--- a/SABR_CPR_Component_Status.pptx
+++ b/SABR_CPR_Component_Status.pptx
@@ -930,7 +930,7 @@
                   <a:srgbClr val="FFFFFF"/>
                 </a:solidFill>
               </a:rPr>
-              <a:t>SABR — Component Status &amp; Dependencies</a:t>
+              <a:t>Project SABR</a:t>
             </a:r>
             <a:endParaRPr lang="en-US" sz="1600" dirty="0"/>
           </a:p>
@@ -1722,11 +1722,74 @@
         <p:spPr>
           <a:xfrm>
             <a:off x="1170432" y="1069848"/>
-            <a:ext cx="932688" cy="237744"/>
-          </a:xfrm>
-          <a:prstGeom prst="roundRect">
-            <a:avLst>
-              <a:gd name="adj" fmla="val 15385"/>
+            <a:ext cx="932688" cy="182880"/>
+          </a:xfrm>
+          <a:prstGeom prst="roundRect">
+            <a:avLst>
+              <a:gd name="adj" fmla="val 15000"/>
+            </a:avLst>
+          </a:prstGeom>
+          <a:solidFill>
+            <a:srgbClr val="F1F5F9"/>
+          </a:solidFill>
+          <a:ln w="9525">
+            <a:solidFill>
+              <a:srgbClr val="CBD5E1"/>
+            </a:solidFill>
+            <a:prstDash val="solid"/>
+          </a:ln>
+        </p:spPr>
+      </p:sp>
+      <p:sp>
+        <p:nvSpPr>
+          <p:cNvPr id="29" name="Text 27"/>
+          <p:cNvSpPr/>
+          <p:nvPr/>
+        </p:nvSpPr>
+        <p:spPr>
+          <a:xfrm>
+            <a:off x="1170432" y="1069848"/>
+            <a:ext cx="932688" cy="182880"/>
+          </a:xfrm>
+          <a:prstGeom prst="rect">
+            <a:avLst/>
+          </a:prstGeom>
+          <a:noFill/>
+          <a:ln/>
+        </p:spPr>
+        <p:txBody>
+          <a:bodyPr wrap="square" lIns="0" tIns="0" rIns="0" bIns="0" rtlCol="0" anchor="ctr"/>
+          <a:lstStyle/>
+          <a:p>
+            <a:pPr algn="ctr" indent="0" marL="0">
+              <a:buNone/>
+            </a:pPr>
+            <a:r>
+              <a:rPr lang="en-US" sz="750" b="1" dirty="0">
+                <a:solidFill>
+                  <a:srgbClr val="1E293B"/>
+                </a:solidFill>
+              </a:rPr>
+              <a:t>Roku</a:t>
+            </a:r>
+            <a:endParaRPr lang="en-US" sz="750" dirty="0"/>
+          </a:p>
+        </p:txBody>
+      </p:sp>
+      <p:sp>
+        <p:nvSpPr>
+          <p:cNvPr id="30" name="Shape 28"/>
+          <p:cNvSpPr/>
+          <p:nvPr/>
+        </p:nvSpPr>
+        <p:spPr>
+          <a:xfrm>
+            <a:off x="1170432" y="1280160"/>
+            <a:ext cx="932688" cy="155448"/>
+          </a:xfrm>
+          <a:prstGeom prst="roundRect">
+            <a:avLst>
+              <a:gd name="adj" fmla="val 17647"/>
             </a:avLst>
           </a:prstGeom>
           <a:solidFill>
@@ -1742,14 +1805,14 @@
       </p:sp>
       <p:sp>
         <p:nvSpPr>
-          <p:cNvPr id="29" name="Text 27"/>
-          <p:cNvSpPr/>
-          <p:nvPr/>
-        </p:nvSpPr>
-        <p:spPr>
-          <a:xfrm>
-            <a:off x="1170432" y="1069848"/>
-            <a:ext cx="932688" cy="237744"/>
+          <p:cNvPr id="31" name="Text 29"/>
+          <p:cNvSpPr/>
+          <p:nvPr/>
+        </p:nvSpPr>
+        <p:spPr>
+          <a:xfrm>
+            <a:off x="1170432" y="1280160"/>
+            <a:ext cx="932688" cy="155448"/>
           </a:xfrm>
           <a:prstGeom prst="rect">
             <a:avLst/>
@@ -1765,31 +1828,94 @@
               <a:buNone/>
             </a:pPr>
             <a:r>
-              <a:rPr lang="en-US" sz="800" b="1" dirty="0">
+              <a:rPr lang="en-US" sz="700" dirty="0">
                 <a:solidFill>
                   <a:srgbClr val="FFFFFF"/>
                 </a:solidFill>
               </a:rPr>
-              <a:t>Roku</a:t>
-            </a:r>
-            <a:endParaRPr lang="en-US" sz="800" dirty="0"/>
-          </a:p>
-        </p:txBody>
-      </p:sp>
-      <p:sp>
-        <p:nvSpPr>
-          <p:cNvPr id="30" name="Shape 28"/>
+              <a:t>In Progress</a:t>
+            </a:r>
+            <a:endParaRPr lang="en-US" sz="700" dirty="0"/>
+          </a:p>
+        </p:txBody>
+      </p:sp>
+      <p:sp>
+        <p:nvSpPr>
+          <p:cNvPr id="32" name="Shape 30"/>
           <p:cNvSpPr/>
           <p:nvPr/>
         </p:nvSpPr>
         <p:spPr>
           <a:xfrm>
             <a:off x="2185416" y="1069848"/>
-            <a:ext cx="932688" cy="237744"/>
-          </a:xfrm>
-          <a:prstGeom prst="roundRect">
-            <a:avLst>
-              <a:gd name="adj" fmla="val 15385"/>
+            <a:ext cx="932688" cy="182880"/>
+          </a:xfrm>
+          <a:prstGeom prst="roundRect">
+            <a:avLst>
+              <a:gd name="adj" fmla="val 15000"/>
+            </a:avLst>
+          </a:prstGeom>
+          <a:solidFill>
+            <a:srgbClr val="F1F5F9"/>
+          </a:solidFill>
+          <a:ln w="9525">
+            <a:solidFill>
+              <a:srgbClr val="CBD5E1"/>
+            </a:solidFill>
+            <a:prstDash val="solid"/>
+          </a:ln>
+        </p:spPr>
+      </p:sp>
+      <p:sp>
+        <p:nvSpPr>
+          <p:cNvPr id="33" name="Text 31"/>
+          <p:cNvSpPr/>
+          <p:nvPr/>
+        </p:nvSpPr>
+        <p:spPr>
+          <a:xfrm>
+            <a:off x="2185416" y="1069848"/>
+            <a:ext cx="932688" cy="182880"/>
+          </a:xfrm>
+          <a:prstGeom prst="rect">
+            <a:avLst/>
+          </a:prstGeom>
+          <a:noFill/>
+          <a:ln/>
+        </p:spPr>
+        <p:txBody>
+          <a:bodyPr wrap="square" lIns="0" tIns="0" rIns="0" bIns="0" rtlCol="0" anchor="ctr"/>
+          <a:lstStyle/>
+          <a:p>
+            <a:pPr algn="ctr" indent="0" marL="0">
+              <a:buNone/>
+            </a:pPr>
+            <a:r>
+              <a:rPr lang="en-US" sz="750" b="1" dirty="0">
+                <a:solidFill>
+                  <a:srgbClr val="1E293B"/>
+                </a:solidFill>
+              </a:rPr>
+              <a:t>Fire TV</a:t>
+            </a:r>
+            <a:endParaRPr lang="en-US" sz="750" dirty="0"/>
+          </a:p>
+        </p:txBody>
+      </p:sp>
+      <p:sp>
+        <p:nvSpPr>
+          <p:cNvPr id="34" name="Shape 32"/>
+          <p:cNvSpPr/>
+          <p:nvPr/>
+        </p:nvSpPr>
+        <p:spPr>
+          <a:xfrm>
+            <a:off x="2185416" y="1280160"/>
+            <a:ext cx="932688" cy="155448"/>
+          </a:xfrm>
+          <a:prstGeom prst="roundRect">
+            <a:avLst>
+              <a:gd name="adj" fmla="val 17647"/>
             </a:avLst>
           </a:prstGeom>
           <a:solidFill>
@@ -1805,14 +1931,14 @@
       </p:sp>
       <p:sp>
         <p:nvSpPr>
-          <p:cNvPr id="31" name="Text 29"/>
-          <p:cNvSpPr/>
-          <p:nvPr/>
-        </p:nvSpPr>
-        <p:spPr>
-          <a:xfrm>
-            <a:off x="2185416" y="1069848"/>
-            <a:ext cx="932688" cy="237744"/>
+          <p:cNvPr id="35" name="Text 33"/>
+          <p:cNvSpPr/>
+          <p:nvPr/>
+        </p:nvSpPr>
+        <p:spPr>
+          <a:xfrm>
+            <a:off x="2185416" y="1280160"/>
+            <a:ext cx="932688" cy="155448"/>
           </a:xfrm>
           <a:prstGeom prst="rect">
             <a:avLst/>
@@ -1828,31 +1954,94 @@
               <a:buNone/>
             </a:pPr>
             <a:r>
-              <a:rPr lang="en-US" sz="800" dirty="0">
+              <a:rPr lang="en-US" sz="700" dirty="0">
                 <a:solidFill>
                   <a:srgbClr val="78350F"/>
                 </a:solidFill>
               </a:rPr>
-              <a:t>Fire TV</a:t>
-            </a:r>
-            <a:endParaRPr lang="en-US" sz="800" dirty="0"/>
-          </a:p>
-        </p:txBody>
-      </p:sp>
-      <p:sp>
-        <p:nvSpPr>
-          <p:cNvPr id="32" name="Shape 30"/>
+              <a:t>Not Started</a:t>
+            </a:r>
+            <a:endParaRPr lang="en-US" sz="700" dirty="0"/>
+          </a:p>
+        </p:txBody>
+      </p:sp>
+      <p:sp>
+        <p:nvSpPr>
+          <p:cNvPr id="36" name="Shape 34"/>
           <p:cNvSpPr/>
           <p:nvPr/>
         </p:nvSpPr>
         <p:spPr>
           <a:xfrm>
             <a:off x="3200400" y="1069848"/>
-            <a:ext cx="932688" cy="237744"/>
-          </a:xfrm>
-          <a:prstGeom prst="roundRect">
-            <a:avLst>
-              <a:gd name="adj" fmla="val 15385"/>
+            <a:ext cx="932688" cy="182880"/>
+          </a:xfrm>
+          <a:prstGeom prst="roundRect">
+            <a:avLst>
+              <a:gd name="adj" fmla="val 15000"/>
+            </a:avLst>
+          </a:prstGeom>
+          <a:solidFill>
+            <a:srgbClr val="F1F5F9"/>
+          </a:solidFill>
+          <a:ln w="9525">
+            <a:solidFill>
+              <a:srgbClr val="CBD5E1"/>
+            </a:solidFill>
+            <a:prstDash val="solid"/>
+          </a:ln>
+        </p:spPr>
+      </p:sp>
+      <p:sp>
+        <p:nvSpPr>
+          <p:cNvPr id="37" name="Text 35"/>
+          <p:cNvSpPr/>
+          <p:nvPr/>
+        </p:nvSpPr>
+        <p:spPr>
+          <a:xfrm>
+            <a:off x="3200400" y="1069848"/>
+            <a:ext cx="932688" cy="182880"/>
+          </a:xfrm>
+          <a:prstGeom prst="rect">
+            <a:avLst/>
+          </a:prstGeom>
+          <a:noFill/>
+          <a:ln/>
+        </p:spPr>
+        <p:txBody>
+          <a:bodyPr wrap="square" lIns="0" tIns="0" rIns="0" bIns="0" rtlCol="0" anchor="ctr"/>
+          <a:lstStyle/>
+          <a:p>
+            <a:pPr algn="ctr" indent="0" marL="0">
+              <a:buNone/>
+            </a:pPr>
+            <a:r>
+              <a:rPr lang="en-US" sz="750" b="1" dirty="0">
+                <a:solidFill>
+                  <a:srgbClr val="1E293B"/>
+                </a:solidFill>
+              </a:rPr>
+              <a:t>Samsung</a:t>
+            </a:r>
+            <a:endParaRPr lang="en-US" sz="750" dirty="0"/>
+          </a:p>
+        </p:txBody>
+      </p:sp>
+      <p:sp>
+        <p:nvSpPr>
+          <p:cNvPr id="38" name="Shape 36"/>
+          <p:cNvSpPr/>
+          <p:nvPr/>
+        </p:nvSpPr>
+        <p:spPr>
+          <a:xfrm>
+            <a:off x="3200400" y="1280160"/>
+            <a:ext cx="932688" cy="155448"/>
+          </a:xfrm>
+          <a:prstGeom prst="roundRect">
+            <a:avLst>
+              <a:gd name="adj" fmla="val 17647"/>
             </a:avLst>
           </a:prstGeom>
           <a:solidFill>
@@ -1868,14 +2057,14 @@
       </p:sp>
       <p:sp>
         <p:nvSpPr>
-          <p:cNvPr id="33" name="Text 31"/>
-          <p:cNvSpPr/>
-          <p:nvPr/>
-        </p:nvSpPr>
-        <p:spPr>
-          <a:xfrm>
-            <a:off x="3200400" y="1069848"/>
-            <a:ext cx="932688" cy="237744"/>
+          <p:cNvPr id="39" name="Text 37"/>
+          <p:cNvSpPr/>
+          <p:nvPr/>
+        </p:nvSpPr>
+        <p:spPr>
+          <a:xfrm>
+            <a:off x="3200400" y="1280160"/>
+            <a:ext cx="932688" cy="155448"/>
           </a:xfrm>
           <a:prstGeom prst="rect">
             <a:avLst/>
@@ -1891,31 +2080,94 @@
               <a:buNone/>
             </a:pPr>
             <a:r>
-              <a:rPr lang="en-US" sz="800" dirty="0">
+              <a:rPr lang="en-US" sz="700" dirty="0">
                 <a:solidFill>
                   <a:srgbClr val="78350F"/>
                 </a:solidFill>
               </a:rPr>
-              <a:t>Samsung</a:t>
-            </a:r>
-            <a:endParaRPr lang="en-US" sz="800" dirty="0"/>
-          </a:p>
-        </p:txBody>
-      </p:sp>
-      <p:sp>
-        <p:nvSpPr>
-          <p:cNvPr id="34" name="Shape 32"/>
+              <a:t>Not Started</a:t>
+            </a:r>
+            <a:endParaRPr lang="en-US" sz="700" dirty="0"/>
+          </a:p>
+        </p:txBody>
+      </p:sp>
+      <p:sp>
+        <p:nvSpPr>
+          <p:cNvPr id="40" name="Shape 38"/>
           <p:cNvSpPr/>
           <p:nvPr/>
         </p:nvSpPr>
         <p:spPr>
           <a:xfrm>
             <a:off x="4215384" y="1069848"/>
-            <a:ext cx="932688" cy="237744"/>
-          </a:xfrm>
-          <a:prstGeom prst="roundRect">
-            <a:avLst>
-              <a:gd name="adj" fmla="val 15385"/>
+            <a:ext cx="932688" cy="182880"/>
+          </a:xfrm>
+          <a:prstGeom prst="roundRect">
+            <a:avLst>
+              <a:gd name="adj" fmla="val 15000"/>
+            </a:avLst>
+          </a:prstGeom>
+          <a:solidFill>
+            <a:srgbClr val="F1F5F9"/>
+          </a:solidFill>
+          <a:ln w="9525">
+            <a:solidFill>
+              <a:srgbClr val="CBD5E1"/>
+            </a:solidFill>
+            <a:prstDash val="solid"/>
+          </a:ln>
+        </p:spPr>
+      </p:sp>
+      <p:sp>
+        <p:nvSpPr>
+          <p:cNvPr id="41" name="Text 39"/>
+          <p:cNvSpPr/>
+          <p:nvPr/>
+        </p:nvSpPr>
+        <p:spPr>
+          <a:xfrm>
+            <a:off x="4215384" y="1069848"/>
+            <a:ext cx="932688" cy="182880"/>
+          </a:xfrm>
+          <a:prstGeom prst="rect">
+            <a:avLst/>
+          </a:prstGeom>
+          <a:noFill/>
+          <a:ln/>
+        </p:spPr>
+        <p:txBody>
+          <a:bodyPr wrap="square" lIns="0" tIns="0" rIns="0" bIns="0" rtlCol="0" anchor="ctr"/>
+          <a:lstStyle/>
+          <a:p>
+            <a:pPr algn="ctr" indent="0" marL="0">
+              <a:buNone/>
+            </a:pPr>
+            <a:r>
+              <a:rPr lang="en-US" sz="750" b="1" dirty="0">
+                <a:solidFill>
+                  <a:srgbClr val="1E293B"/>
+                </a:solidFill>
+              </a:rPr>
+              <a:t>TC.com</a:t>
+            </a:r>
+            <a:endParaRPr lang="en-US" sz="750" dirty="0"/>
+          </a:p>
+        </p:txBody>
+      </p:sp>
+      <p:sp>
+        <p:nvSpPr>
+          <p:cNvPr id="42" name="Shape 40"/>
+          <p:cNvSpPr/>
+          <p:nvPr/>
+        </p:nvSpPr>
+        <p:spPr>
+          <a:xfrm>
+            <a:off x="4215384" y="1280160"/>
+            <a:ext cx="932688" cy="155448"/>
+          </a:xfrm>
+          <a:prstGeom prst="roundRect">
+            <a:avLst>
+              <a:gd name="adj" fmla="val 17647"/>
             </a:avLst>
           </a:prstGeom>
           <a:solidFill>
@@ -1931,14 +2183,14 @@
       </p:sp>
       <p:sp>
         <p:nvSpPr>
-          <p:cNvPr id="35" name="Text 33"/>
-          <p:cNvSpPr/>
-          <p:nvPr/>
-        </p:nvSpPr>
-        <p:spPr>
-          <a:xfrm>
-            <a:off x="4215384" y="1069848"/>
-            <a:ext cx="932688" cy="237744"/>
+          <p:cNvPr id="43" name="Text 41"/>
+          <p:cNvSpPr/>
+          <p:nvPr/>
+        </p:nvSpPr>
+        <p:spPr>
+          <a:xfrm>
+            <a:off x="4215384" y="1280160"/>
+            <a:ext cx="932688" cy="155448"/>
           </a:xfrm>
           <a:prstGeom prst="rect">
             <a:avLst/>
@@ -1954,31 +2206,94 @@
               <a:buNone/>
             </a:pPr>
             <a:r>
-              <a:rPr lang="en-US" sz="800" b="1" dirty="0">
+              <a:rPr lang="en-US" sz="700" dirty="0">
                 <a:solidFill>
                   <a:srgbClr val="FFFFFF"/>
                 </a:solidFill>
               </a:rPr>
-              <a:t>TC.com</a:t>
-            </a:r>
-            <a:endParaRPr lang="en-US" sz="800" dirty="0"/>
-          </a:p>
-        </p:txBody>
-      </p:sp>
-      <p:sp>
-        <p:nvSpPr>
-          <p:cNvPr id="36" name="Shape 34"/>
+              <a:t>In Progress</a:t>
+            </a:r>
+            <a:endParaRPr lang="en-US" sz="700" dirty="0"/>
+          </a:p>
+        </p:txBody>
+      </p:sp>
+      <p:sp>
+        <p:nvSpPr>
+          <p:cNvPr id="44" name="Shape 42"/>
           <p:cNvSpPr/>
           <p:nvPr/>
         </p:nvSpPr>
         <p:spPr>
           <a:xfrm>
             <a:off x="5230368" y="1069848"/>
-            <a:ext cx="932688" cy="237744"/>
-          </a:xfrm>
-          <a:prstGeom prst="roundRect">
-            <a:avLst>
-              <a:gd name="adj" fmla="val 15385"/>
+            <a:ext cx="932688" cy="182880"/>
+          </a:xfrm>
+          <a:prstGeom prst="roundRect">
+            <a:avLst>
+              <a:gd name="adj" fmla="val 15000"/>
+            </a:avLst>
+          </a:prstGeom>
+          <a:solidFill>
+            <a:srgbClr val="F1F5F9"/>
+          </a:solidFill>
+          <a:ln w="9525">
+            <a:solidFill>
+              <a:srgbClr val="CBD5E1"/>
+            </a:solidFill>
+            <a:prstDash val="solid"/>
+          </a:ln>
+        </p:spPr>
+      </p:sp>
+      <p:sp>
+        <p:nvSpPr>
+          <p:cNvPr id="45" name="Text 43"/>
+          <p:cNvSpPr/>
+          <p:nvPr/>
+        </p:nvSpPr>
+        <p:spPr>
+          <a:xfrm>
+            <a:off x="5230368" y="1069848"/>
+            <a:ext cx="932688" cy="182880"/>
+          </a:xfrm>
+          <a:prstGeom prst="rect">
+            <a:avLst/>
+          </a:prstGeom>
+          <a:noFill/>
+          <a:ln/>
+        </p:spPr>
+        <p:txBody>
+          <a:bodyPr wrap="square" lIns="0" tIns="0" rIns="0" bIns="0" rtlCol="0" anchor="ctr"/>
+          <a:lstStyle/>
+          <a:p>
+            <a:pPr algn="ctr" indent="0" marL="0">
+              <a:buNone/>
+            </a:pPr>
+            <a:r>
+              <a:rPr lang="en-US" sz="750" b="1" dirty="0">
+                <a:solidFill>
+                  <a:srgbClr val="1E293B"/>
+                </a:solidFill>
+              </a:rPr>
+              <a:t>Apple TV</a:t>
+            </a:r>
+            <a:endParaRPr lang="en-US" sz="750" dirty="0"/>
+          </a:p>
+        </p:txBody>
+      </p:sp>
+      <p:sp>
+        <p:nvSpPr>
+          <p:cNvPr id="46" name="Shape 44"/>
+          <p:cNvSpPr/>
+          <p:nvPr/>
+        </p:nvSpPr>
+        <p:spPr>
+          <a:xfrm>
+            <a:off x="5230368" y="1280160"/>
+            <a:ext cx="932688" cy="155448"/>
+          </a:xfrm>
+          <a:prstGeom prst="roundRect">
+            <a:avLst>
+              <a:gd name="adj" fmla="val 17647"/>
             </a:avLst>
           </a:prstGeom>
           <a:solidFill>
@@ -1994,14 +2309,14 @@
       </p:sp>
       <p:sp>
         <p:nvSpPr>
-          <p:cNvPr id="37" name="Text 35"/>
-          <p:cNvSpPr/>
-          <p:nvPr/>
-        </p:nvSpPr>
-        <p:spPr>
-          <a:xfrm>
-            <a:off x="5230368" y="1069848"/>
-            <a:ext cx="932688" cy="237744"/>
+          <p:cNvPr id="47" name="Text 45"/>
+          <p:cNvSpPr/>
+          <p:nvPr/>
+        </p:nvSpPr>
+        <p:spPr>
+          <a:xfrm>
+            <a:off x="5230368" y="1280160"/>
+            <a:ext cx="932688" cy="155448"/>
           </a:xfrm>
           <a:prstGeom prst="rect">
             <a:avLst/>
@@ -2017,31 +2332,94 @@
               <a:buNone/>
             </a:pPr>
             <a:r>
-              <a:rPr lang="en-US" sz="800" dirty="0">
+              <a:rPr lang="en-US" sz="700" dirty="0">
                 <a:solidFill>
                   <a:srgbClr val="78350F"/>
                 </a:solidFill>
               </a:rPr>
-              <a:t>Apple TV</a:t>
-            </a:r>
-            <a:endParaRPr lang="en-US" sz="800" dirty="0"/>
-          </a:p>
-        </p:txBody>
-      </p:sp>
-      <p:sp>
-        <p:nvSpPr>
-          <p:cNvPr id="38" name="Shape 36"/>
+              <a:t>Not Started</a:t>
+            </a:r>
+            <a:endParaRPr lang="en-US" sz="700" dirty="0"/>
+          </a:p>
+        </p:txBody>
+      </p:sp>
+      <p:sp>
+        <p:nvSpPr>
+          <p:cNvPr id="48" name="Shape 46"/>
           <p:cNvSpPr/>
           <p:nvPr/>
         </p:nvSpPr>
         <p:spPr>
           <a:xfrm>
             <a:off x="6245352" y="1069848"/>
-            <a:ext cx="932688" cy="237744"/>
-          </a:xfrm>
-          <a:prstGeom prst="roundRect">
-            <a:avLst>
-              <a:gd name="adj" fmla="val 15385"/>
+            <a:ext cx="932688" cy="182880"/>
+          </a:xfrm>
+          <a:prstGeom prst="roundRect">
+            <a:avLst>
+              <a:gd name="adj" fmla="val 15000"/>
+            </a:avLst>
+          </a:prstGeom>
+          <a:solidFill>
+            <a:srgbClr val="F1F5F9"/>
+          </a:solidFill>
+          <a:ln w="9525">
+            <a:solidFill>
+              <a:srgbClr val="CBD5E1"/>
+            </a:solidFill>
+            <a:prstDash val="solid"/>
+          </a:ln>
+        </p:spPr>
+      </p:sp>
+      <p:sp>
+        <p:nvSpPr>
+          <p:cNvPr id="49" name="Text 47"/>
+          <p:cNvSpPr/>
+          <p:nvPr/>
+        </p:nvSpPr>
+        <p:spPr>
+          <a:xfrm>
+            <a:off x="6245352" y="1069848"/>
+            <a:ext cx="932688" cy="182880"/>
+          </a:xfrm>
+          <a:prstGeom prst="rect">
+            <a:avLst/>
+          </a:prstGeom>
+          <a:noFill/>
+          <a:ln/>
+        </p:spPr>
+        <p:txBody>
+          <a:bodyPr wrap="square" lIns="0" tIns="0" rIns="0" bIns="0" rtlCol="0" anchor="ctr"/>
+          <a:lstStyle/>
+          <a:p>
+            <a:pPr algn="ctr" indent="0" marL="0">
+              <a:buNone/>
+            </a:pPr>
+            <a:r>
+              <a:rPr lang="en-US" sz="750" b="1" dirty="0">
+                <a:solidFill>
+                  <a:srgbClr val="1E293B"/>
+                </a:solidFill>
+              </a:rPr>
+              <a:t>★ iOS App</a:t>
+            </a:r>
+            <a:endParaRPr lang="en-US" sz="750" dirty="0"/>
+          </a:p>
+        </p:txBody>
+      </p:sp>
+      <p:sp>
+        <p:nvSpPr>
+          <p:cNvPr id="50" name="Shape 48"/>
+          <p:cNvSpPr/>
+          <p:nvPr/>
+        </p:nvSpPr>
+        <p:spPr>
+          <a:xfrm>
+            <a:off x="6245352" y="1280160"/>
+            <a:ext cx="932688" cy="155448"/>
+          </a:xfrm>
+          <a:prstGeom prst="roundRect">
+            <a:avLst>
+              <a:gd name="adj" fmla="val 17647"/>
             </a:avLst>
           </a:prstGeom>
           <a:solidFill>
@@ -2057,14 +2435,14 @@
       </p:sp>
       <p:sp>
         <p:nvSpPr>
-          <p:cNvPr id="39" name="Text 37"/>
-          <p:cNvSpPr/>
-          <p:nvPr/>
-        </p:nvSpPr>
-        <p:spPr>
-          <a:xfrm>
-            <a:off x="6245352" y="1069848"/>
-            <a:ext cx="932688" cy="237744"/>
+          <p:cNvPr id="51" name="Text 49"/>
+          <p:cNvSpPr/>
+          <p:nvPr/>
+        </p:nvSpPr>
+        <p:spPr>
+          <a:xfrm>
+            <a:off x="6245352" y="1280160"/>
+            <a:ext cx="932688" cy="155448"/>
           </a:xfrm>
           <a:prstGeom prst="rect">
             <a:avLst/>
@@ -2080,12 +2458,75 @@
               <a:buNone/>
             </a:pPr>
             <a:r>
+              <a:rPr lang="en-US" sz="700" dirty="0">
+                <a:solidFill>
+                  <a:srgbClr val="FFFFFF"/>
+                </a:solidFill>
+              </a:rPr>
+              <a:t>In Progress</a:t>
+            </a:r>
+            <a:endParaRPr lang="en-US" sz="700" dirty="0"/>
+          </a:p>
+        </p:txBody>
+      </p:sp>
+      <p:sp>
+        <p:nvSpPr>
+          <p:cNvPr id="52" name="Shape 50"/>
+          <p:cNvSpPr/>
+          <p:nvPr/>
+        </p:nvSpPr>
+        <p:spPr>
+          <a:xfrm>
+            <a:off x="7260336" y="1069848"/>
+            <a:ext cx="932688" cy="182880"/>
+          </a:xfrm>
+          <a:prstGeom prst="roundRect">
+            <a:avLst>
+              <a:gd name="adj" fmla="val 15000"/>
+            </a:avLst>
+          </a:prstGeom>
+          <a:solidFill>
+            <a:srgbClr val="F1F5F9"/>
+          </a:solidFill>
+          <a:ln w="9525">
+            <a:solidFill>
+              <a:srgbClr val="CBD5E1"/>
+            </a:solidFill>
+            <a:prstDash val="solid"/>
+          </a:ln>
+        </p:spPr>
+      </p:sp>
+      <p:sp>
+        <p:nvSpPr>
+          <p:cNvPr id="53" name="Text 51"/>
+          <p:cNvSpPr/>
+          <p:nvPr/>
+        </p:nvSpPr>
+        <p:spPr>
+          <a:xfrm>
+            <a:off x="7260336" y="1069848"/>
+            <a:ext cx="932688" cy="182880"/>
+          </a:xfrm>
+          <a:prstGeom prst="rect">
+            <a:avLst/>
+          </a:prstGeom>
+          <a:noFill/>
+          <a:ln/>
+        </p:spPr>
+        <p:txBody>
+          <a:bodyPr wrap="square" lIns="0" tIns="0" rIns="0" bIns="0" rtlCol="0" anchor="ctr"/>
+          <a:lstStyle/>
+          <a:p>
+            <a:pPr algn="ctr" indent="0" marL="0">
+              <a:buNone/>
+            </a:pPr>
+            <a:r>
               <a:rPr lang="en-US" sz="750" b="1" dirty="0">
                 <a:solidFill>
-                  <a:srgbClr val="FFFFFF"/>
-                </a:solidFill>
-              </a:rPr>
-              <a:t>★ iOS App</a:t>
+                  <a:srgbClr val="1E293B"/>
+                </a:solidFill>
+              </a:rPr>
+              <a:t>★ Android App</a:t>
             </a:r>
             <a:endParaRPr lang="en-US" sz="750" dirty="0"/>
           </a:p>
@@ -2093,18 +2534,18 @@
       </p:sp>
       <p:sp>
         <p:nvSpPr>
-          <p:cNvPr id="40" name="Shape 38"/>
-          <p:cNvSpPr/>
-          <p:nvPr/>
-        </p:nvSpPr>
-        <p:spPr>
-          <a:xfrm>
-            <a:off x="7260336" y="1069848"/>
-            <a:ext cx="932688" cy="237744"/>
-          </a:xfrm>
-          <a:prstGeom prst="roundRect">
-            <a:avLst>
-              <a:gd name="adj" fmla="val 15385"/>
+          <p:cNvPr id="54" name="Shape 52"/>
+          <p:cNvSpPr/>
+          <p:nvPr/>
+        </p:nvSpPr>
+        <p:spPr>
+          <a:xfrm>
+            <a:off x="7260336" y="1280160"/>
+            <a:ext cx="932688" cy="155448"/>
+          </a:xfrm>
+          <a:prstGeom prst="roundRect">
+            <a:avLst>
+              <a:gd name="adj" fmla="val 17647"/>
             </a:avLst>
           </a:prstGeom>
           <a:solidFill>
@@ -2120,14 +2561,14 @@
       </p:sp>
       <p:sp>
         <p:nvSpPr>
-          <p:cNvPr id="41" name="Text 39"/>
-          <p:cNvSpPr/>
-          <p:nvPr/>
-        </p:nvSpPr>
-        <p:spPr>
-          <a:xfrm>
-            <a:off x="7260336" y="1069848"/>
-            <a:ext cx="932688" cy="237744"/>
+          <p:cNvPr id="55" name="Text 53"/>
+          <p:cNvSpPr/>
+          <p:nvPr/>
+        </p:nvSpPr>
+        <p:spPr>
+          <a:xfrm>
+            <a:off x="7260336" y="1280160"/>
+            <a:ext cx="932688" cy="155448"/>
           </a:xfrm>
           <a:prstGeom prst="rect">
             <a:avLst/>
@@ -2143,20 +2584,20 @@
               <a:buNone/>
             </a:pPr>
             <a:r>
-              <a:rPr lang="en-US" sz="750" dirty="0">
+              <a:rPr lang="en-US" sz="700" dirty="0">
                 <a:solidFill>
                   <a:srgbClr val="78350F"/>
                 </a:solidFill>
               </a:rPr>
-              <a:t>★ Android App</a:t>
-            </a:r>
-            <a:endParaRPr lang="en-US" sz="750" dirty="0"/>
-          </a:p>
-        </p:txBody>
-      </p:sp>
-      <p:sp>
-        <p:nvSpPr>
-          <p:cNvPr id="42" name="Shape 40"/>
+              <a:t>Not Started</a:t>
+            </a:r>
+            <a:endParaRPr lang="en-US" sz="700" dirty="0"/>
+          </a:p>
+        </p:txBody>
+      </p:sp>
+      <p:sp>
+        <p:nvSpPr>
+          <p:cNvPr id="56" name="Shape 54"/>
           <p:cNvSpPr/>
           <p:nvPr/>
         </p:nvSpPr>
@@ -2181,7 +2622,7 @@
       </p:sp>
       <p:sp>
         <p:nvSpPr>
-          <p:cNvPr id="43" name="Shape 41"/>
+          <p:cNvPr id="57" name="Shape 55"/>
           <p:cNvSpPr/>
           <p:nvPr/>
         </p:nvSpPr>
@@ -2208,7 +2649,7 @@
       </p:sp>
       <p:sp>
         <p:nvSpPr>
-          <p:cNvPr id="44" name="Text 42"/>
+          <p:cNvPr id="58" name="Text 56"/>
           <p:cNvSpPr/>
           <p:nvPr/>
         </p:nvSpPr>
@@ -2258,7 +2699,7 @@
       </p:sp>
       <p:sp>
         <p:nvSpPr>
-          <p:cNvPr id="45" name="Text 43"/>
+          <p:cNvPr id="59" name="Text 57"/>
           <p:cNvSpPr/>
           <p:nvPr/>
         </p:nvSpPr>
@@ -2294,18 +2735,81 @@
       </p:sp>
       <p:sp>
         <p:nvSpPr>
-          <p:cNvPr id="46" name="Shape 44"/>
+          <p:cNvPr id="60" name="Shape 58"/>
           <p:cNvSpPr/>
           <p:nvPr/>
         </p:nvSpPr>
         <p:spPr>
           <a:xfrm>
             <a:off x="1170432" y="2203704"/>
-            <a:ext cx="932688" cy="237744"/>
-          </a:xfrm>
-          <a:prstGeom prst="roundRect">
-            <a:avLst>
-              <a:gd name="adj" fmla="val 15385"/>
+            <a:ext cx="932688" cy="182880"/>
+          </a:xfrm>
+          <a:prstGeom prst="roundRect">
+            <a:avLst>
+              <a:gd name="adj" fmla="val 15000"/>
+            </a:avLst>
+          </a:prstGeom>
+          <a:solidFill>
+            <a:srgbClr val="F1F5F9"/>
+          </a:solidFill>
+          <a:ln w="9525">
+            <a:solidFill>
+              <a:srgbClr val="CBD5E1"/>
+            </a:solidFill>
+            <a:prstDash val="solid"/>
+          </a:ln>
+        </p:spPr>
+      </p:sp>
+      <p:sp>
+        <p:nvSpPr>
+          <p:cNvPr id="61" name="Text 59"/>
+          <p:cNvSpPr/>
+          <p:nvPr/>
+        </p:nvSpPr>
+        <p:spPr>
+          <a:xfrm>
+            <a:off x="1170432" y="2203704"/>
+            <a:ext cx="932688" cy="182880"/>
+          </a:xfrm>
+          <a:prstGeom prst="rect">
+            <a:avLst/>
+          </a:prstGeom>
+          <a:noFill/>
+          <a:ln/>
+        </p:spPr>
+        <p:txBody>
+          <a:bodyPr wrap="square" lIns="0" tIns="0" rIns="0" bIns="0" rtlCol="0" anchor="ctr"/>
+          <a:lstStyle/>
+          <a:p>
+            <a:pPr algn="ctr" indent="0" marL="0">
+              <a:buNone/>
+            </a:pPr>
+            <a:r>
+              <a:rPr lang="en-US" sz="750" b="1" dirty="0">
+                <a:solidFill>
+                  <a:srgbClr val="1E293B"/>
+                </a:solidFill>
+              </a:rPr>
+              <a:t>★ HLS</a:t>
+            </a:r>
+            <a:endParaRPr lang="en-US" sz="750" dirty="0"/>
+          </a:p>
+        </p:txBody>
+      </p:sp>
+      <p:sp>
+        <p:nvSpPr>
+          <p:cNvPr id="62" name="Shape 60"/>
+          <p:cNvSpPr/>
+          <p:nvPr/>
+        </p:nvSpPr>
+        <p:spPr>
+          <a:xfrm>
+            <a:off x="1170432" y="2414016"/>
+            <a:ext cx="932688" cy="155448"/>
+          </a:xfrm>
+          <a:prstGeom prst="roundRect">
+            <a:avLst>
+              <a:gd name="adj" fmla="val 17647"/>
             </a:avLst>
           </a:prstGeom>
           <a:solidFill>
@@ -2321,14 +2825,14 @@
       </p:sp>
       <p:sp>
         <p:nvSpPr>
-          <p:cNvPr id="47" name="Text 45"/>
-          <p:cNvSpPr/>
-          <p:nvPr/>
-        </p:nvSpPr>
-        <p:spPr>
-          <a:xfrm>
-            <a:off x="1170432" y="2203704"/>
-            <a:ext cx="932688" cy="237744"/>
+          <p:cNvPr id="63" name="Text 61"/>
+          <p:cNvSpPr/>
+          <p:nvPr/>
+        </p:nvSpPr>
+        <p:spPr>
+          <a:xfrm>
+            <a:off x="1170432" y="2414016"/>
+            <a:ext cx="932688" cy="155448"/>
           </a:xfrm>
           <a:prstGeom prst="rect">
             <a:avLst/>
@@ -2344,12 +2848,327 @@
               <a:buNone/>
             </a:pPr>
             <a:r>
+              <a:rPr lang="en-US" sz="700" dirty="0">
+                <a:solidFill>
+                  <a:srgbClr val="FFFFFF"/>
+                </a:solidFill>
+              </a:rPr>
+              <a:t>In Progress</a:t>
+            </a:r>
+            <a:endParaRPr lang="en-US" sz="700" dirty="0"/>
+          </a:p>
+        </p:txBody>
+      </p:sp>
+      <p:sp>
+        <p:nvSpPr>
+          <p:cNvPr id="64" name="Shape 62"/>
+          <p:cNvSpPr/>
+          <p:nvPr/>
+        </p:nvSpPr>
+        <p:spPr>
+          <a:xfrm>
+            <a:off x="2185416" y="2203704"/>
+            <a:ext cx="932688" cy="182880"/>
+          </a:xfrm>
+          <a:prstGeom prst="roundRect">
+            <a:avLst>
+              <a:gd name="adj" fmla="val 15000"/>
+            </a:avLst>
+          </a:prstGeom>
+          <a:solidFill>
+            <a:srgbClr val="F1F5F9"/>
+          </a:solidFill>
+          <a:ln w="9525">
+            <a:solidFill>
+              <a:srgbClr val="CBD5E1"/>
+            </a:solidFill>
+            <a:prstDash val="solid"/>
+          </a:ln>
+        </p:spPr>
+      </p:sp>
+      <p:sp>
+        <p:nvSpPr>
+          <p:cNvPr id="65" name="Text 63"/>
+          <p:cNvSpPr/>
+          <p:nvPr/>
+        </p:nvSpPr>
+        <p:spPr>
+          <a:xfrm>
+            <a:off x="2185416" y="2203704"/>
+            <a:ext cx="932688" cy="182880"/>
+          </a:xfrm>
+          <a:prstGeom prst="rect">
+            <a:avLst/>
+          </a:prstGeom>
+          <a:noFill/>
+          <a:ln/>
+        </p:spPr>
+        <p:txBody>
+          <a:bodyPr wrap="square" lIns="0" tIns="0" rIns="0" bIns="0" rtlCol="0" anchor="ctr"/>
+          <a:lstStyle/>
+          <a:p>
+            <a:pPr algn="ctr" indent="0" marL="0">
+              <a:buNone/>
+            </a:pPr>
+            <a:r>
               <a:rPr lang="en-US" sz="750" b="1" dirty="0">
                 <a:solidFill>
+                  <a:srgbClr val="1E293B"/>
+                </a:solidFill>
+              </a:rPr>
+              <a:t>★ MPEG-DASH</a:t>
+            </a:r>
+            <a:endParaRPr lang="en-US" sz="750" dirty="0"/>
+          </a:p>
+        </p:txBody>
+      </p:sp>
+      <p:sp>
+        <p:nvSpPr>
+          <p:cNvPr id="66" name="Shape 64"/>
+          <p:cNvSpPr/>
+          <p:nvPr/>
+        </p:nvSpPr>
+        <p:spPr>
+          <a:xfrm>
+            <a:off x="2185416" y="2414016"/>
+            <a:ext cx="932688" cy="155448"/>
+          </a:xfrm>
+          <a:prstGeom prst="roundRect">
+            <a:avLst>
+              <a:gd name="adj" fmla="val 17647"/>
+            </a:avLst>
+          </a:prstGeom>
+          <a:solidFill>
+            <a:srgbClr val="EBEDF0"/>
+          </a:solidFill>
+          <a:ln w="9525">
+            <a:solidFill>
+              <a:srgbClr val="C9CDD3"/>
+            </a:solidFill>
+            <a:prstDash val="solid"/>
+          </a:ln>
+        </p:spPr>
+      </p:sp>
+      <p:sp>
+        <p:nvSpPr>
+          <p:cNvPr id="67" name="Text 65"/>
+          <p:cNvSpPr/>
+          <p:nvPr/>
+        </p:nvSpPr>
+        <p:spPr>
+          <a:xfrm>
+            <a:off x="2185416" y="2414016"/>
+            <a:ext cx="932688" cy="155448"/>
+          </a:xfrm>
+          <a:prstGeom prst="rect">
+            <a:avLst/>
+          </a:prstGeom>
+          <a:noFill/>
+          <a:ln/>
+        </p:spPr>
+        <p:txBody>
+          <a:bodyPr wrap="square" lIns="0" tIns="0" rIns="0" bIns="0" rtlCol="0" anchor="ctr"/>
+          <a:lstStyle/>
+          <a:p>
+            <a:pPr algn="ctr" indent="0" marL="0">
+              <a:buNone/>
+            </a:pPr>
+            <a:r>
+              <a:rPr lang="en-US" sz="700" dirty="0">
+                <a:solidFill>
+                  <a:srgbClr val="374151"/>
+                </a:solidFill>
+              </a:rPr>
+              <a:t>Not Started</a:t>
+            </a:r>
+            <a:endParaRPr lang="en-US" sz="700" dirty="0"/>
+          </a:p>
+        </p:txBody>
+      </p:sp>
+      <p:sp>
+        <p:nvSpPr>
+          <p:cNvPr id="68" name="Shape 66"/>
+          <p:cNvSpPr/>
+          <p:nvPr/>
+        </p:nvSpPr>
+        <p:spPr>
+          <a:xfrm>
+            <a:off x="3200400" y="2203704"/>
+            <a:ext cx="932688" cy="182880"/>
+          </a:xfrm>
+          <a:prstGeom prst="roundRect">
+            <a:avLst>
+              <a:gd name="adj" fmla="val 15000"/>
+            </a:avLst>
+          </a:prstGeom>
+          <a:solidFill>
+            <a:srgbClr val="F1F5F9"/>
+          </a:solidFill>
+          <a:ln w="9525">
+            <a:solidFill>
+              <a:srgbClr val="CBD5E1"/>
+            </a:solidFill>
+            <a:prstDash val="solid"/>
+          </a:ln>
+        </p:spPr>
+      </p:sp>
+      <p:sp>
+        <p:nvSpPr>
+          <p:cNvPr id="69" name="Text 67"/>
+          <p:cNvSpPr/>
+          <p:nvPr/>
+        </p:nvSpPr>
+        <p:spPr>
+          <a:xfrm>
+            <a:off x="3200400" y="2203704"/>
+            <a:ext cx="932688" cy="182880"/>
+          </a:xfrm>
+          <a:prstGeom prst="rect">
+            <a:avLst/>
+          </a:prstGeom>
+          <a:noFill/>
+          <a:ln/>
+        </p:spPr>
+        <p:txBody>
+          <a:bodyPr wrap="square" lIns="0" tIns="0" rIns="0" bIns="0" rtlCol="0" anchor="ctr"/>
+          <a:lstStyle/>
+          <a:p>
+            <a:pPr algn="ctr" indent="0" marL="0">
+              <a:buNone/>
+            </a:pPr>
+            <a:r>
+              <a:rPr lang="en-US" sz="750" b="1" dirty="0">
+                <a:solidFill>
+                  <a:srgbClr val="1E293B"/>
+                </a:solidFill>
+              </a:rPr>
+              <a:t>★ FairPlay DRM</a:t>
+            </a:r>
+            <a:endParaRPr lang="en-US" sz="750" dirty="0"/>
+          </a:p>
+        </p:txBody>
+      </p:sp>
+      <p:sp>
+        <p:nvSpPr>
+          <p:cNvPr id="70" name="Shape 68"/>
+          <p:cNvSpPr/>
+          <p:nvPr/>
+        </p:nvSpPr>
+        <p:spPr>
+          <a:xfrm>
+            <a:off x="3200400" y="2414016"/>
+            <a:ext cx="932688" cy="155448"/>
+          </a:xfrm>
+          <a:prstGeom prst="roundRect">
+            <a:avLst>
+              <a:gd name="adj" fmla="val 17647"/>
+            </a:avLst>
+          </a:prstGeom>
+          <a:solidFill>
+            <a:srgbClr val="1558A8"/>
+          </a:solidFill>
+          <a:ln w="12700">
+            <a:solidFill>
+              <a:srgbClr val="1558A8"/>
+            </a:solidFill>
+            <a:prstDash val="solid"/>
+          </a:ln>
+        </p:spPr>
+      </p:sp>
+      <p:sp>
+        <p:nvSpPr>
+          <p:cNvPr id="71" name="Text 69"/>
+          <p:cNvSpPr/>
+          <p:nvPr/>
+        </p:nvSpPr>
+        <p:spPr>
+          <a:xfrm>
+            <a:off x="3200400" y="2414016"/>
+            <a:ext cx="932688" cy="155448"/>
+          </a:xfrm>
+          <a:prstGeom prst="rect">
+            <a:avLst/>
+          </a:prstGeom>
+          <a:noFill/>
+          <a:ln/>
+        </p:spPr>
+        <p:txBody>
+          <a:bodyPr wrap="square" lIns="0" tIns="0" rIns="0" bIns="0" rtlCol="0" anchor="ctr"/>
+          <a:lstStyle/>
+          <a:p>
+            <a:pPr algn="ctr" indent="0" marL="0">
+              <a:buNone/>
+            </a:pPr>
+            <a:r>
+              <a:rPr lang="en-US" sz="700" dirty="0">
+                <a:solidFill>
                   <a:srgbClr val="FFFFFF"/>
                 </a:solidFill>
               </a:rPr>
-              <a:t>★ HLS</a:t>
+              <a:t>In Progress</a:t>
+            </a:r>
+            <a:endParaRPr lang="en-US" sz="700" dirty="0"/>
+          </a:p>
+        </p:txBody>
+      </p:sp>
+      <p:sp>
+        <p:nvSpPr>
+          <p:cNvPr id="72" name="Shape 70"/>
+          <p:cNvSpPr/>
+          <p:nvPr/>
+        </p:nvSpPr>
+        <p:spPr>
+          <a:xfrm>
+            <a:off x="4215384" y="2203704"/>
+            <a:ext cx="932688" cy="182880"/>
+          </a:xfrm>
+          <a:prstGeom prst="roundRect">
+            <a:avLst>
+              <a:gd name="adj" fmla="val 15000"/>
+            </a:avLst>
+          </a:prstGeom>
+          <a:solidFill>
+            <a:srgbClr val="F1F5F9"/>
+          </a:solidFill>
+          <a:ln w="9525">
+            <a:solidFill>
+              <a:srgbClr val="CBD5E1"/>
+            </a:solidFill>
+            <a:prstDash val="solid"/>
+          </a:ln>
+        </p:spPr>
+      </p:sp>
+      <p:sp>
+        <p:nvSpPr>
+          <p:cNvPr id="73" name="Text 71"/>
+          <p:cNvSpPr/>
+          <p:nvPr/>
+        </p:nvSpPr>
+        <p:spPr>
+          <a:xfrm>
+            <a:off x="4215384" y="2203704"/>
+            <a:ext cx="932688" cy="182880"/>
+          </a:xfrm>
+          <a:prstGeom prst="rect">
+            <a:avLst/>
+          </a:prstGeom>
+          <a:noFill/>
+          <a:ln/>
+        </p:spPr>
+        <p:txBody>
+          <a:bodyPr wrap="square" lIns="0" tIns="0" rIns="0" bIns="0" rtlCol="0" anchor="ctr"/>
+          <a:lstStyle/>
+          <a:p>
+            <a:pPr algn="ctr" indent="0" marL="0">
+              <a:buNone/>
+            </a:pPr>
+            <a:r>
+              <a:rPr lang="en-US" sz="750" b="1" dirty="0">
+                <a:solidFill>
+                  <a:srgbClr val="1E293B"/>
+                </a:solidFill>
+              </a:rPr>
+              <a:t>★ Widevine DRM</a:t>
             </a:r>
             <a:endParaRPr lang="en-US" sz="750" dirty="0"/>
           </a:p>
@@ -2357,18 +3176,396 @@
       </p:sp>
       <p:sp>
         <p:nvSpPr>
-          <p:cNvPr id="48" name="Shape 46"/>
-          <p:cNvSpPr/>
-          <p:nvPr/>
-        </p:nvSpPr>
-        <p:spPr>
-          <a:xfrm>
-            <a:off x="2185416" y="2203704"/>
-            <a:ext cx="932688" cy="237744"/>
-          </a:xfrm>
-          <a:prstGeom prst="roundRect">
-            <a:avLst>
-              <a:gd name="adj" fmla="val 15385"/>
+          <p:cNvPr id="74" name="Shape 72"/>
+          <p:cNvSpPr/>
+          <p:nvPr/>
+        </p:nvSpPr>
+        <p:spPr>
+          <a:xfrm>
+            <a:off x="4215384" y="2414016"/>
+            <a:ext cx="932688" cy="155448"/>
+          </a:xfrm>
+          <a:prstGeom prst="roundRect">
+            <a:avLst>
+              <a:gd name="adj" fmla="val 17647"/>
+            </a:avLst>
+          </a:prstGeom>
+          <a:solidFill>
+            <a:srgbClr val="FEF3C7"/>
+          </a:solidFill>
+          <a:ln w="19050">
+            <a:solidFill>
+              <a:srgbClr val="D97706"/>
+            </a:solidFill>
+            <a:prstDash val="solid"/>
+          </a:ln>
+        </p:spPr>
+      </p:sp>
+      <p:sp>
+        <p:nvSpPr>
+          <p:cNvPr id="75" name="Text 73"/>
+          <p:cNvSpPr/>
+          <p:nvPr/>
+        </p:nvSpPr>
+        <p:spPr>
+          <a:xfrm>
+            <a:off x="4215384" y="2414016"/>
+            <a:ext cx="932688" cy="155448"/>
+          </a:xfrm>
+          <a:prstGeom prst="rect">
+            <a:avLst/>
+          </a:prstGeom>
+          <a:noFill/>
+          <a:ln/>
+        </p:spPr>
+        <p:txBody>
+          <a:bodyPr wrap="square" lIns="0" tIns="0" rIns="0" bIns="0" rtlCol="0" anchor="ctr"/>
+          <a:lstStyle/>
+          <a:p>
+            <a:pPr algn="ctr" indent="0" marL="0">
+              <a:buNone/>
+            </a:pPr>
+            <a:r>
+              <a:rPr lang="en-US" sz="700" dirty="0">
+                <a:solidFill>
+                  <a:srgbClr val="78350F"/>
+                </a:solidFill>
+              </a:rPr>
+              <a:t>Not Started</a:t>
+            </a:r>
+            <a:endParaRPr lang="en-US" sz="700" dirty="0"/>
+          </a:p>
+        </p:txBody>
+      </p:sp>
+      <p:sp>
+        <p:nvSpPr>
+          <p:cNvPr id="76" name="Shape 74"/>
+          <p:cNvSpPr/>
+          <p:nvPr/>
+        </p:nvSpPr>
+        <p:spPr>
+          <a:xfrm>
+            <a:off x="5230368" y="2203704"/>
+            <a:ext cx="932688" cy="182880"/>
+          </a:xfrm>
+          <a:prstGeom prst="roundRect">
+            <a:avLst>
+              <a:gd name="adj" fmla="val 15000"/>
+            </a:avLst>
+          </a:prstGeom>
+          <a:solidFill>
+            <a:srgbClr val="F1F5F9"/>
+          </a:solidFill>
+          <a:ln w="9525">
+            <a:solidFill>
+              <a:srgbClr val="CBD5E1"/>
+            </a:solidFill>
+            <a:prstDash val="solid"/>
+          </a:ln>
+        </p:spPr>
+      </p:sp>
+      <p:sp>
+        <p:nvSpPr>
+          <p:cNvPr id="77" name="Text 75"/>
+          <p:cNvSpPr/>
+          <p:nvPr/>
+        </p:nvSpPr>
+        <p:spPr>
+          <a:xfrm>
+            <a:off x="5230368" y="2203704"/>
+            <a:ext cx="932688" cy="182880"/>
+          </a:xfrm>
+          <a:prstGeom prst="rect">
+            <a:avLst/>
+          </a:prstGeom>
+          <a:noFill/>
+          <a:ln/>
+        </p:spPr>
+        <p:txBody>
+          <a:bodyPr wrap="square" lIns="0" tIns="0" rIns="0" bIns="0" rtlCol="0" anchor="ctr"/>
+          <a:lstStyle/>
+          <a:p>
+            <a:pPr algn="ctr" indent="0" marL="0">
+              <a:buNone/>
+            </a:pPr>
+            <a:r>
+              <a:rPr lang="en-US" sz="750" b="1" dirty="0">
+                <a:solidFill>
+                  <a:srgbClr val="1E293B"/>
+                </a:solidFill>
+              </a:rPr>
+              <a:t>Live Streams</a:t>
+            </a:r>
+            <a:endParaRPr lang="en-US" sz="750" dirty="0"/>
+          </a:p>
+        </p:txBody>
+      </p:sp>
+      <p:sp>
+        <p:nvSpPr>
+          <p:cNvPr id="78" name="Shape 76"/>
+          <p:cNvSpPr/>
+          <p:nvPr/>
+        </p:nvSpPr>
+        <p:spPr>
+          <a:xfrm>
+            <a:off x="5230368" y="2414016"/>
+            <a:ext cx="932688" cy="155448"/>
+          </a:xfrm>
+          <a:prstGeom prst="roundRect">
+            <a:avLst>
+              <a:gd name="adj" fmla="val 17647"/>
+            </a:avLst>
+          </a:prstGeom>
+          <a:solidFill>
+            <a:srgbClr val="FEF3C7"/>
+          </a:solidFill>
+          <a:ln w="19050">
+            <a:solidFill>
+              <a:srgbClr val="D97706"/>
+            </a:solidFill>
+            <a:prstDash val="solid"/>
+          </a:ln>
+        </p:spPr>
+      </p:sp>
+      <p:sp>
+        <p:nvSpPr>
+          <p:cNvPr id="79" name="Text 77"/>
+          <p:cNvSpPr/>
+          <p:nvPr/>
+        </p:nvSpPr>
+        <p:spPr>
+          <a:xfrm>
+            <a:off x="5230368" y="2414016"/>
+            <a:ext cx="932688" cy="155448"/>
+          </a:xfrm>
+          <a:prstGeom prst="rect">
+            <a:avLst/>
+          </a:prstGeom>
+          <a:noFill/>
+          <a:ln/>
+        </p:spPr>
+        <p:txBody>
+          <a:bodyPr wrap="square" lIns="0" tIns="0" rIns="0" bIns="0" rtlCol="0" anchor="ctr"/>
+          <a:lstStyle/>
+          <a:p>
+            <a:pPr algn="ctr" indent="0" marL="0">
+              <a:buNone/>
+            </a:pPr>
+            <a:r>
+              <a:rPr lang="en-US" sz="700" dirty="0">
+                <a:solidFill>
+                  <a:srgbClr val="78350F"/>
+                </a:solidFill>
+              </a:rPr>
+              <a:t>Not Started</a:t>
+            </a:r>
+            <a:endParaRPr lang="en-US" sz="700" dirty="0"/>
+          </a:p>
+        </p:txBody>
+      </p:sp>
+      <p:sp>
+        <p:nvSpPr>
+          <p:cNvPr id="80" name="Shape 78"/>
+          <p:cNvSpPr/>
+          <p:nvPr/>
+        </p:nvSpPr>
+        <p:spPr>
+          <a:xfrm>
+            <a:off x="6245352" y="2203704"/>
+            <a:ext cx="932688" cy="182880"/>
+          </a:xfrm>
+          <a:prstGeom prst="roundRect">
+            <a:avLst>
+              <a:gd name="adj" fmla="val 15000"/>
+            </a:avLst>
+          </a:prstGeom>
+          <a:solidFill>
+            <a:srgbClr val="F1F5F9"/>
+          </a:solidFill>
+          <a:ln w="9525">
+            <a:solidFill>
+              <a:srgbClr val="CBD5E1"/>
+            </a:solidFill>
+            <a:prstDash val="solid"/>
+          </a:ln>
+        </p:spPr>
+      </p:sp>
+      <p:sp>
+        <p:nvSpPr>
+          <p:cNvPr id="81" name="Text 79"/>
+          <p:cNvSpPr/>
+          <p:nvPr/>
+        </p:nvSpPr>
+        <p:spPr>
+          <a:xfrm>
+            <a:off x="6245352" y="2203704"/>
+            <a:ext cx="932688" cy="182880"/>
+          </a:xfrm>
+          <a:prstGeom prst="rect">
+            <a:avLst/>
+          </a:prstGeom>
+          <a:noFill/>
+          <a:ln/>
+        </p:spPr>
+        <p:txBody>
+          <a:bodyPr wrap="square" lIns="0" tIns="0" rIns="0" bIns="0" rtlCol="0" anchor="ctr"/>
+          <a:lstStyle/>
+          <a:p>
+            <a:pPr algn="ctr" indent="0" marL="0">
+              <a:buNone/>
+            </a:pPr>
+            <a:r>
+              <a:rPr lang="en-US" sz="750" b="1" dirty="0">
+                <a:solidFill>
+                  <a:srgbClr val="1E293B"/>
+                </a:solidFill>
+              </a:rPr>
+              <a:t>VOD Streams</a:t>
+            </a:r>
+            <a:endParaRPr lang="en-US" sz="750" dirty="0"/>
+          </a:p>
+        </p:txBody>
+      </p:sp>
+      <p:sp>
+        <p:nvSpPr>
+          <p:cNvPr id="82" name="Shape 80"/>
+          <p:cNvSpPr/>
+          <p:nvPr/>
+        </p:nvSpPr>
+        <p:spPr>
+          <a:xfrm>
+            <a:off x="6245352" y="2414016"/>
+            <a:ext cx="932688" cy="155448"/>
+          </a:xfrm>
+          <a:prstGeom prst="roundRect">
+            <a:avLst>
+              <a:gd name="adj" fmla="val 17647"/>
+            </a:avLst>
+          </a:prstGeom>
+          <a:solidFill>
+            <a:srgbClr val="FEF3C7"/>
+          </a:solidFill>
+          <a:ln w="19050">
+            <a:solidFill>
+              <a:srgbClr val="D97706"/>
+            </a:solidFill>
+            <a:prstDash val="solid"/>
+          </a:ln>
+        </p:spPr>
+      </p:sp>
+      <p:sp>
+        <p:nvSpPr>
+          <p:cNvPr id="83" name="Text 81"/>
+          <p:cNvSpPr/>
+          <p:nvPr/>
+        </p:nvSpPr>
+        <p:spPr>
+          <a:xfrm>
+            <a:off x="6245352" y="2414016"/>
+            <a:ext cx="932688" cy="155448"/>
+          </a:xfrm>
+          <a:prstGeom prst="rect">
+            <a:avLst/>
+          </a:prstGeom>
+          <a:noFill/>
+          <a:ln/>
+        </p:spPr>
+        <p:txBody>
+          <a:bodyPr wrap="square" lIns="0" tIns="0" rIns="0" bIns="0" rtlCol="0" anchor="ctr"/>
+          <a:lstStyle/>
+          <a:p>
+            <a:pPr algn="ctr" indent="0" marL="0">
+              <a:buNone/>
+            </a:pPr>
+            <a:r>
+              <a:rPr lang="en-US" sz="700" dirty="0">
+                <a:solidFill>
+                  <a:srgbClr val="78350F"/>
+                </a:solidFill>
+              </a:rPr>
+              <a:t>Not Started</a:t>
+            </a:r>
+            <a:endParaRPr lang="en-US" sz="700" dirty="0"/>
+          </a:p>
+        </p:txBody>
+      </p:sp>
+      <p:sp>
+        <p:nvSpPr>
+          <p:cNvPr id="84" name="Shape 82"/>
+          <p:cNvSpPr/>
+          <p:nvPr/>
+        </p:nvSpPr>
+        <p:spPr>
+          <a:xfrm>
+            <a:off x="7260336" y="2203704"/>
+            <a:ext cx="932688" cy="182880"/>
+          </a:xfrm>
+          <a:prstGeom prst="roundRect">
+            <a:avLst>
+              <a:gd name="adj" fmla="val 15000"/>
+            </a:avLst>
+          </a:prstGeom>
+          <a:solidFill>
+            <a:srgbClr val="F1F5F9"/>
+          </a:solidFill>
+          <a:ln w="9525">
+            <a:solidFill>
+              <a:srgbClr val="CBD5E1"/>
+            </a:solidFill>
+            <a:prstDash val="solid"/>
+          </a:ln>
+        </p:spPr>
+      </p:sp>
+      <p:sp>
+        <p:nvSpPr>
+          <p:cNvPr id="85" name="Text 83"/>
+          <p:cNvSpPr/>
+          <p:nvPr/>
+        </p:nvSpPr>
+        <p:spPr>
+          <a:xfrm>
+            <a:off x="7260336" y="2203704"/>
+            <a:ext cx="932688" cy="182880"/>
+          </a:xfrm>
+          <a:prstGeom prst="rect">
+            <a:avLst/>
+          </a:prstGeom>
+          <a:noFill/>
+          <a:ln/>
+        </p:spPr>
+        <p:txBody>
+          <a:bodyPr wrap="square" lIns="0" tIns="0" rIns="0" bIns="0" rtlCol="0" anchor="ctr"/>
+          <a:lstStyle/>
+          <a:p>
+            <a:pPr algn="ctr" indent="0" marL="0">
+              <a:buNone/>
+            </a:pPr>
+            <a:r>
+              <a:rPr lang="en-US" sz="750" b="1" dirty="0">
+                <a:solidFill>
+                  <a:srgbClr val="1E293B"/>
+                </a:solidFill>
+              </a:rPr>
+              <a:t>Linear</a:t>
+            </a:r>
+            <a:endParaRPr lang="en-US" sz="750" dirty="0"/>
+          </a:p>
+        </p:txBody>
+      </p:sp>
+      <p:sp>
+        <p:nvSpPr>
+          <p:cNvPr id="86" name="Shape 84"/>
+          <p:cNvSpPr/>
+          <p:nvPr/>
+        </p:nvSpPr>
+        <p:spPr>
+          <a:xfrm>
+            <a:off x="7260336" y="2414016"/>
+            <a:ext cx="932688" cy="155448"/>
+          </a:xfrm>
+          <a:prstGeom prst="roundRect">
+            <a:avLst>
+              <a:gd name="adj" fmla="val 17647"/>
             </a:avLst>
           </a:prstGeom>
           <a:solidFill>
@@ -2384,14 +3581,14 @@
       </p:sp>
       <p:sp>
         <p:nvSpPr>
-          <p:cNvPr id="49" name="Text 47"/>
-          <p:cNvSpPr/>
-          <p:nvPr/>
-        </p:nvSpPr>
-        <p:spPr>
-          <a:xfrm>
-            <a:off x="2185416" y="2203704"/>
-            <a:ext cx="932688" cy="237744"/>
+          <p:cNvPr id="87" name="Text 85"/>
+          <p:cNvSpPr/>
+          <p:nvPr/>
+        </p:nvSpPr>
+        <p:spPr>
+          <a:xfrm>
+            <a:off x="7260336" y="2414016"/>
+            <a:ext cx="932688" cy="155448"/>
           </a:xfrm>
           <a:prstGeom prst="rect">
             <a:avLst/>
@@ -2407,335 +3604,20 @@
               <a:buNone/>
             </a:pPr>
             <a:r>
-              <a:rPr lang="en-US" sz="750" dirty="0">
+              <a:rPr lang="en-US" sz="700" dirty="0">
                 <a:solidFill>
                   <a:srgbClr val="374151"/>
                 </a:solidFill>
               </a:rPr>
-              <a:t>★ MPEG-DASH</a:t>
-            </a:r>
-            <a:endParaRPr lang="en-US" sz="750" dirty="0"/>
-          </a:p>
-        </p:txBody>
-      </p:sp>
-      <p:sp>
-        <p:nvSpPr>
-          <p:cNvPr id="50" name="Shape 48"/>
-          <p:cNvSpPr/>
-          <p:nvPr/>
-        </p:nvSpPr>
-        <p:spPr>
-          <a:xfrm>
-            <a:off x="3200400" y="2203704"/>
-            <a:ext cx="932688" cy="237744"/>
-          </a:xfrm>
-          <a:prstGeom prst="roundRect">
-            <a:avLst>
-              <a:gd name="adj" fmla="val 15385"/>
-            </a:avLst>
-          </a:prstGeom>
-          <a:solidFill>
-            <a:srgbClr val="1558A8"/>
-          </a:solidFill>
-          <a:ln w="12700">
-            <a:solidFill>
-              <a:srgbClr val="1558A8"/>
-            </a:solidFill>
-            <a:prstDash val="solid"/>
-          </a:ln>
-        </p:spPr>
-      </p:sp>
-      <p:sp>
-        <p:nvSpPr>
-          <p:cNvPr id="51" name="Text 49"/>
-          <p:cNvSpPr/>
-          <p:nvPr/>
-        </p:nvSpPr>
-        <p:spPr>
-          <a:xfrm>
-            <a:off x="3200400" y="2203704"/>
-            <a:ext cx="932688" cy="237744"/>
-          </a:xfrm>
-          <a:prstGeom prst="rect">
-            <a:avLst/>
-          </a:prstGeom>
-          <a:noFill/>
-          <a:ln/>
-        </p:spPr>
-        <p:txBody>
-          <a:bodyPr wrap="square" lIns="0" tIns="0" rIns="0" bIns="0" rtlCol="0" anchor="ctr"/>
-          <a:lstStyle/>
-          <a:p>
-            <a:pPr algn="ctr" indent="0" marL="0">
-              <a:buNone/>
-            </a:pPr>
-            <a:r>
-              <a:rPr lang="en-US" sz="750" b="1" dirty="0">
-                <a:solidFill>
-                  <a:srgbClr val="FFFFFF"/>
-                </a:solidFill>
-              </a:rPr>
-              <a:t>★ FairPlay DRM</a:t>
-            </a:r>
-            <a:endParaRPr lang="en-US" sz="750" dirty="0"/>
-          </a:p>
-        </p:txBody>
-      </p:sp>
-      <p:sp>
-        <p:nvSpPr>
-          <p:cNvPr id="52" name="Shape 50"/>
-          <p:cNvSpPr/>
-          <p:nvPr/>
-        </p:nvSpPr>
-        <p:spPr>
-          <a:xfrm>
-            <a:off x="4215384" y="2203704"/>
-            <a:ext cx="932688" cy="237744"/>
-          </a:xfrm>
-          <a:prstGeom prst="roundRect">
-            <a:avLst>
-              <a:gd name="adj" fmla="val 15385"/>
-            </a:avLst>
-          </a:prstGeom>
-          <a:solidFill>
-            <a:srgbClr val="FEF3C7"/>
-          </a:solidFill>
-          <a:ln w="19050">
-            <a:solidFill>
-              <a:srgbClr val="D97706"/>
-            </a:solidFill>
-            <a:prstDash val="solid"/>
-          </a:ln>
-        </p:spPr>
-      </p:sp>
-      <p:sp>
-        <p:nvSpPr>
-          <p:cNvPr id="53" name="Text 51"/>
-          <p:cNvSpPr/>
-          <p:nvPr/>
-        </p:nvSpPr>
-        <p:spPr>
-          <a:xfrm>
-            <a:off x="4215384" y="2203704"/>
-            <a:ext cx="932688" cy="237744"/>
-          </a:xfrm>
-          <a:prstGeom prst="rect">
-            <a:avLst/>
-          </a:prstGeom>
-          <a:noFill/>
-          <a:ln/>
-        </p:spPr>
-        <p:txBody>
-          <a:bodyPr wrap="square" lIns="0" tIns="0" rIns="0" bIns="0" rtlCol="0" anchor="ctr"/>
-          <a:lstStyle/>
-          <a:p>
-            <a:pPr algn="ctr" indent="0" marL="0">
-              <a:buNone/>
-            </a:pPr>
-            <a:r>
-              <a:rPr lang="en-US" sz="750" dirty="0">
-                <a:solidFill>
-                  <a:srgbClr val="78350F"/>
-                </a:solidFill>
-              </a:rPr>
-              <a:t>★ Widevine DRM</a:t>
-            </a:r>
-            <a:endParaRPr lang="en-US" sz="750" dirty="0"/>
-          </a:p>
-        </p:txBody>
-      </p:sp>
-      <p:sp>
-        <p:nvSpPr>
-          <p:cNvPr id="54" name="Shape 52"/>
-          <p:cNvSpPr/>
-          <p:nvPr/>
-        </p:nvSpPr>
-        <p:spPr>
-          <a:xfrm>
-            <a:off x="5230368" y="2203704"/>
-            <a:ext cx="932688" cy="237744"/>
-          </a:xfrm>
-          <a:prstGeom prst="roundRect">
-            <a:avLst>
-              <a:gd name="adj" fmla="val 15385"/>
-            </a:avLst>
-          </a:prstGeom>
-          <a:solidFill>
-            <a:srgbClr val="FEF3C7"/>
-          </a:solidFill>
-          <a:ln w="19050">
-            <a:solidFill>
-              <a:srgbClr val="D97706"/>
-            </a:solidFill>
-            <a:prstDash val="solid"/>
-          </a:ln>
-        </p:spPr>
-      </p:sp>
-      <p:sp>
-        <p:nvSpPr>
-          <p:cNvPr id="55" name="Text 53"/>
-          <p:cNvSpPr/>
-          <p:nvPr/>
-        </p:nvSpPr>
-        <p:spPr>
-          <a:xfrm>
-            <a:off x="5230368" y="2203704"/>
-            <a:ext cx="932688" cy="237744"/>
-          </a:xfrm>
-          <a:prstGeom prst="rect">
-            <a:avLst/>
-          </a:prstGeom>
-          <a:noFill/>
-          <a:ln/>
-        </p:spPr>
-        <p:txBody>
-          <a:bodyPr wrap="square" lIns="0" tIns="0" rIns="0" bIns="0" rtlCol="0" anchor="ctr"/>
-          <a:lstStyle/>
-          <a:p>
-            <a:pPr algn="ctr" indent="0" marL="0">
-              <a:buNone/>
-            </a:pPr>
-            <a:r>
-              <a:rPr lang="en-US" sz="800" dirty="0">
-                <a:solidFill>
-                  <a:srgbClr val="78350F"/>
-                </a:solidFill>
-              </a:rPr>
-              <a:t>Live Streams</a:t>
-            </a:r>
-            <a:endParaRPr lang="en-US" sz="800" dirty="0"/>
-          </a:p>
-        </p:txBody>
-      </p:sp>
-      <p:sp>
-        <p:nvSpPr>
-          <p:cNvPr id="56" name="Shape 54"/>
-          <p:cNvSpPr/>
-          <p:nvPr/>
-        </p:nvSpPr>
-        <p:spPr>
-          <a:xfrm>
-            <a:off x="6245352" y="2203704"/>
-            <a:ext cx="932688" cy="237744"/>
-          </a:xfrm>
-          <a:prstGeom prst="roundRect">
-            <a:avLst>
-              <a:gd name="adj" fmla="val 15385"/>
-            </a:avLst>
-          </a:prstGeom>
-          <a:solidFill>
-            <a:srgbClr val="FEF3C7"/>
-          </a:solidFill>
-          <a:ln w="19050">
-            <a:solidFill>
-              <a:srgbClr val="D97706"/>
-            </a:solidFill>
-            <a:prstDash val="solid"/>
-          </a:ln>
-        </p:spPr>
-      </p:sp>
-      <p:sp>
-        <p:nvSpPr>
-          <p:cNvPr id="57" name="Text 55"/>
-          <p:cNvSpPr/>
-          <p:nvPr/>
-        </p:nvSpPr>
-        <p:spPr>
-          <a:xfrm>
-            <a:off x="6245352" y="2203704"/>
-            <a:ext cx="932688" cy="237744"/>
-          </a:xfrm>
-          <a:prstGeom prst="rect">
-            <a:avLst/>
-          </a:prstGeom>
-          <a:noFill/>
-          <a:ln/>
-        </p:spPr>
-        <p:txBody>
-          <a:bodyPr wrap="square" lIns="0" tIns="0" rIns="0" bIns="0" rtlCol="0" anchor="ctr"/>
-          <a:lstStyle/>
-          <a:p>
-            <a:pPr algn="ctr" indent="0" marL="0">
-              <a:buNone/>
-            </a:pPr>
-            <a:r>
-              <a:rPr lang="en-US" sz="800" dirty="0">
-                <a:solidFill>
-                  <a:srgbClr val="78350F"/>
-                </a:solidFill>
-              </a:rPr>
-              <a:t>VOD Streams</a:t>
-            </a:r>
-            <a:endParaRPr lang="en-US" sz="800" dirty="0"/>
-          </a:p>
-        </p:txBody>
-      </p:sp>
-      <p:sp>
-        <p:nvSpPr>
-          <p:cNvPr id="58" name="Shape 56"/>
-          <p:cNvSpPr/>
-          <p:nvPr/>
-        </p:nvSpPr>
-        <p:spPr>
-          <a:xfrm>
-            <a:off x="7260336" y="2203704"/>
-            <a:ext cx="932688" cy="237744"/>
-          </a:xfrm>
-          <a:prstGeom prst="roundRect">
-            <a:avLst>
-              <a:gd name="adj" fmla="val 15385"/>
-            </a:avLst>
-          </a:prstGeom>
-          <a:solidFill>
-            <a:srgbClr val="EBEDF0"/>
-          </a:solidFill>
-          <a:ln w="9525">
-            <a:solidFill>
-              <a:srgbClr val="C9CDD3"/>
-            </a:solidFill>
-            <a:prstDash val="solid"/>
-          </a:ln>
-        </p:spPr>
-      </p:sp>
-      <p:sp>
-        <p:nvSpPr>
-          <p:cNvPr id="59" name="Text 57"/>
-          <p:cNvSpPr/>
-          <p:nvPr/>
-        </p:nvSpPr>
-        <p:spPr>
-          <a:xfrm>
-            <a:off x="7260336" y="2203704"/>
-            <a:ext cx="932688" cy="237744"/>
-          </a:xfrm>
-          <a:prstGeom prst="rect">
-            <a:avLst/>
-          </a:prstGeom>
-          <a:noFill/>
-          <a:ln/>
-        </p:spPr>
-        <p:txBody>
-          <a:bodyPr wrap="square" lIns="0" tIns="0" rIns="0" bIns="0" rtlCol="0" anchor="ctr"/>
-          <a:lstStyle/>
-          <a:p>
-            <a:pPr algn="ctr" indent="0" marL="0">
-              <a:buNone/>
-            </a:pPr>
-            <a:r>
-              <a:rPr lang="en-US" sz="800" dirty="0">
-                <a:solidFill>
-                  <a:srgbClr val="374151"/>
-                </a:solidFill>
-              </a:rPr>
-              <a:t>Linear</a:t>
-            </a:r>
-            <a:endParaRPr lang="en-US" sz="800" dirty="0"/>
-          </a:p>
-        </p:txBody>
-      </p:sp>
-      <p:sp>
-        <p:nvSpPr>
-          <p:cNvPr id="60" name="Shape 58"/>
+              <a:t>Not Started</a:t>
+            </a:r>
+            <a:endParaRPr lang="en-US" sz="700" dirty="0"/>
+          </a:p>
+        </p:txBody>
+      </p:sp>
+      <p:sp>
+        <p:nvSpPr>
+          <p:cNvPr id="88" name="Shape 86"/>
           <p:cNvSpPr/>
           <p:nvPr/>
         </p:nvSpPr>
@@ -2760,7 +3642,7 @@
       </p:sp>
       <p:sp>
         <p:nvSpPr>
-          <p:cNvPr id="61" name="Shape 59"/>
+          <p:cNvPr id="89" name="Shape 87"/>
           <p:cNvSpPr/>
           <p:nvPr/>
         </p:nvSpPr>
@@ -2787,7 +3669,7 @@
       </p:sp>
       <p:sp>
         <p:nvSpPr>
-          <p:cNvPr id="62" name="Text 60"/>
+          <p:cNvPr id="90" name="Text 88"/>
           <p:cNvSpPr/>
           <p:nvPr/>
         </p:nvSpPr>
@@ -2823,7 +3705,7 @@
       </p:sp>
       <p:sp>
         <p:nvSpPr>
-          <p:cNvPr id="63" name="Text 61"/>
+          <p:cNvPr id="91" name="Text 89"/>
           <p:cNvSpPr/>
           <p:nvPr/>
         </p:nvSpPr>
@@ -2859,18 +3741,81 @@
       </p:sp>
       <p:sp>
         <p:nvSpPr>
-          <p:cNvPr id="64" name="Shape 62"/>
+          <p:cNvPr id="92" name="Shape 90"/>
           <p:cNvSpPr/>
           <p:nvPr/>
         </p:nvSpPr>
         <p:spPr>
           <a:xfrm>
             <a:off x="1170432" y="3337560"/>
-            <a:ext cx="932688" cy="237744"/>
-          </a:xfrm>
-          <a:prstGeom prst="roundRect">
-            <a:avLst>
-              <a:gd name="adj" fmla="val 15385"/>
+            <a:ext cx="932688" cy="182880"/>
+          </a:xfrm>
+          <a:prstGeom prst="roundRect">
+            <a:avLst>
+              <a:gd name="adj" fmla="val 15000"/>
+            </a:avLst>
+          </a:prstGeom>
+          <a:solidFill>
+            <a:srgbClr val="F1F5F9"/>
+          </a:solidFill>
+          <a:ln w="9525">
+            <a:solidFill>
+              <a:srgbClr val="CBD5E1"/>
+            </a:solidFill>
+            <a:prstDash val="solid"/>
+          </a:ln>
+        </p:spPr>
+      </p:sp>
+      <p:sp>
+        <p:nvSpPr>
+          <p:cNvPr id="93" name="Text 91"/>
+          <p:cNvSpPr/>
+          <p:nvPr/>
+        </p:nvSpPr>
+        <p:spPr>
+          <a:xfrm>
+            <a:off x="1170432" y="3337560"/>
+            <a:ext cx="932688" cy="182880"/>
+          </a:xfrm>
+          <a:prstGeom prst="rect">
+            <a:avLst/>
+          </a:prstGeom>
+          <a:noFill/>
+          <a:ln/>
+        </p:spPr>
+        <p:txBody>
+          <a:bodyPr wrap="square" lIns="0" tIns="0" rIns="0" bIns="0" rtlCol="0" anchor="ctr"/>
+          <a:lstStyle/>
+          <a:p>
+            <a:pPr algn="ctr" indent="0" marL="0">
+              <a:buNone/>
+            </a:pPr>
+            <a:r>
+              <a:rPr lang="en-US" sz="750" b="1" dirty="0">
+                <a:solidFill>
+                  <a:srgbClr val="1E293B"/>
+                </a:solidFill>
+              </a:rPr>
+              <a:t>Web Player</a:t>
+            </a:r>
+            <a:endParaRPr lang="en-US" sz="750" dirty="0"/>
+          </a:p>
+        </p:txBody>
+      </p:sp>
+      <p:sp>
+        <p:nvSpPr>
+          <p:cNvPr id="94" name="Shape 92"/>
+          <p:cNvSpPr/>
+          <p:nvPr/>
+        </p:nvSpPr>
+        <p:spPr>
+          <a:xfrm>
+            <a:off x="1170432" y="3547872"/>
+            <a:ext cx="932688" cy="155448"/>
+          </a:xfrm>
+          <a:prstGeom prst="roundRect">
+            <a:avLst>
+              <a:gd name="adj" fmla="val 17647"/>
             </a:avLst>
           </a:prstGeom>
           <a:solidFill>
@@ -2886,14 +3831,14 @@
       </p:sp>
       <p:sp>
         <p:nvSpPr>
-          <p:cNvPr id="65" name="Text 63"/>
-          <p:cNvSpPr/>
-          <p:nvPr/>
-        </p:nvSpPr>
-        <p:spPr>
-          <a:xfrm>
-            <a:off x="1170432" y="3337560"/>
-            <a:ext cx="932688" cy="237744"/>
+          <p:cNvPr id="95" name="Text 93"/>
+          <p:cNvSpPr/>
+          <p:nvPr/>
+        </p:nvSpPr>
+        <p:spPr>
+          <a:xfrm>
+            <a:off x="1170432" y="3547872"/>
+            <a:ext cx="932688" cy="155448"/>
           </a:xfrm>
           <a:prstGeom prst="rect">
             <a:avLst/>
@@ -2909,31 +3854,94 @@
               <a:buNone/>
             </a:pPr>
             <a:r>
-              <a:rPr lang="en-US" sz="800" b="1" dirty="0">
+              <a:rPr lang="en-US" sz="700" dirty="0">
                 <a:solidFill>
                   <a:srgbClr val="FFFFFF"/>
                 </a:solidFill>
               </a:rPr>
-              <a:t>Web Player</a:t>
-            </a:r>
-            <a:endParaRPr lang="en-US" sz="800" dirty="0"/>
-          </a:p>
-        </p:txBody>
-      </p:sp>
-      <p:sp>
-        <p:nvSpPr>
-          <p:cNvPr id="66" name="Shape 64"/>
+              <a:t>In Progress</a:t>
+            </a:r>
+            <a:endParaRPr lang="en-US" sz="700" dirty="0"/>
+          </a:p>
+        </p:txBody>
+      </p:sp>
+      <p:sp>
+        <p:nvSpPr>
+          <p:cNvPr id="96" name="Shape 94"/>
           <p:cNvSpPr/>
           <p:nvPr/>
         </p:nvSpPr>
         <p:spPr>
           <a:xfrm>
             <a:off x="2185416" y="3337560"/>
-            <a:ext cx="932688" cy="237744"/>
-          </a:xfrm>
-          <a:prstGeom prst="roundRect">
-            <a:avLst>
-              <a:gd name="adj" fmla="val 15385"/>
+            <a:ext cx="932688" cy="182880"/>
+          </a:xfrm>
+          <a:prstGeom prst="roundRect">
+            <a:avLst>
+              <a:gd name="adj" fmla="val 15000"/>
+            </a:avLst>
+          </a:prstGeom>
+          <a:solidFill>
+            <a:srgbClr val="F1F5F9"/>
+          </a:solidFill>
+          <a:ln w="9525">
+            <a:solidFill>
+              <a:srgbClr val="CBD5E1"/>
+            </a:solidFill>
+            <a:prstDash val="solid"/>
+          </a:ln>
+        </p:spPr>
+      </p:sp>
+      <p:sp>
+        <p:nvSpPr>
+          <p:cNvPr id="97" name="Text 95"/>
+          <p:cNvSpPr/>
+          <p:nvPr/>
+        </p:nvSpPr>
+        <p:spPr>
+          <a:xfrm>
+            <a:off x="2185416" y="3337560"/>
+            <a:ext cx="932688" cy="182880"/>
+          </a:xfrm>
+          <a:prstGeom prst="rect">
+            <a:avLst/>
+          </a:prstGeom>
+          <a:noFill/>
+          <a:ln/>
+        </p:spPr>
+        <p:txBody>
+          <a:bodyPr wrap="square" lIns="0" tIns="0" rIns="0" bIns="0" rtlCol="0" anchor="ctr"/>
+          <a:lstStyle/>
+          <a:p>
+            <a:pPr algn="ctr" indent="0" marL="0">
+              <a:buNone/>
+            </a:pPr>
+            <a:r>
+              <a:rPr lang="en-US" sz="750" b="1" dirty="0">
+                <a:solidFill>
+                  <a:srgbClr val="1E293B"/>
+                </a:solidFill>
+              </a:rPr>
+              <a:t>★ FairPlay Sup.</a:t>
+            </a:r>
+            <a:endParaRPr lang="en-US" sz="750" dirty="0"/>
+          </a:p>
+        </p:txBody>
+      </p:sp>
+      <p:sp>
+        <p:nvSpPr>
+          <p:cNvPr id="98" name="Shape 96"/>
+          <p:cNvSpPr/>
+          <p:nvPr/>
+        </p:nvSpPr>
+        <p:spPr>
+          <a:xfrm>
+            <a:off x="2185416" y="3547872"/>
+            <a:ext cx="932688" cy="155448"/>
+          </a:xfrm>
+          <a:prstGeom prst="roundRect">
+            <a:avLst>
+              <a:gd name="adj" fmla="val 17647"/>
             </a:avLst>
           </a:prstGeom>
           <a:solidFill>
@@ -2949,14 +3957,14 @@
       </p:sp>
       <p:sp>
         <p:nvSpPr>
-          <p:cNvPr id="67" name="Text 65"/>
-          <p:cNvSpPr/>
-          <p:nvPr/>
-        </p:nvSpPr>
-        <p:spPr>
-          <a:xfrm>
-            <a:off x="2185416" y="3337560"/>
-            <a:ext cx="932688" cy="237744"/>
+          <p:cNvPr id="99" name="Text 97"/>
+          <p:cNvSpPr/>
+          <p:nvPr/>
+        </p:nvSpPr>
+        <p:spPr>
+          <a:xfrm>
+            <a:off x="2185416" y="3547872"/>
+            <a:ext cx="932688" cy="155448"/>
           </a:xfrm>
           <a:prstGeom prst="rect">
             <a:avLst/>
@@ -2972,12 +3980,201 @@
               <a:buNone/>
             </a:pPr>
             <a:r>
+              <a:rPr lang="en-US" sz="700" dirty="0">
+                <a:solidFill>
+                  <a:srgbClr val="FFFFFF"/>
+                </a:solidFill>
+              </a:rPr>
+              <a:t>In Progress</a:t>
+            </a:r>
+            <a:endParaRPr lang="en-US" sz="700" dirty="0"/>
+          </a:p>
+        </p:txBody>
+      </p:sp>
+      <p:sp>
+        <p:nvSpPr>
+          <p:cNvPr id="100" name="Shape 98"/>
+          <p:cNvSpPr/>
+          <p:nvPr/>
+        </p:nvSpPr>
+        <p:spPr>
+          <a:xfrm>
+            <a:off x="3200400" y="3337560"/>
+            <a:ext cx="932688" cy="182880"/>
+          </a:xfrm>
+          <a:prstGeom prst="roundRect">
+            <a:avLst>
+              <a:gd name="adj" fmla="val 15000"/>
+            </a:avLst>
+          </a:prstGeom>
+          <a:solidFill>
+            <a:srgbClr val="F1F5F9"/>
+          </a:solidFill>
+          <a:ln w="9525">
+            <a:solidFill>
+              <a:srgbClr val="CBD5E1"/>
+            </a:solidFill>
+            <a:prstDash val="solid"/>
+          </a:ln>
+        </p:spPr>
+      </p:sp>
+      <p:sp>
+        <p:nvSpPr>
+          <p:cNvPr id="101" name="Text 99"/>
+          <p:cNvSpPr/>
+          <p:nvPr/>
+        </p:nvSpPr>
+        <p:spPr>
+          <a:xfrm>
+            <a:off x="3200400" y="3337560"/>
+            <a:ext cx="932688" cy="182880"/>
+          </a:xfrm>
+          <a:prstGeom prst="rect">
+            <a:avLst/>
+          </a:prstGeom>
+          <a:noFill/>
+          <a:ln/>
+        </p:spPr>
+        <p:txBody>
+          <a:bodyPr wrap="square" lIns="0" tIns="0" rIns="0" bIns="0" rtlCol="0" anchor="ctr"/>
+          <a:lstStyle/>
+          <a:p>
+            <a:pPr algn="ctr" indent="0" marL="0">
+              <a:buNone/>
+            </a:pPr>
+            <a:r>
               <a:rPr lang="en-US" sz="750" b="1" dirty="0">
                 <a:solidFill>
+                  <a:srgbClr val="1E293B"/>
+                </a:solidFill>
+              </a:rPr>
+              <a:t>★ Widevine Sup.</a:t>
+            </a:r>
+            <a:endParaRPr lang="en-US" sz="750" dirty="0"/>
+          </a:p>
+        </p:txBody>
+      </p:sp>
+      <p:sp>
+        <p:nvSpPr>
+          <p:cNvPr id="102" name="Shape 100"/>
+          <p:cNvSpPr/>
+          <p:nvPr/>
+        </p:nvSpPr>
+        <p:spPr>
+          <a:xfrm>
+            <a:off x="3200400" y="3547872"/>
+            <a:ext cx="932688" cy="155448"/>
+          </a:xfrm>
+          <a:prstGeom prst="roundRect">
+            <a:avLst>
+              <a:gd name="adj" fmla="val 17647"/>
+            </a:avLst>
+          </a:prstGeom>
+          <a:solidFill>
+            <a:srgbClr val="1558A8"/>
+          </a:solidFill>
+          <a:ln w="12700">
+            <a:solidFill>
+              <a:srgbClr val="1558A8"/>
+            </a:solidFill>
+            <a:prstDash val="solid"/>
+          </a:ln>
+        </p:spPr>
+      </p:sp>
+      <p:sp>
+        <p:nvSpPr>
+          <p:cNvPr id="103" name="Text 101"/>
+          <p:cNvSpPr/>
+          <p:nvPr/>
+        </p:nvSpPr>
+        <p:spPr>
+          <a:xfrm>
+            <a:off x="3200400" y="3547872"/>
+            <a:ext cx="932688" cy="155448"/>
+          </a:xfrm>
+          <a:prstGeom prst="rect">
+            <a:avLst/>
+          </a:prstGeom>
+          <a:noFill/>
+          <a:ln/>
+        </p:spPr>
+        <p:txBody>
+          <a:bodyPr wrap="square" lIns="0" tIns="0" rIns="0" bIns="0" rtlCol="0" anchor="ctr"/>
+          <a:lstStyle/>
+          <a:p>
+            <a:pPr algn="ctr" indent="0" marL="0">
+              <a:buNone/>
+            </a:pPr>
+            <a:r>
+              <a:rPr lang="en-US" sz="700" dirty="0">
+                <a:solidFill>
                   <a:srgbClr val="FFFFFF"/>
                 </a:solidFill>
               </a:rPr>
-              <a:t>★ FairPlay Sup.</a:t>
+              <a:t>In Progress</a:t>
+            </a:r>
+            <a:endParaRPr lang="en-US" sz="700" dirty="0"/>
+          </a:p>
+        </p:txBody>
+      </p:sp>
+      <p:sp>
+        <p:nvSpPr>
+          <p:cNvPr id="104" name="Shape 102"/>
+          <p:cNvSpPr/>
+          <p:nvPr/>
+        </p:nvSpPr>
+        <p:spPr>
+          <a:xfrm>
+            <a:off x="4215384" y="3337560"/>
+            <a:ext cx="932688" cy="182880"/>
+          </a:xfrm>
+          <a:prstGeom prst="roundRect">
+            <a:avLst>
+              <a:gd name="adj" fmla="val 15000"/>
+            </a:avLst>
+          </a:prstGeom>
+          <a:solidFill>
+            <a:srgbClr val="F1F5F9"/>
+          </a:solidFill>
+          <a:ln w="9525">
+            <a:solidFill>
+              <a:srgbClr val="CBD5E1"/>
+            </a:solidFill>
+            <a:prstDash val="solid"/>
+          </a:ln>
+        </p:spPr>
+      </p:sp>
+      <p:sp>
+        <p:nvSpPr>
+          <p:cNvPr id="105" name="Text 103"/>
+          <p:cNvSpPr/>
+          <p:nvPr/>
+        </p:nvSpPr>
+        <p:spPr>
+          <a:xfrm>
+            <a:off x="4215384" y="3337560"/>
+            <a:ext cx="932688" cy="182880"/>
+          </a:xfrm>
+          <a:prstGeom prst="rect">
+            <a:avLst/>
+          </a:prstGeom>
+          <a:noFill/>
+          <a:ln/>
+        </p:spPr>
+        <p:txBody>
+          <a:bodyPr wrap="square" lIns="0" tIns="0" rIns="0" bIns="0" rtlCol="0" anchor="ctr"/>
+          <a:lstStyle/>
+          <a:p>
+            <a:pPr algn="ctr" indent="0" marL="0">
+              <a:buNone/>
+            </a:pPr>
+            <a:r>
+              <a:rPr lang="en-US" sz="750" b="1" dirty="0">
+                <a:solidFill>
+                  <a:srgbClr val="1E293B"/>
+                </a:solidFill>
+              </a:rPr>
+              <a:t>★ iOS Player</a:t>
             </a:r>
             <a:endParaRPr lang="en-US" sz="750" dirty="0"/>
           </a:p>
@@ -2985,18 +4182,18 @@
       </p:sp>
       <p:sp>
         <p:nvSpPr>
-          <p:cNvPr id="68" name="Shape 66"/>
-          <p:cNvSpPr/>
-          <p:nvPr/>
-        </p:nvSpPr>
-        <p:spPr>
-          <a:xfrm>
-            <a:off x="3200400" y="3337560"/>
-            <a:ext cx="932688" cy="237744"/>
-          </a:xfrm>
-          <a:prstGeom prst="roundRect">
-            <a:avLst>
-              <a:gd name="adj" fmla="val 15385"/>
+          <p:cNvPr id="106" name="Shape 104"/>
+          <p:cNvSpPr/>
+          <p:nvPr/>
+        </p:nvSpPr>
+        <p:spPr>
+          <a:xfrm>
+            <a:off x="4215384" y="3547872"/>
+            <a:ext cx="932688" cy="155448"/>
+          </a:xfrm>
+          <a:prstGeom prst="roundRect">
+            <a:avLst>
+              <a:gd name="adj" fmla="val 17647"/>
             </a:avLst>
           </a:prstGeom>
           <a:solidFill>
@@ -3012,14 +4209,14 @@
       </p:sp>
       <p:sp>
         <p:nvSpPr>
-          <p:cNvPr id="69" name="Text 67"/>
-          <p:cNvSpPr/>
-          <p:nvPr/>
-        </p:nvSpPr>
-        <p:spPr>
-          <a:xfrm>
-            <a:off x="3200400" y="3337560"/>
-            <a:ext cx="932688" cy="237744"/>
+          <p:cNvPr id="107" name="Text 105"/>
+          <p:cNvSpPr/>
+          <p:nvPr/>
+        </p:nvSpPr>
+        <p:spPr>
+          <a:xfrm>
+            <a:off x="4215384" y="3547872"/>
+            <a:ext cx="932688" cy="155448"/>
           </a:xfrm>
           <a:prstGeom prst="rect">
             <a:avLst/>
@@ -3035,12 +4232,75 @@
               <a:buNone/>
             </a:pPr>
             <a:r>
+              <a:rPr lang="en-US" sz="700" dirty="0">
+                <a:solidFill>
+                  <a:srgbClr val="FFFFFF"/>
+                </a:solidFill>
+              </a:rPr>
+              <a:t>In Progress</a:t>
+            </a:r>
+            <a:endParaRPr lang="en-US" sz="700" dirty="0"/>
+          </a:p>
+        </p:txBody>
+      </p:sp>
+      <p:sp>
+        <p:nvSpPr>
+          <p:cNvPr id="108" name="Shape 106"/>
+          <p:cNvSpPr/>
+          <p:nvPr/>
+        </p:nvSpPr>
+        <p:spPr>
+          <a:xfrm>
+            <a:off x="5230368" y="3337560"/>
+            <a:ext cx="932688" cy="182880"/>
+          </a:xfrm>
+          <a:prstGeom prst="roundRect">
+            <a:avLst>
+              <a:gd name="adj" fmla="val 15000"/>
+            </a:avLst>
+          </a:prstGeom>
+          <a:solidFill>
+            <a:srgbClr val="F1F5F9"/>
+          </a:solidFill>
+          <a:ln w="9525">
+            <a:solidFill>
+              <a:srgbClr val="CBD5E1"/>
+            </a:solidFill>
+            <a:prstDash val="solid"/>
+          </a:ln>
+        </p:spPr>
+      </p:sp>
+      <p:sp>
+        <p:nvSpPr>
+          <p:cNvPr id="109" name="Text 107"/>
+          <p:cNvSpPr/>
+          <p:nvPr/>
+        </p:nvSpPr>
+        <p:spPr>
+          <a:xfrm>
+            <a:off x="5230368" y="3337560"/>
+            <a:ext cx="932688" cy="182880"/>
+          </a:xfrm>
+          <a:prstGeom prst="rect">
+            <a:avLst/>
+          </a:prstGeom>
+          <a:noFill/>
+          <a:ln/>
+        </p:spPr>
+        <p:txBody>
+          <a:bodyPr wrap="square" lIns="0" tIns="0" rIns="0" bIns="0" rtlCol="0" anchor="ctr"/>
+          <a:lstStyle/>
+          <a:p>
+            <a:pPr algn="ctr" indent="0" marL="0">
+              <a:buNone/>
+            </a:pPr>
+            <a:r>
               <a:rPr lang="en-US" sz="750" b="1" dirty="0">
                 <a:solidFill>
-                  <a:srgbClr val="FFFFFF"/>
-                </a:solidFill>
-              </a:rPr>
-              <a:t>★ Widevine Sup.</a:t>
+                  <a:srgbClr val="1E293B"/>
+                </a:solidFill>
+              </a:rPr>
+              <a:t>★ Android Player</a:t>
             </a:r>
             <a:endParaRPr lang="en-US" sz="750" dirty="0"/>
           </a:p>
@@ -3048,41 +4308,41 @@
       </p:sp>
       <p:sp>
         <p:nvSpPr>
-          <p:cNvPr id="70" name="Shape 68"/>
-          <p:cNvSpPr/>
-          <p:nvPr/>
-        </p:nvSpPr>
-        <p:spPr>
-          <a:xfrm>
-            <a:off x="4215384" y="3337560"/>
-            <a:ext cx="932688" cy="237744"/>
-          </a:xfrm>
-          <a:prstGeom prst="roundRect">
-            <a:avLst>
-              <a:gd name="adj" fmla="val 15385"/>
-            </a:avLst>
-          </a:prstGeom>
-          <a:solidFill>
-            <a:srgbClr val="1558A8"/>
-          </a:solidFill>
-          <a:ln w="12700">
-            <a:solidFill>
-              <a:srgbClr val="1558A8"/>
-            </a:solidFill>
-            <a:prstDash val="solid"/>
-          </a:ln>
-        </p:spPr>
-      </p:sp>
-      <p:sp>
-        <p:nvSpPr>
-          <p:cNvPr id="71" name="Text 69"/>
-          <p:cNvSpPr/>
-          <p:nvPr/>
-        </p:nvSpPr>
-        <p:spPr>
-          <a:xfrm>
-            <a:off x="4215384" y="3337560"/>
-            <a:ext cx="932688" cy="237744"/>
+          <p:cNvPr id="110" name="Shape 108"/>
+          <p:cNvSpPr/>
+          <p:nvPr/>
+        </p:nvSpPr>
+        <p:spPr>
+          <a:xfrm>
+            <a:off x="5230368" y="3547872"/>
+            <a:ext cx="932688" cy="155448"/>
+          </a:xfrm>
+          <a:prstGeom prst="roundRect">
+            <a:avLst>
+              <a:gd name="adj" fmla="val 17647"/>
+            </a:avLst>
+          </a:prstGeom>
+          <a:solidFill>
+            <a:srgbClr val="FEF3C7"/>
+          </a:solidFill>
+          <a:ln w="19050">
+            <a:solidFill>
+              <a:srgbClr val="D97706"/>
+            </a:solidFill>
+            <a:prstDash val="solid"/>
+          </a:ln>
+        </p:spPr>
+      </p:sp>
+      <p:sp>
+        <p:nvSpPr>
+          <p:cNvPr id="111" name="Text 109"/>
+          <p:cNvSpPr/>
+          <p:nvPr/>
+        </p:nvSpPr>
+        <p:spPr>
+          <a:xfrm>
+            <a:off x="5230368" y="3547872"/>
+            <a:ext cx="932688" cy="155448"/>
           </a:xfrm>
           <a:prstGeom prst="rect">
             <a:avLst/>
@@ -3098,12 +4358,75 @@
               <a:buNone/>
             </a:pPr>
             <a:r>
+              <a:rPr lang="en-US" sz="700" dirty="0">
+                <a:solidFill>
+                  <a:srgbClr val="78350F"/>
+                </a:solidFill>
+              </a:rPr>
+              <a:t>Not Started</a:t>
+            </a:r>
+            <a:endParaRPr lang="en-US" sz="700" dirty="0"/>
+          </a:p>
+        </p:txBody>
+      </p:sp>
+      <p:sp>
+        <p:nvSpPr>
+          <p:cNvPr id="112" name="Shape 110"/>
+          <p:cNvSpPr/>
+          <p:nvPr/>
+        </p:nvSpPr>
+        <p:spPr>
+          <a:xfrm>
+            <a:off x="6245352" y="3337560"/>
+            <a:ext cx="932688" cy="182880"/>
+          </a:xfrm>
+          <a:prstGeom prst="roundRect">
+            <a:avLst>
+              <a:gd name="adj" fmla="val 15000"/>
+            </a:avLst>
+          </a:prstGeom>
+          <a:solidFill>
+            <a:srgbClr val="F1F5F9"/>
+          </a:solidFill>
+          <a:ln w="9525">
+            <a:solidFill>
+              <a:srgbClr val="CBD5E1"/>
+            </a:solidFill>
+            <a:prstDash val="solid"/>
+          </a:ln>
+        </p:spPr>
+      </p:sp>
+      <p:sp>
+        <p:nvSpPr>
+          <p:cNvPr id="113" name="Text 111"/>
+          <p:cNvSpPr/>
+          <p:nvPr/>
+        </p:nvSpPr>
+        <p:spPr>
+          <a:xfrm>
+            <a:off x="6245352" y="3337560"/>
+            <a:ext cx="932688" cy="182880"/>
+          </a:xfrm>
+          <a:prstGeom prst="rect">
+            <a:avLst/>
+          </a:prstGeom>
+          <a:noFill/>
+          <a:ln/>
+        </p:spPr>
+        <p:txBody>
+          <a:bodyPr wrap="square" lIns="0" tIns="0" rIns="0" bIns="0" rtlCol="0" anchor="ctr"/>
+          <a:lstStyle/>
+          <a:p>
+            <a:pPr algn="ctr" indent="0" marL="0">
+              <a:buNone/>
+            </a:pPr>
+            <a:r>
               <a:rPr lang="en-US" sz="750" b="1" dirty="0">
                 <a:solidFill>
-                  <a:srgbClr val="FFFFFF"/>
-                </a:solidFill>
-              </a:rPr>
-              <a:t>★ iOS Player</a:t>
+                  <a:srgbClr val="1E293B"/>
+                </a:solidFill>
+              </a:rPr>
+              <a:t>HLS/DASH PB</a:t>
             </a:r>
             <a:endParaRPr lang="en-US" sz="750" dirty="0"/>
           </a:p>
@@ -3111,18 +4434,18 @@
       </p:sp>
       <p:sp>
         <p:nvSpPr>
-          <p:cNvPr id="72" name="Shape 70"/>
-          <p:cNvSpPr/>
-          <p:nvPr/>
-        </p:nvSpPr>
-        <p:spPr>
-          <a:xfrm>
-            <a:off x="5230368" y="3337560"/>
-            <a:ext cx="932688" cy="237744"/>
-          </a:xfrm>
-          <a:prstGeom prst="roundRect">
-            <a:avLst>
-              <a:gd name="adj" fmla="val 15385"/>
+          <p:cNvPr id="114" name="Shape 112"/>
+          <p:cNvSpPr/>
+          <p:nvPr/>
+        </p:nvSpPr>
+        <p:spPr>
+          <a:xfrm>
+            <a:off x="6245352" y="3547872"/>
+            <a:ext cx="932688" cy="155448"/>
+          </a:xfrm>
+          <a:prstGeom prst="roundRect">
+            <a:avLst>
+              <a:gd name="adj" fmla="val 17647"/>
             </a:avLst>
           </a:prstGeom>
           <a:solidFill>
@@ -3138,14 +4461,14 @@
       </p:sp>
       <p:sp>
         <p:nvSpPr>
-          <p:cNvPr id="73" name="Text 71"/>
-          <p:cNvSpPr/>
-          <p:nvPr/>
-        </p:nvSpPr>
-        <p:spPr>
-          <a:xfrm>
-            <a:off x="5230368" y="3337560"/>
-            <a:ext cx="932688" cy="237744"/>
+          <p:cNvPr id="115" name="Text 113"/>
+          <p:cNvSpPr/>
+          <p:nvPr/>
+        </p:nvSpPr>
+        <p:spPr>
+          <a:xfrm>
+            <a:off x="6245352" y="3547872"/>
+            <a:ext cx="932688" cy="155448"/>
           </a:xfrm>
           <a:prstGeom prst="rect">
             <a:avLst/>
@@ -3161,12 +4484,75 @@
               <a:buNone/>
             </a:pPr>
             <a:r>
-              <a:rPr lang="en-US" sz="750" dirty="0">
+              <a:rPr lang="en-US" sz="700" dirty="0">
                 <a:solidFill>
                   <a:srgbClr val="78350F"/>
                 </a:solidFill>
               </a:rPr>
-              <a:t>★ Android Player</a:t>
+              <a:t>Not Started</a:t>
+            </a:r>
+            <a:endParaRPr lang="en-US" sz="700" dirty="0"/>
+          </a:p>
+        </p:txBody>
+      </p:sp>
+      <p:sp>
+        <p:nvSpPr>
+          <p:cNvPr id="116" name="Shape 114"/>
+          <p:cNvSpPr/>
+          <p:nvPr/>
+        </p:nvSpPr>
+        <p:spPr>
+          <a:xfrm>
+            <a:off x="7260336" y="3337560"/>
+            <a:ext cx="932688" cy="182880"/>
+          </a:xfrm>
+          <a:prstGeom prst="roundRect">
+            <a:avLst>
+              <a:gd name="adj" fmla="val 15000"/>
+            </a:avLst>
+          </a:prstGeom>
+          <a:solidFill>
+            <a:srgbClr val="F1F5F9"/>
+          </a:solidFill>
+          <a:ln w="9525">
+            <a:solidFill>
+              <a:srgbClr val="CBD5E1"/>
+            </a:solidFill>
+            <a:prstDash val="solid"/>
+          </a:ln>
+        </p:spPr>
+      </p:sp>
+      <p:sp>
+        <p:nvSpPr>
+          <p:cNvPr id="117" name="Text 115"/>
+          <p:cNvSpPr/>
+          <p:nvPr/>
+        </p:nvSpPr>
+        <p:spPr>
+          <a:xfrm>
+            <a:off x="7260336" y="3337560"/>
+            <a:ext cx="932688" cy="182880"/>
+          </a:xfrm>
+          <a:prstGeom prst="rect">
+            <a:avLst/>
+          </a:prstGeom>
+          <a:noFill/>
+          <a:ln/>
+        </p:spPr>
+        <p:txBody>
+          <a:bodyPr wrap="square" lIns="0" tIns="0" rIns="0" bIns="0" rtlCol="0" anchor="ctr"/>
+          <a:lstStyle/>
+          <a:p>
+            <a:pPr algn="ctr" indent="0" marL="0">
+              <a:buNone/>
+            </a:pPr>
+            <a:r>
+              <a:rPr lang="en-US" sz="750" b="1" dirty="0">
+                <a:solidFill>
+                  <a:srgbClr val="1E293B"/>
+                </a:solidFill>
+              </a:rPr>
+              <a:t>Bitmovin QOE</a:t>
             </a:r>
             <a:endParaRPr lang="en-US" sz="750" dirty="0"/>
           </a:p>
@@ -3174,18 +4560,18 @@
       </p:sp>
       <p:sp>
         <p:nvSpPr>
-          <p:cNvPr id="74" name="Shape 72"/>
-          <p:cNvSpPr/>
-          <p:nvPr/>
-        </p:nvSpPr>
-        <p:spPr>
-          <a:xfrm>
-            <a:off x="6245352" y="3337560"/>
-            <a:ext cx="932688" cy="237744"/>
-          </a:xfrm>
-          <a:prstGeom prst="roundRect">
-            <a:avLst>
-              <a:gd name="adj" fmla="val 15385"/>
+          <p:cNvPr id="118" name="Shape 116"/>
+          <p:cNvSpPr/>
+          <p:nvPr/>
+        </p:nvSpPr>
+        <p:spPr>
+          <a:xfrm>
+            <a:off x="7260336" y="3547872"/>
+            <a:ext cx="932688" cy="155448"/>
+          </a:xfrm>
+          <a:prstGeom prst="roundRect">
+            <a:avLst>
+              <a:gd name="adj" fmla="val 17647"/>
             </a:avLst>
           </a:prstGeom>
           <a:solidFill>
@@ -3201,14 +4587,14 @@
       </p:sp>
       <p:sp>
         <p:nvSpPr>
-          <p:cNvPr id="75" name="Text 73"/>
-          <p:cNvSpPr/>
-          <p:nvPr/>
-        </p:nvSpPr>
-        <p:spPr>
-          <a:xfrm>
-            <a:off x="6245352" y="3337560"/>
-            <a:ext cx="932688" cy="237744"/>
+          <p:cNvPr id="119" name="Text 117"/>
+          <p:cNvSpPr/>
+          <p:nvPr/>
+        </p:nvSpPr>
+        <p:spPr>
+          <a:xfrm>
+            <a:off x="7260336" y="3547872"/>
+            <a:ext cx="932688" cy="155448"/>
           </a:xfrm>
           <a:prstGeom prst="rect">
             <a:avLst/>
@@ -3224,83 +4610,20 @@
               <a:buNone/>
             </a:pPr>
             <a:r>
-              <a:rPr lang="en-US" sz="800" dirty="0">
+              <a:rPr lang="en-US" sz="700" dirty="0">
                 <a:solidFill>
                   <a:srgbClr val="78350F"/>
                 </a:solidFill>
               </a:rPr>
-              <a:t>HLS/DASH PB</a:t>
-            </a:r>
-            <a:endParaRPr lang="en-US" sz="800" dirty="0"/>
-          </a:p>
-        </p:txBody>
-      </p:sp>
-      <p:sp>
-        <p:nvSpPr>
-          <p:cNvPr id="76" name="Shape 74"/>
-          <p:cNvSpPr/>
-          <p:nvPr/>
-        </p:nvSpPr>
-        <p:spPr>
-          <a:xfrm>
-            <a:off x="7260336" y="3337560"/>
-            <a:ext cx="932688" cy="237744"/>
-          </a:xfrm>
-          <a:prstGeom prst="roundRect">
-            <a:avLst>
-              <a:gd name="adj" fmla="val 15385"/>
-            </a:avLst>
-          </a:prstGeom>
-          <a:solidFill>
-            <a:srgbClr val="FEF3C7"/>
-          </a:solidFill>
-          <a:ln w="19050">
-            <a:solidFill>
-              <a:srgbClr val="D97706"/>
-            </a:solidFill>
-            <a:prstDash val="solid"/>
-          </a:ln>
-        </p:spPr>
-      </p:sp>
-      <p:sp>
-        <p:nvSpPr>
-          <p:cNvPr id="77" name="Text 75"/>
-          <p:cNvSpPr/>
-          <p:nvPr/>
-        </p:nvSpPr>
-        <p:spPr>
-          <a:xfrm>
-            <a:off x="7260336" y="3337560"/>
-            <a:ext cx="932688" cy="237744"/>
-          </a:xfrm>
-          <a:prstGeom prst="rect">
-            <a:avLst/>
-          </a:prstGeom>
-          <a:noFill/>
-          <a:ln/>
-        </p:spPr>
-        <p:txBody>
-          <a:bodyPr wrap="square" lIns="0" tIns="0" rIns="0" bIns="0" rtlCol="0" anchor="ctr"/>
-          <a:lstStyle/>
-          <a:p>
-            <a:pPr algn="ctr" indent="0" marL="0">
-              <a:buNone/>
-            </a:pPr>
-            <a:r>
-              <a:rPr lang="en-US" sz="800" dirty="0">
-                <a:solidFill>
-                  <a:srgbClr val="78350F"/>
-                </a:solidFill>
-              </a:rPr>
-              <a:t>Bitmovin QOE</a:t>
-            </a:r>
-            <a:endParaRPr lang="en-US" sz="800" dirty="0"/>
-          </a:p>
-        </p:txBody>
-      </p:sp>
-      <p:sp>
-        <p:nvSpPr>
-          <p:cNvPr id="78" name="Shape 76"/>
+              <a:t>Not Started</a:t>
+            </a:r>
+            <a:endParaRPr lang="en-US" sz="700" dirty="0"/>
+          </a:p>
+        </p:txBody>
+      </p:sp>
+      <p:sp>
+        <p:nvSpPr>
+          <p:cNvPr id="120" name="Shape 118"/>
           <p:cNvSpPr/>
           <p:nvPr/>
         </p:nvSpPr>
@@ -3325,7 +4648,7 @@
       </p:sp>
       <p:sp>
         <p:nvSpPr>
-          <p:cNvPr id="79" name="Shape 77"/>
+          <p:cNvPr id="121" name="Shape 119"/>
           <p:cNvSpPr/>
           <p:nvPr/>
         </p:nvSpPr>
@@ -3352,7 +4675,7 @@
       </p:sp>
       <p:sp>
         <p:nvSpPr>
-          <p:cNvPr id="80" name="Text 78"/>
+          <p:cNvPr id="122" name="Text 120"/>
           <p:cNvSpPr/>
           <p:nvPr/>
         </p:nvSpPr>
@@ -3388,7 +4711,7 @@
       </p:sp>
       <p:sp>
         <p:nvSpPr>
-          <p:cNvPr id="81" name="Text 79"/>
+          <p:cNvPr id="123" name="Text 121"/>
           <p:cNvSpPr/>
           <p:nvPr/>
         </p:nvSpPr>
@@ -3424,18 +4747,81 @@
       </p:sp>
       <p:sp>
         <p:nvSpPr>
-          <p:cNvPr id="82" name="Shape 80"/>
+          <p:cNvPr id="124" name="Shape 122"/>
           <p:cNvSpPr/>
           <p:nvPr/>
         </p:nvSpPr>
         <p:spPr>
           <a:xfrm>
             <a:off x="1170432" y="4471416"/>
-            <a:ext cx="932688" cy="237744"/>
-          </a:xfrm>
-          <a:prstGeom prst="roundRect">
-            <a:avLst>
-              <a:gd name="adj" fmla="val 15385"/>
+            <a:ext cx="932688" cy="182880"/>
+          </a:xfrm>
+          <a:prstGeom prst="roundRect">
+            <a:avLst>
+              <a:gd name="adj" fmla="val 15000"/>
+            </a:avLst>
+          </a:prstGeom>
+          <a:solidFill>
+            <a:srgbClr val="F1F5F9"/>
+          </a:solidFill>
+          <a:ln w="9525">
+            <a:solidFill>
+              <a:srgbClr val="CBD5E1"/>
+            </a:solidFill>
+            <a:prstDash val="solid"/>
+          </a:ln>
+        </p:spPr>
+      </p:sp>
+      <p:sp>
+        <p:nvSpPr>
+          <p:cNvPr id="125" name="Text 123"/>
+          <p:cNvSpPr/>
+          <p:nvPr/>
+        </p:nvSpPr>
+        <p:spPr>
+          <a:xfrm>
+            <a:off x="1170432" y="4471416"/>
+            <a:ext cx="932688" cy="182880"/>
+          </a:xfrm>
+          <a:prstGeom prst="rect">
+            <a:avLst/>
+          </a:prstGeom>
+          <a:noFill/>
+          <a:ln/>
+        </p:spPr>
+        <p:txBody>
+          <a:bodyPr wrap="square" lIns="0" tIns="0" rIns="0" bIns="0" rtlCol="0" anchor="ctr"/>
+          <a:lstStyle/>
+          <a:p>
+            <a:pPr algn="ctr" indent="0" marL="0">
+              <a:buNone/>
+            </a:pPr>
+            <a:r>
+              <a:rPr lang="en-US" sz="750" b="1" dirty="0">
+                <a:solidFill>
+                  <a:srgbClr val="1E293B"/>
+                </a:solidFill>
+              </a:rPr>
+              <a:t>Metadata</a:t>
+            </a:r>
+            <a:endParaRPr lang="en-US" sz="750" dirty="0"/>
+          </a:p>
+        </p:txBody>
+      </p:sp>
+      <p:sp>
+        <p:nvSpPr>
+          <p:cNvPr id="126" name="Shape 124"/>
+          <p:cNvSpPr/>
+          <p:nvPr/>
+        </p:nvSpPr>
+        <p:spPr>
+          <a:xfrm>
+            <a:off x="1170432" y="4681728"/>
+            <a:ext cx="932688" cy="155448"/>
+          </a:xfrm>
+          <a:prstGeom prst="roundRect">
+            <a:avLst>
+              <a:gd name="adj" fmla="val 17647"/>
             </a:avLst>
           </a:prstGeom>
           <a:solidFill>
@@ -3451,14 +4837,14 @@
       </p:sp>
       <p:sp>
         <p:nvSpPr>
-          <p:cNvPr id="83" name="Text 81"/>
-          <p:cNvSpPr/>
-          <p:nvPr/>
-        </p:nvSpPr>
-        <p:spPr>
-          <a:xfrm>
-            <a:off x="1170432" y="4471416"/>
-            <a:ext cx="932688" cy="237744"/>
+          <p:cNvPr id="127" name="Text 125"/>
+          <p:cNvSpPr/>
+          <p:nvPr/>
+        </p:nvSpPr>
+        <p:spPr>
+          <a:xfrm>
+            <a:off x="1170432" y="4681728"/>
+            <a:ext cx="932688" cy="155448"/>
           </a:xfrm>
           <a:prstGeom prst="rect">
             <a:avLst/>
@@ -3474,31 +4860,94 @@
               <a:buNone/>
             </a:pPr>
             <a:r>
-              <a:rPr lang="en-US" sz="800" b="1" dirty="0">
+              <a:rPr lang="en-US" sz="700" dirty="0">
                 <a:solidFill>
                   <a:srgbClr val="FFFFFF"/>
                 </a:solidFill>
               </a:rPr>
-              <a:t>Metadata</a:t>
-            </a:r>
-            <a:endParaRPr lang="en-US" sz="800" dirty="0"/>
-          </a:p>
-        </p:txBody>
-      </p:sp>
-      <p:sp>
-        <p:nvSpPr>
-          <p:cNvPr id="84" name="Shape 82"/>
+              <a:t>In Progress</a:t>
+            </a:r>
+            <a:endParaRPr lang="en-US" sz="700" dirty="0"/>
+          </a:p>
+        </p:txBody>
+      </p:sp>
+      <p:sp>
+        <p:nvSpPr>
+          <p:cNvPr id="128" name="Shape 126"/>
           <p:cNvSpPr/>
           <p:nvPr/>
         </p:nvSpPr>
         <p:spPr>
           <a:xfrm>
             <a:off x="2185416" y="4471416"/>
-            <a:ext cx="932688" cy="237744"/>
-          </a:xfrm>
-          <a:prstGeom prst="roundRect">
-            <a:avLst>
-              <a:gd name="adj" fmla="val 15385"/>
+            <a:ext cx="932688" cy="182880"/>
+          </a:xfrm>
+          <a:prstGeom prst="roundRect">
+            <a:avLst>
+              <a:gd name="adj" fmla="val 15000"/>
+            </a:avLst>
+          </a:prstGeom>
+          <a:solidFill>
+            <a:srgbClr val="F1F5F9"/>
+          </a:solidFill>
+          <a:ln w="9525">
+            <a:solidFill>
+              <a:srgbClr val="CBD5E1"/>
+            </a:solidFill>
+            <a:prstDash val="solid"/>
+          </a:ln>
+        </p:spPr>
+      </p:sp>
+      <p:sp>
+        <p:nvSpPr>
+          <p:cNvPr id="129" name="Text 127"/>
+          <p:cNvSpPr/>
+          <p:nvPr/>
+        </p:nvSpPr>
+        <p:spPr>
+          <a:xfrm>
+            <a:off x="2185416" y="4471416"/>
+            <a:ext cx="932688" cy="182880"/>
+          </a:xfrm>
+          <a:prstGeom prst="rect">
+            <a:avLst/>
+          </a:prstGeom>
+          <a:noFill/>
+          <a:ln/>
+        </p:spPr>
+        <p:txBody>
+          <a:bodyPr wrap="square" lIns="0" tIns="0" rIns="0" bIns="0" rtlCol="0" anchor="ctr"/>
+          <a:lstStyle/>
+          <a:p>
+            <a:pPr algn="ctr" indent="0" marL="0">
+              <a:buNone/>
+            </a:pPr>
+            <a:r>
+              <a:rPr lang="en-US" sz="750" b="1" dirty="0">
+                <a:solidFill>
+                  <a:srgbClr val="1E293B"/>
+                </a:solidFill>
+              </a:rPr>
+              <a:t>Images</a:t>
+            </a:r>
+            <a:endParaRPr lang="en-US" sz="750" dirty="0"/>
+          </a:p>
+        </p:txBody>
+      </p:sp>
+      <p:sp>
+        <p:nvSpPr>
+          <p:cNvPr id="130" name="Shape 128"/>
+          <p:cNvSpPr/>
+          <p:nvPr/>
+        </p:nvSpPr>
+        <p:spPr>
+          <a:xfrm>
+            <a:off x="2185416" y="4681728"/>
+            <a:ext cx="932688" cy="155448"/>
+          </a:xfrm>
+          <a:prstGeom prst="roundRect">
+            <a:avLst>
+              <a:gd name="adj" fmla="val 17647"/>
             </a:avLst>
           </a:prstGeom>
           <a:solidFill>
@@ -3514,14 +4963,14 @@
       </p:sp>
       <p:sp>
         <p:nvSpPr>
-          <p:cNvPr id="85" name="Text 83"/>
-          <p:cNvSpPr/>
-          <p:nvPr/>
-        </p:nvSpPr>
-        <p:spPr>
-          <a:xfrm>
-            <a:off x="2185416" y="4471416"/>
-            <a:ext cx="932688" cy="237744"/>
+          <p:cNvPr id="131" name="Text 129"/>
+          <p:cNvSpPr/>
+          <p:nvPr/>
+        </p:nvSpPr>
+        <p:spPr>
+          <a:xfrm>
+            <a:off x="2185416" y="4681728"/>
+            <a:ext cx="932688" cy="155448"/>
           </a:xfrm>
           <a:prstGeom prst="rect">
             <a:avLst/>
@@ -3537,31 +4986,94 @@
               <a:buNone/>
             </a:pPr>
             <a:r>
-              <a:rPr lang="en-US" sz="800" dirty="0">
+              <a:rPr lang="en-US" sz="700" dirty="0">
                 <a:solidFill>
                   <a:srgbClr val="374151"/>
                 </a:solidFill>
               </a:rPr>
-              <a:t>Images</a:t>
-            </a:r>
-            <a:endParaRPr lang="en-US" sz="800" dirty="0"/>
-          </a:p>
-        </p:txBody>
-      </p:sp>
-      <p:sp>
-        <p:nvSpPr>
-          <p:cNvPr id="86" name="Shape 84"/>
+              <a:t>Not Started</a:t>
+            </a:r>
+            <a:endParaRPr lang="en-US" sz="700" dirty="0"/>
+          </a:p>
+        </p:txBody>
+      </p:sp>
+      <p:sp>
+        <p:nvSpPr>
+          <p:cNvPr id="132" name="Shape 130"/>
           <p:cNvSpPr/>
           <p:nvPr/>
         </p:nvSpPr>
         <p:spPr>
           <a:xfrm>
             <a:off x="3200400" y="4471416"/>
-            <a:ext cx="932688" cy="237744"/>
-          </a:xfrm>
-          <a:prstGeom prst="roundRect">
-            <a:avLst>
-              <a:gd name="adj" fmla="val 15385"/>
+            <a:ext cx="932688" cy="182880"/>
+          </a:xfrm>
+          <a:prstGeom prst="roundRect">
+            <a:avLst>
+              <a:gd name="adj" fmla="val 15000"/>
+            </a:avLst>
+          </a:prstGeom>
+          <a:solidFill>
+            <a:srgbClr val="F1F5F9"/>
+          </a:solidFill>
+          <a:ln w="9525">
+            <a:solidFill>
+              <a:srgbClr val="CBD5E1"/>
+            </a:solidFill>
+            <a:prstDash val="solid"/>
+          </a:ln>
+        </p:spPr>
+      </p:sp>
+      <p:sp>
+        <p:nvSpPr>
+          <p:cNvPr id="133" name="Text 131"/>
+          <p:cNvSpPr/>
+          <p:nvPr/>
+        </p:nvSpPr>
+        <p:spPr>
+          <a:xfrm>
+            <a:off x="3200400" y="4471416"/>
+            <a:ext cx="932688" cy="182880"/>
+          </a:xfrm>
+          <a:prstGeom prst="rect">
+            <a:avLst/>
+          </a:prstGeom>
+          <a:noFill/>
+          <a:ln/>
+        </p:spPr>
+        <p:txBody>
+          <a:bodyPr wrap="square" lIns="0" tIns="0" rIns="0" bIns="0" rtlCol="0" anchor="ctr"/>
+          <a:lstStyle/>
+          <a:p>
+            <a:pPr algn="ctr" indent="0" marL="0">
+              <a:buNone/>
+            </a:pPr>
+            <a:r>
+              <a:rPr lang="en-US" sz="750" b="1" dirty="0">
+                <a:solidFill>
+                  <a:srgbClr val="1E293B"/>
+                </a:solidFill>
+              </a:rPr>
+              <a:t>Carousels</a:t>
+            </a:r>
+            <a:endParaRPr lang="en-US" sz="750" dirty="0"/>
+          </a:p>
+        </p:txBody>
+      </p:sp>
+      <p:sp>
+        <p:nvSpPr>
+          <p:cNvPr id="134" name="Shape 132"/>
+          <p:cNvSpPr/>
+          <p:nvPr/>
+        </p:nvSpPr>
+        <p:spPr>
+          <a:xfrm>
+            <a:off x="3200400" y="4681728"/>
+            <a:ext cx="932688" cy="155448"/>
+          </a:xfrm>
+          <a:prstGeom prst="roundRect">
+            <a:avLst>
+              <a:gd name="adj" fmla="val 17647"/>
             </a:avLst>
           </a:prstGeom>
           <a:solidFill>
@@ -3577,14 +5089,14 @@
       </p:sp>
       <p:sp>
         <p:nvSpPr>
-          <p:cNvPr id="87" name="Text 85"/>
-          <p:cNvSpPr/>
-          <p:nvPr/>
-        </p:nvSpPr>
-        <p:spPr>
-          <a:xfrm>
-            <a:off x="3200400" y="4471416"/>
-            <a:ext cx="932688" cy="237744"/>
+          <p:cNvPr id="135" name="Text 133"/>
+          <p:cNvSpPr/>
+          <p:nvPr/>
+        </p:nvSpPr>
+        <p:spPr>
+          <a:xfrm>
+            <a:off x="3200400" y="4681728"/>
+            <a:ext cx="932688" cy="155448"/>
           </a:xfrm>
           <a:prstGeom prst="rect">
             <a:avLst/>
@@ -3600,31 +5112,94 @@
               <a:buNone/>
             </a:pPr>
             <a:r>
-              <a:rPr lang="en-US" sz="800" b="1" dirty="0">
+              <a:rPr lang="en-US" sz="700" dirty="0">
                 <a:solidFill>
                   <a:srgbClr val="FFFFFF"/>
                 </a:solidFill>
               </a:rPr>
-              <a:t>Carousels</a:t>
-            </a:r>
-            <a:endParaRPr lang="en-US" sz="800" dirty="0"/>
-          </a:p>
-        </p:txBody>
-      </p:sp>
-      <p:sp>
-        <p:nvSpPr>
-          <p:cNvPr id="88" name="Shape 86"/>
+              <a:t>In Progress</a:t>
+            </a:r>
+            <a:endParaRPr lang="en-US" sz="700" dirty="0"/>
+          </a:p>
+        </p:txBody>
+      </p:sp>
+      <p:sp>
+        <p:nvSpPr>
+          <p:cNvPr id="136" name="Shape 134"/>
           <p:cNvSpPr/>
           <p:nvPr/>
         </p:nvSpPr>
         <p:spPr>
           <a:xfrm>
             <a:off x="4215384" y="4471416"/>
-            <a:ext cx="932688" cy="237744"/>
-          </a:xfrm>
-          <a:prstGeom prst="roundRect">
-            <a:avLst>
-              <a:gd name="adj" fmla="val 15385"/>
+            <a:ext cx="932688" cy="182880"/>
+          </a:xfrm>
+          <a:prstGeom prst="roundRect">
+            <a:avLst>
+              <a:gd name="adj" fmla="val 15000"/>
+            </a:avLst>
+          </a:prstGeom>
+          <a:solidFill>
+            <a:srgbClr val="F1F5F9"/>
+          </a:solidFill>
+          <a:ln w="9525">
+            <a:solidFill>
+              <a:srgbClr val="CBD5E1"/>
+            </a:solidFill>
+            <a:prstDash val="solid"/>
+          </a:ln>
+        </p:spPr>
+      </p:sp>
+      <p:sp>
+        <p:nvSpPr>
+          <p:cNvPr id="137" name="Text 135"/>
+          <p:cNvSpPr/>
+          <p:nvPr/>
+        </p:nvSpPr>
+        <p:spPr>
+          <a:xfrm>
+            <a:off x="4215384" y="4471416"/>
+            <a:ext cx="932688" cy="182880"/>
+          </a:xfrm>
+          <a:prstGeom prst="rect">
+            <a:avLst/>
+          </a:prstGeom>
+          <a:noFill/>
+          <a:ln/>
+        </p:spPr>
+        <p:txBody>
+          <a:bodyPr wrap="square" lIns="0" tIns="0" rIns="0" bIns="0" rtlCol="0" anchor="ctr"/>
+          <a:lstStyle/>
+          <a:p>
+            <a:pPr algn="ctr" indent="0" marL="0">
+              <a:buNone/>
+            </a:pPr>
+            <a:r>
+              <a:rPr lang="en-US" sz="750" b="1" dirty="0">
+                <a:solidFill>
+                  <a:srgbClr val="1E293B"/>
+                </a:solidFill>
+              </a:rPr>
+              <a:t>Live Video</a:t>
+            </a:r>
+            <a:endParaRPr lang="en-US" sz="750" dirty="0"/>
+          </a:p>
+        </p:txBody>
+      </p:sp>
+      <p:sp>
+        <p:nvSpPr>
+          <p:cNvPr id="138" name="Shape 136"/>
+          <p:cNvSpPr/>
+          <p:nvPr/>
+        </p:nvSpPr>
+        <p:spPr>
+          <a:xfrm>
+            <a:off x="4215384" y="4681728"/>
+            <a:ext cx="932688" cy="155448"/>
+          </a:xfrm>
+          <a:prstGeom prst="roundRect">
+            <a:avLst>
+              <a:gd name="adj" fmla="val 17647"/>
             </a:avLst>
           </a:prstGeom>
           <a:solidFill>
@@ -3640,14 +5215,14 @@
       </p:sp>
       <p:sp>
         <p:nvSpPr>
-          <p:cNvPr id="89" name="Text 87"/>
-          <p:cNvSpPr/>
-          <p:nvPr/>
-        </p:nvSpPr>
-        <p:spPr>
-          <a:xfrm>
-            <a:off x="4215384" y="4471416"/>
-            <a:ext cx="932688" cy="237744"/>
+          <p:cNvPr id="139" name="Text 137"/>
+          <p:cNvSpPr/>
+          <p:nvPr/>
+        </p:nvSpPr>
+        <p:spPr>
+          <a:xfrm>
+            <a:off x="4215384" y="4681728"/>
+            <a:ext cx="932688" cy="155448"/>
           </a:xfrm>
           <a:prstGeom prst="rect">
             <a:avLst/>
@@ -3663,31 +5238,94 @@
               <a:buNone/>
             </a:pPr>
             <a:r>
-              <a:rPr lang="en-US" sz="800" b="1" dirty="0">
+              <a:rPr lang="en-US" sz="700" dirty="0">
                 <a:solidFill>
                   <a:srgbClr val="FFFFFF"/>
                 </a:solidFill>
               </a:rPr>
-              <a:t>Live Video</a:t>
-            </a:r>
-            <a:endParaRPr lang="en-US" sz="800" dirty="0"/>
-          </a:p>
-        </p:txBody>
-      </p:sp>
-      <p:sp>
-        <p:nvSpPr>
-          <p:cNvPr id="90" name="Shape 88"/>
+              <a:t>In Progress</a:t>
+            </a:r>
+            <a:endParaRPr lang="en-US" sz="700" dirty="0"/>
+          </a:p>
+        </p:txBody>
+      </p:sp>
+      <p:sp>
+        <p:nvSpPr>
+          <p:cNvPr id="140" name="Shape 138"/>
           <p:cNvSpPr/>
           <p:nvPr/>
         </p:nvSpPr>
         <p:spPr>
           <a:xfrm>
             <a:off x="5230368" y="4471416"/>
-            <a:ext cx="932688" cy="237744"/>
-          </a:xfrm>
-          <a:prstGeom prst="roundRect">
-            <a:avLst>
-              <a:gd name="adj" fmla="val 15385"/>
+            <a:ext cx="932688" cy="182880"/>
+          </a:xfrm>
+          <a:prstGeom prst="roundRect">
+            <a:avLst>
+              <a:gd name="adj" fmla="val 15000"/>
+            </a:avLst>
+          </a:prstGeom>
+          <a:solidFill>
+            <a:srgbClr val="F1F5F9"/>
+          </a:solidFill>
+          <a:ln w="9525">
+            <a:solidFill>
+              <a:srgbClr val="CBD5E1"/>
+            </a:solidFill>
+            <a:prstDash val="solid"/>
+          </a:ln>
+        </p:spPr>
+      </p:sp>
+      <p:sp>
+        <p:nvSpPr>
+          <p:cNvPr id="141" name="Text 139"/>
+          <p:cNvSpPr/>
+          <p:nvPr/>
+        </p:nvSpPr>
+        <p:spPr>
+          <a:xfrm>
+            <a:off x="5230368" y="4471416"/>
+            <a:ext cx="932688" cy="182880"/>
+          </a:xfrm>
+          <a:prstGeom prst="rect">
+            <a:avLst/>
+          </a:prstGeom>
+          <a:noFill/>
+          <a:ln/>
+        </p:spPr>
+        <p:txBody>
+          <a:bodyPr wrap="square" lIns="0" tIns="0" rIns="0" bIns="0" rtlCol="0" anchor="ctr"/>
+          <a:lstStyle/>
+          <a:p>
+            <a:pPr algn="ctr" indent="0" marL="0">
+              <a:buNone/>
+            </a:pPr>
+            <a:r>
+              <a:rPr lang="en-US" sz="750" b="1" dirty="0">
+                <a:solidFill>
+                  <a:srgbClr val="1E293B"/>
+                </a:solidFill>
+              </a:rPr>
+              <a:t>VOD Video</a:t>
+            </a:r>
+            <a:endParaRPr lang="en-US" sz="750" dirty="0"/>
+          </a:p>
+        </p:txBody>
+      </p:sp>
+      <p:sp>
+        <p:nvSpPr>
+          <p:cNvPr id="142" name="Shape 140"/>
+          <p:cNvSpPr/>
+          <p:nvPr/>
+        </p:nvSpPr>
+        <p:spPr>
+          <a:xfrm>
+            <a:off x="5230368" y="4681728"/>
+            <a:ext cx="932688" cy="155448"/>
+          </a:xfrm>
+          <a:prstGeom prst="roundRect">
+            <a:avLst>
+              <a:gd name="adj" fmla="val 17647"/>
             </a:avLst>
           </a:prstGeom>
           <a:solidFill>
@@ -3703,14 +5341,14 @@
       </p:sp>
       <p:sp>
         <p:nvSpPr>
-          <p:cNvPr id="91" name="Text 89"/>
-          <p:cNvSpPr/>
-          <p:nvPr/>
-        </p:nvSpPr>
-        <p:spPr>
-          <a:xfrm>
-            <a:off x="5230368" y="4471416"/>
-            <a:ext cx="932688" cy="237744"/>
+          <p:cNvPr id="143" name="Text 141"/>
+          <p:cNvSpPr/>
+          <p:nvPr/>
+        </p:nvSpPr>
+        <p:spPr>
+          <a:xfrm>
+            <a:off x="5230368" y="4681728"/>
+            <a:ext cx="932688" cy="155448"/>
           </a:xfrm>
           <a:prstGeom prst="rect">
             <a:avLst/>
@@ -3726,31 +5364,94 @@
               <a:buNone/>
             </a:pPr>
             <a:r>
-              <a:rPr lang="en-US" sz="800" dirty="0">
+              <a:rPr lang="en-US" sz="700" dirty="0">
                 <a:solidFill>
                   <a:srgbClr val="78350F"/>
                 </a:solidFill>
               </a:rPr>
-              <a:t>VOD Video</a:t>
-            </a:r>
-            <a:endParaRPr lang="en-US" sz="800" dirty="0"/>
-          </a:p>
-        </p:txBody>
-      </p:sp>
-      <p:sp>
-        <p:nvSpPr>
-          <p:cNvPr id="92" name="Shape 90"/>
+              <a:t>Not Started</a:t>
+            </a:r>
+            <a:endParaRPr lang="en-US" sz="700" dirty="0"/>
+          </a:p>
+        </p:txBody>
+      </p:sp>
+      <p:sp>
+        <p:nvSpPr>
+          <p:cNvPr id="144" name="Shape 142"/>
           <p:cNvSpPr/>
           <p:nvPr/>
         </p:nvSpPr>
         <p:spPr>
           <a:xfrm>
             <a:off x="6245352" y="4471416"/>
-            <a:ext cx="932688" cy="237744"/>
-          </a:xfrm>
-          <a:prstGeom prst="roundRect">
-            <a:avLst>
-              <a:gd name="adj" fmla="val 15385"/>
+            <a:ext cx="932688" cy="182880"/>
+          </a:xfrm>
+          <a:prstGeom prst="roundRect">
+            <a:avLst>
+              <a:gd name="adj" fmla="val 15000"/>
+            </a:avLst>
+          </a:prstGeom>
+          <a:solidFill>
+            <a:srgbClr val="F1F5F9"/>
+          </a:solidFill>
+          <a:ln w="9525">
+            <a:solidFill>
+              <a:srgbClr val="CBD5E1"/>
+            </a:solidFill>
+            <a:prstDash val="solid"/>
+          </a:ln>
+        </p:spPr>
+      </p:sp>
+      <p:sp>
+        <p:nvSpPr>
+          <p:cNvPr id="145" name="Text 143"/>
+          <p:cNvSpPr/>
+          <p:nvPr/>
+        </p:nvSpPr>
+        <p:spPr>
+          <a:xfrm>
+            <a:off x="6245352" y="4471416"/>
+            <a:ext cx="932688" cy="182880"/>
+          </a:xfrm>
+          <a:prstGeom prst="rect">
+            <a:avLst/>
+          </a:prstGeom>
+          <a:noFill/>
+          <a:ln/>
+        </p:spPr>
+        <p:txBody>
+          <a:bodyPr wrap="square" lIns="0" tIns="0" rIns="0" bIns="0" rtlCol="0" anchor="ctr"/>
+          <a:lstStyle/>
+          <a:p>
+            <a:pPr algn="ctr" indent="0" marL="0">
+              <a:buNone/>
+            </a:pPr>
+            <a:r>
+              <a:rPr lang="en-US" sz="750" b="1" dirty="0">
+                <a:solidFill>
+                  <a:srgbClr val="1E293B"/>
+                </a:solidFill>
+              </a:rPr>
+              <a:t>JABs</a:t>
+            </a:r>
+            <a:endParaRPr lang="en-US" sz="750" dirty="0"/>
+          </a:p>
+        </p:txBody>
+      </p:sp>
+      <p:sp>
+        <p:nvSpPr>
+          <p:cNvPr id="146" name="Shape 144"/>
+          <p:cNvSpPr/>
+          <p:nvPr/>
+        </p:nvSpPr>
+        <p:spPr>
+          <a:xfrm>
+            <a:off x="6245352" y="4681728"/>
+            <a:ext cx="932688" cy="155448"/>
+          </a:xfrm>
+          <a:prstGeom prst="roundRect">
+            <a:avLst>
+              <a:gd name="adj" fmla="val 17647"/>
             </a:avLst>
           </a:prstGeom>
           <a:solidFill>
@@ -3766,14 +5467,14 @@
       </p:sp>
       <p:sp>
         <p:nvSpPr>
-          <p:cNvPr id="93" name="Text 91"/>
-          <p:cNvSpPr/>
-          <p:nvPr/>
-        </p:nvSpPr>
-        <p:spPr>
-          <a:xfrm>
-            <a:off x="6245352" y="4471416"/>
-            <a:ext cx="932688" cy="237744"/>
+          <p:cNvPr id="147" name="Text 145"/>
+          <p:cNvSpPr/>
+          <p:nvPr/>
+        </p:nvSpPr>
+        <p:spPr>
+          <a:xfrm>
+            <a:off x="6245352" y="4681728"/>
+            <a:ext cx="932688" cy="155448"/>
           </a:xfrm>
           <a:prstGeom prst="rect">
             <a:avLst/>
@@ -3789,31 +5490,94 @@
               <a:buNone/>
             </a:pPr>
             <a:r>
-              <a:rPr lang="en-US" sz="800" dirty="0">
+              <a:rPr lang="en-US" sz="700" dirty="0">
                 <a:solidFill>
                   <a:srgbClr val="78350F"/>
                 </a:solidFill>
               </a:rPr>
-              <a:t>JABs</a:t>
-            </a:r>
-            <a:endParaRPr lang="en-US" sz="800" dirty="0"/>
-          </a:p>
-        </p:txBody>
-      </p:sp>
-      <p:sp>
-        <p:nvSpPr>
-          <p:cNvPr id="94" name="Shape 92"/>
+              <a:t>Not Started</a:t>
+            </a:r>
+            <a:endParaRPr lang="en-US" sz="700" dirty="0"/>
+          </a:p>
+        </p:txBody>
+      </p:sp>
+      <p:sp>
+        <p:nvSpPr>
+          <p:cNvPr id="148" name="Shape 146"/>
           <p:cNvSpPr/>
           <p:nvPr/>
         </p:nvSpPr>
         <p:spPr>
           <a:xfrm>
             <a:off x="7260336" y="4471416"/>
-            <a:ext cx="932688" cy="237744"/>
-          </a:xfrm>
-          <a:prstGeom prst="roundRect">
-            <a:avLst>
-              <a:gd name="adj" fmla="val 15385"/>
+            <a:ext cx="932688" cy="182880"/>
+          </a:xfrm>
+          <a:prstGeom prst="roundRect">
+            <a:avLst>
+              <a:gd name="adj" fmla="val 15000"/>
+            </a:avLst>
+          </a:prstGeom>
+          <a:solidFill>
+            <a:srgbClr val="F1F5F9"/>
+          </a:solidFill>
+          <a:ln w="9525">
+            <a:solidFill>
+              <a:srgbClr val="CBD5E1"/>
+            </a:solidFill>
+            <a:prstDash val="solid"/>
+          </a:ln>
+        </p:spPr>
+      </p:sp>
+      <p:sp>
+        <p:nvSpPr>
+          <p:cNvPr id="149" name="Text 147"/>
+          <p:cNvSpPr/>
+          <p:nvPr/>
+        </p:nvSpPr>
+        <p:spPr>
+          <a:xfrm>
+            <a:off x="7260336" y="4471416"/>
+            <a:ext cx="932688" cy="182880"/>
+          </a:xfrm>
+          <a:prstGeom prst="rect">
+            <a:avLst/>
+          </a:prstGeom>
+          <a:noFill/>
+          <a:ln/>
+        </p:spPr>
+        <p:txBody>
+          <a:bodyPr wrap="square" lIns="0" tIns="0" rIns="0" bIns="0" rtlCol="0" anchor="ctr"/>
+          <a:lstStyle/>
+          <a:p>
+            <a:pPr algn="ctr" indent="0" marL="0">
+              <a:buNone/>
+            </a:pPr>
+            <a:r>
+              <a:rPr lang="en-US" sz="750" b="1" dirty="0">
+                <a:solidFill>
+                  <a:srgbClr val="1E293B"/>
+                </a:solidFill>
+              </a:rPr>
+              <a:t>M15</a:t>
+            </a:r>
+            <a:endParaRPr lang="en-US" sz="750" dirty="0"/>
+          </a:p>
+        </p:txBody>
+      </p:sp>
+      <p:sp>
+        <p:nvSpPr>
+          <p:cNvPr id="150" name="Shape 148"/>
+          <p:cNvSpPr/>
+          <p:nvPr/>
+        </p:nvSpPr>
+        <p:spPr>
+          <a:xfrm>
+            <a:off x="7260336" y="4681728"/>
+            <a:ext cx="932688" cy="155448"/>
+          </a:xfrm>
+          <a:prstGeom prst="roundRect">
+            <a:avLst>
+              <a:gd name="adj" fmla="val 17647"/>
             </a:avLst>
           </a:prstGeom>
           <a:solidFill>
@@ -3829,14 +5593,14 @@
       </p:sp>
       <p:sp>
         <p:nvSpPr>
-          <p:cNvPr id="95" name="Text 93"/>
-          <p:cNvSpPr/>
-          <p:nvPr/>
-        </p:nvSpPr>
-        <p:spPr>
-          <a:xfrm>
-            <a:off x="7260336" y="4471416"/>
-            <a:ext cx="932688" cy="237744"/>
+          <p:cNvPr id="151" name="Text 149"/>
+          <p:cNvSpPr/>
+          <p:nvPr/>
+        </p:nvSpPr>
+        <p:spPr>
+          <a:xfrm>
+            <a:off x="7260336" y="4681728"/>
+            <a:ext cx="932688" cy="155448"/>
           </a:xfrm>
           <a:prstGeom prst="rect">
             <a:avLst/>
@@ -3852,31 +5616,94 @@
               <a:buNone/>
             </a:pPr>
             <a:r>
-              <a:rPr lang="en-US" sz="800" dirty="0">
+              <a:rPr lang="en-US" sz="700" dirty="0">
                 <a:solidFill>
                   <a:srgbClr val="78350F"/>
                 </a:solidFill>
               </a:rPr>
-              <a:t>M15</a:t>
-            </a:r>
-            <a:endParaRPr lang="en-US" sz="800" dirty="0"/>
-          </a:p>
-        </p:txBody>
-      </p:sp>
-      <p:sp>
-        <p:nvSpPr>
-          <p:cNvPr id="96" name="Shape 94"/>
+              <a:t>Not Started</a:t>
+            </a:r>
+            <a:endParaRPr lang="en-US" sz="700" dirty="0"/>
+          </a:p>
+        </p:txBody>
+      </p:sp>
+      <p:sp>
+        <p:nvSpPr>
+          <p:cNvPr id="152" name="Shape 150"/>
           <p:cNvSpPr/>
           <p:nvPr/>
         </p:nvSpPr>
         <p:spPr>
           <a:xfrm>
             <a:off x="8275320" y="4471416"/>
-            <a:ext cx="932688" cy="237744"/>
-          </a:xfrm>
-          <a:prstGeom prst="roundRect">
-            <a:avLst>
-              <a:gd name="adj" fmla="val 15385"/>
+            <a:ext cx="932688" cy="182880"/>
+          </a:xfrm>
+          <a:prstGeom prst="roundRect">
+            <a:avLst>
+              <a:gd name="adj" fmla="val 15000"/>
+            </a:avLst>
+          </a:prstGeom>
+          <a:solidFill>
+            <a:srgbClr val="F1F5F9"/>
+          </a:solidFill>
+          <a:ln w="9525">
+            <a:solidFill>
+              <a:srgbClr val="CBD5E1"/>
+            </a:solidFill>
+            <a:prstDash val="solid"/>
+          </a:ln>
+        </p:spPr>
+      </p:sp>
+      <p:sp>
+        <p:nvSpPr>
+          <p:cNvPr id="153" name="Text 151"/>
+          <p:cNvSpPr/>
+          <p:nvPr/>
+        </p:nvSpPr>
+        <p:spPr>
+          <a:xfrm>
+            <a:off x="8275320" y="4471416"/>
+            <a:ext cx="932688" cy="182880"/>
+          </a:xfrm>
+          <a:prstGeom prst="rect">
+            <a:avLst/>
+          </a:prstGeom>
+          <a:noFill/>
+          <a:ln/>
+        </p:spPr>
+        <p:txBody>
+          <a:bodyPr wrap="square" lIns="0" tIns="0" rIns="0" bIns="0" rtlCol="0" anchor="ctr"/>
+          <a:lstStyle/>
+          <a:p>
+            <a:pPr algn="ctr" indent="0" marL="0">
+              <a:buNone/>
+            </a:pPr>
+            <a:r>
+              <a:rPr lang="en-US" sz="750" b="1" dirty="0">
+                <a:solidFill>
+                  <a:srgbClr val="1E293B"/>
+                </a:solidFill>
+              </a:rPr>
+              <a:t>Highlights</a:t>
+            </a:r>
+            <a:endParaRPr lang="en-US" sz="750" dirty="0"/>
+          </a:p>
+        </p:txBody>
+      </p:sp>
+      <p:sp>
+        <p:nvSpPr>
+          <p:cNvPr id="154" name="Shape 152"/>
+          <p:cNvSpPr/>
+          <p:nvPr/>
+        </p:nvSpPr>
+        <p:spPr>
+          <a:xfrm>
+            <a:off x="8275320" y="4681728"/>
+            <a:ext cx="932688" cy="155448"/>
+          </a:xfrm>
+          <a:prstGeom prst="roundRect">
+            <a:avLst>
+              <a:gd name="adj" fmla="val 17647"/>
             </a:avLst>
           </a:prstGeom>
           <a:solidFill>
@@ -3892,14 +5719,14 @@
       </p:sp>
       <p:sp>
         <p:nvSpPr>
-          <p:cNvPr id="97" name="Text 95"/>
-          <p:cNvSpPr/>
-          <p:nvPr/>
-        </p:nvSpPr>
-        <p:spPr>
-          <a:xfrm>
-            <a:off x="8275320" y="4471416"/>
-            <a:ext cx="932688" cy="237744"/>
+          <p:cNvPr id="155" name="Text 153"/>
+          <p:cNvSpPr/>
+          <p:nvPr/>
+        </p:nvSpPr>
+        <p:spPr>
+          <a:xfrm>
+            <a:off x="8275320" y="4681728"/>
+            <a:ext cx="932688" cy="155448"/>
           </a:xfrm>
           <a:prstGeom prst="rect">
             <a:avLst/>
@@ -3915,20 +5742,20 @@
               <a:buNone/>
             </a:pPr>
             <a:r>
-              <a:rPr lang="en-US" sz="800" dirty="0">
+              <a:rPr lang="en-US" sz="700" dirty="0">
                 <a:solidFill>
                   <a:srgbClr val="78350F"/>
                 </a:solidFill>
               </a:rPr>
-              <a:t>Highlights</a:t>
-            </a:r>
-            <a:endParaRPr lang="en-US" sz="800" dirty="0"/>
-          </a:p>
-        </p:txBody>
-      </p:sp>
-      <p:sp>
-        <p:nvSpPr>
-          <p:cNvPr id="98" name="Shape 96"/>
+              <a:t>Not Started</a:t>
+            </a:r>
+            <a:endParaRPr lang="en-US" sz="700" dirty="0"/>
+          </a:p>
+        </p:txBody>
+      </p:sp>
+      <p:sp>
+        <p:nvSpPr>
+          <p:cNvPr id="156" name="Shape 154"/>
           <p:cNvSpPr/>
           <p:nvPr/>
         </p:nvSpPr>
@@ -3953,7 +5780,7 @@
       </p:sp>
       <p:sp>
         <p:nvSpPr>
-          <p:cNvPr id="99" name="Shape 97"/>
+          <p:cNvPr id="157" name="Shape 155"/>
           <p:cNvSpPr/>
           <p:nvPr/>
         </p:nvSpPr>
@@ -3980,7 +5807,7 @@
       </p:sp>
       <p:sp>
         <p:nvSpPr>
-          <p:cNvPr id="100" name="Text 98"/>
+          <p:cNvPr id="158" name="Text 156"/>
           <p:cNvSpPr/>
           <p:nvPr/>
         </p:nvSpPr>
@@ -4016,7 +5843,7 @@
       </p:sp>
       <p:sp>
         <p:nvSpPr>
-          <p:cNvPr id="101" name="Text 99"/>
+          <p:cNvPr id="159" name="Text 157"/>
           <p:cNvSpPr/>
           <p:nvPr/>
         </p:nvSpPr>
@@ -4052,18 +5879,81 @@
       </p:sp>
       <p:sp>
         <p:nvSpPr>
-          <p:cNvPr id="102" name="Shape 100"/>
+          <p:cNvPr id="160" name="Shape 158"/>
           <p:cNvSpPr/>
           <p:nvPr/>
         </p:nvSpPr>
         <p:spPr>
           <a:xfrm>
             <a:off x="1170432" y="5605272"/>
-            <a:ext cx="932688" cy="237744"/>
-          </a:xfrm>
-          <a:prstGeom prst="roundRect">
-            <a:avLst>
-              <a:gd name="adj" fmla="val 15385"/>
+            <a:ext cx="932688" cy="182880"/>
+          </a:xfrm>
+          <a:prstGeom prst="roundRect">
+            <a:avLst>
+              <a:gd name="adj" fmla="val 15000"/>
+            </a:avLst>
+          </a:prstGeom>
+          <a:solidFill>
+            <a:srgbClr val="F1F5F9"/>
+          </a:solidFill>
+          <a:ln w="9525">
+            <a:solidFill>
+              <a:srgbClr val="CBD5E1"/>
+            </a:solidFill>
+            <a:prstDash val="solid"/>
+          </a:ln>
+        </p:spPr>
+      </p:sp>
+      <p:sp>
+        <p:nvSpPr>
+          <p:cNvPr id="161" name="Text 159"/>
+          <p:cNvSpPr/>
+          <p:nvPr/>
+        </p:nvSpPr>
+        <p:spPr>
+          <a:xfrm>
+            <a:off x="1170432" y="5605272"/>
+            <a:ext cx="932688" cy="182880"/>
+          </a:xfrm>
+          <a:prstGeom prst="rect">
+            <a:avLst/>
+          </a:prstGeom>
+          <a:noFill/>
+          <a:ln/>
+        </p:spPr>
+        <p:txBody>
+          <a:bodyPr wrap="square" lIns="0" tIns="0" rIns="0" bIns="0" rtlCol="0" anchor="ctr"/>
+          <a:lstStyle/>
+          <a:p>
+            <a:pPr algn="ctr" indent="0" marL="0">
+              <a:buNone/>
+            </a:pPr>
+            <a:r>
+              <a:rPr lang="en-US" sz="750" b="1" dirty="0">
+                <a:solidFill>
+                  <a:srgbClr val="1E293B"/>
+                </a:solidFill>
+              </a:rPr>
+              <a:t>★ Sign-in</a:t>
+            </a:r>
+            <a:endParaRPr lang="en-US" sz="750" dirty="0"/>
+          </a:p>
+        </p:txBody>
+      </p:sp>
+      <p:sp>
+        <p:nvSpPr>
+          <p:cNvPr id="162" name="Shape 160"/>
+          <p:cNvSpPr/>
+          <p:nvPr/>
+        </p:nvSpPr>
+        <p:spPr>
+          <a:xfrm>
+            <a:off x="1170432" y="5815584"/>
+            <a:ext cx="932688" cy="155448"/>
+          </a:xfrm>
+          <a:prstGeom prst="roundRect">
+            <a:avLst>
+              <a:gd name="adj" fmla="val 17647"/>
             </a:avLst>
           </a:prstGeom>
           <a:solidFill>
@@ -4079,14 +5969,14 @@
       </p:sp>
       <p:sp>
         <p:nvSpPr>
-          <p:cNvPr id="103" name="Text 101"/>
-          <p:cNvSpPr/>
-          <p:nvPr/>
-        </p:nvSpPr>
-        <p:spPr>
-          <a:xfrm>
-            <a:off x="1170432" y="5605272"/>
-            <a:ext cx="932688" cy="237744"/>
+          <p:cNvPr id="163" name="Text 161"/>
+          <p:cNvSpPr/>
+          <p:nvPr/>
+        </p:nvSpPr>
+        <p:spPr>
+          <a:xfrm>
+            <a:off x="1170432" y="5815584"/>
+            <a:ext cx="932688" cy="155448"/>
           </a:xfrm>
           <a:prstGeom prst="rect">
             <a:avLst/>
@@ -4102,12 +5992,75 @@
               <a:buNone/>
             </a:pPr>
             <a:r>
-              <a:rPr lang="en-US" sz="750" dirty="0">
+              <a:rPr lang="en-US" sz="700" dirty="0">
                 <a:solidFill>
                   <a:srgbClr val="374151"/>
                 </a:solidFill>
               </a:rPr>
-              <a:t>★ Sign-in</a:t>
+              <a:t>Not Started</a:t>
+            </a:r>
+            <a:endParaRPr lang="en-US" sz="700" dirty="0"/>
+          </a:p>
+        </p:txBody>
+      </p:sp>
+      <p:sp>
+        <p:nvSpPr>
+          <p:cNvPr id="164" name="Shape 162"/>
+          <p:cNvSpPr/>
+          <p:nvPr/>
+        </p:nvSpPr>
+        <p:spPr>
+          <a:xfrm>
+            <a:off x="2185416" y="5605272"/>
+            <a:ext cx="932688" cy="182880"/>
+          </a:xfrm>
+          <a:prstGeom prst="roundRect">
+            <a:avLst>
+              <a:gd name="adj" fmla="val 15000"/>
+            </a:avLst>
+          </a:prstGeom>
+          <a:solidFill>
+            <a:srgbClr val="F1F5F9"/>
+          </a:solidFill>
+          <a:ln w="9525">
+            <a:solidFill>
+              <a:srgbClr val="CBD5E1"/>
+            </a:solidFill>
+            <a:prstDash val="solid"/>
+          </a:ln>
+        </p:spPr>
+      </p:sp>
+      <p:sp>
+        <p:nvSpPr>
+          <p:cNvPr id="165" name="Text 163"/>
+          <p:cNvSpPr/>
+          <p:nvPr/>
+        </p:nvSpPr>
+        <p:spPr>
+          <a:xfrm>
+            <a:off x="2185416" y="5605272"/>
+            <a:ext cx="932688" cy="182880"/>
+          </a:xfrm>
+          <a:prstGeom prst="rect">
+            <a:avLst/>
+          </a:prstGeom>
+          <a:noFill/>
+          <a:ln/>
+        </p:spPr>
+        <p:txBody>
+          <a:bodyPr wrap="square" lIns="0" tIns="0" rIns="0" bIns="0" rtlCol="0" anchor="ctr"/>
+          <a:lstStyle/>
+          <a:p>
+            <a:pPr algn="ctr" indent="0" marL="0">
+              <a:buNone/>
+            </a:pPr>
+            <a:r>
+              <a:rPr lang="en-US" sz="750" b="1" dirty="0">
+                <a:solidFill>
+                  <a:srgbClr val="1E293B"/>
+                </a:solidFill>
+              </a:rPr>
+              <a:t>★ Subscription</a:t>
             </a:r>
             <a:endParaRPr lang="en-US" sz="750" dirty="0"/>
           </a:p>
@@ -4115,18 +6068,18 @@
       </p:sp>
       <p:sp>
         <p:nvSpPr>
-          <p:cNvPr id="104" name="Shape 102"/>
-          <p:cNvSpPr/>
-          <p:nvPr/>
-        </p:nvSpPr>
-        <p:spPr>
-          <a:xfrm>
-            <a:off x="2185416" y="5605272"/>
-            <a:ext cx="932688" cy="237744"/>
-          </a:xfrm>
-          <a:prstGeom prst="roundRect">
-            <a:avLst>
-              <a:gd name="adj" fmla="val 15385"/>
+          <p:cNvPr id="166" name="Shape 164"/>
+          <p:cNvSpPr/>
+          <p:nvPr/>
+        </p:nvSpPr>
+        <p:spPr>
+          <a:xfrm>
+            <a:off x="2185416" y="5815584"/>
+            <a:ext cx="932688" cy="155448"/>
+          </a:xfrm>
+          <a:prstGeom prst="roundRect">
+            <a:avLst>
+              <a:gd name="adj" fmla="val 17647"/>
             </a:avLst>
           </a:prstGeom>
           <a:solidFill>
@@ -4142,14 +6095,14 @@
       </p:sp>
       <p:sp>
         <p:nvSpPr>
-          <p:cNvPr id="105" name="Text 103"/>
-          <p:cNvSpPr/>
-          <p:nvPr/>
-        </p:nvSpPr>
-        <p:spPr>
-          <a:xfrm>
-            <a:off x="2185416" y="5605272"/>
-            <a:ext cx="932688" cy="237744"/>
+          <p:cNvPr id="167" name="Text 165"/>
+          <p:cNvSpPr/>
+          <p:nvPr/>
+        </p:nvSpPr>
+        <p:spPr>
+          <a:xfrm>
+            <a:off x="2185416" y="5815584"/>
+            <a:ext cx="932688" cy="155448"/>
           </a:xfrm>
           <a:prstGeom prst="rect">
             <a:avLst/>
@@ -4165,12 +6118,75 @@
               <a:buNone/>
             </a:pPr>
             <a:r>
-              <a:rPr lang="en-US" sz="750" dirty="0">
+              <a:rPr lang="en-US" sz="700" dirty="0">
                 <a:solidFill>
                   <a:srgbClr val="78350F"/>
                 </a:solidFill>
               </a:rPr>
-              <a:t>★ Subscription</a:t>
+              <a:t>Not Started</a:t>
+            </a:r>
+            <a:endParaRPr lang="en-US" sz="700" dirty="0"/>
+          </a:p>
+        </p:txBody>
+      </p:sp>
+      <p:sp>
+        <p:nvSpPr>
+          <p:cNvPr id="168" name="Shape 166"/>
+          <p:cNvSpPr/>
+          <p:nvPr/>
+        </p:nvSpPr>
+        <p:spPr>
+          <a:xfrm>
+            <a:off x="3200400" y="5605272"/>
+            <a:ext cx="932688" cy="182880"/>
+          </a:xfrm>
+          <a:prstGeom prst="roundRect">
+            <a:avLst>
+              <a:gd name="adj" fmla="val 15000"/>
+            </a:avLst>
+          </a:prstGeom>
+          <a:solidFill>
+            <a:srgbClr val="F1F5F9"/>
+          </a:solidFill>
+          <a:ln w="9525">
+            <a:solidFill>
+              <a:srgbClr val="CBD5E1"/>
+            </a:solidFill>
+            <a:prstDash val="solid"/>
+          </a:ln>
+        </p:spPr>
+      </p:sp>
+      <p:sp>
+        <p:nvSpPr>
+          <p:cNvPr id="169" name="Text 167"/>
+          <p:cNvSpPr/>
+          <p:nvPr/>
+        </p:nvSpPr>
+        <p:spPr>
+          <a:xfrm>
+            <a:off x="3200400" y="5605272"/>
+            <a:ext cx="932688" cy="182880"/>
+          </a:xfrm>
+          <a:prstGeom prst="rect">
+            <a:avLst/>
+          </a:prstGeom>
+          <a:noFill/>
+          <a:ln/>
+        </p:spPr>
+        <p:txBody>
+          <a:bodyPr wrap="square" lIns="0" tIns="0" rIns="0" bIns="0" rtlCol="0" anchor="ctr"/>
+          <a:lstStyle/>
+          <a:p>
+            <a:pPr algn="ctr" indent="0" marL="0">
+              <a:buNone/>
+            </a:pPr>
+            <a:r>
+              <a:rPr lang="en-US" sz="750" b="1" dirty="0">
+                <a:solidFill>
+                  <a:srgbClr val="1E293B"/>
+                </a:solidFill>
+              </a:rPr>
+              <a:t>MVPD</a:t>
             </a:r>
             <a:endParaRPr lang="en-US" sz="750" dirty="0"/>
           </a:p>
@@ -4178,18 +6194,18 @@
       </p:sp>
       <p:sp>
         <p:nvSpPr>
-          <p:cNvPr id="106" name="Shape 104"/>
-          <p:cNvSpPr/>
-          <p:nvPr/>
-        </p:nvSpPr>
-        <p:spPr>
-          <a:xfrm>
-            <a:off x="3200400" y="5605272"/>
-            <a:ext cx="932688" cy="237744"/>
-          </a:xfrm>
-          <a:prstGeom prst="roundRect">
-            <a:avLst>
-              <a:gd name="adj" fmla="val 15385"/>
+          <p:cNvPr id="170" name="Shape 168"/>
+          <p:cNvSpPr/>
+          <p:nvPr/>
+        </p:nvSpPr>
+        <p:spPr>
+          <a:xfrm>
+            <a:off x="3200400" y="5815584"/>
+            <a:ext cx="932688" cy="155448"/>
+          </a:xfrm>
+          <a:prstGeom prst="roundRect">
+            <a:avLst>
+              <a:gd name="adj" fmla="val 17647"/>
             </a:avLst>
           </a:prstGeom>
           <a:solidFill>
@@ -4205,14 +6221,14 @@
       </p:sp>
       <p:sp>
         <p:nvSpPr>
-          <p:cNvPr id="107" name="Text 105"/>
-          <p:cNvSpPr/>
-          <p:nvPr/>
-        </p:nvSpPr>
-        <p:spPr>
-          <a:xfrm>
-            <a:off x="3200400" y="5605272"/>
-            <a:ext cx="932688" cy="237744"/>
+          <p:cNvPr id="171" name="Text 169"/>
+          <p:cNvSpPr/>
+          <p:nvPr/>
+        </p:nvSpPr>
+        <p:spPr>
+          <a:xfrm>
+            <a:off x="3200400" y="5815584"/>
+            <a:ext cx="932688" cy="155448"/>
           </a:xfrm>
           <a:prstGeom prst="rect">
             <a:avLst/>
@@ -4228,31 +6244,94 @@
               <a:buNone/>
             </a:pPr>
             <a:r>
-              <a:rPr lang="en-US" sz="800" b="1" dirty="0">
+              <a:rPr lang="en-US" sz="700" dirty="0">
                 <a:solidFill>
                   <a:srgbClr val="FFFFFF"/>
                 </a:solidFill>
               </a:rPr>
-              <a:t>MVPD</a:t>
-            </a:r>
-            <a:endParaRPr lang="en-US" sz="800" dirty="0"/>
-          </a:p>
-        </p:txBody>
-      </p:sp>
-      <p:sp>
-        <p:nvSpPr>
-          <p:cNvPr id="108" name="Shape 106"/>
+              <a:t>In Progress</a:t>
+            </a:r>
+            <a:endParaRPr lang="en-US" sz="700" dirty="0"/>
+          </a:p>
+        </p:txBody>
+      </p:sp>
+      <p:sp>
+        <p:nvSpPr>
+          <p:cNvPr id="172" name="Shape 170"/>
           <p:cNvSpPr/>
           <p:nvPr/>
         </p:nvSpPr>
         <p:spPr>
           <a:xfrm>
             <a:off x="4215384" y="5605272"/>
-            <a:ext cx="932688" cy="237744"/>
-          </a:xfrm>
-          <a:prstGeom prst="roundRect">
-            <a:avLst>
-              <a:gd name="adj" fmla="val 15385"/>
+            <a:ext cx="932688" cy="182880"/>
+          </a:xfrm>
+          <a:prstGeom prst="roundRect">
+            <a:avLst>
+              <a:gd name="adj" fmla="val 15000"/>
+            </a:avLst>
+          </a:prstGeom>
+          <a:solidFill>
+            <a:srgbClr val="F1F5F9"/>
+          </a:solidFill>
+          <a:ln w="9525">
+            <a:solidFill>
+              <a:srgbClr val="CBD5E1"/>
+            </a:solidFill>
+            <a:prstDash val="solid"/>
+          </a:ln>
+        </p:spPr>
+      </p:sp>
+      <p:sp>
+        <p:nvSpPr>
+          <p:cNvPr id="173" name="Text 171"/>
+          <p:cNvSpPr/>
+          <p:nvPr/>
+        </p:nvSpPr>
+        <p:spPr>
+          <a:xfrm>
+            <a:off x="4215384" y="5605272"/>
+            <a:ext cx="932688" cy="182880"/>
+          </a:xfrm>
+          <a:prstGeom prst="rect">
+            <a:avLst/>
+          </a:prstGeom>
+          <a:noFill/>
+          <a:ln/>
+        </p:spPr>
+        <p:txBody>
+          <a:bodyPr wrap="square" lIns="0" tIns="0" rIns="0" bIns="0" rtlCol="0" anchor="ctr"/>
+          <a:lstStyle/>
+          <a:p>
+            <a:pPr algn="ctr" indent="0" marL="0">
+              <a:buNone/>
+            </a:pPr>
+            <a:r>
+              <a:rPr lang="en-US" sz="750" b="1" dirty="0">
+                <a:solidFill>
+                  <a:srgbClr val="1E293B"/>
+                </a:solidFill>
+              </a:rPr>
+              <a:t>Promos</a:t>
+            </a:r>
+            <a:endParaRPr lang="en-US" sz="750" dirty="0"/>
+          </a:p>
+        </p:txBody>
+      </p:sp>
+      <p:sp>
+        <p:nvSpPr>
+          <p:cNvPr id="174" name="Shape 172"/>
+          <p:cNvSpPr/>
+          <p:nvPr/>
+        </p:nvSpPr>
+        <p:spPr>
+          <a:xfrm>
+            <a:off x="4215384" y="5815584"/>
+            <a:ext cx="932688" cy="155448"/>
+          </a:xfrm>
+          <a:prstGeom prst="roundRect">
+            <a:avLst>
+              <a:gd name="adj" fmla="val 17647"/>
             </a:avLst>
           </a:prstGeom>
           <a:solidFill>
@@ -4268,14 +6347,14 @@
       </p:sp>
       <p:sp>
         <p:nvSpPr>
-          <p:cNvPr id="109" name="Text 107"/>
-          <p:cNvSpPr/>
-          <p:nvPr/>
-        </p:nvSpPr>
-        <p:spPr>
-          <a:xfrm>
-            <a:off x="4215384" y="5605272"/>
-            <a:ext cx="932688" cy="237744"/>
+          <p:cNvPr id="175" name="Text 173"/>
+          <p:cNvSpPr/>
+          <p:nvPr/>
+        </p:nvSpPr>
+        <p:spPr>
+          <a:xfrm>
+            <a:off x="4215384" y="5815584"/>
+            <a:ext cx="932688" cy="155448"/>
           </a:xfrm>
           <a:prstGeom prst="rect">
             <a:avLst/>
@@ -4291,20 +6370,20 @@
               <a:buNone/>
             </a:pPr>
             <a:r>
-              <a:rPr lang="en-US" sz="800" dirty="0">
+              <a:rPr lang="en-US" sz="700" dirty="0">
                 <a:solidFill>
                   <a:srgbClr val="78350F"/>
                 </a:solidFill>
               </a:rPr>
-              <a:t>Promos</a:t>
-            </a:r>
-            <a:endParaRPr lang="en-US" sz="800" dirty="0"/>
-          </a:p>
-        </p:txBody>
-      </p:sp>
-      <p:sp>
-        <p:nvSpPr>
-          <p:cNvPr id="110" name="Shape 108"/>
+              <a:t>Not Started</a:t>
+            </a:r>
+            <a:endParaRPr lang="en-US" sz="700" dirty="0"/>
+          </a:p>
+        </p:txBody>
+      </p:sp>
+      <p:sp>
+        <p:nvSpPr>
+          <p:cNvPr id="176" name="Shape 174"/>
           <p:cNvSpPr/>
           <p:nvPr/>
         </p:nvSpPr>
@@ -4329,7 +6408,7 @@
       </p:sp>
       <p:sp>
         <p:nvSpPr>
-          <p:cNvPr id="111" name="Text 109"/>
+          <p:cNvPr id="177" name="Text 175"/>
           <p:cNvSpPr/>
           <p:nvPr/>
         </p:nvSpPr>
@@ -4365,7 +6444,7 @@
       </p:sp>
       <p:sp>
         <p:nvSpPr>
-          <p:cNvPr id="112" name="Text 110"/>
+          <p:cNvPr id="178" name="Text 176"/>
           <p:cNvSpPr/>
           <p:nvPr/>
         </p:nvSpPr>
@@ -4401,7 +6480,7 @@
       </p:sp>
       <p:sp>
         <p:nvSpPr>
-          <p:cNvPr id="113" name="Text 111"/>
+          <p:cNvPr id="179" name="Text 177"/>
           <p:cNvSpPr/>
           <p:nvPr/>
         </p:nvSpPr>
@@ -4437,7 +6516,7 @@
       </p:sp>
       <p:sp>
         <p:nvSpPr>
-          <p:cNvPr id="114" name="Shape 112"/>
+          <p:cNvPr id="180" name="Shape 178"/>
           <p:cNvSpPr/>
           <p:nvPr/>
         </p:nvSpPr>
@@ -4464,7 +6543,7 @@
       </p:sp>
       <p:sp>
         <p:nvSpPr>
-          <p:cNvPr id="115" name="Shape 113"/>
+          <p:cNvPr id="181" name="Shape 179"/>
           <p:cNvSpPr/>
           <p:nvPr/>
         </p:nvSpPr>
@@ -4491,7 +6570,7 @@
       </p:sp>
       <p:sp>
         <p:nvSpPr>
-          <p:cNvPr id="116" name="Text 114"/>
+          <p:cNvPr id="182" name="Text 180"/>
           <p:cNvSpPr/>
           <p:nvPr/>
         </p:nvSpPr>
@@ -4527,7 +6606,7 @@
       </p:sp>
       <p:sp>
         <p:nvSpPr>
-          <p:cNvPr id="117" name="Text 115"/>
+          <p:cNvPr id="183" name="Text 181"/>
           <p:cNvSpPr/>
           <p:nvPr/>
         </p:nvSpPr>
@@ -4563,7 +6642,7 @@
       </p:sp>
       <p:sp>
         <p:nvSpPr>
-          <p:cNvPr id="118" name="Shape 116"/>
+          <p:cNvPr id="184" name="Shape 182"/>
           <p:cNvSpPr/>
           <p:nvPr/>
         </p:nvSpPr>
@@ -4590,7 +6669,7 @@
       </p:sp>
       <p:sp>
         <p:nvSpPr>
-          <p:cNvPr id="119" name="Shape 117"/>
+          <p:cNvPr id="185" name="Shape 183"/>
           <p:cNvSpPr/>
           <p:nvPr/>
         </p:nvSpPr>
@@ -4617,7 +6696,7 @@
       </p:sp>
       <p:sp>
         <p:nvSpPr>
-          <p:cNvPr id="120" name="Text 118"/>
+          <p:cNvPr id="186" name="Text 184"/>
           <p:cNvSpPr/>
           <p:nvPr/>
         </p:nvSpPr>
@@ -4653,7 +6732,7 @@
       </p:sp>
       <p:sp>
         <p:nvSpPr>
-          <p:cNvPr id="121" name="Text 119"/>
+          <p:cNvPr id="187" name="Text 185"/>
           <p:cNvSpPr/>
           <p:nvPr/>
         </p:nvSpPr>
@@ -4689,7 +6768,7 @@
       </p:sp>
       <p:sp>
         <p:nvSpPr>
-          <p:cNvPr id="122" name="Shape 120"/>
+          <p:cNvPr id="188" name="Shape 186"/>
           <p:cNvSpPr/>
           <p:nvPr/>
         </p:nvSpPr>
@@ -4716,7 +6795,7 @@
       </p:sp>
       <p:sp>
         <p:nvSpPr>
-          <p:cNvPr id="123" name="Shape 121"/>
+          <p:cNvPr id="189" name="Shape 187"/>
           <p:cNvSpPr/>
           <p:nvPr/>
         </p:nvSpPr>
@@ -4743,7 +6822,7 @@
       </p:sp>
       <p:sp>
         <p:nvSpPr>
-          <p:cNvPr id="124" name="Text 122"/>
+          <p:cNvPr id="190" name="Text 188"/>
           <p:cNvSpPr/>
           <p:nvPr/>
         </p:nvSpPr>
@@ -4779,7 +6858,7 @@
       </p:sp>
       <p:sp>
         <p:nvSpPr>
-          <p:cNvPr id="125" name="Text 123"/>
+          <p:cNvPr id="191" name="Text 189"/>
           <p:cNvSpPr/>
           <p:nvPr/>
         </p:nvSpPr>
@@ -4815,7 +6894,7 @@
       </p:sp>
       <p:sp>
         <p:nvSpPr>
-          <p:cNvPr id="126" name="Shape 124"/>
+          <p:cNvPr id="192" name="Shape 190"/>
           <p:cNvSpPr/>
           <p:nvPr/>
         </p:nvSpPr>
@@ -4842,7 +6921,7 @@
       </p:sp>
       <p:sp>
         <p:nvSpPr>
-          <p:cNvPr id="127" name="Shape 125"/>
+          <p:cNvPr id="193" name="Shape 191"/>
           <p:cNvSpPr/>
           <p:nvPr/>
         </p:nvSpPr>
@@ -4869,7 +6948,7 @@
       </p:sp>
       <p:sp>
         <p:nvSpPr>
-          <p:cNvPr id="128" name="Text 126"/>
+          <p:cNvPr id="194" name="Text 192"/>
           <p:cNvSpPr/>
           <p:nvPr/>
         </p:nvSpPr>
@@ -4905,7 +6984,7 @@
       </p:sp>
       <p:sp>
         <p:nvSpPr>
-          <p:cNvPr id="129" name="Text 127"/>
+          <p:cNvPr id="195" name="Text 193"/>
           <p:cNvSpPr/>
           <p:nvPr/>
         </p:nvSpPr>
@@ -4941,7 +7020,7 @@
       </p:sp>
       <p:sp>
         <p:nvSpPr>
-          <p:cNvPr id="130" name="Shape 128"/>
+          <p:cNvPr id="196" name="Shape 194"/>
           <p:cNvSpPr/>
           <p:nvPr/>
         </p:nvSpPr>
@@ -4968,7 +7047,7 @@
       </p:sp>
       <p:sp>
         <p:nvSpPr>
-          <p:cNvPr id="131" name="Shape 129"/>
+          <p:cNvPr id="197" name="Shape 195"/>
           <p:cNvSpPr/>
           <p:nvPr/>
         </p:nvSpPr>
@@ -4995,7 +7074,7 @@
       </p:sp>
       <p:sp>
         <p:nvSpPr>
-          <p:cNvPr id="132" name="Shape 130"/>
+          <p:cNvPr id="198" name="Shape 196"/>
           <p:cNvSpPr/>
           <p:nvPr/>
         </p:nvSpPr>
@@ -5018,7 +7097,7 @@
       </p:sp>
       <p:sp>
         <p:nvSpPr>
-          <p:cNvPr id="133" name="Text 131"/>
+          <p:cNvPr id="199" name="Text 197"/>
           <p:cNvSpPr/>
           <p:nvPr/>
         </p:nvSpPr>
@@ -5054,7 +7133,7 @@
       </p:sp>
       <p:sp>
         <p:nvSpPr>
-          <p:cNvPr id="134" name="Text 132"/>
+          <p:cNvPr id="200" name="Text 198"/>
           <p:cNvSpPr/>
           <p:nvPr/>
         </p:nvSpPr>
@@ -5090,7 +7169,7 @@
       </p:sp>
       <p:sp>
         <p:nvSpPr>
-          <p:cNvPr id="135" name="Text 133"/>
+          <p:cNvPr id="201" name="Text 199"/>
           <p:cNvSpPr/>
           <p:nvPr/>
         </p:nvSpPr>
@@ -5126,7 +7205,7 @@
       </p:sp>
       <p:sp>
         <p:nvSpPr>
-          <p:cNvPr id="136" name="Text 134"/>
+          <p:cNvPr id="202" name="Text 200"/>
           <p:cNvSpPr/>
           <p:nvPr/>
         </p:nvSpPr>
@@ -5162,7 +7241,7 @@
       </p:sp>
       <p:sp>
         <p:nvSpPr>
-          <p:cNvPr id="137" name="Text 135"/>
+          <p:cNvPr id="203" name="Text 201"/>
           <p:cNvSpPr/>
           <p:nvPr/>
         </p:nvSpPr>
@@ -5198,7 +7277,7 @@
       </p:sp>
       <p:sp>
         <p:nvSpPr>
-          <p:cNvPr id="138" name="Text 136"/>
+          <p:cNvPr id="204" name="Text 202"/>
           <p:cNvSpPr/>
           <p:nvPr/>
         </p:nvSpPr>
@@ -5234,7 +7313,7 @@
       </p:sp>
       <p:sp>
         <p:nvSpPr>
-          <p:cNvPr id="139" name="Text 137"/>
+          <p:cNvPr id="205" name="Text 203"/>
           <p:cNvSpPr/>
           <p:nvPr/>
         </p:nvSpPr>
@@ -5270,7 +7349,7 @@
       </p:sp>
       <p:sp>
         <p:nvSpPr>
-          <p:cNvPr id="140" name="Text 138"/>
+          <p:cNvPr id="206" name="Text 204"/>
           <p:cNvSpPr/>
           <p:nvPr/>
         </p:nvSpPr>
@@ -5306,7 +7385,7 @@
       </p:sp>
       <p:sp>
         <p:nvSpPr>
-          <p:cNvPr id="141" name="Text 139"/>
+          <p:cNvPr id="207" name="Text 205"/>
           <p:cNvSpPr/>
           <p:nvPr/>
         </p:nvSpPr>
@@ -5342,7 +7421,7 @@
       </p:sp>
       <p:sp>
         <p:nvSpPr>
-          <p:cNvPr id="142" name="Text 140"/>
+          <p:cNvPr id="208" name="Text 206"/>
           <p:cNvSpPr/>
           <p:nvPr/>
         </p:nvSpPr>
@@ -5378,7 +7457,7 @@
       </p:sp>
       <p:sp>
         <p:nvSpPr>
-          <p:cNvPr id="143" name="Text 141"/>
+          <p:cNvPr id="209" name="Text 207"/>
           <p:cNvSpPr/>
           <p:nvPr/>
         </p:nvSpPr>

--- a/SABR_CPR_Component_Status.pptx
+++ b/SABR_CPR_Component_Status.pptx
@@ -1117,7 +1117,7 @@
                   <a:srgbClr val="1D4ED8"/>
                 </a:solidFill>
               </a:rPr>
-              <a:t>13  In Progress</a:t>
+              <a:t>11  In Progress</a:t>
             </a:r>
             <a:endParaRPr lang="en-US" sz="900" dirty="0"/>
           </a:p>
@@ -1180,7 +1180,7 @@
                   <a:srgbClr val="374151"/>
                 </a:solidFill>
               </a:rPr>
-              <a:t>20  Not Started</a:t>
+              <a:t>22  Not Started</a:t>
             </a:r>
             <a:endParaRPr lang="en-US" sz="900" dirty="0"/>
           </a:p>
@@ -1346,7 +1346,7 @@
         <p:spPr>
           <a:xfrm>
             <a:off x="201168" y="6419088"/>
-            <a:ext cx="3840480" cy="438912"/>
+            <a:ext cx="5029200" cy="438912"/>
           </a:xfrm>
           <a:prstGeom prst="rect">
             <a:avLst/>
@@ -1381,181 +1381,37 @@
         </p:nvSpPr>
         <p:spPr>
           <a:xfrm>
-            <a:off x="4023360" y="6419088"/>
-            <a:ext cx="1463040" cy="438912"/>
-          </a:xfrm>
-          <a:prstGeom prst="rect">
-            <a:avLst/>
-          </a:prstGeom>
-          <a:noFill/>
-          <a:ln/>
-        </p:spPr>
-        <p:txBody>
-          <a:bodyPr wrap="square" lIns="0" tIns="0" rIns="0" bIns="0" rtlCol="0" anchor="ctr"/>
-          <a:lstStyle/>
-          <a:p>
-            <a:pPr algn="l" indent="0" marL="0">
-              <a:buNone/>
-            </a:pPr>
-            <a:r>
-              <a:rPr lang="en-US" sz="850" dirty="0">
-                <a:solidFill>
-                  <a:srgbClr val="1558A8"/>
-                </a:solidFill>
-              </a:rPr>
-              <a:t>■ In Progress</a:t>
-            </a:r>
-            <a:endParaRPr lang="en-US" sz="850" dirty="0"/>
+            <a:off x="5486400" y="6419088"/>
+            <a:ext cx="4572000" cy="438912"/>
+          </a:xfrm>
+          <a:prstGeom prst="rect">
+            <a:avLst/>
+          </a:prstGeom>
+          <a:noFill/>
+          <a:ln/>
+        </p:spPr>
+        <p:txBody>
+          <a:bodyPr wrap="square" lIns="0" tIns="0" rIns="0" bIns="0" rtlCol="0" anchor="ctr"/>
+          <a:lstStyle/>
+          <a:p>
+            <a:pPr algn="ctr" indent="0" marL="0">
+              <a:buNone/>
+            </a:pPr>
+            <a:r>
+              <a:rPr lang="en-US" sz="800" dirty="0">
+                <a:solidFill>
+                  <a:srgbClr val="9CA3AF"/>
+                </a:solidFill>
+              </a:rPr>
+              <a:t>Launch: Dec 1, 2026  ·  151 days remaining</a:t>
+            </a:r>
+            <a:endParaRPr lang="en-US" sz="800" dirty="0"/>
           </a:p>
         </p:txBody>
       </p:sp>
       <p:sp>
         <p:nvSpPr>
           <p:cNvPr id="19" name="Text 17"/>
-          <p:cNvSpPr/>
-          <p:nvPr/>
-        </p:nvSpPr>
-        <p:spPr>
-          <a:xfrm>
-            <a:off x="5504688" y="6419088"/>
-            <a:ext cx="1463040" cy="438912"/>
-          </a:xfrm>
-          <a:prstGeom prst="rect">
-            <a:avLst/>
-          </a:prstGeom>
-          <a:noFill/>
-          <a:ln/>
-        </p:spPr>
-        <p:txBody>
-          <a:bodyPr wrap="square" lIns="0" tIns="0" rIns="0" bIns="0" rtlCol="0" anchor="ctr"/>
-          <a:lstStyle/>
-          <a:p>
-            <a:pPr algn="l" indent="0" marL="0">
-              <a:buNone/>
-            </a:pPr>
-            <a:r>
-              <a:rPr lang="en-US" sz="850" dirty="0">
-                <a:solidFill>
-                  <a:srgbClr val="9CA3AF"/>
-                </a:solidFill>
-              </a:rPr>
-              <a:t>□ Not Started</a:t>
-            </a:r>
-            <a:endParaRPr lang="en-US" sz="850" dirty="0"/>
-          </a:p>
-        </p:txBody>
-      </p:sp>
-      <p:sp>
-        <p:nvSpPr>
-          <p:cNvPr id="20" name="Text 18"/>
-          <p:cNvSpPr/>
-          <p:nvPr/>
-        </p:nvSpPr>
-        <p:spPr>
-          <a:xfrm>
-            <a:off x="6986016" y="6419088"/>
-            <a:ext cx="1463040" cy="438912"/>
-          </a:xfrm>
-          <a:prstGeom prst="rect">
-            <a:avLst/>
-          </a:prstGeom>
-          <a:noFill/>
-          <a:ln/>
-        </p:spPr>
-        <p:txBody>
-          <a:bodyPr wrap="square" lIns="0" tIns="0" rIns="0" bIns="0" rtlCol="0" anchor="ctr"/>
-          <a:lstStyle/>
-          <a:p>
-            <a:pPr algn="l" indent="0" marL="0">
-              <a:buNone/>
-            </a:pPr>
-            <a:r>
-              <a:rPr lang="en-US" sz="850" dirty="0">
-                <a:solidFill>
-                  <a:srgbClr val="D97706"/>
-                </a:solidFill>
-              </a:rPr>
-              <a:t>★ Critical Path</a:t>
-            </a:r>
-            <a:endParaRPr lang="en-US" sz="850" dirty="0"/>
-          </a:p>
-        </p:txBody>
-      </p:sp>
-      <p:sp>
-        <p:nvSpPr>
-          <p:cNvPr id="21" name="Text 19"/>
-          <p:cNvSpPr/>
-          <p:nvPr/>
-        </p:nvSpPr>
-        <p:spPr>
-          <a:xfrm>
-            <a:off x="8467344" y="6419088"/>
-            <a:ext cx="1463040" cy="438912"/>
-          </a:xfrm>
-          <a:prstGeom prst="rect">
-            <a:avLst/>
-          </a:prstGeom>
-          <a:noFill/>
-          <a:ln/>
-        </p:spPr>
-        <p:txBody>
-          <a:bodyPr wrap="square" lIns="0" tIns="0" rIns="0" bIns="0" rtlCol="0" anchor="ctr"/>
-          <a:lstStyle/>
-          <a:p>
-            <a:pPr algn="l" indent="0" marL="0">
-              <a:buNone/>
-            </a:pPr>
-            <a:r>
-              <a:rPr lang="en-US" sz="850" dirty="0">
-                <a:solidFill>
-                  <a:srgbClr val="DC2626"/>
-                </a:solidFill>
-              </a:rPr>
-              <a:t>⚠ At Risk</a:t>
-            </a:r>
-            <a:endParaRPr lang="en-US" sz="850" dirty="0"/>
-          </a:p>
-        </p:txBody>
-      </p:sp>
-      <p:sp>
-        <p:nvSpPr>
-          <p:cNvPr id="22" name="Text 20"/>
-          <p:cNvSpPr/>
-          <p:nvPr/>
-        </p:nvSpPr>
-        <p:spPr>
-          <a:xfrm>
-            <a:off x="9948672" y="6419088"/>
-            <a:ext cx="1463040" cy="438912"/>
-          </a:xfrm>
-          <a:prstGeom prst="rect">
-            <a:avLst/>
-          </a:prstGeom>
-          <a:noFill/>
-          <a:ln/>
-        </p:spPr>
-        <p:txBody>
-          <a:bodyPr wrap="square" lIns="0" tIns="0" rIns="0" bIns="0" rtlCol="0" anchor="ctr"/>
-          <a:lstStyle/>
-          <a:p>
-            <a:pPr algn="l" indent="0" marL="0">
-              <a:buNone/>
-            </a:pPr>
-            <a:r>
-              <a:rPr lang="en-US" sz="850" dirty="0">
-                <a:solidFill>
-                  <a:srgbClr val="15803D"/>
-                </a:solidFill>
-              </a:rPr>
-              <a:t>■ Done</a:t>
-            </a:r>
-            <a:endParaRPr lang="en-US" sz="850" dirty="0"/>
-          </a:p>
-        </p:txBody>
-      </p:sp>
-      <p:sp>
-        <p:nvSpPr>
-          <p:cNvPr id="23" name="Text 21"/>
           <p:cNvSpPr/>
           <p:nvPr/>
         </p:nvSpPr>
@@ -1583,7 +1439,7 @@
                   <a:srgbClr val="0F6E56"/>
                 </a:solidFill>
               </a:rPr>
-              <a:t>20% Ready</a:t>
+              <a:t>0% Ready</a:t>
             </a:r>
             <a:endParaRPr lang="en-US" sz="1100" dirty="0"/>
           </a:p>
@@ -1591,7 +1447,7 @@
       </p:sp>
       <p:sp>
         <p:nvSpPr>
-          <p:cNvPr id="24" name="Shape 22"/>
+          <p:cNvPr id="20" name="Shape 18"/>
           <p:cNvSpPr/>
           <p:nvPr/>
         </p:nvSpPr>
@@ -1616,7 +1472,7 @@
       </p:sp>
       <p:sp>
         <p:nvSpPr>
-          <p:cNvPr id="25" name="Shape 23"/>
+          <p:cNvPr id="21" name="Shape 19"/>
           <p:cNvSpPr/>
           <p:nvPr/>
         </p:nvSpPr>
@@ -1631,19 +1487,19 @@
             </a:avLst>
           </a:prstGeom>
           <a:solidFill>
-            <a:srgbClr val="7C3AED"/>
+            <a:srgbClr val="9CA3AF"/>
           </a:solidFill>
           <a:ln w="12700">
             <a:solidFill>
-              <a:srgbClr val="7C3AED"/>
-            </a:solidFill>
-            <a:prstDash val="solid"/>
-          </a:ln>
-        </p:spPr>
-      </p:sp>
-      <p:sp>
-        <p:nvSpPr>
-          <p:cNvPr id="26" name="Text 24"/>
+              <a:srgbClr val="9CA3AF"/>
+            </a:solidFill>
+            <a:prstDash val="solid"/>
+          </a:ln>
+        </p:spPr>
+      </p:sp>
+      <p:sp>
+        <p:nvSpPr>
+          <p:cNvPr id="22" name="Text 20"/>
           <p:cNvSpPr/>
           <p:nvPr/>
         </p:nvSpPr>
@@ -1679,7 +1535,7 @@
       </p:sp>
       <p:sp>
         <p:nvSpPr>
-          <p:cNvPr id="27" name="Text 25"/>
+          <p:cNvPr id="23" name="Text 21"/>
           <p:cNvSpPr/>
           <p:nvPr/>
         </p:nvSpPr>
@@ -1715,7 +1571,7 @@
       </p:sp>
       <p:sp>
         <p:nvSpPr>
-          <p:cNvPr id="28" name="Shape 26"/>
+          <p:cNvPr id="24" name="Shape 22"/>
           <p:cNvSpPr/>
           <p:nvPr/>
         </p:nvSpPr>
@@ -1730,7 +1586,7 @@
             </a:avLst>
           </a:prstGeom>
           <a:solidFill>
-            <a:srgbClr val="F1F5F9"/>
+            <a:srgbClr val="FFFFFF"/>
           </a:solidFill>
           <a:ln w="9525">
             <a:solidFill>
@@ -1742,7 +1598,7 @@
       </p:sp>
       <p:sp>
         <p:nvSpPr>
-          <p:cNvPr id="29" name="Text 27"/>
+          <p:cNvPr id="25" name="Text 23"/>
           <p:cNvSpPr/>
           <p:nvPr/>
         </p:nvSpPr>
@@ -1770,7 +1626,7 @@
                   <a:srgbClr val="1E293B"/>
                 </a:solidFill>
               </a:rPr>
-              <a:t>Roku</a:t>
+              <a:t>TC.com</a:t>
             </a:r>
             <a:endParaRPr lang="en-US" sz="750" dirty="0"/>
           </a:p>
@@ -1778,7 +1634,7 @@
       </p:sp>
       <p:sp>
         <p:nvSpPr>
-          <p:cNvPr id="30" name="Shape 28"/>
+          <p:cNvPr id="26" name="Shape 24"/>
           <p:cNvSpPr/>
           <p:nvPr/>
         </p:nvSpPr>
@@ -1805,7 +1661,7 @@
       </p:sp>
       <p:sp>
         <p:nvSpPr>
-          <p:cNvPr id="31" name="Text 29"/>
+          <p:cNvPr id="27" name="Text 25"/>
           <p:cNvSpPr/>
           <p:nvPr/>
         </p:nvSpPr>
@@ -1841,7 +1697,7 @@
       </p:sp>
       <p:sp>
         <p:nvSpPr>
-          <p:cNvPr id="32" name="Shape 30"/>
+          <p:cNvPr id="28" name="Shape 26"/>
           <p:cNvSpPr/>
           <p:nvPr/>
         </p:nvSpPr>
@@ -1856,7 +1712,7 @@
             </a:avLst>
           </a:prstGeom>
           <a:solidFill>
-            <a:srgbClr val="F1F5F9"/>
+            <a:srgbClr val="FFFFFF"/>
           </a:solidFill>
           <a:ln w="9525">
             <a:solidFill>
@@ -1868,7 +1724,7 @@
       </p:sp>
       <p:sp>
         <p:nvSpPr>
-          <p:cNvPr id="33" name="Text 31"/>
+          <p:cNvPr id="29" name="Text 27"/>
           <p:cNvSpPr/>
           <p:nvPr/>
         </p:nvSpPr>
@@ -1896,7 +1752,7 @@
                   <a:srgbClr val="1E293B"/>
                 </a:solidFill>
               </a:rPr>
-              <a:t>Fire TV</a:t>
+              <a:t>iOS</a:t>
             </a:r>
             <a:endParaRPr lang="en-US" sz="750" dirty="0"/>
           </a:p>
@@ -1904,7 +1760,7 @@
       </p:sp>
       <p:sp>
         <p:nvSpPr>
-          <p:cNvPr id="34" name="Shape 32"/>
+          <p:cNvPr id="30" name="Shape 28"/>
           <p:cNvSpPr/>
           <p:nvPr/>
         </p:nvSpPr>
@@ -1919,19 +1775,19 @@
             </a:avLst>
           </a:prstGeom>
           <a:solidFill>
-            <a:srgbClr val="FEF3C7"/>
-          </a:solidFill>
-          <a:ln w="19050">
-            <a:solidFill>
-              <a:srgbClr val="D97706"/>
-            </a:solidFill>
-            <a:prstDash val="solid"/>
-          </a:ln>
-        </p:spPr>
-      </p:sp>
-      <p:sp>
-        <p:nvSpPr>
-          <p:cNvPr id="35" name="Text 33"/>
+            <a:srgbClr val="1558A8"/>
+          </a:solidFill>
+          <a:ln w="12700">
+            <a:solidFill>
+              <a:srgbClr val="1558A8"/>
+            </a:solidFill>
+            <a:prstDash val="solid"/>
+          </a:ln>
+        </p:spPr>
+      </p:sp>
+      <p:sp>
+        <p:nvSpPr>
+          <p:cNvPr id="31" name="Text 29"/>
           <p:cNvSpPr/>
           <p:nvPr/>
         </p:nvSpPr>
@@ -1956,10 +1812,10 @@
             <a:r>
               <a:rPr lang="en-US" sz="700" dirty="0">
                 <a:solidFill>
-                  <a:srgbClr val="78350F"/>
-                </a:solidFill>
-              </a:rPr>
-              <a:t>Not Started</a:t>
+                  <a:srgbClr val="FFFFFF"/>
+                </a:solidFill>
+              </a:rPr>
+              <a:t>In Progress</a:t>
             </a:r>
             <a:endParaRPr lang="en-US" sz="700" dirty="0"/>
           </a:p>
@@ -1967,7 +1823,7 @@
       </p:sp>
       <p:sp>
         <p:nvSpPr>
-          <p:cNvPr id="36" name="Shape 34"/>
+          <p:cNvPr id="32" name="Shape 30"/>
           <p:cNvSpPr/>
           <p:nvPr/>
         </p:nvSpPr>
@@ -1982,7 +1838,7 @@
             </a:avLst>
           </a:prstGeom>
           <a:solidFill>
-            <a:srgbClr val="F1F5F9"/>
+            <a:srgbClr val="FFFFFF"/>
           </a:solidFill>
           <a:ln w="9525">
             <a:solidFill>
@@ -1994,7 +1850,7 @@
       </p:sp>
       <p:sp>
         <p:nvSpPr>
-          <p:cNvPr id="37" name="Text 35"/>
+          <p:cNvPr id="33" name="Text 31"/>
           <p:cNvSpPr/>
           <p:nvPr/>
         </p:nvSpPr>
@@ -2022,7 +1878,7 @@
                   <a:srgbClr val="1E293B"/>
                 </a:solidFill>
               </a:rPr>
-              <a:t>Samsung</a:t>
+              <a:t>Android</a:t>
             </a:r>
             <a:endParaRPr lang="en-US" sz="750" dirty="0"/>
           </a:p>
@@ -2030,7 +1886,7 @@
       </p:sp>
       <p:sp>
         <p:nvSpPr>
-          <p:cNvPr id="38" name="Shape 36"/>
+          <p:cNvPr id="34" name="Shape 32"/>
           <p:cNvSpPr/>
           <p:nvPr/>
         </p:nvSpPr>
@@ -2045,19 +1901,19 @@
             </a:avLst>
           </a:prstGeom>
           <a:solidFill>
-            <a:srgbClr val="FEF3C7"/>
-          </a:solidFill>
-          <a:ln w="19050">
-            <a:solidFill>
-              <a:srgbClr val="D97706"/>
-            </a:solidFill>
-            <a:prstDash val="solid"/>
-          </a:ln>
-        </p:spPr>
-      </p:sp>
-      <p:sp>
-        <p:nvSpPr>
-          <p:cNvPr id="39" name="Text 37"/>
+            <a:srgbClr val="F3F4F6"/>
+          </a:solidFill>
+          <a:ln w="9525">
+            <a:solidFill>
+              <a:srgbClr val="D1D5DB"/>
+            </a:solidFill>
+            <a:prstDash val="solid"/>
+          </a:ln>
+        </p:spPr>
+      </p:sp>
+      <p:sp>
+        <p:nvSpPr>
+          <p:cNvPr id="35" name="Text 33"/>
           <p:cNvSpPr/>
           <p:nvPr/>
         </p:nvSpPr>
@@ -2082,7 +1938,7 @@
             <a:r>
               <a:rPr lang="en-US" sz="700" dirty="0">
                 <a:solidFill>
-                  <a:srgbClr val="78350F"/>
+                  <a:srgbClr val="374151"/>
                 </a:solidFill>
               </a:rPr>
               <a:t>Not Started</a:t>
@@ -2093,7 +1949,7 @@
       </p:sp>
       <p:sp>
         <p:nvSpPr>
-          <p:cNvPr id="40" name="Shape 38"/>
+          <p:cNvPr id="36" name="Shape 34"/>
           <p:cNvSpPr/>
           <p:nvPr/>
         </p:nvSpPr>
@@ -2108,7 +1964,7 @@
             </a:avLst>
           </a:prstGeom>
           <a:solidFill>
-            <a:srgbClr val="F1F5F9"/>
+            <a:srgbClr val="FFFFFF"/>
           </a:solidFill>
           <a:ln w="9525">
             <a:solidFill>
@@ -2120,7 +1976,7 @@
       </p:sp>
       <p:sp>
         <p:nvSpPr>
-          <p:cNvPr id="41" name="Text 39"/>
+          <p:cNvPr id="37" name="Text 35"/>
           <p:cNvSpPr/>
           <p:nvPr/>
         </p:nvSpPr>
@@ -2148,7 +2004,7 @@
                   <a:srgbClr val="1E293B"/>
                 </a:solidFill>
               </a:rPr>
-              <a:t>TC.com</a:t>
+              <a:t>Roku</a:t>
             </a:r>
             <a:endParaRPr lang="en-US" sz="750" dirty="0"/>
           </a:p>
@@ -2156,7 +2012,7 @@
       </p:sp>
       <p:sp>
         <p:nvSpPr>
-          <p:cNvPr id="42" name="Shape 40"/>
+          <p:cNvPr id="38" name="Shape 36"/>
           <p:cNvSpPr/>
           <p:nvPr/>
         </p:nvSpPr>
@@ -2183,7 +2039,7 @@
       </p:sp>
       <p:sp>
         <p:nvSpPr>
-          <p:cNvPr id="43" name="Text 41"/>
+          <p:cNvPr id="39" name="Text 37"/>
           <p:cNvSpPr/>
           <p:nvPr/>
         </p:nvSpPr>
@@ -2219,7 +2075,7 @@
       </p:sp>
       <p:sp>
         <p:nvSpPr>
-          <p:cNvPr id="44" name="Shape 42"/>
+          <p:cNvPr id="40" name="Shape 38"/>
           <p:cNvSpPr/>
           <p:nvPr/>
         </p:nvSpPr>
@@ -2234,7 +2090,7 @@
             </a:avLst>
           </a:prstGeom>
           <a:solidFill>
-            <a:srgbClr val="F1F5F9"/>
+            <a:srgbClr val="FFFFFF"/>
           </a:solidFill>
           <a:ln w="9525">
             <a:solidFill>
@@ -2246,7 +2102,7 @@
       </p:sp>
       <p:sp>
         <p:nvSpPr>
-          <p:cNvPr id="45" name="Text 43"/>
+          <p:cNvPr id="41" name="Text 39"/>
           <p:cNvSpPr/>
           <p:nvPr/>
         </p:nvSpPr>
@@ -2274,7 +2130,7 @@
                   <a:srgbClr val="1E293B"/>
                 </a:solidFill>
               </a:rPr>
-              <a:t>Apple TV</a:t>
+              <a:t>Fire TV</a:t>
             </a:r>
             <a:endParaRPr lang="en-US" sz="750" dirty="0"/>
           </a:p>
@@ -2282,7 +2138,7 @@
       </p:sp>
       <p:sp>
         <p:nvSpPr>
-          <p:cNvPr id="46" name="Shape 44"/>
+          <p:cNvPr id="42" name="Shape 40"/>
           <p:cNvSpPr/>
           <p:nvPr/>
         </p:nvSpPr>
@@ -2297,19 +2153,19 @@
             </a:avLst>
           </a:prstGeom>
           <a:solidFill>
-            <a:srgbClr val="FEF3C7"/>
-          </a:solidFill>
-          <a:ln w="19050">
-            <a:solidFill>
-              <a:srgbClr val="D97706"/>
-            </a:solidFill>
-            <a:prstDash val="solid"/>
-          </a:ln>
-        </p:spPr>
-      </p:sp>
-      <p:sp>
-        <p:nvSpPr>
-          <p:cNvPr id="47" name="Text 45"/>
+            <a:srgbClr val="F3F4F6"/>
+          </a:solidFill>
+          <a:ln w="9525">
+            <a:solidFill>
+              <a:srgbClr val="D1D5DB"/>
+            </a:solidFill>
+            <a:prstDash val="solid"/>
+          </a:ln>
+        </p:spPr>
+      </p:sp>
+      <p:sp>
+        <p:nvSpPr>
+          <p:cNvPr id="43" name="Text 41"/>
           <p:cNvSpPr/>
           <p:nvPr/>
         </p:nvSpPr>
@@ -2334,7 +2190,7 @@
             <a:r>
               <a:rPr lang="en-US" sz="700" dirty="0">
                 <a:solidFill>
-                  <a:srgbClr val="78350F"/>
+                  <a:srgbClr val="374151"/>
                 </a:solidFill>
               </a:rPr>
               <a:t>Not Started</a:t>
@@ -2345,7 +2201,7 @@
       </p:sp>
       <p:sp>
         <p:nvSpPr>
-          <p:cNvPr id="48" name="Shape 46"/>
+          <p:cNvPr id="44" name="Shape 42"/>
           <p:cNvSpPr/>
           <p:nvPr/>
         </p:nvSpPr>
@@ -2360,7 +2216,7 @@
             </a:avLst>
           </a:prstGeom>
           <a:solidFill>
-            <a:srgbClr val="F1F5F9"/>
+            <a:srgbClr val="FFFFFF"/>
           </a:solidFill>
           <a:ln w="9525">
             <a:solidFill>
@@ -2372,7 +2228,7 @@
       </p:sp>
       <p:sp>
         <p:nvSpPr>
-          <p:cNvPr id="49" name="Text 47"/>
+          <p:cNvPr id="45" name="Text 43"/>
           <p:cNvSpPr/>
           <p:nvPr/>
         </p:nvSpPr>
@@ -2400,7 +2256,7 @@
                   <a:srgbClr val="1E293B"/>
                 </a:solidFill>
               </a:rPr>
-              <a:t>★ iOS App</a:t>
+              <a:t>Samsung</a:t>
             </a:r>
             <a:endParaRPr lang="en-US" sz="750" dirty="0"/>
           </a:p>
@@ -2408,7 +2264,7 @@
       </p:sp>
       <p:sp>
         <p:nvSpPr>
-          <p:cNvPr id="50" name="Shape 48"/>
+          <p:cNvPr id="46" name="Shape 44"/>
           <p:cNvSpPr/>
           <p:nvPr/>
         </p:nvSpPr>
@@ -2423,19 +2279,19 @@
             </a:avLst>
           </a:prstGeom>
           <a:solidFill>
-            <a:srgbClr val="1558A8"/>
-          </a:solidFill>
-          <a:ln w="12700">
-            <a:solidFill>
-              <a:srgbClr val="1558A8"/>
-            </a:solidFill>
-            <a:prstDash val="solid"/>
-          </a:ln>
-        </p:spPr>
-      </p:sp>
-      <p:sp>
-        <p:nvSpPr>
-          <p:cNvPr id="51" name="Text 49"/>
+            <a:srgbClr val="F3F4F6"/>
+          </a:solidFill>
+          <a:ln w="9525">
+            <a:solidFill>
+              <a:srgbClr val="D1D5DB"/>
+            </a:solidFill>
+            <a:prstDash val="solid"/>
+          </a:ln>
+        </p:spPr>
+      </p:sp>
+      <p:sp>
+        <p:nvSpPr>
+          <p:cNvPr id="47" name="Text 45"/>
           <p:cNvSpPr/>
           <p:nvPr/>
         </p:nvSpPr>
@@ -2460,10 +2316,10 @@
             <a:r>
               <a:rPr lang="en-US" sz="700" dirty="0">
                 <a:solidFill>
-                  <a:srgbClr val="FFFFFF"/>
-                </a:solidFill>
-              </a:rPr>
-              <a:t>In Progress</a:t>
+                  <a:srgbClr val="374151"/>
+                </a:solidFill>
+              </a:rPr>
+              <a:t>Not Started</a:t>
             </a:r>
             <a:endParaRPr lang="en-US" sz="700" dirty="0"/>
           </a:p>
@@ -2471,7 +2327,7 @@
       </p:sp>
       <p:sp>
         <p:nvSpPr>
-          <p:cNvPr id="52" name="Shape 50"/>
+          <p:cNvPr id="48" name="Shape 46"/>
           <p:cNvSpPr/>
           <p:nvPr/>
         </p:nvSpPr>
@@ -2486,7 +2342,7 @@
             </a:avLst>
           </a:prstGeom>
           <a:solidFill>
-            <a:srgbClr val="F1F5F9"/>
+            <a:srgbClr val="FFFFFF"/>
           </a:solidFill>
           <a:ln w="9525">
             <a:solidFill>
@@ -2498,7 +2354,7 @@
       </p:sp>
       <p:sp>
         <p:nvSpPr>
-          <p:cNvPr id="53" name="Text 51"/>
+          <p:cNvPr id="49" name="Text 47"/>
           <p:cNvSpPr/>
           <p:nvPr/>
         </p:nvSpPr>
@@ -2526,7 +2382,7 @@
                   <a:srgbClr val="1E293B"/>
                 </a:solidFill>
               </a:rPr>
-              <a:t>★ Android App</a:t>
+              <a:t>tvOS</a:t>
             </a:r>
             <a:endParaRPr lang="en-US" sz="750" dirty="0"/>
           </a:p>
@@ -2534,7 +2390,7 @@
       </p:sp>
       <p:sp>
         <p:nvSpPr>
-          <p:cNvPr id="54" name="Shape 52"/>
+          <p:cNvPr id="50" name="Shape 48"/>
           <p:cNvSpPr/>
           <p:nvPr/>
         </p:nvSpPr>
@@ -2549,19 +2405,19 @@
             </a:avLst>
           </a:prstGeom>
           <a:solidFill>
-            <a:srgbClr val="FEF3C7"/>
-          </a:solidFill>
-          <a:ln w="19050">
-            <a:solidFill>
-              <a:srgbClr val="D97706"/>
-            </a:solidFill>
-            <a:prstDash val="solid"/>
-          </a:ln>
-        </p:spPr>
-      </p:sp>
-      <p:sp>
-        <p:nvSpPr>
-          <p:cNvPr id="55" name="Text 53"/>
+            <a:srgbClr val="F3F4F6"/>
+          </a:solidFill>
+          <a:ln w="9525">
+            <a:solidFill>
+              <a:srgbClr val="D1D5DB"/>
+            </a:solidFill>
+            <a:prstDash val="solid"/>
+          </a:ln>
+        </p:spPr>
+      </p:sp>
+      <p:sp>
+        <p:nvSpPr>
+          <p:cNvPr id="51" name="Text 49"/>
           <p:cNvSpPr/>
           <p:nvPr/>
         </p:nvSpPr>
@@ -2586,7 +2442,7 @@
             <a:r>
               <a:rPr lang="en-US" sz="700" dirty="0">
                 <a:solidFill>
-                  <a:srgbClr val="78350F"/>
+                  <a:srgbClr val="374151"/>
                 </a:solidFill>
               </a:rPr>
               <a:t>Not Started</a:t>
@@ -2597,7 +2453,7 @@
       </p:sp>
       <p:sp>
         <p:nvSpPr>
-          <p:cNvPr id="56" name="Shape 54"/>
+          <p:cNvPr id="52" name="Shape 50"/>
           <p:cNvSpPr/>
           <p:nvPr/>
         </p:nvSpPr>
@@ -2622,7 +2478,7 @@
       </p:sp>
       <p:sp>
         <p:nvSpPr>
-          <p:cNvPr id="57" name="Shape 55"/>
+          <p:cNvPr id="53" name="Shape 51"/>
           <p:cNvSpPr/>
           <p:nvPr/>
         </p:nvSpPr>
@@ -2637,19 +2493,19 @@
             </a:avLst>
           </a:prstGeom>
           <a:solidFill>
-            <a:srgbClr val="C2410C"/>
+            <a:srgbClr val="9CA3AF"/>
           </a:solidFill>
           <a:ln w="12700">
             <a:solidFill>
-              <a:srgbClr val="C2410C"/>
-            </a:solidFill>
-            <a:prstDash val="solid"/>
-          </a:ln>
-        </p:spPr>
-      </p:sp>
-      <p:sp>
-        <p:nvSpPr>
-          <p:cNvPr id="58" name="Text 56"/>
+              <a:srgbClr val="9CA3AF"/>
+            </a:solidFill>
+            <a:prstDash val="solid"/>
+          </a:ln>
+        </p:spPr>
+      </p:sp>
+      <p:sp>
+        <p:nvSpPr>
+          <p:cNvPr id="54" name="Text 52"/>
           <p:cNvSpPr/>
           <p:nvPr/>
         </p:nvSpPr>
@@ -2699,7 +2555,7 @@
       </p:sp>
       <p:sp>
         <p:nvSpPr>
-          <p:cNvPr id="59" name="Text 57"/>
+          <p:cNvPr id="55" name="Text 53"/>
           <p:cNvSpPr/>
           <p:nvPr/>
         </p:nvSpPr>
@@ -2735,7 +2591,7 @@
       </p:sp>
       <p:sp>
         <p:nvSpPr>
-          <p:cNvPr id="60" name="Shape 58"/>
+          <p:cNvPr id="56" name="Shape 54"/>
           <p:cNvSpPr/>
           <p:nvPr/>
         </p:nvSpPr>
@@ -2750,7 +2606,7 @@
             </a:avLst>
           </a:prstGeom>
           <a:solidFill>
-            <a:srgbClr val="F1F5F9"/>
+            <a:srgbClr val="FFFFFF"/>
           </a:solidFill>
           <a:ln w="9525">
             <a:solidFill>
@@ -2762,7 +2618,7 @@
       </p:sp>
       <p:sp>
         <p:nvSpPr>
-          <p:cNvPr id="61" name="Text 59"/>
+          <p:cNvPr id="57" name="Text 55"/>
           <p:cNvSpPr/>
           <p:nvPr/>
         </p:nvSpPr>
@@ -2790,7 +2646,7 @@
                   <a:srgbClr val="1E293B"/>
                 </a:solidFill>
               </a:rPr>
-              <a:t>★ HLS</a:t>
+              <a:t>HLS</a:t>
             </a:r>
             <a:endParaRPr lang="en-US" sz="750" dirty="0"/>
           </a:p>
@@ -2798,7 +2654,7 @@
       </p:sp>
       <p:sp>
         <p:nvSpPr>
-          <p:cNvPr id="62" name="Shape 60"/>
+          <p:cNvPr id="58" name="Shape 56"/>
           <p:cNvSpPr/>
           <p:nvPr/>
         </p:nvSpPr>
@@ -2825,7 +2681,7 @@
       </p:sp>
       <p:sp>
         <p:nvSpPr>
-          <p:cNvPr id="63" name="Text 61"/>
+          <p:cNvPr id="59" name="Text 57"/>
           <p:cNvSpPr/>
           <p:nvPr/>
         </p:nvSpPr>
@@ -2861,7 +2717,7 @@
       </p:sp>
       <p:sp>
         <p:nvSpPr>
-          <p:cNvPr id="64" name="Shape 62"/>
+          <p:cNvPr id="60" name="Shape 58"/>
           <p:cNvSpPr/>
           <p:nvPr/>
         </p:nvSpPr>
@@ -2876,7 +2732,7 @@
             </a:avLst>
           </a:prstGeom>
           <a:solidFill>
-            <a:srgbClr val="F1F5F9"/>
+            <a:srgbClr val="FFFFFF"/>
           </a:solidFill>
           <a:ln w="9525">
             <a:solidFill>
@@ -2888,7 +2744,7 @@
       </p:sp>
       <p:sp>
         <p:nvSpPr>
-          <p:cNvPr id="65" name="Text 63"/>
+          <p:cNvPr id="61" name="Text 59"/>
           <p:cNvSpPr/>
           <p:nvPr/>
         </p:nvSpPr>
@@ -2916,7 +2772,7 @@
                   <a:srgbClr val="1E293B"/>
                 </a:solidFill>
               </a:rPr>
-              <a:t>★ MPEG-DASH</a:t>
+              <a:t>MPEG-DASH</a:t>
             </a:r>
             <a:endParaRPr lang="en-US" sz="750" dirty="0"/>
           </a:p>
@@ -2924,7 +2780,7 @@
       </p:sp>
       <p:sp>
         <p:nvSpPr>
-          <p:cNvPr id="66" name="Shape 64"/>
+          <p:cNvPr id="62" name="Shape 60"/>
           <p:cNvSpPr/>
           <p:nvPr/>
         </p:nvSpPr>
@@ -2939,19 +2795,19 @@
             </a:avLst>
           </a:prstGeom>
           <a:solidFill>
-            <a:srgbClr val="EBEDF0"/>
+            <a:srgbClr val="F3F4F6"/>
           </a:solidFill>
           <a:ln w="9525">
             <a:solidFill>
-              <a:srgbClr val="C9CDD3"/>
-            </a:solidFill>
-            <a:prstDash val="solid"/>
-          </a:ln>
-        </p:spPr>
-      </p:sp>
-      <p:sp>
-        <p:nvSpPr>
-          <p:cNvPr id="67" name="Text 65"/>
+              <a:srgbClr val="D1D5DB"/>
+            </a:solidFill>
+            <a:prstDash val="solid"/>
+          </a:ln>
+        </p:spPr>
+      </p:sp>
+      <p:sp>
+        <p:nvSpPr>
+          <p:cNvPr id="63" name="Text 61"/>
           <p:cNvSpPr/>
           <p:nvPr/>
         </p:nvSpPr>
@@ -2987,7 +2843,7 @@
       </p:sp>
       <p:sp>
         <p:nvSpPr>
-          <p:cNvPr id="68" name="Shape 66"/>
+          <p:cNvPr id="64" name="Shape 62"/>
           <p:cNvSpPr/>
           <p:nvPr/>
         </p:nvSpPr>
@@ -3002,7 +2858,7 @@
             </a:avLst>
           </a:prstGeom>
           <a:solidFill>
-            <a:srgbClr val="F1F5F9"/>
+            <a:srgbClr val="FFFFFF"/>
           </a:solidFill>
           <a:ln w="9525">
             <a:solidFill>
@@ -3014,7 +2870,7 @@
       </p:sp>
       <p:sp>
         <p:nvSpPr>
-          <p:cNvPr id="69" name="Text 67"/>
+          <p:cNvPr id="65" name="Text 63"/>
           <p:cNvSpPr/>
           <p:nvPr/>
         </p:nvSpPr>
@@ -3042,7 +2898,7 @@
                   <a:srgbClr val="1E293B"/>
                 </a:solidFill>
               </a:rPr>
-              <a:t>★ FairPlay DRM</a:t>
+              <a:t>FairPlay DRM</a:t>
             </a:r>
             <a:endParaRPr lang="en-US" sz="750" dirty="0"/>
           </a:p>
@@ -3050,7 +2906,7 @@
       </p:sp>
       <p:sp>
         <p:nvSpPr>
-          <p:cNvPr id="70" name="Shape 68"/>
+          <p:cNvPr id="66" name="Shape 64"/>
           <p:cNvSpPr/>
           <p:nvPr/>
         </p:nvSpPr>
@@ -3077,7 +2933,7 @@
       </p:sp>
       <p:sp>
         <p:nvSpPr>
-          <p:cNvPr id="71" name="Text 69"/>
+          <p:cNvPr id="67" name="Text 65"/>
           <p:cNvSpPr/>
           <p:nvPr/>
         </p:nvSpPr>
@@ -3113,7 +2969,7 @@
       </p:sp>
       <p:sp>
         <p:nvSpPr>
-          <p:cNvPr id="72" name="Shape 70"/>
+          <p:cNvPr id="68" name="Shape 66"/>
           <p:cNvSpPr/>
           <p:nvPr/>
         </p:nvSpPr>
@@ -3128,7 +2984,7 @@
             </a:avLst>
           </a:prstGeom>
           <a:solidFill>
-            <a:srgbClr val="F1F5F9"/>
+            <a:srgbClr val="FFFFFF"/>
           </a:solidFill>
           <a:ln w="9525">
             <a:solidFill>
@@ -3140,7 +2996,7 @@
       </p:sp>
       <p:sp>
         <p:nvSpPr>
-          <p:cNvPr id="73" name="Text 71"/>
+          <p:cNvPr id="69" name="Text 67"/>
           <p:cNvSpPr/>
           <p:nvPr/>
         </p:nvSpPr>
@@ -3168,7 +3024,7 @@
                   <a:srgbClr val="1E293B"/>
                 </a:solidFill>
               </a:rPr>
-              <a:t>★ Widevine DRM</a:t>
+              <a:t>Widevine DRM</a:t>
             </a:r>
             <a:endParaRPr lang="en-US" sz="750" dirty="0"/>
           </a:p>
@@ -3176,7 +3032,7 @@
       </p:sp>
       <p:sp>
         <p:nvSpPr>
-          <p:cNvPr id="74" name="Shape 72"/>
+          <p:cNvPr id="70" name="Shape 68"/>
           <p:cNvSpPr/>
           <p:nvPr/>
         </p:nvSpPr>
@@ -3191,19 +3047,19 @@
             </a:avLst>
           </a:prstGeom>
           <a:solidFill>
-            <a:srgbClr val="FEF3C7"/>
-          </a:solidFill>
-          <a:ln w="19050">
-            <a:solidFill>
-              <a:srgbClr val="D97706"/>
-            </a:solidFill>
-            <a:prstDash val="solid"/>
-          </a:ln>
-        </p:spPr>
-      </p:sp>
-      <p:sp>
-        <p:nvSpPr>
-          <p:cNvPr id="75" name="Text 73"/>
+            <a:srgbClr val="F3F4F6"/>
+          </a:solidFill>
+          <a:ln w="9525">
+            <a:solidFill>
+              <a:srgbClr val="D1D5DB"/>
+            </a:solidFill>
+            <a:prstDash val="solid"/>
+          </a:ln>
+        </p:spPr>
+      </p:sp>
+      <p:sp>
+        <p:nvSpPr>
+          <p:cNvPr id="71" name="Text 69"/>
           <p:cNvSpPr/>
           <p:nvPr/>
         </p:nvSpPr>
@@ -3228,7 +3084,7 @@
             <a:r>
               <a:rPr lang="en-US" sz="700" dirty="0">
                 <a:solidFill>
-                  <a:srgbClr val="78350F"/>
+                  <a:srgbClr val="374151"/>
                 </a:solidFill>
               </a:rPr>
               <a:t>Not Started</a:t>
@@ -3239,7 +3095,7 @@
       </p:sp>
       <p:sp>
         <p:nvSpPr>
-          <p:cNvPr id="76" name="Shape 74"/>
+          <p:cNvPr id="72" name="Shape 70"/>
           <p:cNvSpPr/>
           <p:nvPr/>
         </p:nvSpPr>
@@ -3254,7 +3110,7 @@
             </a:avLst>
           </a:prstGeom>
           <a:solidFill>
-            <a:srgbClr val="F1F5F9"/>
+            <a:srgbClr val="FFFFFF"/>
           </a:solidFill>
           <a:ln w="9525">
             <a:solidFill>
@@ -3266,7 +3122,7 @@
       </p:sp>
       <p:sp>
         <p:nvSpPr>
-          <p:cNvPr id="77" name="Text 75"/>
+          <p:cNvPr id="73" name="Text 71"/>
           <p:cNvSpPr/>
           <p:nvPr/>
         </p:nvSpPr>
@@ -3302,7 +3158,7 @@
       </p:sp>
       <p:sp>
         <p:nvSpPr>
-          <p:cNvPr id="78" name="Shape 76"/>
+          <p:cNvPr id="74" name="Shape 72"/>
           <p:cNvSpPr/>
           <p:nvPr/>
         </p:nvSpPr>
@@ -3317,19 +3173,19 @@
             </a:avLst>
           </a:prstGeom>
           <a:solidFill>
-            <a:srgbClr val="FEF3C7"/>
-          </a:solidFill>
-          <a:ln w="19050">
-            <a:solidFill>
-              <a:srgbClr val="D97706"/>
-            </a:solidFill>
-            <a:prstDash val="solid"/>
-          </a:ln>
-        </p:spPr>
-      </p:sp>
-      <p:sp>
-        <p:nvSpPr>
-          <p:cNvPr id="79" name="Text 77"/>
+            <a:srgbClr val="F3F4F6"/>
+          </a:solidFill>
+          <a:ln w="9525">
+            <a:solidFill>
+              <a:srgbClr val="D1D5DB"/>
+            </a:solidFill>
+            <a:prstDash val="solid"/>
+          </a:ln>
+        </p:spPr>
+      </p:sp>
+      <p:sp>
+        <p:nvSpPr>
+          <p:cNvPr id="75" name="Text 73"/>
           <p:cNvSpPr/>
           <p:nvPr/>
         </p:nvSpPr>
@@ -3354,7 +3210,7 @@
             <a:r>
               <a:rPr lang="en-US" sz="700" dirty="0">
                 <a:solidFill>
-                  <a:srgbClr val="78350F"/>
+                  <a:srgbClr val="374151"/>
                 </a:solidFill>
               </a:rPr>
               <a:t>Not Started</a:t>
@@ -3365,7 +3221,7 @@
       </p:sp>
       <p:sp>
         <p:nvSpPr>
-          <p:cNvPr id="80" name="Shape 78"/>
+          <p:cNvPr id="76" name="Shape 74"/>
           <p:cNvSpPr/>
           <p:nvPr/>
         </p:nvSpPr>
@@ -3380,7 +3236,7 @@
             </a:avLst>
           </a:prstGeom>
           <a:solidFill>
-            <a:srgbClr val="F1F5F9"/>
+            <a:srgbClr val="FFFFFF"/>
           </a:solidFill>
           <a:ln w="9525">
             <a:solidFill>
@@ -3392,7 +3248,7 @@
       </p:sp>
       <p:sp>
         <p:nvSpPr>
-          <p:cNvPr id="81" name="Text 79"/>
+          <p:cNvPr id="77" name="Text 75"/>
           <p:cNvSpPr/>
           <p:nvPr/>
         </p:nvSpPr>
@@ -3428,7 +3284,7 @@
       </p:sp>
       <p:sp>
         <p:nvSpPr>
-          <p:cNvPr id="82" name="Shape 80"/>
+          <p:cNvPr id="78" name="Shape 76"/>
           <p:cNvSpPr/>
           <p:nvPr/>
         </p:nvSpPr>
@@ -3443,19 +3299,19 @@
             </a:avLst>
           </a:prstGeom>
           <a:solidFill>
-            <a:srgbClr val="FEF3C7"/>
-          </a:solidFill>
-          <a:ln w="19050">
-            <a:solidFill>
-              <a:srgbClr val="D97706"/>
-            </a:solidFill>
-            <a:prstDash val="solid"/>
-          </a:ln>
-        </p:spPr>
-      </p:sp>
-      <p:sp>
-        <p:nvSpPr>
-          <p:cNvPr id="83" name="Text 81"/>
+            <a:srgbClr val="F3F4F6"/>
+          </a:solidFill>
+          <a:ln w="9525">
+            <a:solidFill>
+              <a:srgbClr val="D1D5DB"/>
+            </a:solidFill>
+            <a:prstDash val="solid"/>
+          </a:ln>
+        </p:spPr>
+      </p:sp>
+      <p:sp>
+        <p:nvSpPr>
+          <p:cNvPr id="79" name="Text 77"/>
           <p:cNvSpPr/>
           <p:nvPr/>
         </p:nvSpPr>
@@ -3480,7 +3336,7 @@
             <a:r>
               <a:rPr lang="en-US" sz="700" dirty="0">
                 <a:solidFill>
-                  <a:srgbClr val="78350F"/>
+                  <a:srgbClr val="374151"/>
                 </a:solidFill>
               </a:rPr>
               <a:t>Not Started</a:t>
@@ -3491,7 +3347,7 @@
       </p:sp>
       <p:sp>
         <p:nvSpPr>
-          <p:cNvPr id="84" name="Shape 82"/>
+          <p:cNvPr id="80" name="Shape 78"/>
           <p:cNvSpPr/>
           <p:nvPr/>
         </p:nvSpPr>
@@ -3506,7 +3362,7 @@
             </a:avLst>
           </a:prstGeom>
           <a:solidFill>
-            <a:srgbClr val="F1F5F9"/>
+            <a:srgbClr val="FFFFFF"/>
           </a:solidFill>
           <a:ln w="9525">
             <a:solidFill>
@@ -3518,7 +3374,7 @@
       </p:sp>
       <p:sp>
         <p:nvSpPr>
-          <p:cNvPr id="85" name="Text 83"/>
+          <p:cNvPr id="81" name="Text 79"/>
           <p:cNvSpPr/>
           <p:nvPr/>
         </p:nvSpPr>
@@ -3554,7 +3410,7 @@
       </p:sp>
       <p:sp>
         <p:nvSpPr>
-          <p:cNvPr id="86" name="Shape 84"/>
+          <p:cNvPr id="82" name="Shape 80"/>
           <p:cNvSpPr/>
           <p:nvPr/>
         </p:nvSpPr>
@@ -3569,19 +3425,19 @@
             </a:avLst>
           </a:prstGeom>
           <a:solidFill>
-            <a:srgbClr val="EBEDF0"/>
+            <a:srgbClr val="F3F4F6"/>
           </a:solidFill>
           <a:ln w="9525">
             <a:solidFill>
-              <a:srgbClr val="C9CDD3"/>
-            </a:solidFill>
-            <a:prstDash val="solid"/>
-          </a:ln>
-        </p:spPr>
-      </p:sp>
-      <p:sp>
-        <p:nvSpPr>
-          <p:cNvPr id="87" name="Text 85"/>
+              <a:srgbClr val="D1D5DB"/>
+            </a:solidFill>
+            <a:prstDash val="solid"/>
+          </a:ln>
+        </p:spPr>
+      </p:sp>
+      <p:sp>
+        <p:nvSpPr>
+          <p:cNvPr id="83" name="Text 81"/>
           <p:cNvSpPr/>
           <p:nvPr/>
         </p:nvSpPr>
@@ -3617,7 +3473,7 @@
       </p:sp>
       <p:sp>
         <p:nvSpPr>
-          <p:cNvPr id="88" name="Shape 86"/>
+          <p:cNvPr id="84" name="Shape 82"/>
           <p:cNvSpPr/>
           <p:nvPr/>
         </p:nvSpPr>
@@ -3642,7 +3498,7 @@
       </p:sp>
       <p:sp>
         <p:nvSpPr>
-          <p:cNvPr id="89" name="Shape 87"/>
+          <p:cNvPr id="85" name="Shape 83"/>
           <p:cNvSpPr/>
           <p:nvPr/>
         </p:nvSpPr>
@@ -3657,19 +3513,19 @@
             </a:avLst>
           </a:prstGeom>
           <a:solidFill>
-            <a:srgbClr val="0E7490"/>
+            <a:srgbClr val="9CA3AF"/>
           </a:solidFill>
           <a:ln w="12700">
             <a:solidFill>
-              <a:srgbClr val="0E7490"/>
-            </a:solidFill>
-            <a:prstDash val="solid"/>
-          </a:ln>
-        </p:spPr>
-      </p:sp>
-      <p:sp>
-        <p:nvSpPr>
-          <p:cNvPr id="90" name="Text 88"/>
+              <a:srgbClr val="9CA3AF"/>
+            </a:solidFill>
+            <a:prstDash val="solid"/>
+          </a:ln>
+        </p:spPr>
+      </p:sp>
+      <p:sp>
+        <p:nvSpPr>
+          <p:cNvPr id="86" name="Text 84"/>
           <p:cNvSpPr/>
           <p:nvPr/>
         </p:nvSpPr>
@@ -3705,7 +3561,7 @@
       </p:sp>
       <p:sp>
         <p:nvSpPr>
-          <p:cNvPr id="91" name="Text 89"/>
+          <p:cNvPr id="87" name="Text 85"/>
           <p:cNvSpPr/>
           <p:nvPr/>
         </p:nvSpPr>
@@ -3733,7 +3589,7 @@
                   <a:srgbClr val="9CA3AF"/>
                 </a:solidFill>
               </a:rPr>
-              <a:t>4 / 7 In Progress</a:t>
+              <a:t>2 / 5 In Progress</a:t>
             </a:r>
             <a:endParaRPr lang="en-US" sz="750" dirty="0"/>
           </a:p>
@@ -3741,7 +3597,7 @@
       </p:sp>
       <p:sp>
         <p:nvSpPr>
-          <p:cNvPr id="92" name="Shape 90"/>
+          <p:cNvPr id="88" name="Shape 86"/>
           <p:cNvSpPr/>
           <p:nvPr/>
         </p:nvSpPr>
@@ -3756,7 +3612,7 @@
             </a:avLst>
           </a:prstGeom>
           <a:solidFill>
-            <a:srgbClr val="F1F5F9"/>
+            <a:srgbClr val="FFFFFF"/>
           </a:solidFill>
           <a:ln w="9525">
             <a:solidFill>
@@ -3768,7 +3624,7 @@
       </p:sp>
       <p:sp>
         <p:nvSpPr>
-          <p:cNvPr id="93" name="Text 91"/>
+          <p:cNvPr id="89" name="Text 87"/>
           <p:cNvSpPr/>
           <p:nvPr/>
         </p:nvSpPr>
@@ -3804,7 +3660,7 @@
       </p:sp>
       <p:sp>
         <p:nvSpPr>
-          <p:cNvPr id="94" name="Shape 92"/>
+          <p:cNvPr id="90" name="Shape 88"/>
           <p:cNvSpPr/>
           <p:nvPr/>
         </p:nvSpPr>
@@ -3831,7 +3687,7 @@
       </p:sp>
       <p:sp>
         <p:nvSpPr>
-          <p:cNvPr id="95" name="Text 93"/>
+          <p:cNvPr id="91" name="Text 89"/>
           <p:cNvSpPr/>
           <p:nvPr/>
         </p:nvSpPr>
@@ -3867,7 +3723,7 @@
       </p:sp>
       <p:sp>
         <p:nvSpPr>
-          <p:cNvPr id="96" name="Shape 94"/>
+          <p:cNvPr id="92" name="Shape 90"/>
           <p:cNvSpPr/>
           <p:nvPr/>
         </p:nvSpPr>
@@ -3882,7 +3738,7 @@
             </a:avLst>
           </a:prstGeom>
           <a:solidFill>
-            <a:srgbClr val="F1F5F9"/>
+            <a:srgbClr val="FFFFFF"/>
           </a:solidFill>
           <a:ln w="9525">
             <a:solidFill>
@@ -3894,7 +3750,7 @@
       </p:sp>
       <p:sp>
         <p:nvSpPr>
-          <p:cNvPr id="97" name="Text 95"/>
+          <p:cNvPr id="93" name="Text 91"/>
           <p:cNvSpPr/>
           <p:nvPr/>
         </p:nvSpPr>
@@ -3922,7 +3778,7 @@
                   <a:srgbClr val="1E293B"/>
                 </a:solidFill>
               </a:rPr>
-              <a:t>★ FairPlay Sup.</a:t>
+              <a:t>iOS Player</a:t>
             </a:r>
             <a:endParaRPr lang="en-US" sz="750" dirty="0"/>
           </a:p>
@@ -3930,7 +3786,7 @@
       </p:sp>
       <p:sp>
         <p:nvSpPr>
-          <p:cNvPr id="98" name="Shape 96"/>
+          <p:cNvPr id="94" name="Shape 92"/>
           <p:cNvSpPr/>
           <p:nvPr/>
         </p:nvSpPr>
@@ -3957,7 +3813,7 @@
       </p:sp>
       <p:sp>
         <p:nvSpPr>
-          <p:cNvPr id="99" name="Text 97"/>
+          <p:cNvPr id="95" name="Text 93"/>
           <p:cNvSpPr/>
           <p:nvPr/>
         </p:nvSpPr>
@@ -3993,7 +3849,7 @@
       </p:sp>
       <p:sp>
         <p:nvSpPr>
-          <p:cNvPr id="100" name="Shape 98"/>
+          <p:cNvPr id="96" name="Shape 94"/>
           <p:cNvSpPr/>
           <p:nvPr/>
         </p:nvSpPr>
@@ -4008,7 +3864,7 @@
             </a:avLst>
           </a:prstGeom>
           <a:solidFill>
-            <a:srgbClr val="F1F5F9"/>
+            <a:srgbClr val="FFFFFF"/>
           </a:solidFill>
           <a:ln w="9525">
             <a:solidFill>
@@ -4020,7 +3876,7 @@
       </p:sp>
       <p:sp>
         <p:nvSpPr>
-          <p:cNvPr id="101" name="Text 99"/>
+          <p:cNvPr id="97" name="Text 95"/>
           <p:cNvSpPr/>
           <p:nvPr/>
         </p:nvSpPr>
@@ -4048,7 +3904,7 @@
                   <a:srgbClr val="1E293B"/>
                 </a:solidFill>
               </a:rPr>
-              <a:t>★ Widevine Sup.</a:t>
+              <a:t>Android Player</a:t>
             </a:r>
             <a:endParaRPr lang="en-US" sz="750" dirty="0"/>
           </a:p>
@@ -4056,7 +3912,7 @@
       </p:sp>
       <p:sp>
         <p:nvSpPr>
-          <p:cNvPr id="102" name="Shape 100"/>
+          <p:cNvPr id="98" name="Shape 96"/>
           <p:cNvSpPr/>
           <p:nvPr/>
         </p:nvSpPr>
@@ -4071,19 +3927,19 @@
             </a:avLst>
           </a:prstGeom>
           <a:solidFill>
-            <a:srgbClr val="1558A8"/>
-          </a:solidFill>
-          <a:ln w="12700">
-            <a:solidFill>
-              <a:srgbClr val="1558A8"/>
-            </a:solidFill>
-            <a:prstDash val="solid"/>
-          </a:ln>
-        </p:spPr>
-      </p:sp>
-      <p:sp>
-        <p:nvSpPr>
-          <p:cNvPr id="103" name="Text 101"/>
+            <a:srgbClr val="F3F4F6"/>
+          </a:solidFill>
+          <a:ln w="9525">
+            <a:solidFill>
+              <a:srgbClr val="D1D5DB"/>
+            </a:solidFill>
+            <a:prstDash val="solid"/>
+          </a:ln>
+        </p:spPr>
+      </p:sp>
+      <p:sp>
+        <p:nvSpPr>
+          <p:cNvPr id="99" name="Text 97"/>
           <p:cNvSpPr/>
           <p:nvPr/>
         </p:nvSpPr>
@@ -4108,10 +3964,10 @@
             <a:r>
               <a:rPr lang="en-US" sz="700" dirty="0">
                 <a:solidFill>
-                  <a:srgbClr val="FFFFFF"/>
-                </a:solidFill>
-              </a:rPr>
-              <a:t>In Progress</a:t>
+                  <a:srgbClr val="374151"/>
+                </a:solidFill>
+              </a:rPr>
+              <a:t>Not Started</a:t>
             </a:r>
             <a:endParaRPr lang="en-US" sz="700" dirty="0"/>
           </a:p>
@@ -4119,7 +3975,7 @@
       </p:sp>
       <p:sp>
         <p:nvSpPr>
-          <p:cNvPr id="104" name="Shape 102"/>
+          <p:cNvPr id="100" name="Shape 98"/>
           <p:cNvSpPr/>
           <p:nvPr/>
         </p:nvSpPr>
@@ -4134,7 +3990,7 @@
             </a:avLst>
           </a:prstGeom>
           <a:solidFill>
-            <a:srgbClr val="F1F5F9"/>
+            <a:srgbClr val="FFFFFF"/>
           </a:solidFill>
           <a:ln w="9525">
             <a:solidFill>
@@ -4146,7 +4002,7 @@
       </p:sp>
       <p:sp>
         <p:nvSpPr>
-          <p:cNvPr id="105" name="Text 103"/>
+          <p:cNvPr id="101" name="Text 99"/>
           <p:cNvSpPr/>
           <p:nvPr/>
         </p:nvSpPr>
@@ -4174,7 +4030,7 @@
                   <a:srgbClr val="1E293B"/>
                 </a:solidFill>
               </a:rPr>
-              <a:t>★ iOS Player</a:t>
+              <a:t>HLS/DASH PB</a:t>
             </a:r>
             <a:endParaRPr lang="en-US" sz="750" dirty="0"/>
           </a:p>
@@ -4182,7 +4038,7 @@
       </p:sp>
       <p:sp>
         <p:nvSpPr>
-          <p:cNvPr id="106" name="Shape 104"/>
+          <p:cNvPr id="102" name="Shape 100"/>
           <p:cNvSpPr/>
           <p:nvPr/>
         </p:nvSpPr>
@@ -4197,19 +4053,19 @@
             </a:avLst>
           </a:prstGeom>
           <a:solidFill>
-            <a:srgbClr val="1558A8"/>
-          </a:solidFill>
-          <a:ln w="12700">
-            <a:solidFill>
-              <a:srgbClr val="1558A8"/>
-            </a:solidFill>
-            <a:prstDash val="solid"/>
-          </a:ln>
-        </p:spPr>
-      </p:sp>
-      <p:sp>
-        <p:nvSpPr>
-          <p:cNvPr id="107" name="Text 105"/>
+            <a:srgbClr val="F3F4F6"/>
+          </a:solidFill>
+          <a:ln w="9525">
+            <a:solidFill>
+              <a:srgbClr val="D1D5DB"/>
+            </a:solidFill>
+            <a:prstDash val="solid"/>
+          </a:ln>
+        </p:spPr>
+      </p:sp>
+      <p:sp>
+        <p:nvSpPr>
+          <p:cNvPr id="103" name="Text 101"/>
           <p:cNvSpPr/>
           <p:nvPr/>
         </p:nvSpPr>
@@ -4234,10 +4090,10 @@
             <a:r>
               <a:rPr lang="en-US" sz="700" dirty="0">
                 <a:solidFill>
-                  <a:srgbClr val="FFFFFF"/>
-                </a:solidFill>
-              </a:rPr>
-              <a:t>In Progress</a:t>
+                  <a:srgbClr val="374151"/>
+                </a:solidFill>
+              </a:rPr>
+              <a:t>Not Started</a:t>
             </a:r>
             <a:endParaRPr lang="en-US" sz="700" dirty="0"/>
           </a:p>
@@ -4245,7 +4101,7 @@
       </p:sp>
       <p:sp>
         <p:nvSpPr>
-          <p:cNvPr id="108" name="Shape 106"/>
+          <p:cNvPr id="104" name="Shape 102"/>
           <p:cNvSpPr/>
           <p:nvPr/>
         </p:nvSpPr>
@@ -4260,7 +4116,7 @@
             </a:avLst>
           </a:prstGeom>
           <a:solidFill>
-            <a:srgbClr val="F1F5F9"/>
+            <a:srgbClr val="FFFFFF"/>
           </a:solidFill>
           <a:ln w="9525">
             <a:solidFill>
@@ -4272,7 +4128,7 @@
       </p:sp>
       <p:sp>
         <p:nvSpPr>
-          <p:cNvPr id="109" name="Text 107"/>
+          <p:cNvPr id="105" name="Text 103"/>
           <p:cNvSpPr/>
           <p:nvPr/>
         </p:nvSpPr>
@@ -4300,7 +4156,7 @@
                   <a:srgbClr val="1E293B"/>
                 </a:solidFill>
               </a:rPr>
-              <a:t>★ Android Player</a:t>
+              <a:t>Bitmovin QOE</a:t>
             </a:r>
             <a:endParaRPr lang="en-US" sz="750" dirty="0"/>
           </a:p>
@@ -4308,7 +4164,7 @@
       </p:sp>
       <p:sp>
         <p:nvSpPr>
-          <p:cNvPr id="110" name="Shape 108"/>
+          <p:cNvPr id="106" name="Shape 104"/>
           <p:cNvSpPr/>
           <p:nvPr/>
         </p:nvSpPr>
@@ -4323,19 +4179,19 @@
             </a:avLst>
           </a:prstGeom>
           <a:solidFill>
-            <a:srgbClr val="FEF3C7"/>
-          </a:solidFill>
-          <a:ln w="19050">
-            <a:solidFill>
-              <a:srgbClr val="D97706"/>
-            </a:solidFill>
-            <a:prstDash val="solid"/>
-          </a:ln>
-        </p:spPr>
-      </p:sp>
-      <p:sp>
-        <p:nvSpPr>
-          <p:cNvPr id="111" name="Text 109"/>
+            <a:srgbClr val="F3F4F6"/>
+          </a:solidFill>
+          <a:ln w="9525">
+            <a:solidFill>
+              <a:srgbClr val="D1D5DB"/>
+            </a:solidFill>
+            <a:prstDash val="solid"/>
+          </a:ln>
+        </p:spPr>
+      </p:sp>
+      <p:sp>
+        <p:nvSpPr>
+          <p:cNvPr id="107" name="Text 105"/>
           <p:cNvSpPr/>
           <p:nvPr/>
         </p:nvSpPr>
@@ -4360,7 +4216,7 @@
             <a:r>
               <a:rPr lang="en-US" sz="700" dirty="0">
                 <a:solidFill>
-                  <a:srgbClr val="78350F"/>
+                  <a:srgbClr val="374151"/>
                 </a:solidFill>
               </a:rPr>
               <a:t>Not Started</a:t>
@@ -4371,259 +4227,7 @@
       </p:sp>
       <p:sp>
         <p:nvSpPr>
-          <p:cNvPr id="112" name="Shape 110"/>
-          <p:cNvSpPr/>
-          <p:nvPr/>
-        </p:nvSpPr>
-        <p:spPr>
-          <a:xfrm>
-            <a:off x="6245352" y="3337560"/>
-            <a:ext cx="932688" cy="182880"/>
-          </a:xfrm>
-          <a:prstGeom prst="roundRect">
-            <a:avLst>
-              <a:gd name="adj" fmla="val 15000"/>
-            </a:avLst>
-          </a:prstGeom>
-          <a:solidFill>
-            <a:srgbClr val="F1F5F9"/>
-          </a:solidFill>
-          <a:ln w="9525">
-            <a:solidFill>
-              <a:srgbClr val="CBD5E1"/>
-            </a:solidFill>
-            <a:prstDash val="solid"/>
-          </a:ln>
-        </p:spPr>
-      </p:sp>
-      <p:sp>
-        <p:nvSpPr>
-          <p:cNvPr id="113" name="Text 111"/>
-          <p:cNvSpPr/>
-          <p:nvPr/>
-        </p:nvSpPr>
-        <p:spPr>
-          <a:xfrm>
-            <a:off x="6245352" y="3337560"/>
-            <a:ext cx="932688" cy="182880"/>
-          </a:xfrm>
-          <a:prstGeom prst="rect">
-            <a:avLst/>
-          </a:prstGeom>
-          <a:noFill/>
-          <a:ln/>
-        </p:spPr>
-        <p:txBody>
-          <a:bodyPr wrap="square" lIns="0" tIns="0" rIns="0" bIns="0" rtlCol="0" anchor="ctr"/>
-          <a:lstStyle/>
-          <a:p>
-            <a:pPr algn="ctr" indent="0" marL="0">
-              <a:buNone/>
-            </a:pPr>
-            <a:r>
-              <a:rPr lang="en-US" sz="750" b="1" dirty="0">
-                <a:solidFill>
-                  <a:srgbClr val="1E293B"/>
-                </a:solidFill>
-              </a:rPr>
-              <a:t>HLS/DASH PB</a:t>
-            </a:r>
-            <a:endParaRPr lang="en-US" sz="750" dirty="0"/>
-          </a:p>
-        </p:txBody>
-      </p:sp>
-      <p:sp>
-        <p:nvSpPr>
-          <p:cNvPr id="114" name="Shape 112"/>
-          <p:cNvSpPr/>
-          <p:nvPr/>
-        </p:nvSpPr>
-        <p:spPr>
-          <a:xfrm>
-            <a:off x="6245352" y="3547872"/>
-            <a:ext cx="932688" cy="155448"/>
-          </a:xfrm>
-          <a:prstGeom prst="roundRect">
-            <a:avLst>
-              <a:gd name="adj" fmla="val 17647"/>
-            </a:avLst>
-          </a:prstGeom>
-          <a:solidFill>
-            <a:srgbClr val="FEF3C7"/>
-          </a:solidFill>
-          <a:ln w="19050">
-            <a:solidFill>
-              <a:srgbClr val="D97706"/>
-            </a:solidFill>
-            <a:prstDash val="solid"/>
-          </a:ln>
-        </p:spPr>
-      </p:sp>
-      <p:sp>
-        <p:nvSpPr>
-          <p:cNvPr id="115" name="Text 113"/>
-          <p:cNvSpPr/>
-          <p:nvPr/>
-        </p:nvSpPr>
-        <p:spPr>
-          <a:xfrm>
-            <a:off x="6245352" y="3547872"/>
-            <a:ext cx="932688" cy="155448"/>
-          </a:xfrm>
-          <a:prstGeom prst="rect">
-            <a:avLst/>
-          </a:prstGeom>
-          <a:noFill/>
-          <a:ln/>
-        </p:spPr>
-        <p:txBody>
-          <a:bodyPr wrap="square" lIns="0" tIns="0" rIns="0" bIns="0" rtlCol="0" anchor="ctr"/>
-          <a:lstStyle/>
-          <a:p>
-            <a:pPr algn="ctr" indent="0" marL="0">
-              <a:buNone/>
-            </a:pPr>
-            <a:r>
-              <a:rPr lang="en-US" sz="700" dirty="0">
-                <a:solidFill>
-                  <a:srgbClr val="78350F"/>
-                </a:solidFill>
-              </a:rPr>
-              <a:t>Not Started</a:t>
-            </a:r>
-            <a:endParaRPr lang="en-US" sz="700" dirty="0"/>
-          </a:p>
-        </p:txBody>
-      </p:sp>
-      <p:sp>
-        <p:nvSpPr>
-          <p:cNvPr id="116" name="Shape 114"/>
-          <p:cNvSpPr/>
-          <p:nvPr/>
-        </p:nvSpPr>
-        <p:spPr>
-          <a:xfrm>
-            <a:off x="7260336" y="3337560"/>
-            <a:ext cx="932688" cy="182880"/>
-          </a:xfrm>
-          <a:prstGeom prst="roundRect">
-            <a:avLst>
-              <a:gd name="adj" fmla="val 15000"/>
-            </a:avLst>
-          </a:prstGeom>
-          <a:solidFill>
-            <a:srgbClr val="F1F5F9"/>
-          </a:solidFill>
-          <a:ln w="9525">
-            <a:solidFill>
-              <a:srgbClr val="CBD5E1"/>
-            </a:solidFill>
-            <a:prstDash val="solid"/>
-          </a:ln>
-        </p:spPr>
-      </p:sp>
-      <p:sp>
-        <p:nvSpPr>
-          <p:cNvPr id="117" name="Text 115"/>
-          <p:cNvSpPr/>
-          <p:nvPr/>
-        </p:nvSpPr>
-        <p:spPr>
-          <a:xfrm>
-            <a:off x="7260336" y="3337560"/>
-            <a:ext cx="932688" cy="182880"/>
-          </a:xfrm>
-          <a:prstGeom prst="rect">
-            <a:avLst/>
-          </a:prstGeom>
-          <a:noFill/>
-          <a:ln/>
-        </p:spPr>
-        <p:txBody>
-          <a:bodyPr wrap="square" lIns="0" tIns="0" rIns="0" bIns="0" rtlCol="0" anchor="ctr"/>
-          <a:lstStyle/>
-          <a:p>
-            <a:pPr algn="ctr" indent="0" marL="0">
-              <a:buNone/>
-            </a:pPr>
-            <a:r>
-              <a:rPr lang="en-US" sz="750" b="1" dirty="0">
-                <a:solidFill>
-                  <a:srgbClr val="1E293B"/>
-                </a:solidFill>
-              </a:rPr>
-              <a:t>Bitmovin QOE</a:t>
-            </a:r>
-            <a:endParaRPr lang="en-US" sz="750" dirty="0"/>
-          </a:p>
-        </p:txBody>
-      </p:sp>
-      <p:sp>
-        <p:nvSpPr>
-          <p:cNvPr id="118" name="Shape 116"/>
-          <p:cNvSpPr/>
-          <p:nvPr/>
-        </p:nvSpPr>
-        <p:spPr>
-          <a:xfrm>
-            <a:off x="7260336" y="3547872"/>
-            <a:ext cx="932688" cy="155448"/>
-          </a:xfrm>
-          <a:prstGeom prst="roundRect">
-            <a:avLst>
-              <a:gd name="adj" fmla="val 17647"/>
-            </a:avLst>
-          </a:prstGeom>
-          <a:solidFill>
-            <a:srgbClr val="FEF3C7"/>
-          </a:solidFill>
-          <a:ln w="19050">
-            <a:solidFill>
-              <a:srgbClr val="D97706"/>
-            </a:solidFill>
-            <a:prstDash val="solid"/>
-          </a:ln>
-        </p:spPr>
-      </p:sp>
-      <p:sp>
-        <p:nvSpPr>
-          <p:cNvPr id="119" name="Text 117"/>
-          <p:cNvSpPr/>
-          <p:nvPr/>
-        </p:nvSpPr>
-        <p:spPr>
-          <a:xfrm>
-            <a:off x="7260336" y="3547872"/>
-            <a:ext cx="932688" cy="155448"/>
-          </a:xfrm>
-          <a:prstGeom prst="rect">
-            <a:avLst/>
-          </a:prstGeom>
-          <a:noFill/>
-          <a:ln/>
-        </p:spPr>
-        <p:txBody>
-          <a:bodyPr wrap="square" lIns="0" tIns="0" rIns="0" bIns="0" rtlCol="0" anchor="ctr"/>
-          <a:lstStyle/>
-          <a:p>
-            <a:pPr algn="ctr" indent="0" marL="0">
-              <a:buNone/>
-            </a:pPr>
-            <a:r>
-              <a:rPr lang="en-US" sz="700" dirty="0">
-                <a:solidFill>
-                  <a:srgbClr val="78350F"/>
-                </a:solidFill>
-              </a:rPr>
-              <a:t>Not Started</a:t>
-            </a:r>
-            <a:endParaRPr lang="en-US" sz="700" dirty="0"/>
-          </a:p>
-        </p:txBody>
-      </p:sp>
-      <p:sp>
-        <p:nvSpPr>
-          <p:cNvPr id="120" name="Shape 118"/>
+          <p:cNvPr id="108" name="Shape 106"/>
           <p:cNvSpPr/>
           <p:nvPr/>
         </p:nvSpPr>
@@ -4648,7 +4252,7 @@
       </p:sp>
       <p:sp>
         <p:nvSpPr>
-          <p:cNvPr id="121" name="Shape 119"/>
+          <p:cNvPr id="109" name="Shape 107"/>
           <p:cNvSpPr/>
           <p:nvPr/>
         </p:nvSpPr>
@@ -4663,19 +4267,19 @@
             </a:avLst>
           </a:prstGeom>
           <a:solidFill>
-            <a:srgbClr val="15803D"/>
+            <a:srgbClr val="9CA3AF"/>
           </a:solidFill>
           <a:ln w="12700">
             <a:solidFill>
-              <a:srgbClr val="15803D"/>
-            </a:solidFill>
-            <a:prstDash val="solid"/>
-          </a:ln>
-        </p:spPr>
-      </p:sp>
-      <p:sp>
-        <p:nvSpPr>
-          <p:cNvPr id="122" name="Text 120"/>
+              <a:srgbClr val="9CA3AF"/>
+            </a:solidFill>
+            <a:prstDash val="solid"/>
+          </a:ln>
+        </p:spPr>
+      </p:sp>
+      <p:sp>
+        <p:nvSpPr>
+          <p:cNvPr id="110" name="Text 108"/>
           <p:cNvSpPr/>
           <p:nvPr/>
         </p:nvSpPr>
@@ -4711,7 +4315,7 @@
       </p:sp>
       <p:sp>
         <p:nvSpPr>
-          <p:cNvPr id="123" name="Text 121"/>
+          <p:cNvPr id="111" name="Text 109"/>
           <p:cNvSpPr/>
           <p:nvPr/>
         </p:nvSpPr>
@@ -4739,7 +4343,7 @@
                   <a:srgbClr val="9CA3AF"/>
                 </a:solidFill>
               </a:rPr>
-              <a:t>3 / 8 In Progress</a:t>
+              <a:t>3 / 9 In Progress</a:t>
             </a:r>
             <a:endParaRPr lang="en-US" sz="750" dirty="0"/>
           </a:p>
@@ -4747,7 +4351,7 @@
       </p:sp>
       <p:sp>
         <p:nvSpPr>
-          <p:cNvPr id="124" name="Shape 122"/>
+          <p:cNvPr id="112" name="Shape 110"/>
           <p:cNvSpPr/>
           <p:nvPr/>
         </p:nvSpPr>
@@ -4762,7 +4366,7 @@
             </a:avLst>
           </a:prstGeom>
           <a:solidFill>
-            <a:srgbClr val="F1F5F9"/>
+            <a:srgbClr val="FFFFFF"/>
           </a:solidFill>
           <a:ln w="9525">
             <a:solidFill>
@@ -4774,7 +4378,7 @@
       </p:sp>
       <p:sp>
         <p:nvSpPr>
-          <p:cNvPr id="125" name="Text 123"/>
+          <p:cNvPr id="113" name="Text 111"/>
           <p:cNvSpPr/>
           <p:nvPr/>
         </p:nvSpPr>
@@ -4810,7 +4414,7 @@
       </p:sp>
       <p:sp>
         <p:nvSpPr>
-          <p:cNvPr id="126" name="Shape 124"/>
+          <p:cNvPr id="114" name="Shape 112"/>
           <p:cNvSpPr/>
           <p:nvPr/>
         </p:nvSpPr>
@@ -4837,7 +4441,7 @@
       </p:sp>
       <p:sp>
         <p:nvSpPr>
-          <p:cNvPr id="127" name="Text 125"/>
+          <p:cNvPr id="115" name="Text 113"/>
           <p:cNvSpPr/>
           <p:nvPr/>
         </p:nvSpPr>
@@ -4873,7 +4477,7 @@
       </p:sp>
       <p:sp>
         <p:nvSpPr>
-          <p:cNvPr id="128" name="Shape 126"/>
+          <p:cNvPr id="116" name="Shape 114"/>
           <p:cNvSpPr/>
           <p:nvPr/>
         </p:nvSpPr>
@@ -4888,7 +4492,7 @@
             </a:avLst>
           </a:prstGeom>
           <a:solidFill>
-            <a:srgbClr val="F1F5F9"/>
+            <a:srgbClr val="FFFFFF"/>
           </a:solidFill>
           <a:ln w="9525">
             <a:solidFill>
@@ -4900,7 +4504,7 @@
       </p:sp>
       <p:sp>
         <p:nvSpPr>
-          <p:cNvPr id="129" name="Text 127"/>
+          <p:cNvPr id="117" name="Text 115"/>
           <p:cNvSpPr/>
           <p:nvPr/>
         </p:nvSpPr>
@@ -4936,7 +4540,7 @@
       </p:sp>
       <p:sp>
         <p:nvSpPr>
-          <p:cNvPr id="130" name="Shape 128"/>
+          <p:cNvPr id="118" name="Shape 116"/>
           <p:cNvSpPr/>
           <p:nvPr/>
         </p:nvSpPr>
@@ -4951,19 +4555,19 @@
             </a:avLst>
           </a:prstGeom>
           <a:solidFill>
-            <a:srgbClr val="EBEDF0"/>
+            <a:srgbClr val="F3F4F6"/>
           </a:solidFill>
           <a:ln w="9525">
             <a:solidFill>
-              <a:srgbClr val="C9CDD3"/>
-            </a:solidFill>
-            <a:prstDash val="solid"/>
-          </a:ln>
-        </p:spPr>
-      </p:sp>
-      <p:sp>
-        <p:nvSpPr>
-          <p:cNvPr id="131" name="Text 129"/>
+              <a:srgbClr val="D1D5DB"/>
+            </a:solidFill>
+            <a:prstDash val="solid"/>
+          </a:ln>
+        </p:spPr>
+      </p:sp>
+      <p:sp>
+        <p:nvSpPr>
+          <p:cNvPr id="119" name="Text 117"/>
           <p:cNvSpPr/>
           <p:nvPr/>
         </p:nvSpPr>
@@ -4999,7 +4603,7 @@
       </p:sp>
       <p:sp>
         <p:nvSpPr>
-          <p:cNvPr id="132" name="Shape 130"/>
+          <p:cNvPr id="120" name="Shape 118"/>
           <p:cNvSpPr/>
           <p:nvPr/>
         </p:nvSpPr>
@@ -5014,7 +4618,7 @@
             </a:avLst>
           </a:prstGeom>
           <a:solidFill>
-            <a:srgbClr val="F1F5F9"/>
+            <a:srgbClr val="FFFFFF"/>
           </a:solidFill>
           <a:ln w="9525">
             <a:solidFill>
@@ -5026,7 +4630,7 @@
       </p:sp>
       <p:sp>
         <p:nvSpPr>
-          <p:cNvPr id="133" name="Text 131"/>
+          <p:cNvPr id="121" name="Text 119"/>
           <p:cNvSpPr/>
           <p:nvPr/>
         </p:nvSpPr>
@@ -5062,7 +4666,7 @@
       </p:sp>
       <p:sp>
         <p:nvSpPr>
-          <p:cNvPr id="134" name="Shape 132"/>
+          <p:cNvPr id="122" name="Shape 120"/>
           <p:cNvSpPr/>
           <p:nvPr/>
         </p:nvSpPr>
@@ -5089,7 +4693,7 @@
       </p:sp>
       <p:sp>
         <p:nvSpPr>
-          <p:cNvPr id="135" name="Text 133"/>
+          <p:cNvPr id="123" name="Text 121"/>
           <p:cNvSpPr/>
           <p:nvPr/>
         </p:nvSpPr>
@@ -5125,7 +4729,7 @@
       </p:sp>
       <p:sp>
         <p:nvSpPr>
-          <p:cNvPr id="136" name="Shape 134"/>
+          <p:cNvPr id="124" name="Shape 122"/>
           <p:cNvSpPr/>
           <p:nvPr/>
         </p:nvSpPr>
@@ -5140,7 +4744,7 @@
             </a:avLst>
           </a:prstGeom>
           <a:solidFill>
-            <a:srgbClr val="F1F5F9"/>
+            <a:srgbClr val="FFFFFF"/>
           </a:solidFill>
           <a:ln w="9525">
             <a:solidFill>
@@ -5152,7 +4756,7 @@
       </p:sp>
       <p:sp>
         <p:nvSpPr>
-          <p:cNvPr id="137" name="Text 135"/>
+          <p:cNvPr id="125" name="Text 123"/>
           <p:cNvSpPr/>
           <p:nvPr/>
         </p:nvSpPr>
@@ -5180,7 +4784,7 @@
                   <a:srgbClr val="1E293B"/>
                 </a:solidFill>
               </a:rPr>
-              <a:t>Live Video</a:t>
+              <a:t>Live Events</a:t>
             </a:r>
             <a:endParaRPr lang="en-US" sz="750" dirty="0"/>
           </a:p>
@@ -5188,7 +4792,7 @@
       </p:sp>
       <p:sp>
         <p:nvSpPr>
-          <p:cNvPr id="138" name="Shape 136"/>
+          <p:cNvPr id="126" name="Shape 124"/>
           <p:cNvSpPr/>
           <p:nvPr/>
         </p:nvSpPr>
@@ -5215,7 +4819,7 @@
       </p:sp>
       <p:sp>
         <p:nvSpPr>
-          <p:cNvPr id="139" name="Text 137"/>
+          <p:cNvPr id="127" name="Text 125"/>
           <p:cNvSpPr/>
           <p:nvPr/>
         </p:nvSpPr>
@@ -5251,7 +4855,7 @@
       </p:sp>
       <p:sp>
         <p:nvSpPr>
-          <p:cNvPr id="140" name="Shape 138"/>
+          <p:cNvPr id="128" name="Shape 126"/>
           <p:cNvSpPr/>
           <p:nvPr/>
         </p:nvSpPr>
@@ -5266,7 +4870,7 @@
             </a:avLst>
           </a:prstGeom>
           <a:solidFill>
-            <a:srgbClr val="F1F5F9"/>
+            <a:srgbClr val="FFFFFF"/>
           </a:solidFill>
           <a:ln w="9525">
             <a:solidFill>
@@ -5278,7 +4882,7 @@
       </p:sp>
       <p:sp>
         <p:nvSpPr>
-          <p:cNvPr id="141" name="Text 139"/>
+          <p:cNvPr id="129" name="Text 127"/>
           <p:cNvSpPr/>
           <p:nvPr/>
         </p:nvSpPr>
@@ -5306,7 +4910,7 @@
                   <a:srgbClr val="1E293B"/>
                 </a:solidFill>
               </a:rPr>
-              <a:t>VOD Video</a:t>
+              <a:t>Back Catalog</a:t>
             </a:r>
             <a:endParaRPr lang="en-US" sz="750" dirty="0"/>
           </a:p>
@@ -5314,7 +4918,7 @@
       </p:sp>
       <p:sp>
         <p:nvSpPr>
-          <p:cNvPr id="142" name="Shape 140"/>
+          <p:cNvPr id="130" name="Shape 128"/>
           <p:cNvSpPr/>
           <p:nvPr/>
         </p:nvSpPr>
@@ -5329,19 +4933,19 @@
             </a:avLst>
           </a:prstGeom>
           <a:solidFill>
-            <a:srgbClr val="FEF3C7"/>
-          </a:solidFill>
-          <a:ln w="19050">
-            <a:solidFill>
-              <a:srgbClr val="D97706"/>
-            </a:solidFill>
-            <a:prstDash val="solid"/>
-          </a:ln>
-        </p:spPr>
-      </p:sp>
-      <p:sp>
-        <p:nvSpPr>
-          <p:cNvPr id="143" name="Text 141"/>
+            <a:srgbClr val="F3F4F6"/>
+          </a:solidFill>
+          <a:ln w="9525">
+            <a:solidFill>
+              <a:srgbClr val="D1D5DB"/>
+            </a:solidFill>
+            <a:prstDash val="solid"/>
+          </a:ln>
+        </p:spPr>
+      </p:sp>
+      <p:sp>
+        <p:nvSpPr>
+          <p:cNvPr id="131" name="Text 129"/>
           <p:cNvSpPr/>
           <p:nvPr/>
         </p:nvSpPr>
@@ -5366,7 +4970,7 @@
             <a:r>
               <a:rPr lang="en-US" sz="700" dirty="0">
                 <a:solidFill>
-                  <a:srgbClr val="78350F"/>
+                  <a:srgbClr val="374151"/>
                 </a:solidFill>
               </a:rPr>
               <a:t>Not Started</a:t>
@@ -5377,7 +4981,7 @@
       </p:sp>
       <p:sp>
         <p:nvSpPr>
-          <p:cNvPr id="144" name="Shape 142"/>
+          <p:cNvPr id="132" name="Shape 130"/>
           <p:cNvSpPr/>
           <p:nvPr/>
         </p:nvSpPr>
@@ -5392,7 +4996,7 @@
             </a:avLst>
           </a:prstGeom>
           <a:solidFill>
-            <a:srgbClr val="F1F5F9"/>
+            <a:srgbClr val="FFFFFF"/>
           </a:solidFill>
           <a:ln w="9525">
             <a:solidFill>
@@ -5404,7 +5008,7 @@
       </p:sp>
       <p:sp>
         <p:nvSpPr>
-          <p:cNvPr id="145" name="Text 143"/>
+          <p:cNvPr id="133" name="Text 131"/>
           <p:cNvSpPr/>
           <p:nvPr/>
         </p:nvSpPr>
@@ -5432,7 +5036,7 @@
                   <a:srgbClr val="1E293B"/>
                 </a:solidFill>
               </a:rPr>
-              <a:t>JABs</a:t>
+              <a:t>Full Replays</a:t>
             </a:r>
             <a:endParaRPr lang="en-US" sz="750" dirty="0"/>
           </a:p>
@@ -5440,7 +5044,7 @@
       </p:sp>
       <p:sp>
         <p:nvSpPr>
-          <p:cNvPr id="146" name="Shape 144"/>
+          <p:cNvPr id="134" name="Shape 132"/>
           <p:cNvSpPr/>
           <p:nvPr/>
         </p:nvSpPr>
@@ -5455,19 +5059,19 @@
             </a:avLst>
           </a:prstGeom>
           <a:solidFill>
-            <a:srgbClr val="FEF3C7"/>
-          </a:solidFill>
-          <a:ln w="19050">
-            <a:solidFill>
-              <a:srgbClr val="D97706"/>
-            </a:solidFill>
-            <a:prstDash val="solid"/>
-          </a:ln>
-        </p:spPr>
-      </p:sp>
-      <p:sp>
-        <p:nvSpPr>
-          <p:cNvPr id="147" name="Text 145"/>
+            <a:srgbClr val="F3F4F6"/>
+          </a:solidFill>
+          <a:ln w="9525">
+            <a:solidFill>
+              <a:srgbClr val="D1D5DB"/>
+            </a:solidFill>
+            <a:prstDash val="solid"/>
+          </a:ln>
+        </p:spPr>
+      </p:sp>
+      <p:sp>
+        <p:nvSpPr>
+          <p:cNvPr id="135" name="Text 133"/>
           <p:cNvSpPr/>
           <p:nvPr/>
         </p:nvSpPr>
@@ -5492,7 +5096,7 @@
             <a:r>
               <a:rPr lang="en-US" sz="700" dirty="0">
                 <a:solidFill>
-                  <a:srgbClr val="78350F"/>
+                  <a:srgbClr val="374151"/>
                 </a:solidFill>
               </a:rPr>
               <a:t>Not Started</a:t>
@@ -5503,7 +5107,7 @@
       </p:sp>
       <p:sp>
         <p:nvSpPr>
-          <p:cNvPr id="148" name="Shape 146"/>
+          <p:cNvPr id="136" name="Shape 134"/>
           <p:cNvSpPr/>
           <p:nvPr/>
         </p:nvSpPr>
@@ -5518,7 +5122,7 @@
             </a:avLst>
           </a:prstGeom>
           <a:solidFill>
-            <a:srgbClr val="F1F5F9"/>
+            <a:srgbClr val="FFFFFF"/>
           </a:solidFill>
           <a:ln w="9525">
             <a:solidFill>
@@ -5530,7 +5134,7 @@
       </p:sp>
       <p:sp>
         <p:nvSpPr>
-          <p:cNvPr id="149" name="Text 147"/>
+          <p:cNvPr id="137" name="Text 135"/>
           <p:cNvSpPr/>
           <p:nvPr/>
         </p:nvSpPr>
@@ -5566,7 +5170,7 @@
       </p:sp>
       <p:sp>
         <p:nvSpPr>
-          <p:cNvPr id="150" name="Shape 148"/>
+          <p:cNvPr id="138" name="Shape 136"/>
           <p:cNvSpPr/>
           <p:nvPr/>
         </p:nvSpPr>
@@ -5581,19 +5185,19 @@
             </a:avLst>
           </a:prstGeom>
           <a:solidFill>
-            <a:srgbClr val="FEF3C7"/>
-          </a:solidFill>
-          <a:ln w="19050">
-            <a:solidFill>
-              <a:srgbClr val="D97706"/>
-            </a:solidFill>
-            <a:prstDash val="solid"/>
-          </a:ln>
-        </p:spPr>
-      </p:sp>
-      <p:sp>
-        <p:nvSpPr>
-          <p:cNvPr id="151" name="Text 149"/>
+            <a:srgbClr val="F3F4F6"/>
+          </a:solidFill>
+          <a:ln w="9525">
+            <a:solidFill>
+              <a:srgbClr val="D1D5DB"/>
+            </a:solidFill>
+            <a:prstDash val="solid"/>
+          </a:ln>
+        </p:spPr>
+      </p:sp>
+      <p:sp>
+        <p:nvSpPr>
+          <p:cNvPr id="139" name="Text 137"/>
           <p:cNvSpPr/>
           <p:nvPr/>
         </p:nvSpPr>
@@ -5618,7 +5222,7 @@
             <a:r>
               <a:rPr lang="en-US" sz="700" dirty="0">
                 <a:solidFill>
-                  <a:srgbClr val="78350F"/>
+                  <a:srgbClr val="374151"/>
                 </a:solidFill>
               </a:rPr>
               <a:t>Not Started</a:t>
@@ -5629,7 +5233,7 @@
       </p:sp>
       <p:sp>
         <p:nvSpPr>
-          <p:cNvPr id="152" name="Shape 150"/>
+          <p:cNvPr id="140" name="Shape 138"/>
           <p:cNvSpPr/>
           <p:nvPr/>
         </p:nvSpPr>
@@ -5644,7 +5248,7 @@
             </a:avLst>
           </a:prstGeom>
           <a:solidFill>
-            <a:srgbClr val="F1F5F9"/>
+            <a:srgbClr val="FFFFFF"/>
           </a:solidFill>
           <a:ln w="9525">
             <a:solidFill>
@@ -5656,7 +5260,7 @@
       </p:sp>
       <p:sp>
         <p:nvSpPr>
-          <p:cNvPr id="153" name="Text 151"/>
+          <p:cNvPr id="141" name="Text 139"/>
           <p:cNvSpPr/>
           <p:nvPr/>
         </p:nvSpPr>
@@ -5692,7 +5296,7 @@
       </p:sp>
       <p:sp>
         <p:nvSpPr>
-          <p:cNvPr id="154" name="Shape 152"/>
+          <p:cNvPr id="142" name="Shape 140"/>
           <p:cNvSpPr/>
           <p:nvPr/>
         </p:nvSpPr>
@@ -5707,19 +5311,19 @@
             </a:avLst>
           </a:prstGeom>
           <a:solidFill>
-            <a:srgbClr val="FEF3C7"/>
-          </a:solidFill>
-          <a:ln w="19050">
-            <a:solidFill>
-              <a:srgbClr val="D97706"/>
-            </a:solidFill>
-            <a:prstDash val="solid"/>
-          </a:ln>
-        </p:spPr>
-      </p:sp>
-      <p:sp>
-        <p:nvSpPr>
-          <p:cNvPr id="155" name="Text 153"/>
+            <a:srgbClr val="F3F4F6"/>
+          </a:solidFill>
+          <a:ln w="9525">
+            <a:solidFill>
+              <a:srgbClr val="D1D5DB"/>
+            </a:solidFill>
+            <a:prstDash val="solid"/>
+          </a:ln>
+        </p:spPr>
+      </p:sp>
+      <p:sp>
+        <p:nvSpPr>
+          <p:cNvPr id="143" name="Text 141"/>
           <p:cNvSpPr/>
           <p:nvPr/>
         </p:nvSpPr>
@@ -5744,7 +5348,7 @@
             <a:r>
               <a:rPr lang="en-US" sz="700" dirty="0">
                 <a:solidFill>
-                  <a:srgbClr val="78350F"/>
+                  <a:srgbClr val="374151"/>
                 </a:solidFill>
               </a:rPr>
               <a:t>Not Started</a:t>
@@ -5755,7 +5359,133 @@
       </p:sp>
       <p:sp>
         <p:nvSpPr>
-          <p:cNvPr id="156" name="Shape 154"/>
+          <p:cNvPr id="144" name="Shape 142"/>
+          <p:cNvSpPr/>
+          <p:nvPr/>
+        </p:nvSpPr>
+        <p:spPr>
+          <a:xfrm>
+            <a:off x="1170432" y="4928616"/>
+            <a:ext cx="932688" cy="182880"/>
+          </a:xfrm>
+          <a:prstGeom prst="roundRect">
+            <a:avLst>
+              <a:gd name="adj" fmla="val 15000"/>
+            </a:avLst>
+          </a:prstGeom>
+          <a:solidFill>
+            <a:srgbClr val="FFFFFF"/>
+          </a:solidFill>
+          <a:ln w="9525">
+            <a:solidFill>
+              <a:srgbClr val="CBD5E1"/>
+            </a:solidFill>
+            <a:prstDash val="solid"/>
+          </a:ln>
+        </p:spPr>
+      </p:sp>
+      <p:sp>
+        <p:nvSpPr>
+          <p:cNvPr id="145" name="Text 143"/>
+          <p:cNvSpPr/>
+          <p:nvPr/>
+        </p:nvSpPr>
+        <p:spPr>
+          <a:xfrm>
+            <a:off x="1170432" y="4928616"/>
+            <a:ext cx="932688" cy="182880"/>
+          </a:xfrm>
+          <a:prstGeom prst="rect">
+            <a:avLst/>
+          </a:prstGeom>
+          <a:noFill/>
+          <a:ln/>
+        </p:spPr>
+        <p:txBody>
+          <a:bodyPr wrap="square" lIns="0" tIns="0" rIns="0" bIns="0" rtlCol="0" anchor="ctr"/>
+          <a:lstStyle/>
+          <a:p>
+            <a:pPr algn="ctr" indent="0" marL="0">
+              <a:buNone/>
+            </a:pPr>
+            <a:r>
+              <a:rPr lang="en-US" sz="750" b="1" dirty="0">
+                <a:solidFill>
+                  <a:srgbClr val="1E293B"/>
+                </a:solidFill>
+              </a:rPr>
+              <a:t>Linear</a:t>
+            </a:r>
+            <a:endParaRPr lang="en-US" sz="750" dirty="0"/>
+          </a:p>
+        </p:txBody>
+      </p:sp>
+      <p:sp>
+        <p:nvSpPr>
+          <p:cNvPr id="146" name="Shape 144"/>
+          <p:cNvSpPr/>
+          <p:nvPr/>
+        </p:nvSpPr>
+        <p:spPr>
+          <a:xfrm>
+            <a:off x="1170432" y="5138928"/>
+            <a:ext cx="932688" cy="155448"/>
+          </a:xfrm>
+          <a:prstGeom prst="roundRect">
+            <a:avLst>
+              <a:gd name="adj" fmla="val 17647"/>
+            </a:avLst>
+          </a:prstGeom>
+          <a:solidFill>
+            <a:srgbClr val="F3F4F6"/>
+          </a:solidFill>
+          <a:ln w="9525">
+            <a:solidFill>
+              <a:srgbClr val="D1D5DB"/>
+            </a:solidFill>
+            <a:prstDash val="solid"/>
+          </a:ln>
+        </p:spPr>
+      </p:sp>
+      <p:sp>
+        <p:nvSpPr>
+          <p:cNvPr id="147" name="Text 145"/>
+          <p:cNvSpPr/>
+          <p:nvPr/>
+        </p:nvSpPr>
+        <p:spPr>
+          <a:xfrm>
+            <a:off x="1170432" y="5138928"/>
+            <a:ext cx="932688" cy="155448"/>
+          </a:xfrm>
+          <a:prstGeom prst="rect">
+            <a:avLst/>
+          </a:prstGeom>
+          <a:noFill/>
+          <a:ln/>
+        </p:spPr>
+        <p:txBody>
+          <a:bodyPr wrap="square" lIns="0" tIns="0" rIns="0" bIns="0" rtlCol="0" anchor="ctr"/>
+          <a:lstStyle/>
+          <a:p>
+            <a:pPr algn="ctr" indent="0" marL="0">
+              <a:buNone/>
+            </a:pPr>
+            <a:r>
+              <a:rPr lang="en-US" sz="700" dirty="0">
+                <a:solidFill>
+                  <a:srgbClr val="374151"/>
+                </a:solidFill>
+              </a:rPr>
+              <a:t>Not Started</a:t>
+            </a:r>
+            <a:endParaRPr lang="en-US" sz="700" dirty="0"/>
+          </a:p>
+        </p:txBody>
+      </p:sp>
+      <p:sp>
+        <p:nvSpPr>
+          <p:cNvPr id="148" name="Shape 146"/>
           <p:cNvSpPr/>
           <p:nvPr/>
         </p:nvSpPr>
@@ -5780,7 +5510,7 @@
       </p:sp>
       <p:sp>
         <p:nvSpPr>
-          <p:cNvPr id="157" name="Shape 155"/>
+          <p:cNvPr id="149" name="Shape 147"/>
           <p:cNvSpPr/>
           <p:nvPr/>
         </p:nvSpPr>
@@ -5795,19 +5525,19 @@
             </a:avLst>
           </a:prstGeom>
           <a:solidFill>
-            <a:srgbClr val="B91C1C"/>
+            <a:srgbClr val="9CA3AF"/>
           </a:solidFill>
           <a:ln w="12700">
             <a:solidFill>
-              <a:srgbClr val="B91C1C"/>
-            </a:solidFill>
-            <a:prstDash val="solid"/>
-          </a:ln>
-        </p:spPr>
-      </p:sp>
-      <p:sp>
-        <p:nvSpPr>
-          <p:cNvPr id="158" name="Text 156"/>
+              <a:srgbClr val="9CA3AF"/>
+            </a:solidFill>
+            <a:prstDash val="solid"/>
+          </a:ln>
+        </p:spPr>
+      </p:sp>
+      <p:sp>
+        <p:nvSpPr>
+          <p:cNvPr id="150" name="Text 148"/>
           <p:cNvSpPr/>
           <p:nvPr/>
         </p:nvSpPr>
@@ -5843,7 +5573,7 @@
       </p:sp>
       <p:sp>
         <p:nvSpPr>
-          <p:cNvPr id="159" name="Text 157"/>
+          <p:cNvPr id="151" name="Text 149"/>
           <p:cNvSpPr/>
           <p:nvPr/>
         </p:nvSpPr>
@@ -5871,7 +5601,7 @@
                   <a:srgbClr val="9CA3AF"/>
                 </a:solidFill>
               </a:rPr>
-              <a:t>1 / 4 In Progress</a:t>
+              <a:t>1 / 5 In Progress</a:t>
             </a:r>
             <a:endParaRPr lang="en-US" sz="750" dirty="0"/>
           </a:p>
@@ -5879,7 +5609,7 @@
       </p:sp>
       <p:sp>
         <p:nvSpPr>
-          <p:cNvPr id="160" name="Shape 158"/>
+          <p:cNvPr id="152" name="Shape 150"/>
           <p:cNvSpPr/>
           <p:nvPr/>
         </p:nvSpPr>
@@ -5894,7 +5624,7 @@
             </a:avLst>
           </a:prstGeom>
           <a:solidFill>
-            <a:srgbClr val="F1F5F9"/>
+            <a:srgbClr val="FFFFFF"/>
           </a:solidFill>
           <a:ln w="9525">
             <a:solidFill>
@@ -5906,7 +5636,7 @@
       </p:sp>
       <p:sp>
         <p:nvSpPr>
-          <p:cNvPr id="161" name="Text 159"/>
+          <p:cNvPr id="153" name="Text 151"/>
           <p:cNvSpPr/>
           <p:nvPr/>
         </p:nvSpPr>
@@ -5934,7 +5664,7 @@
                   <a:srgbClr val="1E293B"/>
                 </a:solidFill>
               </a:rPr>
-              <a:t>★ Sign-in</a:t>
+              <a:t>Unentitled</a:t>
             </a:r>
             <a:endParaRPr lang="en-US" sz="750" dirty="0"/>
           </a:p>
@@ -5942,7 +5672,7 @@
       </p:sp>
       <p:sp>
         <p:nvSpPr>
-          <p:cNvPr id="162" name="Shape 160"/>
+          <p:cNvPr id="154" name="Shape 152"/>
           <p:cNvSpPr/>
           <p:nvPr/>
         </p:nvSpPr>
@@ -5957,19 +5687,19 @@
             </a:avLst>
           </a:prstGeom>
           <a:solidFill>
-            <a:srgbClr val="EBEDF0"/>
+            <a:srgbClr val="F3F4F6"/>
           </a:solidFill>
           <a:ln w="9525">
             <a:solidFill>
-              <a:srgbClr val="C9CDD3"/>
-            </a:solidFill>
-            <a:prstDash val="solid"/>
-          </a:ln>
-        </p:spPr>
-      </p:sp>
-      <p:sp>
-        <p:nvSpPr>
-          <p:cNvPr id="163" name="Text 161"/>
+              <a:srgbClr val="D1D5DB"/>
+            </a:solidFill>
+            <a:prstDash val="solid"/>
+          </a:ln>
+        </p:spPr>
+      </p:sp>
+      <p:sp>
+        <p:nvSpPr>
+          <p:cNvPr id="155" name="Text 153"/>
           <p:cNvSpPr/>
           <p:nvPr/>
         </p:nvSpPr>
@@ -6005,7 +5735,7 @@
       </p:sp>
       <p:sp>
         <p:nvSpPr>
-          <p:cNvPr id="164" name="Shape 162"/>
+          <p:cNvPr id="156" name="Shape 154"/>
           <p:cNvSpPr/>
           <p:nvPr/>
         </p:nvSpPr>
@@ -6020,7 +5750,7 @@
             </a:avLst>
           </a:prstGeom>
           <a:solidFill>
-            <a:srgbClr val="F1F5F9"/>
+            <a:srgbClr val="FFFFFF"/>
           </a:solidFill>
           <a:ln w="9525">
             <a:solidFill>
@@ -6032,7 +5762,7 @@
       </p:sp>
       <p:sp>
         <p:nvSpPr>
-          <p:cNvPr id="165" name="Text 163"/>
+          <p:cNvPr id="157" name="Text 155"/>
           <p:cNvSpPr/>
           <p:nvPr/>
         </p:nvSpPr>
@@ -6060,7 +5790,7 @@
                   <a:srgbClr val="1E293B"/>
                 </a:solidFill>
               </a:rPr>
-              <a:t>★ Subscription</a:t>
+              <a:t>Sign-in</a:t>
             </a:r>
             <a:endParaRPr lang="en-US" sz="750" dirty="0"/>
           </a:p>
@@ -6068,7 +5798,7 @@
       </p:sp>
       <p:sp>
         <p:nvSpPr>
-          <p:cNvPr id="166" name="Shape 164"/>
+          <p:cNvPr id="158" name="Shape 156"/>
           <p:cNvSpPr/>
           <p:nvPr/>
         </p:nvSpPr>
@@ -6083,19 +5813,19 @@
             </a:avLst>
           </a:prstGeom>
           <a:solidFill>
-            <a:srgbClr val="FEF3C7"/>
-          </a:solidFill>
-          <a:ln w="19050">
-            <a:solidFill>
-              <a:srgbClr val="D97706"/>
-            </a:solidFill>
-            <a:prstDash val="solid"/>
-          </a:ln>
-        </p:spPr>
-      </p:sp>
-      <p:sp>
-        <p:nvSpPr>
-          <p:cNvPr id="167" name="Text 165"/>
+            <a:srgbClr val="F3F4F6"/>
+          </a:solidFill>
+          <a:ln w="9525">
+            <a:solidFill>
+              <a:srgbClr val="D1D5DB"/>
+            </a:solidFill>
+            <a:prstDash val="solid"/>
+          </a:ln>
+        </p:spPr>
+      </p:sp>
+      <p:sp>
+        <p:nvSpPr>
+          <p:cNvPr id="159" name="Text 157"/>
           <p:cNvSpPr/>
           <p:nvPr/>
         </p:nvSpPr>
@@ -6120,7 +5850,7 @@
             <a:r>
               <a:rPr lang="en-US" sz="700" dirty="0">
                 <a:solidFill>
-                  <a:srgbClr val="78350F"/>
+                  <a:srgbClr val="374151"/>
                 </a:solidFill>
               </a:rPr>
               <a:t>Not Started</a:t>
@@ -6131,7 +5861,7 @@
       </p:sp>
       <p:sp>
         <p:nvSpPr>
-          <p:cNvPr id="168" name="Shape 166"/>
+          <p:cNvPr id="160" name="Shape 158"/>
           <p:cNvSpPr/>
           <p:nvPr/>
         </p:nvSpPr>
@@ -6146,7 +5876,7 @@
             </a:avLst>
           </a:prstGeom>
           <a:solidFill>
-            <a:srgbClr val="F1F5F9"/>
+            <a:srgbClr val="FFFFFF"/>
           </a:solidFill>
           <a:ln w="9525">
             <a:solidFill>
@@ -6158,7 +5888,7 @@
       </p:sp>
       <p:sp>
         <p:nvSpPr>
-          <p:cNvPr id="169" name="Text 167"/>
+          <p:cNvPr id="161" name="Text 159"/>
           <p:cNvSpPr/>
           <p:nvPr/>
         </p:nvSpPr>
@@ -6186,7 +5916,7 @@
                   <a:srgbClr val="1E293B"/>
                 </a:solidFill>
               </a:rPr>
-              <a:t>MVPD</a:t>
+              <a:t>Subscription</a:t>
             </a:r>
             <a:endParaRPr lang="en-US" sz="750" dirty="0"/>
           </a:p>
@@ -6194,7 +5924,7 @@
       </p:sp>
       <p:sp>
         <p:nvSpPr>
-          <p:cNvPr id="170" name="Shape 168"/>
+          <p:cNvPr id="162" name="Shape 160"/>
           <p:cNvSpPr/>
           <p:nvPr/>
         </p:nvSpPr>
@@ -6209,19 +5939,19 @@
             </a:avLst>
           </a:prstGeom>
           <a:solidFill>
-            <a:srgbClr val="1558A8"/>
-          </a:solidFill>
-          <a:ln w="12700">
-            <a:solidFill>
-              <a:srgbClr val="1558A8"/>
-            </a:solidFill>
-            <a:prstDash val="solid"/>
-          </a:ln>
-        </p:spPr>
-      </p:sp>
-      <p:sp>
-        <p:nvSpPr>
-          <p:cNvPr id="171" name="Text 169"/>
+            <a:srgbClr val="F3F4F6"/>
+          </a:solidFill>
+          <a:ln w="9525">
+            <a:solidFill>
+              <a:srgbClr val="D1D5DB"/>
+            </a:solidFill>
+            <a:prstDash val="solid"/>
+          </a:ln>
+        </p:spPr>
+      </p:sp>
+      <p:sp>
+        <p:nvSpPr>
+          <p:cNvPr id="163" name="Text 161"/>
           <p:cNvSpPr/>
           <p:nvPr/>
         </p:nvSpPr>
@@ -6246,10 +5976,10 @@
             <a:r>
               <a:rPr lang="en-US" sz="700" dirty="0">
                 <a:solidFill>
-                  <a:srgbClr val="FFFFFF"/>
-                </a:solidFill>
-              </a:rPr>
-              <a:t>In Progress</a:t>
+                  <a:srgbClr val="374151"/>
+                </a:solidFill>
+              </a:rPr>
+              <a:t>Not Started</a:t>
             </a:r>
             <a:endParaRPr lang="en-US" sz="700" dirty="0"/>
           </a:p>
@@ -6257,7 +5987,7 @@
       </p:sp>
       <p:sp>
         <p:nvSpPr>
-          <p:cNvPr id="172" name="Shape 170"/>
+          <p:cNvPr id="164" name="Shape 162"/>
           <p:cNvSpPr/>
           <p:nvPr/>
         </p:nvSpPr>
@@ -6272,7 +6002,7 @@
             </a:avLst>
           </a:prstGeom>
           <a:solidFill>
-            <a:srgbClr val="F1F5F9"/>
+            <a:srgbClr val="FFFFFF"/>
           </a:solidFill>
           <a:ln w="9525">
             <a:solidFill>
@@ -6284,7 +6014,7 @@
       </p:sp>
       <p:sp>
         <p:nvSpPr>
-          <p:cNvPr id="173" name="Text 171"/>
+          <p:cNvPr id="165" name="Text 163"/>
           <p:cNvSpPr/>
           <p:nvPr/>
         </p:nvSpPr>
@@ -6312,7 +6042,7 @@
                   <a:srgbClr val="1E293B"/>
                 </a:solidFill>
               </a:rPr>
-              <a:t>Promos</a:t>
+              <a:t>MVPD</a:t>
             </a:r>
             <a:endParaRPr lang="en-US" sz="750" dirty="0"/>
           </a:p>
@@ -6320,7 +6050,7 @@
       </p:sp>
       <p:sp>
         <p:nvSpPr>
-          <p:cNvPr id="174" name="Shape 172"/>
+          <p:cNvPr id="166" name="Shape 164"/>
           <p:cNvSpPr/>
           <p:nvPr/>
         </p:nvSpPr>
@@ -6335,19 +6065,19 @@
             </a:avLst>
           </a:prstGeom>
           <a:solidFill>
-            <a:srgbClr val="FEF3C7"/>
-          </a:solidFill>
-          <a:ln w="19050">
-            <a:solidFill>
-              <a:srgbClr val="D97706"/>
-            </a:solidFill>
-            <a:prstDash val="solid"/>
-          </a:ln>
-        </p:spPr>
-      </p:sp>
-      <p:sp>
-        <p:nvSpPr>
-          <p:cNvPr id="175" name="Text 173"/>
+            <a:srgbClr val="1558A8"/>
+          </a:solidFill>
+          <a:ln w="12700">
+            <a:solidFill>
+              <a:srgbClr val="1558A8"/>
+            </a:solidFill>
+            <a:prstDash val="solid"/>
+          </a:ln>
+        </p:spPr>
+      </p:sp>
+      <p:sp>
+        <p:nvSpPr>
+          <p:cNvPr id="167" name="Text 165"/>
           <p:cNvSpPr/>
           <p:nvPr/>
         </p:nvSpPr>
@@ -6372,7 +6102,133 @@
             <a:r>
               <a:rPr lang="en-US" sz="700" dirty="0">
                 <a:solidFill>
-                  <a:srgbClr val="78350F"/>
+                  <a:srgbClr val="FFFFFF"/>
+                </a:solidFill>
+              </a:rPr>
+              <a:t>In Progress</a:t>
+            </a:r>
+            <a:endParaRPr lang="en-US" sz="700" dirty="0"/>
+          </a:p>
+        </p:txBody>
+      </p:sp>
+      <p:sp>
+        <p:nvSpPr>
+          <p:cNvPr id="168" name="Shape 166"/>
+          <p:cNvSpPr/>
+          <p:nvPr/>
+        </p:nvSpPr>
+        <p:spPr>
+          <a:xfrm>
+            <a:off x="5230368" y="5605272"/>
+            <a:ext cx="932688" cy="182880"/>
+          </a:xfrm>
+          <a:prstGeom prst="roundRect">
+            <a:avLst>
+              <a:gd name="adj" fmla="val 15000"/>
+            </a:avLst>
+          </a:prstGeom>
+          <a:solidFill>
+            <a:srgbClr val="FFFFFF"/>
+          </a:solidFill>
+          <a:ln w="9525">
+            <a:solidFill>
+              <a:srgbClr val="CBD5E1"/>
+            </a:solidFill>
+            <a:prstDash val="solid"/>
+          </a:ln>
+        </p:spPr>
+      </p:sp>
+      <p:sp>
+        <p:nvSpPr>
+          <p:cNvPr id="169" name="Text 167"/>
+          <p:cNvSpPr/>
+          <p:nvPr/>
+        </p:nvSpPr>
+        <p:spPr>
+          <a:xfrm>
+            <a:off x="5230368" y="5605272"/>
+            <a:ext cx="932688" cy="182880"/>
+          </a:xfrm>
+          <a:prstGeom prst="rect">
+            <a:avLst/>
+          </a:prstGeom>
+          <a:noFill/>
+          <a:ln/>
+        </p:spPr>
+        <p:txBody>
+          <a:bodyPr wrap="square" lIns="0" tIns="0" rIns="0" bIns="0" rtlCol="0" anchor="ctr"/>
+          <a:lstStyle/>
+          <a:p>
+            <a:pPr algn="ctr" indent="0" marL="0">
+              <a:buNone/>
+            </a:pPr>
+            <a:r>
+              <a:rPr lang="en-US" sz="750" b="1" dirty="0">
+                <a:solidFill>
+                  <a:srgbClr val="1E293B"/>
+                </a:solidFill>
+              </a:rPr>
+              <a:t>Promos</a:t>
+            </a:r>
+            <a:endParaRPr lang="en-US" sz="750" dirty="0"/>
+          </a:p>
+        </p:txBody>
+      </p:sp>
+      <p:sp>
+        <p:nvSpPr>
+          <p:cNvPr id="170" name="Shape 168"/>
+          <p:cNvSpPr/>
+          <p:nvPr/>
+        </p:nvSpPr>
+        <p:spPr>
+          <a:xfrm>
+            <a:off x="5230368" y="5815584"/>
+            <a:ext cx="932688" cy="155448"/>
+          </a:xfrm>
+          <a:prstGeom prst="roundRect">
+            <a:avLst>
+              <a:gd name="adj" fmla="val 17647"/>
+            </a:avLst>
+          </a:prstGeom>
+          <a:solidFill>
+            <a:srgbClr val="F3F4F6"/>
+          </a:solidFill>
+          <a:ln w="9525">
+            <a:solidFill>
+              <a:srgbClr val="D1D5DB"/>
+            </a:solidFill>
+            <a:prstDash val="solid"/>
+          </a:ln>
+        </p:spPr>
+      </p:sp>
+      <p:sp>
+        <p:nvSpPr>
+          <p:cNvPr id="171" name="Text 169"/>
+          <p:cNvSpPr/>
+          <p:nvPr/>
+        </p:nvSpPr>
+        <p:spPr>
+          <a:xfrm>
+            <a:off x="5230368" y="5815584"/>
+            <a:ext cx="932688" cy="155448"/>
+          </a:xfrm>
+          <a:prstGeom prst="rect">
+            <a:avLst/>
+          </a:prstGeom>
+          <a:noFill/>
+          <a:ln/>
+        </p:spPr>
+        <p:txBody>
+          <a:bodyPr wrap="square" lIns="0" tIns="0" rIns="0" bIns="0" rtlCol="0" anchor="ctr"/>
+          <a:lstStyle/>
+          <a:p>
+            <a:pPr algn="ctr" indent="0" marL="0">
+              <a:buNone/>
+            </a:pPr>
+            <a:r>
+              <a:rPr lang="en-US" sz="700" dirty="0">
+                <a:solidFill>
+                  <a:srgbClr val="374151"/>
                 </a:solidFill>
               </a:rPr>
               <a:t>Not Started</a:t>
@@ -6383,7 +6239,7 @@
       </p:sp>
       <p:sp>
         <p:nvSpPr>
-          <p:cNvPr id="176" name="Shape 174"/>
+          <p:cNvPr id="172" name="Shape 170"/>
           <p:cNvSpPr/>
           <p:nvPr/>
         </p:nvSpPr>
@@ -6408,7 +6264,7 @@
       </p:sp>
       <p:sp>
         <p:nvSpPr>
-          <p:cNvPr id="177" name="Text 175"/>
+          <p:cNvPr id="173" name="Text 171"/>
           <p:cNvSpPr/>
           <p:nvPr/>
         </p:nvSpPr>
@@ -6444,7 +6300,7 @@
       </p:sp>
       <p:sp>
         <p:nvSpPr>
-          <p:cNvPr id="178" name="Text 176"/>
+          <p:cNvPr id="174" name="Text 172"/>
           <p:cNvSpPr/>
           <p:nvPr/>
         </p:nvSpPr>
@@ -6480,7 +6336,7 @@
       </p:sp>
       <p:sp>
         <p:nvSpPr>
-          <p:cNvPr id="179" name="Text 177"/>
+          <p:cNvPr id="175" name="Text 173"/>
           <p:cNvSpPr/>
           <p:nvPr/>
         </p:nvSpPr>
@@ -6505,10 +6361,10 @@
             <a:r>
               <a:rPr lang="en-US" sz="800" b="1" dirty="0">
                 <a:solidFill>
-                  <a:srgbClr val="7C3AED"/>
-                </a:solidFill>
-              </a:rPr>
-              <a:t>21%</a:t>
+                  <a:srgbClr val="9CA3AF"/>
+                </a:solidFill>
+              </a:rPr>
+              <a:t>0%</a:t>
             </a:r>
             <a:endParaRPr lang="en-US" sz="800" dirty="0"/>
           </a:p>
@@ -6516,7 +6372,7 @@
       </p:sp>
       <p:sp>
         <p:nvSpPr>
-          <p:cNvPr id="180" name="Shape 178"/>
+          <p:cNvPr id="176" name="Shape 174"/>
           <p:cNvSpPr/>
           <p:nvPr/>
         </p:nvSpPr>
@@ -6543,34 +6399,7 @@
       </p:sp>
       <p:sp>
         <p:nvSpPr>
-          <p:cNvPr id="181" name="Shape 179"/>
-          <p:cNvSpPr/>
-          <p:nvPr/>
-        </p:nvSpPr>
-        <p:spPr>
-          <a:xfrm>
-            <a:off x="9500616" y="1399032"/>
-            <a:ext cx="493502" cy="82296"/>
-          </a:xfrm>
-          <a:prstGeom prst="roundRect">
-            <a:avLst>
-              <a:gd name="adj" fmla="val 50000"/>
-            </a:avLst>
-          </a:prstGeom>
-          <a:solidFill>
-            <a:srgbClr val="7C3AED"/>
-          </a:solidFill>
-          <a:ln w="12700">
-            <a:solidFill>
-              <a:srgbClr val="7C3AED"/>
-            </a:solidFill>
-            <a:prstDash val="solid"/>
-          </a:ln>
-        </p:spPr>
-      </p:sp>
-      <p:sp>
-        <p:nvSpPr>
-          <p:cNvPr id="182" name="Text 180"/>
+          <p:cNvPr id="177" name="Text 175"/>
           <p:cNvSpPr/>
           <p:nvPr/>
         </p:nvSpPr>
@@ -6606,7 +6435,7 @@
       </p:sp>
       <p:sp>
         <p:nvSpPr>
-          <p:cNvPr id="183" name="Text 181"/>
+          <p:cNvPr id="178" name="Text 176"/>
           <p:cNvSpPr/>
           <p:nvPr/>
         </p:nvSpPr>
@@ -6631,10 +6460,10 @@
             <a:r>
               <a:rPr lang="en-US" sz="800" b="1" dirty="0">
                 <a:solidFill>
-                  <a:srgbClr val="C2410C"/>
-                </a:solidFill>
-              </a:rPr>
-              <a:t>14%</a:t>
+                  <a:srgbClr val="9CA3AF"/>
+                </a:solidFill>
+              </a:rPr>
+              <a:t>0%</a:t>
             </a:r>
             <a:endParaRPr lang="en-US" sz="800" dirty="0"/>
           </a:p>
@@ -6642,7 +6471,7 @@
       </p:sp>
       <p:sp>
         <p:nvSpPr>
-          <p:cNvPr id="184" name="Shape 182"/>
+          <p:cNvPr id="179" name="Shape 177"/>
           <p:cNvSpPr/>
           <p:nvPr/>
         </p:nvSpPr>
@@ -6669,34 +6498,7 @@
       </p:sp>
       <p:sp>
         <p:nvSpPr>
-          <p:cNvPr id="185" name="Shape 183"/>
-          <p:cNvSpPr/>
-          <p:nvPr/>
-        </p:nvSpPr>
-        <p:spPr>
-          <a:xfrm>
-            <a:off x="9500616" y="1755648"/>
-            <a:ext cx="329001" cy="82296"/>
-          </a:xfrm>
-          <a:prstGeom prst="roundRect">
-            <a:avLst>
-              <a:gd name="adj" fmla="val 50000"/>
-            </a:avLst>
-          </a:prstGeom>
-          <a:solidFill>
-            <a:srgbClr val="C2410C"/>
-          </a:solidFill>
-          <a:ln w="12700">
-            <a:solidFill>
-              <a:srgbClr val="C2410C"/>
-            </a:solidFill>
-            <a:prstDash val="solid"/>
-          </a:ln>
-        </p:spPr>
-      </p:sp>
-      <p:sp>
-        <p:nvSpPr>
-          <p:cNvPr id="186" name="Text 184"/>
+          <p:cNvPr id="180" name="Text 178"/>
           <p:cNvSpPr/>
           <p:nvPr/>
         </p:nvSpPr>
@@ -6732,7 +6534,7 @@
       </p:sp>
       <p:sp>
         <p:nvSpPr>
-          <p:cNvPr id="187" name="Text 185"/>
+          <p:cNvPr id="181" name="Text 179"/>
           <p:cNvSpPr/>
           <p:nvPr/>
         </p:nvSpPr>
@@ -6757,10 +6559,10 @@
             <a:r>
               <a:rPr lang="en-US" sz="800" b="1" dirty="0">
                 <a:solidFill>
-                  <a:srgbClr val="0E7490"/>
-                </a:solidFill>
-              </a:rPr>
-              <a:t>29%</a:t>
+                  <a:srgbClr val="9CA3AF"/>
+                </a:solidFill>
+              </a:rPr>
+              <a:t>0%</a:t>
             </a:r>
             <a:endParaRPr lang="en-US" sz="800" dirty="0"/>
           </a:p>
@@ -6768,7 +6570,7 @@
       </p:sp>
       <p:sp>
         <p:nvSpPr>
-          <p:cNvPr id="188" name="Shape 186"/>
+          <p:cNvPr id="182" name="Shape 180"/>
           <p:cNvSpPr/>
           <p:nvPr/>
         </p:nvSpPr>
@@ -6795,34 +6597,7 @@
       </p:sp>
       <p:sp>
         <p:nvSpPr>
-          <p:cNvPr id="189" name="Shape 187"/>
-          <p:cNvSpPr/>
-          <p:nvPr/>
-        </p:nvSpPr>
-        <p:spPr>
-          <a:xfrm>
-            <a:off x="9500616" y="2112264"/>
-            <a:ext cx="681502" cy="82296"/>
-          </a:xfrm>
-          <a:prstGeom prst="roundRect">
-            <a:avLst>
-              <a:gd name="adj" fmla="val 50000"/>
-            </a:avLst>
-          </a:prstGeom>
-          <a:solidFill>
-            <a:srgbClr val="0E7490"/>
-          </a:solidFill>
-          <a:ln w="12700">
-            <a:solidFill>
-              <a:srgbClr val="0E7490"/>
-            </a:solidFill>
-            <a:prstDash val="solid"/>
-          </a:ln>
-        </p:spPr>
-      </p:sp>
-      <p:sp>
-        <p:nvSpPr>
-          <p:cNvPr id="190" name="Text 188"/>
+          <p:cNvPr id="183" name="Text 181"/>
           <p:cNvSpPr/>
           <p:nvPr/>
         </p:nvSpPr>
@@ -6858,7 +6633,7 @@
       </p:sp>
       <p:sp>
         <p:nvSpPr>
-          <p:cNvPr id="191" name="Text 189"/>
+          <p:cNvPr id="184" name="Text 182"/>
           <p:cNvSpPr/>
           <p:nvPr/>
         </p:nvSpPr>
@@ -6883,10 +6658,10 @@
             <a:r>
               <a:rPr lang="en-US" sz="800" b="1" dirty="0">
                 <a:solidFill>
-                  <a:srgbClr val="15803D"/>
-                </a:solidFill>
-              </a:rPr>
-              <a:t>19%</a:t>
+                  <a:srgbClr val="9CA3AF"/>
+                </a:solidFill>
+              </a:rPr>
+              <a:t>0%</a:t>
             </a:r>
             <a:endParaRPr lang="en-US" sz="800" dirty="0"/>
           </a:p>
@@ -6894,7 +6669,7 @@
       </p:sp>
       <p:sp>
         <p:nvSpPr>
-          <p:cNvPr id="192" name="Shape 190"/>
+          <p:cNvPr id="185" name="Shape 183"/>
           <p:cNvSpPr/>
           <p:nvPr/>
         </p:nvSpPr>
@@ -6921,34 +6696,7 @@
       </p:sp>
       <p:sp>
         <p:nvSpPr>
-          <p:cNvPr id="193" name="Shape 191"/>
-          <p:cNvSpPr/>
-          <p:nvPr/>
-        </p:nvSpPr>
-        <p:spPr>
-          <a:xfrm>
-            <a:off x="9500616" y="2468880"/>
-            <a:ext cx="446502" cy="82296"/>
-          </a:xfrm>
-          <a:prstGeom prst="roundRect">
-            <a:avLst>
-              <a:gd name="adj" fmla="val 50000"/>
-            </a:avLst>
-          </a:prstGeom>
-          <a:solidFill>
-            <a:srgbClr val="15803D"/>
-          </a:solidFill>
-          <a:ln w="12700">
-            <a:solidFill>
-              <a:srgbClr val="15803D"/>
-            </a:solidFill>
-            <a:prstDash val="solid"/>
-          </a:ln>
-        </p:spPr>
-      </p:sp>
-      <p:sp>
-        <p:nvSpPr>
-          <p:cNvPr id="194" name="Text 192"/>
+          <p:cNvPr id="186" name="Text 184"/>
           <p:cNvSpPr/>
           <p:nvPr/>
         </p:nvSpPr>
@@ -6984,7 +6732,7 @@
       </p:sp>
       <p:sp>
         <p:nvSpPr>
-          <p:cNvPr id="195" name="Text 193"/>
+          <p:cNvPr id="187" name="Text 185"/>
           <p:cNvSpPr/>
           <p:nvPr/>
         </p:nvSpPr>
@@ -7009,10 +6757,10 @@
             <a:r>
               <a:rPr lang="en-US" sz="800" b="1" dirty="0">
                 <a:solidFill>
-                  <a:srgbClr val="B91C1C"/>
-                </a:solidFill>
-              </a:rPr>
-              <a:t>13%</a:t>
+                  <a:srgbClr val="9CA3AF"/>
+                </a:solidFill>
+              </a:rPr>
+              <a:t>0%</a:t>
             </a:r>
             <a:endParaRPr lang="en-US" sz="800" dirty="0"/>
           </a:p>
@@ -7020,7 +6768,7 @@
       </p:sp>
       <p:sp>
         <p:nvSpPr>
-          <p:cNvPr id="196" name="Shape 194"/>
+          <p:cNvPr id="188" name="Shape 186"/>
           <p:cNvSpPr/>
           <p:nvPr/>
         </p:nvSpPr>
@@ -7047,34 +6795,7 @@
       </p:sp>
       <p:sp>
         <p:nvSpPr>
-          <p:cNvPr id="197" name="Shape 195"/>
-          <p:cNvSpPr/>
-          <p:nvPr/>
-        </p:nvSpPr>
-        <p:spPr>
-          <a:xfrm>
-            <a:off x="9500616" y="2825496"/>
-            <a:ext cx="305501" cy="82296"/>
-          </a:xfrm>
-          <a:prstGeom prst="roundRect">
-            <a:avLst>
-              <a:gd name="adj" fmla="val 50000"/>
-            </a:avLst>
-          </a:prstGeom>
-          <a:solidFill>
-            <a:srgbClr val="B91C1C"/>
-          </a:solidFill>
-          <a:ln w="12700">
-            <a:solidFill>
-              <a:srgbClr val="B91C1C"/>
-            </a:solidFill>
-            <a:prstDash val="solid"/>
-          </a:ln>
-        </p:spPr>
-      </p:sp>
-      <p:sp>
-        <p:nvSpPr>
-          <p:cNvPr id="198" name="Shape 196"/>
+          <p:cNvPr id="189" name="Shape 187"/>
           <p:cNvSpPr/>
           <p:nvPr/>
         </p:nvSpPr>
@@ -7097,7 +6818,7 @@
       </p:sp>
       <p:sp>
         <p:nvSpPr>
-          <p:cNvPr id="199" name="Text 197"/>
+          <p:cNvPr id="190" name="Text 188"/>
           <p:cNvSpPr/>
           <p:nvPr/>
         </p:nvSpPr>
@@ -7122,10 +6843,10 @@
             <a:r>
               <a:rPr lang="en-US" sz="950" b="1" dirty="0">
                 <a:solidFill>
-                  <a:srgbClr val="B45309"/>
-                </a:solidFill>
-              </a:rPr>
-              <a:t>★  Critical Path — Not Started</a:t>
+                  <a:srgbClr val="111827"/>
+                </a:solidFill>
+              </a:rPr>
+              <a:t>Status Key</a:t>
             </a:r>
             <a:endParaRPr lang="en-US" sz="950" dirty="0"/>
           </a:p>
@@ -7133,39 +6854,327 @@
       </p:sp>
       <p:sp>
         <p:nvSpPr>
-          <p:cNvPr id="200" name="Text 198"/>
-          <p:cNvSpPr/>
-          <p:nvPr/>
-        </p:nvSpPr>
-        <p:spPr>
-          <a:xfrm>
-            <a:off x="9518904" y="3529584"/>
-            <a:ext cx="2441448" cy="173736"/>
-          </a:xfrm>
-          <a:prstGeom prst="rect">
-            <a:avLst/>
-          </a:prstGeom>
-          <a:noFill/>
-          <a:ln/>
-        </p:spPr>
-        <p:txBody>
-          <a:bodyPr wrap="square" lIns="0" tIns="0" rIns="0" bIns="0" rtlCol="0" anchor="ctr"/>
-          <a:lstStyle/>
-          <a:p>
-            <a:pPr indent="0" marL="0">
-              <a:buNone/>
-            </a:pPr>
-            <a:r>
-              <a:rPr lang="en-US" sz="850" b="1" dirty="0">
-                <a:solidFill>
-                  <a:srgbClr val="1E293B"/>
-                </a:solidFill>
-              </a:rPr>
-              <a:t>★  MPEG-DASH</a:t>
-            </a:r>
-            <a:endParaRPr lang="en-US" sz="850" dirty="0"/>
-          </a:p>
-        </p:txBody>
+          <p:cNvPr id="191" name="Shape 189"/>
+          <p:cNvSpPr/>
+          <p:nvPr/>
+        </p:nvSpPr>
+        <p:spPr>
+          <a:xfrm>
+            <a:off x="9500616" y="3511296"/>
+            <a:ext cx="749808" cy="173736"/>
+          </a:xfrm>
+          <a:prstGeom prst="roundRect">
+            <a:avLst>
+              <a:gd name="adj" fmla="val 15789"/>
+            </a:avLst>
+          </a:prstGeom>
+          <a:solidFill>
+            <a:srgbClr val="1558A8"/>
+          </a:solidFill>
+          <a:ln w="12700">
+            <a:solidFill>
+              <a:srgbClr val="1558A8"/>
+            </a:solidFill>
+            <a:prstDash val="solid"/>
+          </a:ln>
+        </p:spPr>
+      </p:sp>
+      <p:sp>
+        <p:nvSpPr>
+          <p:cNvPr id="192" name="Text 190"/>
+          <p:cNvSpPr/>
+          <p:nvPr/>
+        </p:nvSpPr>
+        <p:spPr>
+          <a:xfrm>
+            <a:off x="9500616" y="3511296"/>
+            <a:ext cx="749808" cy="173736"/>
+          </a:xfrm>
+          <a:prstGeom prst="rect">
+            <a:avLst/>
+          </a:prstGeom>
+          <a:noFill/>
+          <a:ln/>
+        </p:spPr>
+        <p:txBody>
+          <a:bodyPr wrap="square" lIns="0" tIns="0" rIns="0" bIns="0" rtlCol="0" anchor="ctr"/>
+          <a:lstStyle/>
+          <a:p>
+            <a:pPr algn="ctr" indent="0" marL="0">
+              <a:buNone/>
+            </a:pPr>
+            <a:r>
+              <a:rPr lang="en-US" sz="700" b="1" dirty="0">
+                <a:solidFill>
+                  <a:srgbClr val="FFFFFF"/>
+                </a:solidFill>
+              </a:rPr>
+              <a:t>In Progress</a:t>
+            </a:r>
+            <a:endParaRPr lang="en-US" sz="700" dirty="0"/>
+          </a:p>
+        </p:txBody>
+      </p:sp>
+      <p:sp>
+        <p:nvSpPr>
+          <p:cNvPr id="193" name="Text 191"/>
+          <p:cNvSpPr/>
+          <p:nvPr/>
+        </p:nvSpPr>
+        <p:spPr>
+          <a:xfrm>
+            <a:off x="10305288" y="3511296"/>
+            <a:ext cx="1636776" cy="173736"/>
+          </a:xfrm>
+          <a:prstGeom prst="rect">
+            <a:avLst/>
+          </a:prstGeom>
+          <a:noFill/>
+          <a:ln/>
+        </p:spPr>
+        <p:txBody>
+          <a:bodyPr wrap="square" lIns="0" tIns="0" rIns="0" bIns="0" rtlCol="0" anchor="ctr"/>
+          <a:lstStyle/>
+          <a:p>
+            <a:pPr algn="l" indent="0" marL="0">
+              <a:buNone/>
+            </a:pPr>
+            <a:r>
+              <a:rPr lang="en-US" sz="700" dirty="0">
+                <a:solidFill>
+                  <a:srgbClr val="6B7280"/>
+                </a:solidFill>
+              </a:rPr>
+              <a:t>Active development underway</a:t>
+            </a:r>
+            <a:endParaRPr lang="en-US" sz="700" dirty="0"/>
+          </a:p>
+        </p:txBody>
+      </p:sp>
+      <p:sp>
+        <p:nvSpPr>
+          <p:cNvPr id="194" name="Shape 192"/>
+          <p:cNvSpPr/>
+          <p:nvPr/>
+        </p:nvSpPr>
+        <p:spPr>
+          <a:xfrm>
+            <a:off x="9500616" y="3739896"/>
+            <a:ext cx="749808" cy="173736"/>
+          </a:xfrm>
+          <a:prstGeom prst="roundRect">
+            <a:avLst>
+              <a:gd name="adj" fmla="val 15789"/>
+            </a:avLst>
+          </a:prstGeom>
+          <a:solidFill>
+            <a:srgbClr val="F3F4F6"/>
+          </a:solidFill>
+          <a:ln w="9525">
+            <a:solidFill>
+              <a:srgbClr val="D1D5DB"/>
+            </a:solidFill>
+            <a:prstDash val="solid"/>
+          </a:ln>
+        </p:spPr>
+      </p:sp>
+      <p:sp>
+        <p:nvSpPr>
+          <p:cNvPr id="195" name="Text 193"/>
+          <p:cNvSpPr/>
+          <p:nvPr/>
+        </p:nvSpPr>
+        <p:spPr>
+          <a:xfrm>
+            <a:off x="9500616" y="3739896"/>
+            <a:ext cx="749808" cy="173736"/>
+          </a:xfrm>
+          <a:prstGeom prst="rect">
+            <a:avLst/>
+          </a:prstGeom>
+          <a:noFill/>
+          <a:ln/>
+        </p:spPr>
+        <p:txBody>
+          <a:bodyPr wrap="square" lIns="0" tIns="0" rIns="0" bIns="0" rtlCol="0" anchor="ctr"/>
+          <a:lstStyle/>
+          <a:p>
+            <a:pPr algn="ctr" indent="0" marL="0">
+              <a:buNone/>
+            </a:pPr>
+            <a:r>
+              <a:rPr lang="en-US" sz="700" b="1" dirty="0">
+                <a:solidFill>
+                  <a:srgbClr val="374151"/>
+                </a:solidFill>
+              </a:rPr>
+              <a:t>Not Started</a:t>
+            </a:r>
+            <a:endParaRPr lang="en-US" sz="700" dirty="0"/>
+          </a:p>
+        </p:txBody>
+      </p:sp>
+      <p:sp>
+        <p:nvSpPr>
+          <p:cNvPr id="196" name="Text 194"/>
+          <p:cNvSpPr/>
+          <p:nvPr/>
+        </p:nvSpPr>
+        <p:spPr>
+          <a:xfrm>
+            <a:off x="10305288" y="3739896"/>
+            <a:ext cx="1636776" cy="173736"/>
+          </a:xfrm>
+          <a:prstGeom prst="rect">
+            <a:avLst/>
+          </a:prstGeom>
+          <a:noFill/>
+          <a:ln/>
+        </p:spPr>
+        <p:txBody>
+          <a:bodyPr wrap="square" lIns="0" tIns="0" rIns="0" bIns="0" rtlCol="0" anchor="ctr"/>
+          <a:lstStyle/>
+          <a:p>
+            <a:pPr algn="l" indent="0" marL="0">
+              <a:buNone/>
+            </a:pPr>
+            <a:r>
+              <a:rPr lang="en-US" sz="700" dirty="0">
+                <a:solidFill>
+                  <a:srgbClr val="6B7280"/>
+                </a:solidFill>
+              </a:rPr>
+              <a:t>Work has not begun</a:t>
+            </a:r>
+            <a:endParaRPr lang="en-US" sz="700" dirty="0"/>
+          </a:p>
+        </p:txBody>
+      </p:sp>
+      <p:sp>
+        <p:nvSpPr>
+          <p:cNvPr id="197" name="Shape 195"/>
+          <p:cNvSpPr/>
+          <p:nvPr/>
+        </p:nvSpPr>
+        <p:spPr>
+          <a:xfrm>
+            <a:off x="9500616" y="3968496"/>
+            <a:ext cx="749808" cy="173736"/>
+          </a:xfrm>
+          <a:prstGeom prst="roundRect">
+            <a:avLst>
+              <a:gd name="adj" fmla="val 15789"/>
+            </a:avLst>
+          </a:prstGeom>
+          <a:solidFill>
+            <a:srgbClr val="FEE2E2"/>
+          </a:solidFill>
+          <a:ln w="19050">
+            <a:solidFill>
+              <a:srgbClr val="DC2626"/>
+            </a:solidFill>
+            <a:prstDash val="solid"/>
+          </a:ln>
+        </p:spPr>
+      </p:sp>
+      <p:sp>
+        <p:nvSpPr>
+          <p:cNvPr id="198" name="Text 196"/>
+          <p:cNvSpPr/>
+          <p:nvPr/>
+        </p:nvSpPr>
+        <p:spPr>
+          <a:xfrm>
+            <a:off x="9500616" y="3968496"/>
+            <a:ext cx="749808" cy="173736"/>
+          </a:xfrm>
+          <a:prstGeom prst="rect">
+            <a:avLst/>
+          </a:prstGeom>
+          <a:noFill/>
+          <a:ln/>
+        </p:spPr>
+        <p:txBody>
+          <a:bodyPr wrap="square" lIns="0" tIns="0" rIns="0" bIns="0" rtlCol="0" anchor="ctr"/>
+          <a:lstStyle/>
+          <a:p>
+            <a:pPr algn="ctr" indent="0" marL="0">
+              <a:buNone/>
+            </a:pPr>
+            <a:r>
+              <a:rPr lang="en-US" sz="700" b="1" dirty="0">
+                <a:solidFill>
+                  <a:srgbClr val="7F1D1D"/>
+                </a:solidFill>
+              </a:rPr>
+              <a:t>Blocked</a:t>
+            </a:r>
+            <a:endParaRPr lang="en-US" sz="700" dirty="0"/>
+          </a:p>
+        </p:txBody>
+      </p:sp>
+      <p:sp>
+        <p:nvSpPr>
+          <p:cNvPr id="199" name="Text 197"/>
+          <p:cNvSpPr/>
+          <p:nvPr/>
+        </p:nvSpPr>
+        <p:spPr>
+          <a:xfrm>
+            <a:off x="10305288" y="3968496"/>
+            <a:ext cx="1636776" cy="173736"/>
+          </a:xfrm>
+          <a:prstGeom prst="rect">
+            <a:avLst/>
+          </a:prstGeom>
+          <a:noFill/>
+          <a:ln/>
+        </p:spPr>
+        <p:txBody>
+          <a:bodyPr wrap="square" lIns="0" tIns="0" rIns="0" bIns="0" rtlCol="0" anchor="ctr"/>
+          <a:lstStyle/>
+          <a:p>
+            <a:pPr algn="l" indent="0" marL="0">
+              <a:buNone/>
+            </a:pPr>
+            <a:r>
+              <a:rPr lang="en-US" sz="700" dirty="0">
+                <a:solidFill>
+                  <a:srgbClr val="6B7280"/>
+                </a:solidFill>
+              </a:rPr>
+              <a:t>Blocked by dependency</a:t>
+            </a:r>
+            <a:endParaRPr lang="en-US" sz="700" dirty="0"/>
+          </a:p>
+        </p:txBody>
+      </p:sp>
+      <p:sp>
+        <p:nvSpPr>
+          <p:cNvPr id="200" name="Shape 198"/>
+          <p:cNvSpPr/>
+          <p:nvPr/>
+        </p:nvSpPr>
+        <p:spPr>
+          <a:xfrm>
+            <a:off x="9500616" y="4197096"/>
+            <a:ext cx="749808" cy="173736"/>
+          </a:xfrm>
+          <a:prstGeom prst="roundRect">
+            <a:avLst>
+              <a:gd name="adj" fmla="val 15789"/>
+            </a:avLst>
+          </a:prstGeom>
+          <a:solidFill>
+            <a:srgbClr val="DCFCE7"/>
+          </a:solidFill>
+          <a:ln w="12700">
+            <a:solidFill>
+              <a:srgbClr val="15803D"/>
+            </a:solidFill>
+            <a:prstDash val="solid"/>
+          </a:ln>
+        </p:spPr>
       </p:sp>
       <p:sp>
         <p:nvSpPr>
@@ -7175,319 +7184,166 @@
         </p:nvSpPr>
         <p:spPr>
           <a:xfrm>
-            <a:off x="9610344" y="3712464"/>
-            <a:ext cx="2350008" cy="146304"/>
-          </a:xfrm>
-          <a:prstGeom prst="rect">
-            <a:avLst/>
-          </a:prstGeom>
-          <a:noFill/>
-          <a:ln/>
-        </p:spPr>
-        <p:txBody>
-          <a:bodyPr wrap="square" lIns="0" tIns="0" rIns="0" bIns="0" rtlCol="0" anchor="ctr"/>
-          <a:lstStyle/>
-          <a:p>
-            <a:pPr indent="0" marL="0">
-              <a:buNone/>
-            </a:pPr>
-            <a:r>
-              <a:rPr lang="en-US" sz="750" dirty="0">
+            <a:off x="9500616" y="4197096"/>
+            <a:ext cx="749808" cy="173736"/>
+          </a:xfrm>
+          <a:prstGeom prst="rect">
+            <a:avLst/>
+          </a:prstGeom>
+          <a:noFill/>
+          <a:ln/>
+        </p:spPr>
+        <p:txBody>
+          <a:bodyPr wrap="square" lIns="0" tIns="0" rIns="0" bIns="0" rtlCol="0" anchor="ctr"/>
+          <a:lstStyle/>
+          <a:p>
+            <a:pPr algn="ctr" indent="0" marL="0">
+              <a:buNone/>
+            </a:pPr>
+            <a:r>
+              <a:rPr lang="en-US" sz="700" b="1" dirty="0">
+                <a:solidFill>
+                  <a:srgbClr val="14532D"/>
+                </a:solidFill>
+              </a:rPr>
+              <a:t>Done</a:t>
+            </a:r>
+            <a:endParaRPr lang="en-US" sz="700" dirty="0"/>
+          </a:p>
+        </p:txBody>
+      </p:sp>
+      <p:sp>
+        <p:nvSpPr>
+          <p:cNvPr id="202" name="Text 200"/>
+          <p:cNvSpPr/>
+          <p:nvPr/>
+        </p:nvSpPr>
+        <p:spPr>
+          <a:xfrm>
+            <a:off x="10305288" y="4197096"/>
+            <a:ext cx="1636776" cy="173736"/>
+          </a:xfrm>
+          <a:prstGeom prst="rect">
+            <a:avLst/>
+          </a:prstGeom>
+          <a:noFill/>
+          <a:ln/>
+        </p:spPr>
+        <p:txBody>
+          <a:bodyPr wrap="square" lIns="0" tIns="0" rIns="0" bIns="0" rtlCol="0" anchor="ctr"/>
+          <a:lstStyle/>
+          <a:p>
+            <a:pPr algn="l" indent="0" marL="0">
+              <a:buNone/>
+            </a:pPr>
+            <a:r>
+              <a:rPr lang="en-US" sz="700" dirty="0">
                 <a:solidFill>
                   <a:srgbClr val="6B7280"/>
                 </a:solidFill>
               </a:rPr>
-              <a:t>Blocks 8+ downstream</a:t>
-            </a:r>
-            <a:endParaRPr lang="en-US" sz="750" dirty="0"/>
-          </a:p>
-        </p:txBody>
-      </p:sp>
-      <p:sp>
-        <p:nvSpPr>
-          <p:cNvPr id="202" name="Text 200"/>
-          <p:cNvSpPr/>
-          <p:nvPr/>
-        </p:nvSpPr>
-        <p:spPr>
-          <a:xfrm>
-            <a:off x="9518904" y="3886200"/>
-            <a:ext cx="2441448" cy="173736"/>
-          </a:xfrm>
-          <a:prstGeom prst="rect">
-            <a:avLst/>
-          </a:prstGeom>
-          <a:noFill/>
-          <a:ln/>
-        </p:spPr>
-        <p:txBody>
-          <a:bodyPr wrap="square" lIns="0" tIns="0" rIns="0" bIns="0" rtlCol="0" anchor="ctr"/>
-          <a:lstStyle/>
-          <a:p>
-            <a:pPr indent="0" marL="0">
-              <a:buNone/>
-            </a:pPr>
-            <a:r>
-              <a:rPr lang="en-US" sz="850" b="1" dirty="0">
-                <a:solidFill>
-                  <a:srgbClr val="1E293B"/>
-                </a:solidFill>
-              </a:rPr>
-              <a:t>★  Sign-in</a:t>
-            </a:r>
-            <a:endParaRPr lang="en-US" sz="850" dirty="0"/>
-          </a:p>
-        </p:txBody>
-      </p:sp>
-      <p:sp>
-        <p:nvSpPr>
-          <p:cNvPr id="203" name="Text 201"/>
-          <p:cNvSpPr/>
-          <p:nvPr/>
-        </p:nvSpPr>
-        <p:spPr>
-          <a:xfrm>
-            <a:off x="9610344" y="4069080"/>
-            <a:ext cx="2350008" cy="146304"/>
-          </a:xfrm>
-          <a:prstGeom prst="rect">
-            <a:avLst/>
-          </a:prstGeom>
-          <a:noFill/>
-          <a:ln/>
-        </p:spPr>
-        <p:txBody>
-          <a:bodyPr wrap="square" lIns="0" tIns="0" rIns="0" bIns="0" rtlCol="0" anchor="ctr"/>
-          <a:lstStyle/>
-          <a:p>
-            <a:pPr indent="0" marL="0">
-              <a:buNone/>
-            </a:pPr>
-            <a:r>
-              <a:rPr lang="en-US" sz="750" dirty="0">
+              <a:t>Complete ✓</a:t>
+            </a:r>
+            <a:endParaRPr lang="en-US" sz="700" dirty="0"/>
+          </a:p>
+        </p:txBody>
+      </p:sp>
+      <p:sp>
+        <p:nvSpPr>
+          <p:cNvPr id="203" name="Shape 201"/>
+          <p:cNvSpPr/>
+          <p:nvPr/>
+        </p:nvSpPr>
+        <p:spPr>
+          <a:xfrm>
+            <a:off x="9500616" y="4425696"/>
+            <a:ext cx="749808" cy="173736"/>
+          </a:xfrm>
+          <a:prstGeom prst="roundRect">
+            <a:avLst>
+              <a:gd name="adj" fmla="val 15789"/>
+            </a:avLst>
+          </a:prstGeom>
+          <a:solidFill>
+            <a:srgbClr val="FEF3C7"/>
+          </a:solidFill>
+          <a:ln w="19050">
+            <a:solidFill>
+              <a:srgbClr val="D97706"/>
+            </a:solidFill>
+            <a:prstDash val="solid"/>
+          </a:ln>
+        </p:spPr>
+      </p:sp>
+      <p:sp>
+        <p:nvSpPr>
+          <p:cNvPr id="204" name="Text 202"/>
+          <p:cNvSpPr/>
+          <p:nvPr/>
+        </p:nvSpPr>
+        <p:spPr>
+          <a:xfrm>
+            <a:off x="9500616" y="4425696"/>
+            <a:ext cx="749808" cy="173736"/>
+          </a:xfrm>
+          <a:prstGeom prst="rect">
+            <a:avLst/>
+          </a:prstGeom>
+          <a:noFill/>
+          <a:ln/>
+        </p:spPr>
+        <p:txBody>
+          <a:bodyPr wrap="square" lIns="0" tIns="0" rIns="0" bIns="0" rtlCol="0" anchor="ctr"/>
+          <a:lstStyle/>
+          <a:p>
+            <a:pPr algn="ctr" indent="0" marL="0">
+              <a:buNone/>
+            </a:pPr>
+            <a:r>
+              <a:rPr lang="en-US" sz="700" b="1" dirty="0">
+                <a:solidFill>
+                  <a:srgbClr val="78350F"/>
+                </a:solidFill>
+              </a:rPr>
+              <a:t>At Risk</a:t>
+            </a:r>
+            <a:endParaRPr lang="en-US" sz="700" dirty="0"/>
+          </a:p>
+        </p:txBody>
+      </p:sp>
+      <p:sp>
+        <p:nvSpPr>
+          <p:cNvPr id="205" name="Text 203"/>
+          <p:cNvSpPr/>
+          <p:nvPr/>
+        </p:nvSpPr>
+        <p:spPr>
+          <a:xfrm>
+            <a:off x="10305288" y="4425696"/>
+            <a:ext cx="1636776" cy="173736"/>
+          </a:xfrm>
+          <a:prstGeom prst="rect">
+            <a:avLst/>
+          </a:prstGeom>
+          <a:noFill/>
+          <a:ln/>
+        </p:spPr>
+        <p:txBody>
+          <a:bodyPr wrap="square" lIns="0" tIns="0" rIns="0" bIns="0" rtlCol="0" anchor="ctr"/>
+          <a:lstStyle/>
+          <a:p>
+            <a:pPr algn="l" indent="0" marL="0">
+              <a:buNone/>
+            </a:pPr>
+            <a:r>
+              <a:rPr lang="en-US" sz="700" dirty="0">
                 <a:solidFill>
                   <a:srgbClr val="6B7280"/>
                 </a:solidFill>
               </a:rPr>
-              <a:t>Blocks auth on all surfaces</a:t>
-            </a:r>
-            <a:endParaRPr lang="en-US" sz="750" dirty="0"/>
-          </a:p>
-        </p:txBody>
-      </p:sp>
-      <p:sp>
-        <p:nvSpPr>
-          <p:cNvPr id="204" name="Text 202"/>
-          <p:cNvSpPr/>
-          <p:nvPr/>
-        </p:nvSpPr>
-        <p:spPr>
-          <a:xfrm>
-            <a:off x="9518904" y="4242816"/>
-            <a:ext cx="2441448" cy="173736"/>
-          </a:xfrm>
-          <a:prstGeom prst="rect">
-            <a:avLst/>
-          </a:prstGeom>
-          <a:noFill/>
-          <a:ln/>
-        </p:spPr>
-        <p:txBody>
-          <a:bodyPr wrap="square" lIns="0" tIns="0" rIns="0" bIns="0" rtlCol="0" anchor="ctr"/>
-          <a:lstStyle/>
-          <a:p>
-            <a:pPr indent="0" marL="0">
-              <a:buNone/>
-            </a:pPr>
-            <a:r>
-              <a:rPr lang="en-US" sz="850" b="1" dirty="0">
-                <a:solidFill>
-                  <a:srgbClr val="1E293B"/>
-                </a:solidFill>
-              </a:rPr>
-              <a:t>★  Widevine DRM</a:t>
-            </a:r>
-            <a:endParaRPr lang="en-US" sz="850" dirty="0"/>
-          </a:p>
-        </p:txBody>
-      </p:sp>
-      <p:sp>
-        <p:nvSpPr>
-          <p:cNvPr id="205" name="Text 203"/>
-          <p:cNvSpPr/>
-          <p:nvPr/>
-        </p:nvSpPr>
-        <p:spPr>
-          <a:xfrm>
-            <a:off x="9610344" y="4425696"/>
-            <a:ext cx="2350008" cy="146304"/>
-          </a:xfrm>
-          <a:prstGeom prst="rect">
-            <a:avLst/>
-          </a:prstGeom>
-          <a:noFill/>
-          <a:ln/>
-        </p:spPr>
-        <p:txBody>
-          <a:bodyPr wrap="square" lIns="0" tIns="0" rIns="0" bIns="0" rtlCol="0" anchor="ctr"/>
-          <a:lstStyle/>
-          <a:p>
-            <a:pPr indent="0" marL="0">
-              <a:buNone/>
-            </a:pPr>
-            <a:r>
-              <a:rPr lang="en-US" sz="750" dirty="0">
-                <a:solidFill>
-                  <a:srgbClr val="6B7280"/>
-                </a:solidFill>
-              </a:rPr>
-              <a:t>Blocked by MPEG-DASH</a:t>
-            </a:r>
-            <a:endParaRPr lang="en-US" sz="750" dirty="0"/>
-          </a:p>
-        </p:txBody>
-      </p:sp>
-      <p:sp>
-        <p:nvSpPr>
-          <p:cNvPr id="206" name="Text 204"/>
-          <p:cNvSpPr/>
-          <p:nvPr/>
-        </p:nvSpPr>
-        <p:spPr>
-          <a:xfrm>
-            <a:off x="9518904" y="4599432"/>
-            <a:ext cx="2441448" cy="173736"/>
-          </a:xfrm>
-          <a:prstGeom prst="rect">
-            <a:avLst/>
-          </a:prstGeom>
-          <a:noFill/>
-          <a:ln/>
-        </p:spPr>
-        <p:txBody>
-          <a:bodyPr wrap="square" lIns="0" tIns="0" rIns="0" bIns="0" rtlCol="0" anchor="ctr"/>
-          <a:lstStyle/>
-          <a:p>
-            <a:pPr indent="0" marL="0">
-              <a:buNone/>
-            </a:pPr>
-            <a:r>
-              <a:rPr lang="en-US" sz="850" b="1" dirty="0">
-                <a:solidFill>
-                  <a:srgbClr val="1E293B"/>
-                </a:solidFill>
-              </a:rPr>
-              <a:t>★  Android Player</a:t>
-            </a:r>
-            <a:endParaRPr lang="en-US" sz="850" dirty="0"/>
-          </a:p>
-        </p:txBody>
-      </p:sp>
-      <p:sp>
-        <p:nvSpPr>
-          <p:cNvPr id="207" name="Text 205"/>
-          <p:cNvSpPr/>
-          <p:nvPr/>
-        </p:nvSpPr>
-        <p:spPr>
-          <a:xfrm>
-            <a:off x="9610344" y="4782312"/>
-            <a:ext cx="2350008" cy="146304"/>
-          </a:xfrm>
-          <a:prstGeom prst="rect">
-            <a:avLst/>
-          </a:prstGeom>
-          <a:noFill/>
-          <a:ln/>
-        </p:spPr>
-        <p:txBody>
-          <a:bodyPr wrap="square" lIns="0" tIns="0" rIns="0" bIns="0" rtlCol="0" anchor="ctr"/>
-          <a:lstStyle/>
-          <a:p>
-            <a:pPr indent="0" marL="0">
-              <a:buNone/>
-            </a:pPr>
-            <a:r>
-              <a:rPr lang="en-US" sz="750" dirty="0">
-                <a:solidFill>
-                  <a:srgbClr val="6B7280"/>
-                </a:solidFill>
-              </a:rPr>
-              <a:t>Blocked by MPEG-DASH</a:t>
-            </a:r>
-            <a:endParaRPr lang="en-US" sz="750" dirty="0"/>
-          </a:p>
-        </p:txBody>
-      </p:sp>
-      <p:sp>
-        <p:nvSpPr>
-          <p:cNvPr id="208" name="Text 206"/>
-          <p:cNvSpPr/>
-          <p:nvPr/>
-        </p:nvSpPr>
-        <p:spPr>
-          <a:xfrm>
-            <a:off x="9518904" y="4956048"/>
-            <a:ext cx="2441448" cy="173736"/>
-          </a:xfrm>
-          <a:prstGeom prst="rect">
-            <a:avLst/>
-          </a:prstGeom>
-          <a:noFill/>
-          <a:ln/>
-        </p:spPr>
-        <p:txBody>
-          <a:bodyPr wrap="square" lIns="0" tIns="0" rIns="0" bIns="0" rtlCol="0" anchor="ctr"/>
-          <a:lstStyle/>
-          <a:p>
-            <a:pPr indent="0" marL="0">
-              <a:buNone/>
-            </a:pPr>
-            <a:r>
-              <a:rPr lang="en-US" sz="850" b="1" dirty="0">
-                <a:solidFill>
-                  <a:srgbClr val="1E293B"/>
-                </a:solidFill>
-              </a:rPr>
-              <a:t>★  Android App</a:t>
-            </a:r>
-            <a:endParaRPr lang="en-US" sz="850" dirty="0"/>
-          </a:p>
-        </p:txBody>
-      </p:sp>
-      <p:sp>
-        <p:nvSpPr>
-          <p:cNvPr id="209" name="Text 207"/>
-          <p:cNvSpPr/>
-          <p:nvPr/>
-        </p:nvSpPr>
-        <p:spPr>
-          <a:xfrm>
-            <a:off x="9610344" y="5138928"/>
-            <a:ext cx="2350008" cy="146304"/>
-          </a:xfrm>
-          <a:prstGeom prst="rect">
-            <a:avLst/>
-          </a:prstGeom>
-          <a:noFill/>
-          <a:ln/>
-        </p:spPr>
-        <p:txBody>
-          <a:bodyPr wrap="square" lIns="0" tIns="0" rIns="0" bIns="0" rtlCol="0" anchor="ctr"/>
-          <a:lstStyle/>
-          <a:p>
-            <a:pPr indent="0" marL="0">
-              <a:buNone/>
-            </a:pPr>
-            <a:r>
-              <a:rPr lang="en-US" sz="750" dirty="0">
-                <a:solidFill>
-                  <a:srgbClr val="6B7280"/>
-                </a:solidFill>
-              </a:rPr>
-              <a:t>3 unmet dependencies</a:t>
-            </a:r>
-            <a:endParaRPr lang="en-US" sz="750" dirty="0"/>
+              <a:t>NS with unmet dependencies</a:t>
+            </a:r>
+            <a:endParaRPr lang="en-US" sz="700" dirty="0"/>
           </a:p>
         </p:txBody>
       </p:sp>

--- a/SABR_CPR_Component_Status.pptx
+++ b/SABR_CPR_Component_Status.pptx
@@ -966,7 +966,7 @@
                   <a:srgbClr val="A7D7C5"/>
                 </a:solidFill>
               </a:rPr>
-              <a:t>CPR  ·  Jul 2, 2026</a:t>
+              <a:t>CPR  ·  Jul 6, 2026</a:t>
             </a:r>
             <a:endParaRPr lang="en-US" sz="1100" dirty="0"/>
           </a:p>
@@ -1117,7 +1117,7 @@
                   <a:srgbClr val="1D4ED8"/>
                 </a:solidFill>
               </a:rPr>
-              <a:t>11  In Progress</a:t>
+              <a:t>10  In Progress</a:t>
             </a:r>
             <a:endParaRPr lang="en-US" sz="900" dirty="0"/>
           </a:p>
@@ -1180,7 +1180,7 @@
                   <a:srgbClr val="374151"/>
                 </a:solidFill>
               </a:rPr>
-              <a:t>22  Not Started</a:t>
+              <a:t>23  Not Started</a:t>
             </a:r>
             <a:endParaRPr lang="en-US" sz="900" dirty="0"/>
           </a:p>
@@ -1306,7 +1306,7 @@
                   <a:srgbClr val="374151"/>
                 </a:solidFill>
               </a:rPr>
-              <a:t>Dec 1, 2026  ·  151 days to launch</a:t>
+              <a:t>Dec 1, 2026  ·  147 days to launch</a:t>
             </a:r>
             <a:endParaRPr lang="en-US" sz="900" dirty="0"/>
           </a:p>
@@ -1403,7 +1403,7 @@
                   <a:srgbClr val="9CA3AF"/>
                 </a:solidFill>
               </a:rPr>
-              <a:t>Launch: Dec 1, 2026  ·  151 days remaining</a:t>
+              <a:t>Launch: Dec 1, 2026  ·  147 days remaining</a:t>
             </a:r>
             <a:endParaRPr lang="en-US" sz="800" dirty="0"/>
           </a:p>
@@ -4343,7 +4343,7 @@
                   <a:srgbClr val="9CA3AF"/>
                 </a:solidFill>
               </a:rPr>
-              <a:t>3 / 9 In Progress</a:t>
+              <a:t>2 / 9 In Progress</a:t>
             </a:r>
             <a:endParaRPr lang="en-US" sz="750" dirty="0"/>
           </a:p>
@@ -4681,11 +4681,11 @@
             </a:avLst>
           </a:prstGeom>
           <a:solidFill>
-            <a:srgbClr val="1558A8"/>
-          </a:solidFill>
-          <a:ln w="12700">
-            <a:solidFill>
-              <a:srgbClr val="1558A8"/>
+            <a:srgbClr val="F3F4F6"/>
+          </a:solidFill>
+          <a:ln w="9525">
+            <a:solidFill>
+              <a:srgbClr val="D1D5DB"/>
             </a:solidFill>
             <a:prstDash val="solid"/>
           </a:ln>
@@ -4718,10 +4718,10 @@
             <a:r>
               <a:rPr lang="en-US" sz="700" dirty="0">
                 <a:solidFill>
-                  <a:srgbClr val="FFFFFF"/>
-                </a:solidFill>
-              </a:rPr>
-              <a:t>In Progress</a:t>
+                  <a:srgbClr val="374151"/>
+                </a:solidFill>
+              </a:rPr>
+              <a:t>Not Started</a:t>
             </a:r>
             <a:endParaRPr lang="en-US" sz="700" dirty="0"/>
           </a:p>
@@ -6869,11 +6869,11 @@
             </a:avLst>
           </a:prstGeom>
           <a:solidFill>
-            <a:srgbClr val="1558A8"/>
-          </a:solidFill>
-          <a:ln w="12700">
-            <a:solidFill>
-              <a:srgbClr val="1558A8"/>
+            <a:srgbClr val="F3F4F6"/>
+          </a:solidFill>
+          <a:ln w="9525">
+            <a:solidFill>
+              <a:srgbClr val="D1D5DB"/>
             </a:solidFill>
             <a:prstDash val="solid"/>
           </a:ln>
@@ -6906,10 +6906,10 @@
             <a:r>
               <a:rPr lang="en-US" sz="700" b="1" dirty="0">
                 <a:solidFill>
-                  <a:srgbClr val="FFFFFF"/>
-                </a:solidFill>
-              </a:rPr>
-              <a:t>In Progress</a:t>
+                  <a:srgbClr val="374151"/>
+                </a:solidFill>
+              </a:rPr>
+              <a:t>Not Started</a:t>
             </a:r>
             <a:endParaRPr lang="en-US" sz="700" dirty="0"/>
           </a:p>
@@ -6945,7 +6945,7 @@
                   <a:srgbClr val="6B7280"/>
                 </a:solidFill>
               </a:rPr>
-              <a:t>Active development underway</a:t>
+              <a:t>Work has not begun</a:t>
             </a:r>
             <a:endParaRPr lang="en-US" sz="700" dirty="0"/>
           </a:p>
@@ -6968,11 +6968,11 @@
             </a:avLst>
           </a:prstGeom>
           <a:solidFill>
-            <a:srgbClr val="F3F4F6"/>
-          </a:solidFill>
-          <a:ln w="9525">
-            <a:solidFill>
-              <a:srgbClr val="D1D5DB"/>
+            <a:srgbClr val="1558A8"/>
+          </a:solidFill>
+          <a:ln w="12700">
+            <a:solidFill>
+              <a:srgbClr val="1558A8"/>
             </a:solidFill>
             <a:prstDash val="solid"/>
           </a:ln>
@@ -7005,10 +7005,10 @@
             <a:r>
               <a:rPr lang="en-US" sz="700" b="1" dirty="0">
                 <a:solidFill>
-                  <a:srgbClr val="374151"/>
-                </a:solidFill>
-              </a:rPr>
-              <a:t>Not Started</a:t>
+                  <a:srgbClr val="FFFFFF"/>
+                </a:solidFill>
+              </a:rPr>
+              <a:t>In Progress</a:t>
             </a:r>
             <a:endParaRPr lang="en-US" sz="700" dirty="0"/>
           </a:p>
@@ -7044,7 +7044,7 @@
                   <a:srgbClr val="6B7280"/>
                 </a:solidFill>
               </a:rPr>
-              <a:t>Work has not begun</a:t>
+              <a:t>Active development underway</a:t>
             </a:r>
             <a:endParaRPr lang="en-US" sz="700" dirty="0"/>
           </a:p>

--- a/SABR_CPR_Component_Status.pptx
+++ b/SABR_CPR_Component_Status.pptx
@@ -1117,7 +1117,7 @@
                   <a:srgbClr val="1D4ED8"/>
                 </a:solidFill>
               </a:rPr>
-              <a:t>10  In Progress</a:t>
+              <a:t>13  In Progress</a:t>
             </a:r>
             <a:endParaRPr lang="en-US" sz="900" dirty="0"/>
           </a:p>
@@ -1180,7 +1180,7 @@
                   <a:srgbClr val="374151"/>
                 </a:solidFill>
               </a:rPr>
-              <a:t>23  Not Started</a:t>
+              <a:t>20  Not Started</a:t>
             </a:r>
             <a:endParaRPr lang="en-US" sz="900" dirty="0"/>
           </a:p>
@@ -2583,7 +2583,7 @@
                   <a:srgbClr val="9CA3AF"/>
                 </a:solidFill>
               </a:rPr>
-              <a:t>2 / 7 In Progress</a:t>
+              <a:t>5 / 7 In Progress</a:t>
             </a:r>
             <a:endParaRPr lang="en-US" sz="750" dirty="0"/>
           </a:p>
@@ -2795,11 +2795,11 @@
             </a:avLst>
           </a:prstGeom>
           <a:solidFill>
-            <a:srgbClr val="F3F4F6"/>
-          </a:solidFill>
-          <a:ln w="9525">
-            <a:solidFill>
-              <a:srgbClr val="D1D5DB"/>
+            <a:srgbClr val="1558A8"/>
+          </a:solidFill>
+          <a:ln w="12700">
+            <a:solidFill>
+              <a:srgbClr val="1558A8"/>
             </a:solidFill>
             <a:prstDash val="solid"/>
           </a:ln>
@@ -2832,10 +2832,10 @@
             <a:r>
               <a:rPr lang="en-US" sz="700" dirty="0">
                 <a:solidFill>
-                  <a:srgbClr val="374151"/>
-                </a:solidFill>
-              </a:rPr>
-              <a:t>Not Started</a:t>
+                  <a:srgbClr val="FFFFFF"/>
+                </a:solidFill>
+              </a:rPr>
+              <a:t>In Progress</a:t>
             </a:r>
             <a:endParaRPr lang="en-US" sz="700" dirty="0"/>
           </a:p>
@@ -3047,11 +3047,11 @@
             </a:avLst>
           </a:prstGeom>
           <a:solidFill>
-            <a:srgbClr val="F3F4F6"/>
-          </a:solidFill>
-          <a:ln w="9525">
-            <a:solidFill>
-              <a:srgbClr val="D1D5DB"/>
+            <a:srgbClr val="1558A8"/>
+          </a:solidFill>
+          <a:ln w="12700">
+            <a:solidFill>
+              <a:srgbClr val="1558A8"/>
             </a:solidFill>
             <a:prstDash val="solid"/>
           </a:ln>
@@ -3084,10 +3084,10 @@
             <a:r>
               <a:rPr lang="en-US" sz="700" dirty="0">
                 <a:solidFill>
-                  <a:srgbClr val="374151"/>
-                </a:solidFill>
-              </a:rPr>
-              <a:t>Not Started</a:t>
+                  <a:srgbClr val="FFFFFF"/>
+                </a:solidFill>
+              </a:rPr>
+              <a:t>In Progress</a:t>
             </a:r>
             <a:endParaRPr lang="en-US" sz="700" dirty="0"/>
           </a:p>
@@ -3299,11 +3299,11 @@
             </a:avLst>
           </a:prstGeom>
           <a:solidFill>
-            <a:srgbClr val="F3F4F6"/>
-          </a:solidFill>
-          <a:ln w="9525">
-            <a:solidFill>
-              <a:srgbClr val="D1D5DB"/>
+            <a:srgbClr val="1558A8"/>
+          </a:solidFill>
+          <a:ln w="12700">
+            <a:solidFill>
+              <a:srgbClr val="1558A8"/>
             </a:solidFill>
             <a:prstDash val="solid"/>
           </a:ln>
@@ -3336,10 +3336,10 @@
             <a:r>
               <a:rPr lang="en-US" sz="700" dirty="0">
                 <a:solidFill>
-                  <a:srgbClr val="374151"/>
-                </a:solidFill>
-              </a:rPr>
-              <a:t>Not Started</a:t>
+                  <a:srgbClr val="FFFFFF"/>
+                </a:solidFill>
+              </a:rPr>
+              <a:t>In Progress</a:t>
             </a:r>
             <a:endParaRPr lang="en-US" sz="700" dirty="0"/>
           </a:p>

--- a/SABR_CPR_Component_Status.pptx
+++ b/SABR_CPR_Component_Status.pptx
@@ -4,15 +4,20 @@
   <p:sldMasterIdLst>
     <p:sldMasterId id="2147483648" r:id="rId1"/>
   </p:sldMasterIdLst>
+  <p:notesMasterIdLst>
+    <p:notesMasterId r:id="rId5"/>
+  </p:notesMasterIdLst>
   <p:sldIdLst>
     <p:sldId id="256" r:id="rId2"/>
+    <p:sldId id="257" r:id="rId3"/>
+    <p:sldId id="258" r:id="rId10"/>
   </p:sldIdLst>
-  <p:notesMasterIdLst>
-    <p:notesMasterId r:id="rId3"/>
-  </p:notesMasterIdLst>
-  <p:sldSz cx="12192000" cy="6858000"/>
-  <p:notesSz cx="6858000" cy="12192000"/>
+  <p:sldSz cx="12344400" cy="7315200"/>
+  <p:notesSz cx="6858000" cy="9144000"/>
   <p:defaultTextStyle>
+    <a:defPPr>
+      <a:defRPr lang="en-US"/>
+    </a:defPPr>
     <a:lvl1pPr marL="0" algn="l" defTabSz="914400" rtl="0" eaLnBrk="1" latinLnBrk="0" hangingPunct="1">
       <a:defRPr sz="1800" kern="1200">
         <a:solidFill>
@@ -104,6 +109,11 @@
       </a:defRPr>
     </a:lvl9pPr>
   </p:defaultTextStyle>
+  <p:extLst>
+    <p:ext uri="{EFAFB233-063F-42B5-8137-9DF3F51BA10A}">
+      <p15:sldGuideLst xmlns:p15="http://schemas.microsoft.com/office/powerpoint/2012/main"/>
+    </p:ext>
+  </p:extLst>
 </p:presentation>
 </file>
 
@@ -187,9 +197,9 @@
             </a:lvl1pPr>
           </a:lstStyle>
           <a:p>
-            <a:fld id="{5282F153-3F37-0F45-9E97-73ACFA13230C}" type="datetimeFigureOut">
-              <a:rPr lang="en-US"/>
-              <a:t>7/23/19</a:t>
+            <a:fld id="{D7F6586C-20BB-0145-BBB0-5205A2D85F37}" type="datetimeFigureOut">
+              <a:rPr lang="en-US" smtClean="0"/>
+              <a:t>7/6/26</a:t>
             </a:fld>
             <a:endParaRPr lang="en-US"/>
           </a:p>
@@ -345,8 +355,8 @@
             </a:lvl1pPr>
           </a:lstStyle>
           <a:p>
-            <a:fld id="{CE5E9CC1-C706-0F49-92D6-E571CC5EEA8F}" type="slidenum">
-              <a:rPr lang="en-US"/>
+            <a:fld id="{C5273F65-57BB-3342-98F4-D52BB15090D3}" type="slidenum">
+              <a:rPr lang="en-US" smtClean="0"/>
               <a:t>‹#›</a:t>
             </a:fld>
             <a:endParaRPr lang="en-US"/>
@@ -356,7 +366,7 @@
     </p:spTree>
     <p:extLst>
       <p:ext uri="{BB962C8B-B14F-4D97-AF65-F5344CB8AC3E}">
-        <p14:creationId xmlns:p14="http://schemas.microsoft.com/office/powerpoint/2010/main" val="1024086991"/>
+        <p14:creationId xmlns:p14="http://schemas.microsoft.com/office/powerpoint/2010/main" val="818598142"/>
       </p:ext>
     </p:extLst>
   </p:cSld>
@@ -483,7 +493,12 @@
             <p:ph type="sldImg"/>
           </p:nvPr>
         </p:nvSpPr>
-        <p:spPr/>
+        <p:spPr>
+          <a:xfrm>
+            <a:off x="825500" y="1143000"/>
+            <a:ext cx="5207000" cy="3086100"/>
+          </a:xfrm>
+        </p:spPr>
       </p:sp>
       <p:sp>
         <p:nvSpPr>
@@ -500,10 +515,6 @@
           <a:bodyPr/>
           <a:lstStyle/>
           <a:p>
-            <a:r>
-              <a:rPr lang="en-US" dirty="0"/>
-              <a:t/>
-            </a:r>
             <a:endParaRPr lang="en-US" dirty="0"/>
           </a:p>
         </p:txBody>
@@ -526,6 +537,184 @@
             <a:fld id="{F7021451-1387-4CA6-816F-3879F97B5CBC}" type="slidenum">
               <a:rPr lang="en-US"/>
               <a:t>1</a:t>
+            </a:fld>
+            <a:endParaRPr lang="en-US"/>
+          </a:p>
+        </p:txBody>
+      </p:sp>
+    </p:spTree>
+    <p:extLst>
+      <p:ext uri="{BB962C8B-B14F-4D97-AF65-F5344CB8AC3E}">
+        <p14:creationId xmlns:p14="http://schemas.microsoft.com/office/powerpoint/2010/main" val="1024086991"/>
+      </p:ext>
+    </p:extLst>
+  </p:cSld>
+  <p:clrMapOvr>
+    <a:masterClrMapping/>
+  </p:clrMapOvr>
+</p:notes>
+</file>
+
+<file path=ppt/notesSlides/notesSlide2.xml><?xml version="1.0" encoding="utf-8"?>
+<p:notes xmlns:a="http://schemas.openxmlformats.org/drawingml/2006/main" xmlns:r="http://schemas.openxmlformats.org/officeDocument/2006/relationships" xmlns:p="http://schemas.openxmlformats.org/presentationml/2006/main">
+  <p:cSld>
+    <p:spTree>
+      <p:nvGrpSpPr>
+        <p:cNvPr id="1" name=""/>
+        <p:cNvGrpSpPr/>
+        <p:nvPr/>
+      </p:nvGrpSpPr>
+      <p:grpSpPr>
+        <a:xfrm>
+          <a:off x="0" y="0"/>
+          <a:ext cx="0" cy="0"/>
+          <a:chOff x="0" y="0"/>
+          <a:chExt cx="0" cy="0"/>
+        </a:xfrm>
+      </p:grpSpPr>
+      <p:sp>
+        <p:nvSpPr>
+          <p:cNvPr id="2" name="Slide Image Placeholder 1"/>
+          <p:cNvSpPr>
+            <a:spLocks noGrp="1" noRot="1" noChangeAspect="1"/>
+          </p:cNvSpPr>
+          <p:nvPr>
+            <p:ph type="sldImg"/>
+          </p:nvPr>
+        </p:nvSpPr>
+        <p:spPr>
+          <a:xfrm>
+            <a:off x="825500" y="1143000"/>
+            <a:ext cx="5207000" cy="3086100"/>
+          </a:xfrm>
+        </p:spPr>
+      </p:sp>
+      <p:sp>
+        <p:nvSpPr>
+          <p:cNvPr id="3" name="Notes Placeholder 2"/>
+          <p:cNvSpPr>
+            <a:spLocks noGrp="1"/>
+          </p:cNvSpPr>
+          <p:nvPr>
+            <p:ph type="body" idx="1"/>
+          </p:nvPr>
+        </p:nvSpPr>
+        <p:spPr/>
+        <p:txBody>
+          <a:bodyPr/>
+          <a:lstStyle/>
+          <a:p>
+            <a:endParaRPr lang="en-US" dirty="0"/>
+          </a:p>
+        </p:txBody>
+      </p:sp>
+      <p:sp>
+        <p:nvSpPr>
+          <p:cNvPr id="4" name="Slide Number Placeholder 3"/>
+          <p:cNvSpPr>
+            <a:spLocks noGrp="1"/>
+          </p:cNvSpPr>
+          <p:nvPr>
+            <p:ph type="sldNum" sz="quarter" idx="10"/>
+          </p:nvPr>
+        </p:nvSpPr>
+        <p:spPr/>
+        <p:txBody>
+          <a:bodyPr/>
+          <a:lstStyle/>
+          <a:p>
+            <a:fld id="{F7021451-1387-4CA6-816F-3879F97B5CBC}" type="slidenum">
+              <a:rPr lang="en-US"/>
+              <a:t>2</a:t>
+            </a:fld>
+            <a:endParaRPr lang="en-US"/>
+          </a:p>
+        </p:txBody>
+      </p:sp>
+    </p:spTree>
+    <p:extLst>
+      <p:ext uri="{BB962C8B-B14F-4D97-AF65-F5344CB8AC3E}">
+        <p14:creationId xmlns:p14="http://schemas.microsoft.com/office/powerpoint/2010/main" val="1024086991"/>
+      </p:ext>
+    </p:extLst>
+  </p:cSld>
+  <p:clrMapOvr>
+    <a:masterClrMapping/>
+  </p:clrMapOvr>
+</p:notes>
+</file>
+
+<file path=ppt/notesSlides/notesSlide3.xml><?xml version="1.0" encoding="utf-8"?>
+<p:notes xmlns:a="http://schemas.openxmlformats.org/drawingml/2006/main" xmlns:r="http://schemas.openxmlformats.org/officeDocument/2006/relationships" xmlns:p="http://schemas.openxmlformats.org/presentationml/2006/main">
+  <p:cSld>
+    <p:spTree>
+      <p:nvGrpSpPr>
+        <p:cNvPr id="1" name=""/>
+        <p:cNvGrpSpPr/>
+        <p:nvPr/>
+      </p:nvGrpSpPr>
+      <p:grpSpPr>
+        <a:xfrm>
+          <a:off x="0" y="0"/>
+          <a:ext cx="0" cy="0"/>
+          <a:chOff x="0" y="0"/>
+          <a:chExt cx="0" cy="0"/>
+        </a:xfrm>
+      </p:grpSpPr>
+      <p:sp>
+        <p:nvSpPr>
+          <p:cNvPr id="2" name="Slide Image Placeholder 1"/>
+          <p:cNvSpPr>
+            <a:spLocks noGrp="1" noRot="1" noChangeAspect="1"/>
+          </p:cNvSpPr>
+          <p:nvPr>
+            <p:ph type="sldImg"/>
+          </p:nvPr>
+        </p:nvSpPr>
+        <p:spPr>
+          <a:xfrm>
+            <a:off x="825500" y="1143000"/>
+            <a:ext cx="5207000" cy="3086100"/>
+          </a:xfrm>
+        </p:spPr>
+      </p:sp>
+      <p:sp>
+        <p:nvSpPr>
+          <p:cNvPr id="3" name="Notes Placeholder 2"/>
+          <p:cNvSpPr>
+            <a:spLocks noGrp="1"/>
+          </p:cNvSpPr>
+          <p:nvPr>
+            <p:ph type="body" idx="1"/>
+          </p:nvPr>
+        </p:nvSpPr>
+        <p:spPr/>
+        <p:txBody>
+          <a:bodyPr/>
+          <a:lstStyle/>
+          <a:p>
+            <a:endParaRPr lang="en-US" dirty="0"/>
+          </a:p>
+        </p:txBody>
+      </p:sp>
+      <p:sp>
+        <p:nvSpPr>
+          <p:cNvPr id="4" name="Slide Number Placeholder 3"/>
+          <p:cNvSpPr>
+            <a:spLocks noGrp="1"/>
+          </p:cNvSpPr>
+          <p:nvPr>
+            <p:ph type="sldNum" sz="quarter" idx="10"/>
+          </p:nvPr>
+        </p:nvSpPr>
+        <p:spPr/>
+        <p:txBody>
+          <a:bodyPr/>
+          <a:lstStyle/>
+          <a:p>
+            <a:fld id="{F7021451-1387-4CA6-816F-3879F97B5CBC}" type="slidenum">
+              <a:rPr lang="en-US"/>
+              <a:t>3</a:t>
             </a:fld>
             <a:endParaRPr lang="en-US"/>
           </a:p>
@@ -545,7 +734,645 @@
 </file>
 
 <file path=ppt/slideLayouts/slideLayout1.xml><?xml version="1.0" encoding="utf-8"?>
-<p:sldLayout xmlns:a="http://schemas.openxmlformats.org/drawingml/2006/main" xmlns:r="http://schemas.openxmlformats.org/officeDocument/2006/relationships" xmlns:p="http://schemas.openxmlformats.org/presentationml/2006/main" preserve="1">
+<p:sldLayout xmlns:a="http://schemas.openxmlformats.org/drawingml/2006/main" xmlns:r="http://schemas.openxmlformats.org/officeDocument/2006/relationships" xmlns:p="http://schemas.openxmlformats.org/presentationml/2006/main" type="title" preserve="1">
+  <p:cSld name="Title Slide">
+    <p:spTree>
+      <p:nvGrpSpPr>
+        <p:cNvPr id="1" name=""/>
+        <p:cNvGrpSpPr/>
+        <p:nvPr/>
+      </p:nvGrpSpPr>
+      <p:grpSpPr>
+        <a:xfrm>
+          <a:off x="0" y="0"/>
+          <a:ext cx="0" cy="0"/>
+          <a:chOff x="0" y="0"/>
+          <a:chExt cx="0" cy="0"/>
+        </a:xfrm>
+      </p:grpSpPr>
+      <p:sp>
+        <p:nvSpPr>
+          <p:cNvPr id="2" name="Title 1">
+            <a:extLst>
+              <a:ext uri="{FF2B5EF4-FFF2-40B4-BE49-F238E27FC236}">
+                <a16:creationId xmlns:a16="http://schemas.microsoft.com/office/drawing/2014/main" id="{94C542AB-4E5D-E3E5-DA43-46F3AD282BA3}"/>
+              </a:ext>
+            </a:extLst>
+          </p:cNvPr>
+          <p:cNvSpPr>
+            <a:spLocks noGrp="1"/>
+          </p:cNvSpPr>
+          <p:nvPr>
+            <p:ph type="ctrTitle"/>
+          </p:nvPr>
+        </p:nvSpPr>
+        <p:spPr>
+          <a:xfrm>
+            <a:off x="1543050" y="1197187"/>
+            <a:ext cx="9258300" cy="2546773"/>
+          </a:xfrm>
+        </p:spPr>
+        <p:txBody>
+          <a:bodyPr anchor="b"/>
+          <a:lstStyle>
+            <a:lvl1pPr algn="ctr">
+              <a:defRPr sz="6000"/>
+            </a:lvl1pPr>
+          </a:lstStyle>
+          <a:p>
+            <a:r>
+              <a:rPr lang="en-US"/>
+              <a:t>Click to edit Master title style</a:t>
+            </a:r>
+          </a:p>
+        </p:txBody>
+      </p:sp>
+      <p:sp>
+        <p:nvSpPr>
+          <p:cNvPr id="3" name="Subtitle 2">
+            <a:extLst>
+              <a:ext uri="{FF2B5EF4-FFF2-40B4-BE49-F238E27FC236}">
+                <a16:creationId xmlns:a16="http://schemas.microsoft.com/office/drawing/2014/main" id="{26ADC5D1-2E43-2D4F-10CF-6B9C4932443F}"/>
+              </a:ext>
+            </a:extLst>
+          </p:cNvPr>
+          <p:cNvSpPr>
+            <a:spLocks noGrp="1"/>
+          </p:cNvSpPr>
+          <p:nvPr>
+            <p:ph type="subTitle" idx="1"/>
+          </p:nvPr>
+        </p:nvSpPr>
+        <p:spPr>
+          <a:xfrm>
+            <a:off x="1543050" y="3842174"/>
+            <a:ext cx="9258300" cy="1766146"/>
+          </a:xfrm>
+        </p:spPr>
+        <p:txBody>
+          <a:bodyPr/>
+          <a:lstStyle>
+            <a:lvl1pPr marL="0" indent="0" algn="ctr">
+              <a:buNone/>
+              <a:defRPr sz="2400"/>
+            </a:lvl1pPr>
+            <a:lvl2pPr marL="457200" indent="0" algn="ctr">
+              <a:buNone/>
+              <a:defRPr sz="2000"/>
+            </a:lvl2pPr>
+            <a:lvl3pPr marL="914400" indent="0" algn="ctr">
+              <a:buNone/>
+              <a:defRPr sz="1800"/>
+            </a:lvl3pPr>
+            <a:lvl4pPr marL="1371600" indent="0" algn="ctr">
+              <a:buNone/>
+              <a:defRPr sz="1600"/>
+            </a:lvl4pPr>
+            <a:lvl5pPr marL="1828800" indent="0" algn="ctr">
+              <a:buNone/>
+              <a:defRPr sz="1600"/>
+            </a:lvl5pPr>
+            <a:lvl6pPr marL="2286000" indent="0" algn="ctr">
+              <a:buNone/>
+              <a:defRPr sz="1600"/>
+            </a:lvl6pPr>
+            <a:lvl7pPr marL="2743200" indent="0" algn="ctr">
+              <a:buNone/>
+              <a:defRPr sz="1600"/>
+            </a:lvl7pPr>
+            <a:lvl8pPr marL="3200400" indent="0" algn="ctr">
+              <a:buNone/>
+              <a:defRPr sz="1600"/>
+            </a:lvl8pPr>
+            <a:lvl9pPr marL="3657600" indent="0" algn="ctr">
+              <a:buNone/>
+              <a:defRPr sz="1600"/>
+            </a:lvl9pPr>
+          </a:lstStyle>
+          <a:p>
+            <a:r>
+              <a:rPr lang="en-US"/>
+              <a:t>Click to edit Master subtitle style</a:t>
+            </a:r>
+          </a:p>
+        </p:txBody>
+      </p:sp>
+      <p:sp>
+        <p:nvSpPr>
+          <p:cNvPr id="4" name="Date Placeholder 3">
+            <a:extLst>
+              <a:ext uri="{FF2B5EF4-FFF2-40B4-BE49-F238E27FC236}">
+                <a16:creationId xmlns:a16="http://schemas.microsoft.com/office/drawing/2014/main" id="{77291BCE-1E26-2FF6-8CD5-66BFE639D14A}"/>
+              </a:ext>
+            </a:extLst>
+          </p:cNvPr>
+          <p:cNvSpPr>
+            <a:spLocks noGrp="1"/>
+          </p:cNvSpPr>
+          <p:nvPr>
+            <p:ph type="dt" sz="half" idx="10"/>
+          </p:nvPr>
+        </p:nvSpPr>
+        <p:spPr/>
+        <p:txBody>
+          <a:bodyPr/>
+          <a:lstStyle/>
+          <a:p>
+            <a:fld id="{4AF3E59C-6757-304D-81DC-AFC89DC42387}" type="datetime1">
+              <a:rPr lang="en-US" smtClean="0"/>
+              <a:t>7/6/26</a:t>
+            </a:fld>
+            <a:endParaRPr lang="en-US"/>
+          </a:p>
+        </p:txBody>
+      </p:sp>
+      <p:sp>
+        <p:nvSpPr>
+          <p:cNvPr id="5" name="Footer Placeholder 4">
+            <a:extLst>
+              <a:ext uri="{FF2B5EF4-FFF2-40B4-BE49-F238E27FC236}">
+                <a16:creationId xmlns:a16="http://schemas.microsoft.com/office/drawing/2014/main" id="{342DBBA0-D6C7-FC07-5C56-7191AB2C846F}"/>
+              </a:ext>
+            </a:extLst>
+          </p:cNvPr>
+          <p:cNvSpPr>
+            <a:spLocks noGrp="1"/>
+          </p:cNvSpPr>
+          <p:nvPr>
+            <p:ph type="ftr" sz="quarter" idx="11"/>
+          </p:nvPr>
+        </p:nvSpPr>
+        <p:spPr/>
+        <p:txBody>
+          <a:bodyPr/>
+          <a:lstStyle/>
+          <a:p>
+            <a:r>
+              <a:rPr lang="en-US"/>
+              <a:t>Tennis Channel 2025 - CONFIDENTIAL</a:t>
+            </a:r>
+          </a:p>
+        </p:txBody>
+      </p:sp>
+      <p:sp>
+        <p:nvSpPr>
+          <p:cNvPr id="6" name="Slide Number Placeholder 5">
+            <a:extLst>
+              <a:ext uri="{FF2B5EF4-FFF2-40B4-BE49-F238E27FC236}">
+                <a16:creationId xmlns:a16="http://schemas.microsoft.com/office/drawing/2014/main" id="{A6C5ABB2-FC67-66A2-B676-98C8F4708307}"/>
+              </a:ext>
+            </a:extLst>
+          </p:cNvPr>
+          <p:cNvSpPr>
+            <a:spLocks noGrp="1"/>
+          </p:cNvSpPr>
+          <p:nvPr>
+            <p:ph type="sldNum" sz="quarter" idx="12"/>
+          </p:nvPr>
+        </p:nvSpPr>
+        <p:spPr/>
+        <p:txBody>
+          <a:bodyPr/>
+          <a:lstStyle/>
+          <a:p>
+            <a:fld id="{F6DAA944-EC5F-9D44-9E3D-812366C7D5CA}" type="slidenum">
+              <a:rPr lang="en-US" smtClean="0"/>
+              <a:t>‹#›</a:t>
+            </a:fld>
+            <a:endParaRPr lang="en-US"/>
+          </a:p>
+        </p:txBody>
+      </p:sp>
+    </p:spTree>
+    <p:extLst>
+      <p:ext uri="{BB962C8B-B14F-4D97-AF65-F5344CB8AC3E}">
+        <p14:creationId xmlns:p14="http://schemas.microsoft.com/office/powerpoint/2010/main" val="3686467028"/>
+      </p:ext>
+    </p:extLst>
+  </p:cSld>
+  <p:clrMapOvr>
+    <a:masterClrMapping/>
+  </p:clrMapOvr>
+  <p:hf hdr="0" dt="0"/>
+</p:sldLayout>
+</file>
+
+<file path=ppt/slideLayouts/slideLayout10.xml><?xml version="1.0" encoding="utf-8"?>
+<p:sldLayout xmlns:a="http://schemas.openxmlformats.org/drawingml/2006/main" xmlns:r="http://schemas.openxmlformats.org/officeDocument/2006/relationships" xmlns:p="http://schemas.openxmlformats.org/presentationml/2006/main" type="vertTx" preserve="1">
+  <p:cSld name="Title and Vertical Text">
+    <p:spTree>
+      <p:nvGrpSpPr>
+        <p:cNvPr id="1" name=""/>
+        <p:cNvGrpSpPr/>
+        <p:nvPr/>
+      </p:nvGrpSpPr>
+      <p:grpSpPr>
+        <a:xfrm>
+          <a:off x="0" y="0"/>
+          <a:ext cx="0" cy="0"/>
+          <a:chOff x="0" y="0"/>
+          <a:chExt cx="0" cy="0"/>
+        </a:xfrm>
+      </p:grpSpPr>
+      <p:sp>
+        <p:nvSpPr>
+          <p:cNvPr id="2" name="Title 1">
+            <a:extLst>
+              <a:ext uri="{FF2B5EF4-FFF2-40B4-BE49-F238E27FC236}">
+                <a16:creationId xmlns:a16="http://schemas.microsoft.com/office/drawing/2014/main" id="{E911DCD6-4900-D307-8B3E-845F0B83D14A}"/>
+              </a:ext>
+            </a:extLst>
+          </p:cNvPr>
+          <p:cNvSpPr>
+            <a:spLocks noGrp="1"/>
+          </p:cNvSpPr>
+          <p:nvPr>
+            <p:ph type="title"/>
+          </p:nvPr>
+        </p:nvSpPr>
+        <p:spPr/>
+        <p:txBody>
+          <a:bodyPr/>
+          <a:lstStyle/>
+          <a:p>
+            <a:r>
+              <a:rPr lang="en-US"/>
+              <a:t>Click to edit Master title style</a:t>
+            </a:r>
+          </a:p>
+        </p:txBody>
+      </p:sp>
+      <p:sp>
+        <p:nvSpPr>
+          <p:cNvPr id="3" name="Vertical Text Placeholder 2">
+            <a:extLst>
+              <a:ext uri="{FF2B5EF4-FFF2-40B4-BE49-F238E27FC236}">
+                <a16:creationId xmlns:a16="http://schemas.microsoft.com/office/drawing/2014/main" id="{8BDDC619-0D5E-261F-3E8E-3F35DAACDE51}"/>
+              </a:ext>
+            </a:extLst>
+          </p:cNvPr>
+          <p:cNvSpPr>
+            <a:spLocks noGrp="1"/>
+          </p:cNvSpPr>
+          <p:nvPr>
+            <p:ph type="body" orient="vert" idx="1"/>
+          </p:nvPr>
+        </p:nvSpPr>
+        <p:spPr/>
+        <p:txBody>
+          <a:bodyPr vert="eaVert"/>
+          <a:lstStyle/>
+          <a:p>
+            <a:pPr lvl="0"/>
+            <a:r>
+              <a:rPr lang="en-US"/>
+              <a:t>Click to edit Master text styles</a:t>
+            </a:r>
+          </a:p>
+          <a:p>
+            <a:pPr lvl="1"/>
+            <a:r>
+              <a:rPr lang="en-US"/>
+              <a:t>Second level</a:t>
+            </a:r>
+          </a:p>
+          <a:p>
+            <a:pPr lvl="2"/>
+            <a:r>
+              <a:rPr lang="en-US"/>
+              <a:t>Third level</a:t>
+            </a:r>
+          </a:p>
+          <a:p>
+            <a:pPr lvl="3"/>
+            <a:r>
+              <a:rPr lang="en-US"/>
+              <a:t>Fourth level</a:t>
+            </a:r>
+          </a:p>
+          <a:p>
+            <a:pPr lvl="4"/>
+            <a:r>
+              <a:rPr lang="en-US"/>
+              <a:t>Fifth level</a:t>
+            </a:r>
+          </a:p>
+        </p:txBody>
+      </p:sp>
+      <p:sp>
+        <p:nvSpPr>
+          <p:cNvPr id="4" name="Date Placeholder 3">
+            <a:extLst>
+              <a:ext uri="{FF2B5EF4-FFF2-40B4-BE49-F238E27FC236}">
+                <a16:creationId xmlns:a16="http://schemas.microsoft.com/office/drawing/2014/main" id="{A1CCCD90-30E8-04DC-218F-7B7549CB26CB}"/>
+              </a:ext>
+            </a:extLst>
+          </p:cNvPr>
+          <p:cNvSpPr>
+            <a:spLocks noGrp="1"/>
+          </p:cNvSpPr>
+          <p:nvPr>
+            <p:ph type="dt" sz="half" idx="10"/>
+          </p:nvPr>
+        </p:nvSpPr>
+        <p:spPr/>
+        <p:txBody>
+          <a:bodyPr/>
+          <a:lstStyle/>
+          <a:p>
+            <a:fld id="{5DD0E256-82DC-B742-83EE-95D668E2CF2A}" type="datetime1">
+              <a:rPr lang="en-US" smtClean="0"/>
+              <a:t>7/6/26</a:t>
+            </a:fld>
+            <a:endParaRPr lang="en-US"/>
+          </a:p>
+        </p:txBody>
+      </p:sp>
+      <p:sp>
+        <p:nvSpPr>
+          <p:cNvPr id="5" name="Footer Placeholder 4">
+            <a:extLst>
+              <a:ext uri="{FF2B5EF4-FFF2-40B4-BE49-F238E27FC236}">
+                <a16:creationId xmlns:a16="http://schemas.microsoft.com/office/drawing/2014/main" id="{1D3EFA0D-D055-1B13-E297-61A43DE8F2B3}"/>
+              </a:ext>
+            </a:extLst>
+          </p:cNvPr>
+          <p:cNvSpPr>
+            <a:spLocks noGrp="1"/>
+          </p:cNvSpPr>
+          <p:nvPr>
+            <p:ph type="ftr" sz="quarter" idx="11"/>
+          </p:nvPr>
+        </p:nvSpPr>
+        <p:spPr/>
+        <p:txBody>
+          <a:bodyPr/>
+          <a:lstStyle/>
+          <a:p>
+            <a:r>
+              <a:rPr lang="en-US"/>
+              <a:t>Tennis Channel 2025 - CONFIDENTIAL</a:t>
+            </a:r>
+          </a:p>
+        </p:txBody>
+      </p:sp>
+      <p:sp>
+        <p:nvSpPr>
+          <p:cNvPr id="6" name="Slide Number Placeholder 5">
+            <a:extLst>
+              <a:ext uri="{FF2B5EF4-FFF2-40B4-BE49-F238E27FC236}">
+                <a16:creationId xmlns:a16="http://schemas.microsoft.com/office/drawing/2014/main" id="{95AF7691-A6DA-9434-C090-1F588D69FC12}"/>
+              </a:ext>
+            </a:extLst>
+          </p:cNvPr>
+          <p:cNvSpPr>
+            <a:spLocks noGrp="1"/>
+          </p:cNvSpPr>
+          <p:nvPr>
+            <p:ph type="sldNum" sz="quarter" idx="12"/>
+          </p:nvPr>
+        </p:nvSpPr>
+        <p:spPr/>
+        <p:txBody>
+          <a:bodyPr/>
+          <a:lstStyle/>
+          <a:p>
+            <a:fld id="{F6DAA944-EC5F-9D44-9E3D-812366C7D5CA}" type="slidenum">
+              <a:rPr lang="en-US" smtClean="0"/>
+              <a:t>‹#›</a:t>
+            </a:fld>
+            <a:endParaRPr lang="en-US"/>
+          </a:p>
+        </p:txBody>
+      </p:sp>
+    </p:spTree>
+    <p:extLst>
+      <p:ext uri="{BB962C8B-B14F-4D97-AF65-F5344CB8AC3E}">
+        <p14:creationId xmlns:p14="http://schemas.microsoft.com/office/powerpoint/2010/main" val="2073727667"/>
+      </p:ext>
+    </p:extLst>
+  </p:cSld>
+  <p:clrMapOvr>
+    <a:masterClrMapping/>
+  </p:clrMapOvr>
+  <p:hf hdr="0" dt="0"/>
+</p:sldLayout>
+</file>
+
+<file path=ppt/slideLayouts/slideLayout11.xml><?xml version="1.0" encoding="utf-8"?>
+<p:sldLayout xmlns:a="http://schemas.openxmlformats.org/drawingml/2006/main" xmlns:r="http://schemas.openxmlformats.org/officeDocument/2006/relationships" xmlns:p="http://schemas.openxmlformats.org/presentationml/2006/main" type="vertTitleAndTx" preserve="1">
+  <p:cSld name="Vertical Title and Text">
+    <p:spTree>
+      <p:nvGrpSpPr>
+        <p:cNvPr id="1" name=""/>
+        <p:cNvGrpSpPr/>
+        <p:nvPr/>
+      </p:nvGrpSpPr>
+      <p:grpSpPr>
+        <a:xfrm>
+          <a:off x="0" y="0"/>
+          <a:ext cx="0" cy="0"/>
+          <a:chOff x="0" y="0"/>
+          <a:chExt cx="0" cy="0"/>
+        </a:xfrm>
+      </p:grpSpPr>
+      <p:sp>
+        <p:nvSpPr>
+          <p:cNvPr id="2" name="Vertical Title 1">
+            <a:extLst>
+              <a:ext uri="{FF2B5EF4-FFF2-40B4-BE49-F238E27FC236}">
+                <a16:creationId xmlns:a16="http://schemas.microsoft.com/office/drawing/2014/main" id="{0387BDF5-EF24-0029-DCE1-7AC24EC7CFEF}"/>
+              </a:ext>
+            </a:extLst>
+          </p:cNvPr>
+          <p:cNvSpPr>
+            <a:spLocks noGrp="1"/>
+          </p:cNvSpPr>
+          <p:nvPr>
+            <p:ph type="title" orient="vert"/>
+          </p:nvPr>
+        </p:nvSpPr>
+        <p:spPr>
+          <a:xfrm>
+            <a:off x="8833961" y="389467"/>
+            <a:ext cx="2661761" cy="6199294"/>
+          </a:xfrm>
+        </p:spPr>
+        <p:txBody>
+          <a:bodyPr vert="eaVert"/>
+          <a:lstStyle/>
+          <a:p>
+            <a:r>
+              <a:rPr lang="en-US"/>
+              <a:t>Click to edit Master title style</a:t>
+            </a:r>
+          </a:p>
+        </p:txBody>
+      </p:sp>
+      <p:sp>
+        <p:nvSpPr>
+          <p:cNvPr id="3" name="Vertical Text Placeholder 2">
+            <a:extLst>
+              <a:ext uri="{FF2B5EF4-FFF2-40B4-BE49-F238E27FC236}">
+                <a16:creationId xmlns:a16="http://schemas.microsoft.com/office/drawing/2014/main" id="{C73943A6-7D60-FE02-0DAD-FE1401B4EE15}"/>
+              </a:ext>
+            </a:extLst>
+          </p:cNvPr>
+          <p:cNvSpPr>
+            <a:spLocks noGrp="1"/>
+          </p:cNvSpPr>
+          <p:nvPr>
+            <p:ph type="body" orient="vert" idx="1"/>
+          </p:nvPr>
+        </p:nvSpPr>
+        <p:spPr>
+          <a:xfrm>
+            <a:off x="848677" y="389467"/>
+            <a:ext cx="7830979" cy="6199294"/>
+          </a:xfrm>
+        </p:spPr>
+        <p:txBody>
+          <a:bodyPr vert="eaVert"/>
+          <a:lstStyle/>
+          <a:p>
+            <a:pPr lvl="0"/>
+            <a:r>
+              <a:rPr lang="en-US"/>
+              <a:t>Click to edit Master text styles</a:t>
+            </a:r>
+          </a:p>
+          <a:p>
+            <a:pPr lvl="1"/>
+            <a:r>
+              <a:rPr lang="en-US"/>
+              <a:t>Second level</a:t>
+            </a:r>
+          </a:p>
+          <a:p>
+            <a:pPr lvl="2"/>
+            <a:r>
+              <a:rPr lang="en-US"/>
+              <a:t>Third level</a:t>
+            </a:r>
+          </a:p>
+          <a:p>
+            <a:pPr lvl="3"/>
+            <a:r>
+              <a:rPr lang="en-US"/>
+              <a:t>Fourth level</a:t>
+            </a:r>
+          </a:p>
+          <a:p>
+            <a:pPr lvl="4"/>
+            <a:r>
+              <a:rPr lang="en-US"/>
+              <a:t>Fifth level</a:t>
+            </a:r>
+          </a:p>
+        </p:txBody>
+      </p:sp>
+      <p:sp>
+        <p:nvSpPr>
+          <p:cNvPr id="4" name="Date Placeholder 3">
+            <a:extLst>
+              <a:ext uri="{FF2B5EF4-FFF2-40B4-BE49-F238E27FC236}">
+                <a16:creationId xmlns:a16="http://schemas.microsoft.com/office/drawing/2014/main" id="{DDF4A4EF-C246-3BC0-F8A4-2D40BC9CAA57}"/>
+              </a:ext>
+            </a:extLst>
+          </p:cNvPr>
+          <p:cNvSpPr>
+            <a:spLocks noGrp="1"/>
+          </p:cNvSpPr>
+          <p:nvPr>
+            <p:ph type="dt" sz="half" idx="10"/>
+          </p:nvPr>
+        </p:nvSpPr>
+        <p:spPr/>
+        <p:txBody>
+          <a:bodyPr/>
+          <a:lstStyle/>
+          <a:p>
+            <a:fld id="{6E08F2DA-B790-C342-8CF1-3B2B97F389FB}" type="datetime1">
+              <a:rPr lang="en-US" smtClean="0"/>
+              <a:t>7/6/26</a:t>
+            </a:fld>
+            <a:endParaRPr lang="en-US"/>
+          </a:p>
+        </p:txBody>
+      </p:sp>
+      <p:sp>
+        <p:nvSpPr>
+          <p:cNvPr id="5" name="Footer Placeholder 4">
+            <a:extLst>
+              <a:ext uri="{FF2B5EF4-FFF2-40B4-BE49-F238E27FC236}">
+                <a16:creationId xmlns:a16="http://schemas.microsoft.com/office/drawing/2014/main" id="{21A78659-C8AF-161E-4E7D-5D3EEF219ED6}"/>
+              </a:ext>
+            </a:extLst>
+          </p:cNvPr>
+          <p:cNvSpPr>
+            <a:spLocks noGrp="1"/>
+          </p:cNvSpPr>
+          <p:nvPr>
+            <p:ph type="ftr" sz="quarter" idx="11"/>
+          </p:nvPr>
+        </p:nvSpPr>
+        <p:spPr/>
+        <p:txBody>
+          <a:bodyPr/>
+          <a:lstStyle/>
+          <a:p>
+            <a:r>
+              <a:rPr lang="en-US"/>
+              <a:t>Tennis Channel 2025 - CONFIDENTIAL</a:t>
+            </a:r>
+          </a:p>
+        </p:txBody>
+      </p:sp>
+      <p:sp>
+        <p:nvSpPr>
+          <p:cNvPr id="6" name="Slide Number Placeholder 5">
+            <a:extLst>
+              <a:ext uri="{FF2B5EF4-FFF2-40B4-BE49-F238E27FC236}">
+                <a16:creationId xmlns:a16="http://schemas.microsoft.com/office/drawing/2014/main" id="{C46C2202-F3E0-D5DC-F7E2-566FC445139A}"/>
+              </a:ext>
+            </a:extLst>
+          </p:cNvPr>
+          <p:cNvSpPr>
+            <a:spLocks noGrp="1"/>
+          </p:cNvSpPr>
+          <p:nvPr>
+            <p:ph type="sldNum" sz="quarter" idx="12"/>
+          </p:nvPr>
+        </p:nvSpPr>
+        <p:spPr/>
+        <p:txBody>
+          <a:bodyPr/>
+          <a:lstStyle/>
+          <a:p>
+            <a:fld id="{F6DAA944-EC5F-9D44-9E3D-812366C7D5CA}" type="slidenum">
+              <a:rPr lang="en-US" smtClean="0"/>
+              <a:t>‹#›</a:t>
+            </a:fld>
+            <a:endParaRPr lang="en-US"/>
+          </a:p>
+        </p:txBody>
+      </p:sp>
+    </p:spTree>
+    <p:extLst>
+      <p:ext uri="{BB962C8B-B14F-4D97-AF65-F5344CB8AC3E}">
+        <p14:creationId xmlns:p14="http://schemas.microsoft.com/office/powerpoint/2010/main" val="1835359364"/>
+      </p:ext>
+    </p:extLst>
+  </p:cSld>
+  <p:clrMapOvr>
+    <a:masterClrMapping/>
+  </p:clrMapOvr>
+  <p:hf hdr="0" dt="0"/>
+</p:sldLayout>
+</file>
+
+<file path=ppt/slideLayouts/slideLayout12.xml><?xml version="1.0" encoding="utf-8"?>
+<p:sldLayout xmlns:a="http://schemas.openxmlformats.org/drawingml/2006/main" xmlns:r="http://schemas.openxmlformats.org/officeDocument/2006/relationships" xmlns:p="http://schemas.openxmlformats.org/presentationml/2006/main">
   <p:cSld name="DEFAULT">
     <p:bg>
       <p:bgRef idx="1001">
@@ -567,6 +1394,11 @@
         </a:xfrm>
       </p:grpSpPr>
     </p:spTree>
+    <p:extLst>
+      <p:ext uri="{BB962C8B-B14F-4D97-AF65-F5344CB8AC3E}">
+        <p14:creationId xmlns:p14="http://schemas.microsoft.com/office/powerpoint/2010/main" val="1707507290"/>
+      </p:ext>
+    </p:extLst>
   </p:cSld>
   <p:clrMapOvr>
     <a:masterClrMapping/>
@@ -574,9 +1406,9 @@
 </p:sldLayout>
 </file>
 
-<file path=ppt/slideMasters/slideMaster1.xml><?xml version="1.0" encoding="utf-8"?>
-<p:sldMaster xmlns:a="http://schemas.openxmlformats.org/drawingml/2006/main" xmlns:r="http://schemas.openxmlformats.org/officeDocument/2006/relationships" xmlns:p="http://schemas.openxmlformats.org/presentationml/2006/main">
-  <p:cSld>
+<file path=ppt/slideLayouts/slideLayout2.xml><?xml version="1.0" encoding="utf-8"?>
+<p:sldLayout xmlns:a="http://schemas.openxmlformats.org/drawingml/2006/main" xmlns:r="http://schemas.openxmlformats.org/officeDocument/2006/relationships" xmlns:p="http://schemas.openxmlformats.org/presentationml/2006/main" type="obj" preserve="1">
+  <p:cSld name="Title and Content">
     <p:spTree>
       <p:nvGrpSpPr>
         <p:cNvPr id="1" name=""/>
@@ -591,16 +1423,2320 @@
           <a:chExt cx="0" cy="0"/>
         </a:xfrm>
       </p:grpSpPr>
+      <p:sp>
+        <p:nvSpPr>
+          <p:cNvPr id="2" name="Title 1">
+            <a:extLst>
+              <a:ext uri="{FF2B5EF4-FFF2-40B4-BE49-F238E27FC236}">
+                <a16:creationId xmlns:a16="http://schemas.microsoft.com/office/drawing/2014/main" id="{DAB8AB43-7245-25CD-9429-3739721B0D9A}"/>
+              </a:ext>
+            </a:extLst>
+          </p:cNvPr>
+          <p:cNvSpPr>
+            <a:spLocks noGrp="1"/>
+          </p:cNvSpPr>
+          <p:nvPr>
+            <p:ph type="title"/>
+          </p:nvPr>
+        </p:nvSpPr>
+        <p:spPr/>
+        <p:txBody>
+          <a:bodyPr/>
+          <a:lstStyle/>
+          <a:p>
+            <a:r>
+              <a:rPr lang="en-US"/>
+              <a:t>Click to edit Master title style</a:t>
+            </a:r>
+          </a:p>
+        </p:txBody>
+      </p:sp>
+      <p:sp>
+        <p:nvSpPr>
+          <p:cNvPr id="3" name="Content Placeholder 2">
+            <a:extLst>
+              <a:ext uri="{FF2B5EF4-FFF2-40B4-BE49-F238E27FC236}">
+                <a16:creationId xmlns:a16="http://schemas.microsoft.com/office/drawing/2014/main" id="{35EB2ECB-D6B4-1B28-8A6F-4A72D3E7E294}"/>
+              </a:ext>
+            </a:extLst>
+          </p:cNvPr>
+          <p:cNvSpPr>
+            <a:spLocks noGrp="1"/>
+          </p:cNvSpPr>
+          <p:nvPr>
+            <p:ph idx="1"/>
+          </p:nvPr>
+        </p:nvSpPr>
+        <p:spPr/>
+        <p:txBody>
+          <a:bodyPr/>
+          <a:lstStyle/>
+          <a:p>
+            <a:pPr lvl="0"/>
+            <a:r>
+              <a:rPr lang="en-US"/>
+              <a:t>Click to edit Master text styles</a:t>
+            </a:r>
+          </a:p>
+          <a:p>
+            <a:pPr lvl="1"/>
+            <a:r>
+              <a:rPr lang="en-US"/>
+              <a:t>Second level</a:t>
+            </a:r>
+          </a:p>
+          <a:p>
+            <a:pPr lvl="2"/>
+            <a:r>
+              <a:rPr lang="en-US"/>
+              <a:t>Third level</a:t>
+            </a:r>
+          </a:p>
+          <a:p>
+            <a:pPr lvl="3"/>
+            <a:r>
+              <a:rPr lang="en-US"/>
+              <a:t>Fourth level</a:t>
+            </a:r>
+          </a:p>
+          <a:p>
+            <a:pPr lvl="4"/>
+            <a:r>
+              <a:rPr lang="en-US"/>
+              <a:t>Fifth level</a:t>
+            </a:r>
+          </a:p>
+        </p:txBody>
+      </p:sp>
+      <p:sp>
+        <p:nvSpPr>
+          <p:cNvPr id="4" name="Date Placeholder 3">
+            <a:extLst>
+              <a:ext uri="{FF2B5EF4-FFF2-40B4-BE49-F238E27FC236}">
+                <a16:creationId xmlns:a16="http://schemas.microsoft.com/office/drawing/2014/main" id="{C465FF69-2AD4-71DC-BCAE-6BCC61AA0542}"/>
+              </a:ext>
+            </a:extLst>
+          </p:cNvPr>
+          <p:cNvSpPr>
+            <a:spLocks noGrp="1"/>
+          </p:cNvSpPr>
+          <p:nvPr>
+            <p:ph type="dt" sz="half" idx="10"/>
+          </p:nvPr>
+        </p:nvSpPr>
+        <p:spPr/>
+        <p:txBody>
+          <a:bodyPr/>
+          <a:lstStyle/>
+          <a:p>
+            <a:fld id="{F5717DB9-6A5E-D34E-8F49-668C4E023DB8}" type="datetime1">
+              <a:rPr lang="en-US" smtClean="0"/>
+              <a:t>7/6/26</a:t>
+            </a:fld>
+            <a:endParaRPr lang="en-US"/>
+          </a:p>
+        </p:txBody>
+      </p:sp>
+      <p:sp>
+        <p:nvSpPr>
+          <p:cNvPr id="5" name="Footer Placeholder 4">
+            <a:extLst>
+              <a:ext uri="{FF2B5EF4-FFF2-40B4-BE49-F238E27FC236}">
+                <a16:creationId xmlns:a16="http://schemas.microsoft.com/office/drawing/2014/main" id="{0A44906B-2BF5-D735-8C03-383888D485AC}"/>
+              </a:ext>
+            </a:extLst>
+          </p:cNvPr>
+          <p:cNvSpPr>
+            <a:spLocks noGrp="1"/>
+          </p:cNvSpPr>
+          <p:nvPr>
+            <p:ph type="ftr" sz="quarter" idx="11"/>
+          </p:nvPr>
+        </p:nvSpPr>
+        <p:spPr/>
+        <p:txBody>
+          <a:bodyPr/>
+          <a:lstStyle/>
+          <a:p>
+            <a:r>
+              <a:rPr lang="en-US"/>
+              <a:t>Tennis Channel 2025 - CONFIDENTIAL</a:t>
+            </a:r>
+          </a:p>
+        </p:txBody>
+      </p:sp>
+      <p:sp>
+        <p:nvSpPr>
+          <p:cNvPr id="6" name="Slide Number Placeholder 5">
+            <a:extLst>
+              <a:ext uri="{FF2B5EF4-FFF2-40B4-BE49-F238E27FC236}">
+                <a16:creationId xmlns:a16="http://schemas.microsoft.com/office/drawing/2014/main" id="{538854DA-D980-9804-D429-EE5849AB2C70}"/>
+              </a:ext>
+            </a:extLst>
+          </p:cNvPr>
+          <p:cNvSpPr>
+            <a:spLocks noGrp="1"/>
+          </p:cNvSpPr>
+          <p:nvPr>
+            <p:ph type="sldNum" sz="quarter" idx="12"/>
+          </p:nvPr>
+        </p:nvSpPr>
+        <p:spPr/>
+        <p:txBody>
+          <a:bodyPr/>
+          <a:lstStyle/>
+          <a:p>
+            <a:fld id="{F6DAA944-EC5F-9D44-9E3D-812366C7D5CA}" type="slidenum">
+              <a:rPr lang="en-US" smtClean="0"/>
+              <a:t>‹#›</a:t>
+            </a:fld>
+            <a:endParaRPr lang="en-US"/>
+          </a:p>
+        </p:txBody>
+      </p:sp>
     </p:spTree>
+    <p:extLst>
+      <p:ext uri="{BB962C8B-B14F-4D97-AF65-F5344CB8AC3E}">
+        <p14:creationId xmlns:p14="http://schemas.microsoft.com/office/powerpoint/2010/main" val="3581239677"/>
+      </p:ext>
+    </p:extLst>
+  </p:cSld>
+  <p:clrMapOvr>
+    <a:masterClrMapping/>
+  </p:clrMapOvr>
+  <p:hf hdr="0" dt="0"/>
+</p:sldLayout>
+</file>
+
+<file path=ppt/slideLayouts/slideLayout3.xml><?xml version="1.0" encoding="utf-8"?>
+<p:sldLayout xmlns:a="http://schemas.openxmlformats.org/drawingml/2006/main" xmlns:r="http://schemas.openxmlformats.org/officeDocument/2006/relationships" xmlns:p="http://schemas.openxmlformats.org/presentationml/2006/main" type="secHead" preserve="1">
+  <p:cSld name="Section Header">
+    <p:spTree>
+      <p:nvGrpSpPr>
+        <p:cNvPr id="1" name=""/>
+        <p:cNvGrpSpPr/>
+        <p:nvPr/>
+      </p:nvGrpSpPr>
+      <p:grpSpPr>
+        <a:xfrm>
+          <a:off x="0" y="0"/>
+          <a:ext cx="0" cy="0"/>
+          <a:chOff x="0" y="0"/>
+          <a:chExt cx="0" cy="0"/>
+        </a:xfrm>
+      </p:grpSpPr>
+      <p:sp>
+        <p:nvSpPr>
+          <p:cNvPr id="2" name="Title 1">
+            <a:extLst>
+              <a:ext uri="{FF2B5EF4-FFF2-40B4-BE49-F238E27FC236}">
+                <a16:creationId xmlns:a16="http://schemas.microsoft.com/office/drawing/2014/main" id="{42F38A7F-439E-24E3-D0F9-D2B05E7C8108}"/>
+              </a:ext>
+            </a:extLst>
+          </p:cNvPr>
+          <p:cNvSpPr>
+            <a:spLocks noGrp="1"/>
+          </p:cNvSpPr>
+          <p:nvPr>
+            <p:ph type="title"/>
+          </p:nvPr>
+        </p:nvSpPr>
+        <p:spPr>
+          <a:xfrm>
+            <a:off x="842248" y="1823721"/>
+            <a:ext cx="10647045" cy="3042919"/>
+          </a:xfrm>
+        </p:spPr>
+        <p:txBody>
+          <a:bodyPr anchor="b"/>
+          <a:lstStyle>
+            <a:lvl1pPr>
+              <a:defRPr sz="6000"/>
+            </a:lvl1pPr>
+          </a:lstStyle>
+          <a:p>
+            <a:r>
+              <a:rPr lang="en-US"/>
+              <a:t>Click to edit Master title style</a:t>
+            </a:r>
+          </a:p>
+        </p:txBody>
+      </p:sp>
+      <p:sp>
+        <p:nvSpPr>
+          <p:cNvPr id="3" name="Text Placeholder 2">
+            <a:extLst>
+              <a:ext uri="{FF2B5EF4-FFF2-40B4-BE49-F238E27FC236}">
+                <a16:creationId xmlns:a16="http://schemas.microsoft.com/office/drawing/2014/main" id="{3443069C-437B-5A7C-D4D2-2F5EA044BEBC}"/>
+              </a:ext>
+            </a:extLst>
+          </p:cNvPr>
+          <p:cNvSpPr>
+            <a:spLocks noGrp="1"/>
+          </p:cNvSpPr>
+          <p:nvPr>
+            <p:ph type="body" idx="1"/>
+          </p:nvPr>
+        </p:nvSpPr>
+        <p:spPr>
+          <a:xfrm>
+            <a:off x="842248" y="4895428"/>
+            <a:ext cx="10647045" cy="1600199"/>
+          </a:xfrm>
+        </p:spPr>
+        <p:txBody>
+          <a:bodyPr/>
+          <a:lstStyle>
+            <a:lvl1pPr marL="0" indent="0">
+              <a:buNone/>
+              <a:defRPr sz="2400">
+                <a:solidFill>
+                  <a:schemeClr val="tx1">
+                    <a:tint val="82000"/>
+                  </a:schemeClr>
+                </a:solidFill>
+              </a:defRPr>
+            </a:lvl1pPr>
+            <a:lvl2pPr marL="457200" indent="0">
+              <a:buNone/>
+              <a:defRPr sz="2000">
+                <a:solidFill>
+                  <a:schemeClr val="tx1">
+                    <a:tint val="82000"/>
+                  </a:schemeClr>
+                </a:solidFill>
+              </a:defRPr>
+            </a:lvl2pPr>
+            <a:lvl3pPr marL="914400" indent="0">
+              <a:buNone/>
+              <a:defRPr sz="1800">
+                <a:solidFill>
+                  <a:schemeClr val="tx1">
+                    <a:tint val="82000"/>
+                  </a:schemeClr>
+                </a:solidFill>
+              </a:defRPr>
+            </a:lvl3pPr>
+            <a:lvl4pPr marL="1371600" indent="0">
+              <a:buNone/>
+              <a:defRPr sz="1600">
+                <a:solidFill>
+                  <a:schemeClr val="tx1">
+                    <a:tint val="82000"/>
+                  </a:schemeClr>
+                </a:solidFill>
+              </a:defRPr>
+            </a:lvl4pPr>
+            <a:lvl5pPr marL="1828800" indent="0">
+              <a:buNone/>
+              <a:defRPr sz="1600">
+                <a:solidFill>
+                  <a:schemeClr val="tx1">
+                    <a:tint val="82000"/>
+                  </a:schemeClr>
+                </a:solidFill>
+              </a:defRPr>
+            </a:lvl5pPr>
+            <a:lvl6pPr marL="2286000" indent="0">
+              <a:buNone/>
+              <a:defRPr sz="1600">
+                <a:solidFill>
+                  <a:schemeClr val="tx1">
+                    <a:tint val="82000"/>
+                  </a:schemeClr>
+                </a:solidFill>
+              </a:defRPr>
+            </a:lvl6pPr>
+            <a:lvl7pPr marL="2743200" indent="0">
+              <a:buNone/>
+              <a:defRPr sz="1600">
+                <a:solidFill>
+                  <a:schemeClr val="tx1">
+                    <a:tint val="82000"/>
+                  </a:schemeClr>
+                </a:solidFill>
+              </a:defRPr>
+            </a:lvl7pPr>
+            <a:lvl8pPr marL="3200400" indent="0">
+              <a:buNone/>
+              <a:defRPr sz="1600">
+                <a:solidFill>
+                  <a:schemeClr val="tx1">
+                    <a:tint val="82000"/>
+                  </a:schemeClr>
+                </a:solidFill>
+              </a:defRPr>
+            </a:lvl8pPr>
+            <a:lvl9pPr marL="3657600" indent="0">
+              <a:buNone/>
+              <a:defRPr sz="1600">
+                <a:solidFill>
+                  <a:schemeClr val="tx1">
+                    <a:tint val="82000"/>
+                  </a:schemeClr>
+                </a:solidFill>
+              </a:defRPr>
+            </a:lvl9pPr>
+          </a:lstStyle>
+          <a:p>
+            <a:pPr lvl="0"/>
+            <a:r>
+              <a:rPr lang="en-US"/>
+              <a:t>Click to edit Master text styles</a:t>
+            </a:r>
+          </a:p>
+        </p:txBody>
+      </p:sp>
+      <p:sp>
+        <p:nvSpPr>
+          <p:cNvPr id="4" name="Date Placeholder 3">
+            <a:extLst>
+              <a:ext uri="{FF2B5EF4-FFF2-40B4-BE49-F238E27FC236}">
+                <a16:creationId xmlns:a16="http://schemas.microsoft.com/office/drawing/2014/main" id="{5C71F402-A6B4-06C9-471A-ADA7A5B20421}"/>
+              </a:ext>
+            </a:extLst>
+          </p:cNvPr>
+          <p:cNvSpPr>
+            <a:spLocks noGrp="1"/>
+          </p:cNvSpPr>
+          <p:nvPr>
+            <p:ph type="dt" sz="half" idx="10"/>
+          </p:nvPr>
+        </p:nvSpPr>
+        <p:spPr/>
+        <p:txBody>
+          <a:bodyPr/>
+          <a:lstStyle/>
+          <a:p>
+            <a:fld id="{9D8F7AC0-3832-FD45-8B44-A4D6390FE77E}" type="datetime1">
+              <a:rPr lang="en-US" smtClean="0"/>
+              <a:t>7/6/26</a:t>
+            </a:fld>
+            <a:endParaRPr lang="en-US"/>
+          </a:p>
+        </p:txBody>
+      </p:sp>
+      <p:sp>
+        <p:nvSpPr>
+          <p:cNvPr id="5" name="Footer Placeholder 4">
+            <a:extLst>
+              <a:ext uri="{FF2B5EF4-FFF2-40B4-BE49-F238E27FC236}">
+                <a16:creationId xmlns:a16="http://schemas.microsoft.com/office/drawing/2014/main" id="{93CF1C27-1515-AE48-2681-B9E0DCA4CFC2}"/>
+              </a:ext>
+            </a:extLst>
+          </p:cNvPr>
+          <p:cNvSpPr>
+            <a:spLocks noGrp="1"/>
+          </p:cNvSpPr>
+          <p:nvPr>
+            <p:ph type="ftr" sz="quarter" idx="11"/>
+          </p:nvPr>
+        </p:nvSpPr>
+        <p:spPr/>
+        <p:txBody>
+          <a:bodyPr/>
+          <a:lstStyle/>
+          <a:p>
+            <a:r>
+              <a:rPr lang="en-US"/>
+              <a:t>Tennis Channel 2025 - CONFIDENTIAL</a:t>
+            </a:r>
+          </a:p>
+        </p:txBody>
+      </p:sp>
+      <p:sp>
+        <p:nvSpPr>
+          <p:cNvPr id="6" name="Slide Number Placeholder 5">
+            <a:extLst>
+              <a:ext uri="{FF2B5EF4-FFF2-40B4-BE49-F238E27FC236}">
+                <a16:creationId xmlns:a16="http://schemas.microsoft.com/office/drawing/2014/main" id="{7591AB8D-4166-DA76-F40F-CB996B4F4D19}"/>
+              </a:ext>
+            </a:extLst>
+          </p:cNvPr>
+          <p:cNvSpPr>
+            <a:spLocks noGrp="1"/>
+          </p:cNvSpPr>
+          <p:nvPr>
+            <p:ph type="sldNum" sz="quarter" idx="12"/>
+          </p:nvPr>
+        </p:nvSpPr>
+        <p:spPr/>
+        <p:txBody>
+          <a:bodyPr/>
+          <a:lstStyle/>
+          <a:p>
+            <a:fld id="{F6DAA944-EC5F-9D44-9E3D-812366C7D5CA}" type="slidenum">
+              <a:rPr lang="en-US" smtClean="0"/>
+              <a:t>‹#›</a:t>
+            </a:fld>
+            <a:endParaRPr lang="en-US"/>
+          </a:p>
+        </p:txBody>
+      </p:sp>
+    </p:spTree>
+    <p:extLst>
+      <p:ext uri="{BB962C8B-B14F-4D97-AF65-F5344CB8AC3E}">
+        <p14:creationId xmlns:p14="http://schemas.microsoft.com/office/powerpoint/2010/main" val="2712274396"/>
+      </p:ext>
+    </p:extLst>
+  </p:cSld>
+  <p:clrMapOvr>
+    <a:masterClrMapping/>
+  </p:clrMapOvr>
+  <p:hf hdr="0" dt="0"/>
+</p:sldLayout>
+</file>
+
+<file path=ppt/slideLayouts/slideLayout4.xml><?xml version="1.0" encoding="utf-8"?>
+<p:sldLayout xmlns:a="http://schemas.openxmlformats.org/drawingml/2006/main" xmlns:r="http://schemas.openxmlformats.org/officeDocument/2006/relationships" xmlns:p="http://schemas.openxmlformats.org/presentationml/2006/main" type="twoObj" preserve="1">
+  <p:cSld name="Two Content">
+    <p:spTree>
+      <p:nvGrpSpPr>
+        <p:cNvPr id="1" name=""/>
+        <p:cNvGrpSpPr/>
+        <p:nvPr/>
+      </p:nvGrpSpPr>
+      <p:grpSpPr>
+        <a:xfrm>
+          <a:off x="0" y="0"/>
+          <a:ext cx="0" cy="0"/>
+          <a:chOff x="0" y="0"/>
+          <a:chExt cx="0" cy="0"/>
+        </a:xfrm>
+      </p:grpSpPr>
+      <p:sp>
+        <p:nvSpPr>
+          <p:cNvPr id="2" name="Title 1">
+            <a:extLst>
+              <a:ext uri="{FF2B5EF4-FFF2-40B4-BE49-F238E27FC236}">
+                <a16:creationId xmlns:a16="http://schemas.microsoft.com/office/drawing/2014/main" id="{F2D33359-1342-9126-C00F-43885A33B2E5}"/>
+              </a:ext>
+            </a:extLst>
+          </p:cNvPr>
+          <p:cNvSpPr>
+            <a:spLocks noGrp="1"/>
+          </p:cNvSpPr>
+          <p:nvPr>
+            <p:ph type="title"/>
+          </p:nvPr>
+        </p:nvSpPr>
+        <p:spPr/>
+        <p:txBody>
+          <a:bodyPr/>
+          <a:lstStyle/>
+          <a:p>
+            <a:r>
+              <a:rPr lang="en-US"/>
+              <a:t>Click to edit Master title style</a:t>
+            </a:r>
+          </a:p>
+        </p:txBody>
+      </p:sp>
+      <p:sp>
+        <p:nvSpPr>
+          <p:cNvPr id="3" name="Content Placeholder 2">
+            <a:extLst>
+              <a:ext uri="{FF2B5EF4-FFF2-40B4-BE49-F238E27FC236}">
+                <a16:creationId xmlns:a16="http://schemas.microsoft.com/office/drawing/2014/main" id="{F8346A5D-AA75-B6A7-2A97-8175D78EB429}"/>
+              </a:ext>
+            </a:extLst>
+          </p:cNvPr>
+          <p:cNvSpPr>
+            <a:spLocks noGrp="1"/>
+          </p:cNvSpPr>
+          <p:nvPr>
+            <p:ph sz="half" idx="1"/>
+          </p:nvPr>
+        </p:nvSpPr>
+        <p:spPr>
+          <a:xfrm>
+            <a:off x="848678" y="1947333"/>
+            <a:ext cx="5246370" cy="4641427"/>
+          </a:xfrm>
+        </p:spPr>
+        <p:txBody>
+          <a:bodyPr/>
+          <a:lstStyle/>
+          <a:p>
+            <a:pPr lvl="0"/>
+            <a:r>
+              <a:rPr lang="en-US"/>
+              <a:t>Click to edit Master text styles</a:t>
+            </a:r>
+          </a:p>
+          <a:p>
+            <a:pPr lvl="1"/>
+            <a:r>
+              <a:rPr lang="en-US"/>
+              <a:t>Second level</a:t>
+            </a:r>
+          </a:p>
+          <a:p>
+            <a:pPr lvl="2"/>
+            <a:r>
+              <a:rPr lang="en-US"/>
+              <a:t>Third level</a:t>
+            </a:r>
+          </a:p>
+          <a:p>
+            <a:pPr lvl="3"/>
+            <a:r>
+              <a:rPr lang="en-US"/>
+              <a:t>Fourth level</a:t>
+            </a:r>
+          </a:p>
+          <a:p>
+            <a:pPr lvl="4"/>
+            <a:r>
+              <a:rPr lang="en-US"/>
+              <a:t>Fifth level</a:t>
+            </a:r>
+          </a:p>
+        </p:txBody>
+      </p:sp>
+      <p:sp>
+        <p:nvSpPr>
+          <p:cNvPr id="4" name="Content Placeholder 3">
+            <a:extLst>
+              <a:ext uri="{FF2B5EF4-FFF2-40B4-BE49-F238E27FC236}">
+                <a16:creationId xmlns:a16="http://schemas.microsoft.com/office/drawing/2014/main" id="{F05D2B62-3F5B-CA87-894D-E35F3A7A73FA}"/>
+              </a:ext>
+            </a:extLst>
+          </p:cNvPr>
+          <p:cNvSpPr>
+            <a:spLocks noGrp="1"/>
+          </p:cNvSpPr>
+          <p:nvPr>
+            <p:ph sz="half" idx="2"/>
+          </p:nvPr>
+        </p:nvSpPr>
+        <p:spPr>
+          <a:xfrm>
+            <a:off x="6249353" y="1947333"/>
+            <a:ext cx="5246370" cy="4641427"/>
+          </a:xfrm>
+        </p:spPr>
+        <p:txBody>
+          <a:bodyPr/>
+          <a:lstStyle/>
+          <a:p>
+            <a:pPr lvl="0"/>
+            <a:r>
+              <a:rPr lang="en-US"/>
+              <a:t>Click to edit Master text styles</a:t>
+            </a:r>
+          </a:p>
+          <a:p>
+            <a:pPr lvl="1"/>
+            <a:r>
+              <a:rPr lang="en-US"/>
+              <a:t>Second level</a:t>
+            </a:r>
+          </a:p>
+          <a:p>
+            <a:pPr lvl="2"/>
+            <a:r>
+              <a:rPr lang="en-US"/>
+              <a:t>Third level</a:t>
+            </a:r>
+          </a:p>
+          <a:p>
+            <a:pPr lvl="3"/>
+            <a:r>
+              <a:rPr lang="en-US"/>
+              <a:t>Fourth level</a:t>
+            </a:r>
+          </a:p>
+          <a:p>
+            <a:pPr lvl="4"/>
+            <a:r>
+              <a:rPr lang="en-US"/>
+              <a:t>Fifth level</a:t>
+            </a:r>
+          </a:p>
+        </p:txBody>
+      </p:sp>
+      <p:sp>
+        <p:nvSpPr>
+          <p:cNvPr id="5" name="Date Placeholder 4">
+            <a:extLst>
+              <a:ext uri="{FF2B5EF4-FFF2-40B4-BE49-F238E27FC236}">
+                <a16:creationId xmlns:a16="http://schemas.microsoft.com/office/drawing/2014/main" id="{2EAB9ACC-74B2-0D1E-9729-94C5BDE608E7}"/>
+              </a:ext>
+            </a:extLst>
+          </p:cNvPr>
+          <p:cNvSpPr>
+            <a:spLocks noGrp="1"/>
+          </p:cNvSpPr>
+          <p:nvPr>
+            <p:ph type="dt" sz="half" idx="10"/>
+          </p:nvPr>
+        </p:nvSpPr>
+        <p:spPr/>
+        <p:txBody>
+          <a:bodyPr/>
+          <a:lstStyle/>
+          <a:p>
+            <a:fld id="{07846480-99BB-4344-B97D-DCA362A5FDF8}" type="datetime1">
+              <a:rPr lang="en-US" smtClean="0"/>
+              <a:t>7/6/26</a:t>
+            </a:fld>
+            <a:endParaRPr lang="en-US"/>
+          </a:p>
+        </p:txBody>
+      </p:sp>
+      <p:sp>
+        <p:nvSpPr>
+          <p:cNvPr id="6" name="Footer Placeholder 5">
+            <a:extLst>
+              <a:ext uri="{FF2B5EF4-FFF2-40B4-BE49-F238E27FC236}">
+                <a16:creationId xmlns:a16="http://schemas.microsoft.com/office/drawing/2014/main" id="{0EB8D0D1-614A-F39F-2359-171D4F29F76E}"/>
+              </a:ext>
+            </a:extLst>
+          </p:cNvPr>
+          <p:cNvSpPr>
+            <a:spLocks noGrp="1"/>
+          </p:cNvSpPr>
+          <p:nvPr>
+            <p:ph type="ftr" sz="quarter" idx="11"/>
+          </p:nvPr>
+        </p:nvSpPr>
+        <p:spPr/>
+        <p:txBody>
+          <a:bodyPr/>
+          <a:lstStyle/>
+          <a:p>
+            <a:r>
+              <a:rPr lang="en-US"/>
+              <a:t>Tennis Channel 2025 - CONFIDENTIAL</a:t>
+            </a:r>
+          </a:p>
+        </p:txBody>
+      </p:sp>
+      <p:sp>
+        <p:nvSpPr>
+          <p:cNvPr id="7" name="Slide Number Placeholder 6">
+            <a:extLst>
+              <a:ext uri="{FF2B5EF4-FFF2-40B4-BE49-F238E27FC236}">
+                <a16:creationId xmlns:a16="http://schemas.microsoft.com/office/drawing/2014/main" id="{41124FE4-5372-56CC-9C0A-792C0649DD98}"/>
+              </a:ext>
+            </a:extLst>
+          </p:cNvPr>
+          <p:cNvSpPr>
+            <a:spLocks noGrp="1"/>
+          </p:cNvSpPr>
+          <p:nvPr>
+            <p:ph type="sldNum" sz="quarter" idx="12"/>
+          </p:nvPr>
+        </p:nvSpPr>
+        <p:spPr/>
+        <p:txBody>
+          <a:bodyPr/>
+          <a:lstStyle/>
+          <a:p>
+            <a:fld id="{F6DAA944-EC5F-9D44-9E3D-812366C7D5CA}" type="slidenum">
+              <a:rPr lang="en-US" smtClean="0"/>
+              <a:t>‹#›</a:t>
+            </a:fld>
+            <a:endParaRPr lang="en-US"/>
+          </a:p>
+        </p:txBody>
+      </p:sp>
+    </p:spTree>
+    <p:extLst>
+      <p:ext uri="{BB962C8B-B14F-4D97-AF65-F5344CB8AC3E}">
+        <p14:creationId xmlns:p14="http://schemas.microsoft.com/office/powerpoint/2010/main" val="3611728568"/>
+      </p:ext>
+    </p:extLst>
+  </p:cSld>
+  <p:clrMapOvr>
+    <a:masterClrMapping/>
+  </p:clrMapOvr>
+  <p:hf hdr="0" dt="0"/>
+</p:sldLayout>
+</file>
+
+<file path=ppt/slideLayouts/slideLayout5.xml><?xml version="1.0" encoding="utf-8"?>
+<p:sldLayout xmlns:a="http://schemas.openxmlformats.org/drawingml/2006/main" xmlns:r="http://schemas.openxmlformats.org/officeDocument/2006/relationships" xmlns:p="http://schemas.openxmlformats.org/presentationml/2006/main" type="twoTxTwoObj" preserve="1">
+  <p:cSld name="Comparison">
+    <p:spTree>
+      <p:nvGrpSpPr>
+        <p:cNvPr id="1" name=""/>
+        <p:cNvGrpSpPr/>
+        <p:nvPr/>
+      </p:nvGrpSpPr>
+      <p:grpSpPr>
+        <a:xfrm>
+          <a:off x="0" y="0"/>
+          <a:ext cx="0" cy="0"/>
+          <a:chOff x="0" y="0"/>
+          <a:chExt cx="0" cy="0"/>
+        </a:xfrm>
+      </p:grpSpPr>
+      <p:sp>
+        <p:nvSpPr>
+          <p:cNvPr id="2" name="Title 1">
+            <a:extLst>
+              <a:ext uri="{FF2B5EF4-FFF2-40B4-BE49-F238E27FC236}">
+                <a16:creationId xmlns:a16="http://schemas.microsoft.com/office/drawing/2014/main" id="{37F741B6-C81C-44D7-8314-B9E48D54DCC6}"/>
+              </a:ext>
+            </a:extLst>
+          </p:cNvPr>
+          <p:cNvSpPr>
+            <a:spLocks noGrp="1"/>
+          </p:cNvSpPr>
+          <p:nvPr>
+            <p:ph type="title"/>
+          </p:nvPr>
+        </p:nvSpPr>
+        <p:spPr>
+          <a:xfrm>
+            <a:off x="850285" y="389467"/>
+            <a:ext cx="10647045" cy="1413934"/>
+          </a:xfrm>
+        </p:spPr>
+        <p:txBody>
+          <a:bodyPr/>
+          <a:lstStyle/>
+          <a:p>
+            <a:r>
+              <a:rPr lang="en-US"/>
+              <a:t>Click to edit Master title style</a:t>
+            </a:r>
+          </a:p>
+        </p:txBody>
+      </p:sp>
+      <p:sp>
+        <p:nvSpPr>
+          <p:cNvPr id="3" name="Text Placeholder 2">
+            <a:extLst>
+              <a:ext uri="{FF2B5EF4-FFF2-40B4-BE49-F238E27FC236}">
+                <a16:creationId xmlns:a16="http://schemas.microsoft.com/office/drawing/2014/main" id="{6A5B6461-6F52-D709-1AA9-7693FA24E633}"/>
+              </a:ext>
+            </a:extLst>
+          </p:cNvPr>
+          <p:cNvSpPr>
+            <a:spLocks noGrp="1"/>
+          </p:cNvSpPr>
+          <p:nvPr>
+            <p:ph type="body" idx="1"/>
+          </p:nvPr>
+        </p:nvSpPr>
+        <p:spPr>
+          <a:xfrm>
+            <a:off x="850286" y="1793241"/>
+            <a:ext cx="5222259" cy="878839"/>
+          </a:xfrm>
+        </p:spPr>
+        <p:txBody>
+          <a:bodyPr anchor="b"/>
+          <a:lstStyle>
+            <a:lvl1pPr marL="0" indent="0">
+              <a:buNone/>
+              <a:defRPr sz="2400" b="1"/>
+            </a:lvl1pPr>
+            <a:lvl2pPr marL="457200" indent="0">
+              <a:buNone/>
+              <a:defRPr sz="2000" b="1"/>
+            </a:lvl2pPr>
+            <a:lvl3pPr marL="914400" indent="0">
+              <a:buNone/>
+              <a:defRPr sz="1800" b="1"/>
+            </a:lvl3pPr>
+            <a:lvl4pPr marL="1371600" indent="0">
+              <a:buNone/>
+              <a:defRPr sz="1600" b="1"/>
+            </a:lvl4pPr>
+            <a:lvl5pPr marL="1828800" indent="0">
+              <a:buNone/>
+              <a:defRPr sz="1600" b="1"/>
+            </a:lvl5pPr>
+            <a:lvl6pPr marL="2286000" indent="0">
+              <a:buNone/>
+              <a:defRPr sz="1600" b="1"/>
+            </a:lvl6pPr>
+            <a:lvl7pPr marL="2743200" indent="0">
+              <a:buNone/>
+              <a:defRPr sz="1600" b="1"/>
+            </a:lvl7pPr>
+            <a:lvl8pPr marL="3200400" indent="0">
+              <a:buNone/>
+              <a:defRPr sz="1600" b="1"/>
+            </a:lvl8pPr>
+            <a:lvl9pPr marL="3657600" indent="0">
+              <a:buNone/>
+              <a:defRPr sz="1600" b="1"/>
+            </a:lvl9pPr>
+          </a:lstStyle>
+          <a:p>
+            <a:pPr lvl="0"/>
+            <a:r>
+              <a:rPr lang="en-US"/>
+              <a:t>Click to edit Master text styles</a:t>
+            </a:r>
+          </a:p>
+        </p:txBody>
+      </p:sp>
+      <p:sp>
+        <p:nvSpPr>
+          <p:cNvPr id="4" name="Content Placeholder 3">
+            <a:extLst>
+              <a:ext uri="{FF2B5EF4-FFF2-40B4-BE49-F238E27FC236}">
+                <a16:creationId xmlns:a16="http://schemas.microsoft.com/office/drawing/2014/main" id="{2F705DFE-74DC-8B97-1F5D-76C626F585D2}"/>
+              </a:ext>
+            </a:extLst>
+          </p:cNvPr>
+          <p:cNvSpPr>
+            <a:spLocks noGrp="1"/>
+          </p:cNvSpPr>
+          <p:nvPr>
+            <p:ph sz="half" idx="2"/>
+          </p:nvPr>
+        </p:nvSpPr>
+        <p:spPr>
+          <a:xfrm>
+            <a:off x="850286" y="2672080"/>
+            <a:ext cx="5222259" cy="3930227"/>
+          </a:xfrm>
+        </p:spPr>
+        <p:txBody>
+          <a:bodyPr/>
+          <a:lstStyle/>
+          <a:p>
+            <a:pPr lvl="0"/>
+            <a:r>
+              <a:rPr lang="en-US"/>
+              <a:t>Click to edit Master text styles</a:t>
+            </a:r>
+          </a:p>
+          <a:p>
+            <a:pPr lvl="1"/>
+            <a:r>
+              <a:rPr lang="en-US"/>
+              <a:t>Second level</a:t>
+            </a:r>
+          </a:p>
+          <a:p>
+            <a:pPr lvl="2"/>
+            <a:r>
+              <a:rPr lang="en-US"/>
+              <a:t>Third level</a:t>
+            </a:r>
+          </a:p>
+          <a:p>
+            <a:pPr lvl="3"/>
+            <a:r>
+              <a:rPr lang="en-US"/>
+              <a:t>Fourth level</a:t>
+            </a:r>
+          </a:p>
+          <a:p>
+            <a:pPr lvl="4"/>
+            <a:r>
+              <a:rPr lang="en-US"/>
+              <a:t>Fifth level</a:t>
+            </a:r>
+          </a:p>
+        </p:txBody>
+      </p:sp>
+      <p:sp>
+        <p:nvSpPr>
+          <p:cNvPr id="5" name="Text Placeholder 4">
+            <a:extLst>
+              <a:ext uri="{FF2B5EF4-FFF2-40B4-BE49-F238E27FC236}">
+                <a16:creationId xmlns:a16="http://schemas.microsoft.com/office/drawing/2014/main" id="{09030914-B7F9-314F-3471-1EB0342CE915}"/>
+              </a:ext>
+            </a:extLst>
+          </p:cNvPr>
+          <p:cNvSpPr>
+            <a:spLocks noGrp="1"/>
+          </p:cNvSpPr>
+          <p:nvPr>
+            <p:ph type="body" sz="quarter" idx="3"/>
+          </p:nvPr>
+        </p:nvSpPr>
+        <p:spPr>
+          <a:xfrm>
+            <a:off x="6249352" y="1793241"/>
+            <a:ext cx="5247978" cy="878839"/>
+          </a:xfrm>
+        </p:spPr>
+        <p:txBody>
+          <a:bodyPr anchor="b"/>
+          <a:lstStyle>
+            <a:lvl1pPr marL="0" indent="0">
+              <a:buNone/>
+              <a:defRPr sz="2400" b="1"/>
+            </a:lvl1pPr>
+            <a:lvl2pPr marL="457200" indent="0">
+              <a:buNone/>
+              <a:defRPr sz="2000" b="1"/>
+            </a:lvl2pPr>
+            <a:lvl3pPr marL="914400" indent="0">
+              <a:buNone/>
+              <a:defRPr sz="1800" b="1"/>
+            </a:lvl3pPr>
+            <a:lvl4pPr marL="1371600" indent="0">
+              <a:buNone/>
+              <a:defRPr sz="1600" b="1"/>
+            </a:lvl4pPr>
+            <a:lvl5pPr marL="1828800" indent="0">
+              <a:buNone/>
+              <a:defRPr sz="1600" b="1"/>
+            </a:lvl5pPr>
+            <a:lvl6pPr marL="2286000" indent="0">
+              <a:buNone/>
+              <a:defRPr sz="1600" b="1"/>
+            </a:lvl6pPr>
+            <a:lvl7pPr marL="2743200" indent="0">
+              <a:buNone/>
+              <a:defRPr sz="1600" b="1"/>
+            </a:lvl7pPr>
+            <a:lvl8pPr marL="3200400" indent="0">
+              <a:buNone/>
+              <a:defRPr sz="1600" b="1"/>
+            </a:lvl8pPr>
+            <a:lvl9pPr marL="3657600" indent="0">
+              <a:buNone/>
+              <a:defRPr sz="1600" b="1"/>
+            </a:lvl9pPr>
+          </a:lstStyle>
+          <a:p>
+            <a:pPr lvl="0"/>
+            <a:r>
+              <a:rPr lang="en-US"/>
+              <a:t>Click to edit Master text styles</a:t>
+            </a:r>
+          </a:p>
+        </p:txBody>
+      </p:sp>
+      <p:sp>
+        <p:nvSpPr>
+          <p:cNvPr id="6" name="Content Placeholder 5">
+            <a:extLst>
+              <a:ext uri="{FF2B5EF4-FFF2-40B4-BE49-F238E27FC236}">
+                <a16:creationId xmlns:a16="http://schemas.microsoft.com/office/drawing/2014/main" id="{9D342F94-E36A-FBCB-AD5A-A7A2F73400BD}"/>
+              </a:ext>
+            </a:extLst>
+          </p:cNvPr>
+          <p:cNvSpPr>
+            <a:spLocks noGrp="1"/>
+          </p:cNvSpPr>
+          <p:nvPr>
+            <p:ph sz="quarter" idx="4"/>
+          </p:nvPr>
+        </p:nvSpPr>
+        <p:spPr>
+          <a:xfrm>
+            <a:off x="6249352" y="2672080"/>
+            <a:ext cx="5247978" cy="3930227"/>
+          </a:xfrm>
+        </p:spPr>
+        <p:txBody>
+          <a:bodyPr/>
+          <a:lstStyle/>
+          <a:p>
+            <a:pPr lvl="0"/>
+            <a:r>
+              <a:rPr lang="en-US"/>
+              <a:t>Click to edit Master text styles</a:t>
+            </a:r>
+          </a:p>
+          <a:p>
+            <a:pPr lvl="1"/>
+            <a:r>
+              <a:rPr lang="en-US"/>
+              <a:t>Second level</a:t>
+            </a:r>
+          </a:p>
+          <a:p>
+            <a:pPr lvl="2"/>
+            <a:r>
+              <a:rPr lang="en-US"/>
+              <a:t>Third level</a:t>
+            </a:r>
+          </a:p>
+          <a:p>
+            <a:pPr lvl="3"/>
+            <a:r>
+              <a:rPr lang="en-US"/>
+              <a:t>Fourth level</a:t>
+            </a:r>
+          </a:p>
+          <a:p>
+            <a:pPr lvl="4"/>
+            <a:r>
+              <a:rPr lang="en-US"/>
+              <a:t>Fifth level</a:t>
+            </a:r>
+          </a:p>
+        </p:txBody>
+      </p:sp>
+      <p:sp>
+        <p:nvSpPr>
+          <p:cNvPr id="7" name="Date Placeholder 6">
+            <a:extLst>
+              <a:ext uri="{FF2B5EF4-FFF2-40B4-BE49-F238E27FC236}">
+                <a16:creationId xmlns:a16="http://schemas.microsoft.com/office/drawing/2014/main" id="{CBDDA9A0-9B83-1061-522A-D57667671334}"/>
+              </a:ext>
+            </a:extLst>
+          </p:cNvPr>
+          <p:cNvSpPr>
+            <a:spLocks noGrp="1"/>
+          </p:cNvSpPr>
+          <p:nvPr>
+            <p:ph type="dt" sz="half" idx="10"/>
+          </p:nvPr>
+        </p:nvSpPr>
+        <p:spPr/>
+        <p:txBody>
+          <a:bodyPr/>
+          <a:lstStyle/>
+          <a:p>
+            <a:fld id="{31F8A984-FDA0-474C-92E2-0FCD6F165F9D}" type="datetime1">
+              <a:rPr lang="en-US" smtClean="0"/>
+              <a:t>7/6/26</a:t>
+            </a:fld>
+            <a:endParaRPr lang="en-US"/>
+          </a:p>
+        </p:txBody>
+      </p:sp>
+      <p:sp>
+        <p:nvSpPr>
+          <p:cNvPr id="8" name="Footer Placeholder 7">
+            <a:extLst>
+              <a:ext uri="{FF2B5EF4-FFF2-40B4-BE49-F238E27FC236}">
+                <a16:creationId xmlns:a16="http://schemas.microsoft.com/office/drawing/2014/main" id="{66A1BFC6-DD30-8582-9BB5-A4C2FCA69217}"/>
+              </a:ext>
+            </a:extLst>
+          </p:cNvPr>
+          <p:cNvSpPr>
+            <a:spLocks noGrp="1"/>
+          </p:cNvSpPr>
+          <p:nvPr>
+            <p:ph type="ftr" sz="quarter" idx="11"/>
+          </p:nvPr>
+        </p:nvSpPr>
+        <p:spPr/>
+        <p:txBody>
+          <a:bodyPr/>
+          <a:lstStyle/>
+          <a:p>
+            <a:r>
+              <a:rPr lang="en-US"/>
+              <a:t>Tennis Channel 2025 - CONFIDENTIAL</a:t>
+            </a:r>
+          </a:p>
+        </p:txBody>
+      </p:sp>
+      <p:sp>
+        <p:nvSpPr>
+          <p:cNvPr id="9" name="Slide Number Placeholder 8">
+            <a:extLst>
+              <a:ext uri="{FF2B5EF4-FFF2-40B4-BE49-F238E27FC236}">
+                <a16:creationId xmlns:a16="http://schemas.microsoft.com/office/drawing/2014/main" id="{50B897CB-2FF9-D746-CA12-5F53E4C9EF19}"/>
+              </a:ext>
+            </a:extLst>
+          </p:cNvPr>
+          <p:cNvSpPr>
+            <a:spLocks noGrp="1"/>
+          </p:cNvSpPr>
+          <p:nvPr>
+            <p:ph type="sldNum" sz="quarter" idx="12"/>
+          </p:nvPr>
+        </p:nvSpPr>
+        <p:spPr/>
+        <p:txBody>
+          <a:bodyPr/>
+          <a:lstStyle/>
+          <a:p>
+            <a:fld id="{F6DAA944-EC5F-9D44-9E3D-812366C7D5CA}" type="slidenum">
+              <a:rPr lang="en-US" smtClean="0"/>
+              <a:t>‹#›</a:t>
+            </a:fld>
+            <a:endParaRPr lang="en-US"/>
+          </a:p>
+        </p:txBody>
+      </p:sp>
+    </p:spTree>
+    <p:extLst>
+      <p:ext uri="{BB962C8B-B14F-4D97-AF65-F5344CB8AC3E}">
+        <p14:creationId xmlns:p14="http://schemas.microsoft.com/office/powerpoint/2010/main" val="2960872535"/>
+      </p:ext>
+    </p:extLst>
+  </p:cSld>
+  <p:clrMapOvr>
+    <a:masterClrMapping/>
+  </p:clrMapOvr>
+  <p:hf hdr="0" dt="0"/>
+</p:sldLayout>
+</file>
+
+<file path=ppt/slideLayouts/slideLayout6.xml><?xml version="1.0" encoding="utf-8"?>
+<p:sldLayout xmlns:a="http://schemas.openxmlformats.org/drawingml/2006/main" xmlns:r="http://schemas.openxmlformats.org/officeDocument/2006/relationships" xmlns:p="http://schemas.openxmlformats.org/presentationml/2006/main" type="titleOnly" preserve="1">
+  <p:cSld name="Title Only">
+    <p:spTree>
+      <p:nvGrpSpPr>
+        <p:cNvPr id="1" name=""/>
+        <p:cNvGrpSpPr/>
+        <p:nvPr/>
+      </p:nvGrpSpPr>
+      <p:grpSpPr>
+        <a:xfrm>
+          <a:off x="0" y="0"/>
+          <a:ext cx="0" cy="0"/>
+          <a:chOff x="0" y="0"/>
+          <a:chExt cx="0" cy="0"/>
+        </a:xfrm>
+      </p:grpSpPr>
+      <p:sp>
+        <p:nvSpPr>
+          <p:cNvPr id="2" name="Title 1">
+            <a:extLst>
+              <a:ext uri="{FF2B5EF4-FFF2-40B4-BE49-F238E27FC236}">
+                <a16:creationId xmlns:a16="http://schemas.microsoft.com/office/drawing/2014/main" id="{0F0689EC-C4E0-F720-B4BB-9C306330584C}"/>
+              </a:ext>
+            </a:extLst>
+          </p:cNvPr>
+          <p:cNvSpPr>
+            <a:spLocks noGrp="1"/>
+          </p:cNvSpPr>
+          <p:nvPr>
+            <p:ph type="title"/>
+          </p:nvPr>
+        </p:nvSpPr>
+        <p:spPr/>
+        <p:txBody>
+          <a:bodyPr/>
+          <a:lstStyle/>
+          <a:p>
+            <a:r>
+              <a:rPr lang="en-US"/>
+              <a:t>Click to edit Master title style</a:t>
+            </a:r>
+          </a:p>
+        </p:txBody>
+      </p:sp>
+      <p:sp>
+        <p:nvSpPr>
+          <p:cNvPr id="3" name="Date Placeholder 2">
+            <a:extLst>
+              <a:ext uri="{FF2B5EF4-FFF2-40B4-BE49-F238E27FC236}">
+                <a16:creationId xmlns:a16="http://schemas.microsoft.com/office/drawing/2014/main" id="{73242ECA-686B-F2FE-244F-519EADC8FBC1}"/>
+              </a:ext>
+            </a:extLst>
+          </p:cNvPr>
+          <p:cNvSpPr>
+            <a:spLocks noGrp="1"/>
+          </p:cNvSpPr>
+          <p:nvPr>
+            <p:ph type="dt" sz="half" idx="10"/>
+          </p:nvPr>
+        </p:nvSpPr>
+        <p:spPr/>
+        <p:txBody>
+          <a:bodyPr/>
+          <a:lstStyle/>
+          <a:p>
+            <a:fld id="{DF7D6774-7599-9340-9771-ADFFFF50DA4A}" type="datetime1">
+              <a:rPr lang="en-US" smtClean="0"/>
+              <a:t>7/6/26</a:t>
+            </a:fld>
+            <a:endParaRPr lang="en-US"/>
+          </a:p>
+        </p:txBody>
+      </p:sp>
+      <p:sp>
+        <p:nvSpPr>
+          <p:cNvPr id="4" name="Footer Placeholder 3">
+            <a:extLst>
+              <a:ext uri="{FF2B5EF4-FFF2-40B4-BE49-F238E27FC236}">
+                <a16:creationId xmlns:a16="http://schemas.microsoft.com/office/drawing/2014/main" id="{994311D5-E61B-E713-F072-7FC70EFC6106}"/>
+              </a:ext>
+            </a:extLst>
+          </p:cNvPr>
+          <p:cNvSpPr>
+            <a:spLocks noGrp="1"/>
+          </p:cNvSpPr>
+          <p:nvPr>
+            <p:ph type="ftr" sz="quarter" idx="11"/>
+          </p:nvPr>
+        </p:nvSpPr>
+        <p:spPr/>
+        <p:txBody>
+          <a:bodyPr/>
+          <a:lstStyle/>
+          <a:p>
+            <a:r>
+              <a:rPr lang="en-US"/>
+              <a:t>Tennis Channel 2025 - CONFIDENTIAL</a:t>
+            </a:r>
+          </a:p>
+        </p:txBody>
+      </p:sp>
+      <p:sp>
+        <p:nvSpPr>
+          <p:cNvPr id="5" name="Slide Number Placeholder 4">
+            <a:extLst>
+              <a:ext uri="{FF2B5EF4-FFF2-40B4-BE49-F238E27FC236}">
+                <a16:creationId xmlns:a16="http://schemas.microsoft.com/office/drawing/2014/main" id="{D8B1AD28-E6B8-41E5-013F-EA3705C5052B}"/>
+              </a:ext>
+            </a:extLst>
+          </p:cNvPr>
+          <p:cNvSpPr>
+            <a:spLocks noGrp="1"/>
+          </p:cNvSpPr>
+          <p:nvPr>
+            <p:ph type="sldNum" sz="quarter" idx="12"/>
+          </p:nvPr>
+        </p:nvSpPr>
+        <p:spPr/>
+        <p:txBody>
+          <a:bodyPr/>
+          <a:lstStyle/>
+          <a:p>
+            <a:fld id="{F6DAA944-EC5F-9D44-9E3D-812366C7D5CA}" type="slidenum">
+              <a:rPr lang="en-US" smtClean="0"/>
+              <a:t>‹#›</a:t>
+            </a:fld>
+            <a:endParaRPr lang="en-US"/>
+          </a:p>
+        </p:txBody>
+      </p:sp>
+    </p:spTree>
+    <p:extLst>
+      <p:ext uri="{BB962C8B-B14F-4D97-AF65-F5344CB8AC3E}">
+        <p14:creationId xmlns:p14="http://schemas.microsoft.com/office/powerpoint/2010/main" val="1461587223"/>
+      </p:ext>
+    </p:extLst>
+  </p:cSld>
+  <p:clrMapOvr>
+    <a:masterClrMapping/>
+  </p:clrMapOvr>
+  <p:hf hdr="0" dt="0"/>
+</p:sldLayout>
+</file>
+
+<file path=ppt/slideLayouts/slideLayout7.xml><?xml version="1.0" encoding="utf-8"?>
+<p:sldLayout xmlns:a="http://schemas.openxmlformats.org/drawingml/2006/main" xmlns:r="http://schemas.openxmlformats.org/officeDocument/2006/relationships" xmlns:p="http://schemas.openxmlformats.org/presentationml/2006/main" type="blank" preserve="1">
+  <p:cSld name="Blank">
+    <p:spTree>
+      <p:nvGrpSpPr>
+        <p:cNvPr id="1" name=""/>
+        <p:cNvGrpSpPr/>
+        <p:nvPr/>
+      </p:nvGrpSpPr>
+      <p:grpSpPr>
+        <a:xfrm>
+          <a:off x="0" y="0"/>
+          <a:ext cx="0" cy="0"/>
+          <a:chOff x="0" y="0"/>
+          <a:chExt cx="0" cy="0"/>
+        </a:xfrm>
+      </p:grpSpPr>
+      <p:sp>
+        <p:nvSpPr>
+          <p:cNvPr id="2" name="Date Placeholder 1">
+            <a:extLst>
+              <a:ext uri="{FF2B5EF4-FFF2-40B4-BE49-F238E27FC236}">
+                <a16:creationId xmlns:a16="http://schemas.microsoft.com/office/drawing/2014/main" id="{59044EE4-4846-6C32-288C-E05F40C3111D}"/>
+              </a:ext>
+            </a:extLst>
+          </p:cNvPr>
+          <p:cNvSpPr>
+            <a:spLocks noGrp="1"/>
+          </p:cNvSpPr>
+          <p:nvPr>
+            <p:ph type="dt" sz="half" idx="10"/>
+          </p:nvPr>
+        </p:nvSpPr>
+        <p:spPr/>
+        <p:txBody>
+          <a:bodyPr/>
+          <a:lstStyle/>
+          <a:p>
+            <a:fld id="{9CBD47B3-23AB-F54B-9A7B-8C00C8081A30}" type="datetime1">
+              <a:rPr lang="en-US" smtClean="0"/>
+              <a:t>7/6/26</a:t>
+            </a:fld>
+            <a:endParaRPr lang="en-US"/>
+          </a:p>
+        </p:txBody>
+      </p:sp>
+      <p:sp>
+        <p:nvSpPr>
+          <p:cNvPr id="3" name="Footer Placeholder 2">
+            <a:extLst>
+              <a:ext uri="{FF2B5EF4-FFF2-40B4-BE49-F238E27FC236}">
+                <a16:creationId xmlns:a16="http://schemas.microsoft.com/office/drawing/2014/main" id="{6261C964-1C2C-8775-5756-EB8BCF7C5D8E}"/>
+              </a:ext>
+            </a:extLst>
+          </p:cNvPr>
+          <p:cNvSpPr>
+            <a:spLocks noGrp="1"/>
+          </p:cNvSpPr>
+          <p:nvPr>
+            <p:ph type="ftr" sz="quarter" idx="11"/>
+          </p:nvPr>
+        </p:nvSpPr>
+        <p:spPr/>
+        <p:txBody>
+          <a:bodyPr/>
+          <a:lstStyle/>
+          <a:p>
+            <a:r>
+              <a:rPr lang="en-US"/>
+              <a:t>Tennis Channel 2025 - CONFIDENTIAL</a:t>
+            </a:r>
+          </a:p>
+        </p:txBody>
+      </p:sp>
+      <p:sp>
+        <p:nvSpPr>
+          <p:cNvPr id="4" name="Slide Number Placeholder 3">
+            <a:extLst>
+              <a:ext uri="{FF2B5EF4-FFF2-40B4-BE49-F238E27FC236}">
+                <a16:creationId xmlns:a16="http://schemas.microsoft.com/office/drawing/2014/main" id="{FACE2306-71B3-FBB9-6236-9950E5EAF320}"/>
+              </a:ext>
+            </a:extLst>
+          </p:cNvPr>
+          <p:cNvSpPr>
+            <a:spLocks noGrp="1"/>
+          </p:cNvSpPr>
+          <p:nvPr>
+            <p:ph type="sldNum" sz="quarter" idx="12"/>
+          </p:nvPr>
+        </p:nvSpPr>
+        <p:spPr/>
+        <p:txBody>
+          <a:bodyPr/>
+          <a:lstStyle/>
+          <a:p>
+            <a:fld id="{F6DAA944-EC5F-9D44-9E3D-812366C7D5CA}" type="slidenum">
+              <a:rPr lang="en-US" smtClean="0"/>
+              <a:t>‹#›</a:t>
+            </a:fld>
+            <a:endParaRPr lang="en-US"/>
+          </a:p>
+        </p:txBody>
+      </p:sp>
+    </p:spTree>
+    <p:extLst>
+      <p:ext uri="{BB962C8B-B14F-4D97-AF65-F5344CB8AC3E}">
+        <p14:creationId xmlns:p14="http://schemas.microsoft.com/office/powerpoint/2010/main" val="2778362405"/>
+      </p:ext>
+    </p:extLst>
+  </p:cSld>
+  <p:clrMapOvr>
+    <a:masterClrMapping/>
+  </p:clrMapOvr>
+  <p:hf hdr="0" dt="0"/>
+</p:sldLayout>
+</file>
+
+<file path=ppt/slideLayouts/slideLayout8.xml><?xml version="1.0" encoding="utf-8"?>
+<p:sldLayout xmlns:a="http://schemas.openxmlformats.org/drawingml/2006/main" xmlns:r="http://schemas.openxmlformats.org/officeDocument/2006/relationships" xmlns:p="http://schemas.openxmlformats.org/presentationml/2006/main" type="objTx" preserve="1">
+  <p:cSld name="Content with Caption">
+    <p:spTree>
+      <p:nvGrpSpPr>
+        <p:cNvPr id="1" name=""/>
+        <p:cNvGrpSpPr/>
+        <p:nvPr/>
+      </p:nvGrpSpPr>
+      <p:grpSpPr>
+        <a:xfrm>
+          <a:off x="0" y="0"/>
+          <a:ext cx="0" cy="0"/>
+          <a:chOff x="0" y="0"/>
+          <a:chExt cx="0" cy="0"/>
+        </a:xfrm>
+      </p:grpSpPr>
+      <p:sp>
+        <p:nvSpPr>
+          <p:cNvPr id="2" name="Title 1">
+            <a:extLst>
+              <a:ext uri="{FF2B5EF4-FFF2-40B4-BE49-F238E27FC236}">
+                <a16:creationId xmlns:a16="http://schemas.microsoft.com/office/drawing/2014/main" id="{D10843BF-2A0F-47ED-D433-DF8E9551A7AC}"/>
+              </a:ext>
+            </a:extLst>
+          </p:cNvPr>
+          <p:cNvSpPr>
+            <a:spLocks noGrp="1"/>
+          </p:cNvSpPr>
+          <p:nvPr>
+            <p:ph type="title"/>
+          </p:nvPr>
+        </p:nvSpPr>
+        <p:spPr>
+          <a:xfrm>
+            <a:off x="850286" y="487680"/>
+            <a:ext cx="3981390" cy="1706880"/>
+          </a:xfrm>
+        </p:spPr>
+        <p:txBody>
+          <a:bodyPr anchor="b"/>
+          <a:lstStyle>
+            <a:lvl1pPr>
+              <a:defRPr sz="3200"/>
+            </a:lvl1pPr>
+          </a:lstStyle>
+          <a:p>
+            <a:r>
+              <a:rPr lang="en-US"/>
+              <a:t>Click to edit Master title style</a:t>
+            </a:r>
+          </a:p>
+        </p:txBody>
+      </p:sp>
+      <p:sp>
+        <p:nvSpPr>
+          <p:cNvPr id="3" name="Content Placeholder 2">
+            <a:extLst>
+              <a:ext uri="{FF2B5EF4-FFF2-40B4-BE49-F238E27FC236}">
+                <a16:creationId xmlns:a16="http://schemas.microsoft.com/office/drawing/2014/main" id="{6473D69E-2B52-800B-E2F9-FE835D84C945}"/>
+              </a:ext>
+            </a:extLst>
+          </p:cNvPr>
+          <p:cNvSpPr>
+            <a:spLocks noGrp="1"/>
+          </p:cNvSpPr>
+          <p:nvPr>
+            <p:ph idx="1"/>
+          </p:nvPr>
+        </p:nvSpPr>
+        <p:spPr>
+          <a:xfrm>
+            <a:off x="5247978" y="1053254"/>
+            <a:ext cx="6249353" cy="5198533"/>
+          </a:xfrm>
+        </p:spPr>
+        <p:txBody>
+          <a:bodyPr/>
+          <a:lstStyle>
+            <a:lvl1pPr>
+              <a:defRPr sz="3200"/>
+            </a:lvl1pPr>
+            <a:lvl2pPr>
+              <a:defRPr sz="2800"/>
+            </a:lvl2pPr>
+            <a:lvl3pPr>
+              <a:defRPr sz="2400"/>
+            </a:lvl3pPr>
+            <a:lvl4pPr>
+              <a:defRPr sz="2000"/>
+            </a:lvl4pPr>
+            <a:lvl5pPr>
+              <a:defRPr sz="2000"/>
+            </a:lvl5pPr>
+            <a:lvl6pPr>
+              <a:defRPr sz="2000"/>
+            </a:lvl6pPr>
+            <a:lvl7pPr>
+              <a:defRPr sz="2000"/>
+            </a:lvl7pPr>
+            <a:lvl8pPr>
+              <a:defRPr sz="2000"/>
+            </a:lvl8pPr>
+            <a:lvl9pPr>
+              <a:defRPr sz="2000"/>
+            </a:lvl9pPr>
+          </a:lstStyle>
+          <a:p>
+            <a:pPr lvl="0"/>
+            <a:r>
+              <a:rPr lang="en-US"/>
+              <a:t>Click to edit Master text styles</a:t>
+            </a:r>
+          </a:p>
+          <a:p>
+            <a:pPr lvl="1"/>
+            <a:r>
+              <a:rPr lang="en-US"/>
+              <a:t>Second level</a:t>
+            </a:r>
+          </a:p>
+          <a:p>
+            <a:pPr lvl="2"/>
+            <a:r>
+              <a:rPr lang="en-US"/>
+              <a:t>Third level</a:t>
+            </a:r>
+          </a:p>
+          <a:p>
+            <a:pPr lvl="3"/>
+            <a:r>
+              <a:rPr lang="en-US"/>
+              <a:t>Fourth level</a:t>
+            </a:r>
+          </a:p>
+          <a:p>
+            <a:pPr lvl="4"/>
+            <a:r>
+              <a:rPr lang="en-US"/>
+              <a:t>Fifth level</a:t>
+            </a:r>
+          </a:p>
+        </p:txBody>
+      </p:sp>
+      <p:sp>
+        <p:nvSpPr>
+          <p:cNvPr id="4" name="Text Placeholder 3">
+            <a:extLst>
+              <a:ext uri="{FF2B5EF4-FFF2-40B4-BE49-F238E27FC236}">
+                <a16:creationId xmlns:a16="http://schemas.microsoft.com/office/drawing/2014/main" id="{DE998016-679C-7679-BDA6-B776B0D0B0C9}"/>
+              </a:ext>
+            </a:extLst>
+          </p:cNvPr>
+          <p:cNvSpPr>
+            <a:spLocks noGrp="1"/>
+          </p:cNvSpPr>
+          <p:nvPr>
+            <p:ph type="body" sz="half" idx="2"/>
+          </p:nvPr>
+        </p:nvSpPr>
+        <p:spPr>
+          <a:xfrm>
+            <a:off x="850286" y="2194560"/>
+            <a:ext cx="3981390" cy="4065694"/>
+          </a:xfrm>
+        </p:spPr>
+        <p:txBody>
+          <a:bodyPr/>
+          <a:lstStyle>
+            <a:lvl1pPr marL="0" indent="0">
+              <a:buNone/>
+              <a:defRPr sz="1600"/>
+            </a:lvl1pPr>
+            <a:lvl2pPr marL="457200" indent="0">
+              <a:buNone/>
+              <a:defRPr sz="1400"/>
+            </a:lvl2pPr>
+            <a:lvl3pPr marL="914400" indent="0">
+              <a:buNone/>
+              <a:defRPr sz="1200"/>
+            </a:lvl3pPr>
+            <a:lvl4pPr marL="1371600" indent="0">
+              <a:buNone/>
+              <a:defRPr sz="1000"/>
+            </a:lvl4pPr>
+            <a:lvl5pPr marL="1828800" indent="0">
+              <a:buNone/>
+              <a:defRPr sz="1000"/>
+            </a:lvl5pPr>
+            <a:lvl6pPr marL="2286000" indent="0">
+              <a:buNone/>
+              <a:defRPr sz="1000"/>
+            </a:lvl6pPr>
+            <a:lvl7pPr marL="2743200" indent="0">
+              <a:buNone/>
+              <a:defRPr sz="1000"/>
+            </a:lvl7pPr>
+            <a:lvl8pPr marL="3200400" indent="0">
+              <a:buNone/>
+              <a:defRPr sz="1000"/>
+            </a:lvl8pPr>
+            <a:lvl9pPr marL="3657600" indent="0">
+              <a:buNone/>
+              <a:defRPr sz="1000"/>
+            </a:lvl9pPr>
+          </a:lstStyle>
+          <a:p>
+            <a:pPr lvl="0"/>
+            <a:r>
+              <a:rPr lang="en-US"/>
+              <a:t>Click to edit Master text styles</a:t>
+            </a:r>
+          </a:p>
+        </p:txBody>
+      </p:sp>
+      <p:sp>
+        <p:nvSpPr>
+          <p:cNvPr id="5" name="Date Placeholder 4">
+            <a:extLst>
+              <a:ext uri="{FF2B5EF4-FFF2-40B4-BE49-F238E27FC236}">
+                <a16:creationId xmlns:a16="http://schemas.microsoft.com/office/drawing/2014/main" id="{65C8CC95-EAA5-1963-009D-F7BA26301BCD}"/>
+              </a:ext>
+            </a:extLst>
+          </p:cNvPr>
+          <p:cNvSpPr>
+            <a:spLocks noGrp="1"/>
+          </p:cNvSpPr>
+          <p:nvPr>
+            <p:ph type="dt" sz="half" idx="10"/>
+          </p:nvPr>
+        </p:nvSpPr>
+        <p:spPr/>
+        <p:txBody>
+          <a:bodyPr/>
+          <a:lstStyle/>
+          <a:p>
+            <a:fld id="{14F30ED9-FCB1-5447-9794-AFD5F779FA3B}" type="datetime1">
+              <a:rPr lang="en-US" smtClean="0"/>
+              <a:t>7/6/26</a:t>
+            </a:fld>
+            <a:endParaRPr lang="en-US"/>
+          </a:p>
+        </p:txBody>
+      </p:sp>
+      <p:sp>
+        <p:nvSpPr>
+          <p:cNvPr id="6" name="Footer Placeholder 5">
+            <a:extLst>
+              <a:ext uri="{FF2B5EF4-FFF2-40B4-BE49-F238E27FC236}">
+                <a16:creationId xmlns:a16="http://schemas.microsoft.com/office/drawing/2014/main" id="{D2646692-B664-9A1B-69AE-7EAA55E6C808}"/>
+              </a:ext>
+            </a:extLst>
+          </p:cNvPr>
+          <p:cNvSpPr>
+            <a:spLocks noGrp="1"/>
+          </p:cNvSpPr>
+          <p:nvPr>
+            <p:ph type="ftr" sz="quarter" idx="11"/>
+          </p:nvPr>
+        </p:nvSpPr>
+        <p:spPr/>
+        <p:txBody>
+          <a:bodyPr/>
+          <a:lstStyle/>
+          <a:p>
+            <a:r>
+              <a:rPr lang="en-US"/>
+              <a:t>Tennis Channel 2025 - CONFIDENTIAL</a:t>
+            </a:r>
+          </a:p>
+        </p:txBody>
+      </p:sp>
+      <p:sp>
+        <p:nvSpPr>
+          <p:cNvPr id="7" name="Slide Number Placeholder 6">
+            <a:extLst>
+              <a:ext uri="{FF2B5EF4-FFF2-40B4-BE49-F238E27FC236}">
+                <a16:creationId xmlns:a16="http://schemas.microsoft.com/office/drawing/2014/main" id="{BEAE579E-2EBD-DCFD-488E-7D4D8A627420}"/>
+              </a:ext>
+            </a:extLst>
+          </p:cNvPr>
+          <p:cNvSpPr>
+            <a:spLocks noGrp="1"/>
+          </p:cNvSpPr>
+          <p:nvPr>
+            <p:ph type="sldNum" sz="quarter" idx="12"/>
+          </p:nvPr>
+        </p:nvSpPr>
+        <p:spPr/>
+        <p:txBody>
+          <a:bodyPr/>
+          <a:lstStyle/>
+          <a:p>
+            <a:fld id="{F6DAA944-EC5F-9D44-9E3D-812366C7D5CA}" type="slidenum">
+              <a:rPr lang="en-US" smtClean="0"/>
+              <a:t>‹#›</a:t>
+            </a:fld>
+            <a:endParaRPr lang="en-US"/>
+          </a:p>
+        </p:txBody>
+      </p:sp>
+    </p:spTree>
+    <p:extLst>
+      <p:ext uri="{BB962C8B-B14F-4D97-AF65-F5344CB8AC3E}">
+        <p14:creationId xmlns:p14="http://schemas.microsoft.com/office/powerpoint/2010/main" val="646652161"/>
+      </p:ext>
+    </p:extLst>
+  </p:cSld>
+  <p:clrMapOvr>
+    <a:masterClrMapping/>
+  </p:clrMapOvr>
+  <p:hf hdr="0" dt="0"/>
+</p:sldLayout>
+</file>
+
+<file path=ppt/slideLayouts/slideLayout9.xml><?xml version="1.0" encoding="utf-8"?>
+<p:sldLayout xmlns:a="http://schemas.openxmlformats.org/drawingml/2006/main" xmlns:r="http://schemas.openxmlformats.org/officeDocument/2006/relationships" xmlns:p="http://schemas.openxmlformats.org/presentationml/2006/main" type="picTx" preserve="1">
+  <p:cSld name="Picture with Caption">
+    <p:spTree>
+      <p:nvGrpSpPr>
+        <p:cNvPr id="1" name=""/>
+        <p:cNvGrpSpPr/>
+        <p:nvPr/>
+      </p:nvGrpSpPr>
+      <p:grpSpPr>
+        <a:xfrm>
+          <a:off x="0" y="0"/>
+          <a:ext cx="0" cy="0"/>
+          <a:chOff x="0" y="0"/>
+          <a:chExt cx="0" cy="0"/>
+        </a:xfrm>
+      </p:grpSpPr>
+      <p:sp>
+        <p:nvSpPr>
+          <p:cNvPr id="2" name="Title 1">
+            <a:extLst>
+              <a:ext uri="{FF2B5EF4-FFF2-40B4-BE49-F238E27FC236}">
+                <a16:creationId xmlns:a16="http://schemas.microsoft.com/office/drawing/2014/main" id="{A1D89F60-72BE-0112-F6AB-FDF9D5265274}"/>
+              </a:ext>
+            </a:extLst>
+          </p:cNvPr>
+          <p:cNvSpPr>
+            <a:spLocks noGrp="1"/>
+          </p:cNvSpPr>
+          <p:nvPr>
+            <p:ph type="title"/>
+          </p:nvPr>
+        </p:nvSpPr>
+        <p:spPr>
+          <a:xfrm>
+            <a:off x="850286" y="487680"/>
+            <a:ext cx="3981390" cy="1706880"/>
+          </a:xfrm>
+        </p:spPr>
+        <p:txBody>
+          <a:bodyPr anchor="b"/>
+          <a:lstStyle>
+            <a:lvl1pPr>
+              <a:defRPr sz="3200"/>
+            </a:lvl1pPr>
+          </a:lstStyle>
+          <a:p>
+            <a:r>
+              <a:rPr lang="en-US"/>
+              <a:t>Click to edit Master title style</a:t>
+            </a:r>
+          </a:p>
+        </p:txBody>
+      </p:sp>
+      <p:sp>
+        <p:nvSpPr>
+          <p:cNvPr id="3" name="Picture Placeholder 2">
+            <a:extLst>
+              <a:ext uri="{FF2B5EF4-FFF2-40B4-BE49-F238E27FC236}">
+                <a16:creationId xmlns:a16="http://schemas.microsoft.com/office/drawing/2014/main" id="{A087395E-5F3E-85C5-01AF-8B5A395FF006}"/>
+              </a:ext>
+            </a:extLst>
+          </p:cNvPr>
+          <p:cNvSpPr>
+            <a:spLocks noGrp="1"/>
+          </p:cNvSpPr>
+          <p:nvPr>
+            <p:ph type="pic" idx="1"/>
+          </p:nvPr>
+        </p:nvSpPr>
+        <p:spPr>
+          <a:xfrm>
+            <a:off x="5247978" y="1053254"/>
+            <a:ext cx="6249353" cy="5198533"/>
+          </a:xfrm>
+        </p:spPr>
+        <p:txBody>
+          <a:bodyPr/>
+          <a:lstStyle>
+            <a:lvl1pPr marL="0" indent="0">
+              <a:buNone/>
+              <a:defRPr sz="3200"/>
+            </a:lvl1pPr>
+            <a:lvl2pPr marL="457200" indent="0">
+              <a:buNone/>
+              <a:defRPr sz="2800"/>
+            </a:lvl2pPr>
+            <a:lvl3pPr marL="914400" indent="0">
+              <a:buNone/>
+              <a:defRPr sz="2400"/>
+            </a:lvl3pPr>
+            <a:lvl4pPr marL="1371600" indent="0">
+              <a:buNone/>
+              <a:defRPr sz="2000"/>
+            </a:lvl4pPr>
+            <a:lvl5pPr marL="1828800" indent="0">
+              <a:buNone/>
+              <a:defRPr sz="2000"/>
+            </a:lvl5pPr>
+            <a:lvl6pPr marL="2286000" indent="0">
+              <a:buNone/>
+              <a:defRPr sz="2000"/>
+            </a:lvl6pPr>
+            <a:lvl7pPr marL="2743200" indent="0">
+              <a:buNone/>
+              <a:defRPr sz="2000"/>
+            </a:lvl7pPr>
+            <a:lvl8pPr marL="3200400" indent="0">
+              <a:buNone/>
+              <a:defRPr sz="2000"/>
+            </a:lvl8pPr>
+            <a:lvl9pPr marL="3657600" indent="0">
+              <a:buNone/>
+              <a:defRPr sz="2000"/>
+            </a:lvl9pPr>
+          </a:lstStyle>
+          <a:p>
+            <a:endParaRPr lang="en-US"/>
+          </a:p>
+        </p:txBody>
+      </p:sp>
+      <p:sp>
+        <p:nvSpPr>
+          <p:cNvPr id="4" name="Text Placeholder 3">
+            <a:extLst>
+              <a:ext uri="{FF2B5EF4-FFF2-40B4-BE49-F238E27FC236}">
+                <a16:creationId xmlns:a16="http://schemas.microsoft.com/office/drawing/2014/main" id="{E7617A5B-9716-D4C8-864D-84AB8F3DF7AA}"/>
+              </a:ext>
+            </a:extLst>
+          </p:cNvPr>
+          <p:cNvSpPr>
+            <a:spLocks noGrp="1"/>
+          </p:cNvSpPr>
+          <p:nvPr>
+            <p:ph type="body" sz="half" idx="2"/>
+          </p:nvPr>
+        </p:nvSpPr>
+        <p:spPr>
+          <a:xfrm>
+            <a:off x="850286" y="2194560"/>
+            <a:ext cx="3981390" cy="4065694"/>
+          </a:xfrm>
+        </p:spPr>
+        <p:txBody>
+          <a:bodyPr/>
+          <a:lstStyle>
+            <a:lvl1pPr marL="0" indent="0">
+              <a:buNone/>
+              <a:defRPr sz="1600"/>
+            </a:lvl1pPr>
+            <a:lvl2pPr marL="457200" indent="0">
+              <a:buNone/>
+              <a:defRPr sz="1400"/>
+            </a:lvl2pPr>
+            <a:lvl3pPr marL="914400" indent="0">
+              <a:buNone/>
+              <a:defRPr sz="1200"/>
+            </a:lvl3pPr>
+            <a:lvl4pPr marL="1371600" indent="0">
+              <a:buNone/>
+              <a:defRPr sz="1000"/>
+            </a:lvl4pPr>
+            <a:lvl5pPr marL="1828800" indent="0">
+              <a:buNone/>
+              <a:defRPr sz="1000"/>
+            </a:lvl5pPr>
+            <a:lvl6pPr marL="2286000" indent="0">
+              <a:buNone/>
+              <a:defRPr sz="1000"/>
+            </a:lvl6pPr>
+            <a:lvl7pPr marL="2743200" indent="0">
+              <a:buNone/>
+              <a:defRPr sz="1000"/>
+            </a:lvl7pPr>
+            <a:lvl8pPr marL="3200400" indent="0">
+              <a:buNone/>
+              <a:defRPr sz="1000"/>
+            </a:lvl8pPr>
+            <a:lvl9pPr marL="3657600" indent="0">
+              <a:buNone/>
+              <a:defRPr sz="1000"/>
+            </a:lvl9pPr>
+          </a:lstStyle>
+          <a:p>
+            <a:pPr lvl="0"/>
+            <a:r>
+              <a:rPr lang="en-US"/>
+              <a:t>Click to edit Master text styles</a:t>
+            </a:r>
+          </a:p>
+        </p:txBody>
+      </p:sp>
+      <p:sp>
+        <p:nvSpPr>
+          <p:cNvPr id="5" name="Date Placeholder 4">
+            <a:extLst>
+              <a:ext uri="{FF2B5EF4-FFF2-40B4-BE49-F238E27FC236}">
+                <a16:creationId xmlns:a16="http://schemas.microsoft.com/office/drawing/2014/main" id="{A4BA2244-8C79-D9DA-DEDF-531C692C6327}"/>
+              </a:ext>
+            </a:extLst>
+          </p:cNvPr>
+          <p:cNvSpPr>
+            <a:spLocks noGrp="1"/>
+          </p:cNvSpPr>
+          <p:nvPr>
+            <p:ph type="dt" sz="half" idx="10"/>
+          </p:nvPr>
+        </p:nvSpPr>
+        <p:spPr/>
+        <p:txBody>
+          <a:bodyPr/>
+          <a:lstStyle/>
+          <a:p>
+            <a:fld id="{DA073474-B78A-B243-B4FD-D7121F5357F7}" type="datetime1">
+              <a:rPr lang="en-US" smtClean="0"/>
+              <a:t>7/6/26</a:t>
+            </a:fld>
+            <a:endParaRPr lang="en-US"/>
+          </a:p>
+        </p:txBody>
+      </p:sp>
+      <p:sp>
+        <p:nvSpPr>
+          <p:cNvPr id="6" name="Footer Placeholder 5">
+            <a:extLst>
+              <a:ext uri="{FF2B5EF4-FFF2-40B4-BE49-F238E27FC236}">
+                <a16:creationId xmlns:a16="http://schemas.microsoft.com/office/drawing/2014/main" id="{F48925A5-5811-EC41-095C-E6482D873996}"/>
+              </a:ext>
+            </a:extLst>
+          </p:cNvPr>
+          <p:cNvSpPr>
+            <a:spLocks noGrp="1"/>
+          </p:cNvSpPr>
+          <p:nvPr>
+            <p:ph type="ftr" sz="quarter" idx="11"/>
+          </p:nvPr>
+        </p:nvSpPr>
+        <p:spPr/>
+        <p:txBody>
+          <a:bodyPr/>
+          <a:lstStyle/>
+          <a:p>
+            <a:r>
+              <a:rPr lang="en-US"/>
+              <a:t>Tennis Channel 2025 - CONFIDENTIAL</a:t>
+            </a:r>
+          </a:p>
+        </p:txBody>
+      </p:sp>
+      <p:sp>
+        <p:nvSpPr>
+          <p:cNvPr id="7" name="Slide Number Placeholder 6">
+            <a:extLst>
+              <a:ext uri="{FF2B5EF4-FFF2-40B4-BE49-F238E27FC236}">
+                <a16:creationId xmlns:a16="http://schemas.microsoft.com/office/drawing/2014/main" id="{9823A3D9-596F-C217-ADA1-150F7A064958}"/>
+              </a:ext>
+            </a:extLst>
+          </p:cNvPr>
+          <p:cNvSpPr>
+            <a:spLocks noGrp="1"/>
+          </p:cNvSpPr>
+          <p:nvPr>
+            <p:ph type="sldNum" sz="quarter" idx="12"/>
+          </p:nvPr>
+        </p:nvSpPr>
+        <p:spPr/>
+        <p:txBody>
+          <a:bodyPr/>
+          <a:lstStyle/>
+          <a:p>
+            <a:fld id="{F6DAA944-EC5F-9D44-9E3D-812366C7D5CA}" type="slidenum">
+              <a:rPr lang="en-US" smtClean="0"/>
+              <a:t>‹#›</a:t>
+            </a:fld>
+            <a:endParaRPr lang="en-US"/>
+          </a:p>
+        </p:txBody>
+      </p:sp>
+    </p:spTree>
+    <p:extLst>
+      <p:ext uri="{BB962C8B-B14F-4D97-AF65-F5344CB8AC3E}">
+        <p14:creationId xmlns:p14="http://schemas.microsoft.com/office/powerpoint/2010/main" val="186003655"/>
+      </p:ext>
+    </p:extLst>
+  </p:cSld>
+  <p:clrMapOvr>
+    <a:masterClrMapping/>
+  </p:clrMapOvr>
+  <p:hf hdr="0" dt="0"/>
+</p:sldLayout>
+</file>
+
+<file path=ppt/slideMasters/slideMaster1.xml><?xml version="1.0" encoding="utf-8"?>
+<p:sldMaster xmlns:a="http://schemas.openxmlformats.org/drawingml/2006/main" xmlns:r="http://schemas.openxmlformats.org/officeDocument/2006/relationships" xmlns:p="http://schemas.openxmlformats.org/presentationml/2006/main">
+  <p:cSld>
+    <p:bg>
+      <p:bgRef idx="1001">
+        <a:schemeClr val="bg1"/>
+      </p:bgRef>
+    </p:bg>
+    <p:spTree>
+      <p:nvGrpSpPr>
+        <p:cNvPr id="1" name=""/>
+        <p:cNvGrpSpPr/>
+        <p:nvPr/>
+      </p:nvGrpSpPr>
+      <p:grpSpPr>
+        <a:xfrm>
+          <a:off x="0" y="0"/>
+          <a:ext cx="0" cy="0"/>
+          <a:chOff x="0" y="0"/>
+          <a:chExt cx="0" cy="0"/>
+        </a:xfrm>
+      </p:grpSpPr>
+      <p:sp>
+        <p:nvSpPr>
+          <p:cNvPr id="2" name="Title Placeholder 1">
+            <a:extLst>
+              <a:ext uri="{FF2B5EF4-FFF2-40B4-BE49-F238E27FC236}">
+                <a16:creationId xmlns:a16="http://schemas.microsoft.com/office/drawing/2014/main" id="{080832AE-95EA-F660-E35B-9F761BA36B82}"/>
+              </a:ext>
+            </a:extLst>
+          </p:cNvPr>
+          <p:cNvSpPr>
+            <a:spLocks noGrp="1"/>
+          </p:cNvSpPr>
+          <p:nvPr>
+            <p:ph type="title"/>
+          </p:nvPr>
+        </p:nvSpPr>
+        <p:spPr>
+          <a:xfrm>
+            <a:off x="848678" y="389467"/>
+            <a:ext cx="10647045" cy="1413934"/>
+          </a:xfrm>
+          <a:prstGeom prst="rect">
+            <a:avLst/>
+          </a:prstGeom>
+        </p:spPr>
+        <p:txBody>
+          <a:bodyPr vert="horz" lIns="91440" tIns="45720" rIns="91440" bIns="45720" rtlCol="0" anchor="ctr">
+            <a:normAutofit/>
+          </a:bodyPr>
+          <a:lstStyle/>
+          <a:p>
+            <a:r>
+              <a:rPr lang="en-US"/>
+              <a:t>Click to edit Master title style</a:t>
+            </a:r>
+          </a:p>
+        </p:txBody>
+      </p:sp>
+      <p:sp>
+        <p:nvSpPr>
+          <p:cNvPr id="3" name="Text Placeholder 2">
+            <a:extLst>
+              <a:ext uri="{FF2B5EF4-FFF2-40B4-BE49-F238E27FC236}">
+                <a16:creationId xmlns:a16="http://schemas.microsoft.com/office/drawing/2014/main" id="{C4A31F6F-E4B0-5C59-F323-FC6476B0321D}"/>
+              </a:ext>
+            </a:extLst>
+          </p:cNvPr>
+          <p:cNvSpPr>
+            <a:spLocks noGrp="1"/>
+          </p:cNvSpPr>
+          <p:nvPr>
+            <p:ph type="body" idx="1"/>
+          </p:nvPr>
+        </p:nvSpPr>
+        <p:spPr>
+          <a:xfrm>
+            <a:off x="848678" y="1947333"/>
+            <a:ext cx="10647045" cy="4641427"/>
+          </a:xfrm>
+          <a:prstGeom prst="rect">
+            <a:avLst/>
+          </a:prstGeom>
+        </p:spPr>
+        <p:txBody>
+          <a:bodyPr vert="horz" lIns="91440" tIns="45720" rIns="91440" bIns="45720" rtlCol="0">
+            <a:normAutofit/>
+          </a:bodyPr>
+          <a:lstStyle/>
+          <a:p>
+            <a:pPr lvl="0"/>
+            <a:r>
+              <a:rPr lang="en-US"/>
+              <a:t>Click to edit Master text styles</a:t>
+            </a:r>
+          </a:p>
+          <a:p>
+            <a:pPr lvl="1"/>
+            <a:r>
+              <a:rPr lang="en-US"/>
+              <a:t>Second level</a:t>
+            </a:r>
+          </a:p>
+          <a:p>
+            <a:pPr lvl="2"/>
+            <a:r>
+              <a:rPr lang="en-US"/>
+              <a:t>Third level</a:t>
+            </a:r>
+          </a:p>
+          <a:p>
+            <a:pPr lvl="3"/>
+            <a:r>
+              <a:rPr lang="en-US"/>
+              <a:t>Fourth level</a:t>
+            </a:r>
+          </a:p>
+          <a:p>
+            <a:pPr lvl="4"/>
+            <a:r>
+              <a:rPr lang="en-US"/>
+              <a:t>Fifth level</a:t>
+            </a:r>
+          </a:p>
+        </p:txBody>
+      </p:sp>
+      <p:sp>
+        <p:nvSpPr>
+          <p:cNvPr id="4" name="Date Placeholder 3">
+            <a:extLst>
+              <a:ext uri="{FF2B5EF4-FFF2-40B4-BE49-F238E27FC236}">
+                <a16:creationId xmlns:a16="http://schemas.microsoft.com/office/drawing/2014/main" id="{B5A68926-F5FE-4122-DF92-7B0B254C8718}"/>
+              </a:ext>
+            </a:extLst>
+          </p:cNvPr>
+          <p:cNvSpPr>
+            <a:spLocks noGrp="1"/>
+          </p:cNvSpPr>
+          <p:nvPr>
+            <p:ph type="dt" sz="half" idx="2"/>
+          </p:nvPr>
+        </p:nvSpPr>
+        <p:spPr>
+          <a:xfrm>
+            <a:off x="848678" y="6780107"/>
+            <a:ext cx="2777490" cy="389467"/>
+          </a:xfrm>
+          <a:prstGeom prst="rect">
+            <a:avLst/>
+          </a:prstGeom>
+        </p:spPr>
+        <p:txBody>
+          <a:bodyPr vert="horz" lIns="91440" tIns="45720" rIns="91440" bIns="45720" rtlCol="0" anchor="ctr"/>
+          <a:lstStyle>
+            <a:lvl1pPr algn="l">
+              <a:defRPr sz="1200">
+                <a:solidFill>
+                  <a:schemeClr val="tx1">
+                    <a:tint val="82000"/>
+                  </a:schemeClr>
+                </a:solidFill>
+              </a:defRPr>
+            </a:lvl1pPr>
+          </a:lstStyle>
+          <a:p>
+            <a:fld id="{905F453D-07D2-4A45-8FB4-9BC139C4CB3A}" type="datetime1">
+              <a:rPr lang="en-US" smtClean="0"/>
+              <a:t>7/6/26</a:t>
+            </a:fld>
+            <a:endParaRPr lang="en-US"/>
+          </a:p>
+        </p:txBody>
+      </p:sp>
+      <p:sp>
+        <p:nvSpPr>
+          <p:cNvPr id="5" name="Footer Placeholder 4">
+            <a:extLst>
+              <a:ext uri="{FF2B5EF4-FFF2-40B4-BE49-F238E27FC236}">
+                <a16:creationId xmlns:a16="http://schemas.microsoft.com/office/drawing/2014/main" id="{6485CEA4-3B6B-7E59-4DDA-7365730F344D}"/>
+              </a:ext>
+            </a:extLst>
+          </p:cNvPr>
+          <p:cNvSpPr>
+            <a:spLocks noGrp="1"/>
+          </p:cNvSpPr>
+          <p:nvPr>
+            <p:ph type="ftr" sz="quarter" idx="3"/>
+          </p:nvPr>
+        </p:nvSpPr>
+        <p:spPr>
+          <a:xfrm>
+            <a:off x="4089083" y="6780107"/>
+            <a:ext cx="4166235" cy="389467"/>
+          </a:xfrm>
+          <a:prstGeom prst="rect">
+            <a:avLst/>
+          </a:prstGeom>
+        </p:spPr>
+        <p:txBody>
+          <a:bodyPr vert="horz" lIns="91440" tIns="45720" rIns="91440" bIns="45720" rtlCol="0" anchor="ctr"/>
+          <a:lstStyle>
+            <a:lvl1pPr algn="ctr">
+              <a:defRPr sz="1200">
+                <a:solidFill>
+                  <a:schemeClr val="tx1">
+                    <a:tint val="82000"/>
+                  </a:schemeClr>
+                </a:solidFill>
+              </a:defRPr>
+            </a:lvl1pPr>
+          </a:lstStyle>
+          <a:p>
+            <a:r>
+              <a:rPr lang="en-US"/>
+              <a:t>Tennis Channel 2025 - CONFIDENTIAL</a:t>
+            </a:r>
+          </a:p>
+        </p:txBody>
+      </p:sp>
+      <p:sp>
+        <p:nvSpPr>
+          <p:cNvPr id="6" name="Slide Number Placeholder 5">
+            <a:extLst>
+              <a:ext uri="{FF2B5EF4-FFF2-40B4-BE49-F238E27FC236}">
+                <a16:creationId xmlns:a16="http://schemas.microsoft.com/office/drawing/2014/main" id="{3162949E-0088-40B8-643A-0F725CFA305F}"/>
+              </a:ext>
+            </a:extLst>
+          </p:cNvPr>
+          <p:cNvSpPr>
+            <a:spLocks noGrp="1"/>
+          </p:cNvSpPr>
+          <p:nvPr>
+            <p:ph type="sldNum" sz="quarter" idx="4"/>
+          </p:nvPr>
+        </p:nvSpPr>
+        <p:spPr>
+          <a:xfrm>
+            <a:off x="8718233" y="6780107"/>
+            <a:ext cx="2777490" cy="389467"/>
+          </a:xfrm>
+          <a:prstGeom prst="rect">
+            <a:avLst/>
+          </a:prstGeom>
+        </p:spPr>
+        <p:txBody>
+          <a:bodyPr vert="horz" lIns="91440" tIns="45720" rIns="91440" bIns="45720" rtlCol="0" anchor="ctr"/>
+          <a:lstStyle>
+            <a:lvl1pPr algn="r">
+              <a:defRPr sz="1200">
+                <a:solidFill>
+                  <a:schemeClr val="tx1">
+                    <a:tint val="82000"/>
+                  </a:schemeClr>
+                </a:solidFill>
+              </a:defRPr>
+            </a:lvl1pPr>
+          </a:lstStyle>
+          <a:p>
+            <a:fld id="{F6DAA944-EC5F-9D44-9E3D-812366C7D5CA}" type="slidenum">
+              <a:rPr lang="en-US" smtClean="0"/>
+              <a:t>‹#›</a:t>
+            </a:fld>
+            <a:endParaRPr lang="en-US"/>
+          </a:p>
+        </p:txBody>
+      </p:sp>
+    </p:spTree>
+    <p:extLst>
+      <p:ext uri="{BB962C8B-B14F-4D97-AF65-F5344CB8AC3E}">
+        <p14:creationId xmlns:p14="http://schemas.microsoft.com/office/powerpoint/2010/main" val="4125013688"/>
+      </p:ext>
+    </p:extLst>
   </p:cSld>
   <p:clrMap bg1="lt1" tx1="dk1" bg2="lt2" tx2="dk2" accent1="accent1" accent2="accent2" accent3="accent3" accent4="accent4" accent5="accent5" accent6="accent6" hlink="hlink" folHlink="folHlink"/>
   <p:sldLayoutIdLst>
     <p:sldLayoutId id="2147483649" r:id="rId1"/>
+    <p:sldLayoutId id="2147483650" r:id="rId2"/>
+    <p:sldLayoutId id="2147483651" r:id="rId3"/>
+    <p:sldLayoutId id="2147483652" r:id="rId4"/>
+    <p:sldLayoutId id="2147483653" r:id="rId5"/>
+    <p:sldLayoutId id="2147483654" r:id="rId6"/>
+    <p:sldLayoutId id="2147483655" r:id="rId7"/>
+    <p:sldLayoutId id="2147483656" r:id="rId8"/>
+    <p:sldLayoutId id="2147483657" r:id="rId9"/>
+    <p:sldLayoutId id="2147483658" r:id="rId10"/>
+    <p:sldLayoutId id="2147483659" r:id="rId11"/>
+    <p:sldLayoutId id="2147483660" r:id="rId12"/>
   </p:sldLayoutIdLst>
-  <p:hf sldNum="0" hdr="0" ftr="0" dt="0"/>
+  <p:hf hdr="0" dt="0"/>
   <p:txStyles>
     <p:titleStyle>
-      <a:lvl1pPr algn="ctr" defTabSz="914400" rtl="0" eaLnBrk="1" latinLnBrk="0" hangingPunct="1">
+      <a:lvl1pPr algn="l" defTabSz="914400" rtl="0" eaLnBrk="1" latinLnBrk="0" hangingPunct="1">
+        <a:lnSpc>
+          <a:spcPct val="90000"/>
+        </a:lnSpc>
         <a:spcBef>
           <a:spcPct val="0"/>
         </a:spcBef>
@@ -616,13 +3752,16 @@
       </a:lvl1pPr>
     </p:titleStyle>
     <p:bodyStyle>
-      <a:lvl1pPr marL="342900" indent="-342900" algn="l" defTabSz="914400" rtl="0" eaLnBrk="1" latinLnBrk="0" hangingPunct="1">
+      <a:lvl1pPr marL="228600" indent="-228600" algn="l" defTabSz="914400" rtl="0" eaLnBrk="1" latinLnBrk="0" hangingPunct="1">
+        <a:lnSpc>
+          <a:spcPct val="90000"/>
+        </a:lnSpc>
         <a:spcBef>
-          <a:spcPct val="20000"/>
+          <a:spcPts val="1000"/>
         </a:spcBef>
-        <a:buFont typeface="Arial" pitchFamily="34" charset="0"/>
+        <a:buFont typeface="Arial" panose="020B0604020202020204" pitchFamily="34" charset="0"/>
         <a:buChar char="•"/>
-        <a:defRPr sz="3200" kern="1200">
+        <a:defRPr sz="2800" kern="1200">
           <a:solidFill>
             <a:schemeClr val="tx1"/>
           </a:solidFill>
@@ -631,13 +3770,16 @@
           <a:cs typeface="+mn-cs"/>
         </a:defRPr>
       </a:lvl1pPr>
-      <a:lvl2pPr marL="742950" indent="-285750" algn="l" defTabSz="914400" rtl="0" eaLnBrk="1" latinLnBrk="0" hangingPunct="1">
+      <a:lvl2pPr marL="685800" indent="-228600" algn="l" defTabSz="914400" rtl="0" eaLnBrk="1" latinLnBrk="0" hangingPunct="1">
+        <a:lnSpc>
+          <a:spcPct val="90000"/>
+        </a:lnSpc>
         <a:spcBef>
-          <a:spcPct val="20000"/>
+          <a:spcPts val="500"/>
         </a:spcBef>
-        <a:buFont typeface="Arial" pitchFamily="34" charset="0"/>
-        <a:buChar char="–"/>
-        <a:defRPr sz="2800" kern="1200">
+        <a:buFont typeface="Arial" panose="020B0604020202020204" pitchFamily="34" charset="0"/>
+        <a:buChar char="•"/>
+        <a:defRPr sz="2400" kern="1200">
           <a:solidFill>
             <a:schemeClr val="tx1"/>
           </a:solidFill>
@@ -647,12 +3789,15 @@
         </a:defRPr>
       </a:lvl2pPr>
       <a:lvl3pPr marL="1143000" indent="-228600" algn="l" defTabSz="914400" rtl="0" eaLnBrk="1" latinLnBrk="0" hangingPunct="1">
+        <a:lnSpc>
+          <a:spcPct val="90000"/>
+        </a:lnSpc>
         <a:spcBef>
-          <a:spcPct val="20000"/>
+          <a:spcPts val="500"/>
         </a:spcBef>
-        <a:buFont typeface="Arial" pitchFamily="34" charset="0"/>
+        <a:buFont typeface="Arial" panose="020B0604020202020204" pitchFamily="34" charset="0"/>
         <a:buChar char="•"/>
-        <a:defRPr sz="2400" kern="1200">
+        <a:defRPr sz="2000" kern="1200">
           <a:solidFill>
             <a:schemeClr val="tx1"/>
           </a:solidFill>
@@ -662,12 +3807,15 @@
         </a:defRPr>
       </a:lvl3pPr>
       <a:lvl4pPr marL="1600200" indent="-228600" algn="l" defTabSz="914400" rtl="0" eaLnBrk="1" latinLnBrk="0" hangingPunct="1">
+        <a:lnSpc>
+          <a:spcPct val="90000"/>
+        </a:lnSpc>
         <a:spcBef>
-          <a:spcPct val="20000"/>
+          <a:spcPts val="500"/>
         </a:spcBef>
-        <a:buFont typeface="Arial" pitchFamily="34" charset="0"/>
-        <a:buChar char="–"/>
-        <a:defRPr sz="2000" kern="1200">
+        <a:buFont typeface="Arial" panose="020B0604020202020204" pitchFamily="34" charset="0"/>
+        <a:buChar char="•"/>
+        <a:defRPr sz="1800" kern="1200">
           <a:solidFill>
             <a:schemeClr val="tx1"/>
           </a:solidFill>
@@ -677,12 +3825,15 @@
         </a:defRPr>
       </a:lvl4pPr>
       <a:lvl5pPr marL="2057400" indent="-228600" algn="l" defTabSz="914400" rtl="0" eaLnBrk="1" latinLnBrk="0" hangingPunct="1">
+        <a:lnSpc>
+          <a:spcPct val="90000"/>
+        </a:lnSpc>
         <a:spcBef>
-          <a:spcPct val="20000"/>
+          <a:spcPts val="500"/>
         </a:spcBef>
-        <a:buFont typeface="Arial" pitchFamily="34" charset="0"/>
-        <a:buChar char="»"/>
-        <a:defRPr sz="2000" kern="1200">
+        <a:buFont typeface="Arial" panose="020B0604020202020204" pitchFamily="34" charset="0"/>
+        <a:buChar char="•"/>
+        <a:defRPr sz="1800" kern="1200">
           <a:solidFill>
             <a:schemeClr val="tx1"/>
           </a:solidFill>
@@ -692,12 +3843,15 @@
         </a:defRPr>
       </a:lvl5pPr>
       <a:lvl6pPr marL="2514600" indent="-228600" algn="l" defTabSz="914400" rtl="0" eaLnBrk="1" latinLnBrk="0" hangingPunct="1">
+        <a:lnSpc>
+          <a:spcPct val="90000"/>
+        </a:lnSpc>
         <a:spcBef>
-          <a:spcPct val="20000"/>
+          <a:spcPts val="500"/>
         </a:spcBef>
-        <a:buFont typeface="Arial" pitchFamily="34" charset="0"/>
+        <a:buFont typeface="Arial" panose="020B0604020202020204" pitchFamily="34" charset="0"/>
         <a:buChar char="•"/>
-        <a:defRPr sz="2000" kern="1200">
+        <a:defRPr sz="1800" kern="1200">
           <a:solidFill>
             <a:schemeClr val="tx1"/>
           </a:solidFill>
@@ -707,12 +3861,15 @@
         </a:defRPr>
       </a:lvl6pPr>
       <a:lvl7pPr marL="2971800" indent="-228600" algn="l" defTabSz="914400" rtl="0" eaLnBrk="1" latinLnBrk="0" hangingPunct="1">
+        <a:lnSpc>
+          <a:spcPct val="90000"/>
+        </a:lnSpc>
         <a:spcBef>
-          <a:spcPct val="20000"/>
+          <a:spcPts val="500"/>
         </a:spcBef>
-        <a:buFont typeface="Arial" pitchFamily="34" charset="0"/>
+        <a:buFont typeface="Arial" panose="020B0604020202020204" pitchFamily="34" charset="0"/>
         <a:buChar char="•"/>
-        <a:defRPr sz="2000" kern="1200">
+        <a:defRPr sz="1800" kern="1200">
           <a:solidFill>
             <a:schemeClr val="tx1"/>
           </a:solidFill>
@@ -722,12 +3879,15 @@
         </a:defRPr>
       </a:lvl7pPr>
       <a:lvl8pPr marL="3429000" indent="-228600" algn="l" defTabSz="914400" rtl="0" eaLnBrk="1" latinLnBrk="0" hangingPunct="1">
+        <a:lnSpc>
+          <a:spcPct val="90000"/>
+        </a:lnSpc>
         <a:spcBef>
-          <a:spcPct val="20000"/>
+          <a:spcPts val="500"/>
         </a:spcBef>
-        <a:buFont typeface="Arial" pitchFamily="34" charset="0"/>
+        <a:buFont typeface="Arial" panose="020B0604020202020204" pitchFamily="34" charset="0"/>
         <a:buChar char="•"/>
-        <a:defRPr sz="2000" kern="1200">
+        <a:defRPr sz="1800" kern="1200">
           <a:solidFill>
             <a:schemeClr val="tx1"/>
           </a:solidFill>
@@ -737,12 +3897,15 @@
         </a:defRPr>
       </a:lvl8pPr>
       <a:lvl9pPr marL="3886200" indent="-228600" algn="l" defTabSz="914400" rtl="0" eaLnBrk="1" latinLnBrk="0" hangingPunct="1">
+        <a:lnSpc>
+          <a:spcPct val="90000"/>
+        </a:lnSpc>
         <a:spcBef>
-          <a:spcPct val="20000"/>
+          <a:spcPts val="500"/>
         </a:spcBef>
-        <a:buFont typeface="Arial" pitchFamily="34" charset="0"/>
+        <a:buFont typeface="Arial" panose="020B0604020202020204" pitchFamily="34" charset="0"/>
         <a:buChar char="•"/>
-        <a:defRPr sz="2000" kern="1200">
+        <a:defRPr sz="1800" kern="1200">
           <a:solidFill>
             <a:schemeClr val="tx1"/>
           </a:solidFill>
@@ -853,6 +4016,4749 @@
 
 <file path=ppt/slides/slide1.xml><?xml version="1.0" encoding="utf-8"?>
 <p:sld xmlns:a="http://schemas.openxmlformats.org/drawingml/2006/main" xmlns:r="http://schemas.openxmlformats.org/officeDocument/2006/relationships" xmlns:p="http://schemas.openxmlformats.org/presentationml/2006/main">
+  <p:cSld>
+    <p:spTree>
+      <p:nvGrpSpPr>
+        <p:cNvPr id="1" name=""/>
+        <p:cNvGrpSpPr/>
+        <p:nvPr/>
+      </p:nvGrpSpPr>
+      <p:grpSpPr>
+        <a:xfrm>
+          <a:off x="0" y="0"/>
+          <a:ext cx="0" cy="0"/>
+          <a:chOff x="0" y="0"/>
+          <a:chExt cx="0" cy="0"/>
+        </a:xfrm>
+      </p:grpSpPr>
+      <p:sp>
+        <p:nvSpPr>
+          <p:cNvPr id="2" name="Shape 0"/>
+          <p:cNvSpPr/>
+          <p:nvPr/>
+        </p:nvSpPr>
+        <p:spPr>
+          <a:xfrm>
+            <a:off x="1" y="27691"/>
+            <a:ext cx="12344091" cy="388849"/>
+          </a:xfrm>
+          <a:prstGeom prst="rect">
+            <a:avLst/>
+          </a:prstGeom>
+          <a:solidFill>
+            <a:srgbClr val="8ED973"/>
+          </a:solidFill>
+          <a:ln w="12700">
+            <a:solidFill>
+              <a:srgbClr val="8ED973"/>
+            </a:solidFill>
+            <a:prstDash val="solid"/>
+          </a:ln>
+        </p:spPr>
+        <p:txBody>
+          <a:bodyPr/>
+          <a:lstStyle/>
+          <a:p>
+            <a:endParaRPr lang="en-US" sz="1823">
+              <a:latin typeface="Arial" panose="020B0604020202020204" pitchFamily="34" charset="0"/>
+              <a:cs typeface="Arial" panose="020B0604020202020204" pitchFamily="34" charset="0"/>
+            </a:endParaRPr>
+          </a:p>
+        </p:txBody>
+      </p:sp>
+      <p:sp>
+        <p:nvSpPr>
+          <p:cNvPr id="3" name="Text 1"/>
+          <p:cNvSpPr/>
+          <p:nvPr/>
+        </p:nvSpPr>
+        <p:spPr>
+          <a:xfrm>
+            <a:off x="1" y="38980"/>
+            <a:ext cx="12344091" cy="388849"/>
+          </a:xfrm>
+          <a:prstGeom prst="rect">
+            <a:avLst/>
+          </a:prstGeom>
+          <a:noFill/>
+          <a:ln/>
+        </p:spPr>
+        <p:txBody>
+          <a:bodyPr wrap="square" lIns="0" tIns="0" rIns="0" bIns="0" rtlCol="0" anchor="ctr"/>
+          <a:lstStyle/>
+          <a:p>
+            <a:pPr algn="ctr"/>
+            <a:r>
+              <a:rPr lang="en-US" sz="1600" b="1" dirty="0">
+                <a:solidFill>
+                  <a:srgbClr val="000000"/>
+                </a:solidFill>
+                <a:latin typeface="Arial" panose="020B0604020202020204" pitchFamily="34" charset="0"/>
+                <a:ea typeface="Arial" pitchFamily="34" charset="-122"/>
+                <a:cs typeface="Arial" panose="020B0604020202020204" pitchFamily="34" charset="0"/>
+              </a:rPr>
+              <a:t>Tennis Channel Project SABR</a:t>
+            </a:r>
+            <a:endParaRPr lang="en-US" sz="1600" b="1" dirty="0">
+              <a:latin typeface="Arial" panose="020B0604020202020204" pitchFamily="34" charset="0"/>
+              <a:cs typeface="Arial" panose="020B0604020202020204" pitchFamily="34" charset="0"/>
+            </a:endParaRPr>
+          </a:p>
+        </p:txBody>
+      </p:sp>
+      <p:sp>
+        <p:nvSpPr>
+          <p:cNvPr id="4" name="Shape 2"/>
+          <p:cNvSpPr/>
+          <p:nvPr/>
+        </p:nvSpPr>
+        <p:spPr>
+          <a:xfrm>
+            <a:off x="0" y="427829"/>
+            <a:ext cx="12251509" cy="1017037"/>
+          </a:xfrm>
+          <a:prstGeom prst="rect">
+            <a:avLst/>
+          </a:prstGeom>
+          <a:solidFill>
+            <a:schemeClr val="bg1"/>
+          </a:solidFill>
+          <a:ln w="9525">
+            <a:solidFill>
+              <a:srgbClr val="D1D5DB"/>
+            </a:solidFill>
+            <a:prstDash val="solid"/>
+          </a:ln>
+        </p:spPr>
+        <p:txBody>
+          <a:bodyPr/>
+          <a:lstStyle/>
+          <a:p>
+            <a:endParaRPr lang="en-US" sz="1823">
+              <a:latin typeface="Arial" panose="020B0604020202020204" pitchFamily="34" charset="0"/>
+              <a:cs typeface="Arial" panose="020B0604020202020204" pitchFamily="34" charset="0"/>
+            </a:endParaRPr>
+          </a:p>
+        </p:txBody>
+      </p:sp>
+      <p:sp>
+        <p:nvSpPr>
+          <p:cNvPr id="5" name="Shape 3"/>
+          <p:cNvSpPr/>
+          <p:nvPr/>
+        </p:nvSpPr>
+        <p:spPr>
+          <a:xfrm>
+            <a:off x="92584" y="861593"/>
+            <a:ext cx="12158925" cy="0"/>
+          </a:xfrm>
+          <a:prstGeom prst="line">
+            <a:avLst/>
+          </a:prstGeom>
+          <a:noFill/>
+          <a:ln w="6350">
+            <a:solidFill>
+              <a:srgbClr val="D1D5DB"/>
+            </a:solidFill>
+            <a:prstDash val="solid"/>
+          </a:ln>
+        </p:spPr>
+        <p:txBody>
+          <a:bodyPr/>
+          <a:lstStyle/>
+          <a:p>
+            <a:endParaRPr lang="en-US" sz="1823">
+              <a:latin typeface="Arial" panose="020B0604020202020204" pitchFamily="34" charset="0"/>
+              <a:cs typeface="Arial" panose="020B0604020202020204" pitchFamily="34" charset="0"/>
+            </a:endParaRPr>
+          </a:p>
+        </p:txBody>
+      </p:sp>
+      <p:sp>
+        <p:nvSpPr>
+          <p:cNvPr id="6" name="Shape 4"/>
+          <p:cNvSpPr/>
+          <p:nvPr/>
+        </p:nvSpPr>
+        <p:spPr>
+          <a:xfrm>
+            <a:off x="92584" y="1213409"/>
+            <a:ext cx="12158925" cy="0"/>
+          </a:xfrm>
+          <a:prstGeom prst="line">
+            <a:avLst/>
+          </a:prstGeom>
+          <a:noFill/>
+          <a:ln w="6350">
+            <a:solidFill>
+              <a:srgbClr val="D1D5DB"/>
+            </a:solidFill>
+            <a:prstDash val="solid"/>
+          </a:ln>
+        </p:spPr>
+        <p:txBody>
+          <a:bodyPr/>
+          <a:lstStyle/>
+          <a:p>
+            <a:endParaRPr lang="en-US" sz="1823">
+              <a:latin typeface="Arial" panose="020B0604020202020204" pitchFamily="34" charset="0"/>
+              <a:cs typeface="Arial" panose="020B0604020202020204" pitchFamily="34" charset="0"/>
+            </a:endParaRPr>
+          </a:p>
+        </p:txBody>
+      </p:sp>
+      <p:sp>
+        <p:nvSpPr>
+          <p:cNvPr id="7" name="Shape 5"/>
+          <p:cNvSpPr/>
+          <p:nvPr/>
+        </p:nvSpPr>
+        <p:spPr>
+          <a:xfrm>
+            <a:off x="925830" y="611619"/>
+            <a:ext cx="0" cy="833247"/>
+          </a:xfrm>
+          <a:prstGeom prst="line">
+            <a:avLst/>
+          </a:prstGeom>
+          <a:noFill/>
+          <a:ln w="6350">
+            <a:solidFill>
+              <a:srgbClr val="D1D5DB"/>
+            </a:solidFill>
+            <a:prstDash val="solid"/>
+          </a:ln>
+        </p:spPr>
+        <p:txBody>
+          <a:bodyPr/>
+          <a:lstStyle/>
+          <a:p>
+            <a:endParaRPr lang="en-US" sz="1823">
+              <a:latin typeface="Arial" panose="020B0604020202020204" pitchFamily="34" charset="0"/>
+              <a:cs typeface="Arial" panose="020B0604020202020204" pitchFamily="34" charset="0"/>
+            </a:endParaRPr>
+          </a:p>
+        </p:txBody>
+      </p:sp>
+      <p:sp>
+        <p:nvSpPr>
+          <p:cNvPr id="8" name="Text 6"/>
+          <p:cNvSpPr/>
+          <p:nvPr/>
+        </p:nvSpPr>
+        <p:spPr>
+          <a:xfrm>
+            <a:off x="148133" y="611619"/>
+            <a:ext cx="759181" cy="249974"/>
+          </a:xfrm>
+          <a:prstGeom prst="rect">
+            <a:avLst/>
+          </a:prstGeom>
+          <a:noFill/>
+          <a:ln/>
+        </p:spPr>
+        <p:txBody>
+          <a:bodyPr wrap="square" lIns="0" tIns="0" rIns="0" bIns="0" rtlCol="0" anchor="ctr"/>
+          <a:lstStyle/>
+          <a:p>
+            <a:r>
+              <a:rPr lang="en-US" sz="810" dirty="0">
+                <a:solidFill>
+                  <a:srgbClr val="555555"/>
+                </a:solidFill>
+                <a:latin typeface="Arial" panose="020B0604020202020204" pitchFamily="34" charset="0"/>
+                <a:ea typeface="Calibri" pitchFamily="34" charset="-122"/>
+                <a:cs typeface="Arial" panose="020B0604020202020204" pitchFamily="34" charset="0"/>
+              </a:rPr>
+              <a:t>OWNERS</a:t>
+            </a:r>
+            <a:endParaRPr lang="en-US" sz="810" dirty="0">
+              <a:latin typeface="Arial" panose="020B0604020202020204" pitchFamily="34" charset="0"/>
+              <a:cs typeface="Arial" panose="020B0604020202020204" pitchFamily="34" charset="0"/>
+            </a:endParaRPr>
+          </a:p>
+        </p:txBody>
+      </p:sp>
+      <p:sp>
+        <p:nvSpPr>
+          <p:cNvPr id="9" name="Text 7"/>
+          <p:cNvSpPr/>
+          <p:nvPr/>
+        </p:nvSpPr>
+        <p:spPr>
+          <a:xfrm>
+            <a:off x="981380" y="611619"/>
+            <a:ext cx="2191069" cy="249974"/>
+          </a:xfrm>
+          <a:prstGeom prst="rect">
+            <a:avLst/>
+          </a:prstGeom>
+          <a:noFill/>
+          <a:ln/>
+        </p:spPr>
+        <p:txBody>
+          <a:bodyPr wrap="square" lIns="0" tIns="0" rIns="0" bIns="0" rtlCol="0" anchor="ctr"/>
+          <a:lstStyle/>
+          <a:p>
+            <a:r>
+              <a:rPr lang="en-US" sz="911" dirty="0">
+                <a:solidFill>
+                  <a:srgbClr val="1A1A1A"/>
+                </a:solidFill>
+                <a:latin typeface="Arial" panose="020B0604020202020204" pitchFamily="34" charset="0"/>
+                <a:ea typeface="Calibri" pitchFamily="34" charset="-122"/>
+                <a:cs typeface="Arial" panose="020B0604020202020204" pitchFamily="34" charset="0"/>
+              </a:rPr>
+              <a:t>Keff Ratcliffe</a:t>
+            </a:r>
+            <a:endParaRPr lang="en-US" sz="911" dirty="0">
+              <a:latin typeface="Arial" panose="020B0604020202020204" pitchFamily="34" charset="0"/>
+              <a:cs typeface="Arial" panose="020B0604020202020204" pitchFamily="34" charset="0"/>
+            </a:endParaRPr>
+          </a:p>
+        </p:txBody>
+      </p:sp>
+      <p:sp>
+        <p:nvSpPr>
+          <p:cNvPr id="10" name="Text 8"/>
+          <p:cNvSpPr/>
+          <p:nvPr/>
+        </p:nvSpPr>
+        <p:spPr>
+          <a:xfrm>
+            <a:off x="3246516" y="611619"/>
+            <a:ext cx="2191069" cy="249974"/>
+          </a:xfrm>
+          <a:prstGeom prst="rect">
+            <a:avLst/>
+          </a:prstGeom>
+          <a:noFill/>
+          <a:ln/>
+        </p:spPr>
+        <p:txBody>
+          <a:bodyPr wrap="square" lIns="0" tIns="0" rIns="0" bIns="0" rtlCol="0" anchor="ctr"/>
+          <a:lstStyle/>
+          <a:p>
+            <a:r>
+              <a:rPr lang="en-US" sz="911" dirty="0">
+                <a:solidFill>
+                  <a:srgbClr val="1A1A1A"/>
+                </a:solidFill>
+                <a:latin typeface="Arial" panose="020B0604020202020204" pitchFamily="34" charset="0"/>
+                <a:ea typeface="Calibri" pitchFamily="34" charset="-122"/>
+                <a:cs typeface="Arial" panose="020B0604020202020204" pitchFamily="34" charset="0"/>
+              </a:rPr>
+              <a:t>Aditya Pande</a:t>
+            </a:r>
+            <a:endParaRPr lang="en-US" sz="911" dirty="0">
+              <a:latin typeface="Arial" panose="020B0604020202020204" pitchFamily="34" charset="0"/>
+              <a:cs typeface="Arial" panose="020B0604020202020204" pitchFamily="34" charset="0"/>
+            </a:endParaRPr>
+          </a:p>
+        </p:txBody>
+      </p:sp>
+      <p:sp>
+        <p:nvSpPr>
+          <p:cNvPr id="11" name="Text 9"/>
+          <p:cNvSpPr/>
+          <p:nvPr/>
+        </p:nvSpPr>
+        <p:spPr>
+          <a:xfrm>
+            <a:off x="5511652" y="611619"/>
+            <a:ext cx="2191069" cy="249974"/>
+          </a:xfrm>
+          <a:prstGeom prst="rect">
+            <a:avLst/>
+          </a:prstGeom>
+          <a:noFill/>
+          <a:ln/>
+        </p:spPr>
+        <p:txBody>
+          <a:bodyPr wrap="square" lIns="0" tIns="0" rIns="0" bIns="0" rtlCol="0" anchor="ctr"/>
+          <a:lstStyle/>
+          <a:p>
+            <a:r>
+              <a:rPr lang="en-US" sz="911" dirty="0">
+                <a:solidFill>
+                  <a:srgbClr val="1A1A1A"/>
+                </a:solidFill>
+                <a:latin typeface="Arial" panose="020B0604020202020204" pitchFamily="34" charset="0"/>
+                <a:ea typeface="Calibri" pitchFamily="34" charset="-122"/>
+                <a:cs typeface="Arial" panose="020B0604020202020204" pitchFamily="34" charset="0"/>
+              </a:rPr>
+              <a:t>Cristina Thompson</a:t>
+            </a:r>
+            <a:endParaRPr lang="en-US" sz="911" dirty="0">
+              <a:latin typeface="Arial" panose="020B0604020202020204" pitchFamily="34" charset="0"/>
+              <a:cs typeface="Arial" panose="020B0604020202020204" pitchFamily="34" charset="0"/>
+            </a:endParaRPr>
+          </a:p>
+        </p:txBody>
+      </p:sp>
+      <p:sp>
+        <p:nvSpPr>
+          <p:cNvPr id="12" name="Text 10"/>
+          <p:cNvSpPr/>
+          <p:nvPr/>
+        </p:nvSpPr>
+        <p:spPr>
+          <a:xfrm>
+            <a:off x="7776787" y="611619"/>
+            <a:ext cx="2191069" cy="249974"/>
+          </a:xfrm>
+          <a:prstGeom prst="rect">
+            <a:avLst/>
+          </a:prstGeom>
+          <a:noFill/>
+          <a:ln/>
+        </p:spPr>
+        <p:txBody>
+          <a:bodyPr wrap="square" lIns="0" tIns="0" rIns="0" bIns="0" rtlCol="0" anchor="ctr"/>
+          <a:lstStyle/>
+          <a:p>
+            <a:r>
+              <a:rPr lang="en-US" sz="911" dirty="0">
+                <a:solidFill>
+                  <a:srgbClr val="1A1A1A"/>
+                </a:solidFill>
+                <a:latin typeface="Arial" panose="020B0604020202020204" pitchFamily="34" charset="0"/>
+                <a:ea typeface="Calibri" pitchFamily="34" charset="-122"/>
+                <a:cs typeface="Arial" panose="020B0604020202020204" pitchFamily="34" charset="0"/>
+              </a:rPr>
+              <a:t>Juan Valdes</a:t>
+            </a:r>
+            <a:endParaRPr lang="en-US" sz="911" dirty="0">
+              <a:latin typeface="Arial" panose="020B0604020202020204" pitchFamily="34" charset="0"/>
+              <a:cs typeface="Arial" panose="020B0604020202020204" pitchFamily="34" charset="0"/>
+            </a:endParaRPr>
+          </a:p>
+        </p:txBody>
+      </p:sp>
+      <p:sp>
+        <p:nvSpPr>
+          <p:cNvPr id="13" name="Text 11"/>
+          <p:cNvSpPr/>
+          <p:nvPr/>
+        </p:nvSpPr>
+        <p:spPr>
+          <a:xfrm>
+            <a:off x="10041923" y="611619"/>
+            <a:ext cx="2191069" cy="249974"/>
+          </a:xfrm>
+          <a:prstGeom prst="rect">
+            <a:avLst/>
+          </a:prstGeom>
+          <a:noFill/>
+          <a:ln/>
+        </p:spPr>
+        <p:txBody>
+          <a:bodyPr wrap="square" lIns="0" tIns="0" rIns="0" bIns="0" rtlCol="0" anchor="ctr"/>
+          <a:lstStyle/>
+          <a:p>
+            <a:r>
+              <a:rPr lang="en-US" sz="911" dirty="0">
+                <a:solidFill>
+                  <a:srgbClr val="1A1A1A"/>
+                </a:solidFill>
+                <a:latin typeface="Arial" panose="020B0604020202020204" pitchFamily="34" charset="0"/>
+                <a:ea typeface="Calibri" pitchFamily="34" charset="-122"/>
+                <a:cs typeface="Arial" panose="020B0604020202020204" pitchFamily="34" charset="0"/>
+              </a:rPr>
+              <a:t>Chris Krueger</a:t>
+            </a:r>
+            <a:endParaRPr lang="en-US" sz="911" dirty="0">
+              <a:latin typeface="Arial" panose="020B0604020202020204" pitchFamily="34" charset="0"/>
+              <a:cs typeface="Arial" panose="020B0604020202020204" pitchFamily="34" charset="0"/>
+            </a:endParaRPr>
+          </a:p>
+        </p:txBody>
+      </p:sp>
+      <p:sp>
+        <p:nvSpPr>
+          <p:cNvPr id="14" name="Text 12"/>
+          <p:cNvSpPr/>
+          <p:nvPr/>
+        </p:nvSpPr>
+        <p:spPr>
+          <a:xfrm>
+            <a:off x="148133" y="861594"/>
+            <a:ext cx="759181" cy="351815"/>
+          </a:xfrm>
+          <a:prstGeom prst="rect">
+            <a:avLst/>
+          </a:prstGeom>
+          <a:noFill/>
+          <a:ln/>
+        </p:spPr>
+        <p:txBody>
+          <a:bodyPr wrap="square" lIns="0" tIns="0" rIns="0" bIns="0" rtlCol="0" anchor="ctr"/>
+          <a:lstStyle/>
+          <a:p>
+            <a:r>
+              <a:rPr lang="en-US" sz="810" dirty="0">
+                <a:solidFill>
+                  <a:srgbClr val="555555"/>
+                </a:solidFill>
+                <a:latin typeface="Arial" panose="020B0604020202020204" pitchFamily="34" charset="0"/>
+                <a:ea typeface="Calibri" pitchFamily="34" charset="-122"/>
+                <a:cs typeface="Arial" panose="020B0604020202020204" pitchFamily="34" charset="0"/>
+              </a:rPr>
+              <a:t>GOAL</a:t>
+            </a:r>
+            <a:endParaRPr lang="en-US" sz="810" dirty="0">
+              <a:latin typeface="Arial" panose="020B0604020202020204" pitchFamily="34" charset="0"/>
+              <a:cs typeface="Arial" panose="020B0604020202020204" pitchFamily="34" charset="0"/>
+            </a:endParaRPr>
+          </a:p>
+        </p:txBody>
+      </p:sp>
+      <p:sp>
+        <p:nvSpPr>
+          <p:cNvPr id="15" name="Text 13"/>
+          <p:cNvSpPr/>
+          <p:nvPr/>
+        </p:nvSpPr>
+        <p:spPr>
+          <a:xfrm>
+            <a:off x="981380" y="861594"/>
+            <a:ext cx="11233095" cy="351815"/>
+          </a:xfrm>
+          <a:prstGeom prst="rect">
+            <a:avLst/>
+          </a:prstGeom>
+          <a:noFill/>
+          <a:ln/>
+        </p:spPr>
+        <p:txBody>
+          <a:bodyPr wrap="square" lIns="0" tIns="0" rIns="0" bIns="0" rtlCol="0" anchor="ctr"/>
+          <a:lstStyle/>
+          <a:p>
+            <a:r>
+              <a:rPr lang="en-US" sz="861" dirty="0">
+                <a:solidFill>
+                  <a:srgbClr val="1A1A1A"/>
+                </a:solidFill>
+                <a:latin typeface="Arial" panose="020B0604020202020204" pitchFamily="34" charset="0"/>
+                <a:ea typeface="Calibri" pitchFamily="34" charset="-122"/>
+                <a:cs typeface="Arial" panose="020B0604020202020204" pitchFamily="34" charset="0"/>
+              </a:rPr>
+              <a:t>Rebuilding Tennis Channel OTT (web, iOS, Android, CTV) on its own platform, powered by Match Central replacing Sport Radar stack.</a:t>
+            </a:r>
+            <a:endParaRPr lang="en-US" sz="861" dirty="0">
+              <a:latin typeface="Arial" panose="020B0604020202020204" pitchFamily="34" charset="0"/>
+              <a:cs typeface="Arial" panose="020B0604020202020204" pitchFamily="34" charset="0"/>
+            </a:endParaRPr>
+          </a:p>
+        </p:txBody>
+      </p:sp>
+      <p:sp>
+        <p:nvSpPr>
+          <p:cNvPr id="16" name="Text 14"/>
+          <p:cNvSpPr/>
+          <p:nvPr/>
+        </p:nvSpPr>
+        <p:spPr>
+          <a:xfrm>
+            <a:off x="148133" y="1213409"/>
+            <a:ext cx="759181" cy="231458"/>
+          </a:xfrm>
+          <a:prstGeom prst="rect">
+            <a:avLst/>
+          </a:prstGeom>
+          <a:noFill/>
+          <a:ln/>
+        </p:spPr>
+        <p:txBody>
+          <a:bodyPr wrap="square" lIns="0" tIns="0" rIns="0" bIns="0" rtlCol="0" anchor="ctr"/>
+          <a:lstStyle/>
+          <a:p>
+            <a:r>
+              <a:rPr lang="en-US" sz="810" dirty="0">
+                <a:solidFill>
+                  <a:srgbClr val="555555"/>
+                </a:solidFill>
+                <a:latin typeface="Arial" panose="020B0604020202020204" pitchFamily="34" charset="0"/>
+                <a:ea typeface="Calibri" pitchFamily="34" charset="-122"/>
+                <a:cs typeface="Arial" panose="020B0604020202020204" pitchFamily="34" charset="0"/>
+              </a:rPr>
+              <a:t>LAUNCH</a:t>
+            </a:r>
+            <a:endParaRPr lang="en-US" sz="810" dirty="0">
+              <a:latin typeface="Arial" panose="020B0604020202020204" pitchFamily="34" charset="0"/>
+              <a:cs typeface="Arial" panose="020B0604020202020204" pitchFamily="34" charset="0"/>
+            </a:endParaRPr>
+          </a:p>
+        </p:txBody>
+      </p:sp>
+      <p:sp>
+        <p:nvSpPr>
+          <p:cNvPr id="17" name="Text 15"/>
+          <p:cNvSpPr/>
+          <p:nvPr/>
+        </p:nvSpPr>
+        <p:spPr>
+          <a:xfrm>
+            <a:off x="981380" y="1213409"/>
+            <a:ext cx="11233095" cy="231458"/>
+          </a:xfrm>
+          <a:prstGeom prst="rect">
+            <a:avLst/>
+          </a:prstGeom>
+          <a:noFill/>
+          <a:ln/>
+        </p:spPr>
+        <p:txBody>
+          <a:bodyPr wrap="square" lIns="0" tIns="0" rIns="0" bIns="0" rtlCol="0" anchor="ctr"/>
+          <a:lstStyle/>
+          <a:p>
+            <a:r>
+              <a:rPr lang="en-US" sz="911" dirty="0">
+                <a:solidFill>
+                  <a:srgbClr val="1A1A1A"/>
+                </a:solidFill>
+                <a:latin typeface="Arial" panose="020B0604020202020204" pitchFamily="34" charset="0"/>
+                <a:ea typeface="Calibri" pitchFamily="34" charset="-122"/>
+                <a:cs typeface="Arial" panose="020B0604020202020204" pitchFamily="34" charset="0"/>
+              </a:rPr>
+              <a:t>December 1, 2026</a:t>
+            </a:r>
+            <a:endParaRPr lang="en-US" sz="911" dirty="0">
+              <a:latin typeface="Arial" panose="020B0604020202020204" pitchFamily="34" charset="0"/>
+              <a:cs typeface="Arial" panose="020B0604020202020204" pitchFamily="34" charset="0"/>
+            </a:endParaRPr>
+          </a:p>
+        </p:txBody>
+      </p:sp>
+      <p:sp>
+        <p:nvSpPr>
+          <p:cNvPr id="18" name="Shape 16"/>
+          <p:cNvSpPr/>
+          <p:nvPr/>
+        </p:nvSpPr>
+        <p:spPr>
+          <a:xfrm>
+            <a:off x="0" y="1463382"/>
+            <a:ext cx="12251509" cy="312747"/>
+          </a:xfrm>
+          <a:prstGeom prst="rect">
+            <a:avLst/>
+          </a:prstGeom>
+          <a:solidFill>
+            <a:srgbClr val="8ED973"/>
+          </a:solidFill>
+          <a:ln w="12700">
+            <a:solidFill>
+              <a:srgbClr val="8ED973"/>
+            </a:solidFill>
+            <a:prstDash val="solid"/>
+          </a:ln>
+        </p:spPr>
+        <p:txBody>
+          <a:bodyPr/>
+          <a:lstStyle/>
+          <a:p>
+            <a:endParaRPr lang="en-US" sz="1823">
+              <a:latin typeface="Arial" panose="020B0604020202020204" pitchFamily="34" charset="0"/>
+              <a:cs typeface="Arial" panose="020B0604020202020204" pitchFamily="34" charset="0"/>
+            </a:endParaRPr>
+          </a:p>
+        </p:txBody>
+      </p:sp>
+      <p:sp>
+        <p:nvSpPr>
+          <p:cNvPr id="19" name="Text 17"/>
+          <p:cNvSpPr/>
+          <p:nvPr/>
+        </p:nvSpPr>
+        <p:spPr>
+          <a:xfrm>
+            <a:off x="92584" y="1463383"/>
+            <a:ext cx="12158925" cy="249974"/>
+          </a:xfrm>
+          <a:prstGeom prst="rect">
+            <a:avLst/>
+          </a:prstGeom>
+          <a:noFill/>
+          <a:ln/>
+        </p:spPr>
+        <p:txBody>
+          <a:bodyPr wrap="square" lIns="0" tIns="102870" rIns="0" bIns="0" rtlCol="0" anchor="ctr"/>
+          <a:lstStyle/>
+          <a:p>
+            <a:r>
+              <a:rPr lang="en-US" sz="1114" b="1" dirty="0">
+                <a:solidFill>
+                  <a:srgbClr val="000000"/>
+                </a:solidFill>
+                <a:latin typeface="Arial" panose="020B0604020202020204" pitchFamily="34" charset="0"/>
+                <a:ea typeface="Calibri" pitchFamily="34" charset="-122"/>
+                <a:cs typeface="Arial" panose="020B0604020202020204" pitchFamily="34" charset="0"/>
+              </a:rPr>
+              <a:t>This Week</a:t>
+            </a:r>
+            <a:endParaRPr lang="en-US" sz="1114" b="1" dirty="0">
+              <a:latin typeface="Arial" panose="020B0604020202020204" pitchFamily="34" charset="0"/>
+              <a:cs typeface="Arial" panose="020B0604020202020204" pitchFamily="34" charset="0"/>
+            </a:endParaRPr>
+          </a:p>
+        </p:txBody>
+      </p:sp>
+      <p:sp>
+        <p:nvSpPr>
+          <p:cNvPr id="20" name="Shape 18"/>
+          <p:cNvSpPr/>
+          <p:nvPr/>
+        </p:nvSpPr>
+        <p:spPr>
+          <a:xfrm>
+            <a:off x="0" y="1787423"/>
+            <a:ext cx="12344400" cy="5488784"/>
+          </a:xfrm>
+          <a:prstGeom prst="rect">
+            <a:avLst/>
+          </a:prstGeom>
+          <a:solidFill>
+            <a:schemeClr val="bg1"/>
+          </a:solidFill>
+          <a:ln w="9525">
+            <a:solidFill>
+              <a:srgbClr val="D1D5DB"/>
+            </a:solidFill>
+            <a:prstDash val="solid"/>
+          </a:ln>
+        </p:spPr>
+        <p:txBody>
+          <a:bodyPr/>
+          <a:lstStyle/>
+          <a:p>
+            <a:pPr lvl="0">
+              <a:buClr>
+                <a:srgbClr val="000000"/>
+              </a:buClr>
+              <a:defRPr/>
+            </a:pPr>
+            <a:r>
+              <a:rPr lang="en-US" sz="1200" b="1" dirty="0">
+                <a:solidFill>
+                  <a:srgbClr val="0A0A0A"/>
+                </a:solidFill>
+                <a:highlight>
+                  <a:srgbClr val="FFFFFF"/>
+                </a:highlight>
+                <a:latin typeface="Arial" panose="020B0604020202020204" pitchFamily="34" charset="0"/>
+                <a:cs typeface="Arial" panose="020B0604020202020204" pitchFamily="34" charset="0"/>
+              </a:rPr>
+              <a:t>7/6 Update</a:t>
+            </a:r>
+          </a:p>
+          <a:p>
+            <a:endParaRPr lang="en-US" sz="1215" dirty="0">
+              <a:latin typeface="Arial" panose="020B0604020202020204" pitchFamily="34" charset="0"/>
+              <a:cs typeface="Arial" panose="020B0604020202020204" pitchFamily="34" charset="0"/>
+            </a:endParaRPr>
+          </a:p>
+          <a:p>
+            <a:r>
+              <a:rPr lang="en-US" sz="1215" dirty="0">
+                <a:latin typeface="Arial" panose="020B0604020202020204" pitchFamily="34" charset="0"/>
+                <a:cs typeface="Arial" panose="020B0604020202020204" pitchFamily="34" charset="0"/>
+              </a:rPr>
+              <a:t>Amagi (Streaming Orchestration) - Several long-standing design questions were resolved this week: the Prime/Ward acknowledgment schema, day-boundary event grouping, and the manual start/stop orchestration model. The remaining open question is how to cut off viewers of a finished match on a shared stream without disrupting others; Amagi is researching a CDN-edge/token approach and owes an estimate by the July 8 call. DRM credentials are due Friday, message-level testing with dummy data starts the week of July 6, and Amagi's full orchestration readiness is targeted for July 15.</a:t>
+            </a:r>
+          </a:p>
+          <a:p>
+            <a:endParaRPr lang="en-US" sz="1215" dirty="0">
+              <a:latin typeface="Arial" panose="020B0604020202020204" pitchFamily="34" charset="0"/>
+              <a:cs typeface="Arial" panose="020B0604020202020204" pitchFamily="34" charset="0"/>
+            </a:endParaRPr>
+          </a:p>
+          <a:p>
+            <a:r>
+              <a:rPr lang="en-US" sz="1215" dirty="0">
+                <a:latin typeface="Arial" panose="020B0604020202020204" pitchFamily="34" charset="0"/>
+                <a:cs typeface="Arial" panose="020B0604020202020204" pitchFamily="34" charset="0"/>
+              </a:rPr>
+              <a:t>Adobe Pass / MVPD - The Adobe Pass integration is transitioning from setup into implementation. The registered application and API documentation are in hand, and Tennis Channel is reviewing the implementation package while configuring domain whitelisting and platform settings. On the app side, a basic prototype of the provider authentication flow is built and currently hardcoded to DirecTV for testing. Recurring working sessions are being scheduled, with a possible dedicated Slack channel to speed up onboarding.</a:t>
+            </a:r>
+          </a:p>
+          <a:p>
+            <a:endParaRPr lang="en-US" sz="1215" dirty="0">
+              <a:latin typeface="Arial" panose="020B0604020202020204" pitchFamily="34" charset="0"/>
+              <a:cs typeface="Arial" panose="020B0604020202020204" pitchFamily="34" charset="0"/>
+            </a:endParaRPr>
+          </a:p>
+          <a:p>
+            <a:r>
+              <a:rPr lang="en-US" sz="1215" dirty="0" err="1">
+                <a:latin typeface="Arial" panose="020B0604020202020204" pitchFamily="34" charset="0"/>
+                <a:cs typeface="Arial" panose="020B0604020202020204" pitchFamily="34" charset="0"/>
+              </a:rPr>
+              <a:t>Foxxum</a:t>
+            </a:r>
+            <a:r>
+              <a:rPr lang="en-US" sz="1215" dirty="0">
+                <a:latin typeface="Arial" panose="020B0604020202020204" pitchFamily="34" charset="0"/>
+                <a:cs typeface="Arial" panose="020B0604020202020204" pitchFamily="34" charset="0"/>
+              </a:rPr>
+              <a:t> - Technical discovery is progressing well, with both teams aligned on the target architecture for authentication, subscription, playback, and platform integration. Focus is now shifting from architecture to execution: documentation, provisioning </a:t>
+            </a:r>
+            <a:r>
+              <a:rPr lang="en-US" sz="1215" dirty="0" err="1">
+                <a:latin typeface="Arial" panose="020B0604020202020204" pitchFamily="34" charset="0"/>
+                <a:cs typeface="Arial" panose="020B0604020202020204" pitchFamily="34" charset="0"/>
+              </a:rPr>
+              <a:t>Cleeng</a:t>
+            </a:r>
+            <a:r>
+              <a:rPr lang="en-US" sz="1215" dirty="0">
+                <a:latin typeface="Arial" panose="020B0604020202020204" pitchFamily="34" charset="0"/>
+                <a:cs typeface="Arial" panose="020B0604020202020204" pitchFamily="34" charset="0"/>
+              </a:rPr>
+              <a:t>, finalizing API definitions, and validating implementation across platforms. No major blockers were identified, though documentation and third-party environment delays remain a watch item.</a:t>
+            </a:r>
+          </a:p>
+          <a:p>
+            <a:endParaRPr lang="en-US" sz="1215" dirty="0">
+              <a:latin typeface="Arial" panose="020B0604020202020204" pitchFamily="34" charset="0"/>
+              <a:cs typeface="Arial" panose="020B0604020202020204" pitchFamily="34" charset="0"/>
+            </a:endParaRPr>
+          </a:p>
+          <a:p>
+            <a:r>
+              <a:rPr lang="en-US" sz="1215" dirty="0">
+                <a:latin typeface="Arial" panose="020B0604020202020204" pitchFamily="34" charset="0"/>
+                <a:cs typeface="Arial" panose="020B0604020202020204" pitchFamily="34" charset="0"/>
+              </a:rPr>
+              <a:t>Platform Engineering (Website &amp; Mobile) On the new website, the front-end foundation shipped and CMS, carousel, Auth0/</a:t>
+            </a:r>
+            <a:r>
+              <a:rPr lang="en-US" sz="1215" dirty="0" err="1">
+                <a:latin typeface="Arial" panose="020B0604020202020204" pitchFamily="34" charset="0"/>
+                <a:cs typeface="Arial" panose="020B0604020202020204" pitchFamily="34" charset="0"/>
+              </a:rPr>
+              <a:t>Cleeng</a:t>
+            </a:r>
+            <a:r>
+              <a:rPr lang="en-US" sz="1215" dirty="0">
+                <a:latin typeface="Arial" panose="020B0604020202020204" pitchFamily="34" charset="0"/>
+                <a:cs typeface="Arial" panose="020B0604020202020204" pitchFamily="34" charset="0"/>
+              </a:rPr>
+              <a:t>, and Adobe Pass work are all progressing, alongside an early proof-of-concept test of the video player. On mobile, the app moved off mock data onto the live backend across Home, Live, Schedule, and Tournaments, entitlement and login groundwork is in place ahead of the real Auth0/</a:t>
+            </a:r>
+            <a:r>
+              <a:rPr lang="en-US" sz="1215" dirty="0" err="1">
+                <a:latin typeface="Arial" panose="020B0604020202020204" pitchFamily="34" charset="0"/>
+                <a:cs typeface="Arial" panose="020B0604020202020204" pitchFamily="34" charset="0"/>
+              </a:rPr>
+              <a:t>Cleeng</a:t>
+            </a:r>
+            <a:r>
+              <a:rPr lang="en-US" sz="1215" dirty="0">
+                <a:latin typeface="Arial" panose="020B0604020202020204" pitchFamily="34" charset="0"/>
+                <a:cs typeface="Arial" panose="020B0604020202020204" pitchFamily="34" charset="0"/>
+              </a:rPr>
+              <a:t> backend, and DRM stubs were handed to Amagi for integration testing.</a:t>
+            </a:r>
+          </a:p>
+        </p:txBody>
+      </p:sp>
+      <p:sp>
+        <p:nvSpPr>
+          <p:cNvPr id="21" name="Text 19"/>
+          <p:cNvSpPr/>
+          <p:nvPr/>
+        </p:nvSpPr>
+        <p:spPr>
+          <a:xfrm>
+            <a:off x="231458" y="1787423"/>
+            <a:ext cx="12020051" cy="4832833"/>
+          </a:xfrm>
+          <a:prstGeom prst="rect">
+            <a:avLst/>
+          </a:prstGeom>
+          <a:noFill/>
+          <a:ln/>
+        </p:spPr>
+        <p:txBody>
+          <a:bodyPr wrap="square" rtlCol="0" anchor="t"/>
+          <a:lstStyle/>
+          <a:p>
+            <a:pPr>
+              <a:spcAft>
+                <a:spcPts val="608"/>
+              </a:spcAft>
+            </a:pPr>
+            <a:endParaRPr lang="en-US" sz="1164" dirty="0">
+              <a:latin typeface="Arial" panose="020B0604020202020204" pitchFamily="34" charset="0"/>
+              <a:cs typeface="Arial" panose="020B0604020202020204" pitchFamily="34" charset="0"/>
+            </a:endParaRPr>
+          </a:p>
+        </p:txBody>
+      </p:sp>
+    </p:spTree>
+  </p:cSld>
+  <p:clrMapOvr>
+    <a:masterClrMapping/>
+  </p:clrMapOvr>
+</p:sld>
+</file>
+
+<file path=ppt/slides/slide2.xml><?xml version="1.0" encoding="utf-8"?>
+<p:sld xmlns:a="http://schemas.openxmlformats.org/drawingml/2006/main" xmlns:r="http://schemas.openxmlformats.org/officeDocument/2006/relationships" xmlns:p="http://schemas.openxmlformats.org/presentationml/2006/main">
+  <p:cSld>
+    <p:spTree>
+      <p:nvGrpSpPr>
+        <p:cNvPr id="1" name=""/>
+        <p:cNvGrpSpPr/>
+        <p:nvPr/>
+      </p:nvGrpSpPr>
+      <p:grpSpPr>
+        <a:xfrm>
+          <a:off x="0" y="0"/>
+          <a:ext cx="0" cy="0"/>
+          <a:chOff x="0" y="0"/>
+          <a:chExt cx="0" cy="0"/>
+        </a:xfrm>
+      </p:grpSpPr>
+      <p:sp>
+        <p:nvSpPr>
+          <p:cNvPr id="2" name="Shape 0"/>
+          <p:cNvSpPr/>
+          <p:nvPr/>
+        </p:nvSpPr>
+        <p:spPr>
+          <a:xfrm>
+            <a:off x="1" y="15838"/>
+            <a:ext cx="12344091" cy="388849"/>
+          </a:xfrm>
+          <a:prstGeom prst="rect">
+            <a:avLst/>
+          </a:prstGeom>
+          <a:solidFill>
+            <a:srgbClr val="8ED973"/>
+          </a:solidFill>
+          <a:ln w="12700">
+            <a:solidFill>
+              <a:srgbClr val="8ED973"/>
+            </a:solidFill>
+            <a:prstDash val="solid"/>
+          </a:ln>
+        </p:spPr>
+        <p:txBody>
+          <a:bodyPr/>
+          <a:lstStyle/>
+          <a:p>
+            <a:endParaRPr lang="en-US" sz="1823">
+              <a:latin typeface="Arial" panose="020B0604020202020204" pitchFamily="34" charset="0"/>
+              <a:cs typeface="Arial" panose="020B0604020202020204" pitchFamily="34" charset="0"/>
+            </a:endParaRPr>
+          </a:p>
+        </p:txBody>
+      </p:sp>
+      <p:sp>
+        <p:nvSpPr>
+          <p:cNvPr id="3" name="Text 1"/>
+          <p:cNvSpPr/>
+          <p:nvPr/>
+        </p:nvSpPr>
+        <p:spPr>
+          <a:xfrm>
+            <a:off x="1" y="4303"/>
+            <a:ext cx="12344091" cy="388849"/>
+          </a:xfrm>
+          <a:prstGeom prst="rect">
+            <a:avLst/>
+          </a:prstGeom>
+          <a:noFill/>
+          <a:ln/>
+        </p:spPr>
+        <p:txBody>
+          <a:bodyPr wrap="square" lIns="0" tIns="0" rIns="0" bIns="0" rtlCol="0" anchor="ctr"/>
+          <a:lstStyle/>
+          <a:p>
+            <a:pPr algn="ctr"/>
+            <a:r>
+              <a:rPr lang="en-US" sz="1600" b="1" dirty="0">
+                <a:solidFill>
+                  <a:srgbClr val="000000"/>
+                </a:solidFill>
+                <a:latin typeface="Arial" panose="020B0604020202020204" pitchFamily="34" charset="0"/>
+                <a:ea typeface="Arial" pitchFamily="34" charset="-122"/>
+                <a:cs typeface="Arial" panose="020B0604020202020204" pitchFamily="34" charset="0"/>
+              </a:rPr>
+              <a:t>Tennis Channel Project SABR</a:t>
+            </a:r>
+            <a:r>
+              <a:rPr lang="en-US" sz="1600" b="1" dirty="0">
+                <a:solidFill>
+                  <a:srgbClr val="1A1A1A"/>
+                </a:solidFill>
+                <a:latin typeface="Arial" panose="020B0604020202020204" pitchFamily="34" charset="0"/>
+                <a:ea typeface="Arial" pitchFamily="34" charset="-122"/>
+                <a:cs typeface="Arial" panose="020B0604020202020204" pitchFamily="34" charset="0"/>
+              </a:rPr>
+              <a:t>  ·  Critical Gates</a:t>
+            </a:r>
+            <a:endParaRPr lang="en-US" sz="1600" b="1" dirty="0">
+              <a:latin typeface="Arial" panose="020B0604020202020204" pitchFamily="34" charset="0"/>
+              <a:cs typeface="Arial" panose="020B0604020202020204" pitchFamily="34" charset="0"/>
+            </a:endParaRPr>
+          </a:p>
+        </p:txBody>
+      </p:sp>
+      <p:sp>
+        <p:nvSpPr>
+          <p:cNvPr id="4" name="Shape 2"/>
+          <p:cNvSpPr/>
+          <p:nvPr/>
+        </p:nvSpPr>
+        <p:spPr>
+          <a:xfrm>
+            <a:off x="92583" y="648653"/>
+            <a:ext cx="5740146" cy="277749"/>
+          </a:xfrm>
+          <a:prstGeom prst="rect">
+            <a:avLst/>
+          </a:prstGeom>
+          <a:solidFill>
+            <a:schemeClr val="accent6">
+              <a:lumMod val="60000"/>
+              <a:lumOff val="40000"/>
+            </a:schemeClr>
+          </a:solidFill>
+          <a:ln w="12700">
+            <a:solidFill>
+              <a:srgbClr val="0F6E56"/>
+            </a:solidFill>
+            <a:prstDash val="solid"/>
+          </a:ln>
+        </p:spPr>
+        <p:txBody>
+          <a:bodyPr/>
+          <a:lstStyle/>
+          <a:p>
+            <a:endParaRPr lang="en-US" sz="1823">
+              <a:latin typeface="Arial" panose="020B0604020202020204" pitchFamily="34" charset="0"/>
+              <a:cs typeface="Arial" panose="020B0604020202020204" pitchFamily="34" charset="0"/>
+            </a:endParaRPr>
+          </a:p>
+        </p:txBody>
+      </p:sp>
+      <p:sp>
+        <p:nvSpPr>
+          <p:cNvPr id="5" name="Text 3"/>
+          <p:cNvSpPr/>
+          <p:nvPr/>
+        </p:nvSpPr>
+        <p:spPr>
+          <a:xfrm>
+            <a:off x="138874" y="648653"/>
+            <a:ext cx="5693855" cy="277749"/>
+          </a:xfrm>
+          <a:prstGeom prst="rect">
+            <a:avLst/>
+          </a:prstGeom>
+          <a:noFill/>
+          <a:ln/>
+        </p:spPr>
+        <p:txBody>
+          <a:bodyPr wrap="square" lIns="0" tIns="0" rIns="0" bIns="0" rtlCol="0" anchor="ctr"/>
+          <a:lstStyle/>
+          <a:p>
+            <a:r>
+              <a:rPr lang="en-US" sz="1013" dirty="0">
+                <a:latin typeface="Arial" panose="020B0604020202020204" pitchFamily="34" charset="0"/>
+                <a:ea typeface="Calibri" pitchFamily="34" charset="-122"/>
+                <a:cs typeface="Arial" panose="020B0604020202020204" pitchFamily="34" charset="0"/>
+              </a:rPr>
+              <a:t>Vendor / Contract</a:t>
+            </a:r>
+            <a:endParaRPr lang="en-US" sz="1013" dirty="0">
+              <a:latin typeface="Arial" panose="020B0604020202020204" pitchFamily="34" charset="0"/>
+              <a:cs typeface="Arial" panose="020B0604020202020204" pitchFamily="34" charset="0"/>
+            </a:endParaRPr>
+          </a:p>
+        </p:txBody>
+      </p:sp>
+      <p:sp>
+        <p:nvSpPr>
+          <p:cNvPr id="6" name="Shape 4"/>
+          <p:cNvSpPr/>
+          <p:nvPr/>
+        </p:nvSpPr>
+        <p:spPr>
+          <a:xfrm>
+            <a:off x="92583" y="926401"/>
+            <a:ext cx="5740146" cy="2740457"/>
+          </a:xfrm>
+          <a:prstGeom prst="rect">
+            <a:avLst/>
+          </a:prstGeom>
+          <a:solidFill>
+            <a:srgbClr val="F8FFFE"/>
+          </a:solidFill>
+          <a:ln w="9525">
+            <a:solidFill>
+              <a:srgbClr val="D1FAE5"/>
+            </a:solidFill>
+            <a:prstDash val="solid"/>
+          </a:ln>
+        </p:spPr>
+        <p:txBody>
+          <a:bodyPr/>
+          <a:lstStyle/>
+          <a:p>
+            <a:endParaRPr lang="en-US" sz="1823">
+              <a:latin typeface="Arial" panose="020B0604020202020204" pitchFamily="34" charset="0"/>
+              <a:cs typeface="Arial" panose="020B0604020202020204" pitchFamily="34" charset="0"/>
+            </a:endParaRPr>
+          </a:p>
+        </p:txBody>
+      </p:sp>
+      <p:sp>
+        <p:nvSpPr>
+          <p:cNvPr id="7" name="Shape 5"/>
+          <p:cNvSpPr/>
+          <p:nvPr/>
+        </p:nvSpPr>
+        <p:spPr>
+          <a:xfrm>
+            <a:off x="101842" y="926402"/>
+            <a:ext cx="5721629" cy="548092"/>
+          </a:xfrm>
+          <a:prstGeom prst="rect">
+            <a:avLst/>
+          </a:prstGeom>
+          <a:solidFill>
+            <a:srgbClr val="FFFFFF"/>
+          </a:solidFill>
+          <a:ln w="12700">
+            <a:solidFill>
+              <a:srgbClr val="FFFFFF"/>
+            </a:solidFill>
+            <a:prstDash val="solid"/>
+          </a:ln>
+        </p:spPr>
+        <p:txBody>
+          <a:bodyPr/>
+          <a:lstStyle/>
+          <a:p>
+            <a:endParaRPr lang="en-US" sz="1823">
+              <a:latin typeface="Arial" panose="020B0604020202020204" pitchFamily="34" charset="0"/>
+              <a:cs typeface="Arial" panose="020B0604020202020204" pitchFamily="34" charset="0"/>
+            </a:endParaRPr>
+          </a:p>
+        </p:txBody>
+      </p:sp>
+      <p:sp>
+        <p:nvSpPr>
+          <p:cNvPr id="8" name="Text 6"/>
+          <p:cNvSpPr/>
+          <p:nvPr/>
+        </p:nvSpPr>
+        <p:spPr>
+          <a:xfrm>
+            <a:off x="138874" y="926402"/>
+            <a:ext cx="601790" cy="548092"/>
+          </a:xfrm>
+          <a:prstGeom prst="rect">
+            <a:avLst/>
+          </a:prstGeom>
+          <a:noFill/>
+          <a:ln/>
+        </p:spPr>
+        <p:txBody>
+          <a:bodyPr wrap="square" lIns="0" tIns="0" rIns="0" bIns="0" rtlCol="0" anchor="ctr"/>
+          <a:lstStyle/>
+          <a:p>
+            <a:r>
+              <a:rPr lang="en-US" sz="861" dirty="0" err="1">
+                <a:solidFill>
+                  <a:srgbClr val="374151"/>
+                </a:solidFill>
+                <a:latin typeface="Arial" panose="020B0604020202020204" pitchFamily="34" charset="0"/>
+                <a:ea typeface="Calibri" pitchFamily="34" charset="-122"/>
+                <a:cs typeface="Arial" panose="020B0604020202020204" pitchFamily="34" charset="0"/>
+              </a:rPr>
+              <a:t>Bitmovin</a:t>
+            </a:r>
+            <a:endParaRPr lang="en-US" sz="861" dirty="0">
+              <a:latin typeface="Arial" panose="020B0604020202020204" pitchFamily="34" charset="0"/>
+              <a:cs typeface="Arial" panose="020B0604020202020204" pitchFamily="34" charset="0"/>
+            </a:endParaRPr>
+          </a:p>
+        </p:txBody>
+      </p:sp>
+      <p:sp>
+        <p:nvSpPr>
+          <p:cNvPr id="9" name="Text 7"/>
+          <p:cNvSpPr/>
+          <p:nvPr/>
+        </p:nvSpPr>
+        <p:spPr>
+          <a:xfrm>
+            <a:off x="759180" y="926402"/>
+            <a:ext cx="4462501" cy="548092"/>
+          </a:xfrm>
+          <a:prstGeom prst="rect">
+            <a:avLst/>
+          </a:prstGeom>
+          <a:noFill/>
+          <a:ln/>
+        </p:spPr>
+        <p:txBody>
+          <a:bodyPr wrap="square" lIns="0" tIns="0" rIns="0" bIns="0" rtlCol="0" anchor="ctr"/>
+          <a:lstStyle/>
+          <a:p>
+            <a:r>
+              <a:rPr lang="en-US" sz="810" dirty="0">
+                <a:latin typeface="Arial" panose="020B0604020202020204" pitchFamily="34" charset="0"/>
+                <a:cs typeface="Arial" panose="020B0604020202020204" pitchFamily="34" charset="0"/>
+              </a:rPr>
+              <a:t>Redlined from TC legal, </a:t>
+            </a:r>
+            <a:r>
+              <a:rPr lang="en-US" sz="810" dirty="0" err="1">
+                <a:latin typeface="Arial" panose="020B0604020202020204" pitchFamily="34" charset="0"/>
+                <a:cs typeface="Arial" panose="020B0604020202020204" pitchFamily="34" charset="0"/>
+              </a:rPr>
+              <a:t>Bitmovin</a:t>
+            </a:r>
+            <a:r>
+              <a:rPr lang="en-US" sz="810" dirty="0">
+                <a:latin typeface="Arial" panose="020B0604020202020204" pitchFamily="34" charset="0"/>
+                <a:cs typeface="Arial" panose="020B0604020202020204" pitchFamily="34" charset="0"/>
+              </a:rPr>
+              <a:t> reviewing </a:t>
+            </a:r>
+          </a:p>
+        </p:txBody>
+      </p:sp>
+      <p:sp>
+        <p:nvSpPr>
+          <p:cNvPr id="10" name="Shape 8"/>
+          <p:cNvSpPr/>
+          <p:nvPr/>
+        </p:nvSpPr>
+        <p:spPr>
+          <a:xfrm>
+            <a:off x="5258714" y="1098605"/>
+            <a:ext cx="546240" cy="203683"/>
+          </a:xfrm>
+          <a:prstGeom prst="roundRect">
+            <a:avLst>
+              <a:gd name="adj" fmla="val 22727"/>
+            </a:avLst>
+          </a:prstGeom>
+          <a:solidFill>
+            <a:srgbClr val="DBEAFE"/>
+          </a:solidFill>
+          <a:ln w="12700">
+            <a:solidFill>
+              <a:srgbClr val="DBEAFE"/>
+            </a:solidFill>
+            <a:prstDash val="solid"/>
+          </a:ln>
+        </p:spPr>
+        <p:txBody>
+          <a:bodyPr/>
+          <a:lstStyle/>
+          <a:p>
+            <a:endParaRPr lang="en-US" sz="1823">
+              <a:latin typeface="Arial" panose="020B0604020202020204" pitchFamily="34" charset="0"/>
+              <a:cs typeface="Arial" panose="020B0604020202020204" pitchFamily="34" charset="0"/>
+            </a:endParaRPr>
+          </a:p>
+        </p:txBody>
+      </p:sp>
+      <p:sp>
+        <p:nvSpPr>
+          <p:cNvPr id="11" name="Text 9"/>
+          <p:cNvSpPr/>
+          <p:nvPr/>
+        </p:nvSpPr>
+        <p:spPr>
+          <a:xfrm>
+            <a:off x="5258714" y="1098605"/>
+            <a:ext cx="546240" cy="203683"/>
+          </a:xfrm>
+          <a:prstGeom prst="rect">
+            <a:avLst/>
+          </a:prstGeom>
+          <a:noFill/>
+          <a:ln/>
+        </p:spPr>
+        <p:txBody>
+          <a:bodyPr wrap="square" lIns="0" tIns="0" rIns="0" bIns="0" rtlCol="0" anchor="ctr"/>
+          <a:lstStyle/>
+          <a:p>
+            <a:pPr algn="ctr"/>
+            <a:r>
+              <a:rPr lang="en-US" sz="709" dirty="0">
+                <a:solidFill>
+                  <a:srgbClr val="1E40AF"/>
+                </a:solidFill>
+                <a:latin typeface="Arial" panose="020B0604020202020204" pitchFamily="34" charset="0"/>
+                <a:ea typeface="Calibri" pitchFamily="34" charset="-122"/>
+                <a:cs typeface="Arial" panose="020B0604020202020204" pitchFamily="34" charset="0"/>
+              </a:rPr>
+              <a:t>In Progress</a:t>
+            </a:r>
+            <a:endParaRPr lang="en-US" sz="709" dirty="0">
+              <a:latin typeface="Arial" panose="020B0604020202020204" pitchFamily="34" charset="0"/>
+              <a:cs typeface="Arial" panose="020B0604020202020204" pitchFamily="34" charset="0"/>
+            </a:endParaRPr>
+          </a:p>
+        </p:txBody>
+      </p:sp>
+      <p:sp>
+        <p:nvSpPr>
+          <p:cNvPr id="12" name="Text 10"/>
+          <p:cNvSpPr/>
+          <p:nvPr/>
+        </p:nvSpPr>
+        <p:spPr>
+          <a:xfrm>
+            <a:off x="138874" y="1474493"/>
+            <a:ext cx="601790" cy="548092"/>
+          </a:xfrm>
+          <a:prstGeom prst="rect">
+            <a:avLst/>
+          </a:prstGeom>
+          <a:noFill/>
+          <a:ln/>
+        </p:spPr>
+        <p:txBody>
+          <a:bodyPr wrap="square" lIns="0" tIns="0" rIns="0" bIns="0" rtlCol="0" anchor="ctr"/>
+          <a:lstStyle/>
+          <a:p>
+            <a:r>
+              <a:rPr lang="en-US" sz="861" dirty="0">
+                <a:solidFill>
+                  <a:srgbClr val="374151"/>
+                </a:solidFill>
+                <a:latin typeface="Arial" panose="020B0604020202020204" pitchFamily="34" charset="0"/>
+                <a:cs typeface="Arial" panose="020B0604020202020204" pitchFamily="34" charset="0"/>
+              </a:rPr>
+              <a:t>Adobe</a:t>
+            </a:r>
+            <a:endParaRPr lang="en-US" sz="861" dirty="0">
+              <a:latin typeface="Arial" panose="020B0604020202020204" pitchFamily="34" charset="0"/>
+              <a:cs typeface="Arial" panose="020B0604020202020204" pitchFamily="34" charset="0"/>
+            </a:endParaRPr>
+          </a:p>
+        </p:txBody>
+      </p:sp>
+      <p:sp>
+        <p:nvSpPr>
+          <p:cNvPr id="13" name="Text 11"/>
+          <p:cNvSpPr/>
+          <p:nvPr/>
+        </p:nvSpPr>
+        <p:spPr>
+          <a:xfrm>
+            <a:off x="759180" y="1474493"/>
+            <a:ext cx="4462501" cy="548092"/>
+          </a:xfrm>
+          <a:prstGeom prst="rect">
+            <a:avLst/>
+          </a:prstGeom>
+          <a:noFill/>
+          <a:ln/>
+        </p:spPr>
+        <p:txBody>
+          <a:bodyPr wrap="square" lIns="0" tIns="0" rIns="0" bIns="0" rtlCol="0" anchor="ctr"/>
+          <a:lstStyle/>
+          <a:p>
+            <a:r>
+              <a:rPr lang="en-US" sz="861" dirty="0">
+                <a:solidFill>
+                  <a:srgbClr val="374151"/>
+                </a:solidFill>
+                <a:latin typeface="Arial" panose="020B0604020202020204" pitchFamily="34" charset="0"/>
+                <a:ea typeface="Calibri" pitchFamily="34" charset="-122"/>
+                <a:cs typeface="Arial" panose="020B0604020202020204" pitchFamily="34" charset="0"/>
+              </a:rPr>
+              <a:t>We are good. Just need to find out who owns the original contract and review renewal dates. Keff owns.</a:t>
+            </a:r>
+            <a:endParaRPr lang="en-US" sz="861" dirty="0">
+              <a:latin typeface="Arial" panose="020B0604020202020204" pitchFamily="34" charset="0"/>
+              <a:cs typeface="Arial" panose="020B0604020202020204" pitchFamily="34" charset="0"/>
+            </a:endParaRPr>
+          </a:p>
+        </p:txBody>
+      </p:sp>
+      <p:sp>
+        <p:nvSpPr>
+          <p:cNvPr id="16" name="Shape 14"/>
+          <p:cNvSpPr/>
+          <p:nvPr/>
+        </p:nvSpPr>
+        <p:spPr>
+          <a:xfrm>
+            <a:off x="101842" y="2022585"/>
+            <a:ext cx="5721629" cy="548092"/>
+          </a:xfrm>
+          <a:prstGeom prst="rect">
+            <a:avLst/>
+          </a:prstGeom>
+          <a:solidFill>
+            <a:srgbClr val="FFFFFF"/>
+          </a:solidFill>
+          <a:ln w="12700">
+            <a:solidFill>
+              <a:srgbClr val="FFFFFF"/>
+            </a:solidFill>
+            <a:prstDash val="solid"/>
+          </a:ln>
+        </p:spPr>
+        <p:txBody>
+          <a:bodyPr/>
+          <a:lstStyle/>
+          <a:p>
+            <a:endParaRPr lang="en-US" sz="1823" dirty="0">
+              <a:latin typeface="Arial" panose="020B0604020202020204" pitchFamily="34" charset="0"/>
+              <a:cs typeface="Arial" panose="020B0604020202020204" pitchFamily="34" charset="0"/>
+            </a:endParaRPr>
+          </a:p>
+        </p:txBody>
+      </p:sp>
+      <p:sp>
+        <p:nvSpPr>
+          <p:cNvPr id="17" name="Text 15"/>
+          <p:cNvSpPr/>
+          <p:nvPr/>
+        </p:nvSpPr>
+        <p:spPr>
+          <a:xfrm>
+            <a:off x="138874" y="2022585"/>
+            <a:ext cx="601790" cy="548092"/>
+          </a:xfrm>
+          <a:prstGeom prst="rect">
+            <a:avLst/>
+          </a:prstGeom>
+          <a:noFill/>
+          <a:ln/>
+        </p:spPr>
+        <p:txBody>
+          <a:bodyPr wrap="square" lIns="0" tIns="0" rIns="0" bIns="0" rtlCol="0" anchor="ctr"/>
+          <a:lstStyle/>
+          <a:p>
+            <a:r>
+              <a:rPr lang="en-US" sz="861" dirty="0">
+                <a:solidFill>
+                  <a:srgbClr val="374151"/>
+                </a:solidFill>
+                <a:latin typeface="Arial" panose="020B0604020202020204" pitchFamily="34" charset="0"/>
+                <a:cs typeface="Arial" panose="020B0604020202020204" pitchFamily="34" charset="0"/>
+              </a:rPr>
+              <a:t>Amagi </a:t>
+            </a:r>
+          </a:p>
+          <a:p>
+            <a:r>
+              <a:rPr lang="en-US" sz="861" dirty="0">
+                <a:solidFill>
+                  <a:srgbClr val="374151"/>
+                </a:solidFill>
+                <a:latin typeface="Arial" panose="020B0604020202020204" pitchFamily="34" charset="0"/>
+                <a:cs typeface="Arial" panose="020B0604020202020204" pitchFamily="34" charset="0"/>
+              </a:rPr>
+              <a:t>SOW</a:t>
+            </a:r>
+            <a:endParaRPr lang="en-US" sz="861" dirty="0">
+              <a:latin typeface="Arial" panose="020B0604020202020204" pitchFamily="34" charset="0"/>
+              <a:cs typeface="Arial" panose="020B0604020202020204" pitchFamily="34" charset="0"/>
+            </a:endParaRPr>
+          </a:p>
+        </p:txBody>
+      </p:sp>
+      <p:sp>
+        <p:nvSpPr>
+          <p:cNvPr id="18" name="Text 16"/>
+          <p:cNvSpPr/>
+          <p:nvPr/>
+        </p:nvSpPr>
+        <p:spPr>
+          <a:xfrm>
+            <a:off x="759180" y="2022585"/>
+            <a:ext cx="4462501" cy="548092"/>
+          </a:xfrm>
+          <a:prstGeom prst="rect">
+            <a:avLst/>
+          </a:prstGeom>
+          <a:noFill/>
+          <a:ln/>
+        </p:spPr>
+        <p:txBody>
+          <a:bodyPr wrap="square" lIns="0" tIns="0" rIns="0" bIns="0" rtlCol="0" anchor="ctr"/>
+          <a:lstStyle/>
+          <a:p>
+            <a:r>
+              <a:rPr lang="en-US" sz="810" dirty="0">
+                <a:latin typeface="Arial" panose="020B0604020202020204" pitchFamily="34" charset="0"/>
+                <a:cs typeface="Arial" panose="020B0604020202020204" pitchFamily="34" charset="0"/>
+              </a:rPr>
+              <a:t>Amagi Contract Cost Review: Provide Sinclair with details on cost savings for Amagi by following up with Mike Kralik and Kevin </a:t>
+            </a:r>
+            <a:r>
+              <a:rPr lang="en-US" sz="810" dirty="0" err="1">
+                <a:latin typeface="Arial" panose="020B0604020202020204" pitchFamily="34" charset="0"/>
+                <a:cs typeface="Arial" panose="020B0604020202020204" pitchFamily="34" charset="0"/>
+              </a:rPr>
+              <a:t>Kotlove</a:t>
+            </a:r>
+            <a:r>
+              <a:rPr lang="en-US" sz="810" dirty="0">
+                <a:latin typeface="Arial" panose="020B0604020202020204" pitchFamily="34" charset="0"/>
+                <a:cs typeface="Arial" panose="020B0604020202020204" pitchFamily="34" charset="0"/>
+              </a:rPr>
+              <a:t>. (Ari)</a:t>
+            </a:r>
+          </a:p>
+        </p:txBody>
+      </p:sp>
+      <p:sp>
+        <p:nvSpPr>
+          <p:cNvPr id="19" name="Shape 17"/>
+          <p:cNvSpPr/>
+          <p:nvPr/>
+        </p:nvSpPr>
+        <p:spPr>
+          <a:xfrm>
+            <a:off x="5258714" y="2194788"/>
+            <a:ext cx="546240" cy="203683"/>
+          </a:xfrm>
+          <a:prstGeom prst="roundRect">
+            <a:avLst>
+              <a:gd name="adj" fmla="val 22727"/>
+            </a:avLst>
+          </a:prstGeom>
+          <a:solidFill>
+            <a:srgbClr val="DBEAFE"/>
+          </a:solidFill>
+          <a:ln w="12700">
+            <a:solidFill>
+              <a:srgbClr val="DBEAFE"/>
+            </a:solidFill>
+            <a:prstDash val="solid"/>
+          </a:ln>
+        </p:spPr>
+        <p:txBody>
+          <a:bodyPr/>
+          <a:lstStyle/>
+          <a:p>
+            <a:endParaRPr lang="en-US" sz="1823">
+              <a:latin typeface="Arial" panose="020B0604020202020204" pitchFamily="34" charset="0"/>
+              <a:cs typeface="Arial" panose="020B0604020202020204" pitchFamily="34" charset="0"/>
+            </a:endParaRPr>
+          </a:p>
+        </p:txBody>
+      </p:sp>
+      <p:sp>
+        <p:nvSpPr>
+          <p:cNvPr id="20" name="Text 18"/>
+          <p:cNvSpPr/>
+          <p:nvPr/>
+        </p:nvSpPr>
+        <p:spPr>
+          <a:xfrm>
+            <a:off x="5258714" y="2194788"/>
+            <a:ext cx="546240" cy="203683"/>
+          </a:xfrm>
+          <a:prstGeom prst="rect">
+            <a:avLst/>
+          </a:prstGeom>
+          <a:noFill/>
+          <a:ln/>
+        </p:spPr>
+        <p:txBody>
+          <a:bodyPr wrap="square" lIns="0" tIns="0" rIns="0" bIns="0" rtlCol="0" anchor="ctr"/>
+          <a:lstStyle/>
+          <a:p>
+            <a:pPr algn="ctr"/>
+            <a:r>
+              <a:rPr lang="en-US" sz="709" dirty="0">
+                <a:solidFill>
+                  <a:srgbClr val="1E40AF"/>
+                </a:solidFill>
+                <a:latin typeface="Arial" panose="020B0604020202020204" pitchFamily="34" charset="0"/>
+                <a:ea typeface="Calibri" pitchFamily="34" charset="-122"/>
+                <a:cs typeface="Arial" panose="020B0604020202020204" pitchFamily="34" charset="0"/>
+              </a:rPr>
+              <a:t>In Progress</a:t>
+            </a:r>
+            <a:endParaRPr lang="en-US" sz="709" dirty="0">
+              <a:latin typeface="Arial" panose="020B0604020202020204" pitchFamily="34" charset="0"/>
+              <a:cs typeface="Arial" panose="020B0604020202020204" pitchFamily="34" charset="0"/>
+            </a:endParaRPr>
+          </a:p>
+        </p:txBody>
+      </p:sp>
+      <p:sp>
+        <p:nvSpPr>
+          <p:cNvPr id="21" name="Text 19"/>
+          <p:cNvSpPr/>
+          <p:nvPr/>
+        </p:nvSpPr>
+        <p:spPr>
+          <a:xfrm>
+            <a:off x="138874" y="2570675"/>
+            <a:ext cx="601790" cy="548092"/>
+          </a:xfrm>
+          <a:prstGeom prst="rect">
+            <a:avLst/>
+          </a:prstGeom>
+          <a:noFill/>
+          <a:ln/>
+        </p:spPr>
+        <p:txBody>
+          <a:bodyPr wrap="square" lIns="0" tIns="0" rIns="0" bIns="0" rtlCol="0" anchor="ctr"/>
+          <a:lstStyle/>
+          <a:p>
+            <a:r>
+              <a:rPr lang="en-US" sz="861" dirty="0">
+                <a:solidFill>
+                  <a:srgbClr val="374151"/>
+                </a:solidFill>
+                <a:latin typeface="Arial" panose="020B0604020202020204" pitchFamily="34" charset="0"/>
+                <a:ea typeface="Calibri" pitchFamily="34" charset="-122"/>
+                <a:cs typeface="Arial" panose="020B0604020202020204" pitchFamily="34" charset="0"/>
+              </a:rPr>
+              <a:t>FOXXUM</a:t>
+            </a:r>
+            <a:endParaRPr lang="en-US" sz="861" dirty="0">
+              <a:latin typeface="Arial" panose="020B0604020202020204" pitchFamily="34" charset="0"/>
+              <a:cs typeface="Arial" panose="020B0604020202020204" pitchFamily="34" charset="0"/>
+            </a:endParaRPr>
+          </a:p>
+        </p:txBody>
+      </p:sp>
+      <p:sp>
+        <p:nvSpPr>
+          <p:cNvPr id="22" name="Text 20"/>
+          <p:cNvSpPr/>
+          <p:nvPr/>
+        </p:nvSpPr>
+        <p:spPr>
+          <a:xfrm>
+            <a:off x="759180" y="2570675"/>
+            <a:ext cx="4462501" cy="548092"/>
+          </a:xfrm>
+          <a:prstGeom prst="rect">
+            <a:avLst/>
+          </a:prstGeom>
+          <a:noFill/>
+          <a:ln/>
+        </p:spPr>
+        <p:txBody>
+          <a:bodyPr wrap="square" lIns="0" tIns="0" rIns="0" bIns="0" rtlCol="0" anchor="ctr"/>
+          <a:lstStyle/>
+          <a:p>
+            <a:r>
+              <a:rPr lang="en-US" sz="861" dirty="0">
+                <a:solidFill>
+                  <a:srgbClr val="374151"/>
+                </a:solidFill>
+                <a:latin typeface="Arial" panose="020B0604020202020204" pitchFamily="34" charset="0"/>
+                <a:ea typeface="Calibri" pitchFamily="34" charset="-122"/>
+                <a:cs typeface="Arial" panose="020B0604020202020204" pitchFamily="34" charset="0"/>
+              </a:rPr>
+              <a:t>Redlined, contract sent out to FOXXUM for review on 7/2.</a:t>
+            </a:r>
+            <a:endParaRPr lang="en-US" sz="861" dirty="0">
+              <a:latin typeface="Arial" panose="020B0604020202020204" pitchFamily="34" charset="0"/>
+              <a:cs typeface="Arial" panose="020B0604020202020204" pitchFamily="34" charset="0"/>
+            </a:endParaRPr>
+          </a:p>
+        </p:txBody>
+      </p:sp>
+      <p:sp>
+        <p:nvSpPr>
+          <p:cNvPr id="23" name="Shape 21"/>
+          <p:cNvSpPr/>
+          <p:nvPr/>
+        </p:nvSpPr>
+        <p:spPr>
+          <a:xfrm>
+            <a:off x="5258714" y="2742880"/>
+            <a:ext cx="546240" cy="203683"/>
+          </a:xfrm>
+          <a:prstGeom prst="roundRect">
+            <a:avLst>
+              <a:gd name="adj" fmla="val 22727"/>
+            </a:avLst>
+          </a:prstGeom>
+          <a:solidFill>
+            <a:srgbClr val="DBEAFE"/>
+          </a:solidFill>
+          <a:ln w="12700">
+            <a:solidFill>
+              <a:srgbClr val="DBEAFE"/>
+            </a:solidFill>
+            <a:prstDash val="solid"/>
+          </a:ln>
+        </p:spPr>
+        <p:txBody>
+          <a:bodyPr/>
+          <a:lstStyle/>
+          <a:p>
+            <a:endParaRPr lang="en-US" sz="1823">
+              <a:latin typeface="Arial" panose="020B0604020202020204" pitchFamily="34" charset="0"/>
+              <a:cs typeface="Arial" panose="020B0604020202020204" pitchFamily="34" charset="0"/>
+            </a:endParaRPr>
+          </a:p>
+        </p:txBody>
+      </p:sp>
+      <p:sp>
+        <p:nvSpPr>
+          <p:cNvPr id="24" name="Text 22"/>
+          <p:cNvSpPr/>
+          <p:nvPr/>
+        </p:nvSpPr>
+        <p:spPr>
+          <a:xfrm>
+            <a:off x="5258714" y="2742880"/>
+            <a:ext cx="546240" cy="203683"/>
+          </a:xfrm>
+          <a:prstGeom prst="rect">
+            <a:avLst/>
+          </a:prstGeom>
+          <a:noFill/>
+          <a:ln/>
+        </p:spPr>
+        <p:txBody>
+          <a:bodyPr wrap="square" lIns="0" tIns="0" rIns="0" bIns="0" rtlCol="0" anchor="ctr"/>
+          <a:lstStyle/>
+          <a:p>
+            <a:pPr algn="ctr"/>
+            <a:r>
+              <a:rPr lang="en-US" sz="709" dirty="0">
+                <a:solidFill>
+                  <a:srgbClr val="1E40AF"/>
+                </a:solidFill>
+                <a:latin typeface="Arial" panose="020B0604020202020204" pitchFamily="34" charset="0"/>
+                <a:ea typeface="Calibri" pitchFamily="34" charset="-122"/>
+                <a:cs typeface="Arial" panose="020B0604020202020204" pitchFamily="34" charset="0"/>
+              </a:rPr>
+              <a:t>In Progress</a:t>
+            </a:r>
+            <a:endParaRPr lang="en-US" sz="709" dirty="0">
+              <a:latin typeface="Arial" panose="020B0604020202020204" pitchFamily="34" charset="0"/>
+              <a:cs typeface="Arial" panose="020B0604020202020204" pitchFamily="34" charset="0"/>
+            </a:endParaRPr>
+          </a:p>
+        </p:txBody>
+      </p:sp>
+      <p:sp>
+        <p:nvSpPr>
+          <p:cNvPr id="25" name="Shape 23"/>
+          <p:cNvSpPr/>
+          <p:nvPr/>
+        </p:nvSpPr>
+        <p:spPr>
+          <a:xfrm>
+            <a:off x="101842" y="3118767"/>
+            <a:ext cx="5721629" cy="548092"/>
+          </a:xfrm>
+          <a:prstGeom prst="rect">
+            <a:avLst/>
+          </a:prstGeom>
+          <a:solidFill>
+            <a:srgbClr val="FFFFFF"/>
+          </a:solidFill>
+          <a:ln w="12700">
+            <a:solidFill>
+              <a:srgbClr val="FFFFFF"/>
+            </a:solidFill>
+            <a:prstDash val="solid"/>
+          </a:ln>
+        </p:spPr>
+        <p:txBody>
+          <a:bodyPr/>
+          <a:lstStyle/>
+          <a:p>
+            <a:endParaRPr lang="en-US" sz="1823">
+              <a:latin typeface="Arial" panose="020B0604020202020204" pitchFamily="34" charset="0"/>
+              <a:cs typeface="Arial" panose="020B0604020202020204" pitchFamily="34" charset="0"/>
+            </a:endParaRPr>
+          </a:p>
+        </p:txBody>
+      </p:sp>
+      <p:sp>
+        <p:nvSpPr>
+          <p:cNvPr id="26" name="Text 24"/>
+          <p:cNvSpPr/>
+          <p:nvPr/>
+        </p:nvSpPr>
+        <p:spPr>
+          <a:xfrm>
+            <a:off x="138874" y="3118767"/>
+            <a:ext cx="601790" cy="548092"/>
+          </a:xfrm>
+          <a:prstGeom prst="rect">
+            <a:avLst/>
+          </a:prstGeom>
+          <a:noFill/>
+          <a:ln/>
+        </p:spPr>
+        <p:txBody>
+          <a:bodyPr wrap="square" lIns="0" tIns="0" rIns="0" bIns="0" rtlCol="0" anchor="ctr"/>
+          <a:lstStyle/>
+          <a:p>
+            <a:r>
+              <a:rPr lang="en-US" sz="861" dirty="0">
+                <a:solidFill>
+                  <a:srgbClr val="374151"/>
+                </a:solidFill>
+                <a:latin typeface="Arial" panose="020B0604020202020204" pitchFamily="34" charset="0"/>
+                <a:ea typeface="Calibri" pitchFamily="34" charset="-122"/>
+                <a:cs typeface="Arial" panose="020B0604020202020204" pitchFamily="34" charset="0"/>
+              </a:rPr>
+              <a:t>SR Data</a:t>
+            </a:r>
+            <a:endParaRPr lang="en-US" sz="861" dirty="0">
+              <a:latin typeface="Arial" panose="020B0604020202020204" pitchFamily="34" charset="0"/>
+              <a:cs typeface="Arial" panose="020B0604020202020204" pitchFamily="34" charset="0"/>
+            </a:endParaRPr>
+          </a:p>
+        </p:txBody>
+      </p:sp>
+      <p:sp>
+        <p:nvSpPr>
+          <p:cNvPr id="27" name="Text 25"/>
+          <p:cNvSpPr/>
+          <p:nvPr/>
+        </p:nvSpPr>
+        <p:spPr>
+          <a:xfrm>
+            <a:off x="759180" y="3118767"/>
+            <a:ext cx="4462501" cy="548092"/>
+          </a:xfrm>
+          <a:prstGeom prst="rect">
+            <a:avLst/>
+          </a:prstGeom>
+          <a:noFill/>
+          <a:ln/>
+        </p:spPr>
+        <p:txBody>
+          <a:bodyPr wrap="square" lIns="0" tIns="0" rIns="0" bIns="0" rtlCol="0" anchor="ctr"/>
+          <a:lstStyle/>
+          <a:p>
+            <a:r>
+              <a:rPr lang="en-US" sz="911" dirty="0">
+                <a:latin typeface="Arial" panose="020B0604020202020204" pitchFamily="34" charset="0"/>
+                <a:cs typeface="Arial" panose="020B0604020202020204" pitchFamily="34" charset="0"/>
+              </a:rPr>
+              <a:t>Discussions will begin end of week or first week of July. Due by end of July.</a:t>
+            </a:r>
+          </a:p>
+          <a:p>
+            <a:endParaRPr lang="en-US" sz="911" dirty="0">
+              <a:latin typeface="Arial" panose="020B0604020202020204" pitchFamily="34" charset="0"/>
+              <a:cs typeface="Arial" panose="020B0604020202020204" pitchFamily="34" charset="0"/>
+            </a:endParaRPr>
+          </a:p>
+        </p:txBody>
+      </p:sp>
+      <p:sp>
+        <p:nvSpPr>
+          <p:cNvPr id="28" name="Shape 26"/>
+          <p:cNvSpPr/>
+          <p:nvPr/>
+        </p:nvSpPr>
+        <p:spPr>
+          <a:xfrm>
+            <a:off x="5258714" y="3290972"/>
+            <a:ext cx="546240" cy="203683"/>
+          </a:xfrm>
+          <a:prstGeom prst="roundRect">
+            <a:avLst>
+              <a:gd name="adj" fmla="val 22727"/>
+            </a:avLst>
+          </a:prstGeom>
+          <a:solidFill>
+            <a:srgbClr val="DBEAFE"/>
+          </a:solidFill>
+          <a:ln w="12700">
+            <a:solidFill>
+              <a:srgbClr val="DBEAFE"/>
+            </a:solidFill>
+            <a:prstDash val="solid"/>
+          </a:ln>
+        </p:spPr>
+        <p:txBody>
+          <a:bodyPr/>
+          <a:lstStyle/>
+          <a:p>
+            <a:endParaRPr lang="en-US" sz="1823">
+              <a:latin typeface="Arial" panose="020B0604020202020204" pitchFamily="34" charset="0"/>
+              <a:cs typeface="Arial" panose="020B0604020202020204" pitchFamily="34" charset="0"/>
+            </a:endParaRPr>
+          </a:p>
+        </p:txBody>
+      </p:sp>
+      <p:sp>
+        <p:nvSpPr>
+          <p:cNvPr id="29" name="Text 27"/>
+          <p:cNvSpPr>
+            <a:spLocks/>
+          </p:cNvSpPr>
+          <p:nvPr/>
+        </p:nvSpPr>
+        <p:spPr>
+          <a:xfrm>
+            <a:off x="5258714" y="3290972"/>
+            <a:ext cx="546240" cy="203683"/>
+          </a:xfrm>
+          <a:prstGeom prst="rect">
+            <a:avLst/>
+          </a:prstGeom>
+          <a:noFill/>
+          <a:ln/>
+        </p:spPr>
+        <p:txBody>
+          <a:bodyPr wrap="square" lIns="0" tIns="0" rIns="0" bIns="0" rtlCol="0" anchor="ctr"/>
+          <a:lstStyle/>
+          <a:p>
+            <a:pPr algn="ctr"/>
+            <a:r>
+              <a:rPr lang="en-US" sz="709" dirty="0">
+                <a:solidFill>
+                  <a:srgbClr val="1E40AF"/>
+                </a:solidFill>
+                <a:latin typeface="Arial" panose="020B0604020202020204" pitchFamily="34" charset="0"/>
+                <a:ea typeface="Calibri" pitchFamily="34" charset="-122"/>
+                <a:cs typeface="Arial" panose="020B0604020202020204" pitchFamily="34" charset="0"/>
+              </a:rPr>
+              <a:t>In Progress</a:t>
+            </a:r>
+            <a:endParaRPr lang="en-US" sz="709" dirty="0">
+              <a:latin typeface="Arial" panose="020B0604020202020204" pitchFamily="34" charset="0"/>
+              <a:cs typeface="Arial" panose="020B0604020202020204" pitchFamily="34" charset="0"/>
+            </a:endParaRPr>
+          </a:p>
+        </p:txBody>
+      </p:sp>
+      <p:sp>
+        <p:nvSpPr>
+          <p:cNvPr id="30" name="Shape 28"/>
+          <p:cNvSpPr/>
+          <p:nvPr/>
+        </p:nvSpPr>
+        <p:spPr>
+          <a:xfrm>
+            <a:off x="5943829" y="648653"/>
+            <a:ext cx="5740146" cy="277749"/>
+          </a:xfrm>
+          <a:prstGeom prst="rect">
+            <a:avLst/>
+          </a:prstGeom>
+          <a:solidFill>
+            <a:schemeClr val="accent6">
+              <a:lumMod val="60000"/>
+              <a:lumOff val="40000"/>
+            </a:schemeClr>
+          </a:solidFill>
+          <a:ln w="12700">
+            <a:solidFill>
+              <a:srgbClr val="0F6E56"/>
+            </a:solidFill>
+            <a:prstDash val="solid"/>
+          </a:ln>
+        </p:spPr>
+        <p:txBody>
+          <a:bodyPr/>
+          <a:lstStyle/>
+          <a:p>
+            <a:endParaRPr lang="en-US" sz="1823">
+              <a:latin typeface="Arial" panose="020B0604020202020204" pitchFamily="34" charset="0"/>
+              <a:cs typeface="Arial" panose="020B0604020202020204" pitchFamily="34" charset="0"/>
+            </a:endParaRPr>
+          </a:p>
+        </p:txBody>
+      </p:sp>
+      <p:sp>
+        <p:nvSpPr>
+          <p:cNvPr id="31" name="Text 29"/>
+          <p:cNvSpPr/>
+          <p:nvPr/>
+        </p:nvSpPr>
+        <p:spPr>
+          <a:xfrm>
+            <a:off x="5999378" y="648653"/>
+            <a:ext cx="5693855" cy="277749"/>
+          </a:xfrm>
+          <a:prstGeom prst="rect">
+            <a:avLst/>
+          </a:prstGeom>
+          <a:noFill/>
+          <a:ln/>
+        </p:spPr>
+        <p:txBody>
+          <a:bodyPr wrap="square" lIns="0" tIns="0" rIns="0" bIns="0" rtlCol="0" anchor="ctr"/>
+          <a:lstStyle/>
+          <a:p>
+            <a:r>
+              <a:rPr lang="en-US" sz="1013" dirty="0">
+                <a:latin typeface="Arial" panose="020B0604020202020204" pitchFamily="34" charset="0"/>
+                <a:cs typeface="Arial" panose="020B0604020202020204" pitchFamily="34" charset="0"/>
+              </a:rPr>
+              <a:t>Shared Infrastructure &amp; Dev Tooling</a:t>
+            </a:r>
+          </a:p>
+        </p:txBody>
+      </p:sp>
+      <p:sp>
+        <p:nvSpPr>
+          <p:cNvPr id="32" name="Shape 30"/>
+          <p:cNvSpPr/>
+          <p:nvPr/>
+        </p:nvSpPr>
+        <p:spPr>
+          <a:xfrm>
+            <a:off x="5953087" y="926401"/>
+            <a:ext cx="5740146" cy="2740457"/>
+          </a:xfrm>
+          <a:prstGeom prst="rect">
+            <a:avLst/>
+          </a:prstGeom>
+          <a:solidFill>
+            <a:srgbClr val="F8FFFE"/>
+          </a:solidFill>
+          <a:ln w="9525">
+            <a:solidFill>
+              <a:srgbClr val="D1FAE5"/>
+            </a:solidFill>
+            <a:prstDash val="solid"/>
+          </a:ln>
+        </p:spPr>
+        <p:txBody>
+          <a:bodyPr/>
+          <a:lstStyle/>
+          <a:p>
+            <a:endParaRPr lang="en-US" sz="1823" dirty="0">
+              <a:latin typeface="Arial" panose="020B0604020202020204" pitchFamily="34" charset="0"/>
+              <a:cs typeface="Arial" panose="020B0604020202020204" pitchFamily="34" charset="0"/>
+            </a:endParaRPr>
+          </a:p>
+        </p:txBody>
+      </p:sp>
+      <p:sp>
+        <p:nvSpPr>
+          <p:cNvPr id="33" name="Shape 31"/>
+          <p:cNvSpPr/>
+          <p:nvPr/>
+        </p:nvSpPr>
+        <p:spPr>
+          <a:xfrm>
+            <a:off x="5962345" y="926402"/>
+            <a:ext cx="5721629" cy="685114"/>
+          </a:xfrm>
+          <a:prstGeom prst="rect">
+            <a:avLst/>
+          </a:prstGeom>
+          <a:solidFill>
+            <a:srgbClr val="FFFFFF"/>
+          </a:solidFill>
+          <a:ln w="12700">
+            <a:solidFill>
+              <a:srgbClr val="FFFFFF"/>
+            </a:solidFill>
+            <a:prstDash val="solid"/>
+          </a:ln>
+        </p:spPr>
+        <p:txBody>
+          <a:bodyPr/>
+          <a:lstStyle/>
+          <a:p>
+            <a:endParaRPr lang="en-US" sz="1823" dirty="0">
+              <a:latin typeface="Arial" panose="020B0604020202020204" pitchFamily="34" charset="0"/>
+              <a:cs typeface="Arial" panose="020B0604020202020204" pitchFamily="34" charset="0"/>
+            </a:endParaRPr>
+          </a:p>
+        </p:txBody>
+      </p:sp>
+      <p:sp>
+        <p:nvSpPr>
+          <p:cNvPr id="34" name="Text 32"/>
+          <p:cNvSpPr/>
+          <p:nvPr/>
+        </p:nvSpPr>
+        <p:spPr>
+          <a:xfrm>
+            <a:off x="5999378" y="926402"/>
+            <a:ext cx="601790" cy="685114"/>
+          </a:xfrm>
+          <a:prstGeom prst="rect">
+            <a:avLst/>
+          </a:prstGeom>
+          <a:noFill/>
+          <a:ln/>
+        </p:spPr>
+        <p:txBody>
+          <a:bodyPr wrap="square" lIns="0" tIns="0" rIns="0" bIns="0" rtlCol="0" anchor="ctr"/>
+          <a:lstStyle/>
+          <a:p>
+            <a:r>
+              <a:rPr lang="en-US" sz="911" dirty="0">
+                <a:latin typeface="Arial" panose="020B0604020202020204" pitchFamily="34" charset="0"/>
+                <a:cs typeface="Arial" panose="020B0604020202020204" pitchFamily="34" charset="0"/>
+              </a:rPr>
+              <a:t>Monitoring &amp; Error Tracking</a:t>
+            </a:r>
+          </a:p>
+        </p:txBody>
+      </p:sp>
+      <p:sp>
+        <p:nvSpPr>
+          <p:cNvPr id="35" name="Text 33"/>
+          <p:cNvSpPr/>
+          <p:nvPr/>
+        </p:nvSpPr>
+        <p:spPr>
+          <a:xfrm>
+            <a:off x="6619684" y="926402"/>
+            <a:ext cx="4462501" cy="685114"/>
+          </a:xfrm>
+          <a:prstGeom prst="rect">
+            <a:avLst/>
+          </a:prstGeom>
+          <a:noFill/>
+          <a:ln/>
+        </p:spPr>
+        <p:txBody>
+          <a:bodyPr wrap="square" lIns="0" tIns="0" rIns="0" bIns="0" rtlCol="0" anchor="ctr"/>
+          <a:lstStyle/>
+          <a:p>
+            <a:r>
+              <a:rPr lang="en-US" sz="911" dirty="0">
+                <a:latin typeface="Arial" panose="020B0604020202020204" pitchFamily="34" charset="0"/>
+                <a:cs typeface="Arial" panose="020B0604020202020204" pitchFamily="34" charset="0"/>
+              </a:rPr>
+              <a:t>Added automatic tracking of what users do in the app (screens viewed, buttons tapped) and instant alerts when something breaks, so issues get caught and fixed faster instead of relying on user reports.</a:t>
+            </a:r>
+            <a:endParaRPr lang="en-US" sz="861" dirty="0">
+              <a:latin typeface="Arial" panose="020B0604020202020204" pitchFamily="34" charset="0"/>
+              <a:cs typeface="Arial" panose="020B0604020202020204" pitchFamily="34" charset="0"/>
+            </a:endParaRPr>
+          </a:p>
+        </p:txBody>
+      </p:sp>
+      <p:sp>
+        <p:nvSpPr>
+          <p:cNvPr id="38" name="Text 36"/>
+          <p:cNvSpPr/>
+          <p:nvPr/>
+        </p:nvSpPr>
+        <p:spPr>
+          <a:xfrm>
+            <a:off x="5999378" y="1611516"/>
+            <a:ext cx="601790" cy="685114"/>
+          </a:xfrm>
+          <a:prstGeom prst="rect">
+            <a:avLst/>
+          </a:prstGeom>
+          <a:noFill/>
+          <a:ln/>
+        </p:spPr>
+        <p:txBody>
+          <a:bodyPr wrap="square" lIns="0" tIns="0" rIns="0" bIns="0" rtlCol="0" anchor="ctr"/>
+          <a:lstStyle/>
+          <a:p>
+            <a:endParaRPr lang="en-US" sz="861" dirty="0">
+              <a:latin typeface="Arial" panose="020B0604020202020204" pitchFamily="34" charset="0"/>
+              <a:cs typeface="Arial" panose="020B0604020202020204" pitchFamily="34" charset="0"/>
+            </a:endParaRPr>
+          </a:p>
+        </p:txBody>
+      </p:sp>
+      <p:sp>
+        <p:nvSpPr>
+          <p:cNvPr id="39" name="Text 37"/>
+          <p:cNvSpPr/>
+          <p:nvPr/>
+        </p:nvSpPr>
+        <p:spPr>
+          <a:xfrm>
+            <a:off x="6619684" y="1611516"/>
+            <a:ext cx="4462501" cy="685114"/>
+          </a:xfrm>
+          <a:prstGeom prst="rect">
+            <a:avLst/>
+          </a:prstGeom>
+          <a:noFill/>
+          <a:ln/>
+        </p:spPr>
+        <p:txBody>
+          <a:bodyPr wrap="square" lIns="0" tIns="0" rIns="0" bIns="0" rtlCol="0" anchor="ctr"/>
+          <a:lstStyle/>
+          <a:p>
+            <a:pPr marL="173593" indent="-173593">
+              <a:buFont typeface="Arial" panose="020B0604020202020204" pitchFamily="34" charset="0"/>
+              <a:buChar char="•"/>
+            </a:pPr>
+            <a:r>
+              <a:rPr lang="en-US" sz="911" dirty="0"/>
+              <a:t>Migrated the app off mock data onto the live backend, so Home, Live, Schedule, and Tournaments now show real content and real playback. </a:t>
+            </a:r>
+          </a:p>
+          <a:p>
+            <a:pPr marL="173593" indent="-173593">
+              <a:buFont typeface="Arial" panose="020B0604020202020204" pitchFamily="34" charset="0"/>
+              <a:buChar char="•"/>
+            </a:pPr>
+            <a:r>
+              <a:rPr lang="en-US" sz="911" dirty="0"/>
+              <a:t>Shipped supporting shared tools (event tracking, design polish, dev tooling) alongside about 35 merged updates this period.</a:t>
+            </a:r>
+            <a:endParaRPr lang="en-US" sz="861" dirty="0">
+              <a:latin typeface="Arial" panose="020B0604020202020204" pitchFamily="34" charset="0"/>
+              <a:cs typeface="Arial" panose="020B0604020202020204" pitchFamily="34" charset="0"/>
+            </a:endParaRPr>
+          </a:p>
+        </p:txBody>
+      </p:sp>
+      <p:sp>
+        <p:nvSpPr>
+          <p:cNvPr id="42" name="Shape 40"/>
+          <p:cNvSpPr/>
+          <p:nvPr/>
+        </p:nvSpPr>
+        <p:spPr>
+          <a:xfrm>
+            <a:off x="5962345" y="2296630"/>
+            <a:ext cx="5721629" cy="685114"/>
+          </a:xfrm>
+          <a:prstGeom prst="rect">
+            <a:avLst/>
+          </a:prstGeom>
+          <a:solidFill>
+            <a:srgbClr val="FFFFFF"/>
+          </a:solidFill>
+          <a:ln w="12700">
+            <a:solidFill>
+              <a:srgbClr val="FFFFFF"/>
+            </a:solidFill>
+            <a:prstDash val="solid"/>
+          </a:ln>
+        </p:spPr>
+        <p:txBody>
+          <a:bodyPr/>
+          <a:lstStyle/>
+          <a:p>
+            <a:endParaRPr lang="en-US" sz="1823">
+              <a:latin typeface="Arial" panose="020B0604020202020204" pitchFamily="34" charset="0"/>
+              <a:cs typeface="Arial" panose="020B0604020202020204" pitchFamily="34" charset="0"/>
+            </a:endParaRPr>
+          </a:p>
+        </p:txBody>
+      </p:sp>
+      <p:sp>
+        <p:nvSpPr>
+          <p:cNvPr id="43" name="Text 41"/>
+          <p:cNvSpPr/>
+          <p:nvPr/>
+        </p:nvSpPr>
+        <p:spPr>
+          <a:xfrm>
+            <a:off x="5999378" y="2296630"/>
+            <a:ext cx="601790" cy="685114"/>
+          </a:xfrm>
+          <a:prstGeom prst="rect">
+            <a:avLst/>
+          </a:prstGeom>
+          <a:noFill/>
+          <a:ln/>
+        </p:spPr>
+        <p:txBody>
+          <a:bodyPr wrap="square" lIns="0" tIns="0" rIns="0" bIns="0" rtlCol="0" anchor="ctr"/>
+          <a:lstStyle/>
+          <a:p>
+            <a:r>
+              <a:rPr lang="en-US" sz="911" dirty="0"/>
+              <a:t>New Website</a:t>
+            </a:r>
+            <a:endParaRPr lang="en-US" sz="861" dirty="0">
+              <a:latin typeface="Arial" panose="020B0604020202020204" pitchFamily="34" charset="0"/>
+              <a:cs typeface="Arial" panose="020B0604020202020204" pitchFamily="34" charset="0"/>
+            </a:endParaRPr>
+          </a:p>
+        </p:txBody>
+      </p:sp>
+      <p:sp>
+        <p:nvSpPr>
+          <p:cNvPr id="44" name="Text 42"/>
+          <p:cNvSpPr/>
+          <p:nvPr/>
+        </p:nvSpPr>
+        <p:spPr>
+          <a:xfrm>
+            <a:off x="6619684" y="2296630"/>
+            <a:ext cx="4462501" cy="685114"/>
+          </a:xfrm>
+          <a:prstGeom prst="rect">
+            <a:avLst/>
+          </a:prstGeom>
+          <a:noFill/>
+          <a:ln/>
+        </p:spPr>
+        <p:txBody>
+          <a:bodyPr wrap="square" lIns="0" tIns="0" rIns="0" bIns="0" rtlCol="0" anchor="ctr"/>
+          <a:lstStyle/>
+          <a:p>
+            <a:pPr marL="173593" indent="-173593">
+              <a:buFont typeface="Arial" panose="020B0604020202020204" pitchFamily="34" charset="0"/>
+              <a:buChar char="•"/>
+            </a:pPr>
+            <a:r>
+              <a:rPr lang="en-US" sz="911" dirty="0"/>
+              <a:t>Prototyping Auth0/</a:t>
+            </a:r>
+            <a:r>
+              <a:rPr lang="en-US" sz="911" dirty="0" err="1"/>
+              <a:t>Cleeng</a:t>
+            </a:r>
+            <a:r>
+              <a:rPr lang="en-US" sz="911" dirty="0"/>
+              <a:t> login, building out CMS widget support, and standing up Adobe Pass provider management, alongside a shipped front-end foundation (design system, navigation, footer, page shell). </a:t>
+            </a:r>
+          </a:p>
+          <a:p>
+            <a:pPr marL="173593" indent="-173593">
+              <a:buFont typeface="Arial" panose="020B0604020202020204" pitchFamily="34" charset="0"/>
+              <a:buChar char="•"/>
+            </a:pPr>
+            <a:r>
+              <a:rPr lang="en-US" sz="911" dirty="0"/>
+              <a:t>Carousel page engine and its backend refresh API delivered, plus an early proof-of-concept test of the </a:t>
+            </a:r>
+            <a:r>
+              <a:rPr lang="en-US" sz="911" dirty="0" err="1"/>
+              <a:t>Bitmovin</a:t>
+            </a:r>
+            <a:r>
+              <a:rPr lang="en-US" sz="911" dirty="0"/>
+              <a:t> video player.</a:t>
+            </a:r>
+            <a:endParaRPr lang="en-US" sz="861" dirty="0">
+              <a:latin typeface="Arial" panose="020B0604020202020204" pitchFamily="34" charset="0"/>
+              <a:cs typeface="Arial" panose="020B0604020202020204" pitchFamily="34" charset="0"/>
+            </a:endParaRPr>
+          </a:p>
+        </p:txBody>
+      </p:sp>
+      <p:sp>
+        <p:nvSpPr>
+          <p:cNvPr id="47" name="Text 45"/>
+          <p:cNvSpPr/>
+          <p:nvPr/>
+        </p:nvSpPr>
+        <p:spPr>
+          <a:xfrm>
+            <a:off x="5999378" y="2981744"/>
+            <a:ext cx="601790" cy="685114"/>
+          </a:xfrm>
+          <a:prstGeom prst="rect">
+            <a:avLst/>
+          </a:prstGeom>
+          <a:noFill/>
+          <a:ln/>
+        </p:spPr>
+        <p:txBody>
+          <a:bodyPr wrap="square" lIns="0" tIns="0" rIns="0" bIns="0" rtlCol="0" anchor="ctr"/>
+          <a:lstStyle/>
+          <a:p>
+            <a:r>
+              <a:rPr lang="en-US" sz="861" dirty="0">
+                <a:solidFill>
+                  <a:srgbClr val="374151"/>
+                </a:solidFill>
+                <a:latin typeface="Arial" panose="020B0604020202020204" pitchFamily="34" charset="0"/>
+                <a:ea typeface="Calibri" pitchFamily="34" charset="-122"/>
+                <a:cs typeface="Arial" panose="020B0604020202020204" pitchFamily="34" charset="0"/>
+              </a:rPr>
+              <a:t>Hosting</a:t>
+            </a:r>
+            <a:endParaRPr lang="en-US" sz="861" dirty="0">
+              <a:latin typeface="Arial" panose="020B0604020202020204" pitchFamily="34" charset="0"/>
+              <a:cs typeface="Arial" panose="020B0604020202020204" pitchFamily="34" charset="0"/>
+            </a:endParaRPr>
+          </a:p>
+        </p:txBody>
+      </p:sp>
+      <p:sp>
+        <p:nvSpPr>
+          <p:cNvPr id="48" name="Text 46"/>
+          <p:cNvSpPr/>
+          <p:nvPr/>
+        </p:nvSpPr>
+        <p:spPr>
+          <a:xfrm>
+            <a:off x="6619684" y="2981744"/>
+            <a:ext cx="4462501" cy="685114"/>
+          </a:xfrm>
+          <a:prstGeom prst="rect">
+            <a:avLst/>
+          </a:prstGeom>
+          <a:noFill/>
+          <a:ln/>
+        </p:spPr>
+        <p:txBody>
+          <a:bodyPr wrap="square" lIns="0" tIns="0" rIns="0" bIns="0" rtlCol="0" anchor="ctr"/>
+          <a:lstStyle/>
+          <a:p>
+            <a:r>
+              <a:rPr lang="en-US" sz="911" dirty="0">
+                <a:latin typeface="Arial" panose="020B0604020202020204" pitchFamily="34" charset="0"/>
+                <a:cs typeface="Arial" panose="020B0604020202020204" pitchFamily="34" charset="0"/>
+              </a:rPr>
+              <a:t>Moving control of Tennis Channel's website hosting setup in-house, the same approach already used successfully for </a:t>
+            </a:r>
+            <a:r>
+              <a:rPr lang="en-US" sz="911" dirty="0" err="1">
+                <a:latin typeface="Arial" panose="020B0604020202020204" pitchFamily="34" charset="0"/>
+                <a:cs typeface="Arial" panose="020B0604020202020204" pitchFamily="34" charset="0"/>
+              </a:rPr>
+              <a:t>Tennis.com</a:t>
+            </a:r>
+            <a:r>
+              <a:rPr lang="en-US" sz="911" dirty="0">
+                <a:latin typeface="Arial" panose="020B0604020202020204" pitchFamily="34" charset="0"/>
+                <a:cs typeface="Arial" panose="020B0604020202020204" pitchFamily="34" charset="0"/>
+              </a:rPr>
+              <a:t>, giving us more control ahead of launch.</a:t>
+            </a:r>
+            <a:endParaRPr lang="en-US" sz="861" dirty="0">
+              <a:latin typeface="Arial" panose="020B0604020202020204" pitchFamily="34" charset="0"/>
+              <a:cs typeface="Arial" panose="020B0604020202020204" pitchFamily="34" charset="0"/>
+            </a:endParaRPr>
+          </a:p>
+        </p:txBody>
+      </p:sp>
+      <p:sp>
+        <p:nvSpPr>
+          <p:cNvPr id="50" name="Text 48"/>
+          <p:cNvSpPr/>
+          <p:nvPr/>
+        </p:nvSpPr>
+        <p:spPr>
+          <a:xfrm>
+            <a:off x="11119218" y="3222460"/>
+            <a:ext cx="546240" cy="203683"/>
+          </a:xfrm>
+          <a:prstGeom prst="rect">
+            <a:avLst/>
+          </a:prstGeom>
+          <a:noFill/>
+          <a:ln/>
+        </p:spPr>
+        <p:txBody>
+          <a:bodyPr wrap="square" lIns="0" tIns="0" rIns="0" bIns="0" rtlCol="0" anchor="ctr"/>
+          <a:lstStyle/>
+          <a:p>
+            <a:pPr algn="ctr"/>
+            <a:endParaRPr lang="en-US" sz="709" dirty="0">
+              <a:latin typeface="Arial" panose="020B0604020202020204" pitchFamily="34" charset="0"/>
+              <a:cs typeface="Arial" panose="020B0604020202020204" pitchFamily="34" charset="0"/>
+            </a:endParaRPr>
+          </a:p>
+        </p:txBody>
+      </p:sp>
+      <p:sp>
+        <p:nvSpPr>
+          <p:cNvPr id="51" name="Shape 49"/>
+          <p:cNvSpPr/>
+          <p:nvPr/>
+        </p:nvSpPr>
+        <p:spPr>
+          <a:xfrm>
+            <a:off x="92583" y="3740925"/>
+            <a:ext cx="5740146" cy="277749"/>
+          </a:xfrm>
+          <a:prstGeom prst="rect">
+            <a:avLst/>
+          </a:prstGeom>
+          <a:solidFill>
+            <a:schemeClr val="accent6">
+              <a:lumMod val="60000"/>
+              <a:lumOff val="40000"/>
+            </a:schemeClr>
+          </a:solidFill>
+          <a:ln w="12700">
+            <a:solidFill>
+              <a:srgbClr val="0F6E56"/>
+            </a:solidFill>
+            <a:prstDash val="solid"/>
+          </a:ln>
+        </p:spPr>
+        <p:txBody>
+          <a:bodyPr/>
+          <a:lstStyle/>
+          <a:p>
+            <a:endParaRPr lang="en-US" sz="1823">
+              <a:latin typeface="Arial" panose="020B0604020202020204" pitchFamily="34" charset="0"/>
+              <a:cs typeface="Arial" panose="020B0604020202020204" pitchFamily="34" charset="0"/>
+            </a:endParaRPr>
+          </a:p>
+        </p:txBody>
+      </p:sp>
+      <p:sp>
+        <p:nvSpPr>
+          <p:cNvPr id="52" name="Text 50"/>
+          <p:cNvSpPr/>
+          <p:nvPr/>
+        </p:nvSpPr>
+        <p:spPr>
+          <a:xfrm>
+            <a:off x="138874" y="3740925"/>
+            <a:ext cx="5693855" cy="277749"/>
+          </a:xfrm>
+          <a:prstGeom prst="rect">
+            <a:avLst/>
+          </a:prstGeom>
+          <a:noFill/>
+          <a:ln/>
+        </p:spPr>
+        <p:txBody>
+          <a:bodyPr wrap="square" lIns="0" tIns="0" rIns="0" bIns="0" rtlCol="0" anchor="ctr"/>
+          <a:lstStyle/>
+          <a:p>
+            <a:r>
+              <a:rPr lang="en-US" sz="1013" dirty="0">
+                <a:latin typeface="Arial" panose="020B0604020202020204" pitchFamily="34" charset="0"/>
+                <a:ea typeface="Calibri" pitchFamily="34" charset="-122"/>
+                <a:cs typeface="Arial" panose="020B0604020202020204" pitchFamily="34" charset="0"/>
+              </a:rPr>
+              <a:t>Partner / Platform Integrations</a:t>
+            </a:r>
+            <a:endParaRPr lang="en-US" sz="1013" dirty="0">
+              <a:latin typeface="Arial" panose="020B0604020202020204" pitchFamily="34" charset="0"/>
+              <a:cs typeface="Arial" panose="020B0604020202020204" pitchFamily="34" charset="0"/>
+            </a:endParaRPr>
+          </a:p>
+        </p:txBody>
+      </p:sp>
+      <p:sp>
+        <p:nvSpPr>
+          <p:cNvPr id="53" name="Shape 51"/>
+          <p:cNvSpPr/>
+          <p:nvPr/>
+        </p:nvSpPr>
+        <p:spPr>
+          <a:xfrm>
+            <a:off x="92583" y="4018674"/>
+            <a:ext cx="5740146" cy="2740457"/>
+          </a:xfrm>
+          <a:prstGeom prst="rect">
+            <a:avLst/>
+          </a:prstGeom>
+          <a:solidFill>
+            <a:srgbClr val="F8FFFE"/>
+          </a:solidFill>
+          <a:ln w="9525">
+            <a:solidFill>
+              <a:srgbClr val="D1FAE5"/>
+            </a:solidFill>
+            <a:prstDash val="solid"/>
+          </a:ln>
+        </p:spPr>
+        <p:txBody>
+          <a:bodyPr/>
+          <a:lstStyle/>
+          <a:p>
+            <a:endParaRPr lang="en-US" sz="1823" dirty="0">
+              <a:latin typeface="Arial" panose="020B0604020202020204" pitchFamily="34" charset="0"/>
+              <a:cs typeface="Arial" panose="020B0604020202020204" pitchFamily="34" charset="0"/>
+            </a:endParaRPr>
+          </a:p>
+        </p:txBody>
+      </p:sp>
+      <p:sp>
+        <p:nvSpPr>
+          <p:cNvPr id="54" name="Shape 52"/>
+          <p:cNvSpPr/>
+          <p:nvPr/>
+        </p:nvSpPr>
+        <p:spPr>
+          <a:xfrm>
+            <a:off x="101842" y="4018674"/>
+            <a:ext cx="5721629" cy="913486"/>
+          </a:xfrm>
+          <a:prstGeom prst="rect">
+            <a:avLst/>
+          </a:prstGeom>
+          <a:solidFill>
+            <a:srgbClr val="FFFFFF"/>
+          </a:solidFill>
+          <a:ln w="12700">
+            <a:solidFill>
+              <a:srgbClr val="FFFFFF"/>
+            </a:solidFill>
+            <a:prstDash val="solid"/>
+          </a:ln>
+        </p:spPr>
+        <p:txBody>
+          <a:bodyPr/>
+          <a:lstStyle/>
+          <a:p>
+            <a:endParaRPr lang="en-US" sz="1823">
+              <a:latin typeface="Arial" panose="020B0604020202020204" pitchFamily="34" charset="0"/>
+              <a:cs typeface="Arial" panose="020B0604020202020204" pitchFamily="34" charset="0"/>
+            </a:endParaRPr>
+          </a:p>
+        </p:txBody>
+      </p:sp>
+      <p:sp>
+        <p:nvSpPr>
+          <p:cNvPr id="55" name="Text 53"/>
+          <p:cNvSpPr/>
+          <p:nvPr/>
+        </p:nvSpPr>
+        <p:spPr>
+          <a:xfrm>
+            <a:off x="138874" y="4018674"/>
+            <a:ext cx="601790" cy="913486"/>
+          </a:xfrm>
+          <a:prstGeom prst="rect">
+            <a:avLst/>
+          </a:prstGeom>
+          <a:noFill/>
+          <a:ln/>
+        </p:spPr>
+        <p:txBody>
+          <a:bodyPr wrap="square" lIns="0" tIns="0" rIns="0" bIns="0" rtlCol="0" anchor="ctr"/>
+          <a:lstStyle/>
+          <a:p>
+            <a:r>
+              <a:rPr lang="en-US" sz="861" dirty="0">
+                <a:solidFill>
+                  <a:srgbClr val="374151"/>
+                </a:solidFill>
+                <a:latin typeface="Arial" panose="020B0604020202020204" pitchFamily="34" charset="0"/>
+                <a:cs typeface="Arial" panose="020B0604020202020204" pitchFamily="34" charset="0"/>
+              </a:rPr>
+              <a:t>MVPD</a:t>
+            </a:r>
+            <a:endParaRPr lang="en-US" sz="861" dirty="0">
+              <a:latin typeface="Arial" panose="020B0604020202020204" pitchFamily="34" charset="0"/>
+              <a:cs typeface="Arial" panose="020B0604020202020204" pitchFamily="34" charset="0"/>
+            </a:endParaRPr>
+          </a:p>
+        </p:txBody>
+      </p:sp>
+      <p:sp>
+        <p:nvSpPr>
+          <p:cNvPr id="56" name="Text 54"/>
+          <p:cNvSpPr/>
+          <p:nvPr/>
+        </p:nvSpPr>
+        <p:spPr>
+          <a:xfrm>
+            <a:off x="759180" y="4018674"/>
+            <a:ext cx="4462501" cy="913486"/>
+          </a:xfrm>
+          <a:prstGeom prst="rect">
+            <a:avLst/>
+          </a:prstGeom>
+          <a:noFill/>
+          <a:ln/>
+        </p:spPr>
+        <p:txBody>
+          <a:bodyPr wrap="square" lIns="0" tIns="0" rIns="0" bIns="0" rtlCol="0" anchor="ctr"/>
+          <a:lstStyle/>
+          <a:p>
+            <a:r>
+              <a:rPr lang="en-US" sz="911" dirty="0">
+                <a:latin typeface="Arial" panose="020B0604020202020204" pitchFamily="34" charset="0"/>
+                <a:cs typeface="Arial" panose="020B0604020202020204" pitchFamily="34" charset="0"/>
+              </a:rPr>
+              <a:t>Adobe Pass integration underway for MVPD access; CMS-based provider management is being brought into the web app, with basic prototypes built and currently hardcoded to DirecTV for testing.</a:t>
+            </a:r>
+          </a:p>
+        </p:txBody>
+      </p:sp>
+      <p:sp>
+        <p:nvSpPr>
+          <p:cNvPr id="57" name="Shape 55"/>
+          <p:cNvSpPr/>
+          <p:nvPr/>
+        </p:nvSpPr>
+        <p:spPr>
+          <a:xfrm>
+            <a:off x="5258714" y="4373575"/>
+            <a:ext cx="546240" cy="203683"/>
+          </a:xfrm>
+          <a:prstGeom prst="roundRect">
+            <a:avLst>
+              <a:gd name="adj" fmla="val 22727"/>
+            </a:avLst>
+          </a:prstGeom>
+          <a:solidFill>
+            <a:srgbClr val="DBEAFE"/>
+          </a:solidFill>
+          <a:ln w="12700">
+            <a:solidFill>
+              <a:srgbClr val="DBEAFE"/>
+            </a:solidFill>
+            <a:prstDash val="solid"/>
+          </a:ln>
+        </p:spPr>
+        <p:txBody>
+          <a:bodyPr/>
+          <a:lstStyle/>
+          <a:p>
+            <a:endParaRPr lang="en-US" sz="1823">
+              <a:latin typeface="Arial" panose="020B0604020202020204" pitchFamily="34" charset="0"/>
+              <a:cs typeface="Arial" panose="020B0604020202020204" pitchFamily="34" charset="0"/>
+            </a:endParaRPr>
+          </a:p>
+        </p:txBody>
+      </p:sp>
+      <p:sp>
+        <p:nvSpPr>
+          <p:cNvPr id="58" name="Text 56"/>
+          <p:cNvSpPr/>
+          <p:nvPr/>
+        </p:nvSpPr>
+        <p:spPr>
+          <a:xfrm>
+            <a:off x="5258714" y="4373575"/>
+            <a:ext cx="546240" cy="203683"/>
+          </a:xfrm>
+          <a:prstGeom prst="rect">
+            <a:avLst/>
+          </a:prstGeom>
+          <a:noFill/>
+          <a:ln/>
+        </p:spPr>
+        <p:txBody>
+          <a:bodyPr wrap="square" lIns="0" tIns="0" rIns="0" bIns="0" rtlCol="0" anchor="ctr"/>
+          <a:lstStyle/>
+          <a:p>
+            <a:pPr algn="ctr"/>
+            <a:r>
+              <a:rPr lang="en-US" sz="709" dirty="0">
+                <a:solidFill>
+                  <a:srgbClr val="1E40AF"/>
+                </a:solidFill>
+                <a:latin typeface="Arial" panose="020B0604020202020204" pitchFamily="34" charset="0"/>
+                <a:ea typeface="Calibri" pitchFamily="34" charset="-122"/>
+                <a:cs typeface="Arial" panose="020B0604020202020204" pitchFamily="34" charset="0"/>
+              </a:rPr>
+              <a:t>In Progress</a:t>
+            </a:r>
+            <a:endParaRPr lang="en-US" sz="709" dirty="0">
+              <a:latin typeface="Arial" panose="020B0604020202020204" pitchFamily="34" charset="0"/>
+              <a:cs typeface="Arial" panose="020B0604020202020204" pitchFamily="34" charset="0"/>
+            </a:endParaRPr>
+          </a:p>
+        </p:txBody>
+      </p:sp>
+      <p:sp>
+        <p:nvSpPr>
+          <p:cNvPr id="59" name="Text 57"/>
+          <p:cNvSpPr/>
+          <p:nvPr/>
+        </p:nvSpPr>
+        <p:spPr>
+          <a:xfrm>
+            <a:off x="138874" y="4932159"/>
+            <a:ext cx="601790" cy="913486"/>
+          </a:xfrm>
+          <a:prstGeom prst="rect">
+            <a:avLst/>
+          </a:prstGeom>
+          <a:noFill/>
+          <a:ln/>
+        </p:spPr>
+        <p:txBody>
+          <a:bodyPr wrap="square" lIns="0" tIns="0" rIns="0" bIns="0" rtlCol="0" anchor="ctr"/>
+          <a:lstStyle/>
+          <a:p>
+            <a:endParaRPr lang="en-US" sz="861" dirty="0">
+              <a:latin typeface="Arial" panose="020B0604020202020204" pitchFamily="34" charset="0"/>
+              <a:cs typeface="Arial" panose="020B0604020202020204" pitchFamily="34" charset="0"/>
+            </a:endParaRPr>
+          </a:p>
+        </p:txBody>
+      </p:sp>
+      <p:sp>
+        <p:nvSpPr>
+          <p:cNvPr id="60" name="Text 58"/>
+          <p:cNvSpPr/>
+          <p:nvPr/>
+        </p:nvSpPr>
+        <p:spPr>
+          <a:xfrm>
+            <a:off x="759180" y="4932159"/>
+            <a:ext cx="4462501" cy="913486"/>
+          </a:xfrm>
+          <a:prstGeom prst="rect">
+            <a:avLst/>
+          </a:prstGeom>
+          <a:noFill/>
+          <a:ln/>
+        </p:spPr>
+        <p:txBody>
+          <a:bodyPr wrap="square" lIns="0" tIns="0" rIns="0" bIns="0" rtlCol="0" anchor="ctr"/>
+          <a:lstStyle/>
+          <a:p>
+            <a:r>
+              <a:rPr lang="en-US" sz="911" dirty="0">
+                <a:latin typeface="Arial" panose="020B0604020202020204" pitchFamily="34" charset="0"/>
+                <a:cs typeface="Arial" panose="020B0604020202020204" pitchFamily="34" charset="0"/>
+              </a:rPr>
+              <a:t>Dedicated DRM auth service  launched, with license flows stubbed for </a:t>
+            </a:r>
+            <a:r>
+              <a:rPr lang="en-US" sz="911" dirty="0" err="1">
+                <a:latin typeface="Arial" panose="020B0604020202020204" pitchFamily="34" charset="0"/>
+                <a:cs typeface="Arial" panose="020B0604020202020204" pitchFamily="34" charset="0"/>
+              </a:rPr>
+              <a:t>FairPlay</a:t>
+            </a:r>
+            <a:r>
+              <a:rPr lang="en-US" sz="911" dirty="0">
+                <a:latin typeface="Arial" panose="020B0604020202020204" pitchFamily="34" charset="0"/>
+                <a:cs typeface="Arial" panose="020B0604020202020204" pitchFamily="34" charset="0"/>
+              </a:rPr>
+              <a:t>, </a:t>
+            </a:r>
+            <a:r>
+              <a:rPr lang="en-US" sz="911" dirty="0" err="1">
+                <a:latin typeface="Arial" panose="020B0604020202020204" pitchFamily="34" charset="0"/>
+                <a:cs typeface="Arial" panose="020B0604020202020204" pitchFamily="34" charset="0"/>
+              </a:rPr>
+              <a:t>Widevine</a:t>
+            </a:r>
+            <a:r>
+              <a:rPr lang="en-US" sz="911" dirty="0">
+                <a:latin typeface="Arial" panose="020B0604020202020204" pitchFamily="34" charset="0"/>
+                <a:cs typeface="Arial" panose="020B0604020202020204" pitchFamily="34" charset="0"/>
+              </a:rPr>
+              <a:t>, and PlayReady, and handed off to Amagi for EZDRM integration testing.</a:t>
+            </a:r>
+          </a:p>
+        </p:txBody>
+      </p:sp>
+      <p:sp>
+        <p:nvSpPr>
+          <p:cNvPr id="61" name="Shape 59"/>
+          <p:cNvSpPr/>
+          <p:nvPr/>
+        </p:nvSpPr>
+        <p:spPr>
+          <a:xfrm>
+            <a:off x="5258714" y="5287061"/>
+            <a:ext cx="546240" cy="203683"/>
+          </a:xfrm>
+          <a:prstGeom prst="roundRect">
+            <a:avLst>
+              <a:gd name="adj" fmla="val 22727"/>
+            </a:avLst>
+          </a:prstGeom>
+          <a:solidFill>
+            <a:srgbClr val="DBEAFE"/>
+          </a:solidFill>
+          <a:ln w="12700">
+            <a:solidFill>
+              <a:srgbClr val="DBEAFE"/>
+            </a:solidFill>
+            <a:prstDash val="solid"/>
+          </a:ln>
+        </p:spPr>
+        <p:txBody>
+          <a:bodyPr/>
+          <a:lstStyle/>
+          <a:p>
+            <a:endParaRPr lang="en-US" sz="1823">
+              <a:latin typeface="Arial" panose="020B0604020202020204" pitchFamily="34" charset="0"/>
+              <a:cs typeface="Arial" panose="020B0604020202020204" pitchFamily="34" charset="0"/>
+            </a:endParaRPr>
+          </a:p>
+        </p:txBody>
+      </p:sp>
+      <p:sp>
+        <p:nvSpPr>
+          <p:cNvPr id="62" name="Text 60"/>
+          <p:cNvSpPr/>
+          <p:nvPr/>
+        </p:nvSpPr>
+        <p:spPr>
+          <a:xfrm>
+            <a:off x="5258714" y="5287061"/>
+            <a:ext cx="546240" cy="203683"/>
+          </a:xfrm>
+          <a:prstGeom prst="rect">
+            <a:avLst/>
+          </a:prstGeom>
+          <a:noFill/>
+          <a:ln/>
+        </p:spPr>
+        <p:txBody>
+          <a:bodyPr wrap="square" lIns="0" tIns="0" rIns="0" bIns="0" rtlCol="0" anchor="ctr"/>
+          <a:lstStyle/>
+          <a:p>
+            <a:pPr algn="ctr"/>
+            <a:r>
+              <a:rPr lang="en-US" sz="709" dirty="0">
+                <a:solidFill>
+                  <a:srgbClr val="1E40AF"/>
+                </a:solidFill>
+                <a:latin typeface="Arial" panose="020B0604020202020204" pitchFamily="34" charset="0"/>
+                <a:ea typeface="Calibri" pitchFamily="34" charset="-122"/>
+                <a:cs typeface="Arial" panose="020B0604020202020204" pitchFamily="34" charset="0"/>
+              </a:rPr>
+              <a:t>In Progress</a:t>
+            </a:r>
+            <a:endParaRPr lang="en-US" sz="709" dirty="0">
+              <a:latin typeface="Arial" panose="020B0604020202020204" pitchFamily="34" charset="0"/>
+              <a:cs typeface="Arial" panose="020B0604020202020204" pitchFamily="34" charset="0"/>
+            </a:endParaRPr>
+          </a:p>
+        </p:txBody>
+      </p:sp>
+      <p:sp>
+        <p:nvSpPr>
+          <p:cNvPr id="63" name="Shape 61"/>
+          <p:cNvSpPr/>
+          <p:nvPr/>
+        </p:nvSpPr>
+        <p:spPr>
+          <a:xfrm>
+            <a:off x="101842" y="5845645"/>
+            <a:ext cx="5721629" cy="913486"/>
+          </a:xfrm>
+          <a:prstGeom prst="rect">
+            <a:avLst/>
+          </a:prstGeom>
+          <a:solidFill>
+            <a:srgbClr val="FFFFFF"/>
+          </a:solidFill>
+          <a:ln w="12700">
+            <a:solidFill>
+              <a:srgbClr val="FFFFFF"/>
+            </a:solidFill>
+            <a:prstDash val="solid"/>
+          </a:ln>
+        </p:spPr>
+        <p:txBody>
+          <a:bodyPr/>
+          <a:lstStyle/>
+          <a:p>
+            <a:endParaRPr lang="en-US" sz="1823">
+              <a:latin typeface="Arial" panose="020B0604020202020204" pitchFamily="34" charset="0"/>
+              <a:cs typeface="Arial" panose="020B0604020202020204" pitchFamily="34" charset="0"/>
+            </a:endParaRPr>
+          </a:p>
+        </p:txBody>
+      </p:sp>
+      <p:sp>
+        <p:nvSpPr>
+          <p:cNvPr id="64" name="Text 62"/>
+          <p:cNvSpPr/>
+          <p:nvPr/>
+        </p:nvSpPr>
+        <p:spPr>
+          <a:xfrm>
+            <a:off x="138874" y="5845645"/>
+            <a:ext cx="601790" cy="913486"/>
+          </a:xfrm>
+          <a:prstGeom prst="rect">
+            <a:avLst/>
+          </a:prstGeom>
+          <a:noFill/>
+          <a:ln/>
+        </p:spPr>
+        <p:txBody>
+          <a:bodyPr wrap="square" lIns="0" tIns="0" rIns="0" bIns="0" rtlCol="0" anchor="ctr"/>
+          <a:lstStyle/>
+          <a:p>
+            <a:r>
+              <a:rPr lang="en-US" sz="861" dirty="0">
+                <a:latin typeface="Arial" panose="020B0604020202020204" pitchFamily="34" charset="0"/>
+                <a:cs typeface="Arial" panose="020B0604020202020204" pitchFamily="34" charset="0"/>
+              </a:rPr>
+              <a:t>FOXXUM</a:t>
+            </a:r>
+          </a:p>
+        </p:txBody>
+      </p:sp>
+      <p:sp>
+        <p:nvSpPr>
+          <p:cNvPr id="65" name="Text 63"/>
+          <p:cNvSpPr/>
+          <p:nvPr/>
+        </p:nvSpPr>
+        <p:spPr>
+          <a:xfrm>
+            <a:off x="759180" y="5845645"/>
+            <a:ext cx="4462501" cy="913486"/>
+          </a:xfrm>
+          <a:prstGeom prst="rect">
+            <a:avLst/>
+          </a:prstGeom>
+          <a:noFill/>
+          <a:ln/>
+        </p:spPr>
+        <p:txBody>
+          <a:bodyPr wrap="square" lIns="0" tIns="0" rIns="0" bIns="0" rtlCol="0" anchor="ctr"/>
+          <a:lstStyle/>
+          <a:p>
+            <a:r>
+              <a:rPr lang="en-US" sz="911" dirty="0">
+                <a:latin typeface="Arial" panose="020B0604020202020204" pitchFamily="34" charset="0"/>
+                <a:cs typeface="Arial" panose="020B0604020202020204" pitchFamily="34" charset="0"/>
+              </a:rPr>
+              <a:t>Integration packet produced and workshop collaboration ongoing with </a:t>
+            </a:r>
+            <a:r>
+              <a:rPr lang="en-US" sz="911" dirty="0" err="1">
+                <a:latin typeface="Arial" panose="020B0604020202020204" pitchFamily="34" charset="0"/>
+                <a:cs typeface="Arial" panose="020B0604020202020204" pitchFamily="34" charset="0"/>
+              </a:rPr>
+              <a:t>Foxxum</a:t>
+            </a:r>
+            <a:r>
+              <a:rPr lang="en-US" sz="911" dirty="0">
+                <a:latin typeface="Arial" panose="020B0604020202020204" pitchFamily="34" charset="0"/>
+                <a:cs typeface="Arial" panose="020B0604020202020204" pitchFamily="34" charset="0"/>
+              </a:rPr>
+              <a:t>; no schema-stability specifics were called out in this update.</a:t>
+            </a:r>
+            <a:endParaRPr lang="en-US" sz="861" dirty="0">
+              <a:latin typeface="Arial" panose="020B0604020202020204" pitchFamily="34" charset="0"/>
+              <a:cs typeface="Arial" panose="020B0604020202020204" pitchFamily="34" charset="0"/>
+            </a:endParaRPr>
+          </a:p>
+        </p:txBody>
+      </p:sp>
+      <p:sp>
+        <p:nvSpPr>
+          <p:cNvPr id="68" name="Shape 66"/>
+          <p:cNvSpPr/>
+          <p:nvPr/>
+        </p:nvSpPr>
+        <p:spPr>
+          <a:xfrm>
+            <a:off x="5953087" y="3740925"/>
+            <a:ext cx="5740146" cy="277749"/>
+          </a:xfrm>
+          <a:prstGeom prst="rect">
+            <a:avLst/>
+          </a:prstGeom>
+          <a:solidFill>
+            <a:schemeClr val="accent6">
+              <a:lumMod val="60000"/>
+              <a:lumOff val="40000"/>
+            </a:schemeClr>
+          </a:solidFill>
+          <a:ln w="12700">
+            <a:solidFill>
+              <a:srgbClr val="0F6E56"/>
+            </a:solidFill>
+            <a:prstDash val="solid"/>
+          </a:ln>
+        </p:spPr>
+        <p:txBody>
+          <a:bodyPr/>
+          <a:lstStyle/>
+          <a:p>
+            <a:endParaRPr lang="en-US" sz="1823">
+              <a:latin typeface="Arial" panose="020B0604020202020204" pitchFamily="34" charset="0"/>
+              <a:cs typeface="Arial" panose="020B0604020202020204" pitchFamily="34" charset="0"/>
+            </a:endParaRPr>
+          </a:p>
+        </p:txBody>
+      </p:sp>
+      <p:sp>
+        <p:nvSpPr>
+          <p:cNvPr id="69" name="Text 67"/>
+          <p:cNvSpPr/>
+          <p:nvPr/>
+        </p:nvSpPr>
+        <p:spPr>
+          <a:xfrm>
+            <a:off x="5999378" y="3740925"/>
+            <a:ext cx="5693855" cy="277749"/>
+          </a:xfrm>
+          <a:prstGeom prst="rect">
+            <a:avLst/>
+          </a:prstGeom>
+          <a:noFill/>
+          <a:ln/>
+        </p:spPr>
+        <p:txBody>
+          <a:bodyPr wrap="square" lIns="0" tIns="0" rIns="0" bIns="0" rtlCol="0" anchor="ctr"/>
+          <a:lstStyle/>
+          <a:p>
+            <a:r>
+              <a:rPr lang="en-US" sz="1013" dirty="0">
+                <a:latin typeface="Arial" panose="020B0604020202020204" pitchFamily="34" charset="0"/>
+                <a:ea typeface="Calibri" pitchFamily="34" charset="-122"/>
+                <a:cs typeface="Arial" panose="020B0604020202020204" pitchFamily="34" charset="0"/>
+              </a:rPr>
+              <a:t>Platform Capabilities</a:t>
+            </a:r>
+            <a:endParaRPr lang="en-US" sz="1013" dirty="0">
+              <a:latin typeface="Arial" panose="020B0604020202020204" pitchFamily="34" charset="0"/>
+              <a:cs typeface="Arial" panose="020B0604020202020204" pitchFamily="34" charset="0"/>
+            </a:endParaRPr>
+          </a:p>
+        </p:txBody>
+      </p:sp>
+      <p:sp>
+        <p:nvSpPr>
+          <p:cNvPr id="70" name="Shape 68"/>
+          <p:cNvSpPr/>
+          <p:nvPr/>
+        </p:nvSpPr>
+        <p:spPr>
+          <a:xfrm>
+            <a:off x="5953087" y="4018674"/>
+            <a:ext cx="5740146" cy="2740457"/>
+          </a:xfrm>
+          <a:prstGeom prst="rect">
+            <a:avLst/>
+          </a:prstGeom>
+          <a:solidFill>
+            <a:srgbClr val="F8FFFE"/>
+          </a:solidFill>
+          <a:ln w="9525">
+            <a:solidFill>
+              <a:srgbClr val="D1FAE5"/>
+            </a:solidFill>
+            <a:prstDash val="solid"/>
+          </a:ln>
+        </p:spPr>
+        <p:txBody>
+          <a:bodyPr/>
+          <a:lstStyle/>
+          <a:p>
+            <a:endParaRPr lang="en-US" sz="1823" dirty="0">
+              <a:latin typeface="Arial" panose="020B0604020202020204" pitchFamily="34" charset="0"/>
+              <a:cs typeface="Arial" panose="020B0604020202020204" pitchFamily="34" charset="0"/>
+            </a:endParaRPr>
+          </a:p>
+        </p:txBody>
+      </p:sp>
+      <p:sp>
+        <p:nvSpPr>
+          <p:cNvPr id="71" name="Shape 69"/>
+          <p:cNvSpPr/>
+          <p:nvPr/>
+        </p:nvSpPr>
+        <p:spPr>
+          <a:xfrm>
+            <a:off x="5927906" y="4031018"/>
+            <a:ext cx="5721629" cy="685114"/>
+          </a:xfrm>
+          <a:prstGeom prst="rect">
+            <a:avLst/>
+          </a:prstGeom>
+          <a:solidFill>
+            <a:srgbClr val="FFFFFF"/>
+          </a:solidFill>
+          <a:ln w="12700">
+            <a:solidFill>
+              <a:srgbClr val="FFFFFF"/>
+            </a:solidFill>
+            <a:prstDash val="solid"/>
+          </a:ln>
+        </p:spPr>
+        <p:txBody>
+          <a:bodyPr/>
+          <a:lstStyle/>
+          <a:p>
+            <a:endParaRPr lang="en-US" sz="1823">
+              <a:latin typeface="Arial" panose="020B0604020202020204" pitchFamily="34" charset="0"/>
+              <a:cs typeface="Arial" panose="020B0604020202020204" pitchFamily="34" charset="0"/>
+            </a:endParaRPr>
+          </a:p>
+        </p:txBody>
+      </p:sp>
+      <p:sp>
+        <p:nvSpPr>
+          <p:cNvPr id="72" name="Text 70"/>
+          <p:cNvSpPr/>
+          <p:nvPr/>
+        </p:nvSpPr>
+        <p:spPr>
+          <a:xfrm>
+            <a:off x="5999378" y="4018674"/>
+            <a:ext cx="601790" cy="685114"/>
+          </a:xfrm>
+          <a:prstGeom prst="rect">
+            <a:avLst/>
+          </a:prstGeom>
+          <a:noFill/>
+          <a:ln/>
+        </p:spPr>
+        <p:txBody>
+          <a:bodyPr wrap="square" lIns="0" tIns="0" rIns="0" bIns="0" rtlCol="0" anchor="ctr"/>
+          <a:lstStyle/>
+          <a:p>
+            <a:r>
+              <a:rPr lang="en-US" sz="861" dirty="0">
+                <a:solidFill>
+                  <a:srgbClr val="374151"/>
+                </a:solidFill>
+                <a:latin typeface="Arial" panose="020B0604020202020204" pitchFamily="34" charset="0"/>
+                <a:cs typeface="Arial" panose="020B0604020202020204" pitchFamily="34" charset="0"/>
+              </a:rPr>
+              <a:t>Platform POC</a:t>
+            </a:r>
+            <a:endParaRPr lang="en-US" sz="861" dirty="0">
+              <a:latin typeface="Arial" panose="020B0604020202020204" pitchFamily="34" charset="0"/>
+              <a:cs typeface="Arial" panose="020B0604020202020204" pitchFamily="34" charset="0"/>
+            </a:endParaRPr>
+          </a:p>
+        </p:txBody>
+      </p:sp>
+      <p:sp>
+        <p:nvSpPr>
+          <p:cNvPr id="73" name="Text 71"/>
+          <p:cNvSpPr/>
+          <p:nvPr/>
+        </p:nvSpPr>
+        <p:spPr>
+          <a:xfrm>
+            <a:off x="6619684" y="4018674"/>
+            <a:ext cx="4462501" cy="685114"/>
+          </a:xfrm>
+          <a:prstGeom prst="rect">
+            <a:avLst/>
+          </a:prstGeom>
+          <a:noFill/>
+          <a:ln/>
+        </p:spPr>
+        <p:txBody>
+          <a:bodyPr wrap="square" lIns="0" tIns="0" rIns="0" bIns="0" rtlCol="0" anchor="ctr"/>
+          <a:lstStyle/>
+          <a:p>
+            <a:pPr marL="173593" indent="-173593">
+              <a:buFont typeface="Arial" panose="020B0604020202020204" pitchFamily="34" charset="0"/>
+              <a:buChar char="•"/>
+            </a:pPr>
+            <a:r>
+              <a:rPr lang="en-US" sz="911" dirty="0"/>
+              <a:t>Mobile login gate placeholder: the first login gate for anonymous viewers, built with placeholder UI ahead of the real Auth0 flow. </a:t>
+            </a:r>
+          </a:p>
+          <a:p>
+            <a:pPr marL="173593" indent="-173593">
+              <a:buFont typeface="Arial" panose="020B0604020202020204" pitchFamily="34" charset="0"/>
+              <a:buChar char="•"/>
+            </a:pPr>
+            <a:r>
+              <a:rPr lang="en-US" sz="911" dirty="0"/>
+              <a:t>Entitlement simulator: the mobile tool simulating any account state to test flows before the real backend exists, more a testing harness than a shipped feature.</a:t>
+            </a:r>
+            <a:endParaRPr lang="en-US" sz="861" dirty="0">
+              <a:latin typeface="Arial" panose="020B0604020202020204" pitchFamily="34" charset="0"/>
+              <a:cs typeface="Arial" panose="020B0604020202020204" pitchFamily="34" charset="0"/>
+            </a:endParaRPr>
+          </a:p>
+        </p:txBody>
+      </p:sp>
+      <p:sp>
+        <p:nvSpPr>
+          <p:cNvPr id="76" name="Text 74"/>
+          <p:cNvSpPr/>
+          <p:nvPr/>
+        </p:nvSpPr>
+        <p:spPr>
+          <a:xfrm>
+            <a:off x="5999378" y="4703788"/>
+            <a:ext cx="601790" cy="685114"/>
+          </a:xfrm>
+          <a:prstGeom prst="rect">
+            <a:avLst/>
+          </a:prstGeom>
+          <a:noFill/>
+          <a:ln/>
+        </p:spPr>
+        <p:txBody>
+          <a:bodyPr wrap="square" lIns="0" tIns="0" rIns="0" bIns="0" rtlCol="0" anchor="ctr"/>
+          <a:lstStyle/>
+          <a:p>
+            <a:r>
+              <a:rPr lang="en-US" sz="861" dirty="0">
+                <a:solidFill>
+                  <a:srgbClr val="374151"/>
+                </a:solidFill>
+                <a:latin typeface="Arial" panose="020B0604020202020204" pitchFamily="34" charset="0"/>
+                <a:ea typeface="Calibri" pitchFamily="34" charset="-122"/>
+                <a:cs typeface="Arial" panose="020B0604020202020204" pitchFamily="34" charset="0"/>
+              </a:rPr>
+              <a:t>UI/UX</a:t>
+            </a:r>
+            <a:endParaRPr lang="en-US" sz="861" dirty="0">
+              <a:latin typeface="Arial" panose="020B0604020202020204" pitchFamily="34" charset="0"/>
+              <a:cs typeface="Arial" panose="020B0604020202020204" pitchFamily="34" charset="0"/>
+            </a:endParaRPr>
+          </a:p>
+        </p:txBody>
+      </p:sp>
+      <p:sp>
+        <p:nvSpPr>
+          <p:cNvPr id="77" name="Text 75"/>
+          <p:cNvSpPr/>
+          <p:nvPr/>
+        </p:nvSpPr>
+        <p:spPr>
+          <a:xfrm>
+            <a:off x="6619684" y="4753834"/>
+            <a:ext cx="4462501" cy="685114"/>
+          </a:xfrm>
+          <a:prstGeom prst="rect">
+            <a:avLst/>
+          </a:prstGeom>
+          <a:noFill/>
+          <a:ln/>
+        </p:spPr>
+        <p:txBody>
+          <a:bodyPr wrap="square" lIns="0" tIns="0" rIns="0" bIns="0" rtlCol="0" anchor="ctr"/>
+          <a:lstStyle/>
+          <a:p>
+            <a:pPr marL="173593" indent="-173593">
+              <a:buFont typeface="Arial" panose="020B0604020202020204" pitchFamily="34" charset="0"/>
+              <a:buChar char="•"/>
+            </a:pPr>
+            <a:r>
+              <a:rPr lang="en-US" sz="861" dirty="0">
+                <a:solidFill>
+                  <a:srgbClr val="374151"/>
+                </a:solidFill>
+                <a:latin typeface="Arial" panose="020B0604020202020204" pitchFamily="34" charset="0"/>
+                <a:ea typeface="Calibri" pitchFamily="34" charset="-122"/>
+                <a:cs typeface="Arial" panose="020B0604020202020204" pitchFamily="34" charset="0"/>
+              </a:rPr>
+              <a:t>Built the front-end foundation (design system, left sidebar navigation, footer, and page shell)</a:t>
+            </a:r>
+          </a:p>
+          <a:p>
+            <a:pPr marL="173593" indent="-173593">
+              <a:buFont typeface="Arial" panose="020B0604020202020204" pitchFamily="34" charset="0"/>
+              <a:buChar char="•"/>
+            </a:pPr>
+            <a:r>
+              <a:rPr lang="en-US" sz="861" dirty="0">
+                <a:solidFill>
+                  <a:srgbClr val="374151"/>
+                </a:solidFill>
+                <a:latin typeface="Arial" panose="020B0604020202020204" pitchFamily="34" charset="0"/>
+                <a:ea typeface="Calibri" pitchFamily="34" charset="-122"/>
+                <a:cs typeface="Arial" panose="020B0604020202020204" pitchFamily="34" charset="0"/>
+              </a:rPr>
+              <a:t>Built the page engine and styled the merchandising carousels (other engineers wired the carousels to data; my part was the full-bleed styling)</a:t>
+            </a:r>
+          </a:p>
+          <a:p>
+            <a:endParaRPr lang="en-US" sz="861" dirty="0">
+              <a:solidFill>
+                <a:srgbClr val="374151"/>
+              </a:solidFill>
+              <a:latin typeface="Arial" panose="020B0604020202020204" pitchFamily="34" charset="0"/>
+              <a:ea typeface="Calibri" pitchFamily="34" charset="-122"/>
+              <a:cs typeface="Arial" panose="020B0604020202020204" pitchFamily="34" charset="0"/>
+            </a:endParaRPr>
+          </a:p>
+        </p:txBody>
+      </p:sp>
+      <p:sp>
+        <p:nvSpPr>
+          <p:cNvPr id="80" name="Shape 78"/>
+          <p:cNvSpPr/>
+          <p:nvPr/>
+        </p:nvSpPr>
+        <p:spPr>
+          <a:xfrm>
+            <a:off x="5962345" y="5388902"/>
+            <a:ext cx="5721629" cy="685114"/>
+          </a:xfrm>
+          <a:prstGeom prst="rect">
+            <a:avLst/>
+          </a:prstGeom>
+          <a:solidFill>
+            <a:srgbClr val="FFFFFF"/>
+          </a:solidFill>
+          <a:ln w="12700">
+            <a:solidFill>
+              <a:srgbClr val="FFFFFF"/>
+            </a:solidFill>
+            <a:prstDash val="solid"/>
+          </a:ln>
+        </p:spPr>
+        <p:txBody>
+          <a:bodyPr/>
+          <a:lstStyle/>
+          <a:p>
+            <a:endParaRPr lang="en-US" sz="1823">
+              <a:latin typeface="Arial" panose="020B0604020202020204" pitchFamily="34" charset="0"/>
+              <a:cs typeface="Arial" panose="020B0604020202020204" pitchFamily="34" charset="0"/>
+            </a:endParaRPr>
+          </a:p>
+        </p:txBody>
+      </p:sp>
+      <p:sp>
+        <p:nvSpPr>
+          <p:cNvPr id="81" name="Text 79"/>
+          <p:cNvSpPr/>
+          <p:nvPr/>
+        </p:nvSpPr>
+        <p:spPr>
+          <a:xfrm>
+            <a:off x="5999378" y="5388902"/>
+            <a:ext cx="601790" cy="685114"/>
+          </a:xfrm>
+          <a:prstGeom prst="rect">
+            <a:avLst/>
+          </a:prstGeom>
+          <a:noFill/>
+          <a:ln/>
+        </p:spPr>
+        <p:txBody>
+          <a:bodyPr wrap="square" lIns="0" tIns="0" rIns="0" bIns="0" rtlCol="0" anchor="ctr"/>
+          <a:lstStyle/>
+          <a:p>
+            <a:r>
+              <a:rPr lang="en-US" sz="861" dirty="0">
+                <a:solidFill>
+                  <a:srgbClr val="374151"/>
+                </a:solidFill>
+                <a:latin typeface="Arial" panose="020B0604020202020204" pitchFamily="34" charset="0"/>
+                <a:ea typeface="Calibri" pitchFamily="34" charset="-122"/>
+                <a:cs typeface="Arial" panose="020B0604020202020204" pitchFamily="34" charset="0"/>
+              </a:rPr>
+              <a:t>Video player</a:t>
+            </a:r>
+            <a:endParaRPr lang="en-US" sz="861" dirty="0">
+              <a:latin typeface="Arial" panose="020B0604020202020204" pitchFamily="34" charset="0"/>
+              <a:cs typeface="Arial" panose="020B0604020202020204" pitchFamily="34" charset="0"/>
+            </a:endParaRPr>
+          </a:p>
+        </p:txBody>
+      </p:sp>
+      <p:sp>
+        <p:nvSpPr>
+          <p:cNvPr id="82" name="Text 80"/>
+          <p:cNvSpPr/>
+          <p:nvPr/>
+        </p:nvSpPr>
+        <p:spPr>
+          <a:xfrm>
+            <a:off x="6619684" y="5388902"/>
+            <a:ext cx="4462501" cy="685114"/>
+          </a:xfrm>
+          <a:prstGeom prst="rect">
+            <a:avLst/>
+          </a:prstGeom>
+          <a:noFill/>
+          <a:ln/>
+        </p:spPr>
+        <p:txBody>
+          <a:bodyPr wrap="square" lIns="0" tIns="0" rIns="0" bIns="0" rtlCol="0" anchor="ctr"/>
+          <a:lstStyle/>
+          <a:p>
+            <a:r>
+              <a:rPr lang="en-US" sz="861" dirty="0">
+                <a:solidFill>
+                  <a:srgbClr val="374151"/>
+                </a:solidFill>
+                <a:latin typeface="Arial" panose="020B0604020202020204" pitchFamily="34" charset="0"/>
+                <a:ea typeface="Calibri" pitchFamily="34" charset="-122"/>
+                <a:cs typeface="Arial" panose="020B0604020202020204" pitchFamily="34" charset="0"/>
+              </a:rPr>
+              <a:t>Prototyped the video experience (exploratory test of the </a:t>
+            </a:r>
+            <a:r>
+              <a:rPr lang="en-US" sz="861" dirty="0" err="1">
+                <a:solidFill>
+                  <a:srgbClr val="374151"/>
+                </a:solidFill>
+                <a:latin typeface="Arial" panose="020B0604020202020204" pitchFamily="34" charset="0"/>
+                <a:ea typeface="Calibri" pitchFamily="34" charset="-122"/>
+                <a:cs typeface="Arial" panose="020B0604020202020204" pitchFamily="34" charset="0"/>
+              </a:rPr>
+              <a:t>BitMovin</a:t>
+            </a:r>
+            <a:r>
+              <a:rPr lang="en-US" sz="861" dirty="0">
+                <a:solidFill>
+                  <a:srgbClr val="374151"/>
+                </a:solidFill>
+                <a:latin typeface="Arial" panose="020B0604020202020204" pitchFamily="34" charset="0"/>
+                <a:ea typeface="Calibri" pitchFamily="34" charset="-122"/>
+                <a:cs typeface="Arial" panose="020B0604020202020204" pitchFamily="34" charset="0"/>
+              </a:rPr>
+              <a:t> player APIs; a proof-of-concept, not the final player)</a:t>
+            </a:r>
+            <a:endParaRPr lang="en-US" sz="861" dirty="0">
+              <a:latin typeface="Arial" panose="020B0604020202020204" pitchFamily="34" charset="0"/>
+              <a:cs typeface="Arial" panose="020B0604020202020204" pitchFamily="34" charset="0"/>
+            </a:endParaRPr>
+          </a:p>
+        </p:txBody>
+      </p:sp>
+      <p:sp>
+        <p:nvSpPr>
+          <p:cNvPr id="85" name="Text 83"/>
+          <p:cNvSpPr/>
+          <p:nvPr/>
+        </p:nvSpPr>
+        <p:spPr>
+          <a:xfrm>
+            <a:off x="5999378" y="6074016"/>
+            <a:ext cx="601790" cy="685114"/>
+          </a:xfrm>
+          <a:prstGeom prst="rect">
+            <a:avLst/>
+          </a:prstGeom>
+          <a:noFill/>
+          <a:ln/>
+        </p:spPr>
+        <p:txBody>
+          <a:bodyPr wrap="square" lIns="0" tIns="0" rIns="0" bIns="0" rtlCol="0" anchor="ctr"/>
+          <a:lstStyle/>
+          <a:p>
+            <a:r>
+              <a:rPr lang="en-US" sz="861" dirty="0">
+                <a:solidFill>
+                  <a:srgbClr val="374151"/>
+                </a:solidFill>
+                <a:latin typeface="Arial" panose="020B0604020202020204" pitchFamily="34" charset="0"/>
+                <a:ea typeface="Calibri" pitchFamily="34" charset="-122"/>
+                <a:cs typeface="Arial" panose="020B0604020202020204" pitchFamily="34" charset="0"/>
+              </a:rPr>
+              <a:t>Testing</a:t>
+            </a:r>
+            <a:endParaRPr lang="en-US" sz="861" dirty="0">
+              <a:latin typeface="Arial" panose="020B0604020202020204" pitchFamily="34" charset="0"/>
+              <a:cs typeface="Arial" panose="020B0604020202020204" pitchFamily="34" charset="0"/>
+            </a:endParaRPr>
+          </a:p>
+        </p:txBody>
+      </p:sp>
+      <p:sp>
+        <p:nvSpPr>
+          <p:cNvPr id="86" name="Text 84"/>
+          <p:cNvSpPr/>
+          <p:nvPr/>
+        </p:nvSpPr>
+        <p:spPr>
+          <a:xfrm>
+            <a:off x="6619684" y="6074016"/>
+            <a:ext cx="4462501" cy="685114"/>
+          </a:xfrm>
+          <a:prstGeom prst="rect">
+            <a:avLst/>
+          </a:prstGeom>
+          <a:noFill/>
+          <a:ln/>
+        </p:spPr>
+        <p:txBody>
+          <a:bodyPr wrap="square" lIns="0" tIns="0" rIns="0" bIns="0" rtlCol="0" anchor="ctr"/>
+          <a:lstStyle/>
+          <a:p>
+            <a:r>
+              <a:rPr lang="en-US" sz="861" dirty="0">
+                <a:solidFill>
+                  <a:srgbClr val="374151"/>
+                </a:solidFill>
+                <a:latin typeface="Arial" panose="020B0604020202020204" pitchFamily="34" charset="0"/>
+                <a:ea typeface="Calibri" pitchFamily="34" charset="-122"/>
+                <a:cs typeface="Arial" panose="020B0604020202020204" pitchFamily="34" charset="0"/>
+              </a:rPr>
+              <a:t>Testing E2E experience; Merchandising, sign in flow, MVPD, </a:t>
+            </a:r>
+            <a:r>
+              <a:rPr lang="en-US" sz="861" dirty="0" err="1">
+                <a:solidFill>
+                  <a:srgbClr val="374151"/>
+                </a:solidFill>
+                <a:latin typeface="Arial" panose="020B0604020202020204" pitchFamily="34" charset="0"/>
+                <a:ea typeface="Calibri" pitchFamily="34" charset="-122"/>
+                <a:cs typeface="Arial" panose="020B0604020202020204" pitchFamily="34" charset="0"/>
+              </a:rPr>
+              <a:t>Cleeng</a:t>
+            </a:r>
+            <a:r>
+              <a:rPr lang="en-US" sz="861" dirty="0">
+                <a:solidFill>
+                  <a:srgbClr val="374151"/>
+                </a:solidFill>
+                <a:latin typeface="Arial" panose="020B0604020202020204" pitchFamily="34" charset="0"/>
+                <a:ea typeface="Calibri" pitchFamily="34" charset="-122"/>
+                <a:cs typeface="Arial" panose="020B0604020202020204" pitchFamily="34" charset="0"/>
+              </a:rPr>
+              <a:t>, replays. </a:t>
+            </a:r>
+            <a:endParaRPr lang="en-US" sz="861" dirty="0">
+              <a:latin typeface="Arial" panose="020B0604020202020204" pitchFamily="34" charset="0"/>
+              <a:cs typeface="Arial" panose="020B0604020202020204" pitchFamily="34" charset="0"/>
+            </a:endParaRPr>
+          </a:p>
+        </p:txBody>
+      </p:sp>
+      <p:sp>
+        <p:nvSpPr>
+          <p:cNvPr id="90" name="Text 53">
+            <a:extLst>
+              <a:ext uri="{FF2B5EF4-FFF2-40B4-BE49-F238E27FC236}">
+                <a16:creationId xmlns:a16="http://schemas.microsoft.com/office/drawing/2014/main" id="{790CEA9C-CC79-9491-0B6C-884834BD2739}"/>
+              </a:ext>
+            </a:extLst>
+          </p:cNvPr>
+          <p:cNvSpPr/>
+          <p:nvPr/>
+        </p:nvSpPr>
+        <p:spPr>
+          <a:xfrm>
+            <a:off x="116493" y="4830318"/>
+            <a:ext cx="601790" cy="913486"/>
+          </a:xfrm>
+          <a:prstGeom prst="rect">
+            <a:avLst/>
+          </a:prstGeom>
+          <a:noFill/>
+          <a:ln/>
+        </p:spPr>
+        <p:txBody>
+          <a:bodyPr wrap="square" lIns="0" tIns="0" rIns="0" bIns="0" rtlCol="0" anchor="ctr"/>
+          <a:lstStyle/>
+          <a:p>
+            <a:r>
+              <a:rPr lang="en-US" sz="861" dirty="0">
+                <a:solidFill>
+                  <a:srgbClr val="374151"/>
+                </a:solidFill>
+                <a:latin typeface="Arial" panose="020B0604020202020204" pitchFamily="34" charset="0"/>
+                <a:cs typeface="Arial" panose="020B0604020202020204" pitchFamily="34" charset="0"/>
+              </a:rPr>
+              <a:t>DRM</a:t>
+            </a:r>
+            <a:endParaRPr lang="en-US" sz="861" dirty="0">
+              <a:latin typeface="Arial" panose="020B0604020202020204" pitchFamily="34" charset="0"/>
+              <a:cs typeface="Arial" panose="020B0604020202020204" pitchFamily="34" charset="0"/>
+            </a:endParaRPr>
+          </a:p>
+        </p:txBody>
+      </p:sp>
+      <p:grpSp>
+        <p:nvGrpSpPr>
+          <p:cNvPr id="103" name="Group 102">
+            <a:extLst>
+              <a:ext uri="{FF2B5EF4-FFF2-40B4-BE49-F238E27FC236}">
+                <a16:creationId xmlns:a16="http://schemas.microsoft.com/office/drawing/2014/main" id="{2415E7D3-0580-835D-6028-C1F6742970F7}"/>
+              </a:ext>
+            </a:extLst>
+          </p:cNvPr>
+          <p:cNvGrpSpPr/>
+          <p:nvPr/>
+        </p:nvGrpSpPr>
+        <p:grpSpPr>
+          <a:xfrm>
+            <a:off x="10991739" y="3129877"/>
+            <a:ext cx="801198" cy="203683"/>
+            <a:chOff x="10856038" y="2322576"/>
+            <a:chExt cx="791307" cy="201168"/>
+          </a:xfrm>
+        </p:grpSpPr>
+        <p:sp>
+          <p:nvSpPr>
+            <p:cNvPr id="104" name="Shape 43">
+              <a:extLst>
+                <a:ext uri="{FF2B5EF4-FFF2-40B4-BE49-F238E27FC236}">
+                  <a16:creationId xmlns:a16="http://schemas.microsoft.com/office/drawing/2014/main" id="{24A10409-FE5B-B5A8-C61F-BF55086DD3BF}"/>
+                </a:ext>
+              </a:extLst>
+            </p:cNvPr>
+            <p:cNvSpPr>
+              <a:spLocks/>
+            </p:cNvSpPr>
+            <p:nvPr/>
+          </p:nvSpPr>
+          <p:spPr>
+            <a:xfrm>
+              <a:off x="10981944" y="2322576"/>
+              <a:ext cx="539496" cy="201168"/>
+            </a:xfrm>
+            <a:prstGeom prst="roundRect">
+              <a:avLst>
+                <a:gd name="adj" fmla="val 22727"/>
+              </a:avLst>
+            </a:prstGeom>
+            <a:solidFill>
+              <a:srgbClr val="DBEAFE"/>
+            </a:solidFill>
+            <a:ln w="12700">
+              <a:solidFill>
+                <a:srgbClr val="DBEAFE"/>
+              </a:solidFill>
+              <a:prstDash val="solid"/>
+            </a:ln>
+          </p:spPr>
+          <p:txBody>
+            <a:bodyPr/>
+            <a:lstStyle/>
+            <a:p>
+              <a:endParaRPr lang="en-US" sz="1823">
+                <a:latin typeface="Arial" panose="020B0604020202020204" pitchFamily="34" charset="0"/>
+                <a:cs typeface="Arial" panose="020B0604020202020204" pitchFamily="34" charset="0"/>
+              </a:endParaRPr>
+            </a:p>
+          </p:txBody>
+        </p:sp>
+        <p:sp>
+          <p:nvSpPr>
+            <p:cNvPr id="105" name="TextBox 104">
+              <a:extLst>
+                <a:ext uri="{FF2B5EF4-FFF2-40B4-BE49-F238E27FC236}">
+                  <a16:creationId xmlns:a16="http://schemas.microsoft.com/office/drawing/2014/main" id="{7AD4F438-C9F8-C1D4-D14F-C4D357F173D6}"/>
+                </a:ext>
+              </a:extLst>
+            </p:cNvPr>
+            <p:cNvSpPr txBox="1">
+              <a:spLocks/>
+            </p:cNvSpPr>
+            <p:nvPr/>
+          </p:nvSpPr>
+          <p:spPr>
+            <a:xfrm>
+              <a:off x="10856038" y="2323689"/>
+              <a:ext cx="791307" cy="200055"/>
+            </a:xfrm>
+            <a:prstGeom prst="rect">
+              <a:avLst/>
+            </a:prstGeom>
+            <a:noFill/>
+          </p:spPr>
+          <p:txBody>
+            <a:bodyPr wrap="square">
+              <a:spAutoFit/>
+            </a:bodyPr>
+            <a:lstStyle/>
+            <a:p>
+              <a:pPr algn="ctr"/>
+              <a:r>
+                <a:rPr lang="en-US" sz="709" dirty="0">
+                  <a:solidFill>
+                    <a:srgbClr val="1E40AF"/>
+                  </a:solidFill>
+                  <a:latin typeface="Arial" panose="020B0604020202020204" pitchFamily="34" charset="0"/>
+                  <a:ea typeface="Calibri" pitchFamily="34" charset="-122"/>
+                  <a:cs typeface="Arial" panose="020B0604020202020204" pitchFamily="34" charset="0"/>
+                </a:rPr>
+                <a:t>In Progress</a:t>
+              </a:r>
+              <a:endParaRPr lang="en-US" sz="709" dirty="0">
+                <a:latin typeface="Arial" panose="020B0604020202020204" pitchFamily="34" charset="0"/>
+                <a:cs typeface="Arial" panose="020B0604020202020204" pitchFamily="34" charset="0"/>
+              </a:endParaRPr>
+            </a:p>
+          </p:txBody>
+        </p:sp>
+      </p:grpSp>
+      <p:grpSp>
+        <p:nvGrpSpPr>
+          <p:cNvPr id="106" name="Group 105">
+            <a:extLst>
+              <a:ext uri="{FF2B5EF4-FFF2-40B4-BE49-F238E27FC236}">
+                <a16:creationId xmlns:a16="http://schemas.microsoft.com/office/drawing/2014/main" id="{36009C5C-8271-24AC-8B52-287CA50FACA5}"/>
+              </a:ext>
+            </a:extLst>
+          </p:cNvPr>
+          <p:cNvGrpSpPr/>
+          <p:nvPr/>
+        </p:nvGrpSpPr>
+        <p:grpSpPr>
+          <a:xfrm>
+            <a:off x="10997183" y="2525001"/>
+            <a:ext cx="801198" cy="203683"/>
+            <a:chOff x="10856038" y="2322576"/>
+            <a:chExt cx="791307" cy="201168"/>
+          </a:xfrm>
+        </p:grpSpPr>
+        <p:sp>
+          <p:nvSpPr>
+            <p:cNvPr id="107" name="Shape 43">
+              <a:extLst>
+                <a:ext uri="{FF2B5EF4-FFF2-40B4-BE49-F238E27FC236}">
+                  <a16:creationId xmlns:a16="http://schemas.microsoft.com/office/drawing/2014/main" id="{67E66F2B-A5DA-8169-369C-4F1A236B1E59}"/>
+                </a:ext>
+              </a:extLst>
+            </p:cNvPr>
+            <p:cNvSpPr>
+              <a:spLocks/>
+            </p:cNvSpPr>
+            <p:nvPr/>
+          </p:nvSpPr>
+          <p:spPr>
+            <a:xfrm>
+              <a:off x="10981944" y="2322576"/>
+              <a:ext cx="539496" cy="201168"/>
+            </a:xfrm>
+            <a:prstGeom prst="roundRect">
+              <a:avLst>
+                <a:gd name="adj" fmla="val 22727"/>
+              </a:avLst>
+            </a:prstGeom>
+            <a:solidFill>
+              <a:srgbClr val="DBEAFE"/>
+            </a:solidFill>
+            <a:ln w="12700">
+              <a:solidFill>
+                <a:srgbClr val="DBEAFE"/>
+              </a:solidFill>
+              <a:prstDash val="solid"/>
+            </a:ln>
+          </p:spPr>
+          <p:txBody>
+            <a:bodyPr/>
+            <a:lstStyle/>
+            <a:p>
+              <a:endParaRPr lang="en-US" sz="1823">
+                <a:latin typeface="Arial" panose="020B0604020202020204" pitchFamily="34" charset="0"/>
+                <a:cs typeface="Arial" panose="020B0604020202020204" pitchFamily="34" charset="0"/>
+              </a:endParaRPr>
+            </a:p>
+          </p:txBody>
+        </p:sp>
+        <p:sp>
+          <p:nvSpPr>
+            <p:cNvPr id="108" name="TextBox 107">
+              <a:extLst>
+                <a:ext uri="{FF2B5EF4-FFF2-40B4-BE49-F238E27FC236}">
+                  <a16:creationId xmlns:a16="http://schemas.microsoft.com/office/drawing/2014/main" id="{F6E5DA9D-E0D9-A4B8-BED0-3E023A8680CD}"/>
+                </a:ext>
+              </a:extLst>
+            </p:cNvPr>
+            <p:cNvSpPr txBox="1">
+              <a:spLocks/>
+            </p:cNvSpPr>
+            <p:nvPr/>
+          </p:nvSpPr>
+          <p:spPr>
+            <a:xfrm>
+              <a:off x="10856038" y="2323689"/>
+              <a:ext cx="791307" cy="200055"/>
+            </a:xfrm>
+            <a:prstGeom prst="rect">
+              <a:avLst/>
+            </a:prstGeom>
+            <a:noFill/>
+          </p:spPr>
+          <p:txBody>
+            <a:bodyPr wrap="square">
+              <a:spAutoFit/>
+            </a:bodyPr>
+            <a:lstStyle/>
+            <a:p>
+              <a:pPr algn="ctr"/>
+              <a:r>
+                <a:rPr lang="en-US" sz="709" dirty="0">
+                  <a:solidFill>
+                    <a:srgbClr val="1E40AF"/>
+                  </a:solidFill>
+                  <a:latin typeface="Arial" panose="020B0604020202020204" pitchFamily="34" charset="0"/>
+                  <a:ea typeface="Calibri" pitchFamily="34" charset="-122"/>
+                  <a:cs typeface="Arial" panose="020B0604020202020204" pitchFamily="34" charset="0"/>
+                </a:rPr>
+                <a:t>In Progress</a:t>
+              </a:r>
+              <a:endParaRPr lang="en-US" sz="709" dirty="0">
+                <a:latin typeface="Arial" panose="020B0604020202020204" pitchFamily="34" charset="0"/>
+                <a:cs typeface="Arial" panose="020B0604020202020204" pitchFamily="34" charset="0"/>
+              </a:endParaRPr>
+            </a:p>
+          </p:txBody>
+        </p:sp>
+      </p:grpSp>
+      <p:grpSp>
+        <p:nvGrpSpPr>
+          <p:cNvPr id="109" name="Group 108">
+            <a:extLst>
+              <a:ext uri="{FF2B5EF4-FFF2-40B4-BE49-F238E27FC236}">
+                <a16:creationId xmlns:a16="http://schemas.microsoft.com/office/drawing/2014/main" id="{D74ED233-04E7-261A-61A3-871D17D81F5C}"/>
+              </a:ext>
+            </a:extLst>
+          </p:cNvPr>
+          <p:cNvGrpSpPr/>
+          <p:nvPr/>
+        </p:nvGrpSpPr>
+        <p:grpSpPr>
+          <a:xfrm>
+            <a:off x="5121978" y="6240157"/>
+            <a:ext cx="801198" cy="203683"/>
+            <a:chOff x="10856038" y="2322576"/>
+            <a:chExt cx="791307" cy="201168"/>
+          </a:xfrm>
+        </p:grpSpPr>
+        <p:sp>
+          <p:nvSpPr>
+            <p:cNvPr id="110" name="Shape 43">
+              <a:extLst>
+                <a:ext uri="{FF2B5EF4-FFF2-40B4-BE49-F238E27FC236}">
+                  <a16:creationId xmlns:a16="http://schemas.microsoft.com/office/drawing/2014/main" id="{0999F11F-435B-0279-627B-E591C22F22D5}"/>
+                </a:ext>
+              </a:extLst>
+            </p:cNvPr>
+            <p:cNvSpPr>
+              <a:spLocks/>
+            </p:cNvSpPr>
+            <p:nvPr/>
+          </p:nvSpPr>
+          <p:spPr>
+            <a:xfrm>
+              <a:off x="10981944" y="2322576"/>
+              <a:ext cx="539496" cy="201168"/>
+            </a:xfrm>
+            <a:prstGeom prst="roundRect">
+              <a:avLst>
+                <a:gd name="adj" fmla="val 22727"/>
+              </a:avLst>
+            </a:prstGeom>
+            <a:solidFill>
+              <a:srgbClr val="DBEAFE"/>
+            </a:solidFill>
+            <a:ln w="12700">
+              <a:solidFill>
+                <a:srgbClr val="DBEAFE"/>
+              </a:solidFill>
+              <a:prstDash val="solid"/>
+            </a:ln>
+          </p:spPr>
+          <p:txBody>
+            <a:bodyPr/>
+            <a:lstStyle/>
+            <a:p>
+              <a:endParaRPr lang="en-US" sz="1823">
+                <a:latin typeface="Arial" panose="020B0604020202020204" pitchFamily="34" charset="0"/>
+                <a:cs typeface="Arial" panose="020B0604020202020204" pitchFamily="34" charset="0"/>
+              </a:endParaRPr>
+            </a:p>
+          </p:txBody>
+        </p:sp>
+        <p:sp>
+          <p:nvSpPr>
+            <p:cNvPr id="111" name="TextBox 110">
+              <a:extLst>
+                <a:ext uri="{FF2B5EF4-FFF2-40B4-BE49-F238E27FC236}">
+                  <a16:creationId xmlns:a16="http://schemas.microsoft.com/office/drawing/2014/main" id="{6C0B2977-A2F4-4D7C-25F0-D06DA87C4CF1}"/>
+                </a:ext>
+              </a:extLst>
+            </p:cNvPr>
+            <p:cNvSpPr txBox="1">
+              <a:spLocks/>
+            </p:cNvSpPr>
+            <p:nvPr/>
+          </p:nvSpPr>
+          <p:spPr>
+            <a:xfrm>
+              <a:off x="10856038" y="2323689"/>
+              <a:ext cx="791307" cy="200055"/>
+            </a:xfrm>
+            <a:prstGeom prst="rect">
+              <a:avLst/>
+            </a:prstGeom>
+            <a:noFill/>
+          </p:spPr>
+          <p:txBody>
+            <a:bodyPr wrap="square">
+              <a:spAutoFit/>
+            </a:bodyPr>
+            <a:lstStyle/>
+            <a:p>
+              <a:pPr algn="ctr"/>
+              <a:r>
+                <a:rPr lang="en-US" sz="709" dirty="0">
+                  <a:solidFill>
+                    <a:srgbClr val="1E40AF"/>
+                  </a:solidFill>
+                  <a:latin typeface="Arial" panose="020B0604020202020204" pitchFamily="34" charset="0"/>
+                  <a:ea typeface="Calibri" pitchFamily="34" charset="-122"/>
+                  <a:cs typeface="Arial" panose="020B0604020202020204" pitchFamily="34" charset="0"/>
+                </a:rPr>
+                <a:t>In Progress</a:t>
+              </a:r>
+              <a:endParaRPr lang="en-US" sz="709" dirty="0">
+                <a:latin typeface="Arial" panose="020B0604020202020204" pitchFamily="34" charset="0"/>
+                <a:cs typeface="Arial" panose="020B0604020202020204" pitchFamily="34" charset="0"/>
+              </a:endParaRPr>
+            </a:p>
+          </p:txBody>
+        </p:sp>
+      </p:grpSp>
+      <p:grpSp>
+        <p:nvGrpSpPr>
+          <p:cNvPr id="112" name="Group 111">
+            <a:extLst>
+              <a:ext uri="{FF2B5EF4-FFF2-40B4-BE49-F238E27FC236}">
+                <a16:creationId xmlns:a16="http://schemas.microsoft.com/office/drawing/2014/main" id="{4D8D8501-B0D2-1527-AF68-B176BFE6C528}"/>
+              </a:ext>
+            </a:extLst>
+          </p:cNvPr>
+          <p:cNvGrpSpPr/>
+          <p:nvPr/>
+        </p:nvGrpSpPr>
+        <p:grpSpPr>
+          <a:xfrm>
+            <a:off x="10991739" y="4228528"/>
+            <a:ext cx="801198" cy="203683"/>
+            <a:chOff x="10856038" y="2322576"/>
+            <a:chExt cx="791307" cy="201168"/>
+          </a:xfrm>
+        </p:grpSpPr>
+        <p:sp>
+          <p:nvSpPr>
+            <p:cNvPr id="113" name="Shape 43">
+              <a:extLst>
+                <a:ext uri="{FF2B5EF4-FFF2-40B4-BE49-F238E27FC236}">
+                  <a16:creationId xmlns:a16="http://schemas.microsoft.com/office/drawing/2014/main" id="{624E48F5-FF69-2B3E-BEEC-FF36EA483DFA}"/>
+                </a:ext>
+              </a:extLst>
+            </p:cNvPr>
+            <p:cNvSpPr>
+              <a:spLocks/>
+            </p:cNvSpPr>
+            <p:nvPr/>
+          </p:nvSpPr>
+          <p:spPr>
+            <a:xfrm>
+              <a:off x="10981944" y="2322576"/>
+              <a:ext cx="539496" cy="201168"/>
+            </a:xfrm>
+            <a:prstGeom prst="roundRect">
+              <a:avLst>
+                <a:gd name="adj" fmla="val 22727"/>
+              </a:avLst>
+            </a:prstGeom>
+            <a:solidFill>
+              <a:srgbClr val="DBEAFE"/>
+            </a:solidFill>
+            <a:ln w="12700">
+              <a:solidFill>
+                <a:srgbClr val="DBEAFE"/>
+              </a:solidFill>
+              <a:prstDash val="solid"/>
+            </a:ln>
+          </p:spPr>
+          <p:txBody>
+            <a:bodyPr/>
+            <a:lstStyle/>
+            <a:p>
+              <a:endParaRPr lang="en-US" sz="1823">
+                <a:latin typeface="Arial" panose="020B0604020202020204" pitchFamily="34" charset="0"/>
+                <a:cs typeface="Arial" panose="020B0604020202020204" pitchFamily="34" charset="0"/>
+              </a:endParaRPr>
+            </a:p>
+          </p:txBody>
+        </p:sp>
+        <p:sp>
+          <p:nvSpPr>
+            <p:cNvPr id="114" name="TextBox 113">
+              <a:extLst>
+                <a:ext uri="{FF2B5EF4-FFF2-40B4-BE49-F238E27FC236}">
+                  <a16:creationId xmlns:a16="http://schemas.microsoft.com/office/drawing/2014/main" id="{D0567EE0-57FA-72C2-4C71-71403553B2BB}"/>
+                </a:ext>
+              </a:extLst>
+            </p:cNvPr>
+            <p:cNvSpPr txBox="1">
+              <a:spLocks/>
+            </p:cNvSpPr>
+            <p:nvPr/>
+          </p:nvSpPr>
+          <p:spPr>
+            <a:xfrm>
+              <a:off x="10856038" y="2323689"/>
+              <a:ext cx="791307" cy="200055"/>
+            </a:xfrm>
+            <a:prstGeom prst="rect">
+              <a:avLst/>
+            </a:prstGeom>
+            <a:noFill/>
+          </p:spPr>
+          <p:txBody>
+            <a:bodyPr wrap="square">
+              <a:spAutoFit/>
+            </a:bodyPr>
+            <a:lstStyle/>
+            <a:p>
+              <a:pPr algn="ctr"/>
+              <a:r>
+                <a:rPr lang="en-US" sz="709" dirty="0">
+                  <a:solidFill>
+                    <a:srgbClr val="1E40AF"/>
+                  </a:solidFill>
+                  <a:latin typeface="Arial" panose="020B0604020202020204" pitchFamily="34" charset="0"/>
+                  <a:ea typeface="Calibri" pitchFamily="34" charset="-122"/>
+                  <a:cs typeface="Arial" panose="020B0604020202020204" pitchFamily="34" charset="0"/>
+                </a:rPr>
+                <a:t>In Progress</a:t>
+              </a:r>
+              <a:endParaRPr lang="en-US" sz="709" dirty="0">
+                <a:latin typeface="Arial" panose="020B0604020202020204" pitchFamily="34" charset="0"/>
+                <a:cs typeface="Arial" panose="020B0604020202020204" pitchFamily="34" charset="0"/>
+              </a:endParaRPr>
+            </a:p>
+          </p:txBody>
+        </p:sp>
+      </p:grpSp>
+      <p:grpSp>
+        <p:nvGrpSpPr>
+          <p:cNvPr id="115" name="Group 114">
+            <a:extLst>
+              <a:ext uri="{FF2B5EF4-FFF2-40B4-BE49-F238E27FC236}">
+                <a16:creationId xmlns:a16="http://schemas.microsoft.com/office/drawing/2014/main" id="{AC725CFB-E2BB-1987-98C5-AA17217EBC60}"/>
+              </a:ext>
+            </a:extLst>
+          </p:cNvPr>
+          <p:cNvGrpSpPr/>
+          <p:nvPr/>
+        </p:nvGrpSpPr>
+        <p:grpSpPr>
+          <a:xfrm>
+            <a:off x="10982482" y="4929819"/>
+            <a:ext cx="801198" cy="203683"/>
+            <a:chOff x="10856038" y="2322576"/>
+            <a:chExt cx="791307" cy="201168"/>
+          </a:xfrm>
+        </p:grpSpPr>
+        <p:sp>
+          <p:nvSpPr>
+            <p:cNvPr id="116" name="Shape 43">
+              <a:extLst>
+                <a:ext uri="{FF2B5EF4-FFF2-40B4-BE49-F238E27FC236}">
+                  <a16:creationId xmlns:a16="http://schemas.microsoft.com/office/drawing/2014/main" id="{A27F82EA-0C5F-BD0B-BBC9-D8FA56463754}"/>
+                </a:ext>
+              </a:extLst>
+            </p:cNvPr>
+            <p:cNvSpPr>
+              <a:spLocks/>
+            </p:cNvSpPr>
+            <p:nvPr/>
+          </p:nvSpPr>
+          <p:spPr>
+            <a:xfrm>
+              <a:off x="10981944" y="2322576"/>
+              <a:ext cx="539496" cy="201168"/>
+            </a:xfrm>
+            <a:prstGeom prst="roundRect">
+              <a:avLst>
+                <a:gd name="adj" fmla="val 22727"/>
+              </a:avLst>
+            </a:prstGeom>
+            <a:solidFill>
+              <a:srgbClr val="DBEAFE"/>
+            </a:solidFill>
+            <a:ln w="12700">
+              <a:solidFill>
+                <a:srgbClr val="DBEAFE"/>
+              </a:solidFill>
+              <a:prstDash val="solid"/>
+            </a:ln>
+          </p:spPr>
+          <p:txBody>
+            <a:bodyPr/>
+            <a:lstStyle/>
+            <a:p>
+              <a:endParaRPr lang="en-US" sz="1823">
+                <a:latin typeface="Arial" panose="020B0604020202020204" pitchFamily="34" charset="0"/>
+                <a:cs typeface="Arial" panose="020B0604020202020204" pitchFamily="34" charset="0"/>
+              </a:endParaRPr>
+            </a:p>
+          </p:txBody>
+        </p:sp>
+        <p:sp>
+          <p:nvSpPr>
+            <p:cNvPr id="117" name="TextBox 116">
+              <a:extLst>
+                <a:ext uri="{FF2B5EF4-FFF2-40B4-BE49-F238E27FC236}">
+                  <a16:creationId xmlns:a16="http://schemas.microsoft.com/office/drawing/2014/main" id="{E7FEE61F-775B-4599-FB15-E01019918FC6}"/>
+                </a:ext>
+              </a:extLst>
+            </p:cNvPr>
+            <p:cNvSpPr txBox="1">
+              <a:spLocks/>
+            </p:cNvSpPr>
+            <p:nvPr/>
+          </p:nvSpPr>
+          <p:spPr>
+            <a:xfrm>
+              <a:off x="10856038" y="2323689"/>
+              <a:ext cx="791307" cy="200055"/>
+            </a:xfrm>
+            <a:prstGeom prst="rect">
+              <a:avLst/>
+            </a:prstGeom>
+            <a:noFill/>
+          </p:spPr>
+          <p:txBody>
+            <a:bodyPr wrap="square">
+              <a:spAutoFit/>
+            </a:bodyPr>
+            <a:lstStyle/>
+            <a:p>
+              <a:pPr algn="ctr"/>
+              <a:r>
+                <a:rPr lang="en-US" sz="709" dirty="0">
+                  <a:solidFill>
+                    <a:srgbClr val="1E40AF"/>
+                  </a:solidFill>
+                  <a:latin typeface="Arial" panose="020B0604020202020204" pitchFamily="34" charset="0"/>
+                  <a:ea typeface="Calibri" pitchFamily="34" charset="-122"/>
+                  <a:cs typeface="Arial" panose="020B0604020202020204" pitchFamily="34" charset="0"/>
+                </a:rPr>
+                <a:t>In Progress</a:t>
+              </a:r>
+              <a:endParaRPr lang="en-US" sz="709" dirty="0">
+                <a:latin typeface="Arial" panose="020B0604020202020204" pitchFamily="34" charset="0"/>
+                <a:cs typeface="Arial" panose="020B0604020202020204" pitchFamily="34" charset="0"/>
+              </a:endParaRPr>
+            </a:p>
+          </p:txBody>
+        </p:sp>
+      </p:grpSp>
+      <p:grpSp>
+        <p:nvGrpSpPr>
+          <p:cNvPr id="118" name="Group 117">
+            <a:extLst>
+              <a:ext uri="{FF2B5EF4-FFF2-40B4-BE49-F238E27FC236}">
+                <a16:creationId xmlns:a16="http://schemas.microsoft.com/office/drawing/2014/main" id="{A0092163-86E7-960A-C9A0-8778F154B24D}"/>
+              </a:ext>
+            </a:extLst>
+          </p:cNvPr>
+          <p:cNvGrpSpPr/>
+          <p:nvPr/>
+        </p:nvGrpSpPr>
+        <p:grpSpPr>
+          <a:xfrm>
+            <a:off x="10982482" y="5608422"/>
+            <a:ext cx="801198" cy="203683"/>
+            <a:chOff x="10856038" y="2322576"/>
+            <a:chExt cx="791307" cy="201168"/>
+          </a:xfrm>
+        </p:grpSpPr>
+        <p:sp>
+          <p:nvSpPr>
+            <p:cNvPr id="119" name="Shape 43">
+              <a:extLst>
+                <a:ext uri="{FF2B5EF4-FFF2-40B4-BE49-F238E27FC236}">
+                  <a16:creationId xmlns:a16="http://schemas.microsoft.com/office/drawing/2014/main" id="{3E931F12-F74C-56A4-D2C5-EB39C66423EE}"/>
+                </a:ext>
+              </a:extLst>
+            </p:cNvPr>
+            <p:cNvSpPr>
+              <a:spLocks/>
+            </p:cNvSpPr>
+            <p:nvPr/>
+          </p:nvSpPr>
+          <p:spPr>
+            <a:xfrm>
+              <a:off x="10981944" y="2322576"/>
+              <a:ext cx="539496" cy="201168"/>
+            </a:xfrm>
+            <a:prstGeom prst="roundRect">
+              <a:avLst>
+                <a:gd name="adj" fmla="val 22727"/>
+              </a:avLst>
+            </a:prstGeom>
+            <a:solidFill>
+              <a:srgbClr val="DBEAFE"/>
+            </a:solidFill>
+            <a:ln w="12700">
+              <a:solidFill>
+                <a:srgbClr val="DBEAFE"/>
+              </a:solidFill>
+              <a:prstDash val="solid"/>
+            </a:ln>
+          </p:spPr>
+          <p:txBody>
+            <a:bodyPr/>
+            <a:lstStyle/>
+            <a:p>
+              <a:endParaRPr lang="en-US" sz="1823">
+                <a:latin typeface="Arial" panose="020B0604020202020204" pitchFamily="34" charset="0"/>
+                <a:cs typeface="Arial" panose="020B0604020202020204" pitchFamily="34" charset="0"/>
+              </a:endParaRPr>
+            </a:p>
+          </p:txBody>
+        </p:sp>
+        <p:sp>
+          <p:nvSpPr>
+            <p:cNvPr id="120" name="TextBox 119">
+              <a:extLst>
+                <a:ext uri="{FF2B5EF4-FFF2-40B4-BE49-F238E27FC236}">
+                  <a16:creationId xmlns:a16="http://schemas.microsoft.com/office/drawing/2014/main" id="{A9B8DA65-C185-45B6-8927-7535FF712057}"/>
+                </a:ext>
+              </a:extLst>
+            </p:cNvPr>
+            <p:cNvSpPr txBox="1">
+              <a:spLocks/>
+            </p:cNvSpPr>
+            <p:nvPr/>
+          </p:nvSpPr>
+          <p:spPr>
+            <a:xfrm>
+              <a:off x="10856038" y="2323689"/>
+              <a:ext cx="791307" cy="200055"/>
+            </a:xfrm>
+            <a:prstGeom prst="rect">
+              <a:avLst/>
+            </a:prstGeom>
+            <a:noFill/>
+          </p:spPr>
+          <p:txBody>
+            <a:bodyPr wrap="square">
+              <a:spAutoFit/>
+            </a:bodyPr>
+            <a:lstStyle/>
+            <a:p>
+              <a:pPr algn="ctr"/>
+              <a:r>
+                <a:rPr lang="en-US" sz="709" dirty="0">
+                  <a:solidFill>
+                    <a:srgbClr val="1E40AF"/>
+                  </a:solidFill>
+                  <a:latin typeface="Arial" panose="020B0604020202020204" pitchFamily="34" charset="0"/>
+                  <a:ea typeface="Calibri" pitchFamily="34" charset="-122"/>
+                  <a:cs typeface="Arial" panose="020B0604020202020204" pitchFamily="34" charset="0"/>
+                </a:rPr>
+                <a:t>In Progress</a:t>
+              </a:r>
+              <a:endParaRPr lang="en-US" sz="709" dirty="0">
+                <a:latin typeface="Arial" panose="020B0604020202020204" pitchFamily="34" charset="0"/>
+                <a:cs typeface="Arial" panose="020B0604020202020204" pitchFamily="34" charset="0"/>
+              </a:endParaRPr>
+            </a:p>
+          </p:txBody>
+        </p:sp>
+      </p:grpSp>
+      <p:sp>
+        <p:nvSpPr>
+          <p:cNvPr id="125" name="Shape 43">
+            <a:extLst>
+              <a:ext uri="{FF2B5EF4-FFF2-40B4-BE49-F238E27FC236}">
+                <a16:creationId xmlns:a16="http://schemas.microsoft.com/office/drawing/2014/main" id="{70B9B545-80CC-0E6D-F585-2F36A41678ED}"/>
+              </a:ext>
+            </a:extLst>
+          </p:cNvPr>
+          <p:cNvSpPr>
+            <a:spLocks/>
+          </p:cNvSpPr>
+          <p:nvPr/>
+        </p:nvSpPr>
+        <p:spPr>
+          <a:xfrm>
+            <a:off x="11019514" y="6234493"/>
+            <a:ext cx="546240" cy="203683"/>
+          </a:xfrm>
+          <a:prstGeom prst="roundRect">
+            <a:avLst>
+              <a:gd name="adj" fmla="val 22727"/>
+            </a:avLst>
+          </a:prstGeom>
+          <a:solidFill>
+            <a:srgbClr val="DBEAFE"/>
+          </a:solidFill>
+          <a:ln w="12700">
+            <a:solidFill>
+              <a:srgbClr val="DBEAFE"/>
+            </a:solidFill>
+            <a:prstDash val="solid"/>
+          </a:ln>
+        </p:spPr>
+        <p:txBody>
+          <a:bodyPr/>
+          <a:lstStyle/>
+          <a:p>
+            <a:endParaRPr lang="en-US" sz="1823">
+              <a:latin typeface="Arial" panose="020B0604020202020204" pitchFamily="34" charset="0"/>
+              <a:cs typeface="Arial" panose="020B0604020202020204" pitchFamily="34" charset="0"/>
+            </a:endParaRPr>
+          </a:p>
+        </p:txBody>
+      </p:sp>
+      <p:sp>
+        <p:nvSpPr>
+          <p:cNvPr id="126" name="TextBox 125">
+            <a:extLst>
+              <a:ext uri="{FF2B5EF4-FFF2-40B4-BE49-F238E27FC236}">
+                <a16:creationId xmlns:a16="http://schemas.microsoft.com/office/drawing/2014/main" id="{208AB665-5043-8C17-8A24-D0F9AA78D960}"/>
+              </a:ext>
+            </a:extLst>
+          </p:cNvPr>
+          <p:cNvSpPr txBox="1">
+            <a:spLocks/>
+          </p:cNvSpPr>
+          <p:nvPr/>
+        </p:nvSpPr>
+        <p:spPr>
+          <a:xfrm>
+            <a:off x="11019515" y="6235621"/>
+            <a:ext cx="673719" cy="202556"/>
+          </a:xfrm>
+          <a:prstGeom prst="rect">
+            <a:avLst/>
+          </a:prstGeom>
+          <a:solidFill>
+            <a:schemeClr val="bg2"/>
+          </a:solidFill>
+        </p:spPr>
+        <p:txBody>
+          <a:bodyPr wrap="square">
+            <a:spAutoFit/>
+          </a:bodyPr>
+          <a:lstStyle/>
+          <a:p>
+            <a:pPr algn="ctr"/>
+            <a:r>
+              <a:rPr lang="en-US" sz="709" dirty="0">
+                <a:latin typeface="Arial" panose="020B0604020202020204" pitchFamily="34" charset="0"/>
+                <a:ea typeface="Calibri" pitchFamily="34" charset="-122"/>
+                <a:cs typeface="Arial" panose="020B0604020202020204" pitchFamily="34" charset="0"/>
+              </a:rPr>
+              <a:t>Not Started</a:t>
+            </a:r>
+            <a:endParaRPr lang="en-US" sz="709" dirty="0">
+              <a:latin typeface="Arial" panose="020B0604020202020204" pitchFamily="34" charset="0"/>
+              <a:cs typeface="Arial" panose="020B0604020202020204" pitchFamily="34" charset="0"/>
+            </a:endParaRPr>
+          </a:p>
+        </p:txBody>
+      </p:sp>
+      <p:sp>
+        <p:nvSpPr>
+          <p:cNvPr id="127" name="Text 32">
+            <a:extLst>
+              <a:ext uri="{FF2B5EF4-FFF2-40B4-BE49-F238E27FC236}">
+                <a16:creationId xmlns:a16="http://schemas.microsoft.com/office/drawing/2014/main" id="{D21BB0C2-6D45-5F5A-614E-271EE8B66909}"/>
+              </a:ext>
+            </a:extLst>
+          </p:cNvPr>
+          <p:cNvSpPr/>
+          <p:nvPr/>
+        </p:nvSpPr>
+        <p:spPr>
+          <a:xfrm>
+            <a:off x="5996875" y="1559052"/>
+            <a:ext cx="601790" cy="685114"/>
+          </a:xfrm>
+          <a:prstGeom prst="rect">
+            <a:avLst/>
+          </a:prstGeom>
+          <a:noFill/>
+          <a:ln/>
+        </p:spPr>
+        <p:txBody>
+          <a:bodyPr wrap="square" lIns="0" tIns="0" rIns="0" bIns="0" rtlCol="0" anchor="ctr"/>
+          <a:lstStyle/>
+          <a:p>
+            <a:r>
+              <a:rPr lang="en-US" sz="911" dirty="0">
+                <a:latin typeface="Arial" panose="020B0604020202020204" pitchFamily="34" charset="0"/>
+                <a:cs typeface="Arial" panose="020B0604020202020204" pitchFamily="34" charset="0"/>
+              </a:rPr>
+              <a:t>New Mobile </a:t>
+            </a:r>
+          </a:p>
+          <a:p>
+            <a:r>
+              <a:rPr lang="en-US" sz="911" dirty="0">
+                <a:latin typeface="Arial" panose="020B0604020202020204" pitchFamily="34" charset="0"/>
+                <a:cs typeface="Arial" panose="020B0604020202020204" pitchFamily="34" charset="0"/>
+              </a:rPr>
+              <a:t>App</a:t>
+            </a:r>
+          </a:p>
+        </p:txBody>
+      </p:sp>
+      <p:sp>
+        <p:nvSpPr>
+          <p:cNvPr id="129" name="Shape 50">
+            <a:extLst>
+              <a:ext uri="{FF2B5EF4-FFF2-40B4-BE49-F238E27FC236}">
+                <a16:creationId xmlns:a16="http://schemas.microsoft.com/office/drawing/2014/main" id="{5C9D865E-DD60-768F-2585-A56B029EF495}"/>
+              </a:ext>
+            </a:extLst>
+          </p:cNvPr>
+          <p:cNvSpPr/>
+          <p:nvPr/>
+        </p:nvSpPr>
+        <p:spPr>
+          <a:xfrm>
+            <a:off x="5117088" y="1685782"/>
+            <a:ext cx="687866" cy="262736"/>
+          </a:xfrm>
+          <a:prstGeom prst="roundRect">
+            <a:avLst>
+              <a:gd name="adj" fmla="val 18182"/>
+            </a:avLst>
+          </a:prstGeom>
+          <a:solidFill>
+            <a:srgbClr val="D1FAE5"/>
+          </a:solidFill>
+          <a:ln w="12700">
+            <a:solidFill>
+              <a:srgbClr val="D1FAE5"/>
+            </a:solidFill>
+            <a:prstDash val="solid"/>
+          </a:ln>
+        </p:spPr>
+        <p:txBody>
+          <a:bodyPr/>
+          <a:lstStyle/>
+          <a:p>
+            <a:r>
+              <a:rPr lang="en-US" sz="700" dirty="0"/>
+              <a:t>Contracted</a:t>
+            </a:r>
+          </a:p>
+        </p:txBody>
+      </p:sp>
+      <p:grpSp>
+        <p:nvGrpSpPr>
+          <p:cNvPr id="130" name="Group 129">
+            <a:extLst>
+              <a:ext uri="{FF2B5EF4-FFF2-40B4-BE49-F238E27FC236}">
+                <a16:creationId xmlns:a16="http://schemas.microsoft.com/office/drawing/2014/main" id="{4132CF53-7D6D-7E08-1092-56FA9E76348C}"/>
+              </a:ext>
+            </a:extLst>
+          </p:cNvPr>
+          <p:cNvGrpSpPr/>
+          <p:nvPr/>
+        </p:nvGrpSpPr>
+        <p:grpSpPr>
+          <a:xfrm>
+            <a:off x="11019515" y="1806107"/>
+            <a:ext cx="801198" cy="203683"/>
+            <a:chOff x="10856038" y="2322576"/>
+            <a:chExt cx="791307" cy="201168"/>
+          </a:xfrm>
+        </p:grpSpPr>
+        <p:sp>
+          <p:nvSpPr>
+            <p:cNvPr id="131" name="Shape 43">
+              <a:extLst>
+                <a:ext uri="{FF2B5EF4-FFF2-40B4-BE49-F238E27FC236}">
+                  <a16:creationId xmlns:a16="http://schemas.microsoft.com/office/drawing/2014/main" id="{0E44B3C3-60B3-80E9-04F9-A275A1BFE415}"/>
+                </a:ext>
+              </a:extLst>
+            </p:cNvPr>
+            <p:cNvSpPr>
+              <a:spLocks/>
+            </p:cNvSpPr>
+            <p:nvPr/>
+          </p:nvSpPr>
+          <p:spPr>
+            <a:xfrm>
+              <a:off x="10981944" y="2322576"/>
+              <a:ext cx="539496" cy="201168"/>
+            </a:xfrm>
+            <a:prstGeom prst="roundRect">
+              <a:avLst>
+                <a:gd name="adj" fmla="val 22727"/>
+              </a:avLst>
+            </a:prstGeom>
+            <a:solidFill>
+              <a:srgbClr val="DBEAFE"/>
+            </a:solidFill>
+            <a:ln w="12700">
+              <a:solidFill>
+                <a:srgbClr val="DBEAFE"/>
+              </a:solidFill>
+              <a:prstDash val="solid"/>
+            </a:ln>
+          </p:spPr>
+          <p:txBody>
+            <a:bodyPr/>
+            <a:lstStyle/>
+            <a:p>
+              <a:endParaRPr lang="en-US" sz="1823">
+                <a:latin typeface="Arial" panose="020B0604020202020204" pitchFamily="34" charset="0"/>
+                <a:cs typeface="Arial" panose="020B0604020202020204" pitchFamily="34" charset="0"/>
+              </a:endParaRPr>
+            </a:p>
+          </p:txBody>
+        </p:sp>
+        <p:sp>
+          <p:nvSpPr>
+            <p:cNvPr id="132" name="TextBox 131">
+              <a:extLst>
+                <a:ext uri="{FF2B5EF4-FFF2-40B4-BE49-F238E27FC236}">
+                  <a16:creationId xmlns:a16="http://schemas.microsoft.com/office/drawing/2014/main" id="{80E17D4F-E6D0-4B16-F927-AAF566C2F60F}"/>
+                </a:ext>
+              </a:extLst>
+            </p:cNvPr>
+            <p:cNvSpPr txBox="1">
+              <a:spLocks/>
+            </p:cNvSpPr>
+            <p:nvPr/>
+          </p:nvSpPr>
+          <p:spPr>
+            <a:xfrm>
+              <a:off x="10856038" y="2323689"/>
+              <a:ext cx="791307" cy="200055"/>
+            </a:xfrm>
+            <a:prstGeom prst="rect">
+              <a:avLst/>
+            </a:prstGeom>
+            <a:noFill/>
+          </p:spPr>
+          <p:txBody>
+            <a:bodyPr wrap="square">
+              <a:spAutoFit/>
+            </a:bodyPr>
+            <a:lstStyle/>
+            <a:p>
+              <a:pPr algn="ctr"/>
+              <a:r>
+                <a:rPr lang="en-US" sz="709" b="1" dirty="0">
+                  <a:solidFill>
+                    <a:srgbClr val="1E40AF"/>
+                  </a:solidFill>
+                  <a:latin typeface="Arial" panose="020B0604020202020204" pitchFamily="34" charset="0"/>
+                  <a:ea typeface="Calibri" pitchFamily="34" charset="-122"/>
+                  <a:cs typeface="Arial" panose="020B0604020202020204" pitchFamily="34" charset="0"/>
+                </a:rPr>
+                <a:t>In Progress</a:t>
+              </a:r>
+              <a:endParaRPr lang="en-US" sz="709" dirty="0">
+                <a:latin typeface="Arial" panose="020B0604020202020204" pitchFamily="34" charset="0"/>
+                <a:cs typeface="Arial" panose="020B0604020202020204" pitchFamily="34" charset="0"/>
+              </a:endParaRPr>
+            </a:p>
+          </p:txBody>
+        </p:sp>
+      </p:grpSp>
+      <p:grpSp>
+        <p:nvGrpSpPr>
+          <p:cNvPr id="133" name="Group 132">
+            <a:extLst>
+              <a:ext uri="{FF2B5EF4-FFF2-40B4-BE49-F238E27FC236}">
+                <a16:creationId xmlns:a16="http://schemas.microsoft.com/office/drawing/2014/main" id="{042E70DA-F2F8-0889-73F8-F772A6AD5209}"/>
+              </a:ext>
+            </a:extLst>
+          </p:cNvPr>
+          <p:cNvGrpSpPr/>
+          <p:nvPr/>
+        </p:nvGrpSpPr>
+        <p:grpSpPr>
+          <a:xfrm>
+            <a:off x="11012393" y="1197193"/>
+            <a:ext cx="801198" cy="203683"/>
+            <a:chOff x="10856038" y="2322576"/>
+            <a:chExt cx="791307" cy="201168"/>
+          </a:xfrm>
+        </p:grpSpPr>
+        <p:sp>
+          <p:nvSpPr>
+            <p:cNvPr id="134" name="Shape 43">
+              <a:extLst>
+                <a:ext uri="{FF2B5EF4-FFF2-40B4-BE49-F238E27FC236}">
+                  <a16:creationId xmlns:a16="http://schemas.microsoft.com/office/drawing/2014/main" id="{A84D8951-A161-C449-5C26-88BA18CAA4B2}"/>
+                </a:ext>
+              </a:extLst>
+            </p:cNvPr>
+            <p:cNvSpPr>
+              <a:spLocks/>
+            </p:cNvSpPr>
+            <p:nvPr/>
+          </p:nvSpPr>
+          <p:spPr>
+            <a:xfrm>
+              <a:off x="10981944" y="2322576"/>
+              <a:ext cx="539496" cy="201168"/>
+            </a:xfrm>
+            <a:prstGeom prst="roundRect">
+              <a:avLst>
+                <a:gd name="adj" fmla="val 22727"/>
+              </a:avLst>
+            </a:prstGeom>
+            <a:solidFill>
+              <a:srgbClr val="DBEAFE"/>
+            </a:solidFill>
+            <a:ln w="12700">
+              <a:solidFill>
+                <a:srgbClr val="DBEAFE"/>
+              </a:solidFill>
+              <a:prstDash val="solid"/>
+            </a:ln>
+          </p:spPr>
+          <p:txBody>
+            <a:bodyPr/>
+            <a:lstStyle/>
+            <a:p>
+              <a:endParaRPr lang="en-US" sz="1823">
+                <a:latin typeface="Arial" panose="020B0604020202020204" pitchFamily="34" charset="0"/>
+                <a:cs typeface="Arial" panose="020B0604020202020204" pitchFamily="34" charset="0"/>
+              </a:endParaRPr>
+            </a:p>
+          </p:txBody>
+        </p:sp>
+        <p:sp>
+          <p:nvSpPr>
+            <p:cNvPr id="135" name="TextBox 134">
+              <a:extLst>
+                <a:ext uri="{FF2B5EF4-FFF2-40B4-BE49-F238E27FC236}">
+                  <a16:creationId xmlns:a16="http://schemas.microsoft.com/office/drawing/2014/main" id="{2EB2C3A4-C4A6-95F5-034A-C315AD177485}"/>
+                </a:ext>
+              </a:extLst>
+            </p:cNvPr>
+            <p:cNvSpPr txBox="1">
+              <a:spLocks/>
+            </p:cNvSpPr>
+            <p:nvPr/>
+          </p:nvSpPr>
+          <p:spPr>
+            <a:xfrm>
+              <a:off x="10856038" y="2323689"/>
+              <a:ext cx="791307" cy="200055"/>
+            </a:xfrm>
+            <a:prstGeom prst="rect">
+              <a:avLst/>
+            </a:prstGeom>
+            <a:noFill/>
+          </p:spPr>
+          <p:txBody>
+            <a:bodyPr wrap="square">
+              <a:spAutoFit/>
+            </a:bodyPr>
+            <a:lstStyle/>
+            <a:p>
+              <a:pPr algn="ctr"/>
+              <a:r>
+                <a:rPr lang="en-US" sz="709" b="1" dirty="0">
+                  <a:solidFill>
+                    <a:srgbClr val="1E40AF"/>
+                  </a:solidFill>
+                  <a:latin typeface="Arial" panose="020B0604020202020204" pitchFamily="34" charset="0"/>
+                  <a:ea typeface="Calibri" pitchFamily="34" charset="-122"/>
+                  <a:cs typeface="Arial" panose="020B0604020202020204" pitchFamily="34" charset="0"/>
+                </a:rPr>
+                <a:t>In Progress</a:t>
+              </a:r>
+              <a:endParaRPr lang="en-US" sz="709" dirty="0">
+                <a:latin typeface="Arial" panose="020B0604020202020204" pitchFamily="34" charset="0"/>
+                <a:cs typeface="Arial" panose="020B0604020202020204" pitchFamily="34" charset="0"/>
+              </a:endParaRPr>
+            </a:p>
+          </p:txBody>
+        </p:sp>
+      </p:grpSp>
+    </p:spTree>
+  </p:cSld>
+  <p:clrMapOvr>
+    <a:masterClrMapping/>
+  </p:clrMapOvr>
+</p:sld>
+</file>
+
+<file path=ppt/slides/slide3.xml><?xml version="1.0" encoding="utf-8"?>
+<p:sld xmlns:a="http://schemas.openxmlformats.org/drawingml/2006/main" xmlns:r="http://schemas.openxmlformats.org/officeDocument/2006/relationships" xmlns:p="http://schemas.openxmlformats.org/presentationml/2006/main">
   <p:cSld name="Slide 1">
     <p:bg>
       <p:bgPr>
@@ -7366,39 +15272,39 @@
         <a:sysClr val="window" lastClr="FFFFFF"/>
       </a:lt1>
       <a:dk2>
-        <a:srgbClr val="44546A"/>
+        <a:srgbClr val="0E2841"/>
       </a:dk2>
       <a:lt2>
-        <a:srgbClr val="E7E6E6"/>
+        <a:srgbClr val="E8E8E8"/>
       </a:lt2>
       <a:accent1>
-        <a:srgbClr val="4472C4"/>
+        <a:srgbClr val="156082"/>
       </a:accent1>
       <a:accent2>
-        <a:srgbClr val="ED7D31"/>
+        <a:srgbClr val="E97132"/>
       </a:accent2>
       <a:accent3>
-        <a:srgbClr val="A5A5A5"/>
+        <a:srgbClr val="196B24"/>
       </a:accent3>
       <a:accent4>
-        <a:srgbClr val="FFC000"/>
+        <a:srgbClr val="0F9ED5"/>
       </a:accent4>
       <a:accent5>
-        <a:srgbClr val="5B9BD5"/>
+        <a:srgbClr val="A02B93"/>
       </a:accent5>
       <a:accent6>
-        <a:srgbClr val="70AD47"/>
+        <a:srgbClr val="4EA72E"/>
       </a:accent6>
       <a:hlink>
-        <a:srgbClr val="0563C1"/>
+        <a:srgbClr val="467886"/>
       </a:hlink>
       <a:folHlink>
-        <a:srgbClr val="954F72"/>
+        <a:srgbClr val="96607D"/>
       </a:folHlink>
     </a:clrScheme>
     <a:fontScheme name="Office">
       <a:majorFont>
-        <a:latin typeface="Calibri Light" panose="020F0302020204030204"/>
+        <a:latin typeface="Aptos Display" panose="02110004020202020204"/>
         <a:ea typeface=""/>
         <a:cs typeface=""/>
         <a:font script="Jpan" typeface="游ゴシック Light"/>
@@ -7450,7 +15356,7 @@
         <a:font script="Tfng" typeface="Ebrima"/>
       </a:majorFont>
       <a:minorFont>
-        <a:latin typeface="Calibri" panose="020F0502020204030204"/>
+        <a:latin typeface="Aptos" panose="02110004020202020204"/>
         <a:ea typeface=""/>
         <a:cs typeface=""/>
         <a:font script="Jpan" typeface="游ゴシック"/>
@@ -7561,13 +15467,6 @@
         </a:gradFill>
       </a:fillStyleLst>
       <a:lnStyleLst>
-        <a:ln w="6350" cap="flat" cmpd="sng" algn="ctr">
-          <a:solidFill>
-            <a:schemeClr val="phClr"/>
-          </a:solidFill>
-          <a:prstDash val="solid"/>
-          <a:miter lim="800000"/>
-        </a:ln>
         <a:ln w="12700" cap="flat" cmpd="sng" algn="ctr">
           <a:solidFill>
             <a:schemeClr val="phClr"/>
@@ -7576,6 +15475,13 @@
           <a:miter lim="800000"/>
         </a:ln>
         <a:ln w="19050" cap="flat" cmpd="sng" algn="ctr">
+          <a:solidFill>
+            <a:schemeClr val="phClr"/>
+          </a:solidFill>
+          <a:prstDash val="solid"/>
+          <a:miter lim="800000"/>
+        </a:ln>
+        <a:ln w="25400" cap="flat" cmpd="sng" algn="ctr">
           <a:solidFill>
             <a:schemeClr val="phClr"/>
           </a:solidFill>
@@ -7640,11 +15546,346 @@
       </a:bgFillStyleLst>
     </a:fmtScheme>
   </a:themeElements>
-  <a:objectDefaults/>
+  <a:objectDefaults>
+    <a:lnDef>
+      <a:spPr/>
+      <a:bodyPr/>
+      <a:lstStyle/>
+      <a:style>
+        <a:lnRef idx="2">
+          <a:schemeClr val="accent1"/>
+        </a:lnRef>
+        <a:fillRef idx="0">
+          <a:schemeClr val="accent1"/>
+        </a:fillRef>
+        <a:effectRef idx="1">
+          <a:schemeClr val="accent1"/>
+        </a:effectRef>
+        <a:fontRef idx="minor">
+          <a:schemeClr val="tx1"/>
+        </a:fontRef>
+      </a:style>
+    </a:lnDef>
+  </a:objectDefaults>
   <a:extraClrSchemeLst/>
   <a:extLst>
     <a:ext uri="{05A4C25C-085E-4340-85A3-A5531E510DB2}">
-      <thm15:themeFamily xmlns:thm15="http://schemas.microsoft.com/office/thememl/2012/main" name="Office Theme" id="{62F939B6-93AF-4DB8-9C6B-D6C7DFDC589F}" vid="{4A3C46E8-61CC-4603-A589-7422A47A8E4A}"/>
+      <thm15:themeFamily xmlns:thm15="http://schemas.microsoft.com/office/thememl/2012/main" name="Office Theme" id="{2E142A2C-CD16-42D6-873A-C26D2A0506FA}" vid="{1BDDFF52-6CD6-40A5-AB3C-68EB2F1E4D0A}"/>
+    </a:ext>
+  </a:extLst>
+</a:theme>
+</file>
+
+<file path=ppt/theme/theme2.xml><?xml version="1.0" encoding="utf-8"?>
+<a:theme xmlns:a="http://schemas.openxmlformats.org/drawingml/2006/main" name="Office Theme">
+  <a:themeElements>
+    <a:clrScheme name="Office">
+      <a:dk1>
+        <a:sysClr val="windowText" lastClr="000000"/>
+      </a:dk1>
+      <a:lt1>
+        <a:sysClr val="window" lastClr="FFFFFF"/>
+      </a:lt1>
+      <a:dk2>
+        <a:srgbClr val="0E2841"/>
+      </a:dk2>
+      <a:lt2>
+        <a:srgbClr val="E8E8E8"/>
+      </a:lt2>
+      <a:accent1>
+        <a:srgbClr val="156082"/>
+      </a:accent1>
+      <a:accent2>
+        <a:srgbClr val="E97132"/>
+      </a:accent2>
+      <a:accent3>
+        <a:srgbClr val="196B24"/>
+      </a:accent3>
+      <a:accent4>
+        <a:srgbClr val="0F9ED5"/>
+      </a:accent4>
+      <a:accent5>
+        <a:srgbClr val="A02B93"/>
+      </a:accent5>
+      <a:accent6>
+        <a:srgbClr val="4EA72E"/>
+      </a:accent6>
+      <a:hlink>
+        <a:srgbClr val="467886"/>
+      </a:hlink>
+      <a:folHlink>
+        <a:srgbClr val="96607D"/>
+      </a:folHlink>
+    </a:clrScheme>
+    <a:fontScheme name="Office">
+      <a:majorFont>
+        <a:latin typeface="Aptos Display" panose="02110004020202020204"/>
+        <a:ea typeface=""/>
+        <a:cs typeface=""/>
+        <a:font script="Jpan" typeface="游ゴシック Light"/>
+        <a:font script="Hang" typeface="맑은 고딕"/>
+        <a:font script="Hans" typeface="等线 Light"/>
+        <a:font script="Hant" typeface="新細明體"/>
+        <a:font script="Arab" typeface="Times New Roman"/>
+        <a:font script="Hebr" typeface="Times New Roman"/>
+        <a:font script="Thai" typeface="Angsana New"/>
+        <a:font script="Ethi" typeface="Nyala"/>
+        <a:font script="Beng" typeface="Vrinda"/>
+        <a:font script="Gujr" typeface="Shruti"/>
+        <a:font script="Khmr" typeface="MoolBoran"/>
+        <a:font script="Knda" typeface="Tunga"/>
+        <a:font script="Guru" typeface="Raavi"/>
+        <a:font script="Cans" typeface="Euphemia"/>
+        <a:font script="Cher" typeface="Plantagenet Cherokee"/>
+        <a:font script="Yiii" typeface="Microsoft Yi Baiti"/>
+        <a:font script="Tibt" typeface="Microsoft Himalaya"/>
+        <a:font script="Thaa" typeface="MV Boli"/>
+        <a:font script="Deva" typeface="Mangal"/>
+        <a:font script="Telu" typeface="Gautami"/>
+        <a:font script="Taml" typeface="Latha"/>
+        <a:font script="Syrc" typeface="Estrangelo Edessa"/>
+        <a:font script="Orya" typeface="Kalinga"/>
+        <a:font script="Mlym" typeface="Kartika"/>
+        <a:font script="Laoo" typeface="DokChampa"/>
+        <a:font script="Sinh" typeface="Iskoola Pota"/>
+        <a:font script="Mong" typeface="Mongolian Baiti"/>
+        <a:font script="Viet" typeface="Times New Roman"/>
+        <a:font script="Uigh" typeface="Microsoft Uighur"/>
+        <a:font script="Geor" typeface="Sylfaen"/>
+        <a:font script="Armn" typeface="Arial"/>
+        <a:font script="Bugi" typeface="Leelawadee UI"/>
+        <a:font script="Bopo" typeface="Microsoft JhengHei"/>
+        <a:font script="Java" typeface="Javanese Text"/>
+        <a:font script="Lisu" typeface="Segoe UI"/>
+        <a:font script="Mymr" typeface="Myanmar Text"/>
+        <a:font script="Nkoo" typeface="Ebrima"/>
+        <a:font script="Olck" typeface="Nirmala UI"/>
+        <a:font script="Osma" typeface="Ebrima"/>
+        <a:font script="Phag" typeface="Phagspa"/>
+        <a:font script="Syrn" typeface="Estrangelo Edessa"/>
+        <a:font script="Syrj" typeface="Estrangelo Edessa"/>
+        <a:font script="Syre" typeface="Estrangelo Edessa"/>
+        <a:font script="Sora" typeface="Nirmala UI"/>
+        <a:font script="Tale" typeface="Microsoft Tai Le"/>
+        <a:font script="Talu" typeface="Microsoft New Tai Lue"/>
+        <a:font script="Tfng" typeface="Ebrima"/>
+      </a:majorFont>
+      <a:minorFont>
+        <a:latin typeface="Aptos" panose="02110004020202020204"/>
+        <a:ea typeface=""/>
+        <a:cs typeface=""/>
+        <a:font script="Jpan" typeface="游ゴシック"/>
+        <a:font script="Hang" typeface="맑은 고딕"/>
+        <a:font script="Hans" typeface="等线"/>
+        <a:font script="Hant" typeface="新細明體"/>
+        <a:font script="Arab" typeface="Arial"/>
+        <a:font script="Hebr" typeface="Arial"/>
+        <a:font script="Thai" typeface="Cordia New"/>
+        <a:font script="Ethi" typeface="Nyala"/>
+        <a:font script="Beng" typeface="Vrinda"/>
+        <a:font script="Gujr" typeface="Shruti"/>
+        <a:font script="Khmr" typeface="DaunPenh"/>
+        <a:font script="Knda" typeface="Tunga"/>
+        <a:font script="Guru" typeface="Raavi"/>
+        <a:font script="Cans" typeface="Euphemia"/>
+        <a:font script="Cher" typeface="Plantagenet Cherokee"/>
+        <a:font script="Yiii" typeface="Microsoft Yi Baiti"/>
+        <a:font script="Tibt" typeface="Microsoft Himalaya"/>
+        <a:font script="Thaa" typeface="MV Boli"/>
+        <a:font script="Deva" typeface="Mangal"/>
+        <a:font script="Telu" typeface="Gautami"/>
+        <a:font script="Taml" typeface="Latha"/>
+        <a:font script="Syrc" typeface="Estrangelo Edessa"/>
+        <a:font script="Orya" typeface="Kalinga"/>
+        <a:font script="Mlym" typeface="Kartika"/>
+        <a:font script="Laoo" typeface="DokChampa"/>
+        <a:font script="Sinh" typeface="Iskoola Pota"/>
+        <a:font script="Mong" typeface="Mongolian Baiti"/>
+        <a:font script="Viet" typeface="Arial"/>
+        <a:font script="Uigh" typeface="Microsoft Uighur"/>
+        <a:font script="Geor" typeface="Sylfaen"/>
+        <a:font script="Armn" typeface="Arial"/>
+        <a:font script="Bugi" typeface="Leelawadee UI"/>
+        <a:font script="Bopo" typeface="Microsoft JhengHei"/>
+        <a:font script="Java" typeface="Javanese Text"/>
+        <a:font script="Lisu" typeface="Segoe UI"/>
+        <a:font script="Mymr" typeface="Myanmar Text"/>
+        <a:font script="Nkoo" typeface="Ebrima"/>
+        <a:font script="Olck" typeface="Nirmala UI"/>
+        <a:font script="Osma" typeface="Ebrima"/>
+        <a:font script="Phag" typeface="Phagspa"/>
+        <a:font script="Syrn" typeface="Estrangelo Edessa"/>
+        <a:font script="Syrj" typeface="Estrangelo Edessa"/>
+        <a:font script="Syre" typeface="Estrangelo Edessa"/>
+        <a:font script="Sora" typeface="Nirmala UI"/>
+        <a:font script="Tale" typeface="Microsoft Tai Le"/>
+        <a:font script="Talu" typeface="Microsoft New Tai Lue"/>
+        <a:font script="Tfng" typeface="Ebrima"/>
+      </a:minorFont>
+    </a:fontScheme>
+    <a:fmtScheme name="Office">
+      <a:fillStyleLst>
+        <a:solidFill>
+          <a:schemeClr val="phClr"/>
+        </a:solidFill>
+        <a:gradFill rotWithShape="1">
+          <a:gsLst>
+            <a:gs pos="0">
+              <a:schemeClr val="phClr">
+                <a:lumMod val="110000"/>
+                <a:satMod val="105000"/>
+                <a:tint val="67000"/>
+              </a:schemeClr>
+            </a:gs>
+            <a:gs pos="50000">
+              <a:schemeClr val="phClr">
+                <a:lumMod val="105000"/>
+                <a:satMod val="103000"/>
+                <a:tint val="73000"/>
+              </a:schemeClr>
+            </a:gs>
+            <a:gs pos="100000">
+              <a:schemeClr val="phClr">
+                <a:lumMod val="105000"/>
+                <a:satMod val="109000"/>
+                <a:tint val="81000"/>
+              </a:schemeClr>
+            </a:gs>
+          </a:gsLst>
+          <a:lin ang="5400000" scaled="0"/>
+        </a:gradFill>
+        <a:gradFill rotWithShape="1">
+          <a:gsLst>
+            <a:gs pos="0">
+              <a:schemeClr val="phClr">
+                <a:satMod val="103000"/>
+                <a:lumMod val="102000"/>
+                <a:tint val="94000"/>
+              </a:schemeClr>
+            </a:gs>
+            <a:gs pos="50000">
+              <a:schemeClr val="phClr">
+                <a:satMod val="110000"/>
+                <a:lumMod val="100000"/>
+                <a:shade val="100000"/>
+              </a:schemeClr>
+            </a:gs>
+            <a:gs pos="100000">
+              <a:schemeClr val="phClr">
+                <a:lumMod val="99000"/>
+                <a:satMod val="120000"/>
+                <a:shade val="78000"/>
+              </a:schemeClr>
+            </a:gs>
+          </a:gsLst>
+          <a:lin ang="5400000" scaled="0"/>
+        </a:gradFill>
+      </a:fillStyleLst>
+      <a:lnStyleLst>
+        <a:ln w="12700" cap="flat" cmpd="sng" algn="ctr">
+          <a:solidFill>
+            <a:schemeClr val="phClr"/>
+          </a:solidFill>
+          <a:prstDash val="solid"/>
+          <a:miter lim="800000"/>
+        </a:ln>
+        <a:ln w="19050" cap="flat" cmpd="sng" algn="ctr">
+          <a:solidFill>
+            <a:schemeClr val="phClr"/>
+          </a:solidFill>
+          <a:prstDash val="solid"/>
+          <a:miter lim="800000"/>
+        </a:ln>
+        <a:ln w="25400" cap="flat" cmpd="sng" algn="ctr">
+          <a:solidFill>
+            <a:schemeClr val="phClr"/>
+          </a:solidFill>
+          <a:prstDash val="solid"/>
+          <a:miter lim="800000"/>
+        </a:ln>
+      </a:lnStyleLst>
+      <a:effectStyleLst>
+        <a:effectStyle>
+          <a:effectLst/>
+        </a:effectStyle>
+        <a:effectStyle>
+          <a:effectLst/>
+        </a:effectStyle>
+        <a:effectStyle>
+          <a:effectLst>
+            <a:outerShdw blurRad="57150" dist="19050" dir="5400000" algn="ctr" rotWithShape="0">
+              <a:srgbClr val="000000">
+                <a:alpha val="63000"/>
+              </a:srgbClr>
+            </a:outerShdw>
+          </a:effectLst>
+        </a:effectStyle>
+      </a:effectStyleLst>
+      <a:bgFillStyleLst>
+        <a:solidFill>
+          <a:schemeClr val="phClr"/>
+        </a:solidFill>
+        <a:solidFill>
+          <a:schemeClr val="phClr">
+            <a:tint val="95000"/>
+            <a:satMod val="170000"/>
+          </a:schemeClr>
+        </a:solidFill>
+        <a:gradFill rotWithShape="1">
+          <a:gsLst>
+            <a:gs pos="0">
+              <a:schemeClr val="phClr">
+                <a:tint val="93000"/>
+                <a:satMod val="150000"/>
+                <a:shade val="98000"/>
+                <a:lumMod val="102000"/>
+              </a:schemeClr>
+            </a:gs>
+            <a:gs pos="50000">
+              <a:schemeClr val="phClr">
+                <a:tint val="98000"/>
+                <a:satMod val="130000"/>
+                <a:shade val="90000"/>
+                <a:lumMod val="103000"/>
+              </a:schemeClr>
+            </a:gs>
+            <a:gs pos="100000">
+              <a:schemeClr val="phClr">
+                <a:shade val="63000"/>
+                <a:satMod val="120000"/>
+              </a:schemeClr>
+            </a:gs>
+          </a:gsLst>
+          <a:lin ang="5400000" scaled="0"/>
+        </a:gradFill>
+      </a:bgFillStyleLst>
+    </a:fmtScheme>
+  </a:themeElements>
+  <a:objectDefaults>
+    <a:lnDef>
+      <a:spPr/>
+      <a:bodyPr/>
+      <a:lstStyle/>
+      <a:style>
+        <a:lnRef idx="2">
+          <a:schemeClr val="accent1"/>
+        </a:lnRef>
+        <a:fillRef idx="0">
+          <a:schemeClr val="accent1"/>
+        </a:fillRef>
+        <a:effectRef idx="1">
+          <a:schemeClr val="accent1"/>
+        </a:effectRef>
+        <a:fontRef idx="minor">
+          <a:schemeClr val="tx1"/>
+        </a:fontRef>
+      </a:style>
+    </a:lnDef>
+  </a:objectDefaults>
+  <a:extraClrSchemeLst/>
+  <a:extLst>
+    <a:ext uri="{05A4C25C-085E-4340-85A3-A5531E510DB2}">
+      <thm15:themeFamily xmlns:thm15="http://schemas.microsoft.com/office/thememl/2012/main" name="Office Theme" id="{2E142A2C-CD16-42D6-873A-C26D2A0506FA}" vid="{1BDDFF52-6CD6-40A5-AB3C-68EB2F1E4D0A}"/>
     </a:ext>
   </a:extLst>
 </a:theme>

--- a/SABR_CPR_Component_Status.pptx
+++ b/SABR_CPR_Component_Status.pptx
@@ -6549,7 +6549,7 @@
         <p:spPr>
           <a:xfrm>
             <a:off x="92583" y="4018674"/>
-            <a:ext cx="5740146" cy="2740457"/>
+            <a:ext cx="5740146" cy="3296526"/>
           </a:xfrm>
           <a:prstGeom prst="rect">
             <a:avLst/>
@@ -6929,7 +6929,7 @@
         <p:spPr>
           <a:xfrm>
             <a:off x="101842" y="5845645"/>
-            <a:ext cx="5721629" cy="913486"/>
+            <a:ext cx="5721629" cy="1469555"/>
           </a:xfrm>
           <a:prstGeom prst="rect">
             <a:avLst/>
@@ -6964,7 +6964,7 @@
         <p:spPr>
           <a:xfrm>
             <a:off x="138874" y="5845645"/>
-            <a:ext cx="601790" cy="913486"/>
+            <a:ext cx="601790" cy="1469555"/>
           </a:xfrm>
           <a:prstGeom prst="rect">
             <a:avLst/>
@@ -6995,7 +6995,7 @@
         <p:spPr>
           <a:xfrm>
             <a:off x="759180" y="5845645"/>
-            <a:ext cx="4462501" cy="913486"/>
+            <a:ext cx="4462501" cy="1469555"/>
           </a:xfrm>
           <a:prstGeom prst="rect">
             <a:avLst/>
@@ -7118,7 +7118,7 @@
         <p:spPr>
           <a:xfrm>
             <a:off x="5953087" y="4018674"/>
-            <a:ext cx="5740146" cy="2740457"/>
+            <a:ext cx="5740146" cy="3296526"/>
           </a:xfrm>
           <a:prstGeom prst="rect">
             <a:avLst/>
@@ -7512,7 +7512,7 @@
         <p:spPr>
           <a:xfrm>
             <a:off x="5999378" y="6074016"/>
-            <a:ext cx="601790" cy="685114"/>
+            <a:ext cx="601790" cy="1241183"/>
           </a:xfrm>
           <a:prstGeom prst="rect">
             <a:avLst/>
@@ -7551,7 +7551,7 @@
         <p:spPr>
           <a:xfrm>
             <a:off x="6619684" y="6074016"/>
-            <a:ext cx="4462501" cy="685114"/>
+            <a:ext cx="4462501" cy="1241183"/>
           </a:xfrm>
           <a:prstGeom prst="rect">
             <a:avLst/>
@@ -8790,17 +8790,17 @@
         <p:spPr>
           <a:xfrm>
             <a:off x="0" y="0"/>
-            <a:ext cx="12188952" cy="457200"/>
+            <a:ext cx="12344400" cy="457200"/>
           </a:xfrm>
           <a:prstGeom prst="rect">
             <a:avLst/>
           </a:prstGeom>
           <a:solidFill>
-            <a:srgbClr val="0F6E56"/>
+            <a:srgbClr val="8ED973"/>
           </a:solidFill>
           <a:ln w="12700">
             <a:solidFill>
-              <a:srgbClr val="0F6E56"/>
+              <a:srgbClr val="8ED973"/>
             </a:solidFill>
             <a:prstDash val="solid"/>
           </a:ln>
@@ -8833,7 +8833,7 @@
             <a:r>
               <a:rPr lang="en-US" sz="1600" b="1" dirty="0">
                 <a:solidFill>
-                  <a:srgbClr val="FFFFFF"/>
+                  <a:srgbClr val="000000"/>
                 </a:solidFill>
               </a:rPr>
               <a:t>Project SABR</a:t>
@@ -8869,7 +8869,7 @@
             <a:r>
               <a:rPr lang="en-US" sz="1100" dirty="0">
                 <a:solidFill>
-                  <a:srgbClr val="A7D7C5"/>
+                  <a:srgbClr val="388849"/>
                 </a:solidFill>
               </a:rPr>
               <a:t>CPR  ·  Jul 6, 2026</a:t>
@@ -8887,7 +8887,7 @@
         <p:spPr>
           <a:xfrm>
             <a:off x="0" y="457200"/>
-            <a:ext cx="12188952" cy="347472"/>
+            <a:ext cx="12344400" cy="347472"/>
           </a:xfrm>
           <a:prstGeom prst="rect">
             <a:avLst/>
@@ -9023,7 +9023,7 @@
                   <a:srgbClr val="1D4ED8"/>
                 </a:solidFill>
               </a:rPr>
-              <a:t>13  In Progress</a:t>
+              <a:t>15  In Progress</a:t>
             </a:r>
             <a:endParaRPr lang="en-US" sz="900" dirty="0"/>
           </a:p>
@@ -9086,7 +9086,7 @@
                   <a:srgbClr val="374151"/>
                 </a:solidFill>
               </a:rPr>
-              <a:t>20  Not Started</a:t>
+              <a:t>18  Not Started</a:t>
             </a:r>
             <a:endParaRPr lang="en-US" sz="900" dirty="0"/>
           </a:p>
@@ -9226,8 +9226,8 @@
         </p:nvSpPr>
         <p:spPr>
           <a:xfrm>
-            <a:off x="0" y="6419088"/>
-            <a:ext cx="12188952" cy="438912"/>
+            <a:off x="0" y="6876288"/>
+            <a:ext cx="12344400" cy="438912"/>
           </a:xfrm>
           <a:prstGeom prst="rect">
             <a:avLst/>
@@ -9251,7 +9251,7 @@
         </p:nvSpPr>
         <p:spPr>
           <a:xfrm>
-            <a:off x="201168" y="6419088"/>
+            <a:off x="201168" y="6876288"/>
             <a:ext cx="5029200" cy="438912"/>
           </a:xfrm>
           <a:prstGeom prst="rect">
@@ -9287,7 +9287,7 @@
         </p:nvSpPr>
         <p:spPr>
           <a:xfrm>
-            <a:off x="5486400" y="6419088"/>
+            <a:off x="5486400" y="6876288"/>
             <a:ext cx="4572000" cy="438912"/>
           </a:xfrm>
           <a:prstGeom prst="rect">
@@ -9323,7 +9323,7 @@
         </p:nvSpPr>
         <p:spPr>
           <a:xfrm>
-            <a:off x="10515600" y="6419088"/>
+            <a:off x="10515600" y="6876288"/>
             <a:ext cx="1508760" cy="438912"/>
           </a:xfrm>
           <a:prstGeom prst="rect">
@@ -9342,7 +9342,7 @@
             <a:r>
               <a:rPr lang="en-US" sz="1100" b="1" dirty="0">
                 <a:solidFill>
-                  <a:srgbClr val="0F6E56"/>
+                  <a:srgbClr val="388849"/>
                 </a:solidFill>
               </a:rPr>
               <a:t>0% Ready</a:t>
@@ -9360,7 +9360,7 @@
         <p:spPr>
           <a:xfrm>
             <a:off x="164592" y="804672"/>
-            <a:ext cx="9116568" cy="1078992"/>
+            <a:ext cx="9116568" cy="1170432"/>
           </a:xfrm>
           <a:prstGeom prst="rect">
             <a:avLst/>
@@ -9385,7 +9385,7 @@
         <p:spPr>
           <a:xfrm>
             <a:off x="182880" y="877824"/>
-            <a:ext cx="859536" cy="932688"/>
+            <a:ext cx="859536" cy="1024128"/>
           </a:xfrm>
           <a:prstGeom prst="roundRect">
             <a:avLst>
@@ -9412,7 +9412,7 @@
         <p:spPr>
           <a:xfrm>
             <a:off x="182880" y="877824"/>
-            <a:ext cx="859536" cy="932688"/>
+            <a:ext cx="859536" cy="1024128"/>
           </a:xfrm>
           <a:prstGeom prst="rect">
             <a:avLst/>
@@ -10365,8 +10365,8 @@
         </p:nvSpPr>
         <p:spPr>
           <a:xfrm>
-            <a:off x="164592" y="1938528"/>
-            <a:ext cx="9116568" cy="1078992"/>
+            <a:off x="164592" y="2029968"/>
+            <a:ext cx="9116568" cy="1170432"/>
           </a:xfrm>
           <a:prstGeom prst="rect">
             <a:avLst/>
@@ -10390,8 +10390,8 @@
         </p:nvSpPr>
         <p:spPr>
           <a:xfrm>
-            <a:off x="182880" y="2011680"/>
-            <a:ext cx="859536" cy="932688"/>
+            <a:off x="182880" y="2103120"/>
+            <a:ext cx="859536" cy="1024128"/>
           </a:xfrm>
           <a:prstGeom prst="roundRect">
             <a:avLst>
@@ -10417,8 +10417,8 @@
         </p:nvSpPr>
         <p:spPr>
           <a:xfrm>
-            <a:off x="182880" y="2011680"/>
-            <a:ext cx="859536" cy="932688"/>
+            <a:off x="182880" y="2103120"/>
+            <a:ext cx="859536" cy="1024128"/>
           </a:xfrm>
           <a:prstGeom prst="rect">
             <a:avLst/>
@@ -10467,7 +10467,7 @@
         </p:nvSpPr>
         <p:spPr>
           <a:xfrm>
-            <a:off x="1170432" y="1984248"/>
+            <a:off x="1170432" y="2075688"/>
             <a:ext cx="8110728" cy="182880"/>
           </a:xfrm>
           <a:prstGeom prst="rect">
@@ -10489,7 +10489,7 @@
                   <a:srgbClr val="9CA3AF"/>
                 </a:solidFill>
               </a:rPr>
-              <a:t>5 / 7 In Progress</a:t>
+              <a:t>6 / 7 In Progress</a:t>
             </a:r>
             <a:endParaRPr lang="en-US" sz="750" dirty="0"/>
           </a:p>
@@ -10503,7 +10503,7 @@
         </p:nvSpPr>
         <p:spPr>
           <a:xfrm>
-            <a:off x="1170432" y="2203704"/>
+            <a:off x="1170432" y="2295144"/>
             <a:ext cx="932688" cy="182880"/>
           </a:xfrm>
           <a:prstGeom prst="roundRect">
@@ -10530,7 +10530,7 @@
         </p:nvSpPr>
         <p:spPr>
           <a:xfrm>
-            <a:off x="1170432" y="2203704"/>
+            <a:off x="1170432" y="2295144"/>
             <a:ext cx="932688" cy="182880"/>
           </a:xfrm>
           <a:prstGeom prst="rect">
@@ -10566,7 +10566,7 @@
         </p:nvSpPr>
         <p:spPr>
           <a:xfrm>
-            <a:off x="1170432" y="2414016"/>
+            <a:off x="1170432" y="2505456"/>
             <a:ext cx="932688" cy="155448"/>
           </a:xfrm>
           <a:prstGeom prst="roundRect">
@@ -10593,7 +10593,7 @@
         </p:nvSpPr>
         <p:spPr>
           <a:xfrm>
-            <a:off x="1170432" y="2414016"/>
+            <a:off x="1170432" y="2505456"/>
             <a:ext cx="932688" cy="155448"/>
           </a:xfrm>
           <a:prstGeom prst="rect">
@@ -10629,7 +10629,7 @@
         </p:nvSpPr>
         <p:spPr>
           <a:xfrm>
-            <a:off x="2185416" y="2203704"/>
+            <a:off x="2185416" y="2295144"/>
             <a:ext cx="932688" cy="182880"/>
           </a:xfrm>
           <a:prstGeom prst="roundRect">
@@ -10656,7 +10656,7 @@
         </p:nvSpPr>
         <p:spPr>
           <a:xfrm>
-            <a:off x="2185416" y="2203704"/>
+            <a:off x="2185416" y="2295144"/>
             <a:ext cx="932688" cy="182880"/>
           </a:xfrm>
           <a:prstGeom prst="rect">
@@ -10692,7 +10692,7 @@
         </p:nvSpPr>
         <p:spPr>
           <a:xfrm>
-            <a:off x="2185416" y="2414016"/>
+            <a:off x="2185416" y="2505456"/>
             <a:ext cx="932688" cy="155448"/>
           </a:xfrm>
           <a:prstGeom prst="roundRect">
@@ -10719,7 +10719,7 @@
         </p:nvSpPr>
         <p:spPr>
           <a:xfrm>
-            <a:off x="2185416" y="2414016"/>
+            <a:off x="2185416" y="2505456"/>
             <a:ext cx="932688" cy="155448"/>
           </a:xfrm>
           <a:prstGeom prst="rect">
@@ -10755,7 +10755,7 @@
         </p:nvSpPr>
         <p:spPr>
           <a:xfrm>
-            <a:off x="3200400" y="2203704"/>
+            <a:off x="3200400" y="2295144"/>
             <a:ext cx="932688" cy="182880"/>
           </a:xfrm>
           <a:prstGeom prst="roundRect">
@@ -10782,7 +10782,7 @@
         </p:nvSpPr>
         <p:spPr>
           <a:xfrm>
-            <a:off x="3200400" y="2203704"/>
+            <a:off x="3200400" y="2295144"/>
             <a:ext cx="932688" cy="182880"/>
           </a:xfrm>
           <a:prstGeom prst="rect">
@@ -10818,7 +10818,7 @@
         </p:nvSpPr>
         <p:spPr>
           <a:xfrm>
-            <a:off x="3200400" y="2414016"/>
+            <a:off x="3200400" y="2505456"/>
             <a:ext cx="932688" cy="155448"/>
           </a:xfrm>
           <a:prstGeom prst="roundRect">
@@ -10845,7 +10845,7 @@
         </p:nvSpPr>
         <p:spPr>
           <a:xfrm>
-            <a:off x="3200400" y="2414016"/>
+            <a:off x="3200400" y="2505456"/>
             <a:ext cx="932688" cy="155448"/>
           </a:xfrm>
           <a:prstGeom prst="rect">
@@ -10881,7 +10881,7 @@
         </p:nvSpPr>
         <p:spPr>
           <a:xfrm>
-            <a:off x="4215384" y="2203704"/>
+            <a:off x="4215384" y="2295144"/>
             <a:ext cx="932688" cy="182880"/>
           </a:xfrm>
           <a:prstGeom prst="roundRect">
@@ -10908,7 +10908,7 @@
         </p:nvSpPr>
         <p:spPr>
           <a:xfrm>
-            <a:off x="4215384" y="2203704"/>
+            <a:off x="4215384" y="2295144"/>
             <a:ext cx="932688" cy="182880"/>
           </a:xfrm>
           <a:prstGeom prst="rect">
@@ -10944,7 +10944,7 @@
         </p:nvSpPr>
         <p:spPr>
           <a:xfrm>
-            <a:off x="4215384" y="2414016"/>
+            <a:off x="4215384" y="2505456"/>
             <a:ext cx="932688" cy="155448"/>
           </a:xfrm>
           <a:prstGeom prst="roundRect">
@@ -10971,7 +10971,7 @@
         </p:nvSpPr>
         <p:spPr>
           <a:xfrm>
-            <a:off x="4215384" y="2414016"/>
+            <a:off x="4215384" y="2505456"/>
             <a:ext cx="932688" cy="155448"/>
           </a:xfrm>
           <a:prstGeom prst="rect">
@@ -11007,7 +11007,7 @@
         </p:nvSpPr>
         <p:spPr>
           <a:xfrm>
-            <a:off x="5230368" y="2203704"/>
+            <a:off x="5230368" y="2295144"/>
             <a:ext cx="932688" cy="182880"/>
           </a:xfrm>
           <a:prstGeom prst="roundRect">
@@ -11034,7 +11034,7 @@
         </p:nvSpPr>
         <p:spPr>
           <a:xfrm>
-            <a:off x="5230368" y="2203704"/>
+            <a:off x="5230368" y="2295144"/>
             <a:ext cx="932688" cy="182880"/>
           </a:xfrm>
           <a:prstGeom prst="rect">
@@ -11070,7 +11070,7 @@
         </p:nvSpPr>
         <p:spPr>
           <a:xfrm>
-            <a:off x="5230368" y="2414016"/>
+            <a:off x="5230368" y="2505456"/>
             <a:ext cx="932688" cy="155448"/>
           </a:xfrm>
           <a:prstGeom prst="roundRect">
@@ -11097,7 +11097,7 @@
         </p:nvSpPr>
         <p:spPr>
           <a:xfrm>
-            <a:off x="5230368" y="2414016"/>
+            <a:off x="5230368" y="2505456"/>
             <a:ext cx="932688" cy="155448"/>
           </a:xfrm>
           <a:prstGeom prst="rect">
@@ -11133,7 +11133,7 @@
         </p:nvSpPr>
         <p:spPr>
           <a:xfrm>
-            <a:off x="6245352" y="2203704"/>
+            <a:off x="6245352" y="2295144"/>
             <a:ext cx="932688" cy="182880"/>
           </a:xfrm>
           <a:prstGeom prst="roundRect">
@@ -11160,7 +11160,7 @@
         </p:nvSpPr>
         <p:spPr>
           <a:xfrm>
-            <a:off x="6245352" y="2203704"/>
+            <a:off x="6245352" y="2295144"/>
             <a:ext cx="932688" cy="182880"/>
           </a:xfrm>
           <a:prstGeom prst="rect">
@@ -11196,7 +11196,7 @@
         </p:nvSpPr>
         <p:spPr>
           <a:xfrm>
-            <a:off x="6245352" y="2414016"/>
+            <a:off x="6245352" y="2505456"/>
             <a:ext cx="932688" cy="155448"/>
           </a:xfrm>
           <a:prstGeom prst="roundRect">
@@ -11223,7 +11223,7 @@
         </p:nvSpPr>
         <p:spPr>
           <a:xfrm>
-            <a:off x="6245352" y="2414016"/>
+            <a:off x="6245352" y="2505456"/>
             <a:ext cx="932688" cy="155448"/>
           </a:xfrm>
           <a:prstGeom prst="rect">
@@ -11259,7 +11259,7 @@
         </p:nvSpPr>
         <p:spPr>
           <a:xfrm>
-            <a:off x="7260336" y="2203704"/>
+            <a:off x="7260336" y="2295144"/>
             <a:ext cx="932688" cy="182880"/>
           </a:xfrm>
           <a:prstGeom prst="roundRect">
@@ -11286,7 +11286,7 @@
         </p:nvSpPr>
         <p:spPr>
           <a:xfrm>
-            <a:off x="7260336" y="2203704"/>
+            <a:off x="7260336" y="2295144"/>
             <a:ext cx="932688" cy="182880"/>
           </a:xfrm>
           <a:prstGeom prst="rect">
@@ -11322,7 +11322,509 @@
         </p:nvSpPr>
         <p:spPr>
           <a:xfrm>
-            <a:off x="7260336" y="2414016"/>
+            <a:off x="7260336" y="2505456"/>
+            <a:ext cx="932688" cy="155448"/>
+          </a:xfrm>
+          <a:prstGeom prst="roundRect">
+            <a:avLst>
+              <a:gd name="adj" fmla="val 17647"/>
+            </a:avLst>
+          </a:prstGeom>
+          <a:solidFill>
+            <a:srgbClr val="1558A8"/>
+          </a:solidFill>
+          <a:ln w="12700">
+            <a:solidFill>
+              <a:srgbClr val="1558A8"/>
+            </a:solidFill>
+            <a:prstDash val="solid"/>
+          </a:ln>
+        </p:spPr>
+      </p:sp>
+      <p:sp>
+        <p:nvSpPr>
+          <p:cNvPr id="83" name="Text 81"/>
+          <p:cNvSpPr/>
+          <p:nvPr/>
+        </p:nvSpPr>
+        <p:spPr>
+          <a:xfrm>
+            <a:off x="7260336" y="2505456"/>
+            <a:ext cx="932688" cy="155448"/>
+          </a:xfrm>
+          <a:prstGeom prst="rect">
+            <a:avLst/>
+          </a:prstGeom>
+          <a:noFill/>
+          <a:ln/>
+        </p:spPr>
+        <p:txBody>
+          <a:bodyPr wrap="square" lIns="0" tIns="0" rIns="0" bIns="0" rtlCol="0" anchor="ctr"/>
+          <a:lstStyle/>
+          <a:p>
+            <a:pPr algn="ctr" indent="0" marL="0">
+              <a:buNone/>
+            </a:pPr>
+            <a:r>
+              <a:rPr lang="en-US" sz="700" dirty="0">
+                <a:solidFill>
+                  <a:srgbClr val="FFFFFF"/>
+                </a:solidFill>
+              </a:rPr>
+              <a:t>In Progress</a:t>
+            </a:r>
+            <a:endParaRPr lang="en-US" sz="700" dirty="0"/>
+          </a:p>
+        </p:txBody>
+      </p:sp>
+      <p:sp>
+        <p:nvSpPr>
+          <p:cNvPr id="84" name="Shape 82"/>
+          <p:cNvSpPr/>
+          <p:nvPr/>
+        </p:nvSpPr>
+        <p:spPr>
+          <a:xfrm>
+            <a:off x="164592" y="3255264"/>
+            <a:ext cx="9116568" cy="1170432"/>
+          </a:xfrm>
+          <a:prstGeom prst="rect">
+            <a:avLst/>
+          </a:prstGeom>
+          <a:solidFill>
+            <a:srgbClr val="FAFBFC"/>
+          </a:solidFill>
+          <a:ln w="6350">
+            <a:solidFill>
+              <a:srgbClr val="E5E7EB"/>
+            </a:solidFill>
+            <a:prstDash val="solid"/>
+          </a:ln>
+        </p:spPr>
+      </p:sp>
+      <p:sp>
+        <p:nvSpPr>
+          <p:cNvPr id="85" name="Shape 83"/>
+          <p:cNvSpPr/>
+          <p:nvPr/>
+        </p:nvSpPr>
+        <p:spPr>
+          <a:xfrm>
+            <a:off x="182880" y="3328416"/>
+            <a:ext cx="859536" cy="1024128"/>
+          </a:xfrm>
+          <a:prstGeom prst="roundRect">
+            <a:avLst>
+              <a:gd name="adj" fmla="val 5319"/>
+            </a:avLst>
+          </a:prstGeom>
+          <a:solidFill>
+            <a:srgbClr val="9CA3AF"/>
+          </a:solidFill>
+          <a:ln w="12700">
+            <a:solidFill>
+              <a:srgbClr val="9CA3AF"/>
+            </a:solidFill>
+            <a:prstDash val="solid"/>
+          </a:ln>
+        </p:spPr>
+      </p:sp>
+      <p:sp>
+        <p:nvSpPr>
+          <p:cNvPr id="86" name="Text 84"/>
+          <p:cNvSpPr/>
+          <p:nvPr/>
+        </p:nvSpPr>
+        <p:spPr>
+          <a:xfrm>
+            <a:off x="182880" y="3328416"/>
+            <a:ext cx="859536" cy="1024128"/>
+          </a:xfrm>
+          <a:prstGeom prst="rect">
+            <a:avLst/>
+          </a:prstGeom>
+          <a:noFill/>
+          <a:ln/>
+        </p:spPr>
+        <p:txBody>
+          <a:bodyPr wrap="square" lIns="0" tIns="0" rIns="0" bIns="0" rtlCol="0" anchor="ctr"/>
+          <a:lstStyle/>
+          <a:p>
+            <a:pPr algn="ctr" indent="0" marL="0">
+              <a:buNone/>
+            </a:pPr>
+            <a:r>
+              <a:rPr lang="en-US" sz="950" b="1" dirty="0">
+                <a:solidFill>
+                  <a:srgbClr val="FFFFFF"/>
+                </a:solidFill>
+              </a:rPr>
+              <a:t>Player</a:t>
+            </a:r>
+            <a:endParaRPr lang="en-US" sz="950" dirty="0"/>
+          </a:p>
+        </p:txBody>
+      </p:sp>
+      <p:sp>
+        <p:nvSpPr>
+          <p:cNvPr id="87" name="Text 85"/>
+          <p:cNvSpPr/>
+          <p:nvPr/>
+        </p:nvSpPr>
+        <p:spPr>
+          <a:xfrm>
+            <a:off x="1170432" y="3300984"/>
+            <a:ext cx="8110728" cy="182880"/>
+          </a:xfrm>
+          <a:prstGeom prst="rect">
+            <a:avLst/>
+          </a:prstGeom>
+          <a:noFill/>
+          <a:ln/>
+        </p:spPr>
+        <p:txBody>
+          <a:bodyPr wrap="square" lIns="0" tIns="0" rIns="0" bIns="0" rtlCol="0" anchor="ctr"/>
+          <a:lstStyle/>
+          <a:p>
+            <a:pPr algn="l" indent="0" marL="0">
+              <a:buNone/>
+            </a:pPr>
+            <a:r>
+              <a:rPr lang="en-US" sz="750" dirty="0">
+                <a:solidFill>
+                  <a:srgbClr val="9CA3AF"/>
+                </a:solidFill>
+              </a:rPr>
+              <a:t>2 / 5 In Progress</a:t>
+            </a:r>
+            <a:endParaRPr lang="en-US" sz="750" dirty="0"/>
+          </a:p>
+        </p:txBody>
+      </p:sp>
+      <p:sp>
+        <p:nvSpPr>
+          <p:cNvPr id="88" name="Shape 86"/>
+          <p:cNvSpPr/>
+          <p:nvPr/>
+        </p:nvSpPr>
+        <p:spPr>
+          <a:xfrm>
+            <a:off x="1170432" y="3520440"/>
+            <a:ext cx="932688" cy="182880"/>
+          </a:xfrm>
+          <a:prstGeom prst="roundRect">
+            <a:avLst>
+              <a:gd name="adj" fmla="val 15000"/>
+            </a:avLst>
+          </a:prstGeom>
+          <a:solidFill>
+            <a:srgbClr val="FFFFFF"/>
+          </a:solidFill>
+          <a:ln w="9525">
+            <a:solidFill>
+              <a:srgbClr val="CBD5E1"/>
+            </a:solidFill>
+            <a:prstDash val="solid"/>
+          </a:ln>
+        </p:spPr>
+      </p:sp>
+      <p:sp>
+        <p:nvSpPr>
+          <p:cNvPr id="89" name="Text 87"/>
+          <p:cNvSpPr/>
+          <p:nvPr/>
+        </p:nvSpPr>
+        <p:spPr>
+          <a:xfrm>
+            <a:off x="1170432" y="3520440"/>
+            <a:ext cx="932688" cy="182880"/>
+          </a:xfrm>
+          <a:prstGeom prst="rect">
+            <a:avLst/>
+          </a:prstGeom>
+          <a:noFill/>
+          <a:ln/>
+        </p:spPr>
+        <p:txBody>
+          <a:bodyPr wrap="square" lIns="0" tIns="0" rIns="0" bIns="0" rtlCol="0" anchor="ctr"/>
+          <a:lstStyle/>
+          <a:p>
+            <a:pPr algn="ctr" indent="0" marL="0">
+              <a:buNone/>
+            </a:pPr>
+            <a:r>
+              <a:rPr lang="en-US" sz="750" b="1" dirty="0">
+                <a:solidFill>
+                  <a:srgbClr val="1E293B"/>
+                </a:solidFill>
+              </a:rPr>
+              <a:t>Web Player</a:t>
+            </a:r>
+            <a:endParaRPr lang="en-US" sz="750" dirty="0"/>
+          </a:p>
+        </p:txBody>
+      </p:sp>
+      <p:sp>
+        <p:nvSpPr>
+          <p:cNvPr id="90" name="Shape 88"/>
+          <p:cNvSpPr/>
+          <p:nvPr/>
+        </p:nvSpPr>
+        <p:spPr>
+          <a:xfrm>
+            <a:off x="1170432" y="3730752"/>
+            <a:ext cx="932688" cy="155448"/>
+          </a:xfrm>
+          <a:prstGeom prst="roundRect">
+            <a:avLst>
+              <a:gd name="adj" fmla="val 17647"/>
+            </a:avLst>
+          </a:prstGeom>
+          <a:solidFill>
+            <a:srgbClr val="1558A8"/>
+          </a:solidFill>
+          <a:ln w="12700">
+            <a:solidFill>
+              <a:srgbClr val="1558A8"/>
+            </a:solidFill>
+            <a:prstDash val="solid"/>
+          </a:ln>
+        </p:spPr>
+      </p:sp>
+      <p:sp>
+        <p:nvSpPr>
+          <p:cNvPr id="91" name="Text 89"/>
+          <p:cNvSpPr/>
+          <p:nvPr/>
+        </p:nvSpPr>
+        <p:spPr>
+          <a:xfrm>
+            <a:off x="1170432" y="3730752"/>
+            <a:ext cx="932688" cy="155448"/>
+          </a:xfrm>
+          <a:prstGeom prst="rect">
+            <a:avLst/>
+          </a:prstGeom>
+          <a:noFill/>
+          <a:ln/>
+        </p:spPr>
+        <p:txBody>
+          <a:bodyPr wrap="square" lIns="0" tIns="0" rIns="0" bIns="0" rtlCol="0" anchor="ctr"/>
+          <a:lstStyle/>
+          <a:p>
+            <a:pPr algn="ctr" indent="0" marL="0">
+              <a:buNone/>
+            </a:pPr>
+            <a:r>
+              <a:rPr lang="en-US" sz="700" dirty="0">
+                <a:solidFill>
+                  <a:srgbClr val="FFFFFF"/>
+                </a:solidFill>
+              </a:rPr>
+              <a:t>In Progress</a:t>
+            </a:r>
+            <a:endParaRPr lang="en-US" sz="700" dirty="0"/>
+          </a:p>
+        </p:txBody>
+      </p:sp>
+      <p:sp>
+        <p:nvSpPr>
+          <p:cNvPr id="92" name="Shape 90"/>
+          <p:cNvSpPr/>
+          <p:nvPr/>
+        </p:nvSpPr>
+        <p:spPr>
+          <a:xfrm>
+            <a:off x="2185416" y="3520440"/>
+            <a:ext cx="932688" cy="182880"/>
+          </a:xfrm>
+          <a:prstGeom prst="roundRect">
+            <a:avLst>
+              <a:gd name="adj" fmla="val 15000"/>
+            </a:avLst>
+          </a:prstGeom>
+          <a:solidFill>
+            <a:srgbClr val="FFFFFF"/>
+          </a:solidFill>
+          <a:ln w="9525">
+            <a:solidFill>
+              <a:srgbClr val="CBD5E1"/>
+            </a:solidFill>
+            <a:prstDash val="solid"/>
+          </a:ln>
+        </p:spPr>
+      </p:sp>
+      <p:sp>
+        <p:nvSpPr>
+          <p:cNvPr id="93" name="Text 91"/>
+          <p:cNvSpPr/>
+          <p:nvPr/>
+        </p:nvSpPr>
+        <p:spPr>
+          <a:xfrm>
+            <a:off x="2185416" y="3520440"/>
+            <a:ext cx="932688" cy="182880"/>
+          </a:xfrm>
+          <a:prstGeom prst="rect">
+            <a:avLst/>
+          </a:prstGeom>
+          <a:noFill/>
+          <a:ln/>
+        </p:spPr>
+        <p:txBody>
+          <a:bodyPr wrap="square" lIns="0" tIns="0" rIns="0" bIns="0" rtlCol="0" anchor="ctr"/>
+          <a:lstStyle/>
+          <a:p>
+            <a:pPr algn="ctr" indent="0" marL="0">
+              <a:buNone/>
+            </a:pPr>
+            <a:r>
+              <a:rPr lang="en-US" sz="750" b="1" dirty="0">
+                <a:solidFill>
+                  <a:srgbClr val="1E293B"/>
+                </a:solidFill>
+              </a:rPr>
+              <a:t>iOS Player</a:t>
+            </a:r>
+            <a:endParaRPr lang="en-US" sz="750" dirty="0"/>
+          </a:p>
+        </p:txBody>
+      </p:sp>
+      <p:sp>
+        <p:nvSpPr>
+          <p:cNvPr id="94" name="Shape 92"/>
+          <p:cNvSpPr/>
+          <p:nvPr/>
+        </p:nvSpPr>
+        <p:spPr>
+          <a:xfrm>
+            <a:off x="2185416" y="3730752"/>
+            <a:ext cx="932688" cy="155448"/>
+          </a:xfrm>
+          <a:prstGeom prst="roundRect">
+            <a:avLst>
+              <a:gd name="adj" fmla="val 17647"/>
+            </a:avLst>
+          </a:prstGeom>
+          <a:solidFill>
+            <a:srgbClr val="1558A8"/>
+          </a:solidFill>
+          <a:ln w="12700">
+            <a:solidFill>
+              <a:srgbClr val="1558A8"/>
+            </a:solidFill>
+            <a:prstDash val="solid"/>
+          </a:ln>
+        </p:spPr>
+      </p:sp>
+      <p:sp>
+        <p:nvSpPr>
+          <p:cNvPr id="95" name="Text 93"/>
+          <p:cNvSpPr/>
+          <p:nvPr/>
+        </p:nvSpPr>
+        <p:spPr>
+          <a:xfrm>
+            <a:off x="2185416" y="3730752"/>
+            <a:ext cx="932688" cy="155448"/>
+          </a:xfrm>
+          <a:prstGeom prst="rect">
+            <a:avLst/>
+          </a:prstGeom>
+          <a:noFill/>
+          <a:ln/>
+        </p:spPr>
+        <p:txBody>
+          <a:bodyPr wrap="square" lIns="0" tIns="0" rIns="0" bIns="0" rtlCol="0" anchor="ctr"/>
+          <a:lstStyle/>
+          <a:p>
+            <a:pPr algn="ctr" indent="0" marL="0">
+              <a:buNone/>
+            </a:pPr>
+            <a:r>
+              <a:rPr lang="en-US" sz="700" dirty="0">
+                <a:solidFill>
+                  <a:srgbClr val="FFFFFF"/>
+                </a:solidFill>
+              </a:rPr>
+              <a:t>In Progress</a:t>
+            </a:r>
+            <a:endParaRPr lang="en-US" sz="700" dirty="0"/>
+          </a:p>
+        </p:txBody>
+      </p:sp>
+      <p:sp>
+        <p:nvSpPr>
+          <p:cNvPr id="96" name="Shape 94"/>
+          <p:cNvSpPr/>
+          <p:nvPr/>
+        </p:nvSpPr>
+        <p:spPr>
+          <a:xfrm>
+            <a:off x="3200400" y="3520440"/>
+            <a:ext cx="932688" cy="182880"/>
+          </a:xfrm>
+          <a:prstGeom prst="roundRect">
+            <a:avLst>
+              <a:gd name="adj" fmla="val 15000"/>
+            </a:avLst>
+          </a:prstGeom>
+          <a:solidFill>
+            <a:srgbClr val="FFFFFF"/>
+          </a:solidFill>
+          <a:ln w="9525">
+            <a:solidFill>
+              <a:srgbClr val="CBD5E1"/>
+            </a:solidFill>
+            <a:prstDash val="solid"/>
+          </a:ln>
+        </p:spPr>
+      </p:sp>
+      <p:sp>
+        <p:nvSpPr>
+          <p:cNvPr id="97" name="Text 95"/>
+          <p:cNvSpPr/>
+          <p:nvPr/>
+        </p:nvSpPr>
+        <p:spPr>
+          <a:xfrm>
+            <a:off x="3200400" y="3520440"/>
+            <a:ext cx="932688" cy="182880"/>
+          </a:xfrm>
+          <a:prstGeom prst="rect">
+            <a:avLst/>
+          </a:prstGeom>
+          <a:noFill/>
+          <a:ln/>
+        </p:spPr>
+        <p:txBody>
+          <a:bodyPr wrap="square" lIns="0" tIns="0" rIns="0" bIns="0" rtlCol="0" anchor="ctr"/>
+          <a:lstStyle/>
+          <a:p>
+            <a:pPr algn="ctr" indent="0" marL="0">
+              <a:buNone/>
+            </a:pPr>
+            <a:r>
+              <a:rPr lang="en-US" sz="750" b="1" dirty="0">
+                <a:solidFill>
+                  <a:srgbClr val="1E293B"/>
+                </a:solidFill>
+              </a:rPr>
+              <a:t>Android Player</a:t>
+            </a:r>
+            <a:endParaRPr lang="en-US" sz="750" dirty="0"/>
+          </a:p>
+        </p:txBody>
+      </p:sp>
+      <p:sp>
+        <p:nvSpPr>
+          <p:cNvPr id="98" name="Shape 96"/>
+          <p:cNvSpPr/>
+          <p:nvPr/>
+        </p:nvSpPr>
+        <p:spPr>
+          <a:xfrm>
+            <a:off x="3200400" y="3730752"/>
             <a:ext cx="932688" cy="155448"/>
           </a:xfrm>
           <a:prstGeom prst="roundRect">
@@ -11343,13 +11845,13 @@
       </p:sp>
       <p:sp>
         <p:nvSpPr>
-          <p:cNvPr id="83" name="Text 81"/>
-          <p:cNvSpPr/>
-          <p:nvPr/>
-        </p:nvSpPr>
-        <p:spPr>
-          <a:xfrm>
-            <a:off x="7260336" y="2414016"/>
+          <p:cNvPr id="99" name="Text 97"/>
+          <p:cNvSpPr/>
+          <p:nvPr/>
+        </p:nvSpPr>
+        <p:spPr>
+          <a:xfrm>
+            <a:off x="3200400" y="3730752"/>
             <a:ext cx="932688" cy="155448"/>
           </a:xfrm>
           <a:prstGeom prst="rect">
@@ -11379,14 +11881,1524 @@
       </p:sp>
       <p:sp>
         <p:nvSpPr>
-          <p:cNvPr id="84" name="Shape 82"/>
-          <p:cNvSpPr/>
-          <p:nvPr/>
-        </p:nvSpPr>
-        <p:spPr>
-          <a:xfrm>
-            <a:off x="164592" y="3072384"/>
-            <a:ext cx="9116568" cy="1078992"/>
+          <p:cNvPr id="100" name="Shape 98"/>
+          <p:cNvSpPr/>
+          <p:nvPr/>
+        </p:nvSpPr>
+        <p:spPr>
+          <a:xfrm>
+            <a:off x="4215384" y="3520440"/>
+            <a:ext cx="932688" cy="182880"/>
+          </a:xfrm>
+          <a:prstGeom prst="roundRect">
+            <a:avLst>
+              <a:gd name="adj" fmla="val 15000"/>
+            </a:avLst>
+          </a:prstGeom>
+          <a:solidFill>
+            <a:srgbClr val="FFFFFF"/>
+          </a:solidFill>
+          <a:ln w="9525">
+            <a:solidFill>
+              <a:srgbClr val="CBD5E1"/>
+            </a:solidFill>
+            <a:prstDash val="solid"/>
+          </a:ln>
+        </p:spPr>
+      </p:sp>
+      <p:sp>
+        <p:nvSpPr>
+          <p:cNvPr id="101" name="Text 99"/>
+          <p:cNvSpPr/>
+          <p:nvPr/>
+        </p:nvSpPr>
+        <p:spPr>
+          <a:xfrm>
+            <a:off x="4215384" y="3520440"/>
+            <a:ext cx="932688" cy="182880"/>
+          </a:xfrm>
+          <a:prstGeom prst="rect">
+            <a:avLst/>
+          </a:prstGeom>
+          <a:noFill/>
+          <a:ln/>
+        </p:spPr>
+        <p:txBody>
+          <a:bodyPr wrap="square" lIns="0" tIns="0" rIns="0" bIns="0" rtlCol="0" anchor="ctr"/>
+          <a:lstStyle/>
+          <a:p>
+            <a:pPr algn="ctr" indent="0" marL="0">
+              <a:buNone/>
+            </a:pPr>
+            <a:r>
+              <a:rPr lang="en-US" sz="750" b="1" dirty="0">
+                <a:solidFill>
+                  <a:srgbClr val="1E293B"/>
+                </a:solidFill>
+              </a:rPr>
+              <a:t>HLS/DASH PB</a:t>
+            </a:r>
+            <a:endParaRPr lang="en-US" sz="750" dirty="0"/>
+          </a:p>
+        </p:txBody>
+      </p:sp>
+      <p:sp>
+        <p:nvSpPr>
+          <p:cNvPr id="102" name="Shape 100"/>
+          <p:cNvSpPr/>
+          <p:nvPr/>
+        </p:nvSpPr>
+        <p:spPr>
+          <a:xfrm>
+            <a:off x="4215384" y="3730752"/>
+            <a:ext cx="932688" cy="155448"/>
+          </a:xfrm>
+          <a:prstGeom prst="roundRect">
+            <a:avLst>
+              <a:gd name="adj" fmla="val 17647"/>
+            </a:avLst>
+          </a:prstGeom>
+          <a:solidFill>
+            <a:srgbClr val="F3F4F6"/>
+          </a:solidFill>
+          <a:ln w="9525">
+            <a:solidFill>
+              <a:srgbClr val="D1D5DB"/>
+            </a:solidFill>
+            <a:prstDash val="solid"/>
+          </a:ln>
+        </p:spPr>
+      </p:sp>
+      <p:sp>
+        <p:nvSpPr>
+          <p:cNvPr id="103" name="Text 101"/>
+          <p:cNvSpPr/>
+          <p:nvPr/>
+        </p:nvSpPr>
+        <p:spPr>
+          <a:xfrm>
+            <a:off x="4215384" y="3730752"/>
+            <a:ext cx="932688" cy="155448"/>
+          </a:xfrm>
+          <a:prstGeom prst="rect">
+            <a:avLst/>
+          </a:prstGeom>
+          <a:noFill/>
+          <a:ln/>
+        </p:spPr>
+        <p:txBody>
+          <a:bodyPr wrap="square" lIns="0" tIns="0" rIns="0" bIns="0" rtlCol="0" anchor="ctr"/>
+          <a:lstStyle/>
+          <a:p>
+            <a:pPr algn="ctr" indent="0" marL="0">
+              <a:buNone/>
+            </a:pPr>
+            <a:r>
+              <a:rPr lang="en-US" sz="700" dirty="0">
+                <a:solidFill>
+                  <a:srgbClr val="374151"/>
+                </a:solidFill>
+              </a:rPr>
+              <a:t>Not Started</a:t>
+            </a:r>
+            <a:endParaRPr lang="en-US" sz="700" dirty="0"/>
+          </a:p>
+        </p:txBody>
+      </p:sp>
+      <p:sp>
+        <p:nvSpPr>
+          <p:cNvPr id="104" name="Shape 102"/>
+          <p:cNvSpPr/>
+          <p:nvPr/>
+        </p:nvSpPr>
+        <p:spPr>
+          <a:xfrm>
+            <a:off x="5230368" y="3520440"/>
+            <a:ext cx="932688" cy="182880"/>
+          </a:xfrm>
+          <a:prstGeom prst="roundRect">
+            <a:avLst>
+              <a:gd name="adj" fmla="val 15000"/>
+            </a:avLst>
+          </a:prstGeom>
+          <a:solidFill>
+            <a:srgbClr val="FFFFFF"/>
+          </a:solidFill>
+          <a:ln w="9525">
+            <a:solidFill>
+              <a:srgbClr val="CBD5E1"/>
+            </a:solidFill>
+            <a:prstDash val="solid"/>
+          </a:ln>
+        </p:spPr>
+      </p:sp>
+      <p:sp>
+        <p:nvSpPr>
+          <p:cNvPr id="105" name="Text 103"/>
+          <p:cNvSpPr/>
+          <p:nvPr/>
+        </p:nvSpPr>
+        <p:spPr>
+          <a:xfrm>
+            <a:off x="5230368" y="3520440"/>
+            <a:ext cx="932688" cy="182880"/>
+          </a:xfrm>
+          <a:prstGeom prst="rect">
+            <a:avLst/>
+          </a:prstGeom>
+          <a:noFill/>
+          <a:ln/>
+        </p:spPr>
+        <p:txBody>
+          <a:bodyPr wrap="square" lIns="0" tIns="0" rIns="0" bIns="0" rtlCol="0" anchor="ctr"/>
+          <a:lstStyle/>
+          <a:p>
+            <a:pPr algn="ctr" indent="0" marL="0">
+              <a:buNone/>
+            </a:pPr>
+            <a:r>
+              <a:rPr lang="en-US" sz="750" b="1" dirty="0">
+                <a:solidFill>
+                  <a:srgbClr val="1E293B"/>
+                </a:solidFill>
+              </a:rPr>
+              <a:t>Bitmovin QOE</a:t>
+            </a:r>
+            <a:endParaRPr lang="en-US" sz="750" dirty="0"/>
+          </a:p>
+        </p:txBody>
+      </p:sp>
+      <p:sp>
+        <p:nvSpPr>
+          <p:cNvPr id="106" name="Shape 104"/>
+          <p:cNvSpPr/>
+          <p:nvPr/>
+        </p:nvSpPr>
+        <p:spPr>
+          <a:xfrm>
+            <a:off x="5230368" y="3730752"/>
+            <a:ext cx="932688" cy="155448"/>
+          </a:xfrm>
+          <a:prstGeom prst="roundRect">
+            <a:avLst>
+              <a:gd name="adj" fmla="val 17647"/>
+            </a:avLst>
+          </a:prstGeom>
+          <a:solidFill>
+            <a:srgbClr val="F3F4F6"/>
+          </a:solidFill>
+          <a:ln w="9525">
+            <a:solidFill>
+              <a:srgbClr val="D1D5DB"/>
+            </a:solidFill>
+            <a:prstDash val="solid"/>
+          </a:ln>
+        </p:spPr>
+      </p:sp>
+      <p:sp>
+        <p:nvSpPr>
+          <p:cNvPr id="107" name="Text 105"/>
+          <p:cNvSpPr/>
+          <p:nvPr/>
+        </p:nvSpPr>
+        <p:spPr>
+          <a:xfrm>
+            <a:off x="5230368" y="3730752"/>
+            <a:ext cx="932688" cy="155448"/>
+          </a:xfrm>
+          <a:prstGeom prst="rect">
+            <a:avLst/>
+          </a:prstGeom>
+          <a:noFill/>
+          <a:ln/>
+        </p:spPr>
+        <p:txBody>
+          <a:bodyPr wrap="square" lIns="0" tIns="0" rIns="0" bIns="0" rtlCol="0" anchor="ctr"/>
+          <a:lstStyle/>
+          <a:p>
+            <a:pPr algn="ctr" indent="0" marL="0">
+              <a:buNone/>
+            </a:pPr>
+            <a:r>
+              <a:rPr lang="en-US" sz="700" dirty="0">
+                <a:solidFill>
+                  <a:srgbClr val="374151"/>
+                </a:solidFill>
+              </a:rPr>
+              <a:t>Not Started</a:t>
+            </a:r>
+            <a:endParaRPr lang="en-US" sz="700" dirty="0"/>
+          </a:p>
+        </p:txBody>
+      </p:sp>
+      <p:sp>
+        <p:nvSpPr>
+          <p:cNvPr id="108" name="Shape 106"/>
+          <p:cNvSpPr/>
+          <p:nvPr/>
+        </p:nvSpPr>
+        <p:spPr>
+          <a:xfrm>
+            <a:off x="164592" y="4480560"/>
+            <a:ext cx="9116568" cy="1170432"/>
+          </a:xfrm>
+          <a:prstGeom prst="rect">
+            <a:avLst/>
+          </a:prstGeom>
+          <a:solidFill>
+            <a:srgbClr val="FFFFFF"/>
+          </a:solidFill>
+          <a:ln w="6350">
+            <a:solidFill>
+              <a:srgbClr val="E5E7EB"/>
+            </a:solidFill>
+            <a:prstDash val="solid"/>
+          </a:ln>
+        </p:spPr>
+      </p:sp>
+      <p:sp>
+        <p:nvSpPr>
+          <p:cNvPr id="109" name="Shape 107"/>
+          <p:cNvSpPr/>
+          <p:nvPr/>
+        </p:nvSpPr>
+        <p:spPr>
+          <a:xfrm>
+            <a:off x="182880" y="4553712"/>
+            <a:ext cx="859536" cy="1024128"/>
+          </a:xfrm>
+          <a:prstGeom prst="roundRect">
+            <a:avLst>
+              <a:gd name="adj" fmla="val 5319"/>
+            </a:avLst>
+          </a:prstGeom>
+          <a:solidFill>
+            <a:srgbClr val="9CA3AF"/>
+          </a:solidFill>
+          <a:ln w="12700">
+            <a:solidFill>
+              <a:srgbClr val="9CA3AF"/>
+            </a:solidFill>
+            <a:prstDash val="solid"/>
+          </a:ln>
+        </p:spPr>
+      </p:sp>
+      <p:sp>
+        <p:nvSpPr>
+          <p:cNvPr id="110" name="Text 108"/>
+          <p:cNvSpPr/>
+          <p:nvPr/>
+        </p:nvSpPr>
+        <p:spPr>
+          <a:xfrm>
+            <a:off x="182880" y="4553712"/>
+            <a:ext cx="859536" cy="1024128"/>
+          </a:xfrm>
+          <a:prstGeom prst="rect">
+            <a:avLst/>
+          </a:prstGeom>
+          <a:noFill/>
+          <a:ln/>
+        </p:spPr>
+        <p:txBody>
+          <a:bodyPr wrap="square" lIns="0" tIns="0" rIns="0" bIns="0" rtlCol="0" anchor="ctr"/>
+          <a:lstStyle/>
+          <a:p>
+            <a:pPr algn="ctr" indent="0" marL="0">
+              <a:buNone/>
+            </a:pPr>
+            <a:r>
+              <a:rPr lang="en-US" sz="950" b="1" dirty="0">
+                <a:solidFill>
+                  <a:srgbClr val="FFFFFF"/>
+                </a:solidFill>
+              </a:rPr>
+              <a:t>Merchandising</a:t>
+            </a:r>
+            <a:endParaRPr lang="en-US" sz="950" dirty="0"/>
+          </a:p>
+        </p:txBody>
+      </p:sp>
+      <p:sp>
+        <p:nvSpPr>
+          <p:cNvPr id="111" name="Text 109"/>
+          <p:cNvSpPr/>
+          <p:nvPr/>
+        </p:nvSpPr>
+        <p:spPr>
+          <a:xfrm>
+            <a:off x="1170432" y="4526280"/>
+            <a:ext cx="8110728" cy="182880"/>
+          </a:xfrm>
+          <a:prstGeom prst="rect">
+            <a:avLst/>
+          </a:prstGeom>
+          <a:noFill/>
+          <a:ln/>
+        </p:spPr>
+        <p:txBody>
+          <a:bodyPr wrap="square" lIns="0" tIns="0" rIns="0" bIns="0" rtlCol="0" anchor="ctr"/>
+          <a:lstStyle/>
+          <a:p>
+            <a:pPr algn="l" indent="0" marL="0">
+              <a:buNone/>
+            </a:pPr>
+            <a:r>
+              <a:rPr lang="en-US" sz="750" dirty="0">
+                <a:solidFill>
+                  <a:srgbClr val="9CA3AF"/>
+                </a:solidFill>
+              </a:rPr>
+              <a:t>3 / 9 In Progress</a:t>
+            </a:r>
+            <a:endParaRPr lang="en-US" sz="750" dirty="0"/>
+          </a:p>
+        </p:txBody>
+      </p:sp>
+      <p:sp>
+        <p:nvSpPr>
+          <p:cNvPr id="112" name="Shape 110"/>
+          <p:cNvSpPr/>
+          <p:nvPr/>
+        </p:nvSpPr>
+        <p:spPr>
+          <a:xfrm>
+            <a:off x="1170432" y="4745736"/>
+            <a:ext cx="932688" cy="182880"/>
+          </a:xfrm>
+          <a:prstGeom prst="roundRect">
+            <a:avLst>
+              <a:gd name="adj" fmla="val 15000"/>
+            </a:avLst>
+          </a:prstGeom>
+          <a:solidFill>
+            <a:srgbClr val="FFFFFF"/>
+          </a:solidFill>
+          <a:ln w="9525">
+            <a:solidFill>
+              <a:srgbClr val="CBD5E1"/>
+            </a:solidFill>
+            <a:prstDash val="solid"/>
+          </a:ln>
+        </p:spPr>
+      </p:sp>
+      <p:sp>
+        <p:nvSpPr>
+          <p:cNvPr id="113" name="Text 111"/>
+          <p:cNvSpPr/>
+          <p:nvPr/>
+        </p:nvSpPr>
+        <p:spPr>
+          <a:xfrm>
+            <a:off x="1170432" y="4745736"/>
+            <a:ext cx="932688" cy="182880"/>
+          </a:xfrm>
+          <a:prstGeom prst="rect">
+            <a:avLst/>
+          </a:prstGeom>
+          <a:noFill/>
+          <a:ln/>
+        </p:spPr>
+        <p:txBody>
+          <a:bodyPr wrap="square" lIns="0" tIns="0" rIns="0" bIns="0" rtlCol="0" anchor="ctr"/>
+          <a:lstStyle/>
+          <a:p>
+            <a:pPr algn="ctr" indent="0" marL="0">
+              <a:buNone/>
+            </a:pPr>
+            <a:r>
+              <a:rPr lang="en-US" sz="750" b="1" dirty="0">
+                <a:solidFill>
+                  <a:srgbClr val="1E293B"/>
+                </a:solidFill>
+              </a:rPr>
+              <a:t>Metadata</a:t>
+            </a:r>
+            <a:endParaRPr lang="en-US" sz="750" dirty="0"/>
+          </a:p>
+        </p:txBody>
+      </p:sp>
+      <p:sp>
+        <p:nvSpPr>
+          <p:cNvPr id="114" name="Shape 112"/>
+          <p:cNvSpPr/>
+          <p:nvPr/>
+        </p:nvSpPr>
+        <p:spPr>
+          <a:xfrm>
+            <a:off x="1170432" y="4956048"/>
+            <a:ext cx="932688" cy="155448"/>
+          </a:xfrm>
+          <a:prstGeom prst="roundRect">
+            <a:avLst>
+              <a:gd name="adj" fmla="val 17647"/>
+            </a:avLst>
+          </a:prstGeom>
+          <a:solidFill>
+            <a:srgbClr val="1558A8"/>
+          </a:solidFill>
+          <a:ln w="12700">
+            <a:solidFill>
+              <a:srgbClr val="1558A8"/>
+            </a:solidFill>
+            <a:prstDash val="solid"/>
+          </a:ln>
+        </p:spPr>
+      </p:sp>
+      <p:sp>
+        <p:nvSpPr>
+          <p:cNvPr id="115" name="Text 113"/>
+          <p:cNvSpPr/>
+          <p:nvPr/>
+        </p:nvSpPr>
+        <p:spPr>
+          <a:xfrm>
+            <a:off x="1170432" y="4956048"/>
+            <a:ext cx="932688" cy="155448"/>
+          </a:xfrm>
+          <a:prstGeom prst="rect">
+            <a:avLst/>
+          </a:prstGeom>
+          <a:noFill/>
+          <a:ln/>
+        </p:spPr>
+        <p:txBody>
+          <a:bodyPr wrap="square" lIns="0" tIns="0" rIns="0" bIns="0" rtlCol="0" anchor="ctr"/>
+          <a:lstStyle/>
+          <a:p>
+            <a:pPr algn="ctr" indent="0" marL="0">
+              <a:buNone/>
+            </a:pPr>
+            <a:r>
+              <a:rPr lang="en-US" sz="700" dirty="0">
+                <a:solidFill>
+                  <a:srgbClr val="FFFFFF"/>
+                </a:solidFill>
+              </a:rPr>
+              <a:t>In Progress</a:t>
+            </a:r>
+            <a:endParaRPr lang="en-US" sz="700" dirty="0"/>
+          </a:p>
+        </p:txBody>
+      </p:sp>
+      <p:sp>
+        <p:nvSpPr>
+          <p:cNvPr id="116" name="Shape 114"/>
+          <p:cNvSpPr/>
+          <p:nvPr/>
+        </p:nvSpPr>
+        <p:spPr>
+          <a:xfrm>
+            <a:off x="2185416" y="4745736"/>
+            <a:ext cx="932688" cy="182880"/>
+          </a:xfrm>
+          <a:prstGeom prst="roundRect">
+            <a:avLst>
+              <a:gd name="adj" fmla="val 15000"/>
+            </a:avLst>
+          </a:prstGeom>
+          <a:solidFill>
+            <a:srgbClr val="FFFFFF"/>
+          </a:solidFill>
+          <a:ln w="9525">
+            <a:solidFill>
+              <a:srgbClr val="CBD5E1"/>
+            </a:solidFill>
+            <a:prstDash val="solid"/>
+          </a:ln>
+        </p:spPr>
+      </p:sp>
+      <p:sp>
+        <p:nvSpPr>
+          <p:cNvPr id="117" name="Text 115"/>
+          <p:cNvSpPr/>
+          <p:nvPr/>
+        </p:nvSpPr>
+        <p:spPr>
+          <a:xfrm>
+            <a:off x="2185416" y="4745736"/>
+            <a:ext cx="932688" cy="182880"/>
+          </a:xfrm>
+          <a:prstGeom prst="rect">
+            <a:avLst/>
+          </a:prstGeom>
+          <a:noFill/>
+          <a:ln/>
+        </p:spPr>
+        <p:txBody>
+          <a:bodyPr wrap="square" lIns="0" tIns="0" rIns="0" bIns="0" rtlCol="0" anchor="ctr"/>
+          <a:lstStyle/>
+          <a:p>
+            <a:pPr algn="ctr" indent="0" marL="0">
+              <a:buNone/>
+            </a:pPr>
+            <a:r>
+              <a:rPr lang="en-US" sz="750" b="1" dirty="0">
+                <a:solidFill>
+                  <a:srgbClr val="1E293B"/>
+                </a:solidFill>
+              </a:rPr>
+              <a:t>Images</a:t>
+            </a:r>
+            <a:endParaRPr lang="en-US" sz="750" dirty="0"/>
+          </a:p>
+        </p:txBody>
+      </p:sp>
+      <p:sp>
+        <p:nvSpPr>
+          <p:cNvPr id="118" name="Shape 116"/>
+          <p:cNvSpPr/>
+          <p:nvPr/>
+        </p:nvSpPr>
+        <p:spPr>
+          <a:xfrm>
+            <a:off x="2185416" y="4956048"/>
+            <a:ext cx="932688" cy="155448"/>
+          </a:xfrm>
+          <a:prstGeom prst="roundRect">
+            <a:avLst>
+              <a:gd name="adj" fmla="val 17647"/>
+            </a:avLst>
+          </a:prstGeom>
+          <a:solidFill>
+            <a:srgbClr val="F3F4F6"/>
+          </a:solidFill>
+          <a:ln w="9525">
+            <a:solidFill>
+              <a:srgbClr val="D1D5DB"/>
+            </a:solidFill>
+            <a:prstDash val="solid"/>
+          </a:ln>
+        </p:spPr>
+      </p:sp>
+      <p:sp>
+        <p:nvSpPr>
+          <p:cNvPr id="119" name="Text 117"/>
+          <p:cNvSpPr/>
+          <p:nvPr/>
+        </p:nvSpPr>
+        <p:spPr>
+          <a:xfrm>
+            <a:off x="2185416" y="4956048"/>
+            <a:ext cx="932688" cy="155448"/>
+          </a:xfrm>
+          <a:prstGeom prst="rect">
+            <a:avLst/>
+          </a:prstGeom>
+          <a:noFill/>
+          <a:ln/>
+        </p:spPr>
+        <p:txBody>
+          <a:bodyPr wrap="square" lIns="0" tIns="0" rIns="0" bIns="0" rtlCol="0" anchor="ctr"/>
+          <a:lstStyle/>
+          <a:p>
+            <a:pPr algn="ctr" indent="0" marL="0">
+              <a:buNone/>
+            </a:pPr>
+            <a:r>
+              <a:rPr lang="en-US" sz="700" dirty="0">
+                <a:solidFill>
+                  <a:srgbClr val="374151"/>
+                </a:solidFill>
+              </a:rPr>
+              <a:t>Not Started</a:t>
+            </a:r>
+            <a:endParaRPr lang="en-US" sz="700" dirty="0"/>
+          </a:p>
+        </p:txBody>
+      </p:sp>
+      <p:sp>
+        <p:nvSpPr>
+          <p:cNvPr id="120" name="Shape 118"/>
+          <p:cNvSpPr/>
+          <p:nvPr/>
+        </p:nvSpPr>
+        <p:spPr>
+          <a:xfrm>
+            <a:off x="3200400" y="4745736"/>
+            <a:ext cx="932688" cy="182880"/>
+          </a:xfrm>
+          <a:prstGeom prst="roundRect">
+            <a:avLst>
+              <a:gd name="adj" fmla="val 15000"/>
+            </a:avLst>
+          </a:prstGeom>
+          <a:solidFill>
+            <a:srgbClr val="FFFFFF"/>
+          </a:solidFill>
+          <a:ln w="9525">
+            <a:solidFill>
+              <a:srgbClr val="CBD5E1"/>
+            </a:solidFill>
+            <a:prstDash val="solid"/>
+          </a:ln>
+        </p:spPr>
+      </p:sp>
+      <p:sp>
+        <p:nvSpPr>
+          <p:cNvPr id="121" name="Text 119"/>
+          <p:cNvSpPr/>
+          <p:nvPr/>
+        </p:nvSpPr>
+        <p:spPr>
+          <a:xfrm>
+            <a:off x="3200400" y="4745736"/>
+            <a:ext cx="932688" cy="182880"/>
+          </a:xfrm>
+          <a:prstGeom prst="rect">
+            <a:avLst/>
+          </a:prstGeom>
+          <a:noFill/>
+          <a:ln/>
+        </p:spPr>
+        <p:txBody>
+          <a:bodyPr wrap="square" lIns="0" tIns="0" rIns="0" bIns="0" rtlCol="0" anchor="ctr"/>
+          <a:lstStyle/>
+          <a:p>
+            <a:pPr algn="ctr" indent="0" marL="0">
+              <a:buNone/>
+            </a:pPr>
+            <a:r>
+              <a:rPr lang="en-US" sz="750" b="1" dirty="0">
+                <a:solidFill>
+                  <a:srgbClr val="1E293B"/>
+                </a:solidFill>
+              </a:rPr>
+              <a:t>Carousels</a:t>
+            </a:r>
+            <a:endParaRPr lang="en-US" sz="750" dirty="0"/>
+          </a:p>
+        </p:txBody>
+      </p:sp>
+      <p:sp>
+        <p:nvSpPr>
+          <p:cNvPr id="122" name="Shape 120"/>
+          <p:cNvSpPr/>
+          <p:nvPr/>
+        </p:nvSpPr>
+        <p:spPr>
+          <a:xfrm>
+            <a:off x="3200400" y="4956048"/>
+            <a:ext cx="932688" cy="155448"/>
+          </a:xfrm>
+          <a:prstGeom prst="roundRect">
+            <a:avLst>
+              <a:gd name="adj" fmla="val 17647"/>
+            </a:avLst>
+          </a:prstGeom>
+          <a:solidFill>
+            <a:srgbClr val="F3F4F6"/>
+          </a:solidFill>
+          <a:ln w="9525">
+            <a:solidFill>
+              <a:srgbClr val="D1D5DB"/>
+            </a:solidFill>
+            <a:prstDash val="solid"/>
+          </a:ln>
+        </p:spPr>
+      </p:sp>
+      <p:sp>
+        <p:nvSpPr>
+          <p:cNvPr id="123" name="Text 121"/>
+          <p:cNvSpPr/>
+          <p:nvPr/>
+        </p:nvSpPr>
+        <p:spPr>
+          <a:xfrm>
+            <a:off x="3200400" y="4956048"/>
+            <a:ext cx="932688" cy="155448"/>
+          </a:xfrm>
+          <a:prstGeom prst="rect">
+            <a:avLst/>
+          </a:prstGeom>
+          <a:noFill/>
+          <a:ln/>
+        </p:spPr>
+        <p:txBody>
+          <a:bodyPr wrap="square" lIns="0" tIns="0" rIns="0" bIns="0" rtlCol="0" anchor="ctr"/>
+          <a:lstStyle/>
+          <a:p>
+            <a:pPr algn="ctr" indent="0" marL="0">
+              <a:buNone/>
+            </a:pPr>
+            <a:r>
+              <a:rPr lang="en-US" sz="700" dirty="0">
+                <a:solidFill>
+                  <a:srgbClr val="374151"/>
+                </a:solidFill>
+              </a:rPr>
+              <a:t>Not Started</a:t>
+            </a:r>
+            <a:endParaRPr lang="en-US" sz="700" dirty="0"/>
+          </a:p>
+        </p:txBody>
+      </p:sp>
+      <p:sp>
+        <p:nvSpPr>
+          <p:cNvPr id="124" name="Shape 122"/>
+          <p:cNvSpPr/>
+          <p:nvPr/>
+        </p:nvSpPr>
+        <p:spPr>
+          <a:xfrm>
+            <a:off x="4215384" y="4745736"/>
+            <a:ext cx="932688" cy="182880"/>
+          </a:xfrm>
+          <a:prstGeom prst="roundRect">
+            <a:avLst>
+              <a:gd name="adj" fmla="val 15000"/>
+            </a:avLst>
+          </a:prstGeom>
+          <a:solidFill>
+            <a:srgbClr val="FFFFFF"/>
+          </a:solidFill>
+          <a:ln w="9525">
+            <a:solidFill>
+              <a:srgbClr val="CBD5E1"/>
+            </a:solidFill>
+            <a:prstDash val="solid"/>
+          </a:ln>
+        </p:spPr>
+      </p:sp>
+      <p:sp>
+        <p:nvSpPr>
+          <p:cNvPr id="125" name="Text 123"/>
+          <p:cNvSpPr/>
+          <p:nvPr/>
+        </p:nvSpPr>
+        <p:spPr>
+          <a:xfrm>
+            <a:off x="4215384" y="4745736"/>
+            <a:ext cx="932688" cy="182880"/>
+          </a:xfrm>
+          <a:prstGeom prst="rect">
+            <a:avLst/>
+          </a:prstGeom>
+          <a:noFill/>
+          <a:ln/>
+        </p:spPr>
+        <p:txBody>
+          <a:bodyPr wrap="square" lIns="0" tIns="0" rIns="0" bIns="0" rtlCol="0" anchor="ctr"/>
+          <a:lstStyle/>
+          <a:p>
+            <a:pPr algn="ctr" indent="0" marL="0">
+              <a:buNone/>
+            </a:pPr>
+            <a:r>
+              <a:rPr lang="en-US" sz="750" b="1" dirty="0">
+                <a:solidFill>
+                  <a:srgbClr val="1E293B"/>
+                </a:solidFill>
+              </a:rPr>
+              <a:t>Live Events</a:t>
+            </a:r>
+            <a:endParaRPr lang="en-US" sz="750" dirty="0"/>
+          </a:p>
+        </p:txBody>
+      </p:sp>
+      <p:sp>
+        <p:nvSpPr>
+          <p:cNvPr id="126" name="Shape 124"/>
+          <p:cNvSpPr/>
+          <p:nvPr/>
+        </p:nvSpPr>
+        <p:spPr>
+          <a:xfrm>
+            <a:off x="4215384" y="4956048"/>
+            <a:ext cx="932688" cy="155448"/>
+          </a:xfrm>
+          <a:prstGeom prst="roundRect">
+            <a:avLst>
+              <a:gd name="adj" fmla="val 17647"/>
+            </a:avLst>
+          </a:prstGeom>
+          <a:solidFill>
+            <a:srgbClr val="1558A8"/>
+          </a:solidFill>
+          <a:ln w="12700">
+            <a:solidFill>
+              <a:srgbClr val="1558A8"/>
+            </a:solidFill>
+            <a:prstDash val="solid"/>
+          </a:ln>
+        </p:spPr>
+      </p:sp>
+      <p:sp>
+        <p:nvSpPr>
+          <p:cNvPr id="127" name="Text 125"/>
+          <p:cNvSpPr/>
+          <p:nvPr/>
+        </p:nvSpPr>
+        <p:spPr>
+          <a:xfrm>
+            <a:off x="4215384" y="4956048"/>
+            <a:ext cx="932688" cy="155448"/>
+          </a:xfrm>
+          <a:prstGeom prst="rect">
+            <a:avLst/>
+          </a:prstGeom>
+          <a:noFill/>
+          <a:ln/>
+        </p:spPr>
+        <p:txBody>
+          <a:bodyPr wrap="square" lIns="0" tIns="0" rIns="0" bIns="0" rtlCol="0" anchor="ctr"/>
+          <a:lstStyle/>
+          <a:p>
+            <a:pPr algn="ctr" indent="0" marL="0">
+              <a:buNone/>
+            </a:pPr>
+            <a:r>
+              <a:rPr lang="en-US" sz="700" dirty="0">
+                <a:solidFill>
+                  <a:srgbClr val="FFFFFF"/>
+                </a:solidFill>
+              </a:rPr>
+              <a:t>In Progress</a:t>
+            </a:r>
+            <a:endParaRPr lang="en-US" sz="700" dirty="0"/>
+          </a:p>
+        </p:txBody>
+      </p:sp>
+      <p:sp>
+        <p:nvSpPr>
+          <p:cNvPr id="128" name="Shape 126"/>
+          <p:cNvSpPr/>
+          <p:nvPr/>
+        </p:nvSpPr>
+        <p:spPr>
+          <a:xfrm>
+            <a:off x="5230368" y="4745736"/>
+            <a:ext cx="932688" cy="182880"/>
+          </a:xfrm>
+          <a:prstGeom prst="roundRect">
+            <a:avLst>
+              <a:gd name="adj" fmla="val 15000"/>
+            </a:avLst>
+          </a:prstGeom>
+          <a:solidFill>
+            <a:srgbClr val="FFFFFF"/>
+          </a:solidFill>
+          <a:ln w="9525">
+            <a:solidFill>
+              <a:srgbClr val="CBD5E1"/>
+            </a:solidFill>
+            <a:prstDash val="solid"/>
+          </a:ln>
+        </p:spPr>
+      </p:sp>
+      <p:sp>
+        <p:nvSpPr>
+          <p:cNvPr id="129" name="Text 127"/>
+          <p:cNvSpPr/>
+          <p:nvPr/>
+        </p:nvSpPr>
+        <p:spPr>
+          <a:xfrm>
+            <a:off x="5230368" y="4745736"/>
+            <a:ext cx="932688" cy="182880"/>
+          </a:xfrm>
+          <a:prstGeom prst="rect">
+            <a:avLst/>
+          </a:prstGeom>
+          <a:noFill/>
+          <a:ln/>
+        </p:spPr>
+        <p:txBody>
+          <a:bodyPr wrap="square" lIns="0" tIns="0" rIns="0" bIns="0" rtlCol="0" anchor="ctr"/>
+          <a:lstStyle/>
+          <a:p>
+            <a:pPr algn="ctr" indent="0" marL="0">
+              <a:buNone/>
+            </a:pPr>
+            <a:r>
+              <a:rPr lang="en-US" sz="750" b="1" dirty="0">
+                <a:solidFill>
+                  <a:srgbClr val="1E293B"/>
+                </a:solidFill>
+              </a:rPr>
+              <a:t>Back Catalog</a:t>
+            </a:r>
+            <a:endParaRPr lang="en-US" sz="750" dirty="0"/>
+          </a:p>
+        </p:txBody>
+      </p:sp>
+      <p:sp>
+        <p:nvSpPr>
+          <p:cNvPr id="130" name="Shape 128"/>
+          <p:cNvSpPr/>
+          <p:nvPr/>
+        </p:nvSpPr>
+        <p:spPr>
+          <a:xfrm>
+            <a:off x="5230368" y="4956048"/>
+            <a:ext cx="932688" cy="155448"/>
+          </a:xfrm>
+          <a:prstGeom prst="roundRect">
+            <a:avLst>
+              <a:gd name="adj" fmla="val 17647"/>
+            </a:avLst>
+          </a:prstGeom>
+          <a:solidFill>
+            <a:srgbClr val="F3F4F6"/>
+          </a:solidFill>
+          <a:ln w="9525">
+            <a:solidFill>
+              <a:srgbClr val="D1D5DB"/>
+            </a:solidFill>
+            <a:prstDash val="solid"/>
+          </a:ln>
+        </p:spPr>
+      </p:sp>
+      <p:sp>
+        <p:nvSpPr>
+          <p:cNvPr id="131" name="Text 129"/>
+          <p:cNvSpPr/>
+          <p:nvPr/>
+        </p:nvSpPr>
+        <p:spPr>
+          <a:xfrm>
+            <a:off x="5230368" y="4956048"/>
+            <a:ext cx="932688" cy="155448"/>
+          </a:xfrm>
+          <a:prstGeom prst="rect">
+            <a:avLst/>
+          </a:prstGeom>
+          <a:noFill/>
+          <a:ln/>
+        </p:spPr>
+        <p:txBody>
+          <a:bodyPr wrap="square" lIns="0" tIns="0" rIns="0" bIns="0" rtlCol="0" anchor="ctr"/>
+          <a:lstStyle/>
+          <a:p>
+            <a:pPr algn="ctr" indent="0" marL="0">
+              <a:buNone/>
+            </a:pPr>
+            <a:r>
+              <a:rPr lang="en-US" sz="700" dirty="0">
+                <a:solidFill>
+                  <a:srgbClr val="374151"/>
+                </a:solidFill>
+              </a:rPr>
+              <a:t>Not Started</a:t>
+            </a:r>
+            <a:endParaRPr lang="en-US" sz="700" dirty="0"/>
+          </a:p>
+        </p:txBody>
+      </p:sp>
+      <p:sp>
+        <p:nvSpPr>
+          <p:cNvPr id="132" name="Shape 130"/>
+          <p:cNvSpPr/>
+          <p:nvPr/>
+        </p:nvSpPr>
+        <p:spPr>
+          <a:xfrm>
+            <a:off x="6245352" y="4745736"/>
+            <a:ext cx="932688" cy="182880"/>
+          </a:xfrm>
+          <a:prstGeom prst="roundRect">
+            <a:avLst>
+              <a:gd name="adj" fmla="val 15000"/>
+            </a:avLst>
+          </a:prstGeom>
+          <a:solidFill>
+            <a:srgbClr val="FFFFFF"/>
+          </a:solidFill>
+          <a:ln w="9525">
+            <a:solidFill>
+              <a:srgbClr val="CBD5E1"/>
+            </a:solidFill>
+            <a:prstDash val="solid"/>
+          </a:ln>
+        </p:spPr>
+      </p:sp>
+      <p:sp>
+        <p:nvSpPr>
+          <p:cNvPr id="133" name="Text 131"/>
+          <p:cNvSpPr/>
+          <p:nvPr/>
+        </p:nvSpPr>
+        <p:spPr>
+          <a:xfrm>
+            <a:off x="6245352" y="4745736"/>
+            <a:ext cx="932688" cy="182880"/>
+          </a:xfrm>
+          <a:prstGeom prst="rect">
+            <a:avLst/>
+          </a:prstGeom>
+          <a:noFill/>
+          <a:ln/>
+        </p:spPr>
+        <p:txBody>
+          <a:bodyPr wrap="square" lIns="0" tIns="0" rIns="0" bIns="0" rtlCol="0" anchor="ctr"/>
+          <a:lstStyle/>
+          <a:p>
+            <a:pPr algn="ctr" indent="0" marL="0">
+              <a:buNone/>
+            </a:pPr>
+            <a:r>
+              <a:rPr lang="en-US" sz="750" b="1" dirty="0">
+                <a:solidFill>
+                  <a:srgbClr val="1E293B"/>
+                </a:solidFill>
+              </a:rPr>
+              <a:t>Full Replays</a:t>
+            </a:r>
+            <a:endParaRPr lang="en-US" sz="750" dirty="0"/>
+          </a:p>
+        </p:txBody>
+      </p:sp>
+      <p:sp>
+        <p:nvSpPr>
+          <p:cNvPr id="134" name="Shape 132"/>
+          <p:cNvSpPr/>
+          <p:nvPr/>
+        </p:nvSpPr>
+        <p:spPr>
+          <a:xfrm>
+            <a:off x="6245352" y="4956048"/>
+            <a:ext cx="932688" cy="155448"/>
+          </a:xfrm>
+          <a:prstGeom prst="roundRect">
+            <a:avLst>
+              <a:gd name="adj" fmla="val 17647"/>
+            </a:avLst>
+          </a:prstGeom>
+          <a:solidFill>
+            <a:srgbClr val="F3F4F6"/>
+          </a:solidFill>
+          <a:ln w="9525">
+            <a:solidFill>
+              <a:srgbClr val="D1D5DB"/>
+            </a:solidFill>
+            <a:prstDash val="solid"/>
+          </a:ln>
+        </p:spPr>
+      </p:sp>
+      <p:sp>
+        <p:nvSpPr>
+          <p:cNvPr id="135" name="Text 133"/>
+          <p:cNvSpPr/>
+          <p:nvPr/>
+        </p:nvSpPr>
+        <p:spPr>
+          <a:xfrm>
+            <a:off x="6245352" y="4956048"/>
+            <a:ext cx="932688" cy="155448"/>
+          </a:xfrm>
+          <a:prstGeom prst="rect">
+            <a:avLst/>
+          </a:prstGeom>
+          <a:noFill/>
+          <a:ln/>
+        </p:spPr>
+        <p:txBody>
+          <a:bodyPr wrap="square" lIns="0" tIns="0" rIns="0" bIns="0" rtlCol="0" anchor="ctr"/>
+          <a:lstStyle/>
+          <a:p>
+            <a:pPr algn="ctr" indent="0" marL="0">
+              <a:buNone/>
+            </a:pPr>
+            <a:r>
+              <a:rPr lang="en-US" sz="700" dirty="0">
+                <a:solidFill>
+                  <a:srgbClr val="374151"/>
+                </a:solidFill>
+              </a:rPr>
+              <a:t>Not Started</a:t>
+            </a:r>
+            <a:endParaRPr lang="en-US" sz="700" dirty="0"/>
+          </a:p>
+        </p:txBody>
+      </p:sp>
+      <p:sp>
+        <p:nvSpPr>
+          <p:cNvPr id="136" name="Shape 134"/>
+          <p:cNvSpPr/>
+          <p:nvPr/>
+        </p:nvSpPr>
+        <p:spPr>
+          <a:xfrm>
+            <a:off x="7260336" y="4745736"/>
+            <a:ext cx="932688" cy="182880"/>
+          </a:xfrm>
+          <a:prstGeom prst="roundRect">
+            <a:avLst>
+              <a:gd name="adj" fmla="val 15000"/>
+            </a:avLst>
+          </a:prstGeom>
+          <a:solidFill>
+            <a:srgbClr val="FFFFFF"/>
+          </a:solidFill>
+          <a:ln w="9525">
+            <a:solidFill>
+              <a:srgbClr val="CBD5E1"/>
+            </a:solidFill>
+            <a:prstDash val="solid"/>
+          </a:ln>
+        </p:spPr>
+      </p:sp>
+      <p:sp>
+        <p:nvSpPr>
+          <p:cNvPr id="137" name="Text 135"/>
+          <p:cNvSpPr/>
+          <p:nvPr/>
+        </p:nvSpPr>
+        <p:spPr>
+          <a:xfrm>
+            <a:off x="7260336" y="4745736"/>
+            <a:ext cx="932688" cy="182880"/>
+          </a:xfrm>
+          <a:prstGeom prst="rect">
+            <a:avLst/>
+          </a:prstGeom>
+          <a:noFill/>
+          <a:ln/>
+        </p:spPr>
+        <p:txBody>
+          <a:bodyPr wrap="square" lIns="0" tIns="0" rIns="0" bIns="0" rtlCol="0" anchor="ctr"/>
+          <a:lstStyle/>
+          <a:p>
+            <a:pPr algn="ctr" indent="0" marL="0">
+              <a:buNone/>
+            </a:pPr>
+            <a:r>
+              <a:rPr lang="en-US" sz="750" b="1" dirty="0">
+                <a:solidFill>
+                  <a:srgbClr val="1E293B"/>
+                </a:solidFill>
+              </a:rPr>
+              <a:t>M15</a:t>
+            </a:r>
+            <a:endParaRPr lang="en-US" sz="750" dirty="0"/>
+          </a:p>
+        </p:txBody>
+      </p:sp>
+      <p:sp>
+        <p:nvSpPr>
+          <p:cNvPr id="138" name="Shape 136"/>
+          <p:cNvSpPr/>
+          <p:nvPr/>
+        </p:nvSpPr>
+        <p:spPr>
+          <a:xfrm>
+            <a:off x="7260336" y="4956048"/>
+            <a:ext cx="932688" cy="155448"/>
+          </a:xfrm>
+          <a:prstGeom prst="roundRect">
+            <a:avLst>
+              <a:gd name="adj" fmla="val 17647"/>
+            </a:avLst>
+          </a:prstGeom>
+          <a:solidFill>
+            <a:srgbClr val="F3F4F6"/>
+          </a:solidFill>
+          <a:ln w="9525">
+            <a:solidFill>
+              <a:srgbClr val="D1D5DB"/>
+            </a:solidFill>
+            <a:prstDash val="solid"/>
+          </a:ln>
+        </p:spPr>
+      </p:sp>
+      <p:sp>
+        <p:nvSpPr>
+          <p:cNvPr id="139" name="Text 137"/>
+          <p:cNvSpPr/>
+          <p:nvPr/>
+        </p:nvSpPr>
+        <p:spPr>
+          <a:xfrm>
+            <a:off x="7260336" y="4956048"/>
+            <a:ext cx="932688" cy="155448"/>
+          </a:xfrm>
+          <a:prstGeom prst="rect">
+            <a:avLst/>
+          </a:prstGeom>
+          <a:noFill/>
+          <a:ln/>
+        </p:spPr>
+        <p:txBody>
+          <a:bodyPr wrap="square" lIns="0" tIns="0" rIns="0" bIns="0" rtlCol="0" anchor="ctr"/>
+          <a:lstStyle/>
+          <a:p>
+            <a:pPr algn="ctr" indent="0" marL="0">
+              <a:buNone/>
+            </a:pPr>
+            <a:r>
+              <a:rPr lang="en-US" sz="700" dirty="0">
+                <a:solidFill>
+                  <a:srgbClr val="374151"/>
+                </a:solidFill>
+              </a:rPr>
+              <a:t>Not Started</a:t>
+            </a:r>
+            <a:endParaRPr lang="en-US" sz="700" dirty="0"/>
+          </a:p>
+        </p:txBody>
+      </p:sp>
+      <p:sp>
+        <p:nvSpPr>
+          <p:cNvPr id="140" name="Shape 138"/>
+          <p:cNvSpPr/>
+          <p:nvPr/>
+        </p:nvSpPr>
+        <p:spPr>
+          <a:xfrm>
+            <a:off x="8275320" y="4745736"/>
+            <a:ext cx="932688" cy="182880"/>
+          </a:xfrm>
+          <a:prstGeom prst="roundRect">
+            <a:avLst>
+              <a:gd name="adj" fmla="val 15000"/>
+            </a:avLst>
+          </a:prstGeom>
+          <a:solidFill>
+            <a:srgbClr val="FFFFFF"/>
+          </a:solidFill>
+          <a:ln w="9525">
+            <a:solidFill>
+              <a:srgbClr val="CBD5E1"/>
+            </a:solidFill>
+            <a:prstDash val="solid"/>
+          </a:ln>
+        </p:spPr>
+      </p:sp>
+      <p:sp>
+        <p:nvSpPr>
+          <p:cNvPr id="141" name="Text 139"/>
+          <p:cNvSpPr/>
+          <p:nvPr/>
+        </p:nvSpPr>
+        <p:spPr>
+          <a:xfrm>
+            <a:off x="8275320" y="4745736"/>
+            <a:ext cx="932688" cy="182880"/>
+          </a:xfrm>
+          <a:prstGeom prst="rect">
+            <a:avLst/>
+          </a:prstGeom>
+          <a:noFill/>
+          <a:ln/>
+        </p:spPr>
+        <p:txBody>
+          <a:bodyPr wrap="square" lIns="0" tIns="0" rIns="0" bIns="0" rtlCol="0" anchor="ctr"/>
+          <a:lstStyle/>
+          <a:p>
+            <a:pPr algn="ctr" indent="0" marL="0">
+              <a:buNone/>
+            </a:pPr>
+            <a:r>
+              <a:rPr lang="en-US" sz="750" b="1" dirty="0">
+                <a:solidFill>
+                  <a:srgbClr val="1E293B"/>
+                </a:solidFill>
+              </a:rPr>
+              <a:t>Highlights</a:t>
+            </a:r>
+            <a:endParaRPr lang="en-US" sz="750" dirty="0"/>
+          </a:p>
+        </p:txBody>
+      </p:sp>
+      <p:sp>
+        <p:nvSpPr>
+          <p:cNvPr id="142" name="Shape 140"/>
+          <p:cNvSpPr/>
+          <p:nvPr/>
+        </p:nvSpPr>
+        <p:spPr>
+          <a:xfrm>
+            <a:off x="8275320" y="4956048"/>
+            <a:ext cx="932688" cy="155448"/>
+          </a:xfrm>
+          <a:prstGeom prst="roundRect">
+            <a:avLst>
+              <a:gd name="adj" fmla="val 17647"/>
+            </a:avLst>
+          </a:prstGeom>
+          <a:solidFill>
+            <a:srgbClr val="F3F4F6"/>
+          </a:solidFill>
+          <a:ln w="9525">
+            <a:solidFill>
+              <a:srgbClr val="D1D5DB"/>
+            </a:solidFill>
+            <a:prstDash val="solid"/>
+          </a:ln>
+        </p:spPr>
+      </p:sp>
+      <p:sp>
+        <p:nvSpPr>
+          <p:cNvPr id="143" name="Text 141"/>
+          <p:cNvSpPr/>
+          <p:nvPr/>
+        </p:nvSpPr>
+        <p:spPr>
+          <a:xfrm>
+            <a:off x="8275320" y="4956048"/>
+            <a:ext cx="932688" cy="155448"/>
+          </a:xfrm>
+          <a:prstGeom prst="rect">
+            <a:avLst/>
+          </a:prstGeom>
+          <a:noFill/>
+          <a:ln/>
+        </p:spPr>
+        <p:txBody>
+          <a:bodyPr wrap="square" lIns="0" tIns="0" rIns="0" bIns="0" rtlCol="0" anchor="ctr"/>
+          <a:lstStyle/>
+          <a:p>
+            <a:pPr algn="ctr" indent="0" marL="0">
+              <a:buNone/>
+            </a:pPr>
+            <a:r>
+              <a:rPr lang="en-US" sz="700" dirty="0">
+                <a:solidFill>
+                  <a:srgbClr val="374151"/>
+                </a:solidFill>
+              </a:rPr>
+              <a:t>Not Started</a:t>
+            </a:r>
+            <a:endParaRPr lang="en-US" sz="700" dirty="0"/>
+          </a:p>
+        </p:txBody>
+      </p:sp>
+      <p:sp>
+        <p:nvSpPr>
+          <p:cNvPr id="144" name="Shape 142"/>
+          <p:cNvSpPr/>
+          <p:nvPr/>
+        </p:nvSpPr>
+        <p:spPr>
+          <a:xfrm>
+            <a:off x="1170432" y="5202936"/>
+            <a:ext cx="932688" cy="182880"/>
+          </a:xfrm>
+          <a:prstGeom prst="roundRect">
+            <a:avLst>
+              <a:gd name="adj" fmla="val 15000"/>
+            </a:avLst>
+          </a:prstGeom>
+          <a:solidFill>
+            <a:srgbClr val="FFFFFF"/>
+          </a:solidFill>
+          <a:ln w="9525">
+            <a:solidFill>
+              <a:srgbClr val="CBD5E1"/>
+            </a:solidFill>
+            <a:prstDash val="solid"/>
+          </a:ln>
+        </p:spPr>
+      </p:sp>
+      <p:sp>
+        <p:nvSpPr>
+          <p:cNvPr id="145" name="Text 143"/>
+          <p:cNvSpPr/>
+          <p:nvPr/>
+        </p:nvSpPr>
+        <p:spPr>
+          <a:xfrm>
+            <a:off x="1170432" y="5202936"/>
+            <a:ext cx="932688" cy="182880"/>
+          </a:xfrm>
+          <a:prstGeom prst="rect">
+            <a:avLst/>
+          </a:prstGeom>
+          <a:noFill/>
+          <a:ln/>
+        </p:spPr>
+        <p:txBody>
+          <a:bodyPr wrap="square" lIns="0" tIns="0" rIns="0" bIns="0" rtlCol="0" anchor="ctr"/>
+          <a:lstStyle/>
+          <a:p>
+            <a:pPr algn="ctr" indent="0" marL="0">
+              <a:buNone/>
+            </a:pPr>
+            <a:r>
+              <a:rPr lang="en-US" sz="750" b="1" dirty="0">
+                <a:solidFill>
+                  <a:srgbClr val="1E293B"/>
+                </a:solidFill>
+              </a:rPr>
+              <a:t>Linear</a:t>
+            </a:r>
+            <a:endParaRPr lang="en-US" sz="750" dirty="0"/>
+          </a:p>
+        </p:txBody>
+      </p:sp>
+      <p:sp>
+        <p:nvSpPr>
+          <p:cNvPr id="146" name="Shape 144"/>
+          <p:cNvSpPr/>
+          <p:nvPr/>
+        </p:nvSpPr>
+        <p:spPr>
+          <a:xfrm>
+            <a:off x="1170432" y="5413248"/>
+            <a:ext cx="932688" cy="155448"/>
+          </a:xfrm>
+          <a:prstGeom prst="roundRect">
+            <a:avLst>
+              <a:gd name="adj" fmla="val 17647"/>
+            </a:avLst>
+          </a:prstGeom>
+          <a:solidFill>
+            <a:srgbClr val="1558A8"/>
+          </a:solidFill>
+          <a:ln w="12700">
+            <a:solidFill>
+              <a:srgbClr val="1558A8"/>
+            </a:solidFill>
+            <a:prstDash val="solid"/>
+          </a:ln>
+        </p:spPr>
+      </p:sp>
+      <p:sp>
+        <p:nvSpPr>
+          <p:cNvPr id="147" name="Text 145"/>
+          <p:cNvSpPr/>
+          <p:nvPr/>
+        </p:nvSpPr>
+        <p:spPr>
+          <a:xfrm>
+            <a:off x="1170432" y="5413248"/>
+            <a:ext cx="932688" cy="155448"/>
+          </a:xfrm>
+          <a:prstGeom prst="rect">
+            <a:avLst/>
+          </a:prstGeom>
+          <a:noFill/>
+          <a:ln/>
+        </p:spPr>
+        <p:txBody>
+          <a:bodyPr wrap="square" lIns="0" tIns="0" rIns="0" bIns="0" rtlCol="0" anchor="ctr"/>
+          <a:lstStyle/>
+          <a:p>
+            <a:pPr algn="ctr" indent="0" marL="0">
+              <a:buNone/>
+            </a:pPr>
+            <a:r>
+              <a:rPr lang="en-US" sz="700" dirty="0">
+                <a:solidFill>
+                  <a:srgbClr val="FFFFFF"/>
+                </a:solidFill>
+              </a:rPr>
+              <a:t>In Progress</a:t>
+            </a:r>
+            <a:endParaRPr lang="en-US" sz="700" dirty="0"/>
+          </a:p>
+        </p:txBody>
+      </p:sp>
+      <p:sp>
+        <p:nvSpPr>
+          <p:cNvPr id="148" name="Shape 146"/>
+          <p:cNvSpPr/>
+          <p:nvPr/>
+        </p:nvSpPr>
+        <p:spPr>
+          <a:xfrm>
+            <a:off x="164592" y="5705856"/>
+            <a:ext cx="9116568" cy="1170432"/>
           </a:xfrm>
           <a:prstGeom prst="rect">
             <a:avLst/>
@@ -11404,14 +13416,14 @@
       </p:sp>
       <p:sp>
         <p:nvSpPr>
-          <p:cNvPr id="85" name="Shape 83"/>
-          <p:cNvSpPr/>
-          <p:nvPr/>
-        </p:nvSpPr>
-        <p:spPr>
-          <a:xfrm>
-            <a:off x="182880" y="3145536"/>
-            <a:ext cx="859536" cy="932688"/>
+          <p:cNvPr id="149" name="Shape 147"/>
+          <p:cNvSpPr/>
+          <p:nvPr/>
+        </p:nvSpPr>
+        <p:spPr>
+          <a:xfrm>
+            <a:off x="182880" y="5779008"/>
+            <a:ext cx="859536" cy="1024128"/>
           </a:xfrm>
           <a:prstGeom prst="roundRect">
             <a:avLst>
@@ -11431,14 +13443,14 @@
       </p:sp>
       <p:sp>
         <p:nvSpPr>
-          <p:cNvPr id="86" name="Text 84"/>
-          <p:cNvSpPr/>
-          <p:nvPr/>
-        </p:nvSpPr>
-        <p:spPr>
-          <a:xfrm>
-            <a:off x="182880" y="3145536"/>
-            <a:ext cx="859536" cy="932688"/>
+          <p:cNvPr id="150" name="Text 148"/>
+          <p:cNvSpPr/>
+          <p:nvPr/>
+        </p:nvSpPr>
+        <p:spPr>
+          <a:xfrm>
+            <a:off x="182880" y="5779008"/>
+            <a:ext cx="859536" cy="1024128"/>
           </a:xfrm>
           <a:prstGeom prst="rect">
             <a:avLst/>
@@ -11459,7 +13471,7 @@
                   <a:srgbClr val="FFFFFF"/>
                 </a:solidFill>
               </a:rPr>
-              <a:t>Player</a:t>
+              <a:t>Onboarding</a:t>
             </a:r>
             <a:endParaRPr lang="en-US" sz="950" dirty="0"/>
           </a:p>
@@ -11467,13 +13479,13 @@
       </p:sp>
       <p:sp>
         <p:nvSpPr>
-          <p:cNvPr id="87" name="Text 85"/>
-          <p:cNvSpPr/>
-          <p:nvPr/>
-        </p:nvSpPr>
-        <p:spPr>
-          <a:xfrm>
-            <a:off x="1170432" y="3118104"/>
+          <p:cNvPr id="151" name="Text 149"/>
+          <p:cNvSpPr/>
+          <p:nvPr/>
+        </p:nvSpPr>
+        <p:spPr>
+          <a:xfrm>
+            <a:off x="1170432" y="5751576"/>
             <a:ext cx="8110728" cy="182880"/>
           </a:xfrm>
           <a:prstGeom prst="rect">
@@ -11495,7 +13507,7 @@
                   <a:srgbClr val="9CA3AF"/>
                 </a:solidFill>
               </a:rPr>
-              <a:t>2 / 5 In Progress</a:t>
+              <a:t>1 / 5 In Progress</a:t>
             </a:r>
             <a:endParaRPr lang="en-US" sz="750" dirty="0"/>
           </a:p>
@@ -11503,13 +13515,13 @@
       </p:sp>
       <p:sp>
         <p:nvSpPr>
-          <p:cNvPr id="88" name="Shape 86"/>
-          <p:cNvSpPr/>
-          <p:nvPr/>
-        </p:nvSpPr>
-        <p:spPr>
-          <a:xfrm>
-            <a:off x="1170432" y="3337560"/>
+          <p:cNvPr id="152" name="Shape 150"/>
+          <p:cNvSpPr/>
+          <p:nvPr/>
+        </p:nvSpPr>
+        <p:spPr>
+          <a:xfrm>
+            <a:off x="1170432" y="5971032"/>
             <a:ext cx="932688" cy="182880"/>
           </a:xfrm>
           <a:prstGeom prst="roundRect">
@@ -11530,13 +13542,13 @@
       </p:sp>
       <p:sp>
         <p:nvSpPr>
-          <p:cNvPr id="89" name="Text 87"/>
-          <p:cNvSpPr/>
-          <p:nvPr/>
-        </p:nvSpPr>
-        <p:spPr>
-          <a:xfrm>
-            <a:off x="1170432" y="3337560"/>
+          <p:cNvPr id="153" name="Text 151"/>
+          <p:cNvSpPr/>
+          <p:nvPr/>
+        </p:nvSpPr>
+        <p:spPr>
+          <a:xfrm>
+            <a:off x="1170432" y="5971032"/>
             <a:ext cx="932688" cy="182880"/>
           </a:xfrm>
           <a:prstGeom prst="rect">
@@ -11558,7 +13570,7 @@
                   <a:srgbClr val="1E293B"/>
                 </a:solidFill>
               </a:rPr>
-              <a:t>Web Player</a:t>
+              <a:t>Unentitled</a:t>
             </a:r>
             <a:endParaRPr lang="en-US" sz="750" dirty="0"/>
           </a:p>
@@ -11566,13 +13578,391 @@
       </p:sp>
       <p:sp>
         <p:nvSpPr>
-          <p:cNvPr id="90" name="Shape 88"/>
-          <p:cNvSpPr/>
-          <p:nvPr/>
-        </p:nvSpPr>
-        <p:spPr>
-          <a:xfrm>
-            <a:off x="1170432" y="3547872"/>
+          <p:cNvPr id="154" name="Shape 152"/>
+          <p:cNvSpPr/>
+          <p:nvPr/>
+        </p:nvSpPr>
+        <p:spPr>
+          <a:xfrm>
+            <a:off x="1170432" y="6181344"/>
+            <a:ext cx="932688" cy="155448"/>
+          </a:xfrm>
+          <a:prstGeom prst="roundRect">
+            <a:avLst>
+              <a:gd name="adj" fmla="val 17647"/>
+            </a:avLst>
+          </a:prstGeom>
+          <a:solidFill>
+            <a:srgbClr val="F3F4F6"/>
+          </a:solidFill>
+          <a:ln w="9525">
+            <a:solidFill>
+              <a:srgbClr val="D1D5DB"/>
+            </a:solidFill>
+            <a:prstDash val="solid"/>
+          </a:ln>
+        </p:spPr>
+      </p:sp>
+      <p:sp>
+        <p:nvSpPr>
+          <p:cNvPr id="155" name="Text 153"/>
+          <p:cNvSpPr/>
+          <p:nvPr/>
+        </p:nvSpPr>
+        <p:spPr>
+          <a:xfrm>
+            <a:off x="1170432" y="6181344"/>
+            <a:ext cx="932688" cy="155448"/>
+          </a:xfrm>
+          <a:prstGeom prst="rect">
+            <a:avLst/>
+          </a:prstGeom>
+          <a:noFill/>
+          <a:ln/>
+        </p:spPr>
+        <p:txBody>
+          <a:bodyPr wrap="square" lIns="0" tIns="0" rIns="0" bIns="0" rtlCol="0" anchor="ctr"/>
+          <a:lstStyle/>
+          <a:p>
+            <a:pPr algn="ctr" indent="0" marL="0">
+              <a:buNone/>
+            </a:pPr>
+            <a:r>
+              <a:rPr lang="en-US" sz="700" dirty="0">
+                <a:solidFill>
+                  <a:srgbClr val="374151"/>
+                </a:solidFill>
+              </a:rPr>
+              <a:t>Not Started</a:t>
+            </a:r>
+            <a:endParaRPr lang="en-US" sz="700" dirty="0"/>
+          </a:p>
+        </p:txBody>
+      </p:sp>
+      <p:sp>
+        <p:nvSpPr>
+          <p:cNvPr id="156" name="Shape 154"/>
+          <p:cNvSpPr/>
+          <p:nvPr/>
+        </p:nvSpPr>
+        <p:spPr>
+          <a:xfrm>
+            <a:off x="2185416" y="5971032"/>
+            <a:ext cx="932688" cy="182880"/>
+          </a:xfrm>
+          <a:prstGeom prst="roundRect">
+            <a:avLst>
+              <a:gd name="adj" fmla="val 15000"/>
+            </a:avLst>
+          </a:prstGeom>
+          <a:solidFill>
+            <a:srgbClr val="FFFFFF"/>
+          </a:solidFill>
+          <a:ln w="9525">
+            <a:solidFill>
+              <a:srgbClr val="CBD5E1"/>
+            </a:solidFill>
+            <a:prstDash val="solid"/>
+          </a:ln>
+        </p:spPr>
+      </p:sp>
+      <p:sp>
+        <p:nvSpPr>
+          <p:cNvPr id="157" name="Text 155"/>
+          <p:cNvSpPr/>
+          <p:nvPr/>
+        </p:nvSpPr>
+        <p:spPr>
+          <a:xfrm>
+            <a:off x="2185416" y="5971032"/>
+            <a:ext cx="932688" cy="182880"/>
+          </a:xfrm>
+          <a:prstGeom prst="rect">
+            <a:avLst/>
+          </a:prstGeom>
+          <a:noFill/>
+          <a:ln/>
+        </p:spPr>
+        <p:txBody>
+          <a:bodyPr wrap="square" lIns="0" tIns="0" rIns="0" bIns="0" rtlCol="0" anchor="ctr"/>
+          <a:lstStyle/>
+          <a:p>
+            <a:pPr algn="ctr" indent="0" marL="0">
+              <a:buNone/>
+            </a:pPr>
+            <a:r>
+              <a:rPr lang="en-US" sz="750" b="1" dirty="0">
+                <a:solidFill>
+                  <a:srgbClr val="1E293B"/>
+                </a:solidFill>
+              </a:rPr>
+              <a:t>Sign-in</a:t>
+            </a:r>
+            <a:endParaRPr lang="en-US" sz="750" dirty="0"/>
+          </a:p>
+        </p:txBody>
+      </p:sp>
+      <p:sp>
+        <p:nvSpPr>
+          <p:cNvPr id="158" name="Shape 156"/>
+          <p:cNvSpPr/>
+          <p:nvPr/>
+        </p:nvSpPr>
+        <p:spPr>
+          <a:xfrm>
+            <a:off x="2185416" y="6181344"/>
+            <a:ext cx="932688" cy="155448"/>
+          </a:xfrm>
+          <a:prstGeom prst="roundRect">
+            <a:avLst>
+              <a:gd name="adj" fmla="val 17647"/>
+            </a:avLst>
+          </a:prstGeom>
+          <a:solidFill>
+            <a:srgbClr val="F3F4F6"/>
+          </a:solidFill>
+          <a:ln w="9525">
+            <a:solidFill>
+              <a:srgbClr val="D1D5DB"/>
+            </a:solidFill>
+            <a:prstDash val="solid"/>
+          </a:ln>
+        </p:spPr>
+      </p:sp>
+      <p:sp>
+        <p:nvSpPr>
+          <p:cNvPr id="159" name="Text 157"/>
+          <p:cNvSpPr/>
+          <p:nvPr/>
+        </p:nvSpPr>
+        <p:spPr>
+          <a:xfrm>
+            <a:off x="2185416" y="6181344"/>
+            <a:ext cx="932688" cy="155448"/>
+          </a:xfrm>
+          <a:prstGeom prst="rect">
+            <a:avLst/>
+          </a:prstGeom>
+          <a:noFill/>
+          <a:ln/>
+        </p:spPr>
+        <p:txBody>
+          <a:bodyPr wrap="square" lIns="0" tIns="0" rIns="0" bIns="0" rtlCol="0" anchor="ctr"/>
+          <a:lstStyle/>
+          <a:p>
+            <a:pPr algn="ctr" indent="0" marL="0">
+              <a:buNone/>
+            </a:pPr>
+            <a:r>
+              <a:rPr lang="en-US" sz="700" dirty="0">
+                <a:solidFill>
+                  <a:srgbClr val="374151"/>
+                </a:solidFill>
+              </a:rPr>
+              <a:t>Not Started</a:t>
+            </a:r>
+            <a:endParaRPr lang="en-US" sz="700" dirty="0"/>
+          </a:p>
+        </p:txBody>
+      </p:sp>
+      <p:sp>
+        <p:nvSpPr>
+          <p:cNvPr id="160" name="Shape 158"/>
+          <p:cNvSpPr/>
+          <p:nvPr/>
+        </p:nvSpPr>
+        <p:spPr>
+          <a:xfrm>
+            <a:off x="3200400" y="5971032"/>
+            <a:ext cx="932688" cy="182880"/>
+          </a:xfrm>
+          <a:prstGeom prst="roundRect">
+            <a:avLst>
+              <a:gd name="adj" fmla="val 15000"/>
+            </a:avLst>
+          </a:prstGeom>
+          <a:solidFill>
+            <a:srgbClr val="FFFFFF"/>
+          </a:solidFill>
+          <a:ln w="9525">
+            <a:solidFill>
+              <a:srgbClr val="CBD5E1"/>
+            </a:solidFill>
+            <a:prstDash val="solid"/>
+          </a:ln>
+        </p:spPr>
+      </p:sp>
+      <p:sp>
+        <p:nvSpPr>
+          <p:cNvPr id="161" name="Text 159"/>
+          <p:cNvSpPr/>
+          <p:nvPr/>
+        </p:nvSpPr>
+        <p:spPr>
+          <a:xfrm>
+            <a:off x="3200400" y="5971032"/>
+            <a:ext cx="932688" cy="182880"/>
+          </a:xfrm>
+          <a:prstGeom prst="rect">
+            <a:avLst/>
+          </a:prstGeom>
+          <a:noFill/>
+          <a:ln/>
+        </p:spPr>
+        <p:txBody>
+          <a:bodyPr wrap="square" lIns="0" tIns="0" rIns="0" bIns="0" rtlCol="0" anchor="ctr"/>
+          <a:lstStyle/>
+          <a:p>
+            <a:pPr algn="ctr" indent="0" marL="0">
+              <a:buNone/>
+            </a:pPr>
+            <a:r>
+              <a:rPr lang="en-US" sz="750" b="1" dirty="0">
+                <a:solidFill>
+                  <a:srgbClr val="1E293B"/>
+                </a:solidFill>
+              </a:rPr>
+              <a:t>Subscription</a:t>
+            </a:r>
+            <a:endParaRPr lang="en-US" sz="750" dirty="0"/>
+          </a:p>
+        </p:txBody>
+      </p:sp>
+      <p:sp>
+        <p:nvSpPr>
+          <p:cNvPr id="162" name="Shape 160"/>
+          <p:cNvSpPr/>
+          <p:nvPr/>
+        </p:nvSpPr>
+        <p:spPr>
+          <a:xfrm>
+            <a:off x="3200400" y="6181344"/>
+            <a:ext cx="932688" cy="155448"/>
+          </a:xfrm>
+          <a:prstGeom prst="roundRect">
+            <a:avLst>
+              <a:gd name="adj" fmla="val 17647"/>
+            </a:avLst>
+          </a:prstGeom>
+          <a:solidFill>
+            <a:srgbClr val="F3F4F6"/>
+          </a:solidFill>
+          <a:ln w="9525">
+            <a:solidFill>
+              <a:srgbClr val="D1D5DB"/>
+            </a:solidFill>
+            <a:prstDash val="solid"/>
+          </a:ln>
+        </p:spPr>
+      </p:sp>
+      <p:sp>
+        <p:nvSpPr>
+          <p:cNvPr id="163" name="Text 161"/>
+          <p:cNvSpPr/>
+          <p:nvPr/>
+        </p:nvSpPr>
+        <p:spPr>
+          <a:xfrm>
+            <a:off x="3200400" y="6181344"/>
+            <a:ext cx="932688" cy="155448"/>
+          </a:xfrm>
+          <a:prstGeom prst="rect">
+            <a:avLst/>
+          </a:prstGeom>
+          <a:noFill/>
+          <a:ln/>
+        </p:spPr>
+        <p:txBody>
+          <a:bodyPr wrap="square" lIns="0" tIns="0" rIns="0" bIns="0" rtlCol="0" anchor="ctr"/>
+          <a:lstStyle/>
+          <a:p>
+            <a:pPr algn="ctr" indent="0" marL="0">
+              <a:buNone/>
+            </a:pPr>
+            <a:r>
+              <a:rPr lang="en-US" sz="700" dirty="0">
+                <a:solidFill>
+                  <a:srgbClr val="374151"/>
+                </a:solidFill>
+              </a:rPr>
+              <a:t>Not Started</a:t>
+            </a:r>
+            <a:endParaRPr lang="en-US" sz="700" dirty="0"/>
+          </a:p>
+        </p:txBody>
+      </p:sp>
+      <p:sp>
+        <p:nvSpPr>
+          <p:cNvPr id="164" name="Shape 162"/>
+          <p:cNvSpPr/>
+          <p:nvPr/>
+        </p:nvSpPr>
+        <p:spPr>
+          <a:xfrm>
+            <a:off x="4215384" y="5971032"/>
+            <a:ext cx="932688" cy="182880"/>
+          </a:xfrm>
+          <a:prstGeom prst="roundRect">
+            <a:avLst>
+              <a:gd name="adj" fmla="val 15000"/>
+            </a:avLst>
+          </a:prstGeom>
+          <a:solidFill>
+            <a:srgbClr val="FFFFFF"/>
+          </a:solidFill>
+          <a:ln w="9525">
+            <a:solidFill>
+              <a:srgbClr val="CBD5E1"/>
+            </a:solidFill>
+            <a:prstDash val="solid"/>
+          </a:ln>
+        </p:spPr>
+      </p:sp>
+      <p:sp>
+        <p:nvSpPr>
+          <p:cNvPr id="165" name="Text 163"/>
+          <p:cNvSpPr/>
+          <p:nvPr/>
+        </p:nvSpPr>
+        <p:spPr>
+          <a:xfrm>
+            <a:off x="4215384" y="5971032"/>
+            <a:ext cx="932688" cy="182880"/>
+          </a:xfrm>
+          <a:prstGeom prst="rect">
+            <a:avLst/>
+          </a:prstGeom>
+          <a:noFill/>
+          <a:ln/>
+        </p:spPr>
+        <p:txBody>
+          <a:bodyPr wrap="square" lIns="0" tIns="0" rIns="0" bIns="0" rtlCol="0" anchor="ctr"/>
+          <a:lstStyle/>
+          <a:p>
+            <a:pPr algn="ctr" indent="0" marL="0">
+              <a:buNone/>
+            </a:pPr>
+            <a:r>
+              <a:rPr lang="en-US" sz="750" b="1" dirty="0">
+                <a:solidFill>
+                  <a:srgbClr val="1E293B"/>
+                </a:solidFill>
+              </a:rPr>
+              <a:t>MVPD</a:t>
+            </a:r>
+            <a:endParaRPr lang="en-US" sz="750" dirty="0"/>
+          </a:p>
+        </p:txBody>
+      </p:sp>
+      <p:sp>
+        <p:nvSpPr>
+          <p:cNvPr id="166" name="Shape 164"/>
+          <p:cNvSpPr/>
+          <p:nvPr/>
+        </p:nvSpPr>
+        <p:spPr>
+          <a:xfrm>
+            <a:off x="4215384" y="6181344"/>
             <a:ext cx="932688" cy="155448"/>
           </a:xfrm>
           <a:prstGeom prst="roundRect">
@@ -11593,13 +13983,13 @@
       </p:sp>
       <p:sp>
         <p:nvSpPr>
-          <p:cNvPr id="91" name="Text 89"/>
-          <p:cNvSpPr/>
-          <p:nvPr/>
-        </p:nvSpPr>
-        <p:spPr>
-          <a:xfrm>
-            <a:off x="1170432" y="3547872"/>
+          <p:cNvPr id="167" name="Text 165"/>
+          <p:cNvSpPr/>
+          <p:nvPr/>
+        </p:nvSpPr>
+        <p:spPr>
+          <a:xfrm>
+            <a:off x="4215384" y="6181344"/>
             <a:ext cx="932688" cy="155448"/>
           </a:xfrm>
           <a:prstGeom prst="rect">
@@ -11629,13 +14019,13 @@
       </p:sp>
       <p:sp>
         <p:nvSpPr>
-          <p:cNvPr id="92" name="Shape 90"/>
-          <p:cNvSpPr/>
-          <p:nvPr/>
-        </p:nvSpPr>
-        <p:spPr>
-          <a:xfrm>
-            <a:off x="2185416" y="3337560"/>
+          <p:cNvPr id="168" name="Shape 166"/>
+          <p:cNvSpPr/>
+          <p:nvPr/>
+        </p:nvSpPr>
+        <p:spPr>
+          <a:xfrm>
+            <a:off x="5230368" y="5971032"/>
             <a:ext cx="932688" cy="182880"/>
           </a:xfrm>
           <a:prstGeom prst="roundRect">
@@ -11656,13 +14046,13 @@
       </p:sp>
       <p:sp>
         <p:nvSpPr>
-          <p:cNvPr id="93" name="Text 91"/>
-          <p:cNvSpPr/>
-          <p:nvPr/>
-        </p:nvSpPr>
-        <p:spPr>
-          <a:xfrm>
-            <a:off x="2185416" y="3337560"/>
+          <p:cNvPr id="169" name="Text 167"/>
+          <p:cNvSpPr/>
+          <p:nvPr/>
+        </p:nvSpPr>
+        <p:spPr>
+          <a:xfrm>
+            <a:off x="5230368" y="5971032"/>
             <a:ext cx="932688" cy="182880"/>
           </a:xfrm>
           <a:prstGeom prst="rect">
@@ -11684,7 +14074,7 @@
                   <a:srgbClr val="1E293B"/>
                 </a:solidFill>
               </a:rPr>
-              <a:t>iOS Player</a:t>
+              <a:t>Promos</a:t>
             </a:r>
             <a:endParaRPr lang="en-US" sz="750" dirty="0"/>
           </a:p>
@@ -11692,18 +14082,795 @@
       </p:sp>
       <p:sp>
         <p:nvSpPr>
-          <p:cNvPr id="94" name="Shape 92"/>
-          <p:cNvSpPr/>
-          <p:nvPr/>
-        </p:nvSpPr>
-        <p:spPr>
-          <a:xfrm>
-            <a:off x="2185416" y="3547872"/>
+          <p:cNvPr id="170" name="Shape 168"/>
+          <p:cNvSpPr/>
+          <p:nvPr/>
+        </p:nvSpPr>
+        <p:spPr>
+          <a:xfrm>
+            <a:off x="5230368" y="6181344"/>
             <a:ext cx="932688" cy="155448"/>
           </a:xfrm>
           <a:prstGeom prst="roundRect">
             <a:avLst>
               <a:gd name="adj" fmla="val 17647"/>
+            </a:avLst>
+          </a:prstGeom>
+          <a:solidFill>
+            <a:srgbClr val="F3F4F6"/>
+          </a:solidFill>
+          <a:ln w="9525">
+            <a:solidFill>
+              <a:srgbClr val="D1D5DB"/>
+            </a:solidFill>
+            <a:prstDash val="solid"/>
+          </a:ln>
+        </p:spPr>
+      </p:sp>
+      <p:sp>
+        <p:nvSpPr>
+          <p:cNvPr id="171" name="Text 169"/>
+          <p:cNvSpPr/>
+          <p:nvPr/>
+        </p:nvSpPr>
+        <p:spPr>
+          <a:xfrm>
+            <a:off x="5230368" y="6181344"/>
+            <a:ext cx="932688" cy="155448"/>
+          </a:xfrm>
+          <a:prstGeom prst="rect">
+            <a:avLst/>
+          </a:prstGeom>
+          <a:noFill/>
+          <a:ln/>
+        </p:spPr>
+        <p:txBody>
+          <a:bodyPr wrap="square" lIns="0" tIns="0" rIns="0" bIns="0" rtlCol="0" anchor="ctr"/>
+          <a:lstStyle/>
+          <a:p>
+            <a:pPr algn="ctr" indent="0" marL="0">
+              <a:buNone/>
+            </a:pPr>
+            <a:r>
+              <a:rPr lang="en-US" sz="700" dirty="0">
+                <a:solidFill>
+                  <a:srgbClr val="374151"/>
+                </a:solidFill>
+              </a:rPr>
+              <a:t>Not Started</a:t>
+            </a:r>
+            <a:endParaRPr lang="en-US" sz="700" dirty="0"/>
+          </a:p>
+        </p:txBody>
+      </p:sp>
+      <p:sp>
+        <p:nvSpPr>
+          <p:cNvPr id="172" name="Shape 170"/>
+          <p:cNvSpPr/>
+          <p:nvPr/>
+        </p:nvSpPr>
+        <p:spPr>
+          <a:xfrm>
+            <a:off x="9372600" y="804672"/>
+            <a:ext cx="2834640" cy="6071616"/>
+          </a:xfrm>
+          <a:prstGeom prst="rect">
+            <a:avLst/>
+          </a:prstGeom>
+          <a:solidFill>
+            <a:srgbClr val="F8FAFB"/>
+          </a:solidFill>
+          <a:ln w="12700">
+            <a:solidFill>
+              <a:srgbClr val="DDE1E6"/>
+            </a:solidFill>
+            <a:prstDash val="solid"/>
+          </a:ln>
+        </p:spPr>
+      </p:sp>
+      <p:sp>
+        <p:nvSpPr>
+          <p:cNvPr id="173" name="Text 171"/>
+          <p:cNvSpPr/>
+          <p:nvPr/>
+        </p:nvSpPr>
+        <p:spPr>
+          <a:xfrm>
+            <a:off x="9500616" y="950976"/>
+            <a:ext cx="2633472" cy="201168"/>
+          </a:xfrm>
+          <a:prstGeom prst="rect">
+            <a:avLst/>
+          </a:prstGeom>
+          <a:noFill/>
+          <a:ln/>
+        </p:spPr>
+        <p:txBody>
+          <a:bodyPr wrap="square" lIns="0" tIns="0" rIns="0" bIns="0" rtlCol="0" anchor="ctr"/>
+          <a:lstStyle/>
+          <a:p>
+            <a:pPr indent="0" marL="0">
+              <a:buNone/>
+            </a:pPr>
+            <a:r>
+              <a:rPr lang="en-US" sz="950" b="1" dirty="0">
+                <a:solidFill>
+                  <a:srgbClr val="111827"/>
+                </a:solidFill>
+              </a:rPr>
+              <a:t>Progress by Category</a:t>
+            </a:r>
+            <a:endParaRPr lang="en-US" sz="950" dirty="0"/>
+          </a:p>
+        </p:txBody>
+      </p:sp>
+      <p:sp>
+        <p:nvSpPr>
+          <p:cNvPr id="174" name="Text 172"/>
+          <p:cNvSpPr/>
+          <p:nvPr/>
+        </p:nvSpPr>
+        <p:spPr>
+          <a:xfrm>
+            <a:off x="9500616" y="1216152"/>
+            <a:ext cx="1803928" cy="164592"/>
+          </a:xfrm>
+          <a:prstGeom prst="rect">
+            <a:avLst/>
+          </a:prstGeom>
+          <a:noFill/>
+          <a:ln/>
+        </p:spPr>
+        <p:txBody>
+          <a:bodyPr wrap="square" lIns="0" tIns="0" rIns="0" bIns="0" rtlCol="0" anchor="ctr"/>
+          <a:lstStyle/>
+          <a:p>
+            <a:pPr indent="0" marL="0">
+              <a:buNone/>
+            </a:pPr>
+            <a:r>
+              <a:rPr lang="en-US" sz="800" dirty="0">
+                <a:solidFill>
+                  <a:srgbClr val="374151"/>
+                </a:solidFill>
+              </a:rPr>
+              <a:t>Platforms</a:t>
+            </a:r>
+            <a:endParaRPr lang="en-US" sz="800" dirty="0"/>
+          </a:p>
+        </p:txBody>
+      </p:sp>
+      <p:sp>
+        <p:nvSpPr>
+          <p:cNvPr id="175" name="Text 173"/>
+          <p:cNvSpPr/>
+          <p:nvPr/>
+        </p:nvSpPr>
+        <p:spPr>
+          <a:xfrm>
+            <a:off x="11713464" y="1216152"/>
+            <a:ext cx="365760" cy="164592"/>
+          </a:xfrm>
+          <a:prstGeom prst="rect">
+            <a:avLst/>
+          </a:prstGeom>
+          <a:noFill/>
+          <a:ln/>
+        </p:spPr>
+        <p:txBody>
+          <a:bodyPr wrap="square" lIns="0" tIns="0" rIns="0" bIns="0" rtlCol="0" anchor="ctr"/>
+          <a:lstStyle/>
+          <a:p>
+            <a:pPr algn="r" indent="0" marL="0">
+              <a:buNone/>
+            </a:pPr>
+            <a:r>
+              <a:rPr lang="en-US" sz="800" b="1" dirty="0">
+                <a:solidFill>
+                  <a:srgbClr val="9CA3AF"/>
+                </a:solidFill>
+              </a:rPr>
+              <a:t>0%</a:t>
+            </a:r>
+            <a:endParaRPr lang="en-US" sz="800" dirty="0"/>
+          </a:p>
+        </p:txBody>
+      </p:sp>
+      <p:sp>
+        <p:nvSpPr>
+          <p:cNvPr id="176" name="Shape 174"/>
+          <p:cNvSpPr/>
+          <p:nvPr/>
+        </p:nvSpPr>
+        <p:spPr>
+          <a:xfrm>
+            <a:off x="9500616" y="1399032"/>
+            <a:ext cx="2505456" cy="82296"/>
+          </a:xfrm>
+          <a:prstGeom prst="roundRect">
+            <a:avLst>
+              <a:gd name="adj" fmla="val 50000"/>
+            </a:avLst>
+          </a:prstGeom>
+          <a:solidFill>
+            <a:srgbClr val="E5E7EB"/>
+          </a:solidFill>
+          <a:ln w="12700">
+            <a:solidFill>
+              <a:srgbClr val="E5E7EB"/>
+            </a:solidFill>
+            <a:prstDash val="solid"/>
+          </a:ln>
+        </p:spPr>
+      </p:sp>
+      <p:sp>
+        <p:nvSpPr>
+          <p:cNvPr id="177" name="Text 175"/>
+          <p:cNvSpPr/>
+          <p:nvPr/>
+        </p:nvSpPr>
+        <p:spPr>
+          <a:xfrm>
+            <a:off x="9500616" y="1572768"/>
+            <a:ext cx="1803928" cy="164592"/>
+          </a:xfrm>
+          <a:prstGeom prst="rect">
+            <a:avLst/>
+          </a:prstGeom>
+          <a:noFill/>
+          <a:ln/>
+        </p:spPr>
+        <p:txBody>
+          <a:bodyPr wrap="square" lIns="0" tIns="0" rIns="0" bIns="0" rtlCol="0" anchor="ctr"/>
+          <a:lstStyle/>
+          <a:p>
+            <a:pPr indent="0" marL="0">
+              <a:buNone/>
+            </a:pPr>
+            <a:r>
+              <a:rPr lang="en-US" sz="800" dirty="0">
+                <a:solidFill>
+                  <a:srgbClr val="374151"/>
+                </a:solidFill>
+              </a:rPr>
+              <a:t>Video Delivery</a:t>
+            </a:r>
+            <a:endParaRPr lang="en-US" sz="800" dirty="0"/>
+          </a:p>
+        </p:txBody>
+      </p:sp>
+      <p:sp>
+        <p:nvSpPr>
+          <p:cNvPr id="178" name="Text 176"/>
+          <p:cNvSpPr/>
+          <p:nvPr/>
+        </p:nvSpPr>
+        <p:spPr>
+          <a:xfrm>
+            <a:off x="11713464" y="1572768"/>
+            <a:ext cx="365760" cy="164592"/>
+          </a:xfrm>
+          <a:prstGeom prst="rect">
+            <a:avLst/>
+          </a:prstGeom>
+          <a:noFill/>
+          <a:ln/>
+        </p:spPr>
+        <p:txBody>
+          <a:bodyPr wrap="square" lIns="0" tIns="0" rIns="0" bIns="0" rtlCol="0" anchor="ctr"/>
+          <a:lstStyle/>
+          <a:p>
+            <a:pPr algn="r" indent="0" marL="0">
+              <a:buNone/>
+            </a:pPr>
+            <a:r>
+              <a:rPr lang="en-US" sz="800" b="1" dirty="0">
+                <a:solidFill>
+                  <a:srgbClr val="9CA3AF"/>
+                </a:solidFill>
+              </a:rPr>
+              <a:t>0%</a:t>
+            </a:r>
+            <a:endParaRPr lang="en-US" sz="800" dirty="0"/>
+          </a:p>
+        </p:txBody>
+      </p:sp>
+      <p:sp>
+        <p:nvSpPr>
+          <p:cNvPr id="179" name="Shape 177"/>
+          <p:cNvSpPr/>
+          <p:nvPr/>
+        </p:nvSpPr>
+        <p:spPr>
+          <a:xfrm>
+            <a:off x="9500616" y="1755648"/>
+            <a:ext cx="2505456" cy="82296"/>
+          </a:xfrm>
+          <a:prstGeom prst="roundRect">
+            <a:avLst>
+              <a:gd name="adj" fmla="val 50000"/>
+            </a:avLst>
+          </a:prstGeom>
+          <a:solidFill>
+            <a:srgbClr val="E5E7EB"/>
+          </a:solidFill>
+          <a:ln w="12700">
+            <a:solidFill>
+              <a:srgbClr val="E5E7EB"/>
+            </a:solidFill>
+            <a:prstDash val="solid"/>
+          </a:ln>
+        </p:spPr>
+      </p:sp>
+      <p:sp>
+        <p:nvSpPr>
+          <p:cNvPr id="180" name="Text 178"/>
+          <p:cNvSpPr/>
+          <p:nvPr/>
+        </p:nvSpPr>
+        <p:spPr>
+          <a:xfrm>
+            <a:off x="9500616" y="1929384"/>
+            <a:ext cx="1803928" cy="164592"/>
+          </a:xfrm>
+          <a:prstGeom prst="rect">
+            <a:avLst/>
+          </a:prstGeom>
+          <a:noFill/>
+          <a:ln/>
+        </p:spPr>
+        <p:txBody>
+          <a:bodyPr wrap="square" lIns="0" tIns="0" rIns="0" bIns="0" rtlCol="0" anchor="ctr"/>
+          <a:lstStyle/>
+          <a:p>
+            <a:pPr indent="0" marL="0">
+              <a:buNone/>
+            </a:pPr>
+            <a:r>
+              <a:rPr lang="en-US" sz="800" dirty="0">
+                <a:solidFill>
+                  <a:srgbClr val="374151"/>
+                </a:solidFill>
+              </a:rPr>
+              <a:t>Player</a:t>
+            </a:r>
+            <a:endParaRPr lang="en-US" sz="800" dirty="0"/>
+          </a:p>
+        </p:txBody>
+      </p:sp>
+      <p:sp>
+        <p:nvSpPr>
+          <p:cNvPr id="181" name="Text 179"/>
+          <p:cNvSpPr/>
+          <p:nvPr/>
+        </p:nvSpPr>
+        <p:spPr>
+          <a:xfrm>
+            <a:off x="11713464" y="1929384"/>
+            <a:ext cx="365760" cy="164592"/>
+          </a:xfrm>
+          <a:prstGeom prst="rect">
+            <a:avLst/>
+          </a:prstGeom>
+          <a:noFill/>
+          <a:ln/>
+        </p:spPr>
+        <p:txBody>
+          <a:bodyPr wrap="square" lIns="0" tIns="0" rIns="0" bIns="0" rtlCol="0" anchor="ctr"/>
+          <a:lstStyle/>
+          <a:p>
+            <a:pPr algn="r" indent="0" marL="0">
+              <a:buNone/>
+            </a:pPr>
+            <a:r>
+              <a:rPr lang="en-US" sz="800" b="1" dirty="0">
+                <a:solidFill>
+                  <a:srgbClr val="9CA3AF"/>
+                </a:solidFill>
+              </a:rPr>
+              <a:t>0%</a:t>
+            </a:r>
+            <a:endParaRPr lang="en-US" sz="800" dirty="0"/>
+          </a:p>
+        </p:txBody>
+      </p:sp>
+      <p:sp>
+        <p:nvSpPr>
+          <p:cNvPr id="182" name="Shape 180"/>
+          <p:cNvSpPr/>
+          <p:nvPr/>
+        </p:nvSpPr>
+        <p:spPr>
+          <a:xfrm>
+            <a:off x="9500616" y="2112264"/>
+            <a:ext cx="2505456" cy="82296"/>
+          </a:xfrm>
+          <a:prstGeom prst="roundRect">
+            <a:avLst>
+              <a:gd name="adj" fmla="val 50000"/>
+            </a:avLst>
+          </a:prstGeom>
+          <a:solidFill>
+            <a:srgbClr val="E5E7EB"/>
+          </a:solidFill>
+          <a:ln w="12700">
+            <a:solidFill>
+              <a:srgbClr val="E5E7EB"/>
+            </a:solidFill>
+            <a:prstDash val="solid"/>
+          </a:ln>
+        </p:spPr>
+      </p:sp>
+      <p:sp>
+        <p:nvSpPr>
+          <p:cNvPr id="183" name="Text 181"/>
+          <p:cNvSpPr/>
+          <p:nvPr/>
+        </p:nvSpPr>
+        <p:spPr>
+          <a:xfrm>
+            <a:off x="9500616" y="2286000"/>
+            <a:ext cx="1803928" cy="164592"/>
+          </a:xfrm>
+          <a:prstGeom prst="rect">
+            <a:avLst/>
+          </a:prstGeom>
+          <a:noFill/>
+          <a:ln/>
+        </p:spPr>
+        <p:txBody>
+          <a:bodyPr wrap="square" lIns="0" tIns="0" rIns="0" bIns="0" rtlCol="0" anchor="ctr"/>
+          <a:lstStyle/>
+          <a:p>
+            <a:pPr indent="0" marL="0">
+              <a:buNone/>
+            </a:pPr>
+            <a:r>
+              <a:rPr lang="en-US" sz="800" dirty="0">
+                <a:solidFill>
+                  <a:srgbClr val="374151"/>
+                </a:solidFill>
+              </a:rPr>
+              <a:t>Merchandising</a:t>
+            </a:r>
+            <a:endParaRPr lang="en-US" sz="800" dirty="0"/>
+          </a:p>
+        </p:txBody>
+      </p:sp>
+      <p:sp>
+        <p:nvSpPr>
+          <p:cNvPr id="184" name="Text 182"/>
+          <p:cNvSpPr/>
+          <p:nvPr/>
+        </p:nvSpPr>
+        <p:spPr>
+          <a:xfrm>
+            <a:off x="11713464" y="2286000"/>
+            <a:ext cx="365760" cy="164592"/>
+          </a:xfrm>
+          <a:prstGeom prst="rect">
+            <a:avLst/>
+          </a:prstGeom>
+          <a:noFill/>
+          <a:ln/>
+        </p:spPr>
+        <p:txBody>
+          <a:bodyPr wrap="square" lIns="0" tIns="0" rIns="0" bIns="0" rtlCol="0" anchor="ctr"/>
+          <a:lstStyle/>
+          <a:p>
+            <a:pPr algn="r" indent="0" marL="0">
+              <a:buNone/>
+            </a:pPr>
+            <a:r>
+              <a:rPr lang="en-US" sz="800" b="1" dirty="0">
+                <a:solidFill>
+                  <a:srgbClr val="9CA3AF"/>
+                </a:solidFill>
+              </a:rPr>
+              <a:t>0%</a:t>
+            </a:r>
+            <a:endParaRPr lang="en-US" sz="800" dirty="0"/>
+          </a:p>
+        </p:txBody>
+      </p:sp>
+      <p:sp>
+        <p:nvSpPr>
+          <p:cNvPr id="185" name="Shape 183"/>
+          <p:cNvSpPr/>
+          <p:nvPr/>
+        </p:nvSpPr>
+        <p:spPr>
+          <a:xfrm>
+            <a:off x="9500616" y="2468880"/>
+            <a:ext cx="2505456" cy="82296"/>
+          </a:xfrm>
+          <a:prstGeom prst="roundRect">
+            <a:avLst>
+              <a:gd name="adj" fmla="val 50000"/>
+            </a:avLst>
+          </a:prstGeom>
+          <a:solidFill>
+            <a:srgbClr val="E5E7EB"/>
+          </a:solidFill>
+          <a:ln w="12700">
+            <a:solidFill>
+              <a:srgbClr val="E5E7EB"/>
+            </a:solidFill>
+            <a:prstDash val="solid"/>
+          </a:ln>
+        </p:spPr>
+      </p:sp>
+      <p:sp>
+        <p:nvSpPr>
+          <p:cNvPr id="186" name="Text 184"/>
+          <p:cNvSpPr/>
+          <p:nvPr/>
+        </p:nvSpPr>
+        <p:spPr>
+          <a:xfrm>
+            <a:off x="9500616" y="2642616"/>
+            <a:ext cx="1803928" cy="164592"/>
+          </a:xfrm>
+          <a:prstGeom prst="rect">
+            <a:avLst/>
+          </a:prstGeom>
+          <a:noFill/>
+          <a:ln/>
+        </p:spPr>
+        <p:txBody>
+          <a:bodyPr wrap="square" lIns="0" tIns="0" rIns="0" bIns="0" rtlCol="0" anchor="ctr"/>
+          <a:lstStyle/>
+          <a:p>
+            <a:pPr indent="0" marL="0">
+              <a:buNone/>
+            </a:pPr>
+            <a:r>
+              <a:rPr lang="en-US" sz="800" dirty="0">
+                <a:solidFill>
+                  <a:srgbClr val="374151"/>
+                </a:solidFill>
+              </a:rPr>
+              <a:t>Onboarding</a:t>
+            </a:r>
+            <a:endParaRPr lang="en-US" sz="800" dirty="0"/>
+          </a:p>
+        </p:txBody>
+      </p:sp>
+      <p:sp>
+        <p:nvSpPr>
+          <p:cNvPr id="187" name="Text 185"/>
+          <p:cNvSpPr/>
+          <p:nvPr/>
+        </p:nvSpPr>
+        <p:spPr>
+          <a:xfrm>
+            <a:off x="11713464" y="2642616"/>
+            <a:ext cx="365760" cy="164592"/>
+          </a:xfrm>
+          <a:prstGeom prst="rect">
+            <a:avLst/>
+          </a:prstGeom>
+          <a:noFill/>
+          <a:ln/>
+        </p:spPr>
+        <p:txBody>
+          <a:bodyPr wrap="square" lIns="0" tIns="0" rIns="0" bIns="0" rtlCol="0" anchor="ctr"/>
+          <a:lstStyle/>
+          <a:p>
+            <a:pPr algn="r" indent="0" marL="0">
+              <a:buNone/>
+            </a:pPr>
+            <a:r>
+              <a:rPr lang="en-US" sz="800" b="1" dirty="0">
+                <a:solidFill>
+                  <a:srgbClr val="9CA3AF"/>
+                </a:solidFill>
+              </a:rPr>
+              <a:t>0%</a:t>
+            </a:r>
+            <a:endParaRPr lang="en-US" sz="800" dirty="0"/>
+          </a:p>
+        </p:txBody>
+      </p:sp>
+      <p:sp>
+        <p:nvSpPr>
+          <p:cNvPr id="188" name="Shape 186"/>
+          <p:cNvSpPr/>
+          <p:nvPr/>
+        </p:nvSpPr>
+        <p:spPr>
+          <a:xfrm>
+            <a:off x="9500616" y="2825496"/>
+            <a:ext cx="2505456" cy="82296"/>
+          </a:xfrm>
+          <a:prstGeom prst="roundRect">
+            <a:avLst>
+              <a:gd name="adj" fmla="val 50000"/>
+            </a:avLst>
+          </a:prstGeom>
+          <a:solidFill>
+            <a:srgbClr val="E5E7EB"/>
+          </a:solidFill>
+          <a:ln w="12700">
+            <a:solidFill>
+              <a:srgbClr val="E5E7EB"/>
+            </a:solidFill>
+            <a:prstDash val="solid"/>
+          </a:ln>
+        </p:spPr>
+      </p:sp>
+      <p:sp>
+        <p:nvSpPr>
+          <p:cNvPr id="189" name="Shape 187"/>
+          <p:cNvSpPr/>
+          <p:nvPr/>
+        </p:nvSpPr>
+        <p:spPr>
+          <a:xfrm>
+            <a:off x="9482328" y="3127248"/>
+            <a:ext cx="2633472" cy="0"/>
+          </a:xfrm>
+          <a:prstGeom prst="line">
+            <a:avLst/>
+          </a:prstGeom>
+          <a:noFill/>
+          <a:ln w="9525">
+            <a:solidFill>
+              <a:srgbClr val="DDE1E6"/>
+            </a:solidFill>
+            <a:prstDash val="solid"/>
+          </a:ln>
+        </p:spPr>
+      </p:sp>
+      <p:sp>
+        <p:nvSpPr>
+          <p:cNvPr id="190" name="Text 188"/>
+          <p:cNvSpPr/>
+          <p:nvPr/>
+        </p:nvSpPr>
+        <p:spPr>
+          <a:xfrm>
+            <a:off x="9500616" y="3264408"/>
+            <a:ext cx="2633472" cy="201168"/>
+          </a:xfrm>
+          <a:prstGeom prst="rect">
+            <a:avLst/>
+          </a:prstGeom>
+          <a:noFill/>
+          <a:ln/>
+        </p:spPr>
+        <p:txBody>
+          <a:bodyPr wrap="square" lIns="0" tIns="0" rIns="0" bIns="0" rtlCol="0" anchor="ctr"/>
+          <a:lstStyle/>
+          <a:p>
+            <a:pPr indent="0" marL="0">
+              <a:buNone/>
+            </a:pPr>
+            <a:r>
+              <a:rPr lang="en-US" sz="950" b="1" dirty="0">
+                <a:solidFill>
+                  <a:srgbClr val="111827"/>
+                </a:solidFill>
+              </a:rPr>
+              <a:t>Status Key</a:t>
+            </a:r>
+            <a:endParaRPr lang="en-US" sz="950" dirty="0"/>
+          </a:p>
+        </p:txBody>
+      </p:sp>
+      <p:sp>
+        <p:nvSpPr>
+          <p:cNvPr id="191" name="Shape 189"/>
+          <p:cNvSpPr/>
+          <p:nvPr/>
+        </p:nvSpPr>
+        <p:spPr>
+          <a:xfrm>
+            <a:off x="9500616" y="3511296"/>
+            <a:ext cx="749808" cy="173736"/>
+          </a:xfrm>
+          <a:prstGeom prst="roundRect">
+            <a:avLst>
+              <a:gd name="adj" fmla="val 15789"/>
+            </a:avLst>
+          </a:prstGeom>
+          <a:solidFill>
+            <a:srgbClr val="F3F4F6"/>
+          </a:solidFill>
+          <a:ln w="9525">
+            <a:solidFill>
+              <a:srgbClr val="D1D5DB"/>
+            </a:solidFill>
+            <a:prstDash val="solid"/>
+          </a:ln>
+        </p:spPr>
+      </p:sp>
+      <p:sp>
+        <p:nvSpPr>
+          <p:cNvPr id="192" name="Text 190"/>
+          <p:cNvSpPr/>
+          <p:nvPr/>
+        </p:nvSpPr>
+        <p:spPr>
+          <a:xfrm>
+            <a:off x="9500616" y="3511296"/>
+            <a:ext cx="749808" cy="173736"/>
+          </a:xfrm>
+          <a:prstGeom prst="rect">
+            <a:avLst/>
+          </a:prstGeom>
+          <a:noFill/>
+          <a:ln/>
+        </p:spPr>
+        <p:txBody>
+          <a:bodyPr wrap="square" lIns="0" tIns="0" rIns="0" bIns="0" rtlCol="0" anchor="ctr"/>
+          <a:lstStyle/>
+          <a:p>
+            <a:pPr algn="ctr" indent="0" marL="0">
+              <a:buNone/>
+            </a:pPr>
+            <a:r>
+              <a:rPr lang="en-US" sz="700" b="1" dirty="0">
+                <a:solidFill>
+                  <a:srgbClr val="374151"/>
+                </a:solidFill>
+              </a:rPr>
+              <a:t>Not Started</a:t>
+            </a:r>
+            <a:endParaRPr lang="en-US" sz="700" dirty="0"/>
+          </a:p>
+        </p:txBody>
+      </p:sp>
+      <p:sp>
+        <p:nvSpPr>
+          <p:cNvPr id="193" name="Text 191"/>
+          <p:cNvSpPr/>
+          <p:nvPr/>
+        </p:nvSpPr>
+        <p:spPr>
+          <a:xfrm>
+            <a:off x="10305288" y="3511296"/>
+            <a:ext cx="1792224" cy="173736"/>
+          </a:xfrm>
+          <a:prstGeom prst="rect">
+            <a:avLst/>
+          </a:prstGeom>
+          <a:noFill/>
+          <a:ln/>
+        </p:spPr>
+        <p:txBody>
+          <a:bodyPr wrap="square" lIns="0" tIns="0" rIns="0" bIns="0" rtlCol="0" anchor="ctr"/>
+          <a:lstStyle/>
+          <a:p>
+            <a:pPr algn="l" indent="0" marL="0">
+              <a:buNone/>
+            </a:pPr>
+            <a:r>
+              <a:rPr lang="en-US" sz="700" dirty="0">
+                <a:solidFill>
+                  <a:srgbClr val="6B7280"/>
+                </a:solidFill>
+              </a:rPr>
+              <a:t>Work has not begun</a:t>
+            </a:r>
+            <a:endParaRPr lang="en-US" sz="700" dirty="0"/>
+          </a:p>
+        </p:txBody>
+      </p:sp>
+      <p:sp>
+        <p:nvSpPr>
+          <p:cNvPr id="194" name="Shape 192"/>
+          <p:cNvSpPr/>
+          <p:nvPr/>
+        </p:nvSpPr>
+        <p:spPr>
+          <a:xfrm>
+            <a:off x="9500616" y="3739896"/>
+            <a:ext cx="749808" cy="173736"/>
+          </a:xfrm>
+          <a:prstGeom prst="roundRect">
+            <a:avLst>
+              <a:gd name="adj" fmla="val 15789"/>
             </a:avLst>
           </a:prstGeom>
           <a:solidFill>
@@ -11719,3147 +14886,7 @@
       </p:sp>
       <p:sp>
         <p:nvSpPr>
-          <p:cNvPr id="95" name="Text 93"/>
-          <p:cNvSpPr/>
-          <p:nvPr/>
-        </p:nvSpPr>
-        <p:spPr>
-          <a:xfrm>
-            <a:off x="2185416" y="3547872"/>
-            <a:ext cx="932688" cy="155448"/>
-          </a:xfrm>
-          <a:prstGeom prst="rect">
-            <a:avLst/>
-          </a:prstGeom>
-          <a:noFill/>
-          <a:ln/>
-        </p:spPr>
-        <p:txBody>
-          <a:bodyPr wrap="square" lIns="0" tIns="0" rIns="0" bIns="0" rtlCol="0" anchor="ctr"/>
-          <a:lstStyle/>
-          <a:p>
-            <a:pPr algn="ctr" indent="0" marL="0">
-              <a:buNone/>
-            </a:pPr>
-            <a:r>
-              <a:rPr lang="en-US" sz="700" dirty="0">
-                <a:solidFill>
-                  <a:srgbClr val="FFFFFF"/>
-                </a:solidFill>
-              </a:rPr>
-              <a:t>In Progress</a:t>
-            </a:r>
-            <a:endParaRPr lang="en-US" sz="700" dirty="0"/>
-          </a:p>
-        </p:txBody>
-      </p:sp>
-      <p:sp>
-        <p:nvSpPr>
-          <p:cNvPr id="96" name="Shape 94"/>
-          <p:cNvSpPr/>
-          <p:nvPr/>
-        </p:nvSpPr>
-        <p:spPr>
-          <a:xfrm>
-            <a:off x="3200400" y="3337560"/>
-            <a:ext cx="932688" cy="182880"/>
-          </a:xfrm>
-          <a:prstGeom prst="roundRect">
-            <a:avLst>
-              <a:gd name="adj" fmla="val 15000"/>
-            </a:avLst>
-          </a:prstGeom>
-          <a:solidFill>
-            <a:srgbClr val="FFFFFF"/>
-          </a:solidFill>
-          <a:ln w="9525">
-            <a:solidFill>
-              <a:srgbClr val="CBD5E1"/>
-            </a:solidFill>
-            <a:prstDash val="solid"/>
-          </a:ln>
-        </p:spPr>
-      </p:sp>
-      <p:sp>
-        <p:nvSpPr>
-          <p:cNvPr id="97" name="Text 95"/>
-          <p:cNvSpPr/>
-          <p:nvPr/>
-        </p:nvSpPr>
-        <p:spPr>
-          <a:xfrm>
-            <a:off x="3200400" y="3337560"/>
-            <a:ext cx="932688" cy="182880"/>
-          </a:xfrm>
-          <a:prstGeom prst="rect">
-            <a:avLst/>
-          </a:prstGeom>
-          <a:noFill/>
-          <a:ln/>
-        </p:spPr>
-        <p:txBody>
-          <a:bodyPr wrap="square" lIns="0" tIns="0" rIns="0" bIns="0" rtlCol="0" anchor="ctr"/>
-          <a:lstStyle/>
-          <a:p>
-            <a:pPr algn="ctr" indent="0" marL="0">
-              <a:buNone/>
-            </a:pPr>
-            <a:r>
-              <a:rPr lang="en-US" sz="750" b="1" dirty="0">
-                <a:solidFill>
-                  <a:srgbClr val="1E293B"/>
-                </a:solidFill>
-              </a:rPr>
-              <a:t>Android Player</a:t>
-            </a:r>
-            <a:endParaRPr lang="en-US" sz="750" dirty="0"/>
-          </a:p>
-        </p:txBody>
-      </p:sp>
-      <p:sp>
-        <p:nvSpPr>
-          <p:cNvPr id="98" name="Shape 96"/>
-          <p:cNvSpPr/>
-          <p:nvPr/>
-        </p:nvSpPr>
-        <p:spPr>
-          <a:xfrm>
-            <a:off x="3200400" y="3547872"/>
-            <a:ext cx="932688" cy="155448"/>
-          </a:xfrm>
-          <a:prstGeom prst="roundRect">
-            <a:avLst>
-              <a:gd name="adj" fmla="val 17647"/>
-            </a:avLst>
-          </a:prstGeom>
-          <a:solidFill>
-            <a:srgbClr val="F3F4F6"/>
-          </a:solidFill>
-          <a:ln w="9525">
-            <a:solidFill>
-              <a:srgbClr val="D1D5DB"/>
-            </a:solidFill>
-            <a:prstDash val="solid"/>
-          </a:ln>
-        </p:spPr>
-      </p:sp>
-      <p:sp>
-        <p:nvSpPr>
-          <p:cNvPr id="99" name="Text 97"/>
-          <p:cNvSpPr/>
-          <p:nvPr/>
-        </p:nvSpPr>
-        <p:spPr>
-          <a:xfrm>
-            <a:off x="3200400" y="3547872"/>
-            <a:ext cx="932688" cy="155448"/>
-          </a:xfrm>
-          <a:prstGeom prst="rect">
-            <a:avLst/>
-          </a:prstGeom>
-          <a:noFill/>
-          <a:ln/>
-        </p:spPr>
-        <p:txBody>
-          <a:bodyPr wrap="square" lIns="0" tIns="0" rIns="0" bIns="0" rtlCol="0" anchor="ctr"/>
-          <a:lstStyle/>
-          <a:p>
-            <a:pPr algn="ctr" indent="0" marL="0">
-              <a:buNone/>
-            </a:pPr>
-            <a:r>
-              <a:rPr lang="en-US" sz="700" dirty="0">
-                <a:solidFill>
-                  <a:srgbClr val="374151"/>
-                </a:solidFill>
-              </a:rPr>
-              <a:t>Not Started</a:t>
-            </a:r>
-            <a:endParaRPr lang="en-US" sz="700" dirty="0"/>
-          </a:p>
-        </p:txBody>
-      </p:sp>
-      <p:sp>
-        <p:nvSpPr>
-          <p:cNvPr id="100" name="Shape 98"/>
-          <p:cNvSpPr/>
-          <p:nvPr/>
-        </p:nvSpPr>
-        <p:spPr>
-          <a:xfrm>
-            <a:off x="4215384" y="3337560"/>
-            <a:ext cx="932688" cy="182880"/>
-          </a:xfrm>
-          <a:prstGeom prst="roundRect">
-            <a:avLst>
-              <a:gd name="adj" fmla="val 15000"/>
-            </a:avLst>
-          </a:prstGeom>
-          <a:solidFill>
-            <a:srgbClr val="FFFFFF"/>
-          </a:solidFill>
-          <a:ln w="9525">
-            <a:solidFill>
-              <a:srgbClr val="CBD5E1"/>
-            </a:solidFill>
-            <a:prstDash val="solid"/>
-          </a:ln>
-        </p:spPr>
-      </p:sp>
-      <p:sp>
-        <p:nvSpPr>
-          <p:cNvPr id="101" name="Text 99"/>
-          <p:cNvSpPr/>
-          <p:nvPr/>
-        </p:nvSpPr>
-        <p:spPr>
-          <a:xfrm>
-            <a:off x="4215384" y="3337560"/>
-            <a:ext cx="932688" cy="182880"/>
-          </a:xfrm>
-          <a:prstGeom prst="rect">
-            <a:avLst/>
-          </a:prstGeom>
-          <a:noFill/>
-          <a:ln/>
-        </p:spPr>
-        <p:txBody>
-          <a:bodyPr wrap="square" lIns="0" tIns="0" rIns="0" bIns="0" rtlCol="0" anchor="ctr"/>
-          <a:lstStyle/>
-          <a:p>
-            <a:pPr algn="ctr" indent="0" marL="0">
-              <a:buNone/>
-            </a:pPr>
-            <a:r>
-              <a:rPr lang="en-US" sz="750" b="1" dirty="0">
-                <a:solidFill>
-                  <a:srgbClr val="1E293B"/>
-                </a:solidFill>
-              </a:rPr>
-              <a:t>HLS/DASH PB</a:t>
-            </a:r>
-            <a:endParaRPr lang="en-US" sz="750" dirty="0"/>
-          </a:p>
-        </p:txBody>
-      </p:sp>
-      <p:sp>
-        <p:nvSpPr>
-          <p:cNvPr id="102" name="Shape 100"/>
-          <p:cNvSpPr/>
-          <p:nvPr/>
-        </p:nvSpPr>
-        <p:spPr>
-          <a:xfrm>
-            <a:off x="4215384" y="3547872"/>
-            <a:ext cx="932688" cy="155448"/>
-          </a:xfrm>
-          <a:prstGeom prst="roundRect">
-            <a:avLst>
-              <a:gd name="adj" fmla="val 17647"/>
-            </a:avLst>
-          </a:prstGeom>
-          <a:solidFill>
-            <a:srgbClr val="F3F4F6"/>
-          </a:solidFill>
-          <a:ln w="9525">
-            <a:solidFill>
-              <a:srgbClr val="D1D5DB"/>
-            </a:solidFill>
-            <a:prstDash val="solid"/>
-          </a:ln>
-        </p:spPr>
-      </p:sp>
-      <p:sp>
-        <p:nvSpPr>
-          <p:cNvPr id="103" name="Text 101"/>
-          <p:cNvSpPr/>
-          <p:nvPr/>
-        </p:nvSpPr>
-        <p:spPr>
-          <a:xfrm>
-            <a:off x="4215384" y="3547872"/>
-            <a:ext cx="932688" cy="155448"/>
-          </a:xfrm>
-          <a:prstGeom prst="rect">
-            <a:avLst/>
-          </a:prstGeom>
-          <a:noFill/>
-          <a:ln/>
-        </p:spPr>
-        <p:txBody>
-          <a:bodyPr wrap="square" lIns="0" tIns="0" rIns="0" bIns="0" rtlCol="0" anchor="ctr"/>
-          <a:lstStyle/>
-          <a:p>
-            <a:pPr algn="ctr" indent="0" marL="0">
-              <a:buNone/>
-            </a:pPr>
-            <a:r>
-              <a:rPr lang="en-US" sz="700" dirty="0">
-                <a:solidFill>
-                  <a:srgbClr val="374151"/>
-                </a:solidFill>
-              </a:rPr>
-              <a:t>Not Started</a:t>
-            </a:r>
-            <a:endParaRPr lang="en-US" sz="700" dirty="0"/>
-          </a:p>
-        </p:txBody>
-      </p:sp>
-      <p:sp>
-        <p:nvSpPr>
-          <p:cNvPr id="104" name="Shape 102"/>
-          <p:cNvSpPr/>
-          <p:nvPr/>
-        </p:nvSpPr>
-        <p:spPr>
-          <a:xfrm>
-            <a:off x="5230368" y="3337560"/>
-            <a:ext cx="932688" cy="182880"/>
-          </a:xfrm>
-          <a:prstGeom prst="roundRect">
-            <a:avLst>
-              <a:gd name="adj" fmla="val 15000"/>
-            </a:avLst>
-          </a:prstGeom>
-          <a:solidFill>
-            <a:srgbClr val="FFFFFF"/>
-          </a:solidFill>
-          <a:ln w="9525">
-            <a:solidFill>
-              <a:srgbClr val="CBD5E1"/>
-            </a:solidFill>
-            <a:prstDash val="solid"/>
-          </a:ln>
-        </p:spPr>
-      </p:sp>
-      <p:sp>
-        <p:nvSpPr>
-          <p:cNvPr id="105" name="Text 103"/>
-          <p:cNvSpPr/>
-          <p:nvPr/>
-        </p:nvSpPr>
-        <p:spPr>
-          <a:xfrm>
-            <a:off x="5230368" y="3337560"/>
-            <a:ext cx="932688" cy="182880"/>
-          </a:xfrm>
-          <a:prstGeom prst="rect">
-            <a:avLst/>
-          </a:prstGeom>
-          <a:noFill/>
-          <a:ln/>
-        </p:spPr>
-        <p:txBody>
-          <a:bodyPr wrap="square" lIns="0" tIns="0" rIns="0" bIns="0" rtlCol="0" anchor="ctr"/>
-          <a:lstStyle/>
-          <a:p>
-            <a:pPr algn="ctr" indent="0" marL="0">
-              <a:buNone/>
-            </a:pPr>
-            <a:r>
-              <a:rPr lang="en-US" sz="750" b="1" dirty="0">
-                <a:solidFill>
-                  <a:srgbClr val="1E293B"/>
-                </a:solidFill>
-              </a:rPr>
-              <a:t>Bitmovin QOE</a:t>
-            </a:r>
-            <a:endParaRPr lang="en-US" sz="750" dirty="0"/>
-          </a:p>
-        </p:txBody>
-      </p:sp>
-      <p:sp>
-        <p:nvSpPr>
-          <p:cNvPr id="106" name="Shape 104"/>
-          <p:cNvSpPr/>
-          <p:nvPr/>
-        </p:nvSpPr>
-        <p:spPr>
-          <a:xfrm>
-            <a:off x="5230368" y="3547872"/>
-            <a:ext cx="932688" cy="155448"/>
-          </a:xfrm>
-          <a:prstGeom prst="roundRect">
-            <a:avLst>
-              <a:gd name="adj" fmla="val 17647"/>
-            </a:avLst>
-          </a:prstGeom>
-          <a:solidFill>
-            <a:srgbClr val="F3F4F6"/>
-          </a:solidFill>
-          <a:ln w="9525">
-            <a:solidFill>
-              <a:srgbClr val="D1D5DB"/>
-            </a:solidFill>
-            <a:prstDash val="solid"/>
-          </a:ln>
-        </p:spPr>
-      </p:sp>
-      <p:sp>
-        <p:nvSpPr>
-          <p:cNvPr id="107" name="Text 105"/>
-          <p:cNvSpPr/>
-          <p:nvPr/>
-        </p:nvSpPr>
-        <p:spPr>
-          <a:xfrm>
-            <a:off x="5230368" y="3547872"/>
-            <a:ext cx="932688" cy="155448"/>
-          </a:xfrm>
-          <a:prstGeom prst="rect">
-            <a:avLst/>
-          </a:prstGeom>
-          <a:noFill/>
-          <a:ln/>
-        </p:spPr>
-        <p:txBody>
-          <a:bodyPr wrap="square" lIns="0" tIns="0" rIns="0" bIns="0" rtlCol="0" anchor="ctr"/>
-          <a:lstStyle/>
-          <a:p>
-            <a:pPr algn="ctr" indent="0" marL="0">
-              <a:buNone/>
-            </a:pPr>
-            <a:r>
-              <a:rPr lang="en-US" sz="700" dirty="0">
-                <a:solidFill>
-                  <a:srgbClr val="374151"/>
-                </a:solidFill>
-              </a:rPr>
-              <a:t>Not Started</a:t>
-            </a:r>
-            <a:endParaRPr lang="en-US" sz="700" dirty="0"/>
-          </a:p>
-        </p:txBody>
-      </p:sp>
-      <p:sp>
-        <p:nvSpPr>
-          <p:cNvPr id="108" name="Shape 106"/>
-          <p:cNvSpPr/>
-          <p:nvPr/>
-        </p:nvSpPr>
-        <p:spPr>
-          <a:xfrm>
-            <a:off x="164592" y="4206240"/>
-            <a:ext cx="9116568" cy="1078992"/>
-          </a:xfrm>
-          <a:prstGeom prst="rect">
-            <a:avLst/>
-          </a:prstGeom>
-          <a:solidFill>
-            <a:srgbClr val="FFFFFF"/>
-          </a:solidFill>
-          <a:ln w="6350">
-            <a:solidFill>
-              <a:srgbClr val="E5E7EB"/>
-            </a:solidFill>
-            <a:prstDash val="solid"/>
-          </a:ln>
-        </p:spPr>
-      </p:sp>
-      <p:sp>
-        <p:nvSpPr>
-          <p:cNvPr id="109" name="Shape 107"/>
-          <p:cNvSpPr/>
-          <p:nvPr/>
-        </p:nvSpPr>
-        <p:spPr>
-          <a:xfrm>
-            <a:off x="182880" y="4279392"/>
-            <a:ext cx="859536" cy="932688"/>
-          </a:xfrm>
-          <a:prstGeom prst="roundRect">
-            <a:avLst>
-              <a:gd name="adj" fmla="val 5319"/>
-            </a:avLst>
-          </a:prstGeom>
-          <a:solidFill>
-            <a:srgbClr val="9CA3AF"/>
-          </a:solidFill>
-          <a:ln w="12700">
-            <a:solidFill>
-              <a:srgbClr val="9CA3AF"/>
-            </a:solidFill>
-            <a:prstDash val="solid"/>
-          </a:ln>
-        </p:spPr>
-      </p:sp>
-      <p:sp>
-        <p:nvSpPr>
-          <p:cNvPr id="110" name="Text 108"/>
-          <p:cNvSpPr/>
-          <p:nvPr/>
-        </p:nvSpPr>
-        <p:spPr>
-          <a:xfrm>
-            <a:off x="182880" y="4279392"/>
-            <a:ext cx="859536" cy="932688"/>
-          </a:xfrm>
-          <a:prstGeom prst="rect">
-            <a:avLst/>
-          </a:prstGeom>
-          <a:noFill/>
-          <a:ln/>
-        </p:spPr>
-        <p:txBody>
-          <a:bodyPr wrap="square" lIns="0" tIns="0" rIns="0" bIns="0" rtlCol="0" anchor="ctr"/>
-          <a:lstStyle/>
-          <a:p>
-            <a:pPr algn="ctr" indent="0" marL="0">
-              <a:buNone/>
-            </a:pPr>
-            <a:r>
-              <a:rPr lang="en-US" sz="950" b="1" dirty="0">
-                <a:solidFill>
-                  <a:srgbClr val="FFFFFF"/>
-                </a:solidFill>
-              </a:rPr>
-              <a:t>Merchandising</a:t>
-            </a:r>
-            <a:endParaRPr lang="en-US" sz="950" dirty="0"/>
-          </a:p>
-        </p:txBody>
-      </p:sp>
-      <p:sp>
-        <p:nvSpPr>
-          <p:cNvPr id="111" name="Text 109"/>
-          <p:cNvSpPr/>
-          <p:nvPr/>
-        </p:nvSpPr>
-        <p:spPr>
-          <a:xfrm>
-            <a:off x="1170432" y="4251960"/>
-            <a:ext cx="8110728" cy="182880"/>
-          </a:xfrm>
-          <a:prstGeom prst="rect">
-            <a:avLst/>
-          </a:prstGeom>
-          <a:noFill/>
-          <a:ln/>
-        </p:spPr>
-        <p:txBody>
-          <a:bodyPr wrap="square" lIns="0" tIns="0" rIns="0" bIns="0" rtlCol="0" anchor="ctr"/>
-          <a:lstStyle/>
-          <a:p>
-            <a:pPr algn="l" indent="0" marL="0">
-              <a:buNone/>
-            </a:pPr>
-            <a:r>
-              <a:rPr lang="en-US" sz="750" dirty="0">
-                <a:solidFill>
-                  <a:srgbClr val="9CA3AF"/>
-                </a:solidFill>
-              </a:rPr>
-              <a:t>2 / 9 In Progress</a:t>
-            </a:r>
-            <a:endParaRPr lang="en-US" sz="750" dirty="0"/>
-          </a:p>
-        </p:txBody>
-      </p:sp>
-      <p:sp>
-        <p:nvSpPr>
-          <p:cNvPr id="112" name="Shape 110"/>
-          <p:cNvSpPr/>
-          <p:nvPr/>
-        </p:nvSpPr>
-        <p:spPr>
-          <a:xfrm>
-            <a:off x="1170432" y="4471416"/>
-            <a:ext cx="932688" cy="182880"/>
-          </a:xfrm>
-          <a:prstGeom prst="roundRect">
-            <a:avLst>
-              <a:gd name="adj" fmla="val 15000"/>
-            </a:avLst>
-          </a:prstGeom>
-          <a:solidFill>
-            <a:srgbClr val="FFFFFF"/>
-          </a:solidFill>
-          <a:ln w="9525">
-            <a:solidFill>
-              <a:srgbClr val="CBD5E1"/>
-            </a:solidFill>
-            <a:prstDash val="solid"/>
-          </a:ln>
-        </p:spPr>
-      </p:sp>
-      <p:sp>
-        <p:nvSpPr>
-          <p:cNvPr id="113" name="Text 111"/>
-          <p:cNvSpPr/>
-          <p:nvPr/>
-        </p:nvSpPr>
-        <p:spPr>
-          <a:xfrm>
-            <a:off x="1170432" y="4471416"/>
-            <a:ext cx="932688" cy="182880"/>
-          </a:xfrm>
-          <a:prstGeom prst="rect">
-            <a:avLst/>
-          </a:prstGeom>
-          <a:noFill/>
-          <a:ln/>
-        </p:spPr>
-        <p:txBody>
-          <a:bodyPr wrap="square" lIns="0" tIns="0" rIns="0" bIns="0" rtlCol="0" anchor="ctr"/>
-          <a:lstStyle/>
-          <a:p>
-            <a:pPr algn="ctr" indent="0" marL="0">
-              <a:buNone/>
-            </a:pPr>
-            <a:r>
-              <a:rPr lang="en-US" sz="750" b="1" dirty="0">
-                <a:solidFill>
-                  <a:srgbClr val="1E293B"/>
-                </a:solidFill>
-              </a:rPr>
-              <a:t>Metadata</a:t>
-            </a:r>
-            <a:endParaRPr lang="en-US" sz="750" dirty="0"/>
-          </a:p>
-        </p:txBody>
-      </p:sp>
-      <p:sp>
-        <p:nvSpPr>
-          <p:cNvPr id="114" name="Shape 112"/>
-          <p:cNvSpPr/>
-          <p:nvPr/>
-        </p:nvSpPr>
-        <p:spPr>
-          <a:xfrm>
-            <a:off x="1170432" y="4681728"/>
-            <a:ext cx="932688" cy="155448"/>
-          </a:xfrm>
-          <a:prstGeom prst="roundRect">
-            <a:avLst>
-              <a:gd name="adj" fmla="val 17647"/>
-            </a:avLst>
-          </a:prstGeom>
-          <a:solidFill>
-            <a:srgbClr val="1558A8"/>
-          </a:solidFill>
-          <a:ln w="12700">
-            <a:solidFill>
-              <a:srgbClr val="1558A8"/>
-            </a:solidFill>
-            <a:prstDash val="solid"/>
-          </a:ln>
-        </p:spPr>
-      </p:sp>
-      <p:sp>
-        <p:nvSpPr>
-          <p:cNvPr id="115" name="Text 113"/>
-          <p:cNvSpPr/>
-          <p:nvPr/>
-        </p:nvSpPr>
-        <p:spPr>
-          <a:xfrm>
-            <a:off x="1170432" y="4681728"/>
-            <a:ext cx="932688" cy="155448"/>
-          </a:xfrm>
-          <a:prstGeom prst="rect">
-            <a:avLst/>
-          </a:prstGeom>
-          <a:noFill/>
-          <a:ln/>
-        </p:spPr>
-        <p:txBody>
-          <a:bodyPr wrap="square" lIns="0" tIns="0" rIns="0" bIns="0" rtlCol="0" anchor="ctr"/>
-          <a:lstStyle/>
-          <a:p>
-            <a:pPr algn="ctr" indent="0" marL="0">
-              <a:buNone/>
-            </a:pPr>
-            <a:r>
-              <a:rPr lang="en-US" sz="700" dirty="0">
-                <a:solidFill>
-                  <a:srgbClr val="FFFFFF"/>
-                </a:solidFill>
-              </a:rPr>
-              <a:t>In Progress</a:t>
-            </a:r>
-            <a:endParaRPr lang="en-US" sz="700" dirty="0"/>
-          </a:p>
-        </p:txBody>
-      </p:sp>
-      <p:sp>
-        <p:nvSpPr>
-          <p:cNvPr id="116" name="Shape 114"/>
-          <p:cNvSpPr/>
-          <p:nvPr/>
-        </p:nvSpPr>
-        <p:spPr>
-          <a:xfrm>
-            <a:off x="2185416" y="4471416"/>
-            <a:ext cx="932688" cy="182880"/>
-          </a:xfrm>
-          <a:prstGeom prst="roundRect">
-            <a:avLst>
-              <a:gd name="adj" fmla="val 15000"/>
-            </a:avLst>
-          </a:prstGeom>
-          <a:solidFill>
-            <a:srgbClr val="FFFFFF"/>
-          </a:solidFill>
-          <a:ln w="9525">
-            <a:solidFill>
-              <a:srgbClr val="CBD5E1"/>
-            </a:solidFill>
-            <a:prstDash val="solid"/>
-          </a:ln>
-        </p:spPr>
-      </p:sp>
-      <p:sp>
-        <p:nvSpPr>
-          <p:cNvPr id="117" name="Text 115"/>
-          <p:cNvSpPr/>
-          <p:nvPr/>
-        </p:nvSpPr>
-        <p:spPr>
-          <a:xfrm>
-            <a:off x="2185416" y="4471416"/>
-            <a:ext cx="932688" cy="182880"/>
-          </a:xfrm>
-          <a:prstGeom prst="rect">
-            <a:avLst/>
-          </a:prstGeom>
-          <a:noFill/>
-          <a:ln/>
-        </p:spPr>
-        <p:txBody>
-          <a:bodyPr wrap="square" lIns="0" tIns="0" rIns="0" bIns="0" rtlCol="0" anchor="ctr"/>
-          <a:lstStyle/>
-          <a:p>
-            <a:pPr algn="ctr" indent="0" marL="0">
-              <a:buNone/>
-            </a:pPr>
-            <a:r>
-              <a:rPr lang="en-US" sz="750" b="1" dirty="0">
-                <a:solidFill>
-                  <a:srgbClr val="1E293B"/>
-                </a:solidFill>
-              </a:rPr>
-              <a:t>Images</a:t>
-            </a:r>
-            <a:endParaRPr lang="en-US" sz="750" dirty="0"/>
-          </a:p>
-        </p:txBody>
-      </p:sp>
-      <p:sp>
-        <p:nvSpPr>
-          <p:cNvPr id="118" name="Shape 116"/>
-          <p:cNvSpPr/>
-          <p:nvPr/>
-        </p:nvSpPr>
-        <p:spPr>
-          <a:xfrm>
-            <a:off x="2185416" y="4681728"/>
-            <a:ext cx="932688" cy="155448"/>
-          </a:xfrm>
-          <a:prstGeom prst="roundRect">
-            <a:avLst>
-              <a:gd name="adj" fmla="val 17647"/>
-            </a:avLst>
-          </a:prstGeom>
-          <a:solidFill>
-            <a:srgbClr val="F3F4F6"/>
-          </a:solidFill>
-          <a:ln w="9525">
-            <a:solidFill>
-              <a:srgbClr val="D1D5DB"/>
-            </a:solidFill>
-            <a:prstDash val="solid"/>
-          </a:ln>
-        </p:spPr>
-      </p:sp>
-      <p:sp>
-        <p:nvSpPr>
-          <p:cNvPr id="119" name="Text 117"/>
-          <p:cNvSpPr/>
-          <p:nvPr/>
-        </p:nvSpPr>
-        <p:spPr>
-          <a:xfrm>
-            <a:off x="2185416" y="4681728"/>
-            <a:ext cx="932688" cy="155448"/>
-          </a:xfrm>
-          <a:prstGeom prst="rect">
-            <a:avLst/>
-          </a:prstGeom>
-          <a:noFill/>
-          <a:ln/>
-        </p:spPr>
-        <p:txBody>
-          <a:bodyPr wrap="square" lIns="0" tIns="0" rIns="0" bIns="0" rtlCol="0" anchor="ctr"/>
-          <a:lstStyle/>
-          <a:p>
-            <a:pPr algn="ctr" indent="0" marL="0">
-              <a:buNone/>
-            </a:pPr>
-            <a:r>
-              <a:rPr lang="en-US" sz="700" dirty="0">
-                <a:solidFill>
-                  <a:srgbClr val="374151"/>
-                </a:solidFill>
-              </a:rPr>
-              <a:t>Not Started</a:t>
-            </a:r>
-            <a:endParaRPr lang="en-US" sz="700" dirty="0"/>
-          </a:p>
-        </p:txBody>
-      </p:sp>
-      <p:sp>
-        <p:nvSpPr>
-          <p:cNvPr id="120" name="Shape 118"/>
-          <p:cNvSpPr/>
-          <p:nvPr/>
-        </p:nvSpPr>
-        <p:spPr>
-          <a:xfrm>
-            <a:off x="3200400" y="4471416"/>
-            <a:ext cx="932688" cy="182880"/>
-          </a:xfrm>
-          <a:prstGeom prst="roundRect">
-            <a:avLst>
-              <a:gd name="adj" fmla="val 15000"/>
-            </a:avLst>
-          </a:prstGeom>
-          <a:solidFill>
-            <a:srgbClr val="FFFFFF"/>
-          </a:solidFill>
-          <a:ln w="9525">
-            <a:solidFill>
-              <a:srgbClr val="CBD5E1"/>
-            </a:solidFill>
-            <a:prstDash val="solid"/>
-          </a:ln>
-        </p:spPr>
-      </p:sp>
-      <p:sp>
-        <p:nvSpPr>
-          <p:cNvPr id="121" name="Text 119"/>
-          <p:cNvSpPr/>
-          <p:nvPr/>
-        </p:nvSpPr>
-        <p:spPr>
-          <a:xfrm>
-            <a:off x="3200400" y="4471416"/>
-            <a:ext cx="932688" cy="182880"/>
-          </a:xfrm>
-          <a:prstGeom prst="rect">
-            <a:avLst/>
-          </a:prstGeom>
-          <a:noFill/>
-          <a:ln/>
-        </p:spPr>
-        <p:txBody>
-          <a:bodyPr wrap="square" lIns="0" tIns="0" rIns="0" bIns="0" rtlCol="0" anchor="ctr"/>
-          <a:lstStyle/>
-          <a:p>
-            <a:pPr algn="ctr" indent="0" marL="0">
-              <a:buNone/>
-            </a:pPr>
-            <a:r>
-              <a:rPr lang="en-US" sz="750" b="1" dirty="0">
-                <a:solidFill>
-                  <a:srgbClr val="1E293B"/>
-                </a:solidFill>
-              </a:rPr>
-              <a:t>Carousels</a:t>
-            </a:r>
-            <a:endParaRPr lang="en-US" sz="750" dirty="0"/>
-          </a:p>
-        </p:txBody>
-      </p:sp>
-      <p:sp>
-        <p:nvSpPr>
-          <p:cNvPr id="122" name="Shape 120"/>
-          <p:cNvSpPr/>
-          <p:nvPr/>
-        </p:nvSpPr>
-        <p:spPr>
-          <a:xfrm>
-            <a:off x="3200400" y="4681728"/>
-            <a:ext cx="932688" cy="155448"/>
-          </a:xfrm>
-          <a:prstGeom prst="roundRect">
-            <a:avLst>
-              <a:gd name="adj" fmla="val 17647"/>
-            </a:avLst>
-          </a:prstGeom>
-          <a:solidFill>
-            <a:srgbClr val="F3F4F6"/>
-          </a:solidFill>
-          <a:ln w="9525">
-            <a:solidFill>
-              <a:srgbClr val="D1D5DB"/>
-            </a:solidFill>
-            <a:prstDash val="solid"/>
-          </a:ln>
-        </p:spPr>
-      </p:sp>
-      <p:sp>
-        <p:nvSpPr>
-          <p:cNvPr id="123" name="Text 121"/>
-          <p:cNvSpPr/>
-          <p:nvPr/>
-        </p:nvSpPr>
-        <p:spPr>
-          <a:xfrm>
-            <a:off x="3200400" y="4681728"/>
-            <a:ext cx="932688" cy="155448"/>
-          </a:xfrm>
-          <a:prstGeom prst="rect">
-            <a:avLst/>
-          </a:prstGeom>
-          <a:noFill/>
-          <a:ln/>
-        </p:spPr>
-        <p:txBody>
-          <a:bodyPr wrap="square" lIns="0" tIns="0" rIns="0" bIns="0" rtlCol="0" anchor="ctr"/>
-          <a:lstStyle/>
-          <a:p>
-            <a:pPr algn="ctr" indent="0" marL="0">
-              <a:buNone/>
-            </a:pPr>
-            <a:r>
-              <a:rPr lang="en-US" sz="700" dirty="0">
-                <a:solidFill>
-                  <a:srgbClr val="374151"/>
-                </a:solidFill>
-              </a:rPr>
-              <a:t>Not Started</a:t>
-            </a:r>
-            <a:endParaRPr lang="en-US" sz="700" dirty="0"/>
-          </a:p>
-        </p:txBody>
-      </p:sp>
-      <p:sp>
-        <p:nvSpPr>
-          <p:cNvPr id="124" name="Shape 122"/>
-          <p:cNvSpPr/>
-          <p:nvPr/>
-        </p:nvSpPr>
-        <p:spPr>
-          <a:xfrm>
-            <a:off x="4215384" y="4471416"/>
-            <a:ext cx="932688" cy="182880"/>
-          </a:xfrm>
-          <a:prstGeom prst="roundRect">
-            <a:avLst>
-              <a:gd name="adj" fmla="val 15000"/>
-            </a:avLst>
-          </a:prstGeom>
-          <a:solidFill>
-            <a:srgbClr val="FFFFFF"/>
-          </a:solidFill>
-          <a:ln w="9525">
-            <a:solidFill>
-              <a:srgbClr val="CBD5E1"/>
-            </a:solidFill>
-            <a:prstDash val="solid"/>
-          </a:ln>
-        </p:spPr>
-      </p:sp>
-      <p:sp>
-        <p:nvSpPr>
-          <p:cNvPr id="125" name="Text 123"/>
-          <p:cNvSpPr/>
-          <p:nvPr/>
-        </p:nvSpPr>
-        <p:spPr>
-          <a:xfrm>
-            <a:off x="4215384" y="4471416"/>
-            <a:ext cx="932688" cy="182880"/>
-          </a:xfrm>
-          <a:prstGeom prst="rect">
-            <a:avLst/>
-          </a:prstGeom>
-          <a:noFill/>
-          <a:ln/>
-        </p:spPr>
-        <p:txBody>
-          <a:bodyPr wrap="square" lIns="0" tIns="0" rIns="0" bIns="0" rtlCol="0" anchor="ctr"/>
-          <a:lstStyle/>
-          <a:p>
-            <a:pPr algn="ctr" indent="0" marL="0">
-              <a:buNone/>
-            </a:pPr>
-            <a:r>
-              <a:rPr lang="en-US" sz="750" b="1" dirty="0">
-                <a:solidFill>
-                  <a:srgbClr val="1E293B"/>
-                </a:solidFill>
-              </a:rPr>
-              <a:t>Live Events</a:t>
-            </a:r>
-            <a:endParaRPr lang="en-US" sz="750" dirty="0"/>
-          </a:p>
-        </p:txBody>
-      </p:sp>
-      <p:sp>
-        <p:nvSpPr>
-          <p:cNvPr id="126" name="Shape 124"/>
-          <p:cNvSpPr/>
-          <p:nvPr/>
-        </p:nvSpPr>
-        <p:spPr>
-          <a:xfrm>
-            <a:off x="4215384" y="4681728"/>
-            <a:ext cx="932688" cy="155448"/>
-          </a:xfrm>
-          <a:prstGeom prst="roundRect">
-            <a:avLst>
-              <a:gd name="adj" fmla="val 17647"/>
-            </a:avLst>
-          </a:prstGeom>
-          <a:solidFill>
-            <a:srgbClr val="1558A8"/>
-          </a:solidFill>
-          <a:ln w="12700">
-            <a:solidFill>
-              <a:srgbClr val="1558A8"/>
-            </a:solidFill>
-            <a:prstDash val="solid"/>
-          </a:ln>
-        </p:spPr>
-      </p:sp>
-      <p:sp>
-        <p:nvSpPr>
-          <p:cNvPr id="127" name="Text 125"/>
-          <p:cNvSpPr/>
-          <p:nvPr/>
-        </p:nvSpPr>
-        <p:spPr>
-          <a:xfrm>
-            <a:off x="4215384" y="4681728"/>
-            <a:ext cx="932688" cy="155448"/>
-          </a:xfrm>
-          <a:prstGeom prst="rect">
-            <a:avLst/>
-          </a:prstGeom>
-          <a:noFill/>
-          <a:ln/>
-        </p:spPr>
-        <p:txBody>
-          <a:bodyPr wrap="square" lIns="0" tIns="0" rIns="0" bIns="0" rtlCol="0" anchor="ctr"/>
-          <a:lstStyle/>
-          <a:p>
-            <a:pPr algn="ctr" indent="0" marL="0">
-              <a:buNone/>
-            </a:pPr>
-            <a:r>
-              <a:rPr lang="en-US" sz="700" dirty="0">
-                <a:solidFill>
-                  <a:srgbClr val="FFFFFF"/>
-                </a:solidFill>
-              </a:rPr>
-              <a:t>In Progress</a:t>
-            </a:r>
-            <a:endParaRPr lang="en-US" sz="700" dirty="0"/>
-          </a:p>
-        </p:txBody>
-      </p:sp>
-      <p:sp>
-        <p:nvSpPr>
-          <p:cNvPr id="128" name="Shape 126"/>
-          <p:cNvSpPr/>
-          <p:nvPr/>
-        </p:nvSpPr>
-        <p:spPr>
-          <a:xfrm>
-            <a:off x="5230368" y="4471416"/>
-            <a:ext cx="932688" cy="182880"/>
-          </a:xfrm>
-          <a:prstGeom prst="roundRect">
-            <a:avLst>
-              <a:gd name="adj" fmla="val 15000"/>
-            </a:avLst>
-          </a:prstGeom>
-          <a:solidFill>
-            <a:srgbClr val="FFFFFF"/>
-          </a:solidFill>
-          <a:ln w="9525">
-            <a:solidFill>
-              <a:srgbClr val="CBD5E1"/>
-            </a:solidFill>
-            <a:prstDash val="solid"/>
-          </a:ln>
-        </p:spPr>
-      </p:sp>
-      <p:sp>
-        <p:nvSpPr>
-          <p:cNvPr id="129" name="Text 127"/>
-          <p:cNvSpPr/>
-          <p:nvPr/>
-        </p:nvSpPr>
-        <p:spPr>
-          <a:xfrm>
-            <a:off x="5230368" y="4471416"/>
-            <a:ext cx="932688" cy="182880"/>
-          </a:xfrm>
-          <a:prstGeom prst="rect">
-            <a:avLst/>
-          </a:prstGeom>
-          <a:noFill/>
-          <a:ln/>
-        </p:spPr>
-        <p:txBody>
-          <a:bodyPr wrap="square" lIns="0" tIns="0" rIns="0" bIns="0" rtlCol="0" anchor="ctr"/>
-          <a:lstStyle/>
-          <a:p>
-            <a:pPr algn="ctr" indent="0" marL="0">
-              <a:buNone/>
-            </a:pPr>
-            <a:r>
-              <a:rPr lang="en-US" sz="750" b="1" dirty="0">
-                <a:solidFill>
-                  <a:srgbClr val="1E293B"/>
-                </a:solidFill>
-              </a:rPr>
-              <a:t>Back Catalog</a:t>
-            </a:r>
-            <a:endParaRPr lang="en-US" sz="750" dirty="0"/>
-          </a:p>
-        </p:txBody>
-      </p:sp>
-      <p:sp>
-        <p:nvSpPr>
-          <p:cNvPr id="130" name="Shape 128"/>
-          <p:cNvSpPr/>
-          <p:nvPr/>
-        </p:nvSpPr>
-        <p:spPr>
-          <a:xfrm>
-            <a:off x="5230368" y="4681728"/>
-            <a:ext cx="932688" cy="155448"/>
-          </a:xfrm>
-          <a:prstGeom prst="roundRect">
-            <a:avLst>
-              <a:gd name="adj" fmla="val 17647"/>
-            </a:avLst>
-          </a:prstGeom>
-          <a:solidFill>
-            <a:srgbClr val="F3F4F6"/>
-          </a:solidFill>
-          <a:ln w="9525">
-            <a:solidFill>
-              <a:srgbClr val="D1D5DB"/>
-            </a:solidFill>
-            <a:prstDash val="solid"/>
-          </a:ln>
-        </p:spPr>
-      </p:sp>
-      <p:sp>
-        <p:nvSpPr>
-          <p:cNvPr id="131" name="Text 129"/>
-          <p:cNvSpPr/>
-          <p:nvPr/>
-        </p:nvSpPr>
-        <p:spPr>
-          <a:xfrm>
-            <a:off x="5230368" y="4681728"/>
-            <a:ext cx="932688" cy="155448"/>
-          </a:xfrm>
-          <a:prstGeom prst="rect">
-            <a:avLst/>
-          </a:prstGeom>
-          <a:noFill/>
-          <a:ln/>
-        </p:spPr>
-        <p:txBody>
-          <a:bodyPr wrap="square" lIns="0" tIns="0" rIns="0" bIns="0" rtlCol="0" anchor="ctr"/>
-          <a:lstStyle/>
-          <a:p>
-            <a:pPr algn="ctr" indent="0" marL="0">
-              <a:buNone/>
-            </a:pPr>
-            <a:r>
-              <a:rPr lang="en-US" sz="700" dirty="0">
-                <a:solidFill>
-                  <a:srgbClr val="374151"/>
-                </a:solidFill>
-              </a:rPr>
-              <a:t>Not Started</a:t>
-            </a:r>
-            <a:endParaRPr lang="en-US" sz="700" dirty="0"/>
-          </a:p>
-        </p:txBody>
-      </p:sp>
-      <p:sp>
-        <p:nvSpPr>
-          <p:cNvPr id="132" name="Shape 130"/>
-          <p:cNvSpPr/>
-          <p:nvPr/>
-        </p:nvSpPr>
-        <p:spPr>
-          <a:xfrm>
-            <a:off x="6245352" y="4471416"/>
-            <a:ext cx="932688" cy="182880"/>
-          </a:xfrm>
-          <a:prstGeom prst="roundRect">
-            <a:avLst>
-              <a:gd name="adj" fmla="val 15000"/>
-            </a:avLst>
-          </a:prstGeom>
-          <a:solidFill>
-            <a:srgbClr val="FFFFFF"/>
-          </a:solidFill>
-          <a:ln w="9525">
-            <a:solidFill>
-              <a:srgbClr val="CBD5E1"/>
-            </a:solidFill>
-            <a:prstDash val="solid"/>
-          </a:ln>
-        </p:spPr>
-      </p:sp>
-      <p:sp>
-        <p:nvSpPr>
-          <p:cNvPr id="133" name="Text 131"/>
-          <p:cNvSpPr/>
-          <p:nvPr/>
-        </p:nvSpPr>
-        <p:spPr>
-          <a:xfrm>
-            <a:off x="6245352" y="4471416"/>
-            <a:ext cx="932688" cy="182880"/>
-          </a:xfrm>
-          <a:prstGeom prst="rect">
-            <a:avLst/>
-          </a:prstGeom>
-          <a:noFill/>
-          <a:ln/>
-        </p:spPr>
-        <p:txBody>
-          <a:bodyPr wrap="square" lIns="0" tIns="0" rIns="0" bIns="0" rtlCol="0" anchor="ctr"/>
-          <a:lstStyle/>
-          <a:p>
-            <a:pPr algn="ctr" indent="0" marL="0">
-              <a:buNone/>
-            </a:pPr>
-            <a:r>
-              <a:rPr lang="en-US" sz="750" b="1" dirty="0">
-                <a:solidFill>
-                  <a:srgbClr val="1E293B"/>
-                </a:solidFill>
-              </a:rPr>
-              <a:t>Full Replays</a:t>
-            </a:r>
-            <a:endParaRPr lang="en-US" sz="750" dirty="0"/>
-          </a:p>
-        </p:txBody>
-      </p:sp>
-      <p:sp>
-        <p:nvSpPr>
-          <p:cNvPr id="134" name="Shape 132"/>
-          <p:cNvSpPr/>
-          <p:nvPr/>
-        </p:nvSpPr>
-        <p:spPr>
-          <a:xfrm>
-            <a:off x="6245352" y="4681728"/>
-            <a:ext cx="932688" cy="155448"/>
-          </a:xfrm>
-          <a:prstGeom prst="roundRect">
-            <a:avLst>
-              <a:gd name="adj" fmla="val 17647"/>
-            </a:avLst>
-          </a:prstGeom>
-          <a:solidFill>
-            <a:srgbClr val="F3F4F6"/>
-          </a:solidFill>
-          <a:ln w="9525">
-            <a:solidFill>
-              <a:srgbClr val="D1D5DB"/>
-            </a:solidFill>
-            <a:prstDash val="solid"/>
-          </a:ln>
-        </p:spPr>
-      </p:sp>
-      <p:sp>
-        <p:nvSpPr>
-          <p:cNvPr id="135" name="Text 133"/>
-          <p:cNvSpPr/>
-          <p:nvPr/>
-        </p:nvSpPr>
-        <p:spPr>
-          <a:xfrm>
-            <a:off x="6245352" y="4681728"/>
-            <a:ext cx="932688" cy="155448"/>
-          </a:xfrm>
-          <a:prstGeom prst="rect">
-            <a:avLst/>
-          </a:prstGeom>
-          <a:noFill/>
-          <a:ln/>
-        </p:spPr>
-        <p:txBody>
-          <a:bodyPr wrap="square" lIns="0" tIns="0" rIns="0" bIns="0" rtlCol="0" anchor="ctr"/>
-          <a:lstStyle/>
-          <a:p>
-            <a:pPr algn="ctr" indent="0" marL="0">
-              <a:buNone/>
-            </a:pPr>
-            <a:r>
-              <a:rPr lang="en-US" sz="700" dirty="0">
-                <a:solidFill>
-                  <a:srgbClr val="374151"/>
-                </a:solidFill>
-              </a:rPr>
-              <a:t>Not Started</a:t>
-            </a:r>
-            <a:endParaRPr lang="en-US" sz="700" dirty="0"/>
-          </a:p>
-        </p:txBody>
-      </p:sp>
-      <p:sp>
-        <p:nvSpPr>
-          <p:cNvPr id="136" name="Shape 134"/>
-          <p:cNvSpPr/>
-          <p:nvPr/>
-        </p:nvSpPr>
-        <p:spPr>
-          <a:xfrm>
-            <a:off x="7260336" y="4471416"/>
-            <a:ext cx="932688" cy="182880"/>
-          </a:xfrm>
-          <a:prstGeom prst="roundRect">
-            <a:avLst>
-              <a:gd name="adj" fmla="val 15000"/>
-            </a:avLst>
-          </a:prstGeom>
-          <a:solidFill>
-            <a:srgbClr val="FFFFFF"/>
-          </a:solidFill>
-          <a:ln w="9525">
-            <a:solidFill>
-              <a:srgbClr val="CBD5E1"/>
-            </a:solidFill>
-            <a:prstDash val="solid"/>
-          </a:ln>
-        </p:spPr>
-      </p:sp>
-      <p:sp>
-        <p:nvSpPr>
-          <p:cNvPr id="137" name="Text 135"/>
-          <p:cNvSpPr/>
-          <p:nvPr/>
-        </p:nvSpPr>
-        <p:spPr>
-          <a:xfrm>
-            <a:off x="7260336" y="4471416"/>
-            <a:ext cx="932688" cy="182880"/>
-          </a:xfrm>
-          <a:prstGeom prst="rect">
-            <a:avLst/>
-          </a:prstGeom>
-          <a:noFill/>
-          <a:ln/>
-        </p:spPr>
-        <p:txBody>
-          <a:bodyPr wrap="square" lIns="0" tIns="0" rIns="0" bIns="0" rtlCol="0" anchor="ctr"/>
-          <a:lstStyle/>
-          <a:p>
-            <a:pPr algn="ctr" indent="0" marL="0">
-              <a:buNone/>
-            </a:pPr>
-            <a:r>
-              <a:rPr lang="en-US" sz="750" b="1" dirty="0">
-                <a:solidFill>
-                  <a:srgbClr val="1E293B"/>
-                </a:solidFill>
-              </a:rPr>
-              <a:t>M15</a:t>
-            </a:r>
-            <a:endParaRPr lang="en-US" sz="750" dirty="0"/>
-          </a:p>
-        </p:txBody>
-      </p:sp>
-      <p:sp>
-        <p:nvSpPr>
-          <p:cNvPr id="138" name="Shape 136"/>
-          <p:cNvSpPr/>
-          <p:nvPr/>
-        </p:nvSpPr>
-        <p:spPr>
-          <a:xfrm>
-            <a:off x="7260336" y="4681728"/>
-            <a:ext cx="932688" cy="155448"/>
-          </a:xfrm>
-          <a:prstGeom prst="roundRect">
-            <a:avLst>
-              <a:gd name="adj" fmla="val 17647"/>
-            </a:avLst>
-          </a:prstGeom>
-          <a:solidFill>
-            <a:srgbClr val="F3F4F6"/>
-          </a:solidFill>
-          <a:ln w="9525">
-            <a:solidFill>
-              <a:srgbClr val="D1D5DB"/>
-            </a:solidFill>
-            <a:prstDash val="solid"/>
-          </a:ln>
-        </p:spPr>
-      </p:sp>
-      <p:sp>
-        <p:nvSpPr>
-          <p:cNvPr id="139" name="Text 137"/>
-          <p:cNvSpPr/>
-          <p:nvPr/>
-        </p:nvSpPr>
-        <p:spPr>
-          <a:xfrm>
-            <a:off x="7260336" y="4681728"/>
-            <a:ext cx="932688" cy="155448"/>
-          </a:xfrm>
-          <a:prstGeom prst="rect">
-            <a:avLst/>
-          </a:prstGeom>
-          <a:noFill/>
-          <a:ln/>
-        </p:spPr>
-        <p:txBody>
-          <a:bodyPr wrap="square" lIns="0" tIns="0" rIns="0" bIns="0" rtlCol="0" anchor="ctr"/>
-          <a:lstStyle/>
-          <a:p>
-            <a:pPr algn="ctr" indent="0" marL="0">
-              <a:buNone/>
-            </a:pPr>
-            <a:r>
-              <a:rPr lang="en-US" sz="700" dirty="0">
-                <a:solidFill>
-                  <a:srgbClr val="374151"/>
-                </a:solidFill>
-              </a:rPr>
-              <a:t>Not Started</a:t>
-            </a:r>
-            <a:endParaRPr lang="en-US" sz="700" dirty="0"/>
-          </a:p>
-        </p:txBody>
-      </p:sp>
-      <p:sp>
-        <p:nvSpPr>
-          <p:cNvPr id="140" name="Shape 138"/>
-          <p:cNvSpPr/>
-          <p:nvPr/>
-        </p:nvSpPr>
-        <p:spPr>
-          <a:xfrm>
-            <a:off x="8275320" y="4471416"/>
-            <a:ext cx="932688" cy="182880"/>
-          </a:xfrm>
-          <a:prstGeom prst="roundRect">
-            <a:avLst>
-              <a:gd name="adj" fmla="val 15000"/>
-            </a:avLst>
-          </a:prstGeom>
-          <a:solidFill>
-            <a:srgbClr val="FFFFFF"/>
-          </a:solidFill>
-          <a:ln w="9525">
-            <a:solidFill>
-              <a:srgbClr val="CBD5E1"/>
-            </a:solidFill>
-            <a:prstDash val="solid"/>
-          </a:ln>
-        </p:spPr>
-      </p:sp>
-      <p:sp>
-        <p:nvSpPr>
-          <p:cNvPr id="141" name="Text 139"/>
-          <p:cNvSpPr/>
-          <p:nvPr/>
-        </p:nvSpPr>
-        <p:spPr>
-          <a:xfrm>
-            <a:off x="8275320" y="4471416"/>
-            <a:ext cx="932688" cy="182880"/>
-          </a:xfrm>
-          <a:prstGeom prst="rect">
-            <a:avLst/>
-          </a:prstGeom>
-          <a:noFill/>
-          <a:ln/>
-        </p:spPr>
-        <p:txBody>
-          <a:bodyPr wrap="square" lIns="0" tIns="0" rIns="0" bIns="0" rtlCol="0" anchor="ctr"/>
-          <a:lstStyle/>
-          <a:p>
-            <a:pPr algn="ctr" indent="0" marL="0">
-              <a:buNone/>
-            </a:pPr>
-            <a:r>
-              <a:rPr lang="en-US" sz="750" b="1" dirty="0">
-                <a:solidFill>
-                  <a:srgbClr val="1E293B"/>
-                </a:solidFill>
-              </a:rPr>
-              <a:t>Highlights</a:t>
-            </a:r>
-            <a:endParaRPr lang="en-US" sz="750" dirty="0"/>
-          </a:p>
-        </p:txBody>
-      </p:sp>
-      <p:sp>
-        <p:nvSpPr>
-          <p:cNvPr id="142" name="Shape 140"/>
-          <p:cNvSpPr/>
-          <p:nvPr/>
-        </p:nvSpPr>
-        <p:spPr>
-          <a:xfrm>
-            <a:off x="8275320" y="4681728"/>
-            <a:ext cx="932688" cy="155448"/>
-          </a:xfrm>
-          <a:prstGeom prst="roundRect">
-            <a:avLst>
-              <a:gd name="adj" fmla="val 17647"/>
-            </a:avLst>
-          </a:prstGeom>
-          <a:solidFill>
-            <a:srgbClr val="F3F4F6"/>
-          </a:solidFill>
-          <a:ln w="9525">
-            <a:solidFill>
-              <a:srgbClr val="D1D5DB"/>
-            </a:solidFill>
-            <a:prstDash val="solid"/>
-          </a:ln>
-        </p:spPr>
-      </p:sp>
-      <p:sp>
-        <p:nvSpPr>
-          <p:cNvPr id="143" name="Text 141"/>
-          <p:cNvSpPr/>
-          <p:nvPr/>
-        </p:nvSpPr>
-        <p:spPr>
-          <a:xfrm>
-            <a:off x="8275320" y="4681728"/>
-            <a:ext cx="932688" cy="155448"/>
-          </a:xfrm>
-          <a:prstGeom prst="rect">
-            <a:avLst/>
-          </a:prstGeom>
-          <a:noFill/>
-          <a:ln/>
-        </p:spPr>
-        <p:txBody>
-          <a:bodyPr wrap="square" lIns="0" tIns="0" rIns="0" bIns="0" rtlCol="0" anchor="ctr"/>
-          <a:lstStyle/>
-          <a:p>
-            <a:pPr algn="ctr" indent="0" marL="0">
-              <a:buNone/>
-            </a:pPr>
-            <a:r>
-              <a:rPr lang="en-US" sz="700" dirty="0">
-                <a:solidFill>
-                  <a:srgbClr val="374151"/>
-                </a:solidFill>
-              </a:rPr>
-              <a:t>Not Started</a:t>
-            </a:r>
-            <a:endParaRPr lang="en-US" sz="700" dirty="0"/>
-          </a:p>
-        </p:txBody>
-      </p:sp>
-      <p:sp>
-        <p:nvSpPr>
-          <p:cNvPr id="144" name="Shape 142"/>
-          <p:cNvSpPr/>
-          <p:nvPr/>
-        </p:nvSpPr>
-        <p:spPr>
-          <a:xfrm>
-            <a:off x="1170432" y="4928616"/>
-            <a:ext cx="932688" cy="182880"/>
-          </a:xfrm>
-          <a:prstGeom prst="roundRect">
-            <a:avLst>
-              <a:gd name="adj" fmla="val 15000"/>
-            </a:avLst>
-          </a:prstGeom>
-          <a:solidFill>
-            <a:srgbClr val="FFFFFF"/>
-          </a:solidFill>
-          <a:ln w="9525">
-            <a:solidFill>
-              <a:srgbClr val="CBD5E1"/>
-            </a:solidFill>
-            <a:prstDash val="solid"/>
-          </a:ln>
-        </p:spPr>
-      </p:sp>
-      <p:sp>
-        <p:nvSpPr>
-          <p:cNvPr id="145" name="Text 143"/>
-          <p:cNvSpPr/>
-          <p:nvPr/>
-        </p:nvSpPr>
-        <p:spPr>
-          <a:xfrm>
-            <a:off x="1170432" y="4928616"/>
-            <a:ext cx="932688" cy="182880"/>
-          </a:xfrm>
-          <a:prstGeom prst="rect">
-            <a:avLst/>
-          </a:prstGeom>
-          <a:noFill/>
-          <a:ln/>
-        </p:spPr>
-        <p:txBody>
-          <a:bodyPr wrap="square" lIns="0" tIns="0" rIns="0" bIns="0" rtlCol="0" anchor="ctr"/>
-          <a:lstStyle/>
-          <a:p>
-            <a:pPr algn="ctr" indent="0" marL="0">
-              <a:buNone/>
-            </a:pPr>
-            <a:r>
-              <a:rPr lang="en-US" sz="750" b="1" dirty="0">
-                <a:solidFill>
-                  <a:srgbClr val="1E293B"/>
-                </a:solidFill>
-              </a:rPr>
-              <a:t>Linear</a:t>
-            </a:r>
-            <a:endParaRPr lang="en-US" sz="750" dirty="0"/>
-          </a:p>
-        </p:txBody>
-      </p:sp>
-      <p:sp>
-        <p:nvSpPr>
-          <p:cNvPr id="146" name="Shape 144"/>
-          <p:cNvSpPr/>
-          <p:nvPr/>
-        </p:nvSpPr>
-        <p:spPr>
-          <a:xfrm>
-            <a:off x="1170432" y="5138928"/>
-            <a:ext cx="932688" cy="155448"/>
-          </a:xfrm>
-          <a:prstGeom prst="roundRect">
-            <a:avLst>
-              <a:gd name="adj" fmla="val 17647"/>
-            </a:avLst>
-          </a:prstGeom>
-          <a:solidFill>
-            <a:srgbClr val="F3F4F6"/>
-          </a:solidFill>
-          <a:ln w="9525">
-            <a:solidFill>
-              <a:srgbClr val="D1D5DB"/>
-            </a:solidFill>
-            <a:prstDash val="solid"/>
-          </a:ln>
-        </p:spPr>
-      </p:sp>
-      <p:sp>
-        <p:nvSpPr>
-          <p:cNvPr id="147" name="Text 145"/>
-          <p:cNvSpPr/>
-          <p:nvPr/>
-        </p:nvSpPr>
-        <p:spPr>
-          <a:xfrm>
-            <a:off x="1170432" y="5138928"/>
-            <a:ext cx="932688" cy="155448"/>
-          </a:xfrm>
-          <a:prstGeom prst="rect">
-            <a:avLst/>
-          </a:prstGeom>
-          <a:noFill/>
-          <a:ln/>
-        </p:spPr>
-        <p:txBody>
-          <a:bodyPr wrap="square" lIns="0" tIns="0" rIns="0" bIns="0" rtlCol="0" anchor="ctr"/>
-          <a:lstStyle/>
-          <a:p>
-            <a:pPr algn="ctr" indent="0" marL="0">
-              <a:buNone/>
-            </a:pPr>
-            <a:r>
-              <a:rPr lang="en-US" sz="700" dirty="0">
-                <a:solidFill>
-                  <a:srgbClr val="374151"/>
-                </a:solidFill>
-              </a:rPr>
-              <a:t>Not Started</a:t>
-            </a:r>
-            <a:endParaRPr lang="en-US" sz="700" dirty="0"/>
-          </a:p>
-        </p:txBody>
-      </p:sp>
-      <p:sp>
-        <p:nvSpPr>
-          <p:cNvPr id="148" name="Shape 146"/>
-          <p:cNvSpPr/>
-          <p:nvPr/>
-        </p:nvSpPr>
-        <p:spPr>
-          <a:xfrm>
-            <a:off x="164592" y="5340096"/>
-            <a:ext cx="9116568" cy="1078992"/>
-          </a:xfrm>
-          <a:prstGeom prst="rect">
-            <a:avLst/>
-          </a:prstGeom>
-          <a:solidFill>
-            <a:srgbClr val="FAFBFC"/>
-          </a:solidFill>
-          <a:ln w="6350">
-            <a:solidFill>
-              <a:srgbClr val="E5E7EB"/>
-            </a:solidFill>
-            <a:prstDash val="solid"/>
-          </a:ln>
-        </p:spPr>
-      </p:sp>
-      <p:sp>
-        <p:nvSpPr>
-          <p:cNvPr id="149" name="Shape 147"/>
-          <p:cNvSpPr/>
-          <p:nvPr/>
-        </p:nvSpPr>
-        <p:spPr>
-          <a:xfrm>
-            <a:off x="182880" y="5413248"/>
-            <a:ext cx="859536" cy="932688"/>
-          </a:xfrm>
-          <a:prstGeom prst="roundRect">
-            <a:avLst>
-              <a:gd name="adj" fmla="val 5319"/>
-            </a:avLst>
-          </a:prstGeom>
-          <a:solidFill>
-            <a:srgbClr val="9CA3AF"/>
-          </a:solidFill>
-          <a:ln w="12700">
-            <a:solidFill>
-              <a:srgbClr val="9CA3AF"/>
-            </a:solidFill>
-            <a:prstDash val="solid"/>
-          </a:ln>
-        </p:spPr>
-      </p:sp>
-      <p:sp>
-        <p:nvSpPr>
-          <p:cNvPr id="150" name="Text 148"/>
-          <p:cNvSpPr/>
-          <p:nvPr/>
-        </p:nvSpPr>
-        <p:spPr>
-          <a:xfrm>
-            <a:off x="182880" y="5413248"/>
-            <a:ext cx="859536" cy="932688"/>
-          </a:xfrm>
-          <a:prstGeom prst="rect">
-            <a:avLst/>
-          </a:prstGeom>
-          <a:noFill/>
-          <a:ln/>
-        </p:spPr>
-        <p:txBody>
-          <a:bodyPr wrap="square" lIns="0" tIns="0" rIns="0" bIns="0" rtlCol="0" anchor="ctr"/>
-          <a:lstStyle/>
-          <a:p>
-            <a:pPr algn="ctr" indent="0" marL="0">
-              <a:buNone/>
-            </a:pPr>
-            <a:r>
-              <a:rPr lang="en-US" sz="950" b="1" dirty="0">
-                <a:solidFill>
-                  <a:srgbClr val="FFFFFF"/>
-                </a:solidFill>
-              </a:rPr>
-              <a:t>Onboarding</a:t>
-            </a:r>
-            <a:endParaRPr lang="en-US" sz="950" dirty="0"/>
-          </a:p>
-        </p:txBody>
-      </p:sp>
-      <p:sp>
-        <p:nvSpPr>
-          <p:cNvPr id="151" name="Text 149"/>
-          <p:cNvSpPr/>
-          <p:nvPr/>
-        </p:nvSpPr>
-        <p:spPr>
-          <a:xfrm>
-            <a:off x="1170432" y="5385816"/>
-            <a:ext cx="8110728" cy="182880"/>
-          </a:xfrm>
-          <a:prstGeom prst="rect">
-            <a:avLst/>
-          </a:prstGeom>
-          <a:noFill/>
-          <a:ln/>
-        </p:spPr>
-        <p:txBody>
-          <a:bodyPr wrap="square" lIns="0" tIns="0" rIns="0" bIns="0" rtlCol="0" anchor="ctr"/>
-          <a:lstStyle/>
-          <a:p>
-            <a:pPr algn="l" indent="0" marL="0">
-              <a:buNone/>
-            </a:pPr>
-            <a:r>
-              <a:rPr lang="en-US" sz="750" dirty="0">
-                <a:solidFill>
-                  <a:srgbClr val="9CA3AF"/>
-                </a:solidFill>
-              </a:rPr>
-              <a:t>1 / 5 In Progress</a:t>
-            </a:r>
-            <a:endParaRPr lang="en-US" sz="750" dirty="0"/>
-          </a:p>
-        </p:txBody>
-      </p:sp>
-      <p:sp>
-        <p:nvSpPr>
-          <p:cNvPr id="152" name="Shape 150"/>
-          <p:cNvSpPr/>
-          <p:nvPr/>
-        </p:nvSpPr>
-        <p:spPr>
-          <a:xfrm>
-            <a:off x="1170432" y="5605272"/>
-            <a:ext cx="932688" cy="182880"/>
-          </a:xfrm>
-          <a:prstGeom prst="roundRect">
-            <a:avLst>
-              <a:gd name="adj" fmla="val 15000"/>
-            </a:avLst>
-          </a:prstGeom>
-          <a:solidFill>
-            <a:srgbClr val="FFFFFF"/>
-          </a:solidFill>
-          <a:ln w="9525">
-            <a:solidFill>
-              <a:srgbClr val="CBD5E1"/>
-            </a:solidFill>
-            <a:prstDash val="solid"/>
-          </a:ln>
-        </p:spPr>
-      </p:sp>
-      <p:sp>
-        <p:nvSpPr>
-          <p:cNvPr id="153" name="Text 151"/>
-          <p:cNvSpPr/>
-          <p:nvPr/>
-        </p:nvSpPr>
-        <p:spPr>
-          <a:xfrm>
-            <a:off x="1170432" y="5605272"/>
-            <a:ext cx="932688" cy="182880"/>
-          </a:xfrm>
-          <a:prstGeom prst="rect">
-            <a:avLst/>
-          </a:prstGeom>
-          <a:noFill/>
-          <a:ln/>
-        </p:spPr>
-        <p:txBody>
-          <a:bodyPr wrap="square" lIns="0" tIns="0" rIns="0" bIns="0" rtlCol="0" anchor="ctr"/>
-          <a:lstStyle/>
-          <a:p>
-            <a:pPr algn="ctr" indent="0" marL="0">
-              <a:buNone/>
-            </a:pPr>
-            <a:r>
-              <a:rPr lang="en-US" sz="750" b="1" dirty="0">
-                <a:solidFill>
-                  <a:srgbClr val="1E293B"/>
-                </a:solidFill>
-              </a:rPr>
-              <a:t>Unentitled</a:t>
-            </a:r>
-            <a:endParaRPr lang="en-US" sz="750" dirty="0"/>
-          </a:p>
-        </p:txBody>
-      </p:sp>
-      <p:sp>
-        <p:nvSpPr>
-          <p:cNvPr id="154" name="Shape 152"/>
-          <p:cNvSpPr/>
-          <p:nvPr/>
-        </p:nvSpPr>
-        <p:spPr>
-          <a:xfrm>
-            <a:off x="1170432" y="5815584"/>
-            <a:ext cx="932688" cy="155448"/>
-          </a:xfrm>
-          <a:prstGeom prst="roundRect">
-            <a:avLst>
-              <a:gd name="adj" fmla="val 17647"/>
-            </a:avLst>
-          </a:prstGeom>
-          <a:solidFill>
-            <a:srgbClr val="F3F4F6"/>
-          </a:solidFill>
-          <a:ln w="9525">
-            <a:solidFill>
-              <a:srgbClr val="D1D5DB"/>
-            </a:solidFill>
-            <a:prstDash val="solid"/>
-          </a:ln>
-        </p:spPr>
-      </p:sp>
-      <p:sp>
-        <p:nvSpPr>
-          <p:cNvPr id="155" name="Text 153"/>
-          <p:cNvSpPr/>
-          <p:nvPr/>
-        </p:nvSpPr>
-        <p:spPr>
-          <a:xfrm>
-            <a:off x="1170432" y="5815584"/>
-            <a:ext cx="932688" cy="155448"/>
-          </a:xfrm>
-          <a:prstGeom prst="rect">
-            <a:avLst/>
-          </a:prstGeom>
-          <a:noFill/>
-          <a:ln/>
-        </p:spPr>
-        <p:txBody>
-          <a:bodyPr wrap="square" lIns="0" tIns="0" rIns="0" bIns="0" rtlCol="0" anchor="ctr"/>
-          <a:lstStyle/>
-          <a:p>
-            <a:pPr algn="ctr" indent="0" marL="0">
-              <a:buNone/>
-            </a:pPr>
-            <a:r>
-              <a:rPr lang="en-US" sz="700" dirty="0">
-                <a:solidFill>
-                  <a:srgbClr val="374151"/>
-                </a:solidFill>
-              </a:rPr>
-              <a:t>Not Started</a:t>
-            </a:r>
-            <a:endParaRPr lang="en-US" sz="700" dirty="0"/>
-          </a:p>
-        </p:txBody>
-      </p:sp>
-      <p:sp>
-        <p:nvSpPr>
-          <p:cNvPr id="156" name="Shape 154"/>
-          <p:cNvSpPr/>
-          <p:nvPr/>
-        </p:nvSpPr>
-        <p:spPr>
-          <a:xfrm>
-            <a:off x="2185416" y="5605272"/>
-            <a:ext cx="932688" cy="182880"/>
-          </a:xfrm>
-          <a:prstGeom prst="roundRect">
-            <a:avLst>
-              <a:gd name="adj" fmla="val 15000"/>
-            </a:avLst>
-          </a:prstGeom>
-          <a:solidFill>
-            <a:srgbClr val="FFFFFF"/>
-          </a:solidFill>
-          <a:ln w="9525">
-            <a:solidFill>
-              <a:srgbClr val="CBD5E1"/>
-            </a:solidFill>
-            <a:prstDash val="solid"/>
-          </a:ln>
-        </p:spPr>
-      </p:sp>
-      <p:sp>
-        <p:nvSpPr>
-          <p:cNvPr id="157" name="Text 155"/>
-          <p:cNvSpPr/>
-          <p:nvPr/>
-        </p:nvSpPr>
-        <p:spPr>
-          <a:xfrm>
-            <a:off x="2185416" y="5605272"/>
-            <a:ext cx="932688" cy="182880"/>
-          </a:xfrm>
-          <a:prstGeom prst="rect">
-            <a:avLst/>
-          </a:prstGeom>
-          <a:noFill/>
-          <a:ln/>
-        </p:spPr>
-        <p:txBody>
-          <a:bodyPr wrap="square" lIns="0" tIns="0" rIns="0" bIns="0" rtlCol="0" anchor="ctr"/>
-          <a:lstStyle/>
-          <a:p>
-            <a:pPr algn="ctr" indent="0" marL="0">
-              <a:buNone/>
-            </a:pPr>
-            <a:r>
-              <a:rPr lang="en-US" sz="750" b="1" dirty="0">
-                <a:solidFill>
-                  <a:srgbClr val="1E293B"/>
-                </a:solidFill>
-              </a:rPr>
-              <a:t>Sign-in</a:t>
-            </a:r>
-            <a:endParaRPr lang="en-US" sz="750" dirty="0"/>
-          </a:p>
-        </p:txBody>
-      </p:sp>
-      <p:sp>
-        <p:nvSpPr>
-          <p:cNvPr id="158" name="Shape 156"/>
-          <p:cNvSpPr/>
-          <p:nvPr/>
-        </p:nvSpPr>
-        <p:spPr>
-          <a:xfrm>
-            <a:off x="2185416" y="5815584"/>
-            <a:ext cx="932688" cy="155448"/>
-          </a:xfrm>
-          <a:prstGeom prst="roundRect">
-            <a:avLst>
-              <a:gd name="adj" fmla="val 17647"/>
-            </a:avLst>
-          </a:prstGeom>
-          <a:solidFill>
-            <a:srgbClr val="F3F4F6"/>
-          </a:solidFill>
-          <a:ln w="9525">
-            <a:solidFill>
-              <a:srgbClr val="D1D5DB"/>
-            </a:solidFill>
-            <a:prstDash val="solid"/>
-          </a:ln>
-        </p:spPr>
-      </p:sp>
-      <p:sp>
-        <p:nvSpPr>
-          <p:cNvPr id="159" name="Text 157"/>
-          <p:cNvSpPr/>
-          <p:nvPr/>
-        </p:nvSpPr>
-        <p:spPr>
-          <a:xfrm>
-            <a:off x="2185416" y="5815584"/>
-            <a:ext cx="932688" cy="155448"/>
-          </a:xfrm>
-          <a:prstGeom prst="rect">
-            <a:avLst/>
-          </a:prstGeom>
-          <a:noFill/>
-          <a:ln/>
-        </p:spPr>
-        <p:txBody>
-          <a:bodyPr wrap="square" lIns="0" tIns="0" rIns="0" bIns="0" rtlCol="0" anchor="ctr"/>
-          <a:lstStyle/>
-          <a:p>
-            <a:pPr algn="ctr" indent="0" marL="0">
-              <a:buNone/>
-            </a:pPr>
-            <a:r>
-              <a:rPr lang="en-US" sz="700" dirty="0">
-                <a:solidFill>
-                  <a:srgbClr val="374151"/>
-                </a:solidFill>
-              </a:rPr>
-              <a:t>Not Started</a:t>
-            </a:r>
-            <a:endParaRPr lang="en-US" sz="700" dirty="0"/>
-          </a:p>
-        </p:txBody>
-      </p:sp>
-      <p:sp>
-        <p:nvSpPr>
-          <p:cNvPr id="160" name="Shape 158"/>
-          <p:cNvSpPr/>
-          <p:nvPr/>
-        </p:nvSpPr>
-        <p:spPr>
-          <a:xfrm>
-            <a:off x="3200400" y="5605272"/>
-            <a:ext cx="932688" cy="182880"/>
-          </a:xfrm>
-          <a:prstGeom prst="roundRect">
-            <a:avLst>
-              <a:gd name="adj" fmla="val 15000"/>
-            </a:avLst>
-          </a:prstGeom>
-          <a:solidFill>
-            <a:srgbClr val="FFFFFF"/>
-          </a:solidFill>
-          <a:ln w="9525">
-            <a:solidFill>
-              <a:srgbClr val="CBD5E1"/>
-            </a:solidFill>
-            <a:prstDash val="solid"/>
-          </a:ln>
-        </p:spPr>
-      </p:sp>
-      <p:sp>
-        <p:nvSpPr>
-          <p:cNvPr id="161" name="Text 159"/>
-          <p:cNvSpPr/>
-          <p:nvPr/>
-        </p:nvSpPr>
-        <p:spPr>
-          <a:xfrm>
-            <a:off x="3200400" y="5605272"/>
-            <a:ext cx="932688" cy="182880"/>
-          </a:xfrm>
-          <a:prstGeom prst="rect">
-            <a:avLst/>
-          </a:prstGeom>
-          <a:noFill/>
-          <a:ln/>
-        </p:spPr>
-        <p:txBody>
-          <a:bodyPr wrap="square" lIns="0" tIns="0" rIns="0" bIns="0" rtlCol="0" anchor="ctr"/>
-          <a:lstStyle/>
-          <a:p>
-            <a:pPr algn="ctr" indent="0" marL="0">
-              <a:buNone/>
-            </a:pPr>
-            <a:r>
-              <a:rPr lang="en-US" sz="750" b="1" dirty="0">
-                <a:solidFill>
-                  <a:srgbClr val="1E293B"/>
-                </a:solidFill>
-              </a:rPr>
-              <a:t>Subscription</a:t>
-            </a:r>
-            <a:endParaRPr lang="en-US" sz="750" dirty="0"/>
-          </a:p>
-        </p:txBody>
-      </p:sp>
-      <p:sp>
-        <p:nvSpPr>
-          <p:cNvPr id="162" name="Shape 160"/>
-          <p:cNvSpPr/>
-          <p:nvPr/>
-        </p:nvSpPr>
-        <p:spPr>
-          <a:xfrm>
-            <a:off x="3200400" y="5815584"/>
-            <a:ext cx="932688" cy="155448"/>
-          </a:xfrm>
-          <a:prstGeom prst="roundRect">
-            <a:avLst>
-              <a:gd name="adj" fmla="val 17647"/>
-            </a:avLst>
-          </a:prstGeom>
-          <a:solidFill>
-            <a:srgbClr val="F3F4F6"/>
-          </a:solidFill>
-          <a:ln w="9525">
-            <a:solidFill>
-              <a:srgbClr val="D1D5DB"/>
-            </a:solidFill>
-            <a:prstDash val="solid"/>
-          </a:ln>
-        </p:spPr>
-      </p:sp>
-      <p:sp>
-        <p:nvSpPr>
-          <p:cNvPr id="163" name="Text 161"/>
-          <p:cNvSpPr/>
-          <p:nvPr/>
-        </p:nvSpPr>
-        <p:spPr>
-          <a:xfrm>
-            <a:off x="3200400" y="5815584"/>
-            <a:ext cx="932688" cy="155448"/>
-          </a:xfrm>
-          <a:prstGeom prst="rect">
-            <a:avLst/>
-          </a:prstGeom>
-          <a:noFill/>
-          <a:ln/>
-        </p:spPr>
-        <p:txBody>
-          <a:bodyPr wrap="square" lIns="0" tIns="0" rIns="0" bIns="0" rtlCol="0" anchor="ctr"/>
-          <a:lstStyle/>
-          <a:p>
-            <a:pPr algn="ctr" indent="0" marL="0">
-              <a:buNone/>
-            </a:pPr>
-            <a:r>
-              <a:rPr lang="en-US" sz="700" dirty="0">
-                <a:solidFill>
-                  <a:srgbClr val="374151"/>
-                </a:solidFill>
-              </a:rPr>
-              <a:t>Not Started</a:t>
-            </a:r>
-            <a:endParaRPr lang="en-US" sz="700" dirty="0"/>
-          </a:p>
-        </p:txBody>
-      </p:sp>
-      <p:sp>
-        <p:nvSpPr>
-          <p:cNvPr id="164" name="Shape 162"/>
-          <p:cNvSpPr/>
-          <p:nvPr/>
-        </p:nvSpPr>
-        <p:spPr>
-          <a:xfrm>
-            <a:off x="4215384" y="5605272"/>
-            <a:ext cx="932688" cy="182880"/>
-          </a:xfrm>
-          <a:prstGeom prst="roundRect">
-            <a:avLst>
-              <a:gd name="adj" fmla="val 15000"/>
-            </a:avLst>
-          </a:prstGeom>
-          <a:solidFill>
-            <a:srgbClr val="FFFFFF"/>
-          </a:solidFill>
-          <a:ln w="9525">
-            <a:solidFill>
-              <a:srgbClr val="CBD5E1"/>
-            </a:solidFill>
-            <a:prstDash val="solid"/>
-          </a:ln>
-        </p:spPr>
-      </p:sp>
-      <p:sp>
-        <p:nvSpPr>
-          <p:cNvPr id="165" name="Text 163"/>
-          <p:cNvSpPr/>
-          <p:nvPr/>
-        </p:nvSpPr>
-        <p:spPr>
-          <a:xfrm>
-            <a:off x="4215384" y="5605272"/>
-            <a:ext cx="932688" cy="182880"/>
-          </a:xfrm>
-          <a:prstGeom prst="rect">
-            <a:avLst/>
-          </a:prstGeom>
-          <a:noFill/>
-          <a:ln/>
-        </p:spPr>
-        <p:txBody>
-          <a:bodyPr wrap="square" lIns="0" tIns="0" rIns="0" bIns="0" rtlCol="0" anchor="ctr"/>
-          <a:lstStyle/>
-          <a:p>
-            <a:pPr algn="ctr" indent="0" marL="0">
-              <a:buNone/>
-            </a:pPr>
-            <a:r>
-              <a:rPr lang="en-US" sz="750" b="1" dirty="0">
-                <a:solidFill>
-                  <a:srgbClr val="1E293B"/>
-                </a:solidFill>
-              </a:rPr>
-              <a:t>MVPD</a:t>
-            </a:r>
-            <a:endParaRPr lang="en-US" sz="750" dirty="0"/>
-          </a:p>
-        </p:txBody>
-      </p:sp>
-      <p:sp>
-        <p:nvSpPr>
-          <p:cNvPr id="166" name="Shape 164"/>
-          <p:cNvSpPr/>
-          <p:nvPr/>
-        </p:nvSpPr>
-        <p:spPr>
-          <a:xfrm>
-            <a:off x="4215384" y="5815584"/>
-            <a:ext cx="932688" cy="155448"/>
-          </a:xfrm>
-          <a:prstGeom prst="roundRect">
-            <a:avLst>
-              <a:gd name="adj" fmla="val 17647"/>
-            </a:avLst>
-          </a:prstGeom>
-          <a:solidFill>
-            <a:srgbClr val="1558A8"/>
-          </a:solidFill>
-          <a:ln w="12700">
-            <a:solidFill>
-              <a:srgbClr val="1558A8"/>
-            </a:solidFill>
-            <a:prstDash val="solid"/>
-          </a:ln>
-        </p:spPr>
-      </p:sp>
-      <p:sp>
-        <p:nvSpPr>
-          <p:cNvPr id="167" name="Text 165"/>
-          <p:cNvSpPr/>
-          <p:nvPr/>
-        </p:nvSpPr>
-        <p:spPr>
-          <a:xfrm>
-            <a:off x="4215384" y="5815584"/>
-            <a:ext cx="932688" cy="155448"/>
-          </a:xfrm>
-          <a:prstGeom prst="rect">
-            <a:avLst/>
-          </a:prstGeom>
-          <a:noFill/>
-          <a:ln/>
-        </p:spPr>
-        <p:txBody>
-          <a:bodyPr wrap="square" lIns="0" tIns="0" rIns="0" bIns="0" rtlCol="0" anchor="ctr"/>
-          <a:lstStyle/>
-          <a:p>
-            <a:pPr algn="ctr" indent="0" marL="0">
-              <a:buNone/>
-            </a:pPr>
-            <a:r>
-              <a:rPr lang="en-US" sz="700" dirty="0">
-                <a:solidFill>
-                  <a:srgbClr val="FFFFFF"/>
-                </a:solidFill>
-              </a:rPr>
-              <a:t>In Progress</a:t>
-            </a:r>
-            <a:endParaRPr lang="en-US" sz="700" dirty="0"/>
-          </a:p>
-        </p:txBody>
-      </p:sp>
-      <p:sp>
-        <p:nvSpPr>
-          <p:cNvPr id="168" name="Shape 166"/>
-          <p:cNvSpPr/>
-          <p:nvPr/>
-        </p:nvSpPr>
-        <p:spPr>
-          <a:xfrm>
-            <a:off x="5230368" y="5605272"/>
-            <a:ext cx="932688" cy="182880"/>
-          </a:xfrm>
-          <a:prstGeom prst="roundRect">
-            <a:avLst>
-              <a:gd name="adj" fmla="val 15000"/>
-            </a:avLst>
-          </a:prstGeom>
-          <a:solidFill>
-            <a:srgbClr val="FFFFFF"/>
-          </a:solidFill>
-          <a:ln w="9525">
-            <a:solidFill>
-              <a:srgbClr val="CBD5E1"/>
-            </a:solidFill>
-            <a:prstDash val="solid"/>
-          </a:ln>
-        </p:spPr>
-      </p:sp>
-      <p:sp>
-        <p:nvSpPr>
-          <p:cNvPr id="169" name="Text 167"/>
-          <p:cNvSpPr/>
-          <p:nvPr/>
-        </p:nvSpPr>
-        <p:spPr>
-          <a:xfrm>
-            <a:off x="5230368" y="5605272"/>
-            <a:ext cx="932688" cy="182880"/>
-          </a:xfrm>
-          <a:prstGeom prst="rect">
-            <a:avLst/>
-          </a:prstGeom>
-          <a:noFill/>
-          <a:ln/>
-        </p:spPr>
-        <p:txBody>
-          <a:bodyPr wrap="square" lIns="0" tIns="0" rIns="0" bIns="0" rtlCol="0" anchor="ctr"/>
-          <a:lstStyle/>
-          <a:p>
-            <a:pPr algn="ctr" indent="0" marL="0">
-              <a:buNone/>
-            </a:pPr>
-            <a:r>
-              <a:rPr lang="en-US" sz="750" b="1" dirty="0">
-                <a:solidFill>
-                  <a:srgbClr val="1E293B"/>
-                </a:solidFill>
-              </a:rPr>
-              <a:t>Promos</a:t>
-            </a:r>
-            <a:endParaRPr lang="en-US" sz="750" dirty="0"/>
-          </a:p>
-        </p:txBody>
-      </p:sp>
-      <p:sp>
-        <p:nvSpPr>
-          <p:cNvPr id="170" name="Shape 168"/>
-          <p:cNvSpPr/>
-          <p:nvPr/>
-        </p:nvSpPr>
-        <p:spPr>
-          <a:xfrm>
-            <a:off x="5230368" y="5815584"/>
-            <a:ext cx="932688" cy="155448"/>
-          </a:xfrm>
-          <a:prstGeom prst="roundRect">
-            <a:avLst>
-              <a:gd name="adj" fmla="val 17647"/>
-            </a:avLst>
-          </a:prstGeom>
-          <a:solidFill>
-            <a:srgbClr val="F3F4F6"/>
-          </a:solidFill>
-          <a:ln w="9525">
-            <a:solidFill>
-              <a:srgbClr val="D1D5DB"/>
-            </a:solidFill>
-            <a:prstDash val="solid"/>
-          </a:ln>
-        </p:spPr>
-      </p:sp>
-      <p:sp>
-        <p:nvSpPr>
-          <p:cNvPr id="171" name="Text 169"/>
-          <p:cNvSpPr/>
-          <p:nvPr/>
-        </p:nvSpPr>
-        <p:spPr>
-          <a:xfrm>
-            <a:off x="5230368" y="5815584"/>
-            <a:ext cx="932688" cy="155448"/>
-          </a:xfrm>
-          <a:prstGeom prst="rect">
-            <a:avLst/>
-          </a:prstGeom>
-          <a:noFill/>
-          <a:ln/>
-        </p:spPr>
-        <p:txBody>
-          <a:bodyPr wrap="square" lIns="0" tIns="0" rIns="0" bIns="0" rtlCol="0" anchor="ctr"/>
-          <a:lstStyle/>
-          <a:p>
-            <a:pPr algn="ctr" indent="0" marL="0">
-              <a:buNone/>
-            </a:pPr>
-            <a:r>
-              <a:rPr lang="en-US" sz="700" dirty="0">
-                <a:solidFill>
-                  <a:srgbClr val="374151"/>
-                </a:solidFill>
-              </a:rPr>
-              <a:t>Not Started</a:t>
-            </a:r>
-            <a:endParaRPr lang="en-US" sz="700" dirty="0"/>
-          </a:p>
-        </p:txBody>
-      </p:sp>
-      <p:sp>
-        <p:nvSpPr>
-          <p:cNvPr id="172" name="Shape 170"/>
-          <p:cNvSpPr/>
-          <p:nvPr/>
-        </p:nvSpPr>
-        <p:spPr>
-          <a:xfrm>
-            <a:off x="9372600" y="804672"/>
-            <a:ext cx="2679192" cy="5614416"/>
-          </a:xfrm>
-          <a:prstGeom prst="rect">
-            <a:avLst/>
-          </a:prstGeom>
-          <a:solidFill>
-            <a:srgbClr val="F8FAFB"/>
-          </a:solidFill>
-          <a:ln w="12700">
-            <a:solidFill>
-              <a:srgbClr val="DDE1E6"/>
-            </a:solidFill>
-            <a:prstDash val="solid"/>
-          </a:ln>
-        </p:spPr>
-      </p:sp>
-      <p:sp>
-        <p:nvSpPr>
-          <p:cNvPr id="173" name="Text 171"/>
-          <p:cNvSpPr/>
-          <p:nvPr/>
-        </p:nvSpPr>
-        <p:spPr>
-          <a:xfrm>
-            <a:off x="9500616" y="950976"/>
-            <a:ext cx="2478024" cy="201168"/>
-          </a:xfrm>
-          <a:prstGeom prst="rect">
-            <a:avLst/>
-          </a:prstGeom>
-          <a:noFill/>
-          <a:ln/>
-        </p:spPr>
-        <p:txBody>
-          <a:bodyPr wrap="square" lIns="0" tIns="0" rIns="0" bIns="0" rtlCol="0" anchor="ctr"/>
-          <a:lstStyle/>
-          <a:p>
-            <a:pPr indent="0" marL="0">
-              <a:buNone/>
-            </a:pPr>
-            <a:r>
-              <a:rPr lang="en-US" sz="950" b="1" dirty="0">
-                <a:solidFill>
-                  <a:srgbClr val="111827"/>
-                </a:solidFill>
-              </a:rPr>
-              <a:t>Progress by Category</a:t>
-            </a:r>
-            <a:endParaRPr lang="en-US" sz="950" dirty="0"/>
-          </a:p>
-        </p:txBody>
-      </p:sp>
-      <p:sp>
-        <p:nvSpPr>
-          <p:cNvPr id="174" name="Text 172"/>
-          <p:cNvSpPr/>
-          <p:nvPr/>
-        </p:nvSpPr>
-        <p:spPr>
-          <a:xfrm>
-            <a:off x="9500616" y="1216152"/>
-            <a:ext cx="1692006" cy="164592"/>
-          </a:xfrm>
-          <a:prstGeom prst="rect">
-            <a:avLst/>
-          </a:prstGeom>
-          <a:noFill/>
-          <a:ln/>
-        </p:spPr>
-        <p:txBody>
-          <a:bodyPr wrap="square" lIns="0" tIns="0" rIns="0" bIns="0" rtlCol="0" anchor="ctr"/>
-          <a:lstStyle/>
-          <a:p>
-            <a:pPr indent="0" marL="0">
-              <a:buNone/>
-            </a:pPr>
-            <a:r>
-              <a:rPr lang="en-US" sz="800" dirty="0">
-                <a:solidFill>
-                  <a:srgbClr val="374151"/>
-                </a:solidFill>
-              </a:rPr>
-              <a:t>Platforms</a:t>
-            </a:r>
-            <a:endParaRPr lang="en-US" sz="800" dirty="0"/>
-          </a:p>
-        </p:txBody>
-      </p:sp>
-      <p:sp>
-        <p:nvSpPr>
-          <p:cNvPr id="175" name="Text 173"/>
-          <p:cNvSpPr/>
-          <p:nvPr/>
-        </p:nvSpPr>
-        <p:spPr>
-          <a:xfrm>
-            <a:off x="11558016" y="1216152"/>
-            <a:ext cx="365760" cy="164592"/>
-          </a:xfrm>
-          <a:prstGeom prst="rect">
-            <a:avLst/>
-          </a:prstGeom>
-          <a:noFill/>
-          <a:ln/>
-        </p:spPr>
-        <p:txBody>
-          <a:bodyPr wrap="square" lIns="0" tIns="0" rIns="0" bIns="0" rtlCol="0" anchor="ctr"/>
-          <a:lstStyle/>
-          <a:p>
-            <a:pPr algn="r" indent="0" marL="0">
-              <a:buNone/>
-            </a:pPr>
-            <a:r>
-              <a:rPr lang="en-US" sz="800" b="1" dirty="0">
-                <a:solidFill>
-                  <a:srgbClr val="9CA3AF"/>
-                </a:solidFill>
-              </a:rPr>
-              <a:t>0%</a:t>
-            </a:r>
-            <a:endParaRPr lang="en-US" sz="800" dirty="0"/>
-          </a:p>
-        </p:txBody>
-      </p:sp>
-      <p:sp>
-        <p:nvSpPr>
-          <p:cNvPr id="176" name="Shape 174"/>
-          <p:cNvSpPr/>
-          <p:nvPr/>
-        </p:nvSpPr>
-        <p:spPr>
-          <a:xfrm>
-            <a:off x="9500616" y="1399032"/>
-            <a:ext cx="2350008" cy="82296"/>
-          </a:xfrm>
-          <a:prstGeom prst="roundRect">
-            <a:avLst>
-              <a:gd name="adj" fmla="val 50000"/>
-            </a:avLst>
-          </a:prstGeom>
-          <a:solidFill>
-            <a:srgbClr val="E5E7EB"/>
-          </a:solidFill>
-          <a:ln w="12700">
-            <a:solidFill>
-              <a:srgbClr val="E5E7EB"/>
-            </a:solidFill>
-            <a:prstDash val="solid"/>
-          </a:ln>
-        </p:spPr>
-      </p:sp>
-      <p:sp>
-        <p:nvSpPr>
-          <p:cNvPr id="177" name="Text 175"/>
-          <p:cNvSpPr/>
-          <p:nvPr/>
-        </p:nvSpPr>
-        <p:spPr>
-          <a:xfrm>
-            <a:off x="9500616" y="1572768"/>
-            <a:ext cx="1692006" cy="164592"/>
-          </a:xfrm>
-          <a:prstGeom prst="rect">
-            <a:avLst/>
-          </a:prstGeom>
-          <a:noFill/>
-          <a:ln/>
-        </p:spPr>
-        <p:txBody>
-          <a:bodyPr wrap="square" lIns="0" tIns="0" rIns="0" bIns="0" rtlCol="0" anchor="ctr"/>
-          <a:lstStyle/>
-          <a:p>
-            <a:pPr indent="0" marL="0">
-              <a:buNone/>
-            </a:pPr>
-            <a:r>
-              <a:rPr lang="en-US" sz="800" dirty="0">
-                <a:solidFill>
-                  <a:srgbClr val="374151"/>
-                </a:solidFill>
-              </a:rPr>
-              <a:t>Video Delivery</a:t>
-            </a:r>
-            <a:endParaRPr lang="en-US" sz="800" dirty="0"/>
-          </a:p>
-        </p:txBody>
-      </p:sp>
-      <p:sp>
-        <p:nvSpPr>
-          <p:cNvPr id="178" name="Text 176"/>
-          <p:cNvSpPr/>
-          <p:nvPr/>
-        </p:nvSpPr>
-        <p:spPr>
-          <a:xfrm>
-            <a:off x="11558016" y="1572768"/>
-            <a:ext cx="365760" cy="164592"/>
-          </a:xfrm>
-          <a:prstGeom prst="rect">
-            <a:avLst/>
-          </a:prstGeom>
-          <a:noFill/>
-          <a:ln/>
-        </p:spPr>
-        <p:txBody>
-          <a:bodyPr wrap="square" lIns="0" tIns="0" rIns="0" bIns="0" rtlCol="0" anchor="ctr"/>
-          <a:lstStyle/>
-          <a:p>
-            <a:pPr algn="r" indent="0" marL="0">
-              <a:buNone/>
-            </a:pPr>
-            <a:r>
-              <a:rPr lang="en-US" sz="800" b="1" dirty="0">
-                <a:solidFill>
-                  <a:srgbClr val="9CA3AF"/>
-                </a:solidFill>
-              </a:rPr>
-              <a:t>0%</a:t>
-            </a:r>
-            <a:endParaRPr lang="en-US" sz="800" dirty="0"/>
-          </a:p>
-        </p:txBody>
-      </p:sp>
-      <p:sp>
-        <p:nvSpPr>
-          <p:cNvPr id="179" name="Shape 177"/>
-          <p:cNvSpPr/>
-          <p:nvPr/>
-        </p:nvSpPr>
-        <p:spPr>
-          <a:xfrm>
-            <a:off x="9500616" y="1755648"/>
-            <a:ext cx="2350008" cy="82296"/>
-          </a:xfrm>
-          <a:prstGeom prst="roundRect">
-            <a:avLst>
-              <a:gd name="adj" fmla="val 50000"/>
-            </a:avLst>
-          </a:prstGeom>
-          <a:solidFill>
-            <a:srgbClr val="E5E7EB"/>
-          </a:solidFill>
-          <a:ln w="12700">
-            <a:solidFill>
-              <a:srgbClr val="E5E7EB"/>
-            </a:solidFill>
-            <a:prstDash val="solid"/>
-          </a:ln>
-        </p:spPr>
-      </p:sp>
-      <p:sp>
-        <p:nvSpPr>
-          <p:cNvPr id="180" name="Text 178"/>
-          <p:cNvSpPr/>
-          <p:nvPr/>
-        </p:nvSpPr>
-        <p:spPr>
-          <a:xfrm>
-            <a:off x="9500616" y="1929384"/>
-            <a:ext cx="1692006" cy="164592"/>
-          </a:xfrm>
-          <a:prstGeom prst="rect">
-            <a:avLst/>
-          </a:prstGeom>
-          <a:noFill/>
-          <a:ln/>
-        </p:spPr>
-        <p:txBody>
-          <a:bodyPr wrap="square" lIns="0" tIns="0" rIns="0" bIns="0" rtlCol="0" anchor="ctr"/>
-          <a:lstStyle/>
-          <a:p>
-            <a:pPr indent="0" marL="0">
-              <a:buNone/>
-            </a:pPr>
-            <a:r>
-              <a:rPr lang="en-US" sz="800" dirty="0">
-                <a:solidFill>
-                  <a:srgbClr val="374151"/>
-                </a:solidFill>
-              </a:rPr>
-              <a:t>Player</a:t>
-            </a:r>
-            <a:endParaRPr lang="en-US" sz="800" dirty="0"/>
-          </a:p>
-        </p:txBody>
-      </p:sp>
-      <p:sp>
-        <p:nvSpPr>
-          <p:cNvPr id="181" name="Text 179"/>
-          <p:cNvSpPr/>
-          <p:nvPr/>
-        </p:nvSpPr>
-        <p:spPr>
-          <a:xfrm>
-            <a:off x="11558016" y="1929384"/>
-            <a:ext cx="365760" cy="164592"/>
-          </a:xfrm>
-          <a:prstGeom prst="rect">
-            <a:avLst/>
-          </a:prstGeom>
-          <a:noFill/>
-          <a:ln/>
-        </p:spPr>
-        <p:txBody>
-          <a:bodyPr wrap="square" lIns="0" tIns="0" rIns="0" bIns="0" rtlCol="0" anchor="ctr"/>
-          <a:lstStyle/>
-          <a:p>
-            <a:pPr algn="r" indent="0" marL="0">
-              <a:buNone/>
-            </a:pPr>
-            <a:r>
-              <a:rPr lang="en-US" sz="800" b="1" dirty="0">
-                <a:solidFill>
-                  <a:srgbClr val="9CA3AF"/>
-                </a:solidFill>
-              </a:rPr>
-              <a:t>0%</a:t>
-            </a:r>
-            <a:endParaRPr lang="en-US" sz="800" dirty="0"/>
-          </a:p>
-        </p:txBody>
-      </p:sp>
-      <p:sp>
-        <p:nvSpPr>
-          <p:cNvPr id="182" name="Shape 180"/>
-          <p:cNvSpPr/>
-          <p:nvPr/>
-        </p:nvSpPr>
-        <p:spPr>
-          <a:xfrm>
-            <a:off x="9500616" y="2112264"/>
-            <a:ext cx="2350008" cy="82296"/>
-          </a:xfrm>
-          <a:prstGeom prst="roundRect">
-            <a:avLst>
-              <a:gd name="adj" fmla="val 50000"/>
-            </a:avLst>
-          </a:prstGeom>
-          <a:solidFill>
-            <a:srgbClr val="E5E7EB"/>
-          </a:solidFill>
-          <a:ln w="12700">
-            <a:solidFill>
-              <a:srgbClr val="E5E7EB"/>
-            </a:solidFill>
-            <a:prstDash val="solid"/>
-          </a:ln>
-        </p:spPr>
-      </p:sp>
-      <p:sp>
-        <p:nvSpPr>
-          <p:cNvPr id="183" name="Text 181"/>
-          <p:cNvSpPr/>
-          <p:nvPr/>
-        </p:nvSpPr>
-        <p:spPr>
-          <a:xfrm>
-            <a:off x="9500616" y="2286000"/>
-            <a:ext cx="1692006" cy="164592"/>
-          </a:xfrm>
-          <a:prstGeom prst="rect">
-            <a:avLst/>
-          </a:prstGeom>
-          <a:noFill/>
-          <a:ln/>
-        </p:spPr>
-        <p:txBody>
-          <a:bodyPr wrap="square" lIns="0" tIns="0" rIns="0" bIns="0" rtlCol="0" anchor="ctr"/>
-          <a:lstStyle/>
-          <a:p>
-            <a:pPr indent="0" marL="0">
-              <a:buNone/>
-            </a:pPr>
-            <a:r>
-              <a:rPr lang="en-US" sz="800" dirty="0">
-                <a:solidFill>
-                  <a:srgbClr val="374151"/>
-                </a:solidFill>
-              </a:rPr>
-              <a:t>Merchandising</a:t>
-            </a:r>
-            <a:endParaRPr lang="en-US" sz="800" dirty="0"/>
-          </a:p>
-        </p:txBody>
-      </p:sp>
-      <p:sp>
-        <p:nvSpPr>
-          <p:cNvPr id="184" name="Text 182"/>
-          <p:cNvSpPr/>
-          <p:nvPr/>
-        </p:nvSpPr>
-        <p:spPr>
-          <a:xfrm>
-            <a:off x="11558016" y="2286000"/>
-            <a:ext cx="365760" cy="164592"/>
-          </a:xfrm>
-          <a:prstGeom prst="rect">
-            <a:avLst/>
-          </a:prstGeom>
-          <a:noFill/>
-          <a:ln/>
-        </p:spPr>
-        <p:txBody>
-          <a:bodyPr wrap="square" lIns="0" tIns="0" rIns="0" bIns="0" rtlCol="0" anchor="ctr"/>
-          <a:lstStyle/>
-          <a:p>
-            <a:pPr algn="r" indent="0" marL="0">
-              <a:buNone/>
-            </a:pPr>
-            <a:r>
-              <a:rPr lang="en-US" sz="800" b="1" dirty="0">
-                <a:solidFill>
-                  <a:srgbClr val="9CA3AF"/>
-                </a:solidFill>
-              </a:rPr>
-              <a:t>0%</a:t>
-            </a:r>
-            <a:endParaRPr lang="en-US" sz="800" dirty="0"/>
-          </a:p>
-        </p:txBody>
-      </p:sp>
-      <p:sp>
-        <p:nvSpPr>
-          <p:cNvPr id="185" name="Shape 183"/>
-          <p:cNvSpPr/>
-          <p:nvPr/>
-        </p:nvSpPr>
-        <p:spPr>
-          <a:xfrm>
-            <a:off x="9500616" y="2468880"/>
-            <a:ext cx="2350008" cy="82296"/>
-          </a:xfrm>
-          <a:prstGeom prst="roundRect">
-            <a:avLst>
-              <a:gd name="adj" fmla="val 50000"/>
-            </a:avLst>
-          </a:prstGeom>
-          <a:solidFill>
-            <a:srgbClr val="E5E7EB"/>
-          </a:solidFill>
-          <a:ln w="12700">
-            <a:solidFill>
-              <a:srgbClr val="E5E7EB"/>
-            </a:solidFill>
-            <a:prstDash val="solid"/>
-          </a:ln>
-        </p:spPr>
-      </p:sp>
-      <p:sp>
-        <p:nvSpPr>
-          <p:cNvPr id="186" name="Text 184"/>
-          <p:cNvSpPr/>
-          <p:nvPr/>
-        </p:nvSpPr>
-        <p:spPr>
-          <a:xfrm>
-            <a:off x="9500616" y="2642616"/>
-            <a:ext cx="1692006" cy="164592"/>
-          </a:xfrm>
-          <a:prstGeom prst="rect">
-            <a:avLst/>
-          </a:prstGeom>
-          <a:noFill/>
-          <a:ln/>
-        </p:spPr>
-        <p:txBody>
-          <a:bodyPr wrap="square" lIns="0" tIns="0" rIns="0" bIns="0" rtlCol="0" anchor="ctr"/>
-          <a:lstStyle/>
-          <a:p>
-            <a:pPr indent="0" marL="0">
-              <a:buNone/>
-            </a:pPr>
-            <a:r>
-              <a:rPr lang="en-US" sz="800" dirty="0">
-                <a:solidFill>
-                  <a:srgbClr val="374151"/>
-                </a:solidFill>
-              </a:rPr>
-              <a:t>Onboarding</a:t>
-            </a:r>
-            <a:endParaRPr lang="en-US" sz="800" dirty="0"/>
-          </a:p>
-        </p:txBody>
-      </p:sp>
-      <p:sp>
-        <p:nvSpPr>
-          <p:cNvPr id="187" name="Text 185"/>
-          <p:cNvSpPr/>
-          <p:nvPr/>
-        </p:nvSpPr>
-        <p:spPr>
-          <a:xfrm>
-            <a:off x="11558016" y="2642616"/>
-            <a:ext cx="365760" cy="164592"/>
-          </a:xfrm>
-          <a:prstGeom prst="rect">
-            <a:avLst/>
-          </a:prstGeom>
-          <a:noFill/>
-          <a:ln/>
-        </p:spPr>
-        <p:txBody>
-          <a:bodyPr wrap="square" lIns="0" tIns="0" rIns="0" bIns="0" rtlCol="0" anchor="ctr"/>
-          <a:lstStyle/>
-          <a:p>
-            <a:pPr algn="r" indent="0" marL="0">
-              <a:buNone/>
-            </a:pPr>
-            <a:r>
-              <a:rPr lang="en-US" sz="800" b="1" dirty="0">
-                <a:solidFill>
-                  <a:srgbClr val="9CA3AF"/>
-                </a:solidFill>
-              </a:rPr>
-              <a:t>0%</a:t>
-            </a:r>
-            <a:endParaRPr lang="en-US" sz="800" dirty="0"/>
-          </a:p>
-        </p:txBody>
-      </p:sp>
-      <p:sp>
-        <p:nvSpPr>
-          <p:cNvPr id="188" name="Shape 186"/>
-          <p:cNvSpPr/>
-          <p:nvPr/>
-        </p:nvSpPr>
-        <p:spPr>
-          <a:xfrm>
-            <a:off x="9500616" y="2825496"/>
-            <a:ext cx="2350008" cy="82296"/>
-          </a:xfrm>
-          <a:prstGeom prst="roundRect">
-            <a:avLst>
-              <a:gd name="adj" fmla="val 50000"/>
-            </a:avLst>
-          </a:prstGeom>
-          <a:solidFill>
-            <a:srgbClr val="E5E7EB"/>
-          </a:solidFill>
-          <a:ln w="12700">
-            <a:solidFill>
-              <a:srgbClr val="E5E7EB"/>
-            </a:solidFill>
-            <a:prstDash val="solid"/>
-          </a:ln>
-        </p:spPr>
-      </p:sp>
-      <p:sp>
-        <p:nvSpPr>
-          <p:cNvPr id="189" name="Shape 187"/>
-          <p:cNvSpPr/>
-          <p:nvPr/>
-        </p:nvSpPr>
-        <p:spPr>
-          <a:xfrm>
-            <a:off x="9482328" y="3127248"/>
-            <a:ext cx="2478024" cy="0"/>
-          </a:xfrm>
-          <a:prstGeom prst="line">
-            <a:avLst/>
-          </a:prstGeom>
-          <a:noFill/>
-          <a:ln w="9525">
-            <a:solidFill>
-              <a:srgbClr val="DDE1E6"/>
-            </a:solidFill>
-            <a:prstDash val="solid"/>
-          </a:ln>
-        </p:spPr>
-      </p:sp>
-      <p:sp>
-        <p:nvSpPr>
-          <p:cNvPr id="190" name="Text 188"/>
-          <p:cNvSpPr/>
-          <p:nvPr/>
-        </p:nvSpPr>
-        <p:spPr>
-          <a:xfrm>
-            <a:off x="9500616" y="3264408"/>
-            <a:ext cx="2478024" cy="201168"/>
-          </a:xfrm>
-          <a:prstGeom prst="rect">
-            <a:avLst/>
-          </a:prstGeom>
-          <a:noFill/>
-          <a:ln/>
-        </p:spPr>
-        <p:txBody>
-          <a:bodyPr wrap="square" lIns="0" tIns="0" rIns="0" bIns="0" rtlCol="0" anchor="ctr"/>
-          <a:lstStyle/>
-          <a:p>
-            <a:pPr indent="0" marL="0">
-              <a:buNone/>
-            </a:pPr>
-            <a:r>
-              <a:rPr lang="en-US" sz="950" b="1" dirty="0">
-                <a:solidFill>
-                  <a:srgbClr val="111827"/>
-                </a:solidFill>
-              </a:rPr>
-              <a:t>Status Key</a:t>
-            </a:r>
-            <a:endParaRPr lang="en-US" sz="950" dirty="0"/>
-          </a:p>
-        </p:txBody>
-      </p:sp>
-      <p:sp>
-        <p:nvSpPr>
-          <p:cNvPr id="191" name="Shape 189"/>
-          <p:cNvSpPr/>
-          <p:nvPr/>
-        </p:nvSpPr>
-        <p:spPr>
-          <a:xfrm>
-            <a:off x="9500616" y="3511296"/>
-            <a:ext cx="749808" cy="173736"/>
-          </a:xfrm>
-          <a:prstGeom prst="roundRect">
-            <a:avLst>
-              <a:gd name="adj" fmla="val 15789"/>
-            </a:avLst>
-          </a:prstGeom>
-          <a:solidFill>
-            <a:srgbClr val="F3F4F6"/>
-          </a:solidFill>
-          <a:ln w="9525">
-            <a:solidFill>
-              <a:srgbClr val="D1D5DB"/>
-            </a:solidFill>
-            <a:prstDash val="solid"/>
-          </a:ln>
-        </p:spPr>
-      </p:sp>
-      <p:sp>
-        <p:nvSpPr>
-          <p:cNvPr id="192" name="Text 190"/>
-          <p:cNvSpPr/>
-          <p:nvPr/>
-        </p:nvSpPr>
-        <p:spPr>
-          <a:xfrm>
-            <a:off x="9500616" y="3511296"/>
-            <a:ext cx="749808" cy="173736"/>
-          </a:xfrm>
-          <a:prstGeom prst="rect">
-            <a:avLst/>
-          </a:prstGeom>
-          <a:noFill/>
-          <a:ln/>
-        </p:spPr>
-        <p:txBody>
-          <a:bodyPr wrap="square" lIns="0" tIns="0" rIns="0" bIns="0" rtlCol="0" anchor="ctr"/>
-          <a:lstStyle/>
-          <a:p>
-            <a:pPr algn="ctr" indent="0" marL="0">
-              <a:buNone/>
-            </a:pPr>
-            <a:r>
-              <a:rPr lang="en-US" sz="700" b="1" dirty="0">
-                <a:solidFill>
-                  <a:srgbClr val="374151"/>
-                </a:solidFill>
-              </a:rPr>
-              <a:t>Not Started</a:t>
-            </a:r>
-            <a:endParaRPr lang="en-US" sz="700" dirty="0"/>
-          </a:p>
-        </p:txBody>
-      </p:sp>
-      <p:sp>
-        <p:nvSpPr>
-          <p:cNvPr id="193" name="Text 191"/>
-          <p:cNvSpPr/>
-          <p:nvPr/>
-        </p:nvSpPr>
-        <p:spPr>
-          <a:xfrm>
-            <a:off x="10305288" y="3511296"/>
-            <a:ext cx="1636776" cy="173736"/>
-          </a:xfrm>
-          <a:prstGeom prst="rect">
-            <a:avLst/>
-          </a:prstGeom>
-          <a:noFill/>
-          <a:ln/>
-        </p:spPr>
-        <p:txBody>
-          <a:bodyPr wrap="square" lIns="0" tIns="0" rIns="0" bIns="0" rtlCol="0" anchor="ctr"/>
-          <a:lstStyle/>
-          <a:p>
-            <a:pPr algn="l" indent="0" marL="0">
-              <a:buNone/>
-            </a:pPr>
-            <a:r>
-              <a:rPr lang="en-US" sz="700" dirty="0">
-                <a:solidFill>
-                  <a:srgbClr val="6B7280"/>
-                </a:solidFill>
-              </a:rPr>
-              <a:t>Work has not begun</a:t>
-            </a:r>
-            <a:endParaRPr lang="en-US" sz="700" dirty="0"/>
-          </a:p>
-        </p:txBody>
-      </p:sp>
-      <p:sp>
-        <p:nvSpPr>
-          <p:cNvPr id="194" name="Shape 192"/>
+          <p:cNvPr id="195" name="Text 193"/>
           <p:cNvSpPr/>
           <p:nvPr/>
         </p:nvSpPr>
@@ -14868,33 +14895,6 @@
             <a:off x="9500616" y="3739896"/>
             <a:ext cx="749808" cy="173736"/>
           </a:xfrm>
-          <a:prstGeom prst="roundRect">
-            <a:avLst>
-              <a:gd name="adj" fmla="val 15789"/>
-            </a:avLst>
-          </a:prstGeom>
-          <a:solidFill>
-            <a:srgbClr val="1558A8"/>
-          </a:solidFill>
-          <a:ln w="12700">
-            <a:solidFill>
-              <a:srgbClr val="1558A8"/>
-            </a:solidFill>
-            <a:prstDash val="solid"/>
-          </a:ln>
-        </p:spPr>
-      </p:sp>
-      <p:sp>
-        <p:nvSpPr>
-          <p:cNvPr id="195" name="Text 193"/>
-          <p:cNvSpPr/>
-          <p:nvPr/>
-        </p:nvSpPr>
-        <p:spPr>
-          <a:xfrm>
-            <a:off x="9500616" y="3739896"/>
-            <a:ext cx="749808" cy="173736"/>
-          </a:xfrm>
           <a:prstGeom prst="rect">
             <a:avLst/>
           </a:prstGeom>
@@ -14929,7 +14929,7 @@
         <p:spPr>
           <a:xfrm>
             <a:off x="10305288" y="3739896"/>
-            <a:ext cx="1636776" cy="173736"/>
+            <a:ext cx="1792224" cy="173736"/>
           </a:xfrm>
           <a:prstGeom prst="rect">
             <a:avLst/>
@@ -15028,7 +15028,7 @@
         <p:spPr>
           <a:xfrm>
             <a:off x="10305288" y="3968496"/>
-            <a:ext cx="1636776" cy="173736"/>
+            <a:ext cx="1792224" cy="173736"/>
           </a:xfrm>
           <a:prstGeom prst="rect">
             <a:avLst/>
@@ -15127,7 +15127,7 @@
         <p:spPr>
           <a:xfrm>
             <a:off x="10305288" y="4197096"/>
-            <a:ext cx="1636776" cy="173736"/>
+            <a:ext cx="1792224" cy="173736"/>
           </a:xfrm>
           <a:prstGeom prst="rect">
             <a:avLst/>
@@ -15226,7 +15226,7 @@
         <p:spPr>
           <a:xfrm>
             <a:off x="10305288" y="4425696"/>
-            <a:ext cx="1636776" cy="173736"/>
+            <a:ext cx="1792224" cy="173736"/>
           </a:xfrm>
           <a:prstGeom prst="rect">
             <a:avLst/>

--- a/SABR_CPR_Component_Status.pptx
+++ b/SABR_CPR_Component_Status.pptx
@@ -6584,7 +6584,7 @@
         <p:spPr>
           <a:xfrm>
             <a:off x="101842" y="4018674"/>
-            <a:ext cx="5721629" cy="913486"/>
+            <a:ext cx="5721629" cy="1098842"/>
           </a:xfrm>
           <a:prstGeom prst="rect">
             <a:avLst/>
@@ -6619,7 +6619,7 @@
         <p:spPr>
           <a:xfrm>
             <a:off x="138874" y="4018674"/>
-            <a:ext cx="601790" cy="913486"/>
+            <a:ext cx="601790" cy="1098842"/>
           </a:xfrm>
           <a:prstGeom prst="rect">
             <a:avLst/>
@@ -6657,7 +6657,7 @@
         <p:spPr>
           <a:xfrm>
             <a:off x="759180" y="4018674"/>
-            <a:ext cx="4462501" cy="913486"/>
+            <a:ext cx="4462501" cy="1098842"/>
           </a:xfrm>
           <a:prstGeom prst="rect">
             <a:avLst/>
@@ -6764,8 +6764,8 @@
         </p:nvSpPr>
         <p:spPr>
           <a:xfrm>
-            <a:off x="138874" y="4932159"/>
-            <a:ext cx="601790" cy="913486"/>
+            <a:off x="138874" y="5117516"/>
+            <a:ext cx="601790" cy="1098842"/>
           </a:xfrm>
           <a:prstGeom prst="rect">
             <a:avLst/>
@@ -6792,8 +6792,8 @@
         </p:nvSpPr>
         <p:spPr>
           <a:xfrm>
-            <a:off x="759180" y="4932159"/>
-            <a:ext cx="4462501" cy="913486"/>
+            <a:off x="759180" y="5117516"/>
+            <a:ext cx="4462501" cy="1098842"/>
           </a:xfrm>
           <a:prstGeom prst="rect">
             <a:avLst/>
@@ -6851,7 +6851,7 @@
         </p:nvSpPr>
         <p:spPr>
           <a:xfrm>
-            <a:off x="5258714" y="5287061"/>
+            <a:off x="5258714" y="5472418"/>
             <a:ext cx="546240" cy="203683"/>
           </a:xfrm>
           <a:prstGeom prst="roundRect">
@@ -6888,7 +6888,7 @@
         </p:nvSpPr>
         <p:spPr>
           <a:xfrm>
-            <a:off x="5258714" y="5287061"/>
+            <a:off x="5258714" y="5472418"/>
             <a:ext cx="546240" cy="203683"/>
           </a:xfrm>
           <a:prstGeom prst="rect">
@@ -6928,8 +6928,8 @@
         </p:nvSpPr>
         <p:spPr>
           <a:xfrm>
-            <a:off x="101842" y="5845645"/>
-            <a:ext cx="5721629" cy="1469555"/>
+            <a:off x="101842" y="6216358"/>
+            <a:ext cx="5721629" cy="1098842"/>
           </a:xfrm>
           <a:prstGeom prst="rect">
             <a:avLst/>
@@ -6963,8 +6963,8 @@
         </p:nvSpPr>
         <p:spPr>
           <a:xfrm>
-            <a:off x="138874" y="5845645"/>
-            <a:ext cx="601790" cy="1469555"/>
+            <a:off x="138874" y="6216358"/>
+            <a:ext cx="601790" cy="1098842"/>
           </a:xfrm>
           <a:prstGeom prst="rect">
             <a:avLst/>
@@ -6994,8 +6994,8 @@
         </p:nvSpPr>
         <p:spPr>
           <a:xfrm>
-            <a:off x="759180" y="5845645"/>
-            <a:ext cx="4462501" cy="1469555"/>
+            <a:off x="759180" y="6216358"/>
+            <a:ext cx="4462501" cy="1098842"/>
           </a:xfrm>
           <a:prstGeom prst="rect">
             <a:avLst/>
@@ -7153,7 +7153,7 @@
         <p:spPr>
           <a:xfrm>
             <a:off x="5927906" y="4031018"/>
-            <a:ext cx="5721629" cy="685114"/>
+            <a:ext cx="5721629" cy="824132"/>
           </a:xfrm>
           <a:prstGeom prst="rect">
             <a:avLst/>
@@ -7188,7 +7188,7 @@
         <p:spPr>
           <a:xfrm>
             <a:off x="5999378" y="4018674"/>
-            <a:ext cx="601790" cy="685114"/>
+            <a:ext cx="601790" cy="824132"/>
           </a:xfrm>
           <a:prstGeom prst="rect">
             <a:avLst/>
@@ -7226,7 +7226,7 @@
         <p:spPr>
           <a:xfrm>
             <a:off x="6619684" y="4018674"/>
-            <a:ext cx="4462501" cy="685114"/>
+            <a:ext cx="4462501" cy="824132"/>
           </a:xfrm>
           <a:prstGeom prst="rect">
             <a:avLst/>
@@ -7271,8 +7271,8 @@
         </p:nvSpPr>
         <p:spPr>
           <a:xfrm>
-            <a:off x="5999378" y="4703788"/>
-            <a:ext cx="601790" cy="685114"/>
+            <a:off x="5999378" y="4842806"/>
+            <a:ext cx="601790" cy="824132"/>
           </a:xfrm>
           <a:prstGeom prst="rect">
             <a:avLst/>
@@ -7310,8 +7310,8 @@
         </p:nvSpPr>
         <p:spPr>
           <a:xfrm>
-            <a:off x="6619684" y="4753834"/>
-            <a:ext cx="4462501" cy="685114"/>
+            <a:off x="6619684" y="4892852"/>
+            <a:ext cx="4462501" cy="824132"/>
           </a:xfrm>
           <a:prstGeom prst="rect">
             <a:avLst/>
@@ -7376,8 +7376,8 @@
         </p:nvSpPr>
         <p:spPr>
           <a:xfrm>
-            <a:off x="5962345" y="5388902"/>
-            <a:ext cx="5721629" cy="685114"/>
+            <a:off x="5962345" y="5666938"/>
+            <a:ext cx="5721629" cy="824131"/>
           </a:xfrm>
           <a:prstGeom prst="rect">
             <a:avLst/>
@@ -7411,8 +7411,8 @@
         </p:nvSpPr>
         <p:spPr>
           <a:xfrm>
-            <a:off x="5999378" y="5388902"/>
-            <a:ext cx="601790" cy="685114"/>
+            <a:off x="5999378" y="5666938"/>
+            <a:ext cx="601790" cy="824131"/>
           </a:xfrm>
           <a:prstGeom prst="rect">
             <a:avLst/>
@@ -7450,8 +7450,8 @@
         </p:nvSpPr>
         <p:spPr>
           <a:xfrm>
-            <a:off x="6619684" y="5388902"/>
-            <a:ext cx="4462501" cy="685114"/>
+            <a:off x="6619684" y="5666938"/>
+            <a:ext cx="4462501" cy="824131"/>
           </a:xfrm>
           <a:prstGeom prst="rect">
             <a:avLst/>
@@ -7511,8 +7511,8 @@
         </p:nvSpPr>
         <p:spPr>
           <a:xfrm>
-            <a:off x="5999378" y="6074016"/>
-            <a:ext cx="601790" cy="1241183"/>
+            <a:off x="5999378" y="6491069"/>
+            <a:ext cx="601790" cy="824131"/>
           </a:xfrm>
           <a:prstGeom prst="rect">
             <a:avLst/>
@@ -7550,8 +7550,8 @@
         </p:nvSpPr>
         <p:spPr>
           <a:xfrm>
-            <a:off x="6619684" y="6074016"/>
-            <a:ext cx="4462501" cy="1241183"/>
+            <a:off x="6619684" y="6491069"/>
+            <a:ext cx="4462501" cy="824131"/>
           </a:xfrm>
           <a:prstGeom prst="rect">
             <a:avLst/>
@@ -7617,8 +7617,8 @@
         </p:nvSpPr>
         <p:spPr>
           <a:xfrm>
-            <a:off x="116493" y="4830318"/>
-            <a:ext cx="601790" cy="913486"/>
+            <a:off x="116493" y="5117516"/>
+            <a:ext cx="601790" cy="1098842"/>
           </a:xfrm>
           <a:prstGeom prst="rect">
             <a:avLst/>
@@ -7891,7 +7891,7 @@
         </p:nvGrpSpPr>
         <p:grpSpPr>
           <a:xfrm>
-            <a:off x="5121978" y="6240157"/>
+            <a:off x="5121978" y="6610870"/>
             <a:ext cx="801198" cy="203683"/>
             <a:chOff x="10856038" y="2322576"/>
             <a:chExt cx="791307" cy="201168"/>
@@ -8121,7 +8121,7 @@
         </p:nvGrpSpPr>
         <p:grpSpPr>
           <a:xfrm>
-            <a:off x="10982482" y="4929819"/>
+            <a:off x="10982482" y="5068837"/>
             <a:ext cx="801198" cy="203683"/>
             <a:chOff x="10856038" y="2322576"/>
             <a:chExt cx="791307" cy="201168"/>
@@ -8236,7 +8236,7 @@
         </p:nvGrpSpPr>
         <p:grpSpPr>
           <a:xfrm>
-            <a:off x="10982482" y="5608422"/>
+            <a:off x="10982482" y="5886458"/>
             <a:ext cx="801198" cy="203683"/>
             <a:chOff x="10856038" y="2322576"/>
             <a:chExt cx="791307" cy="201168"/>
@@ -8353,7 +8353,7 @@
         </p:nvSpPr>
         <p:spPr>
           <a:xfrm>
-            <a:off x="11019514" y="6234493"/>
+            <a:off x="11019514" y="6651546"/>
             <a:ext cx="546240" cy="203683"/>
           </a:xfrm>
           <a:prstGeom prst="roundRect">
@@ -8398,7 +8398,7 @@
         </p:nvSpPr>
         <p:spPr>
           <a:xfrm>
-            <a:off x="11019515" y="6235621"/>
+            <a:off x="11019515" y="6652674"/>
             <a:ext cx="673719" cy="202556"/>
           </a:xfrm>
           <a:prstGeom prst="rect">
@@ -9023,7 +9023,7 @@
                   <a:srgbClr val="1D4ED8"/>
                 </a:solidFill>
               </a:rPr>
-              <a:t>15  In Progress</a:t>
+              <a:t>18  In Progress</a:t>
             </a:r>
             <a:endParaRPr lang="en-US" sz="900" dirty="0"/>
           </a:p>
@@ -9086,7 +9086,7 @@
                   <a:srgbClr val="374151"/>
                 </a:solidFill>
               </a:rPr>
-              <a:t>18  Not Started</a:t>
+              <a:t>15  Not Started</a:t>
             </a:r>
             <a:endParaRPr lang="en-US" sz="900" dirty="0"/>
           </a:p>
@@ -11495,7 +11495,7 @@
                   <a:srgbClr val="9CA3AF"/>
                 </a:solidFill>
               </a:rPr>
-              <a:t>2 / 5 In Progress</a:t>
+              <a:t>3 / 5 In Progress</a:t>
             </a:r>
             <a:endParaRPr lang="en-US" sz="750" dirty="0"/>
           </a:p>
@@ -11959,11 +11959,11 @@
             </a:avLst>
           </a:prstGeom>
           <a:solidFill>
-            <a:srgbClr val="F3F4F6"/>
+            <a:srgbClr val="1558A8"/>
           </a:solidFill>
-          <a:ln w="9525">
+          <a:ln w="12700">
             <a:solidFill>
-              <a:srgbClr val="D1D5DB"/>
+              <a:srgbClr val="1558A8"/>
             </a:solidFill>
             <a:prstDash val="solid"/>
           </a:ln>
@@ -11996,10 +11996,10 @@
             <a:r>
               <a:rPr lang="en-US" sz="700" dirty="0">
                 <a:solidFill>
-                  <a:srgbClr val="374151"/>
-                </a:solidFill>
-              </a:rPr>
-              <a:t>Not Started</a:t>
+                  <a:srgbClr val="FFFFFF"/>
+                </a:solidFill>
+              </a:rPr>
+              <a:t>In Progress</a:t>
             </a:r>
             <a:endParaRPr lang="en-US" sz="700" dirty="0"/>
           </a:p>
@@ -12249,7 +12249,7 @@
                   <a:srgbClr val="9CA3AF"/>
                 </a:solidFill>
               </a:rPr>
-              <a:t>3 / 9 In Progress</a:t>
+              <a:t>5 / 9 In Progress</a:t>
             </a:r>
             <a:endParaRPr lang="en-US" sz="750" dirty="0"/>
           </a:p>
@@ -12461,11 +12461,11 @@
             </a:avLst>
           </a:prstGeom>
           <a:solidFill>
-            <a:srgbClr val="F3F4F6"/>
+            <a:srgbClr val="1558A8"/>
           </a:solidFill>
-          <a:ln w="9525">
+          <a:ln w="12700">
             <a:solidFill>
-              <a:srgbClr val="D1D5DB"/>
+              <a:srgbClr val="1558A8"/>
             </a:solidFill>
             <a:prstDash val="solid"/>
           </a:ln>
@@ -12498,10 +12498,10 @@
             <a:r>
               <a:rPr lang="en-US" sz="700" dirty="0">
                 <a:solidFill>
-                  <a:srgbClr val="374151"/>
-                </a:solidFill>
-              </a:rPr>
-              <a:t>Not Started</a:t>
+                  <a:srgbClr val="FFFFFF"/>
+                </a:solidFill>
+              </a:rPr>
+              <a:t>In Progress</a:t>
             </a:r>
             <a:endParaRPr lang="en-US" sz="700" dirty="0"/>
           </a:p>
@@ -12587,11 +12587,11 @@
             </a:avLst>
           </a:prstGeom>
           <a:solidFill>
-            <a:srgbClr val="F3F4F6"/>
+            <a:srgbClr val="1558A8"/>
           </a:solidFill>
-          <a:ln w="9525">
+          <a:ln w="12700">
             <a:solidFill>
-              <a:srgbClr val="D1D5DB"/>
+              <a:srgbClr val="1558A8"/>
             </a:solidFill>
             <a:prstDash val="solid"/>
           </a:ln>
@@ -12624,10 +12624,10 @@
             <a:r>
               <a:rPr lang="en-US" sz="700" dirty="0">
                 <a:solidFill>
-                  <a:srgbClr val="374151"/>
-                </a:solidFill>
-              </a:rPr>
-              <a:t>Not Started</a:t>
+                  <a:srgbClr val="FFFFFF"/>
+                </a:solidFill>
+              </a:rPr>
+              <a:t>In Progress</a:t>
             </a:r>
             <a:endParaRPr lang="en-US" sz="700" dirty="0"/>
           </a:p>

--- a/SABR_CPR_Component_Status.pptx
+++ b/SABR_CPR_Component_Status.pptx
@@ -4749,7 +4749,7 @@
                 <a:latin typeface="Arial" panose="020B0604020202020204" pitchFamily="34" charset="0"/>
                 <a:cs typeface="Arial" panose="020B0604020202020204" pitchFamily="34" charset="0"/>
               </a:rPr>
-              <a:t>7/6 Update</a:t>
+              <a:t>7/7 Update</a:t>
             </a:r>
           </a:p>
           <a:p>
@@ -8872,7 +8872,7 @@
                   <a:srgbClr val="388849"/>
                 </a:solidFill>
               </a:rPr>
-              <a:t>CPR  ·  Jul 6, 2026</a:t>
+              <a:t>CPR  ·  Jul 7, 2026</a:t>
             </a:r>
             <a:endParaRPr lang="en-US" sz="1100" dirty="0"/>
           </a:p>
@@ -9212,7 +9212,7 @@
                   <a:srgbClr val="374151"/>
                 </a:solidFill>
               </a:rPr>
-              <a:t>Dec 1, 2026  ·  147 days to launch</a:t>
+              <a:t>Sep 30, 2026  ·  Beta</a:t>
             </a:r>
             <a:endParaRPr lang="en-US" sz="900" dirty="0"/>
           </a:p>
@@ -9309,7 +9309,7 @@
                   <a:srgbClr val="9CA3AF"/>
                 </a:solidFill>
               </a:rPr>
-              <a:t>Launch: Dec 1, 2026  ·  147 days remaining</a:t>
+              <a:t>Beta: Sep 30, 2026  ·  84 days remaining</a:t>
             </a:r>
             <a:endParaRPr lang="en-US" sz="800" dirty="0"/>
           </a:p>

--- a/SABR_CPR_Component_Status.pptx
+++ b/SABR_CPR_Component_Status.pptx
@@ -4621,7 +4621,7 @@
                 <a:ea typeface="Calibri" pitchFamily="34" charset="-122"/>
                 <a:cs typeface="Arial" panose="020B0604020202020204" pitchFamily="34" charset="0"/>
               </a:rPr>
-              <a:t>December 1, 2026</a:t>
+              <a:t>September 30, 2026</a:t>
             </a:r>
             <a:endParaRPr lang="en-US" sz="911" dirty="0">
               <a:latin typeface="Arial" panose="020B0604020202020204" pitchFamily="34" charset="0"/>
@@ -9086,7 +9086,7 @@
                   <a:srgbClr val="374151"/>
                 </a:solidFill>
               </a:rPr>
-              <a:t>15  Not Started</a:t>
+              <a:t>14  Not Started</a:t>
             </a:r>
             <a:endParaRPr lang="en-US" sz="900" dirty="0"/>
           </a:p>
@@ -10489,7 +10489,7 @@
                   <a:srgbClr val="9CA3AF"/>
                 </a:solidFill>
               </a:rPr>
-              <a:t>6 / 7 In Progress</a:t>
+              <a:t>6 / 6 In Progress</a:t>
             </a:r>
             <a:endParaRPr lang="en-US" sz="750" dirty="0"/>
           </a:p>
@@ -11056,7 +11056,7 @@
                   <a:srgbClr val="1E293B"/>
                 </a:solidFill>
               </a:rPr>
-              <a:t>Live Streams</a:t>
+              <a:t>VOD Streams</a:t>
             </a:r>
             <a:endParaRPr lang="en-US" sz="750" dirty="0"/>
           </a:p>
@@ -11071,6 +11071,634 @@
         <p:spPr>
           <a:xfrm>
             <a:off x="5230368" y="2505456"/>
+            <a:ext cx="932688" cy="155448"/>
+          </a:xfrm>
+          <a:prstGeom prst="roundRect">
+            <a:avLst>
+              <a:gd name="adj" fmla="val 17647"/>
+            </a:avLst>
+          </a:prstGeom>
+          <a:solidFill>
+            <a:srgbClr val="1558A8"/>
+          </a:solidFill>
+          <a:ln w="12700">
+            <a:solidFill>
+              <a:srgbClr val="1558A8"/>
+            </a:solidFill>
+            <a:prstDash val="solid"/>
+          </a:ln>
+        </p:spPr>
+      </p:sp>
+      <p:sp>
+        <p:nvSpPr>
+          <p:cNvPr id="75" name="Text 73"/>
+          <p:cNvSpPr/>
+          <p:nvPr/>
+        </p:nvSpPr>
+        <p:spPr>
+          <a:xfrm>
+            <a:off x="5230368" y="2505456"/>
+            <a:ext cx="932688" cy="155448"/>
+          </a:xfrm>
+          <a:prstGeom prst="rect">
+            <a:avLst/>
+          </a:prstGeom>
+          <a:noFill/>
+          <a:ln/>
+        </p:spPr>
+        <p:txBody>
+          <a:bodyPr wrap="square" lIns="0" tIns="0" rIns="0" bIns="0" rtlCol="0" anchor="ctr"/>
+          <a:lstStyle/>
+          <a:p>
+            <a:pPr algn="ctr" indent="0" marL="0">
+              <a:buNone/>
+            </a:pPr>
+            <a:r>
+              <a:rPr lang="en-US" sz="700" dirty="0">
+                <a:solidFill>
+                  <a:srgbClr val="FFFFFF"/>
+                </a:solidFill>
+              </a:rPr>
+              <a:t>In Progress</a:t>
+            </a:r>
+            <a:endParaRPr lang="en-US" sz="700" dirty="0"/>
+          </a:p>
+        </p:txBody>
+      </p:sp>
+      <p:sp>
+        <p:nvSpPr>
+          <p:cNvPr id="76" name="Shape 74"/>
+          <p:cNvSpPr/>
+          <p:nvPr/>
+        </p:nvSpPr>
+        <p:spPr>
+          <a:xfrm>
+            <a:off x="6245352" y="2295144"/>
+            <a:ext cx="932688" cy="182880"/>
+          </a:xfrm>
+          <a:prstGeom prst="roundRect">
+            <a:avLst>
+              <a:gd name="adj" fmla="val 15000"/>
+            </a:avLst>
+          </a:prstGeom>
+          <a:solidFill>
+            <a:srgbClr val="FFFFFF"/>
+          </a:solidFill>
+          <a:ln w="9525">
+            <a:solidFill>
+              <a:srgbClr val="CBD5E1"/>
+            </a:solidFill>
+            <a:prstDash val="solid"/>
+          </a:ln>
+        </p:spPr>
+      </p:sp>
+      <p:sp>
+        <p:nvSpPr>
+          <p:cNvPr id="77" name="Text 75"/>
+          <p:cNvSpPr/>
+          <p:nvPr/>
+        </p:nvSpPr>
+        <p:spPr>
+          <a:xfrm>
+            <a:off x="6245352" y="2295144"/>
+            <a:ext cx="932688" cy="182880"/>
+          </a:xfrm>
+          <a:prstGeom prst="rect">
+            <a:avLst/>
+          </a:prstGeom>
+          <a:noFill/>
+          <a:ln/>
+        </p:spPr>
+        <p:txBody>
+          <a:bodyPr wrap="square" lIns="0" tIns="0" rIns="0" bIns="0" rtlCol="0" anchor="ctr"/>
+          <a:lstStyle/>
+          <a:p>
+            <a:pPr algn="ctr" indent="0" marL="0">
+              <a:buNone/>
+            </a:pPr>
+            <a:r>
+              <a:rPr lang="en-US" sz="750" b="1" dirty="0">
+                <a:solidFill>
+                  <a:srgbClr val="1E293B"/>
+                </a:solidFill>
+              </a:rPr>
+              <a:t>Linear</a:t>
+            </a:r>
+            <a:endParaRPr lang="en-US" sz="750" dirty="0"/>
+          </a:p>
+        </p:txBody>
+      </p:sp>
+      <p:sp>
+        <p:nvSpPr>
+          <p:cNvPr id="78" name="Shape 76"/>
+          <p:cNvSpPr/>
+          <p:nvPr/>
+        </p:nvSpPr>
+        <p:spPr>
+          <a:xfrm>
+            <a:off x="6245352" y="2505456"/>
+            <a:ext cx="932688" cy="155448"/>
+          </a:xfrm>
+          <a:prstGeom prst="roundRect">
+            <a:avLst>
+              <a:gd name="adj" fmla="val 17647"/>
+            </a:avLst>
+          </a:prstGeom>
+          <a:solidFill>
+            <a:srgbClr val="1558A8"/>
+          </a:solidFill>
+          <a:ln w="12700">
+            <a:solidFill>
+              <a:srgbClr val="1558A8"/>
+            </a:solidFill>
+            <a:prstDash val="solid"/>
+          </a:ln>
+        </p:spPr>
+      </p:sp>
+      <p:sp>
+        <p:nvSpPr>
+          <p:cNvPr id="79" name="Text 77"/>
+          <p:cNvSpPr/>
+          <p:nvPr/>
+        </p:nvSpPr>
+        <p:spPr>
+          <a:xfrm>
+            <a:off x="6245352" y="2505456"/>
+            <a:ext cx="932688" cy="155448"/>
+          </a:xfrm>
+          <a:prstGeom prst="rect">
+            <a:avLst/>
+          </a:prstGeom>
+          <a:noFill/>
+          <a:ln/>
+        </p:spPr>
+        <p:txBody>
+          <a:bodyPr wrap="square" lIns="0" tIns="0" rIns="0" bIns="0" rtlCol="0" anchor="ctr"/>
+          <a:lstStyle/>
+          <a:p>
+            <a:pPr algn="ctr" indent="0" marL="0">
+              <a:buNone/>
+            </a:pPr>
+            <a:r>
+              <a:rPr lang="en-US" sz="700" dirty="0">
+                <a:solidFill>
+                  <a:srgbClr val="FFFFFF"/>
+                </a:solidFill>
+              </a:rPr>
+              <a:t>In Progress</a:t>
+            </a:r>
+            <a:endParaRPr lang="en-US" sz="700" dirty="0"/>
+          </a:p>
+        </p:txBody>
+      </p:sp>
+      <p:sp>
+        <p:nvSpPr>
+          <p:cNvPr id="80" name="Shape 78"/>
+          <p:cNvSpPr/>
+          <p:nvPr/>
+        </p:nvSpPr>
+        <p:spPr>
+          <a:xfrm>
+            <a:off x="164592" y="3255264"/>
+            <a:ext cx="9116568" cy="1170432"/>
+          </a:xfrm>
+          <a:prstGeom prst="rect">
+            <a:avLst/>
+          </a:prstGeom>
+          <a:solidFill>
+            <a:srgbClr val="FAFBFC"/>
+          </a:solidFill>
+          <a:ln w="6350">
+            <a:solidFill>
+              <a:srgbClr val="E5E7EB"/>
+            </a:solidFill>
+            <a:prstDash val="solid"/>
+          </a:ln>
+        </p:spPr>
+      </p:sp>
+      <p:sp>
+        <p:nvSpPr>
+          <p:cNvPr id="81" name="Shape 79"/>
+          <p:cNvSpPr/>
+          <p:nvPr/>
+        </p:nvSpPr>
+        <p:spPr>
+          <a:xfrm>
+            <a:off x="182880" y="3328416"/>
+            <a:ext cx="859536" cy="1024128"/>
+          </a:xfrm>
+          <a:prstGeom prst="roundRect">
+            <a:avLst>
+              <a:gd name="adj" fmla="val 5319"/>
+            </a:avLst>
+          </a:prstGeom>
+          <a:solidFill>
+            <a:srgbClr val="9CA3AF"/>
+          </a:solidFill>
+          <a:ln w="12700">
+            <a:solidFill>
+              <a:srgbClr val="9CA3AF"/>
+            </a:solidFill>
+            <a:prstDash val="solid"/>
+          </a:ln>
+        </p:spPr>
+      </p:sp>
+      <p:sp>
+        <p:nvSpPr>
+          <p:cNvPr id="82" name="Text 80"/>
+          <p:cNvSpPr/>
+          <p:nvPr/>
+        </p:nvSpPr>
+        <p:spPr>
+          <a:xfrm>
+            <a:off x="182880" y="3328416"/>
+            <a:ext cx="859536" cy="1024128"/>
+          </a:xfrm>
+          <a:prstGeom prst="rect">
+            <a:avLst/>
+          </a:prstGeom>
+          <a:noFill/>
+          <a:ln/>
+        </p:spPr>
+        <p:txBody>
+          <a:bodyPr wrap="square" lIns="0" tIns="0" rIns="0" bIns="0" rtlCol="0" anchor="ctr"/>
+          <a:lstStyle/>
+          <a:p>
+            <a:pPr algn="ctr" indent="0" marL="0">
+              <a:buNone/>
+            </a:pPr>
+            <a:r>
+              <a:rPr lang="en-US" sz="950" b="1" dirty="0">
+                <a:solidFill>
+                  <a:srgbClr val="FFFFFF"/>
+                </a:solidFill>
+              </a:rPr>
+              <a:t>Player</a:t>
+            </a:r>
+            <a:endParaRPr lang="en-US" sz="950" dirty="0"/>
+          </a:p>
+        </p:txBody>
+      </p:sp>
+      <p:sp>
+        <p:nvSpPr>
+          <p:cNvPr id="83" name="Text 81"/>
+          <p:cNvSpPr/>
+          <p:nvPr/>
+        </p:nvSpPr>
+        <p:spPr>
+          <a:xfrm>
+            <a:off x="1170432" y="3300984"/>
+            <a:ext cx="8110728" cy="182880"/>
+          </a:xfrm>
+          <a:prstGeom prst="rect">
+            <a:avLst/>
+          </a:prstGeom>
+          <a:noFill/>
+          <a:ln/>
+        </p:spPr>
+        <p:txBody>
+          <a:bodyPr wrap="square" lIns="0" tIns="0" rIns="0" bIns="0" rtlCol="0" anchor="ctr"/>
+          <a:lstStyle/>
+          <a:p>
+            <a:pPr algn="l" indent="0" marL="0">
+              <a:buNone/>
+            </a:pPr>
+            <a:r>
+              <a:rPr lang="en-US" sz="750" dirty="0">
+                <a:solidFill>
+                  <a:srgbClr val="9CA3AF"/>
+                </a:solidFill>
+              </a:rPr>
+              <a:t>3 / 5 In Progress</a:t>
+            </a:r>
+            <a:endParaRPr lang="en-US" sz="750" dirty="0"/>
+          </a:p>
+        </p:txBody>
+      </p:sp>
+      <p:sp>
+        <p:nvSpPr>
+          <p:cNvPr id="84" name="Shape 82"/>
+          <p:cNvSpPr/>
+          <p:nvPr/>
+        </p:nvSpPr>
+        <p:spPr>
+          <a:xfrm>
+            <a:off x="1170432" y="3520440"/>
+            <a:ext cx="932688" cy="182880"/>
+          </a:xfrm>
+          <a:prstGeom prst="roundRect">
+            <a:avLst>
+              <a:gd name="adj" fmla="val 15000"/>
+            </a:avLst>
+          </a:prstGeom>
+          <a:solidFill>
+            <a:srgbClr val="FFFFFF"/>
+          </a:solidFill>
+          <a:ln w="9525">
+            <a:solidFill>
+              <a:srgbClr val="CBD5E1"/>
+            </a:solidFill>
+            <a:prstDash val="solid"/>
+          </a:ln>
+        </p:spPr>
+      </p:sp>
+      <p:sp>
+        <p:nvSpPr>
+          <p:cNvPr id="85" name="Text 83"/>
+          <p:cNvSpPr/>
+          <p:nvPr/>
+        </p:nvSpPr>
+        <p:spPr>
+          <a:xfrm>
+            <a:off x="1170432" y="3520440"/>
+            <a:ext cx="932688" cy="182880"/>
+          </a:xfrm>
+          <a:prstGeom prst="rect">
+            <a:avLst/>
+          </a:prstGeom>
+          <a:noFill/>
+          <a:ln/>
+        </p:spPr>
+        <p:txBody>
+          <a:bodyPr wrap="square" lIns="0" tIns="0" rIns="0" bIns="0" rtlCol="0" anchor="ctr"/>
+          <a:lstStyle/>
+          <a:p>
+            <a:pPr algn="ctr" indent="0" marL="0">
+              <a:buNone/>
+            </a:pPr>
+            <a:r>
+              <a:rPr lang="en-US" sz="750" b="1" dirty="0">
+                <a:solidFill>
+                  <a:srgbClr val="1E293B"/>
+                </a:solidFill>
+              </a:rPr>
+              <a:t>Web Player</a:t>
+            </a:r>
+            <a:endParaRPr lang="en-US" sz="750" dirty="0"/>
+          </a:p>
+        </p:txBody>
+      </p:sp>
+      <p:sp>
+        <p:nvSpPr>
+          <p:cNvPr id="86" name="Shape 84"/>
+          <p:cNvSpPr/>
+          <p:nvPr/>
+        </p:nvSpPr>
+        <p:spPr>
+          <a:xfrm>
+            <a:off x="1170432" y="3730752"/>
+            <a:ext cx="932688" cy="155448"/>
+          </a:xfrm>
+          <a:prstGeom prst="roundRect">
+            <a:avLst>
+              <a:gd name="adj" fmla="val 17647"/>
+            </a:avLst>
+          </a:prstGeom>
+          <a:solidFill>
+            <a:srgbClr val="1558A8"/>
+          </a:solidFill>
+          <a:ln w="12700">
+            <a:solidFill>
+              <a:srgbClr val="1558A8"/>
+            </a:solidFill>
+            <a:prstDash val="solid"/>
+          </a:ln>
+        </p:spPr>
+      </p:sp>
+      <p:sp>
+        <p:nvSpPr>
+          <p:cNvPr id="87" name="Text 85"/>
+          <p:cNvSpPr/>
+          <p:nvPr/>
+        </p:nvSpPr>
+        <p:spPr>
+          <a:xfrm>
+            <a:off x="1170432" y="3730752"/>
+            <a:ext cx="932688" cy="155448"/>
+          </a:xfrm>
+          <a:prstGeom prst="rect">
+            <a:avLst/>
+          </a:prstGeom>
+          <a:noFill/>
+          <a:ln/>
+        </p:spPr>
+        <p:txBody>
+          <a:bodyPr wrap="square" lIns="0" tIns="0" rIns="0" bIns="0" rtlCol="0" anchor="ctr"/>
+          <a:lstStyle/>
+          <a:p>
+            <a:pPr algn="ctr" indent="0" marL="0">
+              <a:buNone/>
+            </a:pPr>
+            <a:r>
+              <a:rPr lang="en-US" sz="700" dirty="0">
+                <a:solidFill>
+                  <a:srgbClr val="FFFFFF"/>
+                </a:solidFill>
+              </a:rPr>
+              <a:t>In Progress</a:t>
+            </a:r>
+            <a:endParaRPr lang="en-US" sz="700" dirty="0"/>
+          </a:p>
+        </p:txBody>
+      </p:sp>
+      <p:sp>
+        <p:nvSpPr>
+          <p:cNvPr id="88" name="Shape 86"/>
+          <p:cNvSpPr/>
+          <p:nvPr/>
+        </p:nvSpPr>
+        <p:spPr>
+          <a:xfrm>
+            <a:off x="2185416" y="3520440"/>
+            <a:ext cx="932688" cy="182880"/>
+          </a:xfrm>
+          <a:prstGeom prst="roundRect">
+            <a:avLst>
+              <a:gd name="adj" fmla="val 15000"/>
+            </a:avLst>
+          </a:prstGeom>
+          <a:solidFill>
+            <a:srgbClr val="FFFFFF"/>
+          </a:solidFill>
+          <a:ln w="9525">
+            <a:solidFill>
+              <a:srgbClr val="CBD5E1"/>
+            </a:solidFill>
+            <a:prstDash val="solid"/>
+          </a:ln>
+        </p:spPr>
+      </p:sp>
+      <p:sp>
+        <p:nvSpPr>
+          <p:cNvPr id="89" name="Text 87"/>
+          <p:cNvSpPr/>
+          <p:nvPr/>
+        </p:nvSpPr>
+        <p:spPr>
+          <a:xfrm>
+            <a:off x="2185416" y="3520440"/>
+            <a:ext cx="932688" cy="182880"/>
+          </a:xfrm>
+          <a:prstGeom prst="rect">
+            <a:avLst/>
+          </a:prstGeom>
+          <a:noFill/>
+          <a:ln/>
+        </p:spPr>
+        <p:txBody>
+          <a:bodyPr wrap="square" lIns="0" tIns="0" rIns="0" bIns="0" rtlCol="0" anchor="ctr"/>
+          <a:lstStyle/>
+          <a:p>
+            <a:pPr algn="ctr" indent="0" marL="0">
+              <a:buNone/>
+            </a:pPr>
+            <a:r>
+              <a:rPr lang="en-US" sz="750" b="1" dirty="0">
+                <a:solidFill>
+                  <a:srgbClr val="1E293B"/>
+                </a:solidFill>
+              </a:rPr>
+              <a:t>iOS Player</a:t>
+            </a:r>
+            <a:endParaRPr lang="en-US" sz="750" dirty="0"/>
+          </a:p>
+        </p:txBody>
+      </p:sp>
+      <p:sp>
+        <p:nvSpPr>
+          <p:cNvPr id="90" name="Shape 88"/>
+          <p:cNvSpPr/>
+          <p:nvPr/>
+        </p:nvSpPr>
+        <p:spPr>
+          <a:xfrm>
+            <a:off x="2185416" y="3730752"/>
+            <a:ext cx="932688" cy="155448"/>
+          </a:xfrm>
+          <a:prstGeom prst="roundRect">
+            <a:avLst>
+              <a:gd name="adj" fmla="val 17647"/>
+            </a:avLst>
+          </a:prstGeom>
+          <a:solidFill>
+            <a:srgbClr val="1558A8"/>
+          </a:solidFill>
+          <a:ln w="12700">
+            <a:solidFill>
+              <a:srgbClr val="1558A8"/>
+            </a:solidFill>
+            <a:prstDash val="solid"/>
+          </a:ln>
+        </p:spPr>
+      </p:sp>
+      <p:sp>
+        <p:nvSpPr>
+          <p:cNvPr id="91" name="Text 89"/>
+          <p:cNvSpPr/>
+          <p:nvPr/>
+        </p:nvSpPr>
+        <p:spPr>
+          <a:xfrm>
+            <a:off x="2185416" y="3730752"/>
+            <a:ext cx="932688" cy="155448"/>
+          </a:xfrm>
+          <a:prstGeom prst="rect">
+            <a:avLst/>
+          </a:prstGeom>
+          <a:noFill/>
+          <a:ln/>
+        </p:spPr>
+        <p:txBody>
+          <a:bodyPr wrap="square" lIns="0" tIns="0" rIns="0" bIns="0" rtlCol="0" anchor="ctr"/>
+          <a:lstStyle/>
+          <a:p>
+            <a:pPr algn="ctr" indent="0" marL="0">
+              <a:buNone/>
+            </a:pPr>
+            <a:r>
+              <a:rPr lang="en-US" sz="700" dirty="0">
+                <a:solidFill>
+                  <a:srgbClr val="FFFFFF"/>
+                </a:solidFill>
+              </a:rPr>
+              <a:t>In Progress</a:t>
+            </a:r>
+            <a:endParaRPr lang="en-US" sz="700" dirty="0"/>
+          </a:p>
+        </p:txBody>
+      </p:sp>
+      <p:sp>
+        <p:nvSpPr>
+          <p:cNvPr id="92" name="Shape 90"/>
+          <p:cNvSpPr/>
+          <p:nvPr/>
+        </p:nvSpPr>
+        <p:spPr>
+          <a:xfrm>
+            <a:off x="3200400" y="3520440"/>
+            <a:ext cx="932688" cy="182880"/>
+          </a:xfrm>
+          <a:prstGeom prst="roundRect">
+            <a:avLst>
+              <a:gd name="adj" fmla="val 15000"/>
+            </a:avLst>
+          </a:prstGeom>
+          <a:solidFill>
+            <a:srgbClr val="FFFFFF"/>
+          </a:solidFill>
+          <a:ln w="9525">
+            <a:solidFill>
+              <a:srgbClr val="CBD5E1"/>
+            </a:solidFill>
+            <a:prstDash val="solid"/>
+          </a:ln>
+        </p:spPr>
+      </p:sp>
+      <p:sp>
+        <p:nvSpPr>
+          <p:cNvPr id="93" name="Text 91"/>
+          <p:cNvSpPr/>
+          <p:nvPr/>
+        </p:nvSpPr>
+        <p:spPr>
+          <a:xfrm>
+            <a:off x="3200400" y="3520440"/>
+            <a:ext cx="932688" cy="182880"/>
+          </a:xfrm>
+          <a:prstGeom prst="rect">
+            <a:avLst/>
+          </a:prstGeom>
+          <a:noFill/>
+          <a:ln/>
+        </p:spPr>
+        <p:txBody>
+          <a:bodyPr wrap="square" lIns="0" tIns="0" rIns="0" bIns="0" rtlCol="0" anchor="ctr"/>
+          <a:lstStyle/>
+          <a:p>
+            <a:pPr algn="ctr" indent="0" marL="0">
+              <a:buNone/>
+            </a:pPr>
+            <a:r>
+              <a:rPr lang="en-US" sz="750" b="1" dirty="0">
+                <a:solidFill>
+                  <a:srgbClr val="1E293B"/>
+                </a:solidFill>
+              </a:rPr>
+              <a:t>Android Player</a:t>
+            </a:r>
+            <a:endParaRPr lang="en-US" sz="750" dirty="0"/>
+          </a:p>
+        </p:txBody>
+      </p:sp>
+      <p:sp>
+        <p:nvSpPr>
+          <p:cNvPr id="94" name="Shape 92"/>
+          <p:cNvSpPr/>
+          <p:nvPr/>
+        </p:nvSpPr>
+        <p:spPr>
+          <a:xfrm>
+            <a:off x="3200400" y="3730752"/>
             <a:ext cx="932688" cy="155448"/>
           </a:xfrm>
           <a:prstGeom prst="roundRect">
@@ -11091,13 +11719,13 @@
       </p:sp>
       <p:sp>
         <p:nvSpPr>
-          <p:cNvPr id="75" name="Text 73"/>
-          <p:cNvSpPr/>
-          <p:nvPr/>
-        </p:nvSpPr>
-        <p:spPr>
-          <a:xfrm>
-            <a:off x="5230368" y="2505456"/>
+          <p:cNvPr id="95" name="Text 93"/>
+          <p:cNvSpPr/>
+          <p:nvPr/>
+        </p:nvSpPr>
+        <p:spPr>
+          <a:xfrm>
+            <a:off x="3200400" y="3730752"/>
             <a:ext cx="932688" cy="155448"/>
           </a:xfrm>
           <a:prstGeom prst="rect">
@@ -11127,13 +11755,13 @@
       </p:sp>
       <p:sp>
         <p:nvSpPr>
-          <p:cNvPr id="76" name="Shape 74"/>
-          <p:cNvSpPr/>
-          <p:nvPr/>
-        </p:nvSpPr>
-        <p:spPr>
-          <a:xfrm>
-            <a:off x="6245352" y="2295144"/>
+          <p:cNvPr id="96" name="Shape 94"/>
+          <p:cNvSpPr/>
+          <p:nvPr/>
+        </p:nvSpPr>
+        <p:spPr>
+          <a:xfrm>
+            <a:off x="4215384" y="3520440"/>
             <a:ext cx="932688" cy="182880"/>
           </a:xfrm>
           <a:prstGeom prst="roundRect">
@@ -11154,13 +11782,13 @@
       </p:sp>
       <p:sp>
         <p:nvSpPr>
-          <p:cNvPr id="77" name="Text 75"/>
-          <p:cNvSpPr/>
-          <p:nvPr/>
-        </p:nvSpPr>
-        <p:spPr>
-          <a:xfrm>
-            <a:off x="6245352" y="2295144"/>
+          <p:cNvPr id="97" name="Text 95"/>
+          <p:cNvSpPr/>
+          <p:nvPr/>
+        </p:nvSpPr>
+        <p:spPr>
+          <a:xfrm>
+            <a:off x="4215384" y="3520440"/>
             <a:ext cx="932688" cy="182880"/>
           </a:xfrm>
           <a:prstGeom prst="rect">
@@ -11182,7 +11810,7 @@
                   <a:srgbClr val="1E293B"/>
                 </a:solidFill>
               </a:rPr>
-              <a:t>VOD Streams</a:t>
+              <a:t>HLS/DASH PB</a:t>
             </a:r>
             <a:endParaRPr lang="en-US" sz="750" dirty="0"/>
           </a:p>
@@ -11190,13 +11818,13 @@
       </p:sp>
       <p:sp>
         <p:nvSpPr>
-          <p:cNvPr id="78" name="Shape 76"/>
-          <p:cNvSpPr/>
-          <p:nvPr/>
-        </p:nvSpPr>
-        <p:spPr>
-          <a:xfrm>
-            <a:off x="6245352" y="2505456"/>
+          <p:cNvPr id="98" name="Shape 96"/>
+          <p:cNvSpPr/>
+          <p:nvPr/>
+        </p:nvSpPr>
+        <p:spPr>
+          <a:xfrm>
+            <a:off x="4215384" y="3730752"/>
             <a:ext cx="932688" cy="155448"/>
           </a:xfrm>
           <a:prstGeom prst="roundRect">
@@ -11217,13 +11845,13 @@
       </p:sp>
       <p:sp>
         <p:nvSpPr>
-          <p:cNvPr id="79" name="Text 77"/>
-          <p:cNvSpPr/>
-          <p:nvPr/>
-        </p:nvSpPr>
-        <p:spPr>
-          <a:xfrm>
-            <a:off x="6245352" y="2505456"/>
+          <p:cNvPr id="99" name="Text 97"/>
+          <p:cNvSpPr/>
+          <p:nvPr/>
+        </p:nvSpPr>
+        <p:spPr>
+          <a:xfrm>
+            <a:off x="4215384" y="3730752"/>
             <a:ext cx="932688" cy="155448"/>
           </a:xfrm>
           <a:prstGeom prst="rect">
@@ -11253,13 +11881,13 @@
       </p:sp>
       <p:sp>
         <p:nvSpPr>
-          <p:cNvPr id="80" name="Shape 78"/>
-          <p:cNvSpPr/>
-          <p:nvPr/>
-        </p:nvSpPr>
-        <p:spPr>
-          <a:xfrm>
-            <a:off x="7260336" y="2295144"/>
+          <p:cNvPr id="100" name="Shape 98"/>
+          <p:cNvSpPr/>
+          <p:nvPr/>
+        </p:nvSpPr>
+        <p:spPr>
+          <a:xfrm>
+            <a:off x="5230368" y="3520440"/>
             <a:ext cx="932688" cy="182880"/>
           </a:xfrm>
           <a:prstGeom prst="roundRect">
@@ -11280,13 +11908,13 @@
       </p:sp>
       <p:sp>
         <p:nvSpPr>
-          <p:cNvPr id="81" name="Text 79"/>
-          <p:cNvSpPr/>
-          <p:nvPr/>
-        </p:nvSpPr>
-        <p:spPr>
-          <a:xfrm>
-            <a:off x="7260336" y="2295144"/>
+          <p:cNvPr id="101" name="Text 99"/>
+          <p:cNvSpPr/>
+          <p:nvPr/>
+        </p:nvSpPr>
+        <p:spPr>
+          <a:xfrm>
+            <a:off x="5230368" y="3520440"/>
             <a:ext cx="932688" cy="182880"/>
           </a:xfrm>
           <a:prstGeom prst="rect">
@@ -11308,7 +11936,7 @@
                   <a:srgbClr val="1E293B"/>
                 </a:solidFill>
               </a:rPr>
-              <a:t>Linear</a:t>
+              <a:t>Bitmovin QOE</a:t>
             </a:r>
             <a:endParaRPr lang="en-US" sz="750" dirty="0"/>
           </a:p>
@@ -11316,13 +11944,263 @@
       </p:sp>
       <p:sp>
         <p:nvSpPr>
-          <p:cNvPr id="82" name="Shape 80"/>
-          <p:cNvSpPr/>
-          <p:nvPr/>
-        </p:nvSpPr>
-        <p:spPr>
-          <a:xfrm>
-            <a:off x="7260336" y="2505456"/>
+          <p:cNvPr id="102" name="Shape 100"/>
+          <p:cNvSpPr/>
+          <p:nvPr/>
+        </p:nvSpPr>
+        <p:spPr>
+          <a:xfrm>
+            <a:off x="5230368" y="3730752"/>
+            <a:ext cx="932688" cy="155448"/>
+          </a:xfrm>
+          <a:prstGeom prst="roundRect">
+            <a:avLst>
+              <a:gd name="adj" fmla="val 17647"/>
+            </a:avLst>
+          </a:prstGeom>
+          <a:solidFill>
+            <a:srgbClr val="F3F4F6"/>
+          </a:solidFill>
+          <a:ln w="9525">
+            <a:solidFill>
+              <a:srgbClr val="D1D5DB"/>
+            </a:solidFill>
+            <a:prstDash val="solid"/>
+          </a:ln>
+        </p:spPr>
+      </p:sp>
+      <p:sp>
+        <p:nvSpPr>
+          <p:cNvPr id="103" name="Text 101"/>
+          <p:cNvSpPr/>
+          <p:nvPr/>
+        </p:nvSpPr>
+        <p:spPr>
+          <a:xfrm>
+            <a:off x="5230368" y="3730752"/>
+            <a:ext cx="932688" cy="155448"/>
+          </a:xfrm>
+          <a:prstGeom prst="rect">
+            <a:avLst/>
+          </a:prstGeom>
+          <a:noFill/>
+          <a:ln/>
+        </p:spPr>
+        <p:txBody>
+          <a:bodyPr wrap="square" lIns="0" tIns="0" rIns="0" bIns="0" rtlCol="0" anchor="ctr"/>
+          <a:lstStyle/>
+          <a:p>
+            <a:pPr algn="ctr" indent="0" marL="0">
+              <a:buNone/>
+            </a:pPr>
+            <a:r>
+              <a:rPr lang="en-US" sz="700" dirty="0">
+                <a:solidFill>
+                  <a:srgbClr val="374151"/>
+                </a:solidFill>
+              </a:rPr>
+              <a:t>Not Started</a:t>
+            </a:r>
+            <a:endParaRPr lang="en-US" sz="700" dirty="0"/>
+          </a:p>
+        </p:txBody>
+      </p:sp>
+      <p:sp>
+        <p:nvSpPr>
+          <p:cNvPr id="104" name="Shape 102"/>
+          <p:cNvSpPr/>
+          <p:nvPr/>
+        </p:nvSpPr>
+        <p:spPr>
+          <a:xfrm>
+            <a:off x="164592" y="4480560"/>
+            <a:ext cx="9116568" cy="1170432"/>
+          </a:xfrm>
+          <a:prstGeom prst="rect">
+            <a:avLst/>
+          </a:prstGeom>
+          <a:solidFill>
+            <a:srgbClr val="FFFFFF"/>
+          </a:solidFill>
+          <a:ln w="6350">
+            <a:solidFill>
+              <a:srgbClr val="E5E7EB"/>
+            </a:solidFill>
+            <a:prstDash val="solid"/>
+          </a:ln>
+        </p:spPr>
+      </p:sp>
+      <p:sp>
+        <p:nvSpPr>
+          <p:cNvPr id="105" name="Shape 103"/>
+          <p:cNvSpPr/>
+          <p:nvPr/>
+        </p:nvSpPr>
+        <p:spPr>
+          <a:xfrm>
+            <a:off x="182880" y="4553712"/>
+            <a:ext cx="859536" cy="1024128"/>
+          </a:xfrm>
+          <a:prstGeom prst="roundRect">
+            <a:avLst>
+              <a:gd name="adj" fmla="val 5319"/>
+            </a:avLst>
+          </a:prstGeom>
+          <a:solidFill>
+            <a:srgbClr val="9CA3AF"/>
+          </a:solidFill>
+          <a:ln w="12700">
+            <a:solidFill>
+              <a:srgbClr val="9CA3AF"/>
+            </a:solidFill>
+            <a:prstDash val="solid"/>
+          </a:ln>
+        </p:spPr>
+      </p:sp>
+      <p:sp>
+        <p:nvSpPr>
+          <p:cNvPr id="106" name="Text 104"/>
+          <p:cNvSpPr/>
+          <p:nvPr/>
+        </p:nvSpPr>
+        <p:spPr>
+          <a:xfrm>
+            <a:off x="182880" y="4553712"/>
+            <a:ext cx="859536" cy="1024128"/>
+          </a:xfrm>
+          <a:prstGeom prst="rect">
+            <a:avLst/>
+          </a:prstGeom>
+          <a:noFill/>
+          <a:ln/>
+        </p:spPr>
+        <p:txBody>
+          <a:bodyPr wrap="square" lIns="0" tIns="0" rIns="0" bIns="0" rtlCol="0" anchor="ctr"/>
+          <a:lstStyle/>
+          <a:p>
+            <a:pPr algn="ctr" indent="0" marL="0">
+              <a:buNone/>
+            </a:pPr>
+            <a:r>
+              <a:rPr lang="en-US" sz="950" b="1" dirty="0">
+                <a:solidFill>
+                  <a:srgbClr val="FFFFFF"/>
+                </a:solidFill>
+              </a:rPr>
+              <a:t>Merchandising</a:t>
+            </a:r>
+            <a:endParaRPr lang="en-US" sz="950" dirty="0"/>
+          </a:p>
+        </p:txBody>
+      </p:sp>
+      <p:sp>
+        <p:nvSpPr>
+          <p:cNvPr id="107" name="Text 105"/>
+          <p:cNvSpPr/>
+          <p:nvPr/>
+        </p:nvSpPr>
+        <p:spPr>
+          <a:xfrm>
+            <a:off x="1170432" y="4526280"/>
+            <a:ext cx="8110728" cy="182880"/>
+          </a:xfrm>
+          <a:prstGeom prst="rect">
+            <a:avLst/>
+          </a:prstGeom>
+          <a:noFill/>
+          <a:ln/>
+        </p:spPr>
+        <p:txBody>
+          <a:bodyPr wrap="square" lIns="0" tIns="0" rIns="0" bIns="0" rtlCol="0" anchor="ctr"/>
+          <a:lstStyle/>
+          <a:p>
+            <a:pPr algn="l" indent="0" marL="0">
+              <a:buNone/>
+            </a:pPr>
+            <a:r>
+              <a:rPr lang="en-US" sz="750" dirty="0">
+                <a:solidFill>
+                  <a:srgbClr val="9CA3AF"/>
+                </a:solidFill>
+              </a:rPr>
+              <a:t>5 / 9 In Progress</a:t>
+            </a:r>
+            <a:endParaRPr lang="en-US" sz="750" dirty="0"/>
+          </a:p>
+        </p:txBody>
+      </p:sp>
+      <p:sp>
+        <p:nvSpPr>
+          <p:cNvPr id="108" name="Shape 106"/>
+          <p:cNvSpPr/>
+          <p:nvPr/>
+        </p:nvSpPr>
+        <p:spPr>
+          <a:xfrm>
+            <a:off x="1170432" y="4745736"/>
+            <a:ext cx="932688" cy="182880"/>
+          </a:xfrm>
+          <a:prstGeom prst="roundRect">
+            <a:avLst>
+              <a:gd name="adj" fmla="val 15000"/>
+            </a:avLst>
+          </a:prstGeom>
+          <a:solidFill>
+            <a:srgbClr val="FFFFFF"/>
+          </a:solidFill>
+          <a:ln w="9525">
+            <a:solidFill>
+              <a:srgbClr val="CBD5E1"/>
+            </a:solidFill>
+            <a:prstDash val="solid"/>
+          </a:ln>
+        </p:spPr>
+      </p:sp>
+      <p:sp>
+        <p:nvSpPr>
+          <p:cNvPr id="109" name="Text 107"/>
+          <p:cNvSpPr/>
+          <p:nvPr/>
+        </p:nvSpPr>
+        <p:spPr>
+          <a:xfrm>
+            <a:off x="1170432" y="4745736"/>
+            <a:ext cx="932688" cy="182880"/>
+          </a:xfrm>
+          <a:prstGeom prst="rect">
+            <a:avLst/>
+          </a:prstGeom>
+          <a:noFill/>
+          <a:ln/>
+        </p:spPr>
+        <p:txBody>
+          <a:bodyPr wrap="square" lIns="0" tIns="0" rIns="0" bIns="0" rtlCol="0" anchor="ctr"/>
+          <a:lstStyle/>
+          <a:p>
+            <a:pPr algn="ctr" indent="0" marL="0">
+              <a:buNone/>
+            </a:pPr>
+            <a:r>
+              <a:rPr lang="en-US" sz="750" b="1" dirty="0">
+                <a:solidFill>
+                  <a:srgbClr val="1E293B"/>
+                </a:solidFill>
+              </a:rPr>
+              <a:t>Metadata</a:t>
+            </a:r>
+            <a:endParaRPr lang="en-US" sz="750" dirty="0"/>
+          </a:p>
+        </p:txBody>
+      </p:sp>
+      <p:sp>
+        <p:nvSpPr>
+          <p:cNvPr id="110" name="Shape 108"/>
+          <p:cNvSpPr/>
+          <p:nvPr/>
+        </p:nvSpPr>
+        <p:spPr>
+          <a:xfrm>
+            <a:off x="1170432" y="4956048"/>
             <a:ext cx="932688" cy="155448"/>
           </a:xfrm>
           <a:prstGeom prst="roundRect">
@@ -11343,13 +12221,13 @@
       </p:sp>
       <p:sp>
         <p:nvSpPr>
-          <p:cNvPr id="83" name="Text 81"/>
-          <p:cNvSpPr/>
-          <p:nvPr/>
-        </p:nvSpPr>
-        <p:spPr>
-          <a:xfrm>
-            <a:off x="7260336" y="2505456"/>
+          <p:cNvPr id="111" name="Text 109"/>
+          <p:cNvSpPr/>
+          <p:nvPr/>
+        </p:nvSpPr>
+        <p:spPr>
+          <a:xfrm>
+            <a:off x="1170432" y="4956048"/>
             <a:ext cx="932688" cy="155448"/>
           </a:xfrm>
           <a:prstGeom prst="rect">
@@ -11379,13 +12257,1021 @@
       </p:sp>
       <p:sp>
         <p:nvSpPr>
-          <p:cNvPr id="84" name="Shape 82"/>
-          <p:cNvSpPr/>
-          <p:nvPr/>
-        </p:nvSpPr>
-        <p:spPr>
-          <a:xfrm>
-            <a:off x="164592" y="3255264"/>
+          <p:cNvPr id="112" name="Shape 110"/>
+          <p:cNvSpPr/>
+          <p:nvPr/>
+        </p:nvSpPr>
+        <p:spPr>
+          <a:xfrm>
+            <a:off x="2185416" y="4745736"/>
+            <a:ext cx="932688" cy="182880"/>
+          </a:xfrm>
+          <a:prstGeom prst="roundRect">
+            <a:avLst>
+              <a:gd name="adj" fmla="val 15000"/>
+            </a:avLst>
+          </a:prstGeom>
+          <a:solidFill>
+            <a:srgbClr val="FFFFFF"/>
+          </a:solidFill>
+          <a:ln w="9525">
+            <a:solidFill>
+              <a:srgbClr val="CBD5E1"/>
+            </a:solidFill>
+            <a:prstDash val="solid"/>
+          </a:ln>
+        </p:spPr>
+      </p:sp>
+      <p:sp>
+        <p:nvSpPr>
+          <p:cNvPr id="113" name="Text 111"/>
+          <p:cNvSpPr/>
+          <p:nvPr/>
+        </p:nvSpPr>
+        <p:spPr>
+          <a:xfrm>
+            <a:off x="2185416" y="4745736"/>
+            <a:ext cx="932688" cy="182880"/>
+          </a:xfrm>
+          <a:prstGeom prst="rect">
+            <a:avLst/>
+          </a:prstGeom>
+          <a:noFill/>
+          <a:ln/>
+        </p:spPr>
+        <p:txBody>
+          <a:bodyPr wrap="square" lIns="0" tIns="0" rIns="0" bIns="0" rtlCol="0" anchor="ctr"/>
+          <a:lstStyle/>
+          <a:p>
+            <a:pPr algn="ctr" indent="0" marL="0">
+              <a:buNone/>
+            </a:pPr>
+            <a:r>
+              <a:rPr lang="en-US" sz="750" b="1" dirty="0">
+                <a:solidFill>
+                  <a:srgbClr val="1E293B"/>
+                </a:solidFill>
+              </a:rPr>
+              <a:t>Images</a:t>
+            </a:r>
+            <a:endParaRPr lang="en-US" sz="750" dirty="0"/>
+          </a:p>
+        </p:txBody>
+      </p:sp>
+      <p:sp>
+        <p:nvSpPr>
+          <p:cNvPr id="114" name="Shape 112"/>
+          <p:cNvSpPr/>
+          <p:nvPr/>
+        </p:nvSpPr>
+        <p:spPr>
+          <a:xfrm>
+            <a:off x="2185416" y="4956048"/>
+            <a:ext cx="932688" cy="155448"/>
+          </a:xfrm>
+          <a:prstGeom prst="roundRect">
+            <a:avLst>
+              <a:gd name="adj" fmla="val 17647"/>
+            </a:avLst>
+          </a:prstGeom>
+          <a:solidFill>
+            <a:srgbClr val="1558A8"/>
+          </a:solidFill>
+          <a:ln w="12700">
+            <a:solidFill>
+              <a:srgbClr val="1558A8"/>
+            </a:solidFill>
+            <a:prstDash val="solid"/>
+          </a:ln>
+        </p:spPr>
+      </p:sp>
+      <p:sp>
+        <p:nvSpPr>
+          <p:cNvPr id="115" name="Text 113"/>
+          <p:cNvSpPr/>
+          <p:nvPr/>
+        </p:nvSpPr>
+        <p:spPr>
+          <a:xfrm>
+            <a:off x="2185416" y="4956048"/>
+            <a:ext cx="932688" cy="155448"/>
+          </a:xfrm>
+          <a:prstGeom prst="rect">
+            <a:avLst/>
+          </a:prstGeom>
+          <a:noFill/>
+          <a:ln/>
+        </p:spPr>
+        <p:txBody>
+          <a:bodyPr wrap="square" lIns="0" tIns="0" rIns="0" bIns="0" rtlCol="0" anchor="ctr"/>
+          <a:lstStyle/>
+          <a:p>
+            <a:pPr algn="ctr" indent="0" marL="0">
+              <a:buNone/>
+            </a:pPr>
+            <a:r>
+              <a:rPr lang="en-US" sz="700" dirty="0">
+                <a:solidFill>
+                  <a:srgbClr val="FFFFFF"/>
+                </a:solidFill>
+              </a:rPr>
+              <a:t>In Progress</a:t>
+            </a:r>
+            <a:endParaRPr lang="en-US" sz="700" dirty="0"/>
+          </a:p>
+        </p:txBody>
+      </p:sp>
+      <p:sp>
+        <p:nvSpPr>
+          <p:cNvPr id="116" name="Shape 114"/>
+          <p:cNvSpPr/>
+          <p:nvPr/>
+        </p:nvSpPr>
+        <p:spPr>
+          <a:xfrm>
+            <a:off x="3200400" y="4745736"/>
+            <a:ext cx="932688" cy="182880"/>
+          </a:xfrm>
+          <a:prstGeom prst="roundRect">
+            <a:avLst>
+              <a:gd name="adj" fmla="val 15000"/>
+            </a:avLst>
+          </a:prstGeom>
+          <a:solidFill>
+            <a:srgbClr val="FFFFFF"/>
+          </a:solidFill>
+          <a:ln w="9525">
+            <a:solidFill>
+              <a:srgbClr val="CBD5E1"/>
+            </a:solidFill>
+            <a:prstDash val="solid"/>
+          </a:ln>
+        </p:spPr>
+      </p:sp>
+      <p:sp>
+        <p:nvSpPr>
+          <p:cNvPr id="117" name="Text 115"/>
+          <p:cNvSpPr/>
+          <p:nvPr/>
+        </p:nvSpPr>
+        <p:spPr>
+          <a:xfrm>
+            <a:off x="3200400" y="4745736"/>
+            <a:ext cx="932688" cy="182880"/>
+          </a:xfrm>
+          <a:prstGeom prst="rect">
+            <a:avLst/>
+          </a:prstGeom>
+          <a:noFill/>
+          <a:ln/>
+        </p:spPr>
+        <p:txBody>
+          <a:bodyPr wrap="square" lIns="0" tIns="0" rIns="0" bIns="0" rtlCol="0" anchor="ctr"/>
+          <a:lstStyle/>
+          <a:p>
+            <a:pPr algn="ctr" indent="0" marL="0">
+              <a:buNone/>
+            </a:pPr>
+            <a:r>
+              <a:rPr lang="en-US" sz="750" b="1" dirty="0">
+                <a:solidFill>
+                  <a:srgbClr val="1E293B"/>
+                </a:solidFill>
+              </a:rPr>
+              <a:t>Carousels</a:t>
+            </a:r>
+            <a:endParaRPr lang="en-US" sz="750" dirty="0"/>
+          </a:p>
+        </p:txBody>
+      </p:sp>
+      <p:sp>
+        <p:nvSpPr>
+          <p:cNvPr id="118" name="Shape 116"/>
+          <p:cNvSpPr/>
+          <p:nvPr/>
+        </p:nvSpPr>
+        <p:spPr>
+          <a:xfrm>
+            <a:off x="3200400" y="4956048"/>
+            <a:ext cx="932688" cy="155448"/>
+          </a:xfrm>
+          <a:prstGeom prst="roundRect">
+            <a:avLst>
+              <a:gd name="adj" fmla="val 17647"/>
+            </a:avLst>
+          </a:prstGeom>
+          <a:solidFill>
+            <a:srgbClr val="1558A8"/>
+          </a:solidFill>
+          <a:ln w="12700">
+            <a:solidFill>
+              <a:srgbClr val="1558A8"/>
+            </a:solidFill>
+            <a:prstDash val="solid"/>
+          </a:ln>
+        </p:spPr>
+      </p:sp>
+      <p:sp>
+        <p:nvSpPr>
+          <p:cNvPr id="119" name="Text 117"/>
+          <p:cNvSpPr/>
+          <p:nvPr/>
+        </p:nvSpPr>
+        <p:spPr>
+          <a:xfrm>
+            <a:off x="3200400" y="4956048"/>
+            <a:ext cx="932688" cy="155448"/>
+          </a:xfrm>
+          <a:prstGeom prst="rect">
+            <a:avLst/>
+          </a:prstGeom>
+          <a:noFill/>
+          <a:ln/>
+        </p:spPr>
+        <p:txBody>
+          <a:bodyPr wrap="square" lIns="0" tIns="0" rIns="0" bIns="0" rtlCol="0" anchor="ctr"/>
+          <a:lstStyle/>
+          <a:p>
+            <a:pPr algn="ctr" indent="0" marL="0">
+              <a:buNone/>
+            </a:pPr>
+            <a:r>
+              <a:rPr lang="en-US" sz="700" dirty="0">
+                <a:solidFill>
+                  <a:srgbClr val="FFFFFF"/>
+                </a:solidFill>
+              </a:rPr>
+              <a:t>In Progress</a:t>
+            </a:r>
+            <a:endParaRPr lang="en-US" sz="700" dirty="0"/>
+          </a:p>
+        </p:txBody>
+      </p:sp>
+      <p:sp>
+        <p:nvSpPr>
+          <p:cNvPr id="120" name="Shape 118"/>
+          <p:cNvSpPr/>
+          <p:nvPr/>
+        </p:nvSpPr>
+        <p:spPr>
+          <a:xfrm>
+            <a:off x="4215384" y="4745736"/>
+            <a:ext cx="932688" cy="182880"/>
+          </a:xfrm>
+          <a:prstGeom prst="roundRect">
+            <a:avLst>
+              <a:gd name="adj" fmla="val 15000"/>
+            </a:avLst>
+          </a:prstGeom>
+          <a:solidFill>
+            <a:srgbClr val="FFFFFF"/>
+          </a:solidFill>
+          <a:ln w="9525">
+            <a:solidFill>
+              <a:srgbClr val="CBD5E1"/>
+            </a:solidFill>
+            <a:prstDash val="solid"/>
+          </a:ln>
+        </p:spPr>
+      </p:sp>
+      <p:sp>
+        <p:nvSpPr>
+          <p:cNvPr id="121" name="Text 119"/>
+          <p:cNvSpPr/>
+          <p:nvPr/>
+        </p:nvSpPr>
+        <p:spPr>
+          <a:xfrm>
+            <a:off x="4215384" y="4745736"/>
+            <a:ext cx="932688" cy="182880"/>
+          </a:xfrm>
+          <a:prstGeom prst="rect">
+            <a:avLst/>
+          </a:prstGeom>
+          <a:noFill/>
+          <a:ln/>
+        </p:spPr>
+        <p:txBody>
+          <a:bodyPr wrap="square" lIns="0" tIns="0" rIns="0" bIns="0" rtlCol="0" anchor="ctr"/>
+          <a:lstStyle/>
+          <a:p>
+            <a:pPr algn="ctr" indent="0" marL="0">
+              <a:buNone/>
+            </a:pPr>
+            <a:r>
+              <a:rPr lang="en-US" sz="750" b="1" dirty="0">
+                <a:solidFill>
+                  <a:srgbClr val="1E293B"/>
+                </a:solidFill>
+              </a:rPr>
+              <a:t>Live Events</a:t>
+            </a:r>
+            <a:endParaRPr lang="en-US" sz="750" dirty="0"/>
+          </a:p>
+        </p:txBody>
+      </p:sp>
+      <p:sp>
+        <p:nvSpPr>
+          <p:cNvPr id="122" name="Shape 120"/>
+          <p:cNvSpPr/>
+          <p:nvPr/>
+        </p:nvSpPr>
+        <p:spPr>
+          <a:xfrm>
+            <a:off x="4215384" y="4956048"/>
+            <a:ext cx="932688" cy="155448"/>
+          </a:xfrm>
+          <a:prstGeom prst="roundRect">
+            <a:avLst>
+              <a:gd name="adj" fmla="val 17647"/>
+            </a:avLst>
+          </a:prstGeom>
+          <a:solidFill>
+            <a:srgbClr val="1558A8"/>
+          </a:solidFill>
+          <a:ln w="12700">
+            <a:solidFill>
+              <a:srgbClr val="1558A8"/>
+            </a:solidFill>
+            <a:prstDash val="solid"/>
+          </a:ln>
+        </p:spPr>
+      </p:sp>
+      <p:sp>
+        <p:nvSpPr>
+          <p:cNvPr id="123" name="Text 121"/>
+          <p:cNvSpPr/>
+          <p:nvPr/>
+        </p:nvSpPr>
+        <p:spPr>
+          <a:xfrm>
+            <a:off x="4215384" y="4956048"/>
+            <a:ext cx="932688" cy="155448"/>
+          </a:xfrm>
+          <a:prstGeom prst="rect">
+            <a:avLst/>
+          </a:prstGeom>
+          <a:noFill/>
+          <a:ln/>
+        </p:spPr>
+        <p:txBody>
+          <a:bodyPr wrap="square" lIns="0" tIns="0" rIns="0" bIns="0" rtlCol="0" anchor="ctr"/>
+          <a:lstStyle/>
+          <a:p>
+            <a:pPr algn="ctr" indent="0" marL="0">
+              <a:buNone/>
+            </a:pPr>
+            <a:r>
+              <a:rPr lang="en-US" sz="700" dirty="0">
+                <a:solidFill>
+                  <a:srgbClr val="FFFFFF"/>
+                </a:solidFill>
+              </a:rPr>
+              <a:t>In Progress</a:t>
+            </a:r>
+            <a:endParaRPr lang="en-US" sz="700" dirty="0"/>
+          </a:p>
+        </p:txBody>
+      </p:sp>
+      <p:sp>
+        <p:nvSpPr>
+          <p:cNvPr id="124" name="Shape 122"/>
+          <p:cNvSpPr/>
+          <p:nvPr/>
+        </p:nvSpPr>
+        <p:spPr>
+          <a:xfrm>
+            <a:off x="5230368" y="4745736"/>
+            <a:ext cx="932688" cy="182880"/>
+          </a:xfrm>
+          <a:prstGeom prst="roundRect">
+            <a:avLst>
+              <a:gd name="adj" fmla="val 15000"/>
+            </a:avLst>
+          </a:prstGeom>
+          <a:solidFill>
+            <a:srgbClr val="FFFFFF"/>
+          </a:solidFill>
+          <a:ln w="9525">
+            <a:solidFill>
+              <a:srgbClr val="CBD5E1"/>
+            </a:solidFill>
+            <a:prstDash val="solid"/>
+          </a:ln>
+        </p:spPr>
+      </p:sp>
+      <p:sp>
+        <p:nvSpPr>
+          <p:cNvPr id="125" name="Text 123"/>
+          <p:cNvSpPr/>
+          <p:nvPr/>
+        </p:nvSpPr>
+        <p:spPr>
+          <a:xfrm>
+            <a:off x="5230368" y="4745736"/>
+            <a:ext cx="932688" cy="182880"/>
+          </a:xfrm>
+          <a:prstGeom prst="rect">
+            <a:avLst/>
+          </a:prstGeom>
+          <a:noFill/>
+          <a:ln/>
+        </p:spPr>
+        <p:txBody>
+          <a:bodyPr wrap="square" lIns="0" tIns="0" rIns="0" bIns="0" rtlCol="0" anchor="ctr"/>
+          <a:lstStyle/>
+          <a:p>
+            <a:pPr algn="ctr" indent="0" marL="0">
+              <a:buNone/>
+            </a:pPr>
+            <a:r>
+              <a:rPr lang="en-US" sz="750" b="1" dirty="0">
+                <a:solidFill>
+                  <a:srgbClr val="1E293B"/>
+                </a:solidFill>
+              </a:rPr>
+              <a:t>Back Catalog</a:t>
+            </a:r>
+            <a:endParaRPr lang="en-US" sz="750" dirty="0"/>
+          </a:p>
+        </p:txBody>
+      </p:sp>
+      <p:sp>
+        <p:nvSpPr>
+          <p:cNvPr id="126" name="Shape 124"/>
+          <p:cNvSpPr/>
+          <p:nvPr/>
+        </p:nvSpPr>
+        <p:spPr>
+          <a:xfrm>
+            <a:off x="5230368" y="4956048"/>
+            <a:ext cx="932688" cy="155448"/>
+          </a:xfrm>
+          <a:prstGeom prst="roundRect">
+            <a:avLst>
+              <a:gd name="adj" fmla="val 17647"/>
+            </a:avLst>
+          </a:prstGeom>
+          <a:solidFill>
+            <a:srgbClr val="F3F4F6"/>
+          </a:solidFill>
+          <a:ln w="9525">
+            <a:solidFill>
+              <a:srgbClr val="D1D5DB"/>
+            </a:solidFill>
+            <a:prstDash val="solid"/>
+          </a:ln>
+        </p:spPr>
+      </p:sp>
+      <p:sp>
+        <p:nvSpPr>
+          <p:cNvPr id="127" name="Text 125"/>
+          <p:cNvSpPr/>
+          <p:nvPr/>
+        </p:nvSpPr>
+        <p:spPr>
+          <a:xfrm>
+            <a:off x="5230368" y="4956048"/>
+            <a:ext cx="932688" cy="155448"/>
+          </a:xfrm>
+          <a:prstGeom prst="rect">
+            <a:avLst/>
+          </a:prstGeom>
+          <a:noFill/>
+          <a:ln/>
+        </p:spPr>
+        <p:txBody>
+          <a:bodyPr wrap="square" lIns="0" tIns="0" rIns="0" bIns="0" rtlCol="0" anchor="ctr"/>
+          <a:lstStyle/>
+          <a:p>
+            <a:pPr algn="ctr" indent="0" marL="0">
+              <a:buNone/>
+            </a:pPr>
+            <a:r>
+              <a:rPr lang="en-US" sz="700" dirty="0">
+                <a:solidFill>
+                  <a:srgbClr val="374151"/>
+                </a:solidFill>
+              </a:rPr>
+              <a:t>Not Started</a:t>
+            </a:r>
+            <a:endParaRPr lang="en-US" sz="700" dirty="0"/>
+          </a:p>
+        </p:txBody>
+      </p:sp>
+      <p:sp>
+        <p:nvSpPr>
+          <p:cNvPr id="128" name="Shape 126"/>
+          <p:cNvSpPr/>
+          <p:nvPr/>
+        </p:nvSpPr>
+        <p:spPr>
+          <a:xfrm>
+            <a:off x="6245352" y="4745736"/>
+            <a:ext cx="932688" cy="182880"/>
+          </a:xfrm>
+          <a:prstGeom prst="roundRect">
+            <a:avLst>
+              <a:gd name="adj" fmla="val 15000"/>
+            </a:avLst>
+          </a:prstGeom>
+          <a:solidFill>
+            <a:srgbClr val="FFFFFF"/>
+          </a:solidFill>
+          <a:ln w="9525">
+            <a:solidFill>
+              <a:srgbClr val="CBD5E1"/>
+            </a:solidFill>
+            <a:prstDash val="solid"/>
+          </a:ln>
+        </p:spPr>
+      </p:sp>
+      <p:sp>
+        <p:nvSpPr>
+          <p:cNvPr id="129" name="Text 127"/>
+          <p:cNvSpPr/>
+          <p:nvPr/>
+        </p:nvSpPr>
+        <p:spPr>
+          <a:xfrm>
+            <a:off x="6245352" y="4745736"/>
+            <a:ext cx="932688" cy="182880"/>
+          </a:xfrm>
+          <a:prstGeom prst="rect">
+            <a:avLst/>
+          </a:prstGeom>
+          <a:noFill/>
+          <a:ln/>
+        </p:spPr>
+        <p:txBody>
+          <a:bodyPr wrap="square" lIns="0" tIns="0" rIns="0" bIns="0" rtlCol="0" anchor="ctr"/>
+          <a:lstStyle/>
+          <a:p>
+            <a:pPr algn="ctr" indent="0" marL="0">
+              <a:buNone/>
+            </a:pPr>
+            <a:r>
+              <a:rPr lang="en-US" sz="750" b="1" dirty="0">
+                <a:solidFill>
+                  <a:srgbClr val="1E293B"/>
+                </a:solidFill>
+              </a:rPr>
+              <a:t>Full Replays</a:t>
+            </a:r>
+            <a:endParaRPr lang="en-US" sz="750" dirty="0"/>
+          </a:p>
+        </p:txBody>
+      </p:sp>
+      <p:sp>
+        <p:nvSpPr>
+          <p:cNvPr id="130" name="Shape 128"/>
+          <p:cNvSpPr/>
+          <p:nvPr/>
+        </p:nvSpPr>
+        <p:spPr>
+          <a:xfrm>
+            <a:off x="6245352" y="4956048"/>
+            <a:ext cx="932688" cy="155448"/>
+          </a:xfrm>
+          <a:prstGeom prst="roundRect">
+            <a:avLst>
+              <a:gd name="adj" fmla="val 17647"/>
+            </a:avLst>
+          </a:prstGeom>
+          <a:solidFill>
+            <a:srgbClr val="F3F4F6"/>
+          </a:solidFill>
+          <a:ln w="9525">
+            <a:solidFill>
+              <a:srgbClr val="D1D5DB"/>
+            </a:solidFill>
+            <a:prstDash val="solid"/>
+          </a:ln>
+        </p:spPr>
+      </p:sp>
+      <p:sp>
+        <p:nvSpPr>
+          <p:cNvPr id="131" name="Text 129"/>
+          <p:cNvSpPr/>
+          <p:nvPr/>
+        </p:nvSpPr>
+        <p:spPr>
+          <a:xfrm>
+            <a:off x="6245352" y="4956048"/>
+            <a:ext cx="932688" cy="155448"/>
+          </a:xfrm>
+          <a:prstGeom prst="rect">
+            <a:avLst/>
+          </a:prstGeom>
+          <a:noFill/>
+          <a:ln/>
+        </p:spPr>
+        <p:txBody>
+          <a:bodyPr wrap="square" lIns="0" tIns="0" rIns="0" bIns="0" rtlCol="0" anchor="ctr"/>
+          <a:lstStyle/>
+          <a:p>
+            <a:pPr algn="ctr" indent="0" marL="0">
+              <a:buNone/>
+            </a:pPr>
+            <a:r>
+              <a:rPr lang="en-US" sz="700" dirty="0">
+                <a:solidFill>
+                  <a:srgbClr val="374151"/>
+                </a:solidFill>
+              </a:rPr>
+              <a:t>Not Started</a:t>
+            </a:r>
+            <a:endParaRPr lang="en-US" sz="700" dirty="0"/>
+          </a:p>
+        </p:txBody>
+      </p:sp>
+      <p:sp>
+        <p:nvSpPr>
+          <p:cNvPr id="132" name="Shape 130"/>
+          <p:cNvSpPr/>
+          <p:nvPr/>
+        </p:nvSpPr>
+        <p:spPr>
+          <a:xfrm>
+            <a:off x="7260336" y="4745736"/>
+            <a:ext cx="932688" cy="182880"/>
+          </a:xfrm>
+          <a:prstGeom prst="roundRect">
+            <a:avLst>
+              <a:gd name="adj" fmla="val 15000"/>
+            </a:avLst>
+          </a:prstGeom>
+          <a:solidFill>
+            <a:srgbClr val="FFFFFF"/>
+          </a:solidFill>
+          <a:ln w="9525">
+            <a:solidFill>
+              <a:srgbClr val="CBD5E1"/>
+            </a:solidFill>
+            <a:prstDash val="solid"/>
+          </a:ln>
+        </p:spPr>
+      </p:sp>
+      <p:sp>
+        <p:nvSpPr>
+          <p:cNvPr id="133" name="Text 131"/>
+          <p:cNvSpPr/>
+          <p:nvPr/>
+        </p:nvSpPr>
+        <p:spPr>
+          <a:xfrm>
+            <a:off x="7260336" y="4745736"/>
+            <a:ext cx="932688" cy="182880"/>
+          </a:xfrm>
+          <a:prstGeom prst="rect">
+            <a:avLst/>
+          </a:prstGeom>
+          <a:noFill/>
+          <a:ln/>
+        </p:spPr>
+        <p:txBody>
+          <a:bodyPr wrap="square" lIns="0" tIns="0" rIns="0" bIns="0" rtlCol="0" anchor="ctr"/>
+          <a:lstStyle/>
+          <a:p>
+            <a:pPr algn="ctr" indent="0" marL="0">
+              <a:buNone/>
+            </a:pPr>
+            <a:r>
+              <a:rPr lang="en-US" sz="750" b="1" dirty="0">
+                <a:solidFill>
+                  <a:srgbClr val="1E293B"/>
+                </a:solidFill>
+              </a:rPr>
+              <a:t>M15</a:t>
+            </a:r>
+            <a:endParaRPr lang="en-US" sz="750" dirty="0"/>
+          </a:p>
+        </p:txBody>
+      </p:sp>
+      <p:sp>
+        <p:nvSpPr>
+          <p:cNvPr id="134" name="Shape 132"/>
+          <p:cNvSpPr/>
+          <p:nvPr/>
+        </p:nvSpPr>
+        <p:spPr>
+          <a:xfrm>
+            <a:off x="7260336" y="4956048"/>
+            <a:ext cx="932688" cy="155448"/>
+          </a:xfrm>
+          <a:prstGeom prst="roundRect">
+            <a:avLst>
+              <a:gd name="adj" fmla="val 17647"/>
+            </a:avLst>
+          </a:prstGeom>
+          <a:solidFill>
+            <a:srgbClr val="F3F4F6"/>
+          </a:solidFill>
+          <a:ln w="9525">
+            <a:solidFill>
+              <a:srgbClr val="D1D5DB"/>
+            </a:solidFill>
+            <a:prstDash val="solid"/>
+          </a:ln>
+        </p:spPr>
+      </p:sp>
+      <p:sp>
+        <p:nvSpPr>
+          <p:cNvPr id="135" name="Text 133"/>
+          <p:cNvSpPr/>
+          <p:nvPr/>
+        </p:nvSpPr>
+        <p:spPr>
+          <a:xfrm>
+            <a:off x="7260336" y="4956048"/>
+            <a:ext cx="932688" cy="155448"/>
+          </a:xfrm>
+          <a:prstGeom prst="rect">
+            <a:avLst/>
+          </a:prstGeom>
+          <a:noFill/>
+          <a:ln/>
+        </p:spPr>
+        <p:txBody>
+          <a:bodyPr wrap="square" lIns="0" tIns="0" rIns="0" bIns="0" rtlCol="0" anchor="ctr"/>
+          <a:lstStyle/>
+          <a:p>
+            <a:pPr algn="ctr" indent="0" marL="0">
+              <a:buNone/>
+            </a:pPr>
+            <a:r>
+              <a:rPr lang="en-US" sz="700" dirty="0">
+                <a:solidFill>
+                  <a:srgbClr val="374151"/>
+                </a:solidFill>
+              </a:rPr>
+              <a:t>Not Started</a:t>
+            </a:r>
+            <a:endParaRPr lang="en-US" sz="700" dirty="0"/>
+          </a:p>
+        </p:txBody>
+      </p:sp>
+      <p:sp>
+        <p:nvSpPr>
+          <p:cNvPr id="136" name="Shape 134"/>
+          <p:cNvSpPr/>
+          <p:nvPr/>
+        </p:nvSpPr>
+        <p:spPr>
+          <a:xfrm>
+            <a:off x="8275320" y="4745736"/>
+            <a:ext cx="932688" cy="182880"/>
+          </a:xfrm>
+          <a:prstGeom prst="roundRect">
+            <a:avLst>
+              <a:gd name="adj" fmla="val 15000"/>
+            </a:avLst>
+          </a:prstGeom>
+          <a:solidFill>
+            <a:srgbClr val="FFFFFF"/>
+          </a:solidFill>
+          <a:ln w="9525">
+            <a:solidFill>
+              <a:srgbClr val="CBD5E1"/>
+            </a:solidFill>
+            <a:prstDash val="solid"/>
+          </a:ln>
+        </p:spPr>
+      </p:sp>
+      <p:sp>
+        <p:nvSpPr>
+          <p:cNvPr id="137" name="Text 135"/>
+          <p:cNvSpPr/>
+          <p:nvPr/>
+        </p:nvSpPr>
+        <p:spPr>
+          <a:xfrm>
+            <a:off x="8275320" y="4745736"/>
+            <a:ext cx="932688" cy="182880"/>
+          </a:xfrm>
+          <a:prstGeom prst="rect">
+            <a:avLst/>
+          </a:prstGeom>
+          <a:noFill/>
+          <a:ln/>
+        </p:spPr>
+        <p:txBody>
+          <a:bodyPr wrap="square" lIns="0" tIns="0" rIns="0" bIns="0" rtlCol="0" anchor="ctr"/>
+          <a:lstStyle/>
+          <a:p>
+            <a:pPr algn="ctr" indent="0" marL="0">
+              <a:buNone/>
+            </a:pPr>
+            <a:r>
+              <a:rPr lang="en-US" sz="750" b="1" dirty="0">
+                <a:solidFill>
+                  <a:srgbClr val="1E293B"/>
+                </a:solidFill>
+              </a:rPr>
+              <a:t>Highlights</a:t>
+            </a:r>
+            <a:endParaRPr lang="en-US" sz="750" dirty="0"/>
+          </a:p>
+        </p:txBody>
+      </p:sp>
+      <p:sp>
+        <p:nvSpPr>
+          <p:cNvPr id="138" name="Shape 136"/>
+          <p:cNvSpPr/>
+          <p:nvPr/>
+        </p:nvSpPr>
+        <p:spPr>
+          <a:xfrm>
+            <a:off x="8275320" y="4956048"/>
+            <a:ext cx="932688" cy="155448"/>
+          </a:xfrm>
+          <a:prstGeom prst="roundRect">
+            <a:avLst>
+              <a:gd name="adj" fmla="val 17647"/>
+            </a:avLst>
+          </a:prstGeom>
+          <a:solidFill>
+            <a:srgbClr val="F3F4F6"/>
+          </a:solidFill>
+          <a:ln w="9525">
+            <a:solidFill>
+              <a:srgbClr val="D1D5DB"/>
+            </a:solidFill>
+            <a:prstDash val="solid"/>
+          </a:ln>
+        </p:spPr>
+      </p:sp>
+      <p:sp>
+        <p:nvSpPr>
+          <p:cNvPr id="139" name="Text 137"/>
+          <p:cNvSpPr/>
+          <p:nvPr/>
+        </p:nvSpPr>
+        <p:spPr>
+          <a:xfrm>
+            <a:off x="8275320" y="4956048"/>
+            <a:ext cx="932688" cy="155448"/>
+          </a:xfrm>
+          <a:prstGeom prst="rect">
+            <a:avLst/>
+          </a:prstGeom>
+          <a:noFill/>
+          <a:ln/>
+        </p:spPr>
+        <p:txBody>
+          <a:bodyPr wrap="square" lIns="0" tIns="0" rIns="0" bIns="0" rtlCol="0" anchor="ctr"/>
+          <a:lstStyle/>
+          <a:p>
+            <a:pPr algn="ctr" indent="0" marL="0">
+              <a:buNone/>
+            </a:pPr>
+            <a:r>
+              <a:rPr lang="en-US" sz="700" dirty="0">
+                <a:solidFill>
+                  <a:srgbClr val="374151"/>
+                </a:solidFill>
+              </a:rPr>
+              <a:t>Not Started</a:t>
+            </a:r>
+            <a:endParaRPr lang="en-US" sz="700" dirty="0"/>
+          </a:p>
+        </p:txBody>
+      </p:sp>
+      <p:sp>
+        <p:nvSpPr>
+          <p:cNvPr id="140" name="Shape 138"/>
+          <p:cNvSpPr/>
+          <p:nvPr/>
+        </p:nvSpPr>
+        <p:spPr>
+          <a:xfrm>
+            <a:off x="1170432" y="5202936"/>
+            <a:ext cx="932688" cy="182880"/>
+          </a:xfrm>
+          <a:prstGeom prst="roundRect">
+            <a:avLst>
+              <a:gd name="adj" fmla="val 15000"/>
+            </a:avLst>
+          </a:prstGeom>
+          <a:solidFill>
+            <a:srgbClr val="FFFFFF"/>
+          </a:solidFill>
+          <a:ln w="9525">
+            <a:solidFill>
+              <a:srgbClr val="CBD5E1"/>
+            </a:solidFill>
+            <a:prstDash val="solid"/>
+          </a:ln>
+        </p:spPr>
+      </p:sp>
+      <p:sp>
+        <p:nvSpPr>
+          <p:cNvPr id="141" name="Text 139"/>
+          <p:cNvSpPr/>
+          <p:nvPr/>
+        </p:nvSpPr>
+        <p:spPr>
+          <a:xfrm>
+            <a:off x="1170432" y="5202936"/>
+            <a:ext cx="932688" cy="182880"/>
+          </a:xfrm>
+          <a:prstGeom prst="rect">
+            <a:avLst/>
+          </a:prstGeom>
+          <a:noFill/>
+          <a:ln/>
+        </p:spPr>
+        <p:txBody>
+          <a:bodyPr wrap="square" lIns="0" tIns="0" rIns="0" bIns="0" rtlCol="0" anchor="ctr"/>
+          <a:lstStyle/>
+          <a:p>
+            <a:pPr algn="ctr" indent="0" marL="0">
+              <a:buNone/>
+            </a:pPr>
+            <a:r>
+              <a:rPr lang="en-US" sz="750" b="1" dirty="0">
+                <a:solidFill>
+                  <a:srgbClr val="1E293B"/>
+                </a:solidFill>
+              </a:rPr>
+              <a:t>Linear</a:t>
+            </a:r>
+            <a:endParaRPr lang="en-US" sz="750" dirty="0"/>
+          </a:p>
+        </p:txBody>
+      </p:sp>
+      <p:sp>
+        <p:nvSpPr>
+          <p:cNvPr id="142" name="Shape 140"/>
+          <p:cNvSpPr/>
+          <p:nvPr/>
+        </p:nvSpPr>
+        <p:spPr>
+          <a:xfrm>
+            <a:off x="1170432" y="5413248"/>
+            <a:ext cx="932688" cy="155448"/>
+          </a:xfrm>
+          <a:prstGeom prst="roundRect">
+            <a:avLst>
+              <a:gd name="adj" fmla="val 17647"/>
+            </a:avLst>
+          </a:prstGeom>
+          <a:solidFill>
+            <a:srgbClr val="1558A8"/>
+          </a:solidFill>
+          <a:ln w="12700">
+            <a:solidFill>
+              <a:srgbClr val="1558A8"/>
+            </a:solidFill>
+            <a:prstDash val="solid"/>
+          </a:ln>
+        </p:spPr>
+      </p:sp>
+      <p:sp>
+        <p:nvSpPr>
+          <p:cNvPr id="143" name="Text 141"/>
+          <p:cNvSpPr/>
+          <p:nvPr/>
+        </p:nvSpPr>
+        <p:spPr>
+          <a:xfrm>
+            <a:off x="1170432" y="5413248"/>
+            <a:ext cx="932688" cy="155448"/>
+          </a:xfrm>
+          <a:prstGeom prst="rect">
+            <a:avLst/>
+          </a:prstGeom>
+          <a:noFill/>
+          <a:ln/>
+        </p:spPr>
+        <p:txBody>
+          <a:bodyPr wrap="square" lIns="0" tIns="0" rIns="0" bIns="0" rtlCol="0" anchor="ctr"/>
+          <a:lstStyle/>
+          <a:p>
+            <a:pPr algn="ctr" indent="0" marL="0">
+              <a:buNone/>
+            </a:pPr>
+            <a:r>
+              <a:rPr lang="en-US" sz="700" dirty="0">
+                <a:solidFill>
+                  <a:srgbClr val="FFFFFF"/>
+                </a:solidFill>
+              </a:rPr>
+              <a:t>In Progress</a:t>
+            </a:r>
+            <a:endParaRPr lang="en-US" sz="700" dirty="0"/>
+          </a:p>
+        </p:txBody>
+      </p:sp>
+      <p:sp>
+        <p:nvSpPr>
+          <p:cNvPr id="144" name="Shape 142"/>
+          <p:cNvSpPr/>
+          <p:nvPr/>
+        </p:nvSpPr>
+        <p:spPr>
+          <a:xfrm>
+            <a:off x="164592" y="5705856"/>
             <a:ext cx="9116568" cy="1170432"/>
           </a:xfrm>
           <a:prstGeom prst="rect">
@@ -11404,13 +13290,13 @@
       </p:sp>
       <p:sp>
         <p:nvSpPr>
-          <p:cNvPr id="85" name="Shape 83"/>
-          <p:cNvSpPr/>
-          <p:nvPr/>
-        </p:nvSpPr>
-        <p:spPr>
-          <a:xfrm>
-            <a:off x="182880" y="3328416"/>
+          <p:cNvPr id="145" name="Shape 143"/>
+          <p:cNvSpPr/>
+          <p:nvPr/>
+        </p:nvSpPr>
+        <p:spPr>
+          <a:xfrm>
+            <a:off x="182880" y="5779008"/>
             <a:ext cx="859536" cy="1024128"/>
           </a:xfrm>
           <a:prstGeom prst="roundRect">
@@ -11431,13 +13317,13 @@
       </p:sp>
       <p:sp>
         <p:nvSpPr>
-          <p:cNvPr id="86" name="Text 84"/>
-          <p:cNvSpPr/>
-          <p:nvPr/>
-        </p:nvSpPr>
-        <p:spPr>
-          <a:xfrm>
-            <a:off x="182880" y="3328416"/>
+          <p:cNvPr id="146" name="Text 144"/>
+          <p:cNvSpPr/>
+          <p:nvPr/>
+        </p:nvSpPr>
+        <p:spPr>
+          <a:xfrm>
+            <a:off x="182880" y="5779008"/>
             <a:ext cx="859536" cy="1024128"/>
           </a:xfrm>
           <a:prstGeom prst="rect">
@@ -11459,7 +13345,7 @@
                   <a:srgbClr val="FFFFFF"/>
                 </a:solidFill>
               </a:rPr>
-              <a:t>Player</a:t>
+              <a:t>Onboarding</a:t>
             </a:r>
             <a:endParaRPr lang="en-US" sz="950" dirty="0"/>
           </a:p>
@@ -11467,13 +13353,13 @@
       </p:sp>
       <p:sp>
         <p:nvSpPr>
-          <p:cNvPr id="87" name="Text 85"/>
-          <p:cNvSpPr/>
-          <p:nvPr/>
-        </p:nvSpPr>
-        <p:spPr>
-          <a:xfrm>
-            <a:off x="1170432" y="3300984"/>
+          <p:cNvPr id="147" name="Text 145"/>
+          <p:cNvSpPr/>
+          <p:nvPr/>
+        </p:nvSpPr>
+        <p:spPr>
+          <a:xfrm>
+            <a:off x="1170432" y="5751576"/>
             <a:ext cx="8110728" cy="182880"/>
           </a:xfrm>
           <a:prstGeom prst="rect">
@@ -11495,7 +13381,7 @@
                   <a:srgbClr val="9CA3AF"/>
                 </a:solidFill>
               </a:rPr>
-              <a:t>3 / 5 In Progress</a:t>
+              <a:t>1 / 5 In Progress</a:t>
             </a:r>
             <a:endParaRPr lang="en-US" sz="750" dirty="0"/>
           </a:p>
@@ -11503,13 +13389,13 @@
       </p:sp>
       <p:sp>
         <p:nvSpPr>
-          <p:cNvPr id="88" name="Shape 86"/>
-          <p:cNvSpPr/>
-          <p:nvPr/>
-        </p:nvSpPr>
-        <p:spPr>
-          <a:xfrm>
-            <a:off x="1170432" y="3520440"/>
+          <p:cNvPr id="148" name="Shape 146"/>
+          <p:cNvSpPr/>
+          <p:nvPr/>
+        </p:nvSpPr>
+        <p:spPr>
+          <a:xfrm>
+            <a:off x="1170432" y="5971032"/>
             <a:ext cx="932688" cy="182880"/>
           </a:xfrm>
           <a:prstGeom prst="roundRect">
@@ -11530,13 +13416,13 @@
       </p:sp>
       <p:sp>
         <p:nvSpPr>
-          <p:cNvPr id="89" name="Text 87"/>
-          <p:cNvSpPr/>
-          <p:nvPr/>
-        </p:nvSpPr>
-        <p:spPr>
-          <a:xfrm>
-            <a:off x="1170432" y="3520440"/>
+          <p:cNvPr id="149" name="Text 147"/>
+          <p:cNvSpPr/>
+          <p:nvPr/>
+        </p:nvSpPr>
+        <p:spPr>
+          <a:xfrm>
+            <a:off x="1170432" y="5971032"/>
             <a:ext cx="932688" cy="182880"/>
           </a:xfrm>
           <a:prstGeom prst="rect">
@@ -11558,7 +13444,7 @@
                   <a:srgbClr val="1E293B"/>
                 </a:solidFill>
               </a:rPr>
-              <a:t>Web Player</a:t>
+              <a:t>Unentitled</a:t>
             </a:r>
             <a:endParaRPr lang="en-US" sz="750" dirty="0"/>
           </a:p>
@@ -11566,13 +13452,391 @@
       </p:sp>
       <p:sp>
         <p:nvSpPr>
-          <p:cNvPr id="90" name="Shape 88"/>
-          <p:cNvSpPr/>
-          <p:nvPr/>
-        </p:nvSpPr>
-        <p:spPr>
-          <a:xfrm>
-            <a:off x="1170432" y="3730752"/>
+          <p:cNvPr id="150" name="Shape 148"/>
+          <p:cNvSpPr/>
+          <p:nvPr/>
+        </p:nvSpPr>
+        <p:spPr>
+          <a:xfrm>
+            <a:off x="1170432" y="6181344"/>
+            <a:ext cx="932688" cy="155448"/>
+          </a:xfrm>
+          <a:prstGeom prst="roundRect">
+            <a:avLst>
+              <a:gd name="adj" fmla="val 17647"/>
+            </a:avLst>
+          </a:prstGeom>
+          <a:solidFill>
+            <a:srgbClr val="F3F4F6"/>
+          </a:solidFill>
+          <a:ln w="9525">
+            <a:solidFill>
+              <a:srgbClr val="D1D5DB"/>
+            </a:solidFill>
+            <a:prstDash val="solid"/>
+          </a:ln>
+        </p:spPr>
+      </p:sp>
+      <p:sp>
+        <p:nvSpPr>
+          <p:cNvPr id="151" name="Text 149"/>
+          <p:cNvSpPr/>
+          <p:nvPr/>
+        </p:nvSpPr>
+        <p:spPr>
+          <a:xfrm>
+            <a:off x="1170432" y="6181344"/>
+            <a:ext cx="932688" cy="155448"/>
+          </a:xfrm>
+          <a:prstGeom prst="rect">
+            <a:avLst/>
+          </a:prstGeom>
+          <a:noFill/>
+          <a:ln/>
+        </p:spPr>
+        <p:txBody>
+          <a:bodyPr wrap="square" lIns="0" tIns="0" rIns="0" bIns="0" rtlCol="0" anchor="ctr"/>
+          <a:lstStyle/>
+          <a:p>
+            <a:pPr algn="ctr" indent="0" marL="0">
+              <a:buNone/>
+            </a:pPr>
+            <a:r>
+              <a:rPr lang="en-US" sz="700" dirty="0">
+                <a:solidFill>
+                  <a:srgbClr val="374151"/>
+                </a:solidFill>
+              </a:rPr>
+              <a:t>Not Started</a:t>
+            </a:r>
+            <a:endParaRPr lang="en-US" sz="700" dirty="0"/>
+          </a:p>
+        </p:txBody>
+      </p:sp>
+      <p:sp>
+        <p:nvSpPr>
+          <p:cNvPr id="152" name="Shape 150"/>
+          <p:cNvSpPr/>
+          <p:nvPr/>
+        </p:nvSpPr>
+        <p:spPr>
+          <a:xfrm>
+            <a:off x="2185416" y="5971032"/>
+            <a:ext cx="932688" cy="182880"/>
+          </a:xfrm>
+          <a:prstGeom prst="roundRect">
+            <a:avLst>
+              <a:gd name="adj" fmla="val 15000"/>
+            </a:avLst>
+          </a:prstGeom>
+          <a:solidFill>
+            <a:srgbClr val="FFFFFF"/>
+          </a:solidFill>
+          <a:ln w="9525">
+            <a:solidFill>
+              <a:srgbClr val="CBD5E1"/>
+            </a:solidFill>
+            <a:prstDash val="solid"/>
+          </a:ln>
+        </p:spPr>
+      </p:sp>
+      <p:sp>
+        <p:nvSpPr>
+          <p:cNvPr id="153" name="Text 151"/>
+          <p:cNvSpPr/>
+          <p:nvPr/>
+        </p:nvSpPr>
+        <p:spPr>
+          <a:xfrm>
+            <a:off x="2185416" y="5971032"/>
+            <a:ext cx="932688" cy="182880"/>
+          </a:xfrm>
+          <a:prstGeom prst="rect">
+            <a:avLst/>
+          </a:prstGeom>
+          <a:noFill/>
+          <a:ln/>
+        </p:spPr>
+        <p:txBody>
+          <a:bodyPr wrap="square" lIns="0" tIns="0" rIns="0" bIns="0" rtlCol="0" anchor="ctr"/>
+          <a:lstStyle/>
+          <a:p>
+            <a:pPr algn="ctr" indent="0" marL="0">
+              <a:buNone/>
+            </a:pPr>
+            <a:r>
+              <a:rPr lang="en-US" sz="750" b="1" dirty="0">
+                <a:solidFill>
+                  <a:srgbClr val="1E293B"/>
+                </a:solidFill>
+              </a:rPr>
+              <a:t>Sign-in</a:t>
+            </a:r>
+            <a:endParaRPr lang="en-US" sz="750" dirty="0"/>
+          </a:p>
+        </p:txBody>
+      </p:sp>
+      <p:sp>
+        <p:nvSpPr>
+          <p:cNvPr id="154" name="Shape 152"/>
+          <p:cNvSpPr/>
+          <p:nvPr/>
+        </p:nvSpPr>
+        <p:spPr>
+          <a:xfrm>
+            <a:off x="2185416" y="6181344"/>
+            <a:ext cx="932688" cy="155448"/>
+          </a:xfrm>
+          <a:prstGeom prst="roundRect">
+            <a:avLst>
+              <a:gd name="adj" fmla="val 17647"/>
+            </a:avLst>
+          </a:prstGeom>
+          <a:solidFill>
+            <a:srgbClr val="F3F4F6"/>
+          </a:solidFill>
+          <a:ln w="9525">
+            <a:solidFill>
+              <a:srgbClr val="D1D5DB"/>
+            </a:solidFill>
+            <a:prstDash val="solid"/>
+          </a:ln>
+        </p:spPr>
+      </p:sp>
+      <p:sp>
+        <p:nvSpPr>
+          <p:cNvPr id="155" name="Text 153"/>
+          <p:cNvSpPr/>
+          <p:nvPr/>
+        </p:nvSpPr>
+        <p:spPr>
+          <a:xfrm>
+            <a:off x="2185416" y="6181344"/>
+            <a:ext cx="932688" cy="155448"/>
+          </a:xfrm>
+          <a:prstGeom prst="rect">
+            <a:avLst/>
+          </a:prstGeom>
+          <a:noFill/>
+          <a:ln/>
+        </p:spPr>
+        <p:txBody>
+          <a:bodyPr wrap="square" lIns="0" tIns="0" rIns="0" bIns="0" rtlCol="0" anchor="ctr"/>
+          <a:lstStyle/>
+          <a:p>
+            <a:pPr algn="ctr" indent="0" marL="0">
+              <a:buNone/>
+            </a:pPr>
+            <a:r>
+              <a:rPr lang="en-US" sz="700" dirty="0">
+                <a:solidFill>
+                  <a:srgbClr val="374151"/>
+                </a:solidFill>
+              </a:rPr>
+              <a:t>Not Started</a:t>
+            </a:r>
+            <a:endParaRPr lang="en-US" sz="700" dirty="0"/>
+          </a:p>
+        </p:txBody>
+      </p:sp>
+      <p:sp>
+        <p:nvSpPr>
+          <p:cNvPr id="156" name="Shape 154"/>
+          <p:cNvSpPr/>
+          <p:nvPr/>
+        </p:nvSpPr>
+        <p:spPr>
+          <a:xfrm>
+            <a:off x="3200400" y="5971032"/>
+            <a:ext cx="932688" cy="182880"/>
+          </a:xfrm>
+          <a:prstGeom prst="roundRect">
+            <a:avLst>
+              <a:gd name="adj" fmla="val 15000"/>
+            </a:avLst>
+          </a:prstGeom>
+          <a:solidFill>
+            <a:srgbClr val="FFFFFF"/>
+          </a:solidFill>
+          <a:ln w="9525">
+            <a:solidFill>
+              <a:srgbClr val="CBD5E1"/>
+            </a:solidFill>
+            <a:prstDash val="solid"/>
+          </a:ln>
+        </p:spPr>
+      </p:sp>
+      <p:sp>
+        <p:nvSpPr>
+          <p:cNvPr id="157" name="Text 155"/>
+          <p:cNvSpPr/>
+          <p:nvPr/>
+        </p:nvSpPr>
+        <p:spPr>
+          <a:xfrm>
+            <a:off x="3200400" y="5971032"/>
+            <a:ext cx="932688" cy="182880"/>
+          </a:xfrm>
+          <a:prstGeom prst="rect">
+            <a:avLst/>
+          </a:prstGeom>
+          <a:noFill/>
+          <a:ln/>
+        </p:spPr>
+        <p:txBody>
+          <a:bodyPr wrap="square" lIns="0" tIns="0" rIns="0" bIns="0" rtlCol="0" anchor="ctr"/>
+          <a:lstStyle/>
+          <a:p>
+            <a:pPr algn="ctr" indent="0" marL="0">
+              <a:buNone/>
+            </a:pPr>
+            <a:r>
+              <a:rPr lang="en-US" sz="750" b="1" dirty="0">
+                <a:solidFill>
+                  <a:srgbClr val="1E293B"/>
+                </a:solidFill>
+              </a:rPr>
+              <a:t>Subscription</a:t>
+            </a:r>
+            <a:endParaRPr lang="en-US" sz="750" dirty="0"/>
+          </a:p>
+        </p:txBody>
+      </p:sp>
+      <p:sp>
+        <p:nvSpPr>
+          <p:cNvPr id="158" name="Shape 156"/>
+          <p:cNvSpPr/>
+          <p:nvPr/>
+        </p:nvSpPr>
+        <p:spPr>
+          <a:xfrm>
+            <a:off x="3200400" y="6181344"/>
+            <a:ext cx="932688" cy="155448"/>
+          </a:xfrm>
+          <a:prstGeom prst="roundRect">
+            <a:avLst>
+              <a:gd name="adj" fmla="val 17647"/>
+            </a:avLst>
+          </a:prstGeom>
+          <a:solidFill>
+            <a:srgbClr val="F3F4F6"/>
+          </a:solidFill>
+          <a:ln w="9525">
+            <a:solidFill>
+              <a:srgbClr val="D1D5DB"/>
+            </a:solidFill>
+            <a:prstDash val="solid"/>
+          </a:ln>
+        </p:spPr>
+      </p:sp>
+      <p:sp>
+        <p:nvSpPr>
+          <p:cNvPr id="159" name="Text 157"/>
+          <p:cNvSpPr/>
+          <p:nvPr/>
+        </p:nvSpPr>
+        <p:spPr>
+          <a:xfrm>
+            <a:off x="3200400" y="6181344"/>
+            <a:ext cx="932688" cy="155448"/>
+          </a:xfrm>
+          <a:prstGeom prst="rect">
+            <a:avLst/>
+          </a:prstGeom>
+          <a:noFill/>
+          <a:ln/>
+        </p:spPr>
+        <p:txBody>
+          <a:bodyPr wrap="square" lIns="0" tIns="0" rIns="0" bIns="0" rtlCol="0" anchor="ctr"/>
+          <a:lstStyle/>
+          <a:p>
+            <a:pPr algn="ctr" indent="0" marL="0">
+              <a:buNone/>
+            </a:pPr>
+            <a:r>
+              <a:rPr lang="en-US" sz="700" dirty="0">
+                <a:solidFill>
+                  <a:srgbClr val="374151"/>
+                </a:solidFill>
+              </a:rPr>
+              <a:t>Not Started</a:t>
+            </a:r>
+            <a:endParaRPr lang="en-US" sz="700" dirty="0"/>
+          </a:p>
+        </p:txBody>
+      </p:sp>
+      <p:sp>
+        <p:nvSpPr>
+          <p:cNvPr id="160" name="Shape 158"/>
+          <p:cNvSpPr/>
+          <p:nvPr/>
+        </p:nvSpPr>
+        <p:spPr>
+          <a:xfrm>
+            <a:off x="4215384" y="5971032"/>
+            <a:ext cx="932688" cy="182880"/>
+          </a:xfrm>
+          <a:prstGeom prst="roundRect">
+            <a:avLst>
+              <a:gd name="adj" fmla="val 15000"/>
+            </a:avLst>
+          </a:prstGeom>
+          <a:solidFill>
+            <a:srgbClr val="FFFFFF"/>
+          </a:solidFill>
+          <a:ln w="9525">
+            <a:solidFill>
+              <a:srgbClr val="CBD5E1"/>
+            </a:solidFill>
+            <a:prstDash val="solid"/>
+          </a:ln>
+        </p:spPr>
+      </p:sp>
+      <p:sp>
+        <p:nvSpPr>
+          <p:cNvPr id="161" name="Text 159"/>
+          <p:cNvSpPr/>
+          <p:nvPr/>
+        </p:nvSpPr>
+        <p:spPr>
+          <a:xfrm>
+            <a:off x="4215384" y="5971032"/>
+            <a:ext cx="932688" cy="182880"/>
+          </a:xfrm>
+          <a:prstGeom prst="rect">
+            <a:avLst/>
+          </a:prstGeom>
+          <a:noFill/>
+          <a:ln/>
+        </p:spPr>
+        <p:txBody>
+          <a:bodyPr wrap="square" lIns="0" tIns="0" rIns="0" bIns="0" rtlCol="0" anchor="ctr"/>
+          <a:lstStyle/>
+          <a:p>
+            <a:pPr algn="ctr" indent="0" marL="0">
+              <a:buNone/>
+            </a:pPr>
+            <a:r>
+              <a:rPr lang="en-US" sz="750" b="1" dirty="0">
+                <a:solidFill>
+                  <a:srgbClr val="1E293B"/>
+                </a:solidFill>
+              </a:rPr>
+              <a:t>MVPD</a:t>
+            </a:r>
+            <a:endParaRPr lang="en-US" sz="750" dirty="0"/>
+          </a:p>
+        </p:txBody>
+      </p:sp>
+      <p:sp>
+        <p:nvSpPr>
+          <p:cNvPr id="162" name="Shape 160"/>
+          <p:cNvSpPr/>
+          <p:nvPr/>
+        </p:nvSpPr>
+        <p:spPr>
+          <a:xfrm>
+            <a:off x="4215384" y="6181344"/>
             <a:ext cx="932688" cy="155448"/>
           </a:xfrm>
           <a:prstGeom prst="roundRect">
@@ -11593,13 +13857,13 @@
       </p:sp>
       <p:sp>
         <p:nvSpPr>
-          <p:cNvPr id="91" name="Text 89"/>
-          <p:cNvSpPr/>
-          <p:nvPr/>
-        </p:nvSpPr>
-        <p:spPr>
-          <a:xfrm>
-            <a:off x="1170432" y="3730752"/>
+          <p:cNvPr id="163" name="Text 161"/>
+          <p:cNvSpPr/>
+          <p:nvPr/>
+        </p:nvSpPr>
+        <p:spPr>
+          <a:xfrm>
+            <a:off x="4215384" y="6181344"/>
             <a:ext cx="932688" cy="155448"/>
           </a:xfrm>
           <a:prstGeom prst="rect">
@@ -11629,13 +13893,13 @@
       </p:sp>
       <p:sp>
         <p:nvSpPr>
-          <p:cNvPr id="92" name="Shape 90"/>
-          <p:cNvSpPr/>
-          <p:nvPr/>
-        </p:nvSpPr>
-        <p:spPr>
-          <a:xfrm>
-            <a:off x="2185416" y="3520440"/>
+          <p:cNvPr id="164" name="Shape 162"/>
+          <p:cNvSpPr/>
+          <p:nvPr/>
+        </p:nvSpPr>
+        <p:spPr>
+          <a:xfrm>
+            <a:off x="5230368" y="5971032"/>
             <a:ext cx="932688" cy="182880"/>
           </a:xfrm>
           <a:prstGeom prst="roundRect">
@@ -11656,13 +13920,13 @@
       </p:sp>
       <p:sp>
         <p:nvSpPr>
-          <p:cNvPr id="93" name="Text 91"/>
-          <p:cNvSpPr/>
-          <p:nvPr/>
-        </p:nvSpPr>
-        <p:spPr>
-          <a:xfrm>
-            <a:off x="2185416" y="3520440"/>
+          <p:cNvPr id="165" name="Text 163"/>
+          <p:cNvSpPr/>
+          <p:nvPr/>
+        </p:nvSpPr>
+        <p:spPr>
+          <a:xfrm>
+            <a:off x="5230368" y="5971032"/>
             <a:ext cx="932688" cy="182880"/>
           </a:xfrm>
           <a:prstGeom prst="rect">
@@ -11684,7 +13948,7 @@
                   <a:srgbClr val="1E293B"/>
                 </a:solidFill>
               </a:rPr>
-              <a:t>iOS Player</a:t>
+              <a:t>Promos</a:t>
             </a:r>
             <a:endParaRPr lang="en-US" sz="750" dirty="0"/>
           </a:p>
@@ -11692,18 +13956,1040 @@
       </p:sp>
       <p:sp>
         <p:nvSpPr>
-          <p:cNvPr id="94" name="Shape 92"/>
-          <p:cNvSpPr/>
-          <p:nvPr/>
-        </p:nvSpPr>
-        <p:spPr>
-          <a:xfrm>
-            <a:off x="2185416" y="3730752"/>
+          <p:cNvPr id="166" name="Shape 164"/>
+          <p:cNvSpPr/>
+          <p:nvPr/>
+        </p:nvSpPr>
+        <p:spPr>
+          <a:xfrm>
+            <a:off x="5230368" y="6181344"/>
             <a:ext cx="932688" cy="155448"/>
           </a:xfrm>
           <a:prstGeom prst="roundRect">
             <a:avLst>
               <a:gd name="adj" fmla="val 17647"/>
+            </a:avLst>
+          </a:prstGeom>
+          <a:solidFill>
+            <a:srgbClr val="F3F4F6"/>
+          </a:solidFill>
+          <a:ln w="9525">
+            <a:solidFill>
+              <a:srgbClr val="D1D5DB"/>
+            </a:solidFill>
+            <a:prstDash val="solid"/>
+          </a:ln>
+        </p:spPr>
+      </p:sp>
+      <p:sp>
+        <p:nvSpPr>
+          <p:cNvPr id="167" name="Text 165"/>
+          <p:cNvSpPr/>
+          <p:nvPr/>
+        </p:nvSpPr>
+        <p:spPr>
+          <a:xfrm>
+            <a:off x="5230368" y="6181344"/>
+            <a:ext cx="932688" cy="155448"/>
+          </a:xfrm>
+          <a:prstGeom prst="rect">
+            <a:avLst/>
+          </a:prstGeom>
+          <a:noFill/>
+          <a:ln/>
+        </p:spPr>
+        <p:txBody>
+          <a:bodyPr wrap="square" lIns="0" tIns="0" rIns="0" bIns="0" rtlCol="0" anchor="ctr"/>
+          <a:lstStyle/>
+          <a:p>
+            <a:pPr algn="ctr" indent="0" marL="0">
+              <a:buNone/>
+            </a:pPr>
+            <a:r>
+              <a:rPr lang="en-US" sz="700" dirty="0">
+                <a:solidFill>
+                  <a:srgbClr val="374151"/>
+                </a:solidFill>
+              </a:rPr>
+              <a:t>Not Started</a:t>
+            </a:r>
+            <a:endParaRPr lang="en-US" sz="700" dirty="0"/>
+          </a:p>
+        </p:txBody>
+      </p:sp>
+      <p:sp>
+        <p:nvSpPr>
+          <p:cNvPr id="168" name="Shape 166"/>
+          <p:cNvSpPr/>
+          <p:nvPr/>
+        </p:nvSpPr>
+        <p:spPr>
+          <a:xfrm>
+            <a:off x="9372600" y="804672"/>
+            <a:ext cx="2834640" cy="6071616"/>
+          </a:xfrm>
+          <a:prstGeom prst="rect">
+            <a:avLst/>
+          </a:prstGeom>
+          <a:solidFill>
+            <a:srgbClr val="F8FAFB"/>
+          </a:solidFill>
+          <a:ln w="12700">
+            <a:solidFill>
+              <a:srgbClr val="DDE1E6"/>
+            </a:solidFill>
+            <a:prstDash val="solid"/>
+          </a:ln>
+        </p:spPr>
+      </p:sp>
+      <p:sp>
+        <p:nvSpPr>
+          <p:cNvPr id="169" name="Text 167"/>
+          <p:cNvSpPr/>
+          <p:nvPr/>
+        </p:nvSpPr>
+        <p:spPr>
+          <a:xfrm>
+            <a:off x="9500616" y="950976"/>
+            <a:ext cx="2633472" cy="201168"/>
+          </a:xfrm>
+          <a:prstGeom prst="rect">
+            <a:avLst/>
+          </a:prstGeom>
+          <a:noFill/>
+          <a:ln/>
+        </p:spPr>
+        <p:txBody>
+          <a:bodyPr wrap="square" lIns="0" tIns="0" rIns="0" bIns="0" rtlCol="0" anchor="ctr"/>
+          <a:lstStyle/>
+          <a:p>
+            <a:pPr indent="0" marL="0">
+              <a:buNone/>
+            </a:pPr>
+            <a:r>
+              <a:rPr lang="en-US" sz="950" b="1" dirty="0">
+                <a:solidFill>
+                  <a:srgbClr val="111827"/>
+                </a:solidFill>
+              </a:rPr>
+              <a:t>Milestones</a:t>
+            </a:r>
+            <a:endParaRPr lang="en-US" sz="950" dirty="0"/>
+          </a:p>
+        </p:txBody>
+      </p:sp>
+      <p:sp>
+        <p:nvSpPr>
+          <p:cNvPr id="170" name="Shape 168"/>
+          <p:cNvSpPr/>
+          <p:nvPr/>
+        </p:nvSpPr>
+        <p:spPr>
+          <a:xfrm>
+            <a:off x="9464040" y="1225296"/>
+            <a:ext cx="2670048" cy="420624"/>
+          </a:xfrm>
+          <a:prstGeom prst="rect">
+            <a:avLst/>
+          </a:prstGeom>
+          <a:solidFill>
+            <a:srgbClr val="FFFFFF"/>
+          </a:solidFill>
+          <a:ln w="6350">
+            <a:solidFill>
+              <a:srgbClr val="E5E7EB"/>
+            </a:solidFill>
+            <a:prstDash val="solid"/>
+          </a:ln>
+        </p:spPr>
+      </p:sp>
+      <p:sp>
+        <p:nvSpPr>
+          <p:cNvPr id="171" name="Shape 169"/>
+          <p:cNvSpPr/>
+          <p:nvPr/>
+        </p:nvSpPr>
+        <p:spPr>
+          <a:xfrm>
+            <a:off x="9537192" y="1316736"/>
+            <a:ext cx="109728" cy="109728"/>
+          </a:xfrm>
+          <a:prstGeom prst="ellipse">
+            <a:avLst/>
+          </a:prstGeom>
+          <a:solidFill>
+            <a:srgbClr val="16A34A"/>
+          </a:solidFill>
+          <a:ln w="12700">
+            <a:solidFill>
+              <a:srgbClr val="16A34A"/>
+            </a:solidFill>
+            <a:prstDash val="solid"/>
+          </a:ln>
+        </p:spPr>
+      </p:sp>
+      <p:sp>
+        <p:nvSpPr>
+          <p:cNvPr id="172" name="Text 170"/>
+          <p:cNvSpPr/>
+          <p:nvPr/>
+        </p:nvSpPr>
+        <p:spPr>
+          <a:xfrm>
+            <a:off x="9701784" y="1243584"/>
+            <a:ext cx="2304288" cy="173736"/>
+          </a:xfrm>
+          <a:prstGeom prst="rect">
+            <a:avLst/>
+          </a:prstGeom>
+          <a:noFill/>
+          <a:ln/>
+        </p:spPr>
+        <p:txBody>
+          <a:bodyPr wrap="square" lIns="0" tIns="0" rIns="0" bIns="0" rtlCol="0" anchor="ctr"/>
+          <a:lstStyle/>
+          <a:p>
+            <a:pPr indent="0" marL="0">
+              <a:buNone/>
+            </a:pPr>
+            <a:r>
+              <a:rPr lang="en-US" sz="800" b="1" dirty="0">
+                <a:solidFill>
+                  <a:srgbClr val="15803D"/>
+                </a:solidFill>
+              </a:rPr>
+              <a:t>Requirements</a:t>
+            </a:r>
+            <a:endParaRPr lang="en-US" sz="800" dirty="0"/>
+          </a:p>
+        </p:txBody>
+      </p:sp>
+      <p:sp>
+        <p:nvSpPr>
+          <p:cNvPr id="173" name="Text 171"/>
+          <p:cNvSpPr/>
+          <p:nvPr/>
+        </p:nvSpPr>
+        <p:spPr>
+          <a:xfrm>
+            <a:off x="9701784" y="1453896"/>
+            <a:ext cx="1773936" cy="137160"/>
+          </a:xfrm>
+          <a:prstGeom prst="rect">
+            <a:avLst/>
+          </a:prstGeom>
+          <a:noFill/>
+          <a:ln/>
+        </p:spPr>
+        <p:txBody>
+          <a:bodyPr wrap="square" lIns="0" tIns="0" rIns="0" bIns="0" rtlCol="0" anchor="ctr"/>
+          <a:lstStyle/>
+          <a:p>
+            <a:pPr indent="0" marL="0">
+              <a:buNone/>
+            </a:pPr>
+            <a:r>
+              <a:rPr lang="en-US" sz="700" dirty="0">
+                <a:solidFill>
+                  <a:srgbClr val="6B7280"/>
+                </a:solidFill>
+              </a:rPr>
+              <a:t>Jun 30, 2026</a:t>
+            </a:r>
+            <a:endParaRPr lang="en-US" sz="700" dirty="0"/>
+          </a:p>
+        </p:txBody>
+      </p:sp>
+      <p:sp>
+        <p:nvSpPr>
+          <p:cNvPr id="174" name="Shape 172"/>
+          <p:cNvSpPr/>
+          <p:nvPr/>
+        </p:nvSpPr>
+        <p:spPr>
+          <a:xfrm>
+            <a:off x="11548872" y="1453896"/>
+            <a:ext cx="530352" cy="137160"/>
+          </a:xfrm>
+          <a:prstGeom prst="roundRect">
+            <a:avLst>
+              <a:gd name="adj" fmla="val 20000"/>
+            </a:avLst>
+          </a:prstGeom>
+          <a:solidFill>
+            <a:srgbClr val="DCFCE7"/>
+          </a:solidFill>
+          <a:ln w="12700">
+            <a:solidFill>
+              <a:srgbClr val="DCFCE7"/>
+            </a:solidFill>
+            <a:prstDash val="solid"/>
+          </a:ln>
+        </p:spPr>
+      </p:sp>
+      <p:sp>
+        <p:nvSpPr>
+          <p:cNvPr id="175" name="Text 173"/>
+          <p:cNvSpPr/>
+          <p:nvPr/>
+        </p:nvSpPr>
+        <p:spPr>
+          <a:xfrm>
+            <a:off x="11548872" y="1453896"/>
+            <a:ext cx="530352" cy="137160"/>
+          </a:xfrm>
+          <a:prstGeom prst="rect">
+            <a:avLst/>
+          </a:prstGeom>
+          <a:noFill/>
+          <a:ln/>
+        </p:spPr>
+        <p:txBody>
+          <a:bodyPr wrap="square" lIns="0" tIns="0" rIns="0" bIns="0" rtlCol="0" anchor="ctr"/>
+          <a:lstStyle/>
+          <a:p>
+            <a:pPr algn="ctr" indent="0" marL="0">
+              <a:buNone/>
+            </a:pPr>
+            <a:r>
+              <a:rPr lang="en-US" sz="650" b="1" dirty="0">
+                <a:solidFill>
+                  <a:srgbClr val="166534"/>
+                </a:solidFill>
+              </a:rPr>
+              <a:t>Complete</a:t>
+            </a:r>
+            <a:endParaRPr lang="en-US" sz="650" dirty="0"/>
+          </a:p>
+        </p:txBody>
+      </p:sp>
+      <p:sp>
+        <p:nvSpPr>
+          <p:cNvPr id="176" name="Shape 174"/>
+          <p:cNvSpPr/>
+          <p:nvPr/>
+        </p:nvSpPr>
+        <p:spPr>
+          <a:xfrm>
+            <a:off x="9464040" y="1700784"/>
+            <a:ext cx="2670048" cy="420624"/>
+          </a:xfrm>
+          <a:prstGeom prst="rect">
+            <a:avLst/>
+          </a:prstGeom>
+          <a:solidFill>
+            <a:srgbClr val="FFFFFF"/>
+          </a:solidFill>
+          <a:ln w="6350">
+            <a:solidFill>
+              <a:srgbClr val="E5E7EB"/>
+            </a:solidFill>
+            <a:prstDash val="solid"/>
+          </a:ln>
+        </p:spPr>
+      </p:sp>
+      <p:sp>
+        <p:nvSpPr>
+          <p:cNvPr id="177" name="Shape 175"/>
+          <p:cNvSpPr/>
+          <p:nvPr/>
+        </p:nvSpPr>
+        <p:spPr>
+          <a:xfrm>
+            <a:off x="9537192" y="1792224"/>
+            <a:ext cx="109728" cy="109728"/>
+          </a:xfrm>
+          <a:prstGeom prst="ellipse">
+            <a:avLst/>
+          </a:prstGeom>
+          <a:solidFill>
+            <a:srgbClr val="9CA3AF"/>
+          </a:solidFill>
+          <a:ln w="12700">
+            <a:solidFill>
+              <a:srgbClr val="9CA3AF"/>
+            </a:solidFill>
+            <a:prstDash val="solid"/>
+          </a:ln>
+        </p:spPr>
+      </p:sp>
+      <p:sp>
+        <p:nvSpPr>
+          <p:cNvPr id="178" name="Text 176"/>
+          <p:cNvSpPr/>
+          <p:nvPr/>
+        </p:nvSpPr>
+        <p:spPr>
+          <a:xfrm>
+            <a:off x="9701784" y="1719072"/>
+            <a:ext cx="2304288" cy="173736"/>
+          </a:xfrm>
+          <a:prstGeom prst="rect">
+            <a:avLst/>
+          </a:prstGeom>
+          <a:noFill/>
+          <a:ln/>
+        </p:spPr>
+        <p:txBody>
+          <a:bodyPr wrap="square" lIns="0" tIns="0" rIns="0" bIns="0" rtlCol="0" anchor="ctr"/>
+          <a:lstStyle/>
+          <a:p>
+            <a:pPr indent="0" marL="0">
+              <a:buNone/>
+            </a:pPr>
+            <a:r>
+              <a:rPr lang="en-US" sz="800" b="1" dirty="0">
+                <a:solidFill>
+                  <a:srgbClr val="1F2937"/>
+                </a:solidFill>
+              </a:rPr>
+              <a:t>Integration</a:t>
+            </a:r>
+            <a:endParaRPr lang="en-US" sz="800" dirty="0"/>
+          </a:p>
+        </p:txBody>
+      </p:sp>
+      <p:sp>
+        <p:nvSpPr>
+          <p:cNvPr id="179" name="Text 177"/>
+          <p:cNvSpPr/>
+          <p:nvPr/>
+        </p:nvSpPr>
+        <p:spPr>
+          <a:xfrm>
+            <a:off x="9701784" y="1929384"/>
+            <a:ext cx="1773936" cy="137160"/>
+          </a:xfrm>
+          <a:prstGeom prst="rect">
+            <a:avLst/>
+          </a:prstGeom>
+          <a:noFill/>
+          <a:ln/>
+        </p:spPr>
+        <p:txBody>
+          <a:bodyPr wrap="square" lIns="0" tIns="0" rIns="0" bIns="0" rtlCol="0" anchor="ctr"/>
+          <a:lstStyle/>
+          <a:p>
+            <a:pPr indent="0" marL="0">
+              <a:buNone/>
+            </a:pPr>
+            <a:r>
+              <a:rPr lang="en-US" sz="700" dirty="0">
+                <a:solidFill>
+                  <a:srgbClr val="6B7280"/>
+                </a:solidFill>
+              </a:rPr>
+              <a:t>Sep 30, 2026</a:t>
+            </a:r>
+            <a:endParaRPr lang="en-US" sz="700" dirty="0"/>
+          </a:p>
+        </p:txBody>
+      </p:sp>
+      <p:sp>
+        <p:nvSpPr>
+          <p:cNvPr id="180" name="Shape 178"/>
+          <p:cNvSpPr/>
+          <p:nvPr/>
+        </p:nvSpPr>
+        <p:spPr>
+          <a:xfrm>
+            <a:off x="11548872" y="1929384"/>
+            <a:ext cx="530352" cy="137160"/>
+          </a:xfrm>
+          <a:prstGeom prst="roundRect">
+            <a:avLst>
+              <a:gd name="adj" fmla="val 20000"/>
+            </a:avLst>
+          </a:prstGeom>
+          <a:solidFill>
+            <a:srgbClr val="F3F4F6"/>
+          </a:solidFill>
+          <a:ln w="12700">
+            <a:solidFill>
+              <a:srgbClr val="F3F4F6"/>
+            </a:solidFill>
+            <a:prstDash val="solid"/>
+          </a:ln>
+        </p:spPr>
+      </p:sp>
+      <p:sp>
+        <p:nvSpPr>
+          <p:cNvPr id="181" name="Text 179"/>
+          <p:cNvSpPr/>
+          <p:nvPr/>
+        </p:nvSpPr>
+        <p:spPr>
+          <a:xfrm>
+            <a:off x="11548872" y="1929384"/>
+            <a:ext cx="530352" cy="137160"/>
+          </a:xfrm>
+          <a:prstGeom prst="rect">
+            <a:avLst/>
+          </a:prstGeom>
+          <a:noFill/>
+          <a:ln/>
+        </p:spPr>
+        <p:txBody>
+          <a:bodyPr wrap="square" lIns="0" tIns="0" rIns="0" bIns="0" rtlCol="0" anchor="ctr"/>
+          <a:lstStyle/>
+          <a:p>
+            <a:pPr algn="ctr" indent="0" marL="0">
+              <a:buNone/>
+            </a:pPr>
+            <a:r>
+              <a:rPr lang="en-US" sz="650" b="1" dirty="0">
+                <a:solidFill>
+                  <a:srgbClr val="6B7280"/>
+                </a:solidFill>
+              </a:rPr>
+              <a:t>Upcoming</a:t>
+            </a:r>
+            <a:endParaRPr lang="en-US" sz="650" dirty="0"/>
+          </a:p>
+        </p:txBody>
+      </p:sp>
+      <p:sp>
+        <p:nvSpPr>
+          <p:cNvPr id="182" name="Shape 180"/>
+          <p:cNvSpPr/>
+          <p:nvPr/>
+        </p:nvSpPr>
+        <p:spPr>
+          <a:xfrm>
+            <a:off x="9464040" y="2176272"/>
+            <a:ext cx="2670048" cy="420624"/>
+          </a:xfrm>
+          <a:prstGeom prst="rect">
+            <a:avLst/>
+          </a:prstGeom>
+          <a:solidFill>
+            <a:srgbClr val="FFFFFF"/>
+          </a:solidFill>
+          <a:ln w="6350">
+            <a:solidFill>
+              <a:srgbClr val="E5E7EB"/>
+            </a:solidFill>
+            <a:prstDash val="solid"/>
+          </a:ln>
+        </p:spPr>
+      </p:sp>
+      <p:sp>
+        <p:nvSpPr>
+          <p:cNvPr id="183" name="Shape 181"/>
+          <p:cNvSpPr/>
+          <p:nvPr/>
+        </p:nvSpPr>
+        <p:spPr>
+          <a:xfrm>
+            <a:off x="9537192" y="2267712"/>
+            <a:ext cx="109728" cy="109728"/>
+          </a:xfrm>
+          <a:prstGeom prst="ellipse">
+            <a:avLst/>
+          </a:prstGeom>
+          <a:solidFill>
+            <a:srgbClr val="9CA3AF"/>
+          </a:solidFill>
+          <a:ln w="12700">
+            <a:solidFill>
+              <a:srgbClr val="9CA3AF"/>
+            </a:solidFill>
+            <a:prstDash val="solid"/>
+          </a:ln>
+        </p:spPr>
+      </p:sp>
+      <p:sp>
+        <p:nvSpPr>
+          <p:cNvPr id="184" name="Text 182"/>
+          <p:cNvSpPr/>
+          <p:nvPr/>
+        </p:nvSpPr>
+        <p:spPr>
+          <a:xfrm>
+            <a:off x="9701784" y="2194560"/>
+            <a:ext cx="2304288" cy="173736"/>
+          </a:xfrm>
+          <a:prstGeom prst="rect">
+            <a:avLst/>
+          </a:prstGeom>
+          <a:noFill/>
+          <a:ln/>
+        </p:spPr>
+        <p:txBody>
+          <a:bodyPr wrap="square" lIns="0" tIns="0" rIns="0" bIns="0" rtlCol="0" anchor="ctr"/>
+          <a:lstStyle/>
+          <a:p>
+            <a:pPr indent="0" marL="0">
+              <a:buNone/>
+            </a:pPr>
+            <a:r>
+              <a:rPr lang="en-US" sz="800" b="1" dirty="0">
+                <a:solidFill>
+                  <a:srgbClr val="1F2937"/>
+                </a:solidFill>
+              </a:rPr>
+              <a:t>Testing</a:t>
+            </a:r>
+            <a:endParaRPr lang="en-US" sz="800" dirty="0"/>
+          </a:p>
+        </p:txBody>
+      </p:sp>
+      <p:sp>
+        <p:nvSpPr>
+          <p:cNvPr id="185" name="Text 183"/>
+          <p:cNvSpPr/>
+          <p:nvPr/>
+        </p:nvSpPr>
+        <p:spPr>
+          <a:xfrm>
+            <a:off x="9701784" y="2404872"/>
+            <a:ext cx="1773936" cy="137160"/>
+          </a:xfrm>
+          <a:prstGeom prst="rect">
+            <a:avLst/>
+          </a:prstGeom>
+          <a:noFill/>
+          <a:ln/>
+        </p:spPr>
+        <p:txBody>
+          <a:bodyPr wrap="square" lIns="0" tIns="0" rIns="0" bIns="0" rtlCol="0" anchor="ctr"/>
+          <a:lstStyle/>
+          <a:p>
+            <a:pPr indent="0" marL="0">
+              <a:buNone/>
+            </a:pPr>
+            <a:r>
+              <a:rPr lang="en-US" sz="700" dirty="0">
+                <a:solidFill>
+                  <a:srgbClr val="6B7280"/>
+                </a:solidFill>
+              </a:rPr>
+              <a:t>Nov 30, 2026</a:t>
+            </a:r>
+            <a:endParaRPr lang="en-US" sz="700" dirty="0"/>
+          </a:p>
+        </p:txBody>
+      </p:sp>
+      <p:sp>
+        <p:nvSpPr>
+          <p:cNvPr id="186" name="Shape 184"/>
+          <p:cNvSpPr/>
+          <p:nvPr/>
+        </p:nvSpPr>
+        <p:spPr>
+          <a:xfrm>
+            <a:off x="11548872" y="2404872"/>
+            <a:ext cx="530352" cy="137160"/>
+          </a:xfrm>
+          <a:prstGeom prst="roundRect">
+            <a:avLst>
+              <a:gd name="adj" fmla="val 20000"/>
+            </a:avLst>
+          </a:prstGeom>
+          <a:solidFill>
+            <a:srgbClr val="F3F4F6"/>
+          </a:solidFill>
+          <a:ln w="12700">
+            <a:solidFill>
+              <a:srgbClr val="F3F4F6"/>
+            </a:solidFill>
+            <a:prstDash val="solid"/>
+          </a:ln>
+        </p:spPr>
+      </p:sp>
+      <p:sp>
+        <p:nvSpPr>
+          <p:cNvPr id="187" name="Text 185"/>
+          <p:cNvSpPr/>
+          <p:nvPr/>
+        </p:nvSpPr>
+        <p:spPr>
+          <a:xfrm>
+            <a:off x="11548872" y="2404872"/>
+            <a:ext cx="530352" cy="137160"/>
+          </a:xfrm>
+          <a:prstGeom prst="rect">
+            <a:avLst/>
+          </a:prstGeom>
+          <a:noFill/>
+          <a:ln/>
+        </p:spPr>
+        <p:txBody>
+          <a:bodyPr wrap="square" lIns="0" tIns="0" rIns="0" bIns="0" rtlCol="0" anchor="ctr"/>
+          <a:lstStyle/>
+          <a:p>
+            <a:pPr algn="ctr" indent="0" marL="0">
+              <a:buNone/>
+            </a:pPr>
+            <a:r>
+              <a:rPr lang="en-US" sz="650" b="1" dirty="0">
+                <a:solidFill>
+                  <a:srgbClr val="6B7280"/>
+                </a:solidFill>
+              </a:rPr>
+              <a:t>Upcoming</a:t>
+            </a:r>
+            <a:endParaRPr lang="en-US" sz="650" dirty="0"/>
+          </a:p>
+        </p:txBody>
+      </p:sp>
+      <p:sp>
+        <p:nvSpPr>
+          <p:cNvPr id="188" name="Shape 186"/>
+          <p:cNvSpPr/>
+          <p:nvPr/>
+        </p:nvSpPr>
+        <p:spPr>
+          <a:xfrm>
+            <a:off x="9464040" y="2651760"/>
+            <a:ext cx="2670048" cy="420624"/>
+          </a:xfrm>
+          <a:prstGeom prst="rect">
+            <a:avLst/>
+          </a:prstGeom>
+          <a:solidFill>
+            <a:srgbClr val="FFFFFF"/>
+          </a:solidFill>
+          <a:ln w="6350">
+            <a:solidFill>
+              <a:srgbClr val="E5E7EB"/>
+            </a:solidFill>
+            <a:prstDash val="solid"/>
+          </a:ln>
+        </p:spPr>
+      </p:sp>
+      <p:sp>
+        <p:nvSpPr>
+          <p:cNvPr id="189" name="Shape 187"/>
+          <p:cNvSpPr/>
+          <p:nvPr/>
+        </p:nvSpPr>
+        <p:spPr>
+          <a:xfrm>
+            <a:off x="9537192" y="2743200"/>
+            <a:ext cx="109728" cy="109728"/>
+          </a:xfrm>
+          <a:prstGeom prst="ellipse">
+            <a:avLst/>
+          </a:prstGeom>
+          <a:solidFill>
+            <a:srgbClr val="9CA3AF"/>
+          </a:solidFill>
+          <a:ln w="12700">
+            <a:solidFill>
+              <a:srgbClr val="9CA3AF"/>
+            </a:solidFill>
+            <a:prstDash val="solid"/>
+          </a:ln>
+        </p:spPr>
+      </p:sp>
+      <p:sp>
+        <p:nvSpPr>
+          <p:cNvPr id="190" name="Text 188"/>
+          <p:cNvSpPr/>
+          <p:nvPr/>
+        </p:nvSpPr>
+        <p:spPr>
+          <a:xfrm>
+            <a:off x="9701784" y="2670048"/>
+            <a:ext cx="2304288" cy="173736"/>
+          </a:xfrm>
+          <a:prstGeom prst="rect">
+            <a:avLst/>
+          </a:prstGeom>
+          <a:noFill/>
+          <a:ln/>
+        </p:spPr>
+        <p:txBody>
+          <a:bodyPr wrap="square" lIns="0" tIns="0" rIns="0" bIns="0" rtlCol="0" anchor="ctr"/>
+          <a:lstStyle/>
+          <a:p>
+            <a:pPr indent="0" marL="0">
+              <a:buNone/>
+            </a:pPr>
+            <a:r>
+              <a:rPr lang="en-US" sz="800" b="1" dirty="0">
+                <a:solidFill>
+                  <a:srgbClr val="1F2937"/>
+                </a:solidFill>
+              </a:rPr>
+              <a:t>Release</a:t>
+            </a:r>
+            <a:endParaRPr lang="en-US" sz="800" dirty="0"/>
+          </a:p>
+        </p:txBody>
+      </p:sp>
+      <p:sp>
+        <p:nvSpPr>
+          <p:cNvPr id="191" name="Text 189"/>
+          <p:cNvSpPr/>
+          <p:nvPr/>
+        </p:nvSpPr>
+        <p:spPr>
+          <a:xfrm>
+            <a:off x="9701784" y="2880360"/>
+            <a:ext cx="1773936" cy="137160"/>
+          </a:xfrm>
+          <a:prstGeom prst="rect">
+            <a:avLst/>
+          </a:prstGeom>
+          <a:noFill/>
+          <a:ln/>
+        </p:spPr>
+        <p:txBody>
+          <a:bodyPr wrap="square" lIns="0" tIns="0" rIns="0" bIns="0" rtlCol="0" anchor="ctr"/>
+          <a:lstStyle/>
+          <a:p>
+            <a:pPr indent="0" marL="0">
+              <a:buNone/>
+            </a:pPr>
+            <a:r>
+              <a:rPr lang="en-US" sz="700" dirty="0">
+                <a:solidFill>
+                  <a:srgbClr val="6B7280"/>
+                </a:solidFill>
+              </a:rPr>
+              <a:t>Dec 2026</a:t>
+            </a:r>
+            <a:endParaRPr lang="en-US" sz="700" dirty="0"/>
+          </a:p>
+        </p:txBody>
+      </p:sp>
+      <p:sp>
+        <p:nvSpPr>
+          <p:cNvPr id="192" name="Shape 190"/>
+          <p:cNvSpPr/>
+          <p:nvPr/>
+        </p:nvSpPr>
+        <p:spPr>
+          <a:xfrm>
+            <a:off x="11548872" y="2880360"/>
+            <a:ext cx="530352" cy="137160"/>
+          </a:xfrm>
+          <a:prstGeom prst="roundRect">
+            <a:avLst>
+              <a:gd name="adj" fmla="val 20000"/>
+            </a:avLst>
+          </a:prstGeom>
+          <a:solidFill>
+            <a:srgbClr val="F3F4F6"/>
+          </a:solidFill>
+          <a:ln w="12700">
+            <a:solidFill>
+              <a:srgbClr val="F3F4F6"/>
+            </a:solidFill>
+            <a:prstDash val="solid"/>
+          </a:ln>
+        </p:spPr>
+      </p:sp>
+      <p:sp>
+        <p:nvSpPr>
+          <p:cNvPr id="193" name="Text 191"/>
+          <p:cNvSpPr/>
+          <p:nvPr/>
+        </p:nvSpPr>
+        <p:spPr>
+          <a:xfrm>
+            <a:off x="11548872" y="2880360"/>
+            <a:ext cx="530352" cy="137160"/>
+          </a:xfrm>
+          <a:prstGeom prst="rect">
+            <a:avLst/>
+          </a:prstGeom>
+          <a:noFill/>
+          <a:ln/>
+        </p:spPr>
+        <p:txBody>
+          <a:bodyPr wrap="square" lIns="0" tIns="0" rIns="0" bIns="0" rtlCol="0" anchor="ctr"/>
+          <a:lstStyle/>
+          <a:p>
+            <a:pPr algn="ctr" indent="0" marL="0">
+              <a:buNone/>
+            </a:pPr>
+            <a:r>
+              <a:rPr lang="en-US" sz="650" b="1" dirty="0">
+                <a:solidFill>
+                  <a:srgbClr val="6B7280"/>
+                </a:solidFill>
+              </a:rPr>
+              <a:t>Upcoming</a:t>
+            </a:r>
+            <a:endParaRPr lang="en-US" sz="650" dirty="0"/>
+          </a:p>
+        </p:txBody>
+      </p:sp>
+      <p:sp>
+        <p:nvSpPr>
+          <p:cNvPr id="194" name="Shape 192"/>
+          <p:cNvSpPr/>
+          <p:nvPr/>
+        </p:nvSpPr>
+        <p:spPr>
+          <a:xfrm>
+            <a:off x="9482328" y="3200400"/>
+            <a:ext cx="2633472" cy="0"/>
+          </a:xfrm>
+          <a:prstGeom prst="line">
+            <a:avLst/>
+          </a:prstGeom>
+          <a:noFill/>
+          <a:ln w="9525">
+            <a:solidFill>
+              <a:srgbClr val="DDE1E6"/>
+            </a:solidFill>
+            <a:prstDash val="solid"/>
+          </a:ln>
+        </p:spPr>
+      </p:sp>
+      <p:sp>
+        <p:nvSpPr>
+          <p:cNvPr id="195" name="Text 193"/>
+          <p:cNvSpPr/>
+          <p:nvPr/>
+        </p:nvSpPr>
+        <p:spPr>
+          <a:xfrm>
+            <a:off x="9500616" y="3337560"/>
+            <a:ext cx="2633472" cy="201168"/>
+          </a:xfrm>
+          <a:prstGeom prst="rect">
+            <a:avLst/>
+          </a:prstGeom>
+          <a:noFill/>
+          <a:ln/>
+        </p:spPr>
+        <p:txBody>
+          <a:bodyPr wrap="square" lIns="0" tIns="0" rIns="0" bIns="0" rtlCol="0" anchor="ctr"/>
+          <a:lstStyle/>
+          <a:p>
+            <a:pPr indent="0" marL="0">
+              <a:buNone/>
+            </a:pPr>
+            <a:r>
+              <a:rPr lang="en-US" sz="950" b="1" dirty="0">
+                <a:solidFill>
+                  <a:srgbClr val="111827"/>
+                </a:solidFill>
+              </a:rPr>
+              <a:t>Status Key</a:t>
+            </a:r>
+            <a:endParaRPr lang="en-US" sz="950" dirty="0"/>
+          </a:p>
+        </p:txBody>
+      </p:sp>
+      <p:sp>
+        <p:nvSpPr>
+          <p:cNvPr id="196" name="Shape 194"/>
+          <p:cNvSpPr/>
+          <p:nvPr/>
+        </p:nvSpPr>
+        <p:spPr>
+          <a:xfrm>
+            <a:off x="9500616" y="3584448"/>
+            <a:ext cx="749808" cy="173736"/>
+          </a:xfrm>
+          <a:prstGeom prst="roundRect">
+            <a:avLst>
+              <a:gd name="adj" fmla="val 15789"/>
+            </a:avLst>
+          </a:prstGeom>
+          <a:solidFill>
+            <a:srgbClr val="F3F4F6"/>
+          </a:solidFill>
+          <a:ln w="9525">
+            <a:solidFill>
+              <a:srgbClr val="D1D5DB"/>
+            </a:solidFill>
+            <a:prstDash val="solid"/>
+          </a:ln>
+        </p:spPr>
+      </p:sp>
+      <p:sp>
+        <p:nvSpPr>
+          <p:cNvPr id="197" name="Text 195"/>
+          <p:cNvSpPr/>
+          <p:nvPr/>
+        </p:nvSpPr>
+        <p:spPr>
+          <a:xfrm>
+            <a:off x="9500616" y="3584448"/>
+            <a:ext cx="749808" cy="173736"/>
+          </a:xfrm>
+          <a:prstGeom prst="rect">
+            <a:avLst/>
+          </a:prstGeom>
+          <a:noFill/>
+          <a:ln/>
+        </p:spPr>
+        <p:txBody>
+          <a:bodyPr wrap="square" lIns="0" tIns="0" rIns="0" bIns="0" rtlCol="0" anchor="ctr"/>
+          <a:lstStyle/>
+          <a:p>
+            <a:pPr algn="ctr" indent="0" marL="0">
+              <a:buNone/>
+            </a:pPr>
+            <a:r>
+              <a:rPr lang="en-US" sz="700" b="1" dirty="0">
+                <a:solidFill>
+                  <a:srgbClr val="374151"/>
+                </a:solidFill>
+              </a:rPr>
+              <a:t>Not Started</a:t>
+            </a:r>
+            <a:endParaRPr lang="en-US" sz="700" dirty="0"/>
+          </a:p>
+        </p:txBody>
+      </p:sp>
+      <p:sp>
+        <p:nvSpPr>
+          <p:cNvPr id="198" name="Text 196"/>
+          <p:cNvSpPr/>
+          <p:nvPr/>
+        </p:nvSpPr>
+        <p:spPr>
+          <a:xfrm>
+            <a:off x="10305288" y="3584448"/>
+            <a:ext cx="1792224" cy="173736"/>
+          </a:xfrm>
+          <a:prstGeom prst="rect">
+            <a:avLst/>
+          </a:prstGeom>
+          <a:noFill/>
+          <a:ln/>
+        </p:spPr>
+        <p:txBody>
+          <a:bodyPr wrap="square" lIns="0" tIns="0" rIns="0" bIns="0" rtlCol="0" anchor="ctr"/>
+          <a:lstStyle/>
+          <a:p>
+            <a:pPr algn="l" indent="0" marL="0">
+              <a:buNone/>
+            </a:pPr>
+            <a:r>
+              <a:rPr lang="en-US" sz="700" dirty="0">
+                <a:solidFill>
+                  <a:srgbClr val="6B7280"/>
+                </a:solidFill>
+              </a:rPr>
+              <a:t>Work has not begun</a:t>
+            </a:r>
+            <a:endParaRPr lang="en-US" sz="700" dirty="0"/>
+          </a:p>
+        </p:txBody>
+      </p:sp>
+      <p:sp>
+        <p:nvSpPr>
+          <p:cNvPr id="199" name="Shape 197"/>
+          <p:cNvSpPr/>
+          <p:nvPr/>
+        </p:nvSpPr>
+        <p:spPr>
+          <a:xfrm>
+            <a:off x="9500616" y="3813048"/>
+            <a:ext cx="749808" cy="173736"/>
+          </a:xfrm>
+          <a:prstGeom prst="roundRect">
+            <a:avLst>
+              <a:gd name="adj" fmla="val 15789"/>
             </a:avLst>
           </a:prstGeom>
           <a:solidFill>
@@ -11719,14 +15005,14 @@
       </p:sp>
       <p:sp>
         <p:nvSpPr>
-          <p:cNvPr id="95" name="Text 93"/>
-          <p:cNvSpPr/>
-          <p:nvPr/>
-        </p:nvSpPr>
-        <p:spPr>
-          <a:xfrm>
-            <a:off x="2185416" y="3730752"/>
-            <a:ext cx="932688" cy="155448"/>
+          <p:cNvPr id="200" name="Text 198"/>
+          <p:cNvSpPr/>
+          <p:nvPr/>
+        </p:nvSpPr>
+        <p:spPr>
+          <a:xfrm>
+            <a:off x="9500616" y="3813048"/>
+            <a:ext cx="749808" cy="173736"/>
           </a:xfrm>
           <a:prstGeom prst="rect">
             <a:avLst/>
@@ -11742,12 +15028,48 @@
               <a:buNone/>
             </a:pPr>
             <a:r>
+              <a:rPr lang="en-US" sz="700" b="1" dirty="0">
+                <a:solidFill>
+                  <a:srgbClr val="FFFFFF"/>
+                </a:solidFill>
+              </a:rPr>
+              <a:t>In Progress</a:t>
+            </a:r>
+            <a:endParaRPr lang="en-US" sz="700" dirty="0"/>
+          </a:p>
+        </p:txBody>
+      </p:sp>
+      <p:sp>
+        <p:nvSpPr>
+          <p:cNvPr id="201" name="Text 199"/>
+          <p:cNvSpPr/>
+          <p:nvPr/>
+        </p:nvSpPr>
+        <p:spPr>
+          <a:xfrm>
+            <a:off x="10305288" y="3813048"/>
+            <a:ext cx="1792224" cy="173736"/>
+          </a:xfrm>
+          <a:prstGeom prst="rect">
+            <a:avLst/>
+          </a:prstGeom>
+          <a:noFill/>
+          <a:ln/>
+        </p:spPr>
+        <p:txBody>
+          <a:bodyPr wrap="square" lIns="0" tIns="0" rIns="0" bIns="0" rtlCol="0" anchor="ctr"/>
+          <a:lstStyle/>
+          <a:p>
+            <a:pPr algn="l" indent="0" marL="0">
+              <a:buNone/>
+            </a:pPr>
+            <a:r>
               <a:rPr lang="en-US" sz="700" dirty="0">
                 <a:solidFill>
-                  <a:srgbClr val="FFFFFF"/>
-                </a:solidFill>
-              </a:rPr>
-              <a:t>In Progress</a:t>
+                  <a:srgbClr val="6B7280"/>
+                </a:solidFill>
+              </a:rPr>
+              <a:t>Active development underway</a:t>
             </a:r>
             <a:endParaRPr lang="en-US" sz="700" dirty="0"/>
           </a:p>
@@ -11755,3216 +15077,13 @@
       </p:sp>
       <p:sp>
         <p:nvSpPr>
-          <p:cNvPr id="96" name="Shape 94"/>
-          <p:cNvSpPr/>
-          <p:nvPr/>
-        </p:nvSpPr>
-        <p:spPr>
-          <a:xfrm>
-            <a:off x="3200400" y="3520440"/>
-            <a:ext cx="932688" cy="182880"/>
-          </a:xfrm>
-          <a:prstGeom prst="roundRect">
-            <a:avLst>
-              <a:gd name="adj" fmla="val 15000"/>
-            </a:avLst>
-          </a:prstGeom>
-          <a:solidFill>
-            <a:srgbClr val="FFFFFF"/>
-          </a:solidFill>
-          <a:ln w="9525">
-            <a:solidFill>
-              <a:srgbClr val="CBD5E1"/>
-            </a:solidFill>
-            <a:prstDash val="solid"/>
-          </a:ln>
-        </p:spPr>
-      </p:sp>
-      <p:sp>
-        <p:nvSpPr>
-          <p:cNvPr id="97" name="Text 95"/>
-          <p:cNvSpPr/>
-          <p:nvPr/>
-        </p:nvSpPr>
-        <p:spPr>
-          <a:xfrm>
-            <a:off x="3200400" y="3520440"/>
-            <a:ext cx="932688" cy="182880"/>
-          </a:xfrm>
-          <a:prstGeom prst="rect">
-            <a:avLst/>
-          </a:prstGeom>
-          <a:noFill/>
-          <a:ln/>
-        </p:spPr>
-        <p:txBody>
-          <a:bodyPr wrap="square" lIns="0" tIns="0" rIns="0" bIns="0" rtlCol="0" anchor="ctr"/>
-          <a:lstStyle/>
-          <a:p>
-            <a:pPr algn="ctr" indent="0" marL="0">
-              <a:buNone/>
-            </a:pPr>
-            <a:r>
-              <a:rPr lang="en-US" sz="750" b="1" dirty="0">
-                <a:solidFill>
-                  <a:srgbClr val="1E293B"/>
-                </a:solidFill>
-              </a:rPr>
-              <a:t>Android Player</a:t>
-            </a:r>
-            <a:endParaRPr lang="en-US" sz="750" dirty="0"/>
-          </a:p>
-        </p:txBody>
-      </p:sp>
-      <p:sp>
-        <p:nvSpPr>
-          <p:cNvPr id="98" name="Shape 96"/>
-          <p:cNvSpPr/>
-          <p:nvPr/>
-        </p:nvSpPr>
-        <p:spPr>
-          <a:xfrm>
-            <a:off x="3200400" y="3730752"/>
-            <a:ext cx="932688" cy="155448"/>
-          </a:xfrm>
-          <a:prstGeom prst="roundRect">
-            <a:avLst>
-              <a:gd name="adj" fmla="val 17647"/>
-            </a:avLst>
-          </a:prstGeom>
-          <a:solidFill>
-            <a:srgbClr val="F3F4F6"/>
-          </a:solidFill>
-          <a:ln w="9525">
-            <a:solidFill>
-              <a:srgbClr val="D1D5DB"/>
-            </a:solidFill>
-            <a:prstDash val="solid"/>
-          </a:ln>
-        </p:spPr>
-      </p:sp>
-      <p:sp>
-        <p:nvSpPr>
-          <p:cNvPr id="99" name="Text 97"/>
-          <p:cNvSpPr/>
-          <p:nvPr/>
-        </p:nvSpPr>
-        <p:spPr>
-          <a:xfrm>
-            <a:off x="3200400" y="3730752"/>
-            <a:ext cx="932688" cy="155448"/>
-          </a:xfrm>
-          <a:prstGeom prst="rect">
-            <a:avLst/>
-          </a:prstGeom>
-          <a:noFill/>
-          <a:ln/>
-        </p:spPr>
-        <p:txBody>
-          <a:bodyPr wrap="square" lIns="0" tIns="0" rIns="0" bIns="0" rtlCol="0" anchor="ctr"/>
-          <a:lstStyle/>
-          <a:p>
-            <a:pPr algn="ctr" indent="0" marL="0">
-              <a:buNone/>
-            </a:pPr>
-            <a:r>
-              <a:rPr lang="en-US" sz="700" dirty="0">
-                <a:solidFill>
-                  <a:srgbClr val="374151"/>
-                </a:solidFill>
-              </a:rPr>
-              <a:t>Not Started</a:t>
-            </a:r>
-            <a:endParaRPr lang="en-US" sz="700" dirty="0"/>
-          </a:p>
-        </p:txBody>
-      </p:sp>
-      <p:sp>
-        <p:nvSpPr>
-          <p:cNvPr id="100" name="Shape 98"/>
-          <p:cNvSpPr/>
-          <p:nvPr/>
-        </p:nvSpPr>
-        <p:spPr>
-          <a:xfrm>
-            <a:off x="4215384" y="3520440"/>
-            <a:ext cx="932688" cy="182880"/>
-          </a:xfrm>
-          <a:prstGeom prst="roundRect">
-            <a:avLst>
-              <a:gd name="adj" fmla="val 15000"/>
-            </a:avLst>
-          </a:prstGeom>
-          <a:solidFill>
-            <a:srgbClr val="FFFFFF"/>
-          </a:solidFill>
-          <a:ln w="9525">
-            <a:solidFill>
-              <a:srgbClr val="CBD5E1"/>
-            </a:solidFill>
-            <a:prstDash val="solid"/>
-          </a:ln>
-        </p:spPr>
-      </p:sp>
-      <p:sp>
-        <p:nvSpPr>
-          <p:cNvPr id="101" name="Text 99"/>
-          <p:cNvSpPr/>
-          <p:nvPr/>
-        </p:nvSpPr>
-        <p:spPr>
-          <a:xfrm>
-            <a:off x="4215384" y="3520440"/>
-            <a:ext cx="932688" cy="182880"/>
-          </a:xfrm>
-          <a:prstGeom prst="rect">
-            <a:avLst/>
-          </a:prstGeom>
-          <a:noFill/>
-          <a:ln/>
-        </p:spPr>
-        <p:txBody>
-          <a:bodyPr wrap="square" lIns="0" tIns="0" rIns="0" bIns="0" rtlCol="0" anchor="ctr"/>
-          <a:lstStyle/>
-          <a:p>
-            <a:pPr algn="ctr" indent="0" marL="0">
-              <a:buNone/>
-            </a:pPr>
-            <a:r>
-              <a:rPr lang="en-US" sz="750" b="1" dirty="0">
-                <a:solidFill>
-                  <a:srgbClr val="1E293B"/>
-                </a:solidFill>
-              </a:rPr>
-              <a:t>HLS/DASH PB</a:t>
-            </a:r>
-            <a:endParaRPr lang="en-US" sz="750" dirty="0"/>
-          </a:p>
-        </p:txBody>
-      </p:sp>
-      <p:sp>
-        <p:nvSpPr>
-          <p:cNvPr id="102" name="Shape 100"/>
-          <p:cNvSpPr/>
-          <p:nvPr/>
-        </p:nvSpPr>
-        <p:spPr>
-          <a:xfrm>
-            <a:off x="4215384" y="3730752"/>
-            <a:ext cx="932688" cy="155448"/>
-          </a:xfrm>
-          <a:prstGeom prst="roundRect">
-            <a:avLst>
-              <a:gd name="adj" fmla="val 17647"/>
-            </a:avLst>
-          </a:prstGeom>
-          <a:solidFill>
-            <a:srgbClr val="1558A8"/>
-          </a:solidFill>
-          <a:ln w="12700">
-            <a:solidFill>
-              <a:srgbClr val="1558A8"/>
-            </a:solidFill>
-            <a:prstDash val="solid"/>
-          </a:ln>
-        </p:spPr>
-      </p:sp>
-      <p:sp>
-        <p:nvSpPr>
-          <p:cNvPr id="103" name="Text 101"/>
-          <p:cNvSpPr/>
-          <p:nvPr/>
-        </p:nvSpPr>
-        <p:spPr>
-          <a:xfrm>
-            <a:off x="4215384" y="3730752"/>
-            <a:ext cx="932688" cy="155448"/>
-          </a:xfrm>
-          <a:prstGeom prst="rect">
-            <a:avLst/>
-          </a:prstGeom>
-          <a:noFill/>
-          <a:ln/>
-        </p:spPr>
-        <p:txBody>
-          <a:bodyPr wrap="square" lIns="0" tIns="0" rIns="0" bIns="0" rtlCol="0" anchor="ctr"/>
-          <a:lstStyle/>
-          <a:p>
-            <a:pPr algn="ctr" indent="0" marL="0">
-              <a:buNone/>
-            </a:pPr>
-            <a:r>
-              <a:rPr lang="en-US" sz="700" dirty="0">
-                <a:solidFill>
-                  <a:srgbClr val="FFFFFF"/>
-                </a:solidFill>
-              </a:rPr>
-              <a:t>In Progress</a:t>
-            </a:r>
-            <a:endParaRPr lang="en-US" sz="700" dirty="0"/>
-          </a:p>
-        </p:txBody>
-      </p:sp>
-      <p:sp>
-        <p:nvSpPr>
-          <p:cNvPr id="104" name="Shape 102"/>
-          <p:cNvSpPr/>
-          <p:nvPr/>
-        </p:nvSpPr>
-        <p:spPr>
-          <a:xfrm>
-            <a:off x="5230368" y="3520440"/>
-            <a:ext cx="932688" cy="182880"/>
-          </a:xfrm>
-          <a:prstGeom prst="roundRect">
-            <a:avLst>
-              <a:gd name="adj" fmla="val 15000"/>
-            </a:avLst>
-          </a:prstGeom>
-          <a:solidFill>
-            <a:srgbClr val="FFFFFF"/>
-          </a:solidFill>
-          <a:ln w="9525">
-            <a:solidFill>
-              <a:srgbClr val="CBD5E1"/>
-            </a:solidFill>
-            <a:prstDash val="solid"/>
-          </a:ln>
-        </p:spPr>
-      </p:sp>
-      <p:sp>
-        <p:nvSpPr>
-          <p:cNvPr id="105" name="Text 103"/>
-          <p:cNvSpPr/>
-          <p:nvPr/>
-        </p:nvSpPr>
-        <p:spPr>
-          <a:xfrm>
-            <a:off x="5230368" y="3520440"/>
-            <a:ext cx="932688" cy="182880"/>
-          </a:xfrm>
-          <a:prstGeom prst="rect">
-            <a:avLst/>
-          </a:prstGeom>
-          <a:noFill/>
-          <a:ln/>
-        </p:spPr>
-        <p:txBody>
-          <a:bodyPr wrap="square" lIns="0" tIns="0" rIns="0" bIns="0" rtlCol="0" anchor="ctr"/>
-          <a:lstStyle/>
-          <a:p>
-            <a:pPr algn="ctr" indent="0" marL="0">
-              <a:buNone/>
-            </a:pPr>
-            <a:r>
-              <a:rPr lang="en-US" sz="750" b="1" dirty="0">
-                <a:solidFill>
-                  <a:srgbClr val="1E293B"/>
-                </a:solidFill>
-              </a:rPr>
-              <a:t>Bitmovin QOE</a:t>
-            </a:r>
-            <a:endParaRPr lang="en-US" sz="750" dirty="0"/>
-          </a:p>
-        </p:txBody>
-      </p:sp>
-      <p:sp>
-        <p:nvSpPr>
-          <p:cNvPr id="106" name="Shape 104"/>
-          <p:cNvSpPr/>
-          <p:nvPr/>
-        </p:nvSpPr>
-        <p:spPr>
-          <a:xfrm>
-            <a:off x="5230368" y="3730752"/>
-            <a:ext cx="932688" cy="155448"/>
-          </a:xfrm>
-          <a:prstGeom prst="roundRect">
-            <a:avLst>
-              <a:gd name="adj" fmla="val 17647"/>
-            </a:avLst>
-          </a:prstGeom>
-          <a:solidFill>
-            <a:srgbClr val="F3F4F6"/>
-          </a:solidFill>
-          <a:ln w="9525">
-            <a:solidFill>
-              <a:srgbClr val="D1D5DB"/>
-            </a:solidFill>
-            <a:prstDash val="solid"/>
-          </a:ln>
-        </p:spPr>
-      </p:sp>
-      <p:sp>
-        <p:nvSpPr>
-          <p:cNvPr id="107" name="Text 105"/>
-          <p:cNvSpPr/>
-          <p:nvPr/>
-        </p:nvSpPr>
-        <p:spPr>
-          <a:xfrm>
-            <a:off x="5230368" y="3730752"/>
-            <a:ext cx="932688" cy="155448"/>
-          </a:xfrm>
-          <a:prstGeom prst="rect">
-            <a:avLst/>
-          </a:prstGeom>
-          <a:noFill/>
-          <a:ln/>
-        </p:spPr>
-        <p:txBody>
-          <a:bodyPr wrap="square" lIns="0" tIns="0" rIns="0" bIns="0" rtlCol="0" anchor="ctr"/>
-          <a:lstStyle/>
-          <a:p>
-            <a:pPr algn="ctr" indent="0" marL="0">
-              <a:buNone/>
-            </a:pPr>
-            <a:r>
-              <a:rPr lang="en-US" sz="700" dirty="0">
-                <a:solidFill>
-                  <a:srgbClr val="374151"/>
-                </a:solidFill>
-              </a:rPr>
-              <a:t>Not Started</a:t>
-            </a:r>
-            <a:endParaRPr lang="en-US" sz="700" dirty="0"/>
-          </a:p>
-        </p:txBody>
-      </p:sp>
-      <p:sp>
-        <p:nvSpPr>
-          <p:cNvPr id="108" name="Shape 106"/>
-          <p:cNvSpPr/>
-          <p:nvPr/>
-        </p:nvSpPr>
-        <p:spPr>
-          <a:xfrm>
-            <a:off x="164592" y="4480560"/>
-            <a:ext cx="9116568" cy="1170432"/>
-          </a:xfrm>
-          <a:prstGeom prst="rect">
-            <a:avLst/>
-          </a:prstGeom>
-          <a:solidFill>
-            <a:srgbClr val="FFFFFF"/>
-          </a:solidFill>
-          <a:ln w="6350">
-            <a:solidFill>
-              <a:srgbClr val="E5E7EB"/>
-            </a:solidFill>
-            <a:prstDash val="solid"/>
-          </a:ln>
-        </p:spPr>
-      </p:sp>
-      <p:sp>
-        <p:nvSpPr>
-          <p:cNvPr id="109" name="Shape 107"/>
-          <p:cNvSpPr/>
-          <p:nvPr/>
-        </p:nvSpPr>
-        <p:spPr>
-          <a:xfrm>
-            <a:off x="182880" y="4553712"/>
-            <a:ext cx="859536" cy="1024128"/>
-          </a:xfrm>
-          <a:prstGeom prst="roundRect">
-            <a:avLst>
-              <a:gd name="adj" fmla="val 5319"/>
-            </a:avLst>
-          </a:prstGeom>
-          <a:solidFill>
-            <a:srgbClr val="9CA3AF"/>
-          </a:solidFill>
-          <a:ln w="12700">
-            <a:solidFill>
-              <a:srgbClr val="9CA3AF"/>
-            </a:solidFill>
-            <a:prstDash val="solid"/>
-          </a:ln>
-        </p:spPr>
-      </p:sp>
-      <p:sp>
-        <p:nvSpPr>
-          <p:cNvPr id="110" name="Text 108"/>
-          <p:cNvSpPr/>
-          <p:nvPr/>
-        </p:nvSpPr>
-        <p:spPr>
-          <a:xfrm>
-            <a:off x="182880" y="4553712"/>
-            <a:ext cx="859536" cy="1024128"/>
-          </a:xfrm>
-          <a:prstGeom prst="rect">
-            <a:avLst/>
-          </a:prstGeom>
-          <a:noFill/>
-          <a:ln/>
-        </p:spPr>
-        <p:txBody>
-          <a:bodyPr wrap="square" lIns="0" tIns="0" rIns="0" bIns="0" rtlCol="0" anchor="ctr"/>
-          <a:lstStyle/>
-          <a:p>
-            <a:pPr algn="ctr" indent="0" marL="0">
-              <a:buNone/>
-            </a:pPr>
-            <a:r>
-              <a:rPr lang="en-US" sz="950" b="1" dirty="0">
-                <a:solidFill>
-                  <a:srgbClr val="FFFFFF"/>
-                </a:solidFill>
-              </a:rPr>
-              <a:t>Merchandising</a:t>
-            </a:r>
-            <a:endParaRPr lang="en-US" sz="950" dirty="0"/>
-          </a:p>
-        </p:txBody>
-      </p:sp>
-      <p:sp>
-        <p:nvSpPr>
-          <p:cNvPr id="111" name="Text 109"/>
-          <p:cNvSpPr/>
-          <p:nvPr/>
-        </p:nvSpPr>
-        <p:spPr>
-          <a:xfrm>
-            <a:off x="1170432" y="4526280"/>
-            <a:ext cx="8110728" cy="182880"/>
-          </a:xfrm>
-          <a:prstGeom prst="rect">
-            <a:avLst/>
-          </a:prstGeom>
-          <a:noFill/>
-          <a:ln/>
-        </p:spPr>
-        <p:txBody>
-          <a:bodyPr wrap="square" lIns="0" tIns="0" rIns="0" bIns="0" rtlCol="0" anchor="ctr"/>
-          <a:lstStyle/>
-          <a:p>
-            <a:pPr algn="l" indent="0" marL="0">
-              <a:buNone/>
-            </a:pPr>
-            <a:r>
-              <a:rPr lang="en-US" sz="750" dirty="0">
-                <a:solidFill>
-                  <a:srgbClr val="9CA3AF"/>
-                </a:solidFill>
-              </a:rPr>
-              <a:t>5 / 9 In Progress</a:t>
-            </a:r>
-            <a:endParaRPr lang="en-US" sz="750" dirty="0"/>
-          </a:p>
-        </p:txBody>
-      </p:sp>
-      <p:sp>
-        <p:nvSpPr>
-          <p:cNvPr id="112" name="Shape 110"/>
-          <p:cNvSpPr/>
-          <p:nvPr/>
-        </p:nvSpPr>
-        <p:spPr>
-          <a:xfrm>
-            <a:off x="1170432" y="4745736"/>
-            <a:ext cx="932688" cy="182880"/>
-          </a:xfrm>
-          <a:prstGeom prst="roundRect">
-            <a:avLst>
-              <a:gd name="adj" fmla="val 15000"/>
-            </a:avLst>
-          </a:prstGeom>
-          <a:solidFill>
-            <a:srgbClr val="FFFFFF"/>
-          </a:solidFill>
-          <a:ln w="9525">
-            <a:solidFill>
-              <a:srgbClr val="CBD5E1"/>
-            </a:solidFill>
-            <a:prstDash val="solid"/>
-          </a:ln>
-        </p:spPr>
-      </p:sp>
-      <p:sp>
-        <p:nvSpPr>
-          <p:cNvPr id="113" name="Text 111"/>
-          <p:cNvSpPr/>
-          <p:nvPr/>
-        </p:nvSpPr>
-        <p:spPr>
-          <a:xfrm>
-            <a:off x="1170432" y="4745736"/>
-            <a:ext cx="932688" cy="182880"/>
-          </a:xfrm>
-          <a:prstGeom prst="rect">
-            <a:avLst/>
-          </a:prstGeom>
-          <a:noFill/>
-          <a:ln/>
-        </p:spPr>
-        <p:txBody>
-          <a:bodyPr wrap="square" lIns="0" tIns="0" rIns="0" bIns="0" rtlCol="0" anchor="ctr"/>
-          <a:lstStyle/>
-          <a:p>
-            <a:pPr algn="ctr" indent="0" marL="0">
-              <a:buNone/>
-            </a:pPr>
-            <a:r>
-              <a:rPr lang="en-US" sz="750" b="1" dirty="0">
-                <a:solidFill>
-                  <a:srgbClr val="1E293B"/>
-                </a:solidFill>
-              </a:rPr>
-              <a:t>Metadata</a:t>
-            </a:r>
-            <a:endParaRPr lang="en-US" sz="750" dirty="0"/>
-          </a:p>
-        </p:txBody>
-      </p:sp>
-      <p:sp>
-        <p:nvSpPr>
-          <p:cNvPr id="114" name="Shape 112"/>
-          <p:cNvSpPr/>
-          <p:nvPr/>
-        </p:nvSpPr>
-        <p:spPr>
-          <a:xfrm>
-            <a:off x="1170432" y="4956048"/>
-            <a:ext cx="932688" cy="155448"/>
-          </a:xfrm>
-          <a:prstGeom prst="roundRect">
-            <a:avLst>
-              <a:gd name="adj" fmla="val 17647"/>
-            </a:avLst>
-          </a:prstGeom>
-          <a:solidFill>
-            <a:srgbClr val="1558A8"/>
-          </a:solidFill>
-          <a:ln w="12700">
-            <a:solidFill>
-              <a:srgbClr val="1558A8"/>
-            </a:solidFill>
-            <a:prstDash val="solid"/>
-          </a:ln>
-        </p:spPr>
-      </p:sp>
-      <p:sp>
-        <p:nvSpPr>
-          <p:cNvPr id="115" name="Text 113"/>
-          <p:cNvSpPr/>
-          <p:nvPr/>
-        </p:nvSpPr>
-        <p:spPr>
-          <a:xfrm>
-            <a:off x="1170432" y="4956048"/>
-            <a:ext cx="932688" cy="155448"/>
-          </a:xfrm>
-          <a:prstGeom prst="rect">
-            <a:avLst/>
-          </a:prstGeom>
-          <a:noFill/>
-          <a:ln/>
-        </p:spPr>
-        <p:txBody>
-          <a:bodyPr wrap="square" lIns="0" tIns="0" rIns="0" bIns="0" rtlCol="0" anchor="ctr"/>
-          <a:lstStyle/>
-          <a:p>
-            <a:pPr algn="ctr" indent="0" marL="0">
-              <a:buNone/>
-            </a:pPr>
-            <a:r>
-              <a:rPr lang="en-US" sz="700" dirty="0">
-                <a:solidFill>
-                  <a:srgbClr val="FFFFFF"/>
-                </a:solidFill>
-              </a:rPr>
-              <a:t>In Progress</a:t>
-            </a:r>
-            <a:endParaRPr lang="en-US" sz="700" dirty="0"/>
-          </a:p>
-        </p:txBody>
-      </p:sp>
-      <p:sp>
-        <p:nvSpPr>
-          <p:cNvPr id="116" name="Shape 114"/>
-          <p:cNvSpPr/>
-          <p:nvPr/>
-        </p:nvSpPr>
-        <p:spPr>
-          <a:xfrm>
-            <a:off x="2185416" y="4745736"/>
-            <a:ext cx="932688" cy="182880"/>
-          </a:xfrm>
-          <a:prstGeom prst="roundRect">
-            <a:avLst>
-              <a:gd name="adj" fmla="val 15000"/>
-            </a:avLst>
-          </a:prstGeom>
-          <a:solidFill>
-            <a:srgbClr val="FFFFFF"/>
-          </a:solidFill>
-          <a:ln w="9525">
-            <a:solidFill>
-              <a:srgbClr val="CBD5E1"/>
-            </a:solidFill>
-            <a:prstDash val="solid"/>
-          </a:ln>
-        </p:spPr>
-      </p:sp>
-      <p:sp>
-        <p:nvSpPr>
-          <p:cNvPr id="117" name="Text 115"/>
-          <p:cNvSpPr/>
-          <p:nvPr/>
-        </p:nvSpPr>
-        <p:spPr>
-          <a:xfrm>
-            <a:off x="2185416" y="4745736"/>
-            <a:ext cx="932688" cy="182880"/>
-          </a:xfrm>
-          <a:prstGeom prst="rect">
-            <a:avLst/>
-          </a:prstGeom>
-          <a:noFill/>
-          <a:ln/>
-        </p:spPr>
-        <p:txBody>
-          <a:bodyPr wrap="square" lIns="0" tIns="0" rIns="0" bIns="0" rtlCol="0" anchor="ctr"/>
-          <a:lstStyle/>
-          <a:p>
-            <a:pPr algn="ctr" indent="0" marL="0">
-              <a:buNone/>
-            </a:pPr>
-            <a:r>
-              <a:rPr lang="en-US" sz="750" b="1" dirty="0">
-                <a:solidFill>
-                  <a:srgbClr val="1E293B"/>
-                </a:solidFill>
-              </a:rPr>
-              <a:t>Images</a:t>
-            </a:r>
-            <a:endParaRPr lang="en-US" sz="750" dirty="0"/>
-          </a:p>
-        </p:txBody>
-      </p:sp>
-      <p:sp>
-        <p:nvSpPr>
-          <p:cNvPr id="118" name="Shape 116"/>
-          <p:cNvSpPr/>
-          <p:nvPr/>
-        </p:nvSpPr>
-        <p:spPr>
-          <a:xfrm>
-            <a:off x="2185416" y="4956048"/>
-            <a:ext cx="932688" cy="155448"/>
-          </a:xfrm>
-          <a:prstGeom prst="roundRect">
-            <a:avLst>
-              <a:gd name="adj" fmla="val 17647"/>
-            </a:avLst>
-          </a:prstGeom>
-          <a:solidFill>
-            <a:srgbClr val="1558A8"/>
-          </a:solidFill>
-          <a:ln w="12700">
-            <a:solidFill>
-              <a:srgbClr val="1558A8"/>
-            </a:solidFill>
-            <a:prstDash val="solid"/>
-          </a:ln>
-        </p:spPr>
-      </p:sp>
-      <p:sp>
-        <p:nvSpPr>
-          <p:cNvPr id="119" name="Text 117"/>
-          <p:cNvSpPr/>
-          <p:nvPr/>
-        </p:nvSpPr>
-        <p:spPr>
-          <a:xfrm>
-            <a:off x="2185416" y="4956048"/>
-            <a:ext cx="932688" cy="155448"/>
-          </a:xfrm>
-          <a:prstGeom prst="rect">
-            <a:avLst/>
-          </a:prstGeom>
-          <a:noFill/>
-          <a:ln/>
-        </p:spPr>
-        <p:txBody>
-          <a:bodyPr wrap="square" lIns="0" tIns="0" rIns="0" bIns="0" rtlCol="0" anchor="ctr"/>
-          <a:lstStyle/>
-          <a:p>
-            <a:pPr algn="ctr" indent="0" marL="0">
-              <a:buNone/>
-            </a:pPr>
-            <a:r>
-              <a:rPr lang="en-US" sz="700" dirty="0">
-                <a:solidFill>
-                  <a:srgbClr val="FFFFFF"/>
-                </a:solidFill>
-              </a:rPr>
-              <a:t>In Progress</a:t>
-            </a:r>
-            <a:endParaRPr lang="en-US" sz="700" dirty="0"/>
-          </a:p>
-        </p:txBody>
-      </p:sp>
-      <p:sp>
-        <p:nvSpPr>
-          <p:cNvPr id="120" name="Shape 118"/>
-          <p:cNvSpPr/>
-          <p:nvPr/>
-        </p:nvSpPr>
-        <p:spPr>
-          <a:xfrm>
-            <a:off x="3200400" y="4745736"/>
-            <a:ext cx="932688" cy="182880"/>
-          </a:xfrm>
-          <a:prstGeom prst="roundRect">
-            <a:avLst>
-              <a:gd name="adj" fmla="val 15000"/>
-            </a:avLst>
-          </a:prstGeom>
-          <a:solidFill>
-            <a:srgbClr val="FFFFFF"/>
-          </a:solidFill>
-          <a:ln w="9525">
-            <a:solidFill>
-              <a:srgbClr val="CBD5E1"/>
-            </a:solidFill>
-            <a:prstDash val="solid"/>
-          </a:ln>
-        </p:spPr>
-      </p:sp>
-      <p:sp>
-        <p:nvSpPr>
-          <p:cNvPr id="121" name="Text 119"/>
-          <p:cNvSpPr/>
-          <p:nvPr/>
-        </p:nvSpPr>
-        <p:spPr>
-          <a:xfrm>
-            <a:off x="3200400" y="4745736"/>
-            <a:ext cx="932688" cy="182880"/>
-          </a:xfrm>
-          <a:prstGeom prst="rect">
-            <a:avLst/>
-          </a:prstGeom>
-          <a:noFill/>
-          <a:ln/>
-        </p:spPr>
-        <p:txBody>
-          <a:bodyPr wrap="square" lIns="0" tIns="0" rIns="0" bIns="0" rtlCol="0" anchor="ctr"/>
-          <a:lstStyle/>
-          <a:p>
-            <a:pPr algn="ctr" indent="0" marL="0">
-              <a:buNone/>
-            </a:pPr>
-            <a:r>
-              <a:rPr lang="en-US" sz="750" b="1" dirty="0">
-                <a:solidFill>
-                  <a:srgbClr val="1E293B"/>
-                </a:solidFill>
-              </a:rPr>
-              <a:t>Carousels</a:t>
-            </a:r>
-            <a:endParaRPr lang="en-US" sz="750" dirty="0"/>
-          </a:p>
-        </p:txBody>
-      </p:sp>
-      <p:sp>
-        <p:nvSpPr>
-          <p:cNvPr id="122" name="Shape 120"/>
-          <p:cNvSpPr/>
-          <p:nvPr/>
-        </p:nvSpPr>
-        <p:spPr>
-          <a:xfrm>
-            <a:off x="3200400" y="4956048"/>
-            <a:ext cx="932688" cy="155448"/>
-          </a:xfrm>
-          <a:prstGeom prst="roundRect">
-            <a:avLst>
-              <a:gd name="adj" fmla="val 17647"/>
-            </a:avLst>
-          </a:prstGeom>
-          <a:solidFill>
-            <a:srgbClr val="1558A8"/>
-          </a:solidFill>
-          <a:ln w="12700">
-            <a:solidFill>
-              <a:srgbClr val="1558A8"/>
-            </a:solidFill>
-            <a:prstDash val="solid"/>
-          </a:ln>
-        </p:spPr>
-      </p:sp>
-      <p:sp>
-        <p:nvSpPr>
-          <p:cNvPr id="123" name="Text 121"/>
-          <p:cNvSpPr/>
-          <p:nvPr/>
-        </p:nvSpPr>
-        <p:spPr>
-          <a:xfrm>
-            <a:off x="3200400" y="4956048"/>
-            <a:ext cx="932688" cy="155448"/>
-          </a:xfrm>
-          <a:prstGeom prst="rect">
-            <a:avLst/>
-          </a:prstGeom>
-          <a:noFill/>
-          <a:ln/>
-        </p:spPr>
-        <p:txBody>
-          <a:bodyPr wrap="square" lIns="0" tIns="0" rIns="0" bIns="0" rtlCol="0" anchor="ctr"/>
-          <a:lstStyle/>
-          <a:p>
-            <a:pPr algn="ctr" indent="0" marL="0">
-              <a:buNone/>
-            </a:pPr>
-            <a:r>
-              <a:rPr lang="en-US" sz="700" dirty="0">
-                <a:solidFill>
-                  <a:srgbClr val="FFFFFF"/>
-                </a:solidFill>
-              </a:rPr>
-              <a:t>In Progress</a:t>
-            </a:r>
-            <a:endParaRPr lang="en-US" sz="700" dirty="0"/>
-          </a:p>
-        </p:txBody>
-      </p:sp>
-      <p:sp>
-        <p:nvSpPr>
-          <p:cNvPr id="124" name="Shape 122"/>
-          <p:cNvSpPr/>
-          <p:nvPr/>
-        </p:nvSpPr>
-        <p:spPr>
-          <a:xfrm>
-            <a:off x="4215384" y="4745736"/>
-            <a:ext cx="932688" cy="182880"/>
-          </a:xfrm>
-          <a:prstGeom prst="roundRect">
-            <a:avLst>
-              <a:gd name="adj" fmla="val 15000"/>
-            </a:avLst>
-          </a:prstGeom>
-          <a:solidFill>
-            <a:srgbClr val="FFFFFF"/>
-          </a:solidFill>
-          <a:ln w="9525">
-            <a:solidFill>
-              <a:srgbClr val="CBD5E1"/>
-            </a:solidFill>
-            <a:prstDash val="solid"/>
-          </a:ln>
-        </p:spPr>
-      </p:sp>
-      <p:sp>
-        <p:nvSpPr>
-          <p:cNvPr id="125" name="Text 123"/>
-          <p:cNvSpPr/>
-          <p:nvPr/>
-        </p:nvSpPr>
-        <p:spPr>
-          <a:xfrm>
-            <a:off x="4215384" y="4745736"/>
-            <a:ext cx="932688" cy="182880"/>
-          </a:xfrm>
-          <a:prstGeom prst="rect">
-            <a:avLst/>
-          </a:prstGeom>
-          <a:noFill/>
-          <a:ln/>
-        </p:spPr>
-        <p:txBody>
-          <a:bodyPr wrap="square" lIns="0" tIns="0" rIns="0" bIns="0" rtlCol="0" anchor="ctr"/>
-          <a:lstStyle/>
-          <a:p>
-            <a:pPr algn="ctr" indent="0" marL="0">
-              <a:buNone/>
-            </a:pPr>
-            <a:r>
-              <a:rPr lang="en-US" sz="750" b="1" dirty="0">
-                <a:solidFill>
-                  <a:srgbClr val="1E293B"/>
-                </a:solidFill>
-              </a:rPr>
-              <a:t>Live Events</a:t>
-            </a:r>
-            <a:endParaRPr lang="en-US" sz="750" dirty="0"/>
-          </a:p>
-        </p:txBody>
-      </p:sp>
-      <p:sp>
-        <p:nvSpPr>
-          <p:cNvPr id="126" name="Shape 124"/>
-          <p:cNvSpPr/>
-          <p:nvPr/>
-        </p:nvSpPr>
-        <p:spPr>
-          <a:xfrm>
-            <a:off x="4215384" y="4956048"/>
-            <a:ext cx="932688" cy="155448"/>
-          </a:xfrm>
-          <a:prstGeom prst="roundRect">
-            <a:avLst>
-              <a:gd name="adj" fmla="val 17647"/>
-            </a:avLst>
-          </a:prstGeom>
-          <a:solidFill>
-            <a:srgbClr val="1558A8"/>
-          </a:solidFill>
-          <a:ln w="12700">
-            <a:solidFill>
-              <a:srgbClr val="1558A8"/>
-            </a:solidFill>
-            <a:prstDash val="solid"/>
-          </a:ln>
-        </p:spPr>
-      </p:sp>
-      <p:sp>
-        <p:nvSpPr>
-          <p:cNvPr id="127" name="Text 125"/>
-          <p:cNvSpPr/>
-          <p:nvPr/>
-        </p:nvSpPr>
-        <p:spPr>
-          <a:xfrm>
-            <a:off x="4215384" y="4956048"/>
-            <a:ext cx="932688" cy="155448"/>
-          </a:xfrm>
-          <a:prstGeom prst="rect">
-            <a:avLst/>
-          </a:prstGeom>
-          <a:noFill/>
-          <a:ln/>
-        </p:spPr>
-        <p:txBody>
-          <a:bodyPr wrap="square" lIns="0" tIns="0" rIns="0" bIns="0" rtlCol="0" anchor="ctr"/>
-          <a:lstStyle/>
-          <a:p>
-            <a:pPr algn="ctr" indent="0" marL="0">
-              <a:buNone/>
-            </a:pPr>
-            <a:r>
-              <a:rPr lang="en-US" sz="700" dirty="0">
-                <a:solidFill>
-                  <a:srgbClr val="FFFFFF"/>
-                </a:solidFill>
-              </a:rPr>
-              <a:t>In Progress</a:t>
-            </a:r>
-            <a:endParaRPr lang="en-US" sz="700" dirty="0"/>
-          </a:p>
-        </p:txBody>
-      </p:sp>
-      <p:sp>
-        <p:nvSpPr>
-          <p:cNvPr id="128" name="Shape 126"/>
-          <p:cNvSpPr/>
-          <p:nvPr/>
-        </p:nvSpPr>
-        <p:spPr>
-          <a:xfrm>
-            <a:off x="5230368" y="4745736"/>
-            <a:ext cx="932688" cy="182880"/>
-          </a:xfrm>
-          <a:prstGeom prst="roundRect">
-            <a:avLst>
-              <a:gd name="adj" fmla="val 15000"/>
-            </a:avLst>
-          </a:prstGeom>
-          <a:solidFill>
-            <a:srgbClr val="FFFFFF"/>
-          </a:solidFill>
-          <a:ln w="9525">
-            <a:solidFill>
-              <a:srgbClr val="CBD5E1"/>
-            </a:solidFill>
-            <a:prstDash val="solid"/>
-          </a:ln>
-        </p:spPr>
-      </p:sp>
-      <p:sp>
-        <p:nvSpPr>
-          <p:cNvPr id="129" name="Text 127"/>
-          <p:cNvSpPr/>
-          <p:nvPr/>
-        </p:nvSpPr>
-        <p:spPr>
-          <a:xfrm>
-            <a:off x="5230368" y="4745736"/>
-            <a:ext cx="932688" cy="182880"/>
-          </a:xfrm>
-          <a:prstGeom prst="rect">
-            <a:avLst/>
-          </a:prstGeom>
-          <a:noFill/>
-          <a:ln/>
-        </p:spPr>
-        <p:txBody>
-          <a:bodyPr wrap="square" lIns="0" tIns="0" rIns="0" bIns="0" rtlCol="0" anchor="ctr"/>
-          <a:lstStyle/>
-          <a:p>
-            <a:pPr algn="ctr" indent="0" marL="0">
-              <a:buNone/>
-            </a:pPr>
-            <a:r>
-              <a:rPr lang="en-US" sz="750" b="1" dirty="0">
-                <a:solidFill>
-                  <a:srgbClr val="1E293B"/>
-                </a:solidFill>
-              </a:rPr>
-              <a:t>Back Catalog</a:t>
-            </a:r>
-            <a:endParaRPr lang="en-US" sz="750" dirty="0"/>
-          </a:p>
-        </p:txBody>
-      </p:sp>
-      <p:sp>
-        <p:nvSpPr>
-          <p:cNvPr id="130" name="Shape 128"/>
-          <p:cNvSpPr/>
-          <p:nvPr/>
-        </p:nvSpPr>
-        <p:spPr>
-          <a:xfrm>
-            <a:off x="5230368" y="4956048"/>
-            <a:ext cx="932688" cy="155448"/>
-          </a:xfrm>
-          <a:prstGeom prst="roundRect">
-            <a:avLst>
-              <a:gd name="adj" fmla="val 17647"/>
-            </a:avLst>
-          </a:prstGeom>
-          <a:solidFill>
-            <a:srgbClr val="F3F4F6"/>
-          </a:solidFill>
-          <a:ln w="9525">
-            <a:solidFill>
-              <a:srgbClr val="D1D5DB"/>
-            </a:solidFill>
-            <a:prstDash val="solid"/>
-          </a:ln>
-        </p:spPr>
-      </p:sp>
-      <p:sp>
-        <p:nvSpPr>
-          <p:cNvPr id="131" name="Text 129"/>
-          <p:cNvSpPr/>
-          <p:nvPr/>
-        </p:nvSpPr>
-        <p:spPr>
-          <a:xfrm>
-            <a:off x="5230368" y="4956048"/>
-            <a:ext cx="932688" cy="155448"/>
-          </a:xfrm>
-          <a:prstGeom prst="rect">
-            <a:avLst/>
-          </a:prstGeom>
-          <a:noFill/>
-          <a:ln/>
-        </p:spPr>
-        <p:txBody>
-          <a:bodyPr wrap="square" lIns="0" tIns="0" rIns="0" bIns="0" rtlCol="0" anchor="ctr"/>
-          <a:lstStyle/>
-          <a:p>
-            <a:pPr algn="ctr" indent="0" marL="0">
-              <a:buNone/>
-            </a:pPr>
-            <a:r>
-              <a:rPr lang="en-US" sz="700" dirty="0">
-                <a:solidFill>
-                  <a:srgbClr val="374151"/>
-                </a:solidFill>
-              </a:rPr>
-              <a:t>Not Started</a:t>
-            </a:r>
-            <a:endParaRPr lang="en-US" sz="700" dirty="0"/>
-          </a:p>
-        </p:txBody>
-      </p:sp>
-      <p:sp>
-        <p:nvSpPr>
-          <p:cNvPr id="132" name="Shape 130"/>
-          <p:cNvSpPr/>
-          <p:nvPr/>
-        </p:nvSpPr>
-        <p:spPr>
-          <a:xfrm>
-            <a:off x="6245352" y="4745736"/>
-            <a:ext cx="932688" cy="182880"/>
-          </a:xfrm>
-          <a:prstGeom prst="roundRect">
-            <a:avLst>
-              <a:gd name="adj" fmla="val 15000"/>
-            </a:avLst>
-          </a:prstGeom>
-          <a:solidFill>
-            <a:srgbClr val="FFFFFF"/>
-          </a:solidFill>
-          <a:ln w="9525">
-            <a:solidFill>
-              <a:srgbClr val="CBD5E1"/>
-            </a:solidFill>
-            <a:prstDash val="solid"/>
-          </a:ln>
-        </p:spPr>
-      </p:sp>
-      <p:sp>
-        <p:nvSpPr>
-          <p:cNvPr id="133" name="Text 131"/>
-          <p:cNvSpPr/>
-          <p:nvPr/>
-        </p:nvSpPr>
-        <p:spPr>
-          <a:xfrm>
-            <a:off x="6245352" y="4745736"/>
-            <a:ext cx="932688" cy="182880"/>
-          </a:xfrm>
-          <a:prstGeom prst="rect">
-            <a:avLst/>
-          </a:prstGeom>
-          <a:noFill/>
-          <a:ln/>
-        </p:spPr>
-        <p:txBody>
-          <a:bodyPr wrap="square" lIns="0" tIns="0" rIns="0" bIns="0" rtlCol="0" anchor="ctr"/>
-          <a:lstStyle/>
-          <a:p>
-            <a:pPr algn="ctr" indent="0" marL="0">
-              <a:buNone/>
-            </a:pPr>
-            <a:r>
-              <a:rPr lang="en-US" sz="750" b="1" dirty="0">
-                <a:solidFill>
-                  <a:srgbClr val="1E293B"/>
-                </a:solidFill>
-              </a:rPr>
-              <a:t>Full Replays</a:t>
-            </a:r>
-            <a:endParaRPr lang="en-US" sz="750" dirty="0"/>
-          </a:p>
-        </p:txBody>
-      </p:sp>
-      <p:sp>
-        <p:nvSpPr>
-          <p:cNvPr id="134" name="Shape 132"/>
-          <p:cNvSpPr/>
-          <p:nvPr/>
-        </p:nvSpPr>
-        <p:spPr>
-          <a:xfrm>
-            <a:off x="6245352" y="4956048"/>
-            <a:ext cx="932688" cy="155448"/>
-          </a:xfrm>
-          <a:prstGeom prst="roundRect">
-            <a:avLst>
-              <a:gd name="adj" fmla="val 17647"/>
-            </a:avLst>
-          </a:prstGeom>
-          <a:solidFill>
-            <a:srgbClr val="F3F4F6"/>
-          </a:solidFill>
-          <a:ln w="9525">
-            <a:solidFill>
-              <a:srgbClr val="D1D5DB"/>
-            </a:solidFill>
-            <a:prstDash val="solid"/>
-          </a:ln>
-        </p:spPr>
-      </p:sp>
-      <p:sp>
-        <p:nvSpPr>
-          <p:cNvPr id="135" name="Text 133"/>
-          <p:cNvSpPr/>
-          <p:nvPr/>
-        </p:nvSpPr>
-        <p:spPr>
-          <a:xfrm>
-            <a:off x="6245352" y="4956048"/>
-            <a:ext cx="932688" cy="155448"/>
-          </a:xfrm>
-          <a:prstGeom prst="rect">
-            <a:avLst/>
-          </a:prstGeom>
-          <a:noFill/>
-          <a:ln/>
-        </p:spPr>
-        <p:txBody>
-          <a:bodyPr wrap="square" lIns="0" tIns="0" rIns="0" bIns="0" rtlCol="0" anchor="ctr"/>
-          <a:lstStyle/>
-          <a:p>
-            <a:pPr algn="ctr" indent="0" marL="0">
-              <a:buNone/>
-            </a:pPr>
-            <a:r>
-              <a:rPr lang="en-US" sz="700" dirty="0">
-                <a:solidFill>
-                  <a:srgbClr val="374151"/>
-                </a:solidFill>
-              </a:rPr>
-              <a:t>Not Started</a:t>
-            </a:r>
-            <a:endParaRPr lang="en-US" sz="700" dirty="0"/>
-          </a:p>
-        </p:txBody>
-      </p:sp>
-      <p:sp>
-        <p:nvSpPr>
-          <p:cNvPr id="136" name="Shape 134"/>
-          <p:cNvSpPr/>
-          <p:nvPr/>
-        </p:nvSpPr>
-        <p:spPr>
-          <a:xfrm>
-            <a:off x="7260336" y="4745736"/>
-            <a:ext cx="932688" cy="182880"/>
-          </a:xfrm>
-          <a:prstGeom prst="roundRect">
-            <a:avLst>
-              <a:gd name="adj" fmla="val 15000"/>
-            </a:avLst>
-          </a:prstGeom>
-          <a:solidFill>
-            <a:srgbClr val="FFFFFF"/>
-          </a:solidFill>
-          <a:ln w="9525">
-            <a:solidFill>
-              <a:srgbClr val="CBD5E1"/>
-            </a:solidFill>
-            <a:prstDash val="solid"/>
-          </a:ln>
-        </p:spPr>
-      </p:sp>
-      <p:sp>
-        <p:nvSpPr>
-          <p:cNvPr id="137" name="Text 135"/>
-          <p:cNvSpPr/>
-          <p:nvPr/>
-        </p:nvSpPr>
-        <p:spPr>
-          <a:xfrm>
-            <a:off x="7260336" y="4745736"/>
-            <a:ext cx="932688" cy="182880"/>
-          </a:xfrm>
-          <a:prstGeom prst="rect">
-            <a:avLst/>
-          </a:prstGeom>
-          <a:noFill/>
-          <a:ln/>
-        </p:spPr>
-        <p:txBody>
-          <a:bodyPr wrap="square" lIns="0" tIns="0" rIns="0" bIns="0" rtlCol="0" anchor="ctr"/>
-          <a:lstStyle/>
-          <a:p>
-            <a:pPr algn="ctr" indent="0" marL="0">
-              <a:buNone/>
-            </a:pPr>
-            <a:r>
-              <a:rPr lang="en-US" sz="750" b="1" dirty="0">
-                <a:solidFill>
-                  <a:srgbClr val="1E293B"/>
-                </a:solidFill>
-              </a:rPr>
-              <a:t>M15</a:t>
-            </a:r>
-            <a:endParaRPr lang="en-US" sz="750" dirty="0"/>
-          </a:p>
-        </p:txBody>
-      </p:sp>
-      <p:sp>
-        <p:nvSpPr>
-          <p:cNvPr id="138" name="Shape 136"/>
-          <p:cNvSpPr/>
-          <p:nvPr/>
-        </p:nvSpPr>
-        <p:spPr>
-          <a:xfrm>
-            <a:off x="7260336" y="4956048"/>
-            <a:ext cx="932688" cy="155448"/>
-          </a:xfrm>
-          <a:prstGeom prst="roundRect">
-            <a:avLst>
-              <a:gd name="adj" fmla="val 17647"/>
-            </a:avLst>
-          </a:prstGeom>
-          <a:solidFill>
-            <a:srgbClr val="F3F4F6"/>
-          </a:solidFill>
-          <a:ln w="9525">
-            <a:solidFill>
-              <a:srgbClr val="D1D5DB"/>
-            </a:solidFill>
-            <a:prstDash val="solid"/>
-          </a:ln>
-        </p:spPr>
-      </p:sp>
-      <p:sp>
-        <p:nvSpPr>
-          <p:cNvPr id="139" name="Text 137"/>
-          <p:cNvSpPr/>
-          <p:nvPr/>
-        </p:nvSpPr>
-        <p:spPr>
-          <a:xfrm>
-            <a:off x="7260336" y="4956048"/>
-            <a:ext cx="932688" cy="155448"/>
-          </a:xfrm>
-          <a:prstGeom prst="rect">
-            <a:avLst/>
-          </a:prstGeom>
-          <a:noFill/>
-          <a:ln/>
-        </p:spPr>
-        <p:txBody>
-          <a:bodyPr wrap="square" lIns="0" tIns="0" rIns="0" bIns="0" rtlCol="0" anchor="ctr"/>
-          <a:lstStyle/>
-          <a:p>
-            <a:pPr algn="ctr" indent="0" marL="0">
-              <a:buNone/>
-            </a:pPr>
-            <a:r>
-              <a:rPr lang="en-US" sz="700" dirty="0">
-                <a:solidFill>
-                  <a:srgbClr val="374151"/>
-                </a:solidFill>
-              </a:rPr>
-              <a:t>Not Started</a:t>
-            </a:r>
-            <a:endParaRPr lang="en-US" sz="700" dirty="0"/>
-          </a:p>
-        </p:txBody>
-      </p:sp>
-      <p:sp>
-        <p:nvSpPr>
-          <p:cNvPr id="140" name="Shape 138"/>
-          <p:cNvSpPr/>
-          <p:nvPr/>
-        </p:nvSpPr>
-        <p:spPr>
-          <a:xfrm>
-            <a:off x="8275320" y="4745736"/>
-            <a:ext cx="932688" cy="182880"/>
-          </a:xfrm>
-          <a:prstGeom prst="roundRect">
-            <a:avLst>
-              <a:gd name="adj" fmla="val 15000"/>
-            </a:avLst>
-          </a:prstGeom>
-          <a:solidFill>
-            <a:srgbClr val="FFFFFF"/>
-          </a:solidFill>
-          <a:ln w="9525">
-            <a:solidFill>
-              <a:srgbClr val="CBD5E1"/>
-            </a:solidFill>
-            <a:prstDash val="solid"/>
-          </a:ln>
-        </p:spPr>
-      </p:sp>
-      <p:sp>
-        <p:nvSpPr>
-          <p:cNvPr id="141" name="Text 139"/>
-          <p:cNvSpPr/>
-          <p:nvPr/>
-        </p:nvSpPr>
-        <p:spPr>
-          <a:xfrm>
-            <a:off x="8275320" y="4745736"/>
-            <a:ext cx="932688" cy="182880"/>
-          </a:xfrm>
-          <a:prstGeom prst="rect">
-            <a:avLst/>
-          </a:prstGeom>
-          <a:noFill/>
-          <a:ln/>
-        </p:spPr>
-        <p:txBody>
-          <a:bodyPr wrap="square" lIns="0" tIns="0" rIns="0" bIns="0" rtlCol="0" anchor="ctr"/>
-          <a:lstStyle/>
-          <a:p>
-            <a:pPr algn="ctr" indent="0" marL="0">
-              <a:buNone/>
-            </a:pPr>
-            <a:r>
-              <a:rPr lang="en-US" sz="750" b="1" dirty="0">
-                <a:solidFill>
-                  <a:srgbClr val="1E293B"/>
-                </a:solidFill>
-              </a:rPr>
-              <a:t>Highlights</a:t>
-            </a:r>
-            <a:endParaRPr lang="en-US" sz="750" dirty="0"/>
-          </a:p>
-        </p:txBody>
-      </p:sp>
-      <p:sp>
-        <p:nvSpPr>
-          <p:cNvPr id="142" name="Shape 140"/>
-          <p:cNvSpPr/>
-          <p:nvPr/>
-        </p:nvSpPr>
-        <p:spPr>
-          <a:xfrm>
-            <a:off x="8275320" y="4956048"/>
-            <a:ext cx="932688" cy="155448"/>
-          </a:xfrm>
-          <a:prstGeom prst="roundRect">
-            <a:avLst>
-              <a:gd name="adj" fmla="val 17647"/>
-            </a:avLst>
-          </a:prstGeom>
-          <a:solidFill>
-            <a:srgbClr val="F3F4F6"/>
-          </a:solidFill>
-          <a:ln w="9525">
-            <a:solidFill>
-              <a:srgbClr val="D1D5DB"/>
-            </a:solidFill>
-            <a:prstDash val="solid"/>
-          </a:ln>
-        </p:spPr>
-      </p:sp>
-      <p:sp>
-        <p:nvSpPr>
-          <p:cNvPr id="143" name="Text 141"/>
-          <p:cNvSpPr/>
-          <p:nvPr/>
-        </p:nvSpPr>
-        <p:spPr>
-          <a:xfrm>
-            <a:off x="8275320" y="4956048"/>
-            <a:ext cx="932688" cy="155448"/>
-          </a:xfrm>
-          <a:prstGeom prst="rect">
-            <a:avLst/>
-          </a:prstGeom>
-          <a:noFill/>
-          <a:ln/>
-        </p:spPr>
-        <p:txBody>
-          <a:bodyPr wrap="square" lIns="0" tIns="0" rIns="0" bIns="0" rtlCol="0" anchor="ctr"/>
-          <a:lstStyle/>
-          <a:p>
-            <a:pPr algn="ctr" indent="0" marL="0">
-              <a:buNone/>
-            </a:pPr>
-            <a:r>
-              <a:rPr lang="en-US" sz="700" dirty="0">
-                <a:solidFill>
-                  <a:srgbClr val="374151"/>
-                </a:solidFill>
-              </a:rPr>
-              <a:t>Not Started</a:t>
-            </a:r>
-            <a:endParaRPr lang="en-US" sz="700" dirty="0"/>
-          </a:p>
-        </p:txBody>
-      </p:sp>
-      <p:sp>
-        <p:nvSpPr>
-          <p:cNvPr id="144" name="Shape 142"/>
-          <p:cNvSpPr/>
-          <p:nvPr/>
-        </p:nvSpPr>
-        <p:spPr>
-          <a:xfrm>
-            <a:off x="1170432" y="5202936"/>
-            <a:ext cx="932688" cy="182880"/>
-          </a:xfrm>
-          <a:prstGeom prst="roundRect">
-            <a:avLst>
-              <a:gd name="adj" fmla="val 15000"/>
-            </a:avLst>
-          </a:prstGeom>
-          <a:solidFill>
-            <a:srgbClr val="FFFFFF"/>
-          </a:solidFill>
-          <a:ln w="9525">
-            <a:solidFill>
-              <a:srgbClr val="CBD5E1"/>
-            </a:solidFill>
-            <a:prstDash val="solid"/>
-          </a:ln>
-        </p:spPr>
-      </p:sp>
-      <p:sp>
-        <p:nvSpPr>
-          <p:cNvPr id="145" name="Text 143"/>
-          <p:cNvSpPr/>
-          <p:nvPr/>
-        </p:nvSpPr>
-        <p:spPr>
-          <a:xfrm>
-            <a:off x="1170432" y="5202936"/>
-            <a:ext cx="932688" cy="182880"/>
-          </a:xfrm>
-          <a:prstGeom prst="rect">
-            <a:avLst/>
-          </a:prstGeom>
-          <a:noFill/>
-          <a:ln/>
-        </p:spPr>
-        <p:txBody>
-          <a:bodyPr wrap="square" lIns="0" tIns="0" rIns="0" bIns="0" rtlCol="0" anchor="ctr"/>
-          <a:lstStyle/>
-          <a:p>
-            <a:pPr algn="ctr" indent="0" marL="0">
-              <a:buNone/>
-            </a:pPr>
-            <a:r>
-              <a:rPr lang="en-US" sz="750" b="1" dirty="0">
-                <a:solidFill>
-                  <a:srgbClr val="1E293B"/>
-                </a:solidFill>
-              </a:rPr>
-              <a:t>Linear</a:t>
-            </a:r>
-            <a:endParaRPr lang="en-US" sz="750" dirty="0"/>
-          </a:p>
-        </p:txBody>
-      </p:sp>
-      <p:sp>
-        <p:nvSpPr>
-          <p:cNvPr id="146" name="Shape 144"/>
-          <p:cNvSpPr/>
-          <p:nvPr/>
-        </p:nvSpPr>
-        <p:spPr>
-          <a:xfrm>
-            <a:off x="1170432" y="5413248"/>
-            <a:ext cx="932688" cy="155448"/>
-          </a:xfrm>
-          <a:prstGeom prst="roundRect">
-            <a:avLst>
-              <a:gd name="adj" fmla="val 17647"/>
-            </a:avLst>
-          </a:prstGeom>
-          <a:solidFill>
-            <a:srgbClr val="1558A8"/>
-          </a:solidFill>
-          <a:ln w="12700">
-            <a:solidFill>
-              <a:srgbClr val="1558A8"/>
-            </a:solidFill>
-            <a:prstDash val="solid"/>
-          </a:ln>
-        </p:spPr>
-      </p:sp>
-      <p:sp>
-        <p:nvSpPr>
-          <p:cNvPr id="147" name="Text 145"/>
-          <p:cNvSpPr/>
-          <p:nvPr/>
-        </p:nvSpPr>
-        <p:spPr>
-          <a:xfrm>
-            <a:off x="1170432" y="5413248"/>
-            <a:ext cx="932688" cy="155448"/>
-          </a:xfrm>
-          <a:prstGeom prst="rect">
-            <a:avLst/>
-          </a:prstGeom>
-          <a:noFill/>
-          <a:ln/>
-        </p:spPr>
-        <p:txBody>
-          <a:bodyPr wrap="square" lIns="0" tIns="0" rIns="0" bIns="0" rtlCol="0" anchor="ctr"/>
-          <a:lstStyle/>
-          <a:p>
-            <a:pPr algn="ctr" indent="0" marL="0">
-              <a:buNone/>
-            </a:pPr>
-            <a:r>
-              <a:rPr lang="en-US" sz="700" dirty="0">
-                <a:solidFill>
-                  <a:srgbClr val="FFFFFF"/>
-                </a:solidFill>
-              </a:rPr>
-              <a:t>In Progress</a:t>
-            </a:r>
-            <a:endParaRPr lang="en-US" sz="700" dirty="0"/>
-          </a:p>
-        </p:txBody>
-      </p:sp>
-      <p:sp>
-        <p:nvSpPr>
-          <p:cNvPr id="148" name="Shape 146"/>
-          <p:cNvSpPr/>
-          <p:nvPr/>
-        </p:nvSpPr>
-        <p:spPr>
-          <a:xfrm>
-            <a:off x="164592" y="5705856"/>
-            <a:ext cx="9116568" cy="1170432"/>
-          </a:xfrm>
-          <a:prstGeom prst="rect">
-            <a:avLst/>
-          </a:prstGeom>
-          <a:solidFill>
-            <a:srgbClr val="FAFBFC"/>
-          </a:solidFill>
-          <a:ln w="6350">
-            <a:solidFill>
-              <a:srgbClr val="E5E7EB"/>
-            </a:solidFill>
-            <a:prstDash val="solid"/>
-          </a:ln>
-        </p:spPr>
-      </p:sp>
-      <p:sp>
-        <p:nvSpPr>
-          <p:cNvPr id="149" name="Shape 147"/>
-          <p:cNvSpPr/>
-          <p:nvPr/>
-        </p:nvSpPr>
-        <p:spPr>
-          <a:xfrm>
-            <a:off x="182880" y="5779008"/>
-            <a:ext cx="859536" cy="1024128"/>
-          </a:xfrm>
-          <a:prstGeom prst="roundRect">
-            <a:avLst>
-              <a:gd name="adj" fmla="val 5319"/>
-            </a:avLst>
-          </a:prstGeom>
-          <a:solidFill>
-            <a:srgbClr val="9CA3AF"/>
-          </a:solidFill>
-          <a:ln w="12700">
-            <a:solidFill>
-              <a:srgbClr val="9CA3AF"/>
-            </a:solidFill>
-            <a:prstDash val="solid"/>
-          </a:ln>
-        </p:spPr>
-      </p:sp>
-      <p:sp>
-        <p:nvSpPr>
-          <p:cNvPr id="150" name="Text 148"/>
-          <p:cNvSpPr/>
-          <p:nvPr/>
-        </p:nvSpPr>
-        <p:spPr>
-          <a:xfrm>
-            <a:off x="182880" y="5779008"/>
-            <a:ext cx="859536" cy="1024128"/>
-          </a:xfrm>
-          <a:prstGeom prst="rect">
-            <a:avLst/>
-          </a:prstGeom>
-          <a:noFill/>
-          <a:ln/>
-        </p:spPr>
-        <p:txBody>
-          <a:bodyPr wrap="square" lIns="0" tIns="0" rIns="0" bIns="0" rtlCol="0" anchor="ctr"/>
-          <a:lstStyle/>
-          <a:p>
-            <a:pPr algn="ctr" indent="0" marL="0">
-              <a:buNone/>
-            </a:pPr>
-            <a:r>
-              <a:rPr lang="en-US" sz="950" b="1" dirty="0">
-                <a:solidFill>
-                  <a:srgbClr val="FFFFFF"/>
-                </a:solidFill>
-              </a:rPr>
-              <a:t>Onboarding</a:t>
-            </a:r>
-            <a:endParaRPr lang="en-US" sz="950" dirty="0"/>
-          </a:p>
-        </p:txBody>
-      </p:sp>
-      <p:sp>
-        <p:nvSpPr>
-          <p:cNvPr id="151" name="Text 149"/>
-          <p:cNvSpPr/>
-          <p:nvPr/>
-        </p:nvSpPr>
-        <p:spPr>
-          <a:xfrm>
-            <a:off x="1170432" y="5751576"/>
-            <a:ext cx="8110728" cy="182880"/>
-          </a:xfrm>
-          <a:prstGeom prst="rect">
-            <a:avLst/>
-          </a:prstGeom>
-          <a:noFill/>
-          <a:ln/>
-        </p:spPr>
-        <p:txBody>
-          <a:bodyPr wrap="square" lIns="0" tIns="0" rIns="0" bIns="0" rtlCol="0" anchor="ctr"/>
-          <a:lstStyle/>
-          <a:p>
-            <a:pPr algn="l" indent="0" marL="0">
-              <a:buNone/>
-            </a:pPr>
-            <a:r>
-              <a:rPr lang="en-US" sz="750" dirty="0">
-                <a:solidFill>
-                  <a:srgbClr val="9CA3AF"/>
-                </a:solidFill>
-              </a:rPr>
-              <a:t>1 / 5 In Progress</a:t>
-            </a:r>
-            <a:endParaRPr lang="en-US" sz="750" dirty="0"/>
-          </a:p>
-        </p:txBody>
-      </p:sp>
-      <p:sp>
-        <p:nvSpPr>
-          <p:cNvPr id="152" name="Shape 150"/>
-          <p:cNvSpPr/>
-          <p:nvPr/>
-        </p:nvSpPr>
-        <p:spPr>
-          <a:xfrm>
-            <a:off x="1170432" y="5971032"/>
-            <a:ext cx="932688" cy="182880"/>
-          </a:xfrm>
-          <a:prstGeom prst="roundRect">
-            <a:avLst>
-              <a:gd name="adj" fmla="val 15000"/>
-            </a:avLst>
-          </a:prstGeom>
-          <a:solidFill>
-            <a:srgbClr val="FFFFFF"/>
-          </a:solidFill>
-          <a:ln w="9525">
-            <a:solidFill>
-              <a:srgbClr val="CBD5E1"/>
-            </a:solidFill>
-            <a:prstDash val="solid"/>
-          </a:ln>
-        </p:spPr>
-      </p:sp>
-      <p:sp>
-        <p:nvSpPr>
-          <p:cNvPr id="153" name="Text 151"/>
-          <p:cNvSpPr/>
-          <p:nvPr/>
-        </p:nvSpPr>
-        <p:spPr>
-          <a:xfrm>
-            <a:off x="1170432" y="5971032"/>
-            <a:ext cx="932688" cy="182880"/>
-          </a:xfrm>
-          <a:prstGeom prst="rect">
-            <a:avLst/>
-          </a:prstGeom>
-          <a:noFill/>
-          <a:ln/>
-        </p:spPr>
-        <p:txBody>
-          <a:bodyPr wrap="square" lIns="0" tIns="0" rIns="0" bIns="0" rtlCol="0" anchor="ctr"/>
-          <a:lstStyle/>
-          <a:p>
-            <a:pPr algn="ctr" indent="0" marL="0">
-              <a:buNone/>
-            </a:pPr>
-            <a:r>
-              <a:rPr lang="en-US" sz="750" b="1" dirty="0">
-                <a:solidFill>
-                  <a:srgbClr val="1E293B"/>
-                </a:solidFill>
-              </a:rPr>
-              <a:t>Unentitled</a:t>
-            </a:r>
-            <a:endParaRPr lang="en-US" sz="750" dirty="0"/>
-          </a:p>
-        </p:txBody>
-      </p:sp>
-      <p:sp>
-        <p:nvSpPr>
-          <p:cNvPr id="154" name="Shape 152"/>
-          <p:cNvSpPr/>
-          <p:nvPr/>
-        </p:nvSpPr>
-        <p:spPr>
-          <a:xfrm>
-            <a:off x="1170432" y="6181344"/>
-            <a:ext cx="932688" cy="155448"/>
-          </a:xfrm>
-          <a:prstGeom prst="roundRect">
-            <a:avLst>
-              <a:gd name="adj" fmla="val 17647"/>
-            </a:avLst>
-          </a:prstGeom>
-          <a:solidFill>
-            <a:srgbClr val="F3F4F6"/>
-          </a:solidFill>
-          <a:ln w="9525">
-            <a:solidFill>
-              <a:srgbClr val="D1D5DB"/>
-            </a:solidFill>
-            <a:prstDash val="solid"/>
-          </a:ln>
-        </p:spPr>
-      </p:sp>
-      <p:sp>
-        <p:nvSpPr>
-          <p:cNvPr id="155" name="Text 153"/>
-          <p:cNvSpPr/>
-          <p:nvPr/>
-        </p:nvSpPr>
-        <p:spPr>
-          <a:xfrm>
-            <a:off x="1170432" y="6181344"/>
-            <a:ext cx="932688" cy="155448"/>
-          </a:xfrm>
-          <a:prstGeom prst="rect">
-            <a:avLst/>
-          </a:prstGeom>
-          <a:noFill/>
-          <a:ln/>
-        </p:spPr>
-        <p:txBody>
-          <a:bodyPr wrap="square" lIns="0" tIns="0" rIns="0" bIns="0" rtlCol="0" anchor="ctr"/>
-          <a:lstStyle/>
-          <a:p>
-            <a:pPr algn="ctr" indent="0" marL="0">
-              <a:buNone/>
-            </a:pPr>
-            <a:r>
-              <a:rPr lang="en-US" sz="700" dirty="0">
-                <a:solidFill>
-                  <a:srgbClr val="374151"/>
-                </a:solidFill>
-              </a:rPr>
-              <a:t>Not Started</a:t>
-            </a:r>
-            <a:endParaRPr lang="en-US" sz="700" dirty="0"/>
-          </a:p>
-        </p:txBody>
-      </p:sp>
-      <p:sp>
-        <p:nvSpPr>
-          <p:cNvPr id="156" name="Shape 154"/>
-          <p:cNvSpPr/>
-          <p:nvPr/>
-        </p:nvSpPr>
-        <p:spPr>
-          <a:xfrm>
-            <a:off x="2185416" y="5971032"/>
-            <a:ext cx="932688" cy="182880"/>
-          </a:xfrm>
-          <a:prstGeom prst="roundRect">
-            <a:avLst>
-              <a:gd name="adj" fmla="val 15000"/>
-            </a:avLst>
-          </a:prstGeom>
-          <a:solidFill>
-            <a:srgbClr val="FFFFFF"/>
-          </a:solidFill>
-          <a:ln w="9525">
-            <a:solidFill>
-              <a:srgbClr val="CBD5E1"/>
-            </a:solidFill>
-            <a:prstDash val="solid"/>
-          </a:ln>
-        </p:spPr>
-      </p:sp>
-      <p:sp>
-        <p:nvSpPr>
-          <p:cNvPr id="157" name="Text 155"/>
-          <p:cNvSpPr/>
-          <p:nvPr/>
-        </p:nvSpPr>
-        <p:spPr>
-          <a:xfrm>
-            <a:off x="2185416" y="5971032"/>
-            <a:ext cx="932688" cy="182880"/>
-          </a:xfrm>
-          <a:prstGeom prst="rect">
-            <a:avLst/>
-          </a:prstGeom>
-          <a:noFill/>
-          <a:ln/>
-        </p:spPr>
-        <p:txBody>
-          <a:bodyPr wrap="square" lIns="0" tIns="0" rIns="0" bIns="0" rtlCol="0" anchor="ctr"/>
-          <a:lstStyle/>
-          <a:p>
-            <a:pPr algn="ctr" indent="0" marL="0">
-              <a:buNone/>
-            </a:pPr>
-            <a:r>
-              <a:rPr lang="en-US" sz="750" b="1" dirty="0">
-                <a:solidFill>
-                  <a:srgbClr val="1E293B"/>
-                </a:solidFill>
-              </a:rPr>
-              <a:t>Sign-in</a:t>
-            </a:r>
-            <a:endParaRPr lang="en-US" sz="750" dirty="0"/>
-          </a:p>
-        </p:txBody>
-      </p:sp>
-      <p:sp>
-        <p:nvSpPr>
-          <p:cNvPr id="158" name="Shape 156"/>
-          <p:cNvSpPr/>
-          <p:nvPr/>
-        </p:nvSpPr>
-        <p:spPr>
-          <a:xfrm>
-            <a:off x="2185416" y="6181344"/>
-            <a:ext cx="932688" cy="155448"/>
-          </a:xfrm>
-          <a:prstGeom prst="roundRect">
-            <a:avLst>
-              <a:gd name="adj" fmla="val 17647"/>
-            </a:avLst>
-          </a:prstGeom>
-          <a:solidFill>
-            <a:srgbClr val="F3F4F6"/>
-          </a:solidFill>
-          <a:ln w="9525">
-            <a:solidFill>
-              <a:srgbClr val="D1D5DB"/>
-            </a:solidFill>
-            <a:prstDash val="solid"/>
-          </a:ln>
-        </p:spPr>
-      </p:sp>
-      <p:sp>
-        <p:nvSpPr>
-          <p:cNvPr id="159" name="Text 157"/>
-          <p:cNvSpPr/>
-          <p:nvPr/>
-        </p:nvSpPr>
-        <p:spPr>
-          <a:xfrm>
-            <a:off x="2185416" y="6181344"/>
-            <a:ext cx="932688" cy="155448"/>
-          </a:xfrm>
-          <a:prstGeom prst="rect">
-            <a:avLst/>
-          </a:prstGeom>
-          <a:noFill/>
-          <a:ln/>
-        </p:spPr>
-        <p:txBody>
-          <a:bodyPr wrap="square" lIns="0" tIns="0" rIns="0" bIns="0" rtlCol="0" anchor="ctr"/>
-          <a:lstStyle/>
-          <a:p>
-            <a:pPr algn="ctr" indent="0" marL="0">
-              <a:buNone/>
-            </a:pPr>
-            <a:r>
-              <a:rPr lang="en-US" sz="700" dirty="0">
-                <a:solidFill>
-                  <a:srgbClr val="374151"/>
-                </a:solidFill>
-              </a:rPr>
-              <a:t>Not Started</a:t>
-            </a:r>
-            <a:endParaRPr lang="en-US" sz="700" dirty="0"/>
-          </a:p>
-        </p:txBody>
-      </p:sp>
-      <p:sp>
-        <p:nvSpPr>
-          <p:cNvPr id="160" name="Shape 158"/>
-          <p:cNvSpPr/>
-          <p:nvPr/>
-        </p:nvSpPr>
-        <p:spPr>
-          <a:xfrm>
-            <a:off x="3200400" y="5971032"/>
-            <a:ext cx="932688" cy="182880"/>
-          </a:xfrm>
-          <a:prstGeom prst="roundRect">
-            <a:avLst>
-              <a:gd name="adj" fmla="val 15000"/>
-            </a:avLst>
-          </a:prstGeom>
-          <a:solidFill>
-            <a:srgbClr val="FFFFFF"/>
-          </a:solidFill>
-          <a:ln w="9525">
-            <a:solidFill>
-              <a:srgbClr val="CBD5E1"/>
-            </a:solidFill>
-            <a:prstDash val="solid"/>
-          </a:ln>
-        </p:spPr>
-      </p:sp>
-      <p:sp>
-        <p:nvSpPr>
-          <p:cNvPr id="161" name="Text 159"/>
-          <p:cNvSpPr/>
-          <p:nvPr/>
-        </p:nvSpPr>
-        <p:spPr>
-          <a:xfrm>
-            <a:off x="3200400" y="5971032"/>
-            <a:ext cx="932688" cy="182880"/>
-          </a:xfrm>
-          <a:prstGeom prst="rect">
-            <a:avLst/>
-          </a:prstGeom>
-          <a:noFill/>
-          <a:ln/>
-        </p:spPr>
-        <p:txBody>
-          <a:bodyPr wrap="square" lIns="0" tIns="0" rIns="0" bIns="0" rtlCol="0" anchor="ctr"/>
-          <a:lstStyle/>
-          <a:p>
-            <a:pPr algn="ctr" indent="0" marL="0">
-              <a:buNone/>
-            </a:pPr>
-            <a:r>
-              <a:rPr lang="en-US" sz="750" b="1" dirty="0">
-                <a:solidFill>
-                  <a:srgbClr val="1E293B"/>
-                </a:solidFill>
-              </a:rPr>
-              <a:t>Subscription</a:t>
-            </a:r>
-            <a:endParaRPr lang="en-US" sz="750" dirty="0"/>
-          </a:p>
-        </p:txBody>
-      </p:sp>
-      <p:sp>
-        <p:nvSpPr>
-          <p:cNvPr id="162" name="Shape 160"/>
-          <p:cNvSpPr/>
-          <p:nvPr/>
-        </p:nvSpPr>
-        <p:spPr>
-          <a:xfrm>
-            <a:off x="3200400" y="6181344"/>
-            <a:ext cx="932688" cy="155448"/>
-          </a:xfrm>
-          <a:prstGeom prst="roundRect">
-            <a:avLst>
-              <a:gd name="adj" fmla="val 17647"/>
-            </a:avLst>
-          </a:prstGeom>
-          <a:solidFill>
-            <a:srgbClr val="F3F4F6"/>
-          </a:solidFill>
-          <a:ln w="9525">
-            <a:solidFill>
-              <a:srgbClr val="D1D5DB"/>
-            </a:solidFill>
-            <a:prstDash val="solid"/>
-          </a:ln>
-        </p:spPr>
-      </p:sp>
-      <p:sp>
-        <p:nvSpPr>
-          <p:cNvPr id="163" name="Text 161"/>
-          <p:cNvSpPr/>
-          <p:nvPr/>
-        </p:nvSpPr>
-        <p:spPr>
-          <a:xfrm>
-            <a:off x="3200400" y="6181344"/>
-            <a:ext cx="932688" cy="155448"/>
-          </a:xfrm>
-          <a:prstGeom prst="rect">
-            <a:avLst/>
-          </a:prstGeom>
-          <a:noFill/>
-          <a:ln/>
-        </p:spPr>
-        <p:txBody>
-          <a:bodyPr wrap="square" lIns="0" tIns="0" rIns="0" bIns="0" rtlCol="0" anchor="ctr"/>
-          <a:lstStyle/>
-          <a:p>
-            <a:pPr algn="ctr" indent="0" marL="0">
-              <a:buNone/>
-            </a:pPr>
-            <a:r>
-              <a:rPr lang="en-US" sz="700" dirty="0">
-                <a:solidFill>
-                  <a:srgbClr val="374151"/>
-                </a:solidFill>
-              </a:rPr>
-              <a:t>Not Started</a:t>
-            </a:r>
-            <a:endParaRPr lang="en-US" sz="700" dirty="0"/>
-          </a:p>
-        </p:txBody>
-      </p:sp>
-      <p:sp>
-        <p:nvSpPr>
-          <p:cNvPr id="164" name="Shape 162"/>
-          <p:cNvSpPr/>
-          <p:nvPr/>
-        </p:nvSpPr>
-        <p:spPr>
-          <a:xfrm>
-            <a:off x="4215384" y="5971032"/>
-            <a:ext cx="932688" cy="182880"/>
-          </a:xfrm>
-          <a:prstGeom prst="roundRect">
-            <a:avLst>
-              <a:gd name="adj" fmla="val 15000"/>
-            </a:avLst>
-          </a:prstGeom>
-          <a:solidFill>
-            <a:srgbClr val="FFFFFF"/>
-          </a:solidFill>
-          <a:ln w="9525">
-            <a:solidFill>
-              <a:srgbClr val="CBD5E1"/>
-            </a:solidFill>
-            <a:prstDash val="solid"/>
-          </a:ln>
-        </p:spPr>
-      </p:sp>
-      <p:sp>
-        <p:nvSpPr>
-          <p:cNvPr id="165" name="Text 163"/>
-          <p:cNvSpPr/>
-          <p:nvPr/>
-        </p:nvSpPr>
-        <p:spPr>
-          <a:xfrm>
-            <a:off x="4215384" y="5971032"/>
-            <a:ext cx="932688" cy="182880"/>
-          </a:xfrm>
-          <a:prstGeom prst="rect">
-            <a:avLst/>
-          </a:prstGeom>
-          <a:noFill/>
-          <a:ln/>
-        </p:spPr>
-        <p:txBody>
-          <a:bodyPr wrap="square" lIns="0" tIns="0" rIns="0" bIns="0" rtlCol="0" anchor="ctr"/>
-          <a:lstStyle/>
-          <a:p>
-            <a:pPr algn="ctr" indent="0" marL="0">
-              <a:buNone/>
-            </a:pPr>
-            <a:r>
-              <a:rPr lang="en-US" sz="750" b="1" dirty="0">
-                <a:solidFill>
-                  <a:srgbClr val="1E293B"/>
-                </a:solidFill>
-              </a:rPr>
-              <a:t>MVPD</a:t>
-            </a:r>
-            <a:endParaRPr lang="en-US" sz="750" dirty="0"/>
-          </a:p>
-        </p:txBody>
-      </p:sp>
-      <p:sp>
-        <p:nvSpPr>
-          <p:cNvPr id="166" name="Shape 164"/>
-          <p:cNvSpPr/>
-          <p:nvPr/>
-        </p:nvSpPr>
-        <p:spPr>
-          <a:xfrm>
-            <a:off x="4215384" y="6181344"/>
-            <a:ext cx="932688" cy="155448"/>
-          </a:xfrm>
-          <a:prstGeom prst="roundRect">
-            <a:avLst>
-              <a:gd name="adj" fmla="val 17647"/>
-            </a:avLst>
-          </a:prstGeom>
-          <a:solidFill>
-            <a:srgbClr val="1558A8"/>
-          </a:solidFill>
-          <a:ln w="12700">
-            <a:solidFill>
-              <a:srgbClr val="1558A8"/>
-            </a:solidFill>
-            <a:prstDash val="solid"/>
-          </a:ln>
-        </p:spPr>
-      </p:sp>
-      <p:sp>
-        <p:nvSpPr>
-          <p:cNvPr id="167" name="Text 165"/>
-          <p:cNvSpPr/>
-          <p:nvPr/>
-        </p:nvSpPr>
-        <p:spPr>
-          <a:xfrm>
-            <a:off x="4215384" y="6181344"/>
-            <a:ext cx="932688" cy="155448"/>
-          </a:xfrm>
-          <a:prstGeom prst="rect">
-            <a:avLst/>
-          </a:prstGeom>
-          <a:noFill/>
-          <a:ln/>
-        </p:spPr>
-        <p:txBody>
-          <a:bodyPr wrap="square" lIns="0" tIns="0" rIns="0" bIns="0" rtlCol="0" anchor="ctr"/>
-          <a:lstStyle/>
-          <a:p>
-            <a:pPr algn="ctr" indent="0" marL="0">
-              <a:buNone/>
-            </a:pPr>
-            <a:r>
-              <a:rPr lang="en-US" sz="700" dirty="0">
-                <a:solidFill>
-                  <a:srgbClr val="FFFFFF"/>
-                </a:solidFill>
-              </a:rPr>
-              <a:t>In Progress</a:t>
-            </a:r>
-            <a:endParaRPr lang="en-US" sz="700" dirty="0"/>
-          </a:p>
-        </p:txBody>
-      </p:sp>
-      <p:sp>
-        <p:nvSpPr>
-          <p:cNvPr id="168" name="Shape 166"/>
-          <p:cNvSpPr/>
-          <p:nvPr/>
-        </p:nvSpPr>
-        <p:spPr>
-          <a:xfrm>
-            <a:off x="5230368" y="5971032"/>
-            <a:ext cx="932688" cy="182880"/>
-          </a:xfrm>
-          <a:prstGeom prst="roundRect">
-            <a:avLst>
-              <a:gd name="adj" fmla="val 15000"/>
-            </a:avLst>
-          </a:prstGeom>
-          <a:solidFill>
-            <a:srgbClr val="FFFFFF"/>
-          </a:solidFill>
-          <a:ln w="9525">
-            <a:solidFill>
-              <a:srgbClr val="CBD5E1"/>
-            </a:solidFill>
-            <a:prstDash val="solid"/>
-          </a:ln>
-        </p:spPr>
-      </p:sp>
-      <p:sp>
-        <p:nvSpPr>
-          <p:cNvPr id="169" name="Text 167"/>
-          <p:cNvSpPr/>
-          <p:nvPr/>
-        </p:nvSpPr>
-        <p:spPr>
-          <a:xfrm>
-            <a:off x="5230368" y="5971032"/>
-            <a:ext cx="932688" cy="182880"/>
-          </a:xfrm>
-          <a:prstGeom prst="rect">
-            <a:avLst/>
-          </a:prstGeom>
-          <a:noFill/>
-          <a:ln/>
-        </p:spPr>
-        <p:txBody>
-          <a:bodyPr wrap="square" lIns="0" tIns="0" rIns="0" bIns="0" rtlCol="0" anchor="ctr"/>
-          <a:lstStyle/>
-          <a:p>
-            <a:pPr algn="ctr" indent="0" marL="0">
-              <a:buNone/>
-            </a:pPr>
-            <a:r>
-              <a:rPr lang="en-US" sz="750" b="1" dirty="0">
-                <a:solidFill>
-                  <a:srgbClr val="1E293B"/>
-                </a:solidFill>
-              </a:rPr>
-              <a:t>Promos</a:t>
-            </a:r>
-            <a:endParaRPr lang="en-US" sz="750" dirty="0"/>
-          </a:p>
-        </p:txBody>
-      </p:sp>
-      <p:sp>
-        <p:nvSpPr>
-          <p:cNvPr id="170" name="Shape 168"/>
-          <p:cNvSpPr/>
-          <p:nvPr/>
-        </p:nvSpPr>
-        <p:spPr>
-          <a:xfrm>
-            <a:off x="5230368" y="6181344"/>
-            <a:ext cx="932688" cy="155448"/>
-          </a:xfrm>
-          <a:prstGeom prst="roundRect">
-            <a:avLst>
-              <a:gd name="adj" fmla="val 17647"/>
-            </a:avLst>
-          </a:prstGeom>
-          <a:solidFill>
-            <a:srgbClr val="F3F4F6"/>
-          </a:solidFill>
-          <a:ln w="9525">
-            <a:solidFill>
-              <a:srgbClr val="D1D5DB"/>
-            </a:solidFill>
-            <a:prstDash val="solid"/>
-          </a:ln>
-        </p:spPr>
-      </p:sp>
-      <p:sp>
-        <p:nvSpPr>
-          <p:cNvPr id="171" name="Text 169"/>
-          <p:cNvSpPr/>
-          <p:nvPr/>
-        </p:nvSpPr>
-        <p:spPr>
-          <a:xfrm>
-            <a:off x="5230368" y="6181344"/>
-            <a:ext cx="932688" cy="155448"/>
-          </a:xfrm>
-          <a:prstGeom prst="rect">
-            <a:avLst/>
-          </a:prstGeom>
-          <a:noFill/>
-          <a:ln/>
-        </p:spPr>
-        <p:txBody>
-          <a:bodyPr wrap="square" lIns="0" tIns="0" rIns="0" bIns="0" rtlCol="0" anchor="ctr"/>
-          <a:lstStyle/>
-          <a:p>
-            <a:pPr algn="ctr" indent="0" marL="0">
-              <a:buNone/>
-            </a:pPr>
-            <a:r>
-              <a:rPr lang="en-US" sz="700" dirty="0">
-                <a:solidFill>
-                  <a:srgbClr val="374151"/>
-                </a:solidFill>
-              </a:rPr>
-              <a:t>Not Started</a:t>
-            </a:r>
-            <a:endParaRPr lang="en-US" sz="700" dirty="0"/>
-          </a:p>
-        </p:txBody>
-      </p:sp>
-      <p:sp>
-        <p:nvSpPr>
-          <p:cNvPr id="172" name="Shape 170"/>
-          <p:cNvSpPr/>
-          <p:nvPr/>
-        </p:nvSpPr>
-        <p:spPr>
-          <a:xfrm>
-            <a:off x="9372600" y="804672"/>
-            <a:ext cx="2834640" cy="6071616"/>
-          </a:xfrm>
-          <a:prstGeom prst="rect">
-            <a:avLst/>
-          </a:prstGeom>
-          <a:solidFill>
-            <a:srgbClr val="F8FAFB"/>
-          </a:solidFill>
-          <a:ln w="12700">
-            <a:solidFill>
-              <a:srgbClr val="DDE1E6"/>
-            </a:solidFill>
-            <a:prstDash val="solid"/>
-          </a:ln>
-        </p:spPr>
-      </p:sp>
-      <p:sp>
-        <p:nvSpPr>
-          <p:cNvPr id="173" name="Text 171"/>
-          <p:cNvSpPr/>
-          <p:nvPr/>
-        </p:nvSpPr>
-        <p:spPr>
-          <a:xfrm>
-            <a:off x="9500616" y="950976"/>
-            <a:ext cx="2633472" cy="201168"/>
-          </a:xfrm>
-          <a:prstGeom prst="rect">
-            <a:avLst/>
-          </a:prstGeom>
-          <a:noFill/>
-          <a:ln/>
-        </p:spPr>
-        <p:txBody>
-          <a:bodyPr wrap="square" lIns="0" tIns="0" rIns="0" bIns="0" rtlCol="0" anchor="ctr"/>
-          <a:lstStyle/>
-          <a:p>
-            <a:pPr indent="0" marL="0">
-              <a:buNone/>
-            </a:pPr>
-            <a:r>
-              <a:rPr lang="en-US" sz="950" b="1" dirty="0">
-                <a:solidFill>
-                  <a:srgbClr val="111827"/>
-                </a:solidFill>
-              </a:rPr>
-              <a:t>Progress by Category</a:t>
-            </a:r>
-            <a:endParaRPr lang="en-US" sz="950" dirty="0"/>
-          </a:p>
-        </p:txBody>
-      </p:sp>
-      <p:sp>
-        <p:nvSpPr>
-          <p:cNvPr id="174" name="Text 172"/>
-          <p:cNvSpPr/>
-          <p:nvPr/>
-        </p:nvSpPr>
-        <p:spPr>
-          <a:xfrm>
-            <a:off x="9500616" y="1216152"/>
-            <a:ext cx="1803928" cy="164592"/>
-          </a:xfrm>
-          <a:prstGeom prst="rect">
-            <a:avLst/>
-          </a:prstGeom>
-          <a:noFill/>
-          <a:ln/>
-        </p:spPr>
-        <p:txBody>
-          <a:bodyPr wrap="square" lIns="0" tIns="0" rIns="0" bIns="0" rtlCol="0" anchor="ctr"/>
-          <a:lstStyle/>
-          <a:p>
-            <a:pPr indent="0" marL="0">
-              <a:buNone/>
-            </a:pPr>
-            <a:r>
-              <a:rPr lang="en-US" sz="800" dirty="0">
-                <a:solidFill>
-                  <a:srgbClr val="374151"/>
-                </a:solidFill>
-              </a:rPr>
-              <a:t>Platforms</a:t>
-            </a:r>
-            <a:endParaRPr lang="en-US" sz="800" dirty="0"/>
-          </a:p>
-        </p:txBody>
-      </p:sp>
-      <p:sp>
-        <p:nvSpPr>
-          <p:cNvPr id="175" name="Text 173"/>
-          <p:cNvSpPr/>
-          <p:nvPr/>
-        </p:nvSpPr>
-        <p:spPr>
-          <a:xfrm>
-            <a:off x="11713464" y="1216152"/>
-            <a:ext cx="365760" cy="164592"/>
-          </a:xfrm>
-          <a:prstGeom prst="rect">
-            <a:avLst/>
-          </a:prstGeom>
-          <a:noFill/>
-          <a:ln/>
-        </p:spPr>
-        <p:txBody>
-          <a:bodyPr wrap="square" lIns="0" tIns="0" rIns="0" bIns="0" rtlCol="0" anchor="ctr"/>
-          <a:lstStyle/>
-          <a:p>
-            <a:pPr algn="r" indent="0" marL="0">
-              <a:buNone/>
-            </a:pPr>
-            <a:r>
-              <a:rPr lang="en-US" sz="800" b="1" dirty="0">
-                <a:solidFill>
-                  <a:srgbClr val="9CA3AF"/>
-                </a:solidFill>
-              </a:rPr>
-              <a:t>0%</a:t>
-            </a:r>
-            <a:endParaRPr lang="en-US" sz="800" dirty="0"/>
-          </a:p>
-        </p:txBody>
-      </p:sp>
-      <p:sp>
-        <p:nvSpPr>
-          <p:cNvPr id="176" name="Shape 174"/>
-          <p:cNvSpPr/>
-          <p:nvPr/>
-        </p:nvSpPr>
-        <p:spPr>
-          <a:xfrm>
-            <a:off x="9500616" y="1399032"/>
-            <a:ext cx="2505456" cy="82296"/>
-          </a:xfrm>
-          <a:prstGeom prst="roundRect">
-            <a:avLst>
-              <a:gd name="adj" fmla="val 50000"/>
-            </a:avLst>
-          </a:prstGeom>
-          <a:solidFill>
-            <a:srgbClr val="E5E7EB"/>
-          </a:solidFill>
-          <a:ln w="12700">
-            <a:solidFill>
-              <a:srgbClr val="E5E7EB"/>
-            </a:solidFill>
-            <a:prstDash val="solid"/>
-          </a:ln>
-        </p:spPr>
-      </p:sp>
-      <p:sp>
-        <p:nvSpPr>
-          <p:cNvPr id="177" name="Text 175"/>
-          <p:cNvSpPr/>
-          <p:nvPr/>
-        </p:nvSpPr>
-        <p:spPr>
-          <a:xfrm>
-            <a:off x="9500616" y="1572768"/>
-            <a:ext cx="1803928" cy="164592"/>
-          </a:xfrm>
-          <a:prstGeom prst="rect">
-            <a:avLst/>
-          </a:prstGeom>
-          <a:noFill/>
-          <a:ln/>
-        </p:spPr>
-        <p:txBody>
-          <a:bodyPr wrap="square" lIns="0" tIns="0" rIns="0" bIns="0" rtlCol="0" anchor="ctr"/>
-          <a:lstStyle/>
-          <a:p>
-            <a:pPr indent="0" marL="0">
-              <a:buNone/>
-            </a:pPr>
-            <a:r>
-              <a:rPr lang="en-US" sz="800" dirty="0">
-                <a:solidFill>
-                  <a:srgbClr val="374151"/>
-                </a:solidFill>
-              </a:rPr>
-              <a:t>Video Delivery</a:t>
-            </a:r>
-            <a:endParaRPr lang="en-US" sz="800" dirty="0"/>
-          </a:p>
-        </p:txBody>
-      </p:sp>
-      <p:sp>
-        <p:nvSpPr>
-          <p:cNvPr id="178" name="Text 176"/>
-          <p:cNvSpPr/>
-          <p:nvPr/>
-        </p:nvSpPr>
-        <p:spPr>
-          <a:xfrm>
-            <a:off x="11713464" y="1572768"/>
-            <a:ext cx="365760" cy="164592"/>
-          </a:xfrm>
-          <a:prstGeom prst="rect">
-            <a:avLst/>
-          </a:prstGeom>
-          <a:noFill/>
-          <a:ln/>
-        </p:spPr>
-        <p:txBody>
-          <a:bodyPr wrap="square" lIns="0" tIns="0" rIns="0" bIns="0" rtlCol="0" anchor="ctr"/>
-          <a:lstStyle/>
-          <a:p>
-            <a:pPr algn="r" indent="0" marL="0">
-              <a:buNone/>
-            </a:pPr>
-            <a:r>
-              <a:rPr lang="en-US" sz="800" b="1" dirty="0">
-                <a:solidFill>
-                  <a:srgbClr val="9CA3AF"/>
-                </a:solidFill>
-              </a:rPr>
-              <a:t>0%</a:t>
-            </a:r>
-            <a:endParaRPr lang="en-US" sz="800" dirty="0"/>
-          </a:p>
-        </p:txBody>
-      </p:sp>
-      <p:sp>
-        <p:nvSpPr>
-          <p:cNvPr id="179" name="Shape 177"/>
-          <p:cNvSpPr/>
-          <p:nvPr/>
-        </p:nvSpPr>
-        <p:spPr>
-          <a:xfrm>
-            <a:off x="9500616" y="1755648"/>
-            <a:ext cx="2505456" cy="82296"/>
-          </a:xfrm>
-          <a:prstGeom prst="roundRect">
-            <a:avLst>
-              <a:gd name="adj" fmla="val 50000"/>
-            </a:avLst>
-          </a:prstGeom>
-          <a:solidFill>
-            <a:srgbClr val="E5E7EB"/>
-          </a:solidFill>
-          <a:ln w="12700">
-            <a:solidFill>
-              <a:srgbClr val="E5E7EB"/>
-            </a:solidFill>
-            <a:prstDash val="solid"/>
-          </a:ln>
-        </p:spPr>
-      </p:sp>
-      <p:sp>
-        <p:nvSpPr>
-          <p:cNvPr id="180" name="Text 178"/>
-          <p:cNvSpPr/>
-          <p:nvPr/>
-        </p:nvSpPr>
-        <p:spPr>
-          <a:xfrm>
-            <a:off x="9500616" y="1929384"/>
-            <a:ext cx="1803928" cy="164592"/>
-          </a:xfrm>
-          <a:prstGeom prst="rect">
-            <a:avLst/>
-          </a:prstGeom>
-          <a:noFill/>
-          <a:ln/>
-        </p:spPr>
-        <p:txBody>
-          <a:bodyPr wrap="square" lIns="0" tIns="0" rIns="0" bIns="0" rtlCol="0" anchor="ctr"/>
-          <a:lstStyle/>
-          <a:p>
-            <a:pPr indent="0" marL="0">
-              <a:buNone/>
-            </a:pPr>
-            <a:r>
-              <a:rPr lang="en-US" sz="800" dirty="0">
-                <a:solidFill>
-                  <a:srgbClr val="374151"/>
-                </a:solidFill>
-              </a:rPr>
-              <a:t>Player</a:t>
-            </a:r>
-            <a:endParaRPr lang="en-US" sz="800" dirty="0"/>
-          </a:p>
-        </p:txBody>
-      </p:sp>
-      <p:sp>
-        <p:nvSpPr>
-          <p:cNvPr id="181" name="Text 179"/>
-          <p:cNvSpPr/>
-          <p:nvPr/>
-        </p:nvSpPr>
-        <p:spPr>
-          <a:xfrm>
-            <a:off x="11713464" y="1929384"/>
-            <a:ext cx="365760" cy="164592"/>
-          </a:xfrm>
-          <a:prstGeom prst="rect">
-            <a:avLst/>
-          </a:prstGeom>
-          <a:noFill/>
-          <a:ln/>
-        </p:spPr>
-        <p:txBody>
-          <a:bodyPr wrap="square" lIns="0" tIns="0" rIns="0" bIns="0" rtlCol="0" anchor="ctr"/>
-          <a:lstStyle/>
-          <a:p>
-            <a:pPr algn="r" indent="0" marL="0">
-              <a:buNone/>
-            </a:pPr>
-            <a:r>
-              <a:rPr lang="en-US" sz="800" b="1" dirty="0">
-                <a:solidFill>
-                  <a:srgbClr val="9CA3AF"/>
-                </a:solidFill>
-              </a:rPr>
-              <a:t>0%</a:t>
-            </a:r>
-            <a:endParaRPr lang="en-US" sz="800" dirty="0"/>
-          </a:p>
-        </p:txBody>
-      </p:sp>
-      <p:sp>
-        <p:nvSpPr>
-          <p:cNvPr id="182" name="Shape 180"/>
-          <p:cNvSpPr/>
-          <p:nvPr/>
-        </p:nvSpPr>
-        <p:spPr>
-          <a:xfrm>
-            <a:off x="9500616" y="2112264"/>
-            <a:ext cx="2505456" cy="82296"/>
-          </a:xfrm>
-          <a:prstGeom prst="roundRect">
-            <a:avLst>
-              <a:gd name="adj" fmla="val 50000"/>
-            </a:avLst>
-          </a:prstGeom>
-          <a:solidFill>
-            <a:srgbClr val="E5E7EB"/>
-          </a:solidFill>
-          <a:ln w="12700">
-            <a:solidFill>
-              <a:srgbClr val="E5E7EB"/>
-            </a:solidFill>
-            <a:prstDash val="solid"/>
-          </a:ln>
-        </p:spPr>
-      </p:sp>
-      <p:sp>
-        <p:nvSpPr>
-          <p:cNvPr id="183" name="Text 181"/>
-          <p:cNvSpPr/>
-          <p:nvPr/>
-        </p:nvSpPr>
-        <p:spPr>
-          <a:xfrm>
-            <a:off x="9500616" y="2286000"/>
-            <a:ext cx="1803928" cy="164592"/>
-          </a:xfrm>
-          <a:prstGeom prst="rect">
-            <a:avLst/>
-          </a:prstGeom>
-          <a:noFill/>
-          <a:ln/>
-        </p:spPr>
-        <p:txBody>
-          <a:bodyPr wrap="square" lIns="0" tIns="0" rIns="0" bIns="0" rtlCol="0" anchor="ctr"/>
-          <a:lstStyle/>
-          <a:p>
-            <a:pPr indent="0" marL="0">
-              <a:buNone/>
-            </a:pPr>
-            <a:r>
-              <a:rPr lang="en-US" sz="800" dirty="0">
-                <a:solidFill>
-                  <a:srgbClr val="374151"/>
-                </a:solidFill>
-              </a:rPr>
-              <a:t>Merchandising</a:t>
-            </a:r>
-            <a:endParaRPr lang="en-US" sz="800" dirty="0"/>
-          </a:p>
-        </p:txBody>
-      </p:sp>
-      <p:sp>
-        <p:nvSpPr>
-          <p:cNvPr id="184" name="Text 182"/>
-          <p:cNvSpPr/>
-          <p:nvPr/>
-        </p:nvSpPr>
-        <p:spPr>
-          <a:xfrm>
-            <a:off x="11713464" y="2286000"/>
-            <a:ext cx="365760" cy="164592"/>
-          </a:xfrm>
-          <a:prstGeom prst="rect">
-            <a:avLst/>
-          </a:prstGeom>
-          <a:noFill/>
-          <a:ln/>
-        </p:spPr>
-        <p:txBody>
-          <a:bodyPr wrap="square" lIns="0" tIns="0" rIns="0" bIns="0" rtlCol="0" anchor="ctr"/>
-          <a:lstStyle/>
-          <a:p>
-            <a:pPr algn="r" indent="0" marL="0">
-              <a:buNone/>
-            </a:pPr>
-            <a:r>
-              <a:rPr lang="en-US" sz="800" b="1" dirty="0">
-                <a:solidFill>
-                  <a:srgbClr val="9CA3AF"/>
-                </a:solidFill>
-              </a:rPr>
-              <a:t>0%</a:t>
-            </a:r>
-            <a:endParaRPr lang="en-US" sz="800" dirty="0"/>
-          </a:p>
-        </p:txBody>
-      </p:sp>
-      <p:sp>
-        <p:nvSpPr>
-          <p:cNvPr id="185" name="Shape 183"/>
-          <p:cNvSpPr/>
-          <p:nvPr/>
-        </p:nvSpPr>
-        <p:spPr>
-          <a:xfrm>
-            <a:off x="9500616" y="2468880"/>
-            <a:ext cx="2505456" cy="82296"/>
-          </a:xfrm>
-          <a:prstGeom prst="roundRect">
-            <a:avLst>
-              <a:gd name="adj" fmla="val 50000"/>
-            </a:avLst>
-          </a:prstGeom>
-          <a:solidFill>
-            <a:srgbClr val="E5E7EB"/>
-          </a:solidFill>
-          <a:ln w="12700">
-            <a:solidFill>
-              <a:srgbClr val="E5E7EB"/>
-            </a:solidFill>
-            <a:prstDash val="solid"/>
-          </a:ln>
-        </p:spPr>
-      </p:sp>
-      <p:sp>
-        <p:nvSpPr>
-          <p:cNvPr id="186" name="Text 184"/>
-          <p:cNvSpPr/>
-          <p:nvPr/>
-        </p:nvSpPr>
-        <p:spPr>
-          <a:xfrm>
-            <a:off x="9500616" y="2642616"/>
-            <a:ext cx="1803928" cy="164592"/>
-          </a:xfrm>
-          <a:prstGeom prst="rect">
-            <a:avLst/>
-          </a:prstGeom>
-          <a:noFill/>
-          <a:ln/>
-        </p:spPr>
-        <p:txBody>
-          <a:bodyPr wrap="square" lIns="0" tIns="0" rIns="0" bIns="0" rtlCol="0" anchor="ctr"/>
-          <a:lstStyle/>
-          <a:p>
-            <a:pPr indent="0" marL="0">
-              <a:buNone/>
-            </a:pPr>
-            <a:r>
-              <a:rPr lang="en-US" sz="800" dirty="0">
-                <a:solidFill>
-                  <a:srgbClr val="374151"/>
-                </a:solidFill>
-              </a:rPr>
-              <a:t>Onboarding</a:t>
-            </a:r>
-            <a:endParaRPr lang="en-US" sz="800" dirty="0"/>
-          </a:p>
-        </p:txBody>
-      </p:sp>
-      <p:sp>
-        <p:nvSpPr>
-          <p:cNvPr id="187" name="Text 185"/>
-          <p:cNvSpPr/>
-          <p:nvPr/>
-        </p:nvSpPr>
-        <p:spPr>
-          <a:xfrm>
-            <a:off x="11713464" y="2642616"/>
-            <a:ext cx="365760" cy="164592"/>
-          </a:xfrm>
-          <a:prstGeom prst="rect">
-            <a:avLst/>
-          </a:prstGeom>
-          <a:noFill/>
-          <a:ln/>
-        </p:spPr>
-        <p:txBody>
-          <a:bodyPr wrap="square" lIns="0" tIns="0" rIns="0" bIns="0" rtlCol="0" anchor="ctr"/>
-          <a:lstStyle/>
-          <a:p>
-            <a:pPr algn="r" indent="0" marL="0">
-              <a:buNone/>
-            </a:pPr>
-            <a:r>
-              <a:rPr lang="en-US" sz="800" b="1" dirty="0">
-                <a:solidFill>
-                  <a:srgbClr val="9CA3AF"/>
-                </a:solidFill>
-              </a:rPr>
-              <a:t>0%</a:t>
-            </a:r>
-            <a:endParaRPr lang="en-US" sz="800" dirty="0"/>
-          </a:p>
-        </p:txBody>
-      </p:sp>
-      <p:sp>
-        <p:nvSpPr>
-          <p:cNvPr id="188" name="Shape 186"/>
-          <p:cNvSpPr/>
-          <p:nvPr/>
-        </p:nvSpPr>
-        <p:spPr>
-          <a:xfrm>
-            <a:off x="9500616" y="2825496"/>
-            <a:ext cx="2505456" cy="82296"/>
-          </a:xfrm>
-          <a:prstGeom prst="roundRect">
-            <a:avLst>
-              <a:gd name="adj" fmla="val 50000"/>
-            </a:avLst>
-          </a:prstGeom>
-          <a:solidFill>
-            <a:srgbClr val="E5E7EB"/>
-          </a:solidFill>
-          <a:ln w="12700">
-            <a:solidFill>
-              <a:srgbClr val="E5E7EB"/>
-            </a:solidFill>
-            <a:prstDash val="solid"/>
-          </a:ln>
-        </p:spPr>
-      </p:sp>
-      <p:sp>
-        <p:nvSpPr>
-          <p:cNvPr id="189" name="Shape 187"/>
-          <p:cNvSpPr/>
-          <p:nvPr/>
-        </p:nvSpPr>
-        <p:spPr>
-          <a:xfrm>
-            <a:off x="9482328" y="3127248"/>
-            <a:ext cx="2633472" cy="0"/>
-          </a:xfrm>
-          <a:prstGeom prst="line">
-            <a:avLst/>
-          </a:prstGeom>
-          <a:noFill/>
-          <a:ln w="9525">
-            <a:solidFill>
-              <a:srgbClr val="DDE1E6"/>
-            </a:solidFill>
-            <a:prstDash val="solid"/>
-          </a:ln>
-        </p:spPr>
-      </p:sp>
-      <p:sp>
-        <p:nvSpPr>
-          <p:cNvPr id="190" name="Text 188"/>
-          <p:cNvSpPr/>
-          <p:nvPr/>
-        </p:nvSpPr>
-        <p:spPr>
-          <a:xfrm>
-            <a:off x="9500616" y="3264408"/>
-            <a:ext cx="2633472" cy="201168"/>
-          </a:xfrm>
-          <a:prstGeom prst="rect">
-            <a:avLst/>
-          </a:prstGeom>
-          <a:noFill/>
-          <a:ln/>
-        </p:spPr>
-        <p:txBody>
-          <a:bodyPr wrap="square" lIns="0" tIns="0" rIns="0" bIns="0" rtlCol="0" anchor="ctr"/>
-          <a:lstStyle/>
-          <a:p>
-            <a:pPr indent="0" marL="0">
-              <a:buNone/>
-            </a:pPr>
-            <a:r>
-              <a:rPr lang="en-US" sz="950" b="1" dirty="0">
-                <a:solidFill>
-                  <a:srgbClr val="111827"/>
-                </a:solidFill>
-              </a:rPr>
-              <a:t>Status Key</a:t>
-            </a:r>
-            <a:endParaRPr lang="en-US" sz="950" dirty="0"/>
-          </a:p>
-        </p:txBody>
-      </p:sp>
-      <p:sp>
-        <p:nvSpPr>
-          <p:cNvPr id="191" name="Shape 189"/>
-          <p:cNvSpPr/>
-          <p:nvPr/>
-        </p:nvSpPr>
-        <p:spPr>
-          <a:xfrm>
-            <a:off x="9500616" y="3511296"/>
-            <a:ext cx="749808" cy="173736"/>
-          </a:xfrm>
-          <a:prstGeom prst="roundRect">
-            <a:avLst>
-              <a:gd name="adj" fmla="val 15789"/>
-            </a:avLst>
-          </a:prstGeom>
-          <a:solidFill>
-            <a:srgbClr val="F3F4F6"/>
-          </a:solidFill>
-          <a:ln w="9525">
-            <a:solidFill>
-              <a:srgbClr val="D1D5DB"/>
-            </a:solidFill>
-            <a:prstDash val="solid"/>
-          </a:ln>
-        </p:spPr>
-      </p:sp>
-      <p:sp>
-        <p:nvSpPr>
-          <p:cNvPr id="192" name="Text 190"/>
-          <p:cNvSpPr/>
-          <p:nvPr/>
-        </p:nvSpPr>
-        <p:spPr>
-          <a:xfrm>
-            <a:off x="9500616" y="3511296"/>
-            <a:ext cx="749808" cy="173736"/>
-          </a:xfrm>
-          <a:prstGeom prst="rect">
-            <a:avLst/>
-          </a:prstGeom>
-          <a:noFill/>
-          <a:ln/>
-        </p:spPr>
-        <p:txBody>
-          <a:bodyPr wrap="square" lIns="0" tIns="0" rIns="0" bIns="0" rtlCol="0" anchor="ctr"/>
-          <a:lstStyle/>
-          <a:p>
-            <a:pPr algn="ctr" indent="0" marL="0">
-              <a:buNone/>
-            </a:pPr>
-            <a:r>
-              <a:rPr lang="en-US" sz="700" b="1" dirty="0">
-                <a:solidFill>
-                  <a:srgbClr val="374151"/>
-                </a:solidFill>
-              </a:rPr>
-              <a:t>Not Started</a:t>
-            </a:r>
-            <a:endParaRPr lang="en-US" sz="700" dirty="0"/>
-          </a:p>
-        </p:txBody>
-      </p:sp>
-      <p:sp>
-        <p:nvSpPr>
-          <p:cNvPr id="193" name="Text 191"/>
-          <p:cNvSpPr/>
-          <p:nvPr/>
-        </p:nvSpPr>
-        <p:spPr>
-          <a:xfrm>
-            <a:off x="10305288" y="3511296"/>
-            <a:ext cx="1792224" cy="173736"/>
-          </a:xfrm>
-          <a:prstGeom prst="rect">
-            <a:avLst/>
-          </a:prstGeom>
-          <a:noFill/>
-          <a:ln/>
-        </p:spPr>
-        <p:txBody>
-          <a:bodyPr wrap="square" lIns="0" tIns="0" rIns="0" bIns="0" rtlCol="0" anchor="ctr"/>
-          <a:lstStyle/>
-          <a:p>
-            <a:pPr algn="l" indent="0" marL="0">
-              <a:buNone/>
-            </a:pPr>
-            <a:r>
-              <a:rPr lang="en-US" sz="700" dirty="0">
-                <a:solidFill>
-                  <a:srgbClr val="6B7280"/>
-                </a:solidFill>
-              </a:rPr>
-              <a:t>Work has not begun</a:t>
-            </a:r>
-            <a:endParaRPr lang="en-US" sz="700" dirty="0"/>
-          </a:p>
-        </p:txBody>
-      </p:sp>
-      <p:sp>
-        <p:nvSpPr>
-          <p:cNvPr id="194" name="Shape 192"/>
-          <p:cNvSpPr/>
-          <p:nvPr/>
-        </p:nvSpPr>
-        <p:spPr>
-          <a:xfrm>
-            <a:off x="9500616" y="3739896"/>
-            <a:ext cx="749808" cy="173736"/>
-          </a:xfrm>
-          <a:prstGeom prst="roundRect">
-            <a:avLst>
-              <a:gd name="adj" fmla="val 15789"/>
-            </a:avLst>
-          </a:prstGeom>
-          <a:solidFill>
-            <a:srgbClr val="1558A8"/>
-          </a:solidFill>
-          <a:ln w="12700">
-            <a:solidFill>
-              <a:srgbClr val="1558A8"/>
-            </a:solidFill>
-            <a:prstDash val="solid"/>
-          </a:ln>
-        </p:spPr>
-      </p:sp>
-      <p:sp>
-        <p:nvSpPr>
-          <p:cNvPr id="195" name="Text 193"/>
-          <p:cNvSpPr/>
-          <p:nvPr/>
-        </p:nvSpPr>
-        <p:spPr>
-          <a:xfrm>
-            <a:off x="9500616" y="3739896"/>
-            <a:ext cx="749808" cy="173736"/>
-          </a:xfrm>
-          <a:prstGeom prst="rect">
-            <a:avLst/>
-          </a:prstGeom>
-          <a:noFill/>
-          <a:ln/>
-        </p:spPr>
-        <p:txBody>
-          <a:bodyPr wrap="square" lIns="0" tIns="0" rIns="0" bIns="0" rtlCol="0" anchor="ctr"/>
-          <a:lstStyle/>
-          <a:p>
-            <a:pPr algn="ctr" indent="0" marL="0">
-              <a:buNone/>
-            </a:pPr>
-            <a:r>
-              <a:rPr lang="en-US" sz="700" b="1" dirty="0">
-                <a:solidFill>
-                  <a:srgbClr val="FFFFFF"/>
-                </a:solidFill>
-              </a:rPr>
-              <a:t>In Progress</a:t>
-            </a:r>
-            <a:endParaRPr lang="en-US" sz="700" dirty="0"/>
-          </a:p>
-        </p:txBody>
-      </p:sp>
-      <p:sp>
-        <p:nvSpPr>
-          <p:cNvPr id="196" name="Text 194"/>
-          <p:cNvSpPr/>
-          <p:nvPr/>
-        </p:nvSpPr>
-        <p:spPr>
-          <a:xfrm>
-            <a:off x="10305288" y="3739896"/>
-            <a:ext cx="1792224" cy="173736"/>
-          </a:xfrm>
-          <a:prstGeom prst="rect">
-            <a:avLst/>
-          </a:prstGeom>
-          <a:noFill/>
-          <a:ln/>
-        </p:spPr>
-        <p:txBody>
-          <a:bodyPr wrap="square" lIns="0" tIns="0" rIns="0" bIns="0" rtlCol="0" anchor="ctr"/>
-          <a:lstStyle/>
-          <a:p>
-            <a:pPr algn="l" indent="0" marL="0">
-              <a:buNone/>
-            </a:pPr>
-            <a:r>
-              <a:rPr lang="en-US" sz="700" dirty="0">
-                <a:solidFill>
-                  <a:srgbClr val="6B7280"/>
-                </a:solidFill>
-              </a:rPr>
-              <a:t>Active development underway</a:t>
-            </a:r>
-            <a:endParaRPr lang="en-US" sz="700" dirty="0"/>
-          </a:p>
-        </p:txBody>
-      </p:sp>
-      <p:sp>
-        <p:nvSpPr>
-          <p:cNvPr id="197" name="Shape 195"/>
-          <p:cNvSpPr/>
-          <p:nvPr/>
-        </p:nvSpPr>
-        <p:spPr>
-          <a:xfrm>
-            <a:off x="9500616" y="3968496"/>
+          <p:cNvPr id="202" name="Shape 200"/>
+          <p:cNvSpPr/>
+          <p:nvPr/>
+        </p:nvSpPr>
+        <p:spPr>
+          <a:xfrm>
+            <a:off x="9500616" y="4041648"/>
             <a:ext cx="749808" cy="173736"/>
           </a:xfrm>
           <a:prstGeom prst="roundRect">
@@ -14985,13 +15104,13 @@
       </p:sp>
       <p:sp>
         <p:nvSpPr>
-          <p:cNvPr id="198" name="Text 196"/>
-          <p:cNvSpPr/>
-          <p:nvPr/>
-        </p:nvSpPr>
-        <p:spPr>
-          <a:xfrm>
-            <a:off x="9500616" y="3968496"/>
+          <p:cNvPr id="203" name="Text 201"/>
+          <p:cNvSpPr/>
+          <p:nvPr/>
+        </p:nvSpPr>
+        <p:spPr>
+          <a:xfrm>
+            <a:off x="9500616" y="4041648"/>
             <a:ext cx="749808" cy="173736"/>
           </a:xfrm>
           <a:prstGeom prst="rect">
@@ -15021,13 +15140,13 @@
       </p:sp>
       <p:sp>
         <p:nvSpPr>
-          <p:cNvPr id="199" name="Text 197"/>
-          <p:cNvSpPr/>
-          <p:nvPr/>
-        </p:nvSpPr>
-        <p:spPr>
-          <a:xfrm>
-            <a:off x="10305288" y="3968496"/>
+          <p:cNvPr id="204" name="Text 202"/>
+          <p:cNvSpPr/>
+          <p:nvPr/>
+        </p:nvSpPr>
+        <p:spPr>
+          <a:xfrm>
+            <a:off x="10305288" y="4041648"/>
             <a:ext cx="1792224" cy="173736"/>
           </a:xfrm>
           <a:prstGeom prst="rect">
@@ -15057,13 +15176,13 @@
       </p:sp>
       <p:sp>
         <p:nvSpPr>
-          <p:cNvPr id="200" name="Shape 198"/>
-          <p:cNvSpPr/>
-          <p:nvPr/>
-        </p:nvSpPr>
-        <p:spPr>
-          <a:xfrm>
-            <a:off x="9500616" y="4197096"/>
+          <p:cNvPr id="205" name="Shape 203"/>
+          <p:cNvSpPr/>
+          <p:nvPr/>
+        </p:nvSpPr>
+        <p:spPr>
+          <a:xfrm>
+            <a:off x="9500616" y="4270248"/>
             <a:ext cx="749808" cy="173736"/>
           </a:xfrm>
           <a:prstGeom prst="roundRect">
@@ -15084,13 +15203,13 @@
       </p:sp>
       <p:sp>
         <p:nvSpPr>
-          <p:cNvPr id="201" name="Text 199"/>
-          <p:cNvSpPr/>
-          <p:nvPr/>
-        </p:nvSpPr>
-        <p:spPr>
-          <a:xfrm>
-            <a:off x="9500616" y="4197096"/>
+          <p:cNvPr id="206" name="Text 204"/>
+          <p:cNvSpPr/>
+          <p:nvPr/>
+        </p:nvSpPr>
+        <p:spPr>
+          <a:xfrm>
+            <a:off x="9500616" y="4270248"/>
             <a:ext cx="749808" cy="173736"/>
           </a:xfrm>
           <a:prstGeom prst="rect">
@@ -15120,13 +15239,13 @@
       </p:sp>
       <p:sp>
         <p:nvSpPr>
-          <p:cNvPr id="202" name="Text 200"/>
-          <p:cNvSpPr/>
-          <p:nvPr/>
-        </p:nvSpPr>
-        <p:spPr>
-          <a:xfrm>
-            <a:off x="10305288" y="4197096"/>
+          <p:cNvPr id="207" name="Text 205"/>
+          <p:cNvSpPr/>
+          <p:nvPr/>
+        </p:nvSpPr>
+        <p:spPr>
+          <a:xfrm>
+            <a:off x="10305288" y="4270248"/>
             <a:ext cx="1792224" cy="173736"/>
           </a:xfrm>
           <a:prstGeom prst="rect">
@@ -15156,13 +15275,13 @@
       </p:sp>
       <p:sp>
         <p:nvSpPr>
-          <p:cNvPr id="203" name="Shape 201"/>
-          <p:cNvSpPr/>
-          <p:nvPr/>
-        </p:nvSpPr>
-        <p:spPr>
-          <a:xfrm>
-            <a:off x="9500616" y="4425696"/>
+          <p:cNvPr id="208" name="Shape 206"/>
+          <p:cNvSpPr/>
+          <p:nvPr/>
+        </p:nvSpPr>
+        <p:spPr>
+          <a:xfrm>
+            <a:off x="9500616" y="4498848"/>
             <a:ext cx="749808" cy="173736"/>
           </a:xfrm>
           <a:prstGeom prst="roundRect">
@@ -15183,13 +15302,13 @@
       </p:sp>
       <p:sp>
         <p:nvSpPr>
-          <p:cNvPr id="204" name="Text 202"/>
-          <p:cNvSpPr/>
-          <p:nvPr/>
-        </p:nvSpPr>
-        <p:spPr>
-          <a:xfrm>
-            <a:off x="9500616" y="4425696"/>
+          <p:cNvPr id="209" name="Text 207"/>
+          <p:cNvSpPr/>
+          <p:nvPr/>
+        </p:nvSpPr>
+        <p:spPr>
+          <a:xfrm>
+            <a:off x="9500616" y="4498848"/>
             <a:ext cx="749808" cy="173736"/>
           </a:xfrm>
           <a:prstGeom prst="rect">
@@ -15219,13 +15338,13 @@
       </p:sp>
       <p:sp>
         <p:nvSpPr>
-          <p:cNvPr id="205" name="Text 203"/>
-          <p:cNvSpPr/>
-          <p:nvPr/>
-        </p:nvSpPr>
-        <p:spPr>
-          <a:xfrm>
-            <a:off x="10305288" y="4425696"/>
+          <p:cNvPr id="210" name="Text 208"/>
+          <p:cNvSpPr/>
+          <p:nvPr/>
+        </p:nvSpPr>
+        <p:spPr>
+          <a:xfrm>
+            <a:off x="10305288" y="4498848"/>
             <a:ext cx="1792224" cy="173736"/>
           </a:xfrm>
           <a:prstGeom prst="rect">

--- a/SABR_CPR_Component_Status.pptx
+++ b/SABR_CPR_Component_Status.pptx
@@ -9,8 +9,8 @@
   </p:notesMasterIdLst>
   <p:sldIdLst>
     <p:sldId id="256" r:id="rId2"/>
-    <p:sldId id="257" r:id="rId3"/>
-    <p:sldId id="258" r:id="rId10"/>
+    <p:sldId id="257" r:id="rId10"/>
+    <p:sldId id="258" r:id="rId11"/>
   </p:sldIdLst>
   <p:sldSz cx="12344400" cy="7315200"/>
   <p:notesSz cx="6858000" cy="9144000"/>
@@ -4749,7 +4749,7 @@
                 <a:latin typeface="Arial" panose="020B0604020202020204" pitchFamily="34" charset="0"/>
                 <a:cs typeface="Arial" panose="020B0604020202020204" pitchFamily="34" charset="0"/>
               </a:rPr>
-              <a:t>7/7 Update</a:t>
+              <a:t>7/8 Update</a:t>
             </a:r>
           </a:p>
           <a:p>
@@ -4905,3859 +4905,6 @@
 </file>
 
 <file path=ppt/slides/slide2.xml><?xml version="1.0" encoding="utf-8"?>
-<p:sld xmlns:a="http://schemas.openxmlformats.org/drawingml/2006/main" xmlns:r="http://schemas.openxmlformats.org/officeDocument/2006/relationships" xmlns:p="http://schemas.openxmlformats.org/presentationml/2006/main">
-  <p:cSld>
-    <p:spTree>
-      <p:nvGrpSpPr>
-        <p:cNvPr id="1" name=""/>
-        <p:cNvGrpSpPr/>
-        <p:nvPr/>
-      </p:nvGrpSpPr>
-      <p:grpSpPr>
-        <a:xfrm>
-          <a:off x="0" y="0"/>
-          <a:ext cx="0" cy="0"/>
-          <a:chOff x="0" y="0"/>
-          <a:chExt cx="0" cy="0"/>
-        </a:xfrm>
-      </p:grpSpPr>
-      <p:sp>
-        <p:nvSpPr>
-          <p:cNvPr id="2" name="Shape 0"/>
-          <p:cNvSpPr/>
-          <p:nvPr/>
-        </p:nvSpPr>
-        <p:spPr>
-          <a:xfrm>
-            <a:off x="1" y="15838"/>
-            <a:ext cx="12344091" cy="388849"/>
-          </a:xfrm>
-          <a:prstGeom prst="rect">
-            <a:avLst/>
-          </a:prstGeom>
-          <a:solidFill>
-            <a:srgbClr val="8ED973"/>
-          </a:solidFill>
-          <a:ln w="12700">
-            <a:solidFill>
-              <a:srgbClr val="8ED973"/>
-            </a:solidFill>
-            <a:prstDash val="solid"/>
-          </a:ln>
-        </p:spPr>
-        <p:txBody>
-          <a:bodyPr/>
-          <a:lstStyle/>
-          <a:p>
-            <a:endParaRPr lang="en-US" sz="1823">
-              <a:latin typeface="Arial" panose="020B0604020202020204" pitchFamily="34" charset="0"/>
-              <a:cs typeface="Arial" panose="020B0604020202020204" pitchFamily="34" charset="0"/>
-            </a:endParaRPr>
-          </a:p>
-        </p:txBody>
-      </p:sp>
-      <p:sp>
-        <p:nvSpPr>
-          <p:cNvPr id="3" name="Text 1"/>
-          <p:cNvSpPr/>
-          <p:nvPr/>
-        </p:nvSpPr>
-        <p:spPr>
-          <a:xfrm>
-            <a:off x="1" y="4303"/>
-            <a:ext cx="12344091" cy="388849"/>
-          </a:xfrm>
-          <a:prstGeom prst="rect">
-            <a:avLst/>
-          </a:prstGeom>
-          <a:noFill/>
-          <a:ln/>
-        </p:spPr>
-        <p:txBody>
-          <a:bodyPr wrap="square" lIns="0" tIns="0" rIns="0" bIns="0" rtlCol="0" anchor="ctr"/>
-          <a:lstStyle/>
-          <a:p>
-            <a:pPr algn="ctr"/>
-            <a:r>
-              <a:rPr lang="en-US" sz="1600" b="1" dirty="0">
-                <a:solidFill>
-                  <a:srgbClr val="000000"/>
-                </a:solidFill>
-                <a:latin typeface="Arial" panose="020B0604020202020204" pitchFamily="34" charset="0"/>
-                <a:ea typeface="Arial" pitchFamily="34" charset="-122"/>
-                <a:cs typeface="Arial" panose="020B0604020202020204" pitchFamily="34" charset="0"/>
-              </a:rPr>
-              <a:t>Tennis Channel Project SABR</a:t>
-            </a:r>
-            <a:r>
-              <a:rPr lang="en-US" sz="1600" b="1" dirty="0">
-                <a:solidFill>
-                  <a:srgbClr val="1A1A1A"/>
-                </a:solidFill>
-                <a:latin typeface="Arial" panose="020B0604020202020204" pitchFamily="34" charset="0"/>
-                <a:ea typeface="Arial" pitchFamily="34" charset="-122"/>
-                <a:cs typeface="Arial" panose="020B0604020202020204" pitchFamily="34" charset="0"/>
-              </a:rPr>
-              <a:t>  ·  Critical Gates</a:t>
-            </a:r>
-            <a:endParaRPr lang="en-US" sz="1600" b="1" dirty="0">
-              <a:latin typeface="Arial" panose="020B0604020202020204" pitchFamily="34" charset="0"/>
-              <a:cs typeface="Arial" panose="020B0604020202020204" pitchFamily="34" charset="0"/>
-            </a:endParaRPr>
-          </a:p>
-        </p:txBody>
-      </p:sp>
-      <p:sp>
-        <p:nvSpPr>
-          <p:cNvPr id="4" name="Shape 2"/>
-          <p:cNvSpPr/>
-          <p:nvPr/>
-        </p:nvSpPr>
-        <p:spPr>
-          <a:xfrm>
-            <a:off x="92583" y="648653"/>
-            <a:ext cx="5740146" cy="277749"/>
-          </a:xfrm>
-          <a:prstGeom prst="rect">
-            <a:avLst/>
-          </a:prstGeom>
-          <a:solidFill>
-            <a:schemeClr val="accent6">
-              <a:lumMod val="60000"/>
-              <a:lumOff val="40000"/>
-            </a:schemeClr>
-          </a:solidFill>
-          <a:ln w="12700">
-            <a:solidFill>
-              <a:srgbClr val="0F6E56"/>
-            </a:solidFill>
-            <a:prstDash val="solid"/>
-          </a:ln>
-        </p:spPr>
-        <p:txBody>
-          <a:bodyPr/>
-          <a:lstStyle/>
-          <a:p>
-            <a:endParaRPr lang="en-US" sz="1823">
-              <a:latin typeface="Arial" panose="020B0604020202020204" pitchFamily="34" charset="0"/>
-              <a:cs typeface="Arial" panose="020B0604020202020204" pitchFamily="34" charset="0"/>
-            </a:endParaRPr>
-          </a:p>
-        </p:txBody>
-      </p:sp>
-      <p:sp>
-        <p:nvSpPr>
-          <p:cNvPr id="5" name="Text 3"/>
-          <p:cNvSpPr/>
-          <p:nvPr/>
-        </p:nvSpPr>
-        <p:spPr>
-          <a:xfrm>
-            <a:off x="138874" y="648653"/>
-            <a:ext cx="5693855" cy="277749"/>
-          </a:xfrm>
-          <a:prstGeom prst="rect">
-            <a:avLst/>
-          </a:prstGeom>
-          <a:noFill/>
-          <a:ln/>
-        </p:spPr>
-        <p:txBody>
-          <a:bodyPr wrap="square" lIns="0" tIns="0" rIns="0" bIns="0" rtlCol="0" anchor="ctr"/>
-          <a:lstStyle/>
-          <a:p>
-            <a:r>
-              <a:rPr lang="en-US" sz="1013" dirty="0">
-                <a:latin typeface="Arial" panose="020B0604020202020204" pitchFamily="34" charset="0"/>
-                <a:ea typeface="Calibri" pitchFamily="34" charset="-122"/>
-                <a:cs typeface="Arial" panose="020B0604020202020204" pitchFamily="34" charset="0"/>
-              </a:rPr>
-              <a:t>Vendor / Contract</a:t>
-            </a:r>
-            <a:endParaRPr lang="en-US" sz="1013" dirty="0">
-              <a:latin typeface="Arial" panose="020B0604020202020204" pitchFamily="34" charset="0"/>
-              <a:cs typeface="Arial" panose="020B0604020202020204" pitchFamily="34" charset="0"/>
-            </a:endParaRPr>
-          </a:p>
-        </p:txBody>
-      </p:sp>
-      <p:sp>
-        <p:nvSpPr>
-          <p:cNvPr id="6" name="Shape 4"/>
-          <p:cNvSpPr/>
-          <p:nvPr/>
-        </p:nvSpPr>
-        <p:spPr>
-          <a:xfrm>
-            <a:off x="92583" y="926401"/>
-            <a:ext cx="5740146" cy="2740457"/>
-          </a:xfrm>
-          <a:prstGeom prst="rect">
-            <a:avLst/>
-          </a:prstGeom>
-          <a:solidFill>
-            <a:srgbClr val="F8FFFE"/>
-          </a:solidFill>
-          <a:ln w="9525">
-            <a:solidFill>
-              <a:srgbClr val="D1FAE5"/>
-            </a:solidFill>
-            <a:prstDash val="solid"/>
-          </a:ln>
-        </p:spPr>
-        <p:txBody>
-          <a:bodyPr/>
-          <a:lstStyle/>
-          <a:p>
-            <a:endParaRPr lang="en-US" sz="1823">
-              <a:latin typeface="Arial" panose="020B0604020202020204" pitchFamily="34" charset="0"/>
-              <a:cs typeface="Arial" panose="020B0604020202020204" pitchFamily="34" charset="0"/>
-            </a:endParaRPr>
-          </a:p>
-        </p:txBody>
-      </p:sp>
-      <p:sp>
-        <p:nvSpPr>
-          <p:cNvPr id="7" name="Shape 5"/>
-          <p:cNvSpPr/>
-          <p:nvPr/>
-        </p:nvSpPr>
-        <p:spPr>
-          <a:xfrm>
-            <a:off x="101842" y="926402"/>
-            <a:ext cx="5721629" cy="548092"/>
-          </a:xfrm>
-          <a:prstGeom prst="rect">
-            <a:avLst/>
-          </a:prstGeom>
-          <a:solidFill>
-            <a:srgbClr val="FFFFFF"/>
-          </a:solidFill>
-          <a:ln w="12700">
-            <a:solidFill>
-              <a:srgbClr val="FFFFFF"/>
-            </a:solidFill>
-            <a:prstDash val="solid"/>
-          </a:ln>
-        </p:spPr>
-        <p:txBody>
-          <a:bodyPr/>
-          <a:lstStyle/>
-          <a:p>
-            <a:endParaRPr lang="en-US" sz="1823">
-              <a:latin typeface="Arial" panose="020B0604020202020204" pitchFamily="34" charset="0"/>
-              <a:cs typeface="Arial" panose="020B0604020202020204" pitchFamily="34" charset="0"/>
-            </a:endParaRPr>
-          </a:p>
-        </p:txBody>
-      </p:sp>
-      <p:sp>
-        <p:nvSpPr>
-          <p:cNvPr id="8" name="Text 6"/>
-          <p:cNvSpPr/>
-          <p:nvPr/>
-        </p:nvSpPr>
-        <p:spPr>
-          <a:xfrm>
-            <a:off x="138874" y="926402"/>
-            <a:ext cx="601790" cy="548092"/>
-          </a:xfrm>
-          <a:prstGeom prst="rect">
-            <a:avLst/>
-          </a:prstGeom>
-          <a:noFill/>
-          <a:ln/>
-        </p:spPr>
-        <p:txBody>
-          <a:bodyPr wrap="square" lIns="0" tIns="0" rIns="0" bIns="0" rtlCol="0" anchor="ctr"/>
-          <a:lstStyle/>
-          <a:p>
-            <a:r>
-              <a:rPr lang="en-US" sz="861" dirty="0" err="1">
-                <a:solidFill>
-                  <a:srgbClr val="374151"/>
-                </a:solidFill>
-                <a:latin typeface="Arial" panose="020B0604020202020204" pitchFamily="34" charset="0"/>
-                <a:ea typeface="Calibri" pitchFamily="34" charset="-122"/>
-                <a:cs typeface="Arial" panose="020B0604020202020204" pitchFamily="34" charset="0"/>
-              </a:rPr>
-              <a:t>Bitmovin</a:t>
-            </a:r>
-            <a:endParaRPr lang="en-US" sz="861" dirty="0">
-              <a:latin typeface="Arial" panose="020B0604020202020204" pitchFamily="34" charset="0"/>
-              <a:cs typeface="Arial" panose="020B0604020202020204" pitchFamily="34" charset="0"/>
-            </a:endParaRPr>
-          </a:p>
-        </p:txBody>
-      </p:sp>
-      <p:sp>
-        <p:nvSpPr>
-          <p:cNvPr id="9" name="Text 7"/>
-          <p:cNvSpPr/>
-          <p:nvPr/>
-        </p:nvSpPr>
-        <p:spPr>
-          <a:xfrm>
-            <a:off x="759180" y="926402"/>
-            <a:ext cx="4462501" cy="548092"/>
-          </a:xfrm>
-          <a:prstGeom prst="rect">
-            <a:avLst/>
-          </a:prstGeom>
-          <a:noFill/>
-          <a:ln/>
-        </p:spPr>
-        <p:txBody>
-          <a:bodyPr wrap="square" lIns="0" tIns="0" rIns="0" bIns="0" rtlCol="0" anchor="ctr"/>
-          <a:lstStyle/>
-          <a:p>
-            <a:r>
-              <a:rPr lang="en-US" sz="810" dirty="0">
-                <a:latin typeface="Arial" panose="020B0604020202020204" pitchFamily="34" charset="0"/>
-                <a:cs typeface="Arial" panose="020B0604020202020204" pitchFamily="34" charset="0"/>
-              </a:rPr>
-              <a:t>Redlined from TC legal, </a:t>
-            </a:r>
-            <a:r>
-              <a:rPr lang="en-US" sz="810" dirty="0" err="1">
-                <a:latin typeface="Arial" panose="020B0604020202020204" pitchFamily="34" charset="0"/>
-                <a:cs typeface="Arial" panose="020B0604020202020204" pitchFamily="34" charset="0"/>
-              </a:rPr>
-              <a:t>Bitmovin</a:t>
-            </a:r>
-            <a:r>
-              <a:rPr lang="en-US" sz="810" dirty="0">
-                <a:latin typeface="Arial" panose="020B0604020202020204" pitchFamily="34" charset="0"/>
-                <a:cs typeface="Arial" panose="020B0604020202020204" pitchFamily="34" charset="0"/>
-              </a:rPr>
-              <a:t> reviewing </a:t>
-            </a:r>
-          </a:p>
-        </p:txBody>
-      </p:sp>
-      <p:sp>
-        <p:nvSpPr>
-          <p:cNvPr id="10" name="Shape 8"/>
-          <p:cNvSpPr/>
-          <p:nvPr/>
-        </p:nvSpPr>
-        <p:spPr>
-          <a:xfrm>
-            <a:off x="5258714" y="1098605"/>
-            <a:ext cx="546240" cy="203683"/>
-          </a:xfrm>
-          <a:prstGeom prst="roundRect">
-            <a:avLst>
-              <a:gd name="adj" fmla="val 22727"/>
-            </a:avLst>
-          </a:prstGeom>
-          <a:solidFill>
-            <a:srgbClr val="DBEAFE"/>
-          </a:solidFill>
-          <a:ln w="12700">
-            <a:solidFill>
-              <a:srgbClr val="DBEAFE"/>
-            </a:solidFill>
-            <a:prstDash val="solid"/>
-          </a:ln>
-        </p:spPr>
-        <p:txBody>
-          <a:bodyPr/>
-          <a:lstStyle/>
-          <a:p>
-            <a:endParaRPr lang="en-US" sz="1823">
-              <a:latin typeface="Arial" panose="020B0604020202020204" pitchFamily="34" charset="0"/>
-              <a:cs typeface="Arial" panose="020B0604020202020204" pitchFamily="34" charset="0"/>
-            </a:endParaRPr>
-          </a:p>
-        </p:txBody>
-      </p:sp>
-      <p:sp>
-        <p:nvSpPr>
-          <p:cNvPr id="11" name="Text 9"/>
-          <p:cNvSpPr/>
-          <p:nvPr/>
-        </p:nvSpPr>
-        <p:spPr>
-          <a:xfrm>
-            <a:off x="5258714" y="1098605"/>
-            <a:ext cx="546240" cy="203683"/>
-          </a:xfrm>
-          <a:prstGeom prst="rect">
-            <a:avLst/>
-          </a:prstGeom>
-          <a:noFill/>
-          <a:ln/>
-        </p:spPr>
-        <p:txBody>
-          <a:bodyPr wrap="square" lIns="0" tIns="0" rIns="0" bIns="0" rtlCol="0" anchor="ctr"/>
-          <a:lstStyle/>
-          <a:p>
-            <a:pPr algn="ctr"/>
-            <a:r>
-              <a:rPr lang="en-US" sz="709" dirty="0">
-                <a:solidFill>
-                  <a:srgbClr val="1E40AF"/>
-                </a:solidFill>
-                <a:latin typeface="Arial" panose="020B0604020202020204" pitchFamily="34" charset="0"/>
-                <a:ea typeface="Calibri" pitchFamily="34" charset="-122"/>
-                <a:cs typeface="Arial" panose="020B0604020202020204" pitchFamily="34" charset="0"/>
-              </a:rPr>
-              <a:t>In Progress</a:t>
-            </a:r>
-            <a:endParaRPr lang="en-US" sz="709" dirty="0">
-              <a:latin typeface="Arial" panose="020B0604020202020204" pitchFamily="34" charset="0"/>
-              <a:cs typeface="Arial" panose="020B0604020202020204" pitchFamily="34" charset="0"/>
-            </a:endParaRPr>
-          </a:p>
-        </p:txBody>
-      </p:sp>
-      <p:sp>
-        <p:nvSpPr>
-          <p:cNvPr id="12" name="Text 10"/>
-          <p:cNvSpPr/>
-          <p:nvPr/>
-        </p:nvSpPr>
-        <p:spPr>
-          <a:xfrm>
-            <a:off x="138874" y="1474493"/>
-            <a:ext cx="601790" cy="548092"/>
-          </a:xfrm>
-          <a:prstGeom prst="rect">
-            <a:avLst/>
-          </a:prstGeom>
-          <a:noFill/>
-          <a:ln/>
-        </p:spPr>
-        <p:txBody>
-          <a:bodyPr wrap="square" lIns="0" tIns="0" rIns="0" bIns="0" rtlCol="0" anchor="ctr"/>
-          <a:lstStyle/>
-          <a:p>
-            <a:r>
-              <a:rPr lang="en-US" sz="861" dirty="0">
-                <a:solidFill>
-                  <a:srgbClr val="374151"/>
-                </a:solidFill>
-                <a:latin typeface="Arial" panose="020B0604020202020204" pitchFamily="34" charset="0"/>
-                <a:cs typeface="Arial" panose="020B0604020202020204" pitchFamily="34" charset="0"/>
-              </a:rPr>
-              <a:t>Adobe</a:t>
-            </a:r>
-            <a:endParaRPr lang="en-US" sz="861" dirty="0">
-              <a:latin typeface="Arial" panose="020B0604020202020204" pitchFamily="34" charset="0"/>
-              <a:cs typeface="Arial" panose="020B0604020202020204" pitchFamily="34" charset="0"/>
-            </a:endParaRPr>
-          </a:p>
-        </p:txBody>
-      </p:sp>
-      <p:sp>
-        <p:nvSpPr>
-          <p:cNvPr id="13" name="Text 11"/>
-          <p:cNvSpPr/>
-          <p:nvPr/>
-        </p:nvSpPr>
-        <p:spPr>
-          <a:xfrm>
-            <a:off x="759180" y="1474493"/>
-            <a:ext cx="4462501" cy="548092"/>
-          </a:xfrm>
-          <a:prstGeom prst="rect">
-            <a:avLst/>
-          </a:prstGeom>
-          <a:noFill/>
-          <a:ln/>
-        </p:spPr>
-        <p:txBody>
-          <a:bodyPr wrap="square" lIns="0" tIns="0" rIns="0" bIns="0" rtlCol="0" anchor="ctr"/>
-          <a:lstStyle/>
-          <a:p>
-            <a:r>
-              <a:rPr lang="en-US" sz="861" dirty="0">
-                <a:solidFill>
-                  <a:srgbClr val="374151"/>
-                </a:solidFill>
-                <a:latin typeface="Arial" panose="020B0604020202020204" pitchFamily="34" charset="0"/>
-                <a:ea typeface="Calibri" pitchFamily="34" charset="-122"/>
-                <a:cs typeface="Arial" panose="020B0604020202020204" pitchFamily="34" charset="0"/>
-              </a:rPr>
-              <a:t>We are good. Just need to find out who owns the original contract and review renewal dates. Keff owns.</a:t>
-            </a:r>
-            <a:endParaRPr lang="en-US" sz="861" dirty="0">
-              <a:latin typeface="Arial" panose="020B0604020202020204" pitchFamily="34" charset="0"/>
-              <a:cs typeface="Arial" panose="020B0604020202020204" pitchFamily="34" charset="0"/>
-            </a:endParaRPr>
-          </a:p>
-        </p:txBody>
-      </p:sp>
-      <p:sp>
-        <p:nvSpPr>
-          <p:cNvPr id="16" name="Shape 14"/>
-          <p:cNvSpPr/>
-          <p:nvPr/>
-        </p:nvSpPr>
-        <p:spPr>
-          <a:xfrm>
-            <a:off x="101842" y="2022585"/>
-            <a:ext cx="5721629" cy="548092"/>
-          </a:xfrm>
-          <a:prstGeom prst="rect">
-            <a:avLst/>
-          </a:prstGeom>
-          <a:solidFill>
-            <a:srgbClr val="FFFFFF"/>
-          </a:solidFill>
-          <a:ln w="12700">
-            <a:solidFill>
-              <a:srgbClr val="FFFFFF"/>
-            </a:solidFill>
-            <a:prstDash val="solid"/>
-          </a:ln>
-        </p:spPr>
-        <p:txBody>
-          <a:bodyPr/>
-          <a:lstStyle/>
-          <a:p>
-            <a:endParaRPr lang="en-US" sz="1823" dirty="0">
-              <a:latin typeface="Arial" panose="020B0604020202020204" pitchFamily="34" charset="0"/>
-              <a:cs typeface="Arial" panose="020B0604020202020204" pitchFamily="34" charset="0"/>
-            </a:endParaRPr>
-          </a:p>
-        </p:txBody>
-      </p:sp>
-      <p:sp>
-        <p:nvSpPr>
-          <p:cNvPr id="17" name="Text 15"/>
-          <p:cNvSpPr/>
-          <p:nvPr/>
-        </p:nvSpPr>
-        <p:spPr>
-          <a:xfrm>
-            <a:off x="138874" y="2022585"/>
-            <a:ext cx="601790" cy="548092"/>
-          </a:xfrm>
-          <a:prstGeom prst="rect">
-            <a:avLst/>
-          </a:prstGeom>
-          <a:noFill/>
-          <a:ln/>
-        </p:spPr>
-        <p:txBody>
-          <a:bodyPr wrap="square" lIns="0" tIns="0" rIns="0" bIns="0" rtlCol="0" anchor="ctr"/>
-          <a:lstStyle/>
-          <a:p>
-            <a:r>
-              <a:rPr lang="en-US" sz="861" dirty="0">
-                <a:solidFill>
-                  <a:srgbClr val="374151"/>
-                </a:solidFill>
-                <a:latin typeface="Arial" panose="020B0604020202020204" pitchFamily="34" charset="0"/>
-                <a:cs typeface="Arial" panose="020B0604020202020204" pitchFamily="34" charset="0"/>
-              </a:rPr>
-              <a:t>Amagi </a:t>
-            </a:r>
-          </a:p>
-          <a:p>
-            <a:r>
-              <a:rPr lang="en-US" sz="861" dirty="0">
-                <a:solidFill>
-                  <a:srgbClr val="374151"/>
-                </a:solidFill>
-                <a:latin typeface="Arial" panose="020B0604020202020204" pitchFamily="34" charset="0"/>
-                <a:cs typeface="Arial" panose="020B0604020202020204" pitchFamily="34" charset="0"/>
-              </a:rPr>
-              <a:t>SOW</a:t>
-            </a:r>
-            <a:endParaRPr lang="en-US" sz="861" dirty="0">
-              <a:latin typeface="Arial" panose="020B0604020202020204" pitchFamily="34" charset="0"/>
-              <a:cs typeface="Arial" panose="020B0604020202020204" pitchFamily="34" charset="0"/>
-            </a:endParaRPr>
-          </a:p>
-        </p:txBody>
-      </p:sp>
-      <p:sp>
-        <p:nvSpPr>
-          <p:cNvPr id="18" name="Text 16"/>
-          <p:cNvSpPr/>
-          <p:nvPr/>
-        </p:nvSpPr>
-        <p:spPr>
-          <a:xfrm>
-            <a:off x="759180" y="2022585"/>
-            <a:ext cx="4462501" cy="548092"/>
-          </a:xfrm>
-          <a:prstGeom prst="rect">
-            <a:avLst/>
-          </a:prstGeom>
-          <a:noFill/>
-          <a:ln/>
-        </p:spPr>
-        <p:txBody>
-          <a:bodyPr wrap="square" lIns="0" tIns="0" rIns="0" bIns="0" rtlCol="0" anchor="ctr"/>
-          <a:lstStyle/>
-          <a:p>
-            <a:r>
-              <a:rPr lang="en-US" sz="810" dirty="0">
-                <a:latin typeface="Arial" panose="020B0604020202020204" pitchFamily="34" charset="0"/>
-                <a:cs typeface="Arial" panose="020B0604020202020204" pitchFamily="34" charset="0"/>
-              </a:rPr>
-              <a:t>Amagi Contract Cost Review: Provide Sinclair with details on cost savings for Amagi by following up with Mike Kralik and Kevin </a:t>
-            </a:r>
-            <a:r>
-              <a:rPr lang="en-US" sz="810" dirty="0" err="1">
-                <a:latin typeface="Arial" panose="020B0604020202020204" pitchFamily="34" charset="0"/>
-                <a:cs typeface="Arial" panose="020B0604020202020204" pitchFamily="34" charset="0"/>
-              </a:rPr>
-              <a:t>Kotlove</a:t>
-            </a:r>
-            <a:r>
-              <a:rPr lang="en-US" sz="810" dirty="0">
-                <a:latin typeface="Arial" panose="020B0604020202020204" pitchFamily="34" charset="0"/>
-                <a:cs typeface="Arial" panose="020B0604020202020204" pitchFamily="34" charset="0"/>
-              </a:rPr>
-              <a:t>. (Ari)</a:t>
-            </a:r>
-          </a:p>
-        </p:txBody>
-      </p:sp>
-      <p:sp>
-        <p:nvSpPr>
-          <p:cNvPr id="19" name="Shape 17"/>
-          <p:cNvSpPr/>
-          <p:nvPr/>
-        </p:nvSpPr>
-        <p:spPr>
-          <a:xfrm>
-            <a:off x="5258714" y="2194788"/>
-            <a:ext cx="546240" cy="203683"/>
-          </a:xfrm>
-          <a:prstGeom prst="roundRect">
-            <a:avLst>
-              <a:gd name="adj" fmla="val 22727"/>
-            </a:avLst>
-          </a:prstGeom>
-          <a:solidFill>
-            <a:srgbClr val="DBEAFE"/>
-          </a:solidFill>
-          <a:ln w="12700">
-            <a:solidFill>
-              <a:srgbClr val="DBEAFE"/>
-            </a:solidFill>
-            <a:prstDash val="solid"/>
-          </a:ln>
-        </p:spPr>
-        <p:txBody>
-          <a:bodyPr/>
-          <a:lstStyle/>
-          <a:p>
-            <a:endParaRPr lang="en-US" sz="1823">
-              <a:latin typeface="Arial" panose="020B0604020202020204" pitchFamily="34" charset="0"/>
-              <a:cs typeface="Arial" panose="020B0604020202020204" pitchFamily="34" charset="0"/>
-            </a:endParaRPr>
-          </a:p>
-        </p:txBody>
-      </p:sp>
-      <p:sp>
-        <p:nvSpPr>
-          <p:cNvPr id="20" name="Text 18"/>
-          <p:cNvSpPr/>
-          <p:nvPr/>
-        </p:nvSpPr>
-        <p:spPr>
-          <a:xfrm>
-            <a:off x="5258714" y="2194788"/>
-            <a:ext cx="546240" cy="203683"/>
-          </a:xfrm>
-          <a:prstGeom prst="rect">
-            <a:avLst/>
-          </a:prstGeom>
-          <a:noFill/>
-          <a:ln/>
-        </p:spPr>
-        <p:txBody>
-          <a:bodyPr wrap="square" lIns="0" tIns="0" rIns="0" bIns="0" rtlCol="0" anchor="ctr"/>
-          <a:lstStyle/>
-          <a:p>
-            <a:pPr algn="ctr"/>
-            <a:r>
-              <a:rPr lang="en-US" sz="709" dirty="0">
-                <a:solidFill>
-                  <a:srgbClr val="1E40AF"/>
-                </a:solidFill>
-                <a:latin typeface="Arial" panose="020B0604020202020204" pitchFamily="34" charset="0"/>
-                <a:ea typeface="Calibri" pitchFamily="34" charset="-122"/>
-                <a:cs typeface="Arial" panose="020B0604020202020204" pitchFamily="34" charset="0"/>
-              </a:rPr>
-              <a:t>In Progress</a:t>
-            </a:r>
-            <a:endParaRPr lang="en-US" sz="709" dirty="0">
-              <a:latin typeface="Arial" panose="020B0604020202020204" pitchFamily="34" charset="0"/>
-              <a:cs typeface="Arial" panose="020B0604020202020204" pitchFamily="34" charset="0"/>
-            </a:endParaRPr>
-          </a:p>
-        </p:txBody>
-      </p:sp>
-      <p:sp>
-        <p:nvSpPr>
-          <p:cNvPr id="21" name="Text 19"/>
-          <p:cNvSpPr/>
-          <p:nvPr/>
-        </p:nvSpPr>
-        <p:spPr>
-          <a:xfrm>
-            <a:off x="138874" y="2570675"/>
-            <a:ext cx="601790" cy="548092"/>
-          </a:xfrm>
-          <a:prstGeom prst="rect">
-            <a:avLst/>
-          </a:prstGeom>
-          <a:noFill/>
-          <a:ln/>
-        </p:spPr>
-        <p:txBody>
-          <a:bodyPr wrap="square" lIns="0" tIns="0" rIns="0" bIns="0" rtlCol="0" anchor="ctr"/>
-          <a:lstStyle/>
-          <a:p>
-            <a:r>
-              <a:rPr lang="en-US" sz="861" dirty="0">
-                <a:solidFill>
-                  <a:srgbClr val="374151"/>
-                </a:solidFill>
-                <a:latin typeface="Arial" panose="020B0604020202020204" pitchFamily="34" charset="0"/>
-                <a:ea typeface="Calibri" pitchFamily="34" charset="-122"/>
-                <a:cs typeface="Arial" panose="020B0604020202020204" pitchFamily="34" charset="0"/>
-              </a:rPr>
-              <a:t>FOXXUM</a:t>
-            </a:r>
-            <a:endParaRPr lang="en-US" sz="861" dirty="0">
-              <a:latin typeface="Arial" panose="020B0604020202020204" pitchFamily="34" charset="0"/>
-              <a:cs typeface="Arial" panose="020B0604020202020204" pitchFamily="34" charset="0"/>
-            </a:endParaRPr>
-          </a:p>
-        </p:txBody>
-      </p:sp>
-      <p:sp>
-        <p:nvSpPr>
-          <p:cNvPr id="22" name="Text 20"/>
-          <p:cNvSpPr/>
-          <p:nvPr/>
-        </p:nvSpPr>
-        <p:spPr>
-          <a:xfrm>
-            <a:off x="759180" y="2570675"/>
-            <a:ext cx="4462501" cy="548092"/>
-          </a:xfrm>
-          <a:prstGeom prst="rect">
-            <a:avLst/>
-          </a:prstGeom>
-          <a:noFill/>
-          <a:ln/>
-        </p:spPr>
-        <p:txBody>
-          <a:bodyPr wrap="square" lIns="0" tIns="0" rIns="0" bIns="0" rtlCol="0" anchor="ctr"/>
-          <a:lstStyle/>
-          <a:p>
-            <a:r>
-              <a:rPr lang="en-US" sz="861" dirty="0">
-                <a:solidFill>
-                  <a:srgbClr val="374151"/>
-                </a:solidFill>
-                <a:latin typeface="Arial" panose="020B0604020202020204" pitchFamily="34" charset="0"/>
-                <a:ea typeface="Calibri" pitchFamily="34" charset="-122"/>
-                <a:cs typeface="Arial" panose="020B0604020202020204" pitchFamily="34" charset="0"/>
-              </a:rPr>
-              <a:t>Redlined, contract sent out to FOXXUM for review on 7/2.</a:t>
-            </a:r>
-            <a:endParaRPr lang="en-US" sz="861" dirty="0">
-              <a:latin typeface="Arial" panose="020B0604020202020204" pitchFamily="34" charset="0"/>
-              <a:cs typeface="Arial" panose="020B0604020202020204" pitchFamily="34" charset="0"/>
-            </a:endParaRPr>
-          </a:p>
-        </p:txBody>
-      </p:sp>
-      <p:sp>
-        <p:nvSpPr>
-          <p:cNvPr id="23" name="Shape 21"/>
-          <p:cNvSpPr/>
-          <p:nvPr/>
-        </p:nvSpPr>
-        <p:spPr>
-          <a:xfrm>
-            <a:off x="5258714" y="2742880"/>
-            <a:ext cx="546240" cy="203683"/>
-          </a:xfrm>
-          <a:prstGeom prst="roundRect">
-            <a:avLst>
-              <a:gd name="adj" fmla="val 22727"/>
-            </a:avLst>
-          </a:prstGeom>
-          <a:solidFill>
-            <a:srgbClr val="DBEAFE"/>
-          </a:solidFill>
-          <a:ln w="12700">
-            <a:solidFill>
-              <a:srgbClr val="DBEAFE"/>
-            </a:solidFill>
-            <a:prstDash val="solid"/>
-          </a:ln>
-        </p:spPr>
-        <p:txBody>
-          <a:bodyPr/>
-          <a:lstStyle/>
-          <a:p>
-            <a:endParaRPr lang="en-US" sz="1823">
-              <a:latin typeface="Arial" panose="020B0604020202020204" pitchFamily="34" charset="0"/>
-              <a:cs typeface="Arial" panose="020B0604020202020204" pitchFamily="34" charset="0"/>
-            </a:endParaRPr>
-          </a:p>
-        </p:txBody>
-      </p:sp>
-      <p:sp>
-        <p:nvSpPr>
-          <p:cNvPr id="24" name="Text 22"/>
-          <p:cNvSpPr/>
-          <p:nvPr/>
-        </p:nvSpPr>
-        <p:spPr>
-          <a:xfrm>
-            <a:off x="5258714" y="2742880"/>
-            <a:ext cx="546240" cy="203683"/>
-          </a:xfrm>
-          <a:prstGeom prst="rect">
-            <a:avLst/>
-          </a:prstGeom>
-          <a:noFill/>
-          <a:ln/>
-        </p:spPr>
-        <p:txBody>
-          <a:bodyPr wrap="square" lIns="0" tIns="0" rIns="0" bIns="0" rtlCol="0" anchor="ctr"/>
-          <a:lstStyle/>
-          <a:p>
-            <a:pPr algn="ctr"/>
-            <a:r>
-              <a:rPr lang="en-US" sz="709" dirty="0">
-                <a:solidFill>
-                  <a:srgbClr val="1E40AF"/>
-                </a:solidFill>
-                <a:latin typeface="Arial" panose="020B0604020202020204" pitchFamily="34" charset="0"/>
-                <a:ea typeface="Calibri" pitchFamily="34" charset="-122"/>
-                <a:cs typeface="Arial" panose="020B0604020202020204" pitchFamily="34" charset="0"/>
-              </a:rPr>
-              <a:t>In Progress</a:t>
-            </a:r>
-            <a:endParaRPr lang="en-US" sz="709" dirty="0">
-              <a:latin typeface="Arial" panose="020B0604020202020204" pitchFamily="34" charset="0"/>
-              <a:cs typeface="Arial" panose="020B0604020202020204" pitchFamily="34" charset="0"/>
-            </a:endParaRPr>
-          </a:p>
-        </p:txBody>
-      </p:sp>
-      <p:sp>
-        <p:nvSpPr>
-          <p:cNvPr id="25" name="Shape 23"/>
-          <p:cNvSpPr/>
-          <p:nvPr/>
-        </p:nvSpPr>
-        <p:spPr>
-          <a:xfrm>
-            <a:off x="101842" y="3118767"/>
-            <a:ext cx="5721629" cy="548092"/>
-          </a:xfrm>
-          <a:prstGeom prst="rect">
-            <a:avLst/>
-          </a:prstGeom>
-          <a:solidFill>
-            <a:srgbClr val="FFFFFF"/>
-          </a:solidFill>
-          <a:ln w="12700">
-            <a:solidFill>
-              <a:srgbClr val="FFFFFF"/>
-            </a:solidFill>
-            <a:prstDash val="solid"/>
-          </a:ln>
-        </p:spPr>
-        <p:txBody>
-          <a:bodyPr/>
-          <a:lstStyle/>
-          <a:p>
-            <a:endParaRPr lang="en-US" sz="1823">
-              <a:latin typeface="Arial" panose="020B0604020202020204" pitchFamily="34" charset="0"/>
-              <a:cs typeface="Arial" panose="020B0604020202020204" pitchFamily="34" charset="0"/>
-            </a:endParaRPr>
-          </a:p>
-        </p:txBody>
-      </p:sp>
-      <p:sp>
-        <p:nvSpPr>
-          <p:cNvPr id="26" name="Text 24"/>
-          <p:cNvSpPr/>
-          <p:nvPr/>
-        </p:nvSpPr>
-        <p:spPr>
-          <a:xfrm>
-            <a:off x="138874" y="3118767"/>
-            <a:ext cx="601790" cy="548092"/>
-          </a:xfrm>
-          <a:prstGeom prst="rect">
-            <a:avLst/>
-          </a:prstGeom>
-          <a:noFill/>
-          <a:ln/>
-        </p:spPr>
-        <p:txBody>
-          <a:bodyPr wrap="square" lIns="0" tIns="0" rIns="0" bIns="0" rtlCol="0" anchor="ctr"/>
-          <a:lstStyle/>
-          <a:p>
-            <a:r>
-              <a:rPr lang="en-US" sz="861" dirty="0">
-                <a:solidFill>
-                  <a:srgbClr val="374151"/>
-                </a:solidFill>
-                <a:latin typeface="Arial" panose="020B0604020202020204" pitchFamily="34" charset="0"/>
-                <a:ea typeface="Calibri" pitchFamily="34" charset="-122"/>
-                <a:cs typeface="Arial" panose="020B0604020202020204" pitchFamily="34" charset="0"/>
-              </a:rPr>
-              <a:t>SR Data</a:t>
-            </a:r>
-            <a:endParaRPr lang="en-US" sz="861" dirty="0">
-              <a:latin typeface="Arial" panose="020B0604020202020204" pitchFamily="34" charset="0"/>
-              <a:cs typeface="Arial" panose="020B0604020202020204" pitchFamily="34" charset="0"/>
-            </a:endParaRPr>
-          </a:p>
-        </p:txBody>
-      </p:sp>
-      <p:sp>
-        <p:nvSpPr>
-          <p:cNvPr id="27" name="Text 25"/>
-          <p:cNvSpPr/>
-          <p:nvPr/>
-        </p:nvSpPr>
-        <p:spPr>
-          <a:xfrm>
-            <a:off x="759180" y="3118767"/>
-            <a:ext cx="4462501" cy="548092"/>
-          </a:xfrm>
-          <a:prstGeom prst="rect">
-            <a:avLst/>
-          </a:prstGeom>
-          <a:noFill/>
-          <a:ln/>
-        </p:spPr>
-        <p:txBody>
-          <a:bodyPr wrap="square" lIns="0" tIns="0" rIns="0" bIns="0" rtlCol="0" anchor="ctr"/>
-          <a:lstStyle/>
-          <a:p>
-            <a:r>
-              <a:rPr lang="en-US" sz="911" dirty="0">
-                <a:latin typeface="Arial" panose="020B0604020202020204" pitchFamily="34" charset="0"/>
-                <a:cs typeface="Arial" panose="020B0604020202020204" pitchFamily="34" charset="0"/>
-              </a:rPr>
-              <a:t>Discussions will begin end of week or first week of July. Due by end of July.</a:t>
-            </a:r>
-          </a:p>
-          <a:p>
-            <a:endParaRPr lang="en-US" sz="911" dirty="0">
-              <a:latin typeface="Arial" panose="020B0604020202020204" pitchFamily="34" charset="0"/>
-              <a:cs typeface="Arial" panose="020B0604020202020204" pitchFamily="34" charset="0"/>
-            </a:endParaRPr>
-          </a:p>
-        </p:txBody>
-      </p:sp>
-      <p:sp>
-        <p:nvSpPr>
-          <p:cNvPr id="28" name="Shape 26"/>
-          <p:cNvSpPr/>
-          <p:nvPr/>
-        </p:nvSpPr>
-        <p:spPr>
-          <a:xfrm>
-            <a:off x="5258714" y="3290972"/>
-            <a:ext cx="546240" cy="203683"/>
-          </a:xfrm>
-          <a:prstGeom prst="roundRect">
-            <a:avLst>
-              <a:gd name="adj" fmla="val 22727"/>
-            </a:avLst>
-          </a:prstGeom>
-          <a:solidFill>
-            <a:srgbClr val="DBEAFE"/>
-          </a:solidFill>
-          <a:ln w="12700">
-            <a:solidFill>
-              <a:srgbClr val="DBEAFE"/>
-            </a:solidFill>
-            <a:prstDash val="solid"/>
-          </a:ln>
-        </p:spPr>
-        <p:txBody>
-          <a:bodyPr/>
-          <a:lstStyle/>
-          <a:p>
-            <a:endParaRPr lang="en-US" sz="1823">
-              <a:latin typeface="Arial" panose="020B0604020202020204" pitchFamily="34" charset="0"/>
-              <a:cs typeface="Arial" panose="020B0604020202020204" pitchFamily="34" charset="0"/>
-            </a:endParaRPr>
-          </a:p>
-        </p:txBody>
-      </p:sp>
-      <p:sp>
-        <p:nvSpPr>
-          <p:cNvPr id="29" name="Text 27"/>
-          <p:cNvSpPr>
-            <a:spLocks/>
-          </p:cNvSpPr>
-          <p:nvPr/>
-        </p:nvSpPr>
-        <p:spPr>
-          <a:xfrm>
-            <a:off x="5258714" y="3290972"/>
-            <a:ext cx="546240" cy="203683"/>
-          </a:xfrm>
-          <a:prstGeom prst="rect">
-            <a:avLst/>
-          </a:prstGeom>
-          <a:noFill/>
-          <a:ln/>
-        </p:spPr>
-        <p:txBody>
-          <a:bodyPr wrap="square" lIns="0" tIns="0" rIns="0" bIns="0" rtlCol="0" anchor="ctr"/>
-          <a:lstStyle/>
-          <a:p>
-            <a:pPr algn="ctr"/>
-            <a:r>
-              <a:rPr lang="en-US" sz="709" dirty="0">
-                <a:solidFill>
-                  <a:srgbClr val="1E40AF"/>
-                </a:solidFill>
-                <a:latin typeface="Arial" panose="020B0604020202020204" pitchFamily="34" charset="0"/>
-                <a:ea typeface="Calibri" pitchFamily="34" charset="-122"/>
-                <a:cs typeface="Arial" panose="020B0604020202020204" pitchFamily="34" charset="0"/>
-              </a:rPr>
-              <a:t>In Progress</a:t>
-            </a:r>
-            <a:endParaRPr lang="en-US" sz="709" dirty="0">
-              <a:latin typeface="Arial" panose="020B0604020202020204" pitchFamily="34" charset="0"/>
-              <a:cs typeface="Arial" panose="020B0604020202020204" pitchFamily="34" charset="0"/>
-            </a:endParaRPr>
-          </a:p>
-        </p:txBody>
-      </p:sp>
-      <p:sp>
-        <p:nvSpPr>
-          <p:cNvPr id="30" name="Shape 28"/>
-          <p:cNvSpPr/>
-          <p:nvPr/>
-        </p:nvSpPr>
-        <p:spPr>
-          <a:xfrm>
-            <a:off x="5943829" y="648653"/>
-            <a:ext cx="5740146" cy="277749"/>
-          </a:xfrm>
-          <a:prstGeom prst="rect">
-            <a:avLst/>
-          </a:prstGeom>
-          <a:solidFill>
-            <a:schemeClr val="accent6">
-              <a:lumMod val="60000"/>
-              <a:lumOff val="40000"/>
-            </a:schemeClr>
-          </a:solidFill>
-          <a:ln w="12700">
-            <a:solidFill>
-              <a:srgbClr val="0F6E56"/>
-            </a:solidFill>
-            <a:prstDash val="solid"/>
-          </a:ln>
-        </p:spPr>
-        <p:txBody>
-          <a:bodyPr/>
-          <a:lstStyle/>
-          <a:p>
-            <a:endParaRPr lang="en-US" sz="1823">
-              <a:latin typeface="Arial" panose="020B0604020202020204" pitchFamily="34" charset="0"/>
-              <a:cs typeface="Arial" panose="020B0604020202020204" pitchFamily="34" charset="0"/>
-            </a:endParaRPr>
-          </a:p>
-        </p:txBody>
-      </p:sp>
-      <p:sp>
-        <p:nvSpPr>
-          <p:cNvPr id="31" name="Text 29"/>
-          <p:cNvSpPr/>
-          <p:nvPr/>
-        </p:nvSpPr>
-        <p:spPr>
-          <a:xfrm>
-            <a:off x="5999378" y="648653"/>
-            <a:ext cx="5693855" cy="277749"/>
-          </a:xfrm>
-          <a:prstGeom prst="rect">
-            <a:avLst/>
-          </a:prstGeom>
-          <a:noFill/>
-          <a:ln/>
-        </p:spPr>
-        <p:txBody>
-          <a:bodyPr wrap="square" lIns="0" tIns="0" rIns="0" bIns="0" rtlCol="0" anchor="ctr"/>
-          <a:lstStyle/>
-          <a:p>
-            <a:r>
-              <a:rPr lang="en-US" sz="1013" dirty="0">
-                <a:latin typeface="Arial" panose="020B0604020202020204" pitchFamily="34" charset="0"/>
-                <a:cs typeface="Arial" panose="020B0604020202020204" pitchFamily="34" charset="0"/>
-              </a:rPr>
-              <a:t>Shared Infrastructure &amp; Dev Tooling</a:t>
-            </a:r>
-          </a:p>
-        </p:txBody>
-      </p:sp>
-      <p:sp>
-        <p:nvSpPr>
-          <p:cNvPr id="32" name="Shape 30"/>
-          <p:cNvSpPr/>
-          <p:nvPr/>
-        </p:nvSpPr>
-        <p:spPr>
-          <a:xfrm>
-            <a:off x="5953087" y="926401"/>
-            <a:ext cx="5740146" cy="2740457"/>
-          </a:xfrm>
-          <a:prstGeom prst="rect">
-            <a:avLst/>
-          </a:prstGeom>
-          <a:solidFill>
-            <a:srgbClr val="F8FFFE"/>
-          </a:solidFill>
-          <a:ln w="9525">
-            <a:solidFill>
-              <a:srgbClr val="D1FAE5"/>
-            </a:solidFill>
-            <a:prstDash val="solid"/>
-          </a:ln>
-        </p:spPr>
-        <p:txBody>
-          <a:bodyPr/>
-          <a:lstStyle/>
-          <a:p>
-            <a:endParaRPr lang="en-US" sz="1823" dirty="0">
-              <a:latin typeface="Arial" panose="020B0604020202020204" pitchFamily="34" charset="0"/>
-              <a:cs typeface="Arial" panose="020B0604020202020204" pitchFamily="34" charset="0"/>
-            </a:endParaRPr>
-          </a:p>
-        </p:txBody>
-      </p:sp>
-      <p:sp>
-        <p:nvSpPr>
-          <p:cNvPr id="33" name="Shape 31"/>
-          <p:cNvSpPr/>
-          <p:nvPr/>
-        </p:nvSpPr>
-        <p:spPr>
-          <a:xfrm>
-            <a:off x="5962345" y="926402"/>
-            <a:ext cx="5721629" cy="685114"/>
-          </a:xfrm>
-          <a:prstGeom prst="rect">
-            <a:avLst/>
-          </a:prstGeom>
-          <a:solidFill>
-            <a:srgbClr val="FFFFFF"/>
-          </a:solidFill>
-          <a:ln w="12700">
-            <a:solidFill>
-              <a:srgbClr val="FFFFFF"/>
-            </a:solidFill>
-            <a:prstDash val="solid"/>
-          </a:ln>
-        </p:spPr>
-        <p:txBody>
-          <a:bodyPr/>
-          <a:lstStyle/>
-          <a:p>
-            <a:endParaRPr lang="en-US" sz="1823" dirty="0">
-              <a:latin typeface="Arial" panose="020B0604020202020204" pitchFamily="34" charset="0"/>
-              <a:cs typeface="Arial" panose="020B0604020202020204" pitchFamily="34" charset="0"/>
-            </a:endParaRPr>
-          </a:p>
-        </p:txBody>
-      </p:sp>
-      <p:sp>
-        <p:nvSpPr>
-          <p:cNvPr id="34" name="Text 32"/>
-          <p:cNvSpPr/>
-          <p:nvPr/>
-        </p:nvSpPr>
-        <p:spPr>
-          <a:xfrm>
-            <a:off x="5999378" y="926402"/>
-            <a:ext cx="601790" cy="685114"/>
-          </a:xfrm>
-          <a:prstGeom prst="rect">
-            <a:avLst/>
-          </a:prstGeom>
-          <a:noFill/>
-          <a:ln/>
-        </p:spPr>
-        <p:txBody>
-          <a:bodyPr wrap="square" lIns="0" tIns="0" rIns="0" bIns="0" rtlCol="0" anchor="ctr"/>
-          <a:lstStyle/>
-          <a:p>
-            <a:r>
-              <a:rPr lang="en-US" sz="911" dirty="0">
-                <a:latin typeface="Arial" panose="020B0604020202020204" pitchFamily="34" charset="0"/>
-                <a:cs typeface="Arial" panose="020B0604020202020204" pitchFamily="34" charset="0"/>
-              </a:rPr>
-              <a:t>Monitoring &amp; Error Tracking</a:t>
-            </a:r>
-          </a:p>
-        </p:txBody>
-      </p:sp>
-      <p:sp>
-        <p:nvSpPr>
-          <p:cNvPr id="35" name="Text 33"/>
-          <p:cNvSpPr/>
-          <p:nvPr/>
-        </p:nvSpPr>
-        <p:spPr>
-          <a:xfrm>
-            <a:off x="6619684" y="926402"/>
-            <a:ext cx="4462501" cy="685114"/>
-          </a:xfrm>
-          <a:prstGeom prst="rect">
-            <a:avLst/>
-          </a:prstGeom>
-          <a:noFill/>
-          <a:ln/>
-        </p:spPr>
-        <p:txBody>
-          <a:bodyPr wrap="square" lIns="0" tIns="0" rIns="0" bIns="0" rtlCol="0" anchor="ctr"/>
-          <a:lstStyle/>
-          <a:p>
-            <a:r>
-              <a:rPr lang="en-US" sz="911" dirty="0">
-                <a:latin typeface="Arial" panose="020B0604020202020204" pitchFamily="34" charset="0"/>
-                <a:cs typeface="Arial" panose="020B0604020202020204" pitchFamily="34" charset="0"/>
-              </a:rPr>
-              <a:t>Added automatic tracking of what users do in the app (screens viewed, buttons tapped) and instant alerts when something breaks, so issues get caught and fixed faster instead of relying on user reports.</a:t>
-            </a:r>
-            <a:endParaRPr lang="en-US" sz="861" dirty="0">
-              <a:latin typeface="Arial" panose="020B0604020202020204" pitchFamily="34" charset="0"/>
-              <a:cs typeface="Arial" panose="020B0604020202020204" pitchFamily="34" charset="0"/>
-            </a:endParaRPr>
-          </a:p>
-        </p:txBody>
-      </p:sp>
-      <p:sp>
-        <p:nvSpPr>
-          <p:cNvPr id="38" name="Text 36"/>
-          <p:cNvSpPr/>
-          <p:nvPr/>
-        </p:nvSpPr>
-        <p:spPr>
-          <a:xfrm>
-            <a:off x="5999378" y="1611516"/>
-            <a:ext cx="601790" cy="685114"/>
-          </a:xfrm>
-          <a:prstGeom prst="rect">
-            <a:avLst/>
-          </a:prstGeom>
-          <a:noFill/>
-          <a:ln/>
-        </p:spPr>
-        <p:txBody>
-          <a:bodyPr wrap="square" lIns="0" tIns="0" rIns="0" bIns="0" rtlCol="0" anchor="ctr"/>
-          <a:lstStyle/>
-          <a:p>
-            <a:endParaRPr lang="en-US" sz="861" dirty="0">
-              <a:latin typeface="Arial" panose="020B0604020202020204" pitchFamily="34" charset="0"/>
-              <a:cs typeface="Arial" panose="020B0604020202020204" pitchFamily="34" charset="0"/>
-            </a:endParaRPr>
-          </a:p>
-        </p:txBody>
-      </p:sp>
-      <p:sp>
-        <p:nvSpPr>
-          <p:cNvPr id="39" name="Text 37"/>
-          <p:cNvSpPr/>
-          <p:nvPr/>
-        </p:nvSpPr>
-        <p:spPr>
-          <a:xfrm>
-            <a:off x="6619684" y="1611516"/>
-            <a:ext cx="4462501" cy="685114"/>
-          </a:xfrm>
-          <a:prstGeom prst="rect">
-            <a:avLst/>
-          </a:prstGeom>
-          <a:noFill/>
-          <a:ln/>
-        </p:spPr>
-        <p:txBody>
-          <a:bodyPr wrap="square" lIns="0" tIns="0" rIns="0" bIns="0" rtlCol="0" anchor="ctr"/>
-          <a:lstStyle/>
-          <a:p>
-            <a:pPr marL="173593" indent="-173593">
-              <a:buFont typeface="Arial" panose="020B0604020202020204" pitchFamily="34" charset="0"/>
-              <a:buChar char="•"/>
-            </a:pPr>
-            <a:r>
-              <a:rPr lang="en-US" sz="911" dirty="0"/>
-              <a:t>Migrated the app off mock data onto the live backend, so Home, Live, Schedule, and Tournaments now show real content and real playback. </a:t>
-            </a:r>
-          </a:p>
-          <a:p>
-            <a:pPr marL="173593" indent="-173593">
-              <a:buFont typeface="Arial" panose="020B0604020202020204" pitchFamily="34" charset="0"/>
-              <a:buChar char="•"/>
-            </a:pPr>
-            <a:r>
-              <a:rPr lang="en-US" sz="911" dirty="0"/>
-              <a:t>Shipped supporting shared tools (event tracking, design polish, dev tooling) alongside about 35 merged updates this period.</a:t>
-            </a:r>
-            <a:endParaRPr lang="en-US" sz="861" dirty="0">
-              <a:latin typeface="Arial" panose="020B0604020202020204" pitchFamily="34" charset="0"/>
-              <a:cs typeface="Arial" panose="020B0604020202020204" pitchFamily="34" charset="0"/>
-            </a:endParaRPr>
-          </a:p>
-        </p:txBody>
-      </p:sp>
-      <p:sp>
-        <p:nvSpPr>
-          <p:cNvPr id="42" name="Shape 40"/>
-          <p:cNvSpPr/>
-          <p:nvPr/>
-        </p:nvSpPr>
-        <p:spPr>
-          <a:xfrm>
-            <a:off x="5962345" y="2296630"/>
-            <a:ext cx="5721629" cy="685114"/>
-          </a:xfrm>
-          <a:prstGeom prst="rect">
-            <a:avLst/>
-          </a:prstGeom>
-          <a:solidFill>
-            <a:srgbClr val="FFFFFF"/>
-          </a:solidFill>
-          <a:ln w="12700">
-            <a:solidFill>
-              <a:srgbClr val="FFFFFF"/>
-            </a:solidFill>
-            <a:prstDash val="solid"/>
-          </a:ln>
-        </p:spPr>
-        <p:txBody>
-          <a:bodyPr/>
-          <a:lstStyle/>
-          <a:p>
-            <a:endParaRPr lang="en-US" sz="1823">
-              <a:latin typeface="Arial" panose="020B0604020202020204" pitchFamily="34" charset="0"/>
-              <a:cs typeface="Arial" panose="020B0604020202020204" pitchFamily="34" charset="0"/>
-            </a:endParaRPr>
-          </a:p>
-        </p:txBody>
-      </p:sp>
-      <p:sp>
-        <p:nvSpPr>
-          <p:cNvPr id="43" name="Text 41"/>
-          <p:cNvSpPr/>
-          <p:nvPr/>
-        </p:nvSpPr>
-        <p:spPr>
-          <a:xfrm>
-            <a:off x="5999378" y="2296630"/>
-            <a:ext cx="601790" cy="685114"/>
-          </a:xfrm>
-          <a:prstGeom prst="rect">
-            <a:avLst/>
-          </a:prstGeom>
-          <a:noFill/>
-          <a:ln/>
-        </p:spPr>
-        <p:txBody>
-          <a:bodyPr wrap="square" lIns="0" tIns="0" rIns="0" bIns="0" rtlCol="0" anchor="ctr"/>
-          <a:lstStyle/>
-          <a:p>
-            <a:r>
-              <a:rPr lang="en-US" sz="911" dirty="0"/>
-              <a:t>New Website</a:t>
-            </a:r>
-            <a:endParaRPr lang="en-US" sz="861" dirty="0">
-              <a:latin typeface="Arial" panose="020B0604020202020204" pitchFamily="34" charset="0"/>
-              <a:cs typeface="Arial" panose="020B0604020202020204" pitchFamily="34" charset="0"/>
-            </a:endParaRPr>
-          </a:p>
-        </p:txBody>
-      </p:sp>
-      <p:sp>
-        <p:nvSpPr>
-          <p:cNvPr id="44" name="Text 42"/>
-          <p:cNvSpPr/>
-          <p:nvPr/>
-        </p:nvSpPr>
-        <p:spPr>
-          <a:xfrm>
-            <a:off x="6619684" y="2296630"/>
-            <a:ext cx="4462501" cy="685114"/>
-          </a:xfrm>
-          <a:prstGeom prst="rect">
-            <a:avLst/>
-          </a:prstGeom>
-          <a:noFill/>
-          <a:ln/>
-        </p:spPr>
-        <p:txBody>
-          <a:bodyPr wrap="square" lIns="0" tIns="0" rIns="0" bIns="0" rtlCol="0" anchor="ctr"/>
-          <a:lstStyle/>
-          <a:p>
-            <a:pPr marL="173593" indent="-173593">
-              <a:buFont typeface="Arial" panose="020B0604020202020204" pitchFamily="34" charset="0"/>
-              <a:buChar char="•"/>
-            </a:pPr>
-            <a:r>
-              <a:rPr lang="en-US" sz="911" dirty="0"/>
-              <a:t>Prototyping Auth0/</a:t>
-            </a:r>
-            <a:r>
-              <a:rPr lang="en-US" sz="911" dirty="0" err="1"/>
-              <a:t>Cleeng</a:t>
-            </a:r>
-            <a:r>
-              <a:rPr lang="en-US" sz="911" dirty="0"/>
-              <a:t> login, building out CMS widget support, and standing up Adobe Pass provider management, alongside a shipped front-end foundation (design system, navigation, footer, page shell). </a:t>
-            </a:r>
-          </a:p>
-          <a:p>
-            <a:pPr marL="173593" indent="-173593">
-              <a:buFont typeface="Arial" panose="020B0604020202020204" pitchFamily="34" charset="0"/>
-              <a:buChar char="•"/>
-            </a:pPr>
-            <a:r>
-              <a:rPr lang="en-US" sz="911" dirty="0"/>
-              <a:t>Carousel page engine and its backend refresh API delivered, plus an early proof-of-concept test of the </a:t>
-            </a:r>
-            <a:r>
-              <a:rPr lang="en-US" sz="911" dirty="0" err="1"/>
-              <a:t>Bitmovin</a:t>
-            </a:r>
-            <a:r>
-              <a:rPr lang="en-US" sz="911" dirty="0"/>
-              <a:t> video player.</a:t>
-            </a:r>
-            <a:endParaRPr lang="en-US" sz="861" dirty="0">
-              <a:latin typeface="Arial" panose="020B0604020202020204" pitchFamily="34" charset="0"/>
-              <a:cs typeface="Arial" panose="020B0604020202020204" pitchFamily="34" charset="0"/>
-            </a:endParaRPr>
-          </a:p>
-        </p:txBody>
-      </p:sp>
-      <p:sp>
-        <p:nvSpPr>
-          <p:cNvPr id="47" name="Text 45"/>
-          <p:cNvSpPr/>
-          <p:nvPr/>
-        </p:nvSpPr>
-        <p:spPr>
-          <a:xfrm>
-            <a:off x="5999378" y="2981744"/>
-            <a:ext cx="601790" cy="685114"/>
-          </a:xfrm>
-          <a:prstGeom prst="rect">
-            <a:avLst/>
-          </a:prstGeom>
-          <a:noFill/>
-          <a:ln/>
-        </p:spPr>
-        <p:txBody>
-          <a:bodyPr wrap="square" lIns="0" tIns="0" rIns="0" bIns="0" rtlCol="0" anchor="ctr"/>
-          <a:lstStyle/>
-          <a:p>
-            <a:r>
-              <a:rPr lang="en-US" sz="861" dirty="0">
-                <a:solidFill>
-                  <a:srgbClr val="374151"/>
-                </a:solidFill>
-                <a:latin typeface="Arial" panose="020B0604020202020204" pitchFamily="34" charset="0"/>
-                <a:ea typeface="Calibri" pitchFamily="34" charset="-122"/>
-                <a:cs typeface="Arial" panose="020B0604020202020204" pitchFamily="34" charset="0"/>
-              </a:rPr>
-              <a:t>Hosting</a:t>
-            </a:r>
-            <a:endParaRPr lang="en-US" sz="861" dirty="0">
-              <a:latin typeface="Arial" panose="020B0604020202020204" pitchFamily="34" charset="0"/>
-              <a:cs typeface="Arial" panose="020B0604020202020204" pitchFamily="34" charset="0"/>
-            </a:endParaRPr>
-          </a:p>
-        </p:txBody>
-      </p:sp>
-      <p:sp>
-        <p:nvSpPr>
-          <p:cNvPr id="48" name="Text 46"/>
-          <p:cNvSpPr/>
-          <p:nvPr/>
-        </p:nvSpPr>
-        <p:spPr>
-          <a:xfrm>
-            <a:off x="6619684" y="2981744"/>
-            <a:ext cx="4462501" cy="685114"/>
-          </a:xfrm>
-          <a:prstGeom prst="rect">
-            <a:avLst/>
-          </a:prstGeom>
-          <a:noFill/>
-          <a:ln/>
-        </p:spPr>
-        <p:txBody>
-          <a:bodyPr wrap="square" lIns="0" tIns="0" rIns="0" bIns="0" rtlCol="0" anchor="ctr"/>
-          <a:lstStyle/>
-          <a:p>
-            <a:r>
-              <a:rPr lang="en-US" sz="911" dirty="0">
-                <a:latin typeface="Arial" panose="020B0604020202020204" pitchFamily="34" charset="0"/>
-                <a:cs typeface="Arial" panose="020B0604020202020204" pitchFamily="34" charset="0"/>
-              </a:rPr>
-              <a:t>Moving control of Tennis Channel's website hosting setup in-house, the same approach already used successfully for </a:t>
-            </a:r>
-            <a:r>
-              <a:rPr lang="en-US" sz="911" dirty="0" err="1">
-                <a:latin typeface="Arial" panose="020B0604020202020204" pitchFamily="34" charset="0"/>
-                <a:cs typeface="Arial" panose="020B0604020202020204" pitchFamily="34" charset="0"/>
-              </a:rPr>
-              <a:t>Tennis.com</a:t>
-            </a:r>
-            <a:r>
-              <a:rPr lang="en-US" sz="911" dirty="0">
-                <a:latin typeface="Arial" panose="020B0604020202020204" pitchFamily="34" charset="0"/>
-                <a:cs typeface="Arial" panose="020B0604020202020204" pitchFamily="34" charset="0"/>
-              </a:rPr>
-              <a:t>, giving us more control ahead of launch.</a:t>
-            </a:r>
-            <a:endParaRPr lang="en-US" sz="861" dirty="0">
-              <a:latin typeface="Arial" panose="020B0604020202020204" pitchFamily="34" charset="0"/>
-              <a:cs typeface="Arial" panose="020B0604020202020204" pitchFamily="34" charset="0"/>
-            </a:endParaRPr>
-          </a:p>
-        </p:txBody>
-      </p:sp>
-      <p:sp>
-        <p:nvSpPr>
-          <p:cNvPr id="50" name="Text 48"/>
-          <p:cNvSpPr/>
-          <p:nvPr/>
-        </p:nvSpPr>
-        <p:spPr>
-          <a:xfrm>
-            <a:off x="11119218" y="3222460"/>
-            <a:ext cx="546240" cy="203683"/>
-          </a:xfrm>
-          <a:prstGeom prst="rect">
-            <a:avLst/>
-          </a:prstGeom>
-          <a:noFill/>
-          <a:ln/>
-        </p:spPr>
-        <p:txBody>
-          <a:bodyPr wrap="square" lIns="0" tIns="0" rIns="0" bIns="0" rtlCol="0" anchor="ctr"/>
-          <a:lstStyle/>
-          <a:p>
-            <a:pPr algn="ctr"/>
-            <a:endParaRPr lang="en-US" sz="709" dirty="0">
-              <a:latin typeface="Arial" panose="020B0604020202020204" pitchFamily="34" charset="0"/>
-              <a:cs typeface="Arial" panose="020B0604020202020204" pitchFamily="34" charset="0"/>
-            </a:endParaRPr>
-          </a:p>
-        </p:txBody>
-      </p:sp>
-      <p:sp>
-        <p:nvSpPr>
-          <p:cNvPr id="51" name="Shape 49"/>
-          <p:cNvSpPr/>
-          <p:nvPr/>
-        </p:nvSpPr>
-        <p:spPr>
-          <a:xfrm>
-            <a:off x="92583" y="3740925"/>
-            <a:ext cx="5740146" cy="277749"/>
-          </a:xfrm>
-          <a:prstGeom prst="rect">
-            <a:avLst/>
-          </a:prstGeom>
-          <a:solidFill>
-            <a:schemeClr val="accent6">
-              <a:lumMod val="60000"/>
-              <a:lumOff val="40000"/>
-            </a:schemeClr>
-          </a:solidFill>
-          <a:ln w="12700">
-            <a:solidFill>
-              <a:srgbClr val="0F6E56"/>
-            </a:solidFill>
-            <a:prstDash val="solid"/>
-          </a:ln>
-        </p:spPr>
-        <p:txBody>
-          <a:bodyPr/>
-          <a:lstStyle/>
-          <a:p>
-            <a:endParaRPr lang="en-US" sz="1823">
-              <a:latin typeface="Arial" panose="020B0604020202020204" pitchFamily="34" charset="0"/>
-              <a:cs typeface="Arial" panose="020B0604020202020204" pitchFamily="34" charset="0"/>
-            </a:endParaRPr>
-          </a:p>
-        </p:txBody>
-      </p:sp>
-      <p:sp>
-        <p:nvSpPr>
-          <p:cNvPr id="52" name="Text 50"/>
-          <p:cNvSpPr/>
-          <p:nvPr/>
-        </p:nvSpPr>
-        <p:spPr>
-          <a:xfrm>
-            <a:off x="138874" y="3740925"/>
-            <a:ext cx="5693855" cy="277749"/>
-          </a:xfrm>
-          <a:prstGeom prst="rect">
-            <a:avLst/>
-          </a:prstGeom>
-          <a:noFill/>
-          <a:ln/>
-        </p:spPr>
-        <p:txBody>
-          <a:bodyPr wrap="square" lIns="0" tIns="0" rIns="0" bIns="0" rtlCol="0" anchor="ctr"/>
-          <a:lstStyle/>
-          <a:p>
-            <a:r>
-              <a:rPr lang="en-US" sz="1013" dirty="0">
-                <a:latin typeface="Arial" panose="020B0604020202020204" pitchFamily="34" charset="0"/>
-                <a:ea typeface="Calibri" pitchFamily="34" charset="-122"/>
-                <a:cs typeface="Arial" panose="020B0604020202020204" pitchFamily="34" charset="0"/>
-              </a:rPr>
-              <a:t>Partner / Platform Integrations</a:t>
-            </a:r>
-            <a:endParaRPr lang="en-US" sz="1013" dirty="0">
-              <a:latin typeface="Arial" panose="020B0604020202020204" pitchFamily="34" charset="0"/>
-              <a:cs typeface="Arial" panose="020B0604020202020204" pitchFamily="34" charset="0"/>
-            </a:endParaRPr>
-          </a:p>
-        </p:txBody>
-      </p:sp>
-      <p:sp>
-        <p:nvSpPr>
-          <p:cNvPr id="53" name="Shape 51"/>
-          <p:cNvSpPr/>
-          <p:nvPr/>
-        </p:nvSpPr>
-        <p:spPr>
-          <a:xfrm>
-            <a:off x="92583" y="4018674"/>
-            <a:ext cx="5740146" cy="3296526"/>
-          </a:xfrm>
-          <a:prstGeom prst="rect">
-            <a:avLst/>
-          </a:prstGeom>
-          <a:solidFill>
-            <a:srgbClr val="F8FFFE"/>
-          </a:solidFill>
-          <a:ln w="9525">
-            <a:solidFill>
-              <a:srgbClr val="D1FAE5"/>
-            </a:solidFill>
-            <a:prstDash val="solid"/>
-          </a:ln>
-        </p:spPr>
-        <p:txBody>
-          <a:bodyPr/>
-          <a:lstStyle/>
-          <a:p>
-            <a:endParaRPr lang="en-US" sz="1823" dirty="0">
-              <a:latin typeface="Arial" panose="020B0604020202020204" pitchFamily="34" charset="0"/>
-              <a:cs typeface="Arial" panose="020B0604020202020204" pitchFamily="34" charset="0"/>
-            </a:endParaRPr>
-          </a:p>
-        </p:txBody>
-      </p:sp>
-      <p:sp>
-        <p:nvSpPr>
-          <p:cNvPr id="54" name="Shape 52"/>
-          <p:cNvSpPr/>
-          <p:nvPr/>
-        </p:nvSpPr>
-        <p:spPr>
-          <a:xfrm>
-            <a:off x="101842" y="4018674"/>
-            <a:ext cx="5721629" cy="1098842"/>
-          </a:xfrm>
-          <a:prstGeom prst="rect">
-            <a:avLst/>
-          </a:prstGeom>
-          <a:solidFill>
-            <a:srgbClr val="FFFFFF"/>
-          </a:solidFill>
-          <a:ln w="12700">
-            <a:solidFill>
-              <a:srgbClr val="FFFFFF"/>
-            </a:solidFill>
-            <a:prstDash val="solid"/>
-          </a:ln>
-        </p:spPr>
-        <p:txBody>
-          <a:bodyPr/>
-          <a:lstStyle/>
-          <a:p>
-            <a:endParaRPr lang="en-US" sz="1823">
-              <a:latin typeface="Arial" panose="020B0604020202020204" pitchFamily="34" charset="0"/>
-              <a:cs typeface="Arial" panose="020B0604020202020204" pitchFamily="34" charset="0"/>
-            </a:endParaRPr>
-          </a:p>
-        </p:txBody>
-      </p:sp>
-      <p:sp>
-        <p:nvSpPr>
-          <p:cNvPr id="55" name="Text 53"/>
-          <p:cNvSpPr/>
-          <p:nvPr/>
-        </p:nvSpPr>
-        <p:spPr>
-          <a:xfrm>
-            <a:off x="138874" y="4018674"/>
-            <a:ext cx="601790" cy="1098842"/>
-          </a:xfrm>
-          <a:prstGeom prst="rect">
-            <a:avLst/>
-          </a:prstGeom>
-          <a:noFill/>
-          <a:ln/>
-        </p:spPr>
-        <p:txBody>
-          <a:bodyPr wrap="square" lIns="0" tIns="0" rIns="0" bIns="0" rtlCol="0" anchor="ctr"/>
-          <a:lstStyle/>
-          <a:p>
-            <a:r>
-              <a:rPr lang="en-US" sz="861" dirty="0">
-                <a:solidFill>
-                  <a:srgbClr val="374151"/>
-                </a:solidFill>
-                <a:latin typeface="Arial" panose="020B0604020202020204" pitchFamily="34" charset="0"/>
-                <a:cs typeface="Arial" panose="020B0604020202020204" pitchFamily="34" charset="0"/>
-              </a:rPr>
-              <a:t>MVPD</a:t>
-            </a:r>
-            <a:endParaRPr lang="en-US" sz="861" dirty="0">
-              <a:latin typeface="Arial" panose="020B0604020202020204" pitchFamily="34" charset="0"/>
-              <a:cs typeface="Arial" panose="020B0604020202020204" pitchFamily="34" charset="0"/>
-            </a:endParaRPr>
-          </a:p>
-        </p:txBody>
-      </p:sp>
-      <p:sp>
-        <p:nvSpPr>
-          <p:cNvPr id="56" name="Text 54"/>
-          <p:cNvSpPr/>
-          <p:nvPr/>
-        </p:nvSpPr>
-        <p:spPr>
-          <a:xfrm>
-            <a:off x="759180" y="4018674"/>
-            <a:ext cx="4462501" cy="1098842"/>
-          </a:xfrm>
-          <a:prstGeom prst="rect">
-            <a:avLst/>
-          </a:prstGeom>
-          <a:noFill/>
-          <a:ln/>
-        </p:spPr>
-        <p:txBody>
-          <a:bodyPr wrap="square" lIns="0" tIns="0" rIns="0" bIns="0" rtlCol="0" anchor="ctr"/>
-          <a:lstStyle/>
-          <a:p>
-            <a:r>
-              <a:rPr lang="en-US" sz="911" dirty="0">
-                <a:latin typeface="Arial" panose="020B0604020202020204" pitchFamily="34" charset="0"/>
-                <a:cs typeface="Arial" panose="020B0604020202020204" pitchFamily="34" charset="0"/>
-              </a:rPr>
-              <a:t>Adobe Pass integration underway for MVPD access; CMS-based provider management is being brought into the web app, with basic prototypes built and currently hardcoded to DirecTV for testing.</a:t>
-            </a:r>
-          </a:p>
-        </p:txBody>
-      </p:sp>
-      <p:sp>
-        <p:nvSpPr>
-          <p:cNvPr id="57" name="Shape 55"/>
-          <p:cNvSpPr/>
-          <p:nvPr/>
-        </p:nvSpPr>
-        <p:spPr>
-          <a:xfrm>
-            <a:off x="5258714" y="4373575"/>
-            <a:ext cx="546240" cy="203683"/>
-          </a:xfrm>
-          <a:prstGeom prst="roundRect">
-            <a:avLst>
-              <a:gd name="adj" fmla="val 22727"/>
-            </a:avLst>
-          </a:prstGeom>
-          <a:solidFill>
-            <a:srgbClr val="DBEAFE"/>
-          </a:solidFill>
-          <a:ln w="12700">
-            <a:solidFill>
-              <a:srgbClr val="DBEAFE"/>
-            </a:solidFill>
-            <a:prstDash val="solid"/>
-          </a:ln>
-        </p:spPr>
-        <p:txBody>
-          <a:bodyPr/>
-          <a:lstStyle/>
-          <a:p>
-            <a:endParaRPr lang="en-US" sz="1823">
-              <a:latin typeface="Arial" panose="020B0604020202020204" pitchFamily="34" charset="0"/>
-              <a:cs typeface="Arial" panose="020B0604020202020204" pitchFamily="34" charset="0"/>
-            </a:endParaRPr>
-          </a:p>
-        </p:txBody>
-      </p:sp>
-      <p:sp>
-        <p:nvSpPr>
-          <p:cNvPr id="58" name="Text 56"/>
-          <p:cNvSpPr/>
-          <p:nvPr/>
-        </p:nvSpPr>
-        <p:spPr>
-          <a:xfrm>
-            <a:off x="5258714" y="4373575"/>
-            <a:ext cx="546240" cy="203683"/>
-          </a:xfrm>
-          <a:prstGeom prst="rect">
-            <a:avLst/>
-          </a:prstGeom>
-          <a:noFill/>
-          <a:ln/>
-        </p:spPr>
-        <p:txBody>
-          <a:bodyPr wrap="square" lIns="0" tIns="0" rIns="0" bIns="0" rtlCol="0" anchor="ctr"/>
-          <a:lstStyle/>
-          <a:p>
-            <a:pPr algn="ctr"/>
-            <a:r>
-              <a:rPr lang="en-US" sz="709" dirty="0">
-                <a:solidFill>
-                  <a:srgbClr val="1E40AF"/>
-                </a:solidFill>
-                <a:latin typeface="Arial" panose="020B0604020202020204" pitchFamily="34" charset="0"/>
-                <a:ea typeface="Calibri" pitchFamily="34" charset="-122"/>
-                <a:cs typeface="Arial" panose="020B0604020202020204" pitchFamily="34" charset="0"/>
-              </a:rPr>
-              <a:t>In Progress</a:t>
-            </a:r>
-            <a:endParaRPr lang="en-US" sz="709" dirty="0">
-              <a:latin typeface="Arial" panose="020B0604020202020204" pitchFamily="34" charset="0"/>
-              <a:cs typeface="Arial" panose="020B0604020202020204" pitchFamily="34" charset="0"/>
-            </a:endParaRPr>
-          </a:p>
-        </p:txBody>
-      </p:sp>
-      <p:sp>
-        <p:nvSpPr>
-          <p:cNvPr id="59" name="Text 57"/>
-          <p:cNvSpPr/>
-          <p:nvPr/>
-        </p:nvSpPr>
-        <p:spPr>
-          <a:xfrm>
-            <a:off x="138874" y="5117516"/>
-            <a:ext cx="601790" cy="1098842"/>
-          </a:xfrm>
-          <a:prstGeom prst="rect">
-            <a:avLst/>
-          </a:prstGeom>
-          <a:noFill/>
-          <a:ln/>
-        </p:spPr>
-        <p:txBody>
-          <a:bodyPr wrap="square" lIns="0" tIns="0" rIns="0" bIns="0" rtlCol="0" anchor="ctr"/>
-          <a:lstStyle/>
-          <a:p>
-            <a:endParaRPr lang="en-US" sz="861" dirty="0">
-              <a:latin typeface="Arial" panose="020B0604020202020204" pitchFamily="34" charset="0"/>
-              <a:cs typeface="Arial" panose="020B0604020202020204" pitchFamily="34" charset="0"/>
-            </a:endParaRPr>
-          </a:p>
-        </p:txBody>
-      </p:sp>
-      <p:sp>
-        <p:nvSpPr>
-          <p:cNvPr id="60" name="Text 58"/>
-          <p:cNvSpPr/>
-          <p:nvPr/>
-        </p:nvSpPr>
-        <p:spPr>
-          <a:xfrm>
-            <a:off x="759180" y="5117516"/>
-            <a:ext cx="4462501" cy="1098842"/>
-          </a:xfrm>
-          <a:prstGeom prst="rect">
-            <a:avLst/>
-          </a:prstGeom>
-          <a:noFill/>
-          <a:ln/>
-        </p:spPr>
-        <p:txBody>
-          <a:bodyPr wrap="square" lIns="0" tIns="0" rIns="0" bIns="0" rtlCol="0" anchor="ctr"/>
-          <a:lstStyle/>
-          <a:p>
-            <a:r>
-              <a:rPr lang="en-US" sz="911" dirty="0">
-                <a:latin typeface="Arial" panose="020B0604020202020204" pitchFamily="34" charset="0"/>
-                <a:cs typeface="Arial" panose="020B0604020202020204" pitchFamily="34" charset="0"/>
-              </a:rPr>
-              <a:t>Dedicated DRM auth service  launched, with license flows stubbed for </a:t>
-            </a:r>
-            <a:r>
-              <a:rPr lang="en-US" sz="911" dirty="0" err="1">
-                <a:latin typeface="Arial" panose="020B0604020202020204" pitchFamily="34" charset="0"/>
-                <a:cs typeface="Arial" panose="020B0604020202020204" pitchFamily="34" charset="0"/>
-              </a:rPr>
-              <a:t>FairPlay</a:t>
-            </a:r>
-            <a:r>
-              <a:rPr lang="en-US" sz="911" dirty="0">
-                <a:latin typeface="Arial" panose="020B0604020202020204" pitchFamily="34" charset="0"/>
-                <a:cs typeface="Arial" panose="020B0604020202020204" pitchFamily="34" charset="0"/>
-              </a:rPr>
-              <a:t>, </a:t>
-            </a:r>
-            <a:r>
-              <a:rPr lang="en-US" sz="911" dirty="0" err="1">
-                <a:latin typeface="Arial" panose="020B0604020202020204" pitchFamily="34" charset="0"/>
-                <a:cs typeface="Arial" panose="020B0604020202020204" pitchFamily="34" charset="0"/>
-              </a:rPr>
-              <a:t>Widevine</a:t>
-            </a:r>
-            <a:r>
-              <a:rPr lang="en-US" sz="911" dirty="0">
-                <a:latin typeface="Arial" panose="020B0604020202020204" pitchFamily="34" charset="0"/>
-                <a:cs typeface="Arial" panose="020B0604020202020204" pitchFamily="34" charset="0"/>
-              </a:rPr>
-              <a:t>, and PlayReady, and handed off to Amagi for EZDRM integration testing.</a:t>
-            </a:r>
-          </a:p>
-        </p:txBody>
-      </p:sp>
-      <p:sp>
-        <p:nvSpPr>
-          <p:cNvPr id="61" name="Shape 59"/>
-          <p:cNvSpPr/>
-          <p:nvPr/>
-        </p:nvSpPr>
-        <p:spPr>
-          <a:xfrm>
-            <a:off x="5258714" y="5472418"/>
-            <a:ext cx="546240" cy="203683"/>
-          </a:xfrm>
-          <a:prstGeom prst="roundRect">
-            <a:avLst>
-              <a:gd name="adj" fmla="val 22727"/>
-            </a:avLst>
-          </a:prstGeom>
-          <a:solidFill>
-            <a:srgbClr val="DBEAFE"/>
-          </a:solidFill>
-          <a:ln w="12700">
-            <a:solidFill>
-              <a:srgbClr val="DBEAFE"/>
-            </a:solidFill>
-            <a:prstDash val="solid"/>
-          </a:ln>
-        </p:spPr>
-        <p:txBody>
-          <a:bodyPr/>
-          <a:lstStyle/>
-          <a:p>
-            <a:endParaRPr lang="en-US" sz="1823">
-              <a:latin typeface="Arial" panose="020B0604020202020204" pitchFamily="34" charset="0"/>
-              <a:cs typeface="Arial" panose="020B0604020202020204" pitchFamily="34" charset="0"/>
-            </a:endParaRPr>
-          </a:p>
-        </p:txBody>
-      </p:sp>
-      <p:sp>
-        <p:nvSpPr>
-          <p:cNvPr id="62" name="Text 60"/>
-          <p:cNvSpPr/>
-          <p:nvPr/>
-        </p:nvSpPr>
-        <p:spPr>
-          <a:xfrm>
-            <a:off x="5258714" y="5472418"/>
-            <a:ext cx="546240" cy="203683"/>
-          </a:xfrm>
-          <a:prstGeom prst="rect">
-            <a:avLst/>
-          </a:prstGeom>
-          <a:noFill/>
-          <a:ln/>
-        </p:spPr>
-        <p:txBody>
-          <a:bodyPr wrap="square" lIns="0" tIns="0" rIns="0" bIns="0" rtlCol="0" anchor="ctr"/>
-          <a:lstStyle/>
-          <a:p>
-            <a:pPr algn="ctr"/>
-            <a:r>
-              <a:rPr lang="en-US" sz="709" dirty="0">
-                <a:solidFill>
-                  <a:srgbClr val="1E40AF"/>
-                </a:solidFill>
-                <a:latin typeface="Arial" panose="020B0604020202020204" pitchFamily="34" charset="0"/>
-                <a:ea typeface="Calibri" pitchFamily="34" charset="-122"/>
-                <a:cs typeface="Arial" panose="020B0604020202020204" pitchFamily="34" charset="0"/>
-              </a:rPr>
-              <a:t>In Progress</a:t>
-            </a:r>
-            <a:endParaRPr lang="en-US" sz="709" dirty="0">
-              <a:latin typeface="Arial" panose="020B0604020202020204" pitchFamily="34" charset="0"/>
-              <a:cs typeface="Arial" panose="020B0604020202020204" pitchFamily="34" charset="0"/>
-            </a:endParaRPr>
-          </a:p>
-        </p:txBody>
-      </p:sp>
-      <p:sp>
-        <p:nvSpPr>
-          <p:cNvPr id="63" name="Shape 61"/>
-          <p:cNvSpPr/>
-          <p:nvPr/>
-        </p:nvSpPr>
-        <p:spPr>
-          <a:xfrm>
-            <a:off x="101842" y="6216358"/>
-            <a:ext cx="5721629" cy="1098842"/>
-          </a:xfrm>
-          <a:prstGeom prst="rect">
-            <a:avLst/>
-          </a:prstGeom>
-          <a:solidFill>
-            <a:srgbClr val="FFFFFF"/>
-          </a:solidFill>
-          <a:ln w="12700">
-            <a:solidFill>
-              <a:srgbClr val="FFFFFF"/>
-            </a:solidFill>
-            <a:prstDash val="solid"/>
-          </a:ln>
-        </p:spPr>
-        <p:txBody>
-          <a:bodyPr/>
-          <a:lstStyle/>
-          <a:p>
-            <a:endParaRPr lang="en-US" sz="1823">
-              <a:latin typeface="Arial" panose="020B0604020202020204" pitchFamily="34" charset="0"/>
-              <a:cs typeface="Arial" panose="020B0604020202020204" pitchFamily="34" charset="0"/>
-            </a:endParaRPr>
-          </a:p>
-        </p:txBody>
-      </p:sp>
-      <p:sp>
-        <p:nvSpPr>
-          <p:cNvPr id="64" name="Text 62"/>
-          <p:cNvSpPr/>
-          <p:nvPr/>
-        </p:nvSpPr>
-        <p:spPr>
-          <a:xfrm>
-            <a:off x="138874" y="6216358"/>
-            <a:ext cx="601790" cy="1098842"/>
-          </a:xfrm>
-          <a:prstGeom prst="rect">
-            <a:avLst/>
-          </a:prstGeom>
-          <a:noFill/>
-          <a:ln/>
-        </p:spPr>
-        <p:txBody>
-          <a:bodyPr wrap="square" lIns="0" tIns="0" rIns="0" bIns="0" rtlCol="0" anchor="ctr"/>
-          <a:lstStyle/>
-          <a:p>
-            <a:r>
-              <a:rPr lang="en-US" sz="861" dirty="0">
-                <a:latin typeface="Arial" panose="020B0604020202020204" pitchFamily="34" charset="0"/>
-                <a:cs typeface="Arial" panose="020B0604020202020204" pitchFamily="34" charset="0"/>
-              </a:rPr>
-              <a:t>FOXXUM</a:t>
-            </a:r>
-          </a:p>
-        </p:txBody>
-      </p:sp>
-      <p:sp>
-        <p:nvSpPr>
-          <p:cNvPr id="65" name="Text 63"/>
-          <p:cNvSpPr/>
-          <p:nvPr/>
-        </p:nvSpPr>
-        <p:spPr>
-          <a:xfrm>
-            <a:off x="759180" y="6216358"/>
-            <a:ext cx="4462501" cy="1098842"/>
-          </a:xfrm>
-          <a:prstGeom prst="rect">
-            <a:avLst/>
-          </a:prstGeom>
-          <a:noFill/>
-          <a:ln/>
-        </p:spPr>
-        <p:txBody>
-          <a:bodyPr wrap="square" lIns="0" tIns="0" rIns="0" bIns="0" rtlCol="0" anchor="ctr"/>
-          <a:lstStyle/>
-          <a:p>
-            <a:r>
-              <a:rPr lang="en-US" sz="911" dirty="0">
-                <a:latin typeface="Arial" panose="020B0604020202020204" pitchFamily="34" charset="0"/>
-                <a:cs typeface="Arial" panose="020B0604020202020204" pitchFamily="34" charset="0"/>
-              </a:rPr>
-              <a:t>Integration packet produced and workshop collaboration ongoing with </a:t>
-            </a:r>
-            <a:r>
-              <a:rPr lang="en-US" sz="911" dirty="0" err="1">
-                <a:latin typeface="Arial" panose="020B0604020202020204" pitchFamily="34" charset="0"/>
-                <a:cs typeface="Arial" panose="020B0604020202020204" pitchFamily="34" charset="0"/>
-              </a:rPr>
-              <a:t>Foxxum</a:t>
-            </a:r>
-            <a:r>
-              <a:rPr lang="en-US" sz="911" dirty="0">
-                <a:latin typeface="Arial" panose="020B0604020202020204" pitchFamily="34" charset="0"/>
-                <a:cs typeface="Arial" panose="020B0604020202020204" pitchFamily="34" charset="0"/>
-              </a:rPr>
-              <a:t>; no schema-stability specifics were called out in this update.</a:t>
-            </a:r>
-            <a:endParaRPr lang="en-US" sz="861" dirty="0">
-              <a:latin typeface="Arial" panose="020B0604020202020204" pitchFamily="34" charset="0"/>
-              <a:cs typeface="Arial" panose="020B0604020202020204" pitchFamily="34" charset="0"/>
-            </a:endParaRPr>
-          </a:p>
-        </p:txBody>
-      </p:sp>
-      <p:sp>
-        <p:nvSpPr>
-          <p:cNvPr id="68" name="Shape 66"/>
-          <p:cNvSpPr/>
-          <p:nvPr/>
-        </p:nvSpPr>
-        <p:spPr>
-          <a:xfrm>
-            <a:off x="5953087" y="3740925"/>
-            <a:ext cx="5740146" cy="277749"/>
-          </a:xfrm>
-          <a:prstGeom prst="rect">
-            <a:avLst/>
-          </a:prstGeom>
-          <a:solidFill>
-            <a:schemeClr val="accent6">
-              <a:lumMod val="60000"/>
-              <a:lumOff val="40000"/>
-            </a:schemeClr>
-          </a:solidFill>
-          <a:ln w="12700">
-            <a:solidFill>
-              <a:srgbClr val="0F6E56"/>
-            </a:solidFill>
-            <a:prstDash val="solid"/>
-          </a:ln>
-        </p:spPr>
-        <p:txBody>
-          <a:bodyPr/>
-          <a:lstStyle/>
-          <a:p>
-            <a:endParaRPr lang="en-US" sz="1823">
-              <a:latin typeface="Arial" panose="020B0604020202020204" pitchFamily="34" charset="0"/>
-              <a:cs typeface="Arial" panose="020B0604020202020204" pitchFamily="34" charset="0"/>
-            </a:endParaRPr>
-          </a:p>
-        </p:txBody>
-      </p:sp>
-      <p:sp>
-        <p:nvSpPr>
-          <p:cNvPr id="69" name="Text 67"/>
-          <p:cNvSpPr/>
-          <p:nvPr/>
-        </p:nvSpPr>
-        <p:spPr>
-          <a:xfrm>
-            <a:off x="5999378" y="3740925"/>
-            <a:ext cx="5693855" cy="277749"/>
-          </a:xfrm>
-          <a:prstGeom prst="rect">
-            <a:avLst/>
-          </a:prstGeom>
-          <a:noFill/>
-          <a:ln/>
-        </p:spPr>
-        <p:txBody>
-          <a:bodyPr wrap="square" lIns="0" tIns="0" rIns="0" bIns="0" rtlCol="0" anchor="ctr"/>
-          <a:lstStyle/>
-          <a:p>
-            <a:r>
-              <a:rPr lang="en-US" sz="1013" dirty="0">
-                <a:latin typeface="Arial" panose="020B0604020202020204" pitchFamily="34" charset="0"/>
-                <a:ea typeface="Calibri" pitchFamily="34" charset="-122"/>
-                <a:cs typeface="Arial" panose="020B0604020202020204" pitchFamily="34" charset="0"/>
-              </a:rPr>
-              <a:t>Platform Capabilities</a:t>
-            </a:r>
-            <a:endParaRPr lang="en-US" sz="1013" dirty="0">
-              <a:latin typeface="Arial" panose="020B0604020202020204" pitchFamily="34" charset="0"/>
-              <a:cs typeface="Arial" panose="020B0604020202020204" pitchFamily="34" charset="0"/>
-            </a:endParaRPr>
-          </a:p>
-        </p:txBody>
-      </p:sp>
-      <p:sp>
-        <p:nvSpPr>
-          <p:cNvPr id="70" name="Shape 68"/>
-          <p:cNvSpPr/>
-          <p:nvPr/>
-        </p:nvSpPr>
-        <p:spPr>
-          <a:xfrm>
-            <a:off x="5953087" y="4018674"/>
-            <a:ext cx="5740146" cy="3296526"/>
-          </a:xfrm>
-          <a:prstGeom prst="rect">
-            <a:avLst/>
-          </a:prstGeom>
-          <a:solidFill>
-            <a:srgbClr val="F8FFFE"/>
-          </a:solidFill>
-          <a:ln w="9525">
-            <a:solidFill>
-              <a:srgbClr val="D1FAE5"/>
-            </a:solidFill>
-            <a:prstDash val="solid"/>
-          </a:ln>
-        </p:spPr>
-        <p:txBody>
-          <a:bodyPr/>
-          <a:lstStyle/>
-          <a:p>
-            <a:endParaRPr lang="en-US" sz="1823" dirty="0">
-              <a:latin typeface="Arial" panose="020B0604020202020204" pitchFamily="34" charset="0"/>
-              <a:cs typeface="Arial" panose="020B0604020202020204" pitchFamily="34" charset="0"/>
-            </a:endParaRPr>
-          </a:p>
-        </p:txBody>
-      </p:sp>
-      <p:sp>
-        <p:nvSpPr>
-          <p:cNvPr id="71" name="Shape 69"/>
-          <p:cNvSpPr/>
-          <p:nvPr/>
-        </p:nvSpPr>
-        <p:spPr>
-          <a:xfrm>
-            <a:off x="5927906" y="4031018"/>
-            <a:ext cx="5721629" cy="824132"/>
-          </a:xfrm>
-          <a:prstGeom prst="rect">
-            <a:avLst/>
-          </a:prstGeom>
-          <a:solidFill>
-            <a:srgbClr val="FFFFFF"/>
-          </a:solidFill>
-          <a:ln w="12700">
-            <a:solidFill>
-              <a:srgbClr val="FFFFFF"/>
-            </a:solidFill>
-            <a:prstDash val="solid"/>
-          </a:ln>
-        </p:spPr>
-        <p:txBody>
-          <a:bodyPr/>
-          <a:lstStyle/>
-          <a:p>
-            <a:endParaRPr lang="en-US" sz="1823">
-              <a:latin typeface="Arial" panose="020B0604020202020204" pitchFamily="34" charset="0"/>
-              <a:cs typeface="Arial" panose="020B0604020202020204" pitchFamily="34" charset="0"/>
-            </a:endParaRPr>
-          </a:p>
-        </p:txBody>
-      </p:sp>
-      <p:sp>
-        <p:nvSpPr>
-          <p:cNvPr id="72" name="Text 70"/>
-          <p:cNvSpPr/>
-          <p:nvPr/>
-        </p:nvSpPr>
-        <p:spPr>
-          <a:xfrm>
-            <a:off x="5999378" y="4018674"/>
-            <a:ext cx="601790" cy="824132"/>
-          </a:xfrm>
-          <a:prstGeom prst="rect">
-            <a:avLst/>
-          </a:prstGeom>
-          <a:noFill/>
-          <a:ln/>
-        </p:spPr>
-        <p:txBody>
-          <a:bodyPr wrap="square" lIns="0" tIns="0" rIns="0" bIns="0" rtlCol="0" anchor="ctr"/>
-          <a:lstStyle/>
-          <a:p>
-            <a:r>
-              <a:rPr lang="en-US" sz="861" dirty="0">
-                <a:solidFill>
-                  <a:srgbClr val="374151"/>
-                </a:solidFill>
-                <a:latin typeface="Arial" panose="020B0604020202020204" pitchFamily="34" charset="0"/>
-                <a:cs typeface="Arial" panose="020B0604020202020204" pitchFamily="34" charset="0"/>
-              </a:rPr>
-              <a:t>Platform POC</a:t>
-            </a:r>
-            <a:endParaRPr lang="en-US" sz="861" dirty="0">
-              <a:latin typeface="Arial" panose="020B0604020202020204" pitchFamily="34" charset="0"/>
-              <a:cs typeface="Arial" panose="020B0604020202020204" pitchFamily="34" charset="0"/>
-            </a:endParaRPr>
-          </a:p>
-        </p:txBody>
-      </p:sp>
-      <p:sp>
-        <p:nvSpPr>
-          <p:cNvPr id="73" name="Text 71"/>
-          <p:cNvSpPr/>
-          <p:nvPr/>
-        </p:nvSpPr>
-        <p:spPr>
-          <a:xfrm>
-            <a:off x="6619684" y="4018674"/>
-            <a:ext cx="4462501" cy="824132"/>
-          </a:xfrm>
-          <a:prstGeom prst="rect">
-            <a:avLst/>
-          </a:prstGeom>
-          <a:noFill/>
-          <a:ln/>
-        </p:spPr>
-        <p:txBody>
-          <a:bodyPr wrap="square" lIns="0" tIns="0" rIns="0" bIns="0" rtlCol="0" anchor="ctr"/>
-          <a:lstStyle/>
-          <a:p>
-            <a:pPr marL="173593" indent="-173593">
-              <a:buFont typeface="Arial" panose="020B0604020202020204" pitchFamily="34" charset="0"/>
-              <a:buChar char="•"/>
-            </a:pPr>
-            <a:r>
-              <a:rPr lang="en-US" sz="911" dirty="0"/>
-              <a:t>Mobile login gate placeholder: the first login gate for anonymous viewers, built with placeholder UI ahead of the real Auth0 flow. </a:t>
-            </a:r>
-          </a:p>
-          <a:p>
-            <a:pPr marL="173593" indent="-173593">
-              <a:buFont typeface="Arial" panose="020B0604020202020204" pitchFamily="34" charset="0"/>
-              <a:buChar char="•"/>
-            </a:pPr>
-            <a:r>
-              <a:rPr lang="en-US" sz="911" dirty="0"/>
-              <a:t>Entitlement simulator: the mobile tool simulating any account state to test flows before the real backend exists, more a testing harness than a shipped feature.</a:t>
-            </a:r>
-            <a:endParaRPr lang="en-US" sz="861" dirty="0">
-              <a:latin typeface="Arial" panose="020B0604020202020204" pitchFamily="34" charset="0"/>
-              <a:cs typeface="Arial" panose="020B0604020202020204" pitchFamily="34" charset="0"/>
-            </a:endParaRPr>
-          </a:p>
-        </p:txBody>
-      </p:sp>
-      <p:sp>
-        <p:nvSpPr>
-          <p:cNvPr id="76" name="Text 74"/>
-          <p:cNvSpPr/>
-          <p:nvPr/>
-        </p:nvSpPr>
-        <p:spPr>
-          <a:xfrm>
-            <a:off x="5999378" y="4842806"/>
-            <a:ext cx="601790" cy="824132"/>
-          </a:xfrm>
-          <a:prstGeom prst="rect">
-            <a:avLst/>
-          </a:prstGeom>
-          <a:noFill/>
-          <a:ln/>
-        </p:spPr>
-        <p:txBody>
-          <a:bodyPr wrap="square" lIns="0" tIns="0" rIns="0" bIns="0" rtlCol="0" anchor="ctr"/>
-          <a:lstStyle/>
-          <a:p>
-            <a:r>
-              <a:rPr lang="en-US" sz="861" dirty="0">
-                <a:solidFill>
-                  <a:srgbClr val="374151"/>
-                </a:solidFill>
-                <a:latin typeface="Arial" panose="020B0604020202020204" pitchFamily="34" charset="0"/>
-                <a:ea typeface="Calibri" pitchFamily="34" charset="-122"/>
-                <a:cs typeface="Arial" panose="020B0604020202020204" pitchFamily="34" charset="0"/>
-              </a:rPr>
-              <a:t>UI/UX</a:t>
-            </a:r>
-            <a:endParaRPr lang="en-US" sz="861" dirty="0">
-              <a:latin typeface="Arial" panose="020B0604020202020204" pitchFamily="34" charset="0"/>
-              <a:cs typeface="Arial" panose="020B0604020202020204" pitchFamily="34" charset="0"/>
-            </a:endParaRPr>
-          </a:p>
-        </p:txBody>
-      </p:sp>
-      <p:sp>
-        <p:nvSpPr>
-          <p:cNvPr id="77" name="Text 75"/>
-          <p:cNvSpPr/>
-          <p:nvPr/>
-        </p:nvSpPr>
-        <p:spPr>
-          <a:xfrm>
-            <a:off x="6619684" y="4892852"/>
-            <a:ext cx="4462501" cy="824132"/>
-          </a:xfrm>
-          <a:prstGeom prst="rect">
-            <a:avLst/>
-          </a:prstGeom>
-          <a:noFill/>
-          <a:ln/>
-        </p:spPr>
-        <p:txBody>
-          <a:bodyPr wrap="square" lIns="0" tIns="0" rIns="0" bIns="0" rtlCol="0" anchor="ctr"/>
-          <a:lstStyle/>
-          <a:p>
-            <a:pPr marL="173593" indent="-173593">
-              <a:buFont typeface="Arial" panose="020B0604020202020204" pitchFamily="34" charset="0"/>
-              <a:buChar char="•"/>
-            </a:pPr>
-            <a:r>
-              <a:rPr lang="en-US" sz="861" dirty="0">
-                <a:solidFill>
-                  <a:srgbClr val="374151"/>
-                </a:solidFill>
-                <a:latin typeface="Arial" panose="020B0604020202020204" pitchFamily="34" charset="0"/>
-                <a:ea typeface="Calibri" pitchFamily="34" charset="-122"/>
-                <a:cs typeface="Arial" panose="020B0604020202020204" pitchFamily="34" charset="0"/>
-              </a:rPr>
-              <a:t>Built the front-end foundation (design system, left sidebar navigation, footer, and page shell)</a:t>
-            </a:r>
-          </a:p>
-          <a:p>
-            <a:pPr marL="173593" indent="-173593">
-              <a:buFont typeface="Arial" panose="020B0604020202020204" pitchFamily="34" charset="0"/>
-              <a:buChar char="•"/>
-            </a:pPr>
-            <a:r>
-              <a:rPr lang="en-US" sz="861" dirty="0">
-                <a:solidFill>
-                  <a:srgbClr val="374151"/>
-                </a:solidFill>
-                <a:latin typeface="Arial" panose="020B0604020202020204" pitchFamily="34" charset="0"/>
-                <a:ea typeface="Calibri" pitchFamily="34" charset="-122"/>
-                <a:cs typeface="Arial" panose="020B0604020202020204" pitchFamily="34" charset="0"/>
-              </a:rPr>
-              <a:t>Built the page engine and styled the merchandising carousels (other engineers wired the carousels to data; my part was the full-bleed styling)</a:t>
-            </a:r>
-          </a:p>
-          <a:p>
-            <a:endParaRPr lang="en-US" sz="861" dirty="0">
-              <a:solidFill>
-                <a:srgbClr val="374151"/>
-              </a:solidFill>
-              <a:latin typeface="Arial" panose="020B0604020202020204" pitchFamily="34" charset="0"/>
-              <a:ea typeface="Calibri" pitchFamily="34" charset="-122"/>
-              <a:cs typeface="Arial" panose="020B0604020202020204" pitchFamily="34" charset="0"/>
-            </a:endParaRPr>
-          </a:p>
-        </p:txBody>
-      </p:sp>
-      <p:sp>
-        <p:nvSpPr>
-          <p:cNvPr id="80" name="Shape 78"/>
-          <p:cNvSpPr/>
-          <p:nvPr/>
-        </p:nvSpPr>
-        <p:spPr>
-          <a:xfrm>
-            <a:off x="5962345" y="5666938"/>
-            <a:ext cx="5721629" cy="824131"/>
-          </a:xfrm>
-          <a:prstGeom prst="rect">
-            <a:avLst/>
-          </a:prstGeom>
-          <a:solidFill>
-            <a:srgbClr val="FFFFFF"/>
-          </a:solidFill>
-          <a:ln w="12700">
-            <a:solidFill>
-              <a:srgbClr val="FFFFFF"/>
-            </a:solidFill>
-            <a:prstDash val="solid"/>
-          </a:ln>
-        </p:spPr>
-        <p:txBody>
-          <a:bodyPr/>
-          <a:lstStyle/>
-          <a:p>
-            <a:endParaRPr lang="en-US" sz="1823">
-              <a:latin typeface="Arial" panose="020B0604020202020204" pitchFamily="34" charset="0"/>
-              <a:cs typeface="Arial" panose="020B0604020202020204" pitchFamily="34" charset="0"/>
-            </a:endParaRPr>
-          </a:p>
-        </p:txBody>
-      </p:sp>
-      <p:sp>
-        <p:nvSpPr>
-          <p:cNvPr id="81" name="Text 79"/>
-          <p:cNvSpPr/>
-          <p:nvPr/>
-        </p:nvSpPr>
-        <p:spPr>
-          <a:xfrm>
-            <a:off x="5999378" y="5666938"/>
-            <a:ext cx="601790" cy="824131"/>
-          </a:xfrm>
-          <a:prstGeom prst="rect">
-            <a:avLst/>
-          </a:prstGeom>
-          <a:noFill/>
-          <a:ln/>
-        </p:spPr>
-        <p:txBody>
-          <a:bodyPr wrap="square" lIns="0" tIns="0" rIns="0" bIns="0" rtlCol="0" anchor="ctr"/>
-          <a:lstStyle/>
-          <a:p>
-            <a:r>
-              <a:rPr lang="en-US" sz="861" dirty="0">
-                <a:solidFill>
-                  <a:srgbClr val="374151"/>
-                </a:solidFill>
-                <a:latin typeface="Arial" panose="020B0604020202020204" pitchFamily="34" charset="0"/>
-                <a:ea typeface="Calibri" pitchFamily="34" charset="-122"/>
-                <a:cs typeface="Arial" panose="020B0604020202020204" pitchFamily="34" charset="0"/>
-              </a:rPr>
-              <a:t>Video player</a:t>
-            </a:r>
-            <a:endParaRPr lang="en-US" sz="861" dirty="0">
-              <a:latin typeface="Arial" panose="020B0604020202020204" pitchFamily="34" charset="0"/>
-              <a:cs typeface="Arial" panose="020B0604020202020204" pitchFamily="34" charset="0"/>
-            </a:endParaRPr>
-          </a:p>
-        </p:txBody>
-      </p:sp>
-      <p:sp>
-        <p:nvSpPr>
-          <p:cNvPr id="82" name="Text 80"/>
-          <p:cNvSpPr/>
-          <p:nvPr/>
-        </p:nvSpPr>
-        <p:spPr>
-          <a:xfrm>
-            <a:off x="6619684" y="5666938"/>
-            <a:ext cx="4462501" cy="824131"/>
-          </a:xfrm>
-          <a:prstGeom prst="rect">
-            <a:avLst/>
-          </a:prstGeom>
-          <a:noFill/>
-          <a:ln/>
-        </p:spPr>
-        <p:txBody>
-          <a:bodyPr wrap="square" lIns="0" tIns="0" rIns="0" bIns="0" rtlCol="0" anchor="ctr"/>
-          <a:lstStyle/>
-          <a:p>
-            <a:r>
-              <a:rPr lang="en-US" sz="861" dirty="0">
-                <a:solidFill>
-                  <a:srgbClr val="374151"/>
-                </a:solidFill>
-                <a:latin typeface="Arial" panose="020B0604020202020204" pitchFamily="34" charset="0"/>
-                <a:ea typeface="Calibri" pitchFamily="34" charset="-122"/>
-                <a:cs typeface="Arial" panose="020B0604020202020204" pitchFamily="34" charset="0"/>
-              </a:rPr>
-              <a:t>Prototyped the video experience (exploratory test of the </a:t>
-            </a:r>
-            <a:r>
-              <a:rPr lang="en-US" sz="861" dirty="0" err="1">
-                <a:solidFill>
-                  <a:srgbClr val="374151"/>
-                </a:solidFill>
-                <a:latin typeface="Arial" panose="020B0604020202020204" pitchFamily="34" charset="0"/>
-                <a:ea typeface="Calibri" pitchFamily="34" charset="-122"/>
-                <a:cs typeface="Arial" panose="020B0604020202020204" pitchFamily="34" charset="0"/>
-              </a:rPr>
-              <a:t>BitMovin</a:t>
-            </a:r>
-            <a:r>
-              <a:rPr lang="en-US" sz="861" dirty="0">
-                <a:solidFill>
-                  <a:srgbClr val="374151"/>
-                </a:solidFill>
-                <a:latin typeface="Arial" panose="020B0604020202020204" pitchFamily="34" charset="0"/>
-                <a:ea typeface="Calibri" pitchFamily="34" charset="-122"/>
-                <a:cs typeface="Arial" panose="020B0604020202020204" pitchFamily="34" charset="0"/>
-              </a:rPr>
-              <a:t> player APIs; a proof-of-concept, not the final player)</a:t>
-            </a:r>
-            <a:endParaRPr lang="en-US" sz="861" dirty="0">
-              <a:latin typeface="Arial" panose="020B0604020202020204" pitchFamily="34" charset="0"/>
-              <a:cs typeface="Arial" panose="020B0604020202020204" pitchFamily="34" charset="0"/>
-            </a:endParaRPr>
-          </a:p>
-        </p:txBody>
-      </p:sp>
-      <p:sp>
-        <p:nvSpPr>
-          <p:cNvPr id="85" name="Text 83"/>
-          <p:cNvSpPr/>
-          <p:nvPr/>
-        </p:nvSpPr>
-        <p:spPr>
-          <a:xfrm>
-            <a:off x="5999378" y="6491069"/>
-            <a:ext cx="601790" cy="824131"/>
-          </a:xfrm>
-          <a:prstGeom prst="rect">
-            <a:avLst/>
-          </a:prstGeom>
-          <a:noFill/>
-          <a:ln/>
-        </p:spPr>
-        <p:txBody>
-          <a:bodyPr wrap="square" lIns="0" tIns="0" rIns="0" bIns="0" rtlCol="0" anchor="ctr"/>
-          <a:lstStyle/>
-          <a:p>
-            <a:r>
-              <a:rPr lang="en-US" sz="861" dirty="0">
-                <a:solidFill>
-                  <a:srgbClr val="374151"/>
-                </a:solidFill>
-                <a:latin typeface="Arial" panose="020B0604020202020204" pitchFamily="34" charset="0"/>
-                <a:ea typeface="Calibri" pitchFamily="34" charset="-122"/>
-                <a:cs typeface="Arial" panose="020B0604020202020204" pitchFamily="34" charset="0"/>
-              </a:rPr>
-              <a:t>Testing</a:t>
-            </a:r>
-            <a:endParaRPr lang="en-US" sz="861" dirty="0">
-              <a:latin typeface="Arial" panose="020B0604020202020204" pitchFamily="34" charset="0"/>
-              <a:cs typeface="Arial" panose="020B0604020202020204" pitchFamily="34" charset="0"/>
-            </a:endParaRPr>
-          </a:p>
-        </p:txBody>
-      </p:sp>
-      <p:sp>
-        <p:nvSpPr>
-          <p:cNvPr id="86" name="Text 84"/>
-          <p:cNvSpPr/>
-          <p:nvPr/>
-        </p:nvSpPr>
-        <p:spPr>
-          <a:xfrm>
-            <a:off x="6619684" y="6491069"/>
-            <a:ext cx="4462501" cy="824131"/>
-          </a:xfrm>
-          <a:prstGeom prst="rect">
-            <a:avLst/>
-          </a:prstGeom>
-          <a:noFill/>
-          <a:ln/>
-        </p:spPr>
-        <p:txBody>
-          <a:bodyPr wrap="square" lIns="0" tIns="0" rIns="0" bIns="0" rtlCol="0" anchor="ctr"/>
-          <a:lstStyle/>
-          <a:p>
-            <a:r>
-              <a:rPr lang="en-US" sz="861" dirty="0">
-                <a:solidFill>
-                  <a:srgbClr val="374151"/>
-                </a:solidFill>
-                <a:latin typeface="Arial" panose="020B0604020202020204" pitchFamily="34" charset="0"/>
-                <a:ea typeface="Calibri" pitchFamily="34" charset="-122"/>
-                <a:cs typeface="Arial" panose="020B0604020202020204" pitchFamily="34" charset="0"/>
-              </a:rPr>
-              <a:t>Testing E2E experience; Merchandising, sign in flow, MVPD, </a:t>
-            </a:r>
-            <a:r>
-              <a:rPr lang="en-US" sz="861" dirty="0" err="1">
-                <a:solidFill>
-                  <a:srgbClr val="374151"/>
-                </a:solidFill>
-                <a:latin typeface="Arial" panose="020B0604020202020204" pitchFamily="34" charset="0"/>
-                <a:ea typeface="Calibri" pitchFamily="34" charset="-122"/>
-                <a:cs typeface="Arial" panose="020B0604020202020204" pitchFamily="34" charset="0"/>
-              </a:rPr>
-              <a:t>Cleeng</a:t>
-            </a:r>
-            <a:r>
-              <a:rPr lang="en-US" sz="861" dirty="0">
-                <a:solidFill>
-                  <a:srgbClr val="374151"/>
-                </a:solidFill>
-                <a:latin typeface="Arial" panose="020B0604020202020204" pitchFamily="34" charset="0"/>
-                <a:ea typeface="Calibri" pitchFamily="34" charset="-122"/>
-                <a:cs typeface="Arial" panose="020B0604020202020204" pitchFamily="34" charset="0"/>
-              </a:rPr>
-              <a:t>, replays. </a:t>
-            </a:r>
-            <a:endParaRPr lang="en-US" sz="861" dirty="0">
-              <a:latin typeface="Arial" panose="020B0604020202020204" pitchFamily="34" charset="0"/>
-              <a:cs typeface="Arial" panose="020B0604020202020204" pitchFamily="34" charset="0"/>
-            </a:endParaRPr>
-          </a:p>
-        </p:txBody>
-      </p:sp>
-      <p:sp>
-        <p:nvSpPr>
-          <p:cNvPr id="90" name="Text 53">
-            <a:extLst>
-              <a:ext uri="{FF2B5EF4-FFF2-40B4-BE49-F238E27FC236}">
-                <a16:creationId xmlns:a16="http://schemas.microsoft.com/office/drawing/2014/main" id="{790CEA9C-CC79-9491-0B6C-884834BD2739}"/>
-              </a:ext>
-            </a:extLst>
-          </p:cNvPr>
-          <p:cNvSpPr/>
-          <p:nvPr/>
-        </p:nvSpPr>
-        <p:spPr>
-          <a:xfrm>
-            <a:off x="116493" y="5117516"/>
-            <a:ext cx="601790" cy="1098842"/>
-          </a:xfrm>
-          <a:prstGeom prst="rect">
-            <a:avLst/>
-          </a:prstGeom>
-          <a:noFill/>
-          <a:ln/>
-        </p:spPr>
-        <p:txBody>
-          <a:bodyPr wrap="square" lIns="0" tIns="0" rIns="0" bIns="0" rtlCol="0" anchor="ctr"/>
-          <a:lstStyle/>
-          <a:p>
-            <a:r>
-              <a:rPr lang="en-US" sz="861" dirty="0">
-                <a:solidFill>
-                  <a:srgbClr val="374151"/>
-                </a:solidFill>
-                <a:latin typeface="Arial" panose="020B0604020202020204" pitchFamily="34" charset="0"/>
-                <a:cs typeface="Arial" panose="020B0604020202020204" pitchFamily="34" charset="0"/>
-              </a:rPr>
-              <a:t>DRM</a:t>
-            </a:r>
-            <a:endParaRPr lang="en-US" sz="861" dirty="0">
-              <a:latin typeface="Arial" panose="020B0604020202020204" pitchFamily="34" charset="0"/>
-              <a:cs typeface="Arial" panose="020B0604020202020204" pitchFamily="34" charset="0"/>
-            </a:endParaRPr>
-          </a:p>
-        </p:txBody>
-      </p:sp>
-      <p:grpSp>
-        <p:nvGrpSpPr>
-          <p:cNvPr id="103" name="Group 102">
-            <a:extLst>
-              <a:ext uri="{FF2B5EF4-FFF2-40B4-BE49-F238E27FC236}">
-                <a16:creationId xmlns:a16="http://schemas.microsoft.com/office/drawing/2014/main" id="{2415E7D3-0580-835D-6028-C1F6742970F7}"/>
-              </a:ext>
-            </a:extLst>
-          </p:cNvPr>
-          <p:cNvGrpSpPr/>
-          <p:nvPr/>
-        </p:nvGrpSpPr>
-        <p:grpSpPr>
-          <a:xfrm>
-            <a:off x="10991739" y="3129877"/>
-            <a:ext cx="801198" cy="203683"/>
-            <a:chOff x="10856038" y="2322576"/>
-            <a:chExt cx="791307" cy="201168"/>
-          </a:xfrm>
-        </p:grpSpPr>
-        <p:sp>
-          <p:nvSpPr>
-            <p:cNvPr id="104" name="Shape 43">
-              <a:extLst>
-                <a:ext uri="{FF2B5EF4-FFF2-40B4-BE49-F238E27FC236}">
-                  <a16:creationId xmlns:a16="http://schemas.microsoft.com/office/drawing/2014/main" id="{24A10409-FE5B-B5A8-C61F-BF55086DD3BF}"/>
-                </a:ext>
-              </a:extLst>
-            </p:cNvPr>
-            <p:cNvSpPr>
-              <a:spLocks/>
-            </p:cNvSpPr>
-            <p:nvPr/>
-          </p:nvSpPr>
-          <p:spPr>
-            <a:xfrm>
-              <a:off x="10981944" y="2322576"/>
-              <a:ext cx="539496" cy="201168"/>
-            </a:xfrm>
-            <a:prstGeom prst="roundRect">
-              <a:avLst>
-                <a:gd name="adj" fmla="val 22727"/>
-              </a:avLst>
-            </a:prstGeom>
-            <a:solidFill>
-              <a:srgbClr val="DBEAFE"/>
-            </a:solidFill>
-            <a:ln w="12700">
-              <a:solidFill>
-                <a:srgbClr val="DBEAFE"/>
-              </a:solidFill>
-              <a:prstDash val="solid"/>
-            </a:ln>
-          </p:spPr>
-          <p:txBody>
-            <a:bodyPr/>
-            <a:lstStyle/>
-            <a:p>
-              <a:endParaRPr lang="en-US" sz="1823">
-                <a:latin typeface="Arial" panose="020B0604020202020204" pitchFamily="34" charset="0"/>
-                <a:cs typeface="Arial" panose="020B0604020202020204" pitchFamily="34" charset="0"/>
-              </a:endParaRPr>
-            </a:p>
-          </p:txBody>
-        </p:sp>
-        <p:sp>
-          <p:nvSpPr>
-            <p:cNvPr id="105" name="TextBox 104">
-              <a:extLst>
-                <a:ext uri="{FF2B5EF4-FFF2-40B4-BE49-F238E27FC236}">
-                  <a16:creationId xmlns:a16="http://schemas.microsoft.com/office/drawing/2014/main" id="{7AD4F438-C9F8-C1D4-D14F-C4D357F173D6}"/>
-                </a:ext>
-              </a:extLst>
-            </p:cNvPr>
-            <p:cNvSpPr txBox="1">
-              <a:spLocks/>
-            </p:cNvSpPr>
-            <p:nvPr/>
-          </p:nvSpPr>
-          <p:spPr>
-            <a:xfrm>
-              <a:off x="10856038" y="2323689"/>
-              <a:ext cx="791307" cy="200055"/>
-            </a:xfrm>
-            <a:prstGeom prst="rect">
-              <a:avLst/>
-            </a:prstGeom>
-            <a:noFill/>
-          </p:spPr>
-          <p:txBody>
-            <a:bodyPr wrap="square">
-              <a:spAutoFit/>
-            </a:bodyPr>
-            <a:lstStyle/>
-            <a:p>
-              <a:pPr algn="ctr"/>
-              <a:r>
-                <a:rPr lang="en-US" sz="709" dirty="0">
-                  <a:solidFill>
-                    <a:srgbClr val="1E40AF"/>
-                  </a:solidFill>
-                  <a:latin typeface="Arial" panose="020B0604020202020204" pitchFamily="34" charset="0"/>
-                  <a:ea typeface="Calibri" pitchFamily="34" charset="-122"/>
-                  <a:cs typeface="Arial" panose="020B0604020202020204" pitchFamily="34" charset="0"/>
-                </a:rPr>
-                <a:t>In Progress</a:t>
-              </a:r>
-              <a:endParaRPr lang="en-US" sz="709" dirty="0">
-                <a:latin typeface="Arial" panose="020B0604020202020204" pitchFamily="34" charset="0"/>
-                <a:cs typeface="Arial" panose="020B0604020202020204" pitchFamily="34" charset="0"/>
-              </a:endParaRPr>
-            </a:p>
-          </p:txBody>
-        </p:sp>
-      </p:grpSp>
-      <p:grpSp>
-        <p:nvGrpSpPr>
-          <p:cNvPr id="106" name="Group 105">
-            <a:extLst>
-              <a:ext uri="{FF2B5EF4-FFF2-40B4-BE49-F238E27FC236}">
-                <a16:creationId xmlns:a16="http://schemas.microsoft.com/office/drawing/2014/main" id="{36009C5C-8271-24AC-8B52-287CA50FACA5}"/>
-              </a:ext>
-            </a:extLst>
-          </p:cNvPr>
-          <p:cNvGrpSpPr/>
-          <p:nvPr/>
-        </p:nvGrpSpPr>
-        <p:grpSpPr>
-          <a:xfrm>
-            <a:off x="10997183" y="2525001"/>
-            <a:ext cx="801198" cy="203683"/>
-            <a:chOff x="10856038" y="2322576"/>
-            <a:chExt cx="791307" cy="201168"/>
-          </a:xfrm>
-        </p:grpSpPr>
-        <p:sp>
-          <p:nvSpPr>
-            <p:cNvPr id="107" name="Shape 43">
-              <a:extLst>
-                <a:ext uri="{FF2B5EF4-FFF2-40B4-BE49-F238E27FC236}">
-                  <a16:creationId xmlns:a16="http://schemas.microsoft.com/office/drawing/2014/main" id="{67E66F2B-A5DA-8169-369C-4F1A236B1E59}"/>
-                </a:ext>
-              </a:extLst>
-            </p:cNvPr>
-            <p:cNvSpPr>
-              <a:spLocks/>
-            </p:cNvSpPr>
-            <p:nvPr/>
-          </p:nvSpPr>
-          <p:spPr>
-            <a:xfrm>
-              <a:off x="10981944" y="2322576"/>
-              <a:ext cx="539496" cy="201168"/>
-            </a:xfrm>
-            <a:prstGeom prst="roundRect">
-              <a:avLst>
-                <a:gd name="adj" fmla="val 22727"/>
-              </a:avLst>
-            </a:prstGeom>
-            <a:solidFill>
-              <a:srgbClr val="DBEAFE"/>
-            </a:solidFill>
-            <a:ln w="12700">
-              <a:solidFill>
-                <a:srgbClr val="DBEAFE"/>
-              </a:solidFill>
-              <a:prstDash val="solid"/>
-            </a:ln>
-          </p:spPr>
-          <p:txBody>
-            <a:bodyPr/>
-            <a:lstStyle/>
-            <a:p>
-              <a:endParaRPr lang="en-US" sz="1823">
-                <a:latin typeface="Arial" panose="020B0604020202020204" pitchFamily="34" charset="0"/>
-                <a:cs typeface="Arial" panose="020B0604020202020204" pitchFamily="34" charset="0"/>
-              </a:endParaRPr>
-            </a:p>
-          </p:txBody>
-        </p:sp>
-        <p:sp>
-          <p:nvSpPr>
-            <p:cNvPr id="108" name="TextBox 107">
-              <a:extLst>
-                <a:ext uri="{FF2B5EF4-FFF2-40B4-BE49-F238E27FC236}">
-                  <a16:creationId xmlns:a16="http://schemas.microsoft.com/office/drawing/2014/main" id="{F6E5DA9D-E0D9-A4B8-BED0-3E023A8680CD}"/>
-                </a:ext>
-              </a:extLst>
-            </p:cNvPr>
-            <p:cNvSpPr txBox="1">
-              <a:spLocks/>
-            </p:cNvSpPr>
-            <p:nvPr/>
-          </p:nvSpPr>
-          <p:spPr>
-            <a:xfrm>
-              <a:off x="10856038" y="2323689"/>
-              <a:ext cx="791307" cy="200055"/>
-            </a:xfrm>
-            <a:prstGeom prst="rect">
-              <a:avLst/>
-            </a:prstGeom>
-            <a:noFill/>
-          </p:spPr>
-          <p:txBody>
-            <a:bodyPr wrap="square">
-              <a:spAutoFit/>
-            </a:bodyPr>
-            <a:lstStyle/>
-            <a:p>
-              <a:pPr algn="ctr"/>
-              <a:r>
-                <a:rPr lang="en-US" sz="709" dirty="0">
-                  <a:solidFill>
-                    <a:srgbClr val="1E40AF"/>
-                  </a:solidFill>
-                  <a:latin typeface="Arial" panose="020B0604020202020204" pitchFamily="34" charset="0"/>
-                  <a:ea typeface="Calibri" pitchFamily="34" charset="-122"/>
-                  <a:cs typeface="Arial" panose="020B0604020202020204" pitchFamily="34" charset="0"/>
-                </a:rPr>
-                <a:t>In Progress</a:t>
-              </a:r>
-              <a:endParaRPr lang="en-US" sz="709" dirty="0">
-                <a:latin typeface="Arial" panose="020B0604020202020204" pitchFamily="34" charset="0"/>
-                <a:cs typeface="Arial" panose="020B0604020202020204" pitchFamily="34" charset="0"/>
-              </a:endParaRPr>
-            </a:p>
-          </p:txBody>
-        </p:sp>
-      </p:grpSp>
-      <p:grpSp>
-        <p:nvGrpSpPr>
-          <p:cNvPr id="109" name="Group 108">
-            <a:extLst>
-              <a:ext uri="{FF2B5EF4-FFF2-40B4-BE49-F238E27FC236}">
-                <a16:creationId xmlns:a16="http://schemas.microsoft.com/office/drawing/2014/main" id="{D74ED233-04E7-261A-61A3-871D17D81F5C}"/>
-              </a:ext>
-            </a:extLst>
-          </p:cNvPr>
-          <p:cNvGrpSpPr/>
-          <p:nvPr/>
-        </p:nvGrpSpPr>
-        <p:grpSpPr>
-          <a:xfrm>
-            <a:off x="5121978" y="6610870"/>
-            <a:ext cx="801198" cy="203683"/>
-            <a:chOff x="10856038" y="2322576"/>
-            <a:chExt cx="791307" cy="201168"/>
-          </a:xfrm>
-        </p:grpSpPr>
-        <p:sp>
-          <p:nvSpPr>
-            <p:cNvPr id="110" name="Shape 43">
-              <a:extLst>
-                <a:ext uri="{FF2B5EF4-FFF2-40B4-BE49-F238E27FC236}">
-                  <a16:creationId xmlns:a16="http://schemas.microsoft.com/office/drawing/2014/main" id="{0999F11F-435B-0279-627B-E591C22F22D5}"/>
-                </a:ext>
-              </a:extLst>
-            </p:cNvPr>
-            <p:cNvSpPr>
-              <a:spLocks/>
-            </p:cNvSpPr>
-            <p:nvPr/>
-          </p:nvSpPr>
-          <p:spPr>
-            <a:xfrm>
-              <a:off x="10981944" y="2322576"/>
-              <a:ext cx="539496" cy="201168"/>
-            </a:xfrm>
-            <a:prstGeom prst="roundRect">
-              <a:avLst>
-                <a:gd name="adj" fmla="val 22727"/>
-              </a:avLst>
-            </a:prstGeom>
-            <a:solidFill>
-              <a:srgbClr val="DBEAFE"/>
-            </a:solidFill>
-            <a:ln w="12700">
-              <a:solidFill>
-                <a:srgbClr val="DBEAFE"/>
-              </a:solidFill>
-              <a:prstDash val="solid"/>
-            </a:ln>
-          </p:spPr>
-          <p:txBody>
-            <a:bodyPr/>
-            <a:lstStyle/>
-            <a:p>
-              <a:endParaRPr lang="en-US" sz="1823">
-                <a:latin typeface="Arial" panose="020B0604020202020204" pitchFamily="34" charset="0"/>
-                <a:cs typeface="Arial" panose="020B0604020202020204" pitchFamily="34" charset="0"/>
-              </a:endParaRPr>
-            </a:p>
-          </p:txBody>
-        </p:sp>
-        <p:sp>
-          <p:nvSpPr>
-            <p:cNvPr id="111" name="TextBox 110">
-              <a:extLst>
-                <a:ext uri="{FF2B5EF4-FFF2-40B4-BE49-F238E27FC236}">
-                  <a16:creationId xmlns:a16="http://schemas.microsoft.com/office/drawing/2014/main" id="{6C0B2977-A2F4-4D7C-25F0-D06DA87C4CF1}"/>
-                </a:ext>
-              </a:extLst>
-            </p:cNvPr>
-            <p:cNvSpPr txBox="1">
-              <a:spLocks/>
-            </p:cNvSpPr>
-            <p:nvPr/>
-          </p:nvSpPr>
-          <p:spPr>
-            <a:xfrm>
-              <a:off x="10856038" y="2323689"/>
-              <a:ext cx="791307" cy="200055"/>
-            </a:xfrm>
-            <a:prstGeom prst="rect">
-              <a:avLst/>
-            </a:prstGeom>
-            <a:noFill/>
-          </p:spPr>
-          <p:txBody>
-            <a:bodyPr wrap="square">
-              <a:spAutoFit/>
-            </a:bodyPr>
-            <a:lstStyle/>
-            <a:p>
-              <a:pPr algn="ctr"/>
-              <a:r>
-                <a:rPr lang="en-US" sz="709" dirty="0">
-                  <a:solidFill>
-                    <a:srgbClr val="1E40AF"/>
-                  </a:solidFill>
-                  <a:latin typeface="Arial" panose="020B0604020202020204" pitchFamily="34" charset="0"/>
-                  <a:ea typeface="Calibri" pitchFamily="34" charset="-122"/>
-                  <a:cs typeface="Arial" panose="020B0604020202020204" pitchFamily="34" charset="0"/>
-                </a:rPr>
-                <a:t>In Progress</a:t>
-              </a:r>
-              <a:endParaRPr lang="en-US" sz="709" dirty="0">
-                <a:latin typeface="Arial" panose="020B0604020202020204" pitchFamily="34" charset="0"/>
-                <a:cs typeface="Arial" panose="020B0604020202020204" pitchFamily="34" charset="0"/>
-              </a:endParaRPr>
-            </a:p>
-          </p:txBody>
-        </p:sp>
-      </p:grpSp>
-      <p:grpSp>
-        <p:nvGrpSpPr>
-          <p:cNvPr id="112" name="Group 111">
-            <a:extLst>
-              <a:ext uri="{FF2B5EF4-FFF2-40B4-BE49-F238E27FC236}">
-                <a16:creationId xmlns:a16="http://schemas.microsoft.com/office/drawing/2014/main" id="{4D8D8501-B0D2-1527-AF68-B176BFE6C528}"/>
-              </a:ext>
-            </a:extLst>
-          </p:cNvPr>
-          <p:cNvGrpSpPr/>
-          <p:nvPr/>
-        </p:nvGrpSpPr>
-        <p:grpSpPr>
-          <a:xfrm>
-            <a:off x="10991739" y="4228528"/>
-            <a:ext cx="801198" cy="203683"/>
-            <a:chOff x="10856038" y="2322576"/>
-            <a:chExt cx="791307" cy="201168"/>
-          </a:xfrm>
-        </p:grpSpPr>
-        <p:sp>
-          <p:nvSpPr>
-            <p:cNvPr id="113" name="Shape 43">
-              <a:extLst>
-                <a:ext uri="{FF2B5EF4-FFF2-40B4-BE49-F238E27FC236}">
-                  <a16:creationId xmlns:a16="http://schemas.microsoft.com/office/drawing/2014/main" id="{624E48F5-FF69-2B3E-BEEC-FF36EA483DFA}"/>
-                </a:ext>
-              </a:extLst>
-            </p:cNvPr>
-            <p:cNvSpPr>
-              <a:spLocks/>
-            </p:cNvSpPr>
-            <p:nvPr/>
-          </p:nvSpPr>
-          <p:spPr>
-            <a:xfrm>
-              <a:off x="10981944" y="2322576"/>
-              <a:ext cx="539496" cy="201168"/>
-            </a:xfrm>
-            <a:prstGeom prst="roundRect">
-              <a:avLst>
-                <a:gd name="adj" fmla="val 22727"/>
-              </a:avLst>
-            </a:prstGeom>
-            <a:solidFill>
-              <a:srgbClr val="DBEAFE"/>
-            </a:solidFill>
-            <a:ln w="12700">
-              <a:solidFill>
-                <a:srgbClr val="DBEAFE"/>
-              </a:solidFill>
-              <a:prstDash val="solid"/>
-            </a:ln>
-          </p:spPr>
-          <p:txBody>
-            <a:bodyPr/>
-            <a:lstStyle/>
-            <a:p>
-              <a:endParaRPr lang="en-US" sz="1823">
-                <a:latin typeface="Arial" panose="020B0604020202020204" pitchFamily="34" charset="0"/>
-                <a:cs typeface="Arial" panose="020B0604020202020204" pitchFamily="34" charset="0"/>
-              </a:endParaRPr>
-            </a:p>
-          </p:txBody>
-        </p:sp>
-        <p:sp>
-          <p:nvSpPr>
-            <p:cNvPr id="114" name="TextBox 113">
-              <a:extLst>
-                <a:ext uri="{FF2B5EF4-FFF2-40B4-BE49-F238E27FC236}">
-                  <a16:creationId xmlns:a16="http://schemas.microsoft.com/office/drawing/2014/main" id="{D0567EE0-57FA-72C2-4C71-71403553B2BB}"/>
-                </a:ext>
-              </a:extLst>
-            </p:cNvPr>
-            <p:cNvSpPr txBox="1">
-              <a:spLocks/>
-            </p:cNvSpPr>
-            <p:nvPr/>
-          </p:nvSpPr>
-          <p:spPr>
-            <a:xfrm>
-              <a:off x="10856038" y="2323689"/>
-              <a:ext cx="791307" cy="200055"/>
-            </a:xfrm>
-            <a:prstGeom prst="rect">
-              <a:avLst/>
-            </a:prstGeom>
-            <a:noFill/>
-          </p:spPr>
-          <p:txBody>
-            <a:bodyPr wrap="square">
-              <a:spAutoFit/>
-            </a:bodyPr>
-            <a:lstStyle/>
-            <a:p>
-              <a:pPr algn="ctr"/>
-              <a:r>
-                <a:rPr lang="en-US" sz="709" dirty="0">
-                  <a:solidFill>
-                    <a:srgbClr val="1E40AF"/>
-                  </a:solidFill>
-                  <a:latin typeface="Arial" panose="020B0604020202020204" pitchFamily="34" charset="0"/>
-                  <a:ea typeface="Calibri" pitchFamily="34" charset="-122"/>
-                  <a:cs typeface="Arial" panose="020B0604020202020204" pitchFamily="34" charset="0"/>
-                </a:rPr>
-                <a:t>In Progress</a:t>
-              </a:r>
-              <a:endParaRPr lang="en-US" sz="709" dirty="0">
-                <a:latin typeface="Arial" panose="020B0604020202020204" pitchFamily="34" charset="0"/>
-                <a:cs typeface="Arial" panose="020B0604020202020204" pitchFamily="34" charset="0"/>
-              </a:endParaRPr>
-            </a:p>
-          </p:txBody>
-        </p:sp>
-      </p:grpSp>
-      <p:grpSp>
-        <p:nvGrpSpPr>
-          <p:cNvPr id="115" name="Group 114">
-            <a:extLst>
-              <a:ext uri="{FF2B5EF4-FFF2-40B4-BE49-F238E27FC236}">
-                <a16:creationId xmlns:a16="http://schemas.microsoft.com/office/drawing/2014/main" id="{AC725CFB-E2BB-1987-98C5-AA17217EBC60}"/>
-              </a:ext>
-            </a:extLst>
-          </p:cNvPr>
-          <p:cNvGrpSpPr/>
-          <p:nvPr/>
-        </p:nvGrpSpPr>
-        <p:grpSpPr>
-          <a:xfrm>
-            <a:off x="10982482" y="5068837"/>
-            <a:ext cx="801198" cy="203683"/>
-            <a:chOff x="10856038" y="2322576"/>
-            <a:chExt cx="791307" cy="201168"/>
-          </a:xfrm>
-        </p:grpSpPr>
-        <p:sp>
-          <p:nvSpPr>
-            <p:cNvPr id="116" name="Shape 43">
-              <a:extLst>
-                <a:ext uri="{FF2B5EF4-FFF2-40B4-BE49-F238E27FC236}">
-                  <a16:creationId xmlns:a16="http://schemas.microsoft.com/office/drawing/2014/main" id="{A27F82EA-0C5F-BD0B-BBC9-D8FA56463754}"/>
-                </a:ext>
-              </a:extLst>
-            </p:cNvPr>
-            <p:cNvSpPr>
-              <a:spLocks/>
-            </p:cNvSpPr>
-            <p:nvPr/>
-          </p:nvSpPr>
-          <p:spPr>
-            <a:xfrm>
-              <a:off x="10981944" y="2322576"/>
-              <a:ext cx="539496" cy="201168"/>
-            </a:xfrm>
-            <a:prstGeom prst="roundRect">
-              <a:avLst>
-                <a:gd name="adj" fmla="val 22727"/>
-              </a:avLst>
-            </a:prstGeom>
-            <a:solidFill>
-              <a:srgbClr val="DBEAFE"/>
-            </a:solidFill>
-            <a:ln w="12700">
-              <a:solidFill>
-                <a:srgbClr val="DBEAFE"/>
-              </a:solidFill>
-              <a:prstDash val="solid"/>
-            </a:ln>
-          </p:spPr>
-          <p:txBody>
-            <a:bodyPr/>
-            <a:lstStyle/>
-            <a:p>
-              <a:endParaRPr lang="en-US" sz="1823">
-                <a:latin typeface="Arial" panose="020B0604020202020204" pitchFamily="34" charset="0"/>
-                <a:cs typeface="Arial" panose="020B0604020202020204" pitchFamily="34" charset="0"/>
-              </a:endParaRPr>
-            </a:p>
-          </p:txBody>
-        </p:sp>
-        <p:sp>
-          <p:nvSpPr>
-            <p:cNvPr id="117" name="TextBox 116">
-              <a:extLst>
-                <a:ext uri="{FF2B5EF4-FFF2-40B4-BE49-F238E27FC236}">
-                  <a16:creationId xmlns:a16="http://schemas.microsoft.com/office/drawing/2014/main" id="{E7FEE61F-775B-4599-FB15-E01019918FC6}"/>
-                </a:ext>
-              </a:extLst>
-            </p:cNvPr>
-            <p:cNvSpPr txBox="1">
-              <a:spLocks/>
-            </p:cNvSpPr>
-            <p:nvPr/>
-          </p:nvSpPr>
-          <p:spPr>
-            <a:xfrm>
-              <a:off x="10856038" y="2323689"/>
-              <a:ext cx="791307" cy="200055"/>
-            </a:xfrm>
-            <a:prstGeom prst="rect">
-              <a:avLst/>
-            </a:prstGeom>
-            <a:noFill/>
-          </p:spPr>
-          <p:txBody>
-            <a:bodyPr wrap="square">
-              <a:spAutoFit/>
-            </a:bodyPr>
-            <a:lstStyle/>
-            <a:p>
-              <a:pPr algn="ctr"/>
-              <a:r>
-                <a:rPr lang="en-US" sz="709" dirty="0">
-                  <a:solidFill>
-                    <a:srgbClr val="1E40AF"/>
-                  </a:solidFill>
-                  <a:latin typeface="Arial" panose="020B0604020202020204" pitchFamily="34" charset="0"/>
-                  <a:ea typeface="Calibri" pitchFamily="34" charset="-122"/>
-                  <a:cs typeface="Arial" panose="020B0604020202020204" pitchFamily="34" charset="0"/>
-                </a:rPr>
-                <a:t>In Progress</a:t>
-              </a:r>
-              <a:endParaRPr lang="en-US" sz="709" dirty="0">
-                <a:latin typeface="Arial" panose="020B0604020202020204" pitchFamily="34" charset="0"/>
-                <a:cs typeface="Arial" panose="020B0604020202020204" pitchFamily="34" charset="0"/>
-              </a:endParaRPr>
-            </a:p>
-          </p:txBody>
-        </p:sp>
-      </p:grpSp>
-      <p:grpSp>
-        <p:nvGrpSpPr>
-          <p:cNvPr id="118" name="Group 117">
-            <a:extLst>
-              <a:ext uri="{FF2B5EF4-FFF2-40B4-BE49-F238E27FC236}">
-                <a16:creationId xmlns:a16="http://schemas.microsoft.com/office/drawing/2014/main" id="{A0092163-86E7-960A-C9A0-8778F154B24D}"/>
-              </a:ext>
-            </a:extLst>
-          </p:cNvPr>
-          <p:cNvGrpSpPr/>
-          <p:nvPr/>
-        </p:nvGrpSpPr>
-        <p:grpSpPr>
-          <a:xfrm>
-            <a:off x="10982482" y="5886458"/>
-            <a:ext cx="801198" cy="203683"/>
-            <a:chOff x="10856038" y="2322576"/>
-            <a:chExt cx="791307" cy="201168"/>
-          </a:xfrm>
-        </p:grpSpPr>
-        <p:sp>
-          <p:nvSpPr>
-            <p:cNvPr id="119" name="Shape 43">
-              <a:extLst>
-                <a:ext uri="{FF2B5EF4-FFF2-40B4-BE49-F238E27FC236}">
-                  <a16:creationId xmlns:a16="http://schemas.microsoft.com/office/drawing/2014/main" id="{3E931F12-F74C-56A4-D2C5-EB39C66423EE}"/>
-                </a:ext>
-              </a:extLst>
-            </p:cNvPr>
-            <p:cNvSpPr>
-              <a:spLocks/>
-            </p:cNvSpPr>
-            <p:nvPr/>
-          </p:nvSpPr>
-          <p:spPr>
-            <a:xfrm>
-              <a:off x="10981944" y="2322576"/>
-              <a:ext cx="539496" cy="201168"/>
-            </a:xfrm>
-            <a:prstGeom prst="roundRect">
-              <a:avLst>
-                <a:gd name="adj" fmla="val 22727"/>
-              </a:avLst>
-            </a:prstGeom>
-            <a:solidFill>
-              <a:srgbClr val="DBEAFE"/>
-            </a:solidFill>
-            <a:ln w="12700">
-              <a:solidFill>
-                <a:srgbClr val="DBEAFE"/>
-              </a:solidFill>
-              <a:prstDash val="solid"/>
-            </a:ln>
-          </p:spPr>
-          <p:txBody>
-            <a:bodyPr/>
-            <a:lstStyle/>
-            <a:p>
-              <a:endParaRPr lang="en-US" sz="1823">
-                <a:latin typeface="Arial" panose="020B0604020202020204" pitchFamily="34" charset="0"/>
-                <a:cs typeface="Arial" panose="020B0604020202020204" pitchFamily="34" charset="0"/>
-              </a:endParaRPr>
-            </a:p>
-          </p:txBody>
-        </p:sp>
-        <p:sp>
-          <p:nvSpPr>
-            <p:cNvPr id="120" name="TextBox 119">
-              <a:extLst>
-                <a:ext uri="{FF2B5EF4-FFF2-40B4-BE49-F238E27FC236}">
-                  <a16:creationId xmlns:a16="http://schemas.microsoft.com/office/drawing/2014/main" id="{A9B8DA65-C185-45B6-8927-7535FF712057}"/>
-                </a:ext>
-              </a:extLst>
-            </p:cNvPr>
-            <p:cNvSpPr txBox="1">
-              <a:spLocks/>
-            </p:cNvSpPr>
-            <p:nvPr/>
-          </p:nvSpPr>
-          <p:spPr>
-            <a:xfrm>
-              <a:off x="10856038" y="2323689"/>
-              <a:ext cx="791307" cy="200055"/>
-            </a:xfrm>
-            <a:prstGeom prst="rect">
-              <a:avLst/>
-            </a:prstGeom>
-            <a:noFill/>
-          </p:spPr>
-          <p:txBody>
-            <a:bodyPr wrap="square">
-              <a:spAutoFit/>
-            </a:bodyPr>
-            <a:lstStyle/>
-            <a:p>
-              <a:pPr algn="ctr"/>
-              <a:r>
-                <a:rPr lang="en-US" sz="709" dirty="0">
-                  <a:solidFill>
-                    <a:srgbClr val="1E40AF"/>
-                  </a:solidFill>
-                  <a:latin typeface="Arial" panose="020B0604020202020204" pitchFamily="34" charset="0"/>
-                  <a:ea typeface="Calibri" pitchFamily="34" charset="-122"/>
-                  <a:cs typeface="Arial" panose="020B0604020202020204" pitchFamily="34" charset="0"/>
-                </a:rPr>
-                <a:t>In Progress</a:t>
-              </a:r>
-              <a:endParaRPr lang="en-US" sz="709" dirty="0">
-                <a:latin typeface="Arial" panose="020B0604020202020204" pitchFamily="34" charset="0"/>
-                <a:cs typeface="Arial" panose="020B0604020202020204" pitchFamily="34" charset="0"/>
-              </a:endParaRPr>
-            </a:p>
-          </p:txBody>
-        </p:sp>
-      </p:grpSp>
-      <p:sp>
-        <p:nvSpPr>
-          <p:cNvPr id="125" name="Shape 43">
-            <a:extLst>
-              <a:ext uri="{FF2B5EF4-FFF2-40B4-BE49-F238E27FC236}">
-                <a16:creationId xmlns:a16="http://schemas.microsoft.com/office/drawing/2014/main" id="{70B9B545-80CC-0E6D-F585-2F36A41678ED}"/>
-              </a:ext>
-            </a:extLst>
-          </p:cNvPr>
-          <p:cNvSpPr>
-            <a:spLocks/>
-          </p:cNvSpPr>
-          <p:nvPr/>
-        </p:nvSpPr>
-        <p:spPr>
-          <a:xfrm>
-            <a:off x="11019514" y="6651546"/>
-            <a:ext cx="546240" cy="203683"/>
-          </a:xfrm>
-          <a:prstGeom prst="roundRect">
-            <a:avLst>
-              <a:gd name="adj" fmla="val 22727"/>
-            </a:avLst>
-          </a:prstGeom>
-          <a:solidFill>
-            <a:srgbClr val="DBEAFE"/>
-          </a:solidFill>
-          <a:ln w="12700">
-            <a:solidFill>
-              <a:srgbClr val="DBEAFE"/>
-            </a:solidFill>
-            <a:prstDash val="solid"/>
-          </a:ln>
-        </p:spPr>
-        <p:txBody>
-          <a:bodyPr/>
-          <a:lstStyle/>
-          <a:p>
-            <a:endParaRPr lang="en-US" sz="1823">
-              <a:latin typeface="Arial" panose="020B0604020202020204" pitchFamily="34" charset="0"/>
-              <a:cs typeface="Arial" panose="020B0604020202020204" pitchFamily="34" charset="0"/>
-            </a:endParaRPr>
-          </a:p>
-        </p:txBody>
-      </p:sp>
-      <p:sp>
-        <p:nvSpPr>
-          <p:cNvPr id="126" name="TextBox 125">
-            <a:extLst>
-              <a:ext uri="{FF2B5EF4-FFF2-40B4-BE49-F238E27FC236}">
-                <a16:creationId xmlns:a16="http://schemas.microsoft.com/office/drawing/2014/main" id="{208AB665-5043-8C17-8A24-D0F9AA78D960}"/>
-              </a:ext>
-            </a:extLst>
-          </p:cNvPr>
-          <p:cNvSpPr txBox="1">
-            <a:spLocks/>
-          </p:cNvSpPr>
-          <p:nvPr/>
-        </p:nvSpPr>
-        <p:spPr>
-          <a:xfrm>
-            <a:off x="11019515" y="6652674"/>
-            <a:ext cx="673719" cy="202556"/>
-          </a:xfrm>
-          <a:prstGeom prst="rect">
-            <a:avLst/>
-          </a:prstGeom>
-          <a:solidFill>
-            <a:schemeClr val="bg2"/>
-          </a:solidFill>
-        </p:spPr>
-        <p:txBody>
-          <a:bodyPr wrap="square">
-            <a:spAutoFit/>
-          </a:bodyPr>
-          <a:lstStyle/>
-          <a:p>
-            <a:pPr algn="ctr"/>
-            <a:r>
-              <a:rPr lang="en-US" sz="709" dirty="0">
-                <a:latin typeface="Arial" panose="020B0604020202020204" pitchFamily="34" charset="0"/>
-                <a:ea typeface="Calibri" pitchFamily="34" charset="-122"/>
-                <a:cs typeface="Arial" panose="020B0604020202020204" pitchFamily="34" charset="0"/>
-              </a:rPr>
-              <a:t>Not Started</a:t>
-            </a:r>
-            <a:endParaRPr lang="en-US" sz="709" dirty="0">
-              <a:latin typeface="Arial" panose="020B0604020202020204" pitchFamily="34" charset="0"/>
-              <a:cs typeface="Arial" panose="020B0604020202020204" pitchFamily="34" charset="0"/>
-            </a:endParaRPr>
-          </a:p>
-        </p:txBody>
-      </p:sp>
-      <p:sp>
-        <p:nvSpPr>
-          <p:cNvPr id="127" name="Text 32">
-            <a:extLst>
-              <a:ext uri="{FF2B5EF4-FFF2-40B4-BE49-F238E27FC236}">
-                <a16:creationId xmlns:a16="http://schemas.microsoft.com/office/drawing/2014/main" id="{D21BB0C2-6D45-5F5A-614E-271EE8B66909}"/>
-              </a:ext>
-            </a:extLst>
-          </p:cNvPr>
-          <p:cNvSpPr/>
-          <p:nvPr/>
-        </p:nvSpPr>
-        <p:spPr>
-          <a:xfrm>
-            <a:off x="5996875" y="1559052"/>
-            <a:ext cx="601790" cy="685114"/>
-          </a:xfrm>
-          <a:prstGeom prst="rect">
-            <a:avLst/>
-          </a:prstGeom>
-          <a:noFill/>
-          <a:ln/>
-        </p:spPr>
-        <p:txBody>
-          <a:bodyPr wrap="square" lIns="0" tIns="0" rIns="0" bIns="0" rtlCol="0" anchor="ctr"/>
-          <a:lstStyle/>
-          <a:p>
-            <a:r>
-              <a:rPr lang="en-US" sz="911" dirty="0">
-                <a:latin typeface="Arial" panose="020B0604020202020204" pitchFamily="34" charset="0"/>
-                <a:cs typeface="Arial" panose="020B0604020202020204" pitchFamily="34" charset="0"/>
-              </a:rPr>
-              <a:t>New Mobile </a:t>
-            </a:r>
-          </a:p>
-          <a:p>
-            <a:r>
-              <a:rPr lang="en-US" sz="911" dirty="0">
-                <a:latin typeface="Arial" panose="020B0604020202020204" pitchFamily="34" charset="0"/>
-                <a:cs typeface="Arial" panose="020B0604020202020204" pitchFamily="34" charset="0"/>
-              </a:rPr>
-              <a:t>App</a:t>
-            </a:r>
-          </a:p>
-        </p:txBody>
-      </p:sp>
-      <p:sp>
-        <p:nvSpPr>
-          <p:cNvPr id="129" name="Shape 50">
-            <a:extLst>
-              <a:ext uri="{FF2B5EF4-FFF2-40B4-BE49-F238E27FC236}">
-                <a16:creationId xmlns:a16="http://schemas.microsoft.com/office/drawing/2014/main" id="{5C9D865E-DD60-768F-2585-A56B029EF495}"/>
-              </a:ext>
-            </a:extLst>
-          </p:cNvPr>
-          <p:cNvSpPr/>
-          <p:nvPr/>
-        </p:nvSpPr>
-        <p:spPr>
-          <a:xfrm>
-            <a:off x="5117088" y="1685782"/>
-            <a:ext cx="687866" cy="262736"/>
-          </a:xfrm>
-          <a:prstGeom prst="roundRect">
-            <a:avLst>
-              <a:gd name="adj" fmla="val 18182"/>
-            </a:avLst>
-          </a:prstGeom>
-          <a:solidFill>
-            <a:srgbClr val="D1FAE5"/>
-          </a:solidFill>
-          <a:ln w="12700">
-            <a:solidFill>
-              <a:srgbClr val="D1FAE5"/>
-            </a:solidFill>
-            <a:prstDash val="solid"/>
-          </a:ln>
-        </p:spPr>
-        <p:txBody>
-          <a:bodyPr/>
-          <a:lstStyle/>
-          <a:p>
-            <a:r>
-              <a:rPr lang="en-US" sz="700" dirty="0"/>
-              <a:t>Contracted</a:t>
-            </a:r>
-          </a:p>
-        </p:txBody>
-      </p:sp>
-      <p:grpSp>
-        <p:nvGrpSpPr>
-          <p:cNvPr id="130" name="Group 129">
-            <a:extLst>
-              <a:ext uri="{FF2B5EF4-FFF2-40B4-BE49-F238E27FC236}">
-                <a16:creationId xmlns:a16="http://schemas.microsoft.com/office/drawing/2014/main" id="{4132CF53-7D6D-7E08-1092-56FA9E76348C}"/>
-              </a:ext>
-            </a:extLst>
-          </p:cNvPr>
-          <p:cNvGrpSpPr/>
-          <p:nvPr/>
-        </p:nvGrpSpPr>
-        <p:grpSpPr>
-          <a:xfrm>
-            <a:off x="11019515" y="1806107"/>
-            <a:ext cx="801198" cy="203683"/>
-            <a:chOff x="10856038" y="2322576"/>
-            <a:chExt cx="791307" cy="201168"/>
-          </a:xfrm>
-        </p:grpSpPr>
-        <p:sp>
-          <p:nvSpPr>
-            <p:cNvPr id="131" name="Shape 43">
-              <a:extLst>
-                <a:ext uri="{FF2B5EF4-FFF2-40B4-BE49-F238E27FC236}">
-                  <a16:creationId xmlns:a16="http://schemas.microsoft.com/office/drawing/2014/main" id="{0E44B3C3-60B3-80E9-04F9-A275A1BFE415}"/>
-                </a:ext>
-              </a:extLst>
-            </p:cNvPr>
-            <p:cNvSpPr>
-              <a:spLocks/>
-            </p:cNvSpPr>
-            <p:nvPr/>
-          </p:nvSpPr>
-          <p:spPr>
-            <a:xfrm>
-              <a:off x="10981944" y="2322576"/>
-              <a:ext cx="539496" cy="201168"/>
-            </a:xfrm>
-            <a:prstGeom prst="roundRect">
-              <a:avLst>
-                <a:gd name="adj" fmla="val 22727"/>
-              </a:avLst>
-            </a:prstGeom>
-            <a:solidFill>
-              <a:srgbClr val="DBEAFE"/>
-            </a:solidFill>
-            <a:ln w="12700">
-              <a:solidFill>
-                <a:srgbClr val="DBEAFE"/>
-              </a:solidFill>
-              <a:prstDash val="solid"/>
-            </a:ln>
-          </p:spPr>
-          <p:txBody>
-            <a:bodyPr/>
-            <a:lstStyle/>
-            <a:p>
-              <a:endParaRPr lang="en-US" sz="1823">
-                <a:latin typeface="Arial" panose="020B0604020202020204" pitchFamily="34" charset="0"/>
-                <a:cs typeface="Arial" panose="020B0604020202020204" pitchFamily="34" charset="0"/>
-              </a:endParaRPr>
-            </a:p>
-          </p:txBody>
-        </p:sp>
-        <p:sp>
-          <p:nvSpPr>
-            <p:cNvPr id="132" name="TextBox 131">
-              <a:extLst>
-                <a:ext uri="{FF2B5EF4-FFF2-40B4-BE49-F238E27FC236}">
-                  <a16:creationId xmlns:a16="http://schemas.microsoft.com/office/drawing/2014/main" id="{80E17D4F-E6D0-4B16-F927-AAF566C2F60F}"/>
-                </a:ext>
-              </a:extLst>
-            </p:cNvPr>
-            <p:cNvSpPr txBox="1">
-              <a:spLocks/>
-            </p:cNvSpPr>
-            <p:nvPr/>
-          </p:nvSpPr>
-          <p:spPr>
-            <a:xfrm>
-              <a:off x="10856038" y="2323689"/>
-              <a:ext cx="791307" cy="200055"/>
-            </a:xfrm>
-            <a:prstGeom prst="rect">
-              <a:avLst/>
-            </a:prstGeom>
-            <a:noFill/>
-          </p:spPr>
-          <p:txBody>
-            <a:bodyPr wrap="square">
-              <a:spAutoFit/>
-            </a:bodyPr>
-            <a:lstStyle/>
-            <a:p>
-              <a:pPr algn="ctr"/>
-              <a:r>
-                <a:rPr lang="en-US" sz="709" b="1" dirty="0">
-                  <a:solidFill>
-                    <a:srgbClr val="1E40AF"/>
-                  </a:solidFill>
-                  <a:latin typeface="Arial" panose="020B0604020202020204" pitchFamily="34" charset="0"/>
-                  <a:ea typeface="Calibri" pitchFamily="34" charset="-122"/>
-                  <a:cs typeface="Arial" panose="020B0604020202020204" pitchFamily="34" charset="0"/>
-                </a:rPr>
-                <a:t>In Progress</a:t>
-              </a:r>
-              <a:endParaRPr lang="en-US" sz="709" dirty="0">
-                <a:latin typeface="Arial" panose="020B0604020202020204" pitchFamily="34" charset="0"/>
-                <a:cs typeface="Arial" panose="020B0604020202020204" pitchFamily="34" charset="0"/>
-              </a:endParaRPr>
-            </a:p>
-          </p:txBody>
-        </p:sp>
-      </p:grpSp>
-      <p:grpSp>
-        <p:nvGrpSpPr>
-          <p:cNvPr id="133" name="Group 132">
-            <a:extLst>
-              <a:ext uri="{FF2B5EF4-FFF2-40B4-BE49-F238E27FC236}">
-                <a16:creationId xmlns:a16="http://schemas.microsoft.com/office/drawing/2014/main" id="{042E70DA-F2F8-0889-73F8-F772A6AD5209}"/>
-              </a:ext>
-            </a:extLst>
-          </p:cNvPr>
-          <p:cNvGrpSpPr/>
-          <p:nvPr/>
-        </p:nvGrpSpPr>
-        <p:grpSpPr>
-          <a:xfrm>
-            <a:off x="11012393" y="1197193"/>
-            <a:ext cx="801198" cy="203683"/>
-            <a:chOff x="10856038" y="2322576"/>
-            <a:chExt cx="791307" cy="201168"/>
-          </a:xfrm>
-        </p:grpSpPr>
-        <p:sp>
-          <p:nvSpPr>
-            <p:cNvPr id="134" name="Shape 43">
-              <a:extLst>
-                <a:ext uri="{FF2B5EF4-FFF2-40B4-BE49-F238E27FC236}">
-                  <a16:creationId xmlns:a16="http://schemas.microsoft.com/office/drawing/2014/main" id="{A84D8951-A161-C449-5C26-88BA18CAA4B2}"/>
-                </a:ext>
-              </a:extLst>
-            </p:cNvPr>
-            <p:cNvSpPr>
-              <a:spLocks/>
-            </p:cNvSpPr>
-            <p:nvPr/>
-          </p:nvSpPr>
-          <p:spPr>
-            <a:xfrm>
-              <a:off x="10981944" y="2322576"/>
-              <a:ext cx="539496" cy="201168"/>
-            </a:xfrm>
-            <a:prstGeom prst="roundRect">
-              <a:avLst>
-                <a:gd name="adj" fmla="val 22727"/>
-              </a:avLst>
-            </a:prstGeom>
-            <a:solidFill>
-              <a:srgbClr val="DBEAFE"/>
-            </a:solidFill>
-            <a:ln w="12700">
-              <a:solidFill>
-                <a:srgbClr val="DBEAFE"/>
-              </a:solidFill>
-              <a:prstDash val="solid"/>
-            </a:ln>
-          </p:spPr>
-          <p:txBody>
-            <a:bodyPr/>
-            <a:lstStyle/>
-            <a:p>
-              <a:endParaRPr lang="en-US" sz="1823">
-                <a:latin typeface="Arial" panose="020B0604020202020204" pitchFamily="34" charset="0"/>
-                <a:cs typeface="Arial" panose="020B0604020202020204" pitchFamily="34" charset="0"/>
-              </a:endParaRPr>
-            </a:p>
-          </p:txBody>
-        </p:sp>
-        <p:sp>
-          <p:nvSpPr>
-            <p:cNvPr id="135" name="TextBox 134">
-              <a:extLst>
-                <a:ext uri="{FF2B5EF4-FFF2-40B4-BE49-F238E27FC236}">
-                  <a16:creationId xmlns:a16="http://schemas.microsoft.com/office/drawing/2014/main" id="{2EB2C3A4-C4A6-95F5-034A-C315AD177485}"/>
-                </a:ext>
-              </a:extLst>
-            </p:cNvPr>
-            <p:cNvSpPr txBox="1">
-              <a:spLocks/>
-            </p:cNvSpPr>
-            <p:nvPr/>
-          </p:nvSpPr>
-          <p:spPr>
-            <a:xfrm>
-              <a:off x="10856038" y="2323689"/>
-              <a:ext cx="791307" cy="200055"/>
-            </a:xfrm>
-            <a:prstGeom prst="rect">
-              <a:avLst/>
-            </a:prstGeom>
-            <a:noFill/>
-          </p:spPr>
-          <p:txBody>
-            <a:bodyPr wrap="square">
-              <a:spAutoFit/>
-            </a:bodyPr>
-            <a:lstStyle/>
-            <a:p>
-              <a:pPr algn="ctr"/>
-              <a:r>
-                <a:rPr lang="en-US" sz="709" b="1" dirty="0">
-                  <a:solidFill>
-                    <a:srgbClr val="1E40AF"/>
-                  </a:solidFill>
-                  <a:latin typeface="Arial" panose="020B0604020202020204" pitchFamily="34" charset="0"/>
-                  <a:ea typeface="Calibri" pitchFamily="34" charset="-122"/>
-                  <a:cs typeface="Arial" panose="020B0604020202020204" pitchFamily="34" charset="0"/>
-                </a:rPr>
-                <a:t>In Progress</a:t>
-              </a:r>
-              <a:endParaRPr lang="en-US" sz="709" dirty="0">
-                <a:latin typeface="Arial" panose="020B0604020202020204" pitchFamily="34" charset="0"/>
-                <a:cs typeface="Arial" panose="020B0604020202020204" pitchFamily="34" charset="0"/>
-              </a:endParaRPr>
-            </a:p>
-          </p:txBody>
-        </p:sp>
-      </p:grpSp>
-    </p:spTree>
-  </p:cSld>
-  <p:clrMapOvr>
-    <a:masterClrMapping/>
-  </p:clrMapOvr>
-</p:sld>
-</file>
-
-<file path=ppt/slides/slide3.xml><?xml version="1.0" encoding="utf-8"?>
 <p:sld xmlns:a="http://schemas.openxmlformats.org/drawingml/2006/main" xmlns:r="http://schemas.openxmlformats.org/officeDocument/2006/relationships" xmlns:p="http://schemas.openxmlformats.org/presentationml/2006/main">
   <p:cSld name="Slide 1">
     <p:bg>
@@ -8815,6 +4962,3140 @@
         <p:spPr>
           <a:xfrm>
             <a:off x="201168" y="0"/>
+            <a:ext cx="6858000" cy="457200"/>
+          </a:xfrm>
+          <a:prstGeom prst="rect">
+            <a:avLst/>
+          </a:prstGeom>
+          <a:noFill/>
+          <a:ln/>
+        </p:spPr>
+        <p:txBody>
+          <a:bodyPr wrap="square" lIns="0" tIns="0" rIns="0" bIns="0" rtlCol="0" anchor="ctr"/>
+          <a:lstStyle/>
+          <a:p>
+            <a:pPr algn="l" indent="0" marL="0">
+              <a:buNone/>
+            </a:pPr>
+            <a:r>
+              <a:rPr lang="en-US" sz="1600" b="1" dirty="0">
+                <a:solidFill>
+                  <a:srgbClr val="000000"/>
+                </a:solidFill>
+              </a:rPr>
+              <a:t>Project SABR</a:t>
+            </a:r>
+            <a:endParaRPr lang="en-US" sz="1600" dirty="0"/>
+          </a:p>
+        </p:txBody>
+      </p:sp>
+      <p:sp>
+        <p:nvSpPr>
+          <p:cNvPr id="4" name="Text 2"/>
+          <p:cNvSpPr/>
+          <p:nvPr/>
+        </p:nvSpPr>
+        <p:spPr>
+          <a:xfrm>
+            <a:off x="7315200" y="0"/>
+            <a:ext cx="4754880" cy="457200"/>
+          </a:xfrm>
+          <a:prstGeom prst="rect">
+            <a:avLst/>
+          </a:prstGeom>
+          <a:noFill/>
+          <a:ln/>
+        </p:spPr>
+        <p:txBody>
+          <a:bodyPr wrap="square" lIns="0" tIns="0" rIns="0" bIns="0" rtlCol="0" anchor="ctr"/>
+          <a:lstStyle/>
+          <a:p>
+            <a:pPr algn="r" indent="0" marL="0">
+              <a:buNone/>
+            </a:pPr>
+            <a:r>
+              <a:rPr lang="en-US" sz="1100" dirty="0">
+                <a:solidFill>
+                  <a:srgbClr val="388849"/>
+                </a:solidFill>
+              </a:rPr>
+              <a:t>Critical Gates  ·  Jul 8, 2026</a:t>
+            </a:r>
+            <a:endParaRPr lang="en-US" sz="1100" dirty="0"/>
+          </a:p>
+        </p:txBody>
+      </p:sp>
+      <p:sp>
+        <p:nvSpPr>
+          <p:cNvPr id="5" name="Shape 3"/>
+          <p:cNvSpPr/>
+          <p:nvPr/>
+        </p:nvSpPr>
+        <p:spPr>
+          <a:xfrm>
+            <a:off x="91440" y="502920"/>
+            <a:ext cx="6016752" cy="2926080"/>
+          </a:xfrm>
+          <a:prstGeom prst="rect">
+            <a:avLst/>
+          </a:prstGeom>
+          <a:solidFill>
+            <a:srgbClr val="FAFBFC"/>
+          </a:solidFill>
+          <a:ln w="9525">
+            <a:solidFill>
+              <a:srgbClr val="D1D5DB"/>
+            </a:solidFill>
+            <a:prstDash val="solid"/>
+          </a:ln>
+        </p:spPr>
+      </p:sp>
+      <p:sp>
+        <p:nvSpPr>
+          <p:cNvPr id="6" name="Shape 4"/>
+          <p:cNvSpPr/>
+          <p:nvPr/>
+        </p:nvSpPr>
+        <p:spPr>
+          <a:xfrm>
+            <a:off x="91440" y="502920"/>
+            <a:ext cx="6016752" cy="274320"/>
+          </a:xfrm>
+          <a:prstGeom prst="rect">
+            <a:avLst/>
+          </a:prstGeom>
+          <a:solidFill>
+            <a:srgbClr val="8ED973"/>
+          </a:solidFill>
+          <a:ln w="12700">
+            <a:solidFill>
+              <a:srgbClr val="8ED973"/>
+            </a:solidFill>
+            <a:prstDash val="solid"/>
+          </a:ln>
+        </p:spPr>
+      </p:sp>
+      <p:sp>
+        <p:nvSpPr>
+          <p:cNvPr id="7" name="Text 5"/>
+          <p:cNvSpPr/>
+          <p:nvPr/>
+        </p:nvSpPr>
+        <p:spPr>
+          <a:xfrm>
+            <a:off x="201168" y="502920"/>
+            <a:ext cx="5852160" cy="274320"/>
+          </a:xfrm>
+          <a:prstGeom prst="rect">
+            <a:avLst/>
+          </a:prstGeom>
+          <a:noFill/>
+          <a:ln/>
+        </p:spPr>
+        <p:txBody>
+          <a:bodyPr wrap="square" lIns="0" tIns="0" rIns="0" bIns="0" rtlCol="0" anchor="ctr"/>
+          <a:lstStyle/>
+          <a:p>
+            <a:pPr algn="l" indent="0" marL="0">
+              <a:buNone/>
+            </a:pPr>
+            <a:r>
+              <a:rPr lang="en-US" sz="900" b="1" dirty="0">
+                <a:solidFill>
+                  <a:srgbClr val="000000"/>
+                </a:solidFill>
+              </a:rPr>
+              <a:t>Vendor / Contract</a:t>
+            </a:r>
+            <a:endParaRPr lang="en-US" sz="900" dirty="0"/>
+          </a:p>
+        </p:txBody>
+      </p:sp>
+      <p:sp>
+        <p:nvSpPr>
+          <p:cNvPr id="8" name="Shape 6"/>
+          <p:cNvSpPr/>
+          <p:nvPr/>
+        </p:nvSpPr>
+        <p:spPr>
+          <a:xfrm>
+            <a:off x="91440" y="777240"/>
+            <a:ext cx="6016752" cy="530352"/>
+          </a:xfrm>
+          <a:prstGeom prst="rect">
+            <a:avLst/>
+          </a:prstGeom>
+          <a:solidFill>
+            <a:srgbClr val="FFFFFF"/>
+          </a:solidFill>
+          <a:ln w="3175">
+            <a:solidFill>
+              <a:srgbClr val="E5E7EB"/>
+            </a:solidFill>
+            <a:prstDash val="solid"/>
+          </a:ln>
+        </p:spPr>
+      </p:sp>
+      <p:sp>
+        <p:nvSpPr>
+          <p:cNvPr id="9" name="Text 7"/>
+          <p:cNvSpPr/>
+          <p:nvPr/>
+        </p:nvSpPr>
+        <p:spPr>
+          <a:xfrm>
+            <a:off x="164592" y="795528"/>
+            <a:ext cx="777240" cy="493776"/>
+          </a:xfrm>
+          <a:prstGeom prst="rect">
+            <a:avLst/>
+          </a:prstGeom>
+          <a:noFill/>
+          <a:ln/>
+        </p:spPr>
+        <p:txBody>
+          <a:bodyPr wrap="square" lIns="0" tIns="0" rIns="0" bIns="0" rtlCol="0" anchor="ctr"/>
+          <a:lstStyle/>
+          <a:p>
+            <a:pPr indent="0" marL="0">
+              <a:buNone/>
+            </a:pPr>
+            <a:r>
+              <a:rPr lang="en-US" sz="750" b="1" dirty="0">
+                <a:solidFill>
+                  <a:srgbClr val="1F2937"/>
+                </a:solidFill>
+              </a:rPr>
+              <a:t>Bitmovin</a:t>
+            </a:r>
+            <a:endParaRPr lang="en-US" sz="750" dirty="0"/>
+          </a:p>
+        </p:txBody>
+      </p:sp>
+      <p:sp>
+        <p:nvSpPr>
+          <p:cNvPr id="10" name="Text 8"/>
+          <p:cNvSpPr/>
+          <p:nvPr/>
+        </p:nvSpPr>
+        <p:spPr>
+          <a:xfrm>
+            <a:off x="960120" y="804672"/>
+            <a:ext cx="4178808" cy="475488"/>
+          </a:xfrm>
+          <a:prstGeom prst="rect">
+            <a:avLst/>
+          </a:prstGeom>
+          <a:noFill/>
+          <a:ln/>
+        </p:spPr>
+        <p:txBody>
+          <a:bodyPr wrap="square" lIns="0" tIns="0" rIns="0" bIns="0" rtlCol="0" anchor="t"/>
+          <a:lstStyle/>
+          <a:p>
+            <a:pPr indent="0" marL="0">
+              <a:buNone/>
+            </a:pPr>
+            <a:r>
+              <a:rPr lang="en-US" sz="650" dirty="0">
+                <a:solidFill>
+                  <a:srgbClr val="374151"/>
+                </a:solidFill>
+              </a:rPr>
+              <a:t>Redlined from TC legal, Bitmovin reviewing.</a:t>
+            </a:r>
+            <a:endParaRPr lang="en-US" sz="650" dirty="0"/>
+          </a:p>
+        </p:txBody>
+      </p:sp>
+      <p:sp>
+        <p:nvSpPr>
+          <p:cNvPr id="11" name="Shape 9"/>
+          <p:cNvSpPr/>
+          <p:nvPr/>
+        </p:nvSpPr>
+        <p:spPr>
+          <a:xfrm>
+            <a:off x="5230368" y="955548"/>
+            <a:ext cx="822960" cy="173736"/>
+          </a:xfrm>
+          <a:prstGeom prst="roundRect">
+            <a:avLst>
+              <a:gd name="adj" fmla="val 15789"/>
+            </a:avLst>
+          </a:prstGeom>
+          <a:solidFill>
+            <a:srgbClr val="1558A8"/>
+          </a:solidFill>
+          <a:ln w="12700">
+            <a:solidFill>
+              <a:srgbClr val="1558A8"/>
+            </a:solidFill>
+            <a:prstDash val="solid"/>
+          </a:ln>
+        </p:spPr>
+      </p:sp>
+      <p:sp>
+        <p:nvSpPr>
+          <p:cNvPr id="12" name="Text 10"/>
+          <p:cNvSpPr/>
+          <p:nvPr/>
+        </p:nvSpPr>
+        <p:spPr>
+          <a:xfrm>
+            <a:off x="5230368" y="955548"/>
+            <a:ext cx="822960" cy="173736"/>
+          </a:xfrm>
+          <a:prstGeom prst="rect">
+            <a:avLst/>
+          </a:prstGeom>
+          <a:noFill/>
+          <a:ln/>
+        </p:spPr>
+        <p:txBody>
+          <a:bodyPr wrap="square" lIns="0" tIns="0" rIns="0" bIns="0" rtlCol="0" anchor="ctr"/>
+          <a:lstStyle/>
+          <a:p>
+            <a:pPr algn="ctr" indent="0" marL="0">
+              <a:buNone/>
+            </a:pPr>
+            <a:r>
+              <a:rPr lang="en-US" sz="650" b="1" dirty="0">
+                <a:solidFill>
+                  <a:srgbClr val="FFFFFF"/>
+                </a:solidFill>
+              </a:rPr>
+              <a:t>In Progress</a:t>
+            </a:r>
+            <a:endParaRPr lang="en-US" sz="650" dirty="0"/>
+          </a:p>
+        </p:txBody>
+      </p:sp>
+      <p:sp>
+        <p:nvSpPr>
+          <p:cNvPr id="13" name="Shape 11"/>
+          <p:cNvSpPr/>
+          <p:nvPr/>
+        </p:nvSpPr>
+        <p:spPr>
+          <a:xfrm>
+            <a:off x="91440" y="1307592"/>
+            <a:ext cx="6016752" cy="0"/>
+          </a:xfrm>
+          <a:prstGeom prst="line">
+            <a:avLst/>
+          </a:prstGeom>
+          <a:noFill/>
+          <a:ln w="6350">
+            <a:solidFill>
+              <a:srgbClr val="E5E7EB"/>
+            </a:solidFill>
+            <a:prstDash val="solid"/>
+          </a:ln>
+        </p:spPr>
+      </p:sp>
+      <p:sp>
+        <p:nvSpPr>
+          <p:cNvPr id="14" name="Text 12"/>
+          <p:cNvSpPr/>
+          <p:nvPr/>
+        </p:nvSpPr>
+        <p:spPr>
+          <a:xfrm>
+            <a:off x="164592" y="1325880"/>
+            <a:ext cx="777240" cy="493776"/>
+          </a:xfrm>
+          <a:prstGeom prst="rect">
+            <a:avLst/>
+          </a:prstGeom>
+          <a:noFill/>
+          <a:ln/>
+        </p:spPr>
+        <p:txBody>
+          <a:bodyPr wrap="square" lIns="0" tIns="0" rIns="0" bIns="0" rtlCol="0" anchor="ctr"/>
+          <a:lstStyle/>
+          <a:p>
+            <a:pPr indent="0" marL="0">
+              <a:buNone/>
+            </a:pPr>
+            <a:r>
+              <a:rPr lang="en-US" sz="750" b="1" dirty="0">
+                <a:solidFill>
+                  <a:srgbClr val="1F2937"/>
+                </a:solidFill>
+              </a:rPr>
+              <a:t>Adobe</a:t>
+            </a:r>
+            <a:endParaRPr lang="en-US" sz="750" dirty="0"/>
+          </a:p>
+        </p:txBody>
+      </p:sp>
+      <p:sp>
+        <p:nvSpPr>
+          <p:cNvPr id="15" name="Text 13"/>
+          <p:cNvSpPr/>
+          <p:nvPr/>
+        </p:nvSpPr>
+        <p:spPr>
+          <a:xfrm>
+            <a:off x="960120" y="1335024"/>
+            <a:ext cx="4178808" cy="475488"/>
+          </a:xfrm>
+          <a:prstGeom prst="rect">
+            <a:avLst/>
+          </a:prstGeom>
+          <a:noFill/>
+          <a:ln/>
+        </p:spPr>
+        <p:txBody>
+          <a:bodyPr wrap="square" lIns="0" tIns="0" rIns="0" bIns="0" rtlCol="0" anchor="t"/>
+          <a:lstStyle/>
+          <a:p>
+            <a:pPr indent="0" marL="0">
+              <a:buNone/>
+            </a:pPr>
+            <a:r>
+              <a:rPr lang="en-US" sz="650" dirty="0">
+                <a:solidFill>
+                  <a:srgbClr val="374151"/>
+                </a:solidFill>
+              </a:rPr>
+              <a:t>We are good. Just need to find out who owns the original contract and review renewal dates. Keff owns.</a:t>
+            </a:r>
+            <a:endParaRPr lang="en-US" sz="650" dirty="0"/>
+          </a:p>
+        </p:txBody>
+      </p:sp>
+      <p:sp>
+        <p:nvSpPr>
+          <p:cNvPr id="16" name="Shape 14"/>
+          <p:cNvSpPr/>
+          <p:nvPr/>
+        </p:nvSpPr>
+        <p:spPr>
+          <a:xfrm>
+            <a:off x="5230368" y="1485900"/>
+            <a:ext cx="822960" cy="173736"/>
+          </a:xfrm>
+          <a:prstGeom prst="roundRect">
+            <a:avLst>
+              <a:gd name="adj" fmla="val 15789"/>
+            </a:avLst>
+          </a:prstGeom>
+          <a:solidFill>
+            <a:srgbClr val="CFFAFE"/>
+          </a:solidFill>
+          <a:ln w="12700">
+            <a:solidFill>
+              <a:srgbClr val="0E7490"/>
+            </a:solidFill>
+            <a:prstDash val="solid"/>
+          </a:ln>
+        </p:spPr>
+      </p:sp>
+      <p:sp>
+        <p:nvSpPr>
+          <p:cNvPr id="17" name="Text 15"/>
+          <p:cNvSpPr/>
+          <p:nvPr/>
+        </p:nvSpPr>
+        <p:spPr>
+          <a:xfrm>
+            <a:off x="5230368" y="1485900"/>
+            <a:ext cx="822960" cy="173736"/>
+          </a:xfrm>
+          <a:prstGeom prst="rect">
+            <a:avLst/>
+          </a:prstGeom>
+          <a:noFill/>
+          <a:ln/>
+        </p:spPr>
+        <p:txBody>
+          <a:bodyPr wrap="square" lIns="0" tIns="0" rIns="0" bIns="0" rtlCol="0" anchor="ctr"/>
+          <a:lstStyle/>
+          <a:p>
+            <a:pPr algn="ctr" indent="0" marL="0">
+              <a:buNone/>
+            </a:pPr>
+            <a:r>
+              <a:rPr lang="en-US" sz="650" b="1" dirty="0">
+                <a:solidFill>
+                  <a:srgbClr val="0E7490"/>
+                </a:solidFill>
+              </a:rPr>
+              <a:t>Contracted</a:t>
+            </a:r>
+            <a:endParaRPr lang="en-US" sz="650" dirty="0"/>
+          </a:p>
+        </p:txBody>
+      </p:sp>
+      <p:sp>
+        <p:nvSpPr>
+          <p:cNvPr id="18" name="Shape 16"/>
+          <p:cNvSpPr/>
+          <p:nvPr/>
+        </p:nvSpPr>
+        <p:spPr>
+          <a:xfrm>
+            <a:off x="91440" y="1837944"/>
+            <a:ext cx="6016752" cy="530352"/>
+          </a:xfrm>
+          <a:prstGeom prst="rect">
+            <a:avLst/>
+          </a:prstGeom>
+          <a:solidFill>
+            <a:srgbClr val="FFFFFF"/>
+          </a:solidFill>
+          <a:ln w="3175">
+            <a:solidFill>
+              <a:srgbClr val="E5E7EB"/>
+            </a:solidFill>
+            <a:prstDash val="solid"/>
+          </a:ln>
+        </p:spPr>
+      </p:sp>
+      <p:sp>
+        <p:nvSpPr>
+          <p:cNvPr id="19" name="Shape 17"/>
+          <p:cNvSpPr/>
+          <p:nvPr/>
+        </p:nvSpPr>
+        <p:spPr>
+          <a:xfrm>
+            <a:off x="91440" y="1837944"/>
+            <a:ext cx="6016752" cy="0"/>
+          </a:xfrm>
+          <a:prstGeom prst="line">
+            <a:avLst/>
+          </a:prstGeom>
+          <a:noFill/>
+          <a:ln w="6350">
+            <a:solidFill>
+              <a:srgbClr val="E5E7EB"/>
+            </a:solidFill>
+            <a:prstDash val="solid"/>
+          </a:ln>
+        </p:spPr>
+      </p:sp>
+      <p:sp>
+        <p:nvSpPr>
+          <p:cNvPr id="20" name="Text 18"/>
+          <p:cNvSpPr/>
+          <p:nvPr/>
+        </p:nvSpPr>
+        <p:spPr>
+          <a:xfrm>
+            <a:off x="164592" y="1856232"/>
+            <a:ext cx="777240" cy="493776"/>
+          </a:xfrm>
+          <a:prstGeom prst="rect">
+            <a:avLst/>
+          </a:prstGeom>
+          <a:noFill/>
+          <a:ln/>
+        </p:spPr>
+        <p:txBody>
+          <a:bodyPr wrap="square" lIns="0" tIns="0" rIns="0" bIns="0" rtlCol="0" anchor="ctr"/>
+          <a:lstStyle/>
+          <a:p>
+            <a:pPr indent="0" marL="0">
+              <a:buNone/>
+            </a:pPr>
+            <a:r>
+              <a:rPr lang="en-US" sz="750" b="1" dirty="0">
+                <a:solidFill>
+                  <a:srgbClr val="1F2937"/>
+                </a:solidFill>
+              </a:rPr>
+              <a:t>Amagi SOW</a:t>
+            </a:r>
+            <a:endParaRPr lang="en-US" sz="750" dirty="0"/>
+          </a:p>
+        </p:txBody>
+      </p:sp>
+      <p:sp>
+        <p:nvSpPr>
+          <p:cNvPr id="21" name="Text 19"/>
+          <p:cNvSpPr/>
+          <p:nvPr/>
+        </p:nvSpPr>
+        <p:spPr>
+          <a:xfrm>
+            <a:off x="960120" y="1865376"/>
+            <a:ext cx="4178808" cy="475488"/>
+          </a:xfrm>
+          <a:prstGeom prst="rect">
+            <a:avLst/>
+          </a:prstGeom>
+          <a:noFill/>
+          <a:ln/>
+        </p:spPr>
+        <p:txBody>
+          <a:bodyPr wrap="square" lIns="0" tIns="0" rIns="0" bIns="0" rtlCol="0" anchor="t"/>
+          <a:lstStyle/>
+          <a:p>
+            <a:pPr indent="0" marL="0">
+              <a:buNone/>
+            </a:pPr>
+            <a:r>
+              <a:rPr lang="en-US" sz="650" dirty="0">
+                <a:solidFill>
+                  <a:srgbClr val="374151"/>
+                </a:solidFill>
+              </a:rPr>
+              <a:t>Amagi Contract Cost Review: Provide Sinclair with details on cost savings for Amagi by following up with Mike Kralik and Kevin Kotlove. (Ari)</a:t>
+            </a:r>
+            <a:endParaRPr lang="en-US" sz="650" dirty="0"/>
+          </a:p>
+        </p:txBody>
+      </p:sp>
+      <p:sp>
+        <p:nvSpPr>
+          <p:cNvPr id="22" name="Shape 20"/>
+          <p:cNvSpPr/>
+          <p:nvPr/>
+        </p:nvSpPr>
+        <p:spPr>
+          <a:xfrm>
+            <a:off x="5230368" y="2016252"/>
+            <a:ext cx="822960" cy="173736"/>
+          </a:xfrm>
+          <a:prstGeom prst="roundRect">
+            <a:avLst>
+              <a:gd name="adj" fmla="val 15789"/>
+            </a:avLst>
+          </a:prstGeom>
+          <a:solidFill>
+            <a:srgbClr val="1558A8"/>
+          </a:solidFill>
+          <a:ln w="12700">
+            <a:solidFill>
+              <a:srgbClr val="1558A8"/>
+            </a:solidFill>
+            <a:prstDash val="solid"/>
+          </a:ln>
+        </p:spPr>
+      </p:sp>
+      <p:sp>
+        <p:nvSpPr>
+          <p:cNvPr id="23" name="Text 21"/>
+          <p:cNvSpPr/>
+          <p:nvPr/>
+        </p:nvSpPr>
+        <p:spPr>
+          <a:xfrm>
+            <a:off x="5230368" y="2016252"/>
+            <a:ext cx="822960" cy="173736"/>
+          </a:xfrm>
+          <a:prstGeom prst="rect">
+            <a:avLst/>
+          </a:prstGeom>
+          <a:noFill/>
+          <a:ln/>
+        </p:spPr>
+        <p:txBody>
+          <a:bodyPr wrap="square" lIns="0" tIns="0" rIns="0" bIns="0" rtlCol="0" anchor="ctr"/>
+          <a:lstStyle/>
+          <a:p>
+            <a:pPr algn="ctr" indent="0" marL="0">
+              <a:buNone/>
+            </a:pPr>
+            <a:r>
+              <a:rPr lang="en-US" sz="650" b="1" dirty="0">
+                <a:solidFill>
+                  <a:srgbClr val="FFFFFF"/>
+                </a:solidFill>
+              </a:rPr>
+              <a:t>In Progress</a:t>
+            </a:r>
+            <a:endParaRPr lang="en-US" sz="650" dirty="0"/>
+          </a:p>
+        </p:txBody>
+      </p:sp>
+      <p:sp>
+        <p:nvSpPr>
+          <p:cNvPr id="24" name="Shape 22"/>
+          <p:cNvSpPr/>
+          <p:nvPr/>
+        </p:nvSpPr>
+        <p:spPr>
+          <a:xfrm>
+            <a:off x="91440" y="2368296"/>
+            <a:ext cx="6016752" cy="0"/>
+          </a:xfrm>
+          <a:prstGeom prst="line">
+            <a:avLst/>
+          </a:prstGeom>
+          <a:noFill/>
+          <a:ln w="6350">
+            <a:solidFill>
+              <a:srgbClr val="E5E7EB"/>
+            </a:solidFill>
+            <a:prstDash val="solid"/>
+          </a:ln>
+        </p:spPr>
+      </p:sp>
+      <p:sp>
+        <p:nvSpPr>
+          <p:cNvPr id="25" name="Text 23"/>
+          <p:cNvSpPr/>
+          <p:nvPr/>
+        </p:nvSpPr>
+        <p:spPr>
+          <a:xfrm>
+            <a:off x="164592" y="2386584"/>
+            <a:ext cx="777240" cy="493776"/>
+          </a:xfrm>
+          <a:prstGeom prst="rect">
+            <a:avLst/>
+          </a:prstGeom>
+          <a:noFill/>
+          <a:ln/>
+        </p:spPr>
+        <p:txBody>
+          <a:bodyPr wrap="square" lIns="0" tIns="0" rIns="0" bIns="0" rtlCol="0" anchor="ctr"/>
+          <a:lstStyle/>
+          <a:p>
+            <a:pPr indent="0" marL="0">
+              <a:buNone/>
+            </a:pPr>
+            <a:r>
+              <a:rPr lang="en-US" sz="750" b="1" dirty="0">
+                <a:solidFill>
+                  <a:srgbClr val="1F2937"/>
+                </a:solidFill>
+              </a:rPr>
+              <a:t>FOXXUM</a:t>
+            </a:r>
+            <a:endParaRPr lang="en-US" sz="750" dirty="0"/>
+          </a:p>
+        </p:txBody>
+      </p:sp>
+      <p:sp>
+        <p:nvSpPr>
+          <p:cNvPr id="26" name="Text 24"/>
+          <p:cNvSpPr/>
+          <p:nvPr/>
+        </p:nvSpPr>
+        <p:spPr>
+          <a:xfrm>
+            <a:off x="960120" y="2395728"/>
+            <a:ext cx="4178808" cy="475488"/>
+          </a:xfrm>
+          <a:prstGeom prst="rect">
+            <a:avLst/>
+          </a:prstGeom>
+          <a:noFill/>
+          <a:ln/>
+        </p:spPr>
+        <p:txBody>
+          <a:bodyPr wrap="square" lIns="0" tIns="0" rIns="0" bIns="0" rtlCol="0" anchor="t"/>
+          <a:lstStyle/>
+          <a:p>
+            <a:pPr indent="0" marL="0">
+              <a:buNone/>
+            </a:pPr>
+            <a:r>
+              <a:rPr lang="en-US" sz="650" dirty="0">
+                <a:solidFill>
+                  <a:srgbClr val="374151"/>
+                </a:solidFill>
+              </a:rPr>
+              <a:t>Redlined, contract sent out to FOXXUM for review on 7/2.</a:t>
+            </a:r>
+            <a:endParaRPr lang="en-US" sz="650" dirty="0"/>
+          </a:p>
+        </p:txBody>
+      </p:sp>
+      <p:sp>
+        <p:nvSpPr>
+          <p:cNvPr id="27" name="Shape 25"/>
+          <p:cNvSpPr/>
+          <p:nvPr/>
+        </p:nvSpPr>
+        <p:spPr>
+          <a:xfrm>
+            <a:off x="5230368" y="2546604"/>
+            <a:ext cx="822960" cy="173736"/>
+          </a:xfrm>
+          <a:prstGeom prst="roundRect">
+            <a:avLst>
+              <a:gd name="adj" fmla="val 15789"/>
+            </a:avLst>
+          </a:prstGeom>
+          <a:solidFill>
+            <a:srgbClr val="1558A8"/>
+          </a:solidFill>
+          <a:ln w="12700">
+            <a:solidFill>
+              <a:srgbClr val="1558A8"/>
+            </a:solidFill>
+            <a:prstDash val="solid"/>
+          </a:ln>
+        </p:spPr>
+      </p:sp>
+      <p:sp>
+        <p:nvSpPr>
+          <p:cNvPr id="28" name="Text 26"/>
+          <p:cNvSpPr/>
+          <p:nvPr/>
+        </p:nvSpPr>
+        <p:spPr>
+          <a:xfrm>
+            <a:off x="5230368" y="2546604"/>
+            <a:ext cx="822960" cy="173736"/>
+          </a:xfrm>
+          <a:prstGeom prst="rect">
+            <a:avLst/>
+          </a:prstGeom>
+          <a:noFill/>
+          <a:ln/>
+        </p:spPr>
+        <p:txBody>
+          <a:bodyPr wrap="square" lIns="0" tIns="0" rIns="0" bIns="0" rtlCol="0" anchor="ctr"/>
+          <a:lstStyle/>
+          <a:p>
+            <a:pPr algn="ctr" indent="0" marL="0">
+              <a:buNone/>
+            </a:pPr>
+            <a:r>
+              <a:rPr lang="en-US" sz="650" b="1" dirty="0">
+                <a:solidFill>
+                  <a:srgbClr val="FFFFFF"/>
+                </a:solidFill>
+              </a:rPr>
+              <a:t>In Progress</a:t>
+            </a:r>
+            <a:endParaRPr lang="en-US" sz="650" dirty="0"/>
+          </a:p>
+        </p:txBody>
+      </p:sp>
+      <p:sp>
+        <p:nvSpPr>
+          <p:cNvPr id="29" name="Shape 27"/>
+          <p:cNvSpPr/>
+          <p:nvPr/>
+        </p:nvSpPr>
+        <p:spPr>
+          <a:xfrm>
+            <a:off x="91440" y="2898648"/>
+            <a:ext cx="6016752" cy="530352"/>
+          </a:xfrm>
+          <a:prstGeom prst="rect">
+            <a:avLst/>
+          </a:prstGeom>
+          <a:solidFill>
+            <a:srgbClr val="FFFFFF"/>
+          </a:solidFill>
+          <a:ln w="3175">
+            <a:solidFill>
+              <a:srgbClr val="E5E7EB"/>
+            </a:solidFill>
+            <a:prstDash val="solid"/>
+          </a:ln>
+        </p:spPr>
+      </p:sp>
+      <p:sp>
+        <p:nvSpPr>
+          <p:cNvPr id="30" name="Shape 28"/>
+          <p:cNvSpPr/>
+          <p:nvPr/>
+        </p:nvSpPr>
+        <p:spPr>
+          <a:xfrm>
+            <a:off x="91440" y="2898648"/>
+            <a:ext cx="6016752" cy="0"/>
+          </a:xfrm>
+          <a:prstGeom prst="line">
+            <a:avLst/>
+          </a:prstGeom>
+          <a:noFill/>
+          <a:ln w="6350">
+            <a:solidFill>
+              <a:srgbClr val="E5E7EB"/>
+            </a:solidFill>
+            <a:prstDash val="solid"/>
+          </a:ln>
+        </p:spPr>
+      </p:sp>
+      <p:sp>
+        <p:nvSpPr>
+          <p:cNvPr id="31" name="Text 29"/>
+          <p:cNvSpPr/>
+          <p:nvPr/>
+        </p:nvSpPr>
+        <p:spPr>
+          <a:xfrm>
+            <a:off x="164592" y="2916936"/>
+            <a:ext cx="777240" cy="493776"/>
+          </a:xfrm>
+          <a:prstGeom prst="rect">
+            <a:avLst/>
+          </a:prstGeom>
+          <a:noFill/>
+          <a:ln/>
+        </p:spPr>
+        <p:txBody>
+          <a:bodyPr wrap="square" lIns="0" tIns="0" rIns="0" bIns="0" rtlCol="0" anchor="ctr"/>
+          <a:lstStyle/>
+          <a:p>
+            <a:pPr indent="0" marL="0">
+              <a:buNone/>
+            </a:pPr>
+            <a:r>
+              <a:rPr lang="en-US" sz="750" b="1" dirty="0">
+                <a:solidFill>
+                  <a:srgbClr val="1F2937"/>
+                </a:solidFill>
+              </a:rPr>
+              <a:t>SR Data</a:t>
+            </a:r>
+            <a:endParaRPr lang="en-US" sz="750" dirty="0"/>
+          </a:p>
+        </p:txBody>
+      </p:sp>
+      <p:sp>
+        <p:nvSpPr>
+          <p:cNvPr id="32" name="Text 30"/>
+          <p:cNvSpPr/>
+          <p:nvPr/>
+        </p:nvSpPr>
+        <p:spPr>
+          <a:xfrm>
+            <a:off x="960120" y="2926080"/>
+            <a:ext cx="4178808" cy="475488"/>
+          </a:xfrm>
+          <a:prstGeom prst="rect">
+            <a:avLst/>
+          </a:prstGeom>
+          <a:noFill/>
+          <a:ln/>
+        </p:spPr>
+        <p:txBody>
+          <a:bodyPr wrap="square" lIns="0" tIns="0" rIns="0" bIns="0" rtlCol="0" anchor="t"/>
+          <a:lstStyle/>
+          <a:p>
+            <a:pPr indent="0" marL="0">
+              <a:buNone/>
+            </a:pPr>
+            <a:r>
+              <a:rPr lang="en-US" sz="650" dirty="0">
+                <a:solidFill>
+                  <a:srgbClr val="374151"/>
+                </a:solidFill>
+              </a:rPr>
+              <a:t>Discussions will begin end of week or first week of July. Due by end of July.</a:t>
+            </a:r>
+            <a:endParaRPr lang="en-US" sz="650" dirty="0"/>
+          </a:p>
+        </p:txBody>
+      </p:sp>
+      <p:sp>
+        <p:nvSpPr>
+          <p:cNvPr id="33" name="Shape 31"/>
+          <p:cNvSpPr/>
+          <p:nvPr/>
+        </p:nvSpPr>
+        <p:spPr>
+          <a:xfrm>
+            <a:off x="5230368" y="3076956"/>
+            <a:ext cx="822960" cy="173736"/>
+          </a:xfrm>
+          <a:prstGeom prst="roundRect">
+            <a:avLst>
+              <a:gd name="adj" fmla="val 15789"/>
+            </a:avLst>
+          </a:prstGeom>
+          <a:solidFill>
+            <a:srgbClr val="1558A8"/>
+          </a:solidFill>
+          <a:ln w="12700">
+            <a:solidFill>
+              <a:srgbClr val="1558A8"/>
+            </a:solidFill>
+            <a:prstDash val="solid"/>
+          </a:ln>
+        </p:spPr>
+      </p:sp>
+      <p:sp>
+        <p:nvSpPr>
+          <p:cNvPr id="34" name="Text 32"/>
+          <p:cNvSpPr/>
+          <p:nvPr/>
+        </p:nvSpPr>
+        <p:spPr>
+          <a:xfrm>
+            <a:off x="5230368" y="3076956"/>
+            <a:ext cx="822960" cy="173736"/>
+          </a:xfrm>
+          <a:prstGeom prst="rect">
+            <a:avLst/>
+          </a:prstGeom>
+          <a:noFill/>
+          <a:ln/>
+        </p:spPr>
+        <p:txBody>
+          <a:bodyPr wrap="square" lIns="0" tIns="0" rIns="0" bIns="0" rtlCol="0" anchor="ctr"/>
+          <a:lstStyle/>
+          <a:p>
+            <a:pPr algn="ctr" indent="0" marL="0">
+              <a:buNone/>
+            </a:pPr>
+            <a:r>
+              <a:rPr lang="en-US" sz="650" b="1" dirty="0">
+                <a:solidFill>
+                  <a:srgbClr val="FFFFFF"/>
+                </a:solidFill>
+              </a:rPr>
+              <a:t>In Progress</a:t>
+            </a:r>
+            <a:endParaRPr lang="en-US" sz="650" dirty="0"/>
+          </a:p>
+        </p:txBody>
+      </p:sp>
+      <p:sp>
+        <p:nvSpPr>
+          <p:cNvPr id="35" name="Shape 33"/>
+          <p:cNvSpPr/>
+          <p:nvPr/>
+        </p:nvSpPr>
+        <p:spPr>
+          <a:xfrm>
+            <a:off x="6236208" y="502920"/>
+            <a:ext cx="6016752" cy="2926080"/>
+          </a:xfrm>
+          <a:prstGeom prst="rect">
+            <a:avLst/>
+          </a:prstGeom>
+          <a:solidFill>
+            <a:srgbClr val="FAFBFC"/>
+          </a:solidFill>
+          <a:ln w="9525">
+            <a:solidFill>
+              <a:srgbClr val="D1D5DB"/>
+            </a:solidFill>
+            <a:prstDash val="solid"/>
+          </a:ln>
+        </p:spPr>
+      </p:sp>
+      <p:sp>
+        <p:nvSpPr>
+          <p:cNvPr id="36" name="Shape 34"/>
+          <p:cNvSpPr/>
+          <p:nvPr/>
+        </p:nvSpPr>
+        <p:spPr>
+          <a:xfrm>
+            <a:off x="6236208" y="502920"/>
+            <a:ext cx="6016752" cy="274320"/>
+          </a:xfrm>
+          <a:prstGeom prst="rect">
+            <a:avLst/>
+          </a:prstGeom>
+          <a:solidFill>
+            <a:srgbClr val="8ED973"/>
+          </a:solidFill>
+          <a:ln w="12700">
+            <a:solidFill>
+              <a:srgbClr val="8ED973"/>
+            </a:solidFill>
+            <a:prstDash val="solid"/>
+          </a:ln>
+        </p:spPr>
+      </p:sp>
+      <p:sp>
+        <p:nvSpPr>
+          <p:cNvPr id="37" name="Text 35"/>
+          <p:cNvSpPr/>
+          <p:nvPr/>
+        </p:nvSpPr>
+        <p:spPr>
+          <a:xfrm>
+            <a:off x="6345936" y="502920"/>
+            <a:ext cx="5852160" cy="274320"/>
+          </a:xfrm>
+          <a:prstGeom prst="rect">
+            <a:avLst/>
+          </a:prstGeom>
+          <a:noFill/>
+          <a:ln/>
+        </p:spPr>
+        <p:txBody>
+          <a:bodyPr wrap="square" lIns="0" tIns="0" rIns="0" bIns="0" rtlCol="0" anchor="ctr"/>
+          <a:lstStyle/>
+          <a:p>
+            <a:pPr algn="l" indent="0" marL="0">
+              <a:buNone/>
+            </a:pPr>
+            <a:r>
+              <a:rPr lang="en-US" sz="900" b="1" dirty="0">
+                <a:solidFill>
+                  <a:srgbClr val="000000"/>
+                </a:solidFill>
+              </a:rPr>
+              <a:t>Shared Infrastructure &amp; Dev Tooling</a:t>
+            </a:r>
+            <a:endParaRPr lang="en-US" sz="900" dirty="0"/>
+          </a:p>
+        </p:txBody>
+      </p:sp>
+      <p:sp>
+        <p:nvSpPr>
+          <p:cNvPr id="38" name="Shape 36"/>
+          <p:cNvSpPr/>
+          <p:nvPr/>
+        </p:nvSpPr>
+        <p:spPr>
+          <a:xfrm>
+            <a:off x="6236208" y="777240"/>
+            <a:ext cx="6016752" cy="662940"/>
+          </a:xfrm>
+          <a:prstGeom prst="rect">
+            <a:avLst/>
+          </a:prstGeom>
+          <a:solidFill>
+            <a:srgbClr val="FFFFFF"/>
+          </a:solidFill>
+          <a:ln w="3175">
+            <a:solidFill>
+              <a:srgbClr val="E5E7EB"/>
+            </a:solidFill>
+            <a:prstDash val="solid"/>
+          </a:ln>
+        </p:spPr>
+      </p:sp>
+      <p:sp>
+        <p:nvSpPr>
+          <p:cNvPr id="39" name="Text 37"/>
+          <p:cNvSpPr/>
+          <p:nvPr/>
+        </p:nvSpPr>
+        <p:spPr>
+          <a:xfrm>
+            <a:off x="6309360" y="795528"/>
+            <a:ext cx="777240" cy="626364"/>
+          </a:xfrm>
+          <a:prstGeom prst="rect">
+            <a:avLst/>
+          </a:prstGeom>
+          <a:noFill/>
+          <a:ln/>
+        </p:spPr>
+        <p:txBody>
+          <a:bodyPr wrap="square" lIns="0" tIns="0" rIns="0" bIns="0" rtlCol="0" anchor="ctr"/>
+          <a:lstStyle/>
+          <a:p>
+            <a:pPr indent="0" marL="0">
+              <a:buNone/>
+            </a:pPr>
+            <a:r>
+              <a:rPr lang="en-US" sz="750" b="1" dirty="0">
+                <a:solidFill>
+                  <a:srgbClr val="1F2937"/>
+                </a:solidFill>
+              </a:rPr>
+              <a:t>Monitoring &amp; Error Tracking</a:t>
+            </a:r>
+            <a:endParaRPr lang="en-US" sz="750" dirty="0"/>
+          </a:p>
+        </p:txBody>
+      </p:sp>
+      <p:sp>
+        <p:nvSpPr>
+          <p:cNvPr id="40" name="Text 38"/>
+          <p:cNvSpPr/>
+          <p:nvPr/>
+        </p:nvSpPr>
+        <p:spPr>
+          <a:xfrm>
+            <a:off x="7104888" y="804672"/>
+            <a:ext cx="4178808" cy="608076"/>
+          </a:xfrm>
+          <a:prstGeom prst="rect">
+            <a:avLst/>
+          </a:prstGeom>
+          <a:noFill/>
+          <a:ln/>
+        </p:spPr>
+        <p:txBody>
+          <a:bodyPr wrap="square" lIns="0" tIns="0" rIns="0" bIns="0" rtlCol="0" anchor="t"/>
+          <a:lstStyle/>
+          <a:p>
+            <a:pPr indent="0" marL="0">
+              <a:buNone/>
+            </a:pPr>
+            <a:r>
+              <a:rPr lang="en-US" sz="650" dirty="0">
+                <a:solidFill>
+                  <a:srgbClr val="374151"/>
+                </a:solidFill>
+              </a:rPr>
+              <a:t>Added automatic tracking of what users do in the app (screens viewed, buttons tapped) and instant alerts when something breaks, so issues get caught and fixed faster instead of relying on user reports.</a:t>
+            </a:r>
+            <a:endParaRPr lang="en-US" sz="650" dirty="0"/>
+          </a:p>
+        </p:txBody>
+      </p:sp>
+      <p:sp>
+        <p:nvSpPr>
+          <p:cNvPr id="41" name="Shape 39"/>
+          <p:cNvSpPr/>
+          <p:nvPr/>
+        </p:nvSpPr>
+        <p:spPr>
+          <a:xfrm>
+            <a:off x="11375136" y="1021842"/>
+            <a:ext cx="822960" cy="173736"/>
+          </a:xfrm>
+          <a:prstGeom prst="roundRect">
+            <a:avLst>
+              <a:gd name="adj" fmla="val 15789"/>
+            </a:avLst>
+          </a:prstGeom>
+          <a:solidFill>
+            <a:srgbClr val="1558A8"/>
+          </a:solidFill>
+          <a:ln w="12700">
+            <a:solidFill>
+              <a:srgbClr val="1558A8"/>
+            </a:solidFill>
+            <a:prstDash val="solid"/>
+          </a:ln>
+        </p:spPr>
+      </p:sp>
+      <p:sp>
+        <p:nvSpPr>
+          <p:cNvPr id="42" name="Text 40"/>
+          <p:cNvSpPr/>
+          <p:nvPr/>
+        </p:nvSpPr>
+        <p:spPr>
+          <a:xfrm>
+            <a:off x="11375136" y="1021842"/>
+            <a:ext cx="822960" cy="173736"/>
+          </a:xfrm>
+          <a:prstGeom prst="rect">
+            <a:avLst/>
+          </a:prstGeom>
+          <a:noFill/>
+          <a:ln/>
+        </p:spPr>
+        <p:txBody>
+          <a:bodyPr wrap="square" lIns="0" tIns="0" rIns="0" bIns="0" rtlCol="0" anchor="ctr"/>
+          <a:lstStyle/>
+          <a:p>
+            <a:pPr algn="ctr" indent="0" marL="0">
+              <a:buNone/>
+            </a:pPr>
+            <a:r>
+              <a:rPr lang="en-US" sz="650" b="1" dirty="0">
+                <a:solidFill>
+                  <a:srgbClr val="FFFFFF"/>
+                </a:solidFill>
+              </a:rPr>
+              <a:t>In Progress</a:t>
+            </a:r>
+            <a:endParaRPr lang="en-US" sz="650" dirty="0"/>
+          </a:p>
+        </p:txBody>
+      </p:sp>
+      <p:sp>
+        <p:nvSpPr>
+          <p:cNvPr id="43" name="Shape 41"/>
+          <p:cNvSpPr/>
+          <p:nvPr/>
+        </p:nvSpPr>
+        <p:spPr>
+          <a:xfrm>
+            <a:off x="6236208" y="1440180"/>
+            <a:ext cx="6016752" cy="0"/>
+          </a:xfrm>
+          <a:prstGeom prst="line">
+            <a:avLst/>
+          </a:prstGeom>
+          <a:noFill/>
+          <a:ln w="6350">
+            <a:solidFill>
+              <a:srgbClr val="E5E7EB"/>
+            </a:solidFill>
+            <a:prstDash val="solid"/>
+          </a:ln>
+        </p:spPr>
+      </p:sp>
+      <p:sp>
+        <p:nvSpPr>
+          <p:cNvPr id="44" name="Text 42"/>
+          <p:cNvSpPr/>
+          <p:nvPr/>
+        </p:nvSpPr>
+        <p:spPr>
+          <a:xfrm>
+            <a:off x="6309360" y="1458468"/>
+            <a:ext cx="777240" cy="626364"/>
+          </a:xfrm>
+          <a:prstGeom prst="rect">
+            <a:avLst/>
+          </a:prstGeom>
+          <a:noFill/>
+          <a:ln/>
+        </p:spPr>
+        <p:txBody>
+          <a:bodyPr wrap="square" lIns="0" tIns="0" rIns="0" bIns="0" rtlCol="0" anchor="ctr"/>
+          <a:lstStyle/>
+          <a:p>
+            <a:pPr indent="0" marL="0">
+              <a:buNone/>
+            </a:pPr>
+            <a:r>
+              <a:rPr lang="en-US" sz="750" b="1" dirty="0">
+                <a:solidFill>
+                  <a:srgbClr val="1F2937"/>
+                </a:solidFill>
+              </a:rPr>
+              <a:t>New Mobile App</a:t>
+            </a:r>
+            <a:endParaRPr lang="en-US" sz="750" dirty="0"/>
+          </a:p>
+        </p:txBody>
+      </p:sp>
+      <p:sp>
+        <p:nvSpPr>
+          <p:cNvPr id="45" name="Text 43"/>
+          <p:cNvSpPr/>
+          <p:nvPr/>
+        </p:nvSpPr>
+        <p:spPr>
+          <a:xfrm>
+            <a:off x="7104888" y="1467612"/>
+            <a:ext cx="4178808" cy="608076"/>
+          </a:xfrm>
+          <a:prstGeom prst="rect">
+            <a:avLst/>
+          </a:prstGeom>
+          <a:noFill/>
+          <a:ln/>
+        </p:spPr>
+        <p:txBody>
+          <a:bodyPr wrap="square" lIns="0" tIns="0" rIns="0" bIns="0" rtlCol="0" anchor="t"/>
+          <a:lstStyle/>
+          <a:p>
+            <a:pPr indent="0" marL="0">
+              <a:buNone/>
+            </a:pPr>
+            <a:r>
+              <a:rPr lang="en-US" sz="650" dirty="0">
+                <a:solidFill>
+                  <a:srgbClr val="374151"/>
+                </a:solidFill>
+              </a:rPr>
+              <a:t>Migrated the app off mock data onto the live backend (Home, Live, Schedule, Tournaments now show real content and real playback). Shipped ~35 merged updates.</a:t>
+            </a:r>
+            <a:endParaRPr lang="en-US" sz="650" dirty="0"/>
+          </a:p>
+        </p:txBody>
+      </p:sp>
+      <p:sp>
+        <p:nvSpPr>
+          <p:cNvPr id="46" name="Shape 44"/>
+          <p:cNvSpPr/>
+          <p:nvPr/>
+        </p:nvSpPr>
+        <p:spPr>
+          <a:xfrm>
+            <a:off x="11375136" y="1684782"/>
+            <a:ext cx="822960" cy="173736"/>
+          </a:xfrm>
+          <a:prstGeom prst="roundRect">
+            <a:avLst>
+              <a:gd name="adj" fmla="val 15789"/>
+            </a:avLst>
+          </a:prstGeom>
+          <a:solidFill>
+            <a:srgbClr val="1558A8"/>
+          </a:solidFill>
+          <a:ln w="12700">
+            <a:solidFill>
+              <a:srgbClr val="1558A8"/>
+            </a:solidFill>
+            <a:prstDash val="solid"/>
+          </a:ln>
+        </p:spPr>
+      </p:sp>
+      <p:sp>
+        <p:nvSpPr>
+          <p:cNvPr id="47" name="Text 45"/>
+          <p:cNvSpPr/>
+          <p:nvPr/>
+        </p:nvSpPr>
+        <p:spPr>
+          <a:xfrm>
+            <a:off x="11375136" y="1684782"/>
+            <a:ext cx="822960" cy="173736"/>
+          </a:xfrm>
+          <a:prstGeom prst="rect">
+            <a:avLst/>
+          </a:prstGeom>
+          <a:noFill/>
+          <a:ln/>
+        </p:spPr>
+        <p:txBody>
+          <a:bodyPr wrap="square" lIns="0" tIns="0" rIns="0" bIns="0" rtlCol="0" anchor="ctr"/>
+          <a:lstStyle/>
+          <a:p>
+            <a:pPr algn="ctr" indent="0" marL="0">
+              <a:buNone/>
+            </a:pPr>
+            <a:r>
+              <a:rPr lang="en-US" sz="650" b="1" dirty="0">
+                <a:solidFill>
+                  <a:srgbClr val="FFFFFF"/>
+                </a:solidFill>
+              </a:rPr>
+              <a:t>In Progress</a:t>
+            </a:r>
+            <a:endParaRPr lang="en-US" sz="650" dirty="0"/>
+          </a:p>
+        </p:txBody>
+      </p:sp>
+      <p:sp>
+        <p:nvSpPr>
+          <p:cNvPr id="48" name="Shape 46"/>
+          <p:cNvSpPr/>
+          <p:nvPr/>
+        </p:nvSpPr>
+        <p:spPr>
+          <a:xfrm>
+            <a:off x="6236208" y="2103120"/>
+            <a:ext cx="6016752" cy="662940"/>
+          </a:xfrm>
+          <a:prstGeom prst="rect">
+            <a:avLst/>
+          </a:prstGeom>
+          <a:solidFill>
+            <a:srgbClr val="FFFFFF"/>
+          </a:solidFill>
+          <a:ln w="3175">
+            <a:solidFill>
+              <a:srgbClr val="E5E7EB"/>
+            </a:solidFill>
+            <a:prstDash val="solid"/>
+          </a:ln>
+        </p:spPr>
+      </p:sp>
+      <p:sp>
+        <p:nvSpPr>
+          <p:cNvPr id="49" name="Shape 47"/>
+          <p:cNvSpPr/>
+          <p:nvPr/>
+        </p:nvSpPr>
+        <p:spPr>
+          <a:xfrm>
+            <a:off x="6236208" y="2103120"/>
+            <a:ext cx="6016752" cy="0"/>
+          </a:xfrm>
+          <a:prstGeom prst="line">
+            <a:avLst/>
+          </a:prstGeom>
+          <a:noFill/>
+          <a:ln w="6350">
+            <a:solidFill>
+              <a:srgbClr val="E5E7EB"/>
+            </a:solidFill>
+            <a:prstDash val="solid"/>
+          </a:ln>
+        </p:spPr>
+      </p:sp>
+      <p:sp>
+        <p:nvSpPr>
+          <p:cNvPr id="50" name="Text 48"/>
+          <p:cNvSpPr/>
+          <p:nvPr/>
+        </p:nvSpPr>
+        <p:spPr>
+          <a:xfrm>
+            <a:off x="6309360" y="2121408"/>
+            <a:ext cx="777240" cy="626364"/>
+          </a:xfrm>
+          <a:prstGeom prst="rect">
+            <a:avLst/>
+          </a:prstGeom>
+          <a:noFill/>
+          <a:ln/>
+        </p:spPr>
+        <p:txBody>
+          <a:bodyPr wrap="square" lIns="0" tIns="0" rIns="0" bIns="0" rtlCol="0" anchor="ctr"/>
+          <a:lstStyle/>
+          <a:p>
+            <a:pPr indent="0" marL="0">
+              <a:buNone/>
+            </a:pPr>
+            <a:r>
+              <a:rPr lang="en-US" sz="750" b="1" dirty="0">
+                <a:solidFill>
+                  <a:srgbClr val="1F2937"/>
+                </a:solidFill>
+              </a:rPr>
+              <a:t>New Website</a:t>
+            </a:r>
+            <a:endParaRPr lang="en-US" sz="750" dirty="0"/>
+          </a:p>
+        </p:txBody>
+      </p:sp>
+      <p:sp>
+        <p:nvSpPr>
+          <p:cNvPr id="51" name="Text 49"/>
+          <p:cNvSpPr/>
+          <p:nvPr/>
+        </p:nvSpPr>
+        <p:spPr>
+          <a:xfrm>
+            <a:off x="7104888" y="2130552"/>
+            <a:ext cx="4178808" cy="608076"/>
+          </a:xfrm>
+          <a:prstGeom prst="rect">
+            <a:avLst/>
+          </a:prstGeom>
+          <a:noFill/>
+          <a:ln/>
+        </p:spPr>
+        <p:txBody>
+          <a:bodyPr wrap="square" lIns="0" tIns="0" rIns="0" bIns="0" rtlCol="0" anchor="t"/>
+          <a:lstStyle/>
+          <a:p>
+            <a:pPr indent="0" marL="0">
+              <a:buNone/>
+            </a:pPr>
+            <a:r>
+              <a:rPr lang="en-US" sz="650" dirty="0">
+                <a:solidFill>
+                  <a:srgbClr val="374151"/>
+                </a:solidFill>
+              </a:rPr>
+              <a:t>Prototyping Auth0/Cleeng login, building out CMS widget support, and standing up Adobe Pass provider management. Carousel page engine and backend refresh API delivered.</a:t>
+            </a:r>
+            <a:endParaRPr lang="en-US" sz="650" dirty="0"/>
+          </a:p>
+        </p:txBody>
+      </p:sp>
+      <p:sp>
+        <p:nvSpPr>
+          <p:cNvPr id="52" name="Shape 50"/>
+          <p:cNvSpPr/>
+          <p:nvPr/>
+        </p:nvSpPr>
+        <p:spPr>
+          <a:xfrm>
+            <a:off x="11375136" y="2347722"/>
+            <a:ext cx="822960" cy="173736"/>
+          </a:xfrm>
+          <a:prstGeom prst="roundRect">
+            <a:avLst>
+              <a:gd name="adj" fmla="val 15789"/>
+            </a:avLst>
+          </a:prstGeom>
+          <a:solidFill>
+            <a:srgbClr val="1558A8"/>
+          </a:solidFill>
+          <a:ln w="12700">
+            <a:solidFill>
+              <a:srgbClr val="1558A8"/>
+            </a:solidFill>
+            <a:prstDash val="solid"/>
+          </a:ln>
+        </p:spPr>
+      </p:sp>
+      <p:sp>
+        <p:nvSpPr>
+          <p:cNvPr id="53" name="Text 51"/>
+          <p:cNvSpPr/>
+          <p:nvPr/>
+        </p:nvSpPr>
+        <p:spPr>
+          <a:xfrm>
+            <a:off x="11375136" y="2347722"/>
+            <a:ext cx="822960" cy="173736"/>
+          </a:xfrm>
+          <a:prstGeom prst="rect">
+            <a:avLst/>
+          </a:prstGeom>
+          <a:noFill/>
+          <a:ln/>
+        </p:spPr>
+        <p:txBody>
+          <a:bodyPr wrap="square" lIns="0" tIns="0" rIns="0" bIns="0" rtlCol="0" anchor="ctr"/>
+          <a:lstStyle/>
+          <a:p>
+            <a:pPr algn="ctr" indent="0" marL="0">
+              <a:buNone/>
+            </a:pPr>
+            <a:r>
+              <a:rPr lang="en-US" sz="650" b="1" dirty="0">
+                <a:solidFill>
+                  <a:srgbClr val="FFFFFF"/>
+                </a:solidFill>
+              </a:rPr>
+              <a:t>In Progress</a:t>
+            </a:r>
+            <a:endParaRPr lang="en-US" sz="650" dirty="0"/>
+          </a:p>
+        </p:txBody>
+      </p:sp>
+      <p:sp>
+        <p:nvSpPr>
+          <p:cNvPr id="54" name="Shape 52"/>
+          <p:cNvSpPr/>
+          <p:nvPr/>
+        </p:nvSpPr>
+        <p:spPr>
+          <a:xfrm>
+            <a:off x="6236208" y="2766060"/>
+            <a:ext cx="6016752" cy="0"/>
+          </a:xfrm>
+          <a:prstGeom prst="line">
+            <a:avLst/>
+          </a:prstGeom>
+          <a:noFill/>
+          <a:ln w="6350">
+            <a:solidFill>
+              <a:srgbClr val="E5E7EB"/>
+            </a:solidFill>
+            <a:prstDash val="solid"/>
+          </a:ln>
+        </p:spPr>
+      </p:sp>
+      <p:sp>
+        <p:nvSpPr>
+          <p:cNvPr id="55" name="Text 53"/>
+          <p:cNvSpPr/>
+          <p:nvPr/>
+        </p:nvSpPr>
+        <p:spPr>
+          <a:xfrm>
+            <a:off x="6309360" y="2784348"/>
+            <a:ext cx="777240" cy="626364"/>
+          </a:xfrm>
+          <a:prstGeom prst="rect">
+            <a:avLst/>
+          </a:prstGeom>
+          <a:noFill/>
+          <a:ln/>
+        </p:spPr>
+        <p:txBody>
+          <a:bodyPr wrap="square" lIns="0" tIns="0" rIns="0" bIns="0" rtlCol="0" anchor="ctr"/>
+          <a:lstStyle/>
+          <a:p>
+            <a:pPr indent="0" marL="0">
+              <a:buNone/>
+            </a:pPr>
+            <a:r>
+              <a:rPr lang="en-US" sz="750" b="1" dirty="0">
+                <a:solidFill>
+                  <a:srgbClr val="1F2937"/>
+                </a:solidFill>
+              </a:rPr>
+              <a:t>Hosting</a:t>
+            </a:r>
+            <a:endParaRPr lang="en-US" sz="750" dirty="0"/>
+          </a:p>
+        </p:txBody>
+      </p:sp>
+      <p:sp>
+        <p:nvSpPr>
+          <p:cNvPr id="56" name="Text 54"/>
+          <p:cNvSpPr/>
+          <p:nvPr/>
+        </p:nvSpPr>
+        <p:spPr>
+          <a:xfrm>
+            <a:off x="7104888" y="2793492"/>
+            <a:ext cx="4178808" cy="608076"/>
+          </a:xfrm>
+          <a:prstGeom prst="rect">
+            <a:avLst/>
+          </a:prstGeom>
+          <a:noFill/>
+          <a:ln/>
+        </p:spPr>
+        <p:txBody>
+          <a:bodyPr wrap="square" lIns="0" tIns="0" rIns="0" bIns="0" rtlCol="0" anchor="t"/>
+          <a:lstStyle/>
+          <a:p>
+            <a:pPr indent="0" marL="0">
+              <a:buNone/>
+            </a:pPr>
+            <a:r>
+              <a:rPr lang="en-US" sz="650" dirty="0">
+                <a:solidFill>
+                  <a:srgbClr val="374151"/>
+                </a:solidFill>
+              </a:rPr>
+              <a:t>Moving control of Tennis Channel's website hosting setup in-house — same approach already used successfully for Tennis.com — giving us more control ahead of launch.</a:t>
+            </a:r>
+            <a:endParaRPr lang="en-US" sz="650" dirty="0"/>
+          </a:p>
+        </p:txBody>
+      </p:sp>
+      <p:sp>
+        <p:nvSpPr>
+          <p:cNvPr id="57" name="Shape 55"/>
+          <p:cNvSpPr/>
+          <p:nvPr/>
+        </p:nvSpPr>
+        <p:spPr>
+          <a:xfrm>
+            <a:off x="11375136" y="3010662"/>
+            <a:ext cx="822960" cy="173736"/>
+          </a:xfrm>
+          <a:prstGeom prst="roundRect">
+            <a:avLst>
+              <a:gd name="adj" fmla="val 15789"/>
+            </a:avLst>
+          </a:prstGeom>
+          <a:solidFill>
+            <a:srgbClr val="1558A8"/>
+          </a:solidFill>
+          <a:ln w="12700">
+            <a:solidFill>
+              <a:srgbClr val="1558A8"/>
+            </a:solidFill>
+            <a:prstDash val="solid"/>
+          </a:ln>
+        </p:spPr>
+      </p:sp>
+      <p:sp>
+        <p:nvSpPr>
+          <p:cNvPr id="58" name="Text 56"/>
+          <p:cNvSpPr/>
+          <p:nvPr/>
+        </p:nvSpPr>
+        <p:spPr>
+          <a:xfrm>
+            <a:off x="11375136" y="3010662"/>
+            <a:ext cx="822960" cy="173736"/>
+          </a:xfrm>
+          <a:prstGeom prst="rect">
+            <a:avLst/>
+          </a:prstGeom>
+          <a:noFill/>
+          <a:ln/>
+        </p:spPr>
+        <p:txBody>
+          <a:bodyPr wrap="square" lIns="0" tIns="0" rIns="0" bIns="0" rtlCol="0" anchor="ctr"/>
+          <a:lstStyle/>
+          <a:p>
+            <a:pPr algn="ctr" indent="0" marL="0">
+              <a:buNone/>
+            </a:pPr>
+            <a:r>
+              <a:rPr lang="en-US" sz="650" b="1" dirty="0">
+                <a:solidFill>
+                  <a:srgbClr val="FFFFFF"/>
+                </a:solidFill>
+              </a:rPr>
+              <a:t>In Progress</a:t>
+            </a:r>
+            <a:endParaRPr lang="en-US" sz="650" dirty="0"/>
+          </a:p>
+        </p:txBody>
+      </p:sp>
+      <p:sp>
+        <p:nvSpPr>
+          <p:cNvPr id="59" name="Shape 57"/>
+          <p:cNvSpPr/>
+          <p:nvPr/>
+        </p:nvSpPr>
+        <p:spPr>
+          <a:xfrm>
+            <a:off x="91440" y="3502152"/>
+            <a:ext cx="6016752" cy="3749040"/>
+          </a:xfrm>
+          <a:prstGeom prst="rect">
+            <a:avLst/>
+          </a:prstGeom>
+          <a:solidFill>
+            <a:srgbClr val="FAFBFC"/>
+          </a:solidFill>
+          <a:ln w="9525">
+            <a:solidFill>
+              <a:srgbClr val="D1D5DB"/>
+            </a:solidFill>
+            <a:prstDash val="solid"/>
+          </a:ln>
+        </p:spPr>
+      </p:sp>
+      <p:sp>
+        <p:nvSpPr>
+          <p:cNvPr id="60" name="Shape 58"/>
+          <p:cNvSpPr/>
+          <p:nvPr/>
+        </p:nvSpPr>
+        <p:spPr>
+          <a:xfrm>
+            <a:off x="91440" y="3502152"/>
+            <a:ext cx="6016752" cy="274320"/>
+          </a:xfrm>
+          <a:prstGeom prst="rect">
+            <a:avLst/>
+          </a:prstGeom>
+          <a:solidFill>
+            <a:srgbClr val="8ED973"/>
+          </a:solidFill>
+          <a:ln w="12700">
+            <a:solidFill>
+              <a:srgbClr val="8ED973"/>
+            </a:solidFill>
+            <a:prstDash val="solid"/>
+          </a:ln>
+        </p:spPr>
+      </p:sp>
+      <p:sp>
+        <p:nvSpPr>
+          <p:cNvPr id="61" name="Text 59"/>
+          <p:cNvSpPr/>
+          <p:nvPr/>
+        </p:nvSpPr>
+        <p:spPr>
+          <a:xfrm>
+            <a:off x="201168" y="3502152"/>
+            <a:ext cx="5852160" cy="274320"/>
+          </a:xfrm>
+          <a:prstGeom prst="rect">
+            <a:avLst/>
+          </a:prstGeom>
+          <a:noFill/>
+          <a:ln/>
+        </p:spPr>
+        <p:txBody>
+          <a:bodyPr wrap="square" lIns="0" tIns="0" rIns="0" bIns="0" rtlCol="0" anchor="ctr"/>
+          <a:lstStyle/>
+          <a:p>
+            <a:pPr algn="l" indent="0" marL="0">
+              <a:buNone/>
+            </a:pPr>
+            <a:r>
+              <a:rPr lang="en-US" sz="900" b="1" dirty="0">
+                <a:solidFill>
+                  <a:srgbClr val="000000"/>
+                </a:solidFill>
+              </a:rPr>
+              <a:t>Partner / Platform Integrations</a:t>
+            </a:r>
+            <a:endParaRPr lang="en-US" sz="900" dirty="0"/>
+          </a:p>
+        </p:txBody>
+      </p:sp>
+      <p:sp>
+        <p:nvSpPr>
+          <p:cNvPr id="62" name="Shape 60"/>
+          <p:cNvSpPr/>
+          <p:nvPr/>
+        </p:nvSpPr>
+        <p:spPr>
+          <a:xfrm>
+            <a:off x="91440" y="3776472"/>
+            <a:ext cx="6016752" cy="1158240"/>
+          </a:xfrm>
+          <a:prstGeom prst="rect">
+            <a:avLst/>
+          </a:prstGeom>
+          <a:solidFill>
+            <a:srgbClr val="FFFFFF"/>
+          </a:solidFill>
+          <a:ln w="3175">
+            <a:solidFill>
+              <a:srgbClr val="E5E7EB"/>
+            </a:solidFill>
+            <a:prstDash val="solid"/>
+          </a:ln>
+        </p:spPr>
+      </p:sp>
+      <p:sp>
+        <p:nvSpPr>
+          <p:cNvPr id="63" name="Text 61"/>
+          <p:cNvSpPr/>
+          <p:nvPr/>
+        </p:nvSpPr>
+        <p:spPr>
+          <a:xfrm>
+            <a:off x="164592" y="3794760"/>
+            <a:ext cx="777240" cy="1121664"/>
+          </a:xfrm>
+          <a:prstGeom prst="rect">
+            <a:avLst/>
+          </a:prstGeom>
+          <a:noFill/>
+          <a:ln/>
+        </p:spPr>
+        <p:txBody>
+          <a:bodyPr wrap="square" lIns="0" tIns="0" rIns="0" bIns="0" rtlCol="0" anchor="ctr"/>
+          <a:lstStyle/>
+          <a:p>
+            <a:pPr indent="0" marL="0">
+              <a:buNone/>
+            </a:pPr>
+            <a:r>
+              <a:rPr lang="en-US" sz="750" b="1" dirty="0">
+                <a:solidFill>
+                  <a:srgbClr val="1F2937"/>
+                </a:solidFill>
+              </a:rPr>
+              <a:t>MVPD</a:t>
+            </a:r>
+            <a:endParaRPr lang="en-US" sz="750" dirty="0"/>
+          </a:p>
+        </p:txBody>
+      </p:sp>
+      <p:sp>
+        <p:nvSpPr>
+          <p:cNvPr id="64" name="Text 62"/>
+          <p:cNvSpPr/>
+          <p:nvPr/>
+        </p:nvSpPr>
+        <p:spPr>
+          <a:xfrm>
+            <a:off x="960120" y="3803904"/>
+            <a:ext cx="4178808" cy="1103376"/>
+          </a:xfrm>
+          <a:prstGeom prst="rect">
+            <a:avLst/>
+          </a:prstGeom>
+          <a:noFill/>
+          <a:ln/>
+        </p:spPr>
+        <p:txBody>
+          <a:bodyPr wrap="square" lIns="0" tIns="0" rIns="0" bIns="0" rtlCol="0" anchor="t"/>
+          <a:lstStyle/>
+          <a:p>
+            <a:pPr indent="0" marL="0">
+              <a:buNone/>
+            </a:pPr>
+            <a:r>
+              <a:rPr lang="en-US" sz="650" dirty="0">
+                <a:solidFill>
+                  <a:srgbClr val="374151"/>
+                </a:solidFill>
+              </a:rPr>
+              <a:t>Adobe Pass integration underway for MVPD access; CMS-based provider management being brought into the web app, with basic prototypes built and currently hardcoded to DirecTV for testing.</a:t>
+            </a:r>
+            <a:endParaRPr lang="en-US" sz="650" dirty="0"/>
+          </a:p>
+        </p:txBody>
+      </p:sp>
+      <p:sp>
+        <p:nvSpPr>
+          <p:cNvPr id="65" name="Shape 63"/>
+          <p:cNvSpPr/>
+          <p:nvPr/>
+        </p:nvSpPr>
+        <p:spPr>
+          <a:xfrm>
+            <a:off x="5230368" y="4268724"/>
+            <a:ext cx="822960" cy="173736"/>
+          </a:xfrm>
+          <a:prstGeom prst="roundRect">
+            <a:avLst>
+              <a:gd name="adj" fmla="val 15789"/>
+            </a:avLst>
+          </a:prstGeom>
+          <a:solidFill>
+            <a:srgbClr val="1558A8"/>
+          </a:solidFill>
+          <a:ln w="12700">
+            <a:solidFill>
+              <a:srgbClr val="1558A8"/>
+            </a:solidFill>
+            <a:prstDash val="solid"/>
+          </a:ln>
+        </p:spPr>
+      </p:sp>
+      <p:sp>
+        <p:nvSpPr>
+          <p:cNvPr id="66" name="Text 64"/>
+          <p:cNvSpPr/>
+          <p:nvPr/>
+        </p:nvSpPr>
+        <p:spPr>
+          <a:xfrm>
+            <a:off x="5230368" y="4268724"/>
+            <a:ext cx="822960" cy="173736"/>
+          </a:xfrm>
+          <a:prstGeom prst="rect">
+            <a:avLst/>
+          </a:prstGeom>
+          <a:noFill/>
+          <a:ln/>
+        </p:spPr>
+        <p:txBody>
+          <a:bodyPr wrap="square" lIns="0" tIns="0" rIns="0" bIns="0" rtlCol="0" anchor="ctr"/>
+          <a:lstStyle/>
+          <a:p>
+            <a:pPr algn="ctr" indent="0" marL="0">
+              <a:buNone/>
+            </a:pPr>
+            <a:r>
+              <a:rPr lang="en-US" sz="650" b="1" dirty="0">
+                <a:solidFill>
+                  <a:srgbClr val="FFFFFF"/>
+                </a:solidFill>
+              </a:rPr>
+              <a:t>In Progress</a:t>
+            </a:r>
+            <a:endParaRPr lang="en-US" sz="650" dirty="0"/>
+          </a:p>
+        </p:txBody>
+      </p:sp>
+      <p:sp>
+        <p:nvSpPr>
+          <p:cNvPr id="67" name="Shape 65"/>
+          <p:cNvSpPr/>
+          <p:nvPr/>
+        </p:nvSpPr>
+        <p:spPr>
+          <a:xfrm>
+            <a:off x="91440" y="4934712"/>
+            <a:ext cx="6016752" cy="0"/>
+          </a:xfrm>
+          <a:prstGeom prst="line">
+            <a:avLst/>
+          </a:prstGeom>
+          <a:noFill/>
+          <a:ln w="6350">
+            <a:solidFill>
+              <a:srgbClr val="E5E7EB"/>
+            </a:solidFill>
+            <a:prstDash val="solid"/>
+          </a:ln>
+        </p:spPr>
+      </p:sp>
+      <p:sp>
+        <p:nvSpPr>
+          <p:cNvPr id="68" name="Text 66"/>
+          <p:cNvSpPr/>
+          <p:nvPr/>
+        </p:nvSpPr>
+        <p:spPr>
+          <a:xfrm>
+            <a:off x="164592" y="4953000"/>
+            <a:ext cx="777240" cy="1121664"/>
+          </a:xfrm>
+          <a:prstGeom prst="rect">
+            <a:avLst/>
+          </a:prstGeom>
+          <a:noFill/>
+          <a:ln/>
+        </p:spPr>
+        <p:txBody>
+          <a:bodyPr wrap="square" lIns="0" tIns="0" rIns="0" bIns="0" rtlCol="0" anchor="ctr"/>
+          <a:lstStyle/>
+          <a:p>
+            <a:pPr indent="0" marL="0">
+              <a:buNone/>
+            </a:pPr>
+            <a:r>
+              <a:rPr lang="en-US" sz="750" b="1" dirty="0">
+                <a:solidFill>
+                  <a:srgbClr val="1F2937"/>
+                </a:solidFill>
+              </a:rPr>
+              <a:t>DRM</a:t>
+            </a:r>
+            <a:endParaRPr lang="en-US" sz="750" dirty="0"/>
+          </a:p>
+        </p:txBody>
+      </p:sp>
+      <p:sp>
+        <p:nvSpPr>
+          <p:cNvPr id="69" name="Text 67"/>
+          <p:cNvSpPr/>
+          <p:nvPr/>
+        </p:nvSpPr>
+        <p:spPr>
+          <a:xfrm>
+            <a:off x="960120" y="4962144"/>
+            <a:ext cx="4178808" cy="1103376"/>
+          </a:xfrm>
+          <a:prstGeom prst="rect">
+            <a:avLst/>
+          </a:prstGeom>
+          <a:noFill/>
+          <a:ln/>
+        </p:spPr>
+        <p:txBody>
+          <a:bodyPr wrap="square" lIns="0" tIns="0" rIns="0" bIns="0" rtlCol="0" anchor="t"/>
+          <a:lstStyle/>
+          <a:p>
+            <a:pPr indent="0" marL="0">
+              <a:buNone/>
+            </a:pPr>
+            <a:r>
+              <a:rPr lang="en-US" sz="650" dirty="0">
+                <a:solidFill>
+                  <a:srgbClr val="374151"/>
+                </a:solidFill>
+              </a:rPr>
+              <a:t>Dedicated DRM auth service launched, with license flows stubbed for FairPlay, Widevine, and PlayReady, and handed off to Amagi for EZDRM integration testing.</a:t>
+            </a:r>
+            <a:endParaRPr lang="en-US" sz="650" dirty="0"/>
+          </a:p>
+        </p:txBody>
+      </p:sp>
+      <p:sp>
+        <p:nvSpPr>
+          <p:cNvPr id="70" name="Shape 68"/>
+          <p:cNvSpPr/>
+          <p:nvPr/>
+        </p:nvSpPr>
+        <p:spPr>
+          <a:xfrm>
+            <a:off x="5230368" y="5426964"/>
+            <a:ext cx="822960" cy="173736"/>
+          </a:xfrm>
+          <a:prstGeom prst="roundRect">
+            <a:avLst>
+              <a:gd name="adj" fmla="val 15789"/>
+            </a:avLst>
+          </a:prstGeom>
+          <a:solidFill>
+            <a:srgbClr val="1558A8"/>
+          </a:solidFill>
+          <a:ln w="12700">
+            <a:solidFill>
+              <a:srgbClr val="1558A8"/>
+            </a:solidFill>
+            <a:prstDash val="solid"/>
+          </a:ln>
+        </p:spPr>
+      </p:sp>
+      <p:sp>
+        <p:nvSpPr>
+          <p:cNvPr id="71" name="Text 69"/>
+          <p:cNvSpPr/>
+          <p:nvPr/>
+        </p:nvSpPr>
+        <p:spPr>
+          <a:xfrm>
+            <a:off x="5230368" y="5426964"/>
+            <a:ext cx="822960" cy="173736"/>
+          </a:xfrm>
+          <a:prstGeom prst="rect">
+            <a:avLst/>
+          </a:prstGeom>
+          <a:noFill/>
+          <a:ln/>
+        </p:spPr>
+        <p:txBody>
+          <a:bodyPr wrap="square" lIns="0" tIns="0" rIns="0" bIns="0" rtlCol="0" anchor="ctr"/>
+          <a:lstStyle/>
+          <a:p>
+            <a:pPr algn="ctr" indent="0" marL="0">
+              <a:buNone/>
+            </a:pPr>
+            <a:r>
+              <a:rPr lang="en-US" sz="650" b="1" dirty="0">
+                <a:solidFill>
+                  <a:srgbClr val="FFFFFF"/>
+                </a:solidFill>
+              </a:rPr>
+              <a:t>In Progress</a:t>
+            </a:r>
+            <a:endParaRPr lang="en-US" sz="650" dirty="0"/>
+          </a:p>
+        </p:txBody>
+      </p:sp>
+      <p:sp>
+        <p:nvSpPr>
+          <p:cNvPr id="72" name="Shape 70"/>
+          <p:cNvSpPr/>
+          <p:nvPr/>
+        </p:nvSpPr>
+        <p:spPr>
+          <a:xfrm>
+            <a:off x="91440" y="6092952"/>
+            <a:ext cx="6016752" cy="1158240"/>
+          </a:xfrm>
+          <a:prstGeom prst="rect">
+            <a:avLst/>
+          </a:prstGeom>
+          <a:solidFill>
+            <a:srgbClr val="FFFFFF"/>
+          </a:solidFill>
+          <a:ln w="3175">
+            <a:solidFill>
+              <a:srgbClr val="E5E7EB"/>
+            </a:solidFill>
+            <a:prstDash val="solid"/>
+          </a:ln>
+        </p:spPr>
+      </p:sp>
+      <p:sp>
+        <p:nvSpPr>
+          <p:cNvPr id="73" name="Shape 71"/>
+          <p:cNvSpPr/>
+          <p:nvPr/>
+        </p:nvSpPr>
+        <p:spPr>
+          <a:xfrm>
+            <a:off x="91440" y="6092952"/>
+            <a:ext cx="6016752" cy="0"/>
+          </a:xfrm>
+          <a:prstGeom prst="line">
+            <a:avLst/>
+          </a:prstGeom>
+          <a:noFill/>
+          <a:ln w="6350">
+            <a:solidFill>
+              <a:srgbClr val="E5E7EB"/>
+            </a:solidFill>
+            <a:prstDash val="solid"/>
+          </a:ln>
+        </p:spPr>
+      </p:sp>
+      <p:sp>
+        <p:nvSpPr>
+          <p:cNvPr id="74" name="Text 72"/>
+          <p:cNvSpPr/>
+          <p:nvPr/>
+        </p:nvSpPr>
+        <p:spPr>
+          <a:xfrm>
+            <a:off x="164592" y="6111240"/>
+            <a:ext cx="777240" cy="1121664"/>
+          </a:xfrm>
+          <a:prstGeom prst="rect">
+            <a:avLst/>
+          </a:prstGeom>
+          <a:noFill/>
+          <a:ln/>
+        </p:spPr>
+        <p:txBody>
+          <a:bodyPr wrap="square" lIns="0" tIns="0" rIns="0" bIns="0" rtlCol="0" anchor="ctr"/>
+          <a:lstStyle/>
+          <a:p>
+            <a:pPr indent="0" marL="0">
+              <a:buNone/>
+            </a:pPr>
+            <a:r>
+              <a:rPr lang="en-US" sz="750" b="1" dirty="0">
+                <a:solidFill>
+                  <a:srgbClr val="1F2937"/>
+                </a:solidFill>
+              </a:rPr>
+              <a:t>FOXXUM</a:t>
+            </a:r>
+            <a:endParaRPr lang="en-US" sz="750" dirty="0"/>
+          </a:p>
+        </p:txBody>
+      </p:sp>
+      <p:sp>
+        <p:nvSpPr>
+          <p:cNvPr id="75" name="Text 73"/>
+          <p:cNvSpPr/>
+          <p:nvPr/>
+        </p:nvSpPr>
+        <p:spPr>
+          <a:xfrm>
+            <a:off x="960120" y="6120384"/>
+            <a:ext cx="4178808" cy="1103376"/>
+          </a:xfrm>
+          <a:prstGeom prst="rect">
+            <a:avLst/>
+          </a:prstGeom>
+          <a:noFill/>
+          <a:ln/>
+        </p:spPr>
+        <p:txBody>
+          <a:bodyPr wrap="square" lIns="0" tIns="0" rIns="0" bIns="0" rtlCol="0" anchor="t"/>
+          <a:lstStyle/>
+          <a:p>
+            <a:pPr indent="0" marL="0">
+              <a:buNone/>
+            </a:pPr>
+            <a:r>
+              <a:rPr lang="en-US" sz="650" dirty="0">
+                <a:solidFill>
+                  <a:srgbClr val="374151"/>
+                </a:solidFill>
+              </a:rPr>
+              <a:t>Integration packet produced and workshop collaboration ongoing with Foxxum; no schema-stability specifics called out in this update.</a:t>
+            </a:r>
+            <a:endParaRPr lang="en-US" sz="650" dirty="0"/>
+          </a:p>
+        </p:txBody>
+      </p:sp>
+      <p:sp>
+        <p:nvSpPr>
+          <p:cNvPr id="76" name="Shape 74"/>
+          <p:cNvSpPr/>
+          <p:nvPr/>
+        </p:nvSpPr>
+        <p:spPr>
+          <a:xfrm>
+            <a:off x="5230368" y="6585204"/>
+            <a:ext cx="822960" cy="173736"/>
+          </a:xfrm>
+          <a:prstGeom prst="roundRect">
+            <a:avLst>
+              <a:gd name="adj" fmla="val 15789"/>
+            </a:avLst>
+          </a:prstGeom>
+          <a:solidFill>
+            <a:srgbClr val="1558A8"/>
+          </a:solidFill>
+          <a:ln w="12700">
+            <a:solidFill>
+              <a:srgbClr val="1558A8"/>
+            </a:solidFill>
+            <a:prstDash val="solid"/>
+          </a:ln>
+        </p:spPr>
+      </p:sp>
+      <p:sp>
+        <p:nvSpPr>
+          <p:cNvPr id="77" name="Text 75"/>
+          <p:cNvSpPr/>
+          <p:nvPr/>
+        </p:nvSpPr>
+        <p:spPr>
+          <a:xfrm>
+            <a:off x="5230368" y="6585204"/>
+            <a:ext cx="822960" cy="173736"/>
+          </a:xfrm>
+          <a:prstGeom prst="rect">
+            <a:avLst/>
+          </a:prstGeom>
+          <a:noFill/>
+          <a:ln/>
+        </p:spPr>
+        <p:txBody>
+          <a:bodyPr wrap="square" lIns="0" tIns="0" rIns="0" bIns="0" rtlCol="0" anchor="ctr"/>
+          <a:lstStyle/>
+          <a:p>
+            <a:pPr algn="ctr" indent="0" marL="0">
+              <a:buNone/>
+            </a:pPr>
+            <a:r>
+              <a:rPr lang="en-US" sz="650" b="1" dirty="0">
+                <a:solidFill>
+                  <a:srgbClr val="FFFFFF"/>
+                </a:solidFill>
+              </a:rPr>
+              <a:t>In Progress</a:t>
+            </a:r>
+            <a:endParaRPr lang="en-US" sz="650" dirty="0"/>
+          </a:p>
+        </p:txBody>
+      </p:sp>
+      <p:sp>
+        <p:nvSpPr>
+          <p:cNvPr id="78" name="Shape 76"/>
+          <p:cNvSpPr/>
+          <p:nvPr/>
+        </p:nvSpPr>
+        <p:spPr>
+          <a:xfrm>
+            <a:off x="6236208" y="3502152"/>
+            <a:ext cx="6016752" cy="3749040"/>
+          </a:xfrm>
+          <a:prstGeom prst="rect">
+            <a:avLst/>
+          </a:prstGeom>
+          <a:solidFill>
+            <a:srgbClr val="FAFBFC"/>
+          </a:solidFill>
+          <a:ln w="9525">
+            <a:solidFill>
+              <a:srgbClr val="D1D5DB"/>
+            </a:solidFill>
+            <a:prstDash val="solid"/>
+          </a:ln>
+        </p:spPr>
+      </p:sp>
+      <p:sp>
+        <p:nvSpPr>
+          <p:cNvPr id="79" name="Shape 77"/>
+          <p:cNvSpPr/>
+          <p:nvPr/>
+        </p:nvSpPr>
+        <p:spPr>
+          <a:xfrm>
+            <a:off x="6236208" y="3502152"/>
+            <a:ext cx="6016752" cy="274320"/>
+          </a:xfrm>
+          <a:prstGeom prst="rect">
+            <a:avLst/>
+          </a:prstGeom>
+          <a:solidFill>
+            <a:srgbClr val="8ED973"/>
+          </a:solidFill>
+          <a:ln w="12700">
+            <a:solidFill>
+              <a:srgbClr val="8ED973"/>
+            </a:solidFill>
+            <a:prstDash val="solid"/>
+          </a:ln>
+        </p:spPr>
+      </p:sp>
+      <p:sp>
+        <p:nvSpPr>
+          <p:cNvPr id="80" name="Text 78"/>
+          <p:cNvSpPr/>
+          <p:nvPr/>
+        </p:nvSpPr>
+        <p:spPr>
+          <a:xfrm>
+            <a:off x="6345936" y="3502152"/>
+            <a:ext cx="5852160" cy="274320"/>
+          </a:xfrm>
+          <a:prstGeom prst="rect">
+            <a:avLst/>
+          </a:prstGeom>
+          <a:noFill/>
+          <a:ln/>
+        </p:spPr>
+        <p:txBody>
+          <a:bodyPr wrap="square" lIns="0" tIns="0" rIns="0" bIns="0" rtlCol="0" anchor="ctr"/>
+          <a:lstStyle/>
+          <a:p>
+            <a:pPr algn="l" indent="0" marL="0">
+              <a:buNone/>
+            </a:pPr>
+            <a:r>
+              <a:rPr lang="en-US" sz="900" b="1" dirty="0">
+                <a:solidFill>
+                  <a:srgbClr val="000000"/>
+                </a:solidFill>
+              </a:rPr>
+              <a:t>Platform Capabilities</a:t>
+            </a:r>
+            <a:endParaRPr lang="en-US" sz="900" dirty="0"/>
+          </a:p>
+        </p:txBody>
+      </p:sp>
+      <p:sp>
+        <p:nvSpPr>
+          <p:cNvPr id="81" name="Shape 79"/>
+          <p:cNvSpPr/>
+          <p:nvPr/>
+        </p:nvSpPr>
+        <p:spPr>
+          <a:xfrm>
+            <a:off x="6236208" y="3776472"/>
+            <a:ext cx="6016752" cy="868680"/>
+          </a:xfrm>
+          <a:prstGeom prst="rect">
+            <a:avLst/>
+          </a:prstGeom>
+          <a:solidFill>
+            <a:srgbClr val="FFFFFF"/>
+          </a:solidFill>
+          <a:ln w="3175">
+            <a:solidFill>
+              <a:srgbClr val="E5E7EB"/>
+            </a:solidFill>
+            <a:prstDash val="solid"/>
+          </a:ln>
+        </p:spPr>
+      </p:sp>
+      <p:sp>
+        <p:nvSpPr>
+          <p:cNvPr id="82" name="Text 80"/>
+          <p:cNvSpPr/>
+          <p:nvPr/>
+        </p:nvSpPr>
+        <p:spPr>
+          <a:xfrm>
+            <a:off x="6309360" y="3794760"/>
+            <a:ext cx="777240" cy="832104"/>
+          </a:xfrm>
+          <a:prstGeom prst="rect">
+            <a:avLst/>
+          </a:prstGeom>
+          <a:noFill/>
+          <a:ln/>
+        </p:spPr>
+        <p:txBody>
+          <a:bodyPr wrap="square" lIns="0" tIns="0" rIns="0" bIns="0" rtlCol="0" anchor="ctr"/>
+          <a:lstStyle/>
+          <a:p>
+            <a:pPr indent="0" marL="0">
+              <a:buNone/>
+            </a:pPr>
+            <a:r>
+              <a:rPr lang="en-US" sz="750" b="1" dirty="0">
+                <a:solidFill>
+                  <a:srgbClr val="1F2937"/>
+                </a:solidFill>
+              </a:rPr>
+              <a:t>Platform POC</a:t>
+            </a:r>
+            <a:endParaRPr lang="en-US" sz="750" dirty="0"/>
+          </a:p>
+        </p:txBody>
+      </p:sp>
+      <p:sp>
+        <p:nvSpPr>
+          <p:cNvPr id="83" name="Text 81"/>
+          <p:cNvSpPr/>
+          <p:nvPr/>
+        </p:nvSpPr>
+        <p:spPr>
+          <a:xfrm>
+            <a:off x="7104888" y="3803904"/>
+            <a:ext cx="4178808" cy="813816"/>
+          </a:xfrm>
+          <a:prstGeom prst="rect">
+            <a:avLst/>
+          </a:prstGeom>
+          <a:noFill/>
+          <a:ln/>
+        </p:spPr>
+        <p:txBody>
+          <a:bodyPr wrap="square" lIns="0" tIns="0" rIns="0" bIns="0" rtlCol="0" anchor="t"/>
+          <a:lstStyle/>
+          <a:p>
+            <a:pPr indent="0" marL="0">
+              <a:buNone/>
+            </a:pPr>
+            <a:r>
+              <a:rPr lang="en-US" sz="650" dirty="0">
+                <a:solidFill>
+                  <a:srgbClr val="374151"/>
+                </a:solidFill>
+              </a:rPr>
+              <a:t>Mobile login gate placeholder: first login gate for anonymous viewers built with placeholder UI ahead of the real Auth0 flow. Entitlement simulator: mobile tool simulating any account state to test flows.</a:t>
+            </a:r>
+            <a:endParaRPr lang="en-US" sz="650" dirty="0"/>
+          </a:p>
+        </p:txBody>
+      </p:sp>
+      <p:sp>
+        <p:nvSpPr>
+          <p:cNvPr id="84" name="Shape 82"/>
+          <p:cNvSpPr/>
+          <p:nvPr/>
+        </p:nvSpPr>
+        <p:spPr>
+          <a:xfrm>
+            <a:off x="11375136" y="4123944"/>
+            <a:ext cx="822960" cy="173736"/>
+          </a:xfrm>
+          <a:prstGeom prst="roundRect">
+            <a:avLst>
+              <a:gd name="adj" fmla="val 15789"/>
+            </a:avLst>
+          </a:prstGeom>
+          <a:solidFill>
+            <a:srgbClr val="1558A8"/>
+          </a:solidFill>
+          <a:ln w="12700">
+            <a:solidFill>
+              <a:srgbClr val="1558A8"/>
+            </a:solidFill>
+            <a:prstDash val="solid"/>
+          </a:ln>
+        </p:spPr>
+      </p:sp>
+      <p:sp>
+        <p:nvSpPr>
+          <p:cNvPr id="85" name="Text 83"/>
+          <p:cNvSpPr/>
+          <p:nvPr/>
+        </p:nvSpPr>
+        <p:spPr>
+          <a:xfrm>
+            <a:off x="11375136" y="4123944"/>
+            <a:ext cx="822960" cy="173736"/>
+          </a:xfrm>
+          <a:prstGeom prst="rect">
+            <a:avLst/>
+          </a:prstGeom>
+          <a:noFill/>
+          <a:ln/>
+        </p:spPr>
+        <p:txBody>
+          <a:bodyPr wrap="square" lIns="0" tIns="0" rIns="0" bIns="0" rtlCol="0" anchor="ctr"/>
+          <a:lstStyle/>
+          <a:p>
+            <a:pPr algn="ctr" indent="0" marL="0">
+              <a:buNone/>
+            </a:pPr>
+            <a:r>
+              <a:rPr lang="en-US" sz="650" b="1" dirty="0">
+                <a:solidFill>
+                  <a:srgbClr val="FFFFFF"/>
+                </a:solidFill>
+              </a:rPr>
+              <a:t>In Progress</a:t>
+            </a:r>
+            <a:endParaRPr lang="en-US" sz="650" dirty="0"/>
+          </a:p>
+        </p:txBody>
+      </p:sp>
+      <p:sp>
+        <p:nvSpPr>
+          <p:cNvPr id="86" name="Shape 84"/>
+          <p:cNvSpPr/>
+          <p:nvPr/>
+        </p:nvSpPr>
+        <p:spPr>
+          <a:xfrm>
+            <a:off x="6236208" y="4645152"/>
+            <a:ext cx="6016752" cy="0"/>
+          </a:xfrm>
+          <a:prstGeom prst="line">
+            <a:avLst/>
+          </a:prstGeom>
+          <a:noFill/>
+          <a:ln w="6350">
+            <a:solidFill>
+              <a:srgbClr val="E5E7EB"/>
+            </a:solidFill>
+            <a:prstDash val="solid"/>
+          </a:ln>
+        </p:spPr>
+      </p:sp>
+      <p:sp>
+        <p:nvSpPr>
+          <p:cNvPr id="87" name="Text 85"/>
+          <p:cNvSpPr/>
+          <p:nvPr/>
+        </p:nvSpPr>
+        <p:spPr>
+          <a:xfrm>
+            <a:off x="6309360" y="4663440"/>
+            <a:ext cx="777240" cy="832104"/>
+          </a:xfrm>
+          <a:prstGeom prst="rect">
+            <a:avLst/>
+          </a:prstGeom>
+          <a:noFill/>
+          <a:ln/>
+        </p:spPr>
+        <p:txBody>
+          <a:bodyPr wrap="square" lIns="0" tIns="0" rIns="0" bIns="0" rtlCol="0" anchor="ctr"/>
+          <a:lstStyle/>
+          <a:p>
+            <a:pPr indent="0" marL="0">
+              <a:buNone/>
+            </a:pPr>
+            <a:r>
+              <a:rPr lang="en-US" sz="750" b="1" dirty="0">
+                <a:solidFill>
+                  <a:srgbClr val="1F2937"/>
+                </a:solidFill>
+              </a:rPr>
+              <a:t>UI/UX</a:t>
+            </a:r>
+            <a:endParaRPr lang="en-US" sz="750" dirty="0"/>
+          </a:p>
+        </p:txBody>
+      </p:sp>
+      <p:sp>
+        <p:nvSpPr>
+          <p:cNvPr id="88" name="Text 86"/>
+          <p:cNvSpPr/>
+          <p:nvPr/>
+        </p:nvSpPr>
+        <p:spPr>
+          <a:xfrm>
+            <a:off x="7104888" y="4672584"/>
+            <a:ext cx="4178808" cy="813816"/>
+          </a:xfrm>
+          <a:prstGeom prst="rect">
+            <a:avLst/>
+          </a:prstGeom>
+          <a:noFill/>
+          <a:ln/>
+        </p:spPr>
+        <p:txBody>
+          <a:bodyPr wrap="square" lIns="0" tIns="0" rIns="0" bIns="0" rtlCol="0" anchor="t"/>
+          <a:lstStyle/>
+          <a:p>
+            <a:pPr indent="0" marL="0">
+              <a:buNone/>
+            </a:pPr>
+            <a:r>
+              <a:rPr lang="en-US" sz="650" dirty="0">
+                <a:solidFill>
+                  <a:srgbClr val="374151"/>
+                </a:solidFill>
+              </a:rPr>
+              <a:t>Built the front-end foundation (design system, left sidebar navigation, footer, and page shell). Built the page engine and styled the merchandising carousels.</a:t>
+            </a:r>
+            <a:endParaRPr lang="en-US" sz="650" dirty="0"/>
+          </a:p>
+        </p:txBody>
+      </p:sp>
+      <p:sp>
+        <p:nvSpPr>
+          <p:cNvPr id="89" name="Shape 87"/>
+          <p:cNvSpPr/>
+          <p:nvPr/>
+        </p:nvSpPr>
+        <p:spPr>
+          <a:xfrm>
+            <a:off x="11375136" y="4992624"/>
+            <a:ext cx="822960" cy="173736"/>
+          </a:xfrm>
+          <a:prstGeom prst="roundRect">
+            <a:avLst>
+              <a:gd name="adj" fmla="val 15789"/>
+            </a:avLst>
+          </a:prstGeom>
+          <a:solidFill>
+            <a:srgbClr val="1558A8"/>
+          </a:solidFill>
+          <a:ln w="12700">
+            <a:solidFill>
+              <a:srgbClr val="1558A8"/>
+            </a:solidFill>
+            <a:prstDash val="solid"/>
+          </a:ln>
+        </p:spPr>
+      </p:sp>
+      <p:sp>
+        <p:nvSpPr>
+          <p:cNvPr id="90" name="Text 88"/>
+          <p:cNvSpPr/>
+          <p:nvPr/>
+        </p:nvSpPr>
+        <p:spPr>
+          <a:xfrm>
+            <a:off x="11375136" y="4992624"/>
+            <a:ext cx="822960" cy="173736"/>
+          </a:xfrm>
+          <a:prstGeom prst="rect">
+            <a:avLst/>
+          </a:prstGeom>
+          <a:noFill/>
+          <a:ln/>
+        </p:spPr>
+        <p:txBody>
+          <a:bodyPr wrap="square" lIns="0" tIns="0" rIns="0" bIns="0" rtlCol="0" anchor="ctr"/>
+          <a:lstStyle/>
+          <a:p>
+            <a:pPr algn="ctr" indent="0" marL="0">
+              <a:buNone/>
+            </a:pPr>
+            <a:r>
+              <a:rPr lang="en-US" sz="650" b="1" dirty="0">
+                <a:solidFill>
+                  <a:srgbClr val="FFFFFF"/>
+                </a:solidFill>
+              </a:rPr>
+              <a:t>In Progress</a:t>
+            </a:r>
+            <a:endParaRPr lang="en-US" sz="650" dirty="0"/>
+          </a:p>
+        </p:txBody>
+      </p:sp>
+      <p:sp>
+        <p:nvSpPr>
+          <p:cNvPr id="91" name="Shape 89"/>
+          <p:cNvSpPr/>
+          <p:nvPr/>
+        </p:nvSpPr>
+        <p:spPr>
+          <a:xfrm>
+            <a:off x="6236208" y="5513832"/>
+            <a:ext cx="6016752" cy="868680"/>
+          </a:xfrm>
+          <a:prstGeom prst="rect">
+            <a:avLst/>
+          </a:prstGeom>
+          <a:solidFill>
+            <a:srgbClr val="FFFFFF"/>
+          </a:solidFill>
+          <a:ln w="3175">
+            <a:solidFill>
+              <a:srgbClr val="E5E7EB"/>
+            </a:solidFill>
+            <a:prstDash val="solid"/>
+          </a:ln>
+        </p:spPr>
+      </p:sp>
+      <p:sp>
+        <p:nvSpPr>
+          <p:cNvPr id="92" name="Shape 90"/>
+          <p:cNvSpPr/>
+          <p:nvPr/>
+        </p:nvSpPr>
+        <p:spPr>
+          <a:xfrm>
+            <a:off x="6236208" y="5513832"/>
+            <a:ext cx="6016752" cy="0"/>
+          </a:xfrm>
+          <a:prstGeom prst="line">
+            <a:avLst/>
+          </a:prstGeom>
+          <a:noFill/>
+          <a:ln w="6350">
+            <a:solidFill>
+              <a:srgbClr val="E5E7EB"/>
+            </a:solidFill>
+            <a:prstDash val="solid"/>
+          </a:ln>
+        </p:spPr>
+      </p:sp>
+      <p:sp>
+        <p:nvSpPr>
+          <p:cNvPr id="93" name="Text 91"/>
+          <p:cNvSpPr/>
+          <p:nvPr/>
+        </p:nvSpPr>
+        <p:spPr>
+          <a:xfrm>
+            <a:off x="6309360" y="5532120"/>
+            <a:ext cx="777240" cy="832104"/>
+          </a:xfrm>
+          <a:prstGeom prst="rect">
+            <a:avLst/>
+          </a:prstGeom>
+          <a:noFill/>
+          <a:ln/>
+        </p:spPr>
+        <p:txBody>
+          <a:bodyPr wrap="square" lIns="0" tIns="0" rIns="0" bIns="0" rtlCol="0" anchor="ctr"/>
+          <a:lstStyle/>
+          <a:p>
+            <a:pPr indent="0" marL="0">
+              <a:buNone/>
+            </a:pPr>
+            <a:r>
+              <a:rPr lang="en-US" sz="750" b="1" dirty="0">
+                <a:solidFill>
+                  <a:srgbClr val="1F2937"/>
+                </a:solidFill>
+              </a:rPr>
+              <a:t>Video Player</a:t>
+            </a:r>
+            <a:endParaRPr lang="en-US" sz="750" dirty="0"/>
+          </a:p>
+        </p:txBody>
+      </p:sp>
+      <p:sp>
+        <p:nvSpPr>
+          <p:cNvPr id="94" name="Text 92"/>
+          <p:cNvSpPr/>
+          <p:nvPr/>
+        </p:nvSpPr>
+        <p:spPr>
+          <a:xfrm>
+            <a:off x="7104888" y="5541264"/>
+            <a:ext cx="4178808" cy="813816"/>
+          </a:xfrm>
+          <a:prstGeom prst="rect">
+            <a:avLst/>
+          </a:prstGeom>
+          <a:noFill/>
+          <a:ln/>
+        </p:spPr>
+        <p:txBody>
+          <a:bodyPr wrap="square" lIns="0" tIns="0" rIns="0" bIns="0" rtlCol="0" anchor="t"/>
+          <a:lstStyle/>
+          <a:p>
+            <a:pPr indent="0" marL="0">
+              <a:buNone/>
+            </a:pPr>
+            <a:r>
+              <a:rPr lang="en-US" sz="650" dirty="0">
+                <a:solidFill>
+                  <a:srgbClr val="374151"/>
+                </a:solidFill>
+              </a:rPr>
+              <a:t>Prototyped the video experience: exploratory test of the BitMovin player APIs — a proof-of-concept, not the final player.</a:t>
+            </a:r>
+            <a:endParaRPr lang="en-US" sz="650" dirty="0"/>
+          </a:p>
+        </p:txBody>
+      </p:sp>
+      <p:sp>
+        <p:nvSpPr>
+          <p:cNvPr id="95" name="Shape 93"/>
+          <p:cNvSpPr/>
+          <p:nvPr/>
+        </p:nvSpPr>
+        <p:spPr>
+          <a:xfrm>
+            <a:off x="11375136" y="5861304"/>
+            <a:ext cx="822960" cy="173736"/>
+          </a:xfrm>
+          <a:prstGeom prst="roundRect">
+            <a:avLst>
+              <a:gd name="adj" fmla="val 15789"/>
+            </a:avLst>
+          </a:prstGeom>
+          <a:solidFill>
+            <a:srgbClr val="1558A8"/>
+          </a:solidFill>
+          <a:ln w="12700">
+            <a:solidFill>
+              <a:srgbClr val="1558A8"/>
+            </a:solidFill>
+            <a:prstDash val="solid"/>
+          </a:ln>
+        </p:spPr>
+      </p:sp>
+      <p:sp>
+        <p:nvSpPr>
+          <p:cNvPr id="96" name="Text 94"/>
+          <p:cNvSpPr/>
+          <p:nvPr/>
+        </p:nvSpPr>
+        <p:spPr>
+          <a:xfrm>
+            <a:off x="11375136" y="5861304"/>
+            <a:ext cx="822960" cy="173736"/>
+          </a:xfrm>
+          <a:prstGeom prst="rect">
+            <a:avLst/>
+          </a:prstGeom>
+          <a:noFill/>
+          <a:ln/>
+        </p:spPr>
+        <p:txBody>
+          <a:bodyPr wrap="square" lIns="0" tIns="0" rIns="0" bIns="0" rtlCol="0" anchor="ctr"/>
+          <a:lstStyle/>
+          <a:p>
+            <a:pPr algn="ctr" indent="0" marL="0">
+              <a:buNone/>
+            </a:pPr>
+            <a:r>
+              <a:rPr lang="en-US" sz="650" b="1" dirty="0">
+                <a:solidFill>
+                  <a:srgbClr val="FFFFFF"/>
+                </a:solidFill>
+              </a:rPr>
+              <a:t>In Progress</a:t>
+            </a:r>
+            <a:endParaRPr lang="en-US" sz="650" dirty="0"/>
+          </a:p>
+        </p:txBody>
+      </p:sp>
+      <p:sp>
+        <p:nvSpPr>
+          <p:cNvPr id="97" name="Shape 95"/>
+          <p:cNvSpPr/>
+          <p:nvPr/>
+        </p:nvSpPr>
+        <p:spPr>
+          <a:xfrm>
+            <a:off x="6236208" y="6382512"/>
+            <a:ext cx="6016752" cy="0"/>
+          </a:xfrm>
+          <a:prstGeom prst="line">
+            <a:avLst/>
+          </a:prstGeom>
+          <a:noFill/>
+          <a:ln w="6350">
+            <a:solidFill>
+              <a:srgbClr val="E5E7EB"/>
+            </a:solidFill>
+            <a:prstDash val="solid"/>
+          </a:ln>
+        </p:spPr>
+      </p:sp>
+      <p:sp>
+        <p:nvSpPr>
+          <p:cNvPr id="98" name="Text 96"/>
+          <p:cNvSpPr/>
+          <p:nvPr/>
+        </p:nvSpPr>
+        <p:spPr>
+          <a:xfrm>
+            <a:off x="6309360" y="6400800"/>
+            <a:ext cx="777240" cy="832104"/>
+          </a:xfrm>
+          <a:prstGeom prst="rect">
+            <a:avLst/>
+          </a:prstGeom>
+          <a:noFill/>
+          <a:ln/>
+        </p:spPr>
+        <p:txBody>
+          <a:bodyPr wrap="square" lIns="0" tIns="0" rIns="0" bIns="0" rtlCol="0" anchor="ctr"/>
+          <a:lstStyle/>
+          <a:p>
+            <a:pPr indent="0" marL="0">
+              <a:buNone/>
+            </a:pPr>
+            <a:r>
+              <a:rPr lang="en-US" sz="750" b="1" dirty="0">
+                <a:solidFill>
+                  <a:srgbClr val="1F2937"/>
+                </a:solidFill>
+              </a:rPr>
+              <a:t>Testing</a:t>
+            </a:r>
+            <a:endParaRPr lang="en-US" sz="750" dirty="0"/>
+          </a:p>
+        </p:txBody>
+      </p:sp>
+      <p:sp>
+        <p:nvSpPr>
+          <p:cNvPr id="99" name="Text 97"/>
+          <p:cNvSpPr/>
+          <p:nvPr/>
+        </p:nvSpPr>
+        <p:spPr>
+          <a:xfrm>
+            <a:off x="7104888" y="6409944"/>
+            <a:ext cx="4178808" cy="813816"/>
+          </a:xfrm>
+          <a:prstGeom prst="rect">
+            <a:avLst/>
+          </a:prstGeom>
+          <a:noFill/>
+          <a:ln/>
+        </p:spPr>
+        <p:txBody>
+          <a:bodyPr wrap="square" lIns="0" tIns="0" rIns="0" bIns="0" rtlCol="0" anchor="t"/>
+          <a:lstStyle/>
+          <a:p>
+            <a:pPr indent="0" marL="0">
+              <a:buNone/>
+            </a:pPr>
+            <a:r>
+              <a:rPr lang="en-US" sz="650" dirty="0">
+                <a:solidFill>
+                  <a:srgbClr val="374151"/>
+                </a:solidFill>
+              </a:rPr>
+              <a:t>Testing E2E experience: Merchandising, sign-in flow, MVPD, Cleeng, replays.</a:t>
+            </a:r>
+            <a:endParaRPr lang="en-US" sz="650" dirty="0"/>
+          </a:p>
+        </p:txBody>
+      </p:sp>
+      <p:sp>
+        <p:nvSpPr>
+          <p:cNvPr id="100" name="Shape 98"/>
+          <p:cNvSpPr/>
+          <p:nvPr/>
+        </p:nvSpPr>
+        <p:spPr>
+          <a:xfrm>
+            <a:off x="11375136" y="6729984"/>
+            <a:ext cx="822960" cy="173736"/>
+          </a:xfrm>
+          <a:prstGeom prst="roundRect">
+            <a:avLst>
+              <a:gd name="adj" fmla="val 15789"/>
+            </a:avLst>
+          </a:prstGeom>
+          <a:solidFill>
+            <a:srgbClr val="F3F4F6"/>
+          </a:solidFill>
+          <a:ln w="9525">
+            <a:solidFill>
+              <a:srgbClr val="D1D5DB"/>
+            </a:solidFill>
+            <a:prstDash val="solid"/>
+          </a:ln>
+        </p:spPr>
+      </p:sp>
+      <p:sp>
+        <p:nvSpPr>
+          <p:cNvPr id="101" name="Text 99"/>
+          <p:cNvSpPr/>
+          <p:nvPr/>
+        </p:nvSpPr>
+        <p:spPr>
+          <a:xfrm>
+            <a:off x="11375136" y="6729984"/>
+            <a:ext cx="822960" cy="173736"/>
+          </a:xfrm>
+          <a:prstGeom prst="rect">
+            <a:avLst/>
+          </a:prstGeom>
+          <a:noFill/>
+          <a:ln/>
+        </p:spPr>
+        <p:txBody>
+          <a:bodyPr wrap="square" lIns="0" tIns="0" rIns="0" bIns="0" rtlCol="0" anchor="ctr"/>
+          <a:lstStyle/>
+          <a:p>
+            <a:pPr algn="ctr" indent="0" marL="0">
+              <a:buNone/>
+            </a:pPr>
+            <a:r>
+              <a:rPr lang="en-US" sz="650" b="1" dirty="0">
+                <a:solidFill>
+                  <a:srgbClr val="374151"/>
+                </a:solidFill>
+              </a:rPr>
+              <a:t>Not Started</a:t>
+            </a:r>
+            <a:endParaRPr lang="en-US" sz="650" dirty="0"/>
+          </a:p>
+        </p:txBody>
+      </p:sp>
+    </p:spTree>
+  </p:cSld>
+  <p:clrMapOvr>
+    <a:masterClrMapping/>
+  </p:clrMapOvr>
+</p:sld>
+</file>
+
+<file path=ppt/slides/slide3.xml><?xml version="1.0" encoding="utf-8"?>
+<p:sld xmlns:a="http://schemas.openxmlformats.org/drawingml/2006/main" xmlns:r="http://schemas.openxmlformats.org/officeDocument/2006/relationships" xmlns:p="http://schemas.openxmlformats.org/presentationml/2006/main">
+  <p:cSld name="Slide 2">
+    <p:bg>
+      <p:bgPr>
+        <a:solidFill>
+          <a:srgbClr val="FFFFFF"/>
+        </a:solidFill>
+      </p:bgPr>
+    </p:bg>
+    <p:spTree>
+      <p:nvGrpSpPr>
+        <p:cNvPr id="1" name=""/>
+        <p:cNvGrpSpPr/>
+        <p:nvPr/>
+      </p:nvGrpSpPr>
+      <p:grpSpPr>
+        <a:xfrm>
+          <a:off x="0" y="0"/>
+          <a:ext cx="0" cy="0"/>
+          <a:chOff x="0" y="0"/>
+          <a:chExt cx="0" cy="0"/>
+        </a:xfrm>
+      </p:grpSpPr>
+      <p:sp>
+        <p:nvSpPr>
+          <p:cNvPr id="2" name="Shape 0"/>
+          <p:cNvSpPr/>
+          <p:nvPr/>
+        </p:nvSpPr>
+        <p:spPr>
+          <a:xfrm>
+            <a:off x="0" y="0"/>
+            <a:ext cx="12344400" cy="457200"/>
+          </a:xfrm>
+          <a:prstGeom prst="rect">
+            <a:avLst/>
+          </a:prstGeom>
+          <a:solidFill>
+            <a:srgbClr val="8ED973"/>
+          </a:solidFill>
+          <a:ln w="12700">
+            <a:solidFill>
+              <a:srgbClr val="8ED973"/>
+            </a:solidFill>
+            <a:prstDash val="solid"/>
+          </a:ln>
+        </p:spPr>
+      </p:sp>
+      <p:sp>
+        <p:nvSpPr>
+          <p:cNvPr id="3" name="Text 1"/>
+          <p:cNvSpPr/>
+          <p:nvPr/>
+        </p:nvSpPr>
+        <p:spPr>
+          <a:xfrm>
+            <a:off x="201168" y="0"/>
             <a:ext cx="8229600" cy="457200"/>
           </a:xfrm>
           <a:prstGeom prst="rect">
@@ -8872,7 +8153,7 @@
                   <a:srgbClr val="388849"/>
                 </a:solidFill>
               </a:rPr>
-              <a:t>CPR  ·  Jul 7, 2026</a:t>
+              <a:t>CPR  ·  Jul 8, 2026</a:t>
             </a:r>
             <a:endParaRPr lang="en-US" sz="1100" dirty="0"/>
           </a:p>
@@ -14208,8 +13489,8 @@
         </p:nvSpPr>
         <p:spPr>
           <a:xfrm>
-            <a:off x="11548872" y="1453896"/>
-            <a:ext cx="530352" cy="137160"/>
+            <a:off x="11494008" y="1453896"/>
+            <a:ext cx="658368" cy="137160"/>
           </a:xfrm>
           <a:prstGeom prst="roundRect">
             <a:avLst>
@@ -14235,8 +13516,8 @@
         </p:nvSpPr>
         <p:spPr>
           <a:xfrm>
-            <a:off x="11548872" y="1453896"/>
-            <a:ext cx="530352" cy="137160"/>
+            <a:off x="11494008" y="1453896"/>
+            <a:ext cx="658368" cy="137160"/>
           </a:xfrm>
           <a:prstGeom prst="rect">
             <a:avLst/>
@@ -14252,14 +13533,14 @@
               <a:buNone/>
             </a:pPr>
             <a:r>
-              <a:rPr lang="en-US" sz="650" b="1" dirty="0">
+              <a:rPr lang="en-US" sz="600" b="1" dirty="0">
                 <a:solidFill>
                   <a:srgbClr val="166534"/>
                 </a:solidFill>
               </a:rPr>
               <a:t>Complete</a:t>
             </a:r>
-            <a:endParaRPr lang="en-US" sz="650" dirty="0"/>
+            <a:endParaRPr lang="en-US" sz="600" dirty="0"/>
           </a:p>
         </p:txBody>
       </p:sp>
@@ -14303,11 +13584,11 @@
             <a:avLst/>
           </a:prstGeom>
           <a:solidFill>
-            <a:srgbClr val="9CA3AF"/>
+            <a:srgbClr val="1558A8"/>
           </a:solidFill>
           <a:ln w="12700">
             <a:solidFill>
-              <a:srgbClr val="9CA3AF"/>
+              <a:srgbClr val="1558A8"/>
             </a:solidFill>
             <a:prstDash val="solid"/>
           </a:ln>
@@ -14340,7 +13621,7 @@
             <a:r>
               <a:rPr lang="en-US" sz="800" b="1" dirty="0">
                 <a:solidFill>
-                  <a:srgbClr val="1F2937"/>
+                  <a:srgbClr val="1D4ED8"/>
                 </a:solidFill>
               </a:rPr>
               <a:t>Integration</a:t>
@@ -14393,8 +13674,8 @@
         </p:nvSpPr>
         <p:spPr>
           <a:xfrm>
-            <a:off x="11548872" y="1929384"/>
-            <a:ext cx="530352" cy="137160"/>
+            <a:off x="11494008" y="1929384"/>
+            <a:ext cx="658368" cy="137160"/>
           </a:xfrm>
           <a:prstGeom prst="roundRect">
             <a:avLst>
@@ -14402,11 +13683,11 @@
             </a:avLst>
           </a:prstGeom>
           <a:solidFill>
-            <a:srgbClr val="F3F4F6"/>
+            <a:srgbClr val="DBEAFE"/>
           </a:solidFill>
           <a:ln w="12700">
             <a:solidFill>
-              <a:srgbClr val="F3F4F6"/>
+              <a:srgbClr val="DBEAFE"/>
             </a:solidFill>
             <a:prstDash val="solid"/>
           </a:ln>
@@ -14420,8 +13701,8 @@
         </p:nvSpPr>
         <p:spPr>
           <a:xfrm>
-            <a:off x="11548872" y="1929384"/>
-            <a:ext cx="530352" cy="137160"/>
+            <a:off x="11494008" y="1929384"/>
+            <a:ext cx="658368" cy="137160"/>
           </a:xfrm>
           <a:prstGeom prst="rect">
             <a:avLst/>
@@ -14437,14 +13718,14 @@
               <a:buNone/>
             </a:pPr>
             <a:r>
-              <a:rPr lang="en-US" sz="650" b="1" dirty="0">
-                <a:solidFill>
-                  <a:srgbClr val="6B7280"/>
-                </a:solidFill>
-              </a:rPr>
-              <a:t>Upcoming</a:t>
-            </a:r>
-            <a:endParaRPr lang="en-US" sz="650" dirty="0"/>
+              <a:rPr lang="en-US" sz="600" b="1" dirty="0">
+                <a:solidFill>
+                  <a:srgbClr val="1E40AF"/>
+                </a:solidFill>
+              </a:rPr>
+              <a:t>In Progress</a:t>
+            </a:r>
+            <a:endParaRPr lang="en-US" sz="600" dirty="0"/>
           </a:p>
         </p:txBody>
       </p:sp>
@@ -14578,8 +13859,8 @@
         </p:nvSpPr>
         <p:spPr>
           <a:xfrm>
-            <a:off x="11548872" y="2404872"/>
-            <a:ext cx="530352" cy="137160"/>
+            <a:off x="11494008" y="2404872"/>
+            <a:ext cx="658368" cy="137160"/>
           </a:xfrm>
           <a:prstGeom prst="roundRect">
             <a:avLst>
@@ -14605,8 +13886,8 @@
         </p:nvSpPr>
         <p:spPr>
           <a:xfrm>
-            <a:off x="11548872" y="2404872"/>
-            <a:ext cx="530352" cy="137160"/>
+            <a:off x="11494008" y="2404872"/>
+            <a:ext cx="658368" cy="137160"/>
           </a:xfrm>
           <a:prstGeom prst="rect">
             <a:avLst/>
@@ -14622,14 +13903,14 @@
               <a:buNone/>
             </a:pPr>
             <a:r>
-              <a:rPr lang="en-US" sz="650" b="1" dirty="0">
+              <a:rPr lang="en-US" sz="600" b="1" dirty="0">
                 <a:solidFill>
                   <a:srgbClr val="6B7280"/>
                 </a:solidFill>
               </a:rPr>
               <a:t>Upcoming</a:t>
             </a:r>
-            <a:endParaRPr lang="en-US" sz="650" dirty="0"/>
+            <a:endParaRPr lang="en-US" sz="600" dirty="0"/>
           </a:p>
         </p:txBody>
       </p:sp>
@@ -14763,8 +14044,8 @@
         </p:nvSpPr>
         <p:spPr>
           <a:xfrm>
-            <a:off x="11548872" y="2880360"/>
-            <a:ext cx="530352" cy="137160"/>
+            <a:off x="11494008" y="2880360"/>
+            <a:ext cx="658368" cy="137160"/>
           </a:xfrm>
           <a:prstGeom prst="roundRect">
             <a:avLst>
@@ -14790,8 +14071,8 @@
         </p:nvSpPr>
         <p:spPr>
           <a:xfrm>
-            <a:off x="11548872" y="2880360"/>
-            <a:ext cx="530352" cy="137160"/>
+            <a:off x="11494008" y="2880360"/>
+            <a:ext cx="658368" cy="137160"/>
           </a:xfrm>
           <a:prstGeom prst="rect">
             <a:avLst/>
@@ -14807,14 +14088,14 @@
               <a:buNone/>
             </a:pPr>
             <a:r>
-              <a:rPr lang="en-US" sz="650" b="1" dirty="0">
+              <a:rPr lang="en-US" sz="600" b="1" dirty="0">
                 <a:solidFill>
                   <a:srgbClr val="6B7280"/>
                 </a:solidFill>
               </a:rPr>
               <a:t>Upcoming</a:t>
             </a:r>
-            <a:endParaRPr lang="en-US" sz="650" dirty="0"/>
+            <a:endParaRPr lang="en-US" sz="600" dirty="0"/>
           </a:p>
         </p:txBody>
       </p:sp>

--- a/SABR_CPR_Component_Status.pptx
+++ b/SABR_CPR_Component_Status.pptx
@@ -4621,7 +4621,7 @@
                 <a:ea typeface="Calibri" pitchFamily="34" charset="-122"/>
                 <a:cs typeface="Arial" panose="020B0604020202020204" pitchFamily="34" charset="0"/>
               </a:rPr>
-              <a:t>September 30, 2026</a:t>
+              <a:t>December 1, 2026</a:t>
             </a:r>
             <a:endParaRPr lang="en-US" sz="911" dirty="0">
               <a:latin typeface="Arial" panose="020B0604020202020204" pitchFamily="34" charset="0"/>
@@ -13624,7 +13624,7 @@
                   <a:srgbClr val="1D4ED8"/>
                 </a:solidFill>
               </a:rPr>
-              <a:t>Integration</a:t>
+              <a:t>Beta</a:t>
             </a:r>
             <a:endParaRPr lang="en-US" sz="800" dirty="0"/>
           </a:p>
@@ -13809,7 +13809,7 @@
                   <a:srgbClr val="1F2937"/>
                 </a:solidFill>
               </a:rPr>
-              <a:t>Testing</a:t>
+              <a:t>UAT / Testing</a:t>
             </a:r>
             <a:endParaRPr lang="en-US" sz="800" dirty="0"/>
           </a:p>

--- a/SABR_CPR_Component_Status.pptx
+++ b/SABR_CPR_Component_Status.pptx
@@ -6048,7 +6048,7 @@
         <p:spPr>
           <a:xfrm>
             <a:off x="6236208" y="777240"/>
-            <a:ext cx="6016752" cy="662940"/>
+            <a:ext cx="6016752" cy="530352"/>
           </a:xfrm>
           <a:prstGeom prst="rect">
             <a:avLst/>
@@ -6073,7 +6073,7 @@
         <p:spPr>
           <a:xfrm>
             <a:off x="6309360" y="795528"/>
-            <a:ext cx="777240" cy="626364"/>
+            <a:ext cx="777240" cy="493776"/>
           </a:xfrm>
           <a:prstGeom prst="rect">
             <a:avLst/>
@@ -6109,7 +6109,7 @@
         <p:spPr>
           <a:xfrm>
             <a:off x="7104888" y="804672"/>
-            <a:ext cx="4178808" cy="608076"/>
+            <a:ext cx="4178808" cy="475488"/>
           </a:xfrm>
           <a:prstGeom prst="rect">
             <a:avLst/>
@@ -6144,7 +6144,7 @@
         </p:nvSpPr>
         <p:spPr>
           <a:xfrm>
-            <a:off x="11375136" y="1021842"/>
+            <a:off x="11375136" y="955548"/>
             <a:ext cx="822960" cy="173736"/>
           </a:xfrm>
           <a:prstGeom prst="roundRect">
@@ -6171,7 +6171,7 @@
         </p:nvSpPr>
         <p:spPr>
           <a:xfrm>
-            <a:off x="11375136" y="1021842"/>
+            <a:off x="11375136" y="955548"/>
             <a:ext cx="822960" cy="173736"/>
           </a:xfrm>
           <a:prstGeom prst="rect">
@@ -6207,7 +6207,7 @@
         </p:nvSpPr>
         <p:spPr>
           <a:xfrm>
-            <a:off x="6236208" y="1440180"/>
+            <a:off x="6236208" y="1307592"/>
             <a:ext cx="6016752" cy="0"/>
           </a:xfrm>
           <a:prstGeom prst="line">
@@ -6230,8 +6230,8 @@
         </p:nvSpPr>
         <p:spPr>
           <a:xfrm>
-            <a:off x="6309360" y="1458468"/>
-            <a:ext cx="777240" cy="626364"/>
+            <a:off x="6309360" y="1325880"/>
+            <a:ext cx="777240" cy="493776"/>
           </a:xfrm>
           <a:prstGeom prst="rect">
             <a:avLst/>
@@ -6266,8 +6266,8 @@
         </p:nvSpPr>
         <p:spPr>
           <a:xfrm>
-            <a:off x="7104888" y="1467612"/>
-            <a:ext cx="4178808" cy="608076"/>
+            <a:off x="7104888" y="1335024"/>
+            <a:ext cx="4178808" cy="475488"/>
           </a:xfrm>
           <a:prstGeom prst="rect">
             <a:avLst/>
@@ -6302,7 +6302,7 @@
         </p:nvSpPr>
         <p:spPr>
           <a:xfrm>
-            <a:off x="11375136" y="1684782"/>
+            <a:off x="11375136" y="1485900"/>
             <a:ext cx="822960" cy="173736"/>
           </a:xfrm>
           <a:prstGeom prst="roundRect">
@@ -6329,7 +6329,7 @@
         </p:nvSpPr>
         <p:spPr>
           <a:xfrm>
-            <a:off x="11375136" y="1684782"/>
+            <a:off x="11375136" y="1485900"/>
             <a:ext cx="822960" cy="173736"/>
           </a:xfrm>
           <a:prstGeom prst="rect">
@@ -6365,8 +6365,8 @@
         </p:nvSpPr>
         <p:spPr>
           <a:xfrm>
-            <a:off x="6236208" y="2103120"/>
-            <a:ext cx="6016752" cy="662940"/>
+            <a:off x="6236208" y="1837944"/>
+            <a:ext cx="6016752" cy="530352"/>
           </a:xfrm>
           <a:prstGeom prst="rect">
             <a:avLst/>
@@ -6390,7 +6390,7 @@
         </p:nvSpPr>
         <p:spPr>
           <a:xfrm>
-            <a:off x="6236208" y="2103120"/>
+            <a:off x="6236208" y="1837944"/>
             <a:ext cx="6016752" cy="0"/>
           </a:xfrm>
           <a:prstGeom prst="line">
@@ -6413,8 +6413,8 @@
         </p:nvSpPr>
         <p:spPr>
           <a:xfrm>
-            <a:off x="6309360" y="2121408"/>
-            <a:ext cx="777240" cy="626364"/>
+            <a:off x="6309360" y="1856232"/>
+            <a:ext cx="777240" cy="493776"/>
           </a:xfrm>
           <a:prstGeom prst="rect">
             <a:avLst/>
@@ -6449,8 +6449,8 @@
         </p:nvSpPr>
         <p:spPr>
           <a:xfrm>
-            <a:off x="7104888" y="2130552"/>
-            <a:ext cx="4178808" cy="608076"/>
+            <a:off x="7104888" y="1865376"/>
+            <a:ext cx="4178808" cy="475488"/>
           </a:xfrm>
           <a:prstGeom prst="rect">
             <a:avLst/>
@@ -6485,7 +6485,7 @@
         </p:nvSpPr>
         <p:spPr>
           <a:xfrm>
-            <a:off x="11375136" y="2347722"/>
+            <a:off x="11375136" y="2016252"/>
             <a:ext cx="822960" cy="173736"/>
           </a:xfrm>
           <a:prstGeom prst="roundRect">
@@ -6512,7 +6512,7 @@
         </p:nvSpPr>
         <p:spPr>
           <a:xfrm>
-            <a:off x="11375136" y="2347722"/>
+            <a:off x="11375136" y="2016252"/>
             <a:ext cx="822960" cy="173736"/>
           </a:xfrm>
           <a:prstGeom prst="rect">
@@ -6548,7 +6548,7 @@
         </p:nvSpPr>
         <p:spPr>
           <a:xfrm>
-            <a:off x="6236208" y="2766060"/>
+            <a:off x="6236208" y="2368296"/>
             <a:ext cx="6016752" cy="0"/>
           </a:xfrm>
           <a:prstGeom prst="line">
@@ -6571,8 +6571,8 @@
         </p:nvSpPr>
         <p:spPr>
           <a:xfrm>
-            <a:off x="6309360" y="2784348"/>
-            <a:ext cx="777240" cy="626364"/>
+            <a:off x="6309360" y="2386584"/>
+            <a:ext cx="777240" cy="493776"/>
           </a:xfrm>
           <a:prstGeom prst="rect">
             <a:avLst/>
@@ -6607,8 +6607,8 @@
         </p:nvSpPr>
         <p:spPr>
           <a:xfrm>
-            <a:off x="7104888" y="2793492"/>
-            <a:ext cx="4178808" cy="608076"/>
+            <a:off x="7104888" y="2395728"/>
+            <a:ext cx="4178808" cy="475488"/>
           </a:xfrm>
           <a:prstGeom prst="rect">
             <a:avLst/>
@@ -6643,7 +6643,7 @@
         </p:nvSpPr>
         <p:spPr>
           <a:xfrm>
-            <a:off x="11375136" y="3010662"/>
+            <a:off x="11375136" y="2546604"/>
             <a:ext cx="822960" cy="173736"/>
           </a:xfrm>
           <a:prstGeom prst="roundRect">
@@ -6670,7 +6670,7 @@
         </p:nvSpPr>
         <p:spPr>
           <a:xfrm>
-            <a:off x="11375136" y="3010662"/>
+            <a:off x="11375136" y="2546604"/>
             <a:ext cx="822960" cy="173736"/>
           </a:xfrm>
           <a:prstGeom prst="rect">
@@ -6706,18 +6706,18 @@
         </p:nvSpPr>
         <p:spPr>
           <a:xfrm>
-            <a:off x="91440" y="3502152"/>
-            <a:ext cx="6016752" cy="3749040"/>
-          </a:xfrm>
-          <a:prstGeom prst="rect">
-            <a:avLst/>
-          </a:prstGeom>
-          <a:solidFill>
-            <a:srgbClr val="FAFBFC"/>
-          </a:solidFill>
-          <a:ln w="9525">
-            <a:solidFill>
-              <a:srgbClr val="D1D5DB"/>
+            <a:off x="6236208" y="2898648"/>
+            <a:ext cx="6016752" cy="530352"/>
+          </a:xfrm>
+          <a:prstGeom prst="rect">
+            <a:avLst/>
+          </a:prstGeom>
+          <a:solidFill>
+            <a:srgbClr val="FFFFFF"/>
+          </a:solidFill>
+          <a:ln w="3175">
+            <a:solidFill>
+              <a:srgbClr val="E5E7EB"/>
             </a:solidFill>
             <a:prstDash val="solid"/>
           </a:ln>
@@ -6731,18 +6731,16 @@
         </p:nvSpPr>
         <p:spPr>
           <a:xfrm>
-            <a:off x="91440" y="3502152"/>
-            <a:ext cx="6016752" cy="274320"/>
-          </a:xfrm>
-          <a:prstGeom prst="rect">
-            <a:avLst/>
-          </a:prstGeom>
-          <a:solidFill>
-            <a:srgbClr val="8ED973"/>
-          </a:solidFill>
-          <a:ln w="12700">
-            <a:solidFill>
-              <a:srgbClr val="8ED973"/>
+            <a:off x="6236208" y="2898648"/>
+            <a:ext cx="6016752" cy="0"/>
+          </a:xfrm>
+          <a:prstGeom prst="line">
+            <a:avLst/>
+          </a:prstGeom>
+          <a:noFill/>
+          <a:ln w="6350">
+            <a:solidFill>
+              <a:srgbClr val="E5E7EB"/>
             </a:solidFill>
             <a:prstDash val="solid"/>
           </a:ln>
@@ -6756,69 +6754,8 @@
         </p:nvSpPr>
         <p:spPr>
           <a:xfrm>
-            <a:off x="201168" y="3502152"/>
-            <a:ext cx="5852160" cy="274320"/>
-          </a:xfrm>
-          <a:prstGeom prst="rect">
-            <a:avLst/>
-          </a:prstGeom>
-          <a:noFill/>
-          <a:ln/>
-        </p:spPr>
-        <p:txBody>
-          <a:bodyPr wrap="square" lIns="0" tIns="0" rIns="0" bIns="0" rtlCol="0" anchor="ctr"/>
-          <a:lstStyle/>
-          <a:p>
-            <a:pPr algn="l" indent="0" marL="0">
-              <a:buNone/>
-            </a:pPr>
-            <a:r>
-              <a:rPr lang="en-US" sz="900" b="1" dirty="0">
-                <a:solidFill>
-                  <a:srgbClr val="000000"/>
-                </a:solidFill>
-              </a:rPr>
-              <a:t>Partner / Platform Integrations</a:t>
-            </a:r>
-            <a:endParaRPr lang="en-US" sz="900" dirty="0"/>
-          </a:p>
-        </p:txBody>
-      </p:sp>
-      <p:sp>
-        <p:nvSpPr>
-          <p:cNvPr id="62" name="Shape 60"/>
-          <p:cNvSpPr/>
-          <p:nvPr/>
-        </p:nvSpPr>
-        <p:spPr>
-          <a:xfrm>
-            <a:off x="91440" y="3776472"/>
-            <a:ext cx="6016752" cy="1158240"/>
-          </a:xfrm>
-          <a:prstGeom prst="rect">
-            <a:avLst/>
-          </a:prstGeom>
-          <a:solidFill>
-            <a:srgbClr val="FFFFFF"/>
-          </a:solidFill>
-          <a:ln w="3175">
-            <a:solidFill>
-              <a:srgbClr val="E5E7EB"/>
-            </a:solidFill>
-            <a:prstDash val="solid"/>
-          </a:ln>
-        </p:spPr>
-      </p:sp>
-      <p:sp>
-        <p:nvSpPr>
-          <p:cNvPr id="63" name="Text 61"/>
-          <p:cNvSpPr/>
-          <p:nvPr/>
-        </p:nvSpPr>
-        <p:spPr>
-          <a:xfrm>
-            <a:off x="164592" y="3794760"/>
-            <a:ext cx="777240" cy="1121664"/>
+            <a:off x="6309360" y="2916936"/>
+            <a:ext cx="777240" cy="493776"/>
           </a:xfrm>
           <a:prstGeom prst="rect">
             <a:avLst/>
@@ -6839,7 +6776,7 @@
                   <a:srgbClr val="1F2937"/>
                 </a:solidFill>
               </a:rPr>
-              <a:t>MVPD</a:t>
+              <a:t>Analytics Data Warehouse</a:t>
             </a:r>
             <a:endParaRPr lang="en-US" sz="750" dirty="0"/>
           </a:p>
@@ -6847,14 +6784,14 @@
       </p:sp>
       <p:sp>
         <p:nvSpPr>
-          <p:cNvPr id="64" name="Text 62"/>
-          <p:cNvSpPr/>
-          <p:nvPr/>
-        </p:nvSpPr>
-        <p:spPr>
-          <a:xfrm>
-            <a:off x="960120" y="3803904"/>
-            <a:ext cx="4178808" cy="1103376"/>
+          <p:cNvPr id="62" name="Text 60"/>
+          <p:cNvSpPr/>
+          <p:nvPr/>
+        </p:nvSpPr>
+        <p:spPr>
+          <a:xfrm>
+            <a:off x="7104888" y="2926080"/>
+            <a:ext cx="4178808" cy="475488"/>
           </a:xfrm>
           <a:prstGeom prst="rect">
             <a:avLst/>
@@ -6869,27 +6806,19 @@
             <a:pPr indent="0" marL="0">
               <a:buNone/>
             </a:pPr>
-            <a:r>
-              <a:rPr lang="en-US" sz="650" dirty="0">
-                <a:solidFill>
-                  <a:srgbClr val="374151"/>
-                </a:solidFill>
-              </a:rPr>
-              <a:t>Adobe Pass integration underway for MVPD access; CMS-based provider management being brought into the web app, with basic prototypes built and currently hardcoded to DirecTV for testing.</a:t>
-            </a:r>
             <a:endParaRPr lang="en-US" sz="650" dirty="0"/>
           </a:p>
         </p:txBody>
       </p:sp>
       <p:sp>
         <p:nvSpPr>
-          <p:cNvPr id="65" name="Shape 63"/>
-          <p:cNvSpPr/>
-          <p:nvPr/>
-        </p:nvSpPr>
-        <p:spPr>
-          <a:xfrm>
-            <a:off x="5230368" y="4268724"/>
+          <p:cNvPr id="63" name="Shape 61"/>
+          <p:cNvSpPr/>
+          <p:nvPr/>
+        </p:nvSpPr>
+        <p:spPr>
+          <a:xfrm>
+            <a:off x="11375136" y="3076956"/>
             <a:ext cx="822960" cy="173736"/>
           </a:xfrm>
           <a:prstGeom prst="roundRect">
@@ -6898,156 +6827,244 @@
             </a:avLst>
           </a:prstGeom>
           <a:solidFill>
-            <a:srgbClr val="1558A8"/>
+            <a:srgbClr val="F3F4F6"/>
+          </a:solidFill>
+          <a:ln w="9525">
+            <a:solidFill>
+              <a:srgbClr val="D1D5DB"/>
+            </a:solidFill>
+            <a:prstDash val="solid"/>
+          </a:ln>
+        </p:spPr>
+      </p:sp>
+      <p:sp>
+        <p:nvSpPr>
+          <p:cNvPr id="64" name="Text 62"/>
+          <p:cNvSpPr/>
+          <p:nvPr/>
+        </p:nvSpPr>
+        <p:spPr>
+          <a:xfrm>
+            <a:off x="11375136" y="3076956"/>
+            <a:ext cx="822960" cy="173736"/>
+          </a:xfrm>
+          <a:prstGeom prst="rect">
+            <a:avLst/>
+          </a:prstGeom>
+          <a:noFill/>
+          <a:ln/>
+        </p:spPr>
+        <p:txBody>
+          <a:bodyPr wrap="square" lIns="0" tIns="0" rIns="0" bIns="0" rtlCol="0" anchor="ctr"/>
+          <a:lstStyle/>
+          <a:p>
+            <a:pPr algn="ctr" indent="0" marL="0">
+              <a:buNone/>
+            </a:pPr>
+            <a:r>
+              <a:rPr lang="en-US" sz="650" b="1" dirty="0">
+                <a:solidFill>
+                  <a:srgbClr val="374151"/>
+                </a:solidFill>
+              </a:rPr>
+              <a:t>Not Started</a:t>
+            </a:r>
+            <a:endParaRPr lang="en-US" sz="650" dirty="0"/>
+          </a:p>
+        </p:txBody>
+      </p:sp>
+      <p:sp>
+        <p:nvSpPr>
+          <p:cNvPr id="65" name="Shape 63"/>
+          <p:cNvSpPr/>
+          <p:nvPr/>
+        </p:nvSpPr>
+        <p:spPr>
+          <a:xfrm>
+            <a:off x="91440" y="3502152"/>
+            <a:ext cx="6016752" cy="3749040"/>
+          </a:xfrm>
+          <a:prstGeom prst="rect">
+            <a:avLst/>
+          </a:prstGeom>
+          <a:solidFill>
+            <a:srgbClr val="FAFBFC"/>
+          </a:solidFill>
+          <a:ln w="9525">
+            <a:solidFill>
+              <a:srgbClr val="D1D5DB"/>
+            </a:solidFill>
+            <a:prstDash val="solid"/>
+          </a:ln>
+        </p:spPr>
+      </p:sp>
+      <p:sp>
+        <p:nvSpPr>
+          <p:cNvPr id="66" name="Shape 64"/>
+          <p:cNvSpPr/>
+          <p:nvPr/>
+        </p:nvSpPr>
+        <p:spPr>
+          <a:xfrm>
+            <a:off x="91440" y="3502152"/>
+            <a:ext cx="6016752" cy="274320"/>
+          </a:xfrm>
+          <a:prstGeom prst="rect">
+            <a:avLst/>
+          </a:prstGeom>
+          <a:solidFill>
+            <a:srgbClr val="8ED973"/>
           </a:solidFill>
           <a:ln w="12700">
             <a:solidFill>
-              <a:srgbClr val="1558A8"/>
-            </a:solidFill>
-            <a:prstDash val="solid"/>
-          </a:ln>
-        </p:spPr>
-      </p:sp>
-      <p:sp>
-        <p:nvSpPr>
-          <p:cNvPr id="66" name="Text 64"/>
+              <a:srgbClr val="8ED973"/>
+            </a:solidFill>
+            <a:prstDash val="solid"/>
+          </a:ln>
+        </p:spPr>
+      </p:sp>
+      <p:sp>
+        <p:nvSpPr>
+          <p:cNvPr id="67" name="Text 65"/>
+          <p:cNvSpPr/>
+          <p:nvPr/>
+        </p:nvSpPr>
+        <p:spPr>
+          <a:xfrm>
+            <a:off x="201168" y="3502152"/>
+            <a:ext cx="5852160" cy="274320"/>
+          </a:xfrm>
+          <a:prstGeom prst="rect">
+            <a:avLst/>
+          </a:prstGeom>
+          <a:noFill/>
+          <a:ln/>
+        </p:spPr>
+        <p:txBody>
+          <a:bodyPr wrap="square" lIns="0" tIns="0" rIns="0" bIns="0" rtlCol="0" anchor="ctr"/>
+          <a:lstStyle/>
+          <a:p>
+            <a:pPr algn="l" indent="0" marL="0">
+              <a:buNone/>
+            </a:pPr>
+            <a:r>
+              <a:rPr lang="en-US" sz="900" b="1" dirty="0">
+                <a:solidFill>
+                  <a:srgbClr val="000000"/>
+                </a:solidFill>
+              </a:rPr>
+              <a:t>Partner / Platform Integrations</a:t>
+            </a:r>
+            <a:endParaRPr lang="en-US" sz="900" dirty="0"/>
+          </a:p>
+        </p:txBody>
+      </p:sp>
+      <p:sp>
+        <p:nvSpPr>
+          <p:cNvPr id="68" name="Shape 66"/>
+          <p:cNvSpPr/>
+          <p:nvPr/>
+        </p:nvSpPr>
+        <p:spPr>
+          <a:xfrm>
+            <a:off x="91440" y="3776472"/>
+            <a:ext cx="6016752" cy="1158240"/>
+          </a:xfrm>
+          <a:prstGeom prst="rect">
+            <a:avLst/>
+          </a:prstGeom>
+          <a:solidFill>
+            <a:srgbClr val="FFFFFF"/>
+          </a:solidFill>
+          <a:ln w="3175">
+            <a:solidFill>
+              <a:srgbClr val="E5E7EB"/>
+            </a:solidFill>
+            <a:prstDash val="solid"/>
+          </a:ln>
+        </p:spPr>
+      </p:sp>
+      <p:sp>
+        <p:nvSpPr>
+          <p:cNvPr id="69" name="Text 67"/>
+          <p:cNvSpPr/>
+          <p:nvPr/>
+        </p:nvSpPr>
+        <p:spPr>
+          <a:xfrm>
+            <a:off x="164592" y="3794760"/>
+            <a:ext cx="777240" cy="1121664"/>
+          </a:xfrm>
+          <a:prstGeom prst="rect">
+            <a:avLst/>
+          </a:prstGeom>
+          <a:noFill/>
+          <a:ln/>
+        </p:spPr>
+        <p:txBody>
+          <a:bodyPr wrap="square" lIns="0" tIns="0" rIns="0" bIns="0" rtlCol="0" anchor="ctr"/>
+          <a:lstStyle/>
+          <a:p>
+            <a:pPr indent="0" marL="0">
+              <a:buNone/>
+            </a:pPr>
+            <a:r>
+              <a:rPr lang="en-US" sz="750" b="1" dirty="0">
+                <a:solidFill>
+                  <a:srgbClr val="1F2937"/>
+                </a:solidFill>
+              </a:rPr>
+              <a:t>MVPD</a:t>
+            </a:r>
+            <a:endParaRPr lang="en-US" sz="750" dirty="0"/>
+          </a:p>
+        </p:txBody>
+      </p:sp>
+      <p:sp>
+        <p:nvSpPr>
+          <p:cNvPr id="70" name="Text 68"/>
+          <p:cNvSpPr/>
+          <p:nvPr/>
+        </p:nvSpPr>
+        <p:spPr>
+          <a:xfrm>
+            <a:off x="960120" y="3803904"/>
+            <a:ext cx="4178808" cy="1103376"/>
+          </a:xfrm>
+          <a:prstGeom prst="rect">
+            <a:avLst/>
+          </a:prstGeom>
+          <a:noFill/>
+          <a:ln/>
+        </p:spPr>
+        <p:txBody>
+          <a:bodyPr wrap="square" lIns="0" tIns="0" rIns="0" bIns="0" rtlCol="0" anchor="t"/>
+          <a:lstStyle/>
+          <a:p>
+            <a:pPr indent="0" marL="0">
+              <a:buNone/>
+            </a:pPr>
+            <a:r>
+              <a:rPr lang="en-US" sz="650" dirty="0">
+                <a:solidFill>
+                  <a:srgbClr val="374151"/>
+                </a:solidFill>
+              </a:rPr>
+              <a:t>Adobe Pass integration underway for MVPD access; CMS-based provider management being brought into the web app, with basic prototypes built and currently hardcoded to DirecTV for testing.</a:t>
+            </a:r>
+            <a:endParaRPr lang="en-US" sz="650" dirty="0"/>
+          </a:p>
+        </p:txBody>
+      </p:sp>
+      <p:sp>
+        <p:nvSpPr>
+          <p:cNvPr id="71" name="Shape 69"/>
           <p:cNvSpPr/>
           <p:nvPr/>
         </p:nvSpPr>
         <p:spPr>
           <a:xfrm>
             <a:off x="5230368" y="4268724"/>
-            <a:ext cx="822960" cy="173736"/>
-          </a:xfrm>
-          <a:prstGeom prst="rect">
-            <a:avLst/>
-          </a:prstGeom>
-          <a:noFill/>
-          <a:ln/>
-        </p:spPr>
-        <p:txBody>
-          <a:bodyPr wrap="square" lIns="0" tIns="0" rIns="0" bIns="0" rtlCol="0" anchor="ctr"/>
-          <a:lstStyle/>
-          <a:p>
-            <a:pPr algn="ctr" indent="0" marL="0">
-              <a:buNone/>
-            </a:pPr>
-            <a:r>
-              <a:rPr lang="en-US" sz="650" b="1" dirty="0">
-                <a:solidFill>
-                  <a:srgbClr val="FFFFFF"/>
-                </a:solidFill>
-              </a:rPr>
-              <a:t>In Progress</a:t>
-            </a:r>
-            <a:endParaRPr lang="en-US" sz="650" dirty="0"/>
-          </a:p>
-        </p:txBody>
-      </p:sp>
-      <p:sp>
-        <p:nvSpPr>
-          <p:cNvPr id="67" name="Shape 65"/>
-          <p:cNvSpPr/>
-          <p:nvPr/>
-        </p:nvSpPr>
-        <p:spPr>
-          <a:xfrm>
-            <a:off x="91440" y="4934712"/>
-            <a:ext cx="6016752" cy="0"/>
-          </a:xfrm>
-          <a:prstGeom prst="line">
-            <a:avLst/>
-          </a:prstGeom>
-          <a:noFill/>
-          <a:ln w="6350">
-            <a:solidFill>
-              <a:srgbClr val="E5E7EB"/>
-            </a:solidFill>
-            <a:prstDash val="solid"/>
-          </a:ln>
-        </p:spPr>
-      </p:sp>
-      <p:sp>
-        <p:nvSpPr>
-          <p:cNvPr id="68" name="Text 66"/>
-          <p:cNvSpPr/>
-          <p:nvPr/>
-        </p:nvSpPr>
-        <p:spPr>
-          <a:xfrm>
-            <a:off x="164592" y="4953000"/>
-            <a:ext cx="777240" cy="1121664"/>
-          </a:xfrm>
-          <a:prstGeom prst="rect">
-            <a:avLst/>
-          </a:prstGeom>
-          <a:noFill/>
-          <a:ln/>
-        </p:spPr>
-        <p:txBody>
-          <a:bodyPr wrap="square" lIns="0" tIns="0" rIns="0" bIns="0" rtlCol="0" anchor="ctr"/>
-          <a:lstStyle/>
-          <a:p>
-            <a:pPr indent="0" marL="0">
-              <a:buNone/>
-            </a:pPr>
-            <a:r>
-              <a:rPr lang="en-US" sz="750" b="1" dirty="0">
-                <a:solidFill>
-                  <a:srgbClr val="1F2937"/>
-                </a:solidFill>
-              </a:rPr>
-              <a:t>DRM</a:t>
-            </a:r>
-            <a:endParaRPr lang="en-US" sz="750" dirty="0"/>
-          </a:p>
-        </p:txBody>
-      </p:sp>
-      <p:sp>
-        <p:nvSpPr>
-          <p:cNvPr id="69" name="Text 67"/>
-          <p:cNvSpPr/>
-          <p:nvPr/>
-        </p:nvSpPr>
-        <p:spPr>
-          <a:xfrm>
-            <a:off x="960120" y="4962144"/>
-            <a:ext cx="4178808" cy="1103376"/>
-          </a:xfrm>
-          <a:prstGeom prst="rect">
-            <a:avLst/>
-          </a:prstGeom>
-          <a:noFill/>
-          <a:ln/>
-        </p:spPr>
-        <p:txBody>
-          <a:bodyPr wrap="square" lIns="0" tIns="0" rIns="0" bIns="0" rtlCol="0" anchor="t"/>
-          <a:lstStyle/>
-          <a:p>
-            <a:pPr indent="0" marL="0">
-              <a:buNone/>
-            </a:pPr>
-            <a:r>
-              <a:rPr lang="en-US" sz="650" dirty="0">
-                <a:solidFill>
-                  <a:srgbClr val="374151"/>
-                </a:solidFill>
-              </a:rPr>
-              <a:t>Dedicated DRM auth service launched, with license flows stubbed for FairPlay, Widevine, and PlayReady, and handed off to Amagi for EZDRM integration testing.</a:t>
-            </a:r>
-            <a:endParaRPr lang="en-US" sz="650" dirty="0"/>
-          </a:p>
-        </p:txBody>
-      </p:sp>
-      <p:sp>
-        <p:nvSpPr>
-          <p:cNvPr id="70" name="Shape 68"/>
-          <p:cNvSpPr/>
-          <p:nvPr/>
-        </p:nvSpPr>
-        <p:spPr>
-          <a:xfrm>
-            <a:off x="5230368" y="5426964"/>
             <a:ext cx="822960" cy="173736"/>
           </a:xfrm>
           <a:prstGeom prst="roundRect">
@@ -7068,169 +7085,144 @@
       </p:sp>
       <p:sp>
         <p:nvSpPr>
-          <p:cNvPr id="71" name="Text 69"/>
+          <p:cNvPr id="72" name="Text 70"/>
+          <p:cNvSpPr/>
+          <p:nvPr/>
+        </p:nvSpPr>
+        <p:spPr>
+          <a:xfrm>
+            <a:off x="5230368" y="4268724"/>
+            <a:ext cx="822960" cy="173736"/>
+          </a:xfrm>
+          <a:prstGeom prst="rect">
+            <a:avLst/>
+          </a:prstGeom>
+          <a:noFill/>
+          <a:ln/>
+        </p:spPr>
+        <p:txBody>
+          <a:bodyPr wrap="square" lIns="0" tIns="0" rIns="0" bIns="0" rtlCol="0" anchor="ctr"/>
+          <a:lstStyle/>
+          <a:p>
+            <a:pPr algn="ctr" indent="0" marL="0">
+              <a:buNone/>
+            </a:pPr>
+            <a:r>
+              <a:rPr lang="en-US" sz="650" b="1" dirty="0">
+                <a:solidFill>
+                  <a:srgbClr val="FFFFFF"/>
+                </a:solidFill>
+              </a:rPr>
+              <a:t>In Progress</a:t>
+            </a:r>
+            <a:endParaRPr lang="en-US" sz="650" dirty="0"/>
+          </a:p>
+        </p:txBody>
+      </p:sp>
+      <p:sp>
+        <p:nvSpPr>
+          <p:cNvPr id="73" name="Shape 71"/>
+          <p:cNvSpPr/>
+          <p:nvPr/>
+        </p:nvSpPr>
+        <p:spPr>
+          <a:xfrm>
+            <a:off x="91440" y="4934712"/>
+            <a:ext cx="6016752" cy="0"/>
+          </a:xfrm>
+          <a:prstGeom prst="line">
+            <a:avLst/>
+          </a:prstGeom>
+          <a:noFill/>
+          <a:ln w="6350">
+            <a:solidFill>
+              <a:srgbClr val="E5E7EB"/>
+            </a:solidFill>
+            <a:prstDash val="solid"/>
+          </a:ln>
+        </p:spPr>
+      </p:sp>
+      <p:sp>
+        <p:nvSpPr>
+          <p:cNvPr id="74" name="Text 72"/>
+          <p:cNvSpPr/>
+          <p:nvPr/>
+        </p:nvSpPr>
+        <p:spPr>
+          <a:xfrm>
+            <a:off x="164592" y="4953000"/>
+            <a:ext cx="777240" cy="1121664"/>
+          </a:xfrm>
+          <a:prstGeom prst="rect">
+            <a:avLst/>
+          </a:prstGeom>
+          <a:noFill/>
+          <a:ln/>
+        </p:spPr>
+        <p:txBody>
+          <a:bodyPr wrap="square" lIns="0" tIns="0" rIns="0" bIns="0" rtlCol="0" anchor="ctr"/>
+          <a:lstStyle/>
+          <a:p>
+            <a:pPr indent="0" marL="0">
+              <a:buNone/>
+            </a:pPr>
+            <a:r>
+              <a:rPr lang="en-US" sz="750" b="1" dirty="0">
+                <a:solidFill>
+                  <a:srgbClr val="1F2937"/>
+                </a:solidFill>
+              </a:rPr>
+              <a:t>DRM</a:t>
+            </a:r>
+            <a:endParaRPr lang="en-US" sz="750" dirty="0"/>
+          </a:p>
+        </p:txBody>
+      </p:sp>
+      <p:sp>
+        <p:nvSpPr>
+          <p:cNvPr id="75" name="Text 73"/>
+          <p:cNvSpPr/>
+          <p:nvPr/>
+        </p:nvSpPr>
+        <p:spPr>
+          <a:xfrm>
+            <a:off x="960120" y="4962144"/>
+            <a:ext cx="4178808" cy="1103376"/>
+          </a:xfrm>
+          <a:prstGeom prst="rect">
+            <a:avLst/>
+          </a:prstGeom>
+          <a:noFill/>
+          <a:ln/>
+        </p:spPr>
+        <p:txBody>
+          <a:bodyPr wrap="square" lIns="0" tIns="0" rIns="0" bIns="0" rtlCol="0" anchor="t"/>
+          <a:lstStyle/>
+          <a:p>
+            <a:pPr indent="0" marL="0">
+              <a:buNone/>
+            </a:pPr>
+            <a:r>
+              <a:rPr lang="en-US" sz="650" dirty="0">
+                <a:solidFill>
+                  <a:srgbClr val="374151"/>
+                </a:solidFill>
+              </a:rPr>
+              <a:t>Dedicated DRM auth service launched, with license flows stubbed for FairPlay, Widevine, and PlayReady, and handed off to Amagi for EZDRM integration testing.</a:t>
+            </a:r>
+            <a:endParaRPr lang="en-US" sz="650" dirty="0"/>
+          </a:p>
+        </p:txBody>
+      </p:sp>
+      <p:sp>
+        <p:nvSpPr>
+          <p:cNvPr id="76" name="Shape 74"/>
           <p:cNvSpPr/>
           <p:nvPr/>
         </p:nvSpPr>
         <p:spPr>
           <a:xfrm>
             <a:off x="5230368" y="5426964"/>
-            <a:ext cx="822960" cy="173736"/>
-          </a:xfrm>
-          <a:prstGeom prst="rect">
-            <a:avLst/>
-          </a:prstGeom>
-          <a:noFill/>
-          <a:ln/>
-        </p:spPr>
-        <p:txBody>
-          <a:bodyPr wrap="square" lIns="0" tIns="0" rIns="0" bIns="0" rtlCol="0" anchor="ctr"/>
-          <a:lstStyle/>
-          <a:p>
-            <a:pPr algn="ctr" indent="0" marL="0">
-              <a:buNone/>
-            </a:pPr>
-            <a:r>
-              <a:rPr lang="en-US" sz="650" b="1" dirty="0">
-                <a:solidFill>
-                  <a:srgbClr val="FFFFFF"/>
-                </a:solidFill>
-              </a:rPr>
-              <a:t>In Progress</a:t>
-            </a:r>
-            <a:endParaRPr lang="en-US" sz="650" dirty="0"/>
-          </a:p>
-        </p:txBody>
-      </p:sp>
-      <p:sp>
-        <p:nvSpPr>
-          <p:cNvPr id="72" name="Shape 70"/>
-          <p:cNvSpPr/>
-          <p:nvPr/>
-        </p:nvSpPr>
-        <p:spPr>
-          <a:xfrm>
-            <a:off x="91440" y="6092952"/>
-            <a:ext cx="6016752" cy="1158240"/>
-          </a:xfrm>
-          <a:prstGeom prst="rect">
-            <a:avLst/>
-          </a:prstGeom>
-          <a:solidFill>
-            <a:srgbClr val="FFFFFF"/>
-          </a:solidFill>
-          <a:ln w="3175">
-            <a:solidFill>
-              <a:srgbClr val="E5E7EB"/>
-            </a:solidFill>
-            <a:prstDash val="solid"/>
-          </a:ln>
-        </p:spPr>
-      </p:sp>
-      <p:sp>
-        <p:nvSpPr>
-          <p:cNvPr id="73" name="Shape 71"/>
-          <p:cNvSpPr/>
-          <p:nvPr/>
-        </p:nvSpPr>
-        <p:spPr>
-          <a:xfrm>
-            <a:off x="91440" y="6092952"/>
-            <a:ext cx="6016752" cy="0"/>
-          </a:xfrm>
-          <a:prstGeom prst="line">
-            <a:avLst/>
-          </a:prstGeom>
-          <a:noFill/>
-          <a:ln w="6350">
-            <a:solidFill>
-              <a:srgbClr val="E5E7EB"/>
-            </a:solidFill>
-            <a:prstDash val="solid"/>
-          </a:ln>
-        </p:spPr>
-      </p:sp>
-      <p:sp>
-        <p:nvSpPr>
-          <p:cNvPr id="74" name="Text 72"/>
-          <p:cNvSpPr/>
-          <p:nvPr/>
-        </p:nvSpPr>
-        <p:spPr>
-          <a:xfrm>
-            <a:off x="164592" y="6111240"/>
-            <a:ext cx="777240" cy="1121664"/>
-          </a:xfrm>
-          <a:prstGeom prst="rect">
-            <a:avLst/>
-          </a:prstGeom>
-          <a:noFill/>
-          <a:ln/>
-        </p:spPr>
-        <p:txBody>
-          <a:bodyPr wrap="square" lIns="0" tIns="0" rIns="0" bIns="0" rtlCol="0" anchor="ctr"/>
-          <a:lstStyle/>
-          <a:p>
-            <a:pPr indent="0" marL="0">
-              <a:buNone/>
-            </a:pPr>
-            <a:r>
-              <a:rPr lang="en-US" sz="750" b="1" dirty="0">
-                <a:solidFill>
-                  <a:srgbClr val="1F2937"/>
-                </a:solidFill>
-              </a:rPr>
-              <a:t>FOXXUM</a:t>
-            </a:r>
-            <a:endParaRPr lang="en-US" sz="750" dirty="0"/>
-          </a:p>
-        </p:txBody>
-      </p:sp>
-      <p:sp>
-        <p:nvSpPr>
-          <p:cNvPr id="75" name="Text 73"/>
-          <p:cNvSpPr/>
-          <p:nvPr/>
-        </p:nvSpPr>
-        <p:spPr>
-          <a:xfrm>
-            <a:off x="960120" y="6120384"/>
-            <a:ext cx="4178808" cy="1103376"/>
-          </a:xfrm>
-          <a:prstGeom prst="rect">
-            <a:avLst/>
-          </a:prstGeom>
-          <a:noFill/>
-          <a:ln/>
-        </p:spPr>
-        <p:txBody>
-          <a:bodyPr wrap="square" lIns="0" tIns="0" rIns="0" bIns="0" rtlCol="0" anchor="t"/>
-          <a:lstStyle/>
-          <a:p>
-            <a:pPr indent="0" marL="0">
-              <a:buNone/>
-            </a:pPr>
-            <a:r>
-              <a:rPr lang="en-US" sz="650" dirty="0">
-                <a:solidFill>
-                  <a:srgbClr val="374151"/>
-                </a:solidFill>
-              </a:rPr>
-              <a:t>Integration packet produced and workshop collaboration ongoing with Foxxum; no schema-stability specifics called out in this update.</a:t>
-            </a:r>
-            <a:endParaRPr lang="en-US" sz="650" dirty="0"/>
-          </a:p>
-        </p:txBody>
-      </p:sp>
-      <p:sp>
-        <p:nvSpPr>
-          <p:cNvPr id="76" name="Shape 74"/>
-          <p:cNvSpPr/>
-          <p:nvPr/>
-        </p:nvSpPr>
-        <p:spPr>
-          <a:xfrm>
-            <a:off x="5230368" y="6585204"/>
             <a:ext cx="822960" cy="173736"/>
           </a:xfrm>
           <a:prstGeom prst="roundRect">
@@ -7257,226 +7249,163 @@
         </p:nvSpPr>
         <p:spPr>
           <a:xfrm>
+            <a:off x="5230368" y="5426964"/>
+            <a:ext cx="822960" cy="173736"/>
+          </a:xfrm>
+          <a:prstGeom prst="rect">
+            <a:avLst/>
+          </a:prstGeom>
+          <a:noFill/>
+          <a:ln/>
+        </p:spPr>
+        <p:txBody>
+          <a:bodyPr wrap="square" lIns="0" tIns="0" rIns="0" bIns="0" rtlCol="0" anchor="ctr"/>
+          <a:lstStyle/>
+          <a:p>
+            <a:pPr algn="ctr" indent="0" marL="0">
+              <a:buNone/>
+            </a:pPr>
+            <a:r>
+              <a:rPr lang="en-US" sz="650" b="1" dirty="0">
+                <a:solidFill>
+                  <a:srgbClr val="FFFFFF"/>
+                </a:solidFill>
+              </a:rPr>
+              <a:t>In Progress</a:t>
+            </a:r>
+            <a:endParaRPr lang="en-US" sz="650" dirty="0"/>
+          </a:p>
+        </p:txBody>
+      </p:sp>
+      <p:sp>
+        <p:nvSpPr>
+          <p:cNvPr id="78" name="Shape 76"/>
+          <p:cNvSpPr/>
+          <p:nvPr/>
+        </p:nvSpPr>
+        <p:spPr>
+          <a:xfrm>
+            <a:off x="91440" y="6092952"/>
+            <a:ext cx="6016752" cy="1158240"/>
+          </a:xfrm>
+          <a:prstGeom prst="rect">
+            <a:avLst/>
+          </a:prstGeom>
+          <a:solidFill>
+            <a:srgbClr val="FFFFFF"/>
+          </a:solidFill>
+          <a:ln w="3175">
+            <a:solidFill>
+              <a:srgbClr val="E5E7EB"/>
+            </a:solidFill>
+            <a:prstDash val="solid"/>
+          </a:ln>
+        </p:spPr>
+      </p:sp>
+      <p:sp>
+        <p:nvSpPr>
+          <p:cNvPr id="79" name="Shape 77"/>
+          <p:cNvSpPr/>
+          <p:nvPr/>
+        </p:nvSpPr>
+        <p:spPr>
+          <a:xfrm>
+            <a:off x="91440" y="6092952"/>
+            <a:ext cx="6016752" cy="0"/>
+          </a:xfrm>
+          <a:prstGeom prst="line">
+            <a:avLst/>
+          </a:prstGeom>
+          <a:noFill/>
+          <a:ln w="6350">
+            <a:solidFill>
+              <a:srgbClr val="E5E7EB"/>
+            </a:solidFill>
+            <a:prstDash val="solid"/>
+          </a:ln>
+        </p:spPr>
+      </p:sp>
+      <p:sp>
+        <p:nvSpPr>
+          <p:cNvPr id="80" name="Text 78"/>
+          <p:cNvSpPr/>
+          <p:nvPr/>
+        </p:nvSpPr>
+        <p:spPr>
+          <a:xfrm>
+            <a:off x="164592" y="6111240"/>
+            <a:ext cx="777240" cy="1121664"/>
+          </a:xfrm>
+          <a:prstGeom prst="rect">
+            <a:avLst/>
+          </a:prstGeom>
+          <a:noFill/>
+          <a:ln/>
+        </p:spPr>
+        <p:txBody>
+          <a:bodyPr wrap="square" lIns="0" tIns="0" rIns="0" bIns="0" rtlCol="0" anchor="ctr"/>
+          <a:lstStyle/>
+          <a:p>
+            <a:pPr indent="0" marL="0">
+              <a:buNone/>
+            </a:pPr>
+            <a:r>
+              <a:rPr lang="en-US" sz="750" b="1" dirty="0">
+                <a:solidFill>
+                  <a:srgbClr val="1F2937"/>
+                </a:solidFill>
+              </a:rPr>
+              <a:t>FOXXUM</a:t>
+            </a:r>
+            <a:endParaRPr lang="en-US" sz="750" dirty="0"/>
+          </a:p>
+        </p:txBody>
+      </p:sp>
+      <p:sp>
+        <p:nvSpPr>
+          <p:cNvPr id="81" name="Text 79"/>
+          <p:cNvSpPr/>
+          <p:nvPr/>
+        </p:nvSpPr>
+        <p:spPr>
+          <a:xfrm>
+            <a:off x="960120" y="6120384"/>
+            <a:ext cx="4178808" cy="1103376"/>
+          </a:xfrm>
+          <a:prstGeom prst="rect">
+            <a:avLst/>
+          </a:prstGeom>
+          <a:noFill/>
+          <a:ln/>
+        </p:spPr>
+        <p:txBody>
+          <a:bodyPr wrap="square" lIns="0" tIns="0" rIns="0" bIns="0" rtlCol="0" anchor="t"/>
+          <a:lstStyle/>
+          <a:p>
+            <a:pPr indent="0" marL="0">
+              <a:buNone/>
+            </a:pPr>
+            <a:r>
+              <a:rPr lang="en-US" sz="650" dirty="0">
+                <a:solidFill>
+                  <a:srgbClr val="374151"/>
+                </a:solidFill>
+              </a:rPr>
+              <a:t>Integration packet produced and workshop collaboration ongoing with Foxxum; no schema-stability specifics called out in this update.</a:t>
+            </a:r>
+            <a:endParaRPr lang="en-US" sz="650" dirty="0"/>
+          </a:p>
+        </p:txBody>
+      </p:sp>
+      <p:sp>
+        <p:nvSpPr>
+          <p:cNvPr id="82" name="Shape 80"/>
+          <p:cNvSpPr/>
+          <p:nvPr/>
+        </p:nvSpPr>
+        <p:spPr>
+          <a:xfrm>
             <a:off x="5230368" y="6585204"/>
-            <a:ext cx="822960" cy="173736"/>
-          </a:xfrm>
-          <a:prstGeom prst="rect">
-            <a:avLst/>
-          </a:prstGeom>
-          <a:noFill/>
-          <a:ln/>
-        </p:spPr>
-        <p:txBody>
-          <a:bodyPr wrap="square" lIns="0" tIns="0" rIns="0" bIns="0" rtlCol="0" anchor="ctr"/>
-          <a:lstStyle/>
-          <a:p>
-            <a:pPr algn="ctr" indent="0" marL="0">
-              <a:buNone/>
-            </a:pPr>
-            <a:r>
-              <a:rPr lang="en-US" sz="650" b="1" dirty="0">
-                <a:solidFill>
-                  <a:srgbClr val="FFFFFF"/>
-                </a:solidFill>
-              </a:rPr>
-              <a:t>In Progress</a:t>
-            </a:r>
-            <a:endParaRPr lang="en-US" sz="650" dirty="0"/>
-          </a:p>
-        </p:txBody>
-      </p:sp>
-      <p:sp>
-        <p:nvSpPr>
-          <p:cNvPr id="78" name="Shape 76"/>
-          <p:cNvSpPr/>
-          <p:nvPr/>
-        </p:nvSpPr>
-        <p:spPr>
-          <a:xfrm>
-            <a:off x="6236208" y="3502152"/>
-            <a:ext cx="6016752" cy="3749040"/>
-          </a:xfrm>
-          <a:prstGeom prst="rect">
-            <a:avLst/>
-          </a:prstGeom>
-          <a:solidFill>
-            <a:srgbClr val="FAFBFC"/>
-          </a:solidFill>
-          <a:ln w="9525">
-            <a:solidFill>
-              <a:srgbClr val="D1D5DB"/>
-            </a:solidFill>
-            <a:prstDash val="solid"/>
-          </a:ln>
-        </p:spPr>
-      </p:sp>
-      <p:sp>
-        <p:nvSpPr>
-          <p:cNvPr id="79" name="Shape 77"/>
-          <p:cNvSpPr/>
-          <p:nvPr/>
-        </p:nvSpPr>
-        <p:spPr>
-          <a:xfrm>
-            <a:off x="6236208" y="3502152"/>
-            <a:ext cx="6016752" cy="274320"/>
-          </a:xfrm>
-          <a:prstGeom prst="rect">
-            <a:avLst/>
-          </a:prstGeom>
-          <a:solidFill>
-            <a:srgbClr val="8ED973"/>
-          </a:solidFill>
-          <a:ln w="12700">
-            <a:solidFill>
-              <a:srgbClr val="8ED973"/>
-            </a:solidFill>
-            <a:prstDash val="solid"/>
-          </a:ln>
-        </p:spPr>
-      </p:sp>
-      <p:sp>
-        <p:nvSpPr>
-          <p:cNvPr id="80" name="Text 78"/>
-          <p:cNvSpPr/>
-          <p:nvPr/>
-        </p:nvSpPr>
-        <p:spPr>
-          <a:xfrm>
-            <a:off x="6345936" y="3502152"/>
-            <a:ext cx="5852160" cy="274320"/>
-          </a:xfrm>
-          <a:prstGeom prst="rect">
-            <a:avLst/>
-          </a:prstGeom>
-          <a:noFill/>
-          <a:ln/>
-        </p:spPr>
-        <p:txBody>
-          <a:bodyPr wrap="square" lIns="0" tIns="0" rIns="0" bIns="0" rtlCol="0" anchor="ctr"/>
-          <a:lstStyle/>
-          <a:p>
-            <a:pPr algn="l" indent="0" marL="0">
-              <a:buNone/>
-            </a:pPr>
-            <a:r>
-              <a:rPr lang="en-US" sz="900" b="1" dirty="0">
-                <a:solidFill>
-                  <a:srgbClr val="000000"/>
-                </a:solidFill>
-              </a:rPr>
-              <a:t>Platform Capabilities</a:t>
-            </a:r>
-            <a:endParaRPr lang="en-US" sz="900" dirty="0"/>
-          </a:p>
-        </p:txBody>
-      </p:sp>
-      <p:sp>
-        <p:nvSpPr>
-          <p:cNvPr id="81" name="Shape 79"/>
-          <p:cNvSpPr/>
-          <p:nvPr/>
-        </p:nvSpPr>
-        <p:spPr>
-          <a:xfrm>
-            <a:off x="6236208" y="3776472"/>
-            <a:ext cx="6016752" cy="868680"/>
-          </a:xfrm>
-          <a:prstGeom prst="rect">
-            <a:avLst/>
-          </a:prstGeom>
-          <a:solidFill>
-            <a:srgbClr val="FFFFFF"/>
-          </a:solidFill>
-          <a:ln w="3175">
-            <a:solidFill>
-              <a:srgbClr val="E5E7EB"/>
-            </a:solidFill>
-            <a:prstDash val="solid"/>
-          </a:ln>
-        </p:spPr>
-      </p:sp>
-      <p:sp>
-        <p:nvSpPr>
-          <p:cNvPr id="82" name="Text 80"/>
-          <p:cNvSpPr/>
-          <p:nvPr/>
-        </p:nvSpPr>
-        <p:spPr>
-          <a:xfrm>
-            <a:off x="6309360" y="3794760"/>
-            <a:ext cx="777240" cy="832104"/>
-          </a:xfrm>
-          <a:prstGeom prst="rect">
-            <a:avLst/>
-          </a:prstGeom>
-          <a:noFill/>
-          <a:ln/>
-        </p:spPr>
-        <p:txBody>
-          <a:bodyPr wrap="square" lIns="0" tIns="0" rIns="0" bIns="0" rtlCol="0" anchor="ctr"/>
-          <a:lstStyle/>
-          <a:p>
-            <a:pPr indent="0" marL="0">
-              <a:buNone/>
-            </a:pPr>
-            <a:r>
-              <a:rPr lang="en-US" sz="750" b="1" dirty="0">
-                <a:solidFill>
-                  <a:srgbClr val="1F2937"/>
-                </a:solidFill>
-              </a:rPr>
-              <a:t>Platform POC</a:t>
-            </a:r>
-            <a:endParaRPr lang="en-US" sz="750" dirty="0"/>
-          </a:p>
-        </p:txBody>
-      </p:sp>
-      <p:sp>
-        <p:nvSpPr>
-          <p:cNvPr id="83" name="Text 81"/>
-          <p:cNvSpPr/>
-          <p:nvPr/>
-        </p:nvSpPr>
-        <p:spPr>
-          <a:xfrm>
-            <a:off x="7104888" y="3803904"/>
-            <a:ext cx="4178808" cy="813816"/>
-          </a:xfrm>
-          <a:prstGeom prst="rect">
-            <a:avLst/>
-          </a:prstGeom>
-          <a:noFill/>
-          <a:ln/>
-        </p:spPr>
-        <p:txBody>
-          <a:bodyPr wrap="square" lIns="0" tIns="0" rIns="0" bIns="0" rtlCol="0" anchor="t"/>
-          <a:lstStyle/>
-          <a:p>
-            <a:pPr indent="0" marL="0">
-              <a:buNone/>
-            </a:pPr>
-            <a:r>
-              <a:rPr lang="en-US" sz="650" dirty="0">
-                <a:solidFill>
-                  <a:srgbClr val="374151"/>
-                </a:solidFill>
-              </a:rPr>
-              <a:t>Mobile login gate placeholder: first login gate for anonymous viewers built with placeholder UI ahead of the real Auth0 flow. Entitlement simulator: mobile tool simulating any account state to test flows.</a:t>
-            </a:r>
-            <a:endParaRPr lang="en-US" sz="650" dirty="0"/>
-          </a:p>
-        </p:txBody>
-      </p:sp>
-      <p:sp>
-        <p:nvSpPr>
-          <p:cNvPr id="84" name="Shape 82"/>
-          <p:cNvSpPr/>
-          <p:nvPr/>
-        </p:nvSpPr>
-        <p:spPr>
-          <a:xfrm>
-            <a:off x="11375136" y="4123944"/>
             <a:ext cx="822960" cy="173736"/>
           </a:xfrm>
           <a:prstGeom prst="roundRect">
@@ -7497,144 +7426,232 @@
       </p:sp>
       <p:sp>
         <p:nvSpPr>
-          <p:cNvPr id="85" name="Text 83"/>
+          <p:cNvPr id="83" name="Text 81"/>
+          <p:cNvSpPr/>
+          <p:nvPr/>
+        </p:nvSpPr>
+        <p:spPr>
+          <a:xfrm>
+            <a:off x="5230368" y="6585204"/>
+            <a:ext cx="822960" cy="173736"/>
+          </a:xfrm>
+          <a:prstGeom prst="rect">
+            <a:avLst/>
+          </a:prstGeom>
+          <a:noFill/>
+          <a:ln/>
+        </p:spPr>
+        <p:txBody>
+          <a:bodyPr wrap="square" lIns="0" tIns="0" rIns="0" bIns="0" rtlCol="0" anchor="ctr"/>
+          <a:lstStyle/>
+          <a:p>
+            <a:pPr algn="ctr" indent="0" marL="0">
+              <a:buNone/>
+            </a:pPr>
+            <a:r>
+              <a:rPr lang="en-US" sz="650" b="1" dirty="0">
+                <a:solidFill>
+                  <a:srgbClr val="FFFFFF"/>
+                </a:solidFill>
+              </a:rPr>
+              <a:t>In Progress</a:t>
+            </a:r>
+            <a:endParaRPr lang="en-US" sz="650" dirty="0"/>
+          </a:p>
+        </p:txBody>
+      </p:sp>
+      <p:sp>
+        <p:nvSpPr>
+          <p:cNvPr id="84" name="Shape 82"/>
+          <p:cNvSpPr/>
+          <p:nvPr/>
+        </p:nvSpPr>
+        <p:spPr>
+          <a:xfrm>
+            <a:off x="6236208" y="3502152"/>
+            <a:ext cx="6016752" cy="3749040"/>
+          </a:xfrm>
+          <a:prstGeom prst="rect">
+            <a:avLst/>
+          </a:prstGeom>
+          <a:solidFill>
+            <a:srgbClr val="FAFBFC"/>
+          </a:solidFill>
+          <a:ln w="9525">
+            <a:solidFill>
+              <a:srgbClr val="D1D5DB"/>
+            </a:solidFill>
+            <a:prstDash val="solid"/>
+          </a:ln>
+        </p:spPr>
+      </p:sp>
+      <p:sp>
+        <p:nvSpPr>
+          <p:cNvPr id="85" name="Shape 83"/>
+          <p:cNvSpPr/>
+          <p:nvPr/>
+        </p:nvSpPr>
+        <p:spPr>
+          <a:xfrm>
+            <a:off x="6236208" y="3502152"/>
+            <a:ext cx="6016752" cy="274320"/>
+          </a:xfrm>
+          <a:prstGeom prst="rect">
+            <a:avLst/>
+          </a:prstGeom>
+          <a:solidFill>
+            <a:srgbClr val="8ED973"/>
+          </a:solidFill>
+          <a:ln w="12700">
+            <a:solidFill>
+              <a:srgbClr val="8ED973"/>
+            </a:solidFill>
+            <a:prstDash val="solid"/>
+          </a:ln>
+        </p:spPr>
+      </p:sp>
+      <p:sp>
+        <p:nvSpPr>
+          <p:cNvPr id="86" name="Text 84"/>
+          <p:cNvSpPr/>
+          <p:nvPr/>
+        </p:nvSpPr>
+        <p:spPr>
+          <a:xfrm>
+            <a:off x="6345936" y="3502152"/>
+            <a:ext cx="5852160" cy="274320"/>
+          </a:xfrm>
+          <a:prstGeom prst="rect">
+            <a:avLst/>
+          </a:prstGeom>
+          <a:noFill/>
+          <a:ln/>
+        </p:spPr>
+        <p:txBody>
+          <a:bodyPr wrap="square" lIns="0" tIns="0" rIns="0" bIns="0" rtlCol="0" anchor="ctr"/>
+          <a:lstStyle/>
+          <a:p>
+            <a:pPr algn="l" indent="0" marL="0">
+              <a:buNone/>
+            </a:pPr>
+            <a:r>
+              <a:rPr lang="en-US" sz="900" b="1" dirty="0">
+                <a:solidFill>
+                  <a:srgbClr val="000000"/>
+                </a:solidFill>
+              </a:rPr>
+              <a:t>Platform Capabilities</a:t>
+            </a:r>
+            <a:endParaRPr lang="en-US" sz="900" dirty="0"/>
+          </a:p>
+        </p:txBody>
+      </p:sp>
+      <p:sp>
+        <p:nvSpPr>
+          <p:cNvPr id="87" name="Shape 85"/>
+          <p:cNvSpPr/>
+          <p:nvPr/>
+        </p:nvSpPr>
+        <p:spPr>
+          <a:xfrm>
+            <a:off x="6236208" y="3776472"/>
+            <a:ext cx="6016752" cy="868680"/>
+          </a:xfrm>
+          <a:prstGeom prst="rect">
+            <a:avLst/>
+          </a:prstGeom>
+          <a:solidFill>
+            <a:srgbClr val="FFFFFF"/>
+          </a:solidFill>
+          <a:ln w="3175">
+            <a:solidFill>
+              <a:srgbClr val="E5E7EB"/>
+            </a:solidFill>
+            <a:prstDash val="solid"/>
+          </a:ln>
+        </p:spPr>
+      </p:sp>
+      <p:sp>
+        <p:nvSpPr>
+          <p:cNvPr id="88" name="Text 86"/>
+          <p:cNvSpPr/>
+          <p:nvPr/>
+        </p:nvSpPr>
+        <p:spPr>
+          <a:xfrm>
+            <a:off x="6309360" y="3794760"/>
+            <a:ext cx="777240" cy="832104"/>
+          </a:xfrm>
+          <a:prstGeom prst="rect">
+            <a:avLst/>
+          </a:prstGeom>
+          <a:noFill/>
+          <a:ln/>
+        </p:spPr>
+        <p:txBody>
+          <a:bodyPr wrap="square" lIns="0" tIns="0" rIns="0" bIns="0" rtlCol="0" anchor="ctr"/>
+          <a:lstStyle/>
+          <a:p>
+            <a:pPr indent="0" marL="0">
+              <a:buNone/>
+            </a:pPr>
+            <a:r>
+              <a:rPr lang="en-US" sz="750" b="1" dirty="0">
+                <a:solidFill>
+                  <a:srgbClr val="1F2937"/>
+                </a:solidFill>
+              </a:rPr>
+              <a:t>Platform POC</a:t>
+            </a:r>
+            <a:endParaRPr lang="en-US" sz="750" dirty="0"/>
+          </a:p>
+        </p:txBody>
+      </p:sp>
+      <p:sp>
+        <p:nvSpPr>
+          <p:cNvPr id="89" name="Text 87"/>
+          <p:cNvSpPr/>
+          <p:nvPr/>
+        </p:nvSpPr>
+        <p:spPr>
+          <a:xfrm>
+            <a:off x="7104888" y="3803904"/>
+            <a:ext cx="4178808" cy="813816"/>
+          </a:xfrm>
+          <a:prstGeom prst="rect">
+            <a:avLst/>
+          </a:prstGeom>
+          <a:noFill/>
+          <a:ln/>
+        </p:spPr>
+        <p:txBody>
+          <a:bodyPr wrap="square" lIns="0" tIns="0" rIns="0" bIns="0" rtlCol="0" anchor="t"/>
+          <a:lstStyle/>
+          <a:p>
+            <a:pPr indent="0" marL="0">
+              <a:buNone/>
+            </a:pPr>
+            <a:r>
+              <a:rPr lang="en-US" sz="650" dirty="0">
+                <a:solidFill>
+                  <a:srgbClr val="374151"/>
+                </a:solidFill>
+              </a:rPr>
+              <a:t>Mobile login gate placeholder: first login gate for anonymous viewers built with placeholder UI ahead of the real Auth0 flow. Entitlement simulator: mobile tool simulating any account state to test flows.</a:t>
+            </a:r>
+            <a:endParaRPr lang="en-US" sz="650" dirty="0"/>
+          </a:p>
+        </p:txBody>
+      </p:sp>
+      <p:sp>
+        <p:nvSpPr>
+          <p:cNvPr id="90" name="Shape 88"/>
           <p:cNvSpPr/>
           <p:nvPr/>
         </p:nvSpPr>
         <p:spPr>
           <a:xfrm>
             <a:off x="11375136" y="4123944"/>
-            <a:ext cx="822960" cy="173736"/>
-          </a:xfrm>
-          <a:prstGeom prst="rect">
-            <a:avLst/>
-          </a:prstGeom>
-          <a:noFill/>
-          <a:ln/>
-        </p:spPr>
-        <p:txBody>
-          <a:bodyPr wrap="square" lIns="0" tIns="0" rIns="0" bIns="0" rtlCol="0" anchor="ctr"/>
-          <a:lstStyle/>
-          <a:p>
-            <a:pPr algn="ctr" indent="0" marL="0">
-              <a:buNone/>
-            </a:pPr>
-            <a:r>
-              <a:rPr lang="en-US" sz="650" b="1" dirty="0">
-                <a:solidFill>
-                  <a:srgbClr val="FFFFFF"/>
-                </a:solidFill>
-              </a:rPr>
-              <a:t>In Progress</a:t>
-            </a:r>
-            <a:endParaRPr lang="en-US" sz="650" dirty="0"/>
-          </a:p>
-        </p:txBody>
-      </p:sp>
-      <p:sp>
-        <p:nvSpPr>
-          <p:cNvPr id="86" name="Shape 84"/>
-          <p:cNvSpPr/>
-          <p:nvPr/>
-        </p:nvSpPr>
-        <p:spPr>
-          <a:xfrm>
-            <a:off x="6236208" y="4645152"/>
-            <a:ext cx="6016752" cy="0"/>
-          </a:xfrm>
-          <a:prstGeom prst="line">
-            <a:avLst/>
-          </a:prstGeom>
-          <a:noFill/>
-          <a:ln w="6350">
-            <a:solidFill>
-              <a:srgbClr val="E5E7EB"/>
-            </a:solidFill>
-            <a:prstDash val="solid"/>
-          </a:ln>
-        </p:spPr>
-      </p:sp>
-      <p:sp>
-        <p:nvSpPr>
-          <p:cNvPr id="87" name="Text 85"/>
-          <p:cNvSpPr/>
-          <p:nvPr/>
-        </p:nvSpPr>
-        <p:spPr>
-          <a:xfrm>
-            <a:off x="6309360" y="4663440"/>
-            <a:ext cx="777240" cy="832104"/>
-          </a:xfrm>
-          <a:prstGeom prst="rect">
-            <a:avLst/>
-          </a:prstGeom>
-          <a:noFill/>
-          <a:ln/>
-        </p:spPr>
-        <p:txBody>
-          <a:bodyPr wrap="square" lIns="0" tIns="0" rIns="0" bIns="0" rtlCol="0" anchor="ctr"/>
-          <a:lstStyle/>
-          <a:p>
-            <a:pPr indent="0" marL="0">
-              <a:buNone/>
-            </a:pPr>
-            <a:r>
-              <a:rPr lang="en-US" sz="750" b="1" dirty="0">
-                <a:solidFill>
-                  <a:srgbClr val="1F2937"/>
-                </a:solidFill>
-              </a:rPr>
-              <a:t>UI/UX</a:t>
-            </a:r>
-            <a:endParaRPr lang="en-US" sz="750" dirty="0"/>
-          </a:p>
-        </p:txBody>
-      </p:sp>
-      <p:sp>
-        <p:nvSpPr>
-          <p:cNvPr id="88" name="Text 86"/>
-          <p:cNvSpPr/>
-          <p:nvPr/>
-        </p:nvSpPr>
-        <p:spPr>
-          <a:xfrm>
-            <a:off x="7104888" y="4672584"/>
-            <a:ext cx="4178808" cy="813816"/>
-          </a:xfrm>
-          <a:prstGeom prst="rect">
-            <a:avLst/>
-          </a:prstGeom>
-          <a:noFill/>
-          <a:ln/>
-        </p:spPr>
-        <p:txBody>
-          <a:bodyPr wrap="square" lIns="0" tIns="0" rIns="0" bIns="0" rtlCol="0" anchor="t"/>
-          <a:lstStyle/>
-          <a:p>
-            <a:pPr indent="0" marL="0">
-              <a:buNone/>
-            </a:pPr>
-            <a:r>
-              <a:rPr lang="en-US" sz="650" dirty="0">
-                <a:solidFill>
-                  <a:srgbClr val="374151"/>
-                </a:solidFill>
-              </a:rPr>
-              <a:t>Built the front-end foundation (design system, left sidebar navigation, footer, and page shell). Built the page engine and styled the merchandising carousels.</a:t>
-            </a:r>
-            <a:endParaRPr lang="en-US" sz="650" dirty="0"/>
-          </a:p>
-        </p:txBody>
-      </p:sp>
-      <p:sp>
-        <p:nvSpPr>
-          <p:cNvPr id="89" name="Shape 87"/>
-          <p:cNvSpPr/>
-          <p:nvPr/>
-        </p:nvSpPr>
-        <p:spPr>
-          <a:xfrm>
-            <a:off x="11375136" y="4992624"/>
             <a:ext cx="822960" cy="173736"/>
           </a:xfrm>
           <a:prstGeom prst="roundRect">
@@ -7655,169 +7672,144 @@
       </p:sp>
       <p:sp>
         <p:nvSpPr>
-          <p:cNvPr id="90" name="Text 88"/>
+          <p:cNvPr id="91" name="Text 89"/>
+          <p:cNvSpPr/>
+          <p:nvPr/>
+        </p:nvSpPr>
+        <p:spPr>
+          <a:xfrm>
+            <a:off x="11375136" y="4123944"/>
+            <a:ext cx="822960" cy="173736"/>
+          </a:xfrm>
+          <a:prstGeom prst="rect">
+            <a:avLst/>
+          </a:prstGeom>
+          <a:noFill/>
+          <a:ln/>
+        </p:spPr>
+        <p:txBody>
+          <a:bodyPr wrap="square" lIns="0" tIns="0" rIns="0" bIns="0" rtlCol="0" anchor="ctr"/>
+          <a:lstStyle/>
+          <a:p>
+            <a:pPr algn="ctr" indent="0" marL="0">
+              <a:buNone/>
+            </a:pPr>
+            <a:r>
+              <a:rPr lang="en-US" sz="650" b="1" dirty="0">
+                <a:solidFill>
+                  <a:srgbClr val="FFFFFF"/>
+                </a:solidFill>
+              </a:rPr>
+              <a:t>In Progress</a:t>
+            </a:r>
+            <a:endParaRPr lang="en-US" sz="650" dirty="0"/>
+          </a:p>
+        </p:txBody>
+      </p:sp>
+      <p:sp>
+        <p:nvSpPr>
+          <p:cNvPr id="92" name="Shape 90"/>
+          <p:cNvSpPr/>
+          <p:nvPr/>
+        </p:nvSpPr>
+        <p:spPr>
+          <a:xfrm>
+            <a:off x="6236208" y="4645152"/>
+            <a:ext cx="6016752" cy="0"/>
+          </a:xfrm>
+          <a:prstGeom prst="line">
+            <a:avLst/>
+          </a:prstGeom>
+          <a:noFill/>
+          <a:ln w="6350">
+            <a:solidFill>
+              <a:srgbClr val="E5E7EB"/>
+            </a:solidFill>
+            <a:prstDash val="solid"/>
+          </a:ln>
+        </p:spPr>
+      </p:sp>
+      <p:sp>
+        <p:nvSpPr>
+          <p:cNvPr id="93" name="Text 91"/>
+          <p:cNvSpPr/>
+          <p:nvPr/>
+        </p:nvSpPr>
+        <p:spPr>
+          <a:xfrm>
+            <a:off x="6309360" y="4663440"/>
+            <a:ext cx="777240" cy="832104"/>
+          </a:xfrm>
+          <a:prstGeom prst="rect">
+            <a:avLst/>
+          </a:prstGeom>
+          <a:noFill/>
+          <a:ln/>
+        </p:spPr>
+        <p:txBody>
+          <a:bodyPr wrap="square" lIns="0" tIns="0" rIns="0" bIns="0" rtlCol="0" anchor="ctr"/>
+          <a:lstStyle/>
+          <a:p>
+            <a:pPr indent="0" marL="0">
+              <a:buNone/>
+            </a:pPr>
+            <a:r>
+              <a:rPr lang="en-US" sz="750" b="1" dirty="0">
+                <a:solidFill>
+                  <a:srgbClr val="1F2937"/>
+                </a:solidFill>
+              </a:rPr>
+              <a:t>UI/UX</a:t>
+            </a:r>
+            <a:endParaRPr lang="en-US" sz="750" dirty="0"/>
+          </a:p>
+        </p:txBody>
+      </p:sp>
+      <p:sp>
+        <p:nvSpPr>
+          <p:cNvPr id="94" name="Text 92"/>
+          <p:cNvSpPr/>
+          <p:nvPr/>
+        </p:nvSpPr>
+        <p:spPr>
+          <a:xfrm>
+            <a:off x="7104888" y="4672584"/>
+            <a:ext cx="4178808" cy="813816"/>
+          </a:xfrm>
+          <a:prstGeom prst="rect">
+            <a:avLst/>
+          </a:prstGeom>
+          <a:noFill/>
+          <a:ln/>
+        </p:spPr>
+        <p:txBody>
+          <a:bodyPr wrap="square" lIns="0" tIns="0" rIns="0" bIns="0" rtlCol="0" anchor="t"/>
+          <a:lstStyle/>
+          <a:p>
+            <a:pPr indent="0" marL="0">
+              <a:buNone/>
+            </a:pPr>
+            <a:r>
+              <a:rPr lang="en-US" sz="650" dirty="0">
+                <a:solidFill>
+                  <a:srgbClr val="374151"/>
+                </a:solidFill>
+              </a:rPr>
+              <a:t>Built the front-end foundation (design system, left sidebar navigation, footer, and page shell). Built the page engine and styled the merchandising carousels.</a:t>
+            </a:r>
+            <a:endParaRPr lang="en-US" sz="650" dirty="0"/>
+          </a:p>
+        </p:txBody>
+      </p:sp>
+      <p:sp>
+        <p:nvSpPr>
+          <p:cNvPr id="95" name="Shape 93"/>
           <p:cNvSpPr/>
           <p:nvPr/>
         </p:nvSpPr>
         <p:spPr>
           <a:xfrm>
             <a:off x="11375136" y="4992624"/>
-            <a:ext cx="822960" cy="173736"/>
-          </a:xfrm>
-          <a:prstGeom prst="rect">
-            <a:avLst/>
-          </a:prstGeom>
-          <a:noFill/>
-          <a:ln/>
-        </p:spPr>
-        <p:txBody>
-          <a:bodyPr wrap="square" lIns="0" tIns="0" rIns="0" bIns="0" rtlCol="0" anchor="ctr"/>
-          <a:lstStyle/>
-          <a:p>
-            <a:pPr algn="ctr" indent="0" marL="0">
-              <a:buNone/>
-            </a:pPr>
-            <a:r>
-              <a:rPr lang="en-US" sz="650" b="1" dirty="0">
-                <a:solidFill>
-                  <a:srgbClr val="FFFFFF"/>
-                </a:solidFill>
-              </a:rPr>
-              <a:t>In Progress</a:t>
-            </a:r>
-            <a:endParaRPr lang="en-US" sz="650" dirty="0"/>
-          </a:p>
-        </p:txBody>
-      </p:sp>
-      <p:sp>
-        <p:nvSpPr>
-          <p:cNvPr id="91" name="Shape 89"/>
-          <p:cNvSpPr/>
-          <p:nvPr/>
-        </p:nvSpPr>
-        <p:spPr>
-          <a:xfrm>
-            <a:off x="6236208" y="5513832"/>
-            <a:ext cx="6016752" cy="868680"/>
-          </a:xfrm>
-          <a:prstGeom prst="rect">
-            <a:avLst/>
-          </a:prstGeom>
-          <a:solidFill>
-            <a:srgbClr val="FFFFFF"/>
-          </a:solidFill>
-          <a:ln w="3175">
-            <a:solidFill>
-              <a:srgbClr val="E5E7EB"/>
-            </a:solidFill>
-            <a:prstDash val="solid"/>
-          </a:ln>
-        </p:spPr>
-      </p:sp>
-      <p:sp>
-        <p:nvSpPr>
-          <p:cNvPr id="92" name="Shape 90"/>
-          <p:cNvSpPr/>
-          <p:nvPr/>
-        </p:nvSpPr>
-        <p:spPr>
-          <a:xfrm>
-            <a:off x="6236208" y="5513832"/>
-            <a:ext cx="6016752" cy="0"/>
-          </a:xfrm>
-          <a:prstGeom prst="line">
-            <a:avLst/>
-          </a:prstGeom>
-          <a:noFill/>
-          <a:ln w="6350">
-            <a:solidFill>
-              <a:srgbClr val="E5E7EB"/>
-            </a:solidFill>
-            <a:prstDash val="solid"/>
-          </a:ln>
-        </p:spPr>
-      </p:sp>
-      <p:sp>
-        <p:nvSpPr>
-          <p:cNvPr id="93" name="Text 91"/>
-          <p:cNvSpPr/>
-          <p:nvPr/>
-        </p:nvSpPr>
-        <p:spPr>
-          <a:xfrm>
-            <a:off x="6309360" y="5532120"/>
-            <a:ext cx="777240" cy="832104"/>
-          </a:xfrm>
-          <a:prstGeom prst="rect">
-            <a:avLst/>
-          </a:prstGeom>
-          <a:noFill/>
-          <a:ln/>
-        </p:spPr>
-        <p:txBody>
-          <a:bodyPr wrap="square" lIns="0" tIns="0" rIns="0" bIns="0" rtlCol="0" anchor="ctr"/>
-          <a:lstStyle/>
-          <a:p>
-            <a:pPr indent="0" marL="0">
-              <a:buNone/>
-            </a:pPr>
-            <a:r>
-              <a:rPr lang="en-US" sz="750" b="1" dirty="0">
-                <a:solidFill>
-                  <a:srgbClr val="1F2937"/>
-                </a:solidFill>
-              </a:rPr>
-              <a:t>Video Player</a:t>
-            </a:r>
-            <a:endParaRPr lang="en-US" sz="750" dirty="0"/>
-          </a:p>
-        </p:txBody>
-      </p:sp>
-      <p:sp>
-        <p:nvSpPr>
-          <p:cNvPr id="94" name="Text 92"/>
-          <p:cNvSpPr/>
-          <p:nvPr/>
-        </p:nvSpPr>
-        <p:spPr>
-          <a:xfrm>
-            <a:off x="7104888" y="5541264"/>
-            <a:ext cx="4178808" cy="813816"/>
-          </a:xfrm>
-          <a:prstGeom prst="rect">
-            <a:avLst/>
-          </a:prstGeom>
-          <a:noFill/>
-          <a:ln/>
-        </p:spPr>
-        <p:txBody>
-          <a:bodyPr wrap="square" lIns="0" tIns="0" rIns="0" bIns="0" rtlCol="0" anchor="t"/>
-          <a:lstStyle/>
-          <a:p>
-            <a:pPr indent="0" marL="0">
-              <a:buNone/>
-            </a:pPr>
-            <a:r>
-              <a:rPr lang="en-US" sz="650" dirty="0">
-                <a:solidFill>
-                  <a:srgbClr val="374151"/>
-                </a:solidFill>
-              </a:rPr>
-              <a:t>Prototyped the video experience: exploratory test of the BitMovin player APIs — a proof-of-concept, not the final player.</a:t>
-            </a:r>
-            <a:endParaRPr lang="en-US" sz="650" dirty="0"/>
-          </a:p>
-        </p:txBody>
-      </p:sp>
-      <p:sp>
-        <p:nvSpPr>
-          <p:cNvPr id="95" name="Shape 93"/>
-          <p:cNvSpPr/>
-          <p:nvPr/>
-        </p:nvSpPr>
-        <p:spPr>
-          <a:xfrm>
-            <a:off x="11375136" y="5861304"/>
             <a:ext cx="822960" cy="173736"/>
           </a:xfrm>
           <a:prstGeom prst="roundRect">
@@ -7844,138 +7836,163 @@
         </p:nvSpPr>
         <p:spPr>
           <a:xfrm>
+            <a:off x="11375136" y="4992624"/>
+            <a:ext cx="822960" cy="173736"/>
+          </a:xfrm>
+          <a:prstGeom prst="rect">
+            <a:avLst/>
+          </a:prstGeom>
+          <a:noFill/>
+          <a:ln/>
+        </p:spPr>
+        <p:txBody>
+          <a:bodyPr wrap="square" lIns="0" tIns="0" rIns="0" bIns="0" rtlCol="0" anchor="ctr"/>
+          <a:lstStyle/>
+          <a:p>
+            <a:pPr algn="ctr" indent="0" marL="0">
+              <a:buNone/>
+            </a:pPr>
+            <a:r>
+              <a:rPr lang="en-US" sz="650" b="1" dirty="0">
+                <a:solidFill>
+                  <a:srgbClr val="FFFFFF"/>
+                </a:solidFill>
+              </a:rPr>
+              <a:t>In Progress</a:t>
+            </a:r>
+            <a:endParaRPr lang="en-US" sz="650" dirty="0"/>
+          </a:p>
+        </p:txBody>
+      </p:sp>
+      <p:sp>
+        <p:nvSpPr>
+          <p:cNvPr id="97" name="Shape 95"/>
+          <p:cNvSpPr/>
+          <p:nvPr/>
+        </p:nvSpPr>
+        <p:spPr>
+          <a:xfrm>
+            <a:off x="6236208" y="5513832"/>
+            <a:ext cx="6016752" cy="868680"/>
+          </a:xfrm>
+          <a:prstGeom prst="rect">
+            <a:avLst/>
+          </a:prstGeom>
+          <a:solidFill>
+            <a:srgbClr val="FFFFFF"/>
+          </a:solidFill>
+          <a:ln w="3175">
+            <a:solidFill>
+              <a:srgbClr val="E5E7EB"/>
+            </a:solidFill>
+            <a:prstDash val="solid"/>
+          </a:ln>
+        </p:spPr>
+      </p:sp>
+      <p:sp>
+        <p:nvSpPr>
+          <p:cNvPr id="98" name="Shape 96"/>
+          <p:cNvSpPr/>
+          <p:nvPr/>
+        </p:nvSpPr>
+        <p:spPr>
+          <a:xfrm>
+            <a:off x="6236208" y="5513832"/>
+            <a:ext cx="6016752" cy="0"/>
+          </a:xfrm>
+          <a:prstGeom prst="line">
+            <a:avLst/>
+          </a:prstGeom>
+          <a:noFill/>
+          <a:ln w="6350">
+            <a:solidFill>
+              <a:srgbClr val="E5E7EB"/>
+            </a:solidFill>
+            <a:prstDash val="solid"/>
+          </a:ln>
+        </p:spPr>
+      </p:sp>
+      <p:sp>
+        <p:nvSpPr>
+          <p:cNvPr id="99" name="Text 97"/>
+          <p:cNvSpPr/>
+          <p:nvPr/>
+        </p:nvSpPr>
+        <p:spPr>
+          <a:xfrm>
+            <a:off x="6309360" y="5532120"/>
+            <a:ext cx="777240" cy="832104"/>
+          </a:xfrm>
+          <a:prstGeom prst="rect">
+            <a:avLst/>
+          </a:prstGeom>
+          <a:noFill/>
+          <a:ln/>
+        </p:spPr>
+        <p:txBody>
+          <a:bodyPr wrap="square" lIns="0" tIns="0" rIns="0" bIns="0" rtlCol="0" anchor="ctr"/>
+          <a:lstStyle/>
+          <a:p>
+            <a:pPr indent="0" marL="0">
+              <a:buNone/>
+            </a:pPr>
+            <a:r>
+              <a:rPr lang="en-US" sz="750" b="1" dirty="0">
+                <a:solidFill>
+                  <a:srgbClr val="1F2937"/>
+                </a:solidFill>
+              </a:rPr>
+              <a:t>Video Player</a:t>
+            </a:r>
+            <a:endParaRPr lang="en-US" sz="750" dirty="0"/>
+          </a:p>
+        </p:txBody>
+      </p:sp>
+      <p:sp>
+        <p:nvSpPr>
+          <p:cNvPr id="100" name="Text 98"/>
+          <p:cNvSpPr/>
+          <p:nvPr/>
+        </p:nvSpPr>
+        <p:spPr>
+          <a:xfrm>
+            <a:off x="7104888" y="5541264"/>
+            <a:ext cx="4178808" cy="813816"/>
+          </a:xfrm>
+          <a:prstGeom prst="rect">
+            <a:avLst/>
+          </a:prstGeom>
+          <a:noFill/>
+          <a:ln/>
+        </p:spPr>
+        <p:txBody>
+          <a:bodyPr wrap="square" lIns="0" tIns="0" rIns="0" bIns="0" rtlCol="0" anchor="t"/>
+          <a:lstStyle/>
+          <a:p>
+            <a:pPr indent="0" marL="0">
+              <a:buNone/>
+            </a:pPr>
+            <a:r>
+              <a:rPr lang="en-US" sz="650" dirty="0">
+                <a:solidFill>
+                  <a:srgbClr val="374151"/>
+                </a:solidFill>
+              </a:rPr>
+              <a:t>Prototyped the video experience: exploratory test of the BitMovin player APIs — a proof-of-concept, not the final player.</a:t>
+            </a:r>
+            <a:endParaRPr lang="en-US" sz="650" dirty="0"/>
+          </a:p>
+        </p:txBody>
+      </p:sp>
+      <p:sp>
+        <p:nvSpPr>
+          <p:cNvPr id="101" name="Shape 99"/>
+          <p:cNvSpPr/>
+          <p:nvPr/>
+        </p:nvSpPr>
+        <p:spPr>
+          <a:xfrm>
             <a:off x="11375136" y="5861304"/>
-            <a:ext cx="822960" cy="173736"/>
-          </a:xfrm>
-          <a:prstGeom prst="rect">
-            <a:avLst/>
-          </a:prstGeom>
-          <a:noFill/>
-          <a:ln/>
-        </p:spPr>
-        <p:txBody>
-          <a:bodyPr wrap="square" lIns="0" tIns="0" rIns="0" bIns="0" rtlCol="0" anchor="ctr"/>
-          <a:lstStyle/>
-          <a:p>
-            <a:pPr algn="ctr" indent="0" marL="0">
-              <a:buNone/>
-            </a:pPr>
-            <a:r>
-              <a:rPr lang="en-US" sz="650" b="1" dirty="0">
-                <a:solidFill>
-                  <a:srgbClr val="FFFFFF"/>
-                </a:solidFill>
-              </a:rPr>
-              <a:t>In Progress</a:t>
-            </a:r>
-            <a:endParaRPr lang="en-US" sz="650" dirty="0"/>
-          </a:p>
-        </p:txBody>
-      </p:sp>
-      <p:sp>
-        <p:nvSpPr>
-          <p:cNvPr id="97" name="Shape 95"/>
-          <p:cNvSpPr/>
-          <p:nvPr/>
-        </p:nvSpPr>
-        <p:spPr>
-          <a:xfrm>
-            <a:off x="6236208" y="6382512"/>
-            <a:ext cx="6016752" cy="0"/>
-          </a:xfrm>
-          <a:prstGeom prst="line">
-            <a:avLst/>
-          </a:prstGeom>
-          <a:noFill/>
-          <a:ln w="6350">
-            <a:solidFill>
-              <a:srgbClr val="E5E7EB"/>
-            </a:solidFill>
-            <a:prstDash val="solid"/>
-          </a:ln>
-        </p:spPr>
-      </p:sp>
-      <p:sp>
-        <p:nvSpPr>
-          <p:cNvPr id="98" name="Text 96"/>
-          <p:cNvSpPr/>
-          <p:nvPr/>
-        </p:nvSpPr>
-        <p:spPr>
-          <a:xfrm>
-            <a:off x="6309360" y="6400800"/>
-            <a:ext cx="777240" cy="832104"/>
-          </a:xfrm>
-          <a:prstGeom prst="rect">
-            <a:avLst/>
-          </a:prstGeom>
-          <a:noFill/>
-          <a:ln/>
-        </p:spPr>
-        <p:txBody>
-          <a:bodyPr wrap="square" lIns="0" tIns="0" rIns="0" bIns="0" rtlCol="0" anchor="ctr"/>
-          <a:lstStyle/>
-          <a:p>
-            <a:pPr indent="0" marL="0">
-              <a:buNone/>
-            </a:pPr>
-            <a:r>
-              <a:rPr lang="en-US" sz="750" b="1" dirty="0">
-                <a:solidFill>
-                  <a:srgbClr val="1F2937"/>
-                </a:solidFill>
-              </a:rPr>
-              <a:t>Testing</a:t>
-            </a:r>
-            <a:endParaRPr lang="en-US" sz="750" dirty="0"/>
-          </a:p>
-        </p:txBody>
-      </p:sp>
-      <p:sp>
-        <p:nvSpPr>
-          <p:cNvPr id="99" name="Text 97"/>
-          <p:cNvSpPr/>
-          <p:nvPr/>
-        </p:nvSpPr>
-        <p:spPr>
-          <a:xfrm>
-            <a:off x="7104888" y="6409944"/>
-            <a:ext cx="4178808" cy="813816"/>
-          </a:xfrm>
-          <a:prstGeom prst="rect">
-            <a:avLst/>
-          </a:prstGeom>
-          <a:noFill/>
-          <a:ln/>
-        </p:spPr>
-        <p:txBody>
-          <a:bodyPr wrap="square" lIns="0" tIns="0" rIns="0" bIns="0" rtlCol="0" anchor="t"/>
-          <a:lstStyle/>
-          <a:p>
-            <a:pPr indent="0" marL="0">
-              <a:buNone/>
-            </a:pPr>
-            <a:r>
-              <a:rPr lang="en-US" sz="650" dirty="0">
-                <a:solidFill>
-                  <a:srgbClr val="374151"/>
-                </a:solidFill>
-              </a:rPr>
-              <a:t>Testing E2E experience: Merchandising, sign-in flow, MVPD, Cleeng, replays.</a:t>
-            </a:r>
-            <a:endParaRPr lang="en-US" sz="650" dirty="0"/>
-          </a:p>
-        </p:txBody>
-      </p:sp>
-      <p:sp>
-        <p:nvSpPr>
-          <p:cNvPr id="100" name="Shape 98"/>
-          <p:cNvSpPr/>
-          <p:nvPr/>
-        </p:nvSpPr>
-        <p:spPr>
-          <a:xfrm>
-            <a:off x="11375136" y="6729984"/>
             <a:ext cx="822960" cy="173736"/>
           </a:xfrm>
           <a:prstGeom prst="roundRect">
@@ -7984,6 +8001,164 @@
             </a:avLst>
           </a:prstGeom>
           <a:solidFill>
+            <a:srgbClr val="1558A8"/>
+          </a:solidFill>
+          <a:ln w="12700">
+            <a:solidFill>
+              <a:srgbClr val="1558A8"/>
+            </a:solidFill>
+            <a:prstDash val="solid"/>
+          </a:ln>
+        </p:spPr>
+      </p:sp>
+      <p:sp>
+        <p:nvSpPr>
+          <p:cNvPr id="102" name="Text 100"/>
+          <p:cNvSpPr/>
+          <p:nvPr/>
+        </p:nvSpPr>
+        <p:spPr>
+          <a:xfrm>
+            <a:off x="11375136" y="5861304"/>
+            <a:ext cx="822960" cy="173736"/>
+          </a:xfrm>
+          <a:prstGeom prst="rect">
+            <a:avLst/>
+          </a:prstGeom>
+          <a:noFill/>
+          <a:ln/>
+        </p:spPr>
+        <p:txBody>
+          <a:bodyPr wrap="square" lIns="0" tIns="0" rIns="0" bIns="0" rtlCol="0" anchor="ctr"/>
+          <a:lstStyle/>
+          <a:p>
+            <a:pPr algn="ctr" indent="0" marL="0">
+              <a:buNone/>
+            </a:pPr>
+            <a:r>
+              <a:rPr lang="en-US" sz="650" b="1" dirty="0">
+                <a:solidFill>
+                  <a:srgbClr val="FFFFFF"/>
+                </a:solidFill>
+              </a:rPr>
+              <a:t>In Progress</a:t>
+            </a:r>
+            <a:endParaRPr lang="en-US" sz="650" dirty="0"/>
+          </a:p>
+        </p:txBody>
+      </p:sp>
+      <p:sp>
+        <p:nvSpPr>
+          <p:cNvPr id="103" name="Shape 101"/>
+          <p:cNvSpPr/>
+          <p:nvPr/>
+        </p:nvSpPr>
+        <p:spPr>
+          <a:xfrm>
+            <a:off x="6236208" y="6382512"/>
+            <a:ext cx="6016752" cy="0"/>
+          </a:xfrm>
+          <a:prstGeom prst="line">
+            <a:avLst/>
+          </a:prstGeom>
+          <a:noFill/>
+          <a:ln w="6350">
+            <a:solidFill>
+              <a:srgbClr val="E5E7EB"/>
+            </a:solidFill>
+            <a:prstDash val="solid"/>
+          </a:ln>
+        </p:spPr>
+      </p:sp>
+      <p:sp>
+        <p:nvSpPr>
+          <p:cNvPr id="104" name="Text 102"/>
+          <p:cNvSpPr/>
+          <p:nvPr/>
+        </p:nvSpPr>
+        <p:spPr>
+          <a:xfrm>
+            <a:off x="6309360" y="6400800"/>
+            <a:ext cx="777240" cy="832104"/>
+          </a:xfrm>
+          <a:prstGeom prst="rect">
+            <a:avLst/>
+          </a:prstGeom>
+          <a:noFill/>
+          <a:ln/>
+        </p:spPr>
+        <p:txBody>
+          <a:bodyPr wrap="square" lIns="0" tIns="0" rIns="0" bIns="0" rtlCol="0" anchor="ctr"/>
+          <a:lstStyle/>
+          <a:p>
+            <a:pPr indent="0" marL="0">
+              <a:buNone/>
+            </a:pPr>
+            <a:r>
+              <a:rPr lang="en-US" sz="750" b="1" dirty="0">
+                <a:solidFill>
+                  <a:srgbClr val="1F2937"/>
+                </a:solidFill>
+              </a:rPr>
+              <a:t>Testing</a:t>
+            </a:r>
+            <a:endParaRPr lang="en-US" sz="750" dirty="0"/>
+          </a:p>
+        </p:txBody>
+      </p:sp>
+      <p:sp>
+        <p:nvSpPr>
+          <p:cNvPr id="105" name="Text 103"/>
+          <p:cNvSpPr/>
+          <p:nvPr/>
+        </p:nvSpPr>
+        <p:spPr>
+          <a:xfrm>
+            <a:off x="7104888" y="6409944"/>
+            <a:ext cx="4178808" cy="813816"/>
+          </a:xfrm>
+          <a:prstGeom prst="rect">
+            <a:avLst/>
+          </a:prstGeom>
+          <a:noFill/>
+          <a:ln/>
+        </p:spPr>
+        <p:txBody>
+          <a:bodyPr wrap="square" lIns="0" tIns="0" rIns="0" bIns="0" rtlCol="0" anchor="t"/>
+          <a:lstStyle/>
+          <a:p>
+            <a:pPr indent="0" marL="0">
+              <a:buNone/>
+            </a:pPr>
+            <a:r>
+              <a:rPr lang="en-US" sz="650" dirty="0">
+                <a:solidFill>
+                  <a:srgbClr val="374151"/>
+                </a:solidFill>
+              </a:rPr>
+              <a:t>Testing E2E experience: Merchandising, sign-in flow, MVPD, Cleeng, replays.</a:t>
+            </a:r>
+            <a:endParaRPr lang="en-US" sz="650" dirty="0"/>
+          </a:p>
+        </p:txBody>
+      </p:sp>
+      <p:sp>
+        <p:nvSpPr>
+          <p:cNvPr id="106" name="Shape 104"/>
+          <p:cNvSpPr/>
+          <p:nvPr/>
+        </p:nvSpPr>
+        <p:spPr>
+          <a:xfrm>
+            <a:off x="11375136" y="6729984"/>
+            <a:ext cx="822960" cy="173736"/>
+          </a:xfrm>
+          <a:prstGeom prst="roundRect">
+            <a:avLst>
+              <a:gd name="adj" fmla="val 15789"/>
+            </a:avLst>
+          </a:prstGeom>
+          <a:solidFill>
             <a:srgbClr val="F3F4F6"/>
           </a:solidFill>
           <a:ln w="9525">
@@ -7996,7 +8171,7 @@
       </p:sp>
       <p:sp>
         <p:nvSpPr>
-          <p:cNvPr id="101" name="Text 99"/>
+          <p:cNvPr id="107" name="Text 105"/>
           <p:cNvSpPr/>
           <p:nvPr/>
         </p:nvSpPr>
@@ -8367,7 +8542,7 @@
                   <a:srgbClr val="374151"/>
                 </a:solidFill>
               </a:rPr>
-              <a:t>14  Not Started</a:t>
+              <a:t>15  Not Started</a:t>
             </a:r>
             <a:endParaRPr lang="en-US" sz="900" dirty="0"/>
           </a:p>
@@ -8590,7 +8765,7 @@
                   <a:srgbClr val="9CA3AF"/>
                 </a:solidFill>
               </a:rPr>
-              <a:t>Beta: Sep 30, 2026  ·  84 days remaining</a:t>
+              <a:t>Beta: Sep 30, 2026  ·  83 days remaining</a:t>
             </a:r>
             <a:endParaRPr lang="en-US" sz="800" dirty="0"/>
           </a:p>
@@ -11221,6 +11396,20 @@
             </a:r>
             <a:endParaRPr lang="en-US" sz="750" dirty="0"/>
           </a:p>
+          <a:p>
+            <a:pPr algn="ctr" indent="0" marL="0">
+              <a:buNone/>
+            </a:pPr>
+            <a:r>
+              <a:rPr lang="en-US" sz="750" b="1" dirty="0">
+                <a:solidFill>
+                  <a:srgbClr val="1E293B"/>
+                </a:solidFill>
+              </a:rPr>
+              <a:t>NPAW/BitMov</a:t>
+            </a:r>
+            <a:endParaRPr lang="en-US" sz="750" dirty="0"/>
+          </a:p>
         </p:txBody>
       </p:sp>
       <p:sp>
@@ -12662,7 +12851,7 @@
                   <a:srgbClr val="9CA3AF"/>
                 </a:solidFill>
               </a:rPr>
-              <a:t>1 / 5 In Progress</a:t>
+              <a:t>1 / 6 In Progress</a:t>
             </a:r>
             <a:endParaRPr lang="en-US" sz="750" dirty="0"/>
           </a:p>
@@ -13229,7 +13418,7 @@
                   <a:srgbClr val="1E293B"/>
                 </a:solidFill>
               </a:rPr>
-              <a:t>Promos</a:t>
+              <a:t>Cleeng</a:t>
             </a:r>
             <a:endParaRPr lang="en-US" sz="750" dirty="0"/>
           </a:p>
@@ -13306,6 +13495,132 @@
         </p:nvSpPr>
         <p:spPr>
           <a:xfrm>
+            <a:off x="6245352" y="5971032"/>
+            <a:ext cx="932688" cy="182880"/>
+          </a:xfrm>
+          <a:prstGeom prst="roundRect">
+            <a:avLst>
+              <a:gd name="adj" fmla="val 15000"/>
+            </a:avLst>
+          </a:prstGeom>
+          <a:solidFill>
+            <a:srgbClr val="FFFFFF"/>
+          </a:solidFill>
+          <a:ln w="9525">
+            <a:solidFill>
+              <a:srgbClr val="CBD5E1"/>
+            </a:solidFill>
+            <a:prstDash val="solid"/>
+          </a:ln>
+        </p:spPr>
+      </p:sp>
+      <p:sp>
+        <p:nvSpPr>
+          <p:cNvPr id="169" name="Text 167"/>
+          <p:cNvSpPr/>
+          <p:nvPr/>
+        </p:nvSpPr>
+        <p:spPr>
+          <a:xfrm>
+            <a:off x="6245352" y="5971032"/>
+            <a:ext cx="932688" cy="182880"/>
+          </a:xfrm>
+          <a:prstGeom prst="rect">
+            <a:avLst/>
+          </a:prstGeom>
+          <a:noFill/>
+          <a:ln/>
+        </p:spPr>
+        <p:txBody>
+          <a:bodyPr wrap="square" lIns="0" tIns="0" rIns="0" bIns="0" rtlCol="0" anchor="ctr"/>
+          <a:lstStyle/>
+          <a:p>
+            <a:pPr algn="ctr" indent="0" marL="0">
+              <a:buNone/>
+            </a:pPr>
+            <a:r>
+              <a:rPr lang="en-US" sz="750" b="1" dirty="0">
+                <a:solidFill>
+                  <a:srgbClr val="1E293B"/>
+                </a:solidFill>
+              </a:rPr>
+              <a:t>Promos</a:t>
+            </a:r>
+            <a:endParaRPr lang="en-US" sz="750" dirty="0"/>
+          </a:p>
+        </p:txBody>
+      </p:sp>
+      <p:sp>
+        <p:nvSpPr>
+          <p:cNvPr id="170" name="Shape 168"/>
+          <p:cNvSpPr/>
+          <p:nvPr/>
+        </p:nvSpPr>
+        <p:spPr>
+          <a:xfrm>
+            <a:off x="6245352" y="6181344"/>
+            <a:ext cx="932688" cy="155448"/>
+          </a:xfrm>
+          <a:prstGeom prst="roundRect">
+            <a:avLst>
+              <a:gd name="adj" fmla="val 17647"/>
+            </a:avLst>
+          </a:prstGeom>
+          <a:solidFill>
+            <a:srgbClr val="F3F4F6"/>
+          </a:solidFill>
+          <a:ln w="9525">
+            <a:solidFill>
+              <a:srgbClr val="D1D5DB"/>
+            </a:solidFill>
+            <a:prstDash val="solid"/>
+          </a:ln>
+        </p:spPr>
+      </p:sp>
+      <p:sp>
+        <p:nvSpPr>
+          <p:cNvPr id="171" name="Text 169"/>
+          <p:cNvSpPr/>
+          <p:nvPr/>
+        </p:nvSpPr>
+        <p:spPr>
+          <a:xfrm>
+            <a:off x="6245352" y="6181344"/>
+            <a:ext cx="932688" cy="155448"/>
+          </a:xfrm>
+          <a:prstGeom prst="rect">
+            <a:avLst/>
+          </a:prstGeom>
+          <a:noFill/>
+          <a:ln/>
+        </p:spPr>
+        <p:txBody>
+          <a:bodyPr wrap="square" lIns="0" tIns="0" rIns="0" bIns="0" rtlCol="0" anchor="ctr"/>
+          <a:lstStyle/>
+          <a:p>
+            <a:pPr algn="ctr" indent="0" marL="0">
+              <a:buNone/>
+            </a:pPr>
+            <a:r>
+              <a:rPr lang="en-US" sz="700" dirty="0">
+                <a:solidFill>
+                  <a:srgbClr val="374151"/>
+                </a:solidFill>
+              </a:rPr>
+              <a:t>Not Started</a:t>
+            </a:r>
+            <a:endParaRPr lang="en-US" sz="700" dirty="0"/>
+          </a:p>
+        </p:txBody>
+      </p:sp>
+      <p:sp>
+        <p:nvSpPr>
+          <p:cNvPr id="172" name="Shape 170"/>
+          <p:cNvSpPr/>
+          <p:nvPr/>
+        </p:nvSpPr>
+        <p:spPr>
+          <a:xfrm>
             <a:off x="9372600" y="804672"/>
             <a:ext cx="2834640" cy="6071616"/>
           </a:xfrm>
@@ -13325,7 +13640,7 @@
       </p:sp>
       <p:sp>
         <p:nvSpPr>
-          <p:cNvPr id="169" name="Text 167"/>
+          <p:cNvPr id="173" name="Text 171"/>
           <p:cNvSpPr/>
           <p:nvPr/>
         </p:nvSpPr>
@@ -13361,7 +13676,7 @@
       </p:sp>
       <p:sp>
         <p:nvSpPr>
-          <p:cNvPr id="170" name="Shape 168"/>
+          <p:cNvPr id="174" name="Shape 172"/>
           <p:cNvSpPr/>
           <p:nvPr/>
         </p:nvSpPr>
@@ -13386,7 +13701,7 @@
       </p:sp>
       <p:sp>
         <p:nvSpPr>
-          <p:cNvPr id="171" name="Shape 169"/>
+          <p:cNvPr id="175" name="Shape 173"/>
           <p:cNvSpPr/>
           <p:nvPr/>
         </p:nvSpPr>
@@ -13411,7 +13726,7 @@
       </p:sp>
       <p:sp>
         <p:nvSpPr>
-          <p:cNvPr id="172" name="Text 170"/>
+          <p:cNvPr id="176" name="Text 174"/>
           <p:cNvSpPr/>
           <p:nvPr/>
         </p:nvSpPr>
@@ -13447,7 +13762,7 @@
       </p:sp>
       <p:sp>
         <p:nvSpPr>
-          <p:cNvPr id="173" name="Text 171"/>
+          <p:cNvPr id="177" name="Text 175"/>
           <p:cNvSpPr/>
           <p:nvPr/>
         </p:nvSpPr>
@@ -13483,7 +13798,7 @@
       </p:sp>
       <p:sp>
         <p:nvSpPr>
-          <p:cNvPr id="174" name="Shape 172"/>
+          <p:cNvPr id="178" name="Shape 176"/>
           <p:cNvSpPr/>
           <p:nvPr/>
         </p:nvSpPr>
@@ -13510,7 +13825,7 @@
       </p:sp>
       <p:sp>
         <p:nvSpPr>
-          <p:cNvPr id="175" name="Text 173"/>
+          <p:cNvPr id="179" name="Text 177"/>
           <p:cNvSpPr/>
           <p:nvPr/>
         </p:nvSpPr>
@@ -13546,7 +13861,7 @@
       </p:sp>
       <p:sp>
         <p:nvSpPr>
-          <p:cNvPr id="176" name="Shape 174"/>
+          <p:cNvPr id="180" name="Shape 178"/>
           <p:cNvSpPr/>
           <p:nvPr/>
         </p:nvSpPr>
@@ -13571,7 +13886,7 @@
       </p:sp>
       <p:sp>
         <p:nvSpPr>
-          <p:cNvPr id="177" name="Shape 175"/>
+          <p:cNvPr id="181" name="Shape 179"/>
           <p:cNvSpPr/>
           <p:nvPr/>
         </p:nvSpPr>
@@ -13596,7 +13911,7 @@
       </p:sp>
       <p:sp>
         <p:nvSpPr>
-          <p:cNvPr id="178" name="Text 176"/>
+          <p:cNvPr id="182" name="Text 180"/>
           <p:cNvSpPr/>
           <p:nvPr/>
         </p:nvSpPr>
@@ -13632,7 +13947,7 @@
       </p:sp>
       <p:sp>
         <p:nvSpPr>
-          <p:cNvPr id="179" name="Text 177"/>
+          <p:cNvPr id="183" name="Text 181"/>
           <p:cNvSpPr/>
           <p:nvPr/>
         </p:nvSpPr>
@@ -13668,7 +13983,7 @@
       </p:sp>
       <p:sp>
         <p:nvSpPr>
-          <p:cNvPr id="180" name="Shape 178"/>
+          <p:cNvPr id="184" name="Shape 182"/>
           <p:cNvSpPr/>
           <p:nvPr/>
         </p:nvSpPr>
@@ -13695,7 +14010,7 @@
       </p:sp>
       <p:sp>
         <p:nvSpPr>
-          <p:cNvPr id="181" name="Text 179"/>
+          <p:cNvPr id="185" name="Text 183"/>
           <p:cNvSpPr/>
           <p:nvPr/>
         </p:nvSpPr>
@@ -13731,7 +14046,7 @@
       </p:sp>
       <p:sp>
         <p:nvSpPr>
-          <p:cNvPr id="182" name="Shape 180"/>
+          <p:cNvPr id="186" name="Shape 184"/>
           <p:cNvSpPr/>
           <p:nvPr/>
         </p:nvSpPr>
@@ -13756,7 +14071,7 @@
       </p:sp>
       <p:sp>
         <p:nvSpPr>
-          <p:cNvPr id="183" name="Shape 181"/>
+          <p:cNvPr id="187" name="Shape 185"/>
           <p:cNvSpPr/>
           <p:nvPr/>
         </p:nvSpPr>
@@ -13781,7 +14096,7 @@
       </p:sp>
       <p:sp>
         <p:nvSpPr>
-          <p:cNvPr id="184" name="Text 182"/>
+          <p:cNvPr id="188" name="Text 186"/>
           <p:cNvSpPr/>
           <p:nvPr/>
         </p:nvSpPr>
@@ -13817,7 +14132,7 @@
       </p:sp>
       <p:sp>
         <p:nvSpPr>
-          <p:cNvPr id="185" name="Text 183"/>
+          <p:cNvPr id="189" name="Text 187"/>
           <p:cNvSpPr/>
           <p:nvPr/>
         </p:nvSpPr>
@@ -13853,7 +14168,7 @@
       </p:sp>
       <p:sp>
         <p:nvSpPr>
-          <p:cNvPr id="186" name="Shape 184"/>
+          <p:cNvPr id="190" name="Shape 188"/>
           <p:cNvSpPr/>
           <p:nvPr/>
         </p:nvSpPr>
@@ -13880,7 +14195,7 @@
       </p:sp>
       <p:sp>
         <p:nvSpPr>
-          <p:cNvPr id="187" name="Text 185"/>
+          <p:cNvPr id="191" name="Text 189"/>
           <p:cNvSpPr/>
           <p:nvPr/>
         </p:nvSpPr>
@@ -13916,7 +14231,7 @@
       </p:sp>
       <p:sp>
         <p:nvSpPr>
-          <p:cNvPr id="188" name="Shape 186"/>
+          <p:cNvPr id="192" name="Shape 190"/>
           <p:cNvSpPr/>
           <p:nvPr/>
         </p:nvSpPr>
@@ -13941,7 +14256,7 @@
       </p:sp>
       <p:sp>
         <p:nvSpPr>
-          <p:cNvPr id="189" name="Shape 187"/>
+          <p:cNvPr id="193" name="Shape 191"/>
           <p:cNvSpPr/>
           <p:nvPr/>
         </p:nvSpPr>
@@ -13966,7 +14281,7 @@
       </p:sp>
       <p:sp>
         <p:nvSpPr>
-          <p:cNvPr id="190" name="Text 188"/>
+          <p:cNvPr id="194" name="Text 192"/>
           <p:cNvSpPr/>
           <p:nvPr/>
         </p:nvSpPr>
@@ -14002,7 +14317,7 @@
       </p:sp>
       <p:sp>
         <p:nvSpPr>
-          <p:cNvPr id="191" name="Text 189"/>
+          <p:cNvPr id="195" name="Text 193"/>
           <p:cNvSpPr/>
           <p:nvPr/>
         </p:nvSpPr>
@@ -14038,7 +14353,7 @@
       </p:sp>
       <p:sp>
         <p:nvSpPr>
-          <p:cNvPr id="192" name="Shape 190"/>
+          <p:cNvPr id="196" name="Shape 194"/>
           <p:cNvSpPr/>
           <p:nvPr/>
         </p:nvSpPr>
@@ -14065,7 +14380,7 @@
       </p:sp>
       <p:sp>
         <p:nvSpPr>
-          <p:cNvPr id="193" name="Text 191"/>
+          <p:cNvPr id="197" name="Text 195"/>
           <p:cNvSpPr/>
           <p:nvPr/>
         </p:nvSpPr>
@@ -14101,7 +14416,7 @@
       </p:sp>
       <p:sp>
         <p:nvSpPr>
-          <p:cNvPr id="194" name="Shape 192"/>
+          <p:cNvPr id="198" name="Shape 196"/>
           <p:cNvSpPr/>
           <p:nvPr/>
         </p:nvSpPr>
@@ -14124,7 +14439,7 @@
       </p:sp>
       <p:sp>
         <p:nvSpPr>
-          <p:cNvPr id="195" name="Text 193"/>
+          <p:cNvPr id="199" name="Text 197"/>
           <p:cNvSpPr/>
           <p:nvPr/>
         </p:nvSpPr>
@@ -14160,7 +14475,7 @@
       </p:sp>
       <p:sp>
         <p:nvSpPr>
-          <p:cNvPr id="196" name="Shape 194"/>
+          <p:cNvPr id="200" name="Shape 198"/>
           <p:cNvSpPr/>
           <p:nvPr/>
         </p:nvSpPr>
@@ -14187,7 +14502,7 @@
       </p:sp>
       <p:sp>
         <p:nvSpPr>
-          <p:cNvPr id="197" name="Text 195"/>
+          <p:cNvPr id="201" name="Text 199"/>
           <p:cNvSpPr/>
           <p:nvPr/>
         </p:nvSpPr>
@@ -14223,7 +14538,7 @@
       </p:sp>
       <p:sp>
         <p:nvSpPr>
-          <p:cNvPr id="198" name="Text 196"/>
+          <p:cNvPr id="202" name="Text 200"/>
           <p:cNvSpPr/>
           <p:nvPr/>
         </p:nvSpPr>
@@ -14259,7 +14574,7 @@
       </p:sp>
       <p:sp>
         <p:nvSpPr>
-          <p:cNvPr id="199" name="Shape 197"/>
+          <p:cNvPr id="203" name="Shape 201"/>
           <p:cNvSpPr/>
           <p:nvPr/>
         </p:nvSpPr>
@@ -14286,7 +14601,7 @@
       </p:sp>
       <p:sp>
         <p:nvSpPr>
-          <p:cNvPr id="200" name="Text 198"/>
+          <p:cNvPr id="204" name="Text 202"/>
           <p:cNvSpPr/>
           <p:nvPr/>
         </p:nvSpPr>
@@ -14322,7 +14637,7 @@
       </p:sp>
       <p:sp>
         <p:nvSpPr>
-          <p:cNvPr id="201" name="Text 199"/>
+          <p:cNvPr id="205" name="Text 203"/>
           <p:cNvSpPr/>
           <p:nvPr/>
         </p:nvSpPr>
@@ -14358,7 +14673,7 @@
       </p:sp>
       <p:sp>
         <p:nvSpPr>
-          <p:cNvPr id="202" name="Shape 200"/>
+          <p:cNvPr id="206" name="Shape 204"/>
           <p:cNvSpPr/>
           <p:nvPr/>
         </p:nvSpPr>
@@ -14385,7 +14700,7 @@
       </p:sp>
       <p:sp>
         <p:nvSpPr>
-          <p:cNvPr id="203" name="Text 201"/>
+          <p:cNvPr id="207" name="Text 205"/>
           <p:cNvSpPr/>
           <p:nvPr/>
         </p:nvSpPr>
@@ -14421,7 +14736,7 @@
       </p:sp>
       <p:sp>
         <p:nvSpPr>
-          <p:cNvPr id="204" name="Text 202"/>
+          <p:cNvPr id="208" name="Text 206"/>
           <p:cNvSpPr/>
           <p:nvPr/>
         </p:nvSpPr>
@@ -14457,7 +14772,7 @@
       </p:sp>
       <p:sp>
         <p:nvSpPr>
-          <p:cNvPr id="205" name="Shape 203"/>
+          <p:cNvPr id="209" name="Shape 207"/>
           <p:cNvSpPr/>
           <p:nvPr/>
         </p:nvSpPr>
@@ -14484,7 +14799,7 @@
       </p:sp>
       <p:sp>
         <p:nvSpPr>
-          <p:cNvPr id="206" name="Text 204"/>
+          <p:cNvPr id="210" name="Text 208"/>
           <p:cNvSpPr/>
           <p:nvPr/>
         </p:nvSpPr>
@@ -14520,7 +14835,7 @@
       </p:sp>
       <p:sp>
         <p:nvSpPr>
-          <p:cNvPr id="207" name="Text 205"/>
+          <p:cNvPr id="211" name="Text 209"/>
           <p:cNvSpPr/>
           <p:nvPr/>
         </p:nvSpPr>
@@ -14556,7 +14871,7 @@
       </p:sp>
       <p:sp>
         <p:nvSpPr>
-          <p:cNvPr id="208" name="Shape 206"/>
+          <p:cNvPr id="212" name="Shape 210"/>
           <p:cNvSpPr/>
           <p:nvPr/>
         </p:nvSpPr>
@@ -14583,7 +14898,7 @@
       </p:sp>
       <p:sp>
         <p:nvSpPr>
-          <p:cNvPr id="209" name="Text 207"/>
+          <p:cNvPr id="213" name="Text 211"/>
           <p:cNvSpPr/>
           <p:nvPr/>
         </p:nvSpPr>
@@ -14619,7 +14934,7 @@
       </p:sp>
       <p:sp>
         <p:nvSpPr>
-          <p:cNvPr id="210" name="Text 208"/>
+          <p:cNvPr id="214" name="Text 212"/>
           <p:cNvSpPr/>
           <p:nvPr/>
         </p:nvSpPr>

--- a/SABR_CPR_Component_Status.pptx
+++ b/SABR_CPR_Component_Status.pptx
@@ -13418,7 +13418,7 @@
                   <a:srgbClr val="1E293B"/>
                 </a:solidFill>
               </a:rPr>
-              <a:t>Cleeng</a:t>
+              <a:t>Promos</a:t>
             </a:r>
             <a:endParaRPr lang="en-US" sz="750" dirty="0"/>
           </a:p>
@@ -13544,7 +13544,7 @@
                   <a:srgbClr val="1E293B"/>
                 </a:solidFill>
               </a:rPr>
-              <a:t>Promos</a:t>
+              <a:t>Cleeng</a:t>
             </a:r>
             <a:endParaRPr lang="en-US" sz="750" dirty="0"/>
           </a:p>

--- a/SABR_CPR_Component_Status.pptx
+++ b/SABR_CPR_Component_Status.pptx
@@ -15246,7 +15246,7 @@
                   <a:srgbClr val="1D4ED8"/>
                 </a:solidFill>
               </a:rPr>
-              <a:t>14  In Progress</a:t>
+              <a:t>11  In Progress</a:t>
             </a:r>
             <a:endParaRPr lang="en-US" sz="900" dirty="0"/>
           </a:p>
@@ -15706,7 +15706,7 @@
                   <a:srgbClr val="9CA3AF"/>
                 </a:solidFill>
               </a:rPr>
-              <a:t>6 / 6 In Progress</a:t>
+              <a:t>3 / 3 In Progress</a:t>
             </a:r>
             <a:endParaRPr lang="en-US" sz="750" dirty="0"/>
           </a:p>
@@ -15895,7 +15895,7 @@
                   <a:srgbClr val="1E293B"/>
                 </a:solidFill>
               </a:rPr>
-              <a:t>MPEG-DASH</a:t>
+              <a:t>VOD Streams</a:t>
             </a:r>
             <a:endParaRPr lang="en-US" sz="750" dirty="0"/>
           </a:p>
@@ -16021,7 +16021,7 @@
                   <a:srgbClr val="1E293B"/>
                 </a:solidFill>
               </a:rPr>
-              <a:t>FairPlay DRM</a:t>
+              <a:t>Linear</a:t>
             </a:r>
             <a:endParaRPr lang="en-US" sz="750" dirty="0"/>
           </a:p>
@@ -16098,7 +16098,131 @@
         </p:nvSpPr>
         <p:spPr>
           <a:xfrm>
-            <a:off x="4215384" y="1069848"/>
+            <a:off x="164592" y="2336292"/>
+            <a:ext cx="9116568" cy="1476756"/>
+          </a:xfrm>
+          <a:prstGeom prst="rect">
+            <a:avLst/>
+          </a:prstGeom>
+          <a:solidFill>
+            <a:srgbClr val="FFFFFF"/>
+          </a:solidFill>
+          <a:ln w="6350">
+            <a:solidFill>
+              <a:srgbClr val="E5E7EB"/>
+            </a:solidFill>
+            <a:prstDash val="solid"/>
+          </a:ln>
+        </p:spPr>
+      </p:sp>
+      <p:sp>
+        <p:nvSpPr>
+          <p:cNvPr id="37" name="Shape 35"/>
+          <p:cNvSpPr/>
+          <p:nvPr/>
+        </p:nvSpPr>
+        <p:spPr>
+          <a:xfrm>
+            <a:off x="182880" y="2409444"/>
+            <a:ext cx="859536" cy="1330452"/>
+          </a:xfrm>
+          <a:prstGeom prst="roundRect">
+            <a:avLst>
+              <a:gd name="adj" fmla="val 5319"/>
+            </a:avLst>
+          </a:prstGeom>
+          <a:solidFill>
+            <a:srgbClr val="9CA3AF"/>
+          </a:solidFill>
+          <a:ln w="12700">
+            <a:solidFill>
+              <a:srgbClr val="9CA3AF"/>
+            </a:solidFill>
+            <a:prstDash val="solid"/>
+          </a:ln>
+        </p:spPr>
+      </p:sp>
+      <p:sp>
+        <p:nvSpPr>
+          <p:cNvPr id="38" name="Text 36"/>
+          <p:cNvSpPr/>
+          <p:nvPr/>
+        </p:nvSpPr>
+        <p:spPr>
+          <a:xfrm>
+            <a:off x="182880" y="2409444"/>
+            <a:ext cx="859536" cy="1330452"/>
+          </a:xfrm>
+          <a:prstGeom prst="rect">
+            <a:avLst/>
+          </a:prstGeom>
+          <a:noFill/>
+          <a:ln/>
+        </p:spPr>
+        <p:txBody>
+          <a:bodyPr wrap="square" lIns="0" tIns="0" rIns="0" bIns="0" rtlCol="0" anchor="ctr"/>
+          <a:lstStyle/>
+          <a:p>
+            <a:pPr algn="ctr" indent="0" marL="0">
+              <a:buNone/>
+            </a:pPr>
+            <a:r>
+              <a:rPr lang="en-US" sz="800" b="1" dirty="0">
+                <a:solidFill>
+                  <a:srgbClr val="FFFFFF"/>
+                </a:solidFill>
+              </a:rPr>
+              <a:t>Player</a:t>
+            </a:r>
+            <a:endParaRPr lang="en-US" sz="800" dirty="0"/>
+          </a:p>
+        </p:txBody>
+      </p:sp>
+      <p:sp>
+        <p:nvSpPr>
+          <p:cNvPr id="39" name="Text 37"/>
+          <p:cNvSpPr/>
+          <p:nvPr/>
+        </p:nvSpPr>
+        <p:spPr>
+          <a:xfrm>
+            <a:off x="1170432" y="2382012"/>
+            <a:ext cx="8110728" cy="182880"/>
+          </a:xfrm>
+          <a:prstGeom prst="rect">
+            <a:avLst/>
+          </a:prstGeom>
+          <a:noFill/>
+          <a:ln/>
+        </p:spPr>
+        <p:txBody>
+          <a:bodyPr wrap="square" lIns="0" tIns="0" rIns="0" bIns="0" rtlCol="0" anchor="ctr"/>
+          <a:lstStyle/>
+          <a:p>
+            <a:pPr algn="l" indent="0" marL="0">
+              <a:buNone/>
+            </a:pPr>
+            <a:r>
+              <a:rPr lang="en-US" sz="750" dirty="0">
+                <a:solidFill>
+                  <a:srgbClr val="9CA3AF"/>
+                </a:solidFill>
+              </a:rPr>
+              <a:t>2 / 3 In Progress</a:t>
+            </a:r>
+            <a:endParaRPr lang="en-US" sz="750" dirty="0"/>
+          </a:p>
+        </p:txBody>
+      </p:sp>
+      <p:sp>
+        <p:nvSpPr>
+          <p:cNvPr id="40" name="Shape 38"/>
+          <p:cNvSpPr/>
+          <p:nvPr/>
+        </p:nvSpPr>
+        <p:spPr>
+          <a:xfrm>
+            <a:off x="1170432" y="2601468"/>
             <a:ext cx="932688" cy="182880"/>
           </a:xfrm>
           <a:prstGeom prst="roundRect">
@@ -16119,13 +16243,13 @@
       </p:sp>
       <p:sp>
         <p:nvSpPr>
-          <p:cNvPr id="37" name="Text 35"/>
-          <p:cNvSpPr/>
-          <p:nvPr/>
-        </p:nvSpPr>
-        <p:spPr>
-          <a:xfrm>
-            <a:off x="4215384" y="1069848"/>
+          <p:cNvPr id="41" name="Text 39"/>
+          <p:cNvSpPr/>
+          <p:nvPr/>
+        </p:nvSpPr>
+        <p:spPr>
+          <a:xfrm>
+            <a:off x="1170432" y="2601468"/>
             <a:ext cx="932688" cy="182880"/>
           </a:xfrm>
           <a:prstGeom prst="rect">
@@ -16147,7 +16271,7 @@
                   <a:srgbClr val="1E293B"/>
                 </a:solidFill>
               </a:rPr>
-              <a:t>Widevine DRM</a:t>
+              <a:t>Web Player</a:t>
             </a:r>
             <a:endParaRPr lang="en-US" sz="750" dirty="0"/>
           </a:p>
@@ -16155,13 +16279,13 @@
       </p:sp>
       <p:sp>
         <p:nvSpPr>
-          <p:cNvPr id="38" name="Shape 36"/>
-          <p:cNvSpPr/>
-          <p:nvPr/>
-        </p:nvSpPr>
-        <p:spPr>
-          <a:xfrm>
-            <a:off x="4215384" y="1280160"/>
+          <p:cNvPr id="42" name="Shape 40"/>
+          <p:cNvSpPr/>
+          <p:nvPr/>
+        </p:nvSpPr>
+        <p:spPr>
+          <a:xfrm>
+            <a:off x="1170432" y="2811780"/>
             <a:ext cx="932688" cy="155448"/>
           </a:xfrm>
           <a:prstGeom prst="roundRect">
@@ -16182,13 +16306,13 @@
       </p:sp>
       <p:sp>
         <p:nvSpPr>
-          <p:cNvPr id="39" name="Text 37"/>
-          <p:cNvSpPr/>
-          <p:nvPr/>
-        </p:nvSpPr>
-        <p:spPr>
-          <a:xfrm>
-            <a:off x="4215384" y="1280160"/>
+          <p:cNvPr id="43" name="Text 41"/>
+          <p:cNvSpPr/>
+          <p:nvPr/>
+        </p:nvSpPr>
+        <p:spPr>
+          <a:xfrm>
+            <a:off x="1170432" y="2811780"/>
             <a:ext cx="932688" cy="155448"/>
           </a:xfrm>
           <a:prstGeom prst="rect">
@@ -16218,13 +16342,13 @@
       </p:sp>
       <p:sp>
         <p:nvSpPr>
-          <p:cNvPr id="40" name="Shape 38"/>
-          <p:cNvSpPr/>
-          <p:nvPr/>
-        </p:nvSpPr>
-        <p:spPr>
-          <a:xfrm>
-            <a:off x="5230368" y="1069848"/>
+          <p:cNvPr id="44" name="Shape 42"/>
+          <p:cNvSpPr/>
+          <p:nvPr/>
+        </p:nvSpPr>
+        <p:spPr>
+          <a:xfrm>
+            <a:off x="2185416" y="2601468"/>
             <a:ext cx="932688" cy="182880"/>
           </a:xfrm>
           <a:prstGeom prst="roundRect">
@@ -16245,13 +16369,13 @@
       </p:sp>
       <p:sp>
         <p:nvSpPr>
-          <p:cNvPr id="41" name="Text 39"/>
-          <p:cNvSpPr/>
-          <p:nvPr/>
-        </p:nvSpPr>
-        <p:spPr>
-          <a:xfrm>
-            <a:off x="5230368" y="1069848"/>
+          <p:cNvPr id="45" name="Text 43"/>
+          <p:cNvSpPr/>
+          <p:nvPr/>
+        </p:nvSpPr>
+        <p:spPr>
+          <a:xfrm>
+            <a:off x="2185416" y="2601468"/>
             <a:ext cx="932688" cy="182880"/>
           </a:xfrm>
           <a:prstGeom prst="rect">
@@ -16273,7 +16397,7 @@
                   <a:srgbClr val="1E293B"/>
                 </a:solidFill>
               </a:rPr>
-              <a:t>VOD Streams</a:t>
+              <a:t>HLS/DASH PB</a:t>
             </a:r>
             <a:endParaRPr lang="en-US" sz="750" dirty="0"/>
           </a:p>
@@ -16281,13 +16405,13 @@
       </p:sp>
       <p:sp>
         <p:nvSpPr>
-          <p:cNvPr id="42" name="Shape 40"/>
-          <p:cNvSpPr/>
-          <p:nvPr/>
-        </p:nvSpPr>
-        <p:spPr>
-          <a:xfrm>
-            <a:off x="5230368" y="1280160"/>
+          <p:cNvPr id="46" name="Shape 44"/>
+          <p:cNvSpPr/>
+          <p:nvPr/>
+        </p:nvSpPr>
+        <p:spPr>
+          <a:xfrm>
+            <a:off x="2185416" y="2811780"/>
             <a:ext cx="932688" cy="155448"/>
           </a:xfrm>
           <a:prstGeom prst="roundRect">
@@ -16308,13 +16432,13 @@
       </p:sp>
       <p:sp>
         <p:nvSpPr>
-          <p:cNvPr id="43" name="Text 41"/>
-          <p:cNvSpPr/>
-          <p:nvPr/>
-        </p:nvSpPr>
-        <p:spPr>
-          <a:xfrm>
-            <a:off x="5230368" y="1280160"/>
+          <p:cNvPr id="47" name="Text 45"/>
+          <p:cNvSpPr/>
+          <p:nvPr/>
+        </p:nvSpPr>
+        <p:spPr>
+          <a:xfrm>
+            <a:off x="2185416" y="2811780"/>
             <a:ext cx="932688" cy="155448"/>
           </a:xfrm>
           <a:prstGeom prst="rect">
@@ -16344,13 +16468,13 @@
       </p:sp>
       <p:sp>
         <p:nvSpPr>
-          <p:cNvPr id="44" name="Shape 42"/>
-          <p:cNvSpPr/>
-          <p:nvPr/>
-        </p:nvSpPr>
-        <p:spPr>
-          <a:xfrm>
-            <a:off x="6245352" y="1069848"/>
+          <p:cNvPr id="48" name="Shape 46"/>
+          <p:cNvSpPr/>
+          <p:nvPr/>
+        </p:nvSpPr>
+        <p:spPr>
+          <a:xfrm>
+            <a:off x="3200400" y="2601468"/>
             <a:ext cx="932688" cy="182880"/>
           </a:xfrm>
           <a:prstGeom prst="roundRect">
@@ -16371,13 +16495,13 @@
       </p:sp>
       <p:sp>
         <p:nvSpPr>
-          <p:cNvPr id="45" name="Text 43"/>
-          <p:cNvSpPr/>
-          <p:nvPr/>
-        </p:nvSpPr>
-        <p:spPr>
-          <a:xfrm>
-            <a:off x="6245352" y="1069848"/>
+          <p:cNvPr id="49" name="Text 47"/>
+          <p:cNvSpPr/>
+          <p:nvPr/>
+        </p:nvSpPr>
+        <p:spPr>
+          <a:xfrm>
+            <a:off x="3200400" y="2601468"/>
             <a:ext cx="932688" cy="182880"/>
           </a:xfrm>
           <a:prstGeom prst="rect">
@@ -16399,21 +16523,35 @@
                   <a:srgbClr val="1E293B"/>
                 </a:solidFill>
               </a:rPr>
-              <a:t>Linear</a:t>
+              <a:t>Bitmovin QOE</a:t>
             </a:r>
             <a:endParaRPr lang="en-US" sz="750" dirty="0"/>
           </a:p>
-        </p:txBody>
-      </p:sp>
-      <p:sp>
-        <p:nvSpPr>
-          <p:cNvPr id="46" name="Shape 44"/>
-          <p:cNvSpPr/>
-          <p:nvPr/>
-        </p:nvSpPr>
-        <p:spPr>
-          <a:xfrm>
-            <a:off x="6245352" y="1280160"/>
+          <a:p>
+            <a:pPr algn="ctr" indent="0" marL="0">
+              <a:buNone/>
+            </a:pPr>
+            <a:r>
+              <a:rPr lang="en-US" sz="750" b="1" dirty="0">
+                <a:solidFill>
+                  <a:srgbClr val="1E293B"/>
+                </a:solidFill>
+              </a:rPr>
+              <a:t>NPAW/BitMov</a:t>
+            </a:r>
+            <a:endParaRPr lang="en-US" sz="750" dirty="0"/>
+          </a:p>
+        </p:txBody>
+      </p:sp>
+      <p:sp>
+        <p:nvSpPr>
+          <p:cNvPr id="50" name="Shape 48"/>
+          <p:cNvSpPr/>
+          <p:nvPr/>
+        </p:nvSpPr>
+        <p:spPr>
+          <a:xfrm>
+            <a:off x="3200400" y="2811780"/>
             <a:ext cx="932688" cy="155448"/>
           </a:xfrm>
           <a:prstGeom prst="roundRect">
@@ -16422,25 +16560,25 @@
             </a:avLst>
           </a:prstGeom>
           <a:solidFill>
-            <a:srgbClr val="1558A8"/>
-          </a:solidFill>
-          <a:ln w="12700">
-            <a:solidFill>
-              <a:srgbClr val="1558A8"/>
-            </a:solidFill>
-            <a:prstDash val="solid"/>
-          </a:ln>
-        </p:spPr>
-      </p:sp>
-      <p:sp>
-        <p:nvSpPr>
-          <p:cNvPr id="47" name="Text 45"/>
-          <p:cNvSpPr/>
-          <p:nvPr/>
-        </p:nvSpPr>
-        <p:spPr>
-          <a:xfrm>
-            <a:off x="6245352" y="1280160"/>
+            <a:srgbClr val="F3F4F6"/>
+          </a:solidFill>
+          <a:ln w="9525">
+            <a:solidFill>
+              <a:srgbClr val="D1D5DB"/>
+            </a:solidFill>
+            <a:prstDash val="solid"/>
+          </a:ln>
+        </p:spPr>
+      </p:sp>
+      <p:sp>
+        <p:nvSpPr>
+          <p:cNvPr id="51" name="Text 49"/>
+          <p:cNvSpPr/>
+          <p:nvPr/>
+        </p:nvSpPr>
+        <p:spPr>
+          <a:xfrm>
+            <a:off x="3200400" y="2811780"/>
             <a:ext cx="932688" cy="155448"/>
           </a:xfrm>
           <a:prstGeom prst="rect">
@@ -16459,10 +16597,10 @@
             <a:r>
               <a:rPr lang="en-US" sz="700" dirty="0">
                 <a:solidFill>
-                  <a:srgbClr val="FFFFFF"/>
-                </a:solidFill>
-              </a:rPr>
-              <a:t>In Progress</a:t>
+                  <a:srgbClr val="374151"/>
+                </a:solidFill>
+              </a:rPr>
+              <a:t>Not Started</a:t>
             </a:r>
             <a:endParaRPr lang="en-US" sz="700" dirty="0"/>
           </a:p>
@@ -16470,20 +16608,20 @@
       </p:sp>
       <p:sp>
         <p:nvSpPr>
-          <p:cNvPr id="48" name="Shape 46"/>
-          <p:cNvSpPr/>
-          <p:nvPr/>
-        </p:nvSpPr>
-        <p:spPr>
-          <a:xfrm>
-            <a:off x="164592" y="2336292"/>
+          <p:cNvPr id="52" name="Shape 50"/>
+          <p:cNvSpPr/>
+          <p:nvPr/>
+        </p:nvSpPr>
+        <p:spPr>
+          <a:xfrm>
+            <a:off x="164592" y="3867912"/>
             <a:ext cx="9116568" cy="1476756"/>
           </a:xfrm>
           <a:prstGeom prst="rect">
             <a:avLst/>
           </a:prstGeom>
           <a:solidFill>
-            <a:srgbClr val="FFFFFF"/>
+            <a:srgbClr val="FAFBFC"/>
           </a:solidFill>
           <a:ln w="6350">
             <a:solidFill>
@@ -16495,13 +16633,13 @@
       </p:sp>
       <p:sp>
         <p:nvSpPr>
-          <p:cNvPr id="49" name="Shape 47"/>
-          <p:cNvSpPr/>
-          <p:nvPr/>
-        </p:nvSpPr>
-        <p:spPr>
-          <a:xfrm>
-            <a:off x="182880" y="2409444"/>
+          <p:cNvPr id="53" name="Shape 51"/>
+          <p:cNvSpPr/>
+          <p:nvPr/>
+        </p:nvSpPr>
+        <p:spPr>
+          <a:xfrm>
+            <a:off x="182880" y="3941064"/>
             <a:ext cx="859536" cy="1330452"/>
           </a:xfrm>
           <a:prstGeom prst="roundRect">
@@ -16522,13 +16660,13 @@
       </p:sp>
       <p:sp>
         <p:nvSpPr>
-          <p:cNvPr id="50" name="Text 48"/>
-          <p:cNvSpPr/>
-          <p:nvPr/>
-        </p:nvSpPr>
-        <p:spPr>
-          <a:xfrm>
-            <a:off x="182880" y="2409444"/>
+          <p:cNvPr id="54" name="Text 52"/>
+          <p:cNvSpPr/>
+          <p:nvPr/>
+        </p:nvSpPr>
+        <p:spPr>
+          <a:xfrm>
+            <a:off x="182880" y="3941064"/>
             <a:ext cx="859536" cy="1330452"/>
           </a:xfrm>
           <a:prstGeom prst="rect">
@@ -16550,7 +16688,7 @@
                   <a:srgbClr val="FFFFFF"/>
                 </a:solidFill>
               </a:rPr>
-              <a:t>Player</a:t>
+              <a:t>Merchandising</a:t>
             </a:r>
             <a:endParaRPr lang="en-US" sz="800" dirty="0"/>
           </a:p>
@@ -16558,13 +16696,13 @@
       </p:sp>
       <p:sp>
         <p:nvSpPr>
-          <p:cNvPr id="51" name="Text 49"/>
-          <p:cNvSpPr/>
-          <p:nvPr/>
-        </p:nvSpPr>
-        <p:spPr>
-          <a:xfrm>
-            <a:off x="1170432" y="2382012"/>
+          <p:cNvPr id="55" name="Text 53"/>
+          <p:cNvSpPr/>
+          <p:nvPr/>
+        </p:nvSpPr>
+        <p:spPr>
+          <a:xfrm>
+            <a:off x="1170432" y="3913632"/>
             <a:ext cx="8110728" cy="182880"/>
           </a:xfrm>
           <a:prstGeom prst="rect">
@@ -16586,7 +16724,7 @@
                   <a:srgbClr val="9CA3AF"/>
                 </a:solidFill>
               </a:rPr>
-              <a:t>2 / 3 In Progress</a:t>
+              <a:t>5 / 9 In Progress</a:t>
             </a:r>
             <a:endParaRPr lang="en-US" sz="750" dirty="0"/>
           </a:p>
@@ -16594,13 +16732,13 @@
       </p:sp>
       <p:sp>
         <p:nvSpPr>
-          <p:cNvPr id="52" name="Shape 50"/>
-          <p:cNvSpPr/>
-          <p:nvPr/>
-        </p:nvSpPr>
-        <p:spPr>
-          <a:xfrm>
-            <a:off x="1170432" y="2601468"/>
+          <p:cNvPr id="56" name="Shape 54"/>
+          <p:cNvSpPr/>
+          <p:nvPr/>
+        </p:nvSpPr>
+        <p:spPr>
+          <a:xfrm>
+            <a:off x="1170432" y="4133088"/>
             <a:ext cx="932688" cy="182880"/>
           </a:xfrm>
           <a:prstGeom prst="roundRect">
@@ -16621,13 +16759,13 @@
       </p:sp>
       <p:sp>
         <p:nvSpPr>
-          <p:cNvPr id="53" name="Text 51"/>
-          <p:cNvSpPr/>
-          <p:nvPr/>
-        </p:nvSpPr>
-        <p:spPr>
-          <a:xfrm>
-            <a:off x="1170432" y="2601468"/>
+          <p:cNvPr id="57" name="Text 55"/>
+          <p:cNvSpPr/>
+          <p:nvPr/>
+        </p:nvSpPr>
+        <p:spPr>
+          <a:xfrm>
+            <a:off x="1170432" y="4133088"/>
             <a:ext cx="932688" cy="182880"/>
           </a:xfrm>
           <a:prstGeom prst="rect">
@@ -16649,7 +16787,7 @@
                   <a:srgbClr val="1E293B"/>
                 </a:solidFill>
               </a:rPr>
-              <a:t>Web Player</a:t>
+              <a:t>Metadata</a:t>
             </a:r>
             <a:endParaRPr lang="en-US" sz="750" dirty="0"/>
           </a:p>
@@ -16657,13 +16795,13 @@
       </p:sp>
       <p:sp>
         <p:nvSpPr>
-          <p:cNvPr id="54" name="Shape 52"/>
-          <p:cNvSpPr/>
-          <p:nvPr/>
-        </p:nvSpPr>
-        <p:spPr>
-          <a:xfrm>
-            <a:off x="1170432" y="2811780"/>
+          <p:cNvPr id="58" name="Shape 56"/>
+          <p:cNvSpPr/>
+          <p:nvPr/>
+        </p:nvSpPr>
+        <p:spPr>
+          <a:xfrm>
+            <a:off x="1170432" y="4343400"/>
             <a:ext cx="932688" cy="155448"/>
           </a:xfrm>
           <a:prstGeom prst="roundRect">
@@ -16684,13 +16822,13 @@
       </p:sp>
       <p:sp>
         <p:nvSpPr>
-          <p:cNvPr id="55" name="Text 53"/>
-          <p:cNvSpPr/>
-          <p:nvPr/>
-        </p:nvSpPr>
-        <p:spPr>
-          <a:xfrm>
-            <a:off x="1170432" y="2811780"/>
+          <p:cNvPr id="59" name="Text 57"/>
+          <p:cNvSpPr/>
+          <p:nvPr/>
+        </p:nvSpPr>
+        <p:spPr>
+          <a:xfrm>
+            <a:off x="1170432" y="4343400"/>
             <a:ext cx="932688" cy="155448"/>
           </a:xfrm>
           <a:prstGeom prst="rect">
@@ -16720,13 +16858,13 @@
       </p:sp>
       <p:sp>
         <p:nvSpPr>
-          <p:cNvPr id="56" name="Shape 54"/>
-          <p:cNvSpPr/>
-          <p:nvPr/>
-        </p:nvSpPr>
-        <p:spPr>
-          <a:xfrm>
-            <a:off x="2185416" y="2601468"/>
+          <p:cNvPr id="60" name="Shape 58"/>
+          <p:cNvSpPr/>
+          <p:nvPr/>
+        </p:nvSpPr>
+        <p:spPr>
+          <a:xfrm>
+            <a:off x="2185416" y="4133088"/>
             <a:ext cx="932688" cy="182880"/>
           </a:xfrm>
           <a:prstGeom prst="roundRect">
@@ -16747,13 +16885,13 @@
       </p:sp>
       <p:sp>
         <p:nvSpPr>
-          <p:cNvPr id="57" name="Text 55"/>
-          <p:cNvSpPr/>
-          <p:nvPr/>
-        </p:nvSpPr>
-        <p:spPr>
-          <a:xfrm>
-            <a:off x="2185416" y="2601468"/>
+          <p:cNvPr id="61" name="Text 59"/>
+          <p:cNvSpPr/>
+          <p:nvPr/>
+        </p:nvSpPr>
+        <p:spPr>
+          <a:xfrm>
+            <a:off x="2185416" y="4133088"/>
             <a:ext cx="932688" cy="182880"/>
           </a:xfrm>
           <a:prstGeom prst="rect">
@@ -16775,7 +16913,7 @@
                   <a:srgbClr val="1E293B"/>
                 </a:solidFill>
               </a:rPr>
-              <a:t>HLS/DASH PB</a:t>
+              <a:t>Images</a:t>
             </a:r>
             <a:endParaRPr lang="en-US" sz="750" dirty="0"/>
           </a:p>
@@ -16783,13 +16921,13 @@
       </p:sp>
       <p:sp>
         <p:nvSpPr>
-          <p:cNvPr id="58" name="Shape 56"/>
-          <p:cNvSpPr/>
-          <p:nvPr/>
-        </p:nvSpPr>
-        <p:spPr>
-          <a:xfrm>
-            <a:off x="2185416" y="2811780"/>
+          <p:cNvPr id="62" name="Shape 60"/>
+          <p:cNvSpPr/>
+          <p:nvPr/>
+        </p:nvSpPr>
+        <p:spPr>
+          <a:xfrm>
+            <a:off x="2185416" y="4343400"/>
             <a:ext cx="932688" cy="155448"/>
           </a:xfrm>
           <a:prstGeom prst="roundRect">
@@ -16810,13 +16948,13 @@
       </p:sp>
       <p:sp>
         <p:nvSpPr>
-          <p:cNvPr id="59" name="Text 57"/>
-          <p:cNvSpPr/>
-          <p:nvPr/>
-        </p:nvSpPr>
-        <p:spPr>
-          <a:xfrm>
-            <a:off x="2185416" y="2811780"/>
+          <p:cNvPr id="63" name="Text 61"/>
+          <p:cNvSpPr/>
+          <p:nvPr/>
+        </p:nvSpPr>
+        <p:spPr>
+          <a:xfrm>
+            <a:off x="2185416" y="4343400"/>
             <a:ext cx="932688" cy="155448"/>
           </a:xfrm>
           <a:prstGeom prst="rect">
@@ -16846,13 +16984,13 @@
       </p:sp>
       <p:sp>
         <p:nvSpPr>
-          <p:cNvPr id="60" name="Shape 58"/>
-          <p:cNvSpPr/>
-          <p:nvPr/>
-        </p:nvSpPr>
-        <p:spPr>
-          <a:xfrm>
-            <a:off x="3200400" y="2601468"/>
+          <p:cNvPr id="64" name="Shape 62"/>
+          <p:cNvSpPr/>
+          <p:nvPr/>
+        </p:nvSpPr>
+        <p:spPr>
+          <a:xfrm>
+            <a:off x="3200400" y="4133088"/>
             <a:ext cx="932688" cy="182880"/>
           </a:xfrm>
           <a:prstGeom prst="roundRect">
@@ -16873,13 +17011,13 @@
       </p:sp>
       <p:sp>
         <p:nvSpPr>
-          <p:cNvPr id="61" name="Text 59"/>
-          <p:cNvSpPr/>
-          <p:nvPr/>
-        </p:nvSpPr>
-        <p:spPr>
-          <a:xfrm>
-            <a:off x="3200400" y="2601468"/>
+          <p:cNvPr id="65" name="Text 63"/>
+          <p:cNvSpPr/>
+          <p:nvPr/>
+        </p:nvSpPr>
+        <p:spPr>
+          <a:xfrm>
+            <a:off x="3200400" y="4133088"/>
             <a:ext cx="932688" cy="182880"/>
           </a:xfrm>
           <a:prstGeom prst="rect">
@@ -16901,35 +17039,21 @@
                   <a:srgbClr val="1E293B"/>
                 </a:solidFill>
               </a:rPr>
-              <a:t>Bitmovin QOE</a:t>
+              <a:t>Carousels</a:t>
             </a:r>
             <a:endParaRPr lang="en-US" sz="750" dirty="0"/>
           </a:p>
-          <a:p>
-            <a:pPr algn="ctr" indent="0" marL="0">
-              <a:buNone/>
-            </a:pPr>
-            <a:r>
-              <a:rPr lang="en-US" sz="750" b="1" dirty="0">
-                <a:solidFill>
-                  <a:srgbClr val="1E293B"/>
-                </a:solidFill>
-              </a:rPr>
-              <a:t>NPAW/BitMov</a:t>
-            </a:r>
-            <a:endParaRPr lang="en-US" sz="750" dirty="0"/>
-          </a:p>
-        </p:txBody>
-      </p:sp>
-      <p:sp>
-        <p:nvSpPr>
-          <p:cNvPr id="62" name="Shape 60"/>
-          <p:cNvSpPr/>
-          <p:nvPr/>
-        </p:nvSpPr>
-        <p:spPr>
-          <a:xfrm>
-            <a:off x="3200400" y="2811780"/>
+        </p:txBody>
+      </p:sp>
+      <p:sp>
+        <p:nvSpPr>
+          <p:cNvPr id="66" name="Shape 64"/>
+          <p:cNvSpPr/>
+          <p:nvPr/>
+        </p:nvSpPr>
+        <p:spPr>
+          <a:xfrm>
+            <a:off x="3200400" y="4343400"/>
             <a:ext cx="932688" cy="155448"/>
           </a:xfrm>
           <a:prstGeom prst="roundRect">
@@ -16938,6 +17062,258 @@
             </a:avLst>
           </a:prstGeom>
           <a:solidFill>
+            <a:srgbClr val="1558A8"/>
+          </a:solidFill>
+          <a:ln w="12700">
+            <a:solidFill>
+              <a:srgbClr val="1558A8"/>
+            </a:solidFill>
+            <a:prstDash val="solid"/>
+          </a:ln>
+        </p:spPr>
+      </p:sp>
+      <p:sp>
+        <p:nvSpPr>
+          <p:cNvPr id="67" name="Text 65"/>
+          <p:cNvSpPr/>
+          <p:nvPr/>
+        </p:nvSpPr>
+        <p:spPr>
+          <a:xfrm>
+            <a:off x="3200400" y="4343400"/>
+            <a:ext cx="932688" cy="155448"/>
+          </a:xfrm>
+          <a:prstGeom prst="rect">
+            <a:avLst/>
+          </a:prstGeom>
+          <a:noFill/>
+          <a:ln/>
+        </p:spPr>
+        <p:txBody>
+          <a:bodyPr wrap="square" lIns="0" tIns="0" rIns="0" bIns="0" rtlCol="0" anchor="ctr"/>
+          <a:lstStyle/>
+          <a:p>
+            <a:pPr algn="ctr" indent="0" marL="0">
+              <a:buNone/>
+            </a:pPr>
+            <a:r>
+              <a:rPr lang="en-US" sz="700" dirty="0">
+                <a:solidFill>
+                  <a:srgbClr val="FFFFFF"/>
+                </a:solidFill>
+              </a:rPr>
+              <a:t>In Progress</a:t>
+            </a:r>
+            <a:endParaRPr lang="en-US" sz="700" dirty="0"/>
+          </a:p>
+        </p:txBody>
+      </p:sp>
+      <p:sp>
+        <p:nvSpPr>
+          <p:cNvPr id="68" name="Shape 66"/>
+          <p:cNvSpPr/>
+          <p:nvPr/>
+        </p:nvSpPr>
+        <p:spPr>
+          <a:xfrm>
+            <a:off x="4215384" y="4133088"/>
+            <a:ext cx="932688" cy="182880"/>
+          </a:xfrm>
+          <a:prstGeom prst="roundRect">
+            <a:avLst>
+              <a:gd name="adj" fmla="val 15000"/>
+            </a:avLst>
+          </a:prstGeom>
+          <a:solidFill>
+            <a:srgbClr val="FFFFFF"/>
+          </a:solidFill>
+          <a:ln w="9525">
+            <a:solidFill>
+              <a:srgbClr val="CBD5E1"/>
+            </a:solidFill>
+            <a:prstDash val="solid"/>
+          </a:ln>
+        </p:spPr>
+      </p:sp>
+      <p:sp>
+        <p:nvSpPr>
+          <p:cNvPr id="69" name="Text 67"/>
+          <p:cNvSpPr/>
+          <p:nvPr/>
+        </p:nvSpPr>
+        <p:spPr>
+          <a:xfrm>
+            <a:off x="4215384" y="4133088"/>
+            <a:ext cx="932688" cy="182880"/>
+          </a:xfrm>
+          <a:prstGeom prst="rect">
+            <a:avLst/>
+          </a:prstGeom>
+          <a:noFill/>
+          <a:ln/>
+        </p:spPr>
+        <p:txBody>
+          <a:bodyPr wrap="square" lIns="0" tIns="0" rIns="0" bIns="0" rtlCol="0" anchor="ctr"/>
+          <a:lstStyle/>
+          <a:p>
+            <a:pPr algn="ctr" indent="0" marL="0">
+              <a:buNone/>
+            </a:pPr>
+            <a:r>
+              <a:rPr lang="en-US" sz="750" b="1" dirty="0">
+                <a:solidFill>
+                  <a:srgbClr val="1E293B"/>
+                </a:solidFill>
+              </a:rPr>
+              <a:t>Live Events</a:t>
+            </a:r>
+            <a:endParaRPr lang="en-US" sz="750" dirty="0"/>
+          </a:p>
+        </p:txBody>
+      </p:sp>
+      <p:sp>
+        <p:nvSpPr>
+          <p:cNvPr id="70" name="Shape 68"/>
+          <p:cNvSpPr/>
+          <p:nvPr/>
+        </p:nvSpPr>
+        <p:spPr>
+          <a:xfrm>
+            <a:off x="4215384" y="4343400"/>
+            <a:ext cx="932688" cy="155448"/>
+          </a:xfrm>
+          <a:prstGeom prst="roundRect">
+            <a:avLst>
+              <a:gd name="adj" fmla="val 17647"/>
+            </a:avLst>
+          </a:prstGeom>
+          <a:solidFill>
+            <a:srgbClr val="1558A8"/>
+          </a:solidFill>
+          <a:ln w="12700">
+            <a:solidFill>
+              <a:srgbClr val="1558A8"/>
+            </a:solidFill>
+            <a:prstDash val="solid"/>
+          </a:ln>
+        </p:spPr>
+      </p:sp>
+      <p:sp>
+        <p:nvSpPr>
+          <p:cNvPr id="71" name="Text 69"/>
+          <p:cNvSpPr/>
+          <p:nvPr/>
+        </p:nvSpPr>
+        <p:spPr>
+          <a:xfrm>
+            <a:off x="4215384" y="4343400"/>
+            <a:ext cx="932688" cy="155448"/>
+          </a:xfrm>
+          <a:prstGeom prst="rect">
+            <a:avLst/>
+          </a:prstGeom>
+          <a:noFill/>
+          <a:ln/>
+        </p:spPr>
+        <p:txBody>
+          <a:bodyPr wrap="square" lIns="0" tIns="0" rIns="0" bIns="0" rtlCol="0" anchor="ctr"/>
+          <a:lstStyle/>
+          <a:p>
+            <a:pPr algn="ctr" indent="0" marL="0">
+              <a:buNone/>
+            </a:pPr>
+            <a:r>
+              <a:rPr lang="en-US" sz="700" dirty="0">
+                <a:solidFill>
+                  <a:srgbClr val="FFFFFF"/>
+                </a:solidFill>
+              </a:rPr>
+              <a:t>In Progress</a:t>
+            </a:r>
+            <a:endParaRPr lang="en-US" sz="700" dirty="0"/>
+          </a:p>
+        </p:txBody>
+      </p:sp>
+      <p:sp>
+        <p:nvSpPr>
+          <p:cNvPr id="72" name="Shape 70"/>
+          <p:cNvSpPr/>
+          <p:nvPr/>
+        </p:nvSpPr>
+        <p:spPr>
+          <a:xfrm>
+            <a:off x="5230368" y="4133088"/>
+            <a:ext cx="932688" cy="182880"/>
+          </a:xfrm>
+          <a:prstGeom prst="roundRect">
+            <a:avLst>
+              <a:gd name="adj" fmla="val 15000"/>
+            </a:avLst>
+          </a:prstGeom>
+          <a:solidFill>
+            <a:srgbClr val="FFFFFF"/>
+          </a:solidFill>
+          <a:ln w="9525">
+            <a:solidFill>
+              <a:srgbClr val="CBD5E1"/>
+            </a:solidFill>
+            <a:prstDash val="solid"/>
+          </a:ln>
+        </p:spPr>
+      </p:sp>
+      <p:sp>
+        <p:nvSpPr>
+          <p:cNvPr id="73" name="Text 71"/>
+          <p:cNvSpPr/>
+          <p:nvPr/>
+        </p:nvSpPr>
+        <p:spPr>
+          <a:xfrm>
+            <a:off x="5230368" y="4133088"/>
+            <a:ext cx="932688" cy="182880"/>
+          </a:xfrm>
+          <a:prstGeom prst="rect">
+            <a:avLst/>
+          </a:prstGeom>
+          <a:noFill/>
+          <a:ln/>
+        </p:spPr>
+        <p:txBody>
+          <a:bodyPr wrap="square" lIns="0" tIns="0" rIns="0" bIns="0" rtlCol="0" anchor="ctr"/>
+          <a:lstStyle/>
+          <a:p>
+            <a:pPr algn="ctr" indent="0" marL="0">
+              <a:buNone/>
+            </a:pPr>
+            <a:r>
+              <a:rPr lang="en-US" sz="750" b="1" dirty="0">
+                <a:solidFill>
+                  <a:srgbClr val="1E293B"/>
+                </a:solidFill>
+              </a:rPr>
+              <a:t>Back Catalog</a:t>
+            </a:r>
+            <a:endParaRPr lang="en-US" sz="750" dirty="0"/>
+          </a:p>
+        </p:txBody>
+      </p:sp>
+      <p:sp>
+        <p:nvSpPr>
+          <p:cNvPr id="74" name="Shape 72"/>
+          <p:cNvSpPr/>
+          <p:nvPr/>
+        </p:nvSpPr>
+        <p:spPr>
+          <a:xfrm>
+            <a:off x="5230368" y="4343400"/>
+            <a:ext cx="932688" cy="155448"/>
+          </a:xfrm>
+          <a:prstGeom prst="roundRect">
+            <a:avLst>
+              <a:gd name="adj" fmla="val 17647"/>
+            </a:avLst>
+          </a:prstGeom>
+          <a:solidFill>
             <a:srgbClr val="F3F4F6"/>
           </a:solidFill>
           <a:ln w="9525">
@@ -16950,13 +17326,13 @@
       </p:sp>
       <p:sp>
         <p:nvSpPr>
-          <p:cNvPr id="63" name="Text 61"/>
-          <p:cNvSpPr/>
-          <p:nvPr/>
-        </p:nvSpPr>
-        <p:spPr>
-          <a:xfrm>
-            <a:off x="3200400" y="2811780"/>
+          <p:cNvPr id="75" name="Text 73"/>
+          <p:cNvSpPr/>
+          <p:nvPr/>
+        </p:nvSpPr>
+        <p:spPr>
+          <a:xfrm>
+            <a:off x="5230368" y="4343400"/>
             <a:ext cx="932688" cy="155448"/>
           </a:xfrm>
           <a:prstGeom prst="rect">
@@ -16986,20 +17362,524 @@
       </p:sp>
       <p:sp>
         <p:nvSpPr>
-          <p:cNvPr id="64" name="Shape 62"/>
-          <p:cNvSpPr/>
-          <p:nvPr/>
-        </p:nvSpPr>
-        <p:spPr>
-          <a:xfrm>
-            <a:off x="164592" y="3867912"/>
+          <p:cNvPr id="76" name="Shape 74"/>
+          <p:cNvSpPr/>
+          <p:nvPr/>
+        </p:nvSpPr>
+        <p:spPr>
+          <a:xfrm>
+            <a:off x="6245352" y="4133088"/>
+            <a:ext cx="932688" cy="182880"/>
+          </a:xfrm>
+          <a:prstGeom prst="roundRect">
+            <a:avLst>
+              <a:gd name="adj" fmla="val 15000"/>
+            </a:avLst>
+          </a:prstGeom>
+          <a:solidFill>
+            <a:srgbClr val="FFFFFF"/>
+          </a:solidFill>
+          <a:ln w="9525">
+            <a:solidFill>
+              <a:srgbClr val="CBD5E1"/>
+            </a:solidFill>
+            <a:prstDash val="solid"/>
+          </a:ln>
+        </p:spPr>
+      </p:sp>
+      <p:sp>
+        <p:nvSpPr>
+          <p:cNvPr id="77" name="Text 75"/>
+          <p:cNvSpPr/>
+          <p:nvPr/>
+        </p:nvSpPr>
+        <p:spPr>
+          <a:xfrm>
+            <a:off x="6245352" y="4133088"/>
+            <a:ext cx="932688" cy="182880"/>
+          </a:xfrm>
+          <a:prstGeom prst="rect">
+            <a:avLst/>
+          </a:prstGeom>
+          <a:noFill/>
+          <a:ln/>
+        </p:spPr>
+        <p:txBody>
+          <a:bodyPr wrap="square" lIns="0" tIns="0" rIns="0" bIns="0" rtlCol="0" anchor="ctr"/>
+          <a:lstStyle/>
+          <a:p>
+            <a:pPr algn="ctr" indent="0" marL="0">
+              <a:buNone/>
+            </a:pPr>
+            <a:r>
+              <a:rPr lang="en-US" sz="750" b="1" dirty="0">
+                <a:solidFill>
+                  <a:srgbClr val="1E293B"/>
+                </a:solidFill>
+              </a:rPr>
+              <a:t>Full Replays</a:t>
+            </a:r>
+            <a:endParaRPr lang="en-US" sz="750" dirty="0"/>
+          </a:p>
+        </p:txBody>
+      </p:sp>
+      <p:sp>
+        <p:nvSpPr>
+          <p:cNvPr id="78" name="Shape 76"/>
+          <p:cNvSpPr/>
+          <p:nvPr/>
+        </p:nvSpPr>
+        <p:spPr>
+          <a:xfrm>
+            <a:off x="6245352" y="4343400"/>
+            <a:ext cx="932688" cy="155448"/>
+          </a:xfrm>
+          <a:prstGeom prst="roundRect">
+            <a:avLst>
+              <a:gd name="adj" fmla="val 17647"/>
+            </a:avLst>
+          </a:prstGeom>
+          <a:solidFill>
+            <a:srgbClr val="F3F4F6"/>
+          </a:solidFill>
+          <a:ln w="9525">
+            <a:solidFill>
+              <a:srgbClr val="D1D5DB"/>
+            </a:solidFill>
+            <a:prstDash val="solid"/>
+          </a:ln>
+        </p:spPr>
+      </p:sp>
+      <p:sp>
+        <p:nvSpPr>
+          <p:cNvPr id="79" name="Text 77"/>
+          <p:cNvSpPr/>
+          <p:nvPr/>
+        </p:nvSpPr>
+        <p:spPr>
+          <a:xfrm>
+            <a:off x="6245352" y="4343400"/>
+            <a:ext cx="932688" cy="155448"/>
+          </a:xfrm>
+          <a:prstGeom prst="rect">
+            <a:avLst/>
+          </a:prstGeom>
+          <a:noFill/>
+          <a:ln/>
+        </p:spPr>
+        <p:txBody>
+          <a:bodyPr wrap="square" lIns="0" tIns="0" rIns="0" bIns="0" rtlCol="0" anchor="ctr"/>
+          <a:lstStyle/>
+          <a:p>
+            <a:pPr algn="ctr" indent="0" marL="0">
+              <a:buNone/>
+            </a:pPr>
+            <a:r>
+              <a:rPr lang="en-US" sz="700" dirty="0">
+                <a:solidFill>
+                  <a:srgbClr val="374151"/>
+                </a:solidFill>
+              </a:rPr>
+              <a:t>Not Started</a:t>
+            </a:r>
+            <a:endParaRPr lang="en-US" sz="700" dirty="0"/>
+          </a:p>
+        </p:txBody>
+      </p:sp>
+      <p:sp>
+        <p:nvSpPr>
+          <p:cNvPr id="80" name="Shape 78"/>
+          <p:cNvSpPr/>
+          <p:nvPr/>
+        </p:nvSpPr>
+        <p:spPr>
+          <a:xfrm>
+            <a:off x="7260336" y="4133088"/>
+            <a:ext cx="932688" cy="182880"/>
+          </a:xfrm>
+          <a:prstGeom prst="roundRect">
+            <a:avLst>
+              <a:gd name="adj" fmla="val 15000"/>
+            </a:avLst>
+          </a:prstGeom>
+          <a:solidFill>
+            <a:srgbClr val="FFFFFF"/>
+          </a:solidFill>
+          <a:ln w="9525">
+            <a:solidFill>
+              <a:srgbClr val="CBD5E1"/>
+            </a:solidFill>
+            <a:prstDash val="solid"/>
+          </a:ln>
+        </p:spPr>
+      </p:sp>
+      <p:sp>
+        <p:nvSpPr>
+          <p:cNvPr id="81" name="Text 79"/>
+          <p:cNvSpPr/>
+          <p:nvPr/>
+        </p:nvSpPr>
+        <p:spPr>
+          <a:xfrm>
+            <a:off x="7260336" y="4133088"/>
+            <a:ext cx="932688" cy="182880"/>
+          </a:xfrm>
+          <a:prstGeom prst="rect">
+            <a:avLst/>
+          </a:prstGeom>
+          <a:noFill/>
+          <a:ln/>
+        </p:spPr>
+        <p:txBody>
+          <a:bodyPr wrap="square" lIns="0" tIns="0" rIns="0" bIns="0" rtlCol="0" anchor="ctr"/>
+          <a:lstStyle/>
+          <a:p>
+            <a:pPr algn="ctr" indent="0" marL="0">
+              <a:buNone/>
+            </a:pPr>
+            <a:r>
+              <a:rPr lang="en-US" sz="750" b="1" dirty="0">
+                <a:solidFill>
+                  <a:srgbClr val="1E293B"/>
+                </a:solidFill>
+              </a:rPr>
+              <a:t>M15</a:t>
+            </a:r>
+            <a:endParaRPr lang="en-US" sz="750" dirty="0"/>
+          </a:p>
+        </p:txBody>
+      </p:sp>
+      <p:sp>
+        <p:nvSpPr>
+          <p:cNvPr id="82" name="Shape 80"/>
+          <p:cNvSpPr/>
+          <p:nvPr/>
+        </p:nvSpPr>
+        <p:spPr>
+          <a:xfrm>
+            <a:off x="7260336" y="4343400"/>
+            <a:ext cx="932688" cy="155448"/>
+          </a:xfrm>
+          <a:prstGeom prst="roundRect">
+            <a:avLst>
+              <a:gd name="adj" fmla="val 17647"/>
+            </a:avLst>
+          </a:prstGeom>
+          <a:solidFill>
+            <a:srgbClr val="F3F4F6"/>
+          </a:solidFill>
+          <a:ln w="9525">
+            <a:solidFill>
+              <a:srgbClr val="D1D5DB"/>
+            </a:solidFill>
+            <a:prstDash val="solid"/>
+          </a:ln>
+        </p:spPr>
+      </p:sp>
+      <p:sp>
+        <p:nvSpPr>
+          <p:cNvPr id="83" name="Text 81"/>
+          <p:cNvSpPr/>
+          <p:nvPr/>
+        </p:nvSpPr>
+        <p:spPr>
+          <a:xfrm>
+            <a:off x="7260336" y="4343400"/>
+            <a:ext cx="932688" cy="155448"/>
+          </a:xfrm>
+          <a:prstGeom prst="rect">
+            <a:avLst/>
+          </a:prstGeom>
+          <a:noFill/>
+          <a:ln/>
+        </p:spPr>
+        <p:txBody>
+          <a:bodyPr wrap="square" lIns="0" tIns="0" rIns="0" bIns="0" rtlCol="0" anchor="ctr"/>
+          <a:lstStyle/>
+          <a:p>
+            <a:pPr algn="ctr" indent="0" marL="0">
+              <a:buNone/>
+            </a:pPr>
+            <a:r>
+              <a:rPr lang="en-US" sz="700" dirty="0">
+                <a:solidFill>
+                  <a:srgbClr val="374151"/>
+                </a:solidFill>
+              </a:rPr>
+              <a:t>Not Started</a:t>
+            </a:r>
+            <a:endParaRPr lang="en-US" sz="700" dirty="0"/>
+          </a:p>
+        </p:txBody>
+      </p:sp>
+      <p:sp>
+        <p:nvSpPr>
+          <p:cNvPr id="84" name="Shape 82"/>
+          <p:cNvSpPr/>
+          <p:nvPr/>
+        </p:nvSpPr>
+        <p:spPr>
+          <a:xfrm>
+            <a:off x="8275320" y="4133088"/>
+            <a:ext cx="932688" cy="182880"/>
+          </a:xfrm>
+          <a:prstGeom prst="roundRect">
+            <a:avLst>
+              <a:gd name="adj" fmla="val 15000"/>
+            </a:avLst>
+          </a:prstGeom>
+          <a:solidFill>
+            <a:srgbClr val="FFFFFF"/>
+          </a:solidFill>
+          <a:ln w="9525">
+            <a:solidFill>
+              <a:srgbClr val="CBD5E1"/>
+            </a:solidFill>
+            <a:prstDash val="solid"/>
+          </a:ln>
+        </p:spPr>
+      </p:sp>
+      <p:sp>
+        <p:nvSpPr>
+          <p:cNvPr id="85" name="Text 83"/>
+          <p:cNvSpPr/>
+          <p:nvPr/>
+        </p:nvSpPr>
+        <p:spPr>
+          <a:xfrm>
+            <a:off x="8275320" y="4133088"/>
+            <a:ext cx="932688" cy="182880"/>
+          </a:xfrm>
+          <a:prstGeom prst="rect">
+            <a:avLst/>
+          </a:prstGeom>
+          <a:noFill/>
+          <a:ln/>
+        </p:spPr>
+        <p:txBody>
+          <a:bodyPr wrap="square" lIns="0" tIns="0" rIns="0" bIns="0" rtlCol="0" anchor="ctr"/>
+          <a:lstStyle/>
+          <a:p>
+            <a:pPr algn="ctr" indent="0" marL="0">
+              <a:buNone/>
+            </a:pPr>
+            <a:r>
+              <a:rPr lang="en-US" sz="750" b="1" dirty="0">
+                <a:solidFill>
+                  <a:srgbClr val="1E293B"/>
+                </a:solidFill>
+              </a:rPr>
+              <a:t>Highlights</a:t>
+            </a:r>
+            <a:endParaRPr lang="en-US" sz="750" dirty="0"/>
+          </a:p>
+        </p:txBody>
+      </p:sp>
+      <p:sp>
+        <p:nvSpPr>
+          <p:cNvPr id="86" name="Shape 84"/>
+          <p:cNvSpPr/>
+          <p:nvPr/>
+        </p:nvSpPr>
+        <p:spPr>
+          <a:xfrm>
+            <a:off x="8275320" y="4343400"/>
+            <a:ext cx="932688" cy="155448"/>
+          </a:xfrm>
+          <a:prstGeom prst="roundRect">
+            <a:avLst>
+              <a:gd name="adj" fmla="val 17647"/>
+            </a:avLst>
+          </a:prstGeom>
+          <a:solidFill>
+            <a:srgbClr val="F3F4F6"/>
+          </a:solidFill>
+          <a:ln w="9525">
+            <a:solidFill>
+              <a:srgbClr val="D1D5DB"/>
+            </a:solidFill>
+            <a:prstDash val="solid"/>
+          </a:ln>
+        </p:spPr>
+      </p:sp>
+      <p:sp>
+        <p:nvSpPr>
+          <p:cNvPr id="87" name="Text 85"/>
+          <p:cNvSpPr/>
+          <p:nvPr/>
+        </p:nvSpPr>
+        <p:spPr>
+          <a:xfrm>
+            <a:off x="8275320" y="4343400"/>
+            <a:ext cx="932688" cy="155448"/>
+          </a:xfrm>
+          <a:prstGeom prst="rect">
+            <a:avLst/>
+          </a:prstGeom>
+          <a:noFill/>
+          <a:ln/>
+        </p:spPr>
+        <p:txBody>
+          <a:bodyPr wrap="square" lIns="0" tIns="0" rIns="0" bIns="0" rtlCol="0" anchor="ctr"/>
+          <a:lstStyle/>
+          <a:p>
+            <a:pPr algn="ctr" indent="0" marL="0">
+              <a:buNone/>
+            </a:pPr>
+            <a:r>
+              <a:rPr lang="en-US" sz="700" dirty="0">
+                <a:solidFill>
+                  <a:srgbClr val="374151"/>
+                </a:solidFill>
+              </a:rPr>
+              <a:t>Not Started</a:t>
+            </a:r>
+            <a:endParaRPr lang="en-US" sz="700" dirty="0"/>
+          </a:p>
+        </p:txBody>
+      </p:sp>
+      <p:sp>
+        <p:nvSpPr>
+          <p:cNvPr id="88" name="Shape 86"/>
+          <p:cNvSpPr/>
+          <p:nvPr/>
+        </p:nvSpPr>
+        <p:spPr>
+          <a:xfrm>
+            <a:off x="1170432" y="4590288"/>
+            <a:ext cx="932688" cy="182880"/>
+          </a:xfrm>
+          <a:prstGeom prst="roundRect">
+            <a:avLst>
+              <a:gd name="adj" fmla="val 15000"/>
+            </a:avLst>
+          </a:prstGeom>
+          <a:solidFill>
+            <a:srgbClr val="FFFFFF"/>
+          </a:solidFill>
+          <a:ln w="9525">
+            <a:solidFill>
+              <a:srgbClr val="CBD5E1"/>
+            </a:solidFill>
+            <a:prstDash val="solid"/>
+          </a:ln>
+        </p:spPr>
+      </p:sp>
+      <p:sp>
+        <p:nvSpPr>
+          <p:cNvPr id="89" name="Text 87"/>
+          <p:cNvSpPr/>
+          <p:nvPr/>
+        </p:nvSpPr>
+        <p:spPr>
+          <a:xfrm>
+            <a:off x="1170432" y="4590288"/>
+            <a:ext cx="932688" cy="182880"/>
+          </a:xfrm>
+          <a:prstGeom prst="rect">
+            <a:avLst/>
+          </a:prstGeom>
+          <a:noFill/>
+          <a:ln/>
+        </p:spPr>
+        <p:txBody>
+          <a:bodyPr wrap="square" lIns="0" tIns="0" rIns="0" bIns="0" rtlCol="0" anchor="ctr"/>
+          <a:lstStyle/>
+          <a:p>
+            <a:pPr algn="ctr" indent="0" marL="0">
+              <a:buNone/>
+            </a:pPr>
+            <a:r>
+              <a:rPr lang="en-US" sz="750" b="1" dirty="0">
+                <a:solidFill>
+                  <a:srgbClr val="1E293B"/>
+                </a:solidFill>
+              </a:rPr>
+              <a:t>Linear</a:t>
+            </a:r>
+            <a:endParaRPr lang="en-US" sz="750" dirty="0"/>
+          </a:p>
+        </p:txBody>
+      </p:sp>
+      <p:sp>
+        <p:nvSpPr>
+          <p:cNvPr id="90" name="Shape 88"/>
+          <p:cNvSpPr/>
+          <p:nvPr/>
+        </p:nvSpPr>
+        <p:spPr>
+          <a:xfrm>
+            <a:off x="1170432" y="4800600"/>
+            <a:ext cx="932688" cy="155448"/>
+          </a:xfrm>
+          <a:prstGeom prst="roundRect">
+            <a:avLst>
+              <a:gd name="adj" fmla="val 17647"/>
+            </a:avLst>
+          </a:prstGeom>
+          <a:solidFill>
+            <a:srgbClr val="1558A8"/>
+          </a:solidFill>
+          <a:ln w="12700">
+            <a:solidFill>
+              <a:srgbClr val="1558A8"/>
+            </a:solidFill>
+            <a:prstDash val="solid"/>
+          </a:ln>
+        </p:spPr>
+      </p:sp>
+      <p:sp>
+        <p:nvSpPr>
+          <p:cNvPr id="91" name="Text 89"/>
+          <p:cNvSpPr/>
+          <p:nvPr/>
+        </p:nvSpPr>
+        <p:spPr>
+          <a:xfrm>
+            <a:off x="1170432" y="4800600"/>
+            <a:ext cx="932688" cy="155448"/>
+          </a:xfrm>
+          <a:prstGeom prst="rect">
+            <a:avLst/>
+          </a:prstGeom>
+          <a:noFill/>
+          <a:ln/>
+        </p:spPr>
+        <p:txBody>
+          <a:bodyPr wrap="square" lIns="0" tIns="0" rIns="0" bIns="0" rtlCol="0" anchor="ctr"/>
+          <a:lstStyle/>
+          <a:p>
+            <a:pPr algn="ctr" indent="0" marL="0">
+              <a:buNone/>
+            </a:pPr>
+            <a:r>
+              <a:rPr lang="en-US" sz="700" dirty="0">
+                <a:solidFill>
+                  <a:srgbClr val="FFFFFF"/>
+                </a:solidFill>
+              </a:rPr>
+              <a:t>In Progress</a:t>
+            </a:r>
+            <a:endParaRPr lang="en-US" sz="700" dirty="0"/>
+          </a:p>
+        </p:txBody>
+      </p:sp>
+      <p:sp>
+        <p:nvSpPr>
+          <p:cNvPr id="92" name="Shape 90"/>
+          <p:cNvSpPr/>
+          <p:nvPr/>
+        </p:nvSpPr>
+        <p:spPr>
+          <a:xfrm>
+            <a:off x="164592" y="5399532"/>
             <a:ext cx="9116568" cy="1476756"/>
           </a:xfrm>
           <a:prstGeom prst="rect">
             <a:avLst/>
           </a:prstGeom>
           <a:solidFill>
-            <a:srgbClr val="FAFBFC"/>
+            <a:srgbClr val="FFFFFF"/>
           </a:solidFill>
           <a:ln w="6350">
             <a:solidFill>
@@ -17011,13 +17891,13 @@
       </p:sp>
       <p:sp>
         <p:nvSpPr>
-          <p:cNvPr id="65" name="Shape 63"/>
-          <p:cNvSpPr/>
-          <p:nvPr/>
-        </p:nvSpPr>
-        <p:spPr>
-          <a:xfrm>
-            <a:off x="182880" y="3941064"/>
+          <p:cNvPr id="93" name="Shape 91"/>
+          <p:cNvSpPr/>
+          <p:nvPr/>
+        </p:nvSpPr>
+        <p:spPr>
+          <a:xfrm>
+            <a:off x="182880" y="5472684"/>
             <a:ext cx="859536" cy="1330452"/>
           </a:xfrm>
           <a:prstGeom prst="roundRect">
@@ -17038,13 +17918,13 @@
       </p:sp>
       <p:sp>
         <p:nvSpPr>
-          <p:cNvPr id="66" name="Text 64"/>
-          <p:cNvSpPr/>
-          <p:nvPr/>
-        </p:nvSpPr>
-        <p:spPr>
-          <a:xfrm>
-            <a:off x="182880" y="3941064"/>
+          <p:cNvPr id="94" name="Text 92"/>
+          <p:cNvSpPr/>
+          <p:nvPr/>
+        </p:nvSpPr>
+        <p:spPr>
+          <a:xfrm>
+            <a:off x="182880" y="5472684"/>
             <a:ext cx="859536" cy="1330452"/>
           </a:xfrm>
           <a:prstGeom prst="rect">
@@ -17066,7 +17946,7 @@
                   <a:srgbClr val="FFFFFF"/>
                 </a:solidFill>
               </a:rPr>
-              <a:t>Merchandising</a:t>
+              <a:t>Onboarding</a:t>
             </a:r>
             <a:endParaRPr lang="en-US" sz="800" dirty="0"/>
           </a:p>
@@ -17074,13 +17954,13 @@
       </p:sp>
       <p:sp>
         <p:nvSpPr>
-          <p:cNvPr id="67" name="Text 65"/>
-          <p:cNvSpPr/>
-          <p:nvPr/>
-        </p:nvSpPr>
-        <p:spPr>
-          <a:xfrm>
-            <a:off x="1170432" y="3913632"/>
+          <p:cNvPr id="95" name="Text 93"/>
+          <p:cNvSpPr/>
+          <p:nvPr/>
+        </p:nvSpPr>
+        <p:spPr>
+          <a:xfrm>
+            <a:off x="1170432" y="5445252"/>
             <a:ext cx="8110728" cy="182880"/>
           </a:xfrm>
           <a:prstGeom prst="rect">
@@ -17102,7 +17982,7 @@
                   <a:srgbClr val="9CA3AF"/>
                 </a:solidFill>
               </a:rPr>
-              <a:t>5 / 9 In Progress</a:t>
+              <a:t>1 / 6 In Progress</a:t>
             </a:r>
             <a:endParaRPr lang="en-US" sz="750" dirty="0"/>
           </a:p>
@@ -17110,13 +17990,13 @@
       </p:sp>
       <p:sp>
         <p:nvSpPr>
-          <p:cNvPr id="68" name="Shape 66"/>
-          <p:cNvSpPr/>
-          <p:nvPr/>
-        </p:nvSpPr>
-        <p:spPr>
-          <a:xfrm>
-            <a:off x="1170432" y="4133088"/>
+          <p:cNvPr id="96" name="Shape 94"/>
+          <p:cNvSpPr/>
+          <p:nvPr/>
+        </p:nvSpPr>
+        <p:spPr>
+          <a:xfrm>
+            <a:off x="1170432" y="5664708"/>
             <a:ext cx="932688" cy="182880"/>
           </a:xfrm>
           <a:prstGeom prst="roundRect">
@@ -17137,13 +18017,13 @@
       </p:sp>
       <p:sp>
         <p:nvSpPr>
-          <p:cNvPr id="69" name="Text 67"/>
-          <p:cNvSpPr/>
-          <p:nvPr/>
-        </p:nvSpPr>
-        <p:spPr>
-          <a:xfrm>
-            <a:off x="1170432" y="4133088"/>
+          <p:cNvPr id="97" name="Text 95"/>
+          <p:cNvSpPr/>
+          <p:nvPr/>
+        </p:nvSpPr>
+        <p:spPr>
+          <a:xfrm>
+            <a:off x="1170432" y="5664708"/>
             <a:ext cx="932688" cy="182880"/>
           </a:xfrm>
           <a:prstGeom prst="rect">
@@ -17165,7 +18045,7 @@
                   <a:srgbClr val="1E293B"/>
                 </a:solidFill>
               </a:rPr>
-              <a:t>Metadata</a:t>
+              <a:t>Unentitled</a:t>
             </a:r>
             <a:endParaRPr lang="en-US" sz="750" dirty="0"/>
           </a:p>
@@ -17173,13 +18053,13 @@
       </p:sp>
       <p:sp>
         <p:nvSpPr>
-          <p:cNvPr id="70" name="Shape 68"/>
-          <p:cNvSpPr/>
-          <p:nvPr/>
-        </p:nvSpPr>
-        <p:spPr>
-          <a:xfrm>
-            <a:off x="1170432" y="4343400"/>
+          <p:cNvPr id="98" name="Shape 96"/>
+          <p:cNvSpPr/>
+          <p:nvPr/>
+        </p:nvSpPr>
+        <p:spPr>
+          <a:xfrm>
+            <a:off x="1170432" y="5875020"/>
             <a:ext cx="932688" cy="155448"/>
           </a:xfrm>
           <a:prstGeom prst="roundRect">
@@ -17188,25 +18068,25 @@
             </a:avLst>
           </a:prstGeom>
           <a:solidFill>
-            <a:srgbClr val="1558A8"/>
-          </a:solidFill>
-          <a:ln w="12700">
-            <a:solidFill>
-              <a:srgbClr val="1558A8"/>
-            </a:solidFill>
-            <a:prstDash val="solid"/>
-          </a:ln>
-        </p:spPr>
-      </p:sp>
-      <p:sp>
-        <p:nvSpPr>
-          <p:cNvPr id="71" name="Text 69"/>
-          <p:cNvSpPr/>
-          <p:nvPr/>
-        </p:nvSpPr>
-        <p:spPr>
-          <a:xfrm>
-            <a:off x="1170432" y="4343400"/>
+            <a:srgbClr val="F3F4F6"/>
+          </a:solidFill>
+          <a:ln w="9525">
+            <a:solidFill>
+              <a:srgbClr val="D1D5DB"/>
+            </a:solidFill>
+            <a:prstDash val="solid"/>
+          </a:ln>
+        </p:spPr>
+      </p:sp>
+      <p:sp>
+        <p:nvSpPr>
+          <p:cNvPr id="99" name="Text 97"/>
+          <p:cNvSpPr/>
+          <p:nvPr/>
+        </p:nvSpPr>
+        <p:spPr>
+          <a:xfrm>
+            <a:off x="1170432" y="5875020"/>
             <a:ext cx="932688" cy="155448"/>
           </a:xfrm>
           <a:prstGeom prst="rect">
@@ -17225,10 +18105,10 @@
             <a:r>
               <a:rPr lang="en-US" sz="700" dirty="0">
                 <a:solidFill>
-                  <a:srgbClr val="FFFFFF"/>
-                </a:solidFill>
-              </a:rPr>
-              <a:t>In Progress</a:t>
+                  <a:srgbClr val="374151"/>
+                </a:solidFill>
+              </a:rPr>
+              <a:t>Not Started</a:t>
             </a:r>
             <a:endParaRPr lang="en-US" sz="700" dirty="0"/>
           </a:p>
@@ -17236,13 +18116,13 @@
       </p:sp>
       <p:sp>
         <p:nvSpPr>
-          <p:cNvPr id="72" name="Shape 70"/>
-          <p:cNvSpPr/>
-          <p:nvPr/>
-        </p:nvSpPr>
-        <p:spPr>
-          <a:xfrm>
-            <a:off x="2185416" y="4133088"/>
+          <p:cNvPr id="100" name="Shape 98"/>
+          <p:cNvSpPr/>
+          <p:nvPr/>
+        </p:nvSpPr>
+        <p:spPr>
+          <a:xfrm>
+            <a:off x="2185416" y="5664708"/>
             <a:ext cx="932688" cy="182880"/>
           </a:xfrm>
           <a:prstGeom prst="roundRect">
@@ -17263,13 +18143,13 @@
       </p:sp>
       <p:sp>
         <p:nvSpPr>
-          <p:cNvPr id="73" name="Text 71"/>
-          <p:cNvSpPr/>
-          <p:nvPr/>
-        </p:nvSpPr>
-        <p:spPr>
-          <a:xfrm>
-            <a:off x="2185416" y="4133088"/>
+          <p:cNvPr id="101" name="Text 99"/>
+          <p:cNvSpPr/>
+          <p:nvPr/>
+        </p:nvSpPr>
+        <p:spPr>
+          <a:xfrm>
+            <a:off x="2185416" y="5664708"/>
             <a:ext cx="932688" cy="182880"/>
           </a:xfrm>
           <a:prstGeom prst="rect">
@@ -17291,7 +18171,7 @@
                   <a:srgbClr val="1E293B"/>
                 </a:solidFill>
               </a:rPr>
-              <a:t>Images</a:t>
+              <a:t>Sign-in</a:t>
             </a:r>
             <a:endParaRPr lang="en-US" sz="750" dirty="0"/>
           </a:p>
@@ -17299,13 +18179,13 @@
       </p:sp>
       <p:sp>
         <p:nvSpPr>
-          <p:cNvPr id="74" name="Shape 72"/>
-          <p:cNvSpPr/>
-          <p:nvPr/>
-        </p:nvSpPr>
-        <p:spPr>
-          <a:xfrm>
-            <a:off x="2185416" y="4343400"/>
+          <p:cNvPr id="102" name="Shape 100"/>
+          <p:cNvSpPr/>
+          <p:nvPr/>
+        </p:nvSpPr>
+        <p:spPr>
+          <a:xfrm>
+            <a:off x="2185416" y="5875020"/>
             <a:ext cx="932688" cy="155448"/>
           </a:xfrm>
           <a:prstGeom prst="roundRect">
@@ -17314,25 +18194,25 @@
             </a:avLst>
           </a:prstGeom>
           <a:solidFill>
-            <a:srgbClr val="1558A8"/>
-          </a:solidFill>
-          <a:ln w="12700">
-            <a:solidFill>
-              <a:srgbClr val="1558A8"/>
-            </a:solidFill>
-            <a:prstDash val="solid"/>
-          </a:ln>
-        </p:spPr>
-      </p:sp>
-      <p:sp>
-        <p:nvSpPr>
-          <p:cNvPr id="75" name="Text 73"/>
-          <p:cNvSpPr/>
-          <p:nvPr/>
-        </p:nvSpPr>
-        <p:spPr>
-          <a:xfrm>
-            <a:off x="2185416" y="4343400"/>
+            <a:srgbClr val="F3F4F6"/>
+          </a:solidFill>
+          <a:ln w="9525">
+            <a:solidFill>
+              <a:srgbClr val="D1D5DB"/>
+            </a:solidFill>
+            <a:prstDash val="solid"/>
+          </a:ln>
+        </p:spPr>
+      </p:sp>
+      <p:sp>
+        <p:nvSpPr>
+          <p:cNvPr id="103" name="Text 101"/>
+          <p:cNvSpPr/>
+          <p:nvPr/>
+        </p:nvSpPr>
+        <p:spPr>
+          <a:xfrm>
+            <a:off x="2185416" y="5875020"/>
             <a:ext cx="932688" cy="155448"/>
           </a:xfrm>
           <a:prstGeom prst="rect">
@@ -17351,10 +18231,10 @@
             <a:r>
               <a:rPr lang="en-US" sz="700" dirty="0">
                 <a:solidFill>
-                  <a:srgbClr val="FFFFFF"/>
-                </a:solidFill>
-              </a:rPr>
-              <a:t>In Progress</a:t>
+                  <a:srgbClr val="374151"/>
+                </a:solidFill>
+              </a:rPr>
+              <a:t>Not Started</a:t>
             </a:r>
             <a:endParaRPr lang="en-US" sz="700" dirty="0"/>
           </a:p>
@@ -17362,13 +18242,13 @@
       </p:sp>
       <p:sp>
         <p:nvSpPr>
-          <p:cNvPr id="76" name="Shape 74"/>
-          <p:cNvSpPr/>
-          <p:nvPr/>
-        </p:nvSpPr>
-        <p:spPr>
-          <a:xfrm>
-            <a:off x="3200400" y="4133088"/>
+          <p:cNvPr id="104" name="Shape 102"/>
+          <p:cNvSpPr/>
+          <p:nvPr/>
+        </p:nvSpPr>
+        <p:spPr>
+          <a:xfrm>
+            <a:off x="3200400" y="5664708"/>
             <a:ext cx="932688" cy="182880"/>
           </a:xfrm>
           <a:prstGeom prst="roundRect">
@@ -17389,13 +18269,13 @@
       </p:sp>
       <p:sp>
         <p:nvSpPr>
-          <p:cNvPr id="77" name="Text 75"/>
-          <p:cNvSpPr/>
-          <p:nvPr/>
-        </p:nvSpPr>
-        <p:spPr>
-          <a:xfrm>
-            <a:off x="3200400" y="4133088"/>
+          <p:cNvPr id="105" name="Text 103"/>
+          <p:cNvSpPr/>
+          <p:nvPr/>
+        </p:nvSpPr>
+        <p:spPr>
+          <a:xfrm>
+            <a:off x="3200400" y="5664708"/>
             <a:ext cx="932688" cy="182880"/>
           </a:xfrm>
           <a:prstGeom prst="rect">
@@ -17417,7 +18297,7 @@
                   <a:srgbClr val="1E293B"/>
                 </a:solidFill>
               </a:rPr>
-              <a:t>Carousels</a:t>
+              <a:t>Subscription</a:t>
             </a:r>
             <a:endParaRPr lang="en-US" sz="750" dirty="0"/>
           </a:p>
@@ -17425,13 +18305,13 @@
       </p:sp>
       <p:sp>
         <p:nvSpPr>
-          <p:cNvPr id="78" name="Shape 76"/>
-          <p:cNvSpPr/>
-          <p:nvPr/>
-        </p:nvSpPr>
-        <p:spPr>
-          <a:xfrm>
-            <a:off x="3200400" y="4343400"/>
+          <p:cNvPr id="106" name="Shape 104"/>
+          <p:cNvSpPr/>
+          <p:nvPr/>
+        </p:nvSpPr>
+        <p:spPr>
+          <a:xfrm>
+            <a:off x="3200400" y="5875020"/>
             <a:ext cx="932688" cy="155448"/>
           </a:xfrm>
           <a:prstGeom prst="roundRect">
@@ -17440,25 +18320,25 @@
             </a:avLst>
           </a:prstGeom>
           <a:solidFill>
-            <a:srgbClr val="1558A8"/>
-          </a:solidFill>
-          <a:ln w="12700">
-            <a:solidFill>
-              <a:srgbClr val="1558A8"/>
-            </a:solidFill>
-            <a:prstDash val="solid"/>
-          </a:ln>
-        </p:spPr>
-      </p:sp>
-      <p:sp>
-        <p:nvSpPr>
-          <p:cNvPr id="79" name="Text 77"/>
-          <p:cNvSpPr/>
-          <p:nvPr/>
-        </p:nvSpPr>
-        <p:spPr>
-          <a:xfrm>
-            <a:off x="3200400" y="4343400"/>
+            <a:srgbClr val="F3F4F6"/>
+          </a:solidFill>
+          <a:ln w="9525">
+            <a:solidFill>
+              <a:srgbClr val="D1D5DB"/>
+            </a:solidFill>
+            <a:prstDash val="solid"/>
+          </a:ln>
+        </p:spPr>
+      </p:sp>
+      <p:sp>
+        <p:nvSpPr>
+          <p:cNvPr id="107" name="Text 105"/>
+          <p:cNvSpPr/>
+          <p:nvPr/>
+        </p:nvSpPr>
+        <p:spPr>
+          <a:xfrm>
+            <a:off x="3200400" y="5875020"/>
             <a:ext cx="932688" cy="155448"/>
           </a:xfrm>
           <a:prstGeom prst="rect">
@@ -17477,10 +18357,10 @@
             <a:r>
               <a:rPr lang="en-US" sz="700" dirty="0">
                 <a:solidFill>
-                  <a:srgbClr val="FFFFFF"/>
-                </a:solidFill>
-              </a:rPr>
-              <a:t>In Progress</a:t>
+                  <a:srgbClr val="374151"/>
+                </a:solidFill>
+              </a:rPr>
+              <a:t>Not Started</a:t>
             </a:r>
             <a:endParaRPr lang="en-US" sz="700" dirty="0"/>
           </a:p>
@@ -17488,13 +18368,13 @@
       </p:sp>
       <p:sp>
         <p:nvSpPr>
-          <p:cNvPr id="80" name="Shape 78"/>
-          <p:cNvSpPr/>
-          <p:nvPr/>
-        </p:nvSpPr>
-        <p:spPr>
-          <a:xfrm>
-            <a:off x="4215384" y="4133088"/>
+          <p:cNvPr id="108" name="Shape 106"/>
+          <p:cNvSpPr/>
+          <p:nvPr/>
+        </p:nvSpPr>
+        <p:spPr>
+          <a:xfrm>
+            <a:off x="4215384" y="5664708"/>
             <a:ext cx="932688" cy="182880"/>
           </a:xfrm>
           <a:prstGeom prst="roundRect">
@@ -17515,13 +18395,13 @@
       </p:sp>
       <p:sp>
         <p:nvSpPr>
-          <p:cNvPr id="81" name="Text 79"/>
-          <p:cNvSpPr/>
-          <p:nvPr/>
-        </p:nvSpPr>
-        <p:spPr>
-          <a:xfrm>
-            <a:off x="4215384" y="4133088"/>
+          <p:cNvPr id="109" name="Text 107"/>
+          <p:cNvSpPr/>
+          <p:nvPr/>
+        </p:nvSpPr>
+        <p:spPr>
+          <a:xfrm>
+            <a:off x="4215384" y="5664708"/>
             <a:ext cx="932688" cy="182880"/>
           </a:xfrm>
           <a:prstGeom prst="rect">
@@ -17543,7 +18423,7 @@
                   <a:srgbClr val="1E293B"/>
                 </a:solidFill>
               </a:rPr>
-              <a:t>Live Events</a:t>
+              <a:t>MVPD</a:t>
             </a:r>
             <a:endParaRPr lang="en-US" sz="750" dirty="0"/>
           </a:p>
@@ -17551,13 +18431,13 @@
       </p:sp>
       <p:sp>
         <p:nvSpPr>
-          <p:cNvPr id="82" name="Shape 80"/>
-          <p:cNvSpPr/>
-          <p:nvPr/>
-        </p:nvSpPr>
-        <p:spPr>
-          <a:xfrm>
-            <a:off x="4215384" y="4343400"/>
+          <p:cNvPr id="110" name="Shape 108"/>
+          <p:cNvSpPr/>
+          <p:nvPr/>
+        </p:nvSpPr>
+        <p:spPr>
+          <a:xfrm>
+            <a:off x="4215384" y="5875020"/>
             <a:ext cx="932688" cy="155448"/>
           </a:xfrm>
           <a:prstGeom prst="roundRect">
@@ -17578,13 +18458,13 @@
       </p:sp>
       <p:sp>
         <p:nvSpPr>
-          <p:cNvPr id="83" name="Text 81"/>
-          <p:cNvSpPr/>
-          <p:nvPr/>
-        </p:nvSpPr>
-        <p:spPr>
-          <a:xfrm>
-            <a:off x="4215384" y="4343400"/>
+          <p:cNvPr id="111" name="Text 109"/>
+          <p:cNvSpPr/>
+          <p:nvPr/>
+        </p:nvSpPr>
+        <p:spPr>
+          <a:xfrm>
+            <a:off x="4215384" y="5875020"/>
             <a:ext cx="932688" cy="155448"/>
           </a:xfrm>
           <a:prstGeom prst="rect">
@@ -17614,13 +18494,13 @@
       </p:sp>
       <p:sp>
         <p:nvSpPr>
-          <p:cNvPr id="84" name="Shape 82"/>
-          <p:cNvSpPr/>
-          <p:nvPr/>
-        </p:nvSpPr>
-        <p:spPr>
-          <a:xfrm>
-            <a:off x="5230368" y="4133088"/>
+          <p:cNvPr id="112" name="Shape 110"/>
+          <p:cNvSpPr/>
+          <p:nvPr/>
+        </p:nvSpPr>
+        <p:spPr>
+          <a:xfrm>
+            <a:off x="5230368" y="5664708"/>
             <a:ext cx="932688" cy="182880"/>
           </a:xfrm>
           <a:prstGeom prst="roundRect">
@@ -17641,13 +18521,13 @@
       </p:sp>
       <p:sp>
         <p:nvSpPr>
-          <p:cNvPr id="85" name="Text 83"/>
-          <p:cNvSpPr/>
-          <p:nvPr/>
-        </p:nvSpPr>
-        <p:spPr>
-          <a:xfrm>
-            <a:off x="5230368" y="4133088"/>
+          <p:cNvPr id="113" name="Text 111"/>
+          <p:cNvSpPr/>
+          <p:nvPr/>
+        </p:nvSpPr>
+        <p:spPr>
+          <a:xfrm>
+            <a:off x="5230368" y="5664708"/>
             <a:ext cx="932688" cy="182880"/>
           </a:xfrm>
           <a:prstGeom prst="rect">
@@ -17669,7 +18549,7 @@
                   <a:srgbClr val="1E293B"/>
                 </a:solidFill>
               </a:rPr>
-              <a:t>Back Catalog</a:t>
+              <a:t>Cleeng</a:t>
             </a:r>
             <a:endParaRPr lang="en-US" sz="750" dirty="0"/>
           </a:p>
@@ -17677,13 +18557,13 @@
       </p:sp>
       <p:sp>
         <p:nvSpPr>
-          <p:cNvPr id="86" name="Shape 84"/>
-          <p:cNvSpPr/>
-          <p:nvPr/>
-        </p:nvSpPr>
-        <p:spPr>
-          <a:xfrm>
-            <a:off x="5230368" y="4343400"/>
+          <p:cNvPr id="114" name="Shape 112"/>
+          <p:cNvSpPr/>
+          <p:nvPr/>
+        </p:nvSpPr>
+        <p:spPr>
+          <a:xfrm>
+            <a:off x="5230368" y="5875020"/>
             <a:ext cx="932688" cy="155448"/>
           </a:xfrm>
           <a:prstGeom prst="roundRect">
@@ -17704,13 +18584,13 @@
       </p:sp>
       <p:sp>
         <p:nvSpPr>
-          <p:cNvPr id="87" name="Text 85"/>
-          <p:cNvSpPr/>
-          <p:nvPr/>
-        </p:nvSpPr>
-        <p:spPr>
-          <a:xfrm>
-            <a:off x="5230368" y="4343400"/>
+          <p:cNvPr id="115" name="Text 113"/>
+          <p:cNvSpPr/>
+          <p:nvPr/>
+        </p:nvSpPr>
+        <p:spPr>
+          <a:xfrm>
+            <a:off x="5230368" y="5875020"/>
             <a:ext cx="932688" cy="155448"/>
           </a:xfrm>
           <a:prstGeom prst="rect">
@@ -17740,13 +18620,13 @@
       </p:sp>
       <p:sp>
         <p:nvSpPr>
-          <p:cNvPr id="88" name="Shape 86"/>
-          <p:cNvSpPr/>
-          <p:nvPr/>
-        </p:nvSpPr>
-        <p:spPr>
-          <a:xfrm>
-            <a:off x="6245352" y="4133088"/>
+          <p:cNvPr id="116" name="Shape 114"/>
+          <p:cNvSpPr/>
+          <p:nvPr/>
+        </p:nvSpPr>
+        <p:spPr>
+          <a:xfrm>
+            <a:off x="6245352" y="5664708"/>
             <a:ext cx="932688" cy="182880"/>
           </a:xfrm>
           <a:prstGeom prst="roundRect">
@@ -17767,13 +18647,13 @@
       </p:sp>
       <p:sp>
         <p:nvSpPr>
-          <p:cNvPr id="89" name="Text 87"/>
-          <p:cNvSpPr/>
-          <p:nvPr/>
-        </p:nvSpPr>
-        <p:spPr>
-          <a:xfrm>
-            <a:off x="6245352" y="4133088"/>
+          <p:cNvPr id="117" name="Text 115"/>
+          <p:cNvSpPr/>
+          <p:nvPr/>
+        </p:nvSpPr>
+        <p:spPr>
+          <a:xfrm>
+            <a:off x="6245352" y="5664708"/>
             <a:ext cx="932688" cy="182880"/>
           </a:xfrm>
           <a:prstGeom prst="rect">
@@ -17795,7 +18675,7 @@
                   <a:srgbClr val="1E293B"/>
                 </a:solidFill>
               </a:rPr>
-              <a:t>Full Replays</a:t>
+              <a:t>Promos</a:t>
             </a:r>
             <a:endParaRPr lang="en-US" sz="750" dirty="0"/>
           </a:p>
@@ -17803,13 +18683,13 @@
       </p:sp>
       <p:sp>
         <p:nvSpPr>
-          <p:cNvPr id="90" name="Shape 88"/>
-          <p:cNvSpPr/>
-          <p:nvPr/>
-        </p:nvSpPr>
-        <p:spPr>
-          <a:xfrm>
-            <a:off x="6245352" y="4343400"/>
+          <p:cNvPr id="118" name="Shape 116"/>
+          <p:cNvSpPr/>
+          <p:nvPr/>
+        </p:nvSpPr>
+        <p:spPr>
+          <a:xfrm>
+            <a:off x="6245352" y="5875020"/>
             <a:ext cx="932688" cy="155448"/>
           </a:xfrm>
           <a:prstGeom prst="roundRect">
@@ -17830,1238 +18710,7 @@
       </p:sp>
       <p:sp>
         <p:nvSpPr>
-          <p:cNvPr id="91" name="Text 89"/>
-          <p:cNvSpPr/>
-          <p:nvPr/>
-        </p:nvSpPr>
-        <p:spPr>
-          <a:xfrm>
-            <a:off x="6245352" y="4343400"/>
-            <a:ext cx="932688" cy="155448"/>
-          </a:xfrm>
-          <a:prstGeom prst="rect">
-            <a:avLst/>
-          </a:prstGeom>
-          <a:noFill/>
-          <a:ln/>
-        </p:spPr>
-        <p:txBody>
-          <a:bodyPr wrap="square" lIns="0" tIns="0" rIns="0" bIns="0" rtlCol="0" anchor="ctr"/>
-          <a:lstStyle/>
-          <a:p>
-            <a:pPr algn="ctr" indent="0" marL="0">
-              <a:buNone/>
-            </a:pPr>
-            <a:r>
-              <a:rPr lang="en-US" sz="700" dirty="0">
-                <a:solidFill>
-                  <a:srgbClr val="374151"/>
-                </a:solidFill>
-              </a:rPr>
-              <a:t>Not Started</a:t>
-            </a:r>
-            <a:endParaRPr lang="en-US" sz="700" dirty="0"/>
-          </a:p>
-        </p:txBody>
-      </p:sp>
-      <p:sp>
-        <p:nvSpPr>
-          <p:cNvPr id="92" name="Shape 90"/>
-          <p:cNvSpPr/>
-          <p:nvPr/>
-        </p:nvSpPr>
-        <p:spPr>
-          <a:xfrm>
-            <a:off x="7260336" y="4133088"/>
-            <a:ext cx="932688" cy="182880"/>
-          </a:xfrm>
-          <a:prstGeom prst="roundRect">
-            <a:avLst>
-              <a:gd name="adj" fmla="val 15000"/>
-            </a:avLst>
-          </a:prstGeom>
-          <a:solidFill>
-            <a:srgbClr val="FFFFFF"/>
-          </a:solidFill>
-          <a:ln w="9525">
-            <a:solidFill>
-              <a:srgbClr val="CBD5E1"/>
-            </a:solidFill>
-            <a:prstDash val="solid"/>
-          </a:ln>
-        </p:spPr>
-      </p:sp>
-      <p:sp>
-        <p:nvSpPr>
-          <p:cNvPr id="93" name="Text 91"/>
-          <p:cNvSpPr/>
-          <p:nvPr/>
-        </p:nvSpPr>
-        <p:spPr>
-          <a:xfrm>
-            <a:off x="7260336" y="4133088"/>
-            <a:ext cx="932688" cy="182880"/>
-          </a:xfrm>
-          <a:prstGeom prst="rect">
-            <a:avLst/>
-          </a:prstGeom>
-          <a:noFill/>
-          <a:ln/>
-        </p:spPr>
-        <p:txBody>
-          <a:bodyPr wrap="square" lIns="0" tIns="0" rIns="0" bIns="0" rtlCol="0" anchor="ctr"/>
-          <a:lstStyle/>
-          <a:p>
-            <a:pPr algn="ctr" indent="0" marL="0">
-              <a:buNone/>
-            </a:pPr>
-            <a:r>
-              <a:rPr lang="en-US" sz="750" b="1" dirty="0">
-                <a:solidFill>
-                  <a:srgbClr val="1E293B"/>
-                </a:solidFill>
-              </a:rPr>
-              <a:t>M15</a:t>
-            </a:r>
-            <a:endParaRPr lang="en-US" sz="750" dirty="0"/>
-          </a:p>
-        </p:txBody>
-      </p:sp>
-      <p:sp>
-        <p:nvSpPr>
-          <p:cNvPr id="94" name="Shape 92"/>
-          <p:cNvSpPr/>
-          <p:nvPr/>
-        </p:nvSpPr>
-        <p:spPr>
-          <a:xfrm>
-            <a:off x="7260336" y="4343400"/>
-            <a:ext cx="932688" cy="155448"/>
-          </a:xfrm>
-          <a:prstGeom prst="roundRect">
-            <a:avLst>
-              <a:gd name="adj" fmla="val 17647"/>
-            </a:avLst>
-          </a:prstGeom>
-          <a:solidFill>
-            <a:srgbClr val="F3F4F6"/>
-          </a:solidFill>
-          <a:ln w="9525">
-            <a:solidFill>
-              <a:srgbClr val="D1D5DB"/>
-            </a:solidFill>
-            <a:prstDash val="solid"/>
-          </a:ln>
-        </p:spPr>
-      </p:sp>
-      <p:sp>
-        <p:nvSpPr>
-          <p:cNvPr id="95" name="Text 93"/>
-          <p:cNvSpPr/>
-          <p:nvPr/>
-        </p:nvSpPr>
-        <p:spPr>
-          <a:xfrm>
-            <a:off x="7260336" y="4343400"/>
-            <a:ext cx="932688" cy="155448"/>
-          </a:xfrm>
-          <a:prstGeom prst="rect">
-            <a:avLst/>
-          </a:prstGeom>
-          <a:noFill/>
-          <a:ln/>
-        </p:spPr>
-        <p:txBody>
-          <a:bodyPr wrap="square" lIns="0" tIns="0" rIns="0" bIns="0" rtlCol="0" anchor="ctr"/>
-          <a:lstStyle/>
-          <a:p>
-            <a:pPr algn="ctr" indent="0" marL="0">
-              <a:buNone/>
-            </a:pPr>
-            <a:r>
-              <a:rPr lang="en-US" sz="700" dirty="0">
-                <a:solidFill>
-                  <a:srgbClr val="374151"/>
-                </a:solidFill>
-              </a:rPr>
-              <a:t>Not Started</a:t>
-            </a:r>
-            <a:endParaRPr lang="en-US" sz="700" dirty="0"/>
-          </a:p>
-        </p:txBody>
-      </p:sp>
-      <p:sp>
-        <p:nvSpPr>
-          <p:cNvPr id="96" name="Shape 94"/>
-          <p:cNvSpPr/>
-          <p:nvPr/>
-        </p:nvSpPr>
-        <p:spPr>
-          <a:xfrm>
-            <a:off x="8275320" y="4133088"/>
-            <a:ext cx="932688" cy="182880"/>
-          </a:xfrm>
-          <a:prstGeom prst="roundRect">
-            <a:avLst>
-              <a:gd name="adj" fmla="val 15000"/>
-            </a:avLst>
-          </a:prstGeom>
-          <a:solidFill>
-            <a:srgbClr val="FFFFFF"/>
-          </a:solidFill>
-          <a:ln w="9525">
-            <a:solidFill>
-              <a:srgbClr val="CBD5E1"/>
-            </a:solidFill>
-            <a:prstDash val="solid"/>
-          </a:ln>
-        </p:spPr>
-      </p:sp>
-      <p:sp>
-        <p:nvSpPr>
-          <p:cNvPr id="97" name="Text 95"/>
-          <p:cNvSpPr/>
-          <p:nvPr/>
-        </p:nvSpPr>
-        <p:spPr>
-          <a:xfrm>
-            <a:off x="8275320" y="4133088"/>
-            <a:ext cx="932688" cy="182880"/>
-          </a:xfrm>
-          <a:prstGeom prst="rect">
-            <a:avLst/>
-          </a:prstGeom>
-          <a:noFill/>
-          <a:ln/>
-        </p:spPr>
-        <p:txBody>
-          <a:bodyPr wrap="square" lIns="0" tIns="0" rIns="0" bIns="0" rtlCol="0" anchor="ctr"/>
-          <a:lstStyle/>
-          <a:p>
-            <a:pPr algn="ctr" indent="0" marL="0">
-              <a:buNone/>
-            </a:pPr>
-            <a:r>
-              <a:rPr lang="en-US" sz="750" b="1" dirty="0">
-                <a:solidFill>
-                  <a:srgbClr val="1E293B"/>
-                </a:solidFill>
-              </a:rPr>
-              <a:t>Highlights</a:t>
-            </a:r>
-            <a:endParaRPr lang="en-US" sz="750" dirty="0"/>
-          </a:p>
-        </p:txBody>
-      </p:sp>
-      <p:sp>
-        <p:nvSpPr>
-          <p:cNvPr id="98" name="Shape 96"/>
-          <p:cNvSpPr/>
-          <p:nvPr/>
-        </p:nvSpPr>
-        <p:spPr>
-          <a:xfrm>
-            <a:off x="8275320" y="4343400"/>
-            <a:ext cx="932688" cy="155448"/>
-          </a:xfrm>
-          <a:prstGeom prst="roundRect">
-            <a:avLst>
-              <a:gd name="adj" fmla="val 17647"/>
-            </a:avLst>
-          </a:prstGeom>
-          <a:solidFill>
-            <a:srgbClr val="F3F4F6"/>
-          </a:solidFill>
-          <a:ln w="9525">
-            <a:solidFill>
-              <a:srgbClr val="D1D5DB"/>
-            </a:solidFill>
-            <a:prstDash val="solid"/>
-          </a:ln>
-        </p:spPr>
-      </p:sp>
-      <p:sp>
-        <p:nvSpPr>
-          <p:cNvPr id="99" name="Text 97"/>
-          <p:cNvSpPr/>
-          <p:nvPr/>
-        </p:nvSpPr>
-        <p:spPr>
-          <a:xfrm>
-            <a:off x="8275320" y="4343400"/>
-            <a:ext cx="932688" cy="155448"/>
-          </a:xfrm>
-          <a:prstGeom prst="rect">
-            <a:avLst/>
-          </a:prstGeom>
-          <a:noFill/>
-          <a:ln/>
-        </p:spPr>
-        <p:txBody>
-          <a:bodyPr wrap="square" lIns="0" tIns="0" rIns="0" bIns="0" rtlCol="0" anchor="ctr"/>
-          <a:lstStyle/>
-          <a:p>
-            <a:pPr algn="ctr" indent="0" marL="0">
-              <a:buNone/>
-            </a:pPr>
-            <a:r>
-              <a:rPr lang="en-US" sz="700" dirty="0">
-                <a:solidFill>
-                  <a:srgbClr val="374151"/>
-                </a:solidFill>
-              </a:rPr>
-              <a:t>Not Started</a:t>
-            </a:r>
-            <a:endParaRPr lang="en-US" sz="700" dirty="0"/>
-          </a:p>
-        </p:txBody>
-      </p:sp>
-      <p:sp>
-        <p:nvSpPr>
-          <p:cNvPr id="100" name="Shape 98"/>
-          <p:cNvSpPr/>
-          <p:nvPr/>
-        </p:nvSpPr>
-        <p:spPr>
-          <a:xfrm>
-            <a:off x="1170432" y="4590288"/>
-            <a:ext cx="932688" cy="182880"/>
-          </a:xfrm>
-          <a:prstGeom prst="roundRect">
-            <a:avLst>
-              <a:gd name="adj" fmla="val 15000"/>
-            </a:avLst>
-          </a:prstGeom>
-          <a:solidFill>
-            <a:srgbClr val="FFFFFF"/>
-          </a:solidFill>
-          <a:ln w="9525">
-            <a:solidFill>
-              <a:srgbClr val="CBD5E1"/>
-            </a:solidFill>
-            <a:prstDash val="solid"/>
-          </a:ln>
-        </p:spPr>
-      </p:sp>
-      <p:sp>
-        <p:nvSpPr>
-          <p:cNvPr id="101" name="Text 99"/>
-          <p:cNvSpPr/>
-          <p:nvPr/>
-        </p:nvSpPr>
-        <p:spPr>
-          <a:xfrm>
-            <a:off x="1170432" y="4590288"/>
-            <a:ext cx="932688" cy="182880"/>
-          </a:xfrm>
-          <a:prstGeom prst="rect">
-            <a:avLst/>
-          </a:prstGeom>
-          <a:noFill/>
-          <a:ln/>
-        </p:spPr>
-        <p:txBody>
-          <a:bodyPr wrap="square" lIns="0" tIns="0" rIns="0" bIns="0" rtlCol="0" anchor="ctr"/>
-          <a:lstStyle/>
-          <a:p>
-            <a:pPr algn="ctr" indent="0" marL="0">
-              <a:buNone/>
-            </a:pPr>
-            <a:r>
-              <a:rPr lang="en-US" sz="750" b="1" dirty="0">
-                <a:solidFill>
-                  <a:srgbClr val="1E293B"/>
-                </a:solidFill>
-              </a:rPr>
-              <a:t>Linear</a:t>
-            </a:r>
-            <a:endParaRPr lang="en-US" sz="750" dirty="0"/>
-          </a:p>
-        </p:txBody>
-      </p:sp>
-      <p:sp>
-        <p:nvSpPr>
-          <p:cNvPr id="102" name="Shape 100"/>
-          <p:cNvSpPr/>
-          <p:nvPr/>
-        </p:nvSpPr>
-        <p:spPr>
-          <a:xfrm>
-            <a:off x="1170432" y="4800600"/>
-            <a:ext cx="932688" cy="155448"/>
-          </a:xfrm>
-          <a:prstGeom prst="roundRect">
-            <a:avLst>
-              <a:gd name="adj" fmla="val 17647"/>
-            </a:avLst>
-          </a:prstGeom>
-          <a:solidFill>
-            <a:srgbClr val="1558A8"/>
-          </a:solidFill>
-          <a:ln w="12700">
-            <a:solidFill>
-              <a:srgbClr val="1558A8"/>
-            </a:solidFill>
-            <a:prstDash val="solid"/>
-          </a:ln>
-        </p:spPr>
-      </p:sp>
-      <p:sp>
-        <p:nvSpPr>
-          <p:cNvPr id="103" name="Text 101"/>
-          <p:cNvSpPr/>
-          <p:nvPr/>
-        </p:nvSpPr>
-        <p:spPr>
-          <a:xfrm>
-            <a:off x="1170432" y="4800600"/>
-            <a:ext cx="932688" cy="155448"/>
-          </a:xfrm>
-          <a:prstGeom prst="rect">
-            <a:avLst/>
-          </a:prstGeom>
-          <a:noFill/>
-          <a:ln/>
-        </p:spPr>
-        <p:txBody>
-          <a:bodyPr wrap="square" lIns="0" tIns="0" rIns="0" bIns="0" rtlCol="0" anchor="ctr"/>
-          <a:lstStyle/>
-          <a:p>
-            <a:pPr algn="ctr" indent="0" marL="0">
-              <a:buNone/>
-            </a:pPr>
-            <a:r>
-              <a:rPr lang="en-US" sz="700" dirty="0">
-                <a:solidFill>
-                  <a:srgbClr val="FFFFFF"/>
-                </a:solidFill>
-              </a:rPr>
-              <a:t>In Progress</a:t>
-            </a:r>
-            <a:endParaRPr lang="en-US" sz="700" dirty="0"/>
-          </a:p>
-        </p:txBody>
-      </p:sp>
-      <p:sp>
-        <p:nvSpPr>
-          <p:cNvPr id="104" name="Shape 102"/>
-          <p:cNvSpPr/>
-          <p:nvPr/>
-        </p:nvSpPr>
-        <p:spPr>
-          <a:xfrm>
-            <a:off x="164592" y="5399532"/>
-            <a:ext cx="9116568" cy="1476756"/>
-          </a:xfrm>
-          <a:prstGeom prst="rect">
-            <a:avLst/>
-          </a:prstGeom>
-          <a:solidFill>
-            <a:srgbClr val="FFFFFF"/>
-          </a:solidFill>
-          <a:ln w="6350">
-            <a:solidFill>
-              <a:srgbClr val="E5E7EB"/>
-            </a:solidFill>
-            <a:prstDash val="solid"/>
-          </a:ln>
-        </p:spPr>
-      </p:sp>
-      <p:sp>
-        <p:nvSpPr>
-          <p:cNvPr id="105" name="Shape 103"/>
-          <p:cNvSpPr/>
-          <p:nvPr/>
-        </p:nvSpPr>
-        <p:spPr>
-          <a:xfrm>
-            <a:off x="182880" y="5472684"/>
-            <a:ext cx="859536" cy="1330452"/>
-          </a:xfrm>
-          <a:prstGeom prst="roundRect">
-            <a:avLst>
-              <a:gd name="adj" fmla="val 5319"/>
-            </a:avLst>
-          </a:prstGeom>
-          <a:solidFill>
-            <a:srgbClr val="9CA3AF"/>
-          </a:solidFill>
-          <a:ln w="12700">
-            <a:solidFill>
-              <a:srgbClr val="9CA3AF"/>
-            </a:solidFill>
-            <a:prstDash val="solid"/>
-          </a:ln>
-        </p:spPr>
-      </p:sp>
-      <p:sp>
-        <p:nvSpPr>
-          <p:cNvPr id="106" name="Text 104"/>
-          <p:cNvSpPr/>
-          <p:nvPr/>
-        </p:nvSpPr>
-        <p:spPr>
-          <a:xfrm>
-            <a:off x="182880" y="5472684"/>
-            <a:ext cx="859536" cy="1330452"/>
-          </a:xfrm>
-          <a:prstGeom prst="rect">
-            <a:avLst/>
-          </a:prstGeom>
-          <a:noFill/>
-          <a:ln/>
-        </p:spPr>
-        <p:txBody>
-          <a:bodyPr wrap="square" lIns="0" tIns="0" rIns="0" bIns="0" rtlCol="0" anchor="ctr"/>
-          <a:lstStyle/>
-          <a:p>
-            <a:pPr algn="ctr" indent="0" marL="0">
-              <a:buNone/>
-            </a:pPr>
-            <a:r>
-              <a:rPr lang="en-US" sz="800" b="1" dirty="0">
-                <a:solidFill>
-                  <a:srgbClr val="FFFFFF"/>
-                </a:solidFill>
-              </a:rPr>
-              <a:t>Onboarding</a:t>
-            </a:r>
-            <a:endParaRPr lang="en-US" sz="800" dirty="0"/>
-          </a:p>
-        </p:txBody>
-      </p:sp>
-      <p:sp>
-        <p:nvSpPr>
-          <p:cNvPr id="107" name="Text 105"/>
-          <p:cNvSpPr/>
-          <p:nvPr/>
-        </p:nvSpPr>
-        <p:spPr>
-          <a:xfrm>
-            <a:off x="1170432" y="5445252"/>
-            <a:ext cx="8110728" cy="182880"/>
-          </a:xfrm>
-          <a:prstGeom prst="rect">
-            <a:avLst/>
-          </a:prstGeom>
-          <a:noFill/>
-          <a:ln/>
-        </p:spPr>
-        <p:txBody>
-          <a:bodyPr wrap="square" lIns="0" tIns="0" rIns="0" bIns="0" rtlCol="0" anchor="ctr"/>
-          <a:lstStyle/>
-          <a:p>
-            <a:pPr algn="l" indent="0" marL="0">
-              <a:buNone/>
-            </a:pPr>
-            <a:r>
-              <a:rPr lang="en-US" sz="750" dirty="0">
-                <a:solidFill>
-                  <a:srgbClr val="9CA3AF"/>
-                </a:solidFill>
-              </a:rPr>
-              <a:t>1 / 6 In Progress</a:t>
-            </a:r>
-            <a:endParaRPr lang="en-US" sz="750" dirty="0"/>
-          </a:p>
-        </p:txBody>
-      </p:sp>
-      <p:sp>
-        <p:nvSpPr>
-          <p:cNvPr id="108" name="Shape 106"/>
-          <p:cNvSpPr/>
-          <p:nvPr/>
-        </p:nvSpPr>
-        <p:spPr>
-          <a:xfrm>
-            <a:off x="1170432" y="5664708"/>
-            <a:ext cx="932688" cy="182880"/>
-          </a:xfrm>
-          <a:prstGeom prst="roundRect">
-            <a:avLst>
-              <a:gd name="adj" fmla="val 15000"/>
-            </a:avLst>
-          </a:prstGeom>
-          <a:solidFill>
-            <a:srgbClr val="FFFFFF"/>
-          </a:solidFill>
-          <a:ln w="9525">
-            <a:solidFill>
-              <a:srgbClr val="CBD5E1"/>
-            </a:solidFill>
-            <a:prstDash val="solid"/>
-          </a:ln>
-        </p:spPr>
-      </p:sp>
-      <p:sp>
-        <p:nvSpPr>
-          <p:cNvPr id="109" name="Text 107"/>
-          <p:cNvSpPr/>
-          <p:nvPr/>
-        </p:nvSpPr>
-        <p:spPr>
-          <a:xfrm>
-            <a:off x="1170432" y="5664708"/>
-            <a:ext cx="932688" cy="182880"/>
-          </a:xfrm>
-          <a:prstGeom prst="rect">
-            <a:avLst/>
-          </a:prstGeom>
-          <a:noFill/>
-          <a:ln/>
-        </p:spPr>
-        <p:txBody>
-          <a:bodyPr wrap="square" lIns="0" tIns="0" rIns="0" bIns="0" rtlCol="0" anchor="ctr"/>
-          <a:lstStyle/>
-          <a:p>
-            <a:pPr algn="ctr" indent="0" marL="0">
-              <a:buNone/>
-            </a:pPr>
-            <a:r>
-              <a:rPr lang="en-US" sz="750" b="1" dirty="0">
-                <a:solidFill>
-                  <a:srgbClr val="1E293B"/>
-                </a:solidFill>
-              </a:rPr>
-              <a:t>Unentitled</a:t>
-            </a:r>
-            <a:endParaRPr lang="en-US" sz="750" dirty="0"/>
-          </a:p>
-        </p:txBody>
-      </p:sp>
-      <p:sp>
-        <p:nvSpPr>
-          <p:cNvPr id="110" name="Shape 108"/>
-          <p:cNvSpPr/>
-          <p:nvPr/>
-        </p:nvSpPr>
-        <p:spPr>
-          <a:xfrm>
-            <a:off x="1170432" y="5875020"/>
-            <a:ext cx="932688" cy="155448"/>
-          </a:xfrm>
-          <a:prstGeom prst="roundRect">
-            <a:avLst>
-              <a:gd name="adj" fmla="val 17647"/>
-            </a:avLst>
-          </a:prstGeom>
-          <a:solidFill>
-            <a:srgbClr val="F3F4F6"/>
-          </a:solidFill>
-          <a:ln w="9525">
-            <a:solidFill>
-              <a:srgbClr val="D1D5DB"/>
-            </a:solidFill>
-            <a:prstDash val="solid"/>
-          </a:ln>
-        </p:spPr>
-      </p:sp>
-      <p:sp>
-        <p:nvSpPr>
-          <p:cNvPr id="111" name="Text 109"/>
-          <p:cNvSpPr/>
-          <p:nvPr/>
-        </p:nvSpPr>
-        <p:spPr>
-          <a:xfrm>
-            <a:off x="1170432" y="5875020"/>
-            <a:ext cx="932688" cy="155448"/>
-          </a:xfrm>
-          <a:prstGeom prst="rect">
-            <a:avLst/>
-          </a:prstGeom>
-          <a:noFill/>
-          <a:ln/>
-        </p:spPr>
-        <p:txBody>
-          <a:bodyPr wrap="square" lIns="0" tIns="0" rIns="0" bIns="0" rtlCol="0" anchor="ctr"/>
-          <a:lstStyle/>
-          <a:p>
-            <a:pPr algn="ctr" indent="0" marL="0">
-              <a:buNone/>
-            </a:pPr>
-            <a:r>
-              <a:rPr lang="en-US" sz="700" dirty="0">
-                <a:solidFill>
-                  <a:srgbClr val="374151"/>
-                </a:solidFill>
-              </a:rPr>
-              <a:t>Not Started</a:t>
-            </a:r>
-            <a:endParaRPr lang="en-US" sz="700" dirty="0"/>
-          </a:p>
-        </p:txBody>
-      </p:sp>
-      <p:sp>
-        <p:nvSpPr>
-          <p:cNvPr id="112" name="Shape 110"/>
-          <p:cNvSpPr/>
-          <p:nvPr/>
-        </p:nvSpPr>
-        <p:spPr>
-          <a:xfrm>
-            <a:off x="2185416" y="5664708"/>
-            <a:ext cx="932688" cy="182880"/>
-          </a:xfrm>
-          <a:prstGeom prst="roundRect">
-            <a:avLst>
-              <a:gd name="adj" fmla="val 15000"/>
-            </a:avLst>
-          </a:prstGeom>
-          <a:solidFill>
-            <a:srgbClr val="FFFFFF"/>
-          </a:solidFill>
-          <a:ln w="9525">
-            <a:solidFill>
-              <a:srgbClr val="CBD5E1"/>
-            </a:solidFill>
-            <a:prstDash val="solid"/>
-          </a:ln>
-        </p:spPr>
-      </p:sp>
-      <p:sp>
-        <p:nvSpPr>
-          <p:cNvPr id="113" name="Text 111"/>
-          <p:cNvSpPr/>
-          <p:nvPr/>
-        </p:nvSpPr>
-        <p:spPr>
-          <a:xfrm>
-            <a:off x="2185416" y="5664708"/>
-            <a:ext cx="932688" cy="182880"/>
-          </a:xfrm>
-          <a:prstGeom prst="rect">
-            <a:avLst/>
-          </a:prstGeom>
-          <a:noFill/>
-          <a:ln/>
-        </p:spPr>
-        <p:txBody>
-          <a:bodyPr wrap="square" lIns="0" tIns="0" rIns="0" bIns="0" rtlCol="0" anchor="ctr"/>
-          <a:lstStyle/>
-          <a:p>
-            <a:pPr algn="ctr" indent="0" marL="0">
-              <a:buNone/>
-            </a:pPr>
-            <a:r>
-              <a:rPr lang="en-US" sz="750" b="1" dirty="0">
-                <a:solidFill>
-                  <a:srgbClr val="1E293B"/>
-                </a:solidFill>
-              </a:rPr>
-              <a:t>Sign-in</a:t>
-            </a:r>
-            <a:endParaRPr lang="en-US" sz="750" dirty="0"/>
-          </a:p>
-        </p:txBody>
-      </p:sp>
-      <p:sp>
-        <p:nvSpPr>
-          <p:cNvPr id="114" name="Shape 112"/>
-          <p:cNvSpPr/>
-          <p:nvPr/>
-        </p:nvSpPr>
-        <p:spPr>
-          <a:xfrm>
-            <a:off x="2185416" y="5875020"/>
-            <a:ext cx="932688" cy="155448"/>
-          </a:xfrm>
-          <a:prstGeom prst="roundRect">
-            <a:avLst>
-              <a:gd name="adj" fmla="val 17647"/>
-            </a:avLst>
-          </a:prstGeom>
-          <a:solidFill>
-            <a:srgbClr val="F3F4F6"/>
-          </a:solidFill>
-          <a:ln w="9525">
-            <a:solidFill>
-              <a:srgbClr val="D1D5DB"/>
-            </a:solidFill>
-            <a:prstDash val="solid"/>
-          </a:ln>
-        </p:spPr>
-      </p:sp>
-      <p:sp>
-        <p:nvSpPr>
-          <p:cNvPr id="115" name="Text 113"/>
-          <p:cNvSpPr/>
-          <p:nvPr/>
-        </p:nvSpPr>
-        <p:spPr>
-          <a:xfrm>
-            <a:off x="2185416" y="5875020"/>
-            <a:ext cx="932688" cy="155448"/>
-          </a:xfrm>
-          <a:prstGeom prst="rect">
-            <a:avLst/>
-          </a:prstGeom>
-          <a:noFill/>
-          <a:ln/>
-        </p:spPr>
-        <p:txBody>
-          <a:bodyPr wrap="square" lIns="0" tIns="0" rIns="0" bIns="0" rtlCol="0" anchor="ctr"/>
-          <a:lstStyle/>
-          <a:p>
-            <a:pPr algn="ctr" indent="0" marL="0">
-              <a:buNone/>
-            </a:pPr>
-            <a:r>
-              <a:rPr lang="en-US" sz="700" dirty="0">
-                <a:solidFill>
-                  <a:srgbClr val="374151"/>
-                </a:solidFill>
-              </a:rPr>
-              <a:t>Not Started</a:t>
-            </a:r>
-            <a:endParaRPr lang="en-US" sz="700" dirty="0"/>
-          </a:p>
-        </p:txBody>
-      </p:sp>
-      <p:sp>
-        <p:nvSpPr>
-          <p:cNvPr id="116" name="Shape 114"/>
-          <p:cNvSpPr/>
-          <p:nvPr/>
-        </p:nvSpPr>
-        <p:spPr>
-          <a:xfrm>
-            <a:off x="3200400" y="5664708"/>
-            <a:ext cx="932688" cy="182880"/>
-          </a:xfrm>
-          <a:prstGeom prst="roundRect">
-            <a:avLst>
-              <a:gd name="adj" fmla="val 15000"/>
-            </a:avLst>
-          </a:prstGeom>
-          <a:solidFill>
-            <a:srgbClr val="FFFFFF"/>
-          </a:solidFill>
-          <a:ln w="9525">
-            <a:solidFill>
-              <a:srgbClr val="CBD5E1"/>
-            </a:solidFill>
-            <a:prstDash val="solid"/>
-          </a:ln>
-        </p:spPr>
-      </p:sp>
-      <p:sp>
-        <p:nvSpPr>
-          <p:cNvPr id="117" name="Text 115"/>
-          <p:cNvSpPr/>
-          <p:nvPr/>
-        </p:nvSpPr>
-        <p:spPr>
-          <a:xfrm>
-            <a:off x="3200400" y="5664708"/>
-            <a:ext cx="932688" cy="182880"/>
-          </a:xfrm>
-          <a:prstGeom prst="rect">
-            <a:avLst/>
-          </a:prstGeom>
-          <a:noFill/>
-          <a:ln/>
-        </p:spPr>
-        <p:txBody>
-          <a:bodyPr wrap="square" lIns="0" tIns="0" rIns="0" bIns="0" rtlCol="0" anchor="ctr"/>
-          <a:lstStyle/>
-          <a:p>
-            <a:pPr algn="ctr" indent="0" marL="0">
-              <a:buNone/>
-            </a:pPr>
-            <a:r>
-              <a:rPr lang="en-US" sz="750" b="1" dirty="0">
-                <a:solidFill>
-                  <a:srgbClr val="1E293B"/>
-                </a:solidFill>
-              </a:rPr>
-              <a:t>Subscription</a:t>
-            </a:r>
-            <a:endParaRPr lang="en-US" sz="750" dirty="0"/>
-          </a:p>
-        </p:txBody>
-      </p:sp>
-      <p:sp>
-        <p:nvSpPr>
-          <p:cNvPr id="118" name="Shape 116"/>
-          <p:cNvSpPr/>
-          <p:nvPr/>
-        </p:nvSpPr>
-        <p:spPr>
-          <a:xfrm>
-            <a:off x="3200400" y="5875020"/>
-            <a:ext cx="932688" cy="155448"/>
-          </a:xfrm>
-          <a:prstGeom prst="roundRect">
-            <a:avLst>
-              <a:gd name="adj" fmla="val 17647"/>
-            </a:avLst>
-          </a:prstGeom>
-          <a:solidFill>
-            <a:srgbClr val="F3F4F6"/>
-          </a:solidFill>
-          <a:ln w="9525">
-            <a:solidFill>
-              <a:srgbClr val="D1D5DB"/>
-            </a:solidFill>
-            <a:prstDash val="solid"/>
-          </a:ln>
-        </p:spPr>
-      </p:sp>
-      <p:sp>
-        <p:nvSpPr>
           <p:cNvPr id="119" name="Text 117"/>
-          <p:cNvSpPr/>
-          <p:nvPr/>
-        </p:nvSpPr>
-        <p:spPr>
-          <a:xfrm>
-            <a:off x="3200400" y="5875020"/>
-            <a:ext cx="932688" cy="155448"/>
-          </a:xfrm>
-          <a:prstGeom prst="rect">
-            <a:avLst/>
-          </a:prstGeom>
-          <a:noFill/>
-          <a:ln/>
-        </p:spPr>
-        <p:txBody>
-          <a:bodyPr wrap="square" lIns="0" tIns="0" rIns="0" bIns="0" rtlCol="0" anchor="ctr"/>
-          <a:lstStyle/>
-          <a:p>
-            <a:pPr algn="ctr" indent="0" marL="0">
-              <a:buNone/>
-            </a:pPr>
-            <a:r>
-              <a:rPr lang="en-US" sz="700" dirty="0">
-                <a:solidFill>
-                  <a:srgbClr val="374151"/>
-                </a:solidFill>
-              </a:rPr>
-              <a:t>Not Started</a:t>
-            </a:r>
-            <a:endParaRPr lang="en-US" sz="700" dirty="0"/>
-          </a:p>
-        </p:txBody>
-      </p:sp>
-      <p:sp>
-        <p:nvSpPr>
-          <p:cNvPr id="120" name="Shape 118"/>
-          <p:cNvSpPr/>
-          <p:nvPr/>
-        </p:nvSpPr>
-        <p:spPr>
-          <a:xfrm>
-            <a:off x="4215384" y="5664708"/>
-            <a:ext cx="932688" cy="182880"/>
-          </a:xfrm>
-          <a:prstGeom prst="roundRect">
-            <a:avLst>
-              <a:gd name="adj" fmla="val 15000"/>
-            </a:avLst>
-          </a:prstGeom>
-          <a:solidFill>
-            <a:srgbClr val="FFFFFF"/>
-          </a:solidFill>
-          <a:ln w="9525">
-            <a:solidFill>
-              <a:srgbClr val="CBD5E1"/>
-            </a:solidFill>
-            <a:prstDash val="solid"/>
-          </a:ln>
-        </p:spPr>
-      </p:sp>
-      <p:sp>
-        <p:nvSpPr>
-          <p:cNvPr id="121" name="Text 119"/>
-          <p:cNvSpPr/>
-          <p:nvPr/>
-        </p:nvSpPr>
-        <p:spPr>
-          <a:xfrm>
-            <a:off x="4215384" y="5664708"/>
-            <a:ext cx="932688" cy="182880"/>
-          </a:xfrm>
-          <a:prstGeom prst="rect">
-            <a:avLst/>
-          </a:prstGeom>
-          <a:noFill/>
-          <a:ln/>
-        </p:spPr>
-        <p:txBody>
-          <a:bodyPr wrap="square" lIns="0" tIns="0" rIns="0" bIns="0" rtlCol="0" anchor="ctr"/>
-          <a:lstStyle/>
-          <a:p>
-            <a:pPr algn="ctr" indent="0" marL="0">
-              <a:buNone/>
-            </a:pPr>
-            <a:r>
-              <a:rPr lang="en-US" sz="750" b="1" dirty="0">
-                <a:solidFill>
-                  <a:srgbClr val="1E293B"/>
-                </a:solidFill>
-              </a:rPr>
-              <a:t>MVPD</a:t>
-            </a:r>
-            <a:endParaRPr lang="en-US" sz="750" dirty="0"/>
-          </a:p>
-        </p:txBody>
-      </p:sp>
-      <p:sp>
-        <p:nvSpPr>
-          <p:cNvPr id="122" name="Shape 120"/>
-          <p:cNvSpPr/>
-          <p:nvPr/>
-        </p:nvSpPr>
-        <p:spPr>
-          <a:xfrm>
-            <a:off x="4215384" y="5875020"/>
-            <a:ext cx="932688" cy="155448"/>
-          </a:xfrm>
-          <a:prstGeom prst="roundRect">
-            <a:avLst>
-              <a:gd name="adj" fmla="val 17647"/>
-            </a:avLst>
-          </a:prstGeom>
-          <a:solidFill>
-            <a:srgbClr val="1558A8"/>
-          </a:solidFill>
-          <a:ln w="12700">
-            <a:solidFill>
-              <a:srgbClr val="1558A8"/>
-            </a:solidFill>
-            <a:prstDash val="solid"/>
-          </a:ln>
-        </p:spPr>
-      </p:sp>
-      <p:sp>
-        <p:nvSpPr>
-          <p:cNvPr id="123" name="Text 121"/>
-          <p:cNvSpPr/>
-          <p:nvPr/>
-        </p:nvSpPr>
-        <p:spPr>
-          <a:xfrm>
-            <a:off x="4215384" y="5875020"/>
-            <a:ext cx="932688" cy="155448"/>
-          </a:xfrm>
-          <a:prstGeom prst="rect">
-            <a:avLst/>
-          </a:prstGeom>
-          <a:noFill/>
-          <a:ln/>
-        </p:spPr>
-        <p:txBody>
-          <a:bodyPr wrap="square" lIns="0" tIns="0" rIns="0" bIns="0" rtlCol="0" anchor="ctr"/>
-          <a:lstStyle/>
-          <a:p>
-            <a:pPr algn="ctr" indent="0" marL="0">
-              <a:buNone/>
-            </a:pPr>
-            <a:r>
-              <a:rPr lang="en-US" sz="700" dirty="0">
-                <a:solidFill>
-                  <a:srgbClr val="FFFFFF"/>
-                </a:solidFill>
-              </a:rPr>
-              <a:t>In Progress</a:t>
-            </a:r>
-            <a:endParaRPr lang="en-US" sz="700" dirty="0"/>
-          </a:p>
-        </p:txBody>
-      </p:sp>
-      <p:sp>
-        <p:nvSpPr>
-          <p:cNvPr id="124" name="Shape 122"/>
-          <p:cNvSpPr/>
-          <p:nvPr/>
-        </p:nvSpPr>
-        <p:spPr>
-          <a:xfrm>
-            <a:off x="5230368" y="5664708"/>
-            <a:ext cx="932688" cy="182880"/>
-          </a:xfrm>
-          <a:prstGeom prst="roundRect">
-            <a:avLst>
-              <a:gd name="adj" fmla="val 15000"/>
-            </a:avLst>
-          </a:prstGeom>
-          <a:solidFill>
-            <a:srgbClr val="FFFFFF"/>
-          </a:solidFill>
-          <a:ln w="9525">
-            <a:solidFill>
-              <a:srgbClr val="CBD5E1"/>
-            </a:solidFill>
-            <a:prstDash val="solid"/>
-          </a:ln>
-        </p:spPr>
-      </p:sp>
-      <p:sp>
-        <p:nvSpPr>
-          <p:cNvPr id="125" name="Text 123"/>
-          <p:cNvSpPr/>
-          <p:nvPr/>
-        </p:nvSpPr>
-        <p:spPr>
-          <a:xfrm>
-            <a:off x="5230368" y="5664708"/>
-            <a:ext cx="932688" cy="182880"/>
-          </a:xfrm>
-          <a:prstGeom prst="rect">
-            <a:avLst/>
-          </a:prstGeom>
-          <a:noFill/>
-          <a:ln/>
-        </p:spPr>
-        <p:txBody>
-          <a:bodyPr wrap="square" lIns="0" tIns="0" rIns="0" bIns="0" rtlCol="0" anchor="ctr"/>
-          <a:lstStyle/>
-          <a:p>
-            <a:pPr algn="ctr" indent="0" marL="0">
-              <a:buNone/>
-            </a:pPr>
-            <a:r>
-              <a:rPr lang="en-US" sz="750" b="1" dirty="0">
-                <a:solidFill>
-                  <a:srgbClr val="1E293B"/>
-                </a:solidFill>
-              </a:rPr>
-              <a:t>Cleeng</a:t>
-            </a:r>
-            <a:endParaRPr lang="en-US" sz="750" dirty="0"/>
-          </a:p>
-        </p:txBody>
-      </p:sp>
-      <p:sp>
-        <p:nvSpPr>
-          <p:cNvPr id="126" name="Shape 124"/>
-          <p:cNvSpPr/>
-          <p:nvPr/>
-        </p:nvSpPr>
-        <p:spPr>
-          <a:xfrm>
-            <a:off x="5230368" y="5875020"/>
-            <a:ext cx="932688" cy="155448"/>
-          </a:xfrm>
-          <a:prstGeom prst="roundRect">
-            <a:avLst>
-              <a:gd name="adj" fmla="val 17647"/>
-            </a:avLst>
-          </a:prstGeom>
-          <a:solidFill>
-            <a:srgbClr val="F3F4F6"/>
-          </a:solidFill>
-          <a:ln w="9525">
-            <a:solidFill>
-              <a:srgbClr val="D1D5DB"/>
-            </a:solidFill>
-            <a:prstDash val="solid"/>
-          </a:ln>
-        </p:spPr>
-      </p:sp>
-      <p:sp>
-        <p:nvSpPr>
-          <p:cNvPr id="127" name="Text 125"/>
-          <p:cNvSpPr/>
-          <p:nvPr/>
-        </p:nvSpPr>
-        <p:spPr>
-          <a:xfrm>
-            <a:off x="5230368" y="5875020"/>
-            <a:ext cx="932688" cy="155448"/>
-          </a:xfrm>
-          <a:prstGeom prst="rect">
-            <a:avLst/>
-          </a:prstGeom>
-          <a:noFill/>
-          <a:ln/>
-        </p:spPr>
-        <p:txBody>
-          <a:bodyPr wrap="square" lIns="0" tIns="0" rIns="0" bIns="0" rtlCol="0" anchor="ctr"/>
-          <a:lstStyle/>
-          <a:p>
-            <a:pPr algn="ctr" indent="0" marL="0">
-              <a:buNone/>
-            </a:pPr>
-            <a:r>
-              <a:rPr lang="en-US" sz="700" dirty="0">
-                <a:solidFill>
-                  <a:srgbClr val="374151"/>
-                </a:solidFill>
-              </a:rPr>
-              <a:t>Not Started</a:t>
-            </a:r>
-            <a:endParaRPr lang="en-US" sz="700" dirty="0"/>
-          </a:p>
-        </p:txBody>
-      </p:sp>
-      <p:sp>
-        <p:nvSpPr>
-          <p:cNvPr id="128" name="Shape 126"/>
-          <p:cNvSpPr/>
-          <p:nvPr/>
-        </p:nvSpPr>
-        <p:spPr>
-          <a:xfrm>
-            <a:off x="6245352" y="5664708"/>
-            <a:ext cx="932688" cy="182880"/>
-          </a:xfrm>
-          <a:prstGeom prst="roundRect">
-            <a:avLst>
-              <a:gd name="adj" fmla="val 15000"/>
-            </a:avLst>
-          </a:prstGeom>
-          <a:solidFill>
-            <a:srgbClr val="FFFFFF"/>
-          </a:solidFill>
-          <a:ln w="9525">
-            <a:solidFill>
-              <a:srgbClr val="CBD5E1"/>
-            </a:solidFill>
-            <a:prstDash val="solid"/>
-          </a:ln>
-        </p:spPr>
-      </p:sp>
-      <p:sp>
-        <p:nvSpPr>
-          <p:cNvPr id="129" name="Text 127"/>
-          <p:cNvSpPr/>
-          <p:nvPr/>
-        </p:nvSpPr>
-        <p:spPr>
-          <a:xfrm>
-            <a:off x="6245352" y="5664708"/>
-            <a:ext cx="932688" cy="182880"/>
-          </a:xfrm>
-          <a:prstGeom prst="rect">
-            <a:avLst/>
-          </a:prstGeom>
-          <a:noFill/>
-          <a:ln/>
-        </p:spPr>
-        <p:txBody>
-          <a:bodyPr wrap="square" lIns="0" tIns="0" rIns="0" bIns="0" rtlCol="0" anchor="ctr"/>
-          <a:lstStyle/>
-          <a:p>
-            <a:pPr algn="ctr" indent="0" marL="0">
-              <a:buNone/>
-            </a:pPr>
-            <a:r>
-              <a:rPr lang="en-US" sz="750" b="1" dirty="0">
-                <a:solidFill>
-                  <a:srgbClr val="1E293B"/>
-                </a:solidFill>
-              </a:rPr>
-              <a:t>Promos</a:t>
-            </a:r>
-            <a:endParaRPr lang="en-US" sz="750" dirty="0"/>
-          </a:p>
-        </p:txBody>
-      </p:sp>
-      <p:sp>
-        <p:nvSpPr>
-          <p:cNvPr id="130" name="Shape 128"/>
           <p:cNvSpPr/>
           <p:nvPr/>
         </p:nvSpPr>
@@ -19070,33 +18719,6 @@
             <a:off x="6245352" y="5875020"/>
             <a:ext cx="932688" cy="155448"/>
           </a:xfrm>
-          <a:prstGeom prst="roundRect">
-            <a:avLst>
-              <a:gd name="adj" fmla="val 17647"/>
-            </a:avLst>
-          </a:prstGeom>
-          <a:solidFill>
-            <a:srgbClr val="F3F4F6"/>
-          </a:solidFill>
-          <a:ln w="9525">
-            <a:solidFill>
-              <a:srgbClr val="D1D5DB"/>
-            </a:solidFill>
-            <a:prstDash val="solid"/>
-          </a:ln>
-        </p:spPr>
-      </p:sp>
-      <p:sp>
-        <p:nvSpPr>
-          <p:cNvPr id="131" name="Text 129"/>
-          <p:cNvSpPr/>
-          <p:nvPr/>
-        </p:nvSpPr>
-        <p:spPr>
-          <a:xfrm>
-            <a:off x="6245352" y="5875020"/>
-            <a:ext cx="932688" cy="155448"/>
-          </a:xfrm>
           <a:prstGeom prst="rect">
             <a:avLst/>
           </a:prstGeom>
@@ -19124,7 +18746,7 @@
       </p:sp>
       <p:sp>
         <p:nvSpPr>
-          <p:cNvPr id="132" name="Shape 130"/>
+          <p:cNvPr id="120" name="Shape 118"/>
           <p:cNvSpPr/>
           <p:nvPr/>
         </p:nvSpPr>
@@ -19149,7 +18771,7 @@
       </p:sp>
       <p:sp>
         <p:nvSpPr>
-          <p:cNvPr id="133" name="Text 131"/>
+          <p:cNvPr id="121" name="Text 119"/>
           <p:cNvSpPr/>
           <p:nvPr/>
         </p:nvSpPr>
@@ -19185,7 +18807,7 @@
       </p:sp>
       <p:sp>
         <p:nvSpPr>
-          <p:cNvPr id="134" name="Shape 132"/>
+          <p:cNvPr id="122" name="Shape 120"/>
           <p:cNvSpPr/>
           <p:nvPr/>
         </p:nvSpPr>
@@ -19210,7 +18832,7 @@
       </p:sp>
       <p:sp>
         <p:nvSpPr>
-          <p:cNvPr id="135" name="Shape 133"/>
+          <p:cNvPr id="123" name="Shape 121"/>
           <p:cNvSpPr/>
           <p:nvPr/>
         </p:nvSpPr>
@@ -19235,7 +18857,7 @@
       </p:sp>
       <p:sp>
         <p:nvSpPr>
-          <p:cNvPr id="136" name="Text 134"/>
+          <p:cNvPr id="124" name="Text 122"/>
           <p:cNvSpPr/>
           <p:nvPr/>
         </p:nvSpPr>
@@ -19271,7 +18893,7 @@
       </p:sp>
       <p:sp>
         <p:nvSpPr>
-          <p:cNvPr id="137" name="Text 135"/>
+          <p:cNvPr id="125" name="Text 123"/>
           <p:cNvSpPr/>
           <p:nvPr/>
         </p:nvSpPr>
@@ -19307,7 +18929,7 @@
       </p:sp>
       <p:sp>
         <p:nvSpPr>
-          <p:cNvPr id="138" name="Shape 136"/>
+          <p:cNvPr id="126" name="Shape 124"/>
           <p:cNvSpPr/>
           <p:nvPr/>
         </p:nvSpPr>
@@ -19334,7 +18956,7 @@
       </p:sp>
       <p:sp>
         <p:nvSpPr>
-          <p:cNvPr id="139" name="Text 137"/>
+          <p:cNvPr id="127" name="Text 125"/>
           <p:cNvSpPr/>
           <p:nvPr/>
         </p:nvSpPr>
@@ -19370,7 +18992,7 @@
       </p:sp>
       <p:sp>
         <p:nvSpPr>
-          <p:cNvPr id="140" name="Shape 138"/>
+          <p:cNvPr id="128" name="Shape 126"/>
           <p:cNvSpPr/>
           <p:nvPr/>
         </p:nvSpPr>
@@ -19395,7 +19017,7 @@
       </p:sp>
       <p:sp>
         <p:nvSpPr>
-          <p:cNvPr id="141" name="Shape 139"/>
+          <p:cNvPr id="129" name="Shape 127"/>
           <p:cNvSpPr/>
           <p:nvPr/>
         </p:nvSpPr>
@@ -19420,7 +19042,7 @@
       </p:sp>
       <p:sp>
         <p:nvSpPr>
-          <p:cNvPr id="142" name="Text 140"/>
+          <p:cNvPr id="130" name="Text 128"/>
           <p:cNvSpPr/>
           <p:nvPr/>
         </p:nvSpPr>
@@ -19456,7 +19078,7 @@
       </p:sp>
       <p:sp>
         <p:nvSpPr>
-          <p:cNvPr id="143" name="Text 141"/>
+          <p:cNvPr id="131" name="Text 129"/>
           <p:cNvSpPr/>
           <p:nvPr/>
         </p:nvSpPr>
@@ -19492,7 +19114,7 @@
       </p:sp>
       <p:sp>
         <p:nvSpPr>
-          <p:cNvPr id="144" name="Shape 142"/>
+          <p:cNvPr id="132" name="Shape 130"/>
           <p:cNvSpPr/>
           <p:nvPr/>
         </p:nvSpPr>
@@ -19519,7 +19141,7 @@
       </p:sp>
       <p:sp>
         <p:nvSpPr>
-          <p:cNvPr id="145" name="Text 143"/>
+          <p:cNvPr id="133" name="Text 131"/>
           <p:cNvSpPr/>
           <p:nvPr/>
         </p:nvSpPr>
@@ -19555,7 +19177,7 @@
       </p:sp>
       <p:sp>
         <p:nvSpPr>
-          <p:cNvPr id="146" name="Shape 144"/>
+          <p:cNvPr id="134" name="Shape 132"/>
           <p:cNvSpPr/>
           <p:nvPr/>
         </p:nvSpPr>
@@ -19580,7 +19202,7 @@
       </p:sp>
       <p:sp>
         <p:nvSpPr>
-          <p:cNvPr id="147" name="Shape 145"/>
+          <p:cNvPr id="135" name="Shape 133"/>
           <p:cNvSpPr/>
           <p:nvPr/>
         </p:nvSpPr>
@@ -19605,7 +19227,7 @@
       </p:sp>
       <p:sp>
         <p:nvSpPr>
-          <p:cNvPr id="148" name="Text 146"/>
+          <p:cNvPr id="136" name="Text 134"/>
           <p:cNvSpPr/>
           <p:nvPr/>
         </p:nvSpPr>
@@ -19641,7 +19263,7 @@
       </p:sp>
       <p:sp>
         <p:nvSpPr>
-          <p:cNvPr id="149" name="Text 147"/>
+          <p:cNvPr id="137" name="Text 135"/>
           <p:cNvSpPr/>
           <p:nvPr/>
         </p:nvSpPr>
@@ -19677,7 +19299,7 @@
       </p:sp>
       <p:sp>
         <p:nvSpPr>
-          <p:cNvPr id="150" name="Shape 148"/>
+          <p:cNvPr id="138" name="Shape 136"/>
           <p:cNvSpPr/>
           <p:nvPr/>
         </p:nvSpPr>
@@ -19704,7 +19326,7 @@
       </p:sp>
       <p:sp>
         <p:nvSpPr>
-          <p:cNvPr id="151" name="Text 149"/>
+          <p:cNvPr id="139" name="Text 137"/>
           <p:cNvSpPr/>
           <p:nvPr/>
         </p:nvSpPr>
@@ -19740,7 +19362,7 @@
       </p:sp>
       <p:sp>
         <p:nvSpPr>
-          <p:cNvPr id="152" name="Shape 150"/>
+          <p:cNvPr id="140" name="Shape 138"/>
           <p:cNvSpPr/>
           <p:nvPr/>
         </p:nvSpPr>
@@ -19765,7 +19387,7 @@
       </p:sp>
       <p:sp>
         <p:nvSpPr>
-          <p:cNvPr id="153" name="Shape 151"/>
+          <p:cNvPr id="141" name="Shape 139"/>
           <p:cNvSpPr/>
           <p:nvPr/>
         </p:nvSpPr>
@@ -19790,7 +19412,7 @@
       </p:sp>
       <p:sp>
         <p:nvSpPr>
-          <p:cNvPr id="154" name="Text 152"/>
+          <p:cNvPr id="142" name="Text 140"/>
           <p:cNvSpPr/>
           <p:nvPr/>
         </p:nvSpPr>
@@ -19826,7 +19448,7 @@
       </p:sp>
       <p:sp>
         <p:nvSpPr>
-          <p:cNvPr id="155" name="Text 153"/>
+          <p:cNvPr id="143" name="Text 141"/>
           <p:cNvSpPr/>
           <p:nvPr/>
         </p:nvSpPr>
@@ -19862,7 +19484,7 @@
       </p:sp>
       <p:sp>
         <p:nvSpPr>
-          <p:cNvPr id="156" name="Shape 154"/>
+          <p:cNvPr id="144" name="Shape 142"/>
           <p:cNvSpPr/>
           <p:nvPr/>
         </p:nvSpPr>
@@ -19889,7 +19511,7 @@
       </p:sp>
       <p:sp>
         <p:nvSpPr>
-          <p:cNvPr id="157" name="Text 155"/>
+          <p:cNvPr id="145" name="Text 143"/>
           <p:cNvSpPr/>
           <p:nvPr/>
         </p:nvSpPr>
@@ -19925,7 +19547,7 @@
       </p:sp>
       <p:sp>
         <p:nvSpPr>
-          <p:cNvPr id="158" name="Shape 156"/>
+          <p:cNvPr id="146" name="Shape 144"/>
           <p:cNvSpPr/>
           <p:nvPr/>
         </p:nvSpPr>
@@ -19948,7 +19570,7 @@
       </p:sp>
       <p:sp>
         <p:nvSpPr>
-          <p:cNvPr id="159" name="Text 157"/>
+          <p:cNvPr id="147" name="Text 145"/>
           <p:cNvSpPr/>
           <p:nvPr/>
         </p:nvSpPr>
@@ -19984,7 +19606,7 @@
       </p:sp>
       <p:sp>
         <p:nvSpPr>
-          <p:cNvPr id="160" name="Shape 158"/>
+          <p:cNvPr id="148" name="Shape 146"/>
           <p:cNvSpPr/>
           <p:nvPr/>
         </p:nvSpPr>
@@ -20011,7 +19633,7 @@
       </p:sp>
       <p:sp>
         <p:nvSpPr>
-          <p:cNvPr id="161" name="Text 159"/>
+          <p:cNvPr id="149" name="Text 147"/>
           <p:cNvSpPr/>
           <p:nvPr/>
         </p:nvSpPr>
@@ -20047,7 +19669,7 @@
       </p:sp>
       <p:sp>
         <p:nvSpPr>
-          <p:cNvPr id="162" name="Shape 160"/>
+          <p:cNvPr id="150" name="Shape 148"/>
           <p:cNvSpPr/>
           <p:nvPr/>
         </p:nvSpPr>
@@ -20074,7 +19696,7 @@
       </p:sp>
       <p:sp>
         <p:nvSpPr>
-          <p:cNvPr id="163" name="Text 161"/>
+          <p:cNvPr id="151" name="Text 149"/>
           <p:cNvSpPr/>
           <p:nvPr/>
         </p:nvSpPr>
@@ -20110,7 +19732,7 @@
       </p:sp>
       <p:sp>
         <p:nvSpPr>
-          <p:cNvPr id="164" name="Shape 162"/>
+          <p:cNvPr id="152" name="Shape 150"/>
           <p:cNvSpPr/>
           <p:nvPr/>
         </p:nvSpPr>
@@ -20137,7 +19759,7 @@
       </p:sp>
       <p:sp>
         <p:nvSpPr>
-          <p:cNvPr id="165" name="Text 163"/>
+          <p:cNvPr id="153" name="Text 151"/>
           <p:cNvSpPr/>
           <p:nvPr/>
         </p:nvSpPr>
@@ -20173,7 +19795,7 @@
       </p:sp>
       <p:sp>
         <p:nvSpPr>
-          <p:cNvPr id="166" name="Shape 164"/>
+          <p:cNvPr id="154" name="Shape 152"/>
           <p:cNvSpPr/>
           <p:nvPr/>
         </p:nvSpPr>
@@ -20200,7 +19822,7 @@
       </p:sp>
       <p:sp>
         <p:nvSpPr>
-          <p:cNvPr id="167" name="Text 165"/>
+          <p:cNvPr id="155" name="Text 153"/>
           <p:cNvSpPr/>
           <p:nvPr/>
         </p:nvSpPr>
@@ -30851,7 +30473,295 @@
       </p:sp>
       <p:sp>
         <p:nvSpPr>
-          <p:cNvPr id="16" name="Shape 14"/>
+          <p:cNvPr id="16" name="Text 14"/>
+          <p:cNvSpPr/>
+          <p:nvPr/>
+        </p:nvSpPr>
+        <p:spPr>
+          <a:xfrm>
+            <a:off x="8028432" y="521208"/>
+            <a:ext cx="548640" cy="219456"/>
+          </a:xfrm>
+          <a:prstGeom prst="rect">
+            <a:avLst/>
+          </a:prstGeom>
+          <a:noFill/>
+          <a:ln/>
+        </p:spPr>
+        <p:txBody>
+          <a:bodyPr wrap="square" lIns="0" tIns="0" rIns="0" bIns="0" rtlCol="0" anchor="ctr"/>
+          <a:lstStyle/>
+          <a:p>
+            <a:pPr algn="l" indent="0" marL="0">
+              <a:buNone/>
+            </a:pPr>
+            <a:r>
+              <a:rPr lang="en-US" sz="800" b="1" dirty="0">
+                <a:solidFill>
+                  <a:srgbClr val="374151"/>
+                </a:solidFill>
+              </a:rPr>
+              <a:t>Covers:</a:t>
+            </a:r>
+            <a:endParaRPr lang="en-US" sz="800" dirty="0"/>
+          </a:p>
+        </p:txBody>
+      </p:sp>
+      <p:sp>
+        <p:nvSpPr>
+          <p:cNvPr id="17" name="Shape 15"/>
+          <p:cNvSpPr/>
+          <p:nvPr/>
+        </p:nvSpPr>
+        <p:spPr>
+          <a:xfrm>
+            <a:off x="8613648" y="512064"/>
+            <a:ext cx="585216" cy="237744"/>
+          </a:xfrm>
+          <a:prstGeom prst="roundRect">
+            <a:avLst>
+              <a:gd name="adj" fmla="val 15385"/>
+            </a:avLst>
+          </a:prstGeom>
+          <a:solidFill>
+            <a:srgbClr val="F0FDF4"/>
+          </a:solidFill>
+          <a:ln w="12700">
+            <a:solidFill>
+              <a:srgbClr val="8ED973"/>
+            </a:solidFill>
+            <a:prstDash val="solid"/>
+          </a:ln>
+        </p:spPr>
+      </p:sp>
+      <p:sp>
+        <p:nvSpPr>
+          <p:cNvPr id="18" name="Text 16"/>
+          <p:cNvSpPr/>
+          <p:nvPr/>
+        </p:nvSpPr>
+        <p:spPr>
+          <a:xfrm>
+            <a:off x="8613648" y="512064"/>
+            <a:ext cx="585216" cy="237744"/>
+          </a:xfrm>
+          <a:prstGeom prst="rect">
+            <a:avLst/>
+          </a:prstGeom>
+          <a:noFill/>
+          <a:ln/>
+        </p:spPr>
+        <p:txBody>
+          <a:bodyPr wrap="square" lIns="0" tIns="0" rIns="0" bIns="0" rtlCol="0" anchor="ctr"/>
+          <a:lstStyle/>
+          <a:p>
+            <a:pPr algn="ctr" indent="0" marL="0">
+              <a:buNone/>
+            </a:pPr>
+            <a:r>
+              <a:rPr lang="en-US" sz="800" b="1" dirty="0">
+                <a:solidFill>
+                  <a:srgbClr val="388849"/>
+                </a:solidFill>
+              </a:rPr>
+              <a:t>Roku</a:t>
+            </a:r>
+            <a:endParaRPr lang="en-US" sz="800" dirty="0"/>
+          </a:p>
+        </p:txBody>
+      </p:sp>
+      <p:sp>
+        <p:nvSpPr>
+          <p:cNvPr id="19" name="Shape 17"/>
+          <p:cNvSpPr/>
+          <p:nvPr/>
+        </p:nvSpPr>
+        <p:spPr>
+          <a:xfrm>
+            <a:off x="9272016" y="512064"/>
+            <a:ext cx="658368" cy="237744"/>
+          </a:xfrm>
+          <a:prstGeom prst="roundRect">
+            <a:avLst>
+              <a:gd name="adj" fmla="val 15385"/>
+            </a:avLst>
+          </a:prstGeom>
+          <a:solidFill>
+            <a:srgbClr val="F0FDF4"/>
+          </a:solidFill>
+          <a:ln w="12700">
+            <a:solidFill>
+              <a:srgbClr val="8ED973"/>
+            </a:solidFill>
+            <a:prstDash val="solid"/>
+          </a:ln>
+        </p:spPr>
+      </p:sp>
+      <p:sp>
+        <p:nvSpPr>
+          <p:cNvPr id="20" name="Text 18"/>
+          <p:cNvSpPr/>
+          <p:nvPr/>
+        </p:nvSpPr>
+        <p:spPr>
+          <a:xfrm>
+            <a:off x="9272016" y="512064"/>
+            <a:ext cx="658368" cy="237744"/>
+          </a:xfrm>
+          <a:prstGeom prst="rect">
+            <a:avLst/>
+          </a:prstGeom>
+          <a:noFill/>
+          <a:ln/>
+        </p:spPr>
+        <p:txBody>
+          <a:bodyPr wrap="square" lIns="0" tIns="0" rIns="0" bIns="0" rtlCol="0" anchor="ctr"/>
+          <a:lstStyle/>
+          <a:p>
+            <a:pPr algn="ctr" indent="0" marL="0">
+              <a:buNone/>
+            </a:pPr>
+            <a:r>
+              <a:rPr lang="en-US" sz="800" b="1" dirty="0">
+                <a:solidFill>
+                  <a:srgbClr val="388849"/>
+                </a:solidFill>
+              </a:rPr>
+              <a:t>Fire TV</a:t>
+            </a:r>
+            <a:endParaRPr lang="en-US" sz="800" dirty="0"/>
+          </a:p>
+        </p:txBody>
+      </p:sp>
+      <p:sp>
+        <p:nvSpPr>
+          <p:cNvPr id="21" name="Shape 19"/>
+          <p:cNvSpPr/>
+          <p:nvPr/>
+        </p:nvSpPr>
+        <p:spPr>
+          <a:xfrm>
+            <a:off x="10003536" y="512064"/>
+            <a:ext cx="731520" cy="237744"/>
+          </a:xfrm>
+          <a:prstGeom prst="roundRect">
+            <a:avLst>
+              <a:gd name="adj" fmla="val 15385"/>
+            </a:avLst>
+          </a:prstGeom>
+          <a:solidFill>
+            <a:srgbClr val="F0FDF4"/>
+          </a:solidFill>
+          <a:ln w="12700">
+            <a:solidFill>
+              <a:srgbClr val="8ED973"/>
+            </a:solidFill>
+            <a:prstDash val="solid"/>
+          </a:ln>
+        </p:spPr>
+      </p:sp>
+      <p:sp>
+        <p:nvSpPr>
+          <p:cNvPr id="22" name="Text 20"/>
+          <p:cNvSpPr/>
+          <p:nvPr/>
+        </p:nvSpPr>
+        <p:spPr>
+          <a:xfrm>
+            <a:off x="10003536" y="512064"/>
+            <a:ext cx="731520" cy="237744"/>
+          </a:xfrm>
+          <a:prstGeom prst="rect">
+            <a:avLst/>
+          </a:prstGeom>
+          <a:noFill/>
+          <a:ln/>
+        </p:spPr>
+        <p:txBody>
+          <a:bodyPr wrap="square" lIns="0" tIns="0" rIns="0" bIns="0" rtlCol="0" anchor="ctr"/>
+          <a:lstStyle/>
+          <a:p>
+            <a:pPr algn="ctr" indent="0" marL="0">
+              <a:buNone/>
+            </a:pPr>
+            <a:r>
+              <a:rPr lang="en-US" sz="800" b="1" dirty="0">
+                <a:solidFill>
+                  <a:srgbClr val="388849"/>
+                </a:solidFill>
+              </a:rPr>
+              <a:t>Samsung</a:t>
+            </a:r>
+            <a:endParaRPr lang="en-US" sz="800" dirty="0"/>
+          </a:p>
+        </p:txBody>
+      </p:sp>
+      <p:sp>
+        <p:nvSpPr>
+          <p:cNvPr id="23" name="Shape 21"/>
+          <p:cNvSpPr/>
+          <p:nvPr/>
+        </p:nvSpPr>
+        <p:spPr>
+          <a:xfrm>
+            <a:off x="10808208" y="512064"/>
+            <a:ext cx="585216" cy="237744"/>
+          </a:xfrm>
+          <a:prstGeom prst="roundRect">
+            <a:avLst>
+              <a:gd name="adj" fmla="val 15385"/>
+            </a:avLst>
+          </a:prstGeom>
+          <a:solidFill>
+            <a:srgbClr val="F0FDF4"/>
+          </a:solidFill>
+          <a:ln w="12700">
+            <a:solidFill>
+              <a:srgbClr val="8ED973"/>
+            </a:solidFill>
+            <a:prstDash val="solid"/>
+          </a:ln>
+        </p:spPr>
+      </p:sp>
+      <p:sp>
+        <p:nvSpPr>
+          <p:cNvPr id="24" name="Text 22"/>
+          <p:cNvSpPr/>
+          <p:nvPr/>
+        </p:nvSpPr>
+        <p:spPr>
+          <a:xfrm>
+            <a:off x="10808208" y="512064"/>
+            <a:ext cx="585216" cy="237744"/>
+          </a:xfrm>
+          <a:prstGeom prst="rect">
+            <a:avLst/>
+          </a:prstGeom>
+          <a:noFill/>
+          <a:ln/>
+        </p:spPr>
+        <p:txBody>
+          <a:bodyPr wrap="square" lIns="0" tIns="0" rIns="0" bIns="0" rtlCol="0" anchor="ctr"/>
+          <a:lstStyle/>
+          <a:p>
+            <a:pPr algn="ctr" indent="0" marL="0">
+              <a:buNone/>
+            </a:pPr>
+            <a:r>
+              <a:rPr lang="en-US" sz="800" b="1" dirty="0">
+                <a:solidFill>
+                  <a:srgbClr val="388849"/>
+                </a:solidFill>
+              </a:rPr>
+              <a:t>tvOS</a:t>
+            </a:r>
+            <a:endParaRPr lang="en-US" sz="800" dirty="0"/>
+          </a:p>
+        </p:txBody>
+      </p:sp>
+      <p:sp>
+        <p:nvSpPr>
+          <p:cNvPr id="25" name="Shape 23"/>
           <p:cNvSpPr/>
           <p:nvPr/>
         </p:nvSpPr>
@@ -30876,7 +30786,7 @@
       </p:sp>
       <p:sp>
         <p:nvSpPr>
-          <p:cNvPr id="17" name="Text 15"/>
+          <p:cNvPr id="26" name="Text 24"/>
           <p:cNvSpPr/>
           <p:nvPr/>
         </p:nvSpPr>
@@ -30912,7 +30822,7 @@
       </p:sp>
       <p:sp>
         <p:nvSpPr>
-          <p:cNvPr id="18" name="Text 16"/>
+          <p:cNvPr id="27" name="Text 25"/>
           <p:cNvSpPr/>
           <p:nvPr/>
         </p:nvSpPr>
@@ -30948,7 +30858,7 @@
       </p:sp>
       <p:sp>
         <p:nvSpPr>
-          <p:cNvPr id="19" name="Text 17"/>
+          <p:cNvPr id="28" name="Text 26"/>
           <p:cNvSpPr/>
           <p:nvPr/>
         </p:nvSpPr>
@@ -30984,7 +30894,7 @@
       </p:sp>
       <p:sp>
         <p:nvSpPr>
-          <p:cNvPr id="20" name="Shape 18"/>
+          <p:cNvPr id="29" name="Shape 27"/>
           <p:cNvSpPr/>
           <p:nvPr/>
         </p:nvSpPr>
@@ -31009,7 +30919,7 @@
       </p:sp>
       <p:sp>
         <p:nvSpPr>
-          <p:cNvPr id="21" name="Shape 19"/>
+          <p:cNvPr id="30" name="Shape 28"/>
           <p:cNvSpPr/>
           <p:nvPr/>
         </p:nvSpPr>
@@ -31036,7 +30946,7 @@
       </p:sp>
       <p:sp>
         <p:nvSpPr>
-          <p:cNvPr id="22" name="Text 20"/>
+          <p:cNvPr id="31" name="Text 29"/>
           <p:cNvSpPr/>
           <p:nvPr/>
         </p:nvSpPr>
@@ -31086,7 +30996,7 @@
       </p:sp>
       <p:sp>
         <p:nvSpPr>
-          <p:cNvPr id="23" name="Text 21"/>
+          <p:cNvPr id="32" name="Text 30"/>
           <p:cNvSpPr/>
           <p:nvPr/>
         </p:nvSpPr>
@@ -31122,7 +31032,7 @@
       </p:sp>
       <p:sp>
         <p:nvSpPr>
-          <p:cNvPr id="24" name="Shape 22"/>
+          <p:cNvPr id="33" name="Shape 31"/>
           <p:cNvSpPr/>
           <p:nvPr/>
         </p:nvSpPr>
@@ -31149,7 +31059,7 @@
       </p:sp>
       <p:sp>
         <p:nvSpPr>
-          <p:cNvPr id="25" name="Text 23"/>
+          <p:cNvPr id="34" name="Text 32"/>
           <p:cNvSpPr/>
           <p:nvPr/>
         </p:nvSpPr>
@@ -31185,7 +31095,7 @@
       </p:sp>
       <p:sp>
         <p:nvSpPr>
-          <p:cNvPr id="26" name="Shape 24"/>
+          <p:cNvPr id="35" name="Shape 33"/>
           <p:cNvSpPr/>
           <p:nvPr/>
         </p:nvSpPr>
@@ -31212,7 +31122,7 @@
       </p:sp>
       <p:sp>
         <p:nvSpPr>
-          <p:cNvPr id="27" name="Text 25"/>
+          <p:cNvPr id="36" name="Text 34"/>
           <p:cNvSpPr/>
           <p:nvPr/>
         </p:nvSpPr>
@@ -31248,7 +31158,7 @@
       </p:sp>
       <p:sp>
         <p:nvSpPr>
-          <p:cNvPr id="28" name="Shape 26"/>
+          <p:cNvPr id="37" name="Shape 35"/>
           <p:cNvSpPr/>
           <p:nvPr/>
         </p:nvSpPr>
@@ -31275,7 +31185,7 @@
       </p:sp>
       <p:sp>
         <p:nvSpPr>
-          <p:cNvPr id="29" name="Text 27"/>
+          <p:cNvPr id="38" name="Text 36"/>
           <p:cNvSpPr/>
           <p:nvPr/>
         </p:nvSpPr>
@@ -31311,7 +31221,7 @@
       </p:sp>
       <p:sp>
         <p:nvSpPr>
-          <p:cNvPr id="30" name="Shape 28"/>
+          <p:cNvPr id="39" name="Shape 37"/>
           <p:cNvSpPr/>
           <p:nvPr/>
         </p:nvSpPr>
@@ -31338,7 +31248,7 @@
       </p:sp>
       <p:sp>
         <p:nvSpPr>
-          <p:cNvPr id="31" name="Text 29"/>
+          <p:cNvPr id="40" name="Text 38"/>
           <p:cNvSpPr/>
           <p:nvPr/>
         </p:nvSpPr>
@@ -31374,7 +31284,7 @@
       </p:sp>
       <p:sp>
         <p:nvSpPr>
-          <p:cNvPr id="32" name="Shape 30"/>
+          <p:cNvPr id="41" name="Shape 39"/>
           <p:cNvSpPr/>
           <p:nvPr/>
         </p:nvSpPr>
@@ -31401,7 +31311,7 @@
       </p:sp>
       <p:sp>
         <p:nvSpPr>
-          <p:cNvPr id="33" name="Text 31"/>
+          <p:cNvPr id="42" name="Text 40"/>
           <p:cNvSpPr/>
           <p:nvPr/>
         </p:nvSpPr>
@@ -31437,7 +31347,7 @@
       </p:sp>
       <p:sp>
         <p:nvSpPr>
-          <p:cNvPr id="34" name="Shape 32"/>
+          <p:cNvPr id="43" name="Shape 41"/>
           <p:cNvSpPr/>
           <p:nvPr/>
         </p:nvSpPr>
@@ -31464,7 +31374,7 @@
       </p:sp>
       <p:sp>
         <p:nvSpPr>
-          <p:cNvPr id="35" name="Text 33"/>
+          <p:cNvPr id="44" name="Text 42"/>
           <p:cNvSpPr/>
           <p:nvPr/>
         </p:nvSpPr>
@@ -31500,7 +31410,7 @@
       </p:sp>
       <p:sp>
         <p:nvSpPr>
-          <p:cNvPr id="36" name="Shape 34"/>
+          <p:cNvPr id="45" name="Shape 43"/>
           <p:cNvSpPr/>
           <p:nvPr/>
         </p:nvSpPr>
@@ -31527,7 +31437,7 @@
       </p:sp>
       <p:sp>
         <p:nvSpPr>
-          <p:cNvPr id="37" name="Text 35"/>
+          <p:cNvPr id="46" name="Text 44"/>
           <p:cNvSpPr/>
           <p:nvPr/>
         </p:nvSpPr>
@@ -31563,7 +31473,7 @@
       </p:sp>
       <p:sp>
         <p:nvSpPr>
-          <p:cNvPr id="38" name="Shape 36"/>
+          <p:cNvPr id="47" name="Shape 45"/>
           <p:cNvSpPr/>
           <p:nvPr/>
         </p:nvSpPr>
@@ -31590,7 +31500,7 @@
       </p:sp>
       <p:sp>
         <p:nvSpPr>
-          <p:cNvPr id="39" name="Text 37"/>
+          <p:cNvPr id="48" name="Text 46"/>
           <p:cNvSpPr/>
           <p:nvPr/>
         </p:nvSpPr>
@@ -31626,7 +31536,7 @@
       </p:sp>
       <p:sp>
         <p:nvSpPr>
-          <p:cNvPr id="40" name="Shape 38"/>
+          <p:cNvPr id="49" name="Shape 47"/>
           <p:cNvSpPr/>
           <p:nvPr/>
         </p:nvSpPr>
@@ -31653,7 +31563,7 @@
       </p:sp>
       <p:sp>
         <p:nvSpPr>
-          <p:cNvPr id="41" name="Text 39"/>
+          <p:cNvPr id="50" name="Text 48"/>
           <p:cNvSpPr/>
           <p:nvPr/>
         </p:nvSpPr>
@@ -31689,7 +31599,7 @@
       </p:sp>
       <p:sp>
         <p:nvSpPr>
-          <p:cNvPr id="42" name="Shape 40"/>
+          <p:cNvPr id="51" name="Shape 49"/>
           <p:cNvSpPr/>
           <p:nvPr/>
         </p:nvSpPr>
@@ -31716,7 +31626,7 @@
       </p:sp>
       <p:sp>
         <p:nvSpPr>
-          <p:cNvPr id="43" name="Text 41"/>
+          <p:cNvPr id="52" name="Text 50"/>
           <p:cNvSpPr/>
           <p:nvPr/>
         </p:nvSpPr>
@@ -31752,7 +31662,7 @@
       </p:sp>
       <p:sp>
         <p:nvSpPr>
-          <p:cNvPr id="44" name="Shape 42"/>
+          <p:cNvPr id="53" name="Shape 51"/>
           <p:cNvSpPr/>
           <p:nvPr/>
         </p:nvSpPr>
@@ -31779,7 +31689,7 @@
       </p:sp>
       <p:sp>
         <p:nvSpPr>
-          <p:cNvPr id="45" name="Text 43"/>
+          <p:cNvPr id="54" name="Text 52"/>
           <p:cNvSpPr/>
           <p:nvPr/>
         </p:nvSpPr>
@@ -31815,7 +31725,7 @@
       </p:sp>
       <p:sp>
         <p:nvSpPr>
-          <p:cNvPr id="46" name="Shape 44"/>
+          <p:cNvPr id="55" name="Shape 53"/>
           <p:cNvSpPr/>
           <p:nvPr/>
         </p:nvSpPr>
@@ -31842,7 +31752,7 @@
       </p:sp>
       <p:sp>
         <p:nvSpPr>
-          <p:cNvPr id="47" name="Text 45"/>
+          <p:cNvPr id="56" name="Text 54"/>
           <p:cNvSpPr/>
           <p:nvPr/>
         </p:nvSpPr>
@@ -31878,7 +31788,7 @@
       </p:sp>
       <p:sp>
         <p:nvSpPr>
-          <p:cNvPr id="48" name="Shape 46"/>
+          <p:cNvPr id="57" name="Shape 55"/>
           <p:cNvSpPr/>
           <p:nvPr/>
         </p:nvSpPr>
@@ -31903,7 +31813,7 @@
       </p:sp>
       <p:sp>
         <p:nvSpPr>
-          <p:cNvPr id="49" name="Shape 47"/>
+          <p:cNvPr id="58" name="Shape 56"/>
           <p:cNvSpPr/>
           <p:nvPr/>
         </p:nvSpPr>
@@ -31930,7 +31840,7 @@
       </p:sp>
       <p:sp>
         <p:nvSpPr>
-          <p:cNvPr id="50" name="Text 48"/>
+          <p:cNvPr id="59" name="Text 57"/>
           <p:cNvSpPr/>
           <p:nvPr/>
         </p:nvSpPr>
@@ -31966,7 +31876,7 @@
       </p:sp>
       <p:sp>
         <p:nvSpPr>
-          <p:cNvPr id="51" name="Text 49"/>
+          <p:cNvPr id="60" name="Text 58"/>
           <p:cNvSpPr/>
           <p:nvPr/>
         </p:nvSpPr>
@@ -32002,7 +31912,7 @@
       </p:sp>
       <p:sp>
         <p:nvSpPr>
-          <p:cNvPr id="52" name="Shape 50"/>
+          <p:cNvPr id="61" name="Shape 59"/>
           <p:cNvSpPr/>
           <p:nvPr/>
         </p:nvSpPr>
@@ -32029,7 +31939,7 @@
       </p:sp>
       <p:sp>
         <p:nvSpPr>
-          <p:cNvPr id="53" name="Text 51"/>
+          <p:cNvPr id="62" name="Text 60"/>
           <p:cNvSpPr/>
           <p:nvPr/>
         </p:nvSpPr>
@@ -32065,7 +31975,7 @@
       </p:sp>
       <p:sp>
         <p:nvSpPr>
-          <p:cNvPr id="54" name="Shape 52"/>
+          <p:cNvPr id="63" name="Shape 61"/>
           <p:cNvSpPr/>
           <p:nvPr/>
         </p:nvSpPr>
@@ -32092,7 +32002,7 @@
       </p:sp>
       <p:sp>
         <p:nvSpPr>
-          <p:cNvPr id="55" name="Text 53"/>
+          <p:cNvPr id="64" name="Text 62"/>
           <p:cNvSpPr/>
           <p:nvPr/>
         </p:nvSpPr>
@@ -32128,7 +32038,7 @@
       </p:sp>
       <p:sp>
         <p:nvSpPr>
-          <p:cNvPr id="56" name="Shape 54"/>
+          <p:cNvPr id="65" name="Shape 63"/>
           <p:cNvSpPr/>
           <p:nvPr/>
         </p:nvSpPr>
@@ -32155,7 +32065,7 @@
       </p:sp>
       <p:sp>
         <p:nvSpPr>
-          <p:cNvPr id="57" name="Text 55"/>
+          <p:cNvPr id="66" name="Text 64"/>
           <p:cNvSpPr/>
           <p:nvPr/>
         </p:nvSpPr>
@@ -32191,7 +32101,7 @@
       </p:sp>
       <p:sp>
         <p:nvSpPr>
-          <p:cNvPr id="58" name="Shape 56"/>
+          <p:cNvPr id="67" name="Shape 65"/>
           <p:cNvSpPr/>
           <p:nvPr/>
         </p:nvSpPr>
@@ -32218,7 +32128,7 @@
       </p:sp>
       <p:sp>
         <p:nvSpPr>
-          <p:cNvPr id="59" name="Text 57"/>
+          <p:cNvPr id="68" name="Text 66"/>
           <p:cNvSpPr/>
           <p:nvPr/>
         </p:nvSpPr>
@@ -32254,7 +32164,7 @@
       </p:sp>
       <p:sp>
         <p:nvSpPr>
-          <p:cNvPr id="60" name="Shape 58"/>
+          <p:cNvPr id="69" name="Shape 67"/>
           <p:cNvSpPr/>
           <p:nvPr/>
         </p:nvSpPr>
@@ -32281,7 +32191,7 @@
       </p:sp>
       <p:sp>
         <p:nvSpPr>
-          <p:cNvPr id="61" name="Text 59"/>
+          <p:cNvPr id="70" name="Text 68"/>
           <p:cNvSpPr/>
           <p:nvPr/>
         </p:nvSpPr>
@@ -32317,7 +32227,7 @@
       </p:sp>
       <p:sp>
         <p:nvSpPr>
-          <p:cNvPr id="62" name="Shape 60"/>
+          <p:cNvPr id="71" name="Shape 69"/>
           <p:cNvSpPr/>
           <p:nvPr/>
         </p:nvSpPr>
@@ -32344,7 +32254,7 @@
       </p:sp>
       <p:sp>
         <p:nvSpPr>
-          <p:cNvPr id="63" name="Text 61"/>
+          <p:cNvPr id="72" name="Text 70"/>
           <p:cNvSpPr/>
           <p:nvPr/>
         </p:nvSpPr>
@@ -32380,7 +32290,7 @@
       </p:sp>
       <p:sp>
         <p:nvSpPr>
-          <p:cNvPr id="64" name="Shape 62"/>
+          <p:cNvPr id="73" name="Shape 71"/>
           <p:cNvSpPr/>
           <p:nvPr/>
         </p:nvSpPr>
@@ -32407,7 +32317,7 @@
       </p:sp>
       <p:sp>
         <p:nvSpPr>
-          <p:cNvPr id="65" name="Text 63"/>
+          <p:cNvPr id="74" name="Text 72"/>
           <p:cNvSpPr/>
           <p:nvPr/>
         </p:nvSpPr>
@@ -32457,7 +32367,7 @@
       </p:sp>
       <p:sp>
         <p:nvSpPr>
-          <p:cNvPr id="66" name="Shape 64"/>
+          <p:cNvPr id="75" name="Shape 73"/>
           <p:cNvSpPr/>
           <p:nvPr/>
         </p:nvSpPr>
@@ -32484,7 +32394,7 @@
       </p:sp>
       <p:sp>
         <p:nvSpPr>
-          <p:cNvPr id="67" name="Text 65"/>
+          <p:cNvPr id="76" name="Text 74"/>
           <p:cNvSpPr/>
           <p:nvPr/>
         </p:nvSpPr>
@@ -32520,7 +32430,7 @@
       </p:sp>
       <p:sp>
         <p:nvSpPr>
-          <p:cNvPr id="68" name="Shape 66"/>
+          <p:cNvPr id="77" name="Shape 75"/>
           <p:cNvSpPr/>
           <p:nvPr/>
         </p:nvSpPr>
@@ -32545,7 +32455,7 @@
       </p:sp>
       <p:sp>
         <p:nvSpPr>
-          <p:cNvPr id="69" name="Shape 67"/>
+          <p:cNvPr id="78" name="Shape 76"/>
           <p:cNvSpPr/>
           <p:nvPr/>
         </p:nvSpPr>
@@ -32572,7 +32482,7 @@
       </p:sp>
       <p:sp>
         <p:nvSpPr>
-          <p:cNvPr id="70" name="Text 68"/>
+          <p:cNvPr id="79" name="Text 77"/>
           <p:cNvSpPr/>
           <p:nvPr/>
         </p:nvSpPr>
@@ -32608,7 +32518,7 @@
       </p:sp>
       <p:sp>
         <p:nvSpPr>
-          <p:cNvPr id="71" name="Text 69"/>
+          <p:cNvPr id="80" name="Text 78"/>
           <p:cNvSpPr/>
           <p:nvPr/>
         </p:nvSpPr>
@@ -32644,7 +32554,7 @@
       </p:sp>
       <p:sp>
         <p:nvSpPr>
-          <p:cNvPr id="72" name="Shape 70"/>
+          <p:cNvPr id="81" name="Shape 79"/>
           <p:cNvSpPr/>
           <p:nvPr/>
         </p:nvSpPr>
@@ -32671,7 +32581,7 @@
       </p:sp>
       <p:sp>
         <p:nvSpPr>
-          <p:cNvPr id="73" name="Text 71"/>
+          <p:cNvPr id="82" name="Text 80"/>
           <p:cNvSpPr/>
           <p:nvPr/>
         </p:nvSpPr>
@@ -32707,7 +32617,7 @@
       </p:sp>
       <p:sp>
         <p:nvSpPr>
-          <p:cNvPr id="74" name="Shape 72"/>
+          <p:cNvPr id="83" name="Shape 81"/>
           <p:cNvSpPr/>
           <p:nvPr/>
         </p:nvSpPr>
@@ -32734,7 +32644,7 @@
       </p:sp>
       <p:sp>
         <p:nvSpPr>
-          <p:cNvPr id="75" name="Text 73"/>
+          <p:cNvPr id="84" name="Text 82"/>
           <p:cNvSpPr/>
           <p:nvPr/>
         </p:nvSpPr>
@@ -32770,7 +32680,7 @@
       </p:sp>
       <p:sp>
         <p:nvSpPr>
-          <p:cNvPr id="76" name="Shape 74"/>
+          <p:cNvPr id="85" name="Shape 83"/>
           <p:cNvSpPr/>
           <p:nvPr/>
         </p:nvSpPr>
@@ -32797,7 +32707,7 @@
       </p:sp>
       <p:sp>
         <p:nvSpPr>
-          <p:cNvPr id="77" name="Text 75"/>
+          <p:cNvPr id="86" name="Text 84"/>
           <p:cNvSpPr/>
           <p:nvPr/>
         </p:nvSpPr>
@@ -32833,7 +32743,7 @@
       </p:sp>
       <p:sp>
         <p:nvSpPr>
-          <p:cNvPr id="78" name="Shape 76"/>
+          <p:cNvPr id="87" name="Shape 85"/>
           <p:cNvSpPr/>
           <p:nvPr/>
         </p:nvSpPr>
@@ -32860,7 +32770,7 @@
       </p:sp>
       <p:sp>
         <p:nvSpPr>
-          <p:cNvPr id="79" name="Text 77"/>
+          <p:cNvPr id="88" name="Text 86"/>
           <p:cNvSpPr/>
           <p:nvPr/>
         </p:nvSpPr>
@@ -32896,7 +32806,7 @@
       </p:sp>
       <p:sp>
         <p:nvSpPr>
-          <p:cNvPr id="80" name="Shape 78"/>
+          <p:cNvPr id="89" name="Shape 87"/>
           <p:cNvSpPr/>
           <p:nvPr/>
         </p:nvSpPr>
@@ -32923,7 +32833,7 @@
       </p:sp>
       <p:sp>
         <p:nvSpPr>
-          <p:cNvPr id="81" name="Text 79"/>
+          <p:cNvPr id="90" name="Text 88"/>
           <p:cNvSpPr/>
           <p:nvPr/>
         </p:nvSpPr>
@@ -32959,7 +32869,7 @@
       </p:sp>
       <p:sp>
         <p:nvSpPr>
-          <p:cNvPr id="82" name="Shape 80"/>
+          <p:cNvPr id="91" name="Shape 89"/>
           <p:cNvSpPr/>
           <p:nvPr/>
         </p:nvSpPr>
@@ -32986,7 +32896,7 @@
       </p:sp>
       <p:sp>
         <p:nvSpPr>
-          <p:cNvPr id="83" name="Text 81"/>
+          <p:cNvPr id="92" name="Text 90"/>
           <p:cNvSpPr/>
           <p:nvPr/>
         </p:nvSpPr>
@@ -33022,7 +32932,7 @@
       </p:sp>
       <p:sp>
         <p:nvSpPr>
-          <p:cNvPr id="84" name="Shape 82"/>
+          <p:cNvPr id="93" name="Shape 91"/>
           <p:cNvSpPr/>
           <p:nvPr/>
         </p:nvSpPr>
@@ -33049,7 +32959,7 @@
       </p:sp>
       <p:sp>
         <p:nvSpPr>
-          <p:cNvPr id="85" name="Text 83"/>
+          <p:cNvPr id="94" name="Text 92"/>
           <p:cNvSpPr/>
           <p:nvPr/>
         </p:nvSpPr>
@@ -33085,7 +32995,7 @@
       </p:sp>
       <p:sp>
         <p:nvSpPr>
-          <p:cNvPr id="86" name="Shape 84"/>
+          <p:cNvPr id="95" name="Shape 93"/>
           <p:cNvSpPr/>
           <p:nvPr/>
         </p:nvSpPr>
@@ -33112,7 +33022,7 @@
       </p:sp>
       <p:sp>
         <p:nvSpPr>
-          <p:cNvPr id="87" name="Text 85"/>
+          <p:cNvPr id="96" name="Text 94"/>
           <p:cNvSpPr/>
           <p:nvPr/>
         </p:nvSpPr>
@@ -33148,7 +33058,7 @@
       </p:sp>
       <p:sp>
         <p:nvSpPr>
-          <p:cNvPr id="88" name="Shape 86"/>
+          <p:cNvPr id="97" name="Shape 95"/>
           <p:cNvSpPr/>
           <p:nvPr/>
         </p:nvSpPr>
@@ -33175,7 +33085,7 @@
       </p:sp>
       <p:sp>
         <p:nvSpPr>
-          <p:cNvPr id="89" name="Text 87"/>
+          <p:cNvPr id="98" name="Text 96"/>
           <p:cNvSpPr/>
           <p:nvPr/>
         </p:nvSpPr>
@@ -33211,7 +33121,7 @@
       </p:sp>
       <p:sp>
         <p:nvSpPr>
-          <p:cNvPr id="90" name="Shape 88"/>
+          <p:cNvPr id="99" name="Shape 97"/>
           <p:cNvSpPr/>
           <p:nvPr/>
         </p:nvSpPr>
@@ -33238,7 +33148,7 @@
       </p:sp>
       <p:sp>
         <p:nvSpPr>
-          <p:cNvPr id="91" name="Text 89"/>
+          <p:cNvPr id="100" name="Text 98"/>
           <p:cNvSpPr/>
           <p:nvPr/>
         </p:nvSpPr>
@@ -33274,7 +33184,7 @@
       </p:sp>
       <p:sp>
         <p:nvSpPr>
-          <p:cNvPr id="92" name="Shape 90"/>
+          <p:cNvPr id="101" name="Shape 99"/>
           <p:cNvSpPr/>
           <p:nvPr/>
         </p:nvSpPr>
@@ -33301,7 +33211,7 @@
       </p:sp>
       <p:sp>
         <p:nvSpPr>
-          <p:cNvPr id="93" name="Text 91"/>
+          <p:cNvPr id="102" name="Text 100"/>
           <p:cNvSpPr/>
           <p:nvPr/>
         </p:nvSpPr>
@@ -33337,7 +33247,7 @@
       </p:sp>
       <p:sp>
         <p:nvSpPr>
-          <p:cNvPr id="94" name="Shape 92"/>
+          <p:cNvPr id="103" name="Shape 101"/>
           <p:cNvSpPr/>
           <p:nvPr/>
         </p:nvSpPr>
@@ -33364,7 +33274,7 @@
       </p:sp>
       <p:sp>
         <p:nvSpPr>
-          <p:cNvPr id="95" name="Text 93"/>
+          <p:cNvPr id="104" name="Text 102"/>
           <p:cNvSpPr/>
           <p:nvPr/>
         </p:nvSpPr>
@@ -33400,7 +33310,7 @@
       </p:sp>
       <p:sp>
         <p:nvSpPr>
-          <p:cNvPr id="96" name="Shape 94"/>
+          <p:cNvPr id="105" name="Shape 103"/>
           <p:cNvSpPr/>
           <p:nvPr/>
         </p:nvSpPr>
@@ -33427,7 +33337,7 @@
       </p:sp>
       <p:sp>
         <p:nvSpPr>
-          <p:cNvPr id="97" name="Text 95"/>
+          <p:cNvPr id="106" name="Text 104"/>
           <p:cNvSpPr/>
           <p:nvPr/>
         </p:nvSpPr>
@@ -33463,7 +33373,7 @@
       </p:sp>
       <p:sp>
         <p:nvSpPr>
-          <p:cNvPr id="98" name="Shape 96"/>
+          <p:cNvPr id="107" name="Shape 105"/>
           <p:cNvSpPr/>
           <p:nvPr/>
         </p:nvSpPr>
@@ -33490,7 +33400,7 @@
       </p:sp>
       <p:sp>
         <p:nvSpPr>
-          <p:cNvPr id="99" name="Text 97"/>
+          <p:cNvPr id="108" name="Text 106"/>
           <p:cNvSpPr/>
           <p:nvPr/>
         </p:nvSpPr>
@@ -33526,7 +33436,7 @@
       </p:sp>
       <p:sp>
         <p:nvSpPr>
-          <p:cNvPr id="100" name="Shape 98"/>
+          <p:cNvPr id="109" name="Shape 107"/>
           <p:cNvSpPr/>
           <p:nvPr/>
         </p:nvSpPr>
@@ -33553,7 +33463,7 @@
       </p:sp>
       <p:sp>
         <p:nvSpPr>
-          <p:cNvPr id="101" name="Text 99"/>
+          <p:cNvPr id="110" name="Text 108"/>
           <p:cNvSpPr/>
           <p:nvPr/>
         </p:nvSpPr>
@@ -33589,7 +33499,7 @@
       </p:sp>
       <p:sp>
         <p:nvSpPr>
-          <p:cNvPr id="102" name="Shape 100"/>
+          <p:cNvPr id="111" name="Shape 109"/>
           <p:cNvSpPr/>
           <p:nvPr/>
         </p:nvSpPr>
@@ -33616,7 +33526,7 @@
       </p:sp>
       <p:sp>
         <p:nvSpPr>
-          <p:cNvPr id="103" name="Text 101"/>
+          <p:cNvPr id="112" name="Text 110"/>
           <p:cNvSpPr/>
           <p:nvPr/>
         </p:nvSpPr>
@@ -33652,7 +33562,7 @@
       </p:sp>
       <p:sp>
         <p:nvSpPr>
-          <p:cNvPr id="104" name="Shape 102"/>
+          <p:cNvPr id="113" name="Shape 111"/>
           <p:cNvSpPr/>
           <p:nvPr/>
         </p:nvSpPr>
@@ -33679,7 +33589,7 @@
       </p:sp>
       <p:sp>
         <p:nvSpPr>
-          <p:cNvPr id="105" name="Text 103"/>
+          <p:cNvPr id="114" name="Text 112"/>
           <p:cNvSpPr/>
           <p:nvPr/>
         </p:nvSpPr>
@@ -33715,7 +33625,7 @@
       </p:sp>
       <p:sp>
         <p:nvSpPr>
-          <p:cNvPr id="106" name="Shape 104"/>
+          <p:cNvPr id="115" name="Shape 113"/>
           <p:cNvSpPr/>
           <p:nvPr/>
         </p:nvSpPr>
@@ -33742,7 +33652,7 @@
       </p:sp>
       <p:sp>
         <p:nvSpPr>
-          <p:cNvPr id="107" name="Text 105"/>
+          <p:cNvPr id="116" name="Text 114"/>
           <p:cNvSpPr/>
           <p:nvPr/>
         </p:nvSpPr>
@@ -33778,7 +33688,7 @@
       </p:sp>
       <p:sp>
         <p:nvSpPr>
-          <p:cNvPr id="108" name="Shape 106"/>
+          <p:cNvPr id="117" name="Shape 115"/>
           <p:cNvSpPr/>
           <p:nvPr/>
         </p:nvSpPr>
@@ -33803,7 +33713,7 @@
       </p:sp>
       <p:sp>
         <p:nvSpPr>
-          <p:cNvPr id="109" name="Shape 107"/>
+          <p:cNvPr id="118" name="Shape 116"/>
           <p:cNvSpPr/>
           <p:nvPr/>
         </p:nvSpPr>
@@ -33830,7 +33740,7 @@
       </p:sp>
       <p:sp>
         <p:nvSpPr>
-          <p:cNvPr id="110" name="Text 108"/>
+          <p:cNvPr id="119" name="Text 117"/>
           <p:cNvSpPr/>
           <p:nvPr/>
         </p:nvSpPr>
@@ -33866,7 +33776,7 @@
       </p:sp>
       <p:sp>
         <p:nvSpPr>
-          <p:cNvPr id="111" name="Text 109"/>
+          <p:cNvPr id="120" name="Text 118"/>
           <p:cNvSpPr/>
           <p:nvPr/>
         </p:nvSpPr>
@@ -33902,7 +33812,7 @@
       </p:sp>
       <p:sp>
         <p:nvSpPr>
-          <p:cNvPr id="112" name="Shape 110"/>
+          <p:cNvPr id="121" name="Shape 119"/>
           <p:cNvSpPr/>
           <p:nvPr/>
         </p:nvSpPr>
@@ -33929,7 +33839,7 @@
       </p:sp>
       <p:sp>
         <p:nvSpPr>
-          <p:cNvPr id="113" name="Text 111"/>
+          <p:cNvPr id="122" name="Text 120"/>
           <p:cNvSpPr/>
           <p:nvPr/>
         </p:nvSpPr>
@@ -33965,7 +33875,7 @@
       </p:sp>
       <p:sp>
         <p:nvSpPr>
-          <p:cNvPr id="114" name="Shape 112"/>
+          <p:cNvPr id="123" name="Shape 121"/>
           <p:cNvSpPr/>
           <p:nvPr/>
         </p:nvSpPr>
@@ -33992,7 +33902,7 @@
       </p:sp>
       <p:sp>
         <p:nvSpPr>
-          <p:cNvPr id="115" name="Text 113"/>
+          <p:cNvPr id="124" name="Text 122"/>
           <p:cNvSpPr/>
           <p:nvPr/>
         </p:nvSpPr>
@@ -34028,7 +33938,7 @@
       </p:sp>
       <p:sp>
         <p:nvSpPr>
-          <p:cNvPr id="116" name="Shape 114"/>
+          <p:cNvPr id="125" name="Shape 123"/>
           <p:cNvSpPr/>
           <p:nvPr/>
         </p:nvSpPr>
@@ -34055,7 +33965,7 @@
       </p:sp>
       <p:sp>
         <p:nvSpPr>
-          <p:cNvPr id="117" name="Text 115"/>
+          <p:cNvPr id="126" name="Text 124"/>
           <p:cNvSpPr/>
           <p:nvPr/>
         </p:nvSpPr>
@@ -34091,7 +34001,7 @@
       </p:sp>
       <p:sp>
         <p:nvSpPr>
-          <p:cNvPr id="118" name="Shape 116"/>
+          <p:cNvPr id="127" name="Shape 125"/>
           <p:cNvSpPr/>
           <p:nvPr/>
         </p:nvSpPr>
@@ -34118,7 +34028,7 @@
       </p:sp>
       <p:sp>
         <p:nvSpPr>
-          <p:cNvPr id="119" name="Text 117"/>
+          <p:cNvPr id="128" name="Text 126"/>
           <p:cNvSpPr/>
           <p:nvPr/>
         </p:nvSpPr>
@@ -34154,7 +34064,7 @@
       </p:sp>
       <p:sp>
         <p:nvSpPr>
-          <p:cNvPr id="120" name="Shape 118"/>
+          <p:cNvPr id="129" name="Shape 127"/>
           <p:cNvSpPr/>
           <p:nvPr/>
         </p:nvSpPr>
@@ -34181,7 +34091,7 @@
       </p:sp>
       <p:sp>
         <p:nvSpPr>
-          <p:cNvPr id="121" name="Text 119"/>
+          <p:cNvPr id="130" name="Text 128"/>
           <p:cNvSpPr/>
           <p:nvPr/>
         </p:nvSpPr>
@@ -34217,7 +34127,7 @@
       </p:sp>
       <p:sp>
         <p:nvSpPr>
-          <p:cNvPr id="122" name="Shape 120"/>
+          <p:cNvPr id="131" name="Shape 129"/>
           <p:cNvSpPr/>
           <p:nvPr/>
         </p:nvSpPr>
@@ -34244,7 +34154,7 @@
       </p:sp>
       <p:sp>
         <p:nvSpPr>
-          <p:cNvPr id="123" name="Text 121"/>
+          <p:cNvPr id="132" name="Text 130"/>
           <p:cNvSpPr/>
           <p:nvPr/>
         </p:nvSpPr>
@@ -34280,7 +34190,7 @@
       </p:sp>
       <p:sp>
         <p:nvSpPr>
-          <p:cNvPr id="124" name="Shape 122"/>
+          <p:cNvPr id="133" name="Shape 131"/>
           <p:cNvSpPr/>
           <p:nvPr/>
         </p:nvSpPr>
@@ -34307,7 +34217,7 @@
       </p:sp>
       <p:sp>
         <p:nvSpPr>
-          <p:cNvPr id="125" name="Text 123"/>
+          <p:cNvPr id="134" name="Text 132"/>
           <p:cNvSpPr/>
           <p:nvPr/>
         </p:nvSpPr>
@@ -34343,7 +34253,7 @@
       </p:sp>
       <p:sp>
         <p:nvSpPr>
-          <p:cNvPr id="126" name="Shape 124"/>
+          <p:cNvPr id="135" name="Shape 133"/>
           <p:cNvSpPr/>
           <p:nvPr/>
         </p:nvSpPr>
@@ -34370,7 +34280,7 @@
       </p:sp>
       <p:sp>
         <p:nvSpPr>
-          <p:cNvPr id="127" name="Text 125"/>
+          <p:cNvPr id="136" name="Text 134"/>
           <p:cNvSpPr/>
           <p:nvPr/>
         </p:nvSpPr>
@@ -34406,7 +34316,7 @@
       </p:sp>
       <p:sp>
         <p:nvSpPr>
-          <p:cNvPr id="128" name="Shape 126"/>
+          <p:cNvPr id="137" name="Shape 135"/>
           <p:cNvSpPr/>
           <p:nvPr/>
         </p:nvSpPr>
@@ -34433,7 +34343,7 @@
       </p:sp>
       <p:sp>
         <p:nvSpPr>
-          <p:cNvPr id="129" name="Text 127"/>
+          <p:cNvPr id="138" name="Text 136"/>
           <p:cNvSpPr/>
           <p:nvPr/>
         </p:nvSpPr>
@@ -34469,7 +34379,7 @@
       </p:sp>
       <p:sp>
         <p:nvSpPr>
-          <p:cNvPr id="130" name="Shape 128"/>
+          <p:cNvPr id="139" name="Shape 137"/>
           <p:cNvSpPr/>
           <p:nvPr/>
         </p:nvSpPr>
@@ -34496,7 +34406,7 @@
       </p:sp>
       <p:sp>
         <p:nvSpPr>
-          <p:cNvPr id="131" name="Text 129"/>
+          <p:cNvPr id="140" name="Text 138"/>
           <p:cNvSpPr/>
           <p:nvPr/>
         </p:nvSpPr>
@@ -34532,7 +34442,7 @@
       </p:sp>
       <p:sp>
         <p:nvSpPr>
-          <p:cNvPr id="132" name="Shape 130"/>
+          <p:cNvPr id="141" name="Shape 139"/>
           <p:cNvSpPr/>
           <p:nvPr/>
         </p:nvSpPr>
@@ -34559,7 +34469,7 @@
       </p:sp>
       <p:sp>
         <p:nvSpPr>
-          <p:cNvPr id="133" name="Text 131"/>
+          <p:cNvPr id="142" name="Text 140"/>
           <p:cNvSpPr/>
           <p:nvPr/>
         </p:nvSpPr>
@@ -34595,7 +34505,7 @@
       </p:sp>
       <p:sp>
         <p:nvSpPr>
-          <p:cNvPr id="134" name="Shape 132"/>
+          <p:cNvPr id="143" name="Shape 141"/>
           <p:cNvSpPr/>
           <p:nvPr/>
         </p:nvSpPr>
@@ -34622,7 +34532,7 @@
       </p:sp>
       <p:sp>
         <p:nvSpPr>
-          <p:cNvPr id="135" name="Text 133"/>
+          <p:cNvPr id="144" name="Text 142"/>
           <p:cNvSpPr/>
           <p:nvPr/>
         </p:nvSpPr>
@@ -34658,7 +34568,7 @@
       </p:sp>
       <p:sp>
         <p:nvSpPr>
-          <p:cNvPr id="136" name="Shape 134"/>
+          <p:cNvPr id="145" name="Shape 143"/>
           <p:cNvSpPr/>
           <p:nvPr/>
         </p:nvSpPr>
@@ -34683,7 +34593,7 @@
       </p:sp>
       <p:sp>
         <p:nvSpPr>
-          <p:cNvPr id="137" name="Text 135"/>
+          <p:cNvPr id="146" name="Text 144"/>
           <p:cNvSpPr/>
           <p:nvPr/>
         </p:nvSpPr>
@@ -34719,7 +34629,7 @@
       </p:sp>
       <p:sp>
         <p:nvSpPr>
-          <p:cNvPr id="138" name="Shape 136"/>
+          <p:cNvPr id="147" name="Shape 145"/>
           <p:cNvSpPr/>
           <p:nvPr/>
         </p:nvSpPr>
@@ -34744,7 +34654,7 @@
       </p:sp>
       <p:sp>
         <p:nvSpPr>
-          <p:cNvPr id="139" name="Shape 137"/>
+          <p:cNvPr id="148" name="Shape 146"/>
           <p:cNvSpPr/>
           <p:nvPr/>
         </p:nvSpPr>
@@ -34769,7 +34679,7 @@
       </p:sp>
       <p:sp>
         <p:nvSpPr>
-          <p:cNvPr id="140" name="Text 138"/>
+          <p:cNvPr id="149" name="Text 147"/>
           <p:cNvSpPr/>
           <p:nvPr/>
         </p:nvSpPr>
@@ -34805,7 +34715,7 @@
       </p:sp>
       <p:sp>
         <p:nvSpPr>
-          <p:cNvPr id="141" name="Text 139"/>
+          <p:cNvPr id="150" name="Text 148"/>
           <p:cNvSpPr/>
           <p:nvPr/>
         </p:nvSpPr>
@@ -34841,7 +34751,7 @@
       </p:sp>
       <p:sp>
         <p:nvSpPr>
-          <p:cNvPr id="142" name="Shape 140"/>
+          <p:cNvPr id="151" name="Shape 149"/>
           <p:cNvSpPr/>
           <p:nvPr/>
         </p:nvSpPr>
@@ -34868,7 +34778,7 @@
       </p:sp>
       <p:sp>
         <p:nvSpPr>
-          <p:cNvPr id="143" name="Text 141"/>
+          <p:cNvPr id="152" name="Text 150"/>
           <p:cNvSpPr/>
           <p:nvPr/>
         </p:nvSpPr>
@@ -34904,7 +34814,7 @@
       </p:sp>
       <p:sp>
         <p:nvSpPr>
-          <p:cNvPr id="144" name="Shape 142"/>
+          <p:cNvPr id="153" name="Shape 151"/>
           <p:cNvSpPr/>
           <p:nvPr/>
         </p:nvSpPr>
@@ -34929,7 +34839,7 @@
       </p:sp>
       <p:sp>
         <p:nvSpPr>
-          <p:cNvPr id="145" name="Shape 143"/>
+          <p:cNvPr id="154" name="Shape 152"/>
           <p:cNvSpPr/>
           <p:nvPr/>
         </p:nvSpPr>
@@ -34954,7 +34864,7 @@
       </p:sp>
       <p:sp>
         <p:nvSpPr>
-          <p:cNvPr id="146" name="Text 144"/>
+          <p:cNvPr id="155" name="Text 153"/>
           <p:cNvSpPr/>
           <p:nvPr/>
         </p:nvSpPr>
@@ -34990,7 +34900,7 @@
       </p:sp>
       <p:sp>
         <p:nvSpPr>
-          <p:cNvPr id="147" name="Text 145"/>
+          <p:cNvPr id="156" name="Text 154"/>
           <p:cNvSpPr/>
           <p:nvPr/>
         </p:nvSpPr>
@@ -35026,7 +34936,7 @@
       </p:sp>
       <p:sp>
         <p:nvSpPr>
-          <p:cNvPr id="148" name="Shape 146"/>
+          <p:cNvPr id="157" name="Shape 155"/>
           <p:cNvSpPr/>
           <p:nvPr/>
         </p:nvSpPr>
@@ -35053,7 +34963,7 @@
       </p:sp>
       <p:sp>
         <p:nvSpPr>
-          <p:cNvPr id="149" name="Text 147"/>
+          <p:cNvPr id="158" name="Text 156"/>
           <p:cNvSpPr/>
           <p:nvPr/>
         </p:nvSpPr>
@@ -35089,7 +34999,7 @@
       </p:sp>
       <p:sp>
         <p:nvSpPr>
-          <p:cNvPr id="150" name="Shape 148"/>
+          <p:cNvPr id="159" name="Shape 157"/>
           <p:cNvSpPr/>
           <p:nvPr/>
         </p:nvSpPr>
@@ -35114,7 +35024,7 @@
       </p:sp>
       <p:sp>
         <p:nvSpPr>
-          <p:cNvPr id="151" name="Shape 149"/>
+          <p:cNvPr id="160" name="Shape 158"/>
           <p:cNvSpPr/>
           <p:nvPr/>
         </p:nvSpPr>
@@ -35139,7 +35049,7 @@
       </p:sp>
       <p:sp>
         <p:nvSpPr>
-          <p:cNvPr id="152" name="Text 150"/>
+          <p:cNvPr id="161" name="Text 159"/>
           <p:cNvSpPr/>
           <p:nvPr/>
         </p:nvSpPr>
@@ -35175,7 +35085,7 @@
       </p:sp>
       <p:sp>
         <p:nvSpPr>
-          <p:cNvPr id="153" name="Text 151"/>
+          <p:cNvPr id="162" name="Text 160"/>
           <p:cNvSpPr/>
           <p:nvPr/>
         </p:nvSpPr>
@@ -35211,7 +35121,7 @@
       </p:sp>
       <p:sp>
         <p:nvSpPr>
-          <p:cNvPr id="154" name="Shape 152"/>
+          <p:cNvPr id="163" name="Shape 161"/>
           <p:cNvSpPr/>
           <p:nvPr/>
         </p:nvSpPr>
@@ -35238,7 +35148,7 @@
       </p:sp>
       <p:sp>
         <p:nvSpPr>
-          <p:cNvPr id="155" name="Text 153"/>
+          <p:cNvPr id="164" name="Text 162"/>
           <p:cNvSpPr/>
           <p:nvPr/>
         </p:nvSpPr>
@@ -35274,7 +35184,7 @@
       </p:sp>
       <p:sp>
         <p:nvSpPr>
-          <p:cNvPr id="156" name="Shape 154"/>
+          <p:cNvPr id="165" name="Shape 163"/>
           <p:cNvSpPr/>
           <p:nvPr/>
         </p:nvSpPr>
@@ -35299,7 +35209,7 @@
       </p:sp>
       <p:sp>
         <p:nvSpPr>
-          <p:cNvPr id="157" name="Shape 155"/>
+          <p:cNvPr id="166" name="Shape 164"/>
           <p:cNvSpPr/>
           <p:nvPr/>
         </p:nvSpPr>
@@ -35324,7 +35234,7 @@
       </p:sp>
       <p:sp>
         <p:nvSpPr>
-          <p:cNvPr id="158" name="Text 156"/>
+          <p:cNvPr id="167" name="Text 165"/>
           <p:cNvSpPr/>
           <p:nvPr/>
         </p:nvSpPr>
@@ -35360,7 +35270,7 @@
       </p:sp>
       <p:sp>
         <p:nvSpPr>
-          <p:cNvPr id="159" name="Text 157"/>
+          <p:cNvPr id="168" name="Text 166"/>
           <p:cNvSpPr/>
           <p:nvPr/>
         </p:nvSpPr>
@@ -35396,7 +35306,7 @@
       </p:sp>
       <p:sp>
         <p:nvSpPr>
-          <p:cNvPr id="160" name="Shape 158"/>
+          <p:cNvPr id="169" name="Shape 167"/>
           <p:cNvSpPr/>
           <p:nvPr/>
         </p:nvSpPr>
@@ -35423,7 +35333,7 @@
       </p:sp>
       <p:sp>
         <p:nvSpPr>
-          <p:cNvPr id="161" name="Text 159"/>
+          <p:cNvPr id="170" name="Text 168"/>
           <p:cNvSpPr/>
           <p:nvPr/>
         </p:nvSpPr>
@@ -35459,7 +35369,7 @@
       </p:sp>
       <p:sp>
         <p:nvSpPr>
-          <p:cNvPr id="162" name="Shape 160"/>
+          <p:cNvPr id="171" name="Shape 169"/>
           <p:cNvSpPr/>
           <p:nvPr/>
         </p:nvSpPr>
@@ -35482,7 +35392,7 @@
       </p:sp>
       <p:sp>
         <p:nvSpPr>
-          <p:cNvPr id="163" name="Text 161"/>
+          <p:cNvPr id="172" name="Text 170"/>
           <p:cNvSpPr/>
           <p:nvPr/>
         </p:nvSpPr>
@@ -35518,7 +35428,7 @@
       </p:sp>
       <p:sp>
         <p:nvSpPr>
-          <p:cNvPr id="164" name="Shape 162"/>
+          <p:cNvPr id="173" name="Shape 171"/>
           <p:cNvSpPr/>
           <p:nvPr/>
         </p:nvSpPr>
@@ -35545,7 +35455,7 @@
       </p:sp>
       <p:sp>
         <p:nvSpPr>
-          <p:cNvPr id="165" name="Text 163"/>
+          <p:cNvPr id="174" name="Text 172"/>
           <p:cNvSpPr/>
           <p:nvPr/>
         </p:nvSpPr>
@@ -35581,7 +35491,7 @@
       </p:sp>
       <p:sp>
         <p:nvSpPr>
-          <p:cNvPr id="166" name="Shape 164"/>
+          <p:cNvPr id="175" name="Shape 173"/>
           <p:cNvSpPr/>
           <p:nvPr/>
         </p:nvSpPr>
@@ -35608,7 +35518,7 @@
       </p:sp>
       <p:sp>
         <p:nvSpPr>
-          <p:cNvPr id="167" name="Text 165"/>
+          <p:cNvPr id="176" name="Text 174"/>
           <p:cNvSpPr/>
           <p:nvPr/>
         </p:nvSpPr>
@@ -35644,7 +35554,7 @@
       </p:sp>
       <p:sp>
         <p:nvSpPr>
-          <p:cNvPr id="168" name="Shape 166"/>
+          <p:cNvPr id="177" name="Shape 175"/>
           <p:cNvSpPr/>
           <p:nvPr/>
         </p:nvSpPr>
@@ -35671,7 +35581,7 @@
       </p:sp>
       <p:sp>
         <p:nvSpPr>
-          <p:cNvPr id="169" name="Text 167"/>
+          <p:cNvPr id="178" name="Text 176"/>
           <p:cNvSpPr/>
           <p:nvPr/>
         </p:nvSpPr>
@@ -35707,7 +35617,7 @@
       </p:sp>
       <p:sp>
         <p:nvSpPr>
-          <p:cNvPr id="170" name="Shape 168"/>
+          <p:cNvPr id="179" name="Shape 177"/>
           <p:cNvSpPr/>
           <p:nvPr/>
         </p:nvSpPr>
@@ -35734,7 +35644,7 @@
       </p:sp>
       <p:sp>
         <p:nvSpPr>
-          <p:cNvPr id="171" name="Text 169"/>
+          <p:cNvPr id="180" name="Text 178"/>
           <p:cNvSpPr/>
           <p:nvPr/>
         </p:nvSpPr>

--- a/SABR_CPR_Component_Status.pptx
+++ b/SABR_CPR_Component_Status.pptx
@@ -8420,7 +8420,7 @@
                   <a:srgbClr val="166534"/>
                 </a:solidFill>
               </a:rPr>
-              <a:t>3  Done</a:t>
+              <a:t>2  Done</a:t>
             </a:r>
             <a:endParaRPr lang="en-US" sz="900" dirty="0"/>
           </a:p>
@@ -8546,7 +8546,7 @@
                   <a:srgbClr val="374151"/>
                 </a:solidFill>
               </a:rPr>
-              <a:t>8  Not Started</a:t>
+              <a:t>6  Not Started</a:t>
             </a:r>
             <a:endParaRPr lang="en-US" sz="900" dirty="0"/>
           </a:p>
@@ -8805,7 +8805,7 @@
                   <a:srgbClr val="388849"/>
                 </a:solidFill>
               </a:rPr>
-              <a:t>8% Ready</a:t>
+              <a:t>6% Ready</a:t>
             </a:r>
             <a:endParaRPr lang="en-US" sz="1100" dirty="0"/>
           </a:p>
@@ -11583,7 +11583,7 @@
                   <a:srgbClr val="9CA3AF"/>
                 </a:solidFill>
               </a:rPr>
-              <a:t>4 / 9 In Progress · 2 Done</a:t>
+              <a:t>5 / 9 In Progress · 2 Done</a:t>
             </a:r>
             <a:endParaRPr lang="en-US" sz="750" dirty="0"/>
           </a:p>
@@ -11669,11 +11669,11 @@
             </a:avLst>
           </a:prstGeom>
           <a:solidFill>
-            <a:srgbClr val="F3F4F6"/>
-          </a:solidFill>
-          <a:ln w="9525">
-            <a:solidFill>
-              <a:srgbClr val="D1D5DB"/>
+            <a:srgbClr val="1558A8"/>
+          </a:solidFill>
+          <a:ln w="12700">
+            <a:solidFill>
+              <a:srgbClr val="1558A8"/>
             </a:solidFill>
             <a:prstDash val="solid"/>
           </a:ln>
@@ -11706,10 +11706,10 @@
             <a:r>
               <a:rPr lang="en-US" sz="700" dirty="0">
                 <a:solidFill>
-                  <a:srgbClr val="374151"/>
-                </a:solidFill>
-              </a:rPr>
-              <a:t>Not Started</a:t>
+                  <a:srgbClr val="FFFFFF"/>
+                </a:solidFill>
+              </a:rPr>
+              <a:t>In Progress</a:t>
             </a:r>
             <a:endParaRPr lang="en-US" sz="700" dirty="0"/>
           </a:p>
@@ -13611,798 +13611,6 @@
         </p:nvSpPr>
         <p:spPr>
           <a:xfrm>
-            <a:off x="164592" y="6931152"/>
-            <a:ext cx="9116568" cy="1170432"/>
-          </a:xfrm>
-          <a:prstGeom prst="rect">
-            <a:avLst/>
-          </a:prstGeom>
-          <a:solidFill>
-            <a:srgbClr val="FFFFFF"/>
-          </a:solidFill>
-          <a:ln w="6350">
-            <a:solidFill>
-              <a:srgbClr val="E5E7EB"/>
-            </a:solidFill>
-            <a:prstDash val="solid"/>
-          </a:ln>
-        </p:spPr>
-      </p:sp>
-      <p:sp>
-        <p:nvSpPr>
-          <p:cNvPr id="173" name="Shape 171"/>
-          <p:cNvSpPr/>
-          <p:nvPr/>
-        </p:nvSpPr>
-        <p:spPr>
-          <a:xfrm>
-            <a:off x="182880" y="7004304"/>
-            <a:ext cx="859536" cy="1024128"/>
-          </a:xfrm>
-          <a:prstGeom prst="roundRect">
-            <a:avLst>
-              <a:gd name="adj" fmla="val 5319"/>
-            </a:avLst>
-          </a:prstGeom>
-          <a:solidFill>
-            <a:srgbClr val="9CA3AF"/>
-          </a:solidFill>
-          <a:ln w="12700">
-            <a:solidFill>
-              <a:srgbClr val="9CA3AF"/>
-            </a:solidFill>
-            <a:prstDash val="solid"/>
-          </a:ln>
-        </p:spPr>
-      </p:sp>
-      <p:sp>
-        <p:nvSpPr>
-          <p:cNvPr id="174" name="Text 172"/>
-          <p:cNvSpPr/>
-          <p:nvPr/>
-        </p:nvSpPr>
-        <p:spPr>
-          <a:xfrm>
-            <a:off x="182880" y="7004304"/>
-            <a:ext cx="859536" cy="1024128"/>
-          </a:xfrm>
-          <a:prstGeom prst="rect">
-            <a:avLst/>
-          </a:prstGeom>
-          <a:noFill/>
-          <a:ln/>
-        </p:spPr>
-        <p:txBody>
-          <a:bodyPr wrap="square" lIns="0" tIns="0" rIns="0" bIns="0" rtlCol="0" anchor="ctr"/>
-          <a:lstStyle/>
-          <a:p>
-            <a:pPr algn="ctr" indent="0" marL="0">
-              <a:buNone/>
-            </a:pPr>
-            <a:r>
-              <a:rPr lang="en-US" sz="800" b="1" dirty="0">
-                <a:solidFill>
-                  <a:srgbClr val="FFFFFF"/>
-                </a:solidFill>
-              </a:rPr>
-              <a:t>NPAW</a:t>
-            </a:r>
-            <a:endParaRPr lang="en-US" sz="800" dirty="0"/>
-          </a:p>
-          <a:p>
-            <a:pPr algn="ctr" indent="0" marL="0">
-              <a:buNone/>
-            </a:pPr>
-            <a:r>
-              <a:rPr lang="en-US" sz="800" b="1" dirty="0">
-                <a:solidFill>
-                  <a:srgbClr val="FFFFFF"/>
-                </a:solidFill>
-              </a:rPr>
-              <a:t>Historical</a:t>
-            </a:r>
-            <a:endParaRPr lang="en-US" sz="800" dirty="0"/>
-          </a:p>
-        </p:txBody>
-      </p:sp>
-      <p:sp>
-        <p:nvSpPr>
-          <p:cNvPr id="175" name="Text 173"/>
-          <p:cNvSpPr/>
-          <p:nvPr/>
-        </p:nvSpPr>
-        <p:spPr>
-          <a:xfrm>
-            <a:off x="1170432" y="6976872"/>
-            <a:ext cx="8110728" cy="182880"/>
-          </a:xfrm>
-          <a:prstGeom prst="rect">
-            <a:avLst/>
-          </a:prstGeom>
-          <a:noFill/>
-          <a:ln/>
-        </p:spPr>
-        <p:txBody>
-          <a:bodyPr wrap="square" lIns="0" tIns="0" rIns="0" bIns="0" rtlCol="0" anchor="ctr"/>
-          <a:lstStyle/>
-          <a:p>
-            <a:pPr algn="l" indent="0" marL="0">
-              <a:buNone/>
-            </a:pPr>
-            <a:r>
-              <a:rPr lang="en-US" sz="750" dirty="0">
-                <a:solidFill>
-                  <a:srgbClr val="9CA3AF"/>
-                </a:solidFill>
-              </a:rPr>
-              <a:t>0 / 1 In Progress</a:t>
-            </a:r>
-            <a:endParaRPr lang="en-US" sz="750" dirty="0"/>
-          </a:p>
-        </p:txBody>
-      </p:sp>
-      <p:sp>
-        <p:nvSpPr>
-          <p:cNvPr id="176" name="Shape 174"/>
-          <p:cNvSpPr/>
-          <p:nvPr/>
-        </p:nvSpPr>
-        <p:spPr>
-          <a:xfrm>
-            <a:off x="1170432" y="7196328"/>
-            <a:ext cx="932688" cy="182880"/>
-          </a:xfrm>
-          <a:prstGeom prst="roundRect">
-            <a:avLst>
-              <a:gd name="adj" fmla="val 15000"/>
-            </a:avLst>
-          </a:prstGeom>
-          <a:solidFill>
-            <a:srgbClr val="FFFFFF"/>
-          </a:solidFill>
-          <a:ln w="9525">
-            <a:solidFill>
-              <a:srgbClr val="CBD5E1"/>
-            </a:solidFill>
-            <a:prstDash val="solid"/>
-          </a:ln>
-        </p:spPr>
-      </p:sp>
-      <p:sp>
-        <p:nvSpPr>
-          <p:cNvPr id="177" name="Text 175"/>
-          <p:cNvSpPr/>
-          <p:nvPr/>
-        </p:nvSpPr>
-        <p:spPr>
-          <a:xfrm>
-            <a:off x="1170432" y="7196328"/>
-            <a:ext cx="932688" cy="182880"/>
-          </a:xfrm>
-          <a:prstGeom prst="rect">
-            <a:avLst/>
-          </a:prstGeom>
-          <a:noFill/>
-          <a:ln/>
-        </p:spPr>
-        <p:txBody>
-          <a:bodyPr wrap="square" lIns="0" tIns="0" rIns="0" bIns="0" rtlCol="0" anchor="ctr"/>
-          <a:lstStyle/>
-          <a:p>
-            <a:pPr algn="ctr" indent="0" marL="0">
-              <a:buNone/>
-            </a:pPr>
-            <a:r>
-              <a:rPr lang="en-US" sz="750" b="1" dirty="0">
-                <a:solidFill>
-                  <a:srgbClr val="1E293B"/>
-                </a:solidFill>
-              </a:rPr>
-              <a:t>Metadata</a:t>
-            </a:r>
-            <a:endParaRPr lang="en-US" sz="750" dirty="0"/>
-          </a:p>
-        </p:txBody>
-      </p:sp>
-      <p:sp>
-        <p:nvSpPr>
-          <p:cNvPr id="178" name="Shape 176"/>
-          <p:cNvSpPr/>
-          <p:nvPr/>
-        </p:nvSpPr>
-        <p:spPr>
-          <a:xfrm>
-            <a:off x="1170432" y="7406640"/>
-            <a:ext cx="932688" cy="155448"/>
-          </a:xfrm>
-          <a:prstGeom prst="roundRect">
-            <a:avLst>
-              <a:gd name="adj" fmla="val 17647"/>
-            </a:avLst>
-          </a:prstGeom>
-          <a:solidFill>
-            <a:srgbClr val="F3F4F6"/>
-          </a:solidFill>
-          <a:ln w="9525">
-            <a:solidFill>
-              <a:srgbClr val="D1D5DB"/>
-            </a:solidFill>
-            <a:prstDash val="solid"/>
-          </a:ln>
-        </p:spPr>
-      </p:sp>
-      <p:sp>
-        <p:nvSpPr>
-          <p:cNvPr id="179" name="Text 177"/>
-          <p:cNvSpPr/>
-          <p:nvPr/>
-        </p:nvSpPr>
-        <p:spPr>
-          <a:xfrm>
-            <a:off x="1170432" y="7406640"/>
-            <a:ext cx="932688" cy="155448"/>
-          </a:xfrm>
-          <a:prstGeom prst="rect">
-            <a:avLst/>
-          </a:prstGeom>
-          <a:noFill/>
-          <a:ln/>
-        </p:spPr>
-        <p:txBody>
-          <a:bodyPr wrap="square" lIns="0" tIns="0" rIns="0" bIns="0" rtlCol="0" anchor="ctr"/>
-          <a:lstStyle/>
-          <a:p>
-            <a:pPr algn="ctr" indent="0" marL="0">
-              <a:buNone/>
-            </a:pPr>
-            <a:r>
-              <a:rPr lang="en-US" sz="700" dirty="0">
-                <a:solidFill>
-                  <a:srgbClr val="374151"/>
-                </a:solidFill>
-              </a:rPr>
-              <a:t>Not Started</a:t>
-            </a:r>
-            <a:endParaRPr lang="en-US" sz="700" dirty="0"/>
-          </a:p>
-        </p:txBody>
-      </p:sp>
-      <p:sp>
-        <p:nvSpPr>
-          <p:cNvPr id="180" name="Shape 178"/>
-          <p:cNvSpPr/>
-          <p:nvPr/>
-        </p:nvSpPr>
-        <p:spPr>
-          <a:xfrm>
-            <a:off x="164592" y="8156448"/>
-            <a:ext cx="9116568" cy="1170432"/>
-          </a:xfrm>
-          <a:prstGeom prst="rect">
-            <a:avLst/>
-          </a:prstGeom>
-          <a:solidFill>
-            <a:srgbClr val="FAFBFC"/>
-          </a:solidFill>
-          <a:ln w="6350">
-            <a:solidFill>
-              <a:srgbClr val="E5E7EB"/>
-            </a:solidFill>
-            <a:prstDash val="solid"/>
-          </a:ln>
-        </p:spPr>
-      </p:sp>
-      <p:sp>
-        <p:nvSpPr>
-          <p:cNvPr id="181" name="Shape 179"/>
-          <p:cNvSpPr/>
-          <p:nvPr/>
-        </p:nvSpPr>
-        <p:spPr>
-          <a:xfrm>
-            <a:off x="182880" y="8229600"/>
-            <a:ext cx="859536" cy="1024128"/>
-          </a:xfrm>
-          <a:prstGeom prst="roundRect">
-            <a:avLst>
-              <a:gd name="adj" fmla="val 5319"/>
-            </a:avLst>
-          </a:prstGeom>
-          <a:solidFill>
-            <a:srgbClr val="9CA3AF"/>
-          </a:solidFill>
-          <a:ln w="12700">
-            <a:solidFill>
-              <a:srgbClr val="9CA3AF"/>
-            </a:solidFill>
-            <a:prstDash val="solid"/>
-          </a:ln>
-        </p:spPr>
-      </p:sp>
-      <p:sp>
-        <p:nvSpPr>
-          <p:cNvPr id="182" name="Text 180"/>
-          <p:cNvSpPr/>
-          <p:nvPr/>
-        </p:nvSpPr>
-        <p:spPr>
-          <a:xfrm>
-            <a:off x="182880" y="8229600"/>
-            <a:ext cx="859536" cy="1024128"/>
-          </a:xfrm>
-          <a:prstGeom prst="rect">
-            <a:avLst/>
-          </a:prstGeom>
-          <a:noFill/>
-          <a:ln/>
-        </p:spPr>
-        <p:txBody>
-          <a:bodyPr wrap="square" lIns="0" tIns="0" rIns="0" bIns="0" rtlCol="0" anchor="ctr"/>
-          <a:lstStyle/>
-          <a:p>
-            <a:pPr algn="ctr" indent="0" marL="0">
-              <a:buNone/>
-            </a:pPr>
-            <a:r>
-              <a:rPr lang="en-US" sz="800" b="1" dirty="0">
-                <a:solidFill>
-                  <a:srgbClr val="FFFFFF"/>
-                </a:solidFill>
-              </a:rPr>
-              <a:t>Cleeng</a:t>
-            </a:r>
-            <a:endParaRPr lang="en-US" sz="800" dirty="0"/>
-          </a:p>
-          <a:p>
-            <a:pPr algn="ctr" indent="0" marL="0">
-              <a:buNone/>
-            </a:pPr>
-            <a:r>
-              <a:rPr lang="en-US" sz="800" b="1" dirty="0">
-                <a:solidFill>
-                  <a:srgbClr val="FFFFFF"/>
-                </a:solidFill>
-              </a:rPr>
-              <a:t>Historical and Ongoing</a:t>
-            </a:r>
-            <a:endParaRPr lang="en-US" sz="800" dirty="0"/>
-          </a:p>
-        </p:txBody>
-      </p:sp>
-      <p:sp>
-        <p:nvSpPr>
-          <p:cNvPr id="183" name="Text 181"/>
-          <p:cNvSpPr/>
-          <p:nvPr/>
-        </p:nvSpPr>
-        <p:spPr>
-          <a:xfrm>
-            <a:off x="1170432" y="8202168"/>
-            <a:ext cx="8110728" cy="182880"/>
-          </a:xfrm>
-          <a:prstGeom prst="rect">
-            <a:avLst/>
-          </a:prstGeom>
-          <a:noFill/>
-          <a:ln/>
-        </p:spPr>
-        <p:txBody>
-          <a:bodyPr wrap="square" lIns="0" tIns="0" rIns="0" bIns="0" rtlCol="0" anchor="ctr"/>
-          <a:lstStyle/>
-          <a:p>
-            <a:pPr algn="l" indent="0" marL="0">
-              <a:buNone/>
-            </a:pPr>
-            <a:r>
-              <a:rPr lang="en-US" sz="750" dirty="0">
-                <a:solidFill>
-                  <a:srgbClr val="9CA3AF"/>
-                </a:solidFill>
-              </a:rPr>
-              <a:t>1 / 1 In Progress</a:t>
-            </a:r>
-            <a:endParaRPr lang="en-US" sz="750" dirty="0"/>
-          </a:p>
-        </p:txBody>
-      </p:sp>
-      <p:sp>
-        <p:nvSpPr>
-          <p:cNvPr id="184" name="Shape 182"/>
-          <p:cNvSpPr/>
-          <p:nvPr/>
-        </p:nvSpPr>
-        <p:spPr>
-          <a:xfrm>
-            <a:off x="1170432" y="8421624"/>
-            <a:ext cx="932688" cy="182880"/>
-          </a:xfrm>
-          <a:prstGeom prst="roundRect">
-            <a:avLst>
-              <a:gd name="adj" fmla="val 15000"/>
-            </a:avLst>
-          </a:prstGeom>
-          <a:solidFill>
-            <a:srgbClr val="FFFFFF"/>
-          </a:solidFill>
-          <a:ln w="9525">
-            <a:solidFill>
-              <a:srgbClr val="CBD5E1"/>
-            </a:solidFill>
-            <a:prstDash val="solid"/>
-          </a:ln>
-        </p:spPr>
-      </p:sp>
-      <p:sp>
-        <p:nvSpPr>
-          <p:cNvPr id="185" name="Text 183"/>
-          <p:cNvSpPr/>
-          <p:nvPr/>
-        </p:nvSpPr>
-        <p:spPr>
-          <a:xfrm>
-            <a:off x="1170432" y="8421624"/>
-            <a:ext cx="932688" cy="182880"/>
-          </a:xfrm>
-          <a:prstGeom prst="rect">
-            <a:avLst/>
-          </a:prstGeom>
-          <a:noFill/>
-          <a:ln/>
-        </p:spPr>
-        <p:txBody>
-          <a:bodyPr wrap="square" lIns="0" tIns="0" rIns="0" bIns="0" rtlCol="0" anchor="ctr"/>
-          <a:lstStyle/>
-          <a:p>
-            <a:pPr algn="ctr" indent="0" marL="0">
-              <a:buNone/>
-            </a:pPr>
-            <a:r>
-              <a:rPr lang="en-US" sz="750" b="1" dirty="0">
-                <a:solidFill>
-                  <a:srgbClr val="1E293B"/>
-                </a:solidFill>
-              </a:rPr>
-              <a:t>Images</a:t>
-            </a:r>
-            <a:endParaRPr lang="en-US" sz="750" dirty="0"/>
-          </a:p>
-        </p:txBody>
-      </p:sp>
-      <p:sp>
-        <p:nvSpPr>
-          <p:cNvPr id="186" name="Shape 184"/>
-          <p:cNvSpPr/>
-          <p:nvPr/>
-        </p:nvSpPr>
-        <p:spPr>
-          <a:xfrm>
-            <a:off x="1170432" y="8631936"/>
-            <a:ext cx="932688" cy="155448"/>
-          </a:xfrm>
-          <a:prstGeom prst="roundRect">
-            <a:avLst>
-              <a:gd name="adj" fmla="val 17647"/>
-            </a:avLst>
-          </a:prstGeom>
-          <a:solidFill>
-            <a:srgbClr val="1558A8"/>
-          </a:solidFill>
-          <a:ln w="12700">
-            <a:solidFill>
-              <a:srgbClr val="1558A8"/>
-            </a:solidFill>
-            <a:prstDash val="solid"/>
-          </a:ln>
-        </p:spPr>
-      </p:sp>
-      <p:sp>
-        <p:nvSpPr>
-          <p:cNvPr id="187" name="Text 185"/>
-          <p:cNvSpPr/>
-          <p:nvPr/>
-        </p:nvSpPr>
-        <p:spPr>
-          <a:xfrm>
-            <a:off x="1170432" y="8631936"/>
-            <a:ext cx="932688" cy="155448"/>
-          </a:xfrm>
-          <a:prstGeom prst="rect">
-            <a:avLst/>
-          </a:prstGeom>
-          <a:noFill/>
-          <a:ln/>
-        </p:spPr>
-        <p:txBody>
-          <a:bodyPr wrap="square" lIns="0" tIns="0" rIns="0" bIns="0" rtlCol="0" anchor="ctr"/>
-          <a:lstStyle/>
-          <a:p>
-            <a:pPr algn="ctr" indent="0" marL="0">
-              <a:buNone/>
-            </a:pPr>
-            <a:r>
-              <a:rPr lang="en-US" sz="700" dirty="0">
-                <a:solidFill>
-                  <a:srgbClr val="FFFFFF"/>
-                </a:solidFill>
-              </a:rPr>
-              <a:t>In Progress</a:t>
-            </a:r>
-            <a:endParaRPr lang="en-US" sz="700" dirty="0"/>
-          </a:p>
-        </p:txBody>
-      </p:sp>
-      <p:sp>
-        <p:nvSpPr>
-          <p:cNvPr id="188" name="Shape 186"/>
-          <p:cNvSpPr/>
-          <p:nvPr/>
-        </p:nvSpPr>
-        <p:spPr>
-          <a:xfrm>
-            <a:off x="164592" y="9381744"/>
-            <a:ext cx="9116568" cy="1170432"/>
-          </a:xfrm>
-          <a:prstGeom prst="rect">
-            <a:avLst/>
-          </a:prstGeom>
-          <a:solidFill>
-            <a:srgbClr val="FFFFFF"/>
-          </a:solidFill>
-          <a:ln w="6350">
-            <a:solidFill>
-              <a:srgbClr val="E5E7EB"/>
-            </a:solidFill>
-            <a:prstDash val="solid"/>
-          </a:ln>
-        </p:spPr>
-      </p:sp>
-      <p:sp>
-        <p:nvSpPr>
-          <p:cNvPr id="189" name="Shape 187"/>
-          <p:cNvSpPr/>
-          <p:nvPr/>
-        </p:nvSpPr>
-        <p:spPr>
-          <a:xfrm>
-            <a:off x="182880" y="9454896"/>
-            <a:ext cx="859536" cy="1024128"/>
-          </a:xfrm>
-          <a:prstGeom prst="roundRect">
-            <a:avLst>
-              <a:gd name="adj" fmla="val 5319"/>
-            </a:avLst>
-          </a:prstGeom>
-          <a:solidFill>
-            <a:srgbClr val="9CA3AF"/>
-          </a:solidFill>
-          <a:ln w="12700">
-            <a:solidFill>
-              <a:srgbClr val="9CA3AF"/>
-            </a:solidFill>
-            <a:prstDash val="solid"/>
-          </a:ln>
-        </p:spPr>
-      </p:sp>
-      <p:sp>
-        <p:nvSpPr>
-          <p:cNvPr id="190" name="Text 188"/>
-          <p:cNvSpPr/>
-          <p:nvPr/>
-        </p:nvSpPr>
-        <p:spPr>
-          <a:xfrm>
-            <a:off x="182880" y="9454896"/>
-            <a:ext cx="859536" cy="1024128"/>
-          </a:xfrm>
-          <a:prstGeom prst="rect">
-            <a:avLst/>
-          </a:prstGeom>
-          <a:noFill/>
-          <a:ln/>
-        </p:spPr>
-        <p:txBody>
-          <a:bodyPr wrap="square" lIns="0" tIns="0" rIns="0" bIns="0" rtlCol="0" anchor="ctr"/>
-          <a:lstStyle/>
-          <a:p>
-            <a:pPr algn="ctr" indent="0" marL="0">
-              <a:buNone/>
-            </a:pPr>
-            <a:r>
-              <a:rPr lang="en-US" sz="800" b="1" dirty="0">
-                <a:solidFill>
-                  <a:srgbClr val="FFFFFF"/>
-                </a:solidFill>
-              </a:rPr>
-              <a:t>Slate</a:t>
-            </a:r>
-            <a:endParaRPr lang="en-US" sz="800" dirty="0"/>
-          </a:p>
-          <a:p>
-            <a:pPr algn="ctr" indent="0" marL="0">
-              <a:buNone/>
-            </a:pPr>
-            <a:r>
-              <a:rPr lang="en-US" sz="800" b="1" dirty="0">
-                <a:solidFill>
-                  <a:srgbClr val="FFFFFF"/>
-                </a:solidFill>
-              </a:rPr>
-              <a:t>API integration</a:t>
-            </a:r>
-            <a:endParaRPr lang="en-US" sz="800" dirty="0"/>
-          </a:p>
-        </p:txBody>
-      </p:sp>
-      <p:sp>
-        <p:nvSpPr>
-          <p:cNvPr id="191" name="Text 189"/>
-          <p:cNvSpPr/>
-          <p:nvPr/>
-        </p:nvSpPr>
-        <p:spPr>
-          <a:xfrm>
-            <a:off x="1170432" y="9427464"/>
-            <a:ext cx="8110728" cy="182880"/>
-          </a:xfrm>
-          <a:prstGeom prst="rect">
-            <a:avLst/>
-          </a:prstGeom>
-          <a:noFill/>
-          <a:ln/>
-        </p:spPr>
-        <p:txBody>
-          <a:bodyPr wrap="square" lIns="0" tIns="0" rIns="0" bIns="0" rtlCol="0" anchor="ctr"/>
-          <a:lstStyle/>
-          <a:p>
-            <a:pPr algn="l" indent="0" marL="0">
-              <a:buNone/>
-            </a:pPr>
-            <a:r>
-              <a:rPr lang="en-US" sz="750" dirty="0">
-                <a:solidFill>
-                  <a:srgbClr val="9CA3AF"/>
-                </a:solidFill>
-              </a:rPr>
-              <a:t>0 / 1 In Progress · 1 Done</a:t>
-            </a:r>
-            <a:endParaRPr lang="en-US" sz="750" dirty="0"/>
-          </a:p>
-        </p:txBody>
-      </p:sp>
-      <p:sp>
-        <p:nvSpPr>
-          <p:cNvPr id="192" name="Shape 190"/>
-          <p:cNvSpPr/>
-          <p:nvPr/>
-        </p:nvSpPr>
-        <p:spPr>
-          <a:xfrm>
-            <a:off x="1170432" y="9646920"/>
-            <a:ext cx="932688" cy="182880"/>
-          </a:xfrm>
-          <a:prstGeom prst="roundRect">
-            <a:avLst>
-              <a:gd name="adj" fmla="val 15000"/>
-            </a:avLst>
-          </a:prstGeom>
-          <a:solidFill>
-            <a:srgbClr val="FFFFFF"/>
-          </a:solidFill>
-          <a:ln w="9525">
-            <a:solidFill>
-              <a:srgbClr val="CBD5E1"/>
-            </a:solidFill>
-            <a:prstDash val="solid"/>
-          </a:ln>
-        </p:spPr>
-      </p:sp>
-      <p:sp>
-        <p:nvSpPr>
-          <p:cNvPr id="193" name="Text 191"/>
-          <p:cNvSpPr/>
-          <p:nvPr/>
-        </p:nvSpPr>
-        <p:spPr>
-          <a:xfrm>
-            <a:off x="1170432" y="9646920"/>
-            <a:ext cx="932688" cy="182880"/>
-          </a:xfrm>
-          <a:prstGeom prst="rect">
-            <a:avLst/>
-          </a:prstGeom>
-          <a:noFill/>
-          <a:ln/>
-        </p:spPr>
-        <p:txBody>
-          <a:bodyPr wrap="square" lIns="0" tIns="0" rIns="0" bIns="0" rtlCol="0" anchor="ctr"/>
-          <a:lstStyle/>
-          <a:p>
-            <a:pPr algn="ctr" indent="0" marL="0">
-              <a:buNone/>
-            </a:pPr>
-            <a:r>
-              <a:rPr lang="en-US" sz="750" b="1" dirty="0">
-                <a:solidFill>
-                  <a:srgbClr val="1E293B"/>
-                </a:solidFill>
-              </a:rPr>
-              <a:t>AMZN Channels</a:t>
-            </a:r>
-            <a:endParaRPr lang="en-US" sz="750" dirty="0"/>
-          </a:p>
-        </p:txBody>
-      </p:sp>
-      <p:sp>
-        <p:nvSpPr>
-          <p:cNvPr id="194" name="Shape 192"/>
-          <p:cNvSpPr/>
-          <p:nvPr/>
-        </p:nvSpPr>
-        <p:spPr>
-          <a:xfrm>
-            <a:off x="1170432" y="9857232"/>
-            <a:ext cx="932688" cy="155448"/>
-          </a:xfrm>
-          <a:prstGeom prst="roundRect">
-            <a:avLst>
-              <a:gd name="adj" fmla="val 17647"/>
-            </a:avLst>
-          </a:prstGeom>
-          <a:solidFill>
-            <a:srgbClr val="DCFCE7"/>
-          </a:solidFill>
-          <a:ln w="12700">
-            <a:solidFill>
-              <a:srgbClr val="15803D"/>
-            </a:solidFill>
-            <a:prstDash val="solid"/>
-          </a:ln>
-        </p:spPr>
-      </p:sp>
-      <p:sp>
-        <p:nvSpPr>
-          <p:cNvPr id="195" name="Text 193"/>
-          <p:cNvSpPr/>
-          <p:nvPr/>
-        </p:nvSpPr>
-        <p:spPr>
-          <a:xfrm>
-            <a:off x="1170432" y="9857232"/>
-            <a:ext cx="932688" cy="155448"/>
-          </a:xfrm>
-          <a:prstGeom prst="rect">
-            <a:avLst/>
-          </a:prstGeom>
-          <a:noFill/>
-          <a:ln/>
-        </p:spPr>
-        <p:txBody>
-          <a:bodyPr wrap="square" lIns="0" tIns="0" rIns="0" bIns="0" rtlCol="0" anchor="ctr"/>
-          <a:lstStyle/>
-          <a:p>
-            <a:pPr algn="ctr" indent="0" marL="0">
-              <a:buNone/>
-            </a:pPr>
-            <a:r>
-              <a:rPr lang="en-US" sz="700" dirty="0">
-                <a:solidFill>
-                  <a:srgbClr val="14532D"/>
-                </a:solidFill>
-              </a:rPr>
-              <a:t>Done</a:t>
-            </a:r>
-            <a:endParaRPr lang="en-US" sz="700" dirty="0"/>
-          </a:p>
-        </p:txBody>
-      </p:sp>
-      <p:sp>
-        <p:nvSpPr>
-          <p:cNvPr id="196" name="Shape 194"/>
-          <p:cNvSpPr/>
-          <p:nvPr/>
-        </p:nvSpPr>
-        <p:spPr>
-          <a:xfrm>
             <a:off x="9372600" y="804672"/>
             <a:ext cx="2834640" cy="6071616"/>
           </a:xfrm>
@@ -14422,7 +13630,7 @@
       </p:sp>
       <p:sp>
         <p:nvSpPr>
-          <p:cNvPr id="197" name="Text 195"/>
+          <p:cNvPr id="173" name="Text 171"/>
           <p:cNvSpPr/>
           <p:nvPr/>
         </p:nvSpPr>
@@ -14458,7 +13666,7 @@
       </p:sp>
       <p:sp>
         <p:nvSpPr>
-          <p:cNvPr id="198" name="Shape 196"/>
+          <p:cNvPr id="174" name="Shape 172"/>
           <p:cNvSpPr/>
           <p:nvPr/>
         </p:nvSpPr>
@@ -14483,7 +13691,7 @@
       </p:sp>
       <p:sp>
         <p:nvSpPr>
-          <p:cNvPr id="199" name="Shape 197"/>
+          <p:cNvPr id="175" name="Shape 173"/>
           <p:cNvSpPr/>
           <p:nvPr/>
         </p:nvSpPr>
@@ -14508,7 +13716,7 @@
       </p:sp>
       <p:sp>
         <p:nvSpPr>
-          <p:cNvPr id="200" name="Text 198"/>
+          <p:cNvPr id="176" name="Text 174"/>
           <p:cNvSpPr/>
           <p:nvPr/>
         </p:nvSpPr>
@@ -14544,7 +13752,7 @@
       </p:sp>
       <p:sp>
         <p:nvSpPr>
-          <p:cNvPr id="201" name="Text 199"/>
+          <p:cNvPr id="177" name="Text 175"/>
           <p:cNvSpPr/>
           <p:nvPr/>
         </p:nvSpPr>
@@ -14580,7 +13788,7 @@
       </p:sp>
       <p:sp>
         <p:nvSpPr>
-          <p:cNvPr id="202" name="Shape 200"/>
+          <p:cNvPr id="178" name="Shape 176"/>
           <p:cNvSpPr/>
           <p:nvPr/>
         </p:nvSpPr>
@@ -14607,7 +13815,7 @@
       </p:sp>
       <p:sp>
         <p:nvSpPr>
-          <p:cNvPr id="203" name="Text 201"/>
+          <p:cNvPr id="179" name="Text 177"/>
           <p:cNvSpPr/>
           <p:nvPr/>
         </p:nvSpPr>
@@ -14643,7 +13851,7 @@
       </p:sp>
       <p:sp>
         <p:nvSpPr>
-          <p:cNvPr id="204" name="Shape 202"/>
+          <p:cNvPr id="180" name="Shape 178"/>
           <p:cNvSpPr/>
           <p:nvPr/>
         </p:nvSpPr>
@@ -14668,7 +13876,7 @@
       </p:sp>
       <p:sp>
         <p:nvSpPr>
-          <p:cNvPr id="205" name="Shape 203"/>
+          <p:cNvPr id="181" name="Shape 179"/>
           <p:cNvSpPr/>
           <p:nvPr/>
         </p:nvSpPr>
@@ -14693,7 +13901,7 @@
       </p:sp>
       <p:sp>
         <p:nvSpPr>
-          <p:cNvPr id="206" name="Text 204"/>
+          <p:cNvPr id="182" name="Text 180"/>
           <p:cNvSpPr/>
           <p:nvPr/>
         </p:nvSpPr>
@@ -14729,7 +13937,7 @@
       </p:sp>
       <p:sp>
         <p:nvSpPr>
-          <p:cNvPr id="207" name="Text 205"/>
+          <p:cNvPr id="183" name="Text 181"/>
           <p:cNvSpPr/>
           <p:nvPr/>
         </p:nvSpPr>
@@ -14765,7 +13973,7 @@
       </p:sp>
       <p:sp>
         <p:nvSpPr>
-          <p:cNvPr id="208" name="Shape 206"/>
+          <p:cNvPr id="184" name="Shape 182"/>
           <p:cNvSpPr/>
           <p:nvPr/>
         </p:nvSpPr>
@@ -14792,7 +14000,7 @@
       </p:sp>
       <p:sp>
         <p:nvSpPr>
-          <p:cNvPr id="209" name="Text 207"/>
+          <p:cNvPr id="185" name="Text 183"/>
           <p:cNvSpPr/>
           <p:nvPr/>
         </p:nvSpPr>
@@ -14828,7 +14036,7 @@
       </p:sp>
       <p:sp>
         <p:nvSpPr>
-          <p:cNvPr id="210" name="Shape 208"/>
+          <p:cNvPr id="186" name="Shape 184"/>
           <p:cNvSpPr/>
           <p:nvPr/>
         </p:nvSpPr>
@@ -14853,7 +14061,7 @@
       </p:sp>
       <p:sp>
         <p:nvSpPr>
-          <p:cNvPr id="211" name="Shape 209"/>
+          <p:cNvPr id="187" name="Shape 185"/>
           <p:cNvSpPr/>
           <p:nvPr/>
         </p:nvSpPr>
@@ -14878,7 +14086,7 @@
       </p:sp>
       <p:sp>
         <p:nvSpPr>
-          <p:cNvPr id="212" name="Text 210"/>
+          <p:cNvPr id="188" name="Text 186"/>
           <p:cNvSpPr/>
           <p:nvPr/>
         </p:nvSpPr>
@@ -14914,7 +14122,7 @@
       </p:sp>
       <p:sp>
         <p:nvSpPr>
-          <p:cNvPr id="213" name="Text 211"/>
+          <p:cNvPr id="189" name="Text 187"/>
           <p:cNvSpPr/>
           <p:nvPr/>
         </p:nvSpPr>
@@ -14950,7 +14158,7 @@
       </p:sp>
       <p:sp>
         <p:nvSpPr>
-          <p:cNvPr id="214" name="Shape 212"/>
+          <p:cNvPr id="190" name="Shape 188"/>
           <p:cNvSpPr/>
           <p:nvPr/>
         </p:nvSpPr>
@@ -14977,7 +14185,7 @@
       </p:sp>
       <p:sp>
         <p:nvSpPr>
-          <p:cNvPr id="215" name="Text 213"/>
+          <p:cNvPr id="191" name="Text 189"/>
           <p:cNvSpPr/>
           <p:nvPr/>
         </p:nvSpPr>
@@ -15013,7 +14221,7 @@
       </p:sp>
       <p:sp>
         <p:nvSpPr>
-          <p:cNvPr id="216" name="Shape 214"/>
+          <p:cNvPr id="192" name="Shape 190"/>
           <p:cNvSpPr/>
           <p:nvPr/>
         </p:nvSpPr>
@@ -15038,7 +14246,7 @@
       </p:sp>
       <p:sp>
         <p:nvSpPr>
-          <p:cNvPr id="217" name="Shape 215"/>
+          <p:cNvPr id="193" name="Shape 191"/>
           <p:cNvSpPr/>
           <p:nvPr/>
         </p:nvSpPr>
@@ -15063,7 +14271,7 @@
       </p:sp>
       <p:sp>
         <p:nvSpPr>
-          <p:cNvPr id="218" name="Text 216"/>
+          <p:cNvPr id="194" name="Text 192"/>
           <p:cNvSpPr/>
           <p:nvPr/>
         </p:nvSpPr>
@@ -15099,7 +14307,7 @@
       </p:sp>
       <p:sp>
         <p:nvSpPr>
-          <p:cNvPr id="219" name="Text 217"/>
+          <p:cNvPr id="195" name="Text 193"/>
           <p:cNvSpPr/>
           <p:nvPr/>
         </p:nvSpPr>
@@ -15135,7 +14343,7 @@
       </p:sp>
       <p:sp>
         <p:nvSpPr>
-          <p:cNvPr id="220" name="Shape 218"/>
+          <p:cNvPr id="196" name="Shape 194"/>
           <p:cNvSpPr/>
           <p:nvPr/>
         </p:nvSpPr>
@@ -15162,7 +14370,7 @@
       </p:sp>
       <p:sp>
         <p:nvSpPr>
-          <p:cNvPr id="221" name="Text 219"/>
+          <p:cNvPr id="197" name="Text 195"/>
           <p:cNvSpPr/>
           <p:nvPr/>
         </p:nvSpPr>
@@ -15198,7 +14406,7 @@
       </p:sp>
       <p:sp>
         <p:nvSpPr>
-          <p:cNvPr id="222" name="Shape 220"/>
+          <p:cNvPr id="198" name="Shape 196"/>
           <p:cNvSpPr/>
           <p:nvPr/>
         </p:nvSpPr>
@@ -15221,7 +14429,7 @@
       </p:sp>
       <p:sp>
         <p:nvSpPr>
-          <p:cNvPr id="223" name="Text 221"/>
+          <p:cNvPr id="199" name="Text 197"/>
           <p:cNvSpPr/>
           <p:nvPr/>
         </p:nvSpPr>
@@ -15257,7 +14465,7 @@
       </p:sp>
       <p:sp>
         <p:nvSpPr>
-          <p:cNvPr id="224" name="Shape 222"/>
+          <p:cNvPr id="200" name="Shape 198"/>
           <p:cNvSpPr/>
           <p:nvPr/>
         </p:nvSpPr>
@@ -15284,7 +14492,7 @@
       </p:sp>
       <p:sp>
         <p:nvSpPr>
-          <p:cNvPr id="225" name="Text 223"/>
+          <p:cNvPr id="201" name="Text 199"/>
           <p:cNvSpPr/>
           <p:nvPr/>
         </p:nvSpPr>
@@ -15320,7 +14528,7 @@
       </p:sp>
       <p:sp>
         <p:nvSpPr>
-          <p:cNvPr id="226" name="Text 224"/>
+          <p:cNvPr id="202" name="Text 200"/>
           <p:cNvSpPr/>
           <p:nvPr/>
         </p:nvSpPr>
@@ -15356,7 +14564,7 @@
       </p:sp>
       <p:sp>
         <p:nvSpPr>
-          <p:cNvPr id="227" name="Shape 225"/>
+          <p:cNvPr id="203" name="Shape 201"/>
           <p:cNvSpPr/>
           <p:nvPr/>
         </p:nvSpPr>
@@ -15383,7 +14591,7 @@
       </p:sp>
       <p:sp>
         <p:nvSpPr>
-          <p:cNvPr id="228" name="Text 226"/>
+          <p:cNvPr id="204" name="Text 202"/>
           <p:cNvSpPr/>
           <p:nvPr/>
         </p:nvSpPr>
@@ -15419,7 +14627,7 @@
       </p:sp>
       <p:sp>
         <p:nvSpPr>
-          <p:cNvPr id="229" name="Text 227"/>
+          <p:cNvPr id="205" name="Text 203"/>
           <p:cNvSpPr/>
           <p:nvPr/>
         </p:nvSpPr>
@@ -15455,7 +14663,7 @@
       </p:sp>
       <p:sp>
         <p:nvSpPr>
-          <p:cNvPr id="230" name="Shape 228"/>
+          <p:cNvPr id="206" name="Shape 204"/>
           <p:cNvSpPr/>
           <p:nvPr/>
         </p:nvSpPr>
@@ -15482,7 +14690,7 @@
       </p:sp>
       <p:sp>
         <p:nvSpPr>
-          <p:cNvPr id="231" name="Text 229"/>
+          <p:cNvPr id="207" name="Text 205"/>
           <p:cNvSpPr/>
           <p:nvPr/>
         </p:nvSpPr>
@@ -15518,7 +14726,7 @@
       </p:sp>
       <p:sp>
         <p:nvSpPr>
-          <p:cNvPr id="232" name="Text 230"/>
+          <p:cNvPr id="208" name="Text 206"/>
           <p:cNvSpPr/>
           <p:nvPr/>
         </p:nvSpPr>
@@ -15554,7 +14762,7 @@
       </p:sp>
       <p:sp>
         <p:nvSpPr>
-          <p:cNvPr id="233" name="Shape 231"/>
+          <p:cNvPr id="209" name="Shape 207"/>
           <p:cNvSpPr/>
           <p:nvPr/>
         </p:nvSpPr>
@@ -15581,7 +14789,7 @@
       </p:sp>
       <p:sp>
         <p:nvSpPr>
-          <p:cNvPr id="234" name="Text 232"/>
+          <p:cNvPr id="210" name="Text 208"/>
           <p:cNvSpPr/>
           <p:nvPr/>
         </p:nvSpPr>
@@ -15617,7 +14825,7 @@
       </p:sp>
       <p:sp>
         <p:nvSpPr>
-          <p:cNvPr id="235" name="Text 233"/>
+          <p:cNvPr id="211" name="Text 209"/>
           <p:cNvSpPr/>
           <p:nvPr/>
         </p:nvSpPr>
@@ -15653,7 +14861,7 @@
       </p:sp>
       <p:sp>
         <p:nvSpPr>
-          <p:cNvPr id="236" name="Shape 234"/>
+          <p:cNvPr id="212" name="Shape 210"/>
           <p:cNvSpPr/>
           <p:nvPr/>
         </p:nvSpPr>
@@ -15680,7 +14888,7 @@
       </p:sp>
       <p:sp>
         <p:nvSpPr>
-          <p:cNvPr id="237" name="Text 235"/>
+          <p:cNvPr id="213" name="Text 211"/>
           <p:cNvSpPr/>
           <p:nvPr/>
         </p:nvSpPr>
@@ -15716,7 +14924,7 @@
       </p:sp>
       <p:sp>
         <p:nvSpPr>
-          <p:cNvPr id="238" name="Text 236"/>
+          <p:cNvPr id="214" name="Text 212"/>
           <p:cNvSpPr/>
           <p:nvPr/>
         </p:nvSpPr>
@@ -16024,7 +15232,7 @@
                   <a:srgbClr val="1D4ED8"/>
                 </a:solidFill>
               </a:rPr>
-              <a:t>15  In Progress</a:t>
+              <a:t>16  In Progress</a:t>
             </a:r>
             <a:endParaRPr lang="en-US" sz="900" dirty="0"/>
           </a:p>
@@ -16087,7 +15295,7 @@
                   <a:srgbClr val="374151"/>
                 </a:solidFill>
               </a:rPr>
-              <a:t>5  Not Started</a:t>
+              <a:t>4  Not Started</a:t>
             </a:r>
             <a:endParaRPr lang="en-US" sz="900" dirty="0"/>
           </a:p>
@@ -17362,7 +16570,7 @@
                   <a:srgbClr val="9CA3AF"/>
                 </a:solidFill>
               </a:rPr>
-              <a:t>4 / 9 In Progress · 2 Done</a:t>
+              <a:t>5 / 9 In Progress · 2 Done</a:t>
             </a:r>
             <a:endParaRPr lang="en-US" sz="750" dirty="0"/>
           </a:p>
@@ -17448,11 +16656,11 @@
             </a:avLst>
           </a:prstGeom>
           <a:solidFill>
-            <a:srgbClr val="F3F4F6"/>
-          </a:solidFill>
-          <a:ln w="9525">
-            <a:solidFill>
-              <a:srgbClr val="D1D5DB"/>
+            <a:srgbClr val="1558A8"/>
+          </a:solidFill>
+          <a:ln w="12700">
+            <a:solidFill>
+              <a:srgbClr val="1558A8"/>
             </a:solidFill>
             <a:prstDash val="solid"/>
           </a:ln>
@@ -17485,10 +16693,10 @@
             <a:r>
               <a:rPr lang="en-US" sz="700" dirty="0">
                 <a:solidFill>
-                  <a:srgbClr val="374151"/>
-                </a:solidFill>
-              </a:rPr>
-              <a:t>Not Started</a:t>
+                  <a:srgbClr val="FFFFFF"/>
+                </a:solidFill>
+              </a:rPr>
+              <a:t>In Progress</a:t>
             </a:r>
             <a:endParaRPr lang="en-US" sz="700" dirty="0"/>
           </a:p>
@@ -21296,7 +20504,7 @@
                   <a:srgbClr val="1D4ED8"/>
                 </a:solidFill>
               </a:rPr>
-              <a:t>16  In Progress</a:t>
+              <a:t>17  In Progress</a:t>
             </a:r>
             <a:endParaRPr lang="en-US" sz="900" dirty="0"/>
           </a:p>
@@ -21359,7 +20567,7 @@
                   <a:srgbClr val="374151"/>
                 </a:solidFill>
               </a:rPr>
-              <a:t>5  Not Started</a:t>
+              <a:t>4  Not Started</a:t>
             </a:r>
             <a:endParaRPr lang="en-US" sz="900" dirty="0"/>
           </a:p>
@@ -22760,7 +21968,7 @@
                   <a:srgbClr val="9CA3AF"/>
                 </a:solidFill>
               </a:rPr>
-              <a:t>4 / 9 In Progress · 2 Done</a:t>
+              <a:t>5 / 9 In Progress · 2 Done</a:t>
             </a:r>
             <a:endParaRPr lang="en-US" sz="750" dirty="0"/>
           </a:p>
@@ -22846,11 +22054,11 @@
             </a:avLst>
           </a:prstGeom>
           <a:solidFill>
-            <a:srgbClr val="F3F4F6"/>
-          </a:solidFill>
-          <a:ln w="9525">
-            <a:solidFill>
-              <a:srgbClr val="D1D5DB"/>
+            <a:srgbClr val="1558A8"/>
+          </a:solidFill>
+          <a:ln w="12700">
+            <a:solidFill>
+              <a:srgbClr val="1558A8"/>
             </a:solidFill>
             <a:prstDash val="solid"/>
           </a:ln>
@@ -22883,10 +22091,10 @@
             <a:r>
               <a:rPr lang="en-US" sz="700" dirty="0">
                 <a:solidFill>
-                  <a:srgbClr val="374151"/>
-                </a:solidFill>
-              </a:rPr>
-              <a:t>Not Started</a:t>
+                  <a:srgbClr val="FFFFFF"/>
+                </a:solidFill>
+              </a:rPr>
+              <a:t>In Progress</a:t>
             </a:r>
             <a:endParaRPr lang="en-US" sz="700" dirty="0"/>
           </a:p>
@@ -26694,7 +25902,7 @@
                   <a:srgbClr val="1D4ED8"/>
                 </a:solidFill>
               </a:rPr>
-              <a:t>17  In Progress</a:t>
+              <a:t>18  In Progress</a:t>
             </a:r>
             <a:endParaRPr lang="en-US" sz="900" dirty="0"/>
           </a:p>
@@ -26757,7 +25965,7 @@
                   <a:srgbClr val="374151"/>
                 </a:solidFill>
               </a:rPr>
-              <a:t>5  Not Started</a:t>
+              <a:t>4  Not Started</a:t>
             </a:r>
             <a:endParaRPr lang="en-US" sz="900" dirty="0"/>
           </a:p>
@@ -28284,7 +27492,7 @@
                   <a:srgbClr val="9CA3AF"/>
                 </a:solidFill>
               </a:rPr>
-              <a:t>4 / 9 In Progress · 2 Done</a:t>
+              <a:t>5 / 9 In Progress · 2 Done</a:t>
             </a:r>
             <a:endParaRPr lang="en-US" sz="750" dirty="0"/>
           </a:p>
@@ -28370,11 +27578,11 @@
             </a:avLst>
           </a:prstGeom>
           <a:solidFill>
-            <a:srgbClr val="F3F4F6"/>
-          </a:solidFill>
-          <a:ln w="9525">
-            <a:solidFill>
-              <a:srgbClr val="D1D5DB"/>
+            <a:srgbClr val="1558A8"/>
+          </a:solidFill>
+          <a:ln w="12700">
+            <a:solidFill>
+              <a:srgbClr val="1558A8"/>
             </a:solidFill>
             <a:prstDash val="solid"/>
           </a:ln>
@@ -28407,10 +27615,10 @@
             <a:r>
               <a:rPr lang="en-US" sz="700" dirty="0">
                 <a:solidFill>
-                  <a:srgbClr val="374151"/>
-                </a:solidFill>
-              </a:rPr>
-              <a:t>Not Started</a:t>
+                  <a:srgbClr val="FFFFFF"/>
+                </a:solidFill>
+              </a:rPr>
+              <a:t>In Progress</a:t>
             </a:r>
             <a:endParaRPr lang="en-US" sz="700" dirty="0"/>
           </a:p>
@@ -32218,7 +31426,7 @@
                   <a:srgbClr val="1D4ED8"/>
                 </a:solidFill>
               </a:rPr>
-              <a:t>19  In Progress</a:t>
+              <a:t>20  In Progress</a:t>
             </a:r>
             <a:endParaRPr lang="en-US" sz="900" dirty="0"/>
           </a:p>
@@ -32281,7 +31489,7 @@
                   <a:srgbClr val="374151"/>
                 </a:solidFill>
               </a:rPr>
-              <a:t>5  Not Started</a:t>
+              <a:t>4  Not Started</a:t>
             </a:r>
             <a:endParaRPr lang="en-US" sz="900" dirty="0"/>
           </a:p>
@@ -34348,7 +33556,7 @@
                   <a:srgbClr val="9CA3AF"/>
                 </a:solidFill>
               </a:rPr>
-              <a:t>4 / 9 In Progress · 2 Done</a:t>
+              <a:t>5 / 9 In Progress · 2 Done</a:t>
             </a:r>
             <a:endParaRPr lang="en-US" sz="750" dirty="0"/>
           </a:p>
@@ -34434,11 +33642,11 @@
             </a:avLst>
           </a:prstGeom>
           <a:solidFill>
-            <a:srgbClr val="F3F4F6"/>
-          </a:solidFill>
-          <a:ln w="9525">
-            <a:solidFill>
-              <a:srgbClr val="D1D5DB"/>
+            <a:srgbClr val="1558A8"/>
+          </a:solidFill>
+          <a:ln w="12700">
+            <a:solidFill>
+              <a:srgbClr val="1558A8"/>
             </a:solidFill>
             <a:prstDash val="solid"/>
           </a:ln>
@@ -34471,10 +33679,10 @@
             <a:r>
               <a:rPr lang="en-US" sz="700" dirty="0">
                 <a:solidFill>
-                  <a:srgbClr val="374151"/>
-                </a:solidFill>
-              </a:rPr>
-              <a:t>Not Started</a:t>
+                  <a:srgbClr val="FFFFFF"/>
+                </a:solidFill>
+              </a:rPr>
+              <a:t>In Progress</a:t>
             </a:r>
             <a:endParaRPr lang="en-US" sz="700" dirty="0"/>
           </a:p>

--- a/SABR_CPR_Component_Status.pptx
+++ b/SABR_CPR_Component_Status.pptx
@@ -8420,7 +8420,7 @@
                   <a:srgbClr val="166534"/>
                 </a:solidFill>
               </a:rPr>
-              <a:t>2  Done</a:t>
+              <a:t>3  Done</a:t>
             </a:r>
             <a:endParaRPr lang="en-US" sz="900" dirty="0"/>
           </a:p>
@@ -8483,7 +8483,7 @@
                   <a:srgbClr val="1D4ED8"/>
                 </a:solidFill>
               </a:rPr>
-              <a:t>25  In Progress</a:t>
+              <a:t>26  In Progress</a:t>
             </a:r>
             <a:endParaRPr lang="en-US" sz="900" dirty="0"/>
           </a:p>
@@ -8546,7 +8546,7 @@
                   <a:srgbClr val="374151"/>
                 </a:solidFill>
               </a:rPr>
-              <a:t>6  Not Started</a:t>
+              <a:t>7  Not Started</a:t>
             </a:r>
             <a:endParaRPr lang="en-US" sz="900" dirty="0"/>
           </a:p>
@@ -8805,7 +8805,7 @@
                   <a:srgbClr val="388849"/>
                 </a:solidFill>
               </a:rPr>
-              <a:t>6% Ready</a:t>
+              <a:t>8% Ready</a:t>
             </a:r>
             <a:endParaRPr lang="en-US" sz="1100" dirty="0"/>
           </a:p>
@@ -8820,7 +8820,7 @@
         <p:spPr>
           <a:xfrm>
             <a:off x="164592" y="804672"/>
-            <a:ext cx="9116568" cy="1170432"/>
+            <a:ext cx="9116568" cy="966216"/>
           </a:xfrm>
           <a:prstGeom prst="rect">
             <a:avLst/>
@@ -8845,11 +8845,11 @@
         <p:spPr>
           <a:xfrm>
             <a:off x="182880" y="877824"/>
-            <a:ext cx="859536" cy="1024128"/>
+            <a:ext cx="859536" cy="819912"/>
           </a:xfrm>
           <a:prstGeom prst="roundRect">
             <a:avLst>
-              <a:gd name="adj" fmla="val 5319"/>
+              <a:gd name="adj" fmla="val 5576"/>
             </a:avLst>
           </a:prstGeom>
           <a:solidFill>
@@ -8872,7 +8872,7 @@
         <p:spPr>
           <a:xfrm>
             <a:off x="182880" y="877824"/>
-            <a:ext cx="859536" cy="1024128"/>
+            <a:ext cx="859536" cy="819912"/>
           </a:xfrm>
           <a:prstGeom prst="rect">
             <a:avLst/>
@@ -9825,8 +9825,8 @@
         </p:nvSpPr>
         <p:spPr>
           <a:xfrm>
-            <a:off x="164592" y="2029968"/>
-            <a:ext cx="9116568" cy="1170432"/>
+            <a:off x="164592" y="1825752"/>
+            <a:ext cx="9116568" cy="966216"/>
           </a:xfrm>
           <a:prstGeom prst="rect">
             <a:avLst/>
@@ -9850,12 +9850,12 @@
         </p:nvSpPr>
         <p:spPr>
           <a:xfrm>
-            <a:off x="182880" y="2103120"/>
-            <a:ext cx="859536" cy="1024128"/>
+            <a:off x="182880" y="1898904"/>
+            <a:ext cx="859536" cy="819912"/>
           </a:xfrm>
           <a:prstGeom prst="roundRect">
             <a:avLst>
-              <a:gd name="adj" fmla="val 5319"/>
+              <a:gd name="adj" fmla="val 5576"/>
             </a:avLst>
           </a:prstGeom>
           <a:solidFill>
@@ -9877,8 +9877,8 @@
         </p:nvSpPr>
         <p:spPr>
           <a:xfrm>
-            <a:off x="182880" y="2103120"/>
-            <a:ext cx="859536" cy="1024128"/>
+            <a:off x="182880" y="1898904"/>
+            <a:ext cx="859536" cy="819912"/>
           </a:xfrm>
           <a:prstGeom prst="rect">
             <a:avLst/>
@@ -9927,7 +9927,7 @@
         </p:nvSpPr>
         <p:spPr>
           <a:xfrm>
-            <a:off x="1170432" y="2075688"/>
+            <a:off x="1170432" y="1871472"/>
             <a:ext cx="8110728" cy="182880"/>
           </a:xfrm>
           <a:prstGeom prst="rect">
@@ -9963,7 +9963,7 @@
         </p:nvSpPr>
         <p:spPr>
           <a:xfrm>
-            <a:off x="1170432" y="2295144"/>
+            <a:off x="1170432" y="2090928"/>
             <a:ext cx="932688" cy="182880"/>
           </a:xfrm>
           <a:prstGeom prst="roundRect">
@@ -9990,7 +9990,7 @@
         </p:nvSpPr>
         <p:spPr>
           <a:xfrm>
-            <a:off x="1170432" y="2295144"/>
+            <a:off x="1170432" y="2090928"/>
             <a:ext cx="932688" cy="182880"/>
           </a:xfrm>
           <a:prstGeom prst="rect">
@@ -10026,7 +10026,7 @@
         </p:nvSpPr>
         <p:spPr>
           <a:xfrm>
-            <a:off x="1170432" y="2505456"/>
+            <a:off x="1170432" y="2301240"/>
             <a:ext cx="932688" cy="155448"/>
           </a:xfrm>
           <a:prstGeom prst="roundRect">
@@ -10053,7 +10053,7 @@
         </p:nvSpPr>
         <p:spPr>
           <a:xfrm>
-            <a:off x="1170432" y="2505456"/>
+            <a:off x="1170432" y="2301240"/>
             <a:ext cx="932688" cy="155448"/>
           </a:xfrm>
           <a:prstGeom prst="rect">
@@ -10089,7 +10089,7 @@
         </p:nvSpPr>
         <p:spPr>
           <a:xfrm>
-            <a:off x="2185416" y="2295144"/>
+            <a:off x="2185416" y="2090928"/>
             <a:ext cx="932688" cy="182880"/>
           </a:xfrm>
           <a:prstGeom prst="roundRect">
@@ -10116,7 +10116,7 @@
         </p:nvSpPr>
         <p:spPr>
           <a:xfrm>
-            <a:off x="2185416" y="2295144"/>
+            <a:off x="2185416" y="2090928"/>
             <a:ext cx="932688" cy="182880"/>
           </a:xfrm>
           <a:prstGeom prst="rect">
@@ -10152,7 +10152,7 @@
         </p:nvSpPr>
         <p:spPr>
           <a:xfrm>
-            <a:off x="2185416" y="2505456"/>
+            <a:off x="2185416" y="2301240"/>
             <a:ext cx="932688" cy="155448"/>
           </a:xfrm>
           <a:prstGeom prst="roundRect">
@@ -10179,7 +10179,7 @@
         </p:nvSpPr>
         <p:spPr>
           <a:xfrm>
-            <a:off x="2185416" y="2505456"/>
+            <a:off x="2185416" y="2301240"/>
             <a:ext cx="932688" cy="155448"/>
           </a:xfrm>
           <a:prstGeom prst="rect">
@@ -10215,7 +10215,7 @@
         </p:nvSpPr>
         <p:spPr>
           <a:xfrm>
-            <a:off x="3200400" y="2295144"/>
+            <a:off x="3200400" y="2090928"/>
             <a:ext cx="932688" cy="182880"/>
           </a:xfrm>
           <a:prstGeom prst="roundRect">
@@ -10242,7 +10242,7 @@
         </p:nvSpPr>
         <p:spPr>
           <a:xfrm>
-            <a:off x="3200400" y="2295144"/>
+            <a:off x="3200400" y="2090928"/>
             <a:ext cx="932688" cy="182880"/>
           </a:xfrm>
           <a:prstGeom prst="rect">
@@ -10278,7 +10278,7 @@
         </p:nvSpPr>
         <p:spPr>
           <a:xfrm>
-            <a:off x="3200400" y="2505456"/>
+            <a:off x="3200400" y="2301240"/>
             <a:ext cx="932688" cy="155448"/>
           </a:xfrm>
           <a:prstGeom prst="roundRect">
@@ -10305,7 +10305,7 @@
         </p:nvSpPr>
         <p:spPr>
           <a:xfrm>
-            <a:off x="3200400" y="2505456"/>
+            <a:off x="3200400" y="2301240"/>
             <a:ext cx="932688" cy="155448"/>
           </a:xfrm>
           <a:prstGeom prst="rect">
@@ -10341,7 +10341,7 @@
         </p:nvSpPr>
         <p:spPr>
           <a:xfrm>
-            <a:off x="4215384" y="2295144"/>
+            <a:off x="4215384" y="2090928"/>
             <a:ext cx="932688" cy="182880"/>
           </a:xfrm>
           <a:prstGeom prst="roundRect">
@@ -10368,7 +10368,7 @@
         </p:nvSpPr>
         <p:spPr>
           <a:xfrm>
-            <a:off x="4215384" y="2295144"/>
+            <a:off x="4215384" y="2090928"/>
             <a:ext cx="932688" cy="182880"/>
           </a:xfrm>
           <a:prstGeom prst="rect">
@@ -10404,7 +10404,7 @@
         </p:nvSpPr>
         <p:spPr>
           <a:xfrm>
-            <a:off x="4215384" y="2505456"/>
+            <a:off x="4215384" y="2301240"/>
             <a:ext cx="932688" cy="155448"/>
           </a:xfrm>
           <a:prstGeom prst="roundRect">
@@ -10431,7 +10431,7 @@
         </p:nvSpPr>
         <p:spPr>
           <a:xfrm>
-            <a:off x="4215384" y="2505456"/>
+            <a:off x="4215384" y="2301240"/>
             <a:ext cx="932688" cy="155448"/>
           </a:xfrm>
           <a:prstGeom prst="rect">
@@ -10467,7 +10467,7 @@
         </p:nvSpPr>
         <p:spPr>
           <a:xfrm>
-            <a:off x="5230368" y="2295144"/>
+            <a:off x="5230368" y="2090928"/>
             <a:ext cx="932688" cy="182880"/>
           </a:xfrm>
           <a:prstGeom prst="roundRect">
@@ -10494,7 +10494,7 @@
         </p:nvSpPr>
         <p:spPr>
           <a:xfrm>
-            <a:off x="5230368" y="2295144"/>
+            <a:off x="5230368" y="2090928"/>
             <a:ext cx="932688" cy="182880"/>
           </a:xfrm>
           <a:prstGeom prst="rect">
@@ -10530,7 +10530,7 @@
         </p:nvSpPr>
         <p:spPr>
           <a:xfrm>
-            <a:off x="5230368" y="2505456"/>
+            <a:off x="5230368" y="2301240"/>
             <a:ext cx="932688" cy="155448"/>
           </a:xfrm>
           <a:prstGeom prst="roundRect">
@@ -10557,7 +10557,7 @@
         </p:nvSpPr>
         <p:spPr>
           <a:xfrm>
-            <a:off x="5230368" y="2505456"/>
+            <a:off x="5230368" y="2301240"/>
             <a:ext cx="932688" cy="155448"/>
           </a:xfrm>
           <a:prstGeom prst="rect">
@@ -10593,7 +10593,7 @@
         </p:nvSpPr>
         <p:spPr>
           <a:xfrm>
-            <a:off x="6245352" y="2295144"/>
+            <a:off x="6245352" y="2090928"/>
             <a:ext cx="932688" cy="182880"/>
           </a:xfrm>
           <a:prstGeom prst="roundRect">
@@ -10620,7 +10620,7 @@
         </p:nvSpPr>
         <p:spPr>
           <a:xfrm>
-            <a:off x="6245352" y="2295144"/>
+            <a:off x="6245352" y="2090928"/>
             <a:ext cx="932688" cy="182880"/>
           </a:xfrm>
           <a:prstGeom prst="rect">
@@ -10656,7 +10656,7 @@
         </p:nvSpPr>
         <p:spPr>
           <a:xfrm>
-            <a:off x="6245352" y="2505456"/>
+            <a:off x="6245352" y="2301240"/>
             <a:ext cx="932688" cy="155448"/>
           </a:xfrm>
           <a:prstGeom prst="roundRect">
@@ -10683,7 +10683,7 @@
         </p:nvSpPr>
         <p:spPr>
           <a:xfrm>
-            <a:off x="6245352" y="2505456"/>
+            <a:off x="6245352" y="2301240"/>
             <a:ext cx="932688" cy="155448"/>
           </a:xfrm>
           <a:prstGeom prst="rect">
@@ -10719,8 +10719,8 @@
         </p:nvSpPr>
         <p:spPr>
           <a:xfrm>
-            <a:off x="164592" y="3255264"/>
-            <a:ext cx="9116568" cy="1170432"/>
+            <a:off x="164592" y="2846832"/>
+            <a:ext cx="9116568" cy="966216"/>
           </a:xfrm>
           <a:prstGeom prst="rect">
             <a:avLst/>
@@ -10744,12 +10744,12 @@
         </p:nvSpPr>
         <p:spPr>
           <a:xfrm>
-            <a:off x="182880" y="3328416"/>
-            <a:ext cx="859536" cy="1024128"/>
+            <a:off x="182880" y="2919984"/>
+            <a:ext cx="859536" cy="819912"/>
           </a:xfrm>
           <a:prstGeom prst="roundRect">
             <a:avLst>
-              <a:gd name="adj" fmla="val 5319"/>
+              <a:gd name="adj" fmla="val 5576"/>
             </a:avLst>
           </a:prstGeom>
           <a:solidFill>
@@ -10771,8 +10771,8 @@
         </p:nvSpPr>
         <p:spPr>
           <a:xfrm>
-            <a:off x="182880" y="3328416"/>
-            <a:ext cx="859536" cy="1024128"/>
+            <a:off x="182880" y="2919984"/>
+            <a:ext cx="859536" cy="819912"/>
           </a:xfrm>
           <a:prstGeom prst="rect">
             <a:avLst/>
@@ -10807,7 +10807,7 @@
         </p:nvSpPr>
         <p:spPr>
           <a:xfrm>
-            <a:off x="1170432" y="3300984"/>
+            <a:off x="1170432" y="2892552"/>
             <a:ext cx="8110728" cy="182880"/>
           </a:xfrm>
           <a:prstGeom prst="rect">
@@ -10843,7 +10843,7 @@
         </p:nvSpPr>
         <p:spPr>
           <a:xfrm>
-            <a:off x="1170432" y="3520440"/>
+            <a:off x="1170432" y="3112008"/>
             <a:ext cx="932688" cy="182880"/>
           </a:xfrm>
           <a:prstGeom prst="roundRect">
@@ -10870,7 +10870,7 @@
         </p:nvSpPr>
         <p:spPr>
           <a:xfrm>
-            <a:off x="1170432" y="3520440"/>
+            <a:off x="1170432" y="3112008"/>
             <a:ext cx="932688" cy="182880"/>
           </a:xfrm>
           <a:prstGeom prst="rect">
@@ -10906,7 +10906,7 @@
         </p:nvSpPr>
         <p:spPr>
           <a:xfrm>
-            <a:off x="1170432" y="3730752"/>
+            <a:off x="1170432" y="3322320"/>
             <a:ext cx="932688" cy="155448"/>
           </a:xfrm>
           <a:prstGeom prst="roundRect">
@@ -10933,7 +10933,7 @@
         </p:nvSpPr>
         <p:spPr>
           <a:xfrm>
-            <a:off x="1170432" y="3730752"/>
+            <a:off x="1170432" y="3322320"/>
             <a:ext cx="932688" cy="155448"/>
           </a:xfrm>
           <a:prstGeom prst="rect">
@@ -10969,7 +10969,7 @@
         </p:nvSpPr>
         <p:spPr>
           <a:xfrm>
-            <a:off x="2185416" y="3520440"/>
+            <a:off x="2185416" y="3112008"/>
             <a:ext cx="932688" cy="182880"/>
           </a:xfrm>
           <a:prstGeom prst="roundRect">
@@ -10996,7 +10996,7 @@
         </p:nvSpPr>
         <p:spPr>
           <a:xfrm>
-            <a:off x="2185416" y="3520440"/>
+            <a:off x="2185416" y="3112008"/>
             <a:ext cx="932688" cy="182880"/>
           </a:xfrm>
           <a:prstGeom prst="rect">
@@ -11032,7 +11032,7 @@
         </p:nvSpPr>
         <p:spPr>
           <a:xfrm>
-            <a:off x="2185416" y="3730752"/>
+            <a:off x="2185416" y="3322320"/>
             <a:ext cx="932688" cy="155448"/>
           </a:xfrm>
           <a:prstGeom prst="roundRect">
@@ -11059,7 +11059,7 @@
         </p:nvSpPr>
         <p:spPr>
           <a:xfrm>
-            <a:off x="2185416" y="3730752"/>
+            <a:off x="2185416" y="3322320"/>
             <a:ext cx="932688" cy="155448"/>
           </a:xfrm>
           <a:prstGeom prst="rect">
@@ -11095,7 +11095,7 @@
         </p:nvSpPr>
         <p:spPr>
           <a:xfrm>
-            <a:off x="3200400" y="3520440"/>
+            <a:off x="3200400" y="3112008"/>
             <a:ext cx="932688" cy="182880"/>
           </a:xfrm>
           <a:prstGeom prst="roundRect">
@@ -11122,7 +11122,7 @@
         </p:nvSpPr>
         <p:spPr>
           <a:xfrm>
-            <a:off x="3200400" y="3520440"/>
+            <a:off x="3200400" y="3112008"/>
             <a:ext cx="932688" cy="182880"/>
           </a:xfrm>
           <a:prstGeom prst="rect">
@@ -11158,7 +11158,7 @@
         </p:nvSpPr>
         <p:spPr>
           <a:xfrm>
-            <a:off x="3200400" y="3730752"/>
+            <a:off x="3200400" y="3322320"/>
             <a:ext cx="932688" cy="155448"/>
           </a:xfrm>
           <a:prstGeom prst="roundRect">
@@ -11185,7 +11185,7 @@
         </p:nvSpPr>
         <p:spPr>
           <a:xfrm>
-            <a:off x="3200400" y="3730752"/>
+            <a:off x="3200400" y="3322320"/>
             <a:ext cx="932688" cy="155448"/>
           </a:xfrm>
           <a:prstGeom prst="rect">
@@ -11221,7 +11221,7 @@
         </p:nvSpPr>
         <p:spPr>
           <a:xfrm>
-            <a:off x="4215384" y="3520440"/>
+            <a:off x="4215384" y="3112008"/>
             <a:ext cx="932688" cy="182880"/>
           </a:xfrm>
           <a:prstGeom prst="roundRect">
@@ -11248,7 +11248,7 @@
         </p:nvSpPr>
         <p:spPr>
           <a:xfrm>
-            <a:off x="4215384" y="3520440"/>
+            <a:off x="4215384" y="3112008"/>
             <a:ext cx="932688" cy="182880"/>
           </a:xfrm>
           <a:prstGeom prst="rect">
@@ -11284,7 +11284,7 @@
         </p:nvSpPr>
         <p:spPr>
           <a:xfrm>
-            <a:off x="4215384" y="3730752"/>
+            <a:off x="4215384" y="3322320"/>
             <a:ext cx="932688" cy="155448"/>
           </a:xfrm>
           <a:prstGeom prst="roundRect">
@@ -11311,7 +11311,7 @@
         </p:nvSpPr>
         <p:spPr>
           <a:xfrm>
-            <a:off x="4215384" y="3730752"/>
+            <a:off x="4215384" y="3322320"/>
             <a:ext cx="932688" cy="155448"/>
           </a:xfrm>
           <a:prstGeom prst="rect">
@@ -11347,7 +11347,7 @@
         </p:nvSpPr>
         <p:spPr>
           <a:xfrm>
-            <a:off x="5230368" y="3520440"/>
+            <a:off x="5230368" y="3112008"/>
             <a:ext cx="932688" cy="182880"/>
           </a:xfrm>
           <a:prstGeom prst="roundRect">
@@ -11374,7 +11374,7 @@
         </p:nvSpPr>
         <p:spPr>
           <a:xfrm>
-            <a:off x="5230368" y="3520440"/>
+            <a:off x="5230368" y="3112008"/>
             <a:ext cx="932688" cy="182880"/>
           </a:xfrm>
           <a:prstGeom prst="rect">
@@ -11410,7 +11410,7 @@
         </p:nvSpPr>
         <p:spPr>
           <a:xfrm>
-            <a:off x="5230368" y="3730752"/>
+            <a:off x="5230368" y="3322320"/>
             <a:ext cx="932688" cy="155448"/>
           </a:xfrm>
           <a:prstGeom prst="roundRect">
@@ -11437,7 +11437,7 @@
         </p:nvSpPr>
         <p:spPr>
           <a:xfrm>
-            <a:off x="5230368" y="3730752"/>
+            <a:off x="5230368" y="3322320"/>
             <a:ext cx="932688" cy="155448"/>
           </a:xfrm>
           <a:prstGeom prst="rect">
@@ -11473,8 +11473,8 @@
         </p:nvSpPr>
         <p:spPr>
           <a:xfrm>
-            <a:off x="164592" y="4480560"/>
-            <a:ext cx="9116568" cy="1170432"/>
+            <a:off x="164592" y="3867912"/>
+            <a:ext cx="9116568" cy="966216"/>
           </a:xfrm>
           <a:prstGeom prst="rect">
             <a:avLst/>
@@ -11498,12 +11498,12 @@
         </p:nvSpPr>
         <p:spPr>
           <a:xfrm>
-            <a:off x="182880" y="4553712"/>
-            <a:ext cx="859536" cy="1024128"/>
+            <a:off x="182880" y="3941064"/>
+            <a:ext cx="859536" cy="819912"/>
           </a:xfrm>
           <a:prstGeom prst="roundRect">
             <a:avLst>
-              <a:gd name="adj" fmla="val 5319"/>
+              <a:gd name="adj" fmla="val 5576"/>
             </a:avLst>
           </a:prstGeom>
           <a:solidFill>
@@ -11525,8 +11525,8 @@
         </p:nvSpPr>
         <p:spPr>
           <a:xfrm>
-            <a:off x="182880" y="4553712"/>
-            <a:ext cx="859536" cy="1024128"/>
+            <a:off x="182880" y="3941064"/>
+            <a:ext cx="859536" cy="819912"/>
           </a:xfrm>
           <a:prstGeom prst="rect">
             <a:avLst/>
@@ -11561,7 +11561,7 @@
         </p:nvSpPr>
         <p:spPr>
           <a:xfrm>
-            <a:off x="1170432" y="4526280"/>
+            <a:off x="1170432" y="3913632"/>
             <a:ext cx="8110728" cy="182880"/>
           </a:xfrm>
           <a:prstGeom prst="rect">
@@ -11597,7 +11597,7 @@
         </p:nvSpPr>
         <p:spPr>
           <a:xfrm>
-            <a:off x="1170432" y="4745736"/>
+            <a:off x="1170432" y="4133088"/>
             <a:ext cx="932688" cy="182880"/>
           </a:xfrm>
           <a:prstGeom prst="roundRect">
@@ -11624,7 +11624,7 @@
         </p:nvSpPr>
         <p:spPr>
           <a:xfrm>
-            <a:off x="1170432" y="4745736"/>
+            <a:off x="1170432" y="4133088"/>
             <a:ext cx="932688" cy="182880"/>
           </a:xfrm>
           <a:prstGeom prst="rect">
@@ -11660,7 +11660,7 @@
         </p:nvSpPr>
         <p:spPr>
           <a:xfrm>
-            <a:off x="1170432" y="4956048"/>
+            <a:off x="1170432" y="4343400"/>
             <a:ext cx="932688" cy="155448"/>
           </a:xfrm>
           <a:prstGeom prst="roundRect">
@@ -11687,7 +11687,7 @@
         </p:nvSpPr>
         <p:spPr>
           <a:xfrm>
-            <a:off x="1170432" y="4956048"/>
+            <a:off x="1170432" y="4343400"/>
             <a:ext cx="932688" cy="155448"/>
           </a:xfrm>
           <a:prstGeom prst="rect">
@@ -11723,7 +11723,7 @@
         </p:nvSpPr>
         <p:spPr>
           <a:xfrm>
-            <a:off x="2185416" y="4745736"/>
+            <a:off x="2185416" y="4133088"/>
             <a:ext cx="932688" cy="182880"/>
           </a:xfrm>
           <a:prstGeom prst="roundRect">
@@ -11750,7 +11750,7 @@
         </p:nvSpPr>
         <p:spPr>
           <a:xfrm>
-            <a:off x="2185416" y="4745736"/>
+            <a:off x="2185416" y="4133088"/>
             <a:ext cx="932688" cy="182880"/>
           </a:xfrm>
           <a:prstGeom prst="rect">
@@ -11786,7 +11786,7 @@
         </p:nvSpPr>
         <p:spPr>
           <a:xfrm>
-            <a:off x="2185416" y="4956048"/>
+            <a:off x="2185416" y="4343400"/>
             <a:ext cx="932688" cy="155448"/>
           </a:xfrm>
           <a:prstGeom prst="roundRect">
@@ -11813,7 +11813,7 @@
         </p:nvSpPr>
         <p:spPr>
           <a:xfrm>
-            <a:off x="2185416" y="4956048"/>
+            <a:off x="2185416" y="4343400"/>
             <a:ext cx="932688" cy="155448"/>
           </a:xfrm>
           <a:prstGeom prst="rect">
@@ -11849,7 +11849,7 @@
         </p:nvSpPr>
         <p:spPr>
           <a:xfrm>
-            <a:off x="3200400" y="4745736"/>
+            <a:off x="3200400" y="4133088"/>
             <a:ext cx="932688" cy="182880"/>
           </a:xfrm>
           <a:prstGeom prst="roundRect">
@@ -11876,7 +11876,7 @@
         </p:nvSpPr>
         <p:spPr>
           <a:xfrm>
-            <a:off x="3200400" y="4745736"/>
+            <a:off x="3200400" y="4133088"/>
             <a:ext cx="932688" cy="182880"/>
           </a:xfrm>
           <a:prstGeom prst="rect">
@@ -11912,7 +11912,7 @@
         </p:nvSpPr>
         <p:spPr>
           <a:xfrm>
-            <a:off x="3200400" y="4956048"/>
+            <a:off x="3200400" y="4343400"/>
             <a:ext cx="932688" cy="155448"/>
           </a:xfrm>
           <a:prstGeom prst="roundRect">
@@ -11939,7 +11939,7 @@
         </p:nvSpPr>
         <p:spPr>
           <a:xfrm>
-            <a:off x="3200400" y="4956048"/>
+            <a:off x="3200400" y="4343400"/>
             <a:ext cx="932688" cy="155448"/>
           </a:xfrm>
           <a:prstGeom prst="rect">
@@ -11975,7 +11975,7 @@
         </p:nvSpPr>
         <p:spPr>
           <a:xfrm>
-            <a:off x="4215384" y="4745736"/>
+            <a:off x="4215384" y="4133088"/>
             <a:ext cx="932688" cy="182880"/>
           </a:xfrm>
           <a:prstGeom prst="roundRect">
@@ -12002,7 +12002,7 @@
         </p:nvSpPr>
         <p:spPr>
           <a:xfrm>
-            <a:off x="4215384" y="4745736"/>
+            <a:off x="4215384" y="4133088"/>
             <a:ext cx="932688" cy="182880"/>
           </a:xfrm>
           <a:prstGeom prst="rect">
@@ -12038,7 +12038,7 @@
         </p:nvSpPr>
         <p:spPr>
           <a:xfrm>
-            <a:off x="4215384" y="4956048"/>
+            <a:off x="4215384" y="4343400"/>
             <a:ext cx="932688" cy="155448"/>
           </a:xfrm>
           <a:prstGeom prst="roundRect">
@@ -12065,7 +12065,7 @@
         </p:nvSpPr>
         <p:spPr>
           <a:xfrm>
-            <a:off x="4215384" y="4956048"/>
+            <a:off x="4215384" y="4343400"/>
             <a:ext cx="932688" cy="155448"/>
           </a:xfrm>
           <a:prstGeom prst="rect">
@@ -12101,7 +12101,7 @@
         </p:nvSpPr>
         <p:spPr>
           <a:xfrm>
-            <a:off x="5230368" y="4745736"/>
+            <a:off x="5230368" y="4133088"/>
             <a:ext cx="932688" cy="182880"/>
           </a:xfrm>
           <a:prstGeom prst="roundRect">
@@ -12128,7 +12128,7 @@
         </p:nvSpPr>
         <p:spPr>
           <a:xfrm>
-            <a:off x="5230368" y="4745736"/>
+            <a:off x="5230368" y="4133088"/>
             <a:ext cx="932688" cy="182880"/>
           </a:xfrm>
           <a:prstGeom prst="rect">
@@ -12164,7 +12164,7 @@
         </p:nvSpPr>
         <p:spPr>
           <a:xfrm>
-            <a:off x="5230368" y="4956048"/>
+            <a:off x="5230368" y="4343400"/>
             <a:ext cx="932688" cy="155448"/>
           </a:xfrm>
           <a:prstGeom prst="roundRect">
@@ -12191,7 +12191,7 @@
         </p:nvSpPr>
         <p:spPr>
           <a:xfrm>
-            <a:off x="5230368" y="4956048"/>
+            <a:off x="5230368" y="4343400"/>
             <a:ext cx="932688" cy="155448"/>
           </a:xfrm>
           <a:prstGeom prst="rect">
@@ -12227,7 +12227,7 @@
         </p:nvSpPr>
         <p:spPr>
           <a:xfrm>
-            <a:off x="6245352" y="4745736"/>
+            <a:off x="6245352" y="4133088"/>
             <a:ext cx="932688" cy="182880"/>
           </a:xfrm>
           <a:prstGeom prst="roundRect">
@@ -12254,7 +12254,7 @@
         </p:nvSpPr>
         <p:spPr>
           <a:xfrm>
-            <a:off x="6245352" y="4745736"/>
+            <a:off x="6245352" y="4133088"/>
             <a:ext cx="932688" cy="182880"/>
           </a:xfrm>
           <a:prstGeom prst="rect">
@@ -12290,7 +12290,7 @@
         </p:nvSpPr>
         <p:spPr>
           <a:xfrm>
-            <a:off x="6245352" y="4956048"/>
+            <a:off x="6245352" y="4343400"/>
             <a:ext cx="932688" cy="155448"/>
           </a:xfrm>
           <a:prstGeom prst="roundRect">
@@ -12317,7 +12317,7 @@
         </p:nvSpPr>
         <p:spPr>
           <a:xfrm>
-            <a:off x="6245352" y="4956048"/>
+            <a:off x="6245352" y="4343400"/>
             <a:ext cx="932688" cy="155448"/>
           </a:xfrm>
           <a:prstGeom prst="rect">
@@ -12353,7 +12353,7 @@
         </p:nvSpPr>
         <p:spPr>
           <a:xfrm>
-            <a:off x="7260336" y="4745736"/>
+            <a:off x="7260336" y="4133088"/>
             <a:ext cx="932688" cy="182880"/>
           </a:xfrm>
           <a:prstGeom prst="roundRect">
@@ -12380,7 +12380,7 @@
         </p:nvSpPr>
         <p:spPr>
           <a:xfrm>
-            <a:off x="7260336" y="4745736"/>
+            <a:off x="7260336" y="4133088"/>
             <a:ext cx="932688" cy="182880"/>
           </a:xfrm>
           <a:prstGeom prst="rect">
@@ -12416,7 +12416,7 @@
         </p:nvSpPr>
         <p:spPr>
           <a:xfrm>
-            <a:off x="7260336" y="4956048"/>
+            <a:off x="7260336" y="4343400"/>
             <a:ext cx="932688" cy="155448"/>
           </a:xfrm>
           <a:prstGeom prst="roundRect">
@@ -12443,7 +12443,7 @@
         </p:nvSpPr>
         <p:spPr>
           <a:xfrm>
-            <a:off x="7260336" y="4956048"/>
+            <a:off x="7260336" y="4343400"/>
             <a:ext cx="932688" cy="155448"/>
           </a:xfrm>
           <a:prstGeom prst="rect">
@@ -12479,7 +12479,7 @@
         </p:nvSpPr>
         <p:spPr>
           <a:xfrm>
-            <a:off x="8275320" y="4745736"/>
+            <a:off x="8275320" y="4133088"/>
             <a:ext cx="932688" cy="182880"/>
           </a:xfrm>
           <a:prstGeom prst="roundRect">
@@ -12506,7 +12506,7 @@
         </p:nvSpPr>
         <p:spPr>
           <a:xfrm>
-            <a:off x="8275320" y="4745736"/>
+            <a:off x="8275320" y="4133088"/>
             <a:ext cx="932688" cy="182880"/>
           </a:xfrm>
           <a:prstGeom prst="rect">
@@ -12542,7 +12542,7 @@
         </p:nvSpPr>
         <p:spPr>
           <a:xfrm>
-            <a:off x="8275320" y="4956048"/>
+            <a:off x="8275320" y="4343400"/>
             <a:ext cx="932688" cy="155448"/>
           </a:xfrm>
           <a:prstGeom prst="roundRect">
@@ -12569,7 +12569,7 @@
         </p:nvSpPr>
         <p:spPr>
           <a:xfrm>
-            <a:off x="8275320" y="4956048"/>
+            <a:off x="8275320" y="4343400"/>
             <a:ext cx="932688" cy="155448"/>
           </a:xfrm>
           <a:prstGeom prst="rect">
@@ -12605,7 +12605,7 @@
         </p:nvSpPr>
         <p:spPr>
           <a:xfrm>
-            <a:off x="1170432" y="5202936"/>
+            <a:off x="1170432" y="4590288"/>
             <a:ext cx="932688" cy="182880"/>
           </a:xfrm>
           <a:prstGeom prst="roundRect">
@@ -12632,7 +12632,7 @@
         </p:nvSpPr>
         <p:spPr>
           <a:xfrm>
-            <a:off x="1170432" y="5202936"/>
+            <a:off x="1170432" y="4590288"/>
             <a:ext cx="932688" cy="182880"/>
           </a:xfrm>
           <a:prstGeom prst="rect">
@@ -12668,7 +12668,7 @@
         </p:nvSpPr>
         <p:spPr>
           <a:xfrm>
-            <a:off x="1170432" y="5413248"/>
+            <a:off x="1170432" y="4800600"/>
             <a:ext cx="932688" cy="155448"/>
           </a:xfrm>
           <a:prstGeom prst="roundRect">
@@ -12695,7 +12695,7 @@
         </p:nvSpPr>
         <p:spPr>
           <a:xfrm>
-            <a:off x="1170432" y="5413248"/>
+            <a:off x="1170432" y="4800600"/>
             <a:ext cx="932688" cy="155448"/>
           </a:xfrm>
           <a:prstGeom prst="rect">
@@ -12731,8 +12731,8 @@
         </p:nvSpPr>
         <p:spPr>
           <a:xfrm>
-            <a:off x="164592" y="5705856"/>
-            <a:ext cx="9116568" cy="1170432"/>
+            <a:off x="164592" y="4888992"/>
+            <a:ext cx="9116568" cy="966216"/>
           </a:xfrm>
           <a:prstGeom prst="rect">
             <a:avLst/>
@@ -12756,12 +12756,12 @@
         </p:nvSpPr>
         <p:spPr>
           <a:xfrm>
-            <a:off x="182880" y="5779008"/>
-            <a:ext cx="859536" cy="1024128"/>
+            <a:off x="182880" y="4962144"/>
+            <a:ext cx="859536" cy="819912"/>
           </a:xfrm>
           <a:prstGeom prst="roundRect">
             <a:avLst>
-              <a:gd name="adj" fmla="val 5319"/>
+              <a:gd name="adj" fmla="val 5576"/>
             </a:avLst>
           </a:prstGeom>
           <a:solidFill>
@@ -12783,8 +12783,8 @@
         </p:nvSpPr>
         <p:spPr>
           <a:xfrm>
-            <a:off x="182880" y="5779008"/>
-            <a:ext cx="859536" cy="1024128"/>
+            <a:off x="182880" y="4962144"/>
+            <a:ext cx="859536" cy="819912"/>
           </a:xfrm>
           <a:prstGeom prst="rect">
             <a:avLst/>
@@ -12819,7 +12819,7 @@
         </p:nvSpPr>
         <p:spPr>
           <a:xfrm>
-            <a:off x="1170432" y="5751576"/>
+            <a:off x="1170432" y="4934712"/>
             <a:ext cx="8110728" cy="182880"/>
           </a:xfrm>
           <a:prstGeom prst="rect">
@@ -12855,7 +12855,7 @@
         </p:nvSpPr>
         <p:spPr>
           <a:xfrm>
-            <a:off x="1170432" y="5971032"/>
+            <a:off x="1170432" y="5154168"/>
             <a:ext cx="932688" cy="182880"/>
           </a:xfrm>
           <a:prstGeom prst="roundRect">
@@ -12882,7 +12882,7 @@
         </p:nvSpPr>
         <p:spPr>
           <a:xfrm>
-            <a:off x="1170432" y="5971032"/>
+            <a:off x="1170432" y="5154168"/>
             <a:ext cx="932688" cy="182880"/>
           </a:xfrm>
           <a:prstGeom prst="rect">
@@ -12918,7 +12918,7 @@
         </p:nvSpPr>
         <p:spPr>
           <a:xfrm>
-            <a:off x="1170432" y="6181344"/>
+            <a:off x="1170432" y="5364480"/>
             <a:ext cx="932688" cy="155448"/>
           </a:xfrm>
           <a:prstGeom prst="roundRect">
@@ -12945,7 +12945,7 @@
         </p:nvSpPr>
         <p:spPr>
           <a:xfrm>
-            <a:off x="1170432" y="6181344"/>
+            <a:off x="1170432" y="5364480"/>
             <a:ext cx="932688" cy="155448"/>
           </a:xfrm>
           <a:prstGeom prst="rect">
@@ -12981,7 +12981,7 @@
         </p:nvSpPr>
         <p:spPr>
           <a:xfrm>
-            <a:off x="2185416" y="5971032"/>
+            <a:off x="2185416" y="5154168"/>
             <a:ext cx="932688" cy="182880"/>
           </a:xfrm>
           <a:prstGeom prst="roundRect">
@@ -13008,7 +13008,7 @@
         </p:nvSpPr>
         <p:spPr>
           <a:xfrm>
-            <a:off x="2185416" y="5971032"/>
+            <a:off x="2185416" y="5154168"/>
             <a:ext cx="932688" cy="182880"/>
           </a:xfrm>
           <a:prstGeom prst="rect">
@@ -13044,7 +13044,7 @@
         </p:nvSpPr>
         <p:spPr>
           <a:xfrm>
-            <a:off x="2185416" y="6181344"/>
+            <a:off x="2185416" y="5364480"/>
             <a:ext cx="932688" cy="155448"/>
           </a:xfrm>
           <a:prstGeom prst="roundRect">
@@ -13071,7 +13071,7 @@
         </p:nvSpPr>
         <p:spPr>
           <a:xfrm>
-            <a:off x="2185416" y="6181344"/>
+            <a:off x="2185416" y="5364480"/>
             <a:ext cx="932688" cy="155448"/>
           </a:xfrm>
           <a:prstGeom prst="rect">
@@ -13107,7 +13107,7 @@
         </p:nvSpPr>
         <p:spPr>
           <a:xfrm>
-            <a:off x="3200400" y="5971032"/>
+            <a:off x="3200400" y="5154168"/>
             <a:ext cx="932688" cy="182880"/>
           </a:xfrm>
           <a:prstGeom prst="roundRect">
@@ -13134,7 +13134,7 @@
         </p:nvSpPr>
         <p:spPr>
           <a:xfrm>
-            <a:off x="3200400" y="5971032"/>
+            <a:off x="3200400" y="5154168"/>
             <a:ext cx="932688" cy="182880"/>
           </a:xfrm>
           <a:prstGeom prst="rect">
@@ -13170,7 +13170,7 @@
         </p:nvSpPr>
         <p:spPr>
           <a:xfrm>
-            <a:off x="3200400" y="6181344"/>
+            <a:off x="3200400" y="5364480"/>
             <a:ext cx="932688" cy="155448"/>
           </a:xfrm>
           <a:prstGeom prst="roundRect">
@@ -13197,7 +13197,7 @@
         </p:nvSpPr>
         <p:spPr>
           <a:xfrm>
-            <a:off x="3200400" y="6181344"/>
+            <a:off x="3200400" y="5364480"/>
             <a:ext cx="932688" cy="155448"/>
           </a:xfrm>
           <a:prstGeom prst="rect">
@@ -13233,7 +13233,7 @@
         </p:nvSpPr>
         <p:spPr>
           <a:xfrm>
-            <a:off x="4215384" y="5971032"/>
+            <a:off x="4215384" y="5154168"/>
             <a:ext cx="932688" cy="182880"/>
           </a:xfrm>
           <a:prstGeom prst="roundRect">
@@ -13260,7 +13260,7 @@
         </p:nvSpPr>
         <p:spPr>
           <a:xfrm>
-            <a:off x="4215384" y="5971032"/>
+            <a:off x="4215384" y="5154168"/>
             <a:ext cx="932688" cy="182880"/>
           </a:xfrm>
           <a:prstGeom prst="rect">
@@ -13296,7 +13296,7 @@
         </p:nvSpPr>
         <p:spPr>
           <a:xfrm>
-            <a:off x="4215384" y="6181344"/>
+            <a:off x="4215384" y="5364480"/>
             <a:ext cx="932688" cy="155448"/>
           </a:xfrm>
           <a:prstGeom prst="roundRect">
@@ -13323,7 +13323,7 @@
         </p:nvSpPr>
         <p:spPr>
           <a:xfrm>
-            <a:off x="4215384" y="6181344"/>
+            <a:off x="4215384" y="5364480"/>
             <a:ext cx="932688" cy="155448"/>
           </a:xfrm>
           <a:prstGeom prst="rect">
@@ -13359,7 +13359,7 @@
         </p:nvSpPr>
         <p:spPr>
           <a:xfrm>
-            <a:off x="5230368" y="5971032"/>
+            <a:off x="5230368" y="5154168"/>
             <a:ext cx="932688" cy="182880"/>
           </a:xfrm>
           <a:prstGeom prst="roundRect">
@@ -13386,7 +13386,7 @@
         </p:nvSpPr>
         <p:spPr>
           <a:xfrm>
-            <a:off x="5230368" y="5971032"/>
+            <a:off x="5230368" y="5154168"/>
             <a:ext cx="932688" cy="182880"/>
           </a:xfrm>
           <a:prstGeom prst="rect">
@@ -13422,7 +13422,7 @@
         </p:nvSpPr>
         <p:spPr>
           <a:xfrm>
-            <a:off x="5230368" y="6181344"/>
+            <a:off x="5230368" y="5364480"/>
             <a:ext cx="932688" cy="155448"/>
           </a:xfrm>
           <a:prstGeom prst="roundRect">
@@ -13449,7 +13449,7 @@
         </p:nvSpPr>
         <p:spPr>
           <a:xfrm>
-            <a:off x="5230368" y="6181344"/>
+            <a:off x="5230368" y="5364480"/>
             <a:ext cx="932688" cy="155448"/>
           </a:xfrm>
           <a:prstGeom prst="rect">
@@ -13485,7 +13485,7 @@
         </p:nvSpPr>
         <p:spPr>
           <a:xfrm>
-            <a:off x="6245352" y="5971032"/>
+            <a:off x="6245352" y="5154168"/>
             <a:ext cx="932688" cy="182880"/>
           </a:xfrm>
           <a:prstGeom prst="roundRect">
@@ -13512,7 +13512,7 @@
         </p:nvSpPr>
         <p:spPr>
           <a:xfrm>
-            <a:off x="6245352" y="5971032"/>
+            <a:off x="6245352" y="5154168"/>
             <a:ext cx="932688" cy="182880"/>
           </a:xfrm>
           <a:prstGeom prst="rect">
@@ -13548,7 +13548,7 @@
         </p:nvSpPr>
         <p:spPr>
           <a:xfrm>
-            <a:off x="6245352" y="6181344"/>
+            <a:off x="6245352" y="5364480"/>
             <a:ext cx="932688" cy="155448"/>
           </a:xfrm>
           <a:prstGeom prst="roundRect">
@@ -13575,7 +13575,7 @@
         </p:nvSpPr>
         <p:spPr>
           <a:xfrm>
-            <a:off x="6245352" y="6181344"/>
+            <a:off x="6245352" y="5364480"/>
             <a:ext cx="932688" cy="155448"/>
           </a:xfrm>
           <a:prstGeom prst="rect">
@@ -13606,6 +13606,522 @@
       <p:sp>
         <p:nvSpPr>
           <p:cNvPr id="172" name="Shape 170"/>
+          <p:cNvSpPr/>
+          <p:nvPr/>
+        </p:nvSpPr>
+        <p:spPr>
+          <a:xfrm>
+            <a:off x="164592" y="5910072"/>
+            <a:ext cx="9116568" cy="966216"/>
+          </a:xfrm>
+          <a:prstGeom prst="rect">
+            <a:avLst/>
+          </a:prstGeom>
+          <a:solidFill>
+            <a:srgbClr val="FFFFFF"/>
+          </a:solidFill>
+          <a:ln w="6350">
+            <a:solidFill>
+              <a:srgbClr val="E5E7EB"/>
+            </a:solidFill>
+            <a:prstDash val="solid"/>
+          </a:ln>
+        </p:spPr>
+      </p:sp>
+      <p:sp>
+        <p:nvSpPr>
+          <p:cNvPr id="173" name="Shape 171"/>
+          <p:cNvSpPr/>
+          <p:nvPr/>
+        </p:nvSpPr>
+        <p:spPr>
+          <a:xfrm>
+            <a:off x="182880" y="5983224"/>
+            <a:ext cx="859536" cy="819912"/>
+          </a:xfrm>
+          <a:prstGeom prst="roundRect">
+            <a:avLst>
+              <a:gd name="adj" fmla="val 5576"/>
+            </a:avLst>
+          </a:prstGeom>
+          <a:solidFill>
+            <a:srgbClr val="64748B"/>
+          </a:solidFill>
+          <a:ln w="12700">
+            <a:solidFill>
+              <a:srgbClr val="64748B"/>
+            </a:solidFill>
+            <a:prstDash val="solid"/>
+          </a:ln>
+        </p:spPr>
+      </p:sp>
+      <p:sp>
+        <p:nvSpPr>
+          <p:cNvPr id="174" name="Text 172"/>
+          <p:cNvSpPr/>
+          <p:nvPr/>
+        </p:nvSpPr>
+        <p:spPr>
+          <a:xfrm>
+            <a:off x="182880" y="5983224"/>
+            <a:ext cx="859536" cy="819912"/>
+          </a:xfrm>
+          <a:prstGeom prst="rect">
+            <a:avLst/>
+          </a:prstGeom>
+          <a:noFill/>
+          <a:ln/>
+        </p:spPr>
+        <p:txBody>
+          <a:bodyPr wrap="square" lIns="0" tIns="0" rIns="0" bIns="0" rtlCol="0" anchor="ctr"/>
+          <a:lstStyle/>
+          <a:p>
+            <a:pPr algn="ctr" indent="0" marL="0">
+              <a:buNone/>
+            </a:pPr>
+            <a:r>
+              <a:rPr lang="en-US" sz="800" b="1" dirty="0">
+                <a:solidFill>
+                  <a:srgbClr val="FFFFFF"/>
+                </a:solidFill>
+              </a:rPr>
+              <a:t>Data</a:t>
+            </a:r>
+            <a:endParaRPr lang="en-US" sz="800" dirty="0"/>
+          </a:p>
+          <a:p>
+            <a:pPr algn="ctr" indent="0" marL="0">
+              <a:buNone/>
+            </a:pPr>
+            <a:r>
+              <a:rPr lang="en-US" sz="800" b="1" dirty="0">
+                <a:solidFill>
+                  <a:srgbClr val="FFFFFF"/>
+                </a:solidFill>
+              </a:rPr>
+              <a:t>&amp; Analytics</a:t>
+            </a:r>
+            <a:endParaRPr lang="en-US" sz="800" dirty="0"/>
+          </a:p>
+        </p:txBody>
+      </p:sp>
+      <p:sp>
+        <p:nvSpPr>
+          <p:cNvPr id="175" name="Text 173"/>
+          <p:cNvSpPr/>
+          <p:nvPr/>
+        </p:nvSpPr>
+        <p:spPr>
+          <a:xfrm>
+            <a:off x="1170432" y="5955792"/>
+            <a:ext cx="8110728" cy="182880"/>
+          </a:xfrm>
+          <a:prstGeom prst="rect">
+            <a:avLst/>
+          </a:prstGeom>
+          <a:noFill/>
+          <a:ln/>
+        </p:spPr>
+        <p:txBody>
+          <a:bodyPr wrap="square" lIns="0" tIns="0" rIns="0" bIns="0" rtlCol="0" anchor="ctr"/>
+          <a:lstStyle/>
+          <a:p>
+            <a:pPr algn="l" indent="0" marL="0">
+              <a:buNone/>
+            </a:pPr>
+            <a:r>
+              <a:rPr lang="en-US" sz="750" dirty="0">
+                <a:solidFill>
+                  <a:srgbClr val="9CA3AF"/>
+                </a:solidFill>
+              </a:rPr>
+              <a:t>1 / 3 In Progress · 1 Done</a:t>
+            </a:r>
+            <a:endParaRPr lang="en-US" sz="750" dirty="0"/>
+          </a:p>
+        </p:txBody>
+      </p:sp>
+      <p:sp>
+        <p:nvSpPr>
+          <p:cNvPr id="176" name="Shape 174"/>
+          <p:cNvSpPr/>
+          <p:nvPr/>
+        </p:nvSpPr>
+        <p:spPr>
+          <a:xfrm>
+            <a:off x="1170432" y="6175248"/>
+            <a:ext cx="932688" cy="182880"/>
+          </a:xfrm>
+          <a:prstGeom prst="roundRect">
+            <a:avLst>
+              <a:gd name="adj" fmla="val 15000"/>
+            </a:avLst>
+          </a:prstGeom>
+          <a:solidFill>
+            <a:srgbClr val="FFFFFF"/>
+          </a:solidFill>
+          <a:ln w="9525">
+            <a:solidFill>
+              <a:srgbClr val="CBD5E1"/>
+            </a:solidFill>
+            <a:prstDash val="solid"/>
+          </a:ln>
+        </p:spPr>
+      </p:sp>
+      <p:sp>
+        <p:nvSpPr>
+          <p:cNvPr id="177" name="Text 175"/>
+          <p:cNvSpPr/>
+          <p:nvPr/>
+        </p:nvSpPr>
+        <p:spPr>
+          <a:xfrm>
+            <a:off x="1170432" y="6175248"/>
+            <a:ext cx="932688" cy="182880"/>
+          </a:xfrm>
+          <a:prstGeom prst="rect">
+            <a:avLst/>
+          </a:prstGeom>
+          <a:noFill/>
+          <a:ln/>
+        </p:spPr>
+        <p:txBody>
+          <a:bodyPr wrap="square" lIns="0" tIns="0" rIns="0" bIns="0" rtlCol="0" anchor="ctr"/>
+          <a:lstStyle/>
+          <a:p>
+            <a:pPr algn="ctr" indent="0" marL="0">
+              <a:buNone/>
+            </a:pPr>
+            <a:r>
+              <a:rPr lang="en-US" sz="750" b="1" dirty="0">
+                <a:solidFill>
+                  <a:srgbClr val="1E293B"/>
+                </a:solidFill>
+              </a:rPr>
+              <a:t>Metadata</a:t>
+            </a:r>
+            <a:endParaRPr lang="en-US" sz="750" dirty="0"/>
+          </a:p>
+        </p:txBody>
+      </p:sp>
+      <p:sp>
+        <p:nvSpPr>
+          <p:cNvPr id="178" name="Shape 176"/>
+          <p:cNvSpPr/>
+          <p:nvPr/>
+        </p:nvSpPr>
+        <p:spPr>
+          <a:xfrm>
+            <a:off x="1170432" y="6385560"/>
+            <a:ext cx="932688" cy="155448"/>
+          </a:xfrm>
+          <a:prstGeom prst="roundRect">
+            <a:avLst>
+              <a:gd name="adj" fmla="val 17647"/>
+            </a:avLst>
+          </a:prstGeom>
+          <a:solidFill>
+            <a:srgbClr val="F3F4F6"/>
+          </a:solidFill>
+          <a:ln w="9525">
+            <a:solidFill>
+              <a:srgbClr val="D1D5DB"/>
+            </a:solidFill>
+            <a:prstDash val="solid"/>
+          </a:ln>
+        </p:spPr>
+      </p:sp>
+      <p:sp>
+        <p:nvSpPr>
+          <p:cNvPr id="179" name="Text 177"/>
+          <p:cNvSpPr/>
+          <p:nvPr/>
+        </p:nvSpPr>
+        <p:spPr>
+          <a:xfrm>
+            <a:off x="1170432" y="6385560"/>
+            <a:ext cx="932688" cy="155448"/>
+          </a:xfrm>
+          <a:prstGeom prst="rect">
+            <a:avLst/>
+          </a:prstGeom>
+          <a:noFill/>
+          <a:ln/>
+        </p:spPr>
+        <p:txBody>
+          <a:bodyPr wrap="square" lIns="0" tIns="0" rIns="0" bIns="0" rtlCol="0" anchor="ctr"/>
+          <a:lstStyle/>
+          <a:p>
+            <a:pPr algn="ctr" indent="0" marL="0">
+              <a:buNone/>
+            </a:pPr>
+            <a:r>
+              <a:rPr lang="en-US" sz="700" dirty="0">
+                <a:solidFill>
+                  <a:srgbClr val="374151"/>
+                </a:solidFill>
+              </a:rPr>
+              <a:t>Not Started</a:t>
+            </a:r>
+            <a:endParaRPr lang="en-US" sz="700" dirty="0"/>
+          </a:p>
+        </p:txBody>
+      </p:sp>
+      <p:sp>
+        <p:nvSpPr>
+          <p:cNvPr id="180" name="Shape 178"/>
+          <p:cNvSpPr/>
+          <p:nvPr/>
+        </p:nvSpPr>
+        <p:spPr>
+          <a:xfrm>
+            <a:off x="2185416" y="6175248"/>
+            <a:ext cx="932688" cy="182880"/>
+          </a:xfrm>
+          <a:prstGeom prst="roundRect">
+            <a:avLst>
+              <a:gd name="adj" fmla="val 15000"/>
+            </a:avLst>
+          </a:prstGeom>
+          <a:solidFill>
+            <a:srgbClr val="FFFFFF"/>
+          </a:solidFill>
+          <a:ln w="9525">
+            <a:solidFill>
+              <a:srgbClr val="CBD5E1"/>
+            </a:solidFill>
+            <a:prstDash val="solid"/>
+          </a:ln>
+        </p:spPr>
+      </p:sp>
+      <p:sp>
+        <p:nvSpPr>
+          <p:cNvPr id="181" name="Text 179"/>
+          <p:cNvSpPr/>
+          <p:nvPr/>
+        </p:nvSpPr>
+        <p:spPr>
+          <a:xfrm>
+            <a:off x="2185416" y="6175248"/>
+            <a:ext cx="932688" cy="182880"/>
+          </a:xfrm>
+          <a:prstGeom prst="rect">
+            <a:avLst/>
+          </a:prstGeom>
+          <a:noFill/>
+          <a:ln/>
+        </p:spPr>
+        <p:txBody>
+          <a:bodyPr wrap="square" lIns="0" tIns="0" rIns="0" bIns="0" rtlCol="0" anchor="ctr"/>
+          <a:lstStyle/>
+          <a:p>
+            <a:pPr algn="ctr" indent="0" marL="0">
+              <a:buNone/>
+            </a:pPr>
+            <a:r>
+              <a:rPr lang="en-US" sz="750" b="1" dirty="0">
+                <a:solidFill>
+                  <a:srgbClr val="1E293B"/>
+                </a:solidFill>
+              </a:rPr>
+              <a:t>Images</a:t>
+            </a:r>
+            <a:endParaRPr lang="en-US" sz="750" dirty="0"/>
+          </a:p>
+        </p:txBody>
+      </p:sp>
+      <p:sp>
+        <p:nvSpPr>
+          <p:cNvPr id="182" name="Shape 180"/>
+          <p:cNvSpPr/>
+          <p:nvPr/>
+        </p:nvSpPr>
+        <p:spPr>
+          <a:xfrm>
+            <a:off x="2185416" y="6385560"/>
+            <a:ext cx="932688" cy="155448"/>
+          </a:xfrm>
+          <a:prstGeom prst="roundRect">
+            <a:avLst>
+              <a:gd name="adj" fmla="val 17647"/>
+            </a:avLst>
+          </a:prstGeom>
+          <a:solidFill>
+            <a:srgbClr val="1558A8"/>
+          </a:solidFill>
+          <a:ln w="12700">
+            <a:solidFill>
+              <a:srgbClr val="1558A8"/>
+            </a:solidFill>
+            <a:prstDash val="solid"/>
+          </a:ln>
+        </p:spPr>
+      </p:sp>
+      <p:sp>
+        <p:nvSpPr>
+          <p:cNvPr id="183" name="Text 181"/>
+          <p:cNvSpPr/>
+          <p:nvPr/>
+        </p:nvSpPr>
+        <p:spPr>
+          <a:xfrm>
+            <a:off x="2185416" y="6385560"/>
+            <a:ext cx="932688" cy="155448"/>
+          </a:xfrm>
+          <a:prstGeom prst="rect">
+            <a:avLst/>
+          </a:prstGeom>
+          <a:noFill/>
+          <a:ln/>
+        </p:spPr>
+        <p:txBody>
+          <a:bodyPr wrap="square" lIns="0" tIns="0" rIns="0" bIns="0" rtlCol="0" anchor="ctr"/>
+          <a:lstStyle/>
+          <a:p>
+            <a:pPr algn="ctr" indent="0" marL="0">
+              <a:buNone/>
+            </a:pPr>
+            <a:r>
+              <a:rPr lang="en-US" sz="700" dirty="0">
+                <a:solidFill>
+                  <a:srgbClr val="FFFFFF"/>
+                </a:solidFill>
+              </a:rPr>
+              <a:t>In Progress</a:t>
+            </a:r>
+            <a:endParaRPr lang="en-US" sz="700" dirty="0"/>
+          </a:p>
+        </p:txBody>
+      </p:sp>
+      <p:sp>
+        <p:nvSpPr>
+          <p:cNvPr id="184" name="Shape 182"/>
+          <p:cNvSpPr/>
+          <p:nvPr/>
+        </p:nvSpPr>
+        <p:spPr>
+          <a:xfrm>
+            <a:off x="3200400" y="6175248"/>
+            <a:ext cx="932688" cy="182880"/>
+          </a:xfrm>
+          <a:prstGeom prst="roundRect">
+            <a:avLst>
+              <a:gd name="adj" fmla="val 15000"/>
+            </a:avLst>
+          </a:prstGeom>
+          <a:solidFill>
+            <a:srgbClr val="FFFFFF"/>
+          </a:solidFill>
+          <a:ln w="9525">
+            <a:solidFill>
+              <a:srgbClr val="CBD5E1"/>
+            </a:solidFill>
+            <a:prstDash val="solid"/>
+          </a:ln>
+        </p:spPr>
+      </p:sp>
+      <p:sp>
+        <p:nvSpPr>
+          <p:cNvPr id="185" name="Text 183"/>
+          <p:cNvSpPr/>
+          <p:nvPr/>
+        </p:nvSpPr>
+        <p:spPr>
+          <a:xfrm>
+            <a:off x="3200400" y="6175248"/>
+            <a:ext cx="932688" cy="182880"/>
+          </a:xfrm>
+          <a:prstGeom prst="rect">
+            <a:avLst/>
+          </a:prstGeom>
+          <a:noFill/>
+          <a:ln/>
+        </p:spPr>
+        <p:txBody>
+          <a:bodyPr wrap="square" lIns="0" tIns="0" rIns="0" bIns="0" rtlCol="0" anchor="ctr"/>
+          <a:lstStyle/>
+          <a:p>
+            <a:pPr algn="ctr" indent="0" marL="0">
+              <a:buNone/>
+            </a:pPr>
+            <a:r>
+              <a:rPr lang="en-US" sz="750" b="1" dirty="0">
+                <a:solidFill>
+                  <a:srgbClr val="1E293B"/>
+                </a:solidFill>
+              </a:rPr>
+              <a:t>AMZN Channels</a:t>
+            </a:r>
+            <a:endParaRPr lang="en-US" sz="750" dirty="0"/>
+          </a:p>
+        </p:txBody>
+      </p:sp>
+      <p:sp>
+        <p:nvSpPr>
+          <p:cNvPr id="186" name="Shape 184"/>
+          <p:cNvSpPr/>
+          <p:nvPr/>
+        </p:nvSpPr>
+        <p:spPr>
+          <a:xfrm>
+            <a:off x="3200400" y="6385560"/>
+            <a:ext cx="932688" cy="155448"/>
+          </a:xfrm>
+          <a:prstGeom prst="roundRect">
+            <a:avLst>
+              <a:gd name="adj" fmla="val 17647"/>
+            </a:avLst>
+          </a:prstGeom>
+          <a:solidFill>
+            <a:srgbClr val="DCFCE7"/>
+          </a:solidFill>
+          <a:ln w="12700">
+            <a:solidFill>
+              <a:srgbClr val="15803D"/>
+            </a:solidFill>
+            <a:prstDash val="solid"/>
+          </a:ln>
+        </p:spPr>
+      </p:sp>
+      <p:sp>
+        <p:nvSpPr>
+          <p:cNvPr id="187" name="Text 185"/>
+          <p:cNvSpPr/>
+          <p:nvPr/>
+        </p:nvSpPr>
+        <p:spPr>
+          <a:xfrm>
+            <a:off x="3200400" y="6385560"/>
+            <a:ext cx="932688" cy="155448"/>
+          </a:xfrm>
+          <a:prstGeom prst="rect">
+            <a:avLst/>
+          </a:prstGeom>
+          <a:noFill/>
+          <a:ln/>
+        </p:spPr>
+        <p:txBody>
+          <a:bodyPr wrap="square" lIns="0" tIns="0" rIns="0" bIns="0" rtlCol="0" anchor="ctr"/>
+          <a:lstStyle/>
+          <a:p>
+            <a:pPr algn="ctr" indent="0" marL="0">
+              <a:buNone/>
+            </a:pPr>
+            <a:r>
+              <a:rPr lang="en-US" sz="700" dirty="0">
+                <a:solidFill>
+                  <a:srgbClr val="14532D"/>
+                </a:solidFill>
+              </a:rPr>
+              <a:t>Done</a:t>
+            </a:r>
+            <a:endParaRPr lang="en-US" sz="700" dirty="0"/>
+          </a:p>
+        </p:txBody>
+      </p:sp>
+      <p:sp>
+        <p:nvSpPr>
+          <p:cNvPr id="188" name="Shape 186"/>
           <p:cNvSpPr/>
           <p:nvPr/>
         </p:nvSpPr>
@@ -13630,7 +14146,7 @@
       </p:sp>
       <p:sp>
         <p:nvSpPr>
-          <p:cNvPr id="173" name="Text 171"/>
+          <p:cNvPr id="189" name="Text 187"/>
           <p:cNvSpPr/>
           <p:nvPr/>
         </p:nvSpPr>
@@ -13666,7 +14182,7 @@
       </p:sp>
       <p:sp>
         <p:nvSpPr>
-          <p:cNvPr id="174" name="Shape 172"/>
+          <p:cNvPr id="190" name="Shape 188"/>
           <p:cNvSpPr/>
           <p:nvPr/>
         </p:nvSpPr>
@@ -13691,7 +14207,7 @@
       </p:sp>
       <p:sp>
         <p:nvSpPr>
-          <p:cNvPr id="175" name="Shape 173"/>
+          <p:cNvPr id="191" name="Shape 189"/>
           <p:cNvSpPr/>
           <p:nvPr/>
         </p:nvSpPr>
@@ -13716,7 +14232,7 @@
       </p:sp>
       <p:sp>
         <p:nvSpPr>
-          <p:cNvPr id="176" name="Text 174"/>
+          <p:cNvPr id="192" name="Text 190"/>
           <p:cNvSpPr/>
           <p:nvPr/>
         </p:nvSpPr>
@@ -13752,7 +14268,7 @@
       </p:sp>
       <p:sp>
         <p:nvSpPr>
-          <p:cNvPr id="177" name="Text 175"/>
+          <p:cNvPr id="193" name="Text 191"/>
           <p:cNvSpPr/>
           <p:nvPr/>
         </p:nvSpPr>
@@ -13788,7 +14304,7 @@
       </p:sp>
       <p:sp>
         <p:nvSpPr>
-          <p:cNvPr id="178" name="Shape 176"/>
+          <p:cNvPr id="194" name="Shape 192"/>
           <p:cNvSpPr/>
           <p:nvPr/>
         </p:nvSpPr>
@@ -13815,7 +14331,7 @@
       </p:sp>
       <p:sp>
         <p:nvSpPr>
-          <p:cNvPr id="179" name="Text 177"/>
+          <p:cNvPr id="195" name="Text 193"/>
           <p:cNvSpPr/>
           <p:nvPr/>
         </p:nvSpPr>
@@ -13851,7 +14367,7 @@
       </p:sp>
       <p:sp>
         <p:nvSpPr>
-          <p:cNvPr id="180" name="Shape 178"/>
+          <p:cNvPr id="196" name="Shape 194"/>
           <p:cNvSpPr/>
           <p:nvPr/>
         </p:nvSpPr>
@@ -13876,7 +14392,7 @@
       </p:sp>
       <p:sp>
         <p:nvSpPr>
-          <p:cNvPr id="181" name="Shape 179"/>
+          <p:cNvPr id="197" name="Shape 195"/>
           <p:cNvSpPr/>
           <p:nvPr/>
         </p:nvSpPr>
@@ -13901,7 +14417,7 @@
       </p:sp>
       <p:sp>
         <p:nvSpPr>
-          <p:cNvPr id="182" name="Text 180"/>
+          <p:cNvPr id="198" name="Text 196"/>
           <p:cNvSpPr/>
           <p:nvPr/>
         </p:nvSpPr>
@@ -13937,7 +14453,7 @@
       </p:sp>
       <p:sp>
         <p:nvSpPr>
-          <p:cNvPr id="183" name="Text 181"/>
+          <p:cNvPr id="199" name="Text 197"/>
           <p:cNvSpPr/>
           <p:nvPr/>
         </p:nvSpPr>
@@ -13973,7 +14489,7 @@
       </p:sp>
       <p:sp>
         <p:nvSpPr>
-          <p:cNvPr id="184" name="Shape 182"/>
+          <p:cNvPr id="200" name="Shape 198"/>
           <p:cNvSpPr/>
           <p:nvPr/>
         </p:nvSpPr>
@@ -14000,7 +14516,7 @@
       </p:sp>
       <p:sp>
         <p:nvSpPr>
-          <p:cNvPr id="185" name="Text 183"/>
+          <p:cNvPr id="201" name="Text 199"/>
           <p:cNvSpPr/>
           <p:nvPr/>
         </p:nvSpPr>
@@ -14036,7 +14552,7 @@
       </p:sp>
       <p:sp>
         <p:nvSpPr>
-          <p:cNvPr id="186" name="Shape 184"/>
+          <p:cNvPr id="202" name="Shape 200"/>
           <p:cNvSpPr/>
           <p:nvPr/>
         </p:nvSpPr>
@@ -14061,7 +14577,7 @@
       </p:sp>
       <p:sp>
         <p:nvSpPr>
-          <p:cNvPr id="187" name="Shape 185"/>
+          <p:cNvPr id="203" name="Shape 201"/>
           <p:cNvSpPr/>
           <p:nvPr/>
         </p:nvSpPr>
@@ -14086,7 +14602,7 @@
       </p:sp>
       <p:sp>
         <p:nvSpPr>
-          <p:cNvPr id="188" name="Text 186"/>
+          <p:cNvPr id="204" name="Text 202"/>
           <p:cNvSpPr/>
           <p:nvPr/>
         </p:nvSpPr>
@@ -14122,7 +14638,7 @@
       </p:sp>
       <p:sp>
         <p:nvSpPr>
-          <p:cNvPr id="189" name="Text 187"/>
+          <p:cNvPr id="205" name="Text 203"/>
           <p:cNvSpPr/>
           <p:nvPr/>
         </p:nvSpPr>
@@ -14158,7 +14674,7 @@
       </p:sp>
       <p:sp>
         <p:nvSpPr>
-          <p:cNvPr id="190" name="Shape 188"/>
+          <p:cNvPr id="206" name="Shape 204"/>
           <p:cNvSpPr/>
           <p:nvPr/>
         </p:nvSpPr>
@@ -14185,7 +14701,7 @@
       </p:sp>
       <p:sp>
         <p:nvSpPr>
-          <p:cNvPr id="191" name="Text 189"/>
+          <p:cNvPr id="207" name="Text 205"/>
           <p:cNvSpPr/>
           <p:nvPr/>
         </p:nvSpPr>
@@ -14221,7 +14737,7 @@
       </p:sp>
       <p:sp>
         <p:nvSpPr>
-          <p:cNvPr id="192" name="Shape 190"/>
+          <p:cNvPr id="208" name="Shape 206"/>
           <p:cNvSpPr/>
           <p:nvPr/>
         </p:nvSpPr>
@@ -14246,7 +14762,7 @@
       </p:sp>
       <p:sp>
         <p:nvSpPr>
-          <p:cNvPr id="193" name="Shape 191"/>
+          <p:cNvPr id="209" name="Shape 207"/>
           <p:cNvSpPr/>
           <p:nvPr/>
         </p:nvSpPr>
@@ -14271,7 +14787,7 @@
       </p:sp>
       <p:sp>
         <p:nvSpPr>
-          <p:cNvPr id="194" name="Text 192"/>
+          <p:cNvPr id="210" name="Text 208"/>
           <p:cNvSpPr/>
           <p:nvPr/>
         </p:nvSpPr>
@@ -14307,7 +14823,7 @@
       </p:sp>
       <p:sp>
         <p:nvSpPr>
-          <p:cNvPr id="195" name="Text 193"/>
+          <p:cNvPr id="211" name="Text 209"/>
           <p:cNvSpPr/>
           <p:nvPr/>
         </p:nvSpPr>
@@ -14343,7 +14859,7 @@
       </p:sp>
       <p:sp>
         <p:nvSpPr>
-          <p:cNvPr id="196" name="Shape 194"/>
+          <p:cNvPr id="212" name="Shape 210"/>
           <p:cNvSpPr/>
           <p:nvPr/>
         </p:nvSpPr>
@@ -14370,7 +14886,7 @@
       </p:sp>
       <p:sp>
         <p:nvSpPr>
-          <p:cNvPr id="197" name="Text 195"/>
+          <p:cNvPr id="213" name="Text 211"/>
           <p:cNvSpPr/>
           <p:nvPr/>
         </p:nvSpPr>
@@ -14406,7 +14922,7 @@
       </p:sp>
       <p:sp>
         <p:nvSpPr>
-          <p:cNvPr id="198" name="Shape 196"/>
+          <p:cNvPr id="214" name="Shape 212"/>
           <p:cNvSpPr/>
           <p:nvPr/>
         </p:nvSpPr>
@@ -14429,7 +14945,7 @@
       </p:sp>
       <p:sp>
         <p:nvSpPr>
-          <p:cNvPr id="199" name="Text 197"/>
+          <p:cNvPr id="215" name="Text 213"/>
           <p:cNvSpPr/>
           <p:nvPr/>
         </p:nvSpPr>
@@ -14465,7 +14981,7 @@
       </p:sp>
       <p:sp>
         <p:nvSpPr>
-          <p:cNvPr id="200" name="Shape 198"/>
+          <p:cNvPr id="216" name="Shape 214"/>
           <p:cNvSpPr/>
           <p:nvPr/>
         </p:nvSpPr>
@@ -14492,7 +15008,7 @@
       </p:sp>
       <p:sp>
         <p:nvSpPr>
-          <p:cNvPr id="201" name="Text 199"/>
+          <p:cNvPr id="217" name="Text 215"/>
           <p:cNvSpPr/>
           <p:nvPr/>
         </p:nvSpPr>
@@ -14528,7 +15044,7 @@
       </p:sp>
       <p:sp>
         <p:nvSpPr>
-          <p:cNvPr id="202" name="Text 200"/>
+          <p:cNvPr id="218" name="Text 216"/>
           <p:cNvSpPr/>
           <p:nvPr/>
         </p:nvSpPr>
@@ -14564,7 +15080,7 @@
       </p:sp>
       <p:sp>
         <p:nvSpPr>
-          <p:cNvPr id="203" name="Shape 201"/>
+          <p:cNvPr id="219" name="Shape 217"/>
           <p:cNvSpPr/>
           <p:nvPr/>
         </p:nvSpPr>
@@ -14591,7 +15107,7 @@
       </p:sp>
       <p:sp>
         <p:nvSpPr>
-          <p:cNvPr id="204" name="Text 202"/>
+          <p:cNvPr id="220" name="Text 218"/>
           <p:cNvSpPr/>
           <p:nvPr/>
         </p:nvSpPr>
@@ -14627,7 +15143,7 @@
       </p:sp>
       <p:sp>
         <p:nvSpPr>
-          <p:cNvPr id="205" name="Text 203"/>
+          <p:cNvPr id="221" name="Text 219"/>
           <p:cNvSpPr/>
           <p:nvPr/>
         </p:nvSpPr>
@@ -14663,7 +15179,7 @@
       </p:sp>
       <p:sp>
         <p:nvSpPr>
-          <p:cNvPr id="206" name="Shape 204"/>
+          <p:cNvPr id="222" name="Shape 220"/>
           <p:cNvSpPr/>
           <p:nvPr/>
         </p:nvSpPr>
@@ -14690,7 +15206,7 @@
       </p:sp>
       <p:sp>
         <p:nvSpPr>
-          <p:cNvPr id="207" name="Text 205"/>
+          <p:cNvPr id="223" name="Text 221"/>
           <p:cNvSpPr/>
           <p:nvPr/>
         </p:nvSpPr>
@@ -14726,7 +15242,7 @@
       </p:sp>
       <p:sp>
         <p:nvSpPr>
-          <p:cNvPr id="208" name="Text 206"/>
+          <p:cNvPr id="224" name="Text 222"/>
           <p:cNvSpPr/>
           <p:nvPr/>
         </p:nvSpPr>
@@ -14762,7 +15278,7 @@
       </p:sp>
       <p:sp>
         <p:nvSpPr>
-          <p:cNvPr id="209" name="Shape 207"/>
+          <p:cNvPr id="225" name="Shape 223"/>
           <p:cNvSpPr/>
           <p:nvPr/>
         </p:nvSpPr>
@@ -14789,7 +15305,7 @@
       </p:sp>
       <p:sp>
         <p:nvSpPr>
-          <p:cNvPr id="210" name="Text 208"/>
+          <p:cNvPr id="226" name="Text 224"/>
           <p:cNvSpPr/>
           <p:nvPr/>
         </p:nvSpPr>
@@ -14825,7 +15341,7 @@
       </p:sp>
       <p:sp>
         <p:nvSpPr>
-          <p:cNvPr id="211" name="Text 209"/>
+          <p:cNvPr id="227" name="Text 225"/>
           <p:cNvSpPr/>
           <p:nvPr/>
         </p:nvSpPr>
@@ -14861,7 +15377,7 @@
       </p:sp>
       <p:sp>
         <p:nvSpPr>
-          <p:cNvPr id="212" name="Shape 210"/>
+          <p:cNvPr id="228" name="Shape 226"/>
           <p:cNvSpPr/>
           <p:nvPr/>
         </p:nvSpPr>
@@ -14888,7 +15404,7 @@
       </p:sp>
       <p:sp>
         <p:nvSpPr>
-          <p:cNvPr id="213" name="Text 211"/>
+          <p:cNvPr id="229" name="Text 227"/>
           <p:cNvSpPr/>
           <p:nvPr/>
         </p:nvSpPr>
@@ -14924,7 +15440,7 @@
       </p:sp>
       <p:sp>
         <p:nvSpPr>
-          <p:cNvPr id="214" name="Text 212"/>
+          <p:cNvPr id="230" name="Text 228"/>
           <p:cNvSpPr/>
           <p:nvPr/>
         </p:nvSpPr>
@@ -18632,11 +19148,11 @@
             </a:avLst>
           </a:prstGeom>
           <a:solidFill>
-            <a:srgbClr val="9CA3AF"/>
+            <a:srgbClr val="64748B"/>
           </a:solidFill>
           <a:ln w="12700">
             <a:solidFill>
-              <a:srgbClr val="9CA3AF"/>
+              <a:srgbClr val="64748B"/>
             </a:solidFill>
             <a:prstDash val="solid"/>
           </a:ln>
@@ -18672,7 +19188,7 @@
                   <a:srgbClr val="FFFFFF"/>
                 </a:solidFill>
               </a:rPr>
-              <a:t>NPAW</a:t>
+              <a:t>Data</a:t>
             </a:r>
             <a:endParaRPr lang="en-US" sz="800" dirty="0"/>
           </a:p>
@@ -18686,7 +19202,7 @@
                   <a:srgbClr val="FFFFFF"/>
                 </a:solidFill>
               </a:rPr>
-              <a:t>Historical</a:t>
+              <a:t>&amp; Analytics</a:t>
             </a:r>
             <a:endParaRPr lang="en-US" sz="800" dirty="0"/>
           </a:p>
@@ -18722,7 +19238,7 @@
                   <a:srgbClr val="9CA3AF"/>
                 </a:solidFill>
               </a:rPr>
-              <a:t>0 / 1 In Progress</a:t>
+              <a:t>1 / 2 In Progress</a:t>
             </a:r>
             <a:endParaRPr lang="en-US" sz="750" dirty="0"/>
           </a:p>
@@ -18862,145 +19378,7 @@
         </p:nvSpPr>
         <p:spPr>
           <a:xfrm>
-            <a:off x="164592" y="8462772"/>
-            <a:ext cx="9116568" cy="1476756"/>
-          </a:xfrm>
-          <a:prstGeom prst="rect">
-            <a:avLst/>
-          </a:prstGeom>
-          <a:solidFill>
-            <a:srgbClr val="FFFFFF"/>
-          </a:solidFill>
-          <a:ln w="6350">
-            <a:solidFill>
-              <a:srgbClr val="E5E7EB"/>
-            </a:solidFill>
-            <a:prstDash val="solid"/>
-          </a:ln>
-        </p:spPr>
-      </p:sp>
-      <p:sp>
-        <p:nvSpPr>
-          <p:cNvPr id="125" name="Shape 123"/>
-          <p:cNvSpPr/>
-          <p:nvPr/>
-        </p:nvSpPr>
-        <p:spPr>
-          <a:xfrm>
-            <a:off x="182880" y="8535924"/>
-            <a:ext cx="859536" cy="1330452"/>
-          </a:xfrm>
-          <a:prstGeom prst="roundRect">
-            <a:avLst>
-              <a:gd name="adj" fmla="val 5319"/>
-            </a:avLst>
-          </a:prstGeom>
-          <a:solidFill>
-            <a:srgbClr val="9CA3AF"/>
-          </a:solidFill>
-          <a:ln w="12700">
-            <a:solidFill>
-              <a:srgbClr val="9CA3AF"/>
-            </a:solidFill>
-            <a:prstDash val="solid"/>
-          </a:ln>
-        </p:spPr>
-      </p:sp>
-      <p:sp>
-        <p:nvSpPr>
-          <p:cNvPr id="126" name="Text 124"/>
-          <p:cNvSpPr/>
-          <p:nvPr/>
-        </p:nvSpPr>
-        <p:spPr>
-          <a:xfrm>
-            <a:off x="182880" y="8535924"/>
-            <a:ext cx="859536" cy="1330452"/>
-          </a:xfrm>
-          <a:prstGeom prst="rect">
-            <a:avLst/>
-          </a:prstGeom>
-          <a:noFill/>
-          <a:ln/>
-        </p:spPr>
-        <p:txBody>
-          <a:bodyPr wrap="square" lIns="0" tIns="0" rIns="0" bIns="0" rtlCol="0" anchor="ctr"/>
-          <a:lstStyle/>
-          <a:p>
-            <a:pPr algn="ctr" indent="0" marL="0">
-              <a:buNone/>
-            </a:pPr>
-            <a:r>
-              <a:rPr lang="en-US" sz="800" b="1" dirty="0">
-                <a:solidFill>
-                  <a:srgbClr val="FFFFFF"/>
-                </a:solidFill>
-              </a:rPr>
-              <a:t>Cleeng</a:t>
-            </a:r>
-            <a:endParaRPr lang="en-US" sz="800" dirty="0"/>
-          </a:p>
-          <a:p>
-            <a:pPr algn="ctr" indent="0" marL="0">
-              <a:buNone/>
-            </a:pPr>
-            <a:r>
-              <a:rPr lang="en-US" sz="800" b="1" dirty="0">
-                <a:solidFill>
-                  <a:srgbClr val="FFFFFF"/>
-                </a:solidFill>
-              </a:rPr>
-              <a:t>Historical and Ongoing</a:t>
-            </a:r>
-            <a:endParaRPr lang="en-US" sz="800" dirty="0"/>
-          </a:p>
-        </p:txBody>
-      </p:sp>
-      <p:sp>
-        <p:nvSpPr>
-          <p:cNvPr id="127" name="Text 125"/>
-          <p:cNvSpPr/>
-          <p:nvPr/>
-        </p:nvSpPr>
-        <p:spPr>
-          <a:xfrm>
-            <a:off x="1170432" y="8508492"/>
-            <a:ext cx="8110728" cy="182880"/>
-          </a:xfrm>
-          <a:prstGeom prst="rect">
-            <a:avLst/>
-          </a:prstGeom>
-          <a:noFill/>
-          <a:ln/>
-        </p:spPr>
-        <p:txBody>
-          <a:bodyPr wrap="square" lIns="0" tIns="0" rIns="0" bIns="0" rtlCol="0" anchor="ctr"/>
-          <a:lstStyle/>
-          <a:p>
-            <a:pPr algn="l" indent="0" marL="0">
-              <a:buNone/>
-            </a:pPr>
-            <a:r>
-              <a:rPr lang="en-US" sz="750" dirty="0">
-                <a:solidFill>
-                  <a:srgbClr val="9CA3AF"/>
-                </a:solidFill>
-              </a:rPr>
-              <a:t>1 / 1 In Progress</a:t>
-            </a:r>
-            <a:endParaRPr lang="en-US" sz="750" dirty="0"/>
-          </a:p>
-        </p:txBody>
-      </p:sp>
-      <p:sp>
-        <p:nvSpPr>
-          <p:cNvPr id="128" name="Shape 126"/>
-          <p:cNvSpPr/>
-          <p:nvPr/>
-        </p:nvSpPr>
-        <p:spPr>
-          <a:xfrm>
-            <a:off x="1170432" y="8727948"/>
+            <a:off x="2185416" y="7196328"/>
             <a:ext cx="932688" cy="182880"/>
           </a:xfrm>
           <a:prstGeom prst="roundRect">
@@ -19021,13 +19399,13 @@
       </p:sp>
       <p:sp>
         <p:nvSpPr>
-          <p:cNvPr id="129" name="Text 127"/>
-          <p:cNvSpPr/>
-          <p:nvPr/>
-        </p:nvSpPr>
-        <p:spPr>
-          <a:xfrm>
-            <a:off x="1170432" y="8727948"/>
+          <p:cNvPr id="125" name="Text 123"/>
+          <p:cNvSpPr/>
+          <p:nvPr/>
+        </p:nvSpPr>
+        <p:spPr>
+          <a:xfrm>
+            <a:off x="2185416" y="7196328"/>
             <a:ext cx="932688" cy="182880"/>
           </a:xfrm>
           <a:prstGeom prst="rect">
@@ -19057,13 +19435,13 @@
       </p:sp>
       <p:sp>
         <p:nvSpPr>
-          <p:cNvPr id="130" name="Shape 128"/>
-          <p:cNvSpPr/>
-          <p:nvPr/>
-        </p:nvSpPr>
-        <p:spPr>
-          <a:xfrm>
-            <a:off x="1170432" y="8938260"/>
+          <p:cNvPr id="126" name="Shape 124"/>
+          <p:cNvSpPr/>
+          <p:nvPr/>
+        </p:nvSpPr>
+        <p:spPr>
+          <a:xfrm>
+            <a:off x="2185416" y="7406640"/>
             <a:ext cx="932688" cy="155448"/>
           </a:xfrm>
           <a:prstGeom prst="roundRect">
@@ -19084,13 +19462,13 @@
       </p:sp>
       <p:sp>
         <p:nvSpPr>
-          <p:cNvPr id="131" name="Text 129"/>
-          <p:cNvSpPr/>
-          <p:nvPr/>
-        </p:nvSpPr>
-        <p:spPr>
-          <a:xfrm>
-            <a:off x="1170432" y="8938260"/>
+          <p:cNvPr id="127" name="Text 125"/>
+          <p:cNvSpPr/>
+          <p:nvPr/>
+        </p:nvSpPr>
+        <p:spPr>
+          <a:xfrm>
+            <a:off x="2185416" y="7406640"/>
             <a:ext cx="932688" cy="155448"/>
           </a:xfrm>
           <a:prstGeom prst="rect">
@@ -19120,7 +19498,7 @@
       </p:sp>
       <p:sp>
         <p:nvSpPr>
-          <p:cNvPr id="132" name="Shape 130"/>
+          <p:cNvPr id="128" name="Shape 126"/>
           <p:cNvSpPr/>
           <p:nvPr/>
         </p:nvSpPr>
@@ -19145,7 +19523,7 @@
       </p:sp>
       <p:sp>
         <p:nvSpPr>
-          <p:cNvPr id="133" name="Text 131"/>
+          <p:cNvPr id="129" name="Text 127"/>
           <p:cNvSpPr/>
           <p:nvPr/>
         </p:nvSpPr>
@@ -19181,7 +19559,7 @@
       </p:sp>
       <p:sp>
         <p:nvSpPr>
-          <p:cNvPr id="134" name="Shape 132"/>
+          <p:cNvPr id="130" name="Shape 128"/>
           <p:cNvSpPr/>
           <p:nvPr/>
         </p:nvSpPr>
@@ -19206,7 +19584,7 @@
       </p:sp>
       <p:sp>
         <p:nvSpPr>
-          <p:cNvPr id="135" name="Shape 133"/>
+          <p:cNvPr id="131" name="Shape 129"/>
           <p:cNvSpPr/>
           <p:nvPr/>
         </p:nvSpPr>
@@ -19231,7 +19609,7 @@
       </p:sp>
       <p:sp>
         <p:nvSpPr>
-          <p:cNvPr id="136" name="Text 134"/>
+          <p:cNvPr id="132" name="Text 130"/>
           <p:cNvSpPr/>
           <p:nvPr/>
         </p:nvSpPr>
@@ -19267,7 +19645,7 @@
       </p:sp>
       <p:sp>
         <p:nvSpPr>
-          <p:cNvPr id="137" name="Text 135"/>
+          <p:cNvPr id="133" name="Text 131"/>
           <p:cNvSpPr/>
           <p:nvPr/>
         </p:nvSpPr>
@@ -19303,7 +19681,7 @@
       </p:sp>
       <p:sp>
         <p:nvSpPr>
-          <p:cNvPr id="138" name="Shape 136"/>
+          <p:cNvPr id="134" name="Shape 132"/>
           <p:cNvSpPr/>
           <p:nvPr/>
         </p:nvSpPr>
@@ -19330,7 +19708,7 @@
       </p:sp>
       <p:sp>
         <p:nvSpPr>
-          <p:cNvPr id="139" name="Text 137"/>
+          <p:cNvPr id="135" name="Text 133"/>
           <p:cNvSpPr/>
           <p:nvPr/>
         </p:nvSpPr>
@@ -19366,7 +19744,7 @@
       </p:sp>
       <p:sp>
         <p:nvSpPr>
-          <p:cNvPr id="140" name="Shape 138"/>
+          <p:cNvPr id="136" name="Shape 134"/>
           <p:cNvSpPr/>
           <p:nvPr/>
         </p:nvSpPr>
@@ -19391,7 +19769,7 @@
       </p:sp>
       <p:sp>
         <p:nvSpPr>
-          <p:cNvPr id="141" name="Shape 139"/>
+          <p:cNvPr id="137" name="Shape 135"/>
           <p:cNvSpPr/>
           <p:nvPr/>
         </p:nvSpPr>
@@ -19416,7 +19794,7 @@
       </p:sp>
       <p:sp>
         <p:nvSpPr>
-          <p:cNvPr id="142" name="Text 140"/>
+          <p:cNvPr id="138" name="Text 136"/>
           <p:cNvSpPr/>
           <p:nvPr/>
         </p:nvSpPr>
@@ -19452,7 +19830,7 @@
       </p:sp>
       <p:sp>
         <p:nvSpPr>
-          <p:cNvPr id="143" name="Text 141"/>
+          <p:cNvPr id="139" name="Text 137"/>
           <p:cNvSpPr/>
           <p:nvPr/>
         </p:nvSpPr>
@@ -19488,7 +19866,7 @@
       </p:sp>
       <p:sp>
         <p:nvSpPr>
-          <p:cNvPr id="144" name="Shape 142"/>
+          <p:cNvPr id="140" name="Shape 138"/>
           <p:cNvSpPr/>
           <p:nvPr/>
         </p:nvSpPr>
@@ -19515,7 +19893,7 @@
       </p:sp>
       <p:sp>
         <p:nvSpPr>
-          <p:cNvPr id="145" name="Text 143"/>
+          <p:cNvPr id="141" name="Text 139"/>
           <p:cNvSpPr/>
           <p:nvPr/>
         </p:nvSpPr>
@@ -19551,7 +19929,7 @@
       </p:sp>
       <p:sp>
         <p:nvSpPr>
-          <p:cNvPr id="146" name="Shape 144"/>
+          <p:cNvPr id="142" name="Shape 140"/>
           <p:cNvSpPr/>
           <p:nvPr/>
         </p:nvSpPr>
@@ -19576,7 +19954,7 @@
       </p:sp>
       <p:sp>
         <p:nvSpPr>
-          <p:cNvPr id="147" name="Shape 145"/>
+          <p:cNvPr id="143" name="Shape 141"/>
           <p:cNvSpPr/>
           <p:nvPr/>
         </p:nvSpPr>
@@ -19601,7 +19979,7 @@
       </p:sp>
       <p:sp>
         <p:nvSpPr>
-          <p:cNvPr id="148" name="Text 146"/>
+          <p:cNvPr id="144" name="Text 142"/>
           <p:cNvSpPr/>
           <p:nvPr/>
         </p:nvSpPr>
@@ -19637,7 +20015,7 @@
       </p:sp>
       <p:sp>
         <p:nvSpPr>
-          <p:cNvPr id="149" name="Text 147"/>
+          <p:cNvPr id="145" name="Text 143"/>
           <p:cNvSpPr/>
           <p:nvPr/>
         </p:nvSpPr>
@@ -19673,7 +20051,7 @@
       </p:sp>
       <p:sp>
         <p:nvSpPr>
-          <p:cNvPr id="150" name="Shape 148"/>
+          <p:cNvPr id="146" name="Shape 144"/>
           <p:cNvSpPr/>
           <p:nvPr/>
         </p:nvSpPr>
@@ -19700,7 +20078,7 @@
       </p:sp>
       <p:sp>
         <p:nvSpPr>
-          <p:cNvPr id="151" name="Text 149"/>
+          <p:cNvPr id="147" name="Text 145"/>
           <p:cNvSpPr/>
           <p:nvPr/>
         </p:nvSpPr>
@@ -19736,7 +20114,7 @@
       </p:sp>
       <p:sp>
         <p:nvSpPr>
-          <p:cNvPr id="152" name="Shape 150"/>
+          <p:cNvPr id="148" name="Shape 146"/>
           <p:cNvSpPr/>
           <p:nvPr/>
         </p:nvSpPr>
@@ -19761,7 +20139,7 @@
       </p:sp>
       <p:sp>
         <p:nvSpPr>
-          <p:cNvPr id="153" name="Shape 151"/>
+          <p:cNvPr id="149" name="Shape 147"/>
           <p:cNvSpPr/>
           <p:nvPr/>
         </p:nvSpPr>
@@ -19786,7 +20164,7 @@
       </p:sp>
       <p:sp>
         <p:nvSpPr>
-          <p:cNvPr id="154" name="Text 152"/>
+          <p:cNvPr id="150" name="Text 148"/>
           <p:cNvSpPr/>
           <p:nvPr/>
         </p:nvSpPr>
@@ -19822,7 +20200,7 @@
       </p:sp>
       <p:sp>
         <p:nvSpPr>
-          <p:cNvPr id="155" name="Text 153"/>
+          <p:cNvPr id="151" name="Text 149"/>
           <p:cNvSpPr/>
           <p:nvPr/>
         </p:nvSpPr>
@@ -19858,7 +20236,7 @@
       </p:sp>
       <p:sp>
         <p:nvSpPr>
-          <p:cNvPr id="156" name="Shape 154"/>
+          <p:cNvPr id="152" name="Shape 150"/>
           <p:cNvSpPr/>
           <p:nvPr/>
         </p:nvSpPr>
@@ -19885,7 +20263,7 @@
       </p:sp>
       <p:sp>
         <p:nvSpPr>
-          <p:cNvPr id="157" name="Text 155"/>
+          <p:cNvPr id="153" name="Text 151"/>
           <p:cNvSpPr/>
           <p:nvPr/>
         </p:nvSpPr>
@@ -19921,7 +20299,7 @@
       </p:sp>
       <p:sp>
         <p:nvSpPr>
-          <p:cNvPr id="158" name="Shape 156"/>
+          <p:cNvPr id="154" name="Shape 152"/>
           <p:cNvSpPr/>
           <p:nvPr/>
         </p:nvSpPr>
@@ -19944,7 +20322,7 @@
       </p:sp>
       <p:sp>
         <p:nvSpPr>
-          <p:cNvPr id="159" name="Text 157"/>
+          <p:cNvPr id="155" name="Text 153"/>
           <p:cNvSpPr/>
           <p:nvPr/>
         </p:nvSpPr>
@@ -19980,7 +20358,7 @@
       </p:sp>
       <p:sp>
         <p:nvSpPr>
-          <p:cNvPr id="160" name="Shape 158"/>
+          <p:cNvPr id="156" name="Shape 154"/>
           <p:cNvSpPr/>
           <p:nvPr/>
         </p:nvSpPr>
@@ -20007,7 +20385,7 @@
       </p:sp>
       <p:sp>
         <p:nvSpPr>
-          <p:cNvPr id="161" name="Text 159"/>
+          <p:cNvPr id="157" name="Text 155"/>
           <p:cNvSpPr/>
           <p:nvPr/>
         </p:nvSpPr>
@@ -20043,7 +20421,7 @@
       </p:sp>
       <p:sp>
         <p:nvSpPr>
-          <p:cNvPr id="162" name="Shape 160"/>
+          <p:cNvPr id="158" name="Shape 156"/>
           <p:cNvSpPr/>
           <p:nvPr/>
         </p:nvSpPr>
@@ -20070,7 +20448,7 @@
       </p:sp>
       <p:sp>
         <p:nvSpPr>
-          <p:cNvPr id="163" name="Text 161"/>
+          <p:cNvPr id="159" name="Text 157"/>
           <p:cNvSpPr/>
           <p:nvPr/>
         </p:nvSpPr>
@@ -20106,7 +20484,7 @@
       </p:sp>
       <p:sp>
         <p:nvSpPr>
-          <p:cNvPr id="164" name="Shape 162"/>
+          <p:cNvPr id="160" name="Shape 158"/>
           <p:cNvSpPr/>
           <p:nvPr/>
         </p:nvSpPr>
@@ -20133,7 +20511,7 @@
       </p:sp>
       <p:sp>
         <p:nvSpPr>
-          <p:cNvPr id="165" name="Text 163"/>
+          <p:cNvPr id="161" name="Text 159"/>
           <p:cNvSpPr/>
           <p:nvPr/>
         </p:nvSpPr>
@@ -20169,7 +20547,7 @@
       </p:sp>
       <p:sp>
         <p:nvSpPr>
-          <p:cNvPr id="166" name="Shape 164"/>
+          <p:cNvPr id="162" name="Shape 160"/>
           <p:cNvSpPr/>
           <p:nvPr/>
         </p:nvSpPr>
@@ -20196,7 +20574,7 @@
       </p:sp>
       <p:sp>
         <p:nvSpPr>
-          <p:cNvPr id="167" name="Text 165"/>
+          <p:cNvPr id="163" name="Text 161"/>
           <p:cNvSpPr/>
           <p:nvPr/>
         </p:nvSpPr>
@@ -24030,11 +24408,11 @@
             </a:avLst>
           </a:prstGeom>
           <a:solidFill>
-            <a:srgbClr val="9CA3AF"/>
+            <a:srgbClr val="64748B"/>
           </a:solidFill>
           <a:ln w="12700">
             <a:solidFill>
-              <a:srgbClr val="9CA3AF"/>
+              <a:srgbClr val="64748B"/>
             </a:solidFill>
             <a:prstDash val="solid"/>
           </a:ln>
@@ -24070,7 +24448,7 @@
                   <a:srgbClr val="FFFFFF"/>
                 </a:solidFill>
               </a:rPr>
-              <a:t>NPAW</a:t>
+              <a:t>Data</a:t>
             </a:r>
             <a:endParaRPr lang="en-US" sz="800" dirty="0"/>
           </a:p>
@@ -24084,7 +24462,7 @@
                   <a:srgbClr val="FFFFFF"/>
                 </a:solidFill>
               </a:rPr>
-              <a:t>Historical</a:t>
+              <a:t>&amp; Analytics</a:t>
             </a:r>
             <a:endParaRPr lang="en-US" sz="800" dirty="0"/>
           </a:p>
@@ -24120,7 +24498,7 @@
                   <a:srgbClr val="9CA3AF"/>
                 </a:solidFill>
               </a:rPr>
-              <a:t>0 / 1 In Progress</a:t>
+              <a:t>1 / 2 In Progress</a:t>
             </a:r>
             <a:endParaRPr lang="en-US" sz="750" dirty="0"/>
           </a:p>
@@ -24260,145 +24638,7 @@
         </p:nvSpPr>
         <p:spPr>
           <a:xfrm>
-            <a:off x="164592" y="8462772"/>
-            <a:ext cx="9116568" cy="1476756"/>
-          </a:xfrm>
-          <a:prstGeom prst="rect">
-            <a:avLst/>
-          </a:prstGeom>
-          <a:solidFill>
-            <a:srgbClr val="FFFFFF"/>
-          </a:solidFill>
-          <a:ln w="6350">
-            <a:solidFill>
-              <a:srgbClr val="E5E7EB"/>
-            </a:solidFill>
-            <a:prstDash val="solid"/>
-          </a:ln>
-        </p:spPr>
-      </p:sp>
-      <p:sp>
-        <p:nvSpPr>
-          <p:cNvPr id="129" name="Shape 127"/>
-          <p:cNvSpPr/>
-          <p:nvPr/>
-        </p:nvSpPr>
-        <p:spPr>
-          <a:xfrm>
-            <a:off x="182880" y="8535924"/>
-            <a:ext cx="859536" cy="1330452"/>
-          </a:xfrm>
-          <a:prstGeom prst="roundRect">
-            <a:avLst>
-              <a:gd name="adj" fmla="val 5319"/>
-            </a:avLst>
-          </a:prstGeom>
-          <a:solidFill>
-            <a:srgbClr val="9CA3AF"/>
-          </a:solidFill>
-          <a:ln w="12700">
-            <a:solidFill>
-              <a:srgbClr val="9CA3AF"/>
-            </a:solidFill>
-            <a:prstDash val="solid"/>
-          </a:ln>
-        </p:spPr>
-      </p:sp>
-      <p:sp>
-        <p:nvSpPr>
-          <p:cNvPr id="130" name="Text 128"/>
-          <p:cNvSpPr/>
-          <p:nvPr/>
-        </p:nvSpPr>
-        <p:spPr>
-          <a:xfrm>
-            <a:off x="182880" y="8535924"/>
-            <a:ext cx="859536" cy="1330452"/>
-          </a:xfrm>
-          <a:prstGeom prst="rect">
-            <a:avLst/>
-          </a:prstGeom>
-          <a:noFill/>
-          <a:ln/>
-        </p:spPr>
-        <p:txBody>
-          <a:bodyPr wrap="square" lIns="0" tIns="0" rIns="0" bIns="0" rtlCol="0" anchor="ctr"/>
-          <a:lstStyle/>
-          <a:p>
-            <a:pPr algn="ctr" indent="0" marL="0">
-              <a:buNone/>
-            </a:pPr>
-            <a:r>
-              <a:rPr lang="en-US" sz="800" b="1" dirty="0">
-                <a:solidFill>
-                  <a:srgbClr val="FFFFFF"/>
-                </a:solidFill>
-              </a:rPr>
-              <a:t>Cleeng</a:t>
-            </a:r>
-            <a:endParaRPr lang="en-US" sz="800" dirty="0"/>
-          </a:p>
-          <a:p>
-            <a:pPr algn="ctr" indent="0" marL="0">
-              <a:buNone/>
-            </a:pPr>
-            <a:r>
-              <a:rPr lang="en-US" sz="800" b="1" dirty="0">
-                <a:solidFill>
-                  <a:srgbClr val="FFFFFF"/>
-                </a:solidFill>
-              </a:rPr>
-              <a:t>Historical and Ongoing</a:t>
-            </a:r>
-            <a:endParaRPr lang="en-US" sz="800" dirty="0"/>
-          </a:p>
-        </p:txBody>
-      </p:sp>
-      <p:sp>
-        <p:nvSpPr>
-          <p:cNvPr id="131" name="Text 129"/>
-          <p:cNvSpPr/>
-          <p:nvPr/>
-        </p:nvSpPr>
-        <p:spPr>
-          <a:xfrm>
-            <a:off x="1170432" y="8508492"/>
-            <a:ext cx="8110728" cy="182880"/>
-          </a:xfrm>
-          <a:prstGeom prst="rect">
-            <a:avLst/>
-          </a:prstGeom>
-          <a:noFill/>
-          <a:ln/>
-        </p:spPr>
-        <p:txBody>
-          <a:bodyPr wrap="square" lIns="0" tIns="0" rIns="0" bIns="0" rtlCol="0" anchor="ctr"/>
-          <a:lstStyle/>
-          <a:p>
-            <a:pPr algn="l" indent="0" marL="0">
-              <a:buNone/>
-            </a:pPr>
-            <a:r>
-              <a:rPr lang="en-US" sz="750" dirty="0">
-                <a:solidFill>
-                  <a:srgbClr val="9CA3AF"/>
-                </a:solidFill>
-              </a:rPr>
-              <a:t>1 / 1 In Progress</a:t>
-            </a:r>
-            <a:endParaRPr lang="en-US" sz="750" dirty="0"/>
-          </a:p>
-        </p:txBody>
-      </p:sp>
-      <p:sp>
-        <p:nvSpPr>
-          <p:cNvPr id="132" name="Shape 130"/>
-          <p:cNvSpPr/>
-          <p:nvPr/>
-        </p:nvSpPr>
-        <p:spPr>
-          <a:xfrm>
-            <a:off x="1170432" y="8727948"/>
+            <a:off x="2185416" y="7196328"/>
             <a:ext cx="932688" cy="182880"/>
           </a:xfrm>
           <a:prstGeom prst="roundRect">
@@ -24419,13 +24659,13 @@
       </p:sp>
       <p:sp>
         <p:nvSpPr>
-          <p:cNvPr id="133" name="Text 131"/>
-          <p:cNvSpPr/>
-          <p:nvPr/>
-        </p:nvSpPr>
-        <p:spPr>
-          <a:xfrm>
-            <a:off x="1170432" y="8727948"/>
+          <p:cNvPr id="129" name="Text 127"/>
+          <p:cNvSpPr/>
+          <p:nvPr/>
+        </p:nvSpPr>
+        <p:spPr>
+          <a:xfrm>
+            <a:off x="2185416" y="7196328"/>
             <a:ext cx="932688" cy="182880"/>
           </a:xfrm>
           <a:prstGeom prst="rect">
@@ -24455,13 +24695,13 @@
       </p:sp>
       <p:sp>
         <p:nvSpPr>
-          <p:cNvPr id="134" name="Shape 132"/>
-          <p:cNvSpPr/>
-          <p:nvPr/>
-        </p:nvSpPr>
-        <p:spPr>
-          <a:xfrm>
-            <a:off x="1170432" y="8938260"/>
+          <p:cNvPr id="130" name="Shape 128"/>
+          <p:cNvSpPr/>
+          <p:nvPr/>
+        </p:nvSpPr>
+        <p:spPr>
+          <a:xfrm>
+            <a:off x="2185416" y="7406640"/>
             <a:ext cx="932688" cy="155448"/>
           </a:xfrm>
           <a:prstGeom prst="roundRect">
@@ -24482,13 +24722,13 @@
       </p:sp>
       <p:sp>
         <p:nvSpPr>
-          <p:cNvPr id="135" name="Text 133"/>
-          <p:cNvSpPr/>
-          <p:nvPr/>
-        </p:nvSpPr>
-        <p:spPr>
-          <a:xfrm>
-            <a:off x="1170432" y="8938260"/>
+          <p:cNvPr id="131" name="Text 129"/>
+          <p:cNvSpPr/>
+          <p:nvPr/>
+        </p:nvSpPr>
+        <p:spPr>
+          <a:xfrm>
+            <a:off x="2185416" y="7406640"/>
             <a:ext cx="932688" cy="155448"/>
           </a:xfrm>
           <a:prstGeom prst="rect">
@@ -24518,7 +24758,7 @@
       </p:sp>
       <p:sp>
         <p:nvSpPr>
-          <p:cNvPr id="136" name="Shape 134"/>
+          <p:cNvPr id="132" name="Shape 130"/>
           <p:cNvSpPr/>
           <p:nvPr/>
         </p:nvSpPr>
@@ -24543,7 +24783,7 @@
       </p:sp>
       <p:sp>
         <p:nvSpPr>
-          <p:cNvPr id="137" name="Text 135"/>
+          <p:cNvPr id="133" name="Text 131"/>
           <p:cNvSpPr/>
           <p:nvPr/>
         </p:nvSpPr>
@@ -24579,7 +24819,7 @@
       </p:sp>
       <p:sp>
         <p:nvSpPr>
-          <p:cNvPr id="138" name="Shape 136"/>
+          <p:cNvPr id="134" name="Shape 132"/>
           <p:cNvSpPr/>
           <p:nvPr/>
         </p:nvSpPr>
@@ -24604,7 +24844,7 @@
       </p:sp>
       <p:sp>
         <p:nvSpPr>
-          <p:cNvPr id="139" name="Shape 137"/>
+          <p:cNvPr id="135" name="Shape 133"/>
           <p:cNvSpPr/>
           <p:nvPr/>
         </p:nvSpPr>
@@ -24629,7 +24869,7 @@
       </p:sp>
       <p:sp>
         <p:nvSpPr>
-          <p:cNvPr id="140" name="Text 138"/>
+          <p:cNvPr id="136" name="Text 134"/>
           <p:cNvSpPr/>
           <p:nvPr/>
         </p:nvSpPr>
@@ -24665,7 +24905,7 @@
       </p:sp>
       <p:sp>
         <p:nvSpPr>
-          <p:cNvPr id="141" name="Text 139"/>
+          <p:cNvPr id="137" name="Text 135"/>
           <p:cNvSpPr/>
           <p:nvPr/>
         </p:nvSpPr>
@@ -24701,7 +24941,7 @@
       </p:sp>
       <p:sp>
         <p:nvSpPr>
-          <p:cNvPr id="142" name="Shape 140"/>
+          <p:cNvPr id="138" name="Shape 136"/>
           <p:cNvSpPr/>
           <p:nvPr/>
         </p:nvSpPr>
@@ -24728,7 +24968,7 @@
       </p:sp>
       <p:sp>
         <p:nvSpPr>
-          <p:cNvPr id="143" name="Text 141"/>
+          <p:cNvPr id="139" name="Text 137"/>
           <p:cNvSpPr/>
           <p:nvPr/>
         </p:nvSpPr>
@@ -24764,7 +25004,7 @@
       </p:sp>
       <p:sp>
         <p:nvSpPr>
-          <p:cNvPr id="144" name="Shape 142"/>
+          <p:cNvPr id="140" name="Shape 138"/>
           <p:cNvSpPr/>
           <p:nvPr/>
         </p:nvSpPr>
@@ -24789,7 +25029,7 @@
       </p:sp>
       <p:sp>
         <p:nvSpPr>
-          <p:cNvPr id="145" name="Shape 143"/>
+          <p:cNvPr id="141" name="Shape 139"/>
           <p:cNvSpPr/>
           <p:nvPr/>
         </p:nvSpPr>
@@ -24814,7 +25054,7 @@
       </p:sp>
       <p:sp>
         <p:nvSpPr>
-          <p:cNvPr id="146" name="Text 144"/>
+          <p:cNvPr id="142" name="Text 140"/>
           <p:cNvSpPr/>
           <p:nvPr/>
         </p:nvSpPr>
@@ -24850,7 +25090,7 @@
       </p:sp>
       <p:sp>
         <p:nvSpPr>
-          <p:cNvPr id="147" name="Text 145"/>
+          <p:cNvPr id="143" name="Text 141"/>
           <p:cNvSpPr/>
           <p:nvPr/>
         </p:nvSpPr>
@@ -24886,7 +25126,7 @@
       </p:sp>
       <p:sp>
         <p:nvSpPr>
-          <p:cNvPr id="148" name="Shape 146"/>
+          <p:cNvPr id="144" name="Shape 142"/>
           <p:cNvSpPr/>
           <p:nvPr/>
         </p:nvSpPr>
@@ -24913,7 +25153,7 @@
       </p:sp>
       <p:sp>
         <p:nvSpPr>
-          <p:cNvPr id="149" name="Text 147"/>
+          <p:cNvPr id="145" name="Text 143"/>
           <p:cNvSpPr/>
           <p:nvPr/>
         </p:nvSpPr>
@@ -24949,7 +25189,7 @@
       </p:sp>
       <p:sp>
         <p:nvSpPr>
-          <p:cNvPr id="150" name="Shape 148"/>
+          <p:cNvPr id="146" name="Shape 144"/>
           <p:cNvSpPr/>
           <p:nvPr/>
         </p:nvSpPr>
@@ -24974,7 +25214,7 @@
       </p:sp>
       <p:sp>
         <p:nvSpPr>
-          <p:cNvPr id="151" name="Shape 149"/>
+          <p:cNvPr id="147" name="Shape 145"/>
           <p:cNvSpPr/>
           <p:nvPr/>
         </p:nvSpPr>
@@ -24999,7 +25239,7 @@
       </p:sp>
       <p:sp>
         <p:nvSpPr>
-          <p:cNvPr id="152" name="Text 150"/>
+          <p:cNvPr id="148" name="Text 146"/>
           <p:cNvSpPr/>
           <p:nvPr/>
         </p:nvSpPr>
@@ -25035,7 +25275,7 @@
       </p:sp>
       <p:sp>
         <p:nvSpPr>
-          <p:cNvPr id="153" name="Text 151"/>
+          <p:cNvPr id="149" name="Text 147"/>
           <p:cNvSpPr/>
           <p:nvPr/>
         </p:nvSpPr>
@@ -25071,7 +25311,7 @@
       </p:sp>
       <p:sp>
         <p:nvSpPr>
-          <p:cNvPr id="154" name="Shape 152"/>
+          <p:cNvPr id="150" name="Shape 148"/>
           <p:cNvSpPr/>
           <p:nvPr/>
         </p:nvSpPr>
@@ -25098,7 +25338,7 @@
       </p:sp>
       <p:sp>
         <p:nvSpPr>
-          <p:cNvPr id="155" name="Text 153"/>
+          <p:cNvPr id="151" name="Text 149"/>
           <p:cNvSpPr/>
           <p:nvPr/>
         </p:nvSpPr>
@@ -25134,7 +25374,7 @@
       </p:sp>
       <p:sp>
         <p:nvSpPr>
-          <p:cNvPr id="156" name="Shape 154"/>
+          <p:cNvPr id="152" name="Shape 150"/>
           <p:cNvSpPr/>
           <p:nvPr/>
         </p:nvSpPr>
@@ -25159,7 +25399,7 @@
       </p:sp>
       <p:sp>
         <p:nvSpPr>
-          <p:cNvPr id="157" name="Shape 155"/>
+          <p:cNvPr id="153" name="Shape 151"/>
           <p:cNvSpPr/>
           <p:nvPr/>
         </p:nvSpPr>
@@ -25184,7 +25424,7 @@
       </p:sp>
       <p:sp>
         <p:nvSpPr>
-          <p:cNvPr id="158" name="Text 156"/>
+          <p:cNvPr id="154" name="Text 152"/>
           <p:cNvSpPr/>
           <p:nvPr/>
         </p:nvSpPr>
@@ -25220,7 +25460,7 @@
       </p:sp>
       <p:sp>
         <p:nvSpPr>
-          <p:cNvPr id="159" name="Text 157"/>
+          <p:cNvPr id="155" name="Text 153"/>
           <p:cNvSpPr/>
           <p:nvPr/>
         </p:nvSpPr>
@@ -25256,7 +25496,7 @@
       </p:sp>
       <p:sp>
         <p:nvSpPr>
-          <p:cNvPr id="160" name="Shape 158"/>
+          <p:cNvPr id="156" name="Shape 154"/>
           <p:cNvSpPr/>
           <p:nvPr/>
         </p:nvSpPr>
@@ -25283,7 +25523,7 @@
       </p:sp>
       <p:sp>
         <p:nvSpPr>
-          <p:cNvPr id="161" name="Text 159"/>
+          <p:cNvPr id="157" name="Text 155"/>
           <p:cNvSpPr/>
           <p:nvPr/>
         </p:nvSpPr>
@@ -25319,7 +25559,7 @@
       </p:sp>
       <p:sp>
         <p:nvSpPr>
-          <p:cNvPr id="162" name="Shape 160"/>
+          <p:cNvPr id="158" name="Shape 156"/>
           <p:cNvSpPr/>
           <p:nvPr/>
         </p:nvSpPr>
@@ -25342,7 +25582,7 @@
       </p:sp>
       <p:sp>
         <p:nvSpPr>
-          <p:cNvPr id="163" name="Text 161"/>
+          <p:cNvPr id="159" name="Text 157"/>
           <p:cNvSpPr/>
           <p:nvPr/>
         </p:nvSpPr>
@@ -25378,7 +25618,7 @@
       </p:sp>
       <p:sp>
         <p:nvSpPr>
-          <p:cNvPr id="164" name="Shape 162"/>
+          <p:cNvPr id="160" name="Shape 158"/>
           <p:cNvSpPr/>
           <p:nvPr/>
         </p:nvSpPr>
@@ -25405,7 +25645,7 @@
       </p:sp>
       <p:sp>
         <p:nvSpPr>
-          <p:cNvPr id="165" name="Text 163"/>
+          <p:cNvPr id="161" name="Text 159"/>
           <p:cNvSpPr/>
           <p:nvPr/>
         </p:nvSpPr>
@@ -25441,7 +25681,7 @@
       </p:sp>
       <p:sp>
         <p:nvSpPr>
-          <p:cNvPr id="166" name="Shape 164"/>
+          <p:cNvPr id="162" name="Shape 160"/>
           <p:cNvSpPr/>
           <p:nvPr/>
         </p:nvSpPr>
@@ -25468,7 +25708,7 @@
       </p:sp>
       <p:sp>
         <p:nvSpPr>
-          <p:cNvPr id="167" name="Text 165"/>
+          <p:cNvPr id="163" name="Text 161"/>
           <p:cNvSpPr/>
           <p:nvPr/>
         </p:nvSpPr>
@@ -25504,7 +25744,7 @@
       </p:sp>
       <p:sp>
         <p:nvSpPr>
-          <p:cNvPr id="168" name="Shape 166"/>
+          <p:cNvPr id="164" name="Shape 162"/>
           <p:cNvSpPr/>
           <p:nvPr/>
         </p:nvSpPr>
@@ -25531,7 +25771,7 @@
       </p:sp>
       <p:sp>
         <p:nvSpPr>
-          <p:cNvPr id="169" name="Text 167"/>
+          <p:cNvPr id="165" name="Text 163"/>
           <p:cNvSpPr/>
           <p:nvPr/>
         </p:nvSpPr>
@@ -25567,7 +25807,7 @@
       </p:sp>
       <p:sp>
         <p:nvSpPr>
-          <p:cNvPr id="170" name="Shape 168"/>
+          <p:cNvPr id="166" name="Shape 164"/>
           <p:cNvSpPr/>
           <p:nvPr/>
         </p:nvSpPr>
@@ -25594,7 +25834,7 @@
       </p:sp>
       <p:sp>
         <p:nvSpPr>
-          <p:cNvPr id="171" name="Text 169"/>
+          <p:cNvPr id="167" name="Text 165"/>
           <p:cNvSpPr/>
           <p:nvPr/>
         </p:nvSpPr>
@@ -29554,11 +29794,11 @@
             </a:avLst>
           </a:prstGeom>
           <a:solidFill>
-            <a:srgbClr val="9CA3AF"/>
+            <a:srgbClr val="64748B"/>
           </a:solidFill>
           <a:ln w="12700">
             <a:solidFill>
-              <a:srgbClr val="9CA3AF"/>
+              <a:srgbClr val="64748B"/>
             </a:solidFill>
             <a:prstDash val="solid"/>
           </a:ln>
@@ -29594,7 +29834,7 @@
                   <a:srgbClr val="FFFFFF"/>
                 </a:solidFill>
               </a:rPr>
-              <a:t>NPAW</a:t>
+              <a:t>Data</a:t>
             </a:r>
             <a:endParaRPr lang="en-US" sz="800" dirty="0"/>
           </a:p>
@@ -29608,7 +29848,7 @@
                   <a:srgbClr val="FFFFFF"/>
                 </a:solidFill>
               </a:rPr>
-              <a:t>Historical</a:t>
+              <a:t>&amp; Analytics</a:t>
             </a:r>
             <a:endParaRPr lang="en-US" sz="800" dirty="0"/>
           </a:p>
@@ -29644,7 +29884,7 @@
                   <a:srgbClr val="9CA3AF"/>
                 </a:solidFill>
               </a:rPr>
-              <a:t>0 / 1 In Progress</a:t>
+              <a:t>1 / 2 In Progress</a:t>
             </a:r>
             <a:endParaRPr lang="en-US" sz="750" dirty="0"/>
           </a:p>
@@ -29784,145 +30024,7 @@
         </p:nvSpPr>
         <p:spPr>
           <a:xfrm>
-            <a:off x="164592" y="8462772"/>
-            <a:ext cx="9116568" cy="1476756"/>
-          </a:xfrm>
-          <a:prstGeom prst="rect">
-            <a:avLst/>
-          </a:prstGeom>
-          <a:solidFill>
-            <a:srgbClr val="FFFFFF"/>
-          </a:solidFill>
-          <a:ln w="6350">
-            <a:solidFill>
-              <a:srgbClr val="E5E7EB"/>
-            </a:solidFill>
-            <a:prstDash val="solid"/>
-          </a:ln>
-        </p:spPr>
-      </p:sp>
-      <p:sp>
-        <p:nvSpPr>
-          <p:cNvPr id="133" name="Shape 131"/>
-          <p:cNvSpPr/>
-          <p:nvPr/>
-        </p:nvSpPr>
-        <p:spPr>
-          <a:xfrm>
-            <a:off x="182880" y="8535924"/>
-            <a:ext cx="859536" cy="1330452"/>
-          </a:xfrm>
-          <a:prstGeom prst="roundRect">
-            <a:avLst>
-              <a:gd name="adj" fmla="val 5319"/>
-            </a:avLst>
-          </a:prstGeom>
-          <a:solidFill>
-            <a:srgbClr val="9CA3AF"/>
-          </a:solidFill>
-          <a:ln w="12700">
-            <a:solidFill>
-              <a:srgbClr val="9CA3AF"/>
-            </a:solidFill>
-            <a:prstDash val="solid"/>
-          </a:ln>
-        </p:spPr>
-      </p:sp>
-      <p:sp>
-        <p:nvSpPr>
-          <p:cNvPr id="134" name="Text 132"/>
-          <p:cNvSpPr/>
-          <p:nvPr/>
-        </p:nvSpPr>
-        <p:spPr>
-          <a:xfrm>
-            <a:off x="182880" y="8535924"/>
-            <a:ext cx="859536" cy="1330452"/>
-          </a:xfrm>
-          <a:prstGeom prst="rect">
-            <a:avLst/>
-          </a:prstGeom>
-          <a:noFill/>
-          <a:ln/>
-        </p:spPr>
-        <p:txBody>
-          <a:bodyPr wrap="square" lIns="0" tIns="0" rIns="0" bIns="0" rtlCol="0" anchor="ctr"/>
-          <a:lstStyle/>
-          <a:p>
-            <a:pPr algn="ctr" indent="0" marL="0">
-              <a:buNone/>
-            </a:pPr>
-            <a:r>
-              <a:rPr lang="en-US" sz="800" b="1" dirty="0">
-                <a:solidFill>
-                  <a:srgbClr val="FFFFFF"/>
-                </a:solidFill>
-              </a:rPr>
-              <a:t>Cleeng</a:t>
-            </a:r>
-            <a:endParaRPr lang="en-US" sz="800" dirty="0"/>
-          </a:p>
-          <a:p>
-            <a:pPr algn="ctr" indent="0" marL="0">
-              <a:buNone/>
-            </a:pPr>
-            <a:r>
-              <a:rPr lang="en-US" sz="800" b="1" dirty="0">
-                <a:solidFill>
-                  <a:srgbClr val="FFFFFF"/>
-                </a:solidFill>
-              </a:rPr>
-              <a:t>Historical and Ongoing</a:t>
-            </a:r>
-            <a:endParaRPr lang="en-US" sz="800" dirty="0"/>
-          </a:p>
-        </p:txBody>
-      </p:sp>
-      <p:sp>
-        <p:nvSpPr>
-          <p:cNvPr id="135" name="Text 133"/>
-          <p:cNvSpPr/>
-          <p:nvPr/>
-        </p:nvSpPr>
-        <p:spPr>
-          <a:xfrm>
-            <a:off x="1170432" y="8508492"/>
-            <a:ext cx="8110728" cy="182880"/>
-          </a:xfrm>
-          <a:prstGeom prst="rect">
-            <a:avLst/>
-          </a:prstGeom>
-          <a:noFill/>
-          <a:ln/>
-        </p:spPr>
-        <p:txBody>
-          <a:bodyPr wrap="square" lIns="0" tIns="0" rIns="0" bIns="0" rtlCol="0" anchor="ctr"/>
-          <a:lstStyle/>
-          <a:p>
-            <a:pPr algn="l" indent="0" marL="0">
-              <a:buNone/>
-            </a:pPr>
-            <a:r>
-              <a:rPr lang="en-US" sz="750" dirty="0">
-                <a:solidFill>
-                  <a:srgbClr val="9CA3AF"/>
-                </a:solidFill>
-              </a:rPr>
-              <a:t>1 / 1 In Progress</a:t>
-            </a:r>
-            <a:endParaRPr lang="en-US" sz="750" dirty="0"/>
-          </a:p>
-        </p:txBody>
-      </p:sp>
-      <p:sp>
-        <p:nvSpPr>
-          <p:cNvPr id="136" name="Shape 134"/>
-          <p:cNvSpPr/>
-          <p:nvPr/>
-        </p:nvSpPr>
-        <p:spPr>
-          <a:xfrm>
-            <a:off x="1170432" y="8727948"/>
+            <a:off x="2185416" y="7196328"/>
             <a:ext cx="932688" cy="182880"/>
           </a:xfrm>
           <a:prstGeom prst="roundRect">
@@ -29943,13 +30045,13 @@
       </p:sp>
       <p:sp>
         <p:nvSpPr>
-          <p:cNvPr id="137" name="Text 135"/>
-          <p:cNvSpPr/>
-          <p:nvPr/>
-        </p:nvSpPr>
-        <p:spPr>
-          <a:xfrm>
-            <a:off x="1170432" y="8727948"/>
+          <p:cNvPr id="133" name="Text 131"/>
+          <p:cNvSpPr/>
+          <p:nvPr/>
+        </p:nvSpPr>
+        <p:spPr>
+          <a:xfrm>
+            <a:off x="2185416" y="7196328"/>
             <a:ext cx="932688" cy="182880"/>
           </a:xfrm>
           <a:prstGeom prst="rect">
@@ -29979,13 +30081,13 @@
       </p:sp>
       <p:sp>
         <p:nvSpPr>
-          <p:cNvPr id="138" name="Shape 136"/>
-          <p:cNvSpPr/>
-          <p:nvPr/>
-        </p:nvSpPr>
-        <p:spPr>
-          <a:xfrm>
-            <a:off x="1170432" y="8938260"/>
+          <p:cNvPr id="134" name="Shape 132"/>
+          <p:cNvSpPr/>
+          <p:nvPr/>
+        </p:nvSpPr>
+        <p:spPr>
+          <a:xfrm>
+            <a:off x="2185416" y="7406640"/>
             <a:ext cx="932688" cy="155448"/>
           </a:xfrm>
           <a:prstGeom prst="roundRect">
@@ -30006,13 +30108,13 @@
       </p:sp>
       <p:sp>
         <p:nvSpPr>
-          <p:cNvPr id="139" name="Text 137"/>
-          <p:cNvSpPr/>
-          <p:nvPr/>
-        </p:nvSpPr>
-        <p:spPr>
-          <a:xfrm>
-            <a:off x="1170432" y="8938260"/>
+          <p:cNvPr id="135" name="Text 133"/>
+          <p:cNvSpPr/>
+          <p:nvPr/>
+        </p:nvSpPr>
+        <p:spPr>
+          <a:xfrm>
+            <a:off x="2185416" y="7406640"/>
             <a:ext cx="932688" cy="155448"/>
           </a:xfrm>
           <a:prstGeom prst="rect">
@@ -30042,7 +30144,7 @@
       </p:sp>
       <p:sp>
         <p:nvSpPr>
-          <p:cNvPr id="140" name="Shape 138"/>
+          <p:cNvPr id="136" name="Shape 134"/>
           <p:cNvSpPr/>
           <p:nvPr/>
         </p:nvSpPr>
@@ -30067,7 +30169,7 @@
       </p:sp>
       <p:sp>
         <p:nvSpPr>
-          <p:cNvPr id="141" name="Text 139"/>
+          <p:cNvPr id="137" name="Text 135"/>
           <p:cNvSpPr/>
           <p:nvPr/>
         </p:nvSpPr>
@@ -30103,7 +30205,7 @@
       </p:sp>
       <p:sp>
         <p:nvSpPr>
-          <p:cNvPr id="142" name="Shape 140"/>
+          <p:cNvPr id="138" name="Shape 136"/>
           <p:cNvSpPr/>
           <p:nvPr/>
         </p:nvSpPr>
@@ -30128,7 +30230,7 @@
       </p:sp>
       <p:sp>
         <p:nvSpPr>
-          <p:cNvPr id="143" name="Shape 141"/>
+          <p:cNvPr id="139" name="Shape 137"/>
           <p:cNvSpPr/>
           <p:nvPr/>
         </p:nvSpPr>
@@ -30153,7 +30255,7 @@
       </p:sp>
       <p:sp>
         <p:nvSpPr>
-          <p:cNvPr id="144" name="Text 142"/>
+          <p:cNvPr id="140" name="Text 138"/>
           <p:cNvSpPr/>
           <p:nvPr/>
         </p:nvSpPr>
@@ -30189,7 +30291,7 @@
       </p:sp>
       <p:sp>
         <p:nvSpPr>
-          <p:cNvPr id="145" name="Text 143"/>
+          <p:cNvPr id="141" name="Text 139"/>
           <p:cNvSpPr/>
           <p:nvPr/>
         </p:nvSpPr>
@@ -30225,7 +30327,7 @@
       </p:sp>
       <p:sp>
         <p:nvSpPr>
-          <p:cNvPr id="146" name="Shape 144"/>
+          <p:cNvPr id="142" name="Shape 140"/>
           <p:cNvSpPr/>
           <p:nvPr/>
         </p:nvSpPr>
@@ -30252,7 +30354,7 @@
       </p:sp>
       <p:sp>
         <p:nvSpPr>
-          <p:cNvPr id="147" name="Text 145"/>
+          <p:cNvPr id="143" name="Text 141"/>
           <p:cNvSpPr/>
           <p:nvPr/>
         </p:nvSpPr>
@@ -30288,7 +30390,7 @@
       </p:sp>
       <p:sp>
         <p:nvSpPr>
-          <p:cNvPr id="148" name="Shape 146"/>
+          <p:cNvPr id="144" name="Shape 142"/>
           <p:cNvSpPr/>
           <p:nvPr/>
         </p:nvSpPr>
@@ -30313,7 +30415,7 @@
       </p:sp>
       <p:sp>
         <p:nvSpPr>
-          <p:cNvPr id="149" name="Shape 147"/>
+          <p:cNvPr id="145" name="Shape 143"/>
           <p:cNvSpPr/>
           <p:nvPr/>
         </p:nvSpPr>
@@ -30338,7 +30440,7 @@
       </p:sp>
       <p:sp>
         <p:nvSpPr>
-          <p:cNvPr id="150" name="Text 148"/>
+          <p:cNvPr id="146" name="Text 144"/>
           <p:cNvSpPr/>
           <p:nvPr/>
         </p:nvSpPr>
@@ -30374,7 +30476,7 @@
       </p:sp>
       <p:sp>
         <p:nvSpPr>
-          <p:cNvPr id="151" name="Text 149"/>
+          <p:cNvPr id="147" name="Text 145"/>
           <p:cNvSpPr/>
           <p:nvPr/>
         </p:nvSpPr>
@@ -30410,7 +30512,7 @@
       </p:sp>
       <p:sp>
         <p:nvSpPr>
-          <p:cNvPr id="152" name="Shape 150"/>
+          <p:cNvPr id="148" name="Shape 146"/>
           <p:cNvSpPr/>
           <p:nvPr/>
         </p:nvSpPr>
@@ -30437,7 +30539,7 @@
       </p:sp>
       <p:sp>
         <p:nvSpPr>
-          <p:cNvPr id="153" name="Text 151"/>
+          <p:cNvPr id="149" name="Text 147"/>
           <p:cNvSpPr/>
           <p:nvPr/>
         </p:nvSpPr>
@@ -30473,7 +30575,7 @@
       </p:sp>
       <p:sp>
         <p:nvSpPr>
-          <p:cNvPr id="154" name="Shape 152"/>
+          <p:cNvPr id="150" name="Shape 148"/>
           <p:cNvSpPr/>
           <p:nvPr/>
         </p:nvSpPr>
@@ -30498,7 +30600,7 @@
       </p:sp>
       <p:sp>
         <p:nvSpPr>
-          <p:cNvPr id="155" name="Shape 153"/>
+          <p:cNvPr id="151" name="Shape 149"/>
           <p:cNvSpPr/>
           <p:nvPr/>
         </p:nvSpPr>
@@ -30523,7 +30625,7 @@
       </p:sp>
       <p:sp>
         <p:nvSpPr>
-          <p:cNvPr id="156" name="Text 154"/>
+          <p:cNvPr id="152" name="Text 150"/>
           <p:cNvSpPr/>
           <p:nvPr/>
         </p:nvSpPr>
@@ -30559,7 +30661,7 @@
       </p:sp>
       <p:sp>
         <p:nvSpPr>
-          <p:cNvPr id="157" name="Text 155"/>
+          <p:cNvPr id="153" name="Text 151"/>
           <p:cNvSpPr/>
           <p:nvPr/>
         </p:nvSpPr>
@@ -30595,7 +30697,7 @@
       </p:sp>
       <p:sp>
         <p:nvSpPr>
-          <p:cNvPr id="158" name="Shape 156"/>
+          <p:cNvPr id="154" name="Shape 152"/>
           <p:cNvSpPr/>
           <p:nvPr/>
         </p:nvSpPr>
@@ -30622,7 +30724,7 @@
       </p:sp>
       <p:sp>
         <p:nvSpPr>
-          <p:cNvPr id="159" name="Text 157"/>
+          <p:cNvPr id="155" name="Text 153"/>
           <p:cNvSpPr/>
           <p:nvPr/>
         </p:nvSpPr>
@@ -30658,7 +30760,7 @@
       </p:sp>
       <p:sp>
         <p:nvSpPr>
-          <p:cNvPr id="160" name="Shape 158"/>
+          <p:cNvPr id="156" name="Shape 154"/>
           <p:cNvSpPr/>
           <p:nvPr/>
         </p:nvSpPr>
@@ -30683,7 +30785,7 @@
       </p:sp>
       <p:sp>
         <p:nvSpPr>
-          <p:cNvPr id="161" name="Shape 159"/>
+          <p:cNvPr id="157" name="Shape 155"/>
           <p:cNvSpPr/>
           <p:nvPr/>
         </p:nvSpPr>
@@ -30708,7 +30810,7 @@
       </p:sp>
       <p:sp>
         <p:nvSpPr>
-          <p:cNvPr id="162" name="Text 160"/>
+          <p:cNvPr id="158" name="Text 156"/>
           <p:cNvSpPr/>
           <p:nvPr/>
         </p:nvSpPr>
@@ -30744,7 +30846,7 @@
       </p:sp>
       <p:sp>
         <p:nvSpPr>
-          <p:cNvPr id="163" name="Text 161"/>
+          <p:cNvPr id="159" name="Text 157"/>
           <p:cNvSpPr/>
           <p:nvPr/>
         </p:nvSpPr>
@@ -30780,7 +30882,7 @@
       </p:sp>
       <p:sp>
         <p:nvSpPr>
-          <p:cNvPr id="164" name="Shape 162"/>
+          <p:cNvPr id="160" name="Shape 158"/>
           <p:cNvSpPr/>
           <p:nvPr/>
         </p:nvSpPr>
@@ -30807,7 +30909,7 @@
       </p:sp>
       <p:sp>
         <p:nvSpPr>
-          <p:cNvPr id="165" name="Text 163"/>
+          <p:cNvPr id="161" name="Text 159"/>
           <p:cNvSpPr/>
           <p:nvPr/>
         </p:nvSpPr>
@@ -30843,7 +30945,7 @@
       </p:sp>
       <p:sp>
         <p:nvSpPr>
-          <p:cNvPr id="166" name="Shape 164"/>
+          <p:cNvPr id="162" name="Shape 160"/>
           <p:cNvSpPr/>
           <p:nvPr/>
         </p:nvSpPr>
@@ -30866,7 +30968,7 @@
       </p:sp>
       <p:sp>
         <p:nvSpPr>
-          <p:cNvPr id="167" name="Text 165"/>
+          <p:cNvPr id="163" name="Text 161"/>
           <p:cNvSpPr/>
           <p:nvPr/>
         </p:nvSpPr>
@@ -30902,7 +31004,7 @@
       </p:sp>
       <p:sp>
         <p:nvSpPr>
-          <p:cNvPr id="168" name="Shape 166"/>
+          <p:cNvPr id="164" name="Shape 162"/>
           <p:cNvSpPr/>
           <p:nvPr/>
         </p:nvSpPr>
@@ -30929,7 +31031,7 @@
       </p:sp>
       <p:sp>
         <p:nvSpPr>
-          <p:cNvPr id="169" name="Text 167"/>
+          <p:cNvPr id="165" name="Text 163"/>
           <p:cNvSpPr/>
           <p:nvPr/>
         </p:nvSpPr>
@@ -30965,7 +31067,7 @@
       </p:sp>
       <p:sp>
         <p:nvSpPr>
-          <p:cNvPr id="170" name="Shape 168"/>
+          <p:cNvPr id="166" name="Shape 164"/>
           <p:cNvSpPr/>
           <p:nvPr/>
         </p:nvSpPr>
@@ -30992,7 +31094,7 @@
       </p:sp>
       <p:sp>
         <p:nvSpPr>
-          <p:cNvPr id="171" name="Text 169"/>
+          <p:cNvPr id="167" name="Text 165"/>
           <p:cNvSpPr/>
           <p:nvPr/>
         </p:nvSpPr>
@@ -31028,7 +31130,7 @@
       </p:sp>
       <p:sp>
         <p:nvSpPr>
-          <p:cNvPr id="172" name="Shape 170"/>
+          <p:cNvPr id="168" name="Shape 166"/>
           <p:cNvSpPr/>
           <p:nvPr/>
         </p:nvSpPr>
@@ -31055,7 +31157,7 @@
       </p:sp>
       <p:sp>
         <p:nvSpPr>
-          <p:cNvPr id="173" name="Text 171"/>
+          <p:cNvPr id="169" name="Text 167"/>
           <p:cNvSpPr/>
           <p:nvPr/>
         </p:nvSpPr>
@@ -31091,7 +31193,7 @@
       </p:sp>
       <p:sp>
         <p:nvSpPr>
-          <p:cNvPr id="174" name="Shape 172"/>
+          <p:cNvPr id="170" name="Shape 168"/>
           <p:cNvSpPr/>
           <p:nvPr/>
         </p:nvSpPr>
@@ -31118,7 +31220,7 @@
       </p:sp>
       <p:sp>
         <p:nvSpPr>
-          <p:cNvPr id="175" name="Text 173"/>
+          <p:cNvPr id="171" name="Text 169"/>
           <p:cNvSpPr/>
           <p:nvPr/>
         </p:nvSpPr>
@@ -35618,11 +35720,11 @@
             </a:avLst>
           </a:prstGeom>
           <a:solidFill>
-            <a:srgbClr val="9CA3AF"/>
+            <a:srgbClr val="64748B"/>
           </a:solidFill>
           <a:ln w="12700">
             <a:solidFill>
-              <a:srgbClr val="9CA3AF"/>
+              <a:srgbClr val="64748B"/>
             </a:solidFill>
             <a:prstDash val="solid"/>
           </a:ln>
@@ -35658,7 +35760,7 @@
                   <a:srgbClr val="FFFFFF"/>
                 </a:solidFill>
               </a:rPr>
-              <a:t>NPAW</a:t>
+              <a:t>Data</a:t>
             </a:r>
             <a:endParaRPr lang="en-US" sz="800" dirty="0"/>
           </a:p>
@@ -35672,7 +35774,7 @@
                   <a:srgbClr val="FFFFFF"/>
                 </a:solidFill>
               </a:rPr>
-              <a:t>Historical</a:t>
+              <a:t>&amp; Analytics</a:t>
             </a:r>
             <a:endParaRPr lang="en-US" sz="800" dirty="0"/>
           </a:p>
@@ -35708,7 +35810,7 @@
                   <a:srgbClr val="9CA3AF"/>
                 </a:solidFill>
               </a:rPr>
-              <a:t>0 / 1 In Progress</a:t>
+              <a:t>1 / 2 In Progress</a:t>
             </a:r>
             <a:endParaRPr lang="en-US" sz="750" dirty="0"/>
           </a:p>
@@ -35848,145 +35950,7 @@
         </p:nvSpPr>
         <p:spPr>
           <a:xfrm>
-            <a:off x="164592" y="8462772"/>
-            <a:ext cx="9116568" cy="1476756"/>
-          </a:xfrm>
-          <a:prstGeom prst="rect">
-            <a:avLst/>
-          </a:prstGeom>
-          <a:solidFill>
-            <a:srgbClr val="FFFFFF"/>
-          </a:solidFill>
-          <a:ln w="6350">
-            <a:solidFill>
-              <a:srgbClr val="E5E7EB"/>
-            </a:solidFill>
-            <a:prstDash val="solid"/>
-          </a:ln>
-        </p:spPr>
-      </p:sp>
-      <p:sp>
-        <p:nvSpPr>
-          <p:cNvPr id="150" name="Shape 148"/>
-          <p:cNvSpPr/>
-          <p:nvPr/>
-        </p:nvSpPr>
-        <p:spPr>
-          <a:xfrm>
-            <a:off x="182880" y="8535924"/>
-            <a:ext cx="859536" cy="1330452"/>
-          </a:xfrm>
-          <a:prstGeom prst="roundRect">
-            <a:avLst>
-              <a:gd name="adj" fmla="val 5319"/>
-            </a:avLst>
-          </a:prstGeom>
-          <a:solidFill>
-            <a:srgbClr val="9CA3AF"/>
-          </a:solidFill>
-          <a:ln w="12700">
-            <a:solidFill>
-              <a:srgbClr val="9CA3AF"/>
-            </a:solidFill>
-            <a:prstDash val="solid"/>
-          </a:ln>
-        </p:spPr>
-      </p:sp>
-      <p:sp>
-        <p:nvSpPr>
-          <p:cNvPr id="151" name="Text 149"/>
-          <p:cNvSpPr/>
-          <p:nvPr/>
-        </p:nvSpPr>
-        <p:spPr>
-          <a:xfrm>
-            <a:off x="182880" y="8535924"/>
-            <a:ext cx="859536" cy="1330452"/>
-          </a:xfrm>
-          <a:prstGeom prst="rect">
-            <a:avLst/>
-          </a:prstGeom>
-          <a:noFill/>
-          <a:ln/>
-        </p:spPr>
-        <p:txBody>
-          <a:bodyPr wrap="square" lIns="0" tIns="0" rIns="0" bIns="0" rtlCol="0" anchor="ctr"/>
-          <a:lstStyle/>
-          <a:p>
-            <a:pPr algn="ctr" indent="0" marL="0">
-              <a:buNone/>
-            </a:pPr>
-            <a:r>
-              <a:rPr lang="en-US" sz="800" b="1" dirty="0">
-                <a:solidFill>
-                  <a:srgbClr val="FFFFFF"/>
-                </a:solidFill>
-              </a:rPr>
-              <a:t>Cleeng</a:t>
-            </a:r>
-            <a:endParaRPr lang="en-US" sz="800" dirty="0"/>
-          </a:p>
-          <a:p>
-            <a:pPr algn="ctr" indent="0" marL="0">
-              <a:buNone/>
-            </a:pPr>
-            <a:r>
-              <a:rPr lang="en-US" sz="800" b="1" dirty="0">
-                <a:solidFill>
-                  <a:srgbClr val="FFFFFF"/>
-                </a:solidFill>
-              </a:rPr>
-              <a:t>Historical and Ongoing</a:t>
-            </a:r>
-            <a:endParaRPr lang="en-US" sz="800" dirty="0"/>
-          </a:p>
-        </p:txBody>
-      </p:sp>
-      <p:sp>
-        <p:nvSpPr>
-          <p:cNvPr id="152" name="Text 150"/>
-          <p:cNvSpPr/>
-          <p:nvPr/>
-        </p:nvSpPr>
-        <p:spPr>
-          <a:xfrm>
-            <a:off x="1170432" y="8508492"/>
-            <a:ext cx="8110728" cy="182880"/>
-          </a:xfrm>
-          <a:prstGeom prst="rect">
-            <a:avLst/>
-          </a:prstGeom>
-          <a:noFill/>
-          <a:ln/>
-        </p:spPr>
-        <p:txBody>
-          <a:bodyPr wrap="square" lIns="0" tIns="0" rIns="0" bIns="0" rtlCol="0" anchor="ctr"/>
-          <a:lstStyle/>
-          <a:p>
-            <a:pPr algn="l" indent="0" marL="0">
-              <a:buNone/>
-            </a:pPr>
-            <a:r>
-              <a:rPr lang="en-US" sz="750" dirty="0">
-                <a:solidFill>
-                  <a:srgbClr val="9CA3AF"/>
-                </a:solidFill>
-              </a:rPr>
-              <a:t>1 / 1 In Progress</a:t>
-            </a:r>
-            <a:endParaRPr lang="en-US" sz="750" dirty="0"/>
-          </a:p>
-        </p:txBody>
-      </p:sp>
-      <p:sp>
-        <p:nvSpPr>
-          <p:cNvPr id="153" name="Shape 151"/>
-          <p:cNvSpPr/>
-          <p:nvPr/>
-        </p:nvSpPr>
-        <p:spPr>
-          <a:xfrm>
-            <a:off x="1170432" y="8727948"/>
+            <a:off x="2185416" y="7196328"/>
             <a:ext cx="932688" cy="182880"/>
           </a:xfrm>
           <a:prstGeom prst="roundRect">
@@ -36007,13 +35971,13 @@
       </p:sp>
       <p:sp>
         <p:nvSpPr>
-          <p:cNvPr id="154" name="Text 152"/>
-          <p:cNvSpPr/>
-          <p:nvPr/>
-        </p:nvSpPr>
-        <p:spPr>
-          <a:xfrm>
-            <a:off x="1170432" y="8727948"/>
+          <p:cNvPr id="150" name="Text 148"/>
+          <p:cNvSpPr/>
+          <p:nvPr/>
+        </p:nvSpPr>
+        <p:spPr>
+          <a:xfrm>
+            <a:off x="2185416" y="7196328"/>
             <a:ext cx="932688" cy="182880"/>
           </a:xfrm>
           <a:prstGeom prst="rect">
@@ -36043,13 +36007,13 @@
       </p:sp>
       <p:sp>
         <p:nvSpPr>
-          <p:cNvPr id="155" name="Shape 153"/>
-          <p:cNvSpPr/>
-          <p:nvPr/>
-        </p:nvSpPr>
-        <p:spPr>
-          <a:xfrm>
-            <a:off x="1170432" y="8938260"/>
+          <p:cNvPr id="151" name="Shape 149"/>
+          <p:cNvSpPr/>
+          <p:nvPr/>
+        </p:nvSpPr>
+        <p:spPr>
+          <a:xfrm>
+            <a:off x="2185416" y="7406640"/>
             <a:ext cx="932688" cy="155448"/>
           </a:xfrm>
           <a:prstGeom prst="roundRect">
@@ -36070,13 +36034,13 @@
       </p:sp>
       <p:sp>
         <p:nvSpPr>
-          <p:cNvPr id="156" name="Text 154"/>
-          <p:cNvSpPr/>
-          <p:nvPr/>
-        </p:nvSpPr>
-        <p:spPr>
-          <a:xfrm>
-            <a:off x="1170432" y="8938260"/>
+          <p:cNvPr id="152" name="Text 150"/>
+          <p:cNvSpPr/>
+          <p:nvPr/>
+        </p:nvSpPr>
+        <p:spPr>
+          <a:xfrm>
+            <a:off x="2185416" y="7406640"/>
             <a:ext cx="932688" cy="155448"/>
           </a:xfrm>
           <a:prstGeom prst="rect">
@@ -36106,7 +36070,7 @@
       </p:sp>
       <p:sp>
         <p:nvSpPr>
-          <p:cNvPr id="157" name="Shape 155"/>
+          <p:cNvPr id="153" name="Shape 151"/>
           <p:cNvSpPr/>
           <p:nvPr/>
         </p:nvSpPr>
@@ -36131,7 +36095,7 @@
       </p:sp>
       <p:sp>
         <p:nvSpPr>
-          <p:cNvPr id="158" name="Text 156"/>
+          <p:cNvPr id="154" name="Text 152"/>
           <p:cNvSpPr/>
           <p:nvPr/>
         </p:nvSpPr>
@@ -36167,7 +36131,7 @@
       </p:sp>
       <p:sp>
         <p:nvSpPr>
-          <p:cNvPr id="159" name="Shape 157"/>
+          <p:cNvPr id="155" name="Shape 153"/>
           <p:cNvSpPr/>
           <p:nvPr/>
         </p:nvSpPr>
@@ -36192,7 +36156,7 @@
       </p:sp>
       <p:sp>
         <p:nvSpPr>
-          <p:cNvPr id="160" name="Shape 158"/>
+          <p:cNvPr id="156" name="Shape 154"/>
           <p:cNvSpPr/>
           <p:nvPr/>
         </p:nvSpPr>
@@ -36217,7 +36181,7 @@
       </p:sp>
       <p:sp>
         <p:nvSpPr>
-          <p:cNvPr id="161" name="Text 159"/>
+          <p:cNvPr id="157" name="Text 155"/>
           <p:cNvSpPr/>
           <p:nvPr/>
         </p:nvSpPr>
@@ -36253,7 +36217,7 @@
       </p:sp>
       <p:sp>
         <p:nvSpPr>
-          <p:cNvPr id="162" name="Text 160"/>
+          <p:cNvPr id="158" name="Text 156"/>
           <p:cNvSpPr/>
           <p:nvPr/>
         </p:nvSpPr>
@@ -36289,7 +36253,7 @@
       </p:sp>
       <p:sp>
         <p:nvSpPr>
-          <p:cNvPr id="163" name="Shape 161"/>
+          <p:cNvPr id="159" name="Shape 157"/>
           <p:cNvSpPr/>
           <p:nvPr/>
         </p:nvSpPr>
@@ -36316,7 +36280,7 @@
       </p:sp>
       <p:sp>
         <p:nvSpPr>
-          <p:cNvPr id="164" name="Text 162"/>
+          <p:cNvPr id="160" name="Text 158"/>
           <p:cNvSpPr/>
           <p:nvPr/>
         </p:nvSpPr>
@@ -36352,7 +36316,7 @@
       </p:sp>
       <p:sp>
         <p:nvSpPr>
-          <p:cNvPr id="165" name="Shape 163"/>
+          <p:cNvPr id="161" name="Shape 159"/>
           <p:cNvSpPr/>
           <p:nvPr/>
         </p:nvSpPr>
@@ -36377,7 +36341,7 @@
       </p:sp>
       <p:sp>
         <p:nvSpPr>
-          <p:cNvPr id="166" name="Shape 164"/>
+          <p:cNvPr id="162" name="Shape 160"/>
           <p:cNvSpPr/>
           <p:nvPr/>
         </p:nvSpPr>
@@ -36402,7 +36366,7 @@
       </p:sp>
       <p:sp>
         <p:nvSpPr>
-          <p:cNvPr id="167" name="Text 165"/>
+          <p:cNvPr id="163" name="Text 161"/>
           <p:cNvSpPr/>
           <p:nvPr/>
         </p:nvSpPr>
@@ -36438,7 +36402,7 @@
       </p:sp>
       <p:sp>
         <p:nvSpPr>
-          <p:cNvPr id="168" name="Text 166"/>
+          <p:cNvPr id="164" name="Text 162"/>
           <p:cNvSpPr/>
           <p:nvPr/>
         </p:nvSpPr>
@@ -36474,7 +36438,7 @@
       </p:sp>
       <p:sp>
         <p:nvSpPr>
-          <p:cNvPr id="169" name="Shape 167"/>
+          <p:cNvPr id="165" name="Shape 163"/>
           <p:cNvSpPr/>
           <p:nvPr/>
         </p:nvSpPr>
@@ -36501,7 +36465,7 @@
       </p:sp>
       <p:sp>
         <p:nvSpPr>
-          <p:cNvPr id="170" name="Text 168"/>
+          <p:cNvPr id="166" name="Text 164"/>
           <p:cNvSpPr/>
           <p:nvPr/>
         </p:nvSpPr>
@@ -36537,7 +36501,7 @@
       </p:sp>
       <p:sp>
         <p:nvSpPr>
-          <p:cNvPr id="171" name="Shape 169"/>
+          <p:cNvPr id="167" name="Shape 165"/>
           <p:cNvSpPr/>
           <p:nvPr/>
         </p:nvSpPr>
@@ -36562,7 +36526,7 @@
       </p:sp>
       <p:sp>
         <p:nvSpPr>
-          <p:cNvPr id="172" name="Shape 170"/>
+          <p:cNvPr id="168" name="Shape 166"/>
           <p:cNvSpPr/>
           <p:nvPr/>
         </p:nvSpPr>
@@ -36587,7 +36551,7 @@
       </p:sp>
       <p:sp>
         <p:nvSpPr>
-          <p:cNvPr id="173" name="Text 171"/>
+          <p:cNvPr id="169" name="Text 167"/>
           <p:cNvSpPr/>
           <p:nvPr/>
         </p:nvSpPr>
@@ -36623,7 +36587,7 @@
       </p:sp>
       <p:sp>
         <p:nvSpPr>
-          <p:cNvPr id="174" name="Text 172"/>
+          <p:cNvPr id="170" name="Text 168"/>
           <p:cNvSpPr/>
           <p:nvPr/>
         </p:nvSpPr>
@@ -36659,7 +36623,7 @@
       </p:sp>
       <p:sp>
         <p:nvSpPr>
-          <p:cNvPr id="175" name="Shape 173"/>
+          <p:cNvPr id="171" name="Shape 169"/>
           <p:cNvSpPr/>
           <p:nvPr/>
         </p:nvSpPr>
@@ -36686,7 +36650,7 @@
       </p:sp>
       <p:sp>
         <p:nvSpPr>
-          <p:cNvPr id="176" name="Text 174"/>
+          <p:cNvPr id="172" name="Text 170"/>
           <p:cNvSpPr/>
           <p:nvPr/>
         </p:nvSpPr>
@@ -36722,7 +36686,7 @@
       </p:sp>
       <p:sp>
         <p:nvSpPr>
-          <p:cNvPr id="177" name="Shape 175"/>
+          <p:cNvPr id="173" name="Shape 171"/>
           <p:cNvSpPr/>
           <p:nvPr/>
         </p:nvSpPr>
@@ -36747,7 +36711,7 @@
       </p:sp>
       <p:sp>
         <p:nvSpPr>
-          <p:cNvPr id="178" name="Shape 176"/>
+          <p:cNvPr id="174" name="Shape 172"/>
           <p:cNvSpPr/>
           <p:nvPr/>
         </p:nvSpPr>
@@ -36772,7 +36736,7 @@
       </p:sp>
       <p:sp>
         <p:nvSpPr>
-          <p:cNvPr id="179" name="Text 177"/>
+          <p:cNvPr id="175" name="Text 173"/>
           <p:cNvSpPr/>
           <p:nvPr/>
         </p:nvSpPr>
@@ -36808,7 +36772,7 @@
       </p:sp>
       <p:sp>
         <p:nvSpPr>
-          <p:cNvPr id="180" name="Text 178"/>
+          <p:cNvPr id="176" name="Text 174"/>
           <p:cNvSpPr/>
           <p:nvPr/>
         </p:nvSpPr>
@@ -36844,7 +36808,7 @@
       </p:sp>
       <p:sp>
         <p:nvSpPr>
-          <p:cNvPr id="181" name="Shape 179"/>
+          <p:cNvPr id="177" name="Shape 175"/>
           <p:cNvSpPr/>
           <p:nvPr/>
         </p:nvSpPr>
@@ -36871,7 +36835,7 @@
       </p:sp>
       <p:sp>
         <p:nvSpPr>
-          <p:cNvPr id="182" name="Text 180"/>
+          <p:cNvPr id="178" name="Text 176"/>
           <p:cNvSpPr/>
           <p:nvPr/>
         </p:nvSpPr>
@@ -36907,7 +36871,7 @@
       </p:sp>
       <p:sp>
         <p:nvSpPr>
-          <p:cNvPr id="183" name="Shape 181"/>
+          <p:cNvPr id="179" name="Shape 177"/>
           <p:cNvSpPr/>
           <p:nvPr/>
         </p:nvSpPr>
@@ -36930,7 +36894,7 @@
       </p:sp>
       <p:sp>
         <p:nvSpPr>
-          <p:cNvPr id="184" name="Text 182"/>
+          <p:cNvPr id="180" name="Text 178"/>
           <p:cNvSpPr/>
           <p:nvPr/>
         </p:nvSpPr>
@@ -36966,7 +36930,7 @@
       </p:sp>
       <p:sp>
         <p:nvSpPr>
-          <p:cNvPr id="185" name="Shape 183"/>
+          <p:cNvPr id="181" name="Shape 179"/>
           <p:cNvSpPr/>
           <p:nvPr/>
         </p:nvSpPr>
@@ -36993,7 +36957,7 @@
       </p:sp>
       <p:sp>
         <p:nvSpPr>
-          <p:cNvPr id="186" name="Text 184"/>
+          <p:cNvPr id="182" name="Text 180"/>
           <p:cNvSpPr/>
           <p:nvPr/>
         </p:nvSpPr>
@@ -37029,7 +36993,7 @@
       </p:sp>
       <p:sp>
         <p:nvSpPr>
-          <p:cNvPr id="187" name="Shape 185"/>
+          <p:cNvPr id="183" name="Shape 181"/>
           <p:cNvSpPr/>
           <p:nvPr/>
         </p:nvSpPr>
@@ -37056,7 +37020,7 @@
       </p:sp>
       <p:sp>
         <p:nvSpPr>
-          <p:cNvPr id="188" name="Text 186"/>
+          <p:cNvPr id="184" name="Text 182"/>
           <p:cNvSpPr/>
           <p:nvPr/>
         </p:nvSpPr>
@@ -37092,7 +37056,7 @@
       </p:sp>
       <p:sp>
         <p:nvSpPr>
-          <p:cNvPr id="189" name="Shape 187"/>
+          <p:cNvPr id="185" name="Shape 183"/>
           <p:cNvSpPr/>
           <p:nvPr/>
         </p:nvSpPr>
@@ -37119,7 +37083,7 @@
       </p:sp>
       <p:sp>
         <p:nvSpPr>
-          <p:cNvPr id="190" name="Text 188"/>
+          <p:cNvPr id="186" name="Text 184"/>
           <p:cNvSpPr/>
           <p:nvPr/>
         </p:nvSpPr>
@@ -37155,7 +37119,7 @@
       </p:sp>
       <p:sp>
         <p:nvSpPr>
-          <p:cNvPr id="191" name="Shape 189"/>
+          <p:cNvPr id="187" name="Shape 185"/>
           <p:cNvSpPr/>
           <p:nvPr/>
         </p:nvSpPr>
@@ -37182,7 +37146,7 @@
       </p:sp>
       <p:sp>
         <p:nvSpPr>
-          <p:cNvPr id="192" name="Text 190"/>
+          <p:cNvPr id="188" name="Text 186"/>
           <p:cNvSpPr/>
           <p:nvPr/>
         </p:nvSpPr>

--- a/SABR_CPR_Component_Status.pptx
+++ b/SABR_CPR_Component_Status.pptx
@@ -8420,7 +8420,7 @@
                   <a:srgbClr val="166534"/>
                 </a:solidFill>
               </a:rPr>
-              <a:t>3  Done</a:t>
+              <a:t>2  Done</a:t>
             </a:r>
             <a:endParaRPr lang="en-US" sz="900" dirty="0"/>
           </a:p>
@@ -8805,7 +8805,7 @@
                   <a:srgbClr val="388849"/>
                 </a:solidFill>
               </a:rPr>
-              <a:t>8% Ready</a:t>
+              <a:t>6% Ready</a:t>
             </a:r>
             <a:endParaRPr lang="en-US" sz="1100" dirty="0"/>
           </a:p>
@@ -11597,7 +11597,7 @@
         </p:nvSpPr>
         <p:spPr>
           <a:xfrm>
-            <a:off x="1170432" y="4133088"/>
+            <a:off x="1170432" y="4032504"/>
             <a:ext cx="932688" cy="182880"/>
           </a:xfrm>
           <a:prstGeom prst="roundRect">
@@ -11624,7 +11624,7 @@
         </p:nvSpPr>
         <p:spPr>
           <a:xfrm>
-            <a:off x="1170432" y="4133088"/>
+            <a:off x="1170432" y="4032504"/>
             <a:ext cx="932688" cy="182880"/>
           </a:xfrm>
           <a:prstGeom prst="rect">
@@ -11660,7 +11660,7 @@
         </p:nvSpPr>
         <p:spPr>
           <a:xfrm>
-            <a:off x="1170432" y="4343400"/>
+            <a:off x="1170432" y="4242816"/>
             <a:ext cx="932688" cy="155448"/>
           </a:xfrm>
           <a:prstGeom prst="roundRect">
@@ -11687,7 +11687,7 @@
         </p:nvSpPr>
         <p:spPr>
           <a:xfrm>
-            <a:off x="1170432" y="4343400"/>
+            <a:off x="1170432" y="4242816"/>
             <a:ext cx="932688" cy="155448"/>
           </a:xfrm>
           <a:prstGeom prst="rect">
@@ -11723,7 +11723,7 @@
         </p:nvSpPr>
         <p:spPr>
           <a:xfrm>
-            <a:off x="2185416" y="4133088"/>
+            <a:off x="2185416" y="4032504"/>
             <a:ext cx="932688" cy="182880"/>
           </a:xfrm>
           <a:prstGeom prst="roundRect">
@@ -11750,7 +11750,7 @@
         </p:nvSpPr>
         <p:spPr>
           <a:xfrm>
-            <a:off x="2185416" y="4133088"/>
+            <a:off x="2185416" y="4032504"/>
             <a:ext cx="932688" cy="182880"/>
           </a:xfrm>
           <a:prstGeom prst="rect">
@@ -11786,7 +11786,7 @@
         </p:nvSpPr>
         <p:spPr>
           <a:xfrm>
-            <a:off x="2185416" y="4343400"/>
+            <a:off x="2185416" y="4242816"/>
             <a:ext cx="932688" cy="155448"/>
           </a:xfrm>
           <a:prstGeom prst="roundRect">
@@ -11813,7 +11813,7 @@
         </p:nvSpPr>
         <p:spPr>
           <a:xfrm>
-            <a:off x="2185416" y="4343400"/>
+            <a:off x="2185416" y="4242816"/>
             <a:ext cx="932688" cy="155448"/>
           </a:xfrm>
           <a:prstGeom prst="rect">
@@ -11849,7 +11849,7 @@
         </p:nvSpPr>
         <p:spPr>
           <a:xfrm>
-            <a:off x="3200400" y="4133088"/>
+            <a:off x="3200400" y="4032504"/>
             <a:ext cx="932688" cy="182880"/>
           </a:xfrm>
           <a:prstGeom prst="roundRect">
@@ -11876,7 +11876,7 @@
         </p:nvSpPr>
         <p:spPr>
           <a:xfrm>
-            <a:off x="3200400" y="4133088"/>
+            <a:off x="3200400" y="4032504"/>
             <a:ext cx="932688" cy="182880"/>
           </a:xfrm>
           <a:prstGeom prst="rect">
@@ -11912,7 +11912,7 @@
         </p:nvSpPr>
         <p:spPr>
           <a:xfrm>
-            <a:off x="3200400" y="4343400"/>
+            <a:off x="3200400" y="4242816"/>
             <a:ext cx="932688" cy="155448"/>
           </a:xfrm>
           <a:prstGeom prst="roundRect">
@@ -11939,7 +11939,7 @@
         </p:nvSpPr>
         <p:spPr>
           <a:xfrm>
-            <a:off x="3200400" y="4343400"/>
+            <a:off x="3200400" y="4242816"/>
             <a:ext cx="932688" cy="155448"/>
           </a:xfrm>
           <a:prstGeom prst="rect">
@@ -11975,7 +11975,7 @@
         </p:nvSpPr>
         <p:spPr>
           <a:xfrm>
-            <a:off x="4215384" y="4133088"/>
+            <a:off x="4215384" y="4032504"/>
             <a:ext cx="932688" cy="182880"/>
           </a:xfrm>
           <a:prstGeom prst="roundRect">
@@ -12002,7 +12002,7 @@
         </p:nvSpPr>
         <p:spPr>
           <a:xfrm>
-            <a:off x="4215384" y="4133088"/>
+            <a:off x="4215384" y="4032504"/>
             <a:ext cx="932688" cy="182880"/>
           </a:xfrm>
           <a:prstGeom prst="rect">
@@ -12038,7 +12038,7 @@
         </p:nvSpPr>
         <p:spPr>
           <a:xfrm>
-            <a:off x="4215384" y="4343400"/>
+            <a:off x="4215384" y="4242816"/>
             <a:ext cx="932688" cy="155448"/>
           </a:xfrm>
           <a:prstGeom prst="roundRect">
@@ -12065,7 +12065,7 @@
         </p:nvSpPr>
         <p:spPr>
           <a:xfrm>
-            <a:off x="4215384" y="4343400"/>
+            <a:off x="4215384" y="4242816"/>
             <a:ext cx="932688" cy="155448"/>
           </a:xfrm>
           <a:prstGeom prst="rect">
@@ -12101,7 +12101,7 @@
         </p:nvSpPr>
         <p:spPr>
           <a:xfrm>
-            <a:off x="5230368" y="4133088"/>
+            <a:off x="5230368" y="4032504"/>
             <a:ext cx="932688" cy="182880"/>
           </a:xfrm>
           <a:prstGeom prst="roundRect">
@@ -12128,7 +12128,7 @@
         </p:nvSpPr>
         <p:spPr>
           <a:xfrm>
-            <a:off x="5230368" y="4133088"/>
+            <a:off x="5230368" y="4032504"/>
             <a:ext cx="932688" cy="182880"/>
           </a:xfrm>
           <a:prstGeom prst="rect">
@@ -12164,7 +12164,7 @@
         </p:nvSpPr>
         <p:spPr>
           <a:xfrm>
-            <a:off x="5230368" y="4343400"/>
+            <a:off x="5230368" y="4242816"/>
             <a:ext cx="932688" cy="155448"/>
           </a:xfrm>
           <a:prstGeom prst="roundRect">
@@ -12191,7 +12191,7 @@
         </p:nvSpPr>
         <p:spPr>
           <a:xfrm>
-            <a:off x="5230368" y="4343400"/>
+            <a:off x="5230368" y="4242816"/>
             <a:ext cx="932688" cy="155448"/>
           </a:xfrm>
           <a:prstGeom prst="rect">
@@ -12227,7 +12227,7 @@
         </p:nvSpPr>
         <p:spPr>
           <a:xfrm>
-            <a:off x="6245352" y="4133088"/>
+            <a:off x="6245352" y="4032504"/>
             <a:ext cx="932688" cy="182880"/>
           </a:xfrm>
           <a:prstGeom prst="roundRect">
@@ -12254,7 +12254,7 @@
         </p:nvSpPr>
         <p:spPr>
           <a:xfrm>
-            <a:off x="6245352" y="4133088"/>
+            <a:off x="6245352" y="4032504"/>
             <a:ext cx="932688" cy="182880"/>
           </a:xfrm>
           <a:prstGeom prst="rect">
@@ -12290,7 +12290,7 @@
         </p:nvSpPr>
         <p:spPr>
           <a:xfrm>
-            <a:off x="6245352" y="4343400"/>
+            <a:off x="6245352" y="4242816"/>
             <a:ext cx="932688" cy="155448"/>
           </a:xfrm>
           <a:prstGeom prst="roundRect">
@@ -12317,7 +12317,7 @@
         </p:nvSpPr>
         <p:spPr>
           <a:xfrm>
-            <a:off x="6245352" y="4343400"/>
+            <a:off x="6245352" y="4242816"/>
             <a:ext cx="932688" cy="155448"/>
           </a:xfrm>
           <a:prstGeom prst="rect">
@@ -12353,7 +12353,7 @@
         </p:nvSpPr>
         <p:spPr>
           <a:xfrm>
-            <a:off x="7260336" y="4133088"/>
+            <a:off x="7260336" y="4032504"/>
             <a:ext cx="932688" cy="182880"/>
           </a:xfrm>
           <a:prstGeom prst="roundRect">
@@ -12380,7 +12380,7 @@
         </p:nvSpPr>
         <p:spPr>
           <a:xfrm>
-            <a:off x="7260336" y="4133088"/>
+            <a:off x="7260336" y="4032504"/>
             <a:ext cx="932688" cy="182880"/>
           </a:xfrm>
           <a:prstGeom prst="rect">
@@ -12416,7 +12416,7 @@
         </p:nvSpPr>
         <p:spPr>
           <a:xfrm>
-            <a:off x="7260336" y="4343400"/>
+            <a:off x="7260336" y="4242816"/>
             <a:ext cx="932688" cy="155448"/>
           </a:xfrm>
           <a:prstGeom prst="roundRect">
@@ -12443,7 +12443,7 @@
         </p:nvSpPr>
         <p:spPr>
           <a:xfrm>
-            <a:off x="7260336" y="4343400"/>
+            <a:off x="7260336" y="4242816"/>
             <a:ext cx="932688" cy="155448"/>
           </a:xfrm>
           <a:prstGeom prst="rect">
@@ -12479,7 +12479,7 @@
         </p:nvSpPr>
         <p:spPr>
           <a:xfrm>
-            <a:off x="8275320" y="4133088"/>
+            <a:off x="8275320" y="4032504"/>
             <a:ext cx="932688" cy="182880"/>
           </a:xfrm>
           <a:prstGeom prst="roundRect">
@@ -12506,7 +12506,7 @@
         </p:nvSpPr>
         <p:spPr>
           <a:xfrm>
-            <a:off x="8275320" y="4133088"/>
+            <a:off x="8275320" y="4032504"/>
             <a:ext cx="932688" cy="182880"/>
           </a:xfrm>
           <a:prstGeom prst="rect">
@@ -12542,7 +12542,7 @@
         </p:nvSpPr>
         <p:spPr>
           <a:xfrm>
-            <a:off x="8275320" y="4343400"/>
+            <a:off x="8275320" y="4242816"/>
             <a:ext cx="932688" cy="155448"/>
           </a:xfrm>
           <a:prstGeom prst="roundRect">
@@ -12569,7 +12569,7 @@
         </p:nvSpPr>
         <p:spPr>
           <a:xfrm>
-            <a:off x="8275320" y="4343400"/>
+            <a:off x="8275320" y="4242816"/>
             <a:ext cx="932688" cy="155448"/>
           </a:xfrm>
           <a:prstGeom prst="rect">
@@ -12605,7 +12605,7 @@
         </p:nvSpPr>
         <p:spPr>
           <a:xfrm>
-            <a:off x="1170432" y="4590288"/>
+            <a:off x="1170432" y="4431792"/>
             <a:ext cx="932688" cy="182880"/>
           </a:xfrm>
           <a:prstGeom prst="roundRect">
@@ -12632,7 +12632,7 @@
         </p:nvSpPr>
         <p:spPr>
           <a:xfrm>
-            <a:off x="1170432" y="4590288"/>
+            <a:off x="1170432" y="4431792"/>
             <a:ext cx="932688" cy="182880"/>
           </a:xfrm>
           <a:prstGeom prst="rect">
@@ -12668,7 +12668,7 @@
         </p:nvSpPr>
         <p:spPr>
           <a:xfrm>
-            <a:off x="1170432" y="4800600"/>
+            <a:off x="1170432" y="4642104"/>
             <a:ext cx="932688" cy="155448"/>
           </a:xfrm>
           <a:prstGeom prst="roundRect">
@@ -12695,7 +12695,7 @@
         </p:nvSpPr>
         <p:spPr>
           <a:xfrm>
-            <a:off x="1170432" y="4800600"/>
+            <a:off x="1170432" y="4642104"/>
             <a:ext cx="932688" cy="155448"/>
           </a:xfrm>
           <a:prstGeom prst="rect">
@@ -13735,7 +13735,7 @@
                   <a:srgbClr val="9CA3AF"/>
                 </a:solidFill>
               </a:rPr>
-              <a:t>1 / 3 In Progress · 1 Done</a:t>
+              <a:t>1 / 2 In Progress</a:t>
             </a:r>
             <a:endParaRPr lang="en-US" sz="750" dirty="0"/>
           </a:p>
@@ -13798,7 +13798,7 @@
                   <a:srgbClr val="1E293B"/>
                 </a:solidFill>
               </a:rPr>
-              <a:t>Metadata</a:t>
+              <a:t>NPAW Historical</a:t>
             </a:r>
             <a:endParaRPr lang="en-US" sz="750" dirty="0"/>
           </a:p>
@@ -13924,7 +13924,7 @@
                   <a:srgbClr val="1E293B"/>
                 </a:solidFill>
               </a:rPr>
-              <a:t>Images</a:t>
+              <a:t>Cleeng Historical</a:t>
             </a:r>
             <a:endParaRPr lang="en-US" sz="750" dirty="0"/>
           </a:p>
@@ -14001,132 +14001,6 @@
         </p:nvSpPr>
         <p:spPr>
           <a:xfrm>
-            <a:off x="3200400" y="6175248"/>
-            <a:ext cx="932688" cy="182880"/>
-          </a:xfrm>
-          <a:prstGeom prst="roundRect">
-            <a:avLst>
-              <a:gd name="adj" fmla="val 15000"/>
-            </a:avLst>
-          </a:prstGeom>
-          <a:solidFill>
-            <a:srgbClr val="FFFFFF"/>
-          </a:solidFill>
-          <a:ln w="9525">
-            <a:solidFill>
-              <a:srgbClr val="CBD5E1"/>
-            </a:solidFill>
-            <a:prstDash val="solid"/>
-          </a:ln>
-        </p:spPr>
-      </p:sp>
-      <p:sp>
-        <p:nvSpPr>
-          <p:cNvPr id="185" name="Text 183"/>
-          <p:cNvSpPr/>
-          <p:nvPr/>
-        </p:nvSpPr>
-        <p:spPr>
-          <a:xfrm>
-            <a:off x="3200400" y="6175248"/>
-            <a:ext cx="932688" cy="182880"/>
-          </a:xfrm>
-          <a:prstGeom prst="rect">
-            <a:avLst/>
-          </a:prstGeom>
-          <a:noFill/>
-          <a:ln/>
-        </p:spPr>
-        <p:txBody>
-          <a:bodyPr wrap="square" lIns="0" tIns="0" rIns="0" bIns="0" rtlCol="0" anchor="ctr"/>
-          <a:lstStyle/>
-          <a:p>
-            <a:pPr algn="ctr" indent="0" marL="0">
-              <a:buNone/>
-            </a:pPr>
-            <a:r>
-              <a:rPr lang="en-US" sz="750" b="1" dirty="0">
-                <a:solidFill>
-                  <a:srgbClr val="1E293B"/>
-                </a:solidFill>
-              </a:rPr>
-              <a:t>AMZN Channels</a:t>
-            </a:r>
-            <a:endParaRPr lang="en-US" sz="750" dirty="0"/>
-          </a:p>
-        </p:txBody>
-      </p:sp>
-      <p:sp>
-        <p:nvSpPr>
-          <p:cNvPr id="186" name="Shape 184"/>
-          <p:cNvSpPr/>
-          <p:nvPr/>
-        </p:nvSpPr>
-        <p:spPr>
-          <a:xfrm>
-            <a:off x="3200400" y="6385560"/>
-            <a:ext cx="932688" cy="155448"/>
-          </a:xfrm>
-          <a:prstGeom prst="roundRect">
-            <a:avLst>
-              <a:gd name="adj" fmla="val 17647"/>
-            </a:avLst>
-          </a:prstGeom>
-          <a:solidFill>
-            <a:srgbClr val="DCFCE7"/>
-          </a:solidFill>
-          <a:ln w="12700">
-            <a:solidFill>
-              <a:srgbClr val="15803D"/>
-            </a:solidFill>
-            <a:prstDash val="solid"/>
-          </a:ln>
-        </p:spPr>
-      </p:sp>
-      <p:sp>
-        <p:nvSpPr>
-          <p:cNvPr id="187" name="Text 185"/>
-          <p:cNvSpPr/>
-          <p:nvPr/>
-        </p:nvSpPr>
-        <p:spPr>
-          <a:xfrm>
-            <a:off x="3200400" y="6385560"/>
-            <a:ext cx="932688" cy="155448"/>
-          </a:xfrm>
-          <a:prstGeom prst="rect">
-            <a:avLst/>
-          </a:prstGeom>
-          <a:noFill/>
-          <a:ln/>
-        </p:spPr>
-        <p:txBody>
-          <a:bodyPr wrap="square" lIns="0" tIns="0" rIns="0" bIns="0" rtlCol="0" anchor="ctr"/>
-          <a:lstStyle/>
-          <a:p>
-            <a:pPr algn="ctr" indent="0" marL="0">
-              <a:buNone/>
-            </a:pPr>
-            <a:r>
-              <a:rPr lang="en-US" sz="700" dirty="0">
-                <a:solidFill>
-                  <a:srgbClr val="14532D"/>
-                </a:solidFill>
-              </a:rPr>
-              <a:t>Done</a:t>
-            </a:r>
-            <a:endParaRPr lang="en-US" sz="700" dirty="0"/>
-          </a:p>
-        </p:txBody>
-      </p:sp>
-      <p:sp>
-        <p:nvSpPr>
-          <p:cNvPr id="188" name="Shape 186"/>
-          <p:cNvSpPr/>
-          <p:nvPr/>
-        </p:nvSpPr>
-        <p:spPr>
-          <a:xfrm>
             <a:off x="9372600" y="804672"/>
             <a:ext cx="2834640" cy="6071616"/>
           </a:xfrm>
@@ -14146,7 +14020,7 @@
       </p:sp>
       <p:sp>
         <p:nvSpPr>
-          <p:cNvPr id="189" name="Text 187"/>
+          <p:cNvPr id="185" name="Text 183"/>
           <p:cNvSpPr/>
           <p:nvPr/>
         </p:nvSpPr>
@@ -14182,7 +14056,7 @@
       </p:sp>
       <p:sp>
         <p:nvSpPr>
-          <p:cNvPr id="190" name="Shape 188"/>
+          <p:cNvPr id="186" name="Shape 184"/>
           <p:cNvSpPr/>
           <p:nvPr/>
         </p:nvSpPr>
@@ -14207,7 +14081,7 @@
       </p:sp>
       <p:sp>
         <p:nvSpPr>
-          <p:cNvPr id="191" name="Shape 189"/>
+          <p:cNvPr id="187" name="Shape 185"/>
           <p:cNvSpPr/>
           <p:nvPr/>
         </p:nvSpPr>
@@ -14232,7 +14106,7 @@
       </p:sp>
       <p:sp>
         <p:nvSpPr>
-          <p:cNvPr id="192" name="Text 190"/>
+          <p:cNvPr id="188" name="Text 186"/>
           <p:cNvSpPr/>
           <p:nvPr/>
         </p:nvSpPr>
@@ -14268,7 +14142,7 @@
       </p:sp>
       <p:sp>
         <p:nvSpPr>
-          <p:cNvPr id="193" name="Text 191"/>
+          <p:cNvPr id="189" name="Text 187"/>
           <p:cNvSpPr/>
           <p:nvPr/>
         </p:nvSpPr>
@@ -14304,7 +14178,7 @@
       </p:sp>
       <p:sp>
         <p:nvSpPr>
-          <p:cNvPr id="194" name="Shape 192"/>
+          <p:cNvPr id="190" name="Shape 188"/>
           <p:cNvSpPr/>
           <p:nvPr/>
         </p:nvSpPr>
@@ -14331,7 +14205,7 @@
       </p:sp>
       <p:sp>
         <p:nvSpPr>
-          <p:cNvPr id="195" name="Text 193"/>
+          <p:cNvPr id="191" name="Text 189"/>
           <p:cNvSpPr/>
           <p:nvPr/>
         </p:nvSpPr>
@@ -14367,7 +14241,7 @@
       </p:sp>
       <p:sp>
         <p:nvSpPr>
-          <p:cNvPr id="196" name="Shape 194"/>
+          <p:cNvPr id="192" name="Shape 190"/>
           <p:cNvSpPr/>
           <p:nvPr/>
         </p:nvSpPr>
@@ -14392,7 +14266,7 @@
       </p:sp>
       <p:sp>
         <p:nvSpPr>
-          <p:cNvPr id="197" name="Shape 195"/>
+          <p:cNvPr id="193" name="Shape 191"/>
           <p:cNvSpPr/>
           <p:nvPr/>
         </p:nvSpPr>
@@ -14417,7 +14291,7 @@
       </p:sp>
       <p:sp>
         <p:nvSpPr>
-          <p:cNvPr id="198" name="Text 196"/>
+          <p:cNvPr id="194" name="Text 192"/>
           <p:cNvSpPr/>
           <p:nvPr/>
         </p:nvSpPr>
@@ -14453,7 +14327,7 @@
       </p:sp>
       <p:sp>
         <p:nvSpPr>
-          <p:cNvPr id="199" name="Text 197"/>
+          <p:cNvPr id="195" name="Text 193"/>
           <p:cNvSpPr/>
           <p:nvPr/>
         </p:nvSpPr>
@@ -14489,7 +14363,7 @@
       </p:sp>
       <p:sp>
         <p:nvSpPr>
-          <p:cNvPr id="200" name="Shape 198"/>
+          <p:cNvPr id="196" name="Shape 194"/>
           <p:cNvSpPr/>
           <p:nvPr/>
         </p:nvSpPr>
@@ -14516,7 +14390,7 @@
       </p:sp>
       <p:sp>
         <p:nvSpPr>
-          <p:cNvPr id="201" name="Text 199"/>
+          <p:cNvPr id="197" name="Text 195"/>
           <p:cNvSpPr/>
           <p:nvPr/>
         </p:nvSpPr>
@@ -14552,7 +14426,7 @@
       </p:sp>
       <p:sp>
         <p:nvSpPr>
-          <p:cNvPr id="202" name="Shape 200"/>
+          <p:cNvPr id="198" name="Shape 196"/>
           <p:cNvSpPr/>
           <p:nvPr/>
         </p:nvSpPr>
@@ -14577,7 +14451,7 @@
       </p:sp>
       <p:sp>
         <p:nvSpPr>
-          <p:cNvPr id="203" name="Shape 201"/>
+          <p:cNvPr id="199" name="Shape 197"/>
           <p:cNvSpPr/>
           <p:nvPr/>
         </p:nvSpPr>
@@ -14602,7 +14476,7 @@
       </p:sp>
       <p:sp>
         <p:nvSpPr>
-          <p:cNvPr id="204" name="Text 202"/>
+          <p:cNvPr id="200" name="Text 198"/>
           <p:cNvSpPr/>
           <p:nvPr/>
         </p:nvSpPr>
@@ -14638,7 +14512,7 @@
       </p:sp>
       <p:sp>
         <p:nvSpPr>
-          <p:cNvPr id="205" name="Text 203"/>
+          <p:cNvPr id="201" name="Text 199"/>
           <p:cNvSpPr/>
           <p:nvPr/>
         </p:nvSpPr>
@@ -14674,7 +14548,7 @@
       </p:sp>
       <p:sp>
         <p:nvSpPr>
-          <p:cNvPr id="206" name="Shape 204"/>
+          <p:cNvPr id="202" name="Shape 200"/>
           <p:cNvSpPr/>
           <p:nvPr/>
         </p:nvSpPr>
@@ -14701,7 +14575,7 @@
       </p:sp>
       <p:sp>
         <p:nvSpPr>
-          <p:cNvPr id="207" name="Text 205"/>
+          <p:cNvPr id="203" name="Text 201"/>
           <p:cNvSpPr/>
           <p:nvPr/>
         </p:nvSpPr>
@@ -14737,7 +14611,7 @@
       </p:sp>
       <p:sp>
         <p:nvSpPr>
-          <p:cNvPr id="208" name="Shape 206"/>
+          <p:cNvPr id="204" name="Shape 202"/>
           <p:cNvSpPr/>
           <p:nvPr/>
         </p:nvSpPr>
@@ -14762,7 +14636,7 @@
       </p:sp>
       <p:sp>
         <p:nvSpPr>
-          <p:cNvPr id="209" name="Shape 207"/>
+          <p:cNvPr id="205" name="Shape 203"/>
           <p:cNvSpPr/>
           <p:nvPr/>
         </p:nvSpPr>
@@ -14787,7 +14661,7 @@
       </p:sp>
       <p:sp>
         <p:nvSpPr>
-          <p:cNvPr id="210" name="Text 208"/>
+          <p:cNvPr id="206" name="Text 204"/>
           <p:cNvSpPr/>
           <p:nvPr/>
         </p:nvSpPr>
@@ -14823,7 +14697,7 @@
       </p:sp>
       <p:sp>
         <p:nvSpPr>
-          <p:cNvPr id="211" name="Text 209"/>
+          <p:cNvPr id="207" name="Text 205"/>
           <p:cNvSpPr/>
           <p:nvPr/>
         </p:nvSpPr>
@@ -14859,7 +14733,7 @@
       </p:sp>
       <p:sp>
         <p:nvSpPr>
-          <p:cNvPr id="212" name="Shape 210"/>
+          <p:cNvPr id="208" name="Shape 206"/>
           <p:cNvSpPr/>
           <p:nvPr/>
         </p:nvSpPr>
@@ -14886,7 +14760,7 @@
       </p:sp>
       <p:sp>
         <p:nvSpPr>
-          <p:cNvPr id="213" name="Text 211"/>
+          <p:cNvPr id="209" name="Text 207"/>
           <p:cNvSpPr/>
           <p:nvPr/>
         </p:nvSpPr>
@@ -14922,7 +14796,7 @@
       </p:sp>
       <p:sp>
         <p:nvSpPr>
-          <p:cNvPr id="214" name="Shape 212"/>
+          <p:cNvPr id="210" name="Shape 208"/>
           <p:cNvSpPr/>
           <p:nvPr/>
         </p:nvSpPr>
@@ -14945,7 +14819,7 @@
       </p:sp>
       <p:sp>
         <p:nvSpPr>
-          <p:cNvPr id="215" name="Text 213"/>
+          <p:cNvPr id="211" name="Text 209"/>
           <p:cNvSpPr/>
           <p:nvPr/>
         </p:nvSpPr>
@@ -14981,7 +14855,7 @@
       </p:sp>
       <p:sp>
         <p:nvSpPr>
-          <p:cNvPr id="216" name="Shape 214"/>
+          <p:cNvPr id="212" name="Shape 210"/>
           <p:cNvSpPr/>
           <p:nvPr/>
         </p:nvSpPr>
@@ -15008,7 +14882,7 @@
       </p:sp>
       <p:sp>
         <p:nvSpPr>
-          <p:cNvPr id="217" name="Text 215"/>
+          <p:cNvPr id="213" name="Text 211"/>
           <p:cNvSpPr/>
           <p:nvPr/>
         </p:nvSpPr>
@@ -15044,7 +14918,7 @@
       </p:sp>
       <p:sp>
         <p:nvSpPr>
-          <p:cNvPr id="218" name="Text 216"/>
+          <p:cNvPr id="214" name="Text 212"/>
           <p:cNvSpPr/>
           <p:nvPr/>
         </p:nvSpPr>
@@ -15080,7 +14954,7 @@
       </p:sp>
       <p:sp>
         <p:nvSpPr>
-          <p:cNvPr id="219" name="Shape 217"/>
+          <p:cNvPr id="215" name="Shape 213"/>
           <p:cNvSpPr/>
           <p:nvPr/>
         </p:nvSpPr>
@@ -15107,7 +14981,7 @@
       </p:sp>
       <p:sp>
         <p:nvSpPr>
-          <p:cNvPr id="220" name="Text 218"/>
+          <p:cNvPr id="216" name="Text 214"/>
           <p:cNvSpPr/>
           <p:nvPr/>
         </p:nvSpPr>
@@ -15143,7 +15017,7 @@
       </p:sp>
       <p:sp>
         <p:nvSpPr>
-          <p:cNvPr id="221" name="Text 219"/>
+          <p:cNvPr id="217" name="Text 215"/>
           <p:cNvSpPr/>
           <p:nvPr/>
         </p:nvSpPr>
@@ -15179,7 +15053,7 @@
       </p:sp>
       <p:sp>
         <p:nvSpPr>
-          <p:cNvPr id="222" name="Shape 220"/>
+          <p:cNvPr id="218" name="Shape 216"/>
           <p:cNvSpPr/>
           <p:nvPr/>
         </p:nvSpPr>
@@ -15206,7 +15080,7 @@
       </p:sp>
       <p:sp>
         <p:nvSpPr>
-          <p:cNvPr id="223" name="Text 221"/>
+          <p:cNvPr id="219" name="Text 217"/>
           <p:cNvSpPr/>
           <p:nvPr/>
         </p:nvSpPr>
@@ -15242,7 +15116,7 @@
       </p:sp>
       <p:sp>
         <p:nvSpPr>
-          <p:cNvPr id="224" name="Text 222"/>
+          <p:cNvPr id="220" name="Text 218"/>
           <p:cNvSpPr/>
           <p:nvPr/>
         </p:nvSpPr>
@@ -15278,7 +15152,7 @@
       </p:sp>
       <p:sp>
         <p:nvSpPr>
-          <p:cNvPr id="225" name="Shape 223"/>
+          <p:cNvPr id="221" name="Shape 219"/>
           <p:cNvSpPr/>
           <p:nvPr/>
         </p:nvSpPr>
@@ -15305,7 +15179,7 @@
       </p:sp>
       <p:sp>
         <p:nvSpPr>
-          <p:cNvPr id="226" name="Text 224"/>
+          <p:cNvPr id="222" name="Text 220"/>
           <p:cNvSpPr/>
           <p:nvPr/>
         </p:nvSpPr>
@@ -15341,7 +15215,7 @@
       </p:sp>
       <p:sp>
         <p:nvSpPr>
-          <p:cNvPr id="227" name="Text 225"/>
+          <p:cNvPr id="223" name="Text 221"/>
           <p:cNvSpPr/>
           <p:nvPr/>
         </p:nvSpPr>
@@ -15377,7 +15251,7 @@
       </p:sp>
       <p:sp>
         <p:nvSpPr>
-          <p:cNvPr id="228" name="Shape 226"/>
+          <p:cNvPr id="224" name="Shape 222"/>
           <p:cNvSpPr/>
           <p:nvPr/>
         </p:nvSpPr>
@@ -15404,7 +15278,7 @@
       </p:sp>
       <p:sp>
         <p:nvSpPr>
-          <p:cNvPr id="229" name="Text 227"/>
+          <p:cNvPr id="225" name="Text 223"/>
           <p:cNvSpPr/>
           <p:nvPr/>
         </p:nvSpPr>
@@ -15440,7 +15314,7 @@
       </p:sp>
       <p:sp>
         <p:nvSpPr>
-          <p:cNvPr id="230" name="Text 228"/>
+          <p:cNvPr id="226" name="Text 224"/>
           <p:cNvSpPr/>
           <p:nvPr/>
         </p:nvSpPr>
@@ -15748,7 +15622,7 @@
                   <a:srgbClr val="1D4ED8"/>
                 </a:solidFill>
               </a:rPr>
-              <a:t>16  In Progress</a:t>
+              <a:t>15  In Progress</a:t>
             </a:r>
             <a:endParaRPr lang="en-US" sz="900" dirty="0"/>
           </a:p>
@@ -15811,7 +15685,7 @@
                   <a:srgbClr val="374151"/>
                 </a:solidFill>
               </a:rPr>
-              <a:t>4  Not Started</a:t>
+              <a:t>3  Not Started</a:t>
             </a:r>
             <a:endParaRPr lang="en-US" sz="900" dirty="0"/>
           </a:p>
@@ -16070,7 +15944,7 @@
                   <a:srgbClr val="388849"/>
                 </a:solidFill>
               </a:rPr>
-              <a:t>9% Ready</a:t>
+              <a:t>10% Ready</a:t>
             </a:r>
             <a:endParaRPr lang="en-US" sz="1100" dirty="0"/>
           </a:p>
@@ -19114,396 +18988,6 @@
         </p:nvSpPr>
         <p:spPr>
           <a:xfrm>
-            <a:off x="164592" y="6931152"/>
-            <a:ext cx="9116568" cy="1476756"/>
-          </a:xfrm>
-          <a:prstGeom prst="rect">
-            <a:avLst/>
-          </a:prstGeom>
-          <a:solidFill>
-            <a:srgbClr val="FAFBFC"/>
-          </a:solidFill>
-          <a:ln w="6350">
-            <a:solidFill>
-              <a:srgbClr val="E5E7EB"/>
-            </a:solidFill>
-            <a:prstDash val="solid"/>
-          </a:ln>
-        </p:spPr>
-      </p:sp>
-      <p:sp>
-        <p:nvSpPr>
-          <p:cNvPr id="117" name="Shape 115"/>
-          <p:cNvSpPr/>
-          <p:nvPr/>
-        </p:nvSpPr>
-        <p:spPr>
-          <a:xfrm>
-            <a:off x="182880" y="7004304"/>
-            <a:ext cx="859536" cy="1330452"/>
-          </a:xfrm>
-          <a:prstGeom prst="roundRect">
-            <a:avLst>
-              <a:gd name="adj" fmla="val 5319"/>
-            </a:avLst>
-          </a:prstGeom>
-          <a:solidFill>
-            <a:srgbClr val="64748B"/>
-          </a:solidFill>
-          <a:ln w="12700">
-            <a:solidFill>
-              <a:srgbClr val="64748B"/>
-            </a:solidFill>
-            <a:prstDash val="solid"/>
-          </a:ln>
-        </p:spPr>
-      </p:sp>
-      <p:sp>
-        <p:nvSpPr>
-          <p:cNvPr id="118" name="Text 116"/>
-          <p:cNvSpPr/>
-          <p:nvPr/>
-        </p:nvSpPr>
-        <p:spPr>
-          <a:xfrm>
-            <a:off x="182880" y="7004304"/>
-            <a:ext cx="859536" cy="1330452"/>
-          </a:xfrm>
-          <a:prstGeom prst="rect">
-            <a:avLst/>
-          </a:prstGeom>
-          <a:noFill/>
-          <a:ln/>
-        </p:spPr>
-        <p:txBody>
-          <a:bodyPr wrap="square" lIns="0" tIns="0" rIns="0" bIns="0" rtlCol="0" anchor="ctr"/>
-          <a:lstStyle/>
-          <a:p>
-            <a:pPr algn="ctr" indent="0" marL="0">
-              <a:buNone/>
-            </a:pPr>
-            <a:r>
-              <a:rPr lang="en-US" sz="800" b="1" dirty="0">
-                <a:solidFill>
-                  <a:srgbClr val="FFFFFF"/>
-                </a:solidFill>
-              </a:rPr>
-              <a:t>Data</a:t>
-            </a:r>
-            <a:endParaRPr lang="en-US" sz="800" dirty="0"/>
-          </a:p>
-          <a:p>
-            <a:pPr algn="ctr" indent="0" marL="0">
-              <a:buNone/>
-            </a:pPr>
-            <a:r>
-              <a:rPr lang="en-US" sz="800" b="1" dirty="0">
-                <a:solidFill>
-                  <a:srgbClr val="FFFFFF"/>
-                </a:solidFill>
-              </a:rPr>
-              <a:t>&amp; Analytics</a:t>
-            </a:r>
-            <a:endParaRPr lang="en-US" sz="800" dirty="0"/>
-          </a:p>
-        </p:txBody>
-      </p:sp>
-      <p:sp>
-        <p:nvSpPr>
-          <p:cNvPr id="119" name="Text 117"/>
-          <p:cNvSpPr/>
-          <p:nvPr/>
-        </p:nvSpPr>
-        <p:spPr>
-          <a:xfrm>
-            <a:off x="1170432" y="6976872"/>
-            <a:ext cx="8110728" cy="182880"/>
-          </a:xfrm>
-          <a:prstGeom prst="rect">
-            <a:avLst/>
-          </a:prstGeom>
-          <a:noFill/>
-          <a:ln/>
-        </p:spPr>
-        <p:txBody>
-          <a:bodyPr wrap="square" lIns="0" tIns="0" rIns="0" bIns="0" rtlCol="0" anchor="ctr"/>
-          <a:lstStyle/>
-          <a:p>
-            <a:pPr algn="l" indent="0" marL="0">
-              <a:buNone/>
-            </a:pPr>
-            <a:r>
-              <a:rPr lang="en-US" sz="750" dirty="0">
-                <a:solidFill>
-                  <a:srgbClr val="9CA3AF"/>
-                </a:solidFill>
-              </a:rPr>
-              <a:t>1 / 2 In Progress</a:t>
-            </a:r>
-            <a:endParaRPr lang="en-US" sz="750" dirty="0"/>
-          </a:p>
-        </p:txBody>
-      </p:sp>
-      <p:sp>
-        <p:nvSpPr>
-          <p:cNvPr id="120" name="Shape 118"/>
-          <p:cNvSpPr/>
-          <p:nvPr/>
-        </p:nvSpPr>
-        <p:spPr>
-          <a:xfrm>
-            <a:off x="1170432" y="7196328"/>
-            <a:ext cx="932688" cy="182880"/>
-          </a:xfrm>
-          <a:prstGeom prst="roundRect">
-            <a:avLst>
-              <a:gd name="adj" fmla="val 15000"/>
-            </a:avLst>
-          </a:prstGeom>
-          <a:solidFill>
-            <a:srgbClr val="FFFFFF"/>
-          </a:solidFill>
-          <a:ln w="9525">
-            <a:solidFill>
-              <a:srgbClr val="CBD5E1"/>
-            </a:solidFill>
-            <a:prstDash val="solid"/>
-          </a:ln>
-        </p:spPr>
-      </p:sp>
-      <p:sp>
-        <p:nvSpPr>
-          <p:cNvPr id="121" name="Text 119"/>
-          <p:cNvSpPr/>
-          <p:nvPr/>
-        </p:nvSpPr>
-        <p:spPr>
-          <a:xfrm>
-            <a:off x="1170432" y="7196328"/>
-            <a:ext cx="932688" cy="182880"/>
-          </a:xfrm>
-          <a:prstGeom prst="rect">
-            <a:avLst/>
-          </a:prstGeom>
-          <a:noFill/>
-          <a:ln/>
-        </p:spPr>
-        <p:txBody>
-          <a:bodyPr wrap="square" lIns="0" tIns="0" rIns="0" bIns="0" rtlCol="0" anchor="ctr"/>
-          <a:lstStyle/>
-          <a:p>
-            <a:pPr algn="ctr" indent="0" marL="0">
-              <a:buNone/>
-            </a:pPr>
-            <a:r>
-              <a:rPr lang="en-US" sz="750" b="1" dirty="0">
-                <a:solidFill>
-                  <a:srgbClr val="1E293B"/>
-                </a:solidFill>
-              </a:rPr>
-              <a:t>Metadata</a:t>
-            </a:r>
-            <a:endParaRPr lang="en-US" sz="750" dirty="0"/>
-          </a:p>
-        </p:txBody>
-      </p:sp>
-      <p:sp>
-        <p:nvSpPr>
-          <p:cNvPr id="122" name="Shape 120"/>
-          <p:cNvSpPr/>
-          <p:nvPr/>
-        </p:nvSpPr>
-        <p:spPr>
-          <a:xfrm>
-            <a:off x="1170432" y="7406640"/>
-            <a:ext cx="932688" cy="155448"/>
-          </a:xfrm>
-          <a:prstGeom prst="roundRect">
-            <a:avLst>
-              <a:gd name="adj" fmla="val 17647"/>
-            </a:avLst>
-          </a:prstGeom>
-          <a:solidFill>
-            <a:srgbClr val="F3F4F6"/>
-          </a:solidFill>
-          <a:ln w="9525">
-            <a:solidFill>
-              <a:srgbClr val="D1D5DB"/>
-            </a:solidFill>
-            <a:prstDash val="solid"/>
-          </a:ln>
-        </p:spPr>
-      </p:sp>
-      <p:sp>
-        <p:nvSpPr>
-          <p:cNvPr id="123" name="Text 121"/>
-          <p:cNvSpPr/>
-          <p:nvPr/>
-        </p:nvSpPr>
-        <p:spPr>
-          <a:xfrm>
-            <a:off x="1170432" y="7406640"/>
-            <a:ext cx="932688" cy="155448"/>
-          </a:xfrm>
-          <a:prstGeom prst="rect">
-            <a:avLst/>
-          </a:prstGeom>
-          <a:noFill/>
-          <a:ln/>
-        </p:spPr>
-        <p:txBody>
-          <a:bodyPr wrap="square" lIns="0" tIns="0" rIns="0" bIns="0" rtlCol="0" anchor="ctr"/>
-          <a:lstStyle/>
-          <a:p>
-            <a:pPr algn="ctr" indent="0" marL="0">
-              <a:buNone/>
-            </a:pPr>
-            <a:r>
-              <a:rPr lang="en-US" sz="700" dirty="0">
-                <a:solidFill>
-                  <a:srgbClr val="374151"/>
-                </a:solidFill>
-              </a:rPr>
-              <a:t>Not Started</a:t>
-            </a:r>
-            <a:endParaRPr lang="en-US" sz="700" dirty="0"/>
-          </a:p>
-        </p:txBody>
-      </p:sp>
-      <p:sp>
-        <p:nvSpPr>
-          <p:cNvPr id="124" name="Shape 122"/>
-          <p:cNvSpPr/>
-          <p:nvPr/>
-        </p:nvSpPr>
-        <p:spPr>
-          <a:xfrm>
-            <a:off x="2185416" y="7196328"/>
-            <a:ext cx="932688" cy="182880"/>
-          </a:xfrm>
-          <a:prstGeom prst="roundRect">
-            <a:avLst>
-              <a:gd name="adj" fmla="val 15000"/>
-            </a:avLst>
-          </a:prstGeom>
-          <a:solidFill>
-            <a:srgbClr val="FFFFFF"/>
-          </a:solidFill>
-          <a:ln w="9525">
-            <a:solidFill>
-              <a:srgbClr val="CBD5E1"/>
-            </a:solidFill>
-            <a:prstDash val="solid"/>
-          </a:ln>
-        </p:spPr>
-      </p:sp>
-      <p:sp>
-        <p:nvSpPr>
-          <p:cNvPr id="125" name="Text 123"/>
-          <p:cNvSpPr/>
-          <p:nvPr/>
-        </p:nvSpPr>
-        <p:spPr>
-          <a:xfrm>
-            <a:off x="2185416" y="7196328"/>
-            <a:ext cx="932688" cy="182880"/>
-          </a:xfrm>
-          <a:prstGeom prst="rect">
-            <a:avLst/>
-          </a:prstGeom>
-          <a:noFill/>
-          <a:ln/>
-        </p:spPr>
-        <p:txBody>
-          <a:bodyPr wrap="square" lIns="0" tIns="0" rIns="0" bIns="0" rtlCol="0" anchor="ctr"/>
-          <a:lstStyle/>
-          <a:p>
-            <a:pPr algn="ctr" indent="0" marL="0">
-              <a:buNone/>
-            </a:pPr>
-            <a:r>
-              <a:rPr lang="en-US" sz="750" b="1" dirty="0">
-                <a:solidFill>
-                  <a:srgbClr val="1E293B"/>
-                </a:solidFill>
-              </a:rPr>
-              <a:t>Images</a:t>
-            </a:r>
-            <a:endParaRPr lang="en-US" sz="750" dirty="0"/>
-          </a:p>
-        </p:txBody>
-      </p:sp>
-      <p:sp>
-        <p:nvSpPr>
-          <p:cNvPr id="126" name="Shape 124"/>
-          <p:cNvSpPr/>
-          <p:nvPr/>
-        </p:nvSpPr>
-        <p:spPr>
-          <a:xfrm>
-            <a:off x="2185416" y="7406640"/>
-            <a:ext cx="932688" cy="155448"/>
-          </a:xfrm>
-          <a:prstGeom prst="roundRect">
-            <a:avLst>
-              <a:gd name="adj" fmla="val 17647"/>
-            </a:avLst>
-          </a:prstGeom>
-          <a:solidFill>
-            <a:srgbClr val="1558A8"/>
-          </a:solidFill>
-          <a:ln w="12700">
-            <a:solidFill>
-              <a:srgbClr val="1558A8"/>
-            </a:solidFill>
-            <a:prstDash val="solid"/>
-          </a:ln>
-        </p:spPr>
-      </p:sp>
-      <p:sp>
-        <p:nvSpPr>
-          <p:cNvPr id="127" name="Text 125"/>
-          <p:cNvSpPr/>
-          <p:nvPr/>
-        </p:nvSpPr>
-        <p:spPr>
-          <a:xfrm>
-            <a:off x="2185416" y="7406640"/>
-            <a:ext cx="932688" cy="155448"/>
-          </a:xfrm>
-          <a:prstGeom prst="rect">
-            <a:avLst/>
-          </a:prstGeom>
-          <a:noFill/>
-          <a:ln/>
-        </p:spPr>
-        <p:txBody>
-          <a:bodyPr wrap="square" lIns="0" tIns="0" rIns="0" bIns="0" rtlCol="0" anchor="ctr"/>
-          <a:lstStyle/>
-          <a:p>
-            <a:pPr algn="ctr" indent="0" marL="0">
-              <a:buNone/>
-            </a:pPr>
-            <a:r>
-              <a:rPr lang="en-US" sz="700" dirty="0">
-                <a:solidFill>
-                  <a:srgbClr val="FFFFFF"/>
-                </a:solidFill>
-              </a:rPr>
-              <a:t>In Progress</a:t>
-            </a:r>
-            <a:endParaRPr lang="en-US" sz="700" dirty="0"/>
-          </a:p>
-        </p:txBody>
-      </p:sp>
-      <p:sp>
-        <p:nvSpPr>
-          <p:cNvPr id="128" name="Shape 126"/>
-          <p:cNvSpPr/>
-          <p:nvPr/>
-        </p:nvSpPr>
-        <p:spPr>
-          <a:xfrm>
             <a:off x="9372600" y="804672"/>
             <a:ext cx="2834640" cy="6071616"/>
           </a:xfrm>
@@ -19523,7 +19007,7 @@
       </p:sp>
       <p:sp>
         <p:nvSpPr>
-          <p:cNvPr id="129" name="Text 127"/>
+          <p:cNvPr id="117" name="Text 115"/>
           <p:cNvSpPr/>
           <p:nvPr/>
         </p:nvSpPr>
@@ -19559,7 +19043,7 @@
       </p:sp>
       <p:sp>
         <p:nvSpPr>
-          <p:cNvPr id="130" name="Shape 128"/>
+          <p:cNvPr id="118" name="Shape 116"/>
           <p:cNvSpPr/>
           <p:nvPr/>
         </p:nvSpPr>
@@ -19584,7 +19068,7 @@
       </p:sp>
       <p:sp>
         <p:nvSpPr>
-          <p:cNvPr id="131" name="Shape 129"/>
+          <p:cNvPr id="119" name="Shape 117"/>
           <p:cNvSpPr/>
           <p:nvPr/>
         </p:nvSpPr>
@@ -19609,7 +19093,7 @@
       </p:sp>
       <p:sp>
         <p:nvSpPr>
-          <p:cNvPr id="132" name="Text 130"/>
+          <p:cNvPr id="120" name="Text 118"/>
           <p:cNvSpPr/>
           <p:nvPr/>
         </p:nvSpPr>
@@ -19645,7 +19129,7 @@
       </p:sp>
       <p:sp>
         <p:nvSpPr>
-          <p:cNvPr id="133" name="Text 131"/>
+          <p:cNvPr id="121" name="Text 119"/>
           <p:cNvSpPr/>
           <p:nvPr/>
         </p:nvSpPr>
@@ -19681,7 +19165,7 @@
       </p:sp>
       <p:sp>
         <p:nvSpPr>
-          <p:cNvPr id="134" name="Shape 132"/>
+          <p:cNvPr id="122" name="Shape 120"/>
           <p:cNvSpPr/>
           <p:nvPr/>
         </p:nvSpPr>
@@ -19708,7 +19192,7 @@
       </p:sp>
       <p:sp>
         <p:nvSpPr>
-          <p:cNvPr id="135" name="Text 133"/>
+          <p:cNvPr id="123" name="Text 121"/>
           <p:cNvSpPr/>
           <p:nvPr/>
         </p:nvSpPr>
@@ -19744,7 +19228,7 @@
       </p:sp>
       <p:sp>
         <p:nvSpPr>
-          <p:cNvPr id="136" name="Shape 134"/>
+          <p:cNvPr id="124" name="Shape 122"/>
           <p:cNvSpPr/>
           <p:nvPr/>
         </p:nvSpPr>
@@ -19769,7 +19253,7 @@
       </p:sp>
       <p:sp>
         <p:nvSpPr>
-          <p:cNvPr id="137" name="Shape 135"/>
+          <p:cNvPr id="125" name="Shape 123"/>
           <p:cNvSpPr/>
           <p:nvPr/>
         </p:nvSpPr>
@@ -19794,7 +19278,7 @@
       </p:sp>
       <p:sp>
         <p:nvSpPr>
-          <p:cNvPr id="138" name="Text 136"/>
+          <p:cNvPr id="126" name="Text 124"/>
           <p:cNvSpPr/>
           <p:nvPr/>
         </p:nvSpPr>
@@ -19830,7 +19314,7 @@
       </p:sp>
       <p:sp>
         <p:nvSpPr>
-          <p:cNvPr id="139" name="Text 137"/>
+          <p:cNvPr id="127" name="Text 125"/>
           <p:cNvSpPr/>
           <p:nvPr/>
         </p:nvSpPr>
@@ -19866,7 +19350,7 @@
       </p:sp>
       <p:sp>
         <p:nvSpPr>
-          <p:cNvPr id="140" name="Shape 138"/>
+          <p:cNvPr id="128" name="Shape 126"/>
           <p:cNvSpPr/>
           <p:nvPr/>
         </p:nvSpPr>
@@ -19893,7 +19377,7 @@
       </p:sp>
       <p:sp>
         <p:nvSpPr>
-          <p:cNvPr id="141" name="Text 139"/>
+          <p:cNvPr id="129" name="Text 127"/>
           <p:cNvSpPr/>
           <p:nvPr/>
         </p:nvSpPr>
@@ -19929,7 +19413,7 @@
       </p:sp>
       <p:sp>
         <p:nvSpPr>
-          <p:cNvPr id="142" name="Shape 140"/>
+          <p:cNvPr id="130" name="Shape 128"/>
           <p:cNvSpPr/>
           <p:nvPr/>
         </p:nvSpPr>
@@ -19954,7 +19438,7 @@
       </p:sp>
       <p:sp>
         <p:nvSpPr>
-          <p:cNvPr id="143" name="Shape 141"/>
+          <p:cNvPr id="131" name="Shape 129"/>
           <p:cNvSpPr/>
           <p:nvPr/>
         </p:nvSpPr>
@@ -19979,7 +19463,7 @@
       </p:sp>
       <p:sp>
         <p:nvSpPr>
-          <p:cNvPr id="144" name="Text 142"/>
+          <p:cNvPr id="132" name="Text 130"/>
           <p:cNvSpPr/>
           <p:nvPr/>
         </p:nvSpPr>
@@ -20015,7 +19499,7 @@
       </p:sp>
       <p:sp>
         <p:nvSpPr>
-          <p:cNvPr id="145" name="Text 143"/>
+          <p:cNvPr id="133" name="Text 131"/>
           <p:cNvSpPr/>
           <p:nvPr/>
         </p:nvSpPr>
@@ -20051,7 +19535,7 @@
       </p:sp>
       <p:sp>
         <p:nvSpPr>
-          <p:cNvPr id="146" name="Shape 144"/>
+          <p:cNvPr id="134" name="Shape 132"/>
           <p:cNvSpPr/>
           <p:nvPr/>
         </p:nvSpPr>
@@ -20078,7 +19562,7 @@
       </p:sp>
       <p:sp>
         <p:nvSpPr>
-          <p:cNvPr id="147" name="Text 145"/>
+          <p:cNvPr id="135" name="Text 133"/>
           <p:cNvSpPr/>
           <p:nvPr/>
         </p:nvSpPr>
@@ -20114,7 +19598,7 @@
       </p:sp>
       <p:sp>
         <p:nvSpPr>
-          <p:cNvPr id="148" name="Shape 146"/>
+          <p:cNvPr id="136" name="Shape 134"/>
           <p:cNvSpPr/>
           <p:nvPr/>
         </p:nvSpPr>
@@ -20139,7 +19623,7 @@
       </p:sp>
       <p:sp>
         <p:nvSpPr>
-          <p:cNvPr id="149" name="Shape 147"/>
+          <p:cNvPr id="137" name="Shape 135"/>
           <p:cNvSpPr/>
           <p:nvPr/>
         </p:nvSpPr>
@@ -20164,7 +19648,7 @@
       </p:sp>
       <p:sp>
         <p:nvSpPr>
-          <p:cNvPr id="150" name="Text 148"/>
+          <p:cNvPr id="138" name="Text 136"/>
           <p:cNvSpPr/>
           <p:nvPr/>
         </p:nvSpPr>
@@ -20200,7 +19684,7 @@
       </p:sp>
       <p:sp>
         <p:nvSpPr>
-          <p:cNvPr id="151" name="Text 149"/>
+          <p:cNvPr id="139" name="Text 137"/>
           <p:cNvSpPr/>
           <p:nvPr/>
         </p:nvSpPr>
@@ -20236,7 +19720,7 @@
       </p:sp>
       <p:sp>
         <p:nvSpPr>
-          <p:cNvPr id="152" name="Shape 150"/>
+          <p:cNvPr id="140" name="Shape 138"/>
           <p:cNvSpPr/>
           <p:nvPr/>
         </p:nvSpPr>
@@ -20263,7 +19747,7 @@
       </p:sp>
       <p:sp>
         <p:nvSpPr>
-          <p:cNvPr id="153" name="Text 151"/>
+          <p:cNvPr id="141" name="Text 139"/>
           <p:cNvSpPr/>
           <p:nvPr/>
         </p:nvSpPr>
@@ -20299,7 +19783,7 @@
       </p:sp>
       <p:sp>
         <p:nvSpPr>
-          <p:cNvPr id="154" name="Shape 152"/>
+          <p:cNvPr id="142" name="Shape 140"/>
           <p:cNvSpPr/>
           <p:nvPr/>
         </p:nvSpPr>
@@ -20322,7 +19806,7 @@
       </p:sp>
       <p:sp>
         <p:nvSpPr>
-          <p:cNvPr id="155" name="Text 153"/>
+          <p:cNvPr id="143" name="Text 141"/>
           <p:cNvSpPr/>
           <p:nvPr/>
         </p:nvSpPr>
@@ -20358,7 +19842,7 @@
       </p:sp>
       <p:sp>
         <p:nvSpPr>
-          <p:cNvPr id="156" name="Shape 154"/>
+          <p:cNvPr id="144" name="Shape 142"/>
           <p:cNvSpPr/>
           <p:nvPr/>
         </p:nvSpPr>
@@ -20385,7 +19869,7 @@
       </p:sp>
       <p:sp>
         <p:nvSpPr>
-          <p:cNvPr id="157" name="Text 155"/>
+          <p:cNvPr id="145" name="Text 143"/>
           <p:cNvSpPr/>
           <p:nvPr/>
         </p:nvSpPr>
@@ -20421,7 +19905,7 @@
       </p:sp>
       <p:sp>
         <p:nvSpPr>
-          <p:cNvPr id="158" name="Shape 156"/>
+          <p:cNvPr id="146" name="Shape 144"/>
           <p:cNvSpPr/>
           <p:nvPr/>
         </p:nvSpPr>
@@ -20448,7 +19932,7 @@
       </p:sp>
       <p:sp>
         <p:nvSpPr>
-          <p:cNvPr id="159" name="Text 157"/>
+          <p:cNvPr id="147" name="Text 145"/>
           <p:cNvSpPr/>
           <p:nvPr/>
         </p:nvSpPr>
@@ -20484,7 +19968,7 @@
       </p:sp>
       <p:sp>
         <p:nvSpPr>
-          <p:cNvPr id="160" name="Shape 158"/>
+          <p:cNvPr id="148" name="Shape 146"/>
           <p:cNvSpPr/>
           <p:nvPr/>
         </p:nvSpPr>
@@ -20511,7 +19995,7 @@
       </p:sp>
       <p:sp>
         <p:nvSpPr>
-          <p:cNvPr id="161" name="Text 159"/>
+          <p:cNvPr id="149" name="Text 147"/>
           <p:cNvSpPr/>
           <p:nvPr/>
         </p:nvSpPr>
@@ -20547,7 +20031,7 @@
       </p:sp>
       <p:sp>
         <p:nvSpPr>
-          <p:cNvPr id="162" name="Shape 160"/>
+          <p:cNvPr id="150" name="Shape 148"/>
           <p:cNvSpPr/>
           <p:nvPr/>
         </p:nvSpPr>
@@ -20574,7 +20058,7 @@
       </p:sp>
       <p:sp>
         <p:nvSpPr>
-          <p:cNvPr id="163" name="Text 161"/>
+          <p:cNvPr id="151" name="Text 149"/>
           <p:cNvSpPr/>
           <p:nvPr/>
         </p:nvSpPr>
@@ -20882,7 +20366,7 @@
                   <a:srgbClr val="1D4ED8"/>
                 </a:solidFill>
               </a:rPr>
-              <a:t>17  In Progress</a:t>
+              <a:t>16  In Progress</a:t>
             </a:r>
             <a:endParaRPr lang="en-US" sz="900" dirty="0"/>
           </a:p>
@@ -20945,7 +20429,7 @@
                   <a:srgbClr val="374151"/>
                 </a:solidFill>
               </a:rPr>
-              <a:t>4  Not Started</a:t>
+              <a:t>3  Not Started</a:t>
             </a:r>
             <a:endParaRPr lang="en-US" sz="900" dirty="0"/>
           </a:p>
@@ -21204,7 +20688,7 @@
                   <a:srgbClr val="388849"/>
                 </a:solidFill>
               </a:rPr>
-              <a:t>9% Ready</a:t>
+              <a:t>10% Ready</a:t>
             </a:r>
             <a:endParaRPr lang="en-US" sz="1100" dirty="0"/>
           </a:p>
@@ -24374,396 +23858,6 @@
         </p:nvSpPr>
         <p:spPr>
           <a:xfrm>
-            <a:off x="164592" y="6931152"/>
-            <a:ext cx="9116568" cy="1476756"/>
-          </a:xfrm>
-          <a:prstGeom prst="rect">
-            <a:avLst/>
-          </a:prstGeom>
-          <a:solidFill>
-            <a:srgbClr val="FAFBFC"/>
-          </a:solidFill>
-          <a:ln w="6350">
-            <a:solidFill>
-              <a:srgbClr val="E5E7EB"/>
-            </a:solidFill>
-            <a:prstDash val="solid"/>
-          </a:ln>
-        </p:spPr>
-      </p:sp>
-      <p:sp>
-        <p:nvSpPr>
-          <p:cNvPr id="121" name="Shape 119"/>
-          <p:cNvSpPr/>
-          <p:nvPr/>
-        </p:nvSpPr>
-        <p:spPr>
-          <a:xfrm>
-            <a:off x="182880" y="7004304"/>
-            <a:ext cx="859536" cy="1330452"/>
-          </a:xfrm>
-          <a:prstGeom prst="roundRect">
-            <a:avLst>
-              <a:gd name="adj" fmla="val 5319"/>
-            </a:avLst>
-          </a:prstGeom>
-          <a:solidFill>
-            <a:srgbClr val="64748B"/>
-          </a:solidFill>
-          <a:ln w="12700">
-            <a:solidFill>
-              <a:srgbClr val="64748B"/>
-            </a:solidFill>
-            <a:prstDash val="solid"/>
-          </a:ln>
-        </p:spPr>
-      </p:sp>
-      <p:sp>
-        <p:nvSpPr>
-          <p:cNvPr id="122" name="Text 120"/>
-          <p:cNvSpPr/>
-          <p:nvPr/>
-        </p:nvSpPr>
-        <p:spPr>
-          <a:xfrm>
-            <a:off x="182880" y="7004304"/>
-            <a:ext cx="859536" cy="1330452"/>
-          </a:xfrm>
-          <a:prstGeom prst="rect">
-            <a:avLst/>
-          </a:prstGeom>
-          <a:noFill/>
-          <a:ln/>
-        </p:spPr>
-        <p:txBody>
-          <a:bodyPr wrap="square" lIns="0" tIns="0" rIns="0" bIns="0" rtlCol="0" anchor="ctr"/>
-          <a:lstStyle/>
-          <a:p>
-            <a:pPr algn="ctr" indent="0" marL="0">
-              <a:buNone/>
-            </a:pPr>
-            <a:r>
-              <a:rPr lang="en-US" sz="800" b="1" dirty="0">
-                <a:solidFill>
-                  <a:srgbClr val="FFFFFF"/>
-                </a:solidFill>
-              </a:rPr>
-              <a:t>Data</a:t>
-            </a:r>
-            <a:endParaRPr lang="en-US" sz="800" dirty="0"/>
-          </a:p>
-          <a:p>
-            <a:pPr algn="ctr" indent="0" marL="0">
-              <a:buNone/>
-            </a:pPr>
-            <a:r>
-              <a:rPr lang="en-US" sz="800" b="1" dirty="0">
-                <a:solidFill>
-                  <a:srgbClr val="FFFFFF"/>
-                </a:solidFill>
-              </a:rPr>
-              <a:t>&amp; Analytics</a:t>
-            </a:r>
-            <a:endParaRPr lang="en-US" sz="800" dirty="0"/>
-          </a:p>
-        </p:txBody>
-      </p:sp>
-      <p:sp>
-        <p:nvSpPr>
-          <p:cNvPr id="123" name="Text 121"/>
-          <p:cNvSpPr/>
-          <p:nvPr/>
-        </p:nvSpPr>
-        <p:spPr>
-          <a:xfrm>
-            <a:off x="1170432" y="6976872"/>
-            <a:ext cx="8110728" cy="182880"/>
-          </a:xfrm>
-          <a:prstGeom prst="rect">
-            <a:avLst/>
-          </a:prstGeom>
-          <a:noFill/>
-          <a:ln/>
-        </p:spPr>
-        <p:txBody>
-          <a:bodyPr wrap="square" lIns="0" tIns="0" rIns="0" bIns="0" rtlCol="0" anchor="ctr"/>
-          <a:lstStyle/>
-          <a:p>
-            <a:pPr algn="l" indent="0" marL="0">
-              <a:buNone/>
-            </a:pPr>
-            <a:r>
-              <a:rPr lang="en-US" sz="750" dirty="0">
-                <a:solidFill>
-                  <a:srgbClr val="9CA3AF"/>
-                </a:solidFill>
-              </a:rPr>
-              <a:t>1 / 2 In Progress</a:t>
-            </a:r>
-            <a:endParaRPr lang="en-US" sz="750" dirty="0"/>
-          </a:p>
-        </p:txBody>
-      </p:sp>
-      <p:sp>
-        <p:nvSpPr>
-          <p:cNvPr id="124" name="Shape 122"/>
-          <p:cNvSpPr/>
-          <p:nvPr/>
-        </p:nvSpPr>
-        <p:spPr>
-          <a:xfrm>
-            <a:off x="1170432" y="7196328"/>
-            <a:ext cx="932688" cy="182880"/>
-          </a:xfrm>
-          <a:prstGeom prst="roundRect">
-            <a:avLst>
-              <a:gd name="adj" fmla="val 15000"/>
-            </a:avLst>
-          </a:prstGeom>
-          <a:solidFill>
-            <a:srgbClr val="FFFFFF"/>
-          </a:solidFill>
-          <a:ln w="9525">
-            <a:solidFill>
-              <a:srgbClr val="CBD5E1"/>
-            </a:solidFill>
-            <a:prstDash val="solid"/>
-          </a:ln>
-        </p:spPr>
-      </p:sp>
-      <p:sp>
-        <p:nvSpPr>
-          <p:cNvPr id="125" name="Text 123"/>
-          <p:cNvSpPr/>
-          <p:nvPr/>
-        </p:nvSpPr>
-        <p:spPr>
-          <a:xfrm>
-            <a:off x="1170432" y="7196328"/>
-            <a:ext cx="932688" cy="182880"/>
-          </a:xfrm>
-          <a:prstGeom prst="rect">
-            <a:avLst/>
-          </a:prstGeom>
-          <a:noFill/>
-          <a:ln/>
-        </p:spPr>
-        <p:txBody>
-          <a:bodyPr wrap="square" lIns="0" tIns="0" rIns="0" bIns="0" rtlCol="0" anchor="ctr"/>
-          <a:lstStyle/>
-          <a:p>
-            <a:pPr algn="ctr" indent="0" marL="0">
-              <a:buNone/>
-            </a:pPr>
-            <a:r>
-              <a:rPr lang="en-US" sz="750" b="1" dirty="0">
-                <a:solidFill>
-                  <a:srgbClr val="1E293B"/>
-                </a:solidFill>
-              </a:rPr>
-              <a:t>Metadata</a:t>
-            </a:r>
-            <a:endParaRPr lang="en-US" sz="750" dirty="0"/>
-          </a:p>
-        </p:txBody>
-      </p:sp>
-      <p:sp>
-        <p:nvSpPr>
-          <p:cNvPr id="126" name="Shape 124"/>
-          <p:cNvSpPr/>
-          <p:nvPr/>
-        </p:nvSpPr>
-        <p:spPr>
-          <a:xfrm>
-            <a:off x="1170432" y="7406640"/>
-            <a:ext cx="932688" cy="155448"/>
-          </a:xfrm>
-          <a:prstGeom prst="roundRect">
-            <a:avLst>
-              <a:gd name="adj" fmla="val 17647"/>
-            </a:avLst>
-          </a:prstGeom>
-          <a:solidFill>
-            <a:srgbClr val="F3F4F6"/>
-          </a:solidFill>
-          <a:ln w="9525">
-            <a:solidFill>
-              <a:srgbClr val="D1D5DB"/>
-            </a:solidFill>
-            <a:prstDash val="solid"/>
-          </a:ln>
-        </p:spPr>
-      </p:sp>
-      <p:sp>
-        <p:nvSpPr>
-          <p:cNvPr id="127" name="Text 125"/>
-          <p:cNvSpPr/>
-          <p:nvPr/>
-        </p:nvSpPr>
-        <p:spPr>
-          <a:xfrm>
-            <a:off x="1170432" y="7406640"/>
-            <a:ext cx="932688" cy="155448"/>
-          </a:xfrm>
-          <a:prstGeom prst="rect">
-            <a:avLst/>
-          </a:prstGeom>
-          <a:noFill/>
-          <a:ln/>
-        </p:spPr>
-        <p:txBody>
-          <a:bodyPr wrap="square" lIns="0" tIns="0" rIns="0" bIns="0" rtlCol="0" anchor="ctr"/>
-          <a:lstStyle/>
-          <a:p>
-            <a:pPr algn="ctr" indent="0" marL="0">
-              <a:buNone/>
-            </a:pPr>
-            <a:r>
-              <a:rPr lang="en-US" sz="700" dirty="0">
-                <a:solidFill>
-                  <a:srgbClr val="374151"/>
-                </a:solidFill>
-              </a:rPr>
-              <a:t>Not Started</a:t>
-            </a:r>
-            <a:endParaRPr lang="en-US" sz="700" dirty="0"/>
-          </a:p>
-        </p:txBody>
-      </p:sp>
-      <p:sp>
-        <p:nvSpPr>
-          <p:cNvPr id="128" name="Shape 126"/>
-          <p:cNvSpPr/>
-          <p:nvPr/>
-        </p:nvSpPr>
-        <p:spPr>
-          <a:xfrm>
-            <a:off x="2185416" y="7196328"/>
-            <a:ext cx="932688" cy="182880"/>
-          </a:xfrm>
-          <a:prstGeom prst="roundRect">
-            <a:avLst>
-              <a:gd name="adj" fmla="val 15000"/>
-            </a:avLst>
-          </a:prstGeom>
-          <a:solidFill>
-            <a:srgbClr val="FFFFFF"/>
-          </a:solidFill>
-          <a:ln w="9525">
-            <a:solidFill>
-              <a:srgbClr val="CBD5E1"/>
-            </a:solidFill>
-            <a:prstDash val="solid"/>
-          </a:ln>
-        </p:spPr>
-      </p:sp>
-      <p:sp>
-        <p:nvSpPr>
-          <p:cNvPr id="129" name="Text 127"/>
-          <p:cNvSpPr/>
-          <p:nvPr/>
-        </p:nvSpPr>
-        <p:spPr>
-          <a:xfrm>
-            <a:off x="2185416" y="7196328"/>
-            <a:ext cx="932688" cy="182880"/>
-          </a:xfrm>
-          <a:prstGeom prst="rect">
-            <a:avLst/>
-          </a:prstGeom>
-          <a:noFill/>
-          <a:ln/>
-        </p:spPr>
-        <p:txBody>
-          <a:bodyPr wrap="square" lIns="0" tIns="0" rIns="0" bIns="0" rtlCol="0" anchor="ctr"/>
-          <a:lstStyle/>
-          <a:p>
-            <a:pPr algn="ctr" indent="0" marL="0">
-              <a:buNone/>
-            </a:pPr>
-            <a:r>
-              <a:rPr lang="en-US" sz="750" b="1" dirty="0">
-                <a:solidFill>
-                  <a:srgbClr val="1E293B"/>
-                </a:solidFill>
-              </a:rPr>
-              <a:t>Images</a:t>
-            </a:r>
-            <a:endParaRPr lang="en-US" sz="750" dirty="0"/>
-          </a:p>
-        </p:txBody>
-      </p:sp>
-      <p:sp>
-        <p:nvSpPr>
-          <p:cNvPr id="130" name="Shape 128"/>
-          <p:cNvSpPr/>
-          <p:nvPr/>
-        </p:nvSpPr>
-        <p:spPr>
-          <a:xfrm>
-            <a:off x="2185416" y="7406640"/>
-            <a:ext cx="932688" cy="155448"/>
-          </a:xfrm>
-          <a:prstGeom prst="roundRect">
-            <a:avLst>
-              <a:gd name="adj" fmla="val 17647"/>
-            </a:avLst>
-          </a:prstGeom>
-          <a:solidFill>
-            <a:srgbClr val="1558A8"/>
-          </a:solidFill>
-          <a:ln w="12700">
-            <a:solidFill>
-              <a:srgbClr val="1558A8"/>
-            </a:solidFill>
-            <a:prstDash val="solid"/>
-          </a:ln>
-        </p:spPr>
-      </p:sp>
-      <p:sp>
-        <p:nvSpPr>
-          <p:cNvPr id="131" name="Text 129"/>
-          <p:cNvSpPr/>
-          <p:nvPr/>
-        </p:nvSpPr>
-        <p:spPr>
-          <a:xfrm>
-            <a:off x="2185416" y="7406640"/>
-            <a:ext cx="932688" cy="155448"/>
-          </a:xfrm>
-          <a:prstGeom prst="rect">
-            <a:avLst/>
-          </a:prstGeom>
-          <a:noFill/>
-          <a:ln/>
-        </p:spPr>
-        <p:txBody>
-          <a:bodyPr wrap="square" lIns="0" tIns="0" rIns="0" bIns="0" rtlCol="0" anchor="ctr"/>
-          <a:lstStyle/>
-          <a:p>
-            <a:pPr algn="ctr" indent="0" marL="0">
-              <a:buNone/>
-            </a:pPr>
-            <a:r>
-              <a:rPr lang="en-US" sz="700" dirty="0">
-                <a:solidFill>
-                  <a:srgbClr val="FFFFFF"/>
-                </a:solidFill>
-              </a:rPr>
-              <a:t>In Progress</a:t>
-            </a:r>
-            <a:endParaRPr lang="en-US" sz="700" dirty="0"/>
-          </a:p>
-        </p:txBody>
-      </p:sp>
-      <p:sp>
-        <p:nvSpPr>
-          <p:cNvPr id="132" name="Shape 130"/>
-          <p:cNvSpPr/>
-          <p:nvPr/>
-        </p:nvSpPr>
-        <p:spPr>
-          <a:xfrm>
             <a:off x="9372600" y="804672"/>
             <a:ext cx="2834640" cy="6071616"/>
           </a:xfrm>
@@ -24783,7 +23877,7 @@
       </p:sp>
       <p:sp>
         <p:nvSpPr>
-          <p:cNvPr id="133" name="Text 131"/>
+          <p:cNvPr id="121" name="Text 119"/>
           <p:cNvSpPr/>
           <p:nvPr/>
         </p:nvSpPr>
@@ -24819,7 +23913,7 @@
       </p:sp>
       <p:sp>
         <p:nvSpPr>
-          <p:cNvPr id="134" name="Shape 132"/>
+          <p:cNvPr id="122" name="Shape 120"/>
           <p:cNvSpPr/>
           <p:nvPr/>
         </p:nvSpPr>
@@ -24844,7 +23938,7 @@
       </p:sp>
       <p:sp>
         <p:nvSpPr>
-          <p:cNvPr id="135" name="Shape 133"/>
+          <p:cNvPr id="123" name="Shape 121"/>
           <p:cNvSpPr/>
           <p:nvPr/>
         </p:nvSpPr>
@@ -24869,7 +23963,7 @@
       </p:sp>
       <p:sp>
         <p:nvSpPr>
-          <p:cNvPr id="136" name="Text 134"/>
+          <p:cNvPr id="124" name="Text 122"/>
           <p:cNvSpPr/>
           <p:nvPr/>
         </p:nvSpPr>
@@ -24905,7 +23999,7 @@
       </p:sp>
       <p:sp>
         <p:nvSpPr>
-          <p:cNvPr id="137" name="Text 135"/>
+          <p:cNvPr id="125" name="Text 123"/>
           <p:cNvSpPr/>
           <p:nvPr/>
         </p:nvSpPr>
@@ -24941,7 +24035,7 @@
       </p:sp>
       <p:sp>
         <p:nvSpPr>
-          <p:cNvPr id="138" name="Shape 136"/>
+          <p:cNvPr id="126" name="Shape 124"/>
           <p:cNvSpPr/>
           <p:nvPr/>
         </p:nvSpPr>
@@ -24968,7 +24062,7 @@
       </p:sp>
       <p:sp>
         <p:nvSpPr>
-          <p:cNvPr id="139" name="Text 137"/>
+          <p:cNvPr id="127" name="Text 125"/>
           <p:cNvSpPr/>
           <p:nvPr/>
         </p:nvSpPr>
@@ -25004,7 +24098,7 @@
       </p:sp>
       <p:sp>
         <p:nvSpPr>
-          <p:cNvPr id="140" name="Shape 138"/>
+          <p:cNvPr id="128" name="Shape 126"/>
           <p:cNvSpPr/>
           <p:nvPr/>
         </p:nvSpPr>
@@ -25029,7 +24123,7 @@
       </p:sp>
       <p:sp>
         <p:nvSpPr>
-          <p:cNvPr id="141" name="Shape 139"/>
+          <p:cNvPr id="129" name="Shape 127"/>
           <p:cNvSpPr/>
           <p:nvPr/>
         </p:nvSpPr>
@@ -25054,7 +24148,7 @@
       </p:sp>
       <p:sp>
         <p:nvSpPr>
-          <p:cNvPr id="142" name="Text 140"/>
+          <p:cNvPr id="130" name="Text 128"/>
           <p:cNvSpPr/>
           <p:nvPr/>
         </p:nvSpPr>
@@ -25090,7 +24184,7 @@
       </p:sp>
       <p:sp>
         <p:nvSpPr>
-          <p:cNvPr id="143" name="Text 141"/>
+          <p:cNvPr id="131" name="Text 129"/>
           <p:cNvSpPr/>
           <p:nvPr/>
         </p:nvSpPr>
@@ -25126,7 +24220,7 @@
       </p:sp>
       <p:sp>
         <p:nvSpPr>
-          <p:cNvPr id="144" name="Shape 142"/>
+          <p:cNvPr id="132" name="Shape 130"/>
           <p:cNvSpPr/>
           <p:nvPr/>
         </p:nvSpPr>
@@ -25153,7 +24247,7 @@
       </p:sp>
       <p:sp>
         <p:nvSpPr>
-          <p:cNvPr id="145" name="Text 143"/>
+          <p:cNvPr id="133" name="Text 131"/>
           <p:cNvSpPr/>
           <p:nvPr/>
         </p:nvSpPr>
@@ -25189,7 +24283,7 @@
       </p:sp>
       <p:sp>
         <p:nvSpPr>
-          <p:cNvPr id="146" name="Shape 144"/>
+          <p:cNvPr id="134" name="Shape 132"/>
           <p:cNvSpPr/>
           <p:nvPr/>
         </p:nvSpPr>
@@ -25214,7 +24308,7 @@
       </p:sp>
       <p:sp>
         <p:nvSpPr>
-          <p:cNvPr id="147" name="Shape 145"/>
+          <p:cNvPr id="135" name="Shape 133"/>
           <p:cNvSpPr/>
           <p:nvPr/>
         </p:nvSpPr>
@@ -25239,7 +24333,7 @@
       </p:sp>
       <p:sp>
         <p:nvSpPr>
-          <p:cNvPr id="148" name="Text 146"/>
+          <p:cNvPr id="136" name="Text 134"/>
           <p:cNvSpPr/>
           <p:nvPr/>
         </p:nvSpPr>
@@ -25275,7 +24369,7 @@
       </p:sp>
       <p:sp>
         <p:nvSpPr>
-          <p:cNvPr id="149" name="Text 147"/>
+          <p:cNvPr id="137" name="Text 135"/>
           <p:cNvSpPr/>
           <p:nvPr/>
         </p:nvSpPr>
@@ -25311,7 +24405,7 @@
       </p:sp>
       <p:sp>
         <p:nvSpPr>
-          <p:cNvPr id="150" name="Shape 148"/>
+          <p:cNvPr id="138" name="Shape 136"/>
           <p:cNvSpPr/>
           <p:nvPr/>
         </p:nvSpPr>
@@ -25338,7 +24432,7 @@
       </p:sp>
       <p:sp>
         <p:nvSpPr>
-          <p:cNvPr id="151" name="Text 149"/>
+          <p:cNvPr id="139" name="Text 137"/>
           <p:cNvSpPr/>
           <p:nvPr/>
         </p:nvSpPr>
@@ -25374,7 +24468,7 @@
       </p:sp>
       <p:sp>
         <p:nvSpPr>
-          <p:cNvPr id="152" name="Shape 150"/>
+          <p:cNvPr id="140" name="Shape 138"/>
           <p:cNvSpPr/>
           <p:nvPr/>
         </p:nvSpPr>
@@ -25399,7 +24493,7 @@
       </p:sp>
       <p:sp>
         <p:nvSpPr>
-          <p:cNvPr id="153" name="Shape 151"/>
+          <p:cNvPr id="141" name="Shape 139"/>
           <p:cNvSpPr/>
           <p:nvPr/>
         </p:nvSpPr>
@@ -25424,7 +24518,7 @@
       </p:sp>
       <p:sp>
         <p:nvSpPr>
-          <p:cNvPr id="154" name="Text 152"/>
+          <p:cNvPr id="142" name="Text 140"/>
           <p:cNvSpPr/>
           <p:nvPr/>
         </p:nvSpPr>
@@ -25460,7 +24554,7 @@
       </p:sp>
       <p:sp>
         <p:nvSpPr>
-          <p:cNvPr id="155" name="Text 153"/>
+          <p:cNvPr id="143" name="Text 141"/>
           <p:cNvSpPr/>
           <p:nvPr/>
         </p:nvSpPr>
@@ -25496,7 +24590,7 @@
       </p:sp>
       <p:sp>
         <p:nvSpPr>
-          <p:cNvPr id="156" name="Shape 154"/>
+          <p:cNvPr id="144" name="Shape 142"/>
           <p:cNvSpPr/>
           <p:nvPr/>
         </p:nvSpPr>
@@ -25523,7 +24617,7 @@
       </p:sp>
       <p:sp>
         <p:nvSpPr>
-          <p:cNvPr id="157" name="Text 155"/>
+          <p:cNvPr id="145" name="Text 143"/>
           <p:cNvSpPr/>
           <p:nvPr/>
         </p:nvSpPr>
@@ -25559,7 +24653,7 @@
       </p:sp>
       <p:sp>
         <p:nvSpPr>
-          <p:cNvPr id="158" name="Shape 156"/>
+          <p:cNvPr id="146" name="Shape 144"/>
           <p:cNvSpPr/>
           <p:nvPr/>
         </p:nvSpPr>
@@ -25582,7 +24676,7 @@
       </p:sp>
       <p:sp>
         <p:nvSpPr>
-          <p:cNvPr id="159" name="Text 157"/>
+          <p:cNvPr id="147" name="Text 145"/>
           <p:cNvSpPr/>
           <p:nvPr/>
         </p:nvSpPr>
@@ -25618,7 +24712,7 @@
       </p:sp>
       <p:sp>
         <p:nvSpPr>
-          <p:cNvPr id="160" name="Shape 158"/>
+          <p:cNvPr id="148" name="Shape 146"/>
           <p:cNvSpPr/>
           <p:nvPr/>
         </p:nvSpPr>
@@ -25645,7 +24739,7 @@
       </p:sp>
       <p:sp>
         <p:nvSpPr>
-          <p:cNvPr id="161" name="Text 159"/>
+          <p:cNvPr id="149" name="Text 147"/>
           <p:cNvSpPr/>
           <p:nvPr/>
         </p:nvSpPr>
@@ -25681,7 +24775,7 @@
       </p:sp>
       <p:sp>
         <p:nvSpPr>
-          <p:cNvPr id="162" name="Shape 160"/>
+          <p:cNvPr id="150" name="Shape 148"/>
           <p:cNvSpPr/>
           <p:nvPr/>
         </p:nvSpPr>
@@ -25708,7 +24802,7 @@
       </p:sp>
       <p:sp>
         <p:nvSpPr>
-          <p:cNvPr id="163" name="Text 161"/>
+          <p:cNvPr id="151" name="Text 149"/>
           <p:cNvSpPr/>
           <p:nvPr/>
         </p:nvSpPr>
@@ -25744,7 +24838,7 @@
       </p:sp>
       <p:sp>
         <p:nvSpPr>
-          <p:cNvPr id="164" name="Shape 162"/>
+          <p:cNvPr id="152" name="Shape 150"/>
           <p:cNvSpPr/>
           <p:nvPr/>
         </p:nvSpPr>
@@ -25771,7 +24865,7 @@
       </p:sp>
       <p:sp>
         <p:nvSpPr>
-          <p:cNvPr id="165" name="Text 163"/>
+          <p:cNvPr id="153" name="Text 151"/>
           <p:cNvSpPr/>
           <p:nvPr/>
         </p:nvSpPr>
@@ -25807,7 +24901,7 @@
       </p:sp>
       <p:sp>
         <p:nvSpPr>
-          <p:cNvPr id="166" name="Shape 164"/>
+          <p:cNvPr id="154" name="Shape 152"/>
           <p:cNvSpPr/>
           <p:nvPr/>
         </p:nvSpPr>
@@ -25834,7 +24928,7 @@
       </p:sp>
       <p:sp>
         <p:nvSpPr>
-          <p:cNvPr id="167" name="Text 165"/>
+          <p:cNvPr id="155" name="Text 153"/>
           <p:cNvSpPr/>
           <p:nvPr/>
         </p:nvSpPr>
@@ -26142,7 +25236,7 @@
                   <a:srgbClr val="1D4ED8"/>
                 </a:solidFill>
               </a:rPr>
-              <a:t>18  In Progress</a:t>
+              <a:t>17  In Progress</a:t>
             </a:r>
             <a:endParaRPr lang="en-US" sz="900" dirty="0"/>
           </a:p>
@@ -26205,7 +25299,7 @@
                   <a:srgbClr val="374151"/>
                 </a:solidFill>
               </a:rPr>
-              <a:t>4  Not Started</a:t>
+              <a:t>3  Not Started</a:t>
             </a:r>
             <a:endParaRPr lang="en-US" sz="900" dirty="0"/>
           </a:p>
@@ -26464,7 +25558,7 @@
                   <a:srgbClr val="388849"/>
                 </a:solidFill>
               </a:rPr>
-              <a:t>8% Ready</a:t>
+              <a:t>9% Ready</a:t>
             </a:r>
             <a:endParaRPr lang="en-US" sz="1100" dirty="0"/>
           </a:p>
@@ -29760,396 +28854,6 @@
         </p:nvSpPr>
         <p:spPr>
           <a:xfrm>
-            <a:off x="164592" y="6931152"/>
-            <a:ext cx="9116568" cy="1476756"/>
-          </a:xfrm>
-          <a:prstGeom prst="rect">
-            <a:avLst/>
-          </a:prstGeom>
-          <a:solidFill>
-            <a:srgbClr val="FAFBFC"/>
-          </a:solidFill>
-          <a:ln w="6350">
-            <a:solidFill>
-              <a:srgbClr val="E5E7EB"/>
-            </a:solidFill>
-            <a:prstDash val="solid"/>
-          </a:ln>
-        </p:spPr>
-      </p:sp>
-      <p:sp>
-        <p:nvSpPr>
-          <p:cNvPr id="125" name="Shape 123"/>
-          <p:cNvSpPr/>
-          <p:nvPr/>
-        </p:nvSpPr>
-        <p:spPr>
-          <a:xfrm>
-            <a:off x="182880" y="7004304"/>
-            <a:ext cx="859536" cy="1330452"/>
-          </a:xfrm>
-          <a:prstGeom prst="roundRect">
-            <a:avLst>
-              <a:gd name="adj" fmla="val 5319"/>
-            </a:avLst>
-          </a:prstGeom>
-          <a:solidFill>
-            <a:srgbClr val="64748B"/>
-          </a:solidFill>
-          <a:ln w="12700">
-            <a:solidFill>
-              <a:srgbClr val="64748B"/>
-            </a:solidFill>
-            <a:prstDash val="solid"/>
-          </a:ln>
-        </p:spPr>
-      </p:sp>
-      <p:sp>
-        <p:nvSpPr>
-          <p:cNvPr id="126" name="Text 124"/>
-          <p:cNvSpPr/>
-          <p:nvPr/>
-        </p:nvSpPr>
-        <p:spPr>
-          <a:xfrm>
-            <a:off x="182880" y="7004304"/>
-            <a:ext cx="859536" cy="1330452"/>
-          </a:xfrm>
-          <a:prstGeom prst="rect">
-            <a:avLst/>
-          </a:prstGeom>
-          <a:noFill/>
-          <a:ln/>
-        </p:spPr>
-        <p:txBody>
-          <a:bodyPr wrap="square" lIns="0" tIns="0" rIns="0" bIns="0" rtlCol="0" anchor="ctr"/>
-          <a:lstStyle/>
-          <a:p>
-            <a:pPr algn="ctr" indent="0" marL="0">
-              <a:buNone/>
-            </a:pPr>
-            <a:r>
-              <a:rPr lang="en-US" sz="800" b="1" dirty="0">
-                <a:solidFill>
-                  <a:srgbClr val="FFFFFF"/>
-                </a:solidFill>
-              </a:rPr>
-              <a:t>Data</a:t>
-            </a:r>
-            <a:endParaRPr lang="en-US" sz="800" dirty="0"/>
-          </a:p>
-          <a:p>
-            <a:pPr algn="ctr" indent="0" marL="0">
-              <a:buNone/>
-            </a:pPr>
-            <a:r>
-              <a:rPr lang="en-US" sz="800" b="1" dirty="0">
-                <a:solidFill>
-                  <a:srgbClr val="FFFFFF"/>
-                </a:solidFill>
-              </a:rPr>
-              <a:t>&amp; Analytics</a:t>
-            </a:r>
-            <a:endParaRPr lang="en-US" sz="800" dirty="0"/>
-          </a:p>
-        </p:txBody>
-      </p:sp>
-      <p:sp>
-        <p:nvSpPr>
-          <p:cNvPr id="127" name="Text 125"/>
-          <p:cNvSpPr/>
-          <p:nvPr/>
-        </p:nvSpPr>
-        <p:spPr>
-          <a:xfrm>
-            <a:off x="1170432" y="6976872"/>
-            <a:ext cx="8110728" cy="182880"/>
-          </a:xfrm>
-          <a:prstGeom prst="rect">
-            <a:avLst/>
-          </a:prstGeom>
-          <a:noFill/>
-          <a:ln/>
-        </p:spPr>
-        <p:txBody>
-          <a:bodyPr wrap="square" lIns="0" tIns="0" rIns="0" bIns="0" rtlCol="0" anchor="ctr"/>
-          <a:lstStyle/>
-          <a:p>
-            <a:pPr algn="l" indent="0" marL="0">
-              <a:buNone/>
-            </a:pPr>
-            <a:r>
-              <a:rPr lang="en-US" sz="750" dirty="0">
-                <a:solidFill>
-                  <a:srgbClr val="9CA3AF"/>
-                </a:solidFill>
-              </a:rPr>
-              <a:t>1 / 2 In Progress</a:t>
-            </a:r>
-            <a:endParaRPr lang="en-US" sz="750" dirty="0"/>
-          </a:p>
-        </p:txBody>
-      </p:sp>
-      <p:sp>
-        <p:nvSpPr>
-          <p:cNvPr id="128" name="Shape 126"/>
-          <p:cNvSpPr/>
-          <p:nvPr/>
-        </p:nvSpPr>
-        <p:spPr>
-          <a:xfrm>
-            <a:off x="1170432" y="7196328"/>
-            <a:ext cx="932688" cy="182880"/>
-          </a:xfrm>
-          <a:prstGeom prst="roundRect">
-            <a:avLst>
-              <a:gd name="adj" fmla="val 15000"/>
-            </a:avLst>
-          </a:prstGeom>
-          <a:solidFill>
-            <a:srgbClr val="FFFFFF"/>
-          </a:solidFill>
-          <a:ln w="9525">
-            <a:solidFill>
-              <a:srgbClr val="CBD5E1"/>
-            </a:solidFill>
-            <a:prstDash val="solid"/>
-          </a:ln>
-        </p:spPr>
-      </p:sp>
-      <p:sp>
-        <p:nvSpPr>
-          <p:cNvPr id="129" name="Text 127"/>
-          <p:cNvSpPr/>
-          <p:nvPr/>
-        </p:nvSpPr>
-        <p:spPr>
-          <a:xfrm>
-            <a:off x="1170432" y="7196328"/>
-            <a:ext cx="932688" cy="182880"/>
-          </a:xfrm>
-          <a:prstGeom prst="rect">
-            <a:avLst/>
-          </a:prstGeom>
-          <a:noFill/>
-          <a:ln/>
-        </p:spPr>
-        <p:txBody>
-          <a:bodyPr wrap="square" lIns="0" tIns="0" rIns="0" bIns="0" rtlCol="0" anchor="ctr"/>
-          <a:lstStyle/>
-          <a:p>
-            <a:pPr algn="ctr" indent="0" marL="0">
-              <a:buNone/>
-            </a:pPr>
-            <a:r>
-              <a:rPr lang="en-US" sz="750" b="1" dirty="0">
-                <a:solidFill>
-                  <a:srgbClr val="1E293B"/>
-                </a:solidFill>
-              </a:rPr>
-              <a:t>Metadata</a:t>
-            </a:r>
-            <a:endParaRPr lang="en-US" sz="750" dirty="0"/>
-          </a:p>
-        </p:txBody>
-      </p:sp>
-      <p:sp>
-        <p:nvSpPr>
-          <p:cNvPr id="130" name="Shape 128"/>
-          <p:cNvSpPr/>
-          <p:nvPr/>
-        </p:nvSpPr>
-        <p:spPr>
-          <a:xfrm>
-            <a:off x="1170432" y="7406640"/>
-            <a:ext cx="932688" cy="155448"/>
-          </a:xfrm>
-          <a:prstGeom prst="roundRect">
-            <a:avLst>
-              <a:gd name="adj" fmla="val 17647"/>
-            </a:avLst>
-          </a:prstGeom>
-          <a:solidFill>
-            <a:srgbClr val="F3F4F6"/>
-          </a:solidFill>
-          <a:ln w="9525">
-            <a:solidFill>
-              <a:srgbClr val="D1D5DB"/>
-            </a:solidFill>
-            <a:prstDash val="solid"/>
-          </a:ln>
-        </p:spPr>
-      </p:sp>
-      <p:sp>
-        <p:nvSpPr>
-          <p:cNvPr id="131" name="Text 129"/>
-          <p:cNvSpPr/>
-          <p:nvPr/>
-        </p:nvSpPr>
-        <p:spPr>
-          <a:xfrm>
-            <a:off x="1170432" y="7406640"/>
-            <a:ext cx="932688" cy="155448"/>
-          </a:xfrm>
-          <a:prstGeom prst="rect">
-            <a:avLst/>
-          </a:prstGeom>
-          <a:noFill/>
-          <a:ln/>
-        </p:spPr>
-        <p:txBody>
-          <a:bodyPr wrap="square" lIns="0" tIns="0" rIns="0" bIns="0" rtlCol="0" anchor="ctr"/>
-          <a:lstStyle/>
-          <a:p>
-            <a:pPr algn="ctr" indent="0" marL="0">
-              <a:buNone/>
-            </a:pPr>
-            <a:r>
-              <a:rPr lang="en-US" sz="700" dirty="0">
-                <a:solidFill>
-                  <a:srgbClr val="374151"/>
-                </a:solidFill>
-              </a:rPr>
-              <a:t>Not Started</a:t>
-            </a:r>
-            <a:endParaRPr lang="en-US" sz="700" dirty="0"/>
-          </a:p>
-        </p:txBody>
-      </p:sp>
-      <p:sp>
-        <p:nvSpPr>
-          <p:cNvPr id="132" name="Shape 130"/>
-          <p:cNvSpPr/>
-          <p:nvPr/>
-        </p:nvSpPr>
-        <p:spPr>
-          <a:xfrm>
-            <a:off x="2185416" y="7196328"/>
-            <a:ext cx="932688" cy="182880"/>
-          </a:xfrm>
-          <a:prstGeom prst="roundRect">
-            <a:avLst>
-              <a:gd name="adj" fmla="val 15000"/>
-            </a:avLst>
-          </a:prstGeom>
-          <a:solidFill>
-            <a:srgbClr val="FFFFFF"/>
-          </a:solidFill>
-          <a:ln w="9525">
-            <a:solidFill>
-              <a:srgbClr val="CBD5E1"/>
-            </a:solidFill>
-            <a:prstDash val="solid"/>
-          </a:ln>
-        </p:spPr>
-      </p:sp>
-      <p:sp>
-        <p:nvSpPr>
-          <p:cNvPr id="133" name="Text 131"/>
-          <p:cNvSpPr/>
-          <p:nvPr/>
-        </p:nvSpPr>
-        <p:spPr>
-          <a:xfrm>
-            <a:off x="2185416" y="7196328"/>
-            <a:ext cx="932688" cy="182880"/>
-          </a:xfrm>
-          <a:prstGeom prst="rect">
-            <a:avLst/>
-          </a:prstGeom>
-          <a:noFill/>
-          <a:ln/>
-        </p:spPr>
-        <p:txBody>
-          <a:bodyPr wrap="square" lIns="0" tIns="0" rIns="0" bIns="0" rtlCol="0" anchor="ctr"/>
-          <a:lstStyle/>
-          <a:p>
-            <a:pPr algn="ctr" indent="0" marL="0">
-              <a:buNone/>
-            </a:pPr>
-            <a:r>
-              <a:rPr lang="en-US" sz="750" b="1" dirty="0">
-                <a:solidFill>
-                  <a:srgbClr val="1E293B"/>
-                </a:solidFill>
-              </a:rPr>
-              <a:t>Images</a:t>
-            </a:r>
-            <a:endParaRPr lang="en-US" sz="750" dirty="0"/>
-          </a:p>
-        </p:txBody>
-      </p:sp>
-      <p:sp>
-        <p:nvSpPr>
-          <p:cNvPr id="134" name="Shape 132"/>
-          <p:cNvSpPr/>
-          <p:nvPr/>
-        </p:nvSpPr>
-        <p:spPr>
-          <a:xfrm>
-            <a:off x="2185416" y="7406640"/>
-            <a:ext cx="932688" cy="155448"/>
-          </a:xfrm>
-          <a:prstGeom prst="roundRect">
-            <a:avLst>
-              <a:gd name="adj" fmla="val 17647"/>
-            </a:avLst>
-          </a:prstGeom>
-          <a:solidFill>
-            <a:srgbClr val="1558A8"/>
-          </a:solidFill>
-          <a:ln w="12700">
-            <a:solidFill>
-              <a:srgbClr val="1558A8"/>
-            </a:solidFill>
-            <a:prstDash val="solid"/>
-          </a:ln>
-        </p:spPr>
-      </p:sp>
-      <p:sp>
-        <p:nvSpPr>
-          <p:cNvPr id="135" name="Text 133"/>
-          <p:cNvSpPr/>
-          <p:nvPr/>
-        </p:nvSpPr>
-        <p:spPr>
-          <a:xfrm>
-            <a:off x="2185416" y="7406640"/>
-            <a:ext cx="932688" cy="155448"/>
-          </a:xfrm>
-          <a:prstGeom prst="rect">
-            <a:avLst/>
-          </a:prstGeom>
-          <a:noFill/>
-          <a:ln/>
-        </p:spPr>
-        <p:txBody>
-          <a:bodyPr wrap="square" lIns="0" tIns="0" rIns="0" bIns="0" rtlCol="0" anchor="ctr"/>
-          <a:lstStyle/>
-          <a:p>
-            <a:pPr algn="ctr" indent="0" marL="0">
-              <a:buNone/>
-            </a:pPr>
-            <a:r>
-              <a:rPr lang="en-US" sz="700" dirty="0">
-                <a:solidFill>
-                  <a:srgbClr val="FFFFFF"/>
-                </a:solidFill>
-              </a:rPr>
-              <a:t>In Progress</a:t>
-            </a:r>
-            <a:endParaRPr lang="en-US" sz="700" dirty="0"/>
-          </a:p>
-        </p:txBody>
-      </p:sp>
-      <p:sp>
-        <p:nvSpPr>
-          <p:cNvPr id="136" name="Shape 134"/>
-          <p:cNvSpPr/>
-          <p:nvPr/>
-        </p:nvSpPr>
-        <p:spPr>
-          <a:xfrm>
             <a:off x="9372600" y="804672"/>
             <a:ext cx="2834640" cy="6071616"/>
           </a:xfrm>
@@ -30169,7 +28873,7 @@
       </p:sp>
       <p:sp>
         <p:nvSpPr>
-          <p:cNvPr id="137" name="Text 135"/>
+          <p:cNvPr id="125" name="Text 123"/>
           <p:cNvSpPr/>
           <p:nvPr/>
         </p:nvSpPr>
@@ -30205,7 +28909,7 @@
       </p:sp>
       <p:sp>
         <p:nvSpPr>
-          <p:cNvPr id="138" name="Shape 136"/>
+          <p:cNvPr id="126" name="Shape 124"/>
           <p:cNvSpPr/>
           <p:nvPr/>
         </p:nvSpPr>
@@ -30230,7 +28934,7 @@
       </p:sp>
       <p:sp>
         <p:nvSpPr>
-          <p:cNvPr id="139" name="Shape 137"/>
+          <p:cNvPr id="127" name="Shape 125"/>
           <p:cNvSpPr/>
           <p:nvPr/>
         </p:nvSpPr>
@@ -30255,7 +28959,7 @@
       </p:sp>
       <p:sp>
         <p:nvSpPr>
-          <p:cNvPr id="140" name="Text 138"/>
+          <p:cNvPr id="128" name="Text 126"/>
           <p:cNvSpPr/>
           <p:nvPr/>
         </p:nvSpPr>
@@ -30291,7 +28995,7 @@
       </p:sp>
       <p:sp>
         <p:nvSpPr>
-          <p:cNvPr id="141" name="Text 139"/>
+          <p:cNvPr id="129" name="Text 127"/>
           <p:cNvSpPr/>
           <p:nvPr/>
         </p:nvSpPr>
@@ -30327,7 +29031,7 @@
       </p:sp>
       <p:sp>
         <p:nvSpPr>
-          <p:cNvPr id="142" name="Shape 140"/>
+          <p:cNvPr id="130" name="Shape 128"/>
           <p:cNvSpPr/>
           <p:nvPr/>
         </p:nvSpPr>
@@ -30354,7 +29058,7 @@
       </p:sp>
       <p:sp>
         <p:nvSpPr>
-          <p:cNvPr id="143" name="Text 141"/>
+          <p:cNvPr id="131" name="Text 129"/>
           <p:cNvSpPr/>
           <p:nvPr/>
         </p:nvSpPr>
@@ -30390,7 +29094,7 @@
       </p:sp>
       <p:sp>
         <p:nvSpPr>
-          <p:cNvPr id="144" name="Shape 142"/>
+          <p:cNvPr id="132" name="Shape 130"/>
           <p:cNvSpPr/>
           <p:nvPr/>
         </p:nvSpPr>
@@ -30415,7 +29119,7 @@
       </p:sp>
       <p:sp>
         <p:nvSpPr>
-          <p:cNvPr id="145" name="Shape 143"/>
+          <p:cNvPr id="133" name="Shape 131"/>
           <p:cNvSpPr/>
           <p:nvPr/>
         </p:nvSpPr>
@@ -30440,7 +29144,7 @@
       </p:sp>
       <p:sp>
         <p:nvSpPr>
-          <p:cNvPr id="146" name="Text 144"/>
+          <p:cNvPr id="134" name="Text 132"/>
           <p:cNvSpPr/>
           <p:nvPr/>
         </p:nvSpPr>
@@ -30476,7 +29180,7 @@
       </p:sp>
       <p:sp>
         <p:nvSpPr>
-          <p:cNvPr id="147" name="Text 145"/>
+          <p:cNvPr id="135" name="Text 133"/>
           <p:cNvSpPr/>
           <p:nvPr/>
         </p:nvSpPr>
@@ -30512,7 +29216,7 @@
       </p:sp>
       <p:sp>
         <p:nvSpPr>
-          <p:cNvPr id="148" name="Shape 146"/>
+          <p:cNvPr id="136" name="Shape 134"/>
           <p:cNvSpPr/>
           <p:nvPr/>
         </p:nvSpPr>
@@ -30539,7 +29243,7 @@
       </p:sp>
       <p:sp>
         <p:nvSpPr>
-          <p:cNvPr id="149" name="Text 147"/>
+          <p:cNvPr id="137" name="Text 135"/>
           <p:cNvSpPr/>
           <p:nvPr/>
         </p:nvSpPr>
@@ -30575,7 +29279,7 @@
       </p:sp>
       <p:sp>
         <p:nvSpPr>
-          <p:cNvPr id="150" name="Shape 148"/>
+          <p:cNvPr id="138" name="Shape 136"/>
           <p:cNvSpPr/>
           <p:nvPr/>
         </p:nvSpPr>
@@ -30600,7 +29304,7 @@
       </p:sp>
       <p:sp>
         <p:nvSpPr>
-          <p:cNvPr id="151" name="Shape 149"/>
+          <p:cNvPr id="139" name="Shape 137"/>
           <p:cNvSpPr/>
           <p:nvPr/>
         </p:nvSpPr>
@@ -30625,7 +29329,7 @@
       </p:sp>
       <p:sp>
         <p:nvSpPr>
-          <p:cNvPr id="152" name="Text 150"/>
+          <p:cNvPr id="140" name="Text 138"/>
           <p:cNvSpPr/>
           <p:nvPr/>
         </p:nvSpPr>
@@ -30661,7 +29365,7 @@
       </p:sp>
       <p:sp>
         <p:nvSpPr>
-          <p:cNvPr id="153" name="Text 151"/>
+          <p:cNvPr id="141" name="Text 139"/>
           <p:cNvSpPr/>
           <p:nvPr/>
         </p:nvSpPr>
@@ -30697,7 +29401,7 @@
       </p:sp>
       <p:sp>
         <p:nvSpPr>
-          <p:cNvPr id="154" name="Shape 152"/>
+          <p:cNvPr id="142" name="Shape 140"/>
           <p:cNvSpPr/>
           <p:nvPr/>
         </p:nvSpPr>
@@ -30724,7 +29428,7 @@
       </p:sp>
       <p:sp>
         <p:nvSpPr>
-          <p:cNvPr id="155" name="Text 153"/>
+          <p:cNvPr id="143" name="Text 141"/>
           <p:cNvSpPr/>
           <p:nvPr/>
         </p:nvSpPr>
@@ -30760,7 +29464,7 @@
       </p:sp>
       <p:sp>
         <p:nvSpPr>
-          <p:cNvPr id="156" name="Shape 154"/>
+          <p:cNvPr id="144" name="Shape 142"/>
           <p:cNvSpPr/>
           <p:nvPr/>
         </p:nvSpPr>
@@ -30785,7 +29489,7 @@
       </p:sp>
       <p:sp>
         <p:nvSpPr>
-          <p:cNvPr id="157" name="Shape 155"/>
+          <p:cNvPr id="145" name="Shape 143"/>
           <p:cNvSpPr/>
           <p:nvPr/>
         </p:nvSpPr>
@@ -30810,7 +29514,7 @@
       </p:sp>
       <p:sp>
         <p:nvSpPr>
-          <p:cNvPr id="158" name="Text 156"/>
+          <p:cNvPr id="146" name="Text 144"/>
           <p:cNvSpPr/>
           <p:nvPr/>
         </p:nvSpPr>
@@ -30846,7 +29550,7 @@
       </p:sp>
       <p:sp>
         <p:nvSpPr>
-          <p:cNvPr id="159" name="Text 157"/>
+          <p:cNvPr id="147" name="Text 145"/>
           <p:cNvSpPr/>
           <p:nvPr/>
         </p:nvSpPr>
@@ -30882,7 +29586,7 @@
       </p:sp>
       <p:sp>
         <p:nvSpPr>
-          <p:cNvPr id="160" name="Shape 158"/>
+          <p:cNvPr id="148" name="Shape 146"/>
           <p:cNvSpPr/>
           <p:nvPr/>
         </p:nvSpPr>
@@ -30909,7 +29613,7 @@
       </p:sp>
       <p:sp>
         <p:nvSpPr>
-          <p:cNvPr id="161" name="Text 159"/>
+          <p:cNvPr id="149" name="Text 147"/>
           <p:cNvSpPr/>
           <p:nvPr/>
         </p:nvSpPr>
@@ -30945,7 +29649,7 @@
       </p:sp>
       <p:sp>
         <p:nvSpPr>
-          <p:cNvPr id="162" name="Shape 160"/>
+          <p:cNvPr id="150" name="Shape 148"/>
           <p:cNvSpPr/>
           <p:nvPr/>
         </p:nvSpPr>
@@ -30968,7 +29672,7 @@
       </p:sp>
       <p:sp>
         <p:nvSpPr>
-          <p:cNvPr id="163" name="Text 161"/>
+          <p:cNvPr id="151" name="Text 149"/>
           <p:cNvSpPr/>
           <p:nvPr/>
         </p:nvSpPr>
@@ -31004,7 +29708,7 @@
       </p:sp>
       <p:sp>
         <p:nvSpPr>
-          <p:cNvPr id="164" name="Shape 162"/>
+          <p:cNvPr id="152" name="Shape 150"/>
           <p:cNvSpPr/>
           <p:nvPr/>
         </p:nvSpPr>
@@ -31031,7 +29735,7 @@
       </p:sp>
       <p:sp>
         <p:nvSpPr>
-          <p:cNvPr id="165" name="Text 163"/>
+          <p:cNvPr id="153" name="Text 151"/>
           <p:cNvSpPr/>
           <p:nvPr/>
         </p:nvSpPr>
@@ -31067,7 +29771,7 @@
       </p:sp>
       <p:sp>
         <p:nvSpPr>
-          <p:cNvPr id="166" name="Shape 164"/>
+          <p:cNvPr id="154" name="Shape 152"/>
           <p:cNvSpPr/>
           <p:nvPr/>
         </p:nvSpPr>
@@ -31094,7 +29798,7 @@
       </p:sp>
       <p:sp>
         <p:nvSpPr>
-          <p:cNvPr id="167" name="Text 165"/>
+          <p:cNvPr id="155" name="Text 153"/>
           <p:cNvSpPr/>
           <p:nvPr/>
         </p:nvSpPr>
@@ -31130,7 +29834,7 @@
       </p:sp>
       <p:sp>
         <p:nvSpPr>
-          <p:cNvPr id="168" name="Shape 166"/>
+          <p:cNvPr id="156" name="Shape 154"/>
           <p:cNvSpPr/>
           <p:nvPr/>
         </p:nvSpPr>
@@ -31157,7 +29861,7 @@
       </p:sp>
       <p:sp>
         <p:nvSpPr>
-          <p:cNvPr id="169" name="Text 167"/>
+          <p:cNvPr id="157" name="Text 155"/>
           <p:cNvSpPr/>
           <p:nvPr/>
         </p:nvSpPr>
@@ -31193,7 +29897,7 @@
       </p:sp>
       <p:sp>
         <p:nvSpPr>
-          <p:cNvPr id="170" name="Shape 168"/>
+          <p:cNvPr id="158" name="Shape 156"/>
           <p:cNvSpPr/>
           <p:nvPr/>
         </p:nvSpPr>
@@ -31220,7 +29924,7 @@
       </p:sp>
       <p:sp>
         <p:nvSpPr>
-          <p:cNvPr id="171" name="Text 169"/>
+          <p:cNvPr id="159" name="Text 157"/>
           <p:cNvSpPr/>
           <p:nvPr/>
         </p:nvSpPr>
@@ -31528,7 +30232,7 @@
                   <a:srgbClr val="1D4ED8"/>
                 </a:solidFill>
               </a:rPr>
-              <a:t>20  In Progress</a:t>
+              <a:t>19  In Progress</a:t>
             </a:r>
             <a:endParaRPr lang="en-US" sz="900" dirty="0"/>
           </a:p>
@@ -31591,7 +30295,7 @@
                   <a:srgbClr val="374151"/>
                 </a:solidFill>
               </a:rPr>
-              <a:t>4  Not Started</a:t>
+              <a:t>3  Not Started</a:t>
             </a:r>
             <a:endParaRPr lang="en-US" sz="900" dirty="0"/>
           </a:p>
@@ -35686,396 +34390,6 @@
         </p:nvSpPr>
         <p:spPr>
           <a:xfrm>
-            <a:off x="164592" y="6931152"/>
-            <a:ext cx="9116568" cy="1476756"/>
-          </a:xfrm>
-          <a:prstGeom prst="rect">
-            <a:avLst/>
-          </a:prstGeom>
-          <a:solidFill>
-            <a:srgbClr val="FAFBFC"/>
-          </a:solidFill>
-          <a:ln w="6350">
-            <a:solidFill>
-              <a:srgbClr val="E5E7EB"/>
-            </a:solidFill>
-            <a:prstDash val="solid"/>
-          </a:ln>
-        </p:spPr>
-      </p:sp>
-      <p:sp>
-        <p:nvSpPr>
-          <p:cNvPr id="142" name="Shape 140"/>
-          <p:cNvSpPr/>
-          <p:nvPr/>
-        </p:nvSpPr>
-        <p:spPr>
-          <a:xfrm>
-            <a:off x="182880" y="7004304"/>
-            <a:ext cx="859536" cy="1330452"/>
-          </a:xfrm>
-          <a:prstGeom prst="roundRect">
-            <a:avLst>
-              <a:gd name="adj" fmla="val 5319"/>
-            </a:avLst>
-          </a:prstGeom>
-          <a:solidFill>
-            <a:srgbClr val="64748B"/>
-          </a:solidFill>
-          <a:ln w="12700">
-            <a:solidFill>
-              <a:srgbClr val="64748B"/>
-            </a:solidFill>
-            <a:prstDash val="solid"/>
-          </a:ln>
-        </p:spPr>
-      </p:sp>
-      <p:sp>
-        <p:nvSpPr>
-          <p:cNvPr id="143" name="Text 141"/>
-          <p:cNvSpPr/>
-          <p:nvPr/>
-        </p:nvSpPr>
-        <p:spPr>
-          <a:xfrm>
-            <a:off x="182880" y="7004304"/>
-            <a:ext cx="859536" cy="1330452"/>
-          </a:xfrm>
-          <a:prstGeom prst="rect">
-            <a:avLst/>
-          </a:prstGeom>
-          <a:noFill/>
-          <a:ln/>
-        </p:spPr>
-        <p:txBody>
-          <a:bodyPr wrap="square" lIns="0" tIns="0" rIns="0" bIns="0" rtlCol="0" anchor="ctr"/>
-          <a:lstStyle/>
-          <a:p>
-            <a:pPr algn="ctr" indent="0" marL="0">
-              <a:buNone/>
-            </a:pPr>
-            <a:r>
-              <a:rPr lang="en-US" sz="800" b="1" dirty="0">
-                <a:solidFill>
-                  <a:srgbClr val="FFFFFF"/>
-                </a:solidFill>
-              </a:rPr>
-              <a:t>Data</a:t>
-            </a:r>
-            <a:endParaRPr lang="en-US" sz="800" dirty="0"/>
-          </a:p>
-          <a:p>
-            <a:pPr algn="ctr" indent="0" marL="0">
-              <a:buNone/>
-            </a:pPr>
-            <a:r>
-              <a:rPr lang="en-US" sz="800" b="1" dirty="0">
-                <a:solidFill>
-                  <a:srgbClr val="FFFFFF"/>
-                </a:solidFill>
-              </a:rPr>
-              <a:t>&amp; Analytics</a:t>
-            </a:r>
-            <a:endParaRPr lang="en-US" sz="800" dirty="0"/>
-          </a:p>
-        </p:txBody>
-      </p:sp>
-      <p:sp>
-        <p:nvSpPr>
-          <p:cNvPr id="144" name="Text 142"/>
-          <p:cNvSpPr/>
-          <p:nvPr/>
-        </p:nvSpPr>
-        <p:spPr>
-          <a:xfrm>
-            <a:off x="1170432" y="6976872"/>
-            <a:ext cx="8110728" cy="182880"/>
-          </a:xfrm>
-          <a:prstGeom prst="rect">
-            <a:avLst/>
-          </a:prstGeom>
-          <a:noFill/>
-          <a:ln/>
-        </p:spPr>
-        <p:txBody>
-          <a:bodyPr wrap="square" lIns="0" tIns="0" rIns="0" bIns="0" rtlCol="0" anchor="ctr"/>
-          <a:lstStyle/>
-          <a:p>
-            <a:pPr algn="l" indent="0" marL="0">
-              <a:buNone/>
-            </a:pPr>
-            <a:r>
-              <a:rPr lang="en-US" sz="750" dirty="0">
-                <a:solidFill>
-                  <a:srgbClr val="9CA3AF"/>
-                </a:solidFill>
-              </a:rPr>
-              <a:t>1 / 2 In Progress</a:t>
-            </a:r>
-            <a:endParaRPr lang="en-US" sz="750" dirty="0"/>
-          </a:p>
-        </p:txBody>
-      </p:sp>
-      <p:sp>
-        <p:nvSpPr>
-          <p:cNvPr id="145" name="Shape 143"/>
-          <p:cNvSpPr/>
-          <p:nvPr/>
-        </p:nvSpPr>
-        <p:spPr>
-          <a:xfrm>
-            <a:off x="1170432" y="7196328"/>
-            <a:ext cx="932688" cy="182880"/>
-          </a:xfrm>
-          <a:prstGeom prst="roundRect">
-            <a:avLst>
-              <a:gd name="adj" fmla="val 15000"/>
-            </a:avLst>
-          </a:prstGeom>
-          <a:solidFill>
-            <a:srgbClr val="FFFFFF"/>
-          </a:solidFill>
-          <a:ln w="9525">
-            <a:solidFill>
-              <a:srgbClr val="CBD5E1"/>
-            </a:solidFill>
-            <a:prstDash val="solid"/>
-          </a:ln>
-        </p:spPr>
-      </p:sp>
-      <p:sp>
-        <p:nvSpPr>
-          <p:cNvPr id="146" name="Text 144"/>
-          <p:cNvSpPr/>
-          <p:nvPr/>
-        </p:nvSpPr>
-        <p:spPr>
-          <a:xfrm>
-            <a:off x="1170432" y="7196328"/>
-            <a:ext cx="932688" cy="182880"/>
-          </a:xfrm>
-          <a:prstGeom prst="rect">
-            <a:avLst/>
-          </a:prstGeom>
-          <a:noFill/>
-          <a:ln/>
-        </p:spPr>
-        <p:txBody>
-          <a:bodyPr wrap="square" lIns="0" tIns="0" rIns="0" bIns="0" rtlCol="0" anchor="ctr"/>
-          <a:lstStyle/>
-          <a:p>
-            <a:pPr algn="ctr" indent="0" marL="0">
-              <a:buNone/>
-            </a:pPr>
-            <a:r>
-              <a:rPr lang="en-US" sz="750" b="1" dirty="0">
-                <a:solidFill>
-                  <a:srgbClr val="1E293B"/>
-                </a:solidFill>
-              </a:rPr>
-              <a:t>Metadata</a:t>
-            </a:r>
-            <a:endParaRPr lang="en-US" sz="750" dirty="0"/>
-          </a:p>
-        </p:txBody>
-      </p:sp>
-      <p:sp>
-        <p:nvSpPr>
-          <p:cNvPr id="147" name="Shape 145"/>
-          <p:cNvSpPr/>
-          <p:nvPr/>
-        </p:nvSpPr>
-        <p:spPr>
-          <a:xfrm>
-            <a:off x="1170432" y="7406640"/>
-            <a:ext cx="932688" cy="155448"/>
-          </a:xfrm>
-          <a:prstGeom prst="roundRect">
-            <a:avLst>
-              <a:gd name="adj" fmla="val 17647"/>
-            </a:avLst>
-          </a:prstGeom>
-          <a:solidFill>
-            <a:srgbClr val="F3F4F6"/>
-          </a:solidFill>
-          <a:ln w="9525">
-            <a:solidFill>
-              <a:srgbClr val="D1D5DB"/>
-            </a:solidFill>
-            <a:prstDash val="solid"/>
-          </a:ln>
-        </p:spPr>
-      </p:sp>
-      <p:sp>
-        <p:nvSpPr>
-          <p:cNvPr id="148" name="Text 146"/>
-          <p:cNvSpPr/>
-          <p:nvPr/>
-        </p:nvSpPr>
-        <p:spPr>
-          <a:xfrm>
-            <a:off x="1170432" y="7406640"/>
-            <a:ext cx="932688" cy="155448"/>
-          </a:xfrm>
-          <a:prstGeom prst="rect">
-            <a:avLst/>
-          </a:prstGeom>
-          <a:noFill/>
-          <a:ln/>
-        </p:spPr>
-        <p:txBody>
-          <a:bodyPr wrap="square" lIns="0" tIns="0" rIns="0" bIns="0" rtlCol="0" anchor="ctr"/>
-          <a:lstStyle/>
-          <a:p>
-            <a:pPr algn="ctr" indent="0" marL="0">
-              <a:buNone/>
-            </a:pPr>
-            <a:r>
-              <a:rPr lang="en-US" sz="700" dirty="0">
-                <a:solidFill>
-                  <a:srgbClr val="374151"/>
-                </a:solidFill>
-              </a:rPr>
-              <a:t>Not Started</a:t>
-            </a:r>
-            <a:endParaRPr lang="en-US" sz="700" dirty="0"/>
-          </a:p>
-        </p:txBody>
-      </p:sp>
-      <p:sp>
-        <p:nvSpPr>
-          <p:cNvPr id="149" name="Shape 147"/>
-          <p:cNvSpPr/>
-          <p:nvPr/>
-        </p:nvSpPr>
-        <p:spPr>
-          <a:xfrm>
-            <a:off x="2185416" y="7196328"/>
-            <a:ext cx="932688" cy="182880"/>
-          </a:xfrm>
-          <a:prstGeom prst="roundRect">
-            <a:avLst>
-              <a:gd name="adj" fmla="val 15000"/>
-            </a:avLst>
-          </a:prstGeom>
-          <a:solidFill>
-            <a:srgbClr val="FFFFFF"/>
-          </a:solidFill>
-          <a:ln w="9525">
-            <a:solidFill>
-              <a:srgbClr val="CBD5E1"/>
-            </a:solidFill>
-            <a:prstDash val="solid"/>
-          </a:ln>
-        </p:spPr>
-      </p:sp>
-      <p:sp>
-        <p:nvSpPr>
-          <p:cNvPr id="150" name="Text 148"/>
-          <p:cNvSpPr/>
-          <p:nvPr/>
-        </p:nvSpPr>
-        <p:spPr>
-          <a:xfrm>
-            <a:off x="2185416" y="7196328"/>
-            <a:ext cx="932688" cy="182880"/>
-          </a:xfrm>
-          <a:prstGeom prst="rect">
-            <a:avLst/>
-          </a:prstGeom>
-          <a:noFill/>
-          <a:ln/>
-        </p:spPr>
-        <p:txBody>
-          <a:bodyPr wrap="square" lIns="0" tIns="0" rIns="0" bIns="0" rtlCol="0" anchor="ctr"/>
-          <a:lstStyle/>
-          <a:p>
-            <a:pPr algn="ctr" indent="0" marL="0">
-              <a:buNone/>
-            </a:pPr>
-            <a:r>
-              <a:rPr lang="en-US" sz="750" b="1" dirty="0">
-                <a:solidFill>
-                  <a:srgbClr val="1E293B"/>
-                </a:solidFill>
-              </a:rPr>
-              <a:t>Images</a:t>
-            </a:r>
-            <a:endParaRPr lang="en-US" sz="750" dirty="0"/>
-          </a:p>
-        </p:txBody>
-      </p:sp>
-      <p:sp>
-        <p:nvSpPr>
-          <p:cNvPr id="151" name="Shape 149"/>
-          <p:cNvSpPr/>
-          <p:nvPr/>
-        </p:nvSpPr>
-        <p:spPr>
-          <a:xfrm>
-            <a:off x="2185416" y="7406640"/>
-            <a:ext cx="932688" cy="155448"/>
-          </a:xfrm>
-          <a:prstGeom prst="roundRect">
-            <a:avLst>
-              <a:gd name="adj" fmla="val 17647"/>
-            </a:avLst>
-          </a:prstGeom>
-          <a:solidFill>
-            <a:srgbClr val="1558A8"/>
-          </a:solidFill>
-          <a:ln w="12700">
-            <a:solidFill>
-              <a:srgbClr val="1558A8"/>
-            </a:solidFill>
-            <a:prstDash val="solid"/>
-          </a:ln>
-        </p:spPr>
-      </p:sp>
-      <p:sp>
-        <p:nvSpPr>
-          <p:cNvPr id="152" name="Text 150"/>
-          <p:cNvSpPr/>
-          <p:nvPr/>
-        </p:nvSpPr>
-        <p:spPr>
-          <a:xfrm>
-            <a:off x="2185416" y="7406640"/>
-            <a:ext cx="932688" cy="155448"/>
-          </a:xfrm>
-          <a:prstGeom prst="rect">
-            <a:avLst/>
-          </a:prstGeom>
-          <a:noFill/>
-          <a:ln/>
-        </p:spPr>
-        <p:txBody>
-          <a:bodyPr wrap="square" lIns="0" tIns="0" rIns="0" bIns="0" rtlCol="0" anchor="ctr"/>
-          <a:lstStyle/>
-          <a:p>
-            <a:pPr algn="ctr" indent="0" marL="0">
-              <a:buNone/>
-            </a:pPr>
-            <a:r>
-              <a:rPr lang="en-US" sz="700" dirty="0">
-                <a:solidFill>
-                  <a:srgbClr val="FFFFFF"/>
-                </a:solidFill>
-              </a:rPr>
-              <a:t>In Progress</a:t>
-            </a:r>
-            <a:endParaRPr lang="en-US" sz="700" dirty="0"/>
-          </a:p>
-        </p:txBody>
-      </p:sp>
-      <p:sp>
-        <p:nvSpPr>
-          <p:cNvPr id="153" name="Shape 151"/>
-          <p:cNvSpPr/>
-          <p:nvPr/>
-        </p:nvSpPr>
-        <p:spPr>
-          <a:xfrm>
             <a:off x="9372600" y="804672"/>
             <a:ext cx="2834640" cy="6071616"/>
           </a:xfrm>
@@ -36095,7 +34409,7 @@
       </p:sp>
       <p:sp>
         <p:nvSpPr>
-          <p:cNvPr id="154" name="Text 152"/>
+          <p:cNvPr id="142" name="Text 140"/>
           <p:cNvSpPr/>
           <p:nvPr/>
         </p:nvSpPr>
@@ -36131,7 +34445,7 @@
       </p:sp>
       <p:sp>
         <p:nvSpPr>
-          <p:cNvPr id="155" name="Shape 153"/>
+          <p:cNvPr id="143" name="Shape 141"/>
           <p:cNvSpPr/>
           <p:nvPr/>
         </p:nvSpPr>
@@ -36156,7 +34470,7 @@
       </p:sp>
       <p:sp>
         <p:nvSpPr>
-          <p:cNvPr id="156" name="Shape 154"/>
+          <p:cNvPr id="144" name="Shape 142"/>
           <p:cNvSpPr/>
           <p:nvPr/>
         </p:nvSpPr>
@@ -36181,7 +34495,7 @@
       </p:sp>
       <p:sp>
         <p:nvSpPr>
-          <p:cNvPr id="157" name="Text 155"/>
+          <p:cNvPr id="145" name="Text 143"/>
           <p:cNvSpPr/>
           <p:nvPr/>
         </p:nvSpPr>
@@ -36217,7 +34531,7 @@
       </p:sp>
       <p:sp>
         <p:nvSpPr>
-          <p:cNvPr id="158" name="Text 156"/>
+          <p:cNvPr id="146" name="Text 144"/>
           <p:cNvSpPr/>
           <p:nvPr/>
         </p:nvSpPr>
@@ -36253,7 +34567,7 @@
       </p:sp>
       <p:sp>
         <p:nvSpPr>
-          <p:cNvPr id="159" name="Shape 157"/>
+          <p:cNvPr id="147" name="Shape 145"/>
           <p:cNvSpPr/>
           <p:nvPr/>
         </p:nvSpPr>
@@ -36280,7 +34594,7 @@
       </p:sp>
       <p:sp>
         <p:nvSpPr>
-          <p:cNvPr id="160" name="Text 158"/>
+          <p:cNvPr id="148" name="Text 146"/>
           <p:cNvSpPr/>
           <p:nvPr/>
         </p:nvSpPr>
@@ -36316,7 +34630,7 @@
       </p:sp>
       <p:sp>
         <p:nvSpPr>
-          <p:cNvPr id="161" name="Shape 159"/>
+          <p:cNvPr id="149" name="Shape 147"/>
           <p:cNvSpPr/>
           <p:nvPr/>
         </p:nvSpPr>
@@ -36341,7 +34655,7 @@
       </p:sp>
       <p:sp>
         <p:nvSpPr>
-          <p:cNvPr id="162" name="Shape 160"/>
+          <p:cNvPr id="150" name="Shape 148"/>
           <p:cNvSpPr/>
           <p:nvPr/>
         </p:nvSpPr>
@@ -36366,7 +34680,7 @@
       </p:sp>
       <p:sp>
         <p:nvSpPr>
-          <p:cNvPr id="163" name="Text 161"/>
+          <p:cNvPr id="151" name="Text 149"/>
           <p:cNvSpPr/>
           <p:nvPr/>
         </p:nvSpPr>
@@ -36402,7 +34716,7 @@
       </p:sp>
       <p:sp>
         <p:nvSpPr>
-          <p:cNvPr id="164" name="Text 162"/>
+          <p:cNvPr id="152" name="Text 150"/>
           <p:cNvSpPr/>
           <p:nvPr/>
         </p:nvSpPr>
@@ -36438,7 +34752,7 @@
       </p:sp>
       <p:sp>
         <p:nvSpPr>
-          <p:cNvPr id="165" name="Shape 163"/>
+          <p:cNvPr id="153" name="Shape 151"/>
           <p:cNvSpPr/>
           <p:nvPr/>
         </p:nvSpPr>
@@ -36465,7 +34779,7 @@
       </p:sp>
       <p:sp>
         <p:nvSpPr>
-          <p:cNvPr id="166" name="Text 164"/>
+          <p:cNvPr id="154" name="Text 152"/>
           <p:cNvSpPr/>
           <p:nvPr/>
         </p:nvSpPr>
@@ -36501,7 +34815,7 @@
       </p:sp>
       <p:sp>
         <p:nvSpPr>
-          <p:cNvPr id="167" name="Shape 165"/>
+          <p:cNvPr id="155" name="Shape 153"/>
           <p:cNvSpPr/>
           <p:nvPr/>
         </p:nvSpPr>
@@ -36526,7 +34840,7 @@
       </p:sp>
       <p:sp>
         <p:nvSpPr>
-          <p:cNvPr id="168" name="Shape 166"/>
+          <p:cNvPr id="156" name="Shape 154"/>
           <p:cNvSpPr/>
           <p:nvPr/>
         </p:nvSpPr>
@@ -36551,7 +34865,7 @@
       </p:sp>
       <p:sp>
         <p:nvSpPr>
-          <p:cNvPr id="169" name="Text 167"/>
+          <p:cNvPr id="157" name="Text 155"/>
           <p:cNvSpPr/>
           <p:nvPr/>
         </p:nvSpPr>
@@ -36587,7 +34901,7 @@
       </p:sp>
       <p:sp>
         <p:nvSpPr>
-          <p:cNvPr id="170" name="Text 168"/>
+          <p:cNvPr id="158" name="Text 156"/>
           <p:cNvSpPr/>
           <p:nvPr/>
         </p:nvSpPr>
@@ -36623,7 +34937,7 @@
       </p:sp>
       <p:sp>
         <p:nvSpPr>
-          <p:cNvPr id="171" name="Shape 169"/>
+          <p:cNvPr id="159" name="Shape 157"/>
           <p:cNvSpPr/>
           <p:nvPr/>
         </p:nvSpPr>
@@ -36650,7 +34964,7 @@
       </p:sp>
       <p:sp>
         <p:nvSpPr>
-          <p:cNvPr id="172" name="Text 170"/>
+          <p:cNvPr id="160" name="Text 158"/>
           <p:cNvSpPr/>
           <p:nvPr/>
         </p:nvSpPr>
@@ -36686,7 +35000,7 @@
       </p:sp>
       <p:sp>
         <p:nvSpPr>
-          <p:cNvPr id="173" name="Shape 171"/>
+          <p:cNvPr id="161" name="Shape 159"/>
           <p:cNvSpPr/>
           <p:nvPr/>
         </p:nvSpPr>
@@ -36711,7 +35025,7 @@
       </p:sp>
       <p:sp>
         <p:nvSpPr>
-          <p:cNvPr id="174" name="Shape 172"/>
+          <p:cNvPr id="162" name="Shape 160"/>
           <p:cNvSpPr/>
           <p:nvPr/>
         </p:nvSpPr>
@@ -36736,7 +35050,7 @@
       </p:sp>
       <p:sp>
         <p:nvSpPr>
-          <p:cNvPr id="175" name="Text 173"/>
+          <p:cNvPr id="163" name="Text 161"/>
           <p:cNvSpPr/>
           <p:nvPr/>
         </p:nvSpPr>
@@ -36772,7 +35086,7 @@
       </p:sp>
       <p:sp>
         <p:nvSpPr>
-          <p:cNvPr id="176" name="Text 174"/>
+          <p:cNvPr id="164" name="Text 162"/>
           <p:cNvSpPr/>
           <p:nvPr/>
         </p:nvSpPr>
@@ -36808,7 +35122,7 @@
       </p:sp>
       <p:sp>
         <p:nvSpPr>
-          <p:cNvPr id="177" name="Shape 175"/>
+          <p:cNvPr id="165" name="Shape 163"/>
           <p:cNvSpPr/>
           <p:nvPr/>
         </p:nvSpPr>
@@ -36835,7 +35149,7 @@
       </p:sp>
       <p:sp>
         <p:nvSpPr>
-          <p:cNvPr id="178" name="Text 176"/>
+          <p:cNvPr id="166" name="Text 164"/>
           <p:cNvSpPr/>
           <p:nvPr/>
         </p:nvSpPr>
@@ -36871,7 +35185,7 @@
       </p:sp>
       <p:sp>
         <p:nvSpPr>
-          <p:cNvPr id="179" name="Shape 177"/>
+          <p:cNvPr id="167" name="Shape 165"/>
           <p:cNvSpPr/>
           <p:nvPr/>
         </p:nvSpPr>
@@ -36894,7 +35208,7 @@
       </p:sp>
       <p:sp>
         <p:nvSpPr>
-          <p:cNvPr id="180" name="Text 178"/>
+          <p:cNvPr id="168" name="Text 166"/>
           <p:cNvSpPr/>
           <p:nvPr/>
         </p:nvSpPr>
@@ -36930,7 +35244,7 @@
       </p:sp>
       <p:sp>
         <p:nvSpPr>
-          <p:cNvPr id="181" name="Shape 179"/>
+          <p:cNvPr id="169" name="Shape 167"/>
           <p:cNvSpPr/>
           <p:nvPr/>
         </p:nvSpPr>
@@ -36957,7 +35271,7 @@
       </p:sp>
       <p:sp>
         <p:nvSpPr>
-          <p:cNvPr id="182" name="Text 180"/>
+          <p:cNvPr id="170" name="Text 168"/>
           <p:cNvSpPr/>
           <p:nvPr/>
         </p:nvSpPr>
@@ -36993,7 +35307,7 @@
       </p:sp>
       <p:sp>
         <p:nvSpPr>
-          <p:cNvPr id="183" name="Shape 181"/>
+          <p:cNvPr id="171" name="Shape 169"/>
           <p:cNvSpPr/>
           <p:nvPr/>
         </p:nvSpPr>
@@ -37020,7 +35334,7 @@
       </p:sp>
       <p:sp>
         <p:nvSpPr>
-          <p:cNvPr id="184" name="Text 182"/>
+          <p:cNvPr id="172" name="Text 170"/>
           <p:cNvSpPr/>
           <p:nvPr/>
         </p:nvSpPr>
@@ -37056,7 +35370,7 @@
       </p:sp>
       <p:sp>
         <p:nvSpPr>
-          <p:cNvPr id="185" name="Shape 183"/>
+          <p:cNvPr id="173" name="Shape 171"/>
           <p:cNvSpPr/>
           <p:nvPr/>
         </p:nvSpPr>
@@ -37083,7 +35397,7 @@
       </p:sp>
       <p:sp>
         <p:nvSpPr>
-          <p:cNvPr id="186" name="Text 184"/>
+          <p:cNvPr id="174" name="Text 172"/>
           <p:cNvSpPr/>
           <p:nvPr/>
         </p:nvSpPr>
@@ -37119,7 +35433,7 @@
       </p:sp>
       <p:sp>
         <p:nvSpPr>
-          <p:cNvPr id="187" name="Shape 185"/>
+          <p:cNvPr id="175" name="Shape 173"/>
           <p:cNvSpPr/>
           <p:nvPr/>
         </p:nvSpPr>
@@ -37146,7 +35460,7 @@
       </p:sp>
       <p:sp>
         <p:nvSpPr>
-          <p:cNvPr id="188" name="Text 186"/>
+          <p:cNvPr id="176" name="Text 174"/>
           <p:cNvSpPr/>
           <p:nvPr/>
         </p:nvSpPr>

--- a/SABR_CPR_Component_Status.pptx
+++ b/SABR_CPR_Component_Status.pptx
@@ -1561,7 +1561,7 @@
                   <a:srgbClr val="388849"/>
                 </a:solidFill>
               </a:rPr>
-              <a:t>Jul 17, 2026 Update</a:t>
+              <a:t>notes 7-15 Update</a:t>
             </a:r>
             <a:endParaRPr lang="en-US" sz="1100" dirty="0"/>
           </a:p>
@@ -1653,14 +1653,14 @@
               <a:buNone/>
             </a:pPr>
             <a:r>
-              <a:rPr lang="en-US" sz="900" i="1" dirty="0">
-                <a:solidFill>
-                  <a:srgbClr val="9CA3AF"/>
-                </a:solidFill>
-              </a:rPr>
-              <a:t>(No narrative for this week — run generate_cpr_narrative.py to populate from meeting notes)</a:t>
-            </a:r>
-            <a:endParaRPr lang="en-US" sz="900" dirty="0"/>
+              <a:rPr lang="en-US" sz="1000" dirty="0">
+                <a:solidFill>
+                  <a:srgbClr val="1F2937"/>
+                </a:solidFill>
+              </a:rPr>
+              <a:t>7/15/2026</a:t>
+            </a:r>
+            <a:endParaRPr lang="en-US" sz="1000" dirty="0"/>
           </a:p>
         </p:txBody>
       </p:sp>

--- a/SABR_CPR_Component_Status.pptx
+++ b/SABR_CPR_Component_Status.pptx
@@ -1561,7 +1561,7 @@
                   <a:srgbClr val="388849"/>
                 </a:solidFill>
               </a:rPr>
-              <a:t>notes 7-15 Update</a:t>
+              <a:t>7/15/2026 Update</a:t>
             </a:r>
             <a:endParaRPr lang="en-US" sz="1100" dirty="0"/>
           </a:p>
@@ -1597,7 +1597,7 @@
                   <a:srgbClr val="374151"/>
                 </a:solidFill>
               </a:rPr>
-              <a:t>Beta: Sep 30, 2026  ·  75 days remaining</a:t>
+              <a:t>Beta: Sep 30, 2026  ·  74 days remaining</a:t>
             </a:r>
             <a:endParaRPr lang="en-US" sz="900" dirty="0"/>
           </a:p>
@@ -1658,7 +1658,289 @@
                   <a:srgbClr val="1F2937"/>
                 </a:solidFill>
               </a:rPr>
-              <a:t>7/15/2026</a:t>
+              <a:t># PROJECT SABR — CPR: This Week Update</a:t>
+            </a:r>
+            <a:endParaRPr lang="en-US" sz="1000" dirty="0"/>
+          </a:p>
+          <a:p>
+            <a:pPr algn="l" indent="0" marL="0">
+              <a:buNone/>
+            </a:pPr>
+            <a:r>
+              <a:rPr lang="en-US" sz="1000" dirty="0">
+                <a:solidFill>
+                  <a:srgbClr val="1F2937"/>
+                </a:solidFill>
+              </a:rPr>
+              <a:t>**Week of July 15, 2026**</a:t>
+            </a:r>
+            <a:endParaRPr lang="en-US" sz="1000" dirty="0"/>
+          </a:p>
+          <a:p>
+            <a:pPr algn="l" indent="0" marL="0">
+              <a:buNone/>
+            </a:pPr>
+            <a:endParaRPr lang="en-US" sz="1000" dirty="0"/>
+          </a:p>
+          <a:p>
+            <a:pPr algn="l" indent="0" marL="0">
+              <a:buNone/>
+            </a:pPr>
+            <a:r>
+              <a:rPr lang="en-US" sz="1000" dirty="0">
+                <a:solidFill>
+                  <a:srgbClr val="1F2937"/>
+                </a:solidFill>
+              </a:rPr>
+              <a:t>---</a:t>
+            </a:r>
+            <a:endParaRPr lang="en-US" sz="1000" dirty="0"/>
+          </a:p>
+          <a:p>
+            <a:pPr algn="l" indent="0" marL="0">
+              <a:buNone/>
+            </a:pPr>
+            <a:endParaRPr lang="en-US" sz="1000" dirty="0"/>
+          </a:p>
+          <a:p>
+            <a:pPr algn="l" indent="0" marL="0">
+              <a:buNone/>
+            </a:pPr>
+            <a:r>
+              <a:rPr lang="en-US" sz="1000" dirty="0">
+                <a:solidFill>
+                  <a:srgbClr val="1F2937"/>
+                </a:solidFill>
+              </a:rPr>
+              <a:t>## Overall Summary</a:t>
+            </a:r>
+            <a:endParaRPr lang="en-US" sz="1000" dirty="0"/>
+          </a:p>
+          <a:p>
+            <a:pPr algn="l" indent="0" marL="0">
+              <a:buNone/>
+            </a:pPr>
+            <a:endParaRPr lang="en-US" sz="1000" dirty="0"/>
+          </a:p>
+          <a:p>
+            <a:pPr algn="l" indent="0" marL="0">
+              <a:buNone/>
+            </a:pPr>
+            <a:r>
+              <a:rPr lang="en-US" sz="1000" dirty="0">
+                <a:solidFill>
+                  <a:srgbClr val="1F2937"/>
+                </a:solidFill>
+              </a:rPr>
+              <a:t>The merchandising and frontend teams convened to align on hero module and rotator banner requirements for the platform rebuild. Engineering completed reverse-engineering of production behavior to inform SABR design decisions, while product clarified image asset specifications and responsive design patterns ahead of the beta milestone.</a:t>
+            </a:r>
+            <a:endParaRPr lang="en-US" sz="1000" dirty="0"/>
+          </a:p>
+          <a:p>
+            <a:pPr algn="l" indent="0" marL="0">
+              <a:buNone/>
+            </a:pPr>
+            <a:endParaRPr lang="en-US" sz="1000" dirty="0"/>
+          </a:p>
+          <a:p>
+            <a:pPr algn="l" indent="0" marL="0">
+              <a:buNone/>
+            </a:pPr>
+            <a:r>
+              <a:rPr lang="en-US" sz="1000" dirty="0">
+                <a:solidFill>
+                  <a:srgbClr val="1F2937"/>
+                </a:solidFill>
+              </a:rPr>
+              <a:t>---</a:t>
+            </a:r>
+            <a:endParaRPr lang="en-US" sz="1000" dirty="0"/>
+          </a:p>
+          <a:p>
+            <a:pPr algn="l" indent="0" marL="0">
+              <a:buNone/>
+            </a:pPr>
+            <a:endParaRPr lang="en-US" sz="1000" dirty="0"/>
+          </a:p>
+          <a:p>
+            <a:pPr algn="l" indent="0" marL="0">
+              <a:buNone/>
+            </a:pPr>
+            <a:r>
+              <a:rPr lang="en-US" sz="1000" dirty="0">
+                <a:solidFill>
+                  <a:srgbClr val="1F2937"/>
+                </a:solidFill>
+              </a:rPr>
+              <a:t>## **Merchandising &amp; Product**</a:t>
+            </a:r>
+            <a:endParaRPr lang="en-US" sz="1000" dirty="0"/>
+          </a:p>
+          <a:p>
+            <a:pPr algn="l" indent="0" marL="0">
+              <a:buNone/>
+            </a:pPr>
+            <a:endParaRPr lang="en-US" sz="1000" dirty="0"/>
+          </a:p>
+          <a:p>
+            <a:pPr algn="l" indent="0" marL="0">
+              <a:buNone/>
+            </a:pPr>
+            <a:r>
+              <a:rPr lang="en-US" sz="1000" dirty="0">
+                <a:solidFill>
+                  <a:srgbClr val="1F2937"/>
+                </a:solidFill>
+              </a:rPr>
+              <a:t>Engineering reviewed rotator banner behavior in production, confirming the intended responsive pattern: square image formatting in portrait mode, landscape formatting on mobile web rotation. Product confirmed the standard two-asset upload approach (mobile vertical + web landscape) will continue in SABR, with no requirement for additional asset variants.</a:t>
+            </a:r>
+            <a:endParaRPr lang="en-US" sz="1000" dirty="0"/>
+          </a:p>
+          <a:p>
+            <a:pPr algn="l" indent="0" marL="0">
+              <a:buNone/>
+            </a:pPr>
+            <a:endParaRPr lang="en-US" sz="1000" dirty="0"/>
+          </a:p>
+          <a:p>
+            <a:pPr algn="l" indent="0" marL="0">
+              <a:buNone/>
+            </a:pPr>
+            <a:r>
+              <a:rPr lang="en-US" sz="1000" dirty="0">
+                <a:solidFill>
+                  <a:srgbClr val="1F2937"/>
+                </a:solidFill>
+              </a:rPr>
+              <a:t>---</a:t>
+            </a:r>
+            <a:endParaRPr lang="en-US" sz="1000" dirty="0"/>
+          </a:p>
+          <a:p>
+            <a:pPr algn="l" indent="0" marL="0">
+              <a:buNone/>
+            </a:pPr>
+            <a:endParaRPr lang="en-US" sz="1000" dirty="0"/>
+          </a:p>
+          <a:p>
+            <a:pPr algn="l" indent="0" marL="0">
+              <a:buNone/>
+            </a:pPr>
+            <a:r>
+              <a:rPr lang="en-US" sz="1000" dirty="0">
+                <a:solidFill>
+                  <a:srgbClr val="1F2937"/>
+                </a:solidFill>
+              </a:rPr>
+              <a:t>## **Frontend/Hero Module Design**</a:t>
+            </a:r>
+            <a:endParaRPr lang="en-US" sz="1000" dirty="0"/>
+          </a:p>
+          <a:p>
+            <a:pPr algn="l" indent="0" marL="0">
+              <a:buNone/>
+            </a:pPr>
+            <a:endParaRPr lang="en-US" sz="1000" dirty="0"/>
+          </a:p>
+          <a:p>
+            <a:pPr algn="l" indent="0" marL="0">
+              <a:buNone/>
+            </a:pPr>
+            <a:r>
+              <a:rPr lang="en-US" sz="1000" dirty="0">
+                <a:solidFill>
+                  <a:srgbClr val="1F2937"/>
+                </a:solidFill>
+              </a:rPr>
+              <a:t>Product identified the hero module as a high-priority component requiring design exploration beyond current patterns. The team scheduled extended discussion to evaluate enhanced approaches to hero configuration and linking functionality, recognizing this as one of the most critical editorial touchpoints for the platform.</a:t>
+            </a:r>
+            <a:endParaRPr lang="en-US" sz="1000" dirty="0"/>
+          </a:p>
+          <a:p>
+            <a:pPr algn="l" indent="0" marL="0">
+              <a:buNone/>
+            </a:pPr>
+            <a:endParaRPr lang="en-US" sz="1000" dirty="0"/>
+          </a:p>
+          <a:p>
+            <a:pPr algn="l" indent="0" marL="0">
+              <a:buNone/>
+            </a:pPr>
+            <a:r>
+              <a:rPr lang="en-US" sz="1000" dirty="0">
+                <a:solidFill>
+                  <a:srgbClr val="1F2937"/>
+                </a:solidFill>
+              </a:rPr>
+              <a:t>---</a:t>
+            </a:r>
+            <a:endParaRPr lang="en-US" sz="1000" dirty="0"/>
+          </a:p>
+          <a:p>
+            <a:pPr algn="l" indent="0" marL="0">
+              <a:buNone/>
+            </a:pPr>
+            <a:endParaRPr lang="en-US" sz="1000" dirty="0"/>
+          </a:p>
+          <a:p>
+            <a:pPr algn="l" indent="0" marL="0">
+              <a:buNone/>
+            </a:pPr>
+            <a:r>
+              <a:rPr lang="en-US" sz="1000" dirty="0">
+                <a:solidFill>
+                  <a:srgbClr val="1F2937"/>
+                </a:solidFill>
+              </a:rPr>
+              <a:t>## **Key Decisions**</a:t>
+            </a:r>
+            <a:endParaRPr lang="en-US" sz="1000" dirty="0"/>
+          </a:p>
+          <a:p>
+            <a:pPr algn="l" indent="0" marL="0">
+              <a:buNone/>
+            </a:pPr>
+            <a:endParaRPr lang="en-US" sz="1000" dirty="0"/>
+          </a:p>
+          <a:p>
+            <a:pPr algn="l" indent="0" marL="0">
+              <a:buNone/>
+            </a:pPr>
+            <a:r>
+              <a:rPr lang="en-US" sz="1000" dirty="0">
+                <a:solidFill>
+                  <a:srgbClr val="1F2937"/>
+                </a:solidFill>
+              </a:rPr>
+              <a:t>- Rotator banner responsive behavior confirmed: portrait mode displays square crop; landscape rotation displays full-width asset</a:t>
+            </a:r>
+            <a:endParaRPr lang="en-US" sz="1000" dirty="0"/>
+          </a:p>
+          <a:p>
+            <a:pPr algn="l" indent="0" marL="0">
+              <a:buNone/>
+            </a:pPr>
+            <a:r>
+              <a:rPr lang="en-US" sz="1000" dirty="0">
+                <a:solidFill>
+                  <a:srgbClr val="1F2937"/>
+                </a:solidFill>
+              </a:rPr>
+              <a:t>- Continue two-asset upload model (mobile vertical + web landscape) for SABR</a:t>
+            </a:r>
+            <a:endParaRPr lang="en-US" sz="1000" dirty="0"/>
+          </a:p>
+          <a:p>
+            <a:pPr algn="l" indent="0" marL="0">
+              <a:buNone/>
+            </a:pPr>
+            <a:r>
+              <a:rPr lang="en-US" sz="1000" dirty="0">
+                <a:solidFill>
+                  <a:srgbClr val="1F2937"/>
+                </a:solidFill>
+              </a:rPr>
+              <a:t>- Schedule dedicated design sprint for hero module alternatives to improve upon current configuration workflow</a:t>
             </a:r>
             <a:endParaRPr lang="en-US" sz="1000" dirty="0"/>
           </a:p>
@@ -5638,7 +5920,7 @@
                   <a:srgbClr val="9CA3AF"/>
                 </a:solidFill>
               </a:rPr>
-              <a:t>Beta: Sep 30, 2026  ·  75 days remaining</a:t>
+              <a:t>Beta: Sep 30, 2026  ·  74 days remaining</a:t>
             </a:r>
             <a:endParaRPr lang="en-US" sz="800" dirty="0"/>
           </a:p>
@@ -12777,7 +13059,7 @@
                   <a:srgbClr val="9CA3AF"/>
                 </a:solidFill>
               </a:rPr>
-              <a:t>Beta: Sep 30, 2026  ·  75 days remaining</a:t>
+              <a:t>Beta: Sep 30, 2026  ·  74 days remaining</a:t>
             </a:r>
             <a:endParaRPr lang="en-US" sz="800" dirty="0"/>
           </a:p>
@@ -17521,7 +17803,7 @@
                   <a:srgbClr val="9CA3AF"/>
                 </a:solidFill>
               </a:rPr>
-              <a:t>Beta: Sep 30, 2026  ·  75 days remaining</a:t>
+              <a:t>Beta: Sep 30, 2026  ·  74 days remaining</a:t>
             </a:r>
             <a:endParaRPr lang="en-US" sz="800" dirty="0"/>
           </a:p>
@@ -22391,7 +22673,7 @@
                   <a:srgbClr val="9CA3AF"/>
                 </a:solidFill>
               </a:rPr>
-              <a:t>Beta: Sep 30, 2026  ·  75 days remaining</a:t>
+              <a:t>Beta: Sep 30, 2026  ·  74 days remaining</a:t>
             </a:r>
             <a:endParaRPr lang="en-US" sz="800" dirty="0"/>
           </a:p>
@@ -27675,7 +27957,7 @@
                   <a:srgbClr val="9CA3AF"/>
                 </a:solidFill>
               </a:rPr>
-              <a:t>Beta: Sep 30, 2026  ·  75 days remaining</a:t>
+              <a:t>Beta: Sep 30, 2026  ·  74 days remaining</a:t>
             </a:r>
             <a:endParaRPr lang="en-US" sz="800" dirty="0"/>
           </a:p>

--- a/SABR_CPR_Component_Status.pptx
+++ b/SABR_CPR_Component_Status.pptx
@@ -1658,7 +1658,7 @@
                   <a:srgbClr val="1F2937"/>
                 </a:solidFill>
               </a:rPr>
-              <a:t># PROJECT SABR — CPR: This Week Update</a:t>
+              <a:t>PROJECT SABR — CURRENT PROGRAM REVIEW</a:t>
             </a:r>
             <a:endParaRPr lang="en-US" sz="1000" dirty="0"/>
           </a:p>
@@ -1672,7 +1672,7 @@
                   <a:srgbClr val="1F2937"/>
                 </a:solidFill>
               </a:rPr>
-              <a:t>**Week of July 15, 2026**</a:t>
+              <a:t>Week of July 15, 2026</a:t>
             </a:r>
             <a:endParaRPr lang="en-US" sz="1000" dirty="0"/>
           </a:p>
@@ -1692,7 +1692,7 @@
                   <a:srgbClr val="1F2937"/>
                 </a:solidFill>
               </a:rPr>
-              <a:t>---</a:t>
+              <a:t>Engineering team continues rapid prototyping with working live stream demos across all platforms achieved within two weeks of development. Team is adopting AI-assisted development tools and evolving collaboration practices, though structure around testing and launch readiness will require increased rigor as we approach Beta Sep 30 and Launch Dec 1.</a:t>
             </a:r>
             <a:endParaRPr lang="en-US" sz="1000" dirty="0"/>
           </a:p>
@@ -1712,7 +1712,7 @@
                   <a:srgbClr val="1F2937"/>
                 </a:solidFill>
               </a:rPr>
-              <a:t>## Overall Summary</a:t>
+              <a:t>ENGINEERING: Team demonstrated working live stream on web, mobile, and TV platforms. DRM configuration changes pending from Amagi. Offers and coupon code integration in progress with backend work underway. Mobile authentication including sign-in, sign-up, and MVPD provider login now functional on TestFlight. Video playback being aligned across iOS and Android for unencrypted streams. Infrastructure setup for production instance underway with DNS hosted zone migration in progress.</a:t>
             </a:r>
             <a:endParaRPr lang="en-US" sz="1000" dirty="0"/>
           </a:p>
@@ -1732,7 +1732,7 @@
                   <a:srgbClr val="1F2937"/>
                 </a:solidFill>
               </a:rPr>
-              <a:t>The merchandising and frontend teams convened to align on hero module and rotator banner requirements for the platform rebuild. Engineering completed reverse-engineering of production behavior to inform SABR design decisions, while product clarified image asset specifications and responsive design patterns ahead of the beta milestone.</a:t>
+              <a:t>ROKU VOD PARTNERSHIP: Content delivery strategy refined to prioritize live feeds, match replays, and highlights launching concurrently, with historical VOD backfill deferred post-launch. Focus narrowed to approximately mid-August delivery timeline for live and match-in-15 content. Metadata ingestion process being finalized with Amagi handling transformations to Roku specifications. Policy decision made not to gate launch on comprehensive VOD parity given user viewing drops sharply after 48 hours.</a:t>
             </a:r>
             <a:endParaRPr lang="en-US" sz="1000" dirty="0"/>
           </a:p>
@@ -1752,7 +1752,7 @@
                   <a:srgbClr val="1F2937"/>
                 </a:solidFill>
               </a:rPr>
-              <a:t>---</a:t>
+              <a:t>MVPD ADOBE INTEGRATION: Authentication and logout flows tested across DirecTV, Spectrum, and Cox providers. Session GUID identified as stable identifier for user personalization given it is signed by Adobe. Custom error messaging requirements clarified as specific to Spectrum per contract. Provider TTL reports requested for documentation. Additional proxy account access needed for comprehensive testing across provider scenarios.</a:t>
             </a:r>
             <a:endParaRPr lang="en-US" sz="1000" dirty="0"/>
           </a:p>
@@ -1772,7 +1772,7 @@
                   <a:srgbClr val="1F2937"/>
                 </a:solidFill>
               </a:rPr>
-              <a:t>## **Merchandising &amp; Product**</a:t>
+              <a:t>AMAGI EVENT ORCHESTRATION: Control plane demo showed automated provisioning, readiness, and teardown workflows triggered by metadata events with manual override capabilities for operators. Lead time calculations and timing specifications to be standardized once Tennis Channel worker integrated with control plane. DRM streaming issue with certain bitrate scenarios escalated to EZDRM; ticket pending resolution to ensure playback consistency before broader testing.</a:t>
             </a:r>
             <a:endParaRPr lang="en-US" sz="1000" dirty="0"/>
           </a:p>
@@ -1792,7 +1792,7 @@
                   <a:srgbClr val="1F2937"/>
                 </a:solidFill>
               </a:rPr>
-              <a:t>Engineering reviewed rotator banner behavior in production, confirming the intended responsive pattern: square image formatting in portrait mode, landscape formatting on mobile web rotation. Product confirmed the standard two-asset upload approach (mobile vertical + web landscape) will continue in SABR, with no requirement for additional asset variants.</a:t>
+              <a:t>MERCHANDISING: Rotator banner reverse-engineered from production showing device-specific image handling for portrait and landscape orientations. Engineering confirmed two-image upload standard (mobile vertical and landscape web view). Hero module and content linking functionality reviewed with plans to explore alternative UX approaches given frequency of hero section changes needed.</a:t>
             </a:r>
             <a:endParaRPr lang="en-US" sz="1000" dirty="0"/>
           </a:p>
@@ -1812,7 +1812,7 @@
                   <a:srgbClr val="1F2937"/>
                 </a:solidFill>
               </a:rPr>
-              <a:t>---</a:t>
+              <a:t>VOD INGESTION FOR SABR: Solution identified leveraging metadata tagging for automated merchandising query. SportRadar asset library of 30000-plus items available for ingestion starting October with option to exclude match replays and highlights to reduce volume. Manual upload workflow confirmed as near-term approach for PDM-sourced content with file naming convention-based metadata association. Long-term metadata enrichment and automated workflows planned post-launch. Discussed file identification and upload location options with engineering to be confirmed.</a:t>
             </a:r>
             <a:endParaRPr lang="en-US" sz="1000" dirty="0"/>
           </a:p>
@@ -1832,7 +1832,7 @@
                   <a:srgbClr val="1F2937"/>
                 </a:solidFill>
               </a:rPr>
-              <a:t>## **Frontend/Hero Module Design**</a:t>
+              <a:t>KEY DECISIONS:</a:t>
             </a:r>
             <a:endParaRPr lang="en-US" sz="1000" dirty="0"/>
           </a:p>
@@ -1840,6 +1840,14 @@
             <a:pPr algn="l" indent="0" marL="0">
               <a:buNone/>
             </a:pPr>
+            <a:r>
+              <a:rPr lang="en-US" sz="1000" dirty="0">
+                <a:solidFill>
+                  <a:srgbClr val="1F2937"/>
+                </a:solidFill>
+              </a:rPr>
+              <a:t>• Roku VOD launch will include live feeds, match replays, and highlights only; historical VOD backfill deferred to post-launch to avoid gating launch on low-value content.</a:t>
+            </a:r>
             <a:endParaRPr lang="en-US" sz="1000" dirty="0"/>
           </a:p>
           <a:p>
@@ -1852,7 +1860,7 @@
                   <a:srgbClr val="1F2937"/>
                 </a:solidFill>
               </a:rPr>
-              <a:t>Product identified the hero module as a high-priority component requiring design exploration beyond current patterns. The team scheduled extended discussion to evaluate enhanced approaches to hero configuration and linking functionality, recognizing this as one of the most critical editorial touchpoints for the platform.</a:t>
+              <a:t>• Highlights and match-in-15 for Roku will be delivered through Amagi in Movie Labs format rather than Tennis Channel pushing files directly; Amagi handles all transformations.</a:t>
             </a:r>
             <a:endParaRPr lang="en-US" sz="1000" dirty="0"/>
           </a:p>
@@ -1860,6 +1868,14 @@
             <a:pPr algn="l" indent="0" marL="0">
               <a:buNone/>
             </a:pPr>
+            <a:r>
+              <a:rPr lang="en-US" sz="1000" dirty="0">
+                <a:solidFill>
+                  <a:srgbClr val="1F2937"/>
+                </a:solidFill>
+              </a:rPr>
+              <a:t>• For SABR merchandising VOD, manual file upload with metadata assignment is the initial path; automated workflows to be developed post-launch.</a:t>
+            </a:r>
             <a:endParaRPr lang="en-US" sz="1000" dirty="0"/>
           </a:p>
           <a:p>
@@ -1872,75 +1888,7 @@
                   <a:srgbClr val="1F2937"/>
                 </a:solidFill>
               </a:rPr>
-              <a:t>---</a:t>
-            </a:r>
-            <a:endParaRPr lang="en-US" sz="1000" dirty="0"/>
-          </a:p>
-          <a:p>
-            <a:pPr algn="l" indent="0" marL="0">
-              <a:buNone/>
-            </a:pPr>
-            <a:endParaRPr lang="en-US" sz="1000" dirty="0"/>
-          </a:p>
-          <a:p>
-            <a:pPr algn="l" indent="0" marL="0">
-              <a:buNone/>
-            </a:pPr>
-            <a:r>
-              <a:rPr lang="en-US" sz="1000" dirty="0">
-                <a:solidFill>
-                  <a:srgbClr val="1F2937"/>
-                </a:solidFill>
-              </a:rPr>
-              <a:t>## **Key Decisions**</a:t>
-            </a:r>
-            <a:endParaRPr lang="en-US" sz="1000" dirty="0"/>
-          </a:p>
-          <a:p>
-            <a:pPr algn="l" indent="0" marL="0">
-              <a:buNone/>
-            </a:pPr>
-            <a:endParaRPr lang="en-US" sz="1000" dirty="0"/>
-          </a:p>
-          <a:p>
-            <a:pPr algn="l" indent="0" marL="0">
-              <a:buNone/>
-            </a:pPr>
-            <a:r>
-              <a:rPr lang="en-US" sz="1000" dirty="0">
-                <a:solidFill>
-                  <a:srgbClr val="1F2937"/>
-                </a:solidFill>
-              </a:rPr>
-              <a:t>- Rotator banner responsive behavior confirmed: portrait mode displays square crop; landscape rotation displays full-width asset</a:t>
-            </a:r>
-            <a:endParaRPr lang="en-US" sz="1000" dirty="0"/>
-          </a:p>
-          <a:p>
-            <a:pPr algn="l" indent="0" marL="0">
-              <a:buNone/>
-            </a:pPr>
-            <a:r>
-              <a:rPr lang="en-US" sz="1000" dirty="0">
-                <a:solidFill>
-                  <a:srgbClr val="1F2937"/>
-                </a:solidFill>
-              </a:rPr>
-              <a:t>- Continue two-asset upload model (mobile vertical + web landscape) for SABR</a:t>
-            </a:r>
-            <a:endParaRPr lang="en-US" sz="1000" dirty="0"/>
-          </a:p>
-          <a:p>
-            <a:pPr algn="l" indent="0" marL="0">
-              <a:buNone/>
-            </a:pPr>
-            <a:r>
-              <a:rPr lang="en-US" sz="1000" dirty="0">
-                <a:solidFill>
-                  <a:srgbClr val="1F2937"/>
-                </a:solidFill>
-              </a:rPr>
-              <a:t>- Schedule dedicated design sprint for hero module alternatives to improve upon current configuration workflow</a:t>
+              <a:t>• Coupon code and offer configuration will be managed in Cleeng for launch with simple pricing overrides on plan selection; more sophisticated approaches deferred pending Recurly integration.</a:t>
             </a:r>
             <a:endParaRPr lang="en-US" sz="1000" dirty="0"/>
           </a:p>

--- a/SABR_CPR_Component_Status.pptx
+++ b/SABR_CPR_Component_Status.pptx
@@ -1658,7 +1658,7 @@
                   <a:srgbClr val="1F2937"/>
                 </a:solidFill>
               </a:rPr>
-              <a:t>PROJECT SABR — CURRENT PROGRAM REVIEW</a:t>
+              <a:t>PROJECT SABR - This Week Update</a:t>
             </a:r>
             <a:endParaRPr lang="en-US" sz="1000" dirty="0"/>
           </a:p>
@@ -1666,13 +1666,19 @@
             <a:pPr algn="l" indent="0" marL="0">
               <a:buNone/>
             </a:pPr>
+            <a:endParaRPr lang="en-US" sz="1000" dirty="0"/>
+          </a:p>
+          <a:p>
+            <a:pPr algn="l" indent="0" marL="0">
+              <a:buNone/>
+            </a:pPr>
             <a:r>
               <a:rPr lang="en-US" sz="1000" dirty="0">
                 <a:solidFill>
                   <a:srgbClr val="1F2937"/>
                 </a:solidFill>
               </a:rPr>
-              <a:t>Week of July 15, 2026</a:t>
+              <a:t>Engineering progress remains strong with working prototypes across all platforms demonstrated this week. Teams are moving rapidly using AI-assisted development tools, though the rate of change has created some structural gaps that will require attention as we approach launch readiness by December 1. Overall momentum is positive, but coordination and priority alignment across teams needs immediate reinforcement.</a:t>
             </a:r>
             <a:endParaRPr lang="en-US" sz="1000" dirty="0"/>
           </a:p>
@@ -1687,12 +1693,23 @@
               <a:buNone/>
             </a:pPr>
             <a:r>
+              <a:rPr lang="en-US" sz="1000" b="1" dirty="0">
+                <a:solidFill>
+                  <a:srgbClr val="1B5E20"/>
+                </a:solidFill>
+              </a:rPr>
+              <a:t>ENGINEERING:</a:t>
+            </a:r>
+            <a:pPr algn="l" indent="0" marL="0">
+              <a:buNone/>
+            </a:pPr>
+            <a:r>
               <a:rPr lang="en-US" sz="1000" dirty="0">
                 <a:solidFill>
                   <a:srgbClr val="1F2937"/>
                 </a:solidFill>
               </a:rPr>
-              <a:t>Engineering team continues rapid prototyping with working live stream demos across all platforms achieved within two weeks of development. Team is adopting AI-assisted development tools and evolving collaboration practices, though structure around testing and launch readiness will require increased rigor as we approach Beta Sep 30 and Launch Dec 1.</a:t>
+              <a:t> Teams delivered live stream demonstrations across web, mobile, and TV platforms within two weeks of project kickoff. DRM configuration with EzDRM remains in progress with support tickets open. Development continues on authentication, payments, and video player functionality across all platforms with TestFlight builds available for mobile testing.</a:t>
             </a:r>
             <a:endParaRPr lang="en-US" sz="1000" dirty="0"/>
           </a:p>
@@ -1707,12 +1724,23 @@
               <a:buNone/>
             </a:pPr>
             <a:r>
+              <a:rPr lang="en-US" sz="1000" b="1" dirty="0">
+                <a:solidFill>
+                  <a:srgbClr val="1B5E20"/>
+                </a:solidFill>
+              </a:rPr>
+              <a:t>ROKU PARTNERSHIP:</a:t>
+            </a:r>
+            <a:pPr algn="l" indent="0" marL="0">
+              <a:buNone/>
+            </a:pPr>
+            <a:r>
               <a:rPr lang="en-US" sz="1000" dirty="0">
                 <a:solidFill>
                   <a:srgbClr val="1F2937"/>
                 </a:solidFill>
               </a:rPr>
-              <a:t>ENGINEERING: Team demonstrated working live stream on web, mobile, and TV platforms. DRM configuration changes pending from Amagi. Offers and coupon code integration in progress with backend work underway. Mobile authentication including sign-in, sign-up, and MVPD provider login now functional on TestFlight. Video playback being aligned across iOS and Android for unencrypted streams. Infrastructure setup for production instance underway with DNS hosted zone migration in progress.</a:t>
+              <a:t> Alignment reached on launching with live feeds, match-in-15, and highlights for go-forward content without requiring historical backfill to launch. Focus is live feeds with metadata delivery through Amagi in Movie Labs format. Mid-August content delivery target is tight but team will pursue maximum feasible delivery timeline. Metadata and file delivery workflows between Tennis Channel and Amagi require further definition to support shoulder content.</a:t>
             </a:r>
             <a:endParaRPr lang="en-US" sz="1000" dirty="0"/>
           </a:p>
@@ -1727,12 +1755,23 @@
               <a:buNone/>
             </a:pPr>
             <a:r>
+              <a:rPr lang="en-US" sz="1000" b="1" dirty="0">
+                <a:solidFill>
+                  <a:srgbClr val="1B5E20"/>
+                </a:solidFill>
+              </a:rPr>
+              <a:t>MVPD ADOBE:</a:t>
+            </a:r>
+            <a:pPr algn="l" indent="0" marL="0">
+              <a:buNone/>
+            </a:pPr>
+            <a:r>
               <a:rPr lang="en-US" sz="1000" dirty="0">
                 <a:solidFill>
                   <a:srgbClr val="1F2937"/>
                 </a:solidFill>
               </a:rPr>
-              <a:t>ROKU VOD PARTNERSHIP: Content delivery strategy refined to prioritize live feeds, match replays, and highlights launching concurrently, with historical VOD backfill deferred post-launch. Focus narrowed to approximately mid-August delivery timeline for live and match-in-15 content. Metadata ingestion process being finalized with Amagi handling transformations to Roku specifications. Policy decision made not to gate launch on comprehensive VOD parity given user viewing drops sharply after 48 hours.</a:t>
+              <a:t> Login and logout flows are working on web and mobile with testing underway across provider accounts including Cox, DirecTV, and Spectrum. Error messaging and custom responses are being validated. Session management and TTL configurations for each MVPD provider require documentation and review. Team will provide Adobe TTL report and coordinate additional proxy account testing.</a:t>
             </a:r>
             <a:endParaRPr lang="en-US" sz="1000" dirty="0"/>
           </a:p>
@@ -1747,12 +1786,23 @@
               <a:buNone/>
             </a:pPr>
             <a:r>
+              <a:rPr lang="en-US" sz="1000" b="1" dirty="0">
+                <a:solidFill>
+                  <a:srgbClr val="1B5E20"/>
+                </a:solidFill>
+              </a:rPr>
+              <a:t>AMAGI INTEGRATION:</a:t>
+            </a:r>
+            <a:pPr algn="l" indent="0" marL="0">
+              <a:buNone/>
+            </a:pPr>
+            <a:r>
               <a:rPr lang="en-US" sz="1000" dirty="0">
                 <a:solidFill>
                   <a:srgbClr val="1F2937"/>
                 </a:solidFill>
               </a:rPr>
-              <a:t>MVPD ADOBE INTEGRATION: Authentication and logout flows tested across DirecTV, Spectrum, and Cox providers. Session GUID identified as stable identifier for user personalization given it is signed by Adobe. Custom error messaging requirements clarified as specific to Spectrum per contract. Provider TTL reports requested for documentation. Additional proxy account access needed for comprehensive testing across provider scenarios.</a:t>
+              <a:t> Event orchestration control plane demonstrated with automatic provisioning scheduling and manual teardown gating. DRM playback issues under investigation with EzDRM; unclear if frequency capping or network-related. Live event ingestion API validated with successful test submissions. Metadata requirements and final UI customization for operator dashboard planned for delivery next one to two weeks.</a:t>
             </a:r>
             <a:endParaRPr lang="en-US" sz="1000" dirty="0"/>
           </a:p>
@@ -1767,12 +1817,23 @@
               <a:buNone/>
             </a:pPr>
             <a:r>
+              <a:rPr lang="en-US" sz="1000" b="1" dirty="0">
+                <a:solidFill>
+                  <a:srgbClr val="1B5E20"/>
+                </a:solidFill>
+              </a:rPr>
+              <a:t>MERCHANDISING:</a:t>
+            </a:r>
+            <a:pPr algn="l" indent="0" marL="0">
+              <a:buNone/>
+            </a:pPr>
+            <a:r>
               <a:rPr lang="en-US" sz="1000" dirty="0">
                 <a:solidFill>
                   <a:srgbClr val="1F2937"/>
                 </a:solidFill>
               </a:rPr>
-              <a:t>AMAGI EVENT ORCHESTRATION: Control plane demo showed automated provisioning, readiness, and teardown workflows triggered by metadata events with manual override capabilities for operators. Lead time calculations and timing specifications to be standardized once Tennis Channel worker integrated with control plane. DRM streaming issue with certain bitrate scenarios escalated to EZDRM; ticket pending resolution to ensure playback consistency before broader testing.</a:t>
+              <a:t> Rotator banner behavior clarified with two-version approach confirmed for mobile portrait and landscape orientations. Hero module and expanded hero functionality prioritized for further exploration given importance to ongoing content merchandising needs.</a:t>
             </a:r>
             <a:endParaRPr lang="en-US" sz="1000" dirty="0"/>
           </a:p>
@@ -1787,12 +1848,29 @@
               <a:buNone/>
             </a:pPr>
             <a:r>
+              <a:rPr lang="en-US" sz="1000" b="1" dirty="0">
+                <a:solidFill>
+                  <a:srgbClr val="1B5E20"/>
+                </a:solidFill>
+              </a:rPr>
+              <a:t>KEY DECISIONS:</a:t>
+            </a:r>
+            <a:pPr algn="l" indent="0" marL="0">
+              <a:buNone/>
+            </a:pPr>
+            <a:endParaRPr lang="en-US" sz="1000" dirty="0"/>
+          </a:p>
+          <a:p>
+            <a:pPr algn="l" indent="0" marL="0">
+              <a:buNone/>
+            </a:pPr>
+            <a:r>
               <a:rPr lang="en-US" sz="1000" dirty="0">
                 <a:solidFill>
                   <a:srgbClr val="1F2937"/>
                 </a:solidFill>
               </a:rPr>
-              <a:t>MERCHANDISING: Rotator banner reverse-engineered from production showing device-specific image handling for portrait and landscape orientations. Engineering confirmed two-image upload standard (mobile vertical and landscape web view). Hero module and content linking functionality reviewed with plans to explore alternative UX approaches given frequency of hero section changes needed.</a:t>
+              <a:t>• Launch Roku without historical VOD backfill; focus live feeds and match-in-15 with highlights for immediate delivery</a:t>
             </a:r>
             <a:endParaRPr lang="en-US" sz="1000" dirty="0"/>
           </a:p>
@@ -1800,6 +1878,14 @@
             <a:pPr algn="l" indent="0" marL="0">
               <a:buNone/>
             </a:pPr>
+            <a:r>
+              <a:rPr lang="en-US" sz="1000" dirty="0">
+                <a:solidFill>
+                  <a:srgbClr val="1F2937"/>
+                </a:solidFill>
+              </a:rPr>
+              <a:t>• Amagi to handle all file and metadata transformation for Roku delivery in Movie Labs format to avoid custom implementations</a:t>
+            </a:r>
             <a:endParaRPr lang="en-US" sz="1000" dirty="0"/>
           </a:p>
           <a:p>
@@ -1812,7 +1898,7 @@
                   <a:srgbClr val="1F2937"/>
                 </a:solidFill>
               </a:rPr>
-              <a:t>VOD INGESTION FOR SABR: Solution identified leveraging metadata tagging for automated merchandising query. SportRadar asset library of 30000-plus items available for ingestion starting October with option to exclude match replays and highlights to reduce volume. Manual upload workflow confirmed as near-term approach for PDM-sourced content with file naming convention-based metadata association. Long-term metadata enrichment and automated workflows planned post-launch. Discussed file identification and upload location options with engineering to be confirmed.</a:t>
+              <a:t>• For Roku, do not require full parity with Amazon VOD; backfill content post-launch in phases through October</a:t>
             </a:r>
             <a:endParaRPr lang="en-US" sz="1000" dirty="0"/>
           </a:p>
@@ -1820,6 +1906,14 @@
             <a:pPr algn="l" indent="0" marL="0">
               <a:buNone/>
             </a:pPr>
+            <a:r>
+              <a:rPr lang="en-US" sz="1000" dirty="0">
+                <a:solidFill>
+                  <a:srgbClr val="1F2937"/>
+                </a:solidFill>
+              </a:rPr>
+              <a:t>• Merchandising VOD will start with manual metadata entry and basic CMS workflow; automate post-launch once process is validated</a:t>
+            </a:r>
             <a:endParaRPr lang="en-US" sz="1000" dirty="0"/>
           </a:p>
           <a:p>
@@ -1832,63 +1926,7 @@
                   <a:srgbClr val="1F2937"/>
                 </a:solidFill>
               </a:rPr>
-              <a:t>KEY DECISIONS:</a:t>
-            </a:r>
-            <a:endParaRPr lang="en-US" sz="1000" dirty="0"/>
-          </a:p>
-          <a:p>
-            <a:pPr algn="l" indent="0" marL="0">
-              <a:buNone/>
-            </a:pPr>
-            <a:r>
-              <a:rPr lang="en-US" sz="1000" dirty="0">
-                <a:solidFill>
-                  <a:srgbClr val="1F2937"/>
-                </a:solidFill>
-              </a:rPr>
-              <a:t>• Roku VOD launch will include live feeds, match replays, and highlights only; historical VOD backfill deferred to post-launch to avoid gating launch on low-value content.</a:t>
-            </a:r>
-            <a:endParaRPr lang="en-US" sz="1000" dirty="0"/>
-          </a:p>
-          <a:p>
-            <a:pPr algn="l" indent="0" marL="0">
-              <a:buNone/>
-            </a:pPr>
-            <a:r>
-              <a:rPr lang="en-US" sz="1000" dirty="0">
-                <a:solidFill>
-                  <a:srgbClr val="1F2937"/>
-                </a:solidFill>
-              </a:rPr>
-              <a:t>• Highlights and match-in-15 for Roku will be delivered through Amagi in Movie Labs format rather than Tennis Channel pushing files directly; Amagi handles all transformations.</a:t>
-            </a:r>
-            <a:endParaRPr lang="en-US" sz="1000" dirty="0"/>
-          </a:p>
-          <a:p>
-            <a:pPr algn="l" indent="0" marL="0">
-              <a:buNone/>
-            </a:pPr>
-            <a:r>
-              <a:rPr lang="en-US" sz="1000" dirty="0">
-                <a:solidFill>
-                  <a:srgbClr val="1F2937"/>
-                </a:solidFill>
-              </a:rPr>
-              <a:t>• For SABR merchandising VOD, manual file upload with metadata assignment is the initial path; automated workflows to be developed post-launch.</a:t>
-            </a:r>
-            <a:endParaRPr lang="en-US" sz="1000" dirty="0"/>
-          </a:p>
-          <a:p>
-            <a:pPr algn="l" indent="0" marL="0">
-              <a:buNone/>
-            </a:pPr>
-            <a:r>
-              <a:rPr lang="en-US" sz="1000" dirty="0">
-                <a:solidFill>
-                  <a:srgbClr val="1F2937"/>
-                </a:solidFill>
-              </a:rPr>
-              <a:t>• Coupon code and offer configuration will be managed in Cleeng for launch with simple pricing overrides on plan selection; more sophisticated approaches deferred pending Recurly integration.</a:t>
+              <a:t>• Establish weekly engineering status meetings with structured format: engineering updates first, questions held until end, demos every two weeks when substantial work complete</a:t>
             </a:r>
             <a:endParaRPr lang="en-US" sz="1000" dirty="0"/>
           </a:p>

--- a/SABR_CPR_Component_Status.pptx
+++ b/SABR_CPR_Component_Status.pptx
@@ -1653,12 +1653,23 @@
               <a:buNone/>
             </a:pPr>
             <a:r>
+              <a:rPr lang="en-US" sz="1000" b="1" dirty="0">
+                <a:solidFill>
+                  <a:srgbClr val="1B5E20"/>
+                </a:solidFill>
+              </a:rPr>
+              <a:t>ENGINEERING:</a:t>
+            </a:r>
+            <a:pPr algn="l" indent="0" marL="0">
+              <a:buNone/>
+            </a:pPr>
+            <a:r>
               <a:rPr lang="en-US" sz="1000" dirty="0">
                 <a:solidFill>
                   <a:srgbClr val="1F2937"/>
                 </a:solidFill>
               </a:rPr>
-              <a:t>PROJECT SABR - This Week Update</a:t>
+              <a:t> Working prototypes of live streams across all platforms demonstrated after approximately one to two weeks of development. DRM configuration with EZDRM pending resolution of streaming playback issues. Offers/coupon codes backend integration in progress; awaiting configuration changes from external vendor. Video player and EPG layout enhancements underway on web platform.</a:t>
             </a:r>
             <a:endParaRPr lang="en-US" sz="1000" dirty="0"/>
           </a:p>
@@ -1673,12 +1684,23 @@
               <a:buNone/>
             </a:pPr>
             <a:r>
+              <a:rPr lang="en-US" sz="1000" b="1" dirty="0">
+                <a:solidFill>
+                  <a:srgbClr val="1B5E20"/>
+                </a:solidFill>
+              </a:rPr>
+              <a:t>MERCHANDISING:</a:t>
+            </a:r>
+            <a:pPr algn="l" indent="0" marL="0">
+              <a:buNone/>
+            </a:pPr>
+            <a:r>
               <a:rPr lang="en-US" sz="1000" dirty="0">
                 <a:solidFill>
                   <a:srgbClr val="1F2937"/>
                 </a:solidFill>
               </a:rPr>
-              <a:t>Engineering progress remains strong with working prototypes across all platforms demonstrated this week. Teams are moving rapidly using AI-assisted development tools, though the rate of change has created some structural gaps that will require attention as we approach launch readiness by December 1. Overall momentum is positive, but coordination and priority alignment across teams needs immediate reinforcement.</a:t>
+              <a:t> Rotator banner behavior under review for responsive design consistency across portrait and landscape mobile orientations. Hero and module functionality being explored as alternatives to current setup; decision pending on best approach for content placement and linking.</a:t>
             </a:r>
             <a:endParaRPr lang="en-US" sz="1000" dirty="0"/>
           </a:p>
@@ -1698,7 +1720,7 @@
                   <a:srgbClr val="1B5E20"/>
                 </a:solidFill>
               </a:rPr>
-              <a:t>ENGINEERING:</a:t>
+              <a:t>ROKU PARTNERSHIP:</a:t>
             </a:r>
             <a:pPr algn="l" indent="0" marL="0">
               <a:buNone/>
@@ -1709,7 +1731,7 @@
                   <a:srgbClr val="1F2937"/>
                 </a:solidFill>
               </a:rPr>
-              <a:t> Teams delivered live stream demonstrations across web, mobile, and TV platforms within two weeks of project kickoff. DRM configuration with EzDRM remains in progress with support tickets open. Development continues on authentication, payments, and video player functionality across all platforms with TestFlight builds available for mobile testing.</a:t>
+              <a:t> Content delivery strategy finalized: focus on live feeds, match replays, and 15-minute highlights going forward; back catalog backfill deferred post-launch. VOD metadata delivery will flow through Amagi to Roku using Movie Labs format to avoid custom integrations. Mid-August timeline requested for content readiness; internal confirmation on feasibility pending. Live event orchestration and control plane demo completed with Amagi showing provisioning workflow and operator UI for manual overrides.</a:t>
             </a:r>
             <a:endParaRPr lang="en-US" sz="1000" dirty="0"/>
           </a:p>
@@ -1729,7 +1751,7 @@
                   <a:srgbClr val="1B5E20"/>
                 </a:solidFill>
               </a:rPr>
-              <a:t>ROKU PARTNERSHIP:</a:t>
+              <a:t>MVPD AUTHENTICATION:</a:t>
             </a:r>
             <a:pPr algn="l" indent="0" marL="0">
               <a:buNone/>
@@ -1740,7 +1762,7 @@
                   <a:srgbClr val="1F2937"/>
                 </a:solidFill>
               </a:rPr>
-              <a:t> Alignment reached on launching with live feeds, match-in-15, and highlights for go-forward content without requiring historical backfill to launch. Focus is live feeds with metadata delivery through Amagi in Movie Labs format. Mid-August content delivery target is tight but team will pursue maximum feasible delivery timeline. Metadata and file delivery workflows between Tennis Channel and Amagi require further definition to support shoulder content.</a:t>
+              <a:t> Login and logout functionality tested across multiple cable providers (Cox, DirecTV, Spectrum). Custom error messaging implementation aligned with contractual requirements for Spectrum only. Session stability confirmation in progress; TTL configurations vary by provider and require formal documentation. User ID handling being finalized to support personalization while maintaining Adobe security standards.</a:t>
             </a:r>
             <a:endParaRPr lang="en-US" sz="1000" dirty="0"/>
           </a:p>
@@ -1760,7 +1782,7 @@
                   <a:srgbClr val="1B5E20"/>
                 </a:solidFill>
               </a:rPr>
-              <a:t>MVPD ADOBE:</a:t>
+              <a:t>AMAGI INTEGRATION:</a:t>
             </a:r>
             <a:pPr algn="l" indent="0" marL="0">
               <a:buNone/>
@@ -1771,7 +1793,7 @@
                   <a:srgbClr val="1F2937"/>
                 </a:solidFill>
               </a:rPr>
-              <a:t> Login and logout flows are working on web and mobile with testing underway across provider accounts including Cox, DirecTV, and Spectrum. Error messaging and custom responses are being validated. Session management and TTL configurations for each MVPD provider require documentation and review. Team will provide Adobe TTL report and coordinate additional proxy account testing.</a:t>
+              <a:t> DRM playback issue under investigation with EZDRM vendor; reproducibility limited. Live event control plane ready with metadata-driven orchestration for provisioning, teardown, and manual gating. Event ingestion and processing flows being tested with production event data starting next week.</a:t>
             </a:r>
             <a:endParaRPr lang="en-US" sz="1000" dirty="0"/>
           </a:p>
@@ -1791,7 +1813,7 @@
                   <a:srgbClr val="1B5E20"/>
                 </a:solidFill>
               </a:rPr>
-              <a:t>AMAGI INTEGRATION:</a:t>
+              <a:t>VOD INGESTION:</a:t>
             </a:r>
             <a:pPr algn="l" indent="0" marL="0">
               <a:buNone/>
@@ -1802,7 +1824,7 @@
                   <a:srgbClr val="1F2937"/>
                 </a:solidFill>
               </a:rPr>
-              <a:t> Event orchestration control plane demonstrated with automatic provisioning scheduling and manual teardown gating. DRM playback issues under investigation with EzDRM; unclear if frequency capping or network-related. Live event ingestion API validated with successful test submissions. Metadata requirements and final UI customization for operator dashboard planned for delivery next one to two weeks.</a:t>
+              <a:t> Manual upload workflow via CMS planned as initial phase with metadata assignment. PDM workflow automation deferred post-launch pending broader process redesign. Sport Radar archive ingestion planned for October onward; scope to exclude duplicate match replays and highlights depending on final QA requirements.</a:t>
             </a:r>
             <a:endParaRPr lang="en-US" sz="1000" dirty="0"/>
           </a:p>
@@ -1822,18 +1844,30 @@
                   <a:srgbClr val="1B5E20"/>
                 </a:solidFill>
               </a:rPr>
-              <a:t>MERCHANDISING:</a:t>
+              <a:t>KEY DECISIONS:</a:t>
             </a:r>
             <a:pPr algn="l" indent="0" marL="0">
               <a:buNone/>
             </a:pPr>
+            <a:endParaRPr lang="en-US" sz="1000" dirty="0"/>
+          </a:p>
+          <a:p>
+            <a:pPr algn="l" indent="0" marL="0">
+              <a:buNone/>
+            </a:pPr>
+            <a:endParaRPr lang="en-US" sz="1000" dirty="0"/>
+          </a:p>
+          <a:p>
+            <a:pPr algn="l" indent="0" marL="0">
+              <a:buNone/>
+            </a:pPr>
             <a:r>
               <a:rPr lang="en-US" sz="1000" dirty="0">
                 <a:solidFill>
                   <a:srgbClr val="1F2937"/>
                 </a:solidFill>
               </a:rPr>
-              <a:t> Rotator banner behavior clarified with two-version approach confirmed for mobile portrait and landscape orientations. Hero module and expanded hero functionality prioritized for further exploration given importance to ongoing content merchandising needs.</a:t>
+              <a:t>• Live, match replays, and 15-minute highlights are priority for Roku launch; full back catalog backfill deferred to post-launch window.</a:t>
             </a:r>
             <a:endParaRPr lang="en-US" sz="1000" dirty="0"/>
           </a:p>
@@ -1848,13 +1882,16 @@
               <a:buNone/>
             </a:pPr>
             <a:r>
-              <a:rPr lang="en-US" sz="1000" b="1" dirty="0">
-                <a:solidFill>
-                  <a:srgbClr val="1B5E20"/>
-                </a:solidFill>
-              </a:rPr>
-              <a:t>KEY DECISIONS:</a:t>
-            </a:r>
+              <a:rPr lang="en-US" sz="1000" dirty="0">
+                <a:solidFill>
+                  <a:srgbClr val="1F2937"/>
+                </a:solidFill>
+              </a:rPr>
+              <a:t>• VOD delivery for future partners (ESPN, Apple, etc.) will follow Amagi model with complete file and metadata handling to avoid custom implementations.</a:t>
+            </a:r>
+            <a:endParaRPr lang="en-US" sz="1000" dirty="0"/>
+          </a:p>
+          <a:p>
             <a:pPr algn="l" indent="0" marL="0">
               <a:buNone/>
             </a:pPr>
@@ -1870,7 +1907,7 @@
                   <a:srgbClr val="1F2937"/>
                 </a:solidFill>
               </a:rPr>
-              <a:t>• Launch Roku without historical VOD backfill; focus live feeds and match-in-15 with highlights for immediate delivery</a:t>
+              <a:t>• Coupon code and offer configuration will use Cling as source of truth with override capability for promotions; complex dual-system workflows deferred to post-launch evaluation.</a:t>
             </a:r>
             <a:endParaRPr lang="en-US" sz="1000" dirty="0"/>
           </a:p>
@@ -1878,13 +1915,19 @@
             <a:pPr algn="l" indent="0" marL="0">
               <a:buNone/>
             </a:pPr>
+            <a:endParaRPr lang="en-US" sz="1000" dirty="0"/>
+          </a:p>
+          <a:p>
+            <a:pPr algn="l" indent="0" marL="0">
+              <a:buNone/>
+            </a:pPr>
             <a:r>
               <a:rPr lang="en-US" sz="1000" dirty="0">
                 <a:solidFill>
                   <a:srgbClr val="1F2937"/>
                 </a:solidFill>
               </a:rPr>
-              <a:t>• Amagi to handle all file and metadata transformation for Roku delivery in Movie Labs format to avoid custom implementations</a:t>
+              <a:t>• Mobile authentication in TestFlight; uses Tennis Channel email domain for sign-up with clear rejection messaging; MVPD provider accounts supported in production.</a:t>
             </a:r>
             <a:endParaRPr lang="en-US" sz="1000" dirty="0"/>
           </a:p>
@@ -1892,41 +1935,19 @@
             <a:pPr algn="l" indent="0" marL="0">
               <a:buNone/>
             </a:pPr>
+            <a:endParaRPr lang="en-US" sz="1000" dirty="0"/>
+          </a:p>
+          <a:p>
+            <a:pPr algn="l" indent="0" marL="0">
+              <a:buNone/>
+            </a:pPr>
             <a:r>
               <a:rPr lang="en-US" sz="1000" dirty="0">
                 <a:solidFill>
                   <a:srgbClr val="1F2937"/>
                 </a:solidFill>
               </a:rPr>
-              <a:t>• For Roku, do not require full parity with Amazon VOD; backfill content post-launch in phases through October</a:t>
-            </a:r>
-            <a:endParaRPr lang="en-US" sz="1000" dirty="0"/>
-          </a:p>
-          <a:p>
-            <a:pPr algn="l" indent="0" marL="0">
-              <a:buNone/>
-            </a:pPr>
-            <a:r>
-              <a:rPr lang="en-US" sz="1000" dirty="0">
-                <a:solidFill>
-                  <a:srgbClr val="1F2937"/>
-                </a:solidFill>
-              </a:rPr>
-              <a:t>• Merchandising VOD will start with manual metadata entry and basic CMS workflow; automate post-launch once process is validated</a:t>
-            </a:r>
-            <a:endParaRPr lang="en-US" sz="1000" dirty="0"/>
-          </a:p>
-          <a:p>
-            <a:pPr algn="l" indent="0" marL="0">
-              <a:buNone/>
-            </a:pPr>
-            <a:r>
-              <a:rPr lang="en-US" sz="1000" dirty="0">
-                <a:solidFill>
-                  <a:srgbClr val="1F2937"/>
-                </a:solidFill>
-              </a:rPr>
-              <a:t>• Establish weekly engineering status meetings with structured format: engineering updates first, questions held until end, demos every two weeks when substantial work complete</a:t>
+              <a:t>• Session GUID from Adobe media token approved as stable identifier for user personalization tracking due to cryptographic signing.</a:t>
             </a:r>
             <a:endParaRPr lang="en-US" sz="1000" dirty="0"/>
           </a:p>

--- a/SABR_CPR_Component_Status.pptx
+++ b/SABR_CPR_Component_Status.pptx
@@ -1653,7 +1653,47 @@
               <a:buNone/>
             </a:pPr>
             <a:r>
-              <a:rPr lang="en-US" sz="1000" b="1" dirty="0">
+              <a:rPr lang="en-US" sz="800" dirty="0">
+                <a:solidFill>
+                  <a:srgbClr val="1F2937"/>
+                </a:solidFill>
+              </a:rPr>
+              <a:t>PROJECT SABR — This Week Update</a:t>
+            </a:r>
+            <a:endParaRPr lang="en-US" sz="800" dirty="0"/>
+          </a:p>
+          <a:p>
+            <a:pPr algn="l" indent="0" marL="0">
+              <a:buNone/>
+            </a:pPr>
+            <a:endParaRPr lang="en-US" sz="800" dirty="0"/>
+          </a:p>
+          <a:p>
+            <a:pPr algn="l" indent="0" marL="0">
+              <a:buNone/>
+            </a:pPr>
+            <a:r>
+              <a:rPr lang="en-US" sz="800" dirty="0">
+                <a:solidFill>
+                  <a:srgbClr val="1F2937"/>
+                </a:solidFill>
+              </a:rPr>
+              <a:t>Engineering team made significant progress on live streaming functionality, with working demos of live streams across all platforms completed after approximately one to two weeks of development. The team continues to adapt to rapid AI-assisted development workflows, though structured refinement work will be critical before launch. Overall momentum is strong, but considerable effort remains to ensure the platform is launch-ready by December 1, with particular focus needed on stability, testing, and organizational alignment on priorities.</a:t>
+            </a:r>
+            <a:endParaRPr lang="en-US" sz="800" dirty="0"/>
+          </a:p>
+          <a:p>
+            <a:pPr algn="l" indent="0" marL="0">
+              <a:buNone/>
+            </a:pPr>
+            <a:endParaRPr lang="en-US" sz="800" dirty="0"/>
+          </a:p>
+          <a:p>
+            <a:pPr algn="l" indent="0" marL="0">
+              <a:buNone/>
+            </a:pPr>
+            <a:r>
+              <a:rPr lang="en-US" sz="800" b="1" dirty="0">
                 <a:solidFill>
                   <a:srgbClr val="1B5E20"/>
                 </a:solidFill>
@@ -1664,182 +1704,275 @@
               <a:buNone/>
             </a:pPr>
             <a:r>
-              <a:rPr lang="en-US" sz="1000" dirty="0">
+              <a:rPr lang="en-US" sz="800" dirty="0">
                 <a:solidFill>
                   <a:srgbClr val="1F2937"/>
                 </a:solidFill>
               </a:rPr>
-              <a:t> Working prototypes of live streams across all platforms demonstrated after approximately one to two weeks of development. DRM configuration with EZDRM pending resolution of streaming playback issues. Offers/coupon codes backend integration in progress; awaiting configuration changes from external vendor. Video player and EPG layout enhancements underway on web platform.</a:t>
-            </a:r>
-            <a:endParaRPr lang="en-US" sz="1000" dirty="0"/>
+              <a:t> Live stream playback demonstrated successfully on web, mobile, and TV platforms. Team is moving quickly using AI-assisted coding tools, though approach differs significantly from traditional waterfall methodology. Significant backend refinement work and edge case testing still required. DRM configuration issues with EZDRM being escalated; ticket raised and awaiting vendor response. Offers and coupon code integration progressing with backend implementation and merchandise-side widget planning.</a:t>
+            </a:r>
+            <a:endParaRPr lang="en-US" sz="800" dirty="0"/>
           </a:p>
           <a:p>
             <a:pPr algn="l" indent="0" marL="0">
               <a:buNone/>
             </a:pPr>
-            <a:endParaRPr lang="en-US" sz="1000" dirty="0"/>
+            <a:endParaRPr lang="en-US" sz="800" dirty="0"/>
           </a:p>
           <a:p>
             <a:pPr algn="l" indent="0" marL="0">
               <a:buNone/>
             </a:pPr>
             <a:r>
-              <a:rPr lang="en-US" sz="1000" b="1" dirty="0">
+              <a:rPr lang="en-US" sz="800" b="1" dirty="0">
                 <a:solidFill>
                   <a:srgbClr val="1B5E20"/>
                 </a:solidFill>
               </a:rPr>
+              <a:t>MVPD AUTHENTICATION:</a:t>
+            </a:r>
+            <a:pPr algn="l" indent="0" marL="0">
+              <a:buNone/>
+            </a:pPr>
+            <a:r>
+              <a:rPr lang="en-US" sz="800" dirty="0">
+                <a:solidFill>
+                  <a:srgbClr val="1F2937"/>
+                </a:solidFill>
+              </a:rPr>
+              <a:t> Login and logout flows working on web with mobile and TV integration underway. Testing across DirecTV, Spectrum, Cox, and other providers ongoing. User ID stability from Adobe authentication confirmed for personalization tracking. TTL reports for different MVPD providers being compiled by Adobe for review. Proxy account access needed for comprehensive testing coverage.</a:t>
+            </a:r>
+            <a:endParaRPr lang="en-US" sz="800" dirty="0"/>
+          </a:p>
+          <a:p>
+            <a:pPr algn="l" indent="0" marL="0">
+              <a:buNone/>
+            </a:pPr>
+            <a:endParaRPr lang="en-US" sz="800" dirty="0"/>
+          </a:p>
+          <a:p>
+            <a:pPr algn="l" indent="0" marL="0">
+              <a:buNone/>
+            </a:pPr>
+            <a:r>
+              <a:rPr lang="en-US" sz="800" b="1" dirty="0">
+                <a:solidFill>
+                  <a:srgbClr val="1B5E20"/>
+                </a:solidFill>
+              </a:rPr>
+              <a:t>LIVE EVENT ORCHESTRATION:</a:t>
+            </a:r>
+            <a:pPr algn="l" indent="0" marL="0">
+              <a:buNone/>
+            </a:pPr>
+            <a:r>
+              <a:rPr lang="en-US" sz="800" dirty="0">
+                <a:solidFill>
+                  <a:srgbClr val="1F2937"/>
+                </a:solidFill>
+              </a:rPr>
+              <a:t> Amagi demonstrated control plane with automated provisioning, ready states, and manual teardown gating. Event scheduling, worker orchestration, and state management working. Timeline standardization and terminology refinement (group, match, court concepts) to be finalized. Operator UI with manual override controls planned for next one to two weeks.</a:t>
+            </a:r>
+            <a:endParaRPr lang="en-US" sz="800" dirty="0"/>
+          </a:p>
+          <a:p>
+            <a:pPr algn="l" indent="0" marL="0">
+              <a:buNone/>
+            </a:pPr>
+            <a:endParaRPr lang="en-US" sz="800" dirty="0"/>
+          </a:p>
+          <a:p>
+            <a:pPr algn="l" indent="0" marL="0">
+              <a:buNone/>
+            </a:pPr>
+            <a:r>
+              <a:rPr lang="en-US" sz="800" b="1" dirty="0">
+                <a:solidFill>
+                  <a:srgbClr val="1B5E20"/>
+                </a:solidFill>
+              </a:rPr>
+              <a:t>VOD AND CONTENT DELIVERY:</a:t>
+            </a:r>
+            <a:pPr algn="l" indent="0" marL="0">
+              <a:buNone/>
+            </a:pPr>
+            <a:r>
+              <a:rPr lang="en-US" sz="800" dirty="0">
+                <a:solidFill>
+                  <a:srgbClr val="1F2937"/>
+                </a:solidFill>
+              </a:rPr>
+              <a:t> Roku partnership prioritizing live feeds with match-in-15 and highlights going forward; full back catalog parity deferred post-launch. Amagi to handle metadata transformation for all shoulder content delivery to avoid custom implementations. S3 delivery path confirmed for live and match-in-15 assets. SportRadar archive ingest planned for October with full replays and match-in-15 assets; manual ingest process for PDM content being scoped. Metadata requirements and QA approach to be defined.</a:t>
+            </a:r>
+            <a:endParaRPr lang="en-US" sz="800" dirty="0"/>
+          </a:p>
+          <a:p>
+            <a:pPr algn="l" indent="0" marL="0">
+              <a:buNone/>
+            </a:pPr>
+            <a:endParaRPr lang="en-US" sz="800" dirty="0"/>
+          </a:p>
+          <a:p>
+            <a:pPr algn="l" indent="0" marL="0">
+              <a:buNone/>
+            </a:pPr>
+            <a:r>
+              <a:rPr lang="en-US" sz="800" b="1" dirty="0">
+                <a:solidFill>
+                  <a:srgbClr val="1B5E20"/>
+                </a:solidFill>
+              </a:rPr>
               <a:t>MERCHANDISING:</a:t>
             </a:r>
             <a:pPr algn="l" indent="0" marL="0">
               <a:buNone/>
             </a:pPr>
             <a:r>
-              <a:rPr lang="en-US" sz="1000" dirty="0">
+              <a:rPr lang="en-US" sz="800" dirty="0">
                 <a:solidFill>
                   <a:srgbClr val="1F2937"/>
                 </a:solidFill>
               </a:rPr>
-              <a:t> Rotator banner behavior under review for responsive design consistency across portrait and landscape mobile orientations. Hero and module functionality being explored as alternatives to current setup; decision pending on best approach for content placement and linking.</a:t>
-            </a:r>
-            <a:endParaRPr lang="en-US" sz="1000" dirty="0"/>
+              <a:t> Rotation banner behavior clarified for portrait and landscape mobile orientations. Hero module functionality and merchandising configuration aligned with current approaches. VOD metadata structure established with queryable tags for automated placement. Baseline metadata fields identified with flexibility for post-launch enhancement.</a:t>
+            </a:r>
+            <a:endParaRPr lang="en-US" sz="800" dirty="0"/>
           </a:p>
           <a:p>
             <a:pPr algn="l" indent="0" marL="0">
               <a:buNone/>
             </a:pPr>
-            <a:endParaRPr lang="en-US" sz="1000" dirty="0"/>
+            <a:endParaRPr lang="en-US" sz="800" dirty="0"/>
           </a:p>
           <a:p>
             <a:pPr algn="l" indent="0" marL="0">
               <a:buNone/>
             </a:pPr>
             <a:r>
-              <a:rPr lang="en-US" sz="1000" b="1" dirty="0">
+              <a:rPr lang="en-US" sz="800" b="1" dirty="0">
                 <a:solidFill>
                   <a:srgbClr val="1B5E20"/>
                 </a:solidFill>
               </a:rPr>
-              <a:t>ROKU PARTNERSHIP:</a:t>
+              <a:t>AMAGI INTEGRATION:</a:t>
             </a:r>
             <a:pPr algn="l" indent="0" marL="0">
               <a:buNone/>
             </a:pPr>
             <a:r>
-              <a:rPr lang="en-US" sz="1000" dirty="0">
+              <a:rPr lang="en-US" sz="800" dirty="0">
                 <a:solidFill>
                   <a:srgbClr val="1F2937"/>
                 </a:solidFill>
               </a:rPr>
-              <a:t> Content delivery strategy finalized: focus on live feeds, match replays, and 15-minute highlights going forward; back catalog backfill deferred post-launch. VOD metadata delivery will flow through Amagi to Roku using Movie Labs format to avoid custom integrations. Mid-August timeline requested for content readiness; internal confirmation on feasibility pending. Live event orchestration and control plane demo completed with Amagi showing provisioning workflow and operator UI for manual overrides.</a:t>
-            </a:r>
-            <a:endParaRPr lang="en-US" sz="1000" dirty="0"/>
+              <a:t> API access and documentation shared for live event ingestion. Daily production event testing starting next week to validate integration flows. Match upsert, cancellation, and withdrawal scenarios to be tested. Rights channel configuration for Roku delivery to be added. Non-blocking DRM playback issues under investigation with EZDRM.</a:t>
+            </a:r>
+            <a:endParaRPr lang="en-US" sz="800" dirty="0"/>
           </a:p>
           <a:p>
             <a:pPr algn="l" indent="0" marL="0">
               <a:buNone/>
             </a:pPr>
-            <a:endParaRPr lang="en-US" sz="1000" dirty="0"/>
+            <a:endParaRPr lang="en-US" sz="800" dirty="0"/>
           </a:p>
           <a:p>
             <a:pPr algn="l" indent="0" marL="0">
               <a:buNone/>
             </a:pPr>
             <a:r>
-              <a:rPr lang="en-US" sz="1000" b="1" dirty="0">
+              <a:rPr lang="en-US" sz="800" b="1" dirty="0">
                 <a:solidFill>
                   <a:srgbClr val="1B5E20"/>
                 </a:solidFill>
               </a:rPr>
-              <a:t>MVPD AUTHENTICATION:</a:t>
+              <a:t>DEVICE PARITY STRATEGY:</a:t>
             </a:r>
             <a:pPr algn="l" indent="0" marL="0">
               <a:buNone/>
             </a:pPr>
             <a:r>
-              <a:rPr lang="en-US" sz="1000" dirty="0">
+              <a:rPr lang="en-US" sz="800" dirty="0">
                 <a:solidFill>
                   <a:srgbClr val="1F2937"/>
                 </a:solidFill>
               </a:rPr>
-              <a:t> Login and logout functionality tested across multiple cable providers (Cox, DirecTV, Spectrum). Custom error messaging implementation aligned with contractual requirements for Spectrum only. Session stability confirmation in progress; TTL configurations vary by provider and require formal documentation. User ID handling being finalized to support personalization while maintaining Adobe security standards.</a:t>
-            </a:r>
-            <a:endParaRPr lang="en-US" sz="1000" dirty="0"/>
+              <a:t> Team clarified that perfect parity across web, mobile, and living room is not required; web can move faster with feature prioritization. Minimum feature parity identified for each platform with testing and iteration planned. Decision to avoid gating launch on full VOD backfill; current and going-forward content prioritized.</a:t>
+            </a:r>
+            <a:endParaRPr lang="en-US" sz="800" dirty="0"/>
           </a:p>
           <a:p>
             <a:pPr algn="l" indent="0" marL="0">
               <a:buNone/>
             </a:pPr>
-            <a:endParaRPr lang="en-US" sz="1000" dirty="0"/>
+            <a:endParaRPr lang="en-US" sz="800" dirty="0"/>
           </a:p>
           <a:p>
             <a:pPr algn="l" indent="0" marL="0">
               <a:buNone/>
             </a:pPr>
             <a:r>
-              <a:rPr lang="en-US" sz="1000" b="1" dirty="0">
+              <a:rPr lang="en-US" sz="800" b="1" dirty="0">
                 <a:solidFill>
                   <a:srgbClr val="1B5E20"/>
                 </a:solidFill>
               </a:rPr>
-              <a:t>AMAGI INTEGRATION:</a:t>
+              <a:t>TENNIS.COM COORDINATION:</a:t>
             </a:r>
             <a:pPr algn="l" indent="0" marL="0">
               <a:buNone/>
             </a:pPr>
             <a:r>
-              <a:rPr lang="en-US" sz="1000" dirty="0">
+              <a:rPr lang="en-US" sz="800" dirty="0">
                 <a:solidFill>
                   <a:srgbClr val="1F2937"/>
                 </a:solidFill>
               </a:rPr>
-              <a:t> DRM playback issue under investigation with EZDRM vendor; reproducibility limited. Live event control plane ready with metadata-driven orchestration for provisioning, teardown, and manual gating. Event ingestion and processing flows being tested with production event data starting next week.</a:t>
-            </a:r>
-            <a:endParaRPr lang="en-US" sz="1000" dirty="0"/>
+              <a:t> Strategic conversation needed on relationship between Tennis.com and new OTT platform. Incremental tactical decisions planned including scores and schedules reuse. Product strategy document being drafted to outline H1 priorities around data capabilities, acquisition versus engagement versus retention balance, and high-level product initiatives.</a:t>
+            </a:r>
+            <a:endParaRPr lang="en-US" sz="800" dirty="0"/>
           </a:p>
           <a:p>
             <a:pPr algn="l" indent="0" marL="0">
               <a:buNone/>
             </a:pPr>
-            <a:endParaRPr lang="en-US" sz="1000" dirty="0"/>
+            <a:endParaRPr lang="en-US" sz="800" dirty="0"/>
           </a:p>
           <a:p>
             <a:pPr algn="l" indent="0" marL="0">
               <a:buNone/>
             </a:pPr>
             <a:r>
-              <a:rPr lang="en-US" sz="1000" b="1" dirty="0">
+              <a:rPr lang="en-US" sz="800" b="1" dirty="0">
                 <a:solidFill>
                   <a:srgbClr val="1B5E20"/>
                 </a:solidFill>
               </a:rPr>
-              <a:t>VOD INGESTION:</a:t>
+              <a:t>MEETING CADENCE:</a:t>
             </a:r>
             <a:pPr algn="l" indent="0" marL="0">
               <a:buNone/>
             </a:pPr>
             <a:r>
-              <a:rPr lang="en-US" sz="1000" dirty="0">
+              <a:rPr lang="en-US" sz="800" dirty="0">
                 <a:solidFill>
                   <a:srgbClr val="1F2937"/>
                 </a:solidFill>
               </a:rPr>
-              <a:t> Manual upload workflow via CMS planned as initial phase with metadata assignment. PDM workflow automation deferred post-launch pending broader process redesign. Sport Radar archive ingestion planned for October onward; scope to exclude duplicate match replays and highlights depending on final QA requirements.</a:t>
-            </a:r>
-            <a:endParaRPr lang="en-US" sz="1000" dirty="0"/>
+              <a:t> Wednesday 9:00-9:45 AM engineering status updates implemented with disciplined format: engineers provide uninterrupted updates, questions collected for Q&amp;A section. Blockers and action items identified in real-time. Demos on bi-weekly basis when significant features complete; daily Slack video updates continuing.</a:t>
+            </a:r>
+            <a:endParaRPr lang="en-US" sz="800" dirty="0"/>
           </a:p>
           <a:p>
             <a:pPr algn="l" indent="0" marL="0">
               <a:buNone/>
             </a:pPr>
-            <a:endParaRPr lang="en-US" sz="1000" dirty="0"/>
+            <a:endParaRPr lang="en-US" sz="800" dirty="0"/>
           </a:p>
           <a:p>
             <a:pPr algn="l" indent="0" marL="0">
               <a:buNone/>
             </a:pPr>
             <a:r>
-              <a:rPr lang="en-US" sz="1000" b="1" dirty="0">
+              <a:rPr lang="en-US" sz="800" b="1" dirty="0">
                 <a:solidFill>
                   <a:srgbClr val="1B5E20"/>
                 </a:solidFill>
@@ -1849,107 +1982,91 @@
             <a:pPr algn="l" indent="0" marL="0">
               <a:buNone/>
             </a:pPr>
-            <a:endParaRPr lang="en-US" sz="1000" dirty="0"/>
+            <a:endParaRPr lang="en-US" sz="800" dirty="0"/>
           </a:p>
           <a:p>
             <a:pPr algn="l" indent="0" marL="0">
               <a:buNone/>
             </a:pPr>
-            <a:endParaRPr lang="en-US" sz="1000" dirty="0"/>
+            <a:r>
+              <a:rPr lang="en-US" sz="800" dirty="0">
+                <a:solidFill>
+                  <a:srgbClr val="1F2937"/>
+                </a:solidFill>
+              </a:rPr>
+              <a:t>• Focus Roku launch on live feeds, match-in-15, and highlights with backfill deferred to post-launch phase to avoid gating on content parity</a:t>
+            </a:r>
+            <a:endParaRPr lang="en-US" sz="800" dirty="0"/>
           </a:p>
           <a:p>
             <a:pPr algn="l" indent="0" marL="0">
               <a:buNone/>
             </a:pPr>
             <a:r>
-              <a:rPr lang="en-US" sz="1000" dirty="0">
+              <a:rPr lang="en-US" sz="800" dirty="0">
                 <a:solidFill>
                   <a:srgbClr val="1F2937"/>
                 </a:solidFill>
               </a:rPr>
-              <a:t>• Live, match replays, and 15-minute highlights are priority for Roku launch; full back catalog backfill deferred to post-launch window.</a:t>
-            </a:r>
-            <a:endParaRPr lang="en-US" sz="1000" dirty="0"/>
+              <a:t>• All future VOD delivery to partners will flow through Amagi for metadata transformation and file delivery to prevent custom integrations</a:t>
+            </a:r>
+            <a:endParaRPr lang="en-US" sz="800" dirty="0"/>
           </a:p>
           <a:p>
             <a:pPr algn="l" indent="0" marL="0">
               <a:buNone/>
             </a:pPr>
-            <a:endParaRPr lang="en-US" sz="1000" dirty="0"/>
+            <a:r>
+              <a:rPr lang="en-US" sz="800" dirty="0">
+                <a:solidFill>
+                  <a:srgbClr val="1F2937"/>
+                </a:solidFill>
+              </a:rPr>
+              <a:t>• Device feature parity not required; web leads faster with minimum parity thresholds per platform to be defined in roadmap</a:t>
+            </a:r>
+            <a:endParaRPr lang="en-US" sz="800" dirty="0"/>
           </a:p>
           <a:p>
             <a:pPr algn="l" indent="0" marL="0">
               <a:buNone/>
             </a:pPr>
             <a:r>
-              <a:rPr lang="en-US" sz="1000" dirty="0">
+              <a:rPr lang="en-US" sz="800" dirty="0">
                 <a:solidFill>
                   <a:srgbClr val="1F2937"/>
                 </a:solidFill>
               </a:rPr>
-              <a:t>• VOD delivery for future partners (ESPN, Apple, etc.) will follow Amagi model with complete file and metadata handling to avoid custom implementations.</a:t>
-            </a:r>
-            <a:endParaRPr lang="en-US" sz="1000" dirty="0"/>
+              <a:t>• Coupon code configuration to remain in Cling with promotional pricing overrides on plan selection page until post-launch evaluation of better approaches</a:t>
+            </a:r>
+            <a:endParaRPr lang="en-US" sz="800" dirty="0"/>
           </a:p>
           <a:p>
             <a:pPr algn="l" indent="0" marL="0">
               <a:buNone/>
             </a:pPr>
-            <a:endParaRPr lang="en-US" sz="1000" dirty="0"/>
+            <a:r>
+              <a:rPr lang="en-US" sz="800" dirty="0">
+                <a:solidFill>
+                  <a:srgbClr val="1F2937"/>
+                </a:solidFill>
+              </a:rPr>
+              <a:t>• ProductStrategy document to be developed covering data foundations, acquisition-engagement-retention balance, and H1 product initiatives with Tennis.com coordination approach</a:t>
+            </a:r>
+            <a:endParaRPr lang="en-US" sz="800" dirty="0"/>
           </a:p>
           <a:p>
             <a:pPr algn="l" indent="0" marL="0">
               <a:buNone/>
             </a:pPr>
             <a:r>
-              <a:rPr lang="en-US" sz="1000" dirty="0">
+              <a:rPr lang="en-US" sz="800" dirty="0">
                 <a:solidFill>
                   <a:srgbClr val="1F2937"/>
                 </a:solidFill>
               </a:rPr>
-              <a:t>• Coupon code and offer configuration will use Cling as source of truth with override capability for promotions; complex dual-system workflows deferred to post-launch evaluation.</a:t>
-            </a:r>
-            <a:endParaRPr lang="en-US" sz="1000" dirty="0"/>
-          </a:p>
-          <a:p>
-            <a:pPr algn="l" indent="0" marL="0">
-              <a:buNone/>
-            </a:pPr>
-            <a:endParaRPr lang="en-US" sz="1000" dirty="0"/>
-          </a:p>
-          <a:p>
-            <a:pPr algn="l" indent="0" marL="0">
-              <a:buNone/>
-            </a:pPr>
-            <a:r>
-              <a:rPr lang="en-US" sz="1000" dirty="0">
-                <a:solidFill>
-                  <a:srgbClr val="1F2937"/>
-                </a:solidFill>
-              </a:rPr>
-              <a:t>• Mobile authentication in TestFlight; uses Tennis Channel email domain for sign-up with clear rejection messaging; MVPD provider accounts supported in production.</a:t>
-            </a:r>
-            <a:endParaRPr lang="en-US" sz="1000" dirty="0"/>
-          </a:p>
-          <a:p>
-            <a:pPr algn="l" indent="0" marL="0">
-              <a:buNone/>
-            </a:pPr>
-            <a:endParaRPr lang="en-US" sz="1000" dirty="0"/>
-          </a:p>
-          <a:p>
-            <a:pPr algn="l" indent="0" marL="0">
-              <a:buNone/>
-            </a:pPr>
-            <a:r>
-              <a:rPr lang="en-US" sz="1000" dirty="0">
-                <a:solidFill>
-                  <a:srgbClr val="1F2937"/>
-                </a:solidFill>
-              </a:rPr>
-              <a:t>• Session GUID from Adobe media token approved as stable identifier for user personalization tracking due to cryptographic signing.</a:t>
-            </a:r>
-            <a:endParaRPr lang="en-US" sz="1000" dirty="0"/>
+              <a:t>• Amagi to proceed with production event testing starting next week using real live event data rather than staging environment to accelerate integration validation</a:t>
+            </a:r>
+            <a:endParaRPr lang="en-US" sz="800" dirty="0"/>
           </a:p>
         </p:txBody>
       </p:sp>

--- a/SABR_CPR_Component_Status.pptx
+++ b/SABR_CPR_Component_Status.pptx
@@ -1500,7 +1500,7 @@
                   <a:srgbClr val="388849"/>
                 </a:solidFill>
               </a:rPr>
-              <a:t>This Week  ·  Jul 17, 2026</a:t>
+              <a:t>This Week  ·  Aug 5, 2026</a:t>
             </a:r>
             <a:endParaRPr lang="en-US" sz="1100" dirty="0"/>
           </a:p>
@@ -1561,7 +1561,7 @@
                   <a:srgbClr val="388849"/>
                 </a:solidFill>
               </a:rPr>
-              <a:t>7/15/2026 Update</a:t>
+              <a:t>8/5/2026 Update</a:t>
             </a:r>
             <a:endParaRPr lang="en-US" sz="1100" dirty="0"/>
           </a:p>
@@ -1597,7 +1597,7 @@
                   <a:srgbClr val="374151"/>
                 </a:solidFill>
               </a:rPr>
-              <a:t>Beta: Sep 30, 2026  ·  74 days remaining</a:t>
+              <a:t>Beta: Sep 30, 2026  ·  55 days remaining</a:t>
             </a:r>
             <a:endParaRPr lang="en-US" sz="900" dirty="0"/>
           </a:p>
@@ -1658,7 +1658,7 @@
                   <a:srgbClr val="1F2937"/>
                 </a:solidFill>
               </a:rPr>
-              <a:t>PROJECT SABR — This Week Update</a:t>
+              <a:t>PROJECT SABR — CURRENT PROGRAM REVIEW</a:t>
             </a:r>
             <a:endParaRPr lang="en-US" sz="800" dirty="0"/>
           </a:p>
@@ -1666,19 +1666,33 @@
             <a:pPr algn="l" indent="0" marL="0">
               <a:buNone/>
             </a:pPr>
+            <a:r>
+              <a:rPr lang="en-US" sz="800" dirty="0">
+                <a:solidFill>
+                  <a:srgbClr val="1F2937"/>
+                </a:solidFill>
+              </a:rPr>
+              <a:t>Week of August 5, 2026</a:t>
+            </a:r>
             <a:endParaRPr lang="en-US" sz="800" dirty="0"/>
           </a:p>
           <a:p>
             <a:pPr algn="l" indent="0" marL="0">
               <a:buNone/>
             </a:pPr>
+            <a:endParaRPr lang="en-US" sz="800" dirty="0"/>
+          </a:p>
+          <a:p>
+            <a:pPr algn="l" indent="0" marL="0">
+              <a:buNone/>
+            </a:pPr>
             <a:r>
               <a:rPr lang="en-US" sz="800" dirty="0">
                 <a:solidFill>
                   <a:srgbClr val="1F2937"/>
                 </a:solidFill>
               </a:rPr>
-              <a:t>Engineering team made significant progress on live streaming functionality, with working demos of live streams across all platforms completed after approximately one to two weeks of development. The team continues to adapt to rapid AI-assisted development workflows, though structured refinement work will be critical before launch. Overall momentum is strong, but considerable effort remains to ensure the platform is launch-ready by December 1, with particular focus needed on stability, testing, and organizational alignment on priorities.</a:t>
+              <a:t>Project SABR continued forward momentum across platform integrations and engineering delivery this week, with critical progress on Roku partner coordination, Amagi streaming architecture, and front-end feature development. However, internal process discipline around feature scoping and UX decision-making is requiring immediate attention to keep the team aligned as velocity increases heading into September.</a:t>
             </a:r>
             <a:endParaRPr lang="en-US" sz="800" dirty="0"/>
           </a:p>
@@ -1698,7 +1712,7 @@
                   <a:srgbClr val="1B5E20"/>
                 </a:solidFill>
               </a:rPr>
-              <a:t>ENGINEERING:</a:t>
+              <a:t>ROKU PARTNERSHIP:</a:t>
             </a:r>
             <a:pPr algn="l" indent="0" marL="0">
               <a:buNone/>
@@ -1709,7 +1723,7 @@
                   <a:srgbClr val="1F2937"/>
                 </a:solidFill>
               </a:rPr>
-              <a:t> Live stream playback demonstrated successfully on web, mobile, and TV platforms. Team is moving quickly using AI-assisted coding tools, though approach differs significantly from traditional waterfall methodology. Significant backend refinement work and edge case testing still required. DRM configuration issues with EZDRM being escalated; ticket raised and awaiting vendor response. Offers and coupon code integration progressing with backend implementation and merchandise-side widget planning.</a:t>
+              <a:t> Resolved a metadata conflict between Premium Subscriptions and Roku regarding sports event versus TV episode classification by deciding to deprecate that field from the OTT app and rely on Premium Subscriptions data instead, de-risking the implementation. Confirmed Amagi will deliver a read-only published-matches UI by mid-August for Roku to access content availability without manual spreadsheets. Ads testing infrastructure is ready pending final linear stream connection from Roku; formal ads testing to begin once Roku executes. Tournament spreadsheet requirements have been clarified and reset against the Amagi UI delivery.</a:t>
             </a:r>
             <a:endParaRPr lang="en-US" sz="800" dirty="0"/>
           </a:p>
@@ -1729,7 +1743,7 @@
                   <a:srgbClr val="1B5E20"/>
                 </a:solidFill>
               </a:rPr>
-              <a:t>MVPD AUTHENTICATION:</a:t>
+              <a:t>AMAGI INTEGRATION:</a:t>
             </a:r>
             <a:pPr algn="l" indent="0" marL="0">
               <a:buNone/>
@@ -1740,7 +1754,7 @@
                   <a:srgbClr val="1F2937"/>
                 </a:solidFill>
               </a:rPr>
-              <a:t> Login and logout flows working on web with mobile and TV integration underway. Testing across DirecTV, Spectrum, Cox, and other providers ongoing. User ID stability from Adobe authentication confirmed for personalization tracking. TTL reports for different MVPD providers being compiled by Adobe for review. Proxy account access needed for comprehensive testing coverage.</a:t>
+              <a:t> Delivered a redesigned DVR/VOD architecture shifting from a single continuously-reset stream URL to unique per-match manifest URLs with automatic live-to-VOD transition, eliminating manual frontend start/end time adjustments. Confirmed production replays are flowing and available for testing. Aligned on Ad Ops macro requirements matrix with a source-of-truth document to be exchanged by end of week. Identified Roku trick-play thumbnail spec (640x480 every six seconds) as a hard certification requirement; timeline confirmation pending Dave Bornstein's check on transcoder settings. Tennis Channel EPG feed still in progress; currently using T2 copy for testing. Second-week-of-August delivery target for Axon UI, VOD trim overrides, and full automation pending Amagi internal confirmation.</a:t>
             </a:r>
             <a:endParaRPr lang="en-US" sz="800" dirty="0"/>
           </a:p>
@@ -1760,7 +1774,7 @@
                   <a:srgbClr val="1B5E20"/>
                 </a:solidFill>
               </a:rPr>
-              <a:t>LIVE EVENT ORCHESTRATION:</a:t>
+              <a:t>FOXAM CONTENT DELIVERY:</a:t>
             </a:r>
             <a:pPr algn="l" indent="0" marL="0">
               <a:buNone/>
@@ -1771,7 +1785,7 @@
                   <a:srgbClr val="1F2937"/>
                 </a:solidFill>
               </a:rPr>
-              <a:t> Amagi demonstrated control plane with automated provisioning, ready states, and manual teardown gating. Event scheduling, worker orchestration, and state management working. Timeline standardization and terminology refinement (group, match, court concepts) to be finalized. Operator UI with manual override controls planned for next one to two weeks.</a:t>
+              <a:t> Implemented content page with landscape carousel, vertical and horizontal pagination, and skeleton loading. Completed label additions and addressed image format optimization (PNG over WebP for compatibility). Currently working through entitlement checks, clear settings removal, and planning sprints on playback flow migration, geo-blocking, end card/autoplay, and concurrency management. Clarified error-code list, translation structure, and offer-field requirements for downstream handoff.</a:t>
             </a:r>
             <a:endParaRPr lang="en-US" sz="800" dirty="0"/>
           </a:p>
@@ -1791,7 +1805,7 @@
                   <a:srgbClr val="1B5E20"/>
                 </a:solidFill>
               </a:rPr>
-              <a:t>VOD AND CONTENT DELIVERY:</a:t>
+              <a:t>MERCHANDISING:</a:t>
             </a:r>
             <a:pPr algn="l" indent="0" marL="0">
               <a:buNone/>
@@ -1802,7 +1816,7 @@
                   <a:srgbClr val="1F2937"/>
                 </a:solidFill>
               </a:rPr>
-              <a:t> Roku partnership prioritizing live feeds with match-in-15 and highlights going forward; full back catalog parity deferred post-launch. Amagi to handle metadata transformation for all shoulder content delivery to avoid custom implementations. S3 delivery path confirmed for live and match-in-15 assets. SportRadar archive ingest planned for October with full replays and match-in-15 assets; manual ingest process for PDM content being scoped. Metadata requirements and QA approach to be defined.</a:t>
+              <a:t> Finalized carousel show-more behavior with three configurable states (default on, override off, custom label with path). Default limit set to 20 items with no hard ceiling; Amagi UI will provide read-only visibility for partners. Clarified that show-more can be triggered even if limit not met, supporting edge cases. TV app behavior remains separate pending reverse-product-engineering discovery with Foxam; device-level limits may be necessary for low-power Roku devices.</a:t>
             </a:r>
             <a:endParaRPr lang="en-US" sz="800" dirty="0"/>
           </a:p>
@@ -1822,7 +1836,7 @@
                   <a:srgbClr val="1B5E20"/>
                 </a:solidFill>
               </a:rPr>
-              <a:t>MERCHANDISING:</a:t>
+              <a:t>SABR ENGINEERING DELIVERY:</a:t>
             </a:r>
             <a:pPr algn="l" indent="0" marL="0">
               <a:buNone/>
@@ -1833,7 +1847,7 @@
                   <a:srgbClr val="1F2937"/>
                 </a:solidFill>
               </a:rPr>
-              <a:t> Rotation banner behavior clarified for portrait and landscape mobile orientations. Hero module functionality and merchandising configuration aligned with current approaches. VOD metadata structure established with queryable tags for automated placement. Baseline metadata fields identified with flexibility for post-launch enhancement.</a:t>
+              <a:t> Mobile team shipped working builds for video playback with DRM and picture-in-picture; CI/CD automation for iOS and Android is in progress to enable consistent weekly builds. Web team advanced tournaments and live pages with feedback loops pending; navigation and artwork template editors are now configurable in the CMS. Profile decoupling completed; email-change backend is ready. Test builds publishing to TestFlight today. Overall progress is strong, but engineering team has been shipping UX iterations ahead of formal design feedback, creating scope and coordination tension. Leadership has established twice-weekly jam sessions (Tuesdays and Thursdays) starting immediately to synchronize design feedback, prioritization, and feature control in real time.</a:t>
             </a:r>
             <a:endParaRPr lang="en-US" sz="800" dirty="0"/>
           </a:p>
@@ -1853,18 +1867,24 @@
                   <a:srgbClr val="1B5E20"/>
                 </a:solidFill>
               </a:rPr>
-              <a:t>AMAGI INTEGRATION:</a:t>
+              <a:t>KEY DECISIONS:</a:t>
             </a:r>
             <a:pPr algn="l" indent="0" marL="0">
               <a:buNone/>
             </a:pPr>
+            <a:endParaRPr lang="en-US" sz="800" dirty="0"/>
+          </a:p>
+          <a:p>
+            <a:pPr algn="l" indent="0" marL="0">
+              <a:buNone/>
+            </a:pPr>
             <a:r>
               <a:rPr lang="en-US" sz="800" dirty="0">
                 <a:solidFill>
                   <a:srgbClr val="1F2937"/>
                 </a:solidFill>
               </a:rPr>
-              <a:t> API access and documentation shared for live event ingestion. Daily production event testing starting next week to validate integration flows. Match upsert, cancellation, and withdrawal scenarios to be tested. Rights channel configuration for Roku delivery to be added. Non-blocking DRM playback issues under investigation with EZDRM.</a:t>
+              <a:t>• Deprecate sports-event field from OTT app and rely exclusively on Premium Subscriptions metadata to resolve Roku classification conflict</a:t>
             </a:r>
             <a:endParaRPr lang="en-US" sz="800" dirty="0"/>
           </a:p>
@@ -1872,6 +1892,14 @@
             <a:pPr algn="l" indent="0" marL="0">
               <a:buNone/>
             </a:pPr>
+            <a:r>
+              <a:rPr lang="en-US" sz="800" dirty="0">
+                <a:solidFill>
+                  <a:srgbClr val="1F2937"/>
+                </a:solidFill>
+              </a:rPr>
+              <a:t>• Implement per-match manifest URLs in Amagi architecture rather than single reset stream, with automatic live-to-VOD transition</a:t>
+            </a:r>
             <a:endParaRPr lang="en-US" sz="800" dirty="0"/>
           </a:p>
           <a:p>
@@ -1879,13 +1907,16 @@
               <a:buNone/>
             </a:pPr>
             <a:r>
-              <a:rPr lang="en-US" sz="800" b="1" dirty="0">
-                <a:solidFill>
-                  <a:srgbClr val="1B5E20"/>
-                </a:solidFill>
-              </a:rPr>
-              <a:t>DEVICE PARITY STRATEGY:</a:t>
-            </a:r>
+              <a:rPr lang="en-US" sz="800" dirty="0">
+                <a:solidFill>
+                  <a:srgbClr val="1F2937"/>
+                </a:solidFill>
+              </a:rPr>
+              <a:t>• Use device-configurable DVR buffer (proposed four hours) instead of backend-enforced hard limit</a:t>
+            </a:r>
+            <a:endParaRPr lang="en-US" sz="800" dirty="0"/>
+          </a:p>
+          <a:p>
             <a:pPr algn="l" indent="0" marL="0">
               <a:buNone/>
             </a:pPr>
@@ -1895,7 +1926,7 @@
                   <a:srgbClr val="1F2937"/>
                 </a:solidFill>
               </a:rPr>
-              <a:t> Team clarified that perfect parity across web, mobile, and living room is not required; web can move faster with feature prioritization. Minimum feature parity identified for each platform with testing and iteration planned. Decision to avoid gating launch on full VOD backfill; current and going-forward content prioritized.</a:t>
+              <a:t>• Set carousel show-more to enabled by default with configurable limit of 20 items and ability to override or customize label and path</a:t>
             </a:r>
             <a:endParaRPr lang="en-US" sz="800" dirty="0"/>
           </a:p>
@@ -1903,168 +1934,13 @@
             <a:pPr algn="l" indent="0" marL="0">
               <a:buNone/>
             </a:pPr>
-            <a:endParaRPr lang="en-US" sz="800" dirty="0"/>
-          </a:p>
-          <a:p>
-            <a:pPr algn="l" indent="0" marL="0">
-              <a:buNone/>
-            </a:pPr>
-            <a:r>
-              <a:rPr lang="en-US" sz="800" b="1" dirty="0">
-                <a:solidFill>
-                  <a:srgbClr val="1B5E20"/>
-                </a:solidFill>
-              </a:rPr>
-              <a:t>TENNIS.COM COORDINATION:</a:t>
-            </a:r>
-            <a:pPr algn="l" indent="0" marL="0">
-              <a:buNone/>
-            </a:pPr>
             <a:r>
               <a:rPr lang="en-US" sz="800" dirty="0">
                 <a:solidFill>
                   <a:srgbClr val="1F2937"/>
                 </a:solidFill>
               </a:rPr>
-              <a:t> Strategic conversation needed on relationship between Tennis.com and new OTT platform. Incremental tactical decisions planned including scores and schedules reuse. Product strategy document being drafted to outline H1 priorities around data capabilities, acquisition versus engagement versus retention balance, and high-level product initiatives.</a:t>
-            </a:r>
-            <a:endParaRPr lang="en-US" sz="800" dirty="0"/>
-          </a:p>
-          <a:p>
-            <a:pPr algn="l" indent="0" marL="0">
-              <a:buNone/>
-            </a:pPr>
-            <a:endParaRPr lang="en-US" sz="800" dirty="0"/>
-          </a:p>
-          <a:p>
-            <a:pPr algn="l" indent="0" marL="0">
-              <a:buNone/>
-            </a:pPr>
-            <a:r>
-              <a:rPr lang="en-US" sz="800" b="1" dirty="0">
-                <a:solidFill>
-                  <a:srgbClr val="1B5E20"/>
-                </a:solidFill>
-              </a:rPr>
-              <a:t>MEETING CADENCE:</a:t>
-            </a:r>
-            <a:pPr algn="l" indent="0" marL="0">
-              <a:buNone/>
-            </a:pPr>
-            <a:r>
-              <a:rPr lang="en-US" sz="800" dirty="0">
-                <a:solidFill>
-                  <a:srgbClr val="1F2937"/>
-                </a:solidFill>
-              </a:rPr>
-              <a:t> Wednesday 9:00-9:45 AM engineering status updates implemented with disciplined format: engineers provide uninterrupted updates, questions collected for Q&amp;A section. Blockers and action items identified in real-time. Demos on bi-weekly basis when significant features complete; daily Slack video updates continuing.</a:t>
-            </a:r>
-            <a:endParaRPr lang="en-US" sz="800" dirty="0"/>
-          </a:p>
-          <a:p>
-            <a:pPr algn="l" indent="0" marL="0">
-              <a:buNone/>
-            </a:pPr>
-            <a:endParaRPr lang="en-US" sz="800" dirty="0"/>
-          </a:p>
-          <a:p>
-            <a:pPr algn="l" indent="0" marL="0">
-              <a:buNone/>
-            </a:pPr>
-            <a:r>
-              <a:rPr lang="en-US" sz="800" b="1" dirty="0">
-                <a:solidFill>
-                  <a:srgbClr val="1B5E20"/>
-                </a:solidFill>
-              </a:rPr>
-              <a:t>KEY DECISIONS:</a:t>
-            </a:r>
-            <a:pPr algn="l" indent="0" marL="0">
-              <a:buNone/>
-            </a:pPr>
-            <a:endParaRPr lang="en-US" sz="800" dirty="0"/>
-          </a:p>
-          <a:p>
-            <a:pPr algn="l" indent="0" marL="0">
-              <a:buNone/>
-            </a:pPr>
-            <a:r>
-              <a:rPr lang="en-US" sz="800" dirty="0">
-                <a:solidFill>
-                  <a:srgbClr val="1F2937"/>
-                </a:solidFill>
-              </a:rPr>
-              <a:t>• Focus Roku launch on live feeds, match-in-15, and highlights with backfill deferred to post-launch phase to avoid gating on content parity</a:t>
-            </a:r>
-            <a:endParaRPr lang="en-US" sz="800" dirty="0"/>
-          </a:p>
-          <a:p>
-            <a:pPr algn="l" indent="0" marL="0">
-              <a:buNone/>
-            </a:pPr>
-            <a:r>
-              <a:rPr lang="en-US" sz="800" dirty="0">
-                <a:solidFill>
-                  <a:srgbClr val="1F2937"/>
-                </a:solidFill>
-              </a:rPr>
-              <a:t>• All future VOD delivery to partners will flow through Amagi for metadata transformation and file delivery to prevent custom integrations</a:t>
-            </a:r>
-            <a:endParaRPr lang="en-US" sz="800" dirty="0"/>
-          </a:p>
-          <a:p>
-            <a:pPr algn="l" indent="0" marL="0">
-              <a:buNone/>
-            </a:pPr>
-            <a:r>
-              <a:rPr lang="en-US" sz="800" dirty="0">
-                <a:solidFill>
-                  <a:srgbClr val="1F2937"/>
-                </a:solidFill>
-              </a:rPr>
-              <a:t>• Device feature parity not required; web leads faster with minimum parity thresholds per platform to be defined in roadmap</a:t>
-            </a:r>
-            <a:endParaRPr lang="en-US" sz="800" dirty="0"/>
-          </a:p>
-          <a:p>
-            <a:pPr algn="l" indent="0" marL="0">
-              <a:buNone/>
-            </a:pPr>
-            <a:r>
-              <a:rPr lang="en-US" sz="800" dirty="0">
-                <a:solidFill>
-                  <a:srgbClr val="1F2937"/>
-                </a:solidFill>
-              </a:rPr>
-              <a:t>• Coupon code configuration to remain in Cling with promotional pricing overrides on plan selection page until post-launch evaluation of better approaches</a:t>
-            </a:r>
-            <a:endParaRPr lang="en-US" sz="800" dirty="0"/>
-          </a:p>
-          <a:p>
-            <a:pPr algn="l" indent="0" marL="0">
-              <a:buNone/>
-            </a:pPr>
-            <a:r>
-              <a:rPr lang="en-US" sz="800" dirty="0">
-                <a:solidFill>
-                  <a:srgbClr val="1F2937"/>
-                </a:solidFill>
-              </a:rPr>
-              <a:t>• ProductStrategy document to be developed covering data foundations, acquisition-engagement-retention balance, and H1 product initiatives with Tennis.com coordination approach</a:t>
-            </a:r>
-            <a:endParaRPr lang="en-US" sz="800" dirty="0"/>
-          </a:p>
-          <a:p>
-            <a:pPr algn="l" indent="0" marL="0">
-              <a:buNone/>
-            </a:pPr>
-            <a:r>
-              <a:rPr lang="en-US" sz="800" dirty="0">
-                <a:solidFill>
-                  <a:srgbClr val="1F2937"/>
-                </a:solidFill>
-              </a:rPr>
-              <a:t>• Amagi to proceed with production event testing starting next week using real live event data rather than staging environment to accelerate integration validation</a:t>
+              <a:t>• Establish twice-weekly design jam sessions (Tuesdays and Thursdays) with Santa Monica and Seattle teams to maintain alignment on UX changes as engineering velocity increases</a:t>
             </a:r>
             <a:endParaRPr lang="en-US" sz="800" dirty="0"/>
           </a:p>
@@ -2161,7 +2037,7 @@
                   <a:srgbClr val="388849"/>
                 </a:solidFill>
               </a:rPr>
-              <a:t>6% Ready</a:t>
+              <a:t>9% Ready</a:t>
             </a:r>
             <a:endParaRPr lang="en-US" sz="1100" dirty="0"/>
           </a:p>
@@ -2290,7 +2166,7 @@
                   <a:srgbClr val="388849"/>
                 </a:solidFill>
               </a:rPr>
-              <a:t>Critical Gates  ·  Jul 17, 2026</a:t>
+              <a:t>Critical Gates  ·  Aug 5, 2026</a:t>
             </a:r>
             <a:endParaRPr lang="en-US" sz="1100" dirty="0"/>
           </a:p>
@@ -2837,11 +2713,11 @@
             </a:avLst>
           </a:prstGeom>
           <a:solidFill>
-            <a:srgbClr val="1558A8"/>
+            <a:srgbClr val="CFFAFE"/>
           </a:solidFill>
           <a:ln w="12700">
             <a:solidFill>
-              <a:srgbClr val="1558A8"/>
+              <a:srgbClr val="0E7490"/>
             </a:solidFill>
             <a:prstDash val="solid"/>
           </a:ln>
@@ -2874,10 +2750,10 @@
             <a:r>
               <a:rPr lang="en-US" sz="650" b="1" dirty="0">
                 <a:solidFill>
-                  <a:srgbClr val="FFFFFF"/>
-                </a:solidFill>
-              </a:rPr>
-              <a:t>In Progress</a:t>
+                  <a:srgbClr val="0E7490"/>
+                </a:solidFill>
+              </a:rPr>
+              <a:t>Contracted</a:t>
             </a:r>
             <a:endParaRPr lang="en-US" sz="650" dirty="0"/>
           </a:p>
@@ -3923,11 +3799,11 @@
             </a:avLst>
           </a:prstGeom>
           <a:solidFill>
-            <a:srgbClr val="1558A8"/>
+            <a:srgbClr val="CFFAFE"/>
           </a:solidFill>
           <a:ln w="12700">
             <a:solidFill>
-              <a:srgbClr val="1558A8"/>
+              <a:srgbClr val="0E7490"/>
             </a:solidFill>
             <a:prstDash val="solid"/>
           </a:ln>
@@ -3960,10 +3836,10 @@
             <a:r>
               <a:rPr lang="en-US" sz="650" b="1" dirty="0">
                 <a:solidFill>
-                  <a:srgbClr val="FFFFFF"/>
-                </a:solidFill>
-              </a:rPr>
-              <a:t>In Progress</a:t>
+                  <a:srgbClr val="0E7490"/>
+                </a:solidFill>
+              </a:rPr>
+              <a:t>Contracted</a:t>
             </a:r>
             <a:endParaRPr lang="en-US" sz="650" dirty="0"/>
           </a:p>
@@ -4352,11 +4228,11 @@
             </a:avLst>
           </a:prstGeom>
           <a:solidFill>
-            <a:srgbClr val="1558A8"/>
-          </a:solidFill>
-          <a:ln w="12700">
-            <a:solidFill>
-              <a:srgbClr val="1558A8"/>
+            <a:srgbClr val="F3F4F6"/>
+          </a:solidFill>
+          <a:ln w="9525">
+            <a:solidFill>
+              <a:srgbClr val="D1D5DB"/>
             </a:solidFill>
             <a:prstDash val="solid"/>
           </a:ln>
@@ -4389,10 +4265,10 @@
             <a:r>
               <a:rPr lang="en-US" sz="650" b="1" dirty="0">
                 <a:solidFill>
-                  <a:srgbClr val="FFFFFF"/>
-                </a:solidFill>
-              </a:rPr>
-              <a:t>In Progress</a:t>
+                  <a:srgbClr val="374151"/>
+                </a:solidFill>
+              </a:rPr>
+              <a:t>Complete</a:t>
             </a:r>
             <a:endParaRPr lang="en-US" sz="650" dirty="0"/>
           </a:p>
@@ -4939,11 +4815,11 @@
             </a:avLst>
           </a:prstGeom>
           <a:solidFill>
-            <a:srgbClr val="1558A8"/>
-          </a:solidFill>
-          <a:ln w="12700">
-            <a:solidFill>
-              <a:srgbClr val="1558A8"/>
+            <a:srgbClr val="F3F4F6"/>
+          </a:solidFill>
+          <a:ln w="9525">
+            <a:solidFill>
+              <a:srgbClr val="D1D5DB"/>
             </a:solidFill>
             <a:prstDash val="solid"/>
           </a:ln>
@@ -4976,10 +4852,10 @@
             <a:r>
               <a:rPr lang="en-US" sz="650" b="1" dirty="0">
                 <a:solidFill>
-                  <a:srgbClr val="FFFFFF"/>
-                </a:solidFill>
-              </a:rPr>
-              <a:t>In Progress</a:t>
+                  <a:srgbClr val="374151"/>
+                </a:solidFill>
+              </a:rPr>
+              <a:t>Complete</a:t>
             </a:r>
             <a:endParaRPr lang="en-US" sz="650" dirty="0"/>
           </a:p>
@@ -5607,7 +5483,7 @@
                   <a:srgbClr val="388849"/>
                 </a:solidFill>
               </a:rPr>
-              <a:t>CPR  ·  Jul 17, 2026</a:t>
+              <a:t>CPR  ·  Aug 5, 2026</a:t>
             </a:r>
             <a:endParaRPr lang="en-US" sz="1100" dirty="0"/>
           </a:p>
@@ -5695,7 +5571,7 @@
                   <a:srgbClr val="166534"/>
                 </a:solidFill>
               </a:rPr>
-              <a:t>2  Done</a:t>
+              <a:t>3  Done</a:t>
             </a:r>
             <a:endParaRPr lang="en-US" sz="900" dirty="0"/>
           </a:p>
@@ -5758,7 +5634,7 @@
                   <a:srgbClr val="1D4ED8"/>
                 </a:solidFill>
               </a:rPr>
-              <a:t>28  In Progress</a:t>
+              <a:t>29  In Progress</a:t>
             </a:r>
             <a:endParaRPr lang="en-US" sz="900" dirty="0"/>
           </a:p>
@@ -5821,7 +5697,7 @@
                   <a:srgbClr val="374151"/>
                 </a:solidFill>
               </a:rPr>
-              <a:t>5  Not Started</a:t>
+              <a:t>3  Not Started</a:t>
             </a:r>
             <a:endParaRPr lang="en-US" sz="900" dirty="0"/>
           </a:p>
@@ -6044,7 +5920,7 @@
                   <a:srgbClr val="9CA3AF"/>
                 </a:solidFill>
               </a:rPr>
-              <a:t>Beta: Sep 30, 2026  ·  74 days remaining</a:t>
+              <a:t>Beta: Sep 30, 2026  ·  55 days remaining</a:t>
             </a:r>
             <a:endParaRPr lang="en-US" sz="800" dirty="0"/>
           </a:p>
@@ -6080,7 +5956,7 @@
                   <a:srgbClr val="388849"/>
                 </a:solidFill>
               </a:rPr>
-              <a:t>6% Ready</a:t>
+              <a:t>9% Ready</a:t>
             </a:r>
             <a:endParaRPr lang="en-US" sz="1100" dirty="0"/>
           </a:p>
@@ -6204,7 +6080,7 @@
                   <a:srgbClr val="9CA3AF"/>
                 </a:solidFill>
               </a:rPr>
-              <a:t>5 / 7 In Progress</a:t>
+              <a:t>6 / 7 In Progress</a:t>
             </a:r>
             <a:endParaRPr lang="en-US" sz="750" dirty="0"/>
           </a:p>
@@ -7046,11 +6922,11 @@
             </a:avLst>
           </a:prstGeom>
           <a:solidFill>
-            <a:srgbClr val="F3F4F6"/>
-          </a:solidFill>
-          <a:ln w="9525">
-            <a:solidFill>
-              <a:srgbClr val="D1D5DB"/>
+            <a:srgbClr val="1558A8"/>
+          </a:solidFill>
+          <a:ln w="12700">
+            <a:solidFill>
+              <a:srgbClr val="1558A8"/>
             </a:solidFill>
             <a:prstDash val="solid"/>
           </a:ln>
@@ -7083,10 +6959,10 @@
             <a:r>
               <a:rPr lang="en-US" sz="700" dirty="0">
                 <a:solidFill>
-                  <a:srgbClr val="374151"/>
-                </a:solidFill>
-              </a:rPr>
-              <a:t>Not Started</a:t>
+                  <a:srgbClr val="FFFFFF"/>
+                </a:solidFill>
+              </a:rPr>
+              <a:t>In Progress</a:t>
             </a:r>
             <a:endParaRPr lang="en-US" sz="700" dirty="0"/>
           </a:p>
@@ -8858,7 +8734,7 @@
                   <a:srgbClr val="9CA3AF"/>
                 </a:solidFill>
               </a:rPr>
-              <a:t>5 / 9 In Progress · 2 Done</a:t>
+              <a:t>6 / 9 In Progress · 2 Done</a:t>
             </a:r>
             <a:endParaRPr lang="en-US" sz="750" dirty="0"/>
           </a:p>
@@ -9574,11 +9450,11 @@
             </a:avLst>
           </a:prstGeom>
           <a:solidFill>
-            <a:srgbClr val="F3F4F6"/>
-          </a:solidFill>
-          <a:ln w="9525">
-            <a:solidFill>
-              <a:srgbClr val="D1D5DB"/>
+            <a:srgbClr val="1558A8"/>
+          </a:solidFill>
+          <a:ln w="12700">
+            <a:solidFill>
+              <a:srgbClr val="1558A8"/>
             </a:solidFill>
             <a:prstDash val="solid"/>
           </a:ln>
@@ -9611,10 +9487,10 @@
             <a:r>
               <a:rPr lang="en-US" sz="700" dirty="0">
                 <a:solidFill>
-                  <a:srgbClr val="374151"/>
-                </a:solidFill>
-              </a:rPr>
-              <a:t>Not Started</a:t>
+                  <a:srgbClr val="FFFFFF"/>
+                </a:solidFill>
+              </a:rPr>
+              <a:t>In Progress</a:t>
             </a:r>
             <a:endParaRPr lang="en-US" sz="700" dirty="0"/>
           </a:p>
@@ -10116,7 +9992,7 @@
                   <a:srgbClr val="9CA3AF"/>
                 </a:solidFill>
               </a:rPr>
-              <a:t>5 / 6 In Progress</a:t>
+              <a:t>4 / 6 In Progress · 1 Done</a:t>
             </a:r>
             <a:endParaRPr lang="en-US" sz="750" dirty="0"/>
           </a:p>
@@ -10580,11 +10456,11 @@
             </a:avLst>
           </a:prstGeom>
           <a:solidFill>
-            <a:srgbClr val="1558A8"/>
+            <a:srgbClr val="DCFCE7"/>
           </a:solidFill>
           <a:ln w="12700">
             <a:solidFill>
-              <a:srgbClr val="1558A8"/>
+              <a:srgbClr val="15803D"/>
             </a:solidFill>
             <a:prstDash val="solid"/>
           </a:ln>
@@ -10617,10 +10493,10 @@
             <a:r>
               <a:rPr lang="en-US" sz="700" dirty="0">
                 <a:solidFill>
-                  <a:srgbClr val="FFFFFF"/>
-                </a:solidFill>
-              </a:rPr>
-              <a:t>In Progress</a:t>
+                  <a:srgbClr val="14532D"/>
+                </a:solidFill>
+              </a:rPr>
+              <a:t>Done</a:t>
             </a:r>
             <a:endParaRPr lang="en-US" sz="700" dirty="0"/>
           </a:p>
@@ -12746,7 +12622,7 @@
                   <a:srgbClr val="388849"/>
                 </a:solidFill>
               </a:rPr>
-              <a:t>Web Browser  ·  Jul 17, 2026</a:t>
+              <a:t>Web Browser  ·  Aug 5, 2026</a:t>
             </a:r>
             <a:endParaRPr lang="en-US" sz="1100" dirty="0"/>
           </a:p>
@@ -12834,7 +12710,7 @@
                   <a:srgbClr val="166534"/>
                 </a:solidFill>
               </a:rPr>
-              <a:t>2  Done</a:t>
+              <a:t>3  Done</a:t>
             </a:r>
             <a:endParaRPr lang="en-US" sz="900" dirty="0"/>
           </a:p>
@@ -12960,7 +12836,7 @@
                   <a:srgbClr val="374151"/>
                 </a:solidFill>
               </a:rPr>
-              <a:t>3  Not Started</a:t>
+              <a:t>2  Not Started</a:t>
             </a:r>
             <a:endParaRPr lang="en-US" sz="900" dirty="0"/>
           </a:p>
@@ -13183,7 +13059,7 @@
                   <a:srgbClr val="9CA3AF"/>
                 </a:solidFill>
               </a:rPr>
-              <a:t>Beta: Sep 30, 2026  ·  74 days remaining</a:t>
+              <a:t>Beta: Sep 30, 2026  ·  55 days remaining</a:t>
             </a:r>
             <a:endParaRPr lang="en-US" sz="800" dirty="0"/>
           </a:p>
@@ -13219,7 +13095,7 @@
                   <a:srgbClr val="388849"/>
                 </a:solidFill>
               </a:rPr>
-              <a:t>10% Ready</a:t>
+              <a:t>15% Ready</a:t>
             </a:r>
             <a:endParaRPr lang="en-US" sz="1100" dirty="0"/>
           </a:p>
@@ -14235,7 +14111,7 @@
                   <a:srgbClr val="9CA3AF"/>
                 </a:solidFill>
               </a:rPr>
-              <a:t>5 / 9 In Progress · 2 Done</a:t>
+              <a:t>6 / 9 In Progress · 2 Done</a:t>
             </a:r>
             <a:endParaRPr lang="en-US" sz="750" dirty="0"/>
           </a:p>
@@ -14951,11 +14827,11 @@
             </a:avLst>
           </a:prstGeom>
           <a:solidFill>
-            <a:srgbClr val="F3F4F6"/>
-          </a:solidFill>
-          <a:ln w="9525">
-            <a:solidFill>
-              <a:srgbClr val="D1D5DB"/>
+            <a:srgbClr val="1558A8"/>
+          </a:solidFill>
+          <a:ln w="12700">
+            <a:solidFill>
+              <a:srgbClr val="1558A8"/>
             </a:solidFill>
             <a:prstDash val="solid"/>
           </a:ln>
@@ -14988,10 +14864,10 @@
             <a:r>
               <a:rPr lang="en-US" sz="700" dirty="0">
                 <a:solidFill>
-                  <a:srgbClr val="374151"/>
-                </a:solidFill>
-              </a:rPr>
-              <a:t>Not Started</a:t>
+                  <a:srgbClr val="FFFFFF"/>
+                </a:solidFill>
+              </a:rPr>
+              <a:t>In Progress</a:t>
             </a:r>
             <a:endParaRPr lang="en-US" sz="700" dirty="0"/>
           </a:p>
@@ -15493,7 +15369,7 @@
                   <a:srgbClr val="9CA3AF"/>
                 </a:solidFill>
               </a:rPr>
-              <a:t>5 / 6 In Progress</a:t>
+              <a:t>4 / 6 In Progress · 1 Done</a:t>
             </a:r>
             <a:endParaRPr lang="en-US" sz="750" dirty="0"/>
           </a:p>
@@ -15957,11 +15833,11 @@
             </a:avLst>
           </a:prstGeom>
           <a:solidFill>
-            <a:srgbClr val="1558A8"/>
+            <a:srgbClr val="DCFCE7"/>
           </a:solidFill>
           <a:ln w="12700">
             <a:solidFill>
-              <a:srgbClr val="1558A8"/>
+              <a:srgbClr val="15803D"/>
             </a:solidFill>
             <a:prstDash val="solid"/>
           </a:ln>
@@ -15994,10 +15870,10 @@
             <a:r>
               <a:rPr lang="en-US" sz="700" dirty="0">
                 <a:solidFill>
-                  <a:srgbClr val="FFFFFF"/>
-                </a:solidFill>
-              </a:rPr>
-              <a:t>In Progress</a:t>
+                  <a:srgbClr val="14532D"/>
+                </a:solidFill>
+              </a:rPr>
+              <a:t>Done</a:t>
             </a:r>
             <a:endParaRPr lang="en-US" sz="700" dirty="0"/>
           </a:p>
@@ -17490,7 +17366,7 @@
                   <a:srgbClr val="388849"/>
                 </a:solidFill>
               </a:rPr>
-              <a:t>iPhone · iPad  ·  Jul 17, 2026</a:t>
+              <a:t>iPhone · iPad  ·  Aug 5, 2026</a:t>
             </a:r>
             <a:endParaRPr lang="en-US" sz="1100" dirty="0"/>
           </a:p>
@@ -17578,7 +17454,7 @@
                   <a:srgbClr val="166534"/>
                 </a:solidFill>
               </a:rPr>
-              <a:t>2  Done</a:t>
+              <a:t>3  Done</a:t>
             </a:r>
             <a:endParaRPr lang="en-US" sz="900" dirty="0"/>
           </a:p>
@@ -17704,7 +17580,7 @@
                   <a:srgbClr val="374151"/>
                 </a:solidFill>
               </a:rPr>
-              <a:t>3  Not Started</a:t>
+              <a:t>2  Not Started</a:t>
             </a:r>
             <a:endParaRPr lang="en-US" sz="900" dirty="0"/>
           </a:p>
@@ -17927,7 +17803,7 @@
                   <a:srgbClr val="9CA3AF"/>
                 </a:solidFill>
               </a:rPr>
-              <a:t>Beta: Sep 30, 2026  ·  74 days remaining</a:t>
+              <a:t>Beta: Sep 30, 2026  ·  55 days remaining</a:t>
             </a:r>
             <a:endParaRPr lang="en-US" sz="800" dirty="0"/>
           </a:p>
@@ -17963,7 +17839,7 @@
                   <a:srgbClr val="388849"/>
                 </a:solidFill>
               </a:rPr>
-              <a:t>10% Ready</a:t>
+              <a:t>14% Ready</a:t>
             </a:r>
             <a:endParaRPr lang="en-US" sz="1100" dirty="0"/>
           </a:p>
@@ -19105,7 +18981,7 @@
                   <a:srgbClr val="9CA3AF"/>
                 </a:solidFill>
               </a:rPr>
-              <a:t>5 / 9 In Progress · 2 Done</a:t>
+              <a:t>6 / 9 In Progress · 2 Done</a:t>
             </a:r>
             <a:endParaRPr lang="en-US" sz="750" dirty="0"/>
           </a:p>
@@ -19821,11 +19697,11 @@
             </a:avLst>
           </a:prstGeom>
           <a:solidFill>
-            <a:srgbClr val="F3F4F6"/>
-          </a:solidFill>
-          <a:ln w="9525">
-            <a:solidFill>
-              <a:srgbClr val="D1D5DB"/>
+            <a:srgbClr val="1558A8"/>
+          </a:solidFill>
+          <a:ln w="12700">
+            <a:solidFill>
+              <a:srgbClr val="1558A8"/>
             </a:solidFill>
             <a:prstDash val="solid"/>
           </a:ln>
@@ -19858,10 +19734,10 @@
             <a:r>
               <a:rPr lang="en-US" sz="700" dirty="0">
                 <a:solidFill>
-                  <a:srgbClr val="374151"/>
-                </a:solidFill>
-              </a:rPr>
-              <a:t>Not Started</a:t>
+                  <a:srgbClr val="FFFFFF"/>
+                </a:solidFill>
+              </a:rPr>
+              <a:t>In Progress</a:t>
             </a:r>
             <a:endParaRPr lang="en-US" sz="700" dirty="0"/>
           </a:p>
@@ -20363,7 +20239,7 @@
                   <a:srgbClr val="9CA3AF"/>
                 </a:solidFill>
               </a:rPr>
-              <a:t>5 / 6 In Progress</a:t>
+              <a:t>4 / 6 In Progress · 1 Done</a:t>
             </a:r>
             <a:endParaRPr lang="en-US" sz="750" dirty="0"/>
           </a:p>
@@ -20827,11 +20703,11 @@
             </a:avLst>
           </a:prstGeom>
           <a:solidFill>
-            <a:srgbClr val="1558A8"/>
+            <a:srgbClr val="DCFCE7"/>
           </a:solidFill>
           <a:ln w="12700">
             <a:solidFill>
-              <a:srgbClr val="1558A8"/>
+              <a:srgbClr val="15803D"/>
             </a:solidFill>
             <a:prstDash val="solid"/>
           </a:ln>
@@ -20864,10 +20740,10 @@
             <a:r>
               <a:rPr lang="en-US" sz="700" dirty="0">
                 <a:solidFill>
-                  <a:srgbClr val="FFFFFF"/>
-                </a:solidFill>
-              </a:rPr>
-              <a:t>In Progress</a:t>
+                  <a:srgbClr val="14532D"/>
+                </a:solidFill>
+              </a:rPr>
+              <a:t>Done</a:t>
             </a:r>
             <a:endParaRPr lang="en-US" sz="700" dirty="0"/>
           </a:p>
@@ -22360,7 +22236,7 @@
                   <a:srgbClr val="388849"/>
                 </a:solidFill>
               </a:rPr>
-              <a:t>Android Phone · Tablet  ·  Jul 17, 2026</a:t>
+              <a:t>Android Phone · Tablet  ·  Aug 5, 2026</a:t>
             </a:r>
             <a:endParaRPr lang="en-US" sz="1100" dirty="0"/>
           </a:p>
@@ -22448,7 +22324,7 @@
                   <a:srgbClr val="166534"/>
                 </a:solidFill>
               </a:rPr>
-              <a:t>2  Done</a:t>
+              <a:t>3  Done</a:t>
             </a:r>
             <a:endParaRPr lang="en-US" sz="900" dirty="0"/>
           </a:p>
@@ -22574,7 +22450,7 @@
                   <a:srgbClr val="374151"/>
                 </a:solidFill>
               </a:rPr>
-              <a:t>3  Not Started</a:t>
+              <a:t>2  Not Started</a:t>
             </a:r>
             <a:endParaRPr lang="en-US" sz="900" dirty="0"/>
           </a:p>
@@ -22797,7 +22673,7 @@
                   <a:srgbClr val="9CA3AF"/>
                 </a:solidFill>
               </a:rPr>
-              <a:t>Beta: Sep 30, 2026  ·  74 days remaining</a:t>
+              <a:t>Beta: Sep 30, 2026  ·  55 days remaining</a:t>
             </a:r>
             <a:endParaRPr lang="en-US" sz="800" dirty="0"/>
           </a:p>
@@ -22833,7 +22709,7 @@
                   <a:srgbClr val="388849"/>
                 </a:solidFill>
               </a:rPr>
-              <a:t>9% Ready</a:t>
+              <a:t>14% Ready</a:t>
             </a:r>
             <a:endParaRPr lang="en-US" sz="1100" dirty="0"/>
           </a:p>
@@ -24101,7 +23977,7 @@
                   <a:srgbClr val="9CA3AF"/>
                 </a:solidFill>
               </a:rPr>
-              <a:t>5 / 9 In Progress · 2 Done</a:t>
+              <a:t>6 / 9 In Progress · 2 Done</a:t>
             </a:r>
             <a:endParaRPr lang="en-US" sz="750" dirty="0"/>
           </a:p>
@@ -24817,11 +24693,11 @@
             </a:avLst>
           </a:prstGeom>
           <a:solidFill>
-            <a:srgbClr val="F3F4F6"/>
-          </a:solidFill>
-          <a:ln w="9525">
-            <a:solidFill>
-              <a:srgbClr val="D1D5DB"/>
+            <a:srgbClr val="1558A8"/>
+          </a:solidFill>
+          <a:ln w="12700">
+            <a:solidFill>
+              <a:srgbClr val="1558A8"/>
             </a:solidFill>
             <a:prstDash val="solid"/>
           </a:ln>
@@ -24854,10 +24730,10 @@
             <a:r>
               <a:rPr lang="en-US" sz="700" dirty="0">
                 <a:solidFill>
-                  <a:srgbClr val="374151"/>
-                </a:solidFill>
-              </a:rPr>
-              <a:t>Not Started</a:t>
+                  <a:srgbClr val="FFFFFF"/>
+                </a:solidFill>
+              </a:rPr>
+              <a:t>In Progress</a:t>
             </a:r>
             <a:endParaRPr lang="en-US" sz="700" dirty="0"/>
           </a:p>
@@ -25359,7 +25235,7 @@
                   <a:srgbClr val="9CA3AF"/>
                 </a:solidFill>
               </a:rPr>
-              <a:t>5 / 6 In Progress</a:t>
+              <a:t>4 / 6 In Progress · 1 Done</a:t>
             </a:r>
             <a:endParaRPr lang="en-US" sz="750" dirty="0"/>
           </a:p>
@@ -25823,11 +25699,11 @@
             </a:avLst>
           </a:prstGeom>
           <a:solidFill>
-            <a:srgbClr val="1558A8"/>
+            <a:srgbClr val="DCFCE7"/>
           </a:solidFill>
           <a:ln w="12700">
             <a:solidFill>
-              <a:srgbClr val="1558A8"/>
+              <a:srgbClr val="15803D"/>
             </a:solidFill>
             <a:prstDash val="solid"/>
           </a:ln>
@@ -25860,10 +25736,10 @@
             <a:r>
               <a:rPr lang="en-US" sz="700" dirty="0">
                 <a:solidFill>
-                  <a:srgbClr val="FFFFFF"/>
-                </a:solidFill>
-              </a:rPr>
-              <a:t>In Progress</a:t>
+                  <a:srgbClr val="14532D"/>
+                </a:solidFill>
+              </a:rPr>
+              <a:t>Done</a:t>
             </a:r>
             <a:endParaRPr lang="en-US" sz="700" dirty="0"/>
           </a:p>
@@ -27356,7 +27232,7 @@
                   <a:srgbClr val="388849"/>
                 </a:solidFill>
               </a:rPr>
-              <a:t>Roku · Fire TV · Samsung · tvOS  ·  Jul 17, 2026</a:t>
+              <a:t>Roku · Fire TV · Samsung · tvOS  ·  Aug 5, 2026</a:t>
             </a:r>
             <a:endParaRPr lang="en-US" sz="1100" dirty="0"/>
           </a:p>
@@ -27444,7 +27320,7 @@
                   <a:srgbClr val="166534"/>
                 </a:solidFill>
               </a:rPr>
-              <a:t>2  Done</a:t>
+              <a:t>3  Done</a:t>
             </a:r>
             <a:endParaRPr lang="en-US" sz="900" dirty="0"/>
           </a:p>
@@ -27570,7 +27446,7 @@
                   <a:srgbClr val="374151"/>
                 </a:solidFill>
               </a:rPr>
-              <a:t>3  Not Started</a:t>
+              <a:t>2  Not Started</a:t>
             </a:r>
             <a:endParaRPr lang="en-US" sz="900" dirty="0"/>
           </a:p>
@@ -28081,7 +27957,7 @@
                   <a:srgbClr val="9CA3AF"/>
                 </a:solidFill>
               </a:rPr>
-              <a:t>Beta: Sep 30, 2026  ·  74 days remaining</a:t>
+              <a:t>Beta: Sep 30, 2026  ·  55 days remaining</a:t>
             </a:r>
             <a:endParaRPr lang="en-US" sz="800" dirty="0"/>
           </a:p>
@@ -28117,7 +27993,7 @@
                   <a:srgbClr val="388849"/>
                 </a:solidFill>
               </a:rPr>
-              <a:t>8% Ready</a:t>
+              <a:t>13% Ready</a:t>
             </a:r>
             <a:endParaRPr lang="en-US" sz="1100" dirty="0"/>
           </a:p>
@@ -29637,7 +29513,7 @@
                   <a:srgbClr val="9CA3AF"/>
                 </a:solidFill>
               </a:rPr>
-              <a:t>5 / 9 In Progress · 2 Done</a:t>
+              <a:t>6 / 9 In Progress · 2 Done</a:t>
             </a:r>
             <a:endParaRPr lang="en-US" sz="750" dirty="0"/>
           </a:p>
@@ -30353,11 +30229,11 @@
             </a:avLst>
           </a:prstGeom>
           <a:solidFill>
-            <a:srgbClr val="F3F4F6"/>
-          </a:solidFill>
-          <a:ln w="9525">
-            <a:solidFill>
-              <a:srgbClr val="D1D5DB"/>
+            <a:srgbClr val="1558A8"/>
+          </a:solidFill>
+          <a:ln w="12700">
+            <a:solidFill>
+              <a:srgbClr val="1558A8"/>
             </a:solidFill>
             <a:prstDash val="solid"/>
           </a:ln>
@@ -30390,10 +30266,10 @@
             <a:r>
               <a:rPr lang="en-US" sz="700" dirty="0">
                 <a:solidFill>
-                  <a:srgbClr val="374151"/>
-                </a:solidFill>
-              </a:rPr>
-              <a:t>Not Started</a:t>
+                  <a:srgbClr val="FFFFFF"/>
+                </a:solidFill>
+              </a:rPr>
+              <a:t>In Progress</a:t>
             </a:r>
             <a:endParaRPr lang="en-US" sz="700" dirty="0"/>
           </a:p>
@@ -30895,7 +30771,7 @@
                   <a:srgbClr val="9CA3AF"/>
                 </a:solidFill>
               </a:rPr>
-              <a:t>5 / 6 In Progress</a:t>
+              <a:t>4 / 6 In Progress · 1 Done</a:t>
             </a:r>
             <a:endParaRPr lang="en-US" sz="750" dirty="0"/>
           </a:p>
@@ -31359,11 +31235,11 @@
             </a:avLst>
           </a:prstGeom>
           <a:solidFill>
-            <a:srgbClr val="1558A8"/>
+            <a:srgbClr val="DCFCE7"/>
           </a:solidFill>
           <a:ln w="12700">
             <a:solidFill>
-              <a:srgbClr val="1558A8"/>
+              <a:srgbClr val="15803D"/>
             </a:solidFill>
             <a:prstDash val="solid"/>
           </a:ln>
@@ -31396,10 +31272,10 @@
             <a:r>
               <a:rPr lang="en-US" sz="700" dirty="0">
                 <a:solidFill>
-                  <a:srgbClr val="FFFFFF"/>
-                </a:solidFill>
-              </a:rPr>
-              <a:t>In Progress</a:t>
+                  <a:srgbClr val="14532D"/>
+                </a:solidFill>
+              </a:rPr>
+              <a:t>Done</a:t>
             </a:r>
             <a:endParaRPr lang="en-US" sz="700" dirty="0"/>
           </a:p>

--- a/SABR_CPR_Component_Status.pptx
+++ b/SABR_CPR_Component_Status.pptx
@@ -1653,296 +1653,327 @@
               <a:buNone/>
             </a:pPr>
             <a:r>
-              <a:rPr lang="en-US" sz="800" dirty="0">
+              <a:rPr lang="en-US" sz="900" dirty="0">
                 <a:solidFill>
                   <a:srgbClr val="1F2937"/>
                 </a:solidFill>
               </a:rPr>
               <a:t>PROJECT SABR — CURRENT PROGRAM REVIEW</a:t>
             </a:r>
-            <a:endParaRPr lang="en-US" sz="800" dirty="0"/>
+            <a:endParaRPr lang="en-US" sz="900" dirty="0"/>
           </a:p>
           <a:p>
             <a:pPr algn="l" indent="0" marL="0">
               <a:buNone/>
             </a:pPr>
             <a:r>
-              <a:rPr lang="en-US" sz="800" dirty="0">
+              <a:rPr lang="en-US" sz="900" dirty="0">
                 <a:solidFill>
                   <a:srgbClr val="1F2937"/>
                 </a:solidFill>
               </a:rPr>
-              <a:t>Week of August 5, 2026</a:t>
-            </a:r>
-            <a:endParaRPr lang="en-US" sz="800" dirty="0"/>
+              <a:t>This Week Update | Week of August 5, 2026</a:t>
+            </a:r>
+            <a:endParaRPr lang="en-US" sz="900" dirty="0"/>
           </a:p>
           <a:p>
             <a:pPr algn="l" indent="0" marL="0">
               <a:buNone/>
             </a:pPr>
-            <a:endParaRPr lang="en-US" sz="800" dirty="0"/>
+            <a:endParaRPr lang="en-US" sz="900" dirty="0"/>
           </a:p>
           <a:p>
             <a:pPr algn="l" indent="0" marL="0">
               <a:buNone/>
             </a:pPr>
             <a:r>
-              <a:rPr lang="en-US" sz="800" dirty="0">
+              <a:rPr lang="en-US" sz="900" dirty="0">
                 <a:solidFill>
                   <a:srgbClr val="1F2937"/>
                 </a:solidFill>
               </a:rPr>
-              <a:t>Project SABR continued forward momentum across platform integrations and engineering delivery this week, with critical progress on Roku partner coordination, Amagi streaming architecture, and front-end feature development. However, internal process discipline around feature scoping and UX decision-making is requiring immediate attention to keep the team aligned as velocity increases heading into September.</a:t>
-            </a:r>
-            <a:endParaRPr lang="en-US" sz="800" dirty="0"/>
+              <a:t>Project SABR continued advancing on multiple fronts with significant progress on platform integrations and feature development, though process alignment and scope management remain areas requiring active attention. Engineering delivered notable progress on tournaments and live pages, while backend and infrastructure work progressed on profile management, playback flows, and CMS capabilities.</a:t>
+            </a:r>
+            <a:endParaRPr lang="en-US" sz="900" dirty="0"/>
           </a:p>
           <a:p>
             <a:pPr algn="l" indent="0" marL="0">
               <a:buNone/>
             </a:pPr>
-            <a:endParaRPr lang="en-US" sz="800" dirty="0"/>
+            <a:endParaRPr lang="en-US" sz="900" dirty="0"/>
           </a:p>
           <a:p>
             <a:pPr algn="l" indent="0" marL="0">
               <a:buNone/>
             </a:pPr>
             <a:r>
-              <a:rPr lang="en-US" sz="800" b="1" dirty="0">
+              <a:rPr lang="en-US" sz="900" b="1" dirty="0">
                 <a:solidFill>
                   <a:srgbClr val="1B5E20"/>
                 </a:solidFill>
               </a:rPr>
-              <a:t>ROKU PARTNERSHIP:</a:t>
+              <a:t>ROKU INTEGRATION:</a:t>
             </a:r>
             <a:pPr algn="l" indent="0" marL="0">
               <a:buNone/>
             </a:pPr>
             <a:r>
-              <a:rPr lang="en-US" sz="800" dirty="0">
+              <a:rPr lang="en-US" sz="900" dirty="0">
                 <a:solidFill>
                   <a:srgbClr val="1F2937"/>
                 </a:solidFill>
               </a:rPr>
-              <a:t> Resolved a metadata conflict between Premium Subscriptions and Roku regarding sports event versus TV episode classification by deciding to deprecate that field from the OTT app and rely on Premium Subscriptions data instead, de-risking the implementation. Confirmed Amagi will deliver a read-only published-matches UI by mid-August for Roku to access content availability without manual spreadsheets. Ads testing infrastructure is ready pending final linear stream connection from Roku; formal ads testing to begin once Roku executes. Tournament spreadsheet requirements have been clarified and reset against the Amagi UI delivery.</a:t>
-            </a:r>
-            <a:endParaRPr lang="en-US" sz="800" dirty="0"/>
+              <a:t> Resolved metadata conflict between Premium Subscriptions and Roku by removing the conflicting sports event feed from OTT, simplifying the implementation path. Amagi UI for match visibility is on track for mid-August delivery, enabling read-only partner access without requiring manual availability sheets. Linear stream reconnection completed and ads testing now underway pending final connection confirmation.</a:t>
+            </a:r>
+            <a:endParaRPr lang="en-US" sz="900" dirty="0"/>
           </a:p>
           <a:p>
             <a:pPr algn="l" indent="0" marL="0">
               <a:buNone/>
             </a:pPr>
-            <a:endParaRPr lang="en-US" sz="800" dirty="0"/>
+            <a:endParaRPr lang="en-US" sz="900" dirty="0"/>
           </a:p>
           <a:p>
             <a:pPr algn="l" indent="0" marL="0">
               <a:buNone/>
             </a:pPr>
             <a:r>
-              <a:rPr lang="en-US" sz="800" b="1" dirty="0">
+              <a:rPr lang="en-US" sz="900" b="1" dirty="0">
                 <a:solidFill>
                   <a:srgbClr val="1B5E20"/>
                 </a:solidFill>
               </a:rPr>
+              <a:t>FRONTEND UX AND DESIGN:</a:t>
+            </a:r>
+            <a:pPr algn="l" indent="0" marL="0">
+              <a:buNone/>
+            </a:pPr>
+            <a:r>
+              <a:rPr lang="en-US" sz="900" dirty="0">
+                <a:solidFill>
+                  <a:srgbClr val="1F2937"/>
+                </a:solidFill>
+              </a:rPr>
+              <a:t> Engineering teams delivered unexpected prototypes for tournaments and live pages, creating concern about scope creep and working process alignment. Leadership flagged that ad-hoc feature building without pre-approval, while energetic, risks scope sprawl and rework. Team agreed to institute twice-weekly design jam sessions starting August 6 to align on feature priorities, UX decisions, and feedback incorporation before implementation proceeds.</a:t>
+            </a:r>
+            <a:endParaRPr lang="en-US" sz="900" dirty="0"/>
+          </a:p>
+          <a:p>
+            <a:pPr algn="l" indent="0" marL="0">
+              <a:buNone/>
+            </a:pPr>
+            <a:endParaRPr lang="en-US" sz="900" dirty="0"/>
+          </a:p>
+          <a:p>
+            <a:pPr algn="l" indent="0" marL="0">
+              <a:buNone/>
+            </a:pPr>
+            <a:r>
+              <a:rPr lang="en-US" sz="900" b="1" dirty="0">
+                <a:solidFill>
+                  <a:srgbClr val="1B5E20"/>
+                </a:solidFill>
+              </a:rPr>
+              <a:t>MERCHANDISING AND CAROUSELS:</a:t>
+            </a:r>
+            <a:pPr algn="l" indent="0" marL="0">
+              <a:buNone/>
+            </a:pPr>
+            <a:r>
+              <a:rPr lang="en-US" sz="900" dirty="0">
+                <a:solidFill>
+                  <a:srgbClr val="1F2937"/>
+                </a:solidFill>
+              </a:rPr>
+              <a:t> Finalized show more link behavior across platforms with three options: default enabled, fully disabled, or custom label and path override. Limit defaults to twenty items but remains device-configurable. Show more tile placement at carousel end is P1 for TV client to improve discoverability over current title-link pattern.</a:t>
+            </a:r>
+            <a:endParaRPr lang="en-US" sz="900" dirty="0"/>
+          </a:p>
+          <a:p>
+            <a:pPr algn="l" indent="0" marL="0">
+              <a:buNone/>
+            </a:pPr>
+            <a:endParaRPr lang="en-US" sz="900" dirty="0"/>
+          </a:p>
+          <a:p>
+            <a:pPr algn="l" indent="0" marL="0">
+              <a:buNone/>
+            </a:pPr>
+            <a:r>
+              <a:rPr lang="en-US" sz="900" b="1" dirty="0">
+                <a:solidFill>
+                  <a:srgbClr val="1B5E20"/>
+                </a:solidFill>
+              </a:rPr>
+              <a:t>BACKEND AND PLAYBACK:</a:t>
+            </a:r>
+            <a:pPr algn="l" indent="0" marL="0">
+              <a:buNone/>
+            </a:pPr>
+            <a:r>
+              <a:rPr lang="en-US" sz="900" dirty="0">
+                <a:solidFill>
+                  <a:srgbClr val="1F2937"/>
+                </a:solidFill>
+              </a:rPr>
+              <a:t> Mobile team confirmed DRM and picture-in-picture working on device; iOS certificate patched and verified. Working build with MVPD login will be shared once tested. CI pipeline for iOS and Android builds underway to enable frequent staging pushes. Profile decoupling from menu completed and email-change flow in development.</a:t>
+            </a:r>
+            <a:endParaRPr lang="en-US" sz="900" dirty="0"/>
+          </a:p>
+          <a:p>
+            <a:pPr algn="l" indent="0" marL="0">
+              <a:buNone/>
+            </a:pPr>
+            <a:endParaRPr lang="en-US" sz="900" dirty="0"/>
+          </a:p>
+          <a:p>
+            <a:pPr algn="l" indent="0" marL="0">
+              <a:buNone/>
+            </a:pPr>
+            <a:r>
+              <a:rPr lang="en-US" sz="900" b="1" dirty="0">
+                <a:solidFill>
+                  <a:srgbClr val="1B5E20"/>
+                </a:solidFill>
+              </a:rPr>
               <a:t>AMAGI INTEGRATION:</a:t>
             </a:r>
             <a:pPr algn="l" indent="0" marL="0">
               <a:buNone/>
             </a:pPr>
             <a:r>
-              <a:rPr lang="en-US" sz="800" dirty="0">
+              <a:rPr lang="en-US" sz="900" dirty="0">
                 <a:solidFill>
                   <a:srgbClr val="1F2937"/>
                 </a:solidFill>
               </a:rPr>
-              <a:t> Delivered a redesigned DVR/VOD architecture shifting from a single continuously-reset stream URL to unique per-match manifest URLs with automatic live-to-VOD transition, eliminating manual frontend start/end time adjustments. Confirmed production replays are flowing and available for testing. Aligned on Ad Ops macro requirements matrix with a source-of-truth document to be exchanged by end of week. Identified Roku trick-play thumbnail spec (640x480 every six seconds) as a hard certification requirement; timeline confirmation pending Dave Bornstein's check on transcoder settings. Tennis Channel EPG feed still in progress; currently using T2 copy for testing. Second-week-of-August delivery target for Axon UI, VOD trim overrides, and full automation pending Amagi internal confirmation.</a:t>
-            </a:r>
-            <a:endParaRPr lang="en-US" sz="800" dirty="0"/>
+              <a:t> Proposed major DVR/VOD architecture shift from single stream to per-match manifest URLs with automatic live-to-VOD transition and configurable buffer. Engineering raised questions on URL predictability, token security, and edge cases. Amagi to deliver architecture document this week and target proof-of-concept mid-August. Ad Ops macro matrix due EOD from Brian Hoskins with source attribution. Standalone Tennis Channel EPG feed build underway; T2 copy currently in use for testing. Roku trick-play thumbnail requirement (640x480 every six seconds) flagged as certification blocker; Dave and Swamy to sync on transcoder settings.</a:t>
+            </a:r>
+            <a:endParaRPr lang="en-US" sz="900" dirty="0"/>
           </a:p>
           <a:p>
             <a:pPr algn="l" indent="0" marL="0">
               <a:buNone/>
             </a:pPr>
-            <a:endParaRPr lang="en-US" sz="800" dirty="0"/>
+            <a:endParaRPr lang="en-US" sz="900" dirty="0"/>
           </a:p>
           <a:p>
             <a:pPr algn="l" indent="0" marL="0">
               <a:buNone/>
             </a:pPr>
             <a:r>
-              <a:rPr lang="en-US" sz="800" b="1" dirty="0">
+              <a:rPr lang="en-US" sz="900" b="1" dirty="0">
                 <a:solidFill>
                   <a:srgbClr val="1B5E20"/>
                 </a:solidFill>
               </a:rPr>
-              <a:t>FOXAM CONTENT DELIVERY:</a:t>
+              <a:t>CONTENT AND METADATA:</a:t>
             </a:r>
             <a:pPr algn="l" indent="0" marL="0">
               <a:buNone/>
             </a:pPr>
             <a:r>
-              <a:rPr lang="en-US" sz="800" dirty="0">
+              <a:rPr lang="en-US" sz="900" dirty="0">
                 <a:solidFill>
                   <a:srgbClr val="1F2937"/>
                 </a:solidFill>
               </a:rPr>
-              <a:t> Implemented content page with landscape carousel, vertical and horizontal pagination, and skeleton loading. Completed label additions and addressed image format optimization (PNG over WebP for compatibility). Currently working through entitlement checks, clear settings removal, and planning sprints on playback flow migration, geo-blocking, end card/autoplay, and concurrency management. Clarified error-code list, translation structure, and offer-field requirements for downstream handoff.</a:t>
-            </a:r>
-            <a:endParaRPr lang="en-US" sz="800" dirty="0"/>
+              <a:t> Sport Radar account migration for Auth0 consent tracking moving to dev tenant; existing test accounts will not carry forward. Player favorites storage location still being clarified with Sport Radar. VOD replay processing active for production matches; replays available in dev environment. Rain-delay trimming and ad-supported VOD strategy remain future items pending broader fill-rate and SSAI discussion.</a:t>
+            </a:r>
+            <a:endParaRPr lang="en-US" sz="900" dirty="0"/>
           </a:p>
           <a:p>
             <a:pPr algn="l" indent="0" marL="0">
               <a:buNone/>
             </a:pPr>
-            <a:endParaRPr lang="en-US" sz="800" dirty="0"/>
+            <a:endParaRPr lang="en-US" sz="900" dirty="0"/>
           </a:p>
           <a:p>
             <a:pPr algn="l" indent="0" marL="0">
               <a:buNone/>
             </a:pPr>
             <a:r>
-              <a:rPr lang="en-US" sz="800" b="1" dirty="0">
+              <a:rPr lang="en-US" sz="900" b="1" dirty="0">
                 <a:solidFill>
                   <a:srgbClr val="1B5E20"/>
                 </a:solidFill>
               </a:rPr>
-              <a:t>MERCHANDISING:</a:t>
+              <a:t>KEY DECISIONS:</a:t>
             </a:r>
             <a:pPr algn="l" indent="0" marL="0">
               <a:buNone/>
             </a:pPr>
-            <a:r>
-              <a:rPr lang="en-US" sz="800" dirty="0">
+            <a:endParaRPr lang="en-US" sz="900" dirty="0"/>
+          </a:p>
+          <a:p>
+            <a:pPr algn="l" indent="0" marL="0">
+              <a:buNone/>
+            </a:pPr>
+            <a:r>
+              <a:rPr lang="en-US" sz="900" dirty="0">
                 <a:solidFill>
                   <a:srgbClr val="1F2937"/>
                 </a:solidFill>
               </a:rPr>
-              <a:t> Finalized carousel show-more behavior with three configurable states (default on, override off, custom label with path). Default limit set to 20 items with no hard ceiling; Amagi UI will provide read-only visibility for partners. Clarified that show-more can be triggered even if limit not met, supporting edge cases. TV app behavior remains separate pending reverse-product-engineering discovery with Foxam; device-level limits may be necessary for low-power Roku devices.</a:t>
-            </a:r>
-            <a:endParaRPr lang="en-US" sz="800" dirty="0"/>
+              <a:t>• Remove sports event feed from OTT to eliminate Premium Subscriptions metadata conflict and simplify implementation.</a:t>
+            </a:r>
+            <a:endParaRPr lang="en-US" sz="900" dirty="0"/>
           </a:p>
           <a:p>
             <a:pPr algn="l" indent="0" marL="0">
               <a:buNone/>
             </a:pPr>
-            <a:endParaRPr lang="en-US" sz="800" dirty="0"/>
+            <a:r>
+              <a:rPr lang="en-US" sz="900" dirty="0">
+                <a:solidFill>
+                  <a:srgbClr val="1F2937"/>
+                </a:solidFill>
+              </a:rPr>
+              <a:t>• Carousel show more feature defaults to enabled with twenty-item limit but remains overridable; device handles actual cutoff based on memory and performance.</a:t>
+            </a:r>
+            <a:endParaRPr lang="en-US" sz="900" dirty="0"/>
           </a:p>
           <a:p>
             <a:pPr algn="l" indent="0" marL="0">
               <a:buNone/>
             </a:pPr>
             <a:r>
-              <a:rPr lang="en-US" sz="800" b="1" dirty="0">
-                <a:solidFill>
-                  <a:srgbClr val="1B5E20"/>
-                </a:solidFill>
-              </a:rPr>
-              <a:t>SABR ENGINEERING DELIVERY:</a:t>
-            </a:r>
+              <a:rPr lang="en-US" sz="900" dirty="0">
+                <a:solidFill>
+                  <a:srgbClr val="1F2937"/>
+                </a:solidFill>
+              </a:rPr>
+              <a:t>• Implement twice-weekly design jam sessions (Tuesdays and Thursdays) to review in-flight work and align on feature scope before engineering commits to builds.</a:t>
+            </a:r>
+            <a:endParaRPr lang="en-US" sz="900" dirty="0"/>
+          </a:p>
+          <a:p>
             <a:pPr algn="l" indent="0" marL="0">
               <a:buNone/>
             </a:pPr>
             <a:r>
-              <a:rPr lang="en-US" sz="800" dirty="0">
+              <a:rPr lang="en-US" sz="900" dirty="0">
                 <a:solidFill>
                   <a:srgbClr val="1F2937"/>
                 </a:solidFill>
               </a:rPr>
-              <a:t> Mobile team shipped working builds for video playback with DRM and picture-in-picture; CI/CD automation for iOS and Android is in progress to enable consistent weekly builds. Web team advanced tournaments and live pages with feedback loops pending; navigation and artwork template editors are now configurable in the CMS. Profile decoupling completed; email-change backend is ready. Test builds publishing to TestFlight today. Overall progress is strong, but engineering team has been shipping UX iterations ahead of formal design feedback, creating scope and coordination tension. Leadership has established twice-weekly jam sessions (Tuesdays and Thursdays) starting immediately to synchronize design feedback, prioritization, and feature control in real time.</a:t>
-            </a:r>
-            <a:endParaRPr lang="en-US" sz="800" dirty="0"/>
+              <a:t>• Adopt per-match manifest URLs for DVR/VOD instead of single continuously-reset stream, with matching configuration via Axon UI for operator-controlled VOD start time trimming.</a:t>
+            </a:r>
+            <a:endParaRPr lang="en-US" sz="900" dirty="0"/>
           </a:p>
           <a:p>
             <a:pPr algn="l" indent="0" marL="0">
               <a:buNone/>
             </a:pPr>
-            <a:endParaRPr lang="en-US" sz="800" dirty="0"/>
-          </a:p>
-          <a:p>
-            <a:pPr algn="l" indent="0" marL="0">
-              <a:buNone/>
-            </a:pPr>
-            <a:r>
-              <a:rPr lang="en-US" sz="800" b="1" dirty="0">
-                <a:solidFill>
-                  <a:srgbClr val="1B5E20"/>
-                </a:solidFill>
-              </a:rPr>
-              <a:t>KEY DECISIONS:</a:t>
-            </a:r>
-            <a:pPr algn="l" indent="0" marL="0">
-              <a:buNone/>
-            </a:pPr>
-            <a:endParaRPr lang="en-US" sz="800" dirty="0"/>
-          </a:p>
-          <a:p>
-            <a:pPr algn="l" indent="0" marL="0">
-              <a:buNone/>
-            </a:pPr>
-            <a:r>
-              <a:rPr lang="en-US" sz="800" dirty="0">
+            <a:r>
+              <a:rPr lang="en-US" sz="900" dirty="0">
                 <a:solidFill>
                   <a:srgbClr val="1F2937"/>
                 </a:solidFill>
               </a:rPr>
-              <a:t>• Deprecate sports-event field from OTT app and rely exclusively on Premium Subscriptions metadata to resolve Roku classification conflict</a:t>
-            </a:r>
-            <a:endParaRPr lang="en-US" sz="800" dirty="0"/>
-          </a:p>
-          <a:p>
-            <a:pPr algn="l" indent="0" marL="0">
-              <a:buNone/>
-            </a:pPr>
-            <a:r>
-              <a:rPr lang="en-US" sz="800" dirty="0">
-                <a:solidFill>
-                  <a:srgbClr val="1F2937"/>
-                </a:solidFill>
-              </a:rPr>
-              <a:t>• Implement per-match manifest URLs in Amagi architecture rather than single reset stream, with automatic live-to-VOD transition</a:t>
-            </a:r>
-            <a:endParaRPr lang="en-US" sz="800" dirty="0"/>
-          </a:p>
-          <a:p>
-            <a:pPr algn="l" indent="0" marL="0">
-              <a:buNone/>
-            </a:pPr>
-            <a:r>
-              <a:rPr lang="en-US" sz="800" dirty="0">
-                <a:solidFill>
-                  <a:srgbClr val="1F2937"/>
-                </a:solidFill>
-              </a:rPr>
-              <a:t>• Use device-configurable DVR buffer (proposed four hours) instead of backend-enforced hard limit</a:t>
-            </a:r>
-            <a:endParaRPr lang="en-US" sz="800" dirty="0"/>
-          </a:p>
-          <a:p>
-            <a:pPr algn="l" indent="0" marL="0">
-              <a:buNone/>
-            </a:pPr>
-            <a:r>
-              <a:rPr lang="en-US" sz="800" dirty="0">
-                <a:solidFill>
-                  <a:srgbClr val="1F2937"/>
-                </a:solidFill>
-              </a:rPr>
-              <a:t>• Set carousel show-more to enabled by default with configurable limit of 20 items and ability to override or customize label and path</a:t>
-            </a:r>
-            <a:endParaRPr lang="en-US" sz="800" dirty="0"/>
-          </a:p>
-          <a:p>
-            <a:pPr algn="l" indent="0" marL="0">
-              <a:buNone/>
-            </a:pPr>
-            <a:r>
-              <a:rPr lang="en-US" sz="800" dirty="0">
-                <a:solidFill>
-                  <a:srgbClr val="1F2937"/>
-                </a:solidFill>
-              </a:rPr>
-              <a:t>• Establish twice-weekly design jam sessions (Tuesdays and Thursdays) with Santa Monica and Seattle teams to maintain alignment on UX changes as engineering velocity increases</a:t>
-            </a:r>
-            <a:endParaRPr lang="en-US" sz="800" dirty="0"/>
+              <a:t>• Hold Sprint focus on profile completion, playback flow migration (DRM, captions, live/VOD, DVR, spoiler), and geo-blocking until engineering alignment on feature scope is confirmed.</a:t>
+            </a:r>
+            <a:endParaRPr lang="en-US" sz="900" dirty="0"/>
           </a:p>
         </p:txBody>
       </p:sp>

--- a/SABR_CPR_Component_Status.pptx
+++ b/SABR_CPR_Component_Status.pptx
@@ -1653,61 +1653,61 @@
               <a:buNone/>
             </a:pPr>
             <a:r>
-              <a:rPr lang="en-US" sz="900" dirty="0">
+              <a:rPr lang="en-US" sz="800" dirty="0">
                 <a:solidFill>
                   <a:srgbClr val="1F2937"/>
                 </a:solidFill>
               </a:rPr>
               <a:t>PROJECT SABR — CURRENT PROGRAM REVIEW</a:t>
             </a:r>
-            <a:endParaRPr lang="en-US" sz="900" dirty="0"/>
+            <a:endParaRPr lang="en-US" sz="800" dirty="0"/>
           </a:p>
           <a:p>
             <a:pPr algn="l" indent="0" marL="0">
               <a:buNone/>
             </a:pPr>
             <a:r>
-              <a:rPr lang="en-US" sz="900" dirty="0">
+              <a:rPr lang="en-US" sz="800" dirty="0">
                 <a:solidFill>
                   <a:srgbClr val="1F2937"/>
                 </a:solidFill>
               </a:rPr>
-              <a:t>This Week Update | Week of August 5, 2026</a:t>
-            </a:r>
-            <a:endParaRPr lang="en-US" sz="900" dirty="0"/>
+              <a:t>Week of August 5, 2026</a:t>
+            </a:r>
+            <a:endParaRPr lang="en-US" sz="800" dirty="0"/>
           </a:p>
           <a:p>
             <a:pPr algn="l" indent="0" marL="0">
               <a:buNone/>
             </a:pPr>
-            <a:endParaRPr lang="en-US" sz="900" dirty="0"/>
+            <a:endParaRPr lang="en-US" sz="800" dirty="0"/>
           </a:p>
           <a:p>
             <a:pPr algn="l" indent="0" marL="0">
               <a:buNone/>
             </a:pPr>
             <a:r>
-              <a:rPr lang="en-US" sz="900" dirty="0">
+              <a:rPr lang="en-US" sz="800" dirty="0">
                 <a:solidFill>
                   <a:srgbClr val="1F2937"/>
                 </a:solidFill>
               </a:rPr>
-              <a:t>Project SABR continued advancing on multiple fronts with significant progress on platform integrations and feature development, though process alignment and scope management remain areas requiring active attention. Engineering delivered notable progress on tournaments and live pages, while backend and infrastructure work progressed on profile management, playback flows, and CMS capabilities.</a:t>
-            </a:r>
-            <a:endParaRPr lang="en-US" sz="900" dirty="0"/>
+              <a:t>Project SABR delivered meaningful progress across platform integrations and feature development this week, though significant scoping conversations emerged around feature prioritization and engineering process alignment. Backend architecture decisions advanced notably on DVR/VOD and ad operations, while frontend efforts on mobile and web are moving rapidly—creating a need to sharpen how the team manages scope and stakeholder feedback.</a:t>
+            </a:r>
+            <a:endParaRPr lang="en-US" sz="800" dirty="0"/>
           </a:p>
           <a:p>
             <a:pPr algn="l" indent="0" marL="0">
               <a:buNone/>
             </a:pPr>
-            <a:endParaRPr lang="en-US" sz="900" dirty="0"/>
+            <a:endParaRPr lang="en-US" sz="800" dirty="0"/>
           </a:p>
           <a:p>
             <a:pPr algn="l" indent="0" marL="0">
               <a:buNone/>
             </a:pPr>
             <a:r>
-              <a:rPr lang="en-US" sz="900" b="1" dirty="0">
+              <a:rPr lang="en-US" sz="800" b="1" dirty="0">
                 <a:solidFill>
                   <a:srgbClr val="1B5E20"/>
                 </a:solidFill>
@@ -1718,182 +1718,182 @@
               <a:buNone/>
             </a:pPr>
             <a:r>
-              <a:rPr lang="en-US" sz="900" dirty="0">
+              <a:rPr lang="en-US" sz="800" dirty="0">
                 <a:solidFill>
                   <a:srgbClr val="1F2937"/>
                 </a:solidFill>
               </a:rPr>
-              <a:t> Resolved metadata conflict between Premium Subscriptions and Roku by removing the conflicting sports event feed from OTT, simplifying the implementation path. Amagi UI for match visibility is on track for mid-August delivery, enabling read-only partner access without requiring manual availability sheets. Linear stream reconnection completed and ads testing now underway pending final connection confirmation.</a:t>
-            </a:r>
-            <a:endParaRPr lang="en-US" sz="900" dirty="0"/>
+              <a:t> Resolved a metadata conflict between SportRadar and premium subscription systems by deprecating the sports-event feed from the OTT app in favor of premium subscriptions' native feed, de-risking the integration. Secured alignment from Roku on a near-term publish approach: team will leverage Amagi's upcoming match-details UI (committed for second week of August with read-only partner access) instead of requesting pre-scheduled tournament lists. Linear stream connection work is in flight; ads testing is staged pending that completion. Timeline remains on track for the September 8 beta date pending Roku sign-off on the match-details UI delivery.</a:t>
+            </a:r>
+            <a:endParaRPr lang="en-US" sz="800" dirty="0"/>
           </a:p>
           <a:p>
             <a:pPr algn="l" indent="0" marL="0">
               <a:buNone/>
             </a:pPr>
-            <a:endParaRPr lang="en-US" sz="900" dirty="0"/>
+            <a:endParaRPr lang="en-US" sz="800" dirty="0"/>
           </a:p>
           <a:p>
             <a:pPr algn="l" indent="0" marL="0">
               <a:buNone/>
             </a:pPr>
             <a:r>
-              <a:rPr lang="en-US" sz="900" b="1" dirty="0">
+              <a:rPr lang="en-US" sz="800" b="1" dirty="0">
                 <a:solidFill>
                   <a:srgbClr val="1B5E20"/>
                 </a:solidFill>
               </a:rPr>
-              <a:t>FRONTEND UX AND DESIGN:</a:t>
+              <a:t>AMAGI INTEGRATION:</a:t>
             </a:r>
             <a:pPr algn="l" indent="0" marL="0">
               <a:buNone/>
             </a:pPr>
             <a:r>
-              <a:rPr lang="en-US" sz="900" dirty="0">
+              <a:rPr lang="en-US" sz="800" dirty="0">
                 <a:solidFill>
                   <a:srgbClr val="1F2937"/>
                 </a:solidFill>
               </a:rPr>
-              <a:t> Engineering teams delivered unexpected prototypes for tournaments and live pages, creating concern about scope creep and working process alignment. Leadership flagged that ad-hoc feature building without pre-approval, while energetic, risks scope sprawl and rework. Team agreed to institute twice-weekly design jam sessions starting August 6 to align on feature priorities, UX decisions, and feedback incorporation before implementation proceeds.</a:t>
-            </a:r>
-            <a:endParaRPr lang="en-US" sz="900" dirty="0"/>
+              <a:t> Finalized a significant architectural redesign for DVR and VOD delivery, moving from continuously-reset stream URLs to unique, per-match predictable manifest URLs that auto-transition from live to VOD once Amagi finishes processing. Dave Bornstein raised questions on URL naming, token security, and DRM handling; Amagi will publish a detailed technical spec this week for sign-off. Production replays are being received; continuous automated delivery targets second week of August post-Axon launch. Amagi committed to trick-play thumbnail support for Roku certification (640x480 every six seconds) with timing confirmation due end of week. Ad Ops macro requirements are being consolidated into a single source-of-truth matrix; Brian Hoskins will send by EOD 8/5. Outstanding blocker: standalone Tennis Channel EPG feed still a copy of Tennis Channel 2—true feed build timeline TBD.</a:t>
+            </a:r>
+            <a:endParaRPr lang="en-US" sz="800" dirty="0"/>
           </a:p>
           <a:p>
             <a:pPr algn="l" indent="0" marL="0">
               <a:buNone/>
             </a:pPr>
-            <a:endParaRPr lang="en-US" sz="900" dirty="0"/>
+            <a:endParaRPr lang="en-US" sz="800" dirty="0"/>
           </a:p>
           <a:p>
             <a:pPr algn="l" indent="0" marL="0">
               <a:buNone/>
             </a:pPr>
             <a:r>
-              <a:rPr lang="en-US" sz="900" b="1" dirty="0">
+              <a:rPr lang="en-US" sz="800" b="1" dirty="0">
                 <a:solidFill>
                   <a:srgbClr val="1B5E20"/>
                 </a:solidFill>
               </a:rPr>
-              <a:t>MERCHANDISING AND CAROUSELS:</a:t>
+              <a:t>FRONTEND UX AND ENGINEERING PROCESS:</a:t>
             </a:r>
             <a:pPr algn="l" indent="0" marL="0">
               <a:buNone/>
             </a:pPr>
             <a:r>
-              <a:rPr lang="en-US" sz="900" dirty="0">
+              <a:rPr lang="en-US" sz="800" dirty="0">
                 <a:solidFill>
                   <a:srgbClr val="1F2937"/>
                 </a:solidFill>
               </a:rPr>
-              <a:t> Finalized show more link behavior across platforms with three options: default enabled, fully disabled, or custom label and path override. Limit defaults to twenty items but remains device-configurable. Show more tile placement at carousel end is P1 for TV client to improve discoverability over current title-link pattern.</a:t>
-            </a:r>
-            <a:endParaRPr lang="en-US" sz="900" dirty="0"/>
+              <a:t> Engineering team has demonstrated strong velocity on tournaments page redesign, live page explorations, profile decoupling, DRM/picture-in-picture on mobile, and CMS features (navigation config, artwork template editor, show-more carousel buttons). However, leadership flagged concern that some explorations (especially live page) are being built and partially integrated without upfront scoping conversations, creating rework risk and tension on feature priorities. Team agreed to institute twice-weekly design jam sessions (Tuesdays/Thursdays starting 8/6) for rapid iteration and feedback, plus documentation of all UX changes across versions to reduce surprise at UAT. Engineering leadership committed to not becoming a bottleneck; product/design leadership committed to keeping pace with the engineering team's velocity and maintaining alignment on P0 priorities.</a:t>
+            </a:r>
+            <a:endParaRPr lang="en-US" sz="800" dirty="0"/>
           </a:p>
           <a:p>
             <a:pPr algn="l" indent="0" marL="0">
               <a:buNone/>
             </a:pPr>
-            <a:endParaRPr lang="en-US" sz="900" dirty="0"/>
+            <a:endParaRPr lang="en-US" sz="800" dirty="0"/>
           </a:p>
           <a:p>
             <a:pPr algn="l" indent="0" marL="0">
               <a:buNone/>
             </a:pPr>
             <a:r>
-              <a:rPr lang="en-US" sz="900" b="1" dirty="0">
+              <a:rPr lang="en-US" sz="800" b="1" dirty="0">
                 <a:solidFill>
                   <a:srgbClr val="1B5E20"/>
                 </a:solidFill>
               </a:rPr>
-              <a:t>BACKEND AND PLAYBACK:</a:t>
+              <a:t>MERCHANDISING CAROUSEL AND SHOW MORE:</a:t>
             </a:r>
             <a:pPr algn="l" indent="0" marL="0">
               <a:buNone/>
             </a:pPr>
             <a:r>
-              <a:rPr lang="en-US" sz="900" dirty="0">
+              <a:rPr lang="en-US" sz="800" dirty="0">
                 <a:solidFill>
                   <a:srgbClr val="1F2937"/>
                 </a:solidFill>
               </a:rPr>
-              <a:t> Mobile team confirmed DRM and picture-in-picture working on device; iOS certificate patched and verified. Working build with MVPD login will be shared once tested. CI pipeline for iOS and Android builds underway to enable frequent staging pushes. Profile decoupling from menu completed and email-change flow in development.</a:t>
-            </a:r>
-            <a:endParaRPr lang="en-US" sz="900" dirty="0"/>
+              <a:t> Finalized carousel show-more button spec: default to enabled with configurable limits (default 20 items, range 1–99), ability to override the label and link destination per carousel, and three toggle states (show more by default, hide for exception cases, or force off). Will implement as a tile at the end of each carousel across all platforms where feasible, though TV behavior (navigability and performance) is owned by Foxxum and will differ slightly. Team documented the spec on Confluence.</a:t>
+            </a:r>
+            <a:endParaRPr lang="en-US" sz="800" dirty="0"/>
           </a:p>
           <a:p>
             <a:pPr algn="l" indent="0" marL="0">
               <a:buNone/>
             </a:pPr>
-            <a:endParaRPr lang="en-US" sz="900" dirty="0"/>
+            <a:endParaRPr lang="en-US" sz="800" dirty="0"/>
           </a:p>
           <a:p>
             <a:pPr algn="l" indent="0" marL="0">
               <a:buNone/>
             </a:pPr>
             <a:r>
-              <a:rPr lang="en-US" sz="900" b="1" dirty="0">
+              <a:rPr lang="en-US" sz="800" b="1" dirty="0">
                 <a:solidFill>
                   <a:srgbClr val="1B5E20"/>
                 </a:solidFill>
               </a:rPr>
-              <a:t>AMAGI INTEGRATION:</a:t>
+              <a:t>MOBILE AND WEB BUILDS:</a:t>
             </a:r>
             <a:pPr algn="l" indent="0" marL="0">
               <a:buNone/>
             </a:pPr>
             <a:r>
-              <a:rPr lang="en-US" sz="900" dirty="0">
+              <a:rPr lang="en-US" sz="800" dirty="0">
                 <a:solidFill>
                   <a:srgbClr val="1F2937"/>
                 </a:solidFill>
               </a:rPr>
-              <a:t> Proposed major DVR/VOD architecture shift from single stream to per-match manifest URLs with automatic live-to-VOD transition and configurable buffer. Engineering raised questions on URL predictability, token security, and edge cases. Amagi to deliver architecture document this week and target proof-of-concept mid-August. Ad Ops macro matrix due EOD from Brian Hoskins with source attribution. Standalone Tennis Channel EPG feed build underway; T2 copy currently in use for testing. Roku trick-play thumbnail requirement (640x480 every six seconds) flagged as certification blocker; Dave and Swamy to sync on transcoder settings.</a:t>
-            </a:r>
-            <a:endParaRPr lang="en-US" sz="900" dirty="0"/>
+              <a:t> iOS TestFlight builds are live and ready for stakeholder feedback; Android builds are staged pending login fix (due today). CI/CD pipeline setup is underway to produce consistent multi-weekly builds for web and mobile, with Google Play automation in progress. Profile feature nearly complete; email-change backend is ready, frontend integration in progress.</a:t>
+            </a:r>
+            <a:endParaRPr lang="en-US" sz="800" dirty="0"/>
           </a:p>
           <a:p>
             <a:pPr algn="l" indent="0" marL="0">
               <a:buNone/>
             </a:pPr>
-            <a:endParaRPr lang="en-US" sz="900" dirty="0"/>
+            <a:endParaRPr lang="en-US" sz="800" dirty="0"/>
           </a:p>
           <a:p>
             <a:pPr algn="l" indent="0" marL="0">
               <a:buNone/>
             </a:pPr>
             <a:r>
-              <a:rPr lang="en-US" sz="900" b="1" dirty="0">
+              <a:rPr lang="en-US" sz="800" b="1" dirty="0">
                 <a:solidFill>
                   <a:srgbClr val="1B5E20"/>
                 </a:solidFill>
               </a:rPr>
-              <a:t>CONTENT AND METADATA:</a:t>
+              <a:t>INFRASTRUCTURE AND DATA:</a:t>
             </a:r>
             <a:pPr algn="l" indent="0" marL="0">
               <a:buNone/>
             </a:pPr>
             <a:r>
-              <a:rPr lang="en-US" sz="900" dirty="0">
+              <a:rPr lang="en-US" sz="800" dirty="0">
                 <a:solidFill>
                   <a:srgbClr val="1F2937"/>
                 </a:solidFill>
               </a:rPr>
-              <a:t> Sport Radar account migration for Auth0 consent tracking moving to dev tenant; existing test accounts will not carry forward. Player favorites storage location still being clarified with Sport Radar. VOD replay processing active for production matches; replays available in dev environment. Rain-delay trimming and ad-supported VOD strategy remain future items pending broader fill-rate and SSAI discussion.</a:t>
-            </a:r>
-            <a:endParaRPr lang="en-US" sz="900" dirty="0"/>
+              <a:t> Backend entitlement checks and endpoint removal are in active sprint. Concurrency management requirements are being documented (user-level vs. playback-level), with design to follow. Auth0 account migration from trial to Sport Radar's dev tenant underway; all existing test accounts will be invalidated—new credentials will be needed. Geo-blocking enforcement confirmed on backend; development bypass header solution agreed with partners. VOD trimming via Axon UI override (separate from Match Central start/end) is on track for second-week-of-August demo. DVR/VOD buffer (proposed four hours, configurable) architecture pending acceptance review. Search design received feedback and is undergoing revision. Disaster recovery planning starting on the database side.</a:t>
+            </a:r>
+            <a:endParaRPr lang="en-US" sz="800" dirty="0"/>
           </a:p>
           <a:p>
             <a:pPr algn="l" indent="0" marL="0">
               <a:buNone/>
             </a:pPr>
-            <a:endParaRPr lang="en-US" sz="900" dirty="0"/>
+            <a:endParaRPr lang="en-US" sz="800" dirty="0"/>
           </a:p>
           <a:p>
             <a:pPr algn="l" indent="0" marL="0">
               <a:buNone/>
             </a:pPr>
             <a:r>
-              <a:rPr lang="en-US" sz="900" b="1" dirty="0">
+              <a:rPr lang="en-US" sz="800" b="1" dirty="0">
                 <a:solidFill>
                   <a:srgbClr val="1B5E20"/>
                 </a:solidFill>
@@ -1903,77 +1903,87 @@
             <a:pPr algn="l" indent="0" marL="0">
               <a:buNone/>
             </a:pPr>
-            <a:endParaRPr lang="en-US" sz="900" dirty="0"/>
+            <a:endParaRPr lang="en-US" sz="800" dirty="0"/>
           </a:p>
           <a:p>
             <a:pPr algn="l" indent="0" marL="0">
               <a:buNone/>
             </a:pPr>
-            <a:r>
-              <a:rPr lang="en-US" sz="900" dirty="0">
+            <a:endParaRPr lang="en-US" sz="800" dirty="0"/>
+          </a:p>
+          <a:p>
+            <a:pPr algn="l" indent="0" marL="0">
+              <a:buNone/>
+            </a:pPr>
+            <a:r>
+              <a:rPr lang="en-US" sz="800" dirty="0">
                 <a:solidFill>
                   <a:srgbClr val="1F2937"/>
                 </a:solidFill>
               </a:rPr>
-              <a:t>• Remove sports event feed from OTT to eliminate Premium Subscriptions metadata conflict and simplify implementation.</a:t>
-            </a:r>
-            <a:endParaRPr lang="en-US" sz="900" dirty="0"/>
+              <a:t>• Deprecate SportRadar sports-event feed from OTT app; use premium subscriptions' native feed instead to eliminate metadata conflicts.</a:t>
+            </a:r>
+            <a:endParaRPr lang="en-US" sz="800" dirty="0"/>
           </a:p>
           <a:p>
             <a:pPr algn="l" indent="0" marL="0">
               <a:buNone/>
             </a:pPr>
-            <a:r>
-              <a:rPr lang="en-US" sz="900" dirty="0">
+            <a:endParaRPr lang="en-US" sz="800" dirty="0"/>
+          </a:p>
+          <a:p>
+            <a:pPr algn="l" indent="0" marL="0">
+              <a:buNone/>
+            </a:pPr>
+            <a:r>
+              <a:rPr lang="en-US" sz="800" dirty="0">
                 <a:solidFill>
                   <a:srgbClr val="1F2937"/>
                 </a:solidFill>
               </a:rPr>
-              <a:t>• Carousel show more feature defaults to enabled with twenty-item limit but remains overridable; device handles actual cutoff based on memory and performance.</a:t>
-            </a:r>
-            <a:endParaRPr lang="en-US" sz="900" dirty="0"/>
+              <a:t>• Adopt per-match manifest URLs for DVR/VOD with automatic live-to-VOD transition; Dave Bornstein's architecture spec due this week for final sign-off.</a:t>
+            </a:r>
+            <a:endParaRPr lang="en-US" sz="800" dirty="0"/>
           </a:p>
           <a:p>
             <a:pPr algn="l" indent="0" marL="0">
               <a:buNone/>
             </a:pPr>
-            <a:r>
-              <a:rPr lang="en-US" sz="900" dirty="0">
+            <a:endParaRPr lang="en-US" sz="800" dirty="0"/>
+          </a:p>
+          <a:p>
+            <a:pPr algn="l" indent="0" marL="0">
+              <a:buNone/>
+            </a:pPr>
+            <a:r>
+              <a:rPr lang="en-US" sz="800" dirty="0">
                 <a:solidFill>
                   <a:srgbClr val="1F2937"/>
                 </a:solidFill>
               </a:rPr>
-              <a:t>• Implement twice-weekly design jam sessions (Tuesdays and Thursdays) to review in-flight work and align on feature scope before engineering commits to builds.</a:t>
-            </a:r>
-            <a:endParaRPr lang="en-US" sz="900" dirty="0"/>
+              <a:t>• Implement show-more carousel button by default across all platforms with configurable limits (1–99 items, default 20), label override, and toggle states; handle platform-specific behaviors (TV) via Foxxum.</a:t>
+            </a:r>
+            <a:endParaRPr lang="en-US" sz="800" dirty="0"/>
           </a:p>
           <a:p>
             <a:pPr algn="l" indent="0" marL="0">
               <a:buNone/>
             </a:pPr>
-            <a:r>
-              <a:rPr lang="en-US" sz="900" dirty="0">
+            <a:endParaRPr lang="en-US" sz="800" dirty="0"/>
+          </a:p>
+          <a:p>
+            <a:pPr algn="l" indent="0" marL="0">
+              <a:buNone/>
+            </a:pPr>
+            <a:r>
+              <a:rPr lang="en-US" sz="800" dirty="0">
                 <a:solidFill>
                   <a:srgbClr val="1F2937"/>
                 </a:solidFill>
               </a:rPr>
-              <a:t>• Adopt per-match manifest URLs for DVR/VOD instead of single continuously-reset stream, with matching configuration via Axon UI for operator-controlled VOD start time trimming.</a:t>
-            </a:r>
-            <a:endParaRPr lang="en-US" sz="900" dirty="0"/>
-          </a:p>
-          <a:p>
-            <a:pPr algn="l" indent="0" marL="0">
-              <a:buNone/>
-            </a:pPr>
-            <a:r>
-              <a:rPr lang="en-US" sz="900" dirty="0">
-                <a:solidFill>
-                  <a:srgbClr val="1F2937"/>
-                </a:solidFill>
-              </a:rPr>
-              <a:t>• Hold Sprint focus on profile completion, playback flow migration (DRM, captions, live/VOD, DVR, spoiler), and geo-blocking until engineering alignment on feature scope is confirmed.</a:t>
-            </a:r>
-            <a:endParaRPr lang="en-US" sz="900" dirty="0"/>
+              <a:t>• Launch twice-weekly UX feedback jam sessions (Tuesdays/Thursdays) and track all design changes in a shared document to improve feedback loop velocity and reduce rework risk.</a:t>
+            </a:r>
+            <a:endParaRPr lang="en-US" sz="800" dirty="0"/>
           </a:p>
         </p:txBody>
       </p:sp>

--- a/SABR_CPR_Component_Status.pptx
+++ b/SABR_CPR_Component_Status.pptx
@@ -1658,7 +1658,7 @@
                   <a:srgbClr val="1F2937"/>
                 </a:solidFill>
               </a:rPr>
-              <a:t>PROJECT SABR — CURRENT PROGRAM REVIEW</a:t>
+              <a:t>PROJECT SABR WEEKLY PROGRAM REVIEW</a:t>
             </a:r>
             <a:endParaRPr lang="en-US" sz="800" dirty="0"/>
           </a:p>
@@ -1672,6 +1672,20 @@
                   <a:srgbClr val="1F2937"/>
                 </a:solidFill>
               </a:rPr>
+              <a:t>This Week Update</a:t>
+            </a:r>
+            <a:endParaRPr lang="en-US" sz="800" dirty="0"/>
+          </a:p>
+          <a:p>
+            <a:pPr algn="l" indent="0" marL="0">
+              <a:buNone/>
+            </a:pPr>
+            <a:r>
+              <a:rPr lang="en-US" sz="800" dirty="0">
+                <a:solidFill>
+                  <a:srgbClr val="1F2937"/>
+                </a:solidFill>
+              </a:rPr>
               <a:t>Week of August 5, 2026</a:t>
             </a:r>
             <a:endParaRPr lang="en-US" sz="800" dirty="0"/>
@@ -1692,7 +1706,7 @@
                   <a:srgbClr val="1F2937"/>
                 </a:solidFill>
               </a:rPr>
-              <a:t>Project SABR delivered meaningful progress across platform integrations and feature development this week, though significant scoping conversations emerged around feature prioritization and engineering process alignment. Backend architecture decisions advanced notably on DVR/VOD and ad operations, while frontend efforts on mobile and web are moving rapidly—creating a need to sharpen how the team manages scope and stakeholder feedback.</a:t>
+              <a:t>Project SABR achieved steady momentum across platform integration and content infrastructure this week, with notable progress on Roku partnership alignment, VOD streaming architecture redesign, and merchandising configuration. The team is managing scope carefully to balance feature velocity with quality, while establishing clearer feedback mechanisms between Santa Monica and distributed engineering teams.</a:t>
             </a:r>
             <a:endParaRPr lang="en-US" sz="800" dirty="0"/>
           </a:p>
@@ -1712,18 +1726,24 @@
                   <a:srgbClr val="1B5E20"/>
                 </a:solidFill>
               </a:rPr>
-              <a:t>ROKU INTEGRATION:</a:t>
+              <a:t>ROKU PARTNERSHIP:</a:t>
             </a:r>
             <a:pPr algn="l" indent="0" marL="0">
               <a:buNone/>
             </a:pPr>
+            <a:endParaRPr lang="en-US" sz="800" dirty="0"/>
+          </a:p>
+          <a:p>
+            <a:pPr algn="l" indent="0" marL="0">
+              <a:buNone/>
+            </a:pPr>
             <a:r>
               <a:rPr lang="en-US" sz="800" dirty="0">
                 <a:solidFill>
                   <a:srgbClr val="1F2937"/>
                 </a:solidFill>
               </a:rPr>
-              <a:t> Resolved a metadata conflict between SportRadar and premium subscription systems by deprecating the sports-event feed from the OTT app in favor of premium subscriptions' native feed, de-risking the integration. Secured alignment from Roku on a near-term publish approach: team will leverage Amagi's upcoming match-details UI (committed for second week of August with read-only partner access) instead of requesting pre-scheduled tournament lists. Linear stream connection work is in flight; ads testing is staged pending that completion. Timeline remains on track for the September 8 beta date pending Roku sign-off on the match-details UI delivery.</a:t>
+              <a:t>Roku has confirmed healthy production events with working round-trip delivery on Tennis 1. The team resolved a metadata conflict between premium subscriptions and SportRadar data by removing the SportRadar feed from the OTT app, defaulting to premium subscriptions data instead. Tournament spreadsheet coordination was refined: Roku will access match details through Amagi's read-only UI launching mid-August rather than requesting upfront availability lists. Ad testing framework is ready pending network configuration; Ads Ops will send test FAX to 